--- a/generated/Sales Dashboards/BD Rep Scoreboard.pptx
+++ b/generated/Sales Dashboards/BD Rep Scoreboard.pptx
@@ -21257,7 +21257,7 @@
             <a:avLst/>
           </a:prstGeom>
           <a:solidFill>
-            <a:srgbClr val="D1D5DB"/>
+            <a:srgbClr val="DC2626"/>
           </a:solidFill>
           <a:ln>
             <a:noFill/>
@@ -21316,7 +21316,7 @@
               </a:defRPr>
             </a:pPr>
             <a:r>
-              <a:t>0</a:t>
+              <a:t>10</a:t>
             </a:r>
           </a:p>
         </p:txBody>
@@ -21905,7 +21905,7 @@
               </a:defRPr>
             </a:pPr>
             <a:r>
-              <a:t>56</a:t>
+              <a:t>57</a:t>
             </a:r>
           </a:p>
         </p:txBody>
@@ -21919,6 +21919,2118 @@
         <p:spPr>
           <a:xfrm>
             <a:off x="8631935" y="1636776"/>
+            <a:ext cx="1024127" cy="393192"/>
+          </a:xfrm>
+          <a:prstGeom prst="rect">
+            <a:avLst/>
+          </a:prstGeom>
+          <a:solidFill>
+            <a:srgbClr val="DC2626"/>
+          </a:solidFill>
+          <a:ln>
+            <a:noFill/>
+          </a:ln>
+        </p:spPr>
+        <p:style>
+          <a:lnRef idx="1">
+            <a:schemeClr val="accent1"/>
+          </a:lnRef>
+          <a:fillRef idx="3">
+            <a:schemeClr val="accent1"/>
+          </a:fillRef>
+          <a:effectRef idx="2">
+            <a:schemeClr val="accent1"/>
+          </a:effectRef>
+          <a:fontRef idx="minor">
+            <a:schemeClr val="lt1"/>
+          </a:fontRef>
+        </p:style>
+        <p:txBody>
+          <a:bodyPr rtlCol="0" anchor="ctr"/>
+          <a:lstStyle/>
+          <a:p>
+            <a:pPr algn="ctr"/>
+          </a:p>
+        </p:txBody>
+      </p:sp>
+      <p:sp>
+        <p:nvSpPr>
+          <p:cNvPr id="47" name="TextBox 46"/>
+          <p:cNvSpPr txBox="1"/>
+          <p:nvPr/>
+        </p:nvSpPr>
+        <p:spPr>
+          <a:xfrm>
+            <a:off x="8595359" y="1714500"/>
+            <a:ext cx="1097280" cy="411480"/>
+          </a:xfrm>
+          <a:prstGeom prst="rect">
+            <a:avLst/>
+          </a:prstGeom>
+          <a:noFill/>
+        </p:spPr>
+        <p:txBody>
+          <a:bodyPr wrap="square">
+            <a:spAutoFit/>
+          </a:bodyPr>
+          <a:lstStyle/>
+          <a:p>
+            <a:pPr algn="ctr">
+              <a:defRPr sz="1100" b="1">
+                <a:solidFill>
+                  <a:srgbClr val="FFFFFF"/>
+                </a:solidFill>
+                <a:latin typeface="Calibri"/>
+              </a:defRPr>
+            </a:pPr>
+            <a:r>
+              <a:t>10</a:t>
+            </a:r>
+          </a:p>
+        </p:txBody>
+      </p:sp>
+      <p:sp>
+        <p:nvSpPr>
+          <p:cNvPr id="48" name="TextBox 47"/>
+          <p:cNvSpPr txBox="1"/>
+          <p:nvPr/>
+        </p:nvSpPr>
+        <p:spPr>
+          <a:xfrm>
+            <a:off x="9692640" y="1714500"/>
+            <a:ext cx="822960" cy="429768"/>
+          </a:xfrm>
+          <a:prstGeom prst="rect">
+            <a:avLst/>
+          </a:prstGeom>
+          <a:noFill/>
+        </p:spPr>
+        <p:txBody>
+          <a:bodyPr wrap="square">
+            <a:spAutoFit/>
+          </a:bodyPr>
+          <a:lstStyle/>
+          <a:p>
+            <a:pPr algn="ctr">
+              <a:defRPr sz="1100" b="1">
+                <a:solidFill>
+                  <a:srgbClr val="D97706"/>
+                </a:solidFill>
+                <a:latin typeface="Calibri"/>
+              </a:defRPr>
+            </a:pPr>
+            <a:r>
+              <a:t>82%</a:t>
+            </a:r>
+          </a:p>
+        </p:txBody>
+      </p:sp>
+      <p:sp>
+        <p:nvSpPr>
+          <p:cNvPr id="49" name="TextBox 48"/>
+          <p:cNvSpPr txBox="1"/>
+          <p:nvPr/>
+        </p:nvSpPr>
+        <p:spPr>
+          <a:xfrm>
+            <a:off x="256032" y="2217420"/>
+            <a:ext cx="1828800" cy="429768"/>
+          </a:xfrm>
+          <a:prstGeom prst="rect">
+            <a:avLst/>
+          </a:prstGeom>
+          <a:noFill/>
+        </p:spPr>
+        <p:txBody>
+          <a:bodyPr wrap="square">
+            <a:spAutoFit/>
+          </a:bodyPr>
+          <a:lstStyle/>
+          <a:p>
+            <a:pPr algn="l">
+              <a:defRPr sz="900" b="1">
+                <a:solidFill>
+                  <a:srgbClr val="111827"/>
+                </a:solidFill>
+                <a:latin typeface="Calibri"/>
+              </a:defRPr>
+            </a:pPr>
+            <a:r>
+              <a:t>Christopher Hayes</a:t>
+            </a:r>
+          </a:p>
+        </p:txBody>
+      </p:sp>
+      <p:sp>
+        <p:nvSpPr>
+          <p:cNvPr id="50" name="Rectangle 49"/>
+          <p:cNvSpPr/>
+          <p:nvPr/>
+        </p:nvSpPr>
+        <p:spPr>
+          <a:xfrm>
+            <a:off x="2048256" y="2139696"/>
+            <a:ext cx="1024127" cy="393192"/>
+          </a:xfrm>
+          <a:prstGeom prst="rect">
+            <a:avLst/>
+          </a:prstGeom>
+          <a:solidFill>
+            <a:srgbClr val="D97706"/>
+          </a:solidFill>
+          <a:ln>
+            <a:noFill/>
+          </a:ln>
+        </p:spPr>
+        <p:style>
+          <a:lnRef idx="1">
+            <a:schemeClr val="accent1"/>
+          </a:lnRef>
+          <a:fillRef idx="3">
+            <a:schemeClr val="accent1"/>
+          </a:fillRef>
+          <a:effectRef idx="2">
+            <a:schemeClr val="accent1"/>
+          </a:effectRef>
+          <a:fontRef idx="minor">
+            <a:schemeClr val="lt1"/>
+          </a:fontRef>
+        </p:style>
+        <p:txBody>
+          <a:bodyPr rtlCol="0" anchor="ctr"/>
+          <a:lstStyle/>
+          <a:p>
+            <a:pPr algn="ctr"/>
+          </a:p>
+        </p:txBody>
+      </p:sp>
+      <p:sp>
+        <p:nvSpPr>
+          <p:cNvPr id="51" name="TextBox 50"/>
+          <p:cNvSpPr txBox="1"/>
+          <p:nvPr/>
+        </p:nvSpPr>
+        <p:spPr>
+          <a:xfrm>
+            <a:off x="2011680" y="2217420"/>
+            <a:ext cx="1097280" cy="411480"/>
+          </a:xfrm>
+          <a:prstGeom prst="rect">
+            <a:avLst/>
+          </a:prstGeom>
+          <a:noFill/>
+        </p:spPr>
+        <p:txBody>
+          <a:bodyPr wrap="square">
+            <a:spAutoFit/>
+          </a:bodyPr>
+          <a:lstStyle/>
+          <a:p>
+            <a:pPr algn="ctr">
+              <a:defRPr sz="1100" b="1">
+                <a:solidFill>
+                  <a:srgbClr val="FFFFFF"/>
+                </a:solidFill>
+                <a:latin typeface="Calibri"/>
+              </a:defRPr>
+            </a:pPr>
+            <a:r>
+              <a:t>39</a:t>
+            </a:r>
+          </a:p>
+        </p:txBody>
+      </p:sp>
+      <p:sp>
+        <p:nvSpPr>
+          <p:cNvPr id="52" name="Rectangle 51"/>
+          <p:cNvSpPr/>
+          <p:nvPr/>
+        </p:nvSpPr>
+        <p:spPr>
+          <a:xfrm>
+            <a:off x="3145536" y="2139696"/>
+            <a:ext cx="1024127" cy="393192"/>
+          </a:xfrm>
+          <a:prstGeom prst="rect">
+            <a:avLst/>
+          </a:prstGeom>
+          <a:solidFill>
+            <a:srgbClr val="05784C"/>
+          </a:solidFill>
+          <a:ln>
+            <a:noFill/>
+          </a:ln>
+        </p:spPr>
+        <p:style>
+          <a:lnRef idx="1">
+            <a:schemeClr val="accent1"/>
+          </a:lnRef>
+          <a:fillRef idx="3">
+            <a:schemeClr val="accent1"/>
+          </a:fillRef>
+          <a:effectRef idx="2">
+            <a:schemeClr val="accent1"/>
+          </a:effectRef>
+          <a:fontRef idx="minor">
+            <a:schemeClr val="lt1"/>
+          </a:fontRef>
+        </p:style>
+        <p:txBody>
+          <a:bodyPr rtlCol="0" anchor="ctr"/>
+          <a:lstStyle/>
+          <a:p>
+            <a:pPr algn="ctr"/>
+          </a:p>
+        </p:txBody>
+      </p:sp>
+      <p:sp>
+        <p:nvSpPr>
+          <p:cNvPr id="53" name="TextBox 52"/>
+          <p:cNvSpPr txBox="1"/>
+          <p:nvPr/>
+        </p:nvSpPr>
+        <p:spPr>
+          <a:xfrm>
+            <a:off x="3108960" y="2217420"/>
+            <a:ext cx="1097280" cy="411480"/>
+          </a:xfrm>
+          <a:prstGeom prst="rect">
+            <a:avLst/>
+          </a:prstGeom>
+          <a:noFill/>
+        </p:spPr>
+        <p:txBody>
+          <a:bodyPr wrap="square">
+            <a:spAutoFit/>
+          </a:bodyPr>
+          <a:lstStyle/>
+          <a:p>
+            <a:pPr algn="ctr">
+              <a:defRPr sz="1100" b="1">
+                <a:solidFill>
+                  <a:srgbClr val="FFFFFF"/>
+                </a:solidFill>
+                <a:latin typeface="Calibri"/>
+              </a:defRPr>
+            </a:pPr>
+            <a:r>
+              <a:t>42</a:t>
+            </a:r>
+          </a:p>
+        </p:txBody>
+      </p:sp>
+      <p:sp>
+        <p:nvSpPr>
+          <p:cNvPr id="54" name="Rectangle 53"/>
+          <p:cNvSpPr/>
+          <p:nvPr/>
+        </p:nvSpPr>
+        <p:spPr>
+          <a:xfrm>
+            <a:off x="4242816" y="2139696"/>
+            <a:ext cx="1024127" cy="393192"/>
+          </a:xfrm>
+          <a:prstGeom prst="rect">
+            <a:avLst/>
+          </a:prstGeom>
+          <a:solidFill>
+            <a:srgbClr val="DC2626"/>
+          </a:solidFill>
+          <a:ln>
+            <a:noFill/>
+          </a:ln>
+        </p:spPr>
+        <p:style>
+          <a:lnRef idx="1">
+            <a:schemeClr val="accent1"/>
+          </a:lnRef>
+          <a:fillRef idx="3">
+            <a:schemeClr val="accent1"/>
+          </a:fillRef>
+          <a:effectRef idx="2">
+            <a:schemeClr val="accent1"/>
+          </a:effectRef>
+          <a:fontRef idx="minor">
+            <a:schemeClr val="lt1"/>
+          </a:fontRef>
+        </p:style>
+        <p:txBody>
+          <a:bodyPr rtlCol="0" anchor="ctr"/>
+          <a:lstStyle/>
+          <a:p>
+            <a:pPr algn="ctr"/>
+          </a:p>
+        </p:txBody>
+      </p:sp>
+      <p:sp>
+        <p:nvSpPr>
+          <p:cNvPr id="55" name="TextBox 54"/>
+          <p:cNvSpPr txBox="1"/>
+          <p:nvPr/>
+        </p:nvSpPr>
+        <p:spPr>
+          <a:xfrm>
+            <a:off x="4206240" y="2217420"/>
+            <a:ext cx="1097280" cy="411480"/>
+          </a:xfrm>
+          <a:prstGeom prst="rect">
+            <a:avLst/>
+          </a:prstGeom>
+          <a:noFill/>
+        </p:spPr>
+        <p:txBody>
+          <a:bodyPr wrap="square">
+            <a:spAutoFit/>
+          </a:bodyPr>
+          <a:lstStyle/>
+          <a:p>
+            <a:pPr algn="ctr">
+              <a:defRPr sz="1100" b="1">
+                <a:solidFill>
+                  <a:srgbClr val="FFFFFF"/>
+                </a:solidFill>
+                <a:latin typeface="Calibri"/>
+              </a:defRPr>
+            </a:pPr>
+            <a:r>
+              <a:t>25</a:t>
+            </a:r>
+          </a:p>
+        </p:txBody>
+      </p:sp>
+      <p:sp>
+        <p:nvSpPr>
+          <p:cNvPr id="56" name="Rectangle 55"/>
+          <p:cNvSpPr/>
+          <p:nvPr/>
+        </p:nvSpPr>
+        <p:spPr>
+          <a:xfrm>
+            <a:off x="5340096" y="2139696"/>
+            <a:ext cx="1024127" cy="393192"/>
+          </a:xfrm>
+          <a:prstGeom prst="rect">
+            <a:avLst/>
+          </a:prstGeom>
+          <a:solidFill>
+            <a:srgbClr val="05784C"/>
+          </a:solidFill>
+          <a:ln>
+            <a:noFill/>
+          </a:ln>
+        </p:spPr>
+        <p:style>
+          <a:lnRef idx="1">
+            <a:schemeClr val="accent1"/>
+          </a:lnRef>
+          <a:fillRef idx="3">
+            <a:schemeClr val="accent1"/>
+          </a:fillRef>
+          <a:effectRef idx="2">
+            <a:schemeClr val="accent1"/>
+          </a:effectRef>
+          <a:fontRef idx="minor">
+            <a:schemeClr val="lt1"/>
+          </a:fontRef>
+        </p:style>
+        <p:txBody>
+          <a:bodyPr rtlCol="0" anchor="ctr"/>
+          <a:lstStyle/>
+          <a:p>
+            <a:pPr algn="ctr"/>
+          </a:p>
+        </p:txBody>
+      </p:sp>
+      <p:sp>
+        <p:nvSpPr>
+          <p:cNvPr id="57" name="TextBox 56"/>
+          <p:cNvSpPr txBox="1"/>
+          <p:nvPr/>
+        </p:nvSpPr>
+        <p:spPr>
+          <a:xfrm>
+            <a:off x="5303520" y="2217420"/>
+            <a:ext cx="1097280" cy="411480"/>
+          </a:xfrm>
+          <a:prstGeom prst="rect">
+            <a:avLst/>
+          </a:prstGeom>
+          <a:noFill/>
+        </p:spPr>
+        <p:txBody>
+          <a:bodyPr wrap="square">
+            <a:spAutoFit/>
+          </a:bodyPr>
+          <a:lstStyle/>
+          <a:p>
+            <a:pPr algn="ctr">
+              <a:defRPr sz="1100" b="1">
+                <a:solidFill>
+                  <a:srgbClr val="FFFFFF"/>
+                </a:solidFill>
+                <a:latin typeface="Calibri"/>
+              </a:defRPr>
+            </a:pPr>
+            <a:r>
+              <a:t>40</a:t>
+            </a:r>
+          </a:p>
+        </p:txBody>
+      </p:sp>
+      <p:sp>
+        <p:nvSpPr>
+          <p:cNvPr id="58" name="Rectangle 57"/>
+          <p:cNvSpPr/>
+          <p:nvPr/>
+        </p:nvSpPr>
+        <p:spPr>
+          <a:xfrm>
+            <a:off x="6437376" y="2139696"/>
+            <a:ext cx="1024127" cy="393192"/>
+          </a:xfrm>
+          <a:prstGeom prst="rect">
+            <a:avLst/>
+          </a:prstGeom>
+          <a:solidFill>
+            <a:srgbClr val="DC2626"/>
+          </a:solidFill>
+          <a:ln>
+            <a:noFill/>
+          </a:ln>
+        </p:spPr>
+        <p:style>
+          <a:lnRef idx="1">
+            <a:schemeClr val="accent1"/>
+          </a:lnRef>
+          <a:fillRef idx="3">
+            <a:schemeClr val="accent1"/>
+          </a:fillRef>
+          <a:effectRef idx="2">
+            <a:schemeClr val="accent1"/>
+          </a:effectRef>
+          <a:fontRef idx="minor">
+            <a:schemeClr val="lt1"/>
+          </a:fontRef>
+        </p:style>
+        <p:txBody>
+          <a:bodyPr rtlCol="0" anchor="ctr"/>
+          <a:lstStyle/>
+          <a:p>
+            <a:pPr algn="ctr"/>
+          </a:p>
+        </p:txBody>
+      </p:sp>
+      <p:sp>
+        <p:nvSpPr>
+          <p:cNvPr id="59" name="TextBox 58"/>
+          <p:cNvSpPr txBox="1"/>
+          <p:nvPr/>
+        </p:nvSpPr>
+        <p:spPr>
+          <a:xfrm>
+            <a:off x="6400800" y="2217420"/>
+            <a:ext cx="1097280" cy="411480"/>
+          </a:xfrm>
+          <a:prstGeom prst="rect">
+            <a:avLst/>
+          </a:prstGeom>
+          <a:noFill/>
+        </p:spPr>
+        <p:txBody>
+          <a:bodyPr wrap="square">
+            <a:spAutoFit/>
+          </a:bodyPr>
+          <a:lstStyle/>
+          <a:p>
+            <a:pPr algn="ctr">
+              <a:defRPr sz="1100" b="1">
+                <a:solidFill>
+                  <a:srgbClr val="FFFFFF"/>
+                </a:solidFill>
+                <a:latin typeface="Calibri"/>
+              </a:defRPr>
+            </a:pPr>
+            <a:r>
+              <a:t>15</a:t>
+            </a:r>
+          </a:p>
+        </p:txBody>
+      </p:sp>
+      <p:sp>
+        <p:nvSpPr>
+          <p:cNvPr id="60" name="Rectangle 59"/>
+          <p:cNvSpPr/>
+          <p:nvPr/>
+        </p:nvSpPr>
+        <p:spPr>
+          <a:xfrm>
+            <a:off x="7534655" y="2139696"/>
+            <a:ext cx="1024127" cy="393192"/>
+          </a:xfrm>
+          <a:prstGeom prst="rect">
+            <a:avLst/>
+          </a:prstGeom>
+          <a:solidFill>
+            <a:srgbClr val="05784C"/>
+          </a:solidFill>
+          <a:ln>
+            <a:noFill/>
+          </a:ln>
+        </p:spPr>
+        <p:style>
+          <a:lnRef idx="1">
+            <a:schemeClr val="accent1"/>
+          </a:lnRef>
+          <a:fillRef idx="3">
+            <a:schemeClr val="accent1"/>
+          </a:fillRef>
+          <a:effectRef idx="2">
+            <a:schemeClr val="accent1"/>
+          </a:effectRef>
+          <a:fontRef idx="minor">
+            <a:schemeClr val="lt1"/>
+          </a:fontRef>
+        </p:style>
+        <p:txBody>
+          <a:bodyPr rtlCol="0" anchor="ctr"/>
+          <a:lstStyle/>
+          <a:p>
+            <a:pPr algn="ctr"/>
+          </a:p>
+        </p:txBody>
+      </p:sp>
+      <p:sp>
+        <p:nvSpPr>
+          <p:cNvPr id="61" name="TextBox 60"/>
+          <p:cNvSpPr txBox="1"/>
+          <p:nvPr/>
+        </p:nvSpPr>
+        <p:spPr>
+          <a:xfrm>
+            <a:off x="7498079" y="2217420"/>
+            <a:ext cx="1097280" cy="411480"/>
+          </a:xfrm>
+          <a:prstGeom prst="rect">
+            <a:avLst/>
+          </a:prstGeom>
+          <a:noFill/>
+        </p:spPr>
+        <p:txBody>
+          <a:bodyPr wrap="square">
+            <a:spAutoFit/>
+          </a:bodyPr>
+          <a:lstStyle/>
+          <a:p>
+            <a:pPr algn="ctr">
+              <a:defRPr sz="1100" b="1">
+                <a:solidFill>
+                  <a:srgbClr val="FFFFFF"/>
+                </a:solidFill>
+                <a:latin typeface="Calibri"/>
+              </a:defRPr>
+            </a:pPr>
+            <a:r>
+              <a:t>45</a:t>
+            </a:r>
+          </a:p>
+        </p:txBody>
+      </p:sp>
+      <p:sp>
+        <p:nvSpPr>
+          <p:cNvPr id="62" name="Rectangle 61"/>
+          <p:cNvSpPr/>
+          <p:nvPr/>
+        </p:nvSpPr>
+        <p:spPr>
+          <a:xfrm>
+            <a:off x="8631935" y="2139696"/>
+            <a:ext cx="1024127" cy="393192"/>
+          </a:xfrm>
+          <a:prstGeom prst="rect">
+            <a:avLst/>
+          </a:prstGeom>
+          <a:solidFill>
+            <a:srgbClr val="DC2626"/>
+          </a:solidFill>
+          <a:ln>
+            <a:noFill/>
+          </a:ln>
+        </p:spPr>
+        <p:style>
+          <a:lnRef idx="1">
+            <a:schemeClr val="accent1"/>
+          </a:lnRef>
+          <a:fillRef idx="3">
+            <a:schemeClr val="accent1"/>
+          </a:fillRef>
+          <a:effectRef idx="2">
+            <a:schemeClr val="accent1"/>
+          </a:effectRef>
+          <a:fontRef idx="minor">
+            <a:schemeClr val="lt1"/>
+          </a:fontRef>
+        </p:style>
+        <p:txBody>
+          <a:bodyPr rtlCol="0" anchor="ctr"/>
+          <a:lstStyle/>
+          <a:p>
+            <a:pPr algn="ctr"/>
+          </a:p>
+        </p:txBody>
+      </p:sp>
+      <p:sp>
+        <p:nvSpPr>
+          <p:cNvPr id="63" name="TextBox 62"/>
+          <p:cNvSpPr txBox="1"/>
+          <p:nvPr/>
+        </p:nvSpPr>
+        <p:spPr>
+          <a:xfrm>
+            <a:off x="8595359" y="2217420"/>
+            <a:ext cx="1097280" cy="411480"/>
+          </a:xfrm>
+          <a:prstGeom prst="rect">
+            <a:avLst/>
+          </a:prstGeom>
+          <a:noFill/>
+        </p:spPr>
+        <p:txBody>
+          <a:bodyPr wrap="square">
+            <a:spAutoFit/>
+          </a:bodyPr>
+          <a:lstStyle/>
+          <a:p>
+            <a:pPr algn="ctr">
+              <a:defRPr sz="1100" b="1">
+                <a:solidFill>
+                  <a:srgbClr val="FFFFFF"/>
+                </a:solidFill>
+                <a:latin typeface="Calibri"/>
+              </a:defRPr>
+            </a:pPr>
+            <a:r>
+              <a:t>5</a:t>
+            </a:r>
+          </a:p>
+        </p:txBody>
+      </p:sp>
+      <p:sp>
+        <p:nvSpPr>
+          <p:cNvPr id="64" name="TextBox 63"/>
+          <p:cNvSpPr txBox="1"/>
+          <p:nvPr/>
+        </p:nvSpPr>
+        <p:spPr>
+          <a:xfrm>
+            <a:off x="9692640" y="2217420"/>
+            <a:ext cx="822960" cy="429768"/>
+          </a:xfrm>
+          <a:prstGeom prst="rect">
+            <a:avLst/>
+          </a:prstGeom>
+          <a:noFill/>
+        </p:spPr>
+        <p:txBody>
+          <a:bodyPr wrap="square">
+            <a:spAutoFit/>
+          </a:bodyPr>
+          <a:lstStyle/>
+          <a:p>
+            <a:pPr algn="ctr">
+              <a:defRPr sz="1100" b="1">
+                <a:solidFill>
+                  <a:srgbClr val="D97706"/>
+                </a:solidFill>
+                <a:latin typeface="Calibri"/>
+              </a:defRPr>
+            </a:pPr>
+            <a:r>
+              <a:t>86%</a:t>
+            </a:r>
+          </a:p>
+        </p:txBody>
+      </p:sp>
+      <p:sp>
+        <p:nvSpPr>
+          <p:cNvPr id="65" name="Rectangle 64"/>
+          <p:cNvSpPr/>
+          <p:nvPr/>
+        </p:nvSpPr>
+        <p:spPr>
+          <a:xfrm>
+            <a:off x="182880" y="2587752"/>
+            <a:ext cx="10332720" cy="502920"/>
+          </a:xfrm>
+          <a:prstGeom prst="rect">
+            <a:avLst/>
+          </a:prstGeom>
+          <a:solidFill>
+            <a:srgbClr val="F9FAFB"/>
+          </a:solidFill>
+          <a:ln>
+            <a:noFill/>
+          </a:ln>
+        </p:spPr>
+        <p:style>
+          <a:lnRef idx="1">
+            <a:schemeClr val="accent1"/>
+          </a:lnRef>
+          <a:fillRef idx="3">
+            <a:schemeClr val="accent1"/>
+          </a:fillRef>
+          <a:effectRef idx="2">
+            <a:schemeClr val="accent1"/>
+          </a:effectRef>
+          <a:fontRef idx="minor">
+            <a:schemeClr val="lt1"/>
+          </a:fontRef>
+        </p:style>
+        <p:txBody>
+          <a:bodyPr rtlCol="0" anchor="ctr"/>
+          <a:lstStyle/>
+          <a:p>
+            <a:pPr algn="ctr"/>
+          </a:p>
+        </p:txBody>
+      </p:sp>
+      <p:sp>
+        <p:nvSpPr>
+          <p:cNvPr id="66" name="TextBox 65"/>
+          <p:cNvSpPr txBox="1"/>
+          <p:nvPr/>
+        </p:nvSpPr>
+        <p:spPr>
+          <a:xfrm>
+            <a:off x="256032" y="2720340"/>
+            <a:ext cx="1828800" cy="429768"/>
+          </a:xfrm>
+          <a:prstGeom prst="rect">
+            <a:avLst/>
+          </a:prstGeom>
+          <a:noFill/>
+        </p:spPr>
+        <p:txBody>
+          <a:bodyPr wrap="square">
+            <a:spAutoFit/>
+          </a:bodyPr>
+          <a:lstStyle/>
+          <a:p>
+            <a:pPr algn="l">
+              <a:defRPr sz="900" b="1">
+                <a:solidFill>
+                  <a:srgbClr val="111827"/>
+                </a:solidFill>
+                <a:latin typeface="Calibri"/>
+              </a:defRPr>
+            </a:pPr>
+            <a:r>
+              <a:t>Derrick Leroy</a:t>
+            </a:r>
+          </a:p>
+        </p:txBody>
+      </p:sp>
+      <p:sp>
+        <p:nvSpPr>
+          <p:cNvPr id="67" name="Rectangle 66"/>
+          <p:cNvSpPr/>
+          <p:nvPr/>
+        </p:nvSpPr>
+        <p:spPr>
+          <a:xfrm>
+            <a:off x="2048256" y="2642616"/>
+            <a:ext cx="1024127" cy="393192"/>
+          </a:xfrm>
+          <a:prstGeom prst="rect">
+            <a:avLst/>
+          </a:prstGeom>
+          <a:solidFill>
+            <a:srgbClr val="05784C"/>
+          </a:solidFill>
+          <a:ln>
+            <a:noFill/>
+          </a:ln>
+        </p:spPr>
+        <p:style>
+          <a:lnRef idx="1">
+            <a:schemeClr val="accent1"/>
+          </a:lnRef>
+          <a:fillRef idx="3">
+            <a:schemeClr val="accent1"/>
+          </a:fillRef>
+          <a:effectRef idx="2">
+            <a:schemeClr val="accent1"/>
+          </a:effectRef>
+          <a:fontRef idx="minor">
+            <a:schemeClr val="lt1"/>
+          </a:fontRef>
+        </p:style>
+        <p:txBody>
+          <a:bodyPr rtlCol="0" anchor="ctr"/>
+          <a:lstStyle/>
+          <a:p>
+            <a:pPr algn="ctr"/>
+          </a:p>
+        </p:txBody>
+      </p:sp>
+      <p:sp>
+        <p:nvSpPr>
+          <p:cNvPr id="68" name="TextBox 67"/>
+          <p:cNvSpPr txBox="1"/>
+          <p:nvPr/>
+        </p:nvSpPr>
+        <p:spPr>
+          <a:xfrm>
+            <a:off x="2011680" y="2720340"/>
+            <a:ext cx="1097280" cy="411480"/>
+          </a:xfrm>
+          <a:prstGeom prst="rect">
+            <a:avLst/>
+          </a:prstGeom>
+          <a:noFill/>
+        </p:spPr>
+        <p:txBody>
+          <a:bodyPr wrap="square">
+            <a:spAutoFit/>
+          </a:bodyPr>
+          <a:lstStyle/>
+          <a:p>
+            <a:pPr algn="ctr">
+              <a:defRPr sz="1100" b="1">
+                <a:solidFill>
+                  <a:srgbClr val="FFFFFF"/>
+                </a:solidFill>
+                <a:latin typeface="Calibri"/>
+              </a:defRPr>
+            </a:pPr>
+            <a:r>
+              <a:t>50</a:t>
+            </a:r>
+          </a:p>
+        </p:txBody>
+      </p:sp>
+      <p:sp>
+        <p:nvSpPr>
+          <p:cNvPr id="69" name="Rectangle 68"/>
+          <p:cNvSpPr/>
+          <p:nvPr/>
+        </p:nvSpPr>
+        <p:spPr>
+          <a:xfrm>
+            <a:off x="3145536" y="2642616"/>
+            <a:ext cx="1024127" cy="393192"/>
+          </a:xfrm>
+          <a:prstGeom prst="rect">
+            <a:avLst/>
+          </a:prstGeom>
+          <a:solidFill>
+            <a:srgbClr val="05784C"/>
+          </a:solidFill>
+          <a:ln>
+            <a:noFill/>
+          </a:ln>
+        </p:spPr>
+        <p:style>
+          <a:lnRef idx="1">
+            <a:schemeClr val="accent1"/>
+          </a:lnRef>
+          <a:fillRef idx="3">
+            <a:schemeClr val="accent1"/>
+          </a:fillRef>
+          <a:effectRef idx="2">
+            <a:schemeClr val="accent1"/>
+          </a:effectRef>
+          <a:fontRef idx="minor">
+            <a:schemeClr val="lt1"/>
+          </a:fontRef>
+        </p:style>
+        <p:txBody>
+          <a:bodyPr rtlCol="0" anchor="ctr"/>
+          <a:lstStyle/>
+          <a:p>
+            <a:pPr algn="ctr"/>
+          </a:p>
+        </p:txBody>
+      </p:sp>
+      <p:sp>
+        <p:nvSpPr>
+          <p:cNvPr id="70" name="TextBox 69"/>
+          <p:cNvSpPr txBox="1"/>
+          <p:nvPr/>
+        </p:nvSpPr>
+        <p:spPr>
+          <a:xfrm>
+            <a:off x="3108960" y="2720340"/>
+            <a:ext cx="1097280" cy="411480"/>
+          </a:xfrm>
+          <a:prstGeom prst="rect">
+            <a:avLst/>
+          </a:prstGeom>
+          <a:noFill/>
+        </p:spPr>
+        <p:txBody>
+          <a:bodyPr wrap="square">
+            <a:spAutoFit/>
+          </a:bodyPr>
+          <a:lstStyle/>
+          <a:p>
+            <a:pPr algn="ctr">
+              <a:defRPr sz="1100" b="1">
+                <a:solidFill>
+                  <a:srgbClr val="FFFFFF"/>
+                </a:solidFill>
+                <a:latin typeface="Calibri"/>
+              </a:defRPr>
+            </a:pPr>
+            <a:r>
+              <a:t>48</a:t>
+            </a:r>
+          </a:p>
+        </p:txBody>
+      </p:sp>
+      <p:sp>
+        <p:nvSpPr>
+          <p:cNvPr id="71" name="Rectangle 70"/>
+          <p:cNvSpPr/>
+          <p:nvPr/>
+        </p:nvSpPr>
+        <p:spPr>
+          <a:xfrm>
+            <a:off x="4242816" y="2642616"/>
+            <a:ext cx="1024127" cy="393192"/>
+          </a:xfrm>
+          <a:prstGeom prst="rect">
+            <a:avLst/>
+          </a:prstGeom>
+          <a:solidFill>
+            <a:srgbClr val="05784C"/>
+          </a:solidFill>
+          <a:ln>
+            <a:noFill/>
+          </a:ln>
+        </p:spPr>
+        <p:style>
+          <a:lnRef idx="1">
+            <a:schemeClr val="accent1"/>
+          </a:lnRef>
+          <a:fillRef idx="3">
+            <a:schemeClr val="accent1"/>
+          </a:fillRef>
+          <a:effectRef idx="2">
+            <a:schemeClr val="accent1"/>
+          </a:effectRef>
+          <a:fontRef idx="minor">
+            <a:schemeClr val="lt1"/>
+          </a:fontRef>
+        </p:style>
+        <p:txBody>
+          <a:bodyPr rtlCol="0" anchor="ctr"/>
+          <a:lstStyle/>
+          <a:p>
+            <a:pPr algn="ctr"/>
+          </a:p>
+        </p:txBody>
+      </p:sp>
+      <p:sp>
+        <p:nvSpPr>
+          <p:cNvPr id="72" name="TextBox 71"/>
+          <p:cNvSpPr txBox="1"/>
+          <p:nvPr/>
+        </p:nvSpPr>
+        <p:spPr>
+          <a:xfrm>
+            <a:off x="4206240" y="2720340"/>
+            <a:ext cx="1097280" cy="411480"/>
+          </a:xfrm>
+          <a:prstGeom prst="rect">
+            <a:avLst/>
+          </a:prstGeom>
+          <a:noFill/>
+        </p:spPr>
+        <p:txBody>
+          <a:bodyPr wrap="square">
+            <a:spAutoFit/>
+          </a:bodyPr>
+          <a:lstStyle/>
+          <a:p>
+            <a:pPr algn="ctr">
+              <a:defRPr sz="1100" b="1">
+                <a:solidFill>
+                  <a:srgbClr val="FFFFFF"/>
+                </a:solidFill>
+                <a:latin typeface="Calibri"/>
+              </a:defRPr>
+            </a:pPr>
+            <a:r>
+              <a:t>65</a:t>
+            </a:r>
+          </a:p>
+        </p:txBody>
+      </p:sp>
+      <p:sp>
+        <p:nvSpPr>
+          <p:cNvPr id="73" name="Rectangle 72"/>
+          <p:cNvSpPr/>
+          <p:nvPr/>
+        </p:nvSpPr>
+        <p:spPr>
+          <a:xfrm>
+            <a:off x="5340096" y="2642616"/>
+            <a:ext cx="1024127" cy="393192"/>
+          </a:xfrm>
+          <a:prstGeom prst="rect">
+            <a:avLst/>
+          </a:prstGeom>
+          <a:solidFill>
+            <a:srgbClr val="05784C"/>
+          </a:solidFill>
+          <a:ln>
+            <a:noFill/>
+          </a:ln>
+        </p:spPr>
+        <p:style>
+          <a:lnRef idx="1">
+            <a:schemeClr val="accent1"/>
+          </a:lnRef>
+          <a:fillRef idx="3">
+            <a:schemeClr val="accent1"/>
+          </a:fillRef>
+          <a:effectRef idx="2">
+            <a:schemeClr val="accent1"/>
+          </a:effectRef>
+          <a:fontRef idx="minor">
+            <a:schemeClr val="lt1"/>
+          </a:fontRef>
+        </p:style>
+        <p:txBody>
+          <a:bodyPr rtlCol="0" anchor="ctr"/>
+          <a:lstStyle/>
+          <a:p>
+            <a:pPr algn="ctr"/>
+          </a:p>
+        </p:txBody>
+      </p:sp>
+      <p:sp>
+        <p:nvSpPr>
+          <p:cNvPr id="74" name="TextBox 73"/>
+          <p:cNvSpPr txBox="1"/>
+          <p:nvPr/>
+        </p:nvSpPr>
+        <p:spPr>
+          <a:xfrm>
+            <a:off x="5303520" y="2720340"/>
+            <a:ext cx="1097280" cy="411480"/>
+          </a:xfrm>
+          <a:prstGeom prst="rect">
+            <a:avLst/>
+          </a:prstGeom>
+          <a:noFill/>
+        </p:spPr>
+        <p:txBody>
+          <a:bodyPr wrap="square">
+            <a:spAutoFit/>
+          </a:bodyPr>
+          <a:lstStyle/>
+          <a:p>
+            <a:pPr algn="ctr">
+              <a:defRPr sz="1100" b="1">
+                <a:solidFill>
+                  <a:srgbClr val="FFFFFF"/>
+                </a:solidFill>
+                <a:latin typeface="Calibri"/>
+              </a:defRPr>
+            </a:pPr>
+            <a:r>
+              <a:t>51</a:t>
+            </a:r>
+          </a:p>
+        </p:txBody>
+      </p:sp>
+      <p:sp>
+        <p:nvSpPr>
+          <p:cNvPr id="75" name="Rectangle 74"/>
+          <p:cNvSpPr/>
+          <p:nvPr/>
+        </p:nvSpPr>
+        <p:spPr>
+          <a:xfrm>
+            <a:off x="6437376" y="2642616"/>
+            <a:ext cx="1024127" cy="393192"/>
+          </a:xfrm>
+          <a:prstGeom prst="rect">
+            <a:avLst/>
+          </a:prstGeom>
+          <a:solidFill>
+            <a:srgbClr val="05784C"/>
+          </a:solidFill>
+          <a:ln>
+            <a:noFill/>
+          </a:ln>
+        </p:spPr>
+        <p:style>
+          <a:lnRef idx="1">
+            <a:schemeClr val="accent1"/>
+          </a:lnRef>
+          <a:fillRef idx="3">
+            <a:schemeClr val="accent1"/>
+          </a:fillRef>
+          <a:effectRef idx="2">
+            <a:schemeClr val="accent1"/>
+          </a:effectRef>
+          <a:fontRef idx="minor">
+            <a:schemeClr val="lt1"/>
+          </a:fontRef>
+        </p:style>
+        <p:txBody>
+          <a:bodyPr rtlCol="0" anchor="ctr"/>
+          <a:lstStyle/>
+          <a:p>
+            <a:pPr algn="ctr"/>
+          </a:p>
+        </p:txBody>
+      </p:sp>
+      <p:sp>
+        <p:nvSpPr>
+          <p:cNvPr id="76" name="TextBox 75"/>
+          <p:cNvSpPr txBox="1"/>
+          <p:nvPr/>
+        </p:nvSpPr>
+        <p:spPr>
+          <a:xfrm>
+            <a:off x="6400800" y="2720340"/>
+            <a:ext cx="1097280" cy="411480"/>
+          </a:xfrm>
+          <a:prstGeom prst="rect">
+            <a:avLst/>
+          </a:prstGeom>
+          <a:noFill/>
+        </p:spPr>
+        <p:txBody>
+          <a:bodyPr wrap="square">
+            <a:spAutoFit/>
+          </a:bodyPr>
+          <a:lstStyle/>
+          <a:p>
+            <a:pPr algn="ctr">
+              <a:defRPr sz="1100" b="1">
+                <a:solidFill>
+                  <a:srgbClr val="FFFFFF"/>
+                </a:solidFill>
+                <a:latin typeface="Calibri"/>
+              </a:defRPr>
+            </a:pPr>
+            <a:r>
+              <a:t>54</a:t>
+            </a:r>
+          </a:p>
+        </p:txBody>
+      </p:sp>
+      <p:sp>
+        <p:nvSpPr>
+          <p:cNvPr id="77" name="Rectangle 76"/>
+          <p:cNvSpPr/>
+          <p:nvPr/>
+        </p:nvSpPr>
+        <p:spPr>
+          <a:xfrm>
+            <a:off x="7534655" y="2642616"/>
+            <a:ext cx="1024127" cy="393192"/>
+          </a:xfrm>
+          <a:prstGeom prst="rect">
+            <a:avLst/>
+          </a:prstGeom>
+          <a:solidFill>
+            <a:srgbClr val="05784C"/>
+          </a:solidFill>
+          <a:ln>
+            <a:noFill/>
+          </a:ln>
+        </p:spPr>
+        <p:style>
+          <a:lnRef idx="1">
+            <a:schemeClr val="accent1"/>
+          </a:lnRef>
+          <a:fillRef idx="3">
+            <a:schemeClr val="accent1"/>
+          </a:fillRef>
+          <a:effectRef idx="2">
+            <a:schemeClr val="accent1"/>
+          </a:effectRef>
+          <a:fontRef idx="minor">
+            <a:schemeClr val="lt1"/>
+          </a:fontRef>
+        </p:style>
+        <p:txBody>
+          <a:bodyPr rtlCol="0" anchor="ctr"/>
+          <a:lstStyle/>
+          <a:p>
+            <a:pPr algn="ctr"/>
+          </a:p>
+        </p:txBody>
+      </p:sp>
+      <p:sp>
+        <p:nvSpPr>
+          <p:cNvPr id="78" name="TextBox 77"/>
+          <p:cNvSpPr txBox="1"/>
+          <p:nvPr/>
+        </p:nvSpPr>
+        <p:spPr>
+          <a:xfrm>
+            <a:off x="7498079" y="2720340"/>
+            <a:ext cx="1097280" cy="411480"/>
+          </a:xfrm>
+          <a:prstGeom prst="rect">
+            <a:avLst/>
+          </a:prstGeom>
+          <a:noFill/>
+        </p:spPr>
+        <p:txBody>
+          <a:bodyPr wrap="square">
+            <a:spAutoFit/>
+          </a:bodyPr>
+          <a:lstStyle/>
+          <a:p>
+            <a:pPr algn="ctr">
+              <a:defRPr sz="1100" b="1">
+                <a:solidFill>
+                  <a:srgbClr val="FFFFFF"/>
+                </a:solidFill>
+                <a:latin typeface="Calibri"/>
+              </a:defRPr>
+            </a:pPr>
+            <a:r>
+              <a:t>60</a:t>
+            </a:r>
+          </a:p>
+        </p:txBody>
+      </p:sp>
+      <p:sp>
+        <p:nvSpPr>
+          <p:cNvPr id="79" name="Rectangle 78"/>
+          <p:cNvSpPr/>
+          <p:nvPr/>
+        </p:nvSpPr>
+        <p:spPr>
+          <a:xfrm>
+            <a:off x="8631935" y="2642616"/>
+            <a:ext cx="1024127" cy="393192"/>
+          </a:xfrm>
+          <a:prstGeom prst="rect">
+            <a:avLst/>
+          </a:prstGeom>
+          <a:solidFill>
+            <a:srgbClr val="DC2626"/>
+          </a:solidFill>
+          <a:ln>
+            <a:noFill/>
+          </a:ln>
+        </p:spPr>
+        <p:style>
+          <a:lnRef idx="1">
+            <a:schemeClr val="accent1"/>
+          </a:lnRef>
+          <a:fillRef idx="3">
+            <a:schemeClr val="accent1"/>
+          </a:fillRef>
+          <a:effectRef idx="2">
+            <a:schemeClr val="accent1"/>
+          </a:effectRef>
+          <a:fontRef idx="minor">
+            <a:schemeClr val="lt1"/>
+          </a:fontRef>
+        </p:style>
+        <p:txBody>
+          <a:bodyPr rtlCol="0" anchor="ctr"/>
+          <a:lstStyle/>
+          <a:p>
+            <a:pPr algn="ctr"/>
+          </a:p>
+        </p:txBody>
+      </p:sp>
+      <p:sp>
+        <p:nvSpPr>
+          <p:cNvPr id="80" name="TextBox 79"/>
+          <p:cNvSpPr txBox="1"/>
+          <p:nvPr/>
+        </p:nvSpPr>
+        <p:spPr>
+          <a:xfrm>
+            <a:off x="8595359" y="2720340"/>
+            <a:ext cx="1097280" cy="411480"/>
+          </a:xfrm>
+          <a:prstGeom prst="rect">
+            <a:avLst/>
+          </a:prstGeom>
+          <a:noFill/>
+        </p:spPr>
+        <p:txBody>
+          <a:bodyPr wrap="square">
+            <a:spAutoFit/>
+          </a:bodyPr>
+          <a:lstStyle/>
+          <a:p>
+            <a:pPr algn="ctr">
+              <a:defRPr sz="1100" b="1">
+                <a:solidFill>
+                  <a:srgbClr val="FFFFFF"/>
+                </a:solidFill>
+                <a:latin typeface="Calibri"/>
+              </a:defRPr>
+            </a:pPr>
+            <a:r>
+              <a:t>3</a:t>
+            </a:r>
+          </a:p>
+        </p:txBody>
+      </p:sp>
+      <p:sp>
+        <p:nvSpPr>
+          <p:cNvPr id="81" name="TextBox 80"/>
+          <p:cNvSpPr txBox="1"/>
+          <p:nvPr/>
+        </p:nvSpPr>
+        <p:spPr>
+          <a:xfrm>
+            <a:off x="9692640" y="2720340"/>
+            <a:ext cx="822960" cy="429768"/>
+          </a:xfrm>
+          <a:prstGeom prst="rect">
+            <a:avLst/>
+          </a:prstGeom>
+          <a:noFill/>
+        </p:spPr>
+        <p:txBody>
+          <a:bodyPr wrap="square">
+            <a:spAutoFit/>
+          </a:bodyPr>
+          <a:lstStyle/>
+          <a:p>
+            <a:pPr algn="ctr">
+              <a:defRPr sz="1100" b="1">
+                <a:solidFill>
+                  <a:srgbClr val="059669"/>
+                </a:solidFill>
+                <a:latin typeface="Calibri"/>
+              </a:defRPr>
+            </a:pPr>
+            <a:r>
+              <a:t>137%</a:t>
+            </a:r>
+          </a:p>
+        </p:txBody>
+      </p:sp>
+      <p:sp>
+        <p:nvSpPr>
+          <p:cNvPr id="82" name="TextBox 81"/>
+          <p:cNvSpPr txBox="1"/>
+          <p:nvPr/>
+        </p:nvSpPr>
+        <p:spPr>
+          <a:xfrm>
+            <a:off x="256032" y="3223260"/>
+            <a:ext cx="1828800" cy="429768"/>
+          </a:xfrm>
+          <a:prstGeom prst="rect">
+            <a:avLst/>
+          </a:prstGeom>
+          <a:noFill/>
+        </p:spPr>
+        <p:txBody>
+          <a:bodyPr wrap="square">
+            <a:spAutoFit/>
+          </a:bodyPr>
+          <a:lstStyle/>
+          <a:p>
+            <a:pPr algn="l">
+              <a:defRPr sz="900" b="1">
+                <a:solidFill>
+                  <a:srgbClr val="111827"/>
+                </a:solidFill>
+                <a:latin typeface="Calibri"/>
+              </a:defRPr>
+            </a:pPr>
+            <a:r>
+              <a:t>Westy McLaughlin</a:t>
+            </a:r>
+          </a:p>
+        </p:txBody>
+      </p:sp>
+      <p:sp>
+        <p:nvSpPr>
+          <p:cNvPr id="83" name="Rectangle 82"/>
+          <p:cNvSpPr/>
+          <p:nvPr/>
+        </p:nvSpPr>
+        <p:spPr>
+          <a:xfrm>
+            <a:off x="2048256" y="3145536"/>
+            <a:ext cx="1024127" cy="393192"/>
+          </a:xfrm>
+          <a:prstGeom prst="rect">
+            <a:avLst/>
+          </a:prstGeom>
+          <a:solidFill>
+            <a:srgbClr val="05784C"/>
+          </a:solidFill>
+          <a:ln>
+            <a:noFill/>
+          </a:ln>
+        </p:spPr>
+        <p:style>
+          <a:lnRef idx="1">
+            <a:schemeClr val="accent1"/>
+          </a:lnRef>
+          <a:fillRef idx="3">
+            <a:schemeClr val="accent1"/>
+          </a:fillRef>
+          <a:effectRef idx="2">
+            <a:schemeClr val="accent1"/>
+          </a:effectRef>
+          <a:fontRef idx="minor">
+            <a:schemeClr val="lt1"/>
+          </a:fontRef>
+        </p:style>
+        <p:txBody>
+          <a:bodyPr rtlCol="0" anchor="ctr"/>
+          <a:lstStyle/>
+          <a:p>
+            <a:pPr algn="ctr"/>
+          </a:p>
+        </p:txBody>
+      </p:sp>
+      <p:sp>
+        <p:nvSpPr>
+          <p:cNvPr id="84" name="TextBox 83"/>
+          <p:cNvSpPr txBox="1"/>
+          <p:nvPr/>
+        </p:nvSpPr>
+        <p:spPr>
+          <a:xfrm>
+            <a:off x="2011680" y="3223260"/>
+            <a:ext cx="1097280" cy="411480"/>
+          </a:xfrm>
+          <a:prstGeom prst="rect">
+            <a:avLst/>
+          </a:prstGeom>
+          <a:noFill/>
+        </p:spPr>
+        <p:txBody>
+          <a:bodyPr wrap="square">
+            <a:spAutoFit/>
+          </a:bodyPr>
+          <a:lstStyle/>
+          <a:p>
+            <a:pPr algn="ctr">
+              <a:defRPr sz="1100" b="1">
+                <a:solidFill>
+                  <a:srgbClr val="FFFFFF"/>
+                </a:solidFill>
+                <a:latin typeface="Calibri"/>
+              </a:defRPr>
+            </a:pPr>
+            <a:r>
+              <a:t>46</a:t>
+            </a:r>
+          </a:p>
+        </p:txBody>
+      </p:sp>
+      <p:sp>
+        <p:nvSpPr>
+          <p:cNvPr id="85" name="Rectangle 84"/>
+          <p:cNvSpPr/>
+          <p:nvPr/>
+        </p:nvSpPr>
+        <p:spPr>
+          <a:xfrm>
+            <a:off x="3145536" y="3145536"/>
+            <a:ext cx="1024127" cy="393192"/>
+          </a:xfrm>
+          <a:prstGeom prst="rect">
+            <a:avLst/>
+          </a:prstGeom>
+          <a:solidFill>
+            <a:srgbClr val="DC2626"/>
+          </a:solidFill>
+          <a:ln>
+            <a:noFill/>
+          </a:ln>
+        </p:spPr>
+        <p:style>
+          <a:lnRef idx="1">
+            <a:schemeClr val="accent1"/>
+          </a:lnRef>
+          <a:fillRef idx="3">
+            <a:schemeClr val="accent1"/>
+          </a:fillRef>
+          <a:effectRef idx="2">
+            <a:schemeClr val="accent1"/>
+          </a:effectRef>
+          <a:fontRef idx="minor">
+            <a:schemeClr val="lt1"/>
+          </a:fontRef>
+        </p:style>
+        <p:txBody>
+          <a:bodyPr rtlCol="0" anchor="ctr"/>
+          <a:lstStyle/>
+          <a:p>
+            <a:pPr algn="ctr"/>
+          </a:p>
+        </p:txBody>
+      </p:sp>
+      <p:sp>
+        <p:nvSpPr>
+          <p:cNvPr id="86" name="TextBox 85"/>
+          <p:cNvSpPr txBox="1"/>
+          <p:nvPr/>
+        </p:nvSpPr>
+        <p:spPr>
+          <a:xfrm>
+            <a:off x="3108960" y="3223260"/>
+            <a:ext cx="1097280" cy="411480"/>
+          </a:xfrm>
+          <a:prstGeom prst="rect">
+            <a:avLst/>
+          </a:prstGeom>
+          <a:noFill/>
+        </p:spPr>
+        <p:txBody>
+          <a:bodyPr wrap="square">
+            <a:spAutoFit/>
+          </a:bodyPr>
+          <a:lstStyle/>
+          <a:p>
+            <a:pPr algn="ctr">
+              <a:defRPr sz="1100" b="1">
+                <a:solidFill>
+                  <a:srgbClr val="FFFFFF"/>
+                </a:solidFill>
+                <a:latin typeface="Calibri"/>
+              </a:defRPr>
+            </a:pPr>
+            <a:r>
+              <a:t>29</a:t>
+            </a:r>
+          </a:p>
+        </p:txBody>
+      </p:sp>
+      <p:sp>
+        <p:nvSpPr>
+          <p:cNvPr id="87" name="Rectangle 86"/>
+          <p:cNvSpPr/>
+          <p:nvPr/>
+        </p:nvSpPr>
+        <p:spPr>
+          <a:xfrm>
+            <a:off x="4242816" y="3145536"/>
+            <a:ext cx="1024127" cy="393192"/>
+          </a:xfrm>
+          <a:prstGeom prst="rect">
+            <a:avLst/>
+          </a:prstGeom>
+          <a:solidFill>
+            <a:srgbClr val="DC2626"/>
+          </a:solidFill>
+          <a:ln>
+            <a:noFill/>
+          </a:ln>
+        </p:spPr>
+        <p:style>
+          <a:lnRef idx="1">
+            <a:schemeClr val="accent1"/>
+          </a:lnRef>
+          <a:fillRef idx="3">
+            <a:schemeClr val="accent1"/>
+          </a:fillRef>
+          <a:effectRef idx="2">
+            <a:schemeClr val="accent1"/>
+          </a:effectRef>
+          <a:fontRef idx="minor">
+            <a:schemeClr val="lt1"/>
+          </a:fontRef>
+        </p:style>
+        <p:txBody>
+          <a:bodyPr rtlCol="0" anchor="ctr"/>
+          <a:lstStyle/>
+          <a:p>
+            <a:pPr algn="ctr"/>
+          </a:p>
+        </p:txBody>
+      </p:sp>
+      <p:sp>
+        <p:nvSpPr>
+          <p:cNvPr id="88" name="TextBox 87"/>
+          <p:cNvSpPr txBox="1"/>
+          <p:nvPr/>
+        </p:nvSpPr>
+        <p:spPr>
+          <a:xfrm>
+            <a:off x="4206240" y="3223260"/>
+            <a:ext cx="1097280" cy="411480"/>
+          </a:xfrm>
+          <a:prstGeom prst="rect">
+            <a:avLst/>
+          </a:prstGeom>
+          <a:noFill/>
+        </p:spPr>
+        <p:txBody>
+          <a:bodyPr wrap="square">
+            <a:spAutoFit/>
+          </a:bodyPr>
+          <a:lstStyle/>
+          <a:p>
+            <a:pPr algn="ctr">
+              <a:defRPr sz="1100" b="1">
+                <a:solidFill>
+                  <a:srgbClr val="FFFFFF"/>
+                </a:solidFill>
+                <a:latin typeface="Calibri"/>
+              </a:defRPr>
+            </a:pPr>
+            <a:r>
+              <a:t>28</a:t>
+            </a:r>
+          </a:p>
+        </p:txBody>
+      </p:sp>
+      <p:sp>
+        <p:nvSpPr>
+          <p:cNvPr id="89" name="Rectangle 88"/>
+          <p:cNvSpPr/>
+          <p:nvPr/>
+        </p:nvSpPr>
+        <p:spPr>
+          <a:xfrm>
+            <a:off x="5340096" y="3145536"/>
+            <a:ext cx="1024127" cy="393192"/>
+          </a:xfrm>
+          <a:prstGeom prst="rect">
+            <a:avLst/>
+          </a:prstGeom>
+          <a:solidFill>
+            <a:srgbClr val="D97706"/>
+          </a:solidFill>
+          <a:ln>
+            <a:noFill/>
+          </a:ln>
+        </p:spPr>
+        <p:style>
+          <a:lnRef idx="1">
+            <a:schemeClr val="accent1"/>
+          </a:lnRef>
+          <a:fillRef idx="3">
+            <a:schemeClr val="accent1"/>
+          </a:fillRef>
+          <a:effectRef idx="2">
+            <a:schemeClr val="accent1"/>
+          </a:effectRef>
+          <a:fontRef idx="minor">
+            <a:schemeClr val="lt1"/>
+          </a:fontRef>
+        </p:style>
+        <p:txBody>
+          <a:bodyPr rtlCol="0" anchor="ctr"/>
+          <a:lstStyle/>
+          <a:p>
+            <a:pPr algn="ctr"/>
+          </a:p>
+        </p:txBody>
+      </p:sp>
+      <p:sp>
+        <p:nvSpPr>
+          <p:cNvPr id="90" name="TextBox 89"/>
+          <p:cNvSpPr txBox="1"/>
+          <p:nvPr/>
+        </p:nvSpPr>
+        <p:spPr>
+          <a:xfrm>
+            <a:off x="5303520" y="3223260"/>
+            <a:ext cx="1097280" cy="411480"/>
+          </a:xfrm>
+          <a:prstGeom prst="rect">
+            <a:avLst/>
+          </a:prstGeom>
+          <a:noFill/>
+        </p:spPr>
+        <p:txBody>
+          <a:bodyPr wrap="square">
+            <a:spAutoFit/>
+          </a:bodyPr>
+          <a:lstStyle/>
+          <a:p>
+            <a:pPr algn="ctr">
+              <a:defRPr sz="1100" b="1">
+                <a:solidFill>
+                  <a:srgbClr val="FFFFFF"/>
+                </a:solidFill>
+                <a:latin typeface="Calibri"/>
+              </a:defRPr>
+            </a:pPr>
+            <a:r>
+              <a:t>39</a:t>
+            </a:r>
+          </a:p>
+        </p:txBody>
+      </p:sp>
+      <p:sp>
+        <p:nvSpPr>
+          <p:cNvPr id="91" name="Rectangle 90"/>
+          <p:cNvSpPr/>
+          <p:nvPr/>
+        </p:nvSpPr>
+        <p:spPr>
+          <a:xfrm>
+            <a:off x="6437376" y="3145536"/>
+            <a:ext cx="1024127" cy="393192"/>
+          </a:xfrm>
+          <a:prstGeom prst="rect">
+            <a:avLst/>
+          </a:prstGeom>
+          <a:solidFill>
+            <a:srgbClr val="DC2626"/>
+          </a:solidFill>
+          <a:ln>
+            <a:noFill/>
+          </a:ln>
+        </p:spPr>
+        <p:style>
+          <a:lnRef idx="1">
+            <a:schemeClr val="accent1"/>
+          </a:lnRef>
+          <a:fillRef idx="3">
+            <a:schemeClr val="accent1"/>
+          </a:fillRef>
+          <a:effectRef idx="2">
+            <a:schemeClr val="accent1"/>
+          </a:effectRef>
+          <a:fontRef idx="minor">
+            <a:schemeClr val="lt1"/>
+          </a:fontRef>
+        </p:style>
+        <p:txBody>
+          <a:bodyPr rtlCol="0" anchor="ctr"/>
+          <a:lstStyle/>
+          <a:p>
+            <a:pPr algn="ctr"/>
+          </a:p>
+        </p:txBody>
+      </p:sp>
+      <p:sp>
+        <p:nvSpPr>
+          <p:cNvPr id="92" name="TextBox 91"/>
+          <p:cNvSpPr txBox="1"/>
+          <p:nvPr/>
+        </p:nvSpPr>
+        <p:spPr>
+          <a:xfrm>
+            <a:off x="6400800" y="3223260"/>
+            <a:ext cx="1097280" cy="411480"/>
+          </a:xfrm>
+          <a:prstGeom prst="rect">
+            <a:avLst/>
+          </a:prstGeom>
+          <a:noFill/>
+        </p:spPr>
+        <p:txBody>
+          <a:bodyPr wrap="square">
+            <a:spAutoFit/>
+          </a:bodyPr>
+          <a:lstStyle/>
+          <a:p>
+            <a:pPr algn="ctr">
+              <a:defRPr sz="1100" b="1">
+                <a:solidFill>
+                  <a:srgbClr val="FFFFFF"/>
+                </a:solidFill>
+                <a:latin typeface="Calibri"/>
+              </a:defRPr>
+            </a:pPr>
+            <a:r>
+              <a:t>25</a:t>
+            </a:r>
+          </a:p>
+        </p:txBody>
+      </p:sp>
+      <p:sp>
+        <p:nvSpPr>
+          <p:cNvPr id="93" name="Rectangle 92"/>
+          <p:cNvSpPr/>
+          <p:nvPr/>
+        </p:nvSpPr>
+        <p:spPr>
+          <a:xfrm>
+            <a:off x="7534655" y="3145536"/>
+            <a:ext cx="1024127" cy="393192"/>
+          </a:xfrm>
+          <a:prstGeom prst="rect">
+            <a:avLst/>
+          </a:prstGeom>
+          <a:solidFill>
+            <a:srgbClr val="05784C"/>
+          </a:solidFill>
+          <a:ln>
+            <a:noFill/>
+          </a:ln>
+        </p:spPr>
+        <p:style>
+          <a:lnRef idx="1">
+            <a:schemeClr val="accent1"/>
+          </a:lnRef>
+          <a:fillRef idx="3">
+            <a:schemeClr val="accent1"/>
+          </a:fillRef>
+          <a:effectRef idx="2">
+            <a:schemeClr val="accent1"/>
+          </a:effectRef>
+          <a:fontRef idx="minor">
+            <a:schemeClr val="lt1"/>
+          </a:fontRef>
+        </p:style>
+        <p:txBody>
+          <a:bodyPr rtlCol="0" anchor="ctr"/>
+          <a:lstStyle/>
+          <a:p>
+            <a:pPr algn="ctr"/>
+          </a:p>
+        </p:txBody>
+      </p:sp>
+      <p:sp>
+        <p:nvSpPr>
+          <p:cNvPr id="94" name="TextBox 93"/>
+          <p:cNvSpPr txBox="1"/>
+          <p:nvPr/>
+        </p:nvSpPr>
+        <p:spPr>
+          <a:xfrm>
+            <a:off x="7498079" y="3223260"/>
+            <a:ext cx="1097280" cy="411480"/>
+          </a:xfrm>
+          <a:prstGeom prst="rect">
+            <a:avLst/>
+          </a:prstGeom>
+          <a:noFill/>
+        </p:spPr>
+        <p:txBody>
+          <a:bodyPr wrap="square">
+            <a:spAutoFit/>
+          </a:bodyPr>
+          <a:lstStyle/>
+          <a:p>
+            <a:pPr algn="ctr">
+              <a:defRPr sz="1100" b="1">
+                <a:solidFill>
+                  <a:srgbClr val="FFFFFF"/>
+                </a:solidFill>
+                <a:latin typeface="Calibri"/>
+              </a:defRPr>
+            </a:pPr>
+            <a:r>
+              <a:t>45</a:t>
+            </a:r>
+          </a:p>
+        </p:txBody>
+      </p:sp>
+      <p:sp>
+        <p:nvSpPr>
+          <p:cNvPr id="95" name="Rectangle 94"/>
+          <p:cNvSpPr/>
+          <p:nvPr/>
+        </p:nvSpPr>
+        <p:spPr>
+          <a:xfrm>
+            <a:off x="8631935" y="3145536"/>
+            <a:ext cx="1024127" cy="393192"/>
+          </a:xfrm>
+          <a:prstGeom prst="rect">
+            <a:avLst/>
+          </a:prstGeom>
+          <a:solidFill>
+            <a:srgbClr val="DC2626"/>
+          </a:solidFill>
+          <a:ln>
+            <a:noFill/>
+          </a:ln>
+        </p:spPr>
+        <p:style>
+          <a:lnRef idx="1">
+            <a:schemeClr val="accent1"/>
+          </a:lnRef>
+          <a:fillRef idx="3">
+            <a:schemeClr val="accent1"/>
+          </a:fillRef>
+          <a:effectRef idx="2">
+            <a:schemeClr val="accent1"/>
+          </a:effectRef>
+          <a:fontRef idx="minor">
+            <a:schemeClr val="lt1"/>
+          </a:fontRef>
+        </p:style>
+        <p:txBody>
+          <a:bodyPr rtlCol="0" anchor="ctr"/>
+          <a:lstStyle/>
+          <a:p>
+            <a:pPr algn="ctr"/>
+          </a:p>
+        </p:txBody>
+      </p:sp>
+      <p:sp>
+        <p:nvSpPr>
+          <p:cNvPr id="96" name="TextBox 95"/>
+          <p:cNvSpPr txBox="1"/>
+          <p:nvPr/>
+        </p:nvSpPr>
+        <p:spPr>
+          <a:xfrm>
+            <a:off x="8595359" y="3223260"/>
+            <a:ext cx="1097280" cy="411480"/>
+          </a:xfrm>
+          <a:prstGeom prst="rect">
+            <a:avLst/>
+          </a:prstGeom>
+          <a:noFill/>
+        </p:spPr>
+        <p:txBody>
+          <a:bodyPr wrap="square">
+            <a:spAutoFit/>
+          </a:bodyPr>
+          <a:lstStyle/>
+          <a:p>
+            <a:pPr algn="ctr">
+              <a:defRPr sz="1100" b="1">
+                <a:solidFill>
+                  <a:srgbClr val="FFFFFF"/>
+                </a:solidFill>
+                <a:latin typeface="Calibri"/>
+              </a:defRPr>
+            </a:pPr>
+            <a:r>
+              <a:t>9</a:t>
+            </a:r>
+          </a:p>
+        </p:txBody>
+      </p:sp>
+      <p:sp>
+        <p:nvSpPr>
+          <p:cNvPr id="97" name="TextBox 96"/>
+          <p:cNvSpPr txBox="1"/>
+          <p:nvPr/>
+        </p:nvSpPr>
+        <p:spPr>
+          <a:xfrm>
+            <a:off x="9692640" y="3223260"/>
+            <a:ext cx="822960" cy="429768"/>
+          </a:xfrm>
+          <a:prstGeom prst="rect">
+            <a:avLst/>
+          </a:prstGeom>
+          <a:noFill/>
+        </p:spPr>
+        <p:txBody>
+          <a:bodyPr wrap="square">
+            <a:spAutoFit/>
+          </a:bodyPr>
+          <a:lstStyle/>
+          <a:p>
+            <a:pPr algn="ctr">
+              <a:defRPr sz="1100" b="1">
+                <a:solidFill>
+                  <a:srgbClr val="D97706"/>
+                </a:solidFill>
+                <a:latin typeface="Calibri"/>
+              </a:defRPr>
+            </a:pPr>
+            <a:r>
+              <a:t>88%</a:t>
+            </a:r>
+          </a:p>
+        </p:txBody>
+      </p:sp>
+      <p:sp>
+        <p:nvSpPr>
+          <p:cNvPr id="98" name="Rectangle 97"/>
+          <p:cNvSpPr/>
+          <p:nvPr/>
+        </p:nvSpPr>
+        <p:spPr>
+          <a:xfrm>
+            <a:off x="182880" y="3593591"/>
+            <a:ext cx="10332720" cy="502920"/>
+          </a:xfrm>
+          <a:prstGeom prst="rect">
+            <a:avLst/>
+          </a:prstGeom>
+          <a:solidFill>
+            <a:srgbClr val="F9FAFB"/>
+          </a:solidFill>
+          <a:ln>
+            <a:noFill/>
+          </a:ln>
+        </p:spPr>
+        <p:style>
+          <a:lnRef idx="1">
+            <a:schemeClr val="accent1"/>
+          </a:lnRef>
+          <a:fillRef idx="3">
+            <a:schemeClr val="accent1"/>
+          </a:fillRef>
+          <a:effectRef idx="2">
+            <a:schemeClr val="accent1"/>
+          </a:effectRef>
+          <a:fontRef idx="minor">
+            <a:schemeClr val="lt1"/>
+          </a:fontRef>
+        </p:style>
+        <p:txBody>
+          <a:bodyPr rtlCol="0" anchor="ctr"/>
+          <a:lstStyle/>
+          <a:p>
+            <a:pPr algn="ctr"/>
+          </a:p>
+        </p:txBody>
+      </p:sp>
+      <p:sp>
+        <p:nvSpPr>
+          <p:cNvPr id="99" name="TextBox 98"/>
+          <p:cNvSpPr txBox="1"/>
+          <p:nvPr/>
+        </p:nvSpPr>
+        <p:spPr>
+          <a:xfrm>
+            <a:off x="256032" y="3726180"/>
+            <a:ext cx="1828800" cy="429768"/>
+          </a:xfrm>
+          <a:prstGeom prst="rect">
+            <a:avLst/>
+          </a:prstGeom>
+          <a:noFill/>
+        </p:spPr>
+        <p:txBody>
+          <a:bodyPr wrap="square">
+            <a:spAutoFit/>
+          </a:bodyPr>
+          <a:lstStyle/>
+          <a:p>
+            <a:pPr algn="l">
+              <a:defRPr sz="900" b="1">
+                <a:solidFill>
+                  <a:srgbClr val="111827"/>
+                </a:solidFill>
+                <a:latin typeface="Calibri"/>
+              </a:defRPr>
+            </a:pPr>
+            <a:r>
+              <a:t>Alexis Berry-Smith</a:t>
+            </a:r>
+          </a:p>
+        </p:txBody>
+      </p:sp>
+      <p:sp>
+        <p:nvSpPr>
+          <p:cNvPr id="100" name="Rectangle 99"/>
+          <p:cNvSpPr/>
+          <p:nvPr/>
+        </p:nvSpPr>
+        <p:spPr>
+          <a:xfrm>
+            <a:off x="2048256" y="3648456"/>
             <a:ext cx="1024127" cy="393192"/>
           </a:xfrm>
           <a:prstGeom prst="rect">
@@ -21955,13 +24067,13 @@
       </p:sp>
       <p:sp>
         <p:nvSpPr>
-          <p:cNvPr id="47" name="TextBox 46"/>
-          <p:cNvSpPr txBox="1"/>
-          <p:nvPr/>
-        </p:nvSpPr>
-        <p:spPr>
-          <a:xfrm>
-            <a:off x="8595359" y="1714500"/>
+          <p:cNvPr id="101" name="TextBox 100"/>
+          <p:cNvSpPr txBox="1"/>
+          <p:nvPr/>
+        </p:nvSpPr>
+        <p:spPr>
+          <a:xfrm>
+            <a:off x="2011680" y="3726180"/>
             <a:ext cx="1097280" cy="411480"/>
           </a:xfrm>
           <a:prstGeom prst="rect">
@@ -21991,14 +24103,57 @@
       </p:sp>
       <p:sp>
         <p:nvSpPr>
-          <p:cNvPr id="48" name="TextBox 47"/>
-          <p:cNvSpPr txBox="1"/>
-          <p:nvPr/>
-        </p:nvSpPr>
-        <p:spPr>
-          <a:xfrm>
-            <a:off x="9692640" y="1714500"/>
-            <a:ext cx="822960" cy="429768"/>
+          <p:cNvPr id="102" name="Rectangle 101"/>
+          <p:cNvSpPr/>
+          <p:nvPr/>
+        </p:nvSpPr>
+        <p:spPr>
+          <a:xfrm>
+            <a:off x="3145536" y="3648456"/>
+            <a:ext cx="1024127" cy="393192"/>
+          </a:xfrm>
+          <a:prstGeom prst="rect">
+            <a:avLst/>
+          </a:prstGeom>
+          <a:solidFill>
+            <a:srgbClr val="D1D5DB"/>
+          </a:solidFill>
+          <a:ln>
+            <a:noFill/>
+          </a:ln>
+        </p:spPr>
+        <p:style>
+          <a:lnRef idx="1">
+            <a:schemeClr val="accent1"/>
+          </a:lnRef>
+          <a:fillRef idx="3">
+            <a:schemeClr val="accent1"/>
+          </a:fillRef>
+          <a:effectRef idx="2">
+            <a:schemeClr val="accent1"/>
+          </a:effectRef>
+          <a:fontRef idx="minor">
+            <a:schemeClr val="lt1"/>
+          </a:fontRef>
+        </p:style>
+        <p:txBody>
+          <a:bodyPr rtlCol="0" anchor="ctr"/>
+          <a:lstStyle/>
+          <a:p>
+            <a:pPr algn="ctr"/>
+          </a:p>
+        </p:txBody>
+      </p:sp>
+      <p:sp>
+        <p:nvSpPr>
+          <p:cNvPr id="103" name="TextBox 102"/>
+          <p:cNvSpPr txBox="1"/>
+          <p:nvPr/>
+        </p:nvSpPr>
+        <p:spPr>
+          <a:xfrm>
+            <a:off x="3108960" y="3726180"/>
+            <a:ext cx="1097280" cy="411480"/>
           </a:xfrm>
           <a:prstGeom prst="rect">
             <a:avLst/>
@@ -22014,62 +24169,184 @@
             <a:pPr algn="ctr">
               <a:defRPr sz="1100" b="1">
                 <a:solidFill>
-                  <a:srgbClr val="D97706"/>
-                </a:solidFill>
-                <a:latin typeface="Calibri"/>
-              </a:defRPr>
-            </a:pPr>
-            <a:r>
-              <a:t>82%</a:t>
-            </a:r>
-          </a:p>
-        </p:txBody>
-      </p:sp>
-      <p:sp>
-        <p:nvSpPr>
-          <p:cNvPr id="49" name="TextBox 48"/>
-          <p:cNvSpPr txBox="1"/>
-          <p:nvPr/>
-        </p:nvSpPr>
-        <p:spPr>
-          <a:xfrm>
-            <a:off x="256032" y="2217420"/>
-            <a:ext cx="1828800" cy="429768"/>
-          </a:xfrm>
-          <a:prstGeom prst="rect">
-            <a:avLst/>
-          </a:prstGeom>
-          <a:noFill/>
-        </p:spPr>
-        <p:txBody>
-          <a:bodyPr wrap="square">
-            <a:spAutoFit/>
-          </a:bodyPr>
-          <a:lstStyle/>
-          <a:p>
-            <a:pPr algn="l">
-              <a:defRPr sz="900" b="1">
-                <a:solidFill>
-                  <a:srgbClr val="111827"/>
-                </a:solidFill>
-                <a:latin typeface="Calibri"/>
-              </a:defRPr>
-            </a:pPr>
-            <a:r>
-              <a:t>Christopher Hayes</a:t>
-            </a:r>
-          </a:p>
-        </p:txBody>
-      </p:sp>
-      <p:sp>
-        <p:nvSpPr>
-          <p:cNvPr id="50" name="Rectangle 49"/>
+                  <a:srgbClr val="FFFFFF"/>
+                </a:solidFill>
+                <a:latin typeface="Calibri"/>
+              </a:defRPr>
+            </a:pPr>
+            <a:r>
+              <a:t>0</a:t>
+            </a:r>
+          </a:p>
+        </p:txBody>
+      </p:sp>
+      <p:sp>
+        <p:nvSpPr>
+          <p:cNvPr id="104" name="Rectangle 103"/>
           <p:cNvSpPr/>
           <p:nvPr/>
         </p:nvSpPr>
         <p:spPr>
           <a:xfrm>
-            <a:off x="2048256" y="2139696"/>
+            <a:off x="4242816" y="3648456"/>
+            <a:ext cx="1024127" cy="393192"/>
+          </a:xfrm>
+          <a:prstGeom prst="rect">
+            <a:avLst/>
+          </a:prstGeom>
+          <a:solidFill>
+            <a:srgbClr val="DC2626"/>
+          </a:solidFill>
+          <a:ln>
+            <a:noFill/>
+          </a:ln>
+        </p:spPr>
+        <p:style>
+          <a:lnRef idx="1">
+            <a:schemeClr val="accent1"/>
+          </a:lnRef>
+          <a:fillRef idx="3">
+            <a:schemeClr val="accent1"/>
+          </a:fillRef>
+          <a:effectRef idx="2">
+            <a:schemeClr val="accent1"/>
+          </a:effectRef>
+          <a:fontRef idx="minor">
+            <a:schemeClr val="lt1"/>
+          </a:fontRef>
+        </p:style>
+        <p:txBody>
+          <a:bodyPr rtlCol="0" anchor="ctr"/>
+          <a:lstStyle/>
+          <a:p>
+            <a:pPr algn="ctr"/>
+          </a:p>
+        </p:txBody>
+      </p:sp>
+      <p:sp>
+        <p:nvSpPr>
+          <p:cNvPr id="105" name="TextBox 104"/>
+          <p:cNvSpPr txBox="1"/>
+          <p:nvPr/>
+        </p:nvSpPr>
+        <p:spPr>
+          <a:xfrm>
+            <a:off x="4206240" y="3726180"/>
+            <a:ext cx="1097280" cy="411480"/>
+          </a:xfrm>
+          <a:prstGeom prst="rect">
+            <a:avLst/>
+          </a:prstGeom>
+          <a:noFill/>
+        </p:spPr>
+        <p:txBody>
+          <a:bodyPr wrap="square">
+            <a:spAutoFit/>
+          </a:bodyPr>
+          <a:lstStyle/>
+          <a:p>
+            <a:pPr algn="ctr">
+              <a:defRPr sz="1100" b="1">
+                <a:solidFill>
+                  <a:srgbClr val="FFFFFF"/>
+                </a:solidFill>
+                <a:latin typeface="Calibri"/>
+              </a:defRPr>
+            </a:pPr>
+            <a:r>
+              <a:t>4</a:t>
+            </a:r>
+          </a:p>
+        </p:txBody>
+      </p:sp>
+      <p:sp>
+        <p:nvSpPr>
+          <p:cNvPr id="106" name="Rectangle 105"/>
+          <p:cNvSpPr/>
+          <p:nvPr/>
+        </p:nvSpPr>
+        <p:spPr>
+          <a:xfrm>
+            <a:off x="5340096" y="3648456"/>
+            <a:ext cx="1024127" cy="393192"/>
+          </a:xfrm>
+          <a:prstGeom prst="rect">
+            <a:avLst/>
+          </a:prstGeom>
+          <a:solidFill>
+            <a:srgbClr val="D1D5DB"/>
+          </a:solidFill>
+          <a:ln>
+            <a:noFill/>
+          </a:ln>
+        </p:spPr>
+        <p:style>
+          <a:lnRef idx="1">
+            <a:schemeClr val="accent1"/>
+          </a:lnRef>
+          <a:fillRef idx="3">
+            <a:schemeClr val="accent1"/>
+          </a:fillRef>
+          <a:effectRef idx="2">
+            <a:schemeClr val="accent1"/>
+          </a:effectRef>
+          <a:fontRef idx="minor">
+            <a:schemeClr val="lt1"/>
+          </a:fontRef>
+        </p:style>
+        <p:txBody>
+          <a:bodyPr rtlCol="0" anchor="ctr"/>
+          <a:lstStyle/>
+          <a:p>
+            <a:pPr algn="ctr"/>
+          </a:p>
+        </p:txBody>
+      </p:sp>
+      <p:sp>
+        <p:nvSpPr>
+          <p:cNvPr id="107" name="TextBox 106"/>
+          <p:cNvSpPr txBox="1"/>
+          <p:nvPr/>
+        </p:nvSpPr>
+        <p:spPr>
+          <a:xfrm>
+            <a:off x="5303520" y="3726180"/>
+            <a:ext cx="1097280" cy="411480"/>
+          </a:xfrm>
+          <a:prstGeom prst="rect">
+            <a:avLst/>
+          </a:prstGeom>
+          <a:noFill/>
+        </p:spPr>
+        <p:txBody>
+          <a:bodyPr wrap="square">
+            <a:spAutoFit/>
+          </a:bodyPr>
+          <a:lstStyle/>
+          <a:p>
+            <a:pPr algn="ctr">
+              <a:defRPr sz="1100" b="1">
+                <a:solidFill>
+                  <a:srgbClr val="FFFFFF"/>
+                </a:solidFill>
+                <a:latin typeface="Calibri"/>
+              </a:defRPr>
+            </a:pPr>
+            <a:r>
+              <a:t>0</a:t>
+            </a:r>
+          </a:p>
+        </p:txBody>
+      </p:sp>
+      <p:sp>
+        <p:nvSpPr>
+          <p:cNvPr id="108" name="Rectangle 107"/>
+          <p:cNvSpPr/>
+          <p:nvPr/>
+        </p:nvSpPr>
+        <p:spPr>
+          <a:xfrm>
+            <a:off x="6437376" y="3648456"/>
             <a:ext cx="1024127" cy="393192"/>
           </a:xfrm>
           <a:prstGeom prst="rect">
@@ -22106,13 +24383,13 @@
       </p:sp>
       <p:sp>
         <p:nvSpPr>
-          <p:cNvPr id="51" name="TextBox 50"/>
-          <p:cNvSpPr txBox="1"/>
-          <p:nvPr/>
-        </p:nvSpPr>
-        <p:spPr>
-          <a:xfrm>
-            <a:off x="2011680" y="2217420"/>
+          <p:cNvPr id="109" name="TextBox 108"/>
+          <p:cNvSpPr txBox="1"/>
+          <p:nvPr/>
+        </p:nvSpPr>
+        <p:spPr>
+          <a:xfrm>
+            <a:off x="6400800" y="3726180"/>
             <a:ext cx="1097280" cy="411480"/>
           </a:xfrm>
           <a:prstGeom prst="rect">
@@ -22135,20 +24412,20 @@
               </a:defRPr>
             </a:pPr>
             <a:r>
-              <a:t>39</a:t>
-            </a:r>
-          </a:p>
-        </p:txBody>
-      </p:sp>
-      <p:sp>
-        <p:nvSpPr>
-          <p:cNvPr id="52" name="Rectangle 51"/>
+              <a:t>32</a:t>
+            </a:r>
+          </a:p>
+        </p:txBody>
+      </p:sp>
+      <p:sp>
+        <p:nvSpPr>
+          <p:cNvPr id="110" name="Rectangle 109"/>
           <p:cNvSpPr/>
           <p:nvPr/>
         </p:nvSpPr>
         <p:spPr>
           <a:xfrm>
-            <a:off x="3145536" y="2139696"/>
+            <a:off x="7534655" y="3648456"/>
             <a:ext cx="1024127" cy="393192"/>
           </a:xfrm>
           <a:prstGeom prst="rect">
@@ -22185,13 +24462,13 @@
       </p:sp>
       <p:sp>
         <p:nvSpPr>
-          <p:cNvPr id="53" name="TextBox 52"/>
-          <p:cNvSpPr txBox="1"/>
-          <p:nvPr/>
-        </p:nvSpPr>
-        <p:spPr>
-          <a:xfrm>
-            <a:off x="3108960" y="2217420"/>
+          <p:cNvPr id="111" name="TextBox 110"/>
+          <p:cNvSpPr txBox="1"/>
+          <p:nvPr/>
+        </p:nvSpPr>
+        <p:spPr>
+          <a:xfrm>
+            <a:off x="7498079" y="3726180"/>
             <a:ext cx="1097280" cy="411480"/>
           </a:xfrm>
           <a:prstGeom prst="rect">
@@ -22214,336 +24491,20 @@
               </a:defRPr>
             </a:pPr>
             <a:r>
-              <a:t>42</a:t>
-            </a:r>
-          </a:p>
-        </p:txBody>
-      </p:sp>
-      <p:sp>
-        <p:nvSpPr>
-          <p:cNvPr id="54" name="Rectangle 53"/>
+              <a:t>45</a:t>
+            </a:r>
+          </a:p>
+        </p:txBody>
+      </p:sp>
+      <p:sp>
+        <p:nvSpPr>
+          <p:cNvPr id="112" name="Rectangle 111"/>
           <p:cNvSpPr/>
           <p:nvPr/>
         </p:nvSpPr>
         <p:spPr>
           <a:xfrm>
-            <a:off x="4242816" y="2139696"/>
-            <a:ext cx="1024127" cy="393192"/>
-          </a:xfrm>
-          <a:prstGeom prst="rect">
-            <a:avLst/>
-          </a:prstGeom>
-          <a:solidFill>
-            <a:srgbClr val="DC2626"/>
-          </a:solidFill>
-          <a:ln>
-            <a:noFill/>
-          </a:ln>
-        </p:spPr>
-        <p:style>
-          <a:lnRef idx="1">
-            <a:schemeClr val="accent1"/>
-          </a:lnRef>
-          <a:fillRef idx="3">
-            <a:schemeClr val="accent1"/>
-          </a:fillRef>
-          <a:effectRef idx="2">
-            <a:schemeClr val="accent1"/>
-          </a:effectRef>
-          <a:fontRef idx="minor">
-            <a:schemeClr val="lt1"/>
-          </a:fontRef>
-        </p:style>
-        <p:txBody>
-          <a:bodyPr rtlCol="0" anchor="ctr"/>
-          <a:lstStyle/>
-          <a:p>
-            <a:pPr algn="ctr"/>
-          </a:p>
-        </p:txBody>
-      </p:sp>
-      <p:sp>
-        <p:nvSpPr>
-          <p:cNvPr id="55" name="TextBox 54"/>
-          <p:cNvSpPr txBox="1"/>
-          <p:nvPr/>
-        </p:nvSpPr>
-        <p:spPr>
-          <a:xfrm>
-            <a:off x="4206240" y="2217420"/>
-            <a:ext cx="1097280" cy="411480"/>
-          </a:xfrm>
-          <a:prstGeom prst="rect">
-            <a:avLst/>
-          </a:prstGeom>
-          <a:noFill/>
-        </p:spPr>
-        <p:txBody>
-          <a:bodyPr wrap="square">
-            <a:spAutoFit/>
-          </a:bodyPr>
-          <a:lstStyle/>
-          <a:p>
-            <a:pPr algn="ctr">
-              <a:defRPr sz="1100" b="1">
-                <a:solidFill>
-                  <a:srgbClr val="FFFFFF"/>
-                </a:solidFill>
-                <a:latin typeface="Calibri"/>
-              </a:defRPr>
-            </a:pPr>
-            <a:r>
-              <a:t>25</a:t>
-            </a:r>
-          </a:p>
-        </p:txBody>
-      </p:sp>
-      <p:sp>
-        <p:nvSpPr>
-          <p:cNvPr id="56" name="Rectangle 55"/>
-          <p:cNvSpPr/>
-          <p:nvPr/>
-        </p:nvSpPr>
-        <p:spPr>
-          <a:xfrm>
-            <a:off x="5340096" y="2139696"/>
-            <a:ext cx="1024127" cy="393192"/>
-          </a:xfrm>
-          <a:prstGeom prst="rect">
-            <a:avLst/>
-          </a:prstGeom>
-          <a:solidFill>
-            <a:srgbClr val="05784C"/>
-          </a:solidFill>
-          <a:ln>
-            <a:noFill/>
-          </a:ln>
-        </p:spPr>
-        <p:style>
-          <a:lnRef idx="1">
-            <a:schemeClr val="accent1"/>
-          </a:lnRef>
-          <a:fillRef idx="3">
-            <a:schemeClr val="accent1"/>
-          </a:fillRef>
-          <a:effectRef idx="2">
-            <a:schemeClr val="accent1"/>
-          </a:effectRef>
-          <a:fontRef idx="minor">
-            <a:schemeClr val="lt1"/>
-          </a:fontRef>
-        </p:style>
-        <p:txBody>
-          <a:bodyPr rtlCol="0" anchor="ctr"/>
-          <a:lstStyle/>
-          <a:p>
-            <a:pPr algn="ctr"/>
-          </a:p>
-        </p:txBody>
-      </p:sp>
-      <p:sp>
-        <p:nvSpPr>
-          <p:cNvPr id="57" name="TextBox 56"/>
-          <p:cNvSpPr txBox="1"/>
-          <p:nvPr/>
-        </p:nvSpPr>
-        <p:spPr>
-          <a:xfrm>
-            <a:off x="5303520" y="2217420"/>
-            <a:ext cx="1097280" cy="411480"/>
-          </a:xfrm>
-          <a:prstGeom prst="rect">
-            <a:avLst/>
-          </a:prstGeom>
-          <a:noFill/>
-        </p:spPr>
-        <p:txBody>
-          <a:bodyPr wrap="square">
-            <a:spAutoFit/>
-          </a:bodyPr>
-          <a:lstStyle/>
-          <a:p>
-            <a:pPr algn="ctr">
-              <a:defRPr sz="1100" b="1">
-                <a:solidFill>
-                  <a:srgbClr val="FFFFFF"/>
-                </a:solidFill>
-                <a:latin typeface="Calibri"/>
-              </a:defRPr>
-            </a:pPr>
-            <a:r>
-              <a:t>40</a:t>
-            </a:r>
-          </a:p>
-        </p:txBody>
-      </p:sp>
-      <p:sp>
-        <p:nvSpPr>
-          <p:cNvPr id="58" name="Rectangle 57"/>
-          <p:cNvSpPr/>
-          <p:nvPr/>
-        </p:nvSpPr>
-        <p:spPr>
-          <a:xfrm>
-            <a:off x="6437376" y="2139696"/>
-            <a:ext cx="1024127" cy="393192"/>
-          </a:xfrm>
-          <a:prstGeom prst="rect">
-            <a:avLst/>
-          </a:prstGeom>
-          <a:solidFill>
-            <a:srgbClr val="DC2626"/>
-          </a:solidFill>
-          <a:ln>
-            <a:noFill/>
-          </a:ln>
-        </p:spPr>
-        <p:style>
-          <a:lnRef idx="1">
-            <a:schemeClr val="accent1"/>
-          </a:lnRef>
-          <a:fillRef idx="3">
-            <a:schemeClr val="accent1"/>
-          </a:fillRef>
-          <a:effectRef idx="2">
-            <a:schemeClr val="accent1"/>
-          </a:effectRef>
-          <a:fontRef idx="minor">
-            <a:schemeClr val="lt1"/>
-          </a:fontRef>
-        </p:style>
-        <p:txBody>
-          <a:bodyPr rtlCol="0" anchor="ctr"/>
-          <a:lstStyle/>
-          <a:p>
-            <a:pPr algn="ctr"/>
-          </a:p>
-        </p:txBody>
-      </p:sp>
-      <p:sp>
-        <p:nvSpPr>
-          <p:cNvPr id="59" name="TextBox 58"/>
-          <p:cNvSpPr txBox="1"/>
-          <p:nvPr/>
-        </p:nvSpPr>
-        <p:spPr>
-          <a:xfrm>
-            <a:off x="6400800" y="2217420"/>
-            <a:ext cx="1097280" cy="411480"/>
-          </a:xfrm>
-          <a:prstGeom prst="rect">
-            <a:avLst/>
-          </a:prstGeom>
-          <a:noFill/>
-        </p:spPr>
-        <p:txBody>
-          <a:bodyPr wrap="square">
-            <a:spAutoFit/>
-          </a:bodyPr>
-          <a:lstStyle/>
-          <a:p>
-            <a:pPr algn="ctr">
-              <a:defRPr sz="1100" b="1">
-                <a:solidFill>
-                  <a:srgbClr val="FFFFFF"/>
-                </a:solidFill>
-                <a:latin typeface="Calibri"/>
-              </a:defRPr>
-            </a:pPr>
-            <a:r>
-              <a:t>15</a:t>
-            </a:r>
-          </a:p>
-        </p:txBody>
-      </p:sp>
-      <p:sp>
-        <p:nvSpPr>
-          <p:cNvPr id="60" name="Rectangle 59"/>
-          <p:cNvSpPr/>
-          <p:nvPr/>
-        </p:nvSpPr>
-        <p:spPr>
-          <a:xfrm>
-            <a:off x="7534655" y="2139696"/>
-            <a:ext cx="1024127" cy="393192"/>
-          </a:xfrm>
-          <a:prstGeom prst="rect">
-            <a:avLst/>
-          </a:prstGeom>
-          <a:solidFill>
-            <a:srgbClr val="05784C"/>
-          </a:solidFill>
-          <a:ln>
-            <a:noFill/>
-          </a:ln>
-        </p:spPr>
-        <p:style>
-          <a:lnRef idx="1">
-            <a:schemeClr val="accent1"/>
-          </a:lnRef>
-          <a:fillRef idx="3">
-            <a:schemeClr val="accent1"/>
-          </a:fillRef>
-          <a:effectRef idx="2">
-            <a:schemeClr val="accent1"/>
-          </a:effectRef>
-          <a:fontRef idx="minor">
-            <a:schemeClr val="lt1"/>
-          </a:fontRef>
-        </p:style>
-        <p:txBody>
-          <a:bodyPr rtlCol="0" anchor="ctr"/>
-          <a:lstStyle/>
-          <a:p>
-            <a:pPr algn="ctr"/>
-          </a:p>
-        </p:txBody>
-      </p:sp>
-      <p:sp>
-        <p:nvSpPr>
-          <p:cNvPr id="61" name="TextBox 60"/>
-          <p:cNvSpPr txBox="1"/>
-          <p:nvPr/>
-        </p:nvSpPr>
-        <p:spPr>
-          <a:xfrm>
-            <a:off x="7498079" y="2217420"/>
-            <a:ext cx="1097280" cy="411480"/>
-          </a:xfrm>
-          <a:prstGeom prst="rect">
-            <a:avLst/>
-          </a:prstGeom>
-          <a:noFill/>
-        </p:spPr>
-        <p:txBody>
-          <a:bodyPr wrap="square">
-            <a:spAutoFit/>
-          </a:bodyPr>
-          <a:lstStyle/>
-          <a:p>
-            <a:pPr algn="ctr">
-              <a:defRPr sz="1100" b="1">
-                <a:solidFill>
-                  <a:srgbClr val="FFFFFF"/>
-                </a:solidFill>
-                <a:latin typeface="Calibri"/>
-              </a:defRPr>
-            </a:pPr>
-            <a:r>
-              <a:t>45</a:t>
-            </a:r>
-          </a:p>
-        </p:txBody>
-      </p:sp>
-      <p:sp>
-        <p:nvSpPr>
-          <p:cNvPr id="62" name="Rectangle 61"/>
-          <p:cNvSpPr/>
-          <p:nvPr/>
-        </p:nvSpPr>
-        <p:spPr>
-          <a:xfrm>
-            <a:off x="8631935" y="2139696"/>
+            <a:off x="8631935" y="3648456"/>
             <a:ext cx="1024127" cy="393192"/>
           </a:xfrm>
           <a:prstGeom prst="rect">
@@ -22580,13 +24541,13 @@
       </p:sp>
       <p:sp>
         <p:nvSpPr>
-          <p:cNvPr id="63" name="TextBox 62"/>
-          <p:cNvSpPr txBox="1"/>
-          <p:nvPr/>
-        </p:nvSpPr>
-        <p:spPr>
-          <a:xfrm>
-            <a:off x="8595359" y="2217420"/>
+          <p:cNvPr id="113" name="TextBox 112"/>
+          <p:cNvSpPr txBox="1"/>
+          <p:nvPr/>
+        </p:nvSpPr>
+        <p:spPr>
+          <a:xfrm>
+            <a:off x="8595359" y="3726180"/>
             <a:ext cx="1097280" cy="411480"/>
           </a:xfrm>
           <a:prstGeom prst="rect">
@@ -22616,13 +24577,13 @@
       </p:sp>
       <p:sp>
         <p:nvSpPr>
-          <p:cNvPr id="64" name="TextBox 63"/>
-          <p:cNvSpPr txBox="1"/>
-          <p:nvPr/>
-        </p:nvSpPr>
-        <p:spPr>
-          <a:xfrm>
-            <a:off x="9692640" y="2217420"/>
+          <p:cNvPr id="114" name="TextBox 113"/>
+          <p:cNvSpPr txBox="1"/>
+          <p:nvPr/>
+        </p:nvSpPr>
+        <p:spPr>
+          <a:xfrm>
+            <a:off x="9692640" y="3726180"/>
             <a:ext cx="822960" cy="429768"/>
           </a:xfrm>
           <a:prstGeom prst="rect">
@@ -22639,27 +24600,646 @@
             <a:pPr algn="ctr">
               <a:defRPr sz="1100" b="1">
                 <a:solidFill>
-                  <a:srgbClr val="D97706"/>
-                </a:solidFill>
-                <a:latin typeface="Calibri"/>
-              </a:defRPr>
-            </a:pPr>
-            <a:r>
-              <a:t>86%</a:t>
-            </a:r>
-          </a:p>
-        </p:txBody>
-      </p:sp>
-      <p:sp>
-        <p:nvSpPr>
-          <p:cNvPr id="65" name="Rectangle 64"/>
+                  <a:srgbClr val="DC2626"/>
+                </a:solidFill>
+                <a:latin typeface="Calibri"/>
+              </a:defRPr>
+            </a:pPr>
+            <a:r>
+              <a:t>34%</a:t>
+            </a:r>
+          </a:p>
+        </p:txBody>
+      </p:sp>
+      <p:sp>
+        <p:nvSpPr>
+          <p:cNvPr id="115" name="Rectangle 114"/>
           <p:cNvSpPr/>
           <p:nvPr/>
         </p:nvSpPr>
         <p:spPr>
           <a:xfrm>
-            <a:off x="182880" y="2587752"/>
-            <a:ext cx="10332720" cy="502920"/>
+            <a:off x="0" y="4279392"/>
+            <a:ext cx="12191695" cy="9144"/>
+          </a:xfrm>
+          <a:prstGeom prst="rect">
+            <a:avLst/>
+          </a:prstGeom>
+          <a:solidFill>
+            <a:srgbClr val="E5E7EB"/>
+          </a:solidFill>
+          <a:ln>
+            <a:noFill/>
+          </a:ln>
+        </p:spPr>
+        <p:style>
+          <a:lnRef idx="1">
+            <a:schemeClr val="accent1"/>
+          </a:lnRef>
+          <a:fillRef idx="3">
+            <a:schemeClr val="accent1"/>
+          </a:fillRef>
+          <a:effectRef idx="2">
+            <a:schemeClr val="accent1"/>
+          </a:effectRef>
+          <a:fontRef idx="minor">
+            <a:schemeClr val="lt1"/>
+          </a:fontRef>
+        </p:style>
+        <p:txBody>
+          <a:bodyPr rtlCol="0" anchor="ctr"/>
+          <a:lstStyle/>
+          <a:p>
+            <a:pPr algn="ctr"/>
+          </a:p>
+        </p:txBody>
+      </p:sp>
+      <p:sp>
+        <p:nvSpPr>
+          <p:cNvPr id="116" name="TextBox 115"/>
+          <p:cNvSpPr txBox="1"/>
+          <p:nvPr/>
+        </p:nvSpPr>
+        <p:spPr>
+          <a:xfrm>
+            <a:off x="182880" y="4352544"/>
+            <a:ext cx="1371600" cy="201168"/>
+          </a:xfrm>
+          <a:prstGeom prst="rect">
+            <a:avLst/>
+          </a:prstGeom>
+          <a:noFill/>
+        </p:spPr>
+        <p:txBody>
+          <a:bodyPr wrap="square">
+            <a:spAutoFit/>
+          </a:bodyPr>
+          <a:lstStyle/>
+          <a:p>
+            <a:pPr algn="l">
+              <a:defRPr sz="850" b="1">
+                <a:solidFill>
+                  <a:srgbClr val="6B7280"/>
+                </a:solidFill>
+                <a:latin typeface="Calibri"/>
+              </a:defRPr>
+            </a:pPr>
+            <a:r>
+              <a:t>Rep</a:t>
+            </a:r>
+          </a:p>
+        </p:txBody>
+      </p:sp>
+      <p:sp>
+        <p:nvSpPr>
+          <p:cNvPr id="117" name="TextBox 116"/>
+          <p:cNvSpPr txBox="1"/>
+          <p:nvPr/>
+        </p:nvSpPr>
+        <p:spPr>
+          <a:xfrm>
+            <a:off x="1554480" y="4352544"/>
+            <a:ext cx="594360" cy="201168"/>
+          </a:xfrm>
+          <a:prstGeom prst="rect">
+            <a:avLst/>
+          </a:prstGeom>
+          <a:noFill/>
+        </p:spPr>
+        <p:txBody>
+          <a:bodyPr wrap="square">
+            <a:spAutoFit/>
+          </a:bodyPr>
+          <a:lstStyle/>
+          <a:p>
+            <a:pPr algn="ctr">
+              <a:defRPr sz="850" b="1">
+                <a:solidFill>
+                  <a:srgbClr val="6B7280"/>
+                </a:solidFill>
+                <a:latin typeface="Calibri"/>
+              </a:defRPr>
+            </a:pPr>
+            <a:r>
+              <a:t>Role</a:t>
+            </a:r>
+          </a:p>
+        </p:txBody>
+      </p:sp>
+      <p:sp>
+        <p:nvSpPr>
+          <p:cNvPr id="118" name="TextBox 117"/>
+          <p:cNvSpPr txBox="1"/>
+          <p:nvPr/>
+        </p:nvSpPr>
+        <p:spPr>
+          <a:xfrm>
+            <a:off x="2148840" y="4352544"/>
+            <a:ext cx="1188720" cy="201168"/>
+          </a:xfrm>
+          <a:prstGeom prst="rect">
+            <a:avLst/>
+          </a:prstGeom>
+          <a:noFill/>
+        </p:spPr>
+        <p:txBody>
+          <a:bodyPr wrap="square">
+            <a:spAutoFit/>
+          </a:bodyPr>
+          <a:lstStyle/>
+          <a:p>
+            <a:pPr algn="ctr">
+              <a:defRPr sz="850" b="1">
+                <a:solidFill>
+                  <a:srgbClr val="6B7280"/>
+                </a:solidFill>
+                <a:latin typeface="Calibri"/>
+              </a:defRPr>
+            </a:pPr>
+            <a:r>
+              <a:t>Calls</a:t>
+            </a:r>
+          </a:p>
+        </p:txBody>
+      </p:sp>
+      <p:sp>
+        <p:nvSpPr>
+          <p:cNvPr id="119" name="TextBox 118"/>
+          <p:cNvSpPr txBox="1"/>
+          <p:nvPr/>
+        </p:nvSpPr>
+        <p:spPr>
+          <a:xfrm>
+            <a:off x="3337560" y="4352544"/>
+            <a:ext cx="914400" cy="201168"/>
+          </a:xfrm>
+          <a:prstGeom prst="rect">
+            <a:avLst/>
+          </a:prstGeom>
+          <a:noFill/>
+        </p:spPr>
+        <p:txBody>
+          <a:bodyPr wrap="square">
+            <a:spAutoFit/>
+          </a:bodyPr>
+          <a:lstStyle/>
+          <a:p>
+            <a:pPr algn="ctr">
+              <a:defRPr sz="850" b="1">
+                <a:solidFill>
+                  <a:srgbClr val="6B7280"/>
+                </a:solidFill>
+                <a:latin typeface="Calibri"/>
+              </a:defRPr>
+            </a:pPr>
+            <a:r>
+              <a:t>Meetings</a:t>
+            </a:r>
+          </a:p>
+        </p:txBody>
+      </p:sp>
+      <p:sp>
+        <p:nvSpPr>
+          <p:cNvPr id="120" name="TextBox 119"/>
+          <p:cNvSpPr txBox="1"/>
+          <p:nvPr/>
+        </p:nvSpPr>
+        <p:spPr>
+          <a:xfrm>
+            <a:off x="4251960" y="4352544"/>
+            <a:ext cx="777240" cy="201168"/>
+          </a:xfrm>
+          <a:prstGeom prst="rect">
+            <a:avLst/>
+          </a:prstGeom>
+          <a:noFill/>
+        </p:spPr>
+        <p:txBody>
+          <a:bodyPr wrap="square">
+            <a:spAutoFit/>
+          </a:bodyPr>
+          <a:lstStyle/>
+          <a:p>
+            <a:pPr algn="ctr">
+              <a:defRPr sz="850" b="1">
+                <a:solidFill>
+                  <a:srgbClr val="6B7280"/>
+                </a:solidFill>
+                <a:latin typeface="Calibri"/>
+              </a:defRPr>
+            </a:pPr>
+            <a:r>
+              <a:t>Inbound</a:t>
+            </a:r>
+          </a:p>
+        </p:txBody>
+      </p:sp>
+      <p:sp>
+        <p:nvSpPr>
+          <p:cNvPr id="121" name="TextBox 120"/>
+          <p:cNvSpPr txBox="1"/>
+          <p:nvPr/>
+        </p:nvSpPr>
+        <p:spPr>
+          <a:xfrm>
+            <a:off x="5029200" y="4352544"/>
+            <a:ext cx="777240" cy="201168"/>
+          </a:xfrm>
+          <a:prstGeom prst="rect">
+            <a:avLst/>
+          </a:prstGeom>
+          <a:noFill/>
+        </p:spPr>
+        <p:txBody>
+          <a:bodyPr wrap="square">
+            <a:spAutoFit/>
+          </a:bodyPr>
+          <a:lstStyle/>
+          <a:p>
+            <a:pPr algn="ctr">
+              <a:defRPr sz="850" b="1">
+                <a:solidFill>
+                  <a:srgbClr val="6B7280"/>
+                </a:solidFill>
+                <a:latin typeface="Calibri"/>
+              </a:defRPr>
+            </a:pPr>
+            <a:r>
+              <a:t>Total</a:t>
+            </a:r>
+          </a:p>
+        </p:txBody>
+      </p:sp>
+      <p:sp>
+        <p:nvSpPr>
+          <p:cNvPr id="122" name="TextBox 121"/>
+          <p:cNvSpPr txBox="1"/>
+          <p:nvPr/>
+        </p:nvSpPr>
+        <p:spPr>
+          <a:xfrm>
+            <a:off x="5806440" y="4352544"/>
+            <a:ext cx="777240" cy="201168"/>
+          </a:xfrm>
+          <a:prstGeom prst="rect">
+            <a:avLst/>
+          </a:prstGeom>
+          <a:noFill/>
+        </p:spPr>
+        <p:txBody>
+          <a:bodyPr wrap="square">
+            <a:spAutoFit/>
+          </a:bodyPr>
+          <a:lstStyle/>
+          <a:p>
+            <a:pPr algn="ctr">
+              <a:defRPr sz="850" b="1">
+                <a:solidFill>
+                  <a:srgbClr val="6B7280"/>
+                </a:solidFill>
+                <a:latin typeface="Calibri"/>
+              </a:defRPr>
+            </a:pPr>
+            <a:r>
+              <a:t>Avg/Wk</a:t>
+            </a:r>
+          </a:p>
+        </p:txBody>
+      </p:sp>
+      <p:sp>
+        <p:nvSpPr>
+          <p:cNvPr id="123" name="TextBox 122"/>
+          <p:cNvSpPr txBox="1"/>
+          <p:nvPr/>
+        </p:nvSpPr>
+        <p:spPr>
+          <a:xfrm>
+            <a:off x="6583679" y="4352544"/>
+            <a:ext cx="914400" cy="201168"/>
+          </a:xfrm>
+          <a:prstGeom prst="rect">
+            <a:avLst/>
+          </a:prstGeom>
+          <a:noFill/>
+        </p:spPr>
+        <p:txBody>
+          <a:bodyPr wrap="square">
+            <a:spAutoFit/>
+          </a:bodyPr>
+          <a:lstStyle/>
+          <a:p>
+            <a:pPr algn="ctr">
+              <a:defRPr sz="850" b="1">
+                <a:solidFill>
+                  <a:srgbClr val="6B7280"/>
+                </a:solidFill>
+                <a:latin typeface="Calibri"/>
+              </a:defRPr>
+            </a:pPr>
+            <a:r>
+              <a:t>% to Goal</a:t>
+            </a:r>
+          </a:p>
+        </p:txBody>
+      </p:sp>
+      <p:sp>
+        <p:nvSpPr>
+          <p:cNvPr id="124" name="TextBox 123"/>
+          <p:cNvSpPr txBox="1"/>
+          <p:nvPr/>
+        </p:nvSpPr>
+        <p:spPr>
+          <a:xfrm>
+            <a:off x="182880" y="4553712"/>
+            <a:ext cx="1371600" cy="201168"/>
+          </a:xfrm>
+          <a:prstGeom prst="rect">
+            <a:avLst/>
+          </a:prstGeom>
+          <a:noFill/>
+        </p:spPr>
+        <p:txBody>
+          <a:bodyPr wrap="square">
+            <a:spAutoFit/>
+          </a:bodyPr>
+          <a:lstStyle/>
+          <a:p>
+            <a:pPr algn="l">
+              <a:defRPr sz="900" b="1">
+                <a:solidFill>
+                  <a:srgbClr val="111827"/>
+                </a:solidFill>
+                <a:latin typeface="Calibri"/>
+              </a:defRPr>
+            </a:pPr>
+            <a:r>
+              <a:t>Derek Janssen</a:t>
+            </a:r>
+          </a:p>
+        </p:txBody>
+      </p:sp>
+      <p:sp>
+        <p:nvSpPr>
+          <p:cNvPr id="125" name="TextBox 124"/>
+          <p:cNvSpPr txBox="1"/>
+          <p:nvPr/>
+        </p:nvSpPr>
+        <p:spPr>
+          <a:xfrm>
+            <a:off x="1554480" y="4553712"/>
+            <a:ext cx="594360" cy="201168"/>
+          </a:xfrm>
+          <a:prstGeom prst="rect">
+            <a:avLst/>
+          </a:prstGeom>
+          <a:noFill/>
+        </p:spPr>
+        <p:txBody>
+          <a:bodyPr wrap="square">
+            <a:spAutoFit/>
+          </a:bodyPr>
+          <a:lstStyle/>
+          <a:p>
+            <a:pPr algn="ctr">
+              <a:defRPr sz="900" b="0">
+                <a:solidFill>
+                  <a:srgbClr val="6B7280"/>
+                </a:solidFill>
+                <a:latin typeface="Calibri"/>
+              </a:defRPr>
+            </a:pPr>
+            <a:r>
+              <a:t>BDM</a:t>
+            </a:r>
+          </a:p>
+        </p:txBody>
+      </p:sp>
+      <p:sp>
+        <p:nvSpPr>
+          <p:cNvPr id="126" name="TextBox 125"/>
+          <p:cNvSpPr txBox="1"/>
+          <p:nvPr/>
+        </p:nvSpPr>
+        <p:spPr>
+          <a:xfrm>
+            <a:off x="2148840" y="4553712"/>
+            <a:ext cx="1188720" cy="201168"/>
+          </a:xfrm>
+          <a:prstGeom prst="rect">
+            <a:avLst/>
+          </a:prstGeom>
+          <a:noFill/>
+        </p:spPr>
+        <p:txBody>
+          <a:bodyPr wrap="square">
+            <a:spAutoFit/>
+          </a:bodyPr>
+          <a:lstStyle/>
+          <a:p>
+            <a:pPr algn="ctr">
+              <a:defRPr sz="900" b="0">
+                <a:solidFill>
+                  <a:srgbClr val="111827"/>
+                </a:solidFill>
+                <a:latin typeface="Calibri"/>
+              </a:defRPr>
+            </a:pPr>
+            <a:r>
+              <a:t>391</a:t>
+            </a:r>
+          </a:p>
+        </p:txBody>
+      </p:sp>
+      <p:sp>
+        <p:nvSpPr>
+          <p:cNvPr id="127" name="TextBox 126"/>
+          <p:cNvSpPr txBox="1"/>
+          <p:nvPr/>
+        </p:nvSpPr>
+        <p:spPr>
+          <a:xfrm>
+            <a:off x="3337560" y="4553712"/>
+            <a:ext cx="914400" cy="201168"/>
+          </a:xfrm>
+          <a:prstGeom prst="rect">
+            <a:avLst/>
+          </a:prstGeom>
+          <a:noFill/>
+        </p:spPr>
+        <p:txBody>
+          <a:bodyPr wrap="square">
+            <a:spAutoFit/>
+          </a:bodyPr>
+          <a:lstStyle/>
+          <a:p>
+            <a:pPr algn="ctr">
+              <a:defRPr sz="900" b="0">
+                <a:solidFill>
+                  <a:srgbClr val="111827"/>
+                </a:solidFill>
+                <a:latin typeface="Calibri"/>
+              </a:defRPr>
+            </a:pPr>
+            <a:r>
+              <a:t>47</a:t>
+            </a:r>
+          </a:p>
+        </p:txBody>
+      </p:sp>
+      <p:sp>
+        <p:nvSpPr>
+          <p:cNvPr id="128" name="TextBox 127"/>
+          <p:cNvSpPr txBox="1"/>
+          <p:nvPr/>
+        </p:nvSpPr>
+        <p:spPr>
+          <a:xfrm>
+            <a:off x="4251960" y="4553712"/>
+            <a:ext cx="777240" cy="201168"/>
+          </a:xfrm>
+          <a:prstGeom prst="rect">
+            <a:avLst/>
+          </a:prstGeom>
+          <a:noFill/>
+        </p:spPr>
+        <p:txBody>
+          <a:bodyPr wrap="square">
+            <a:spAutoFit/>
+          </a:bodyPr>
+          <a:lstStyle/>
+          <a:p>
+            <a:pPr algn="ctr">
+              <a:defRPr sz="900" b="0">
+                <a:solidFill>
+                  <a:srgbClr val="6B7280"/>
+                </a:solidFill>
+                <a:latin typeface="Calibri"/>
+              </a:defRPr>
+            </a:pPr>
+            <a:r>
+              <a:t>75</a:t>
+            </a:r>
+          </a:p>
+        </p:txBody>
+      </p:sp>
+      <p:sp>
+        <p:nvSpPr>
+          <p:cNvPr id="129" name="TextBox 128"/>
+          <p:cNvSpPr txBox="1"/>
+          <p:nvPr/>
+        </p:nvSpPr>
+        <p:spPr>
+          <a:xfrm>
+            <a:off x="5029200" y="4553712"/>
+            <a:ext cx="777240" cy="201168"/>
+          </a:xfrm>
+          <a:prstGeom prst="rect">
+            <a:avLst/>
+          </a:prstGeom>
+          <a:noFill/>
+        </p:spPr>
+        <p:txBody>
+          <a:bodyPr wrap="square">
+            <a:spAutoFit/>
+          </a:bodyPr>
+          <a:lstStyle/>
+          <a:p>
+            <a:pPr algn="ctr">
+              <a:defRPr sz="900" b="0">
+                <a:solidFill>
+                  <a:srgbClr val="111827"/>
+                </a:solidFill>
+                <a:latin typeface="Calibri"/>
+              </a:defRPr>
+            </a:pPr>
+            <a:r>
+              <a:t>438</a:t>
+            </a:r>
+          </a:p>
+        </p:txBody>
+      </p:sp>
+      <p:sp>
+        <p:nvSpPr>
+          <p:cNvPr id="130" name="TextBox 129"/>
+          <p:cNvSpPr txBox="1"/>
+          <p:nvPr/>
+        </p:nvSpPr>
+        <p:spPr>
+          <a:xfrm>
+            <a:off x="5806440" y="4553712"/>
+            <a:ext cx="777240" cy="201168"/>
+          </a:xfrm>
+          <a:prstGeom prst="rect">
+            <a:avLst/>
+          </a:prstGeom>
+          <a:noFill/>
+        </p:spPr>
+        <p:txBody>
+          <a:bodyPr wrap="square">
+            <a:spAutoFit/>
+          </a:bodyPr>
+          <a:lstStyle/>
+          <a:p>
+            <a:pPr algn="ctr">
+              <a:defRPr sz="900" b="0">
+                <a:solidFill>
+                  <a:srgbClr val="111827"/>
+                </a:solidFill>
+                <a:latin typeface="Calibri"/>
+              </a:defRPr>
+            </a:pPr>
+            <a:r>
+              <a:t>62.2</a:t>
+            </a:r>
+          </a:p>
+        </p:txBody>
+      </p:sp>
+      <p:sp>
+        <p:nvSpPr>
+          <p:cNvPr id="131" name="TextBox 130"/>
+          <p:cNvSpPr txBox="1"/>
+          <p:nvPr/>
+        </p:nvSpPr>
+        <p:spPr>
+          <a:xfrm>
+            <a:off x="6583679" y="4553712"/>
+            <a:ext cx="914400" cy="201168"/>
+          </a:xfrm>
+          <a:prstGeom prst="rect">
+            <a:avLst/>
+          </a:prstGeom>
+          <a:noFill/>
+        </p:spPr>
+        <p:txBody>
+          <a:bodyPr wrap="square">
+            <a:spAutoFit/>
+          </a:bodyPr>
+          <a:lstStyle/>
+          <a:p>
+            <a:pPr algn="ctr">
+              <a:defRPr sz="900" b="0">
+                <a:solidFill>
+                  <a:srgbClr val="059669"/>
+                </a:solidFill>
+                <a:latin typeface="Calibri"/>
+              </a:defRPr>
+            </a:pPr>
+            <a:r>
+              <a:t>155%</a:t>
+            </a:r>
+          </a:p>
+        </p:txBody>
+      </p:sp>
+      <p:sp>
+        <p:nvSpPr>
+          <p:cNvPr id="132" name="Rectangle 131"/>
+          <p:cNvSpPr/>
+          <p:nvPr/>
+        </p:nvSpPr>
+        <p:spPr>
+          <a:xfrm>
+            <a:off x="182880" y="4791456"/>
+            <a:ext cx="7315200" cy="228600"/>
           </a:xfrm>
           <a:prstGeom prst="rect">
             <a:avLst/>
@@ -22695,14 +25275,14 @@
       </p:sp>
       <p:sp>
         <p:nvSpPr>
-          <p:cNvPr id="66" name="TextBox 65"/>
-          <p:cNvSpPr txBox="1"/>
-          <p:nvPr/>
-        </p:nvSpPr>
-        <p:spPr>
-          <a:xfrm>
-            <a:off x="256032" y="2720340"/>
-            <a:ext cx="1828800" cy="429768"/>
+          <p:cNvPr id="133" name="TextBox 132"/>
+          <p:cNvSpPr txBox="1"/>
+          <p:nvPr/>
+        </p:nvSpPr>
+        <p:spPr>
+          <a:xfrm>
+            <a:off x="182880" y="4809744"/>
+            <a:ext cx="1371600" cy="201168"/>
           </a:xfrm>
           <a:prstGeom prst="rect">
             <a:avLst/>
@@ -22724,610 +25304,273 @@
               </a:defRPr>
             </a:pPr>
             <a:r>
-              <a:t>Derrick Leroy</a:t>
-            </a:r>
-          </a:p>
-        </p:txBody>
-      </p:sp>
-      <p:sp>
-        <p:nvSpPr>
-          <p:cNvPr id="67" name="Rectangle 66"/>
-          <p:cNvSpPr/>
-          <p:nvPr/>
-        </p:nvSpPr>
-        <p:spPr>
-          <a:xfrm>
-            <a:off x="2048256" y="2642616"/>
-            <a:ext cx="1024127" cy="393192"/>
-          </a:xfrm>
-          <a:prstGeom prst="rect">
-            <a:avLst/>
-          </a:prstGeom>
-          <a:solidFill>
-            <a:srgbClr val="05784C"/>
-          </a:solidFill>
-          <a:ln>
-            <a:noFill/>
-          </a:ln>
-        </p:spPr>
-        <p:style>
-          <a:lnRef idx="1">
-            <a:schemeClr val="accent1"/>
-          </a:lnRef>
-          <a:fillRef idx="3">
-            <a:schemeClr val="accent1"/>
-          </a:fillRef>
-          <a:effectRef idx="2">
-            <a:schemeClr val="accent1"/>
-          </a:effectRef>
-          <a:fontRef idx="minor">
-            <a:schemeClr val="lt1"/>
-          </a:fontRef>
-        </p:style>
-        <p:txBody>
-          <a:bodyPr rtlCol="0" anchor="ctr"/>
-          <a:lstStyle/>
-          <a:p>
-            <a:pPr algn="ctr"/>
-          </a:p>
-        </p:txBody>
-      </p:sp>
-      <p:sp>
-        <p:nvSpPr>
-          <p:cNvPr id="68" name="TextBox 67"/>
-          <p:cNvSpPr txBox="1"/>
-          <p:nvPr/>
-        </p:nvSpPr>
-        <p:spPr>
-          <a:xfrm>
-            <a:off x="2011680" y="2720340"/>
-            <a:ext cx="1097280" cy="411480"/>
-          </a:xfrm>
-          <a:prstGeom prst="rect">
-            <a:avLst/>
-          </a:prstGeom>
-          <a:noFill/>
-        </p:spPr>
-        <p:txBody>
-          <a:bodyPr wrap="square">
-            <a:spAutoFit/>
-          </a:bodyPr>
-          <a:lstStyle/>
-          <a:p>
-            <a:pPr algn="ctr">
-              <a:defRPr sz="1100" b="1">
-                <a:solidFill>
-                  <a:srgbClr val="FFFFFF"/>
-                </a:solidFill>
-                <a:latin typeface="Calibri"/>
-              </a:defRPr>
-            </a:pPr>
-            <a:r>
-              <a:t>50</a:t>
-            </a:r>
-          </a:p>
-        </p:txBody>
-      </p:sp>
-      <p:sp>
-        <p:nvSpPr>
-          <p:cNvPr id="69" name="Rectangle 68"/>
-          <p:cNvSpPr/>
-          <p:nvPr/>
-        </p:nvSpPr>
-        <p:spPr>
-          <a:xfrm>
-            <a:off x="3145536" y="2642616"/>
-            <a:ext cx="1024127" cy="393192"/>
-          </a:xfrm>
-          <a:prstGeom prst="rect">
-            <a:avLst/>
-          </a:prstGeom>
-          <a:solidFill>
-            <a:srgbClr val="05784C"/>
-          </a:solidFill>
-          <a:ln>
-            <a:noFill/>
-          </a:ln>
-        </p:spPr>
-        <p:style>
-          <a:lnRef idx="1">
-            <a:schemeClr val="accent1"/>
-          </a:lnRef>
-          <a:fillRef idx="3">
-            <a:schemeClr val="accent1"/>
-          </a:fillRef>
-          <a:effectRef idx="2">
-            <a:schemeClr val="accent1"/>
-          </a:effectRef>
-          <a:fontRef idx="minor">
-            <a:schemeClr val="lt1"/>
-          </a:fontRef>
-        </p:style>
-        <p:txBody>
-          <a:bodyPr rtlCol="0" anchor="ctr"/>
-          <a:lstStyle/>
-          <a:p>
-            <a:pPr algn="ctr"/>
-          </a:p>
-        </p:txBody>
-      </p:sp>
-      <p:sp>
-        <p:nvSpPr>
-          <p:cNvPr id="70" name="TextBox 69"/>
-          <p:cNvSpPr txBox="1"/>
-          <p:nvPr/>
-        </p:nvSpPr>
-        <p:spPr>
-          <a:xfrm>
-            <a:off x="3108960" y="2720340"/>
-            <a:ext cx="1097280" cy="411480"/>
-          </a:xfrm>
-          <a:prstGeom prst="rect">
-            <a:avLst/>
-          </a:prstGeom>
-          <a:noFill/>
-        </p:spPr>
-        <p:txBody>
-          <a:bodyPr wrap="square">
-            <a:spAutoFit/>
-          </a:bodyPr>
-          <a:lstStyle/>
-          <a:p>
-            <a:pPr algn="ctr">
-              <a:defRPr sz="1100" b="1">
-                <a:solidFill>
-                  <a:srgbClr val="FFFFFF"/>
-                </a:solidFill>
-                <a:latin typeface="Calibri"/>
-              </a:defRPr>
-            </a:pPr>
-            <a:r>
-              <a:t>48</a:t>
-            </a:r>
-          </a:p>
-        </p:txBody>
-      </p:sp>
-      <p:sp>
-        <p:nvSpPr>
-          <p:cNvPr id="71" name="Rectangle 70"/>
-          <p:cNvSpPr/>
-          <p:nvPr/>
-        </p:nvSpPr>
-        <p:spPr>
-          <a:xfrm>
-            <a:off x="4242816" y="2642616"/>
-            <a:ext cx="1024127" cy="393192"/>
-          </a:xfrm>
-          <a:prstGeom prst="rect">
-            <a:avLst/>
-          </a:prstGeom>
-          <a:solidFill>
-            <a:srgbClr val="05784C"/>
-          </a:solidFill>
-          <a:ln>
-            <a:noFill/>
-          </a:ln>
-        </p:spPr>
-        <p:style>
-          <a:lnRef idx="1">
-            <a:schemeClr val="accent1"/>
-          </a:lnRef>
-          <a:fillRef idx="3">
-            <a:schemeClr val="accent1"/>
-          </a:fillRef>
-          <a:effectRef idx="2">
-            <a:schemeClr val="accent1"/>
-          </a:effectRef>
-          <a:fontRef idx="minor">
-            <a:schemeClr val="lt1"/>
-          </a:fontRef>
-        </p:style>
-        <p:txBody>
-          <a:bodyPr rtlCol="0" anchor="ctr"/>
-          <a:lstStyle/>
-          <a:p>
-            <a:pPr algn="ctr"/>
-          </a:p>
-        </p:txBody>
-      </p:sp>
-      <p:sp>
-        <p:nvSpPr>
-          <p:cNvPr id="72" name="TextBox 71"/>
-          <p:cNvSpPr txBox="1"/>
-          <p:nvPr/>
-        </p:nvSpPr>
-        <p:spPr>
-          <a:xfrm>
-            <a:off x="4206240" y="2720340"/>
-            <a:ext cx="1097280" cy="411480"/>
-          </a:xfrm>
-          <a:prstGeom prst="rect">
-            <a:avLst/>
-          </a:prstGeom>
-          <a:noFill/>
-        </p:spPr>
-        <p:txBody>
-          <a:bodyPr wrap="square">
-            <a:spAutoFit/>
-          </a:bodyPr>
-          <a:lstStyle/>
-          <a:p>
-            <a:pPr algn="ctr">
-              <a:defRPr sz="1100" b="1">
-                <a:solidFill>
-                  <a:srgbClr val="FFFFFF"/>
-                </a:solidFill>
-                <a:latin typeface="Calibri"/>
-              </a:defRPr>
-            </a:pPr>
-            <a:r>
-              <a:t>65</a:t>
-            </a:r>
-          </a:p>
-        </p:txBody>
-      </p:sp>
-      <p:sp>
-        <p:nvSpPr>
-          <p:cNvPr id="73" name="Rectangle 72"/>
-          <p:cNvSpPr/>
-          <p:nvPr/>
-        </p:nvSpPr>
-        <p:spPr>
-          <a:xfrm>
-            <a:off x="5340096" y="2642616"/>
-            <a:ext cx="1024127" cy="393192"/>
-          </a:xfrm>
-          <a:prstGeom prst="rect">
-            <a:avLst/>
-          </a:prstGeom>
-          <a:solidFill>
-            <a:srgbClr val="05784C"/>
-          </a:solidFill>
-          <a:ln>
-            <a:noFill/>
-          </a:ln>
-        </p:spPr>
-        <p:style>
-          <a:lnRef idx="1">
-            <a:schemeClr val="accent1"/>
-          </a:lnRef>
-          <a:fillRef idx="3">
-            <a:schemeClr val="accent1"/>
-          </a:fillRef>
-          <a:effectRef idx="2">
-            <a:schemeClr val="accent1"/>
-          </a:effectRef>
-          <a:fontRef idx="minor">
-            <a:schemeClr val="lt1"/>
-          </a:fontRef>
-        </p:style>
-        <p:txBody>
-          <a:bodyPr rtlCol="0" anchor="ctr"/>
-          <a:lstStyle/>
-          <a:p>
-            <a:pPr algn="ctr"/>
-          </a:p>
-        </p:txBody>
-      </p:sp>
-      <p:sp>
-        <p:nvSpPr>
-          <p:cNvPr id="74" name="TextBox 73"/>
-          <p:cNvSpPr txBox="1"/>
-          <p:nvPr/>
-        </p:nvSpPr>
-        <p:spPr>
-          <a:xfrm>
-            <a:off x="5303520" y="2720340"/>
-            <a:ext cx="1097280" cy="411480"/>
-          </a:xfrm>
-          <a:prstGeom prst="rect">
-            <a:avLst/>
-          </a:prstGeom>
-          <a:noFill/>
-        </p:spPr>
-        <p:txBody>
-          <a:bodyPr wrap="square">
-            <a:spAutoFit/>
-          </a:bodyPr>
-          <a:lstStyle/>
-          <a:p>
-            <a:pPr algn="ctr">
-              <a:defRPr sz="1100" b="1">
-                <a:solidFill>
-                  <a:srgbClr val="FFFFFF"/>
-                </a:solidFill>
-                <a:latin typeface="Calibri"/>
-              </a:defRPr>
-            </a:pPr>
-            <a:r>
-              <a:t>51</a:t>
-            </a:r>
-          </a:p>
-        </p:txBody>
-      </p:sp>
-      <p:sp>
-        <p:nvSpPr>
-          <p:cNvPr id="75" name="Rectangle 74"/>
-          <p:cNvSpPr/>
-          <p:nvPr/>
-        </p:nvSpPr>
-        <p:spPr>
-          <a:xfrm>
-            <a:off x="6437376" y="2642616"/>
-            <a:ext cx="1024127" cy="393192"/>
-          </a:xfrm>
-          <a:prstGeom prst="rect">
-            <a:avLst/>
-          </a:prstGeom>
-          <a:solidFill>
-            <a:srgbClr val="05784C"/>
-          </a:solidFill>
-          <a:ln>
-            <a:noFill/>
-          </a:ln>
-        </p:spPr>
-        <p:style>
-          <a:lnRef idx="1">
-            <a:schemeClr val="accent1"/>
-          </a:lnRef>
-          <a:fillRef idx="3">
-            <a:schemeClr val="accent1"/>
-          </a:fillRef>
-          <a:effectRef idx="2">
-            <a:schemeClr val="accent1"/>
-          </a:effectRef>
-          <a:fontRef idx="minor">
-            <a:schemeClr val="lt1"/>
-          </a:fontRef>
-        </p:style>
-        <p:txBody>
-          <a:bodyPr rtlCol="0" anchor="ctr"/>
-          <a:lstStyle/>
-          <a:p>
-            <a:pPr algn="ctr"/>
-          </a:p>
-        </p:txBody>
-      </p:sp>
-      <p:sp>
-        <p:nvSpPr>
-          <p:cNvPr id="76" name="TextBox 75"/>
-          <p:cNvSpPr txBox="1"/>
-          <p:nvPr/>
-        </p:nvSpPr>
-        <p:spPr>
-          <a:xfrm>
-            <a:off x="6400800" y="2720340"/>
-            <a:ext cx="1097280" cy="411480"/>
-          </a:xfrm>
-          <a:prstGeom prst="rect">
-            <a:avLst/>
-          </a:prstGeom>
-          <a:noFill/>
-        </p:spPr>
-        <p:txBody>
-          <a:bodyPr wrap="square">
-            <a:spAutoFit/>
-          </a:bodyPr>
-          <a:lstStyle/>
-          <a:p>
-            <a:pPr algn="ctr">
-              <a:defRPr sz="1100" b="1">
-                <a:solidFill>
-                  <a:srgbClr val="FFFFFF"/>
-                </a:solidFill>
-                <a:latin typeface="Calibri"/>
-              </a:defRPr>
-            </a:pPr>
-            <a:r>
-              <a:t>54</a:t>
-            </a:r>
-          </a:p>
-        </p:txBody>
-      </p:sp>
-      <p:sp>
-        <p:nvSpPr>
-          <p:cNvPr id="77" name="Rectangle 76"/>
-          <p:cNvSpPr/>
-          <p:nvPr/>
-        </p:nvSpPr>
-        <p:spPr>
-          <a:xfrm>
-            <a:off x="7534655" y="2642616"/>
-            <a:ext cx="1024127" cy="393192"/>
-          </a:xfrm>
-          <a:prstGeom prst="rect">
-            <a:avLst/>
-          </a:prstGeom>
-          <a:solidFill>
-            <a:srgbClr val="05784C"/>
-          </a:solidFill>
-          <a:ln>
-            <a:noFill/>
-          </a:ln>
-        </p:spPr>
-        <p:style>
-          <a:lnRef idx="1">
-            <a:schemeClr val="accent1"/>
-          </a:lnRef>
-          <a:fillRef idx="3">
-            <a:schemeClr val="accent1"/>
-          </a:fillRef>
-          <a:effectRef idx="2">
-            <a:schemeClr val="accent1"/>
-          </a:effectRef>
-          <a:fontRef idx="minor">
-            <a:schemeClr val="lt1"/>
-          </a:fontRef>
-        </p:style>
-        <p:txBody>
-          <a:bodyPr rtlCol="0" anchor="ctr"/>
-          <a:lstStyle/>
-          <a:p>
-            <a:pPr algn="ctr"/>
-          </a:p>
-        </p:txBody>
-      </p:sp>
-      <p:sp>
-        <p:nvSpPr>
-          <p:cNvPr id="78" name="TextBox 77"/>
-          <p:cNvSpPr txBox="1"/>
-          <p:nvPr/>
-        </p:nvSpPr>
-        <p:spPr>
-          <a:xfrm>
-            <a:off x="7498079" y="2720340"/>
-            <a:ext cx="1097280" cy="411480"/>
-          </a:xfrm>
-          <a:prstGeom prst="rect">
-            <a:avLst/>
-          </a:prstGeom>
-          <a:noFill/>
-        </p:spPr>
-        <p:txBody>
-          <a:bodyPr wrap="square">
-            <a:spAutoFit/>
-          </a:bodyPr>
-          <a:lstStyle/>
-          <a:p>
-            <a:pPr algn="ctr">
-              <a:defRPr sz="1100" b="1">
-                <a:solidFill>
-                  <a:srgbClr val="FFFFFF"/>
-                </a:solidFill>
-                <a:latin typeface="Calibri"/>
-              </a:defRPr>
-            </a:pPr>
-            <a:r>
-              <a:t>60</a:t>
-            </a:r>
-          </a:p>
-        </p:txBody>
-      </p:sp>
-      <p:sp>
-        <p:nvSpPr>
-          <p:cNvPr id="79" name="Rectangle 78"/>
-          <p:cNvSpPr/>
-          <p:nvPr/>
-        </p:nvSpPr>
-        <p:spPr>
-          <a:xfrm>
-            <a:off x="8631935" y="2642616"/>
-            <a:ext cx="1024127" cy="393192"/>
-          </a:xfrm>
-          <a:prstGeom prst="rect">
-            <a:avLst/>
-          </a:prstGeom>
-          <a:solidFill>
-            <a:srgbClr val="DC2626"/>
-          </a:solidFill>
-          <a:ln>
-            <a:noFill/>
-          </a:ln>
-        </p:spPr>
-        <p:style>
-          <a:lnRef idx="1">
-            <a:schemeClr val="accent1"/>
-          </a:lnRef>
-          <a:fillRef idx="3">
-            <a:schemeClr val="accent1"/>
-          </a:fillRef>
-          <a:effectRef idx="2">
-            <a:schemeClr val="accent1"/>
-          </a:effectRef>
-          <a:fontRef idx="minor">
-            <a:schemeClr val="lt1"/>
-          </a:fontRef>
-        </p:style>
-        <p:txBody>
-          <a:bodyPr rtlCol="0" anchor="ctr"/>
-          <a:lstStyle/>
-          <a:p>
-            <a:pPr algn="ctr"/>
-          </a:p>
-        </p:txBody>
-      </p:sp>
-      <p:sp>
-        <p:nvSpPr>
-          <p:cNvPr id="80" name="TextBox 79"/>
-          <p:cNvSpPr txBox="1"/>
-          <p:nvPr/>
-        </p:nvSpPr>
-        <p:spPr>
-          <a:xfrm>
-            <a:off x="8595359" y="2720340"/>
-            <a:ext cx="1097280" cy="411480"/>
-          </a:xfrm>
-          <a:prstGeom prst="rect">
-            <a:avLst/>
-          </a:prstGeom>
-          <a:noFill/>
-        </p:spPr>
-        <p:txBody>
-          <a:bodyPr wrap="square">
-            <a:spAutoFit/>
-          </a:bodyPr>
-          <a:lstStyle/>
-          <a:p>
-            <a:pPr algn="ctr">
-              <a:defRPr sz="1100" b="1">
-                <a:solidFill>
-                  <a:srgbClr val="FFFFFF"/>
-                </a:solidFill>
-                <a:latin typeface="Calibri"/>
-              </a:defRPr>
-            </a:pPr>
-            <a:r>
-              <a:t>2</a:t>
-            </a:r>
-          </a:p>
-        </p:txBody>
-      </p:sp>
-      <p:sp>
-        <p:nvSpPr>
-          <p:cNvPr id="81" name="TextBox 80"/>
-          <p:cNvSpPr txBox="1"/>
-          <p:nvPr/>
-        </p:nvSpPr>
-        <p:spPr>
-          <a:xfrm>
-            <a:off x="9692640" y="2720340"/>
-            <a:ext cx="822960" cy="429768"/>
-          </a:xfrm>
-          <a:prstGeom prst="rect">
-            <a:avLst/>
-          </a:prstGeom>
-          <a:noFill/>
-        </p:spPr>
-        <p:txBody>
-          <a:bodyPr wrap="square">
-            <a:spAutoFit/>
-          </a:bodyPr>
-          <a:lstStyle/>
-          <a:p>
-            <a:pPr algn="ctr">
-              <a:defRPr sz="1100" b="1">
-                <a:solidFill>
-                  <a:srgbClr val="059669"/>
-                </a:solidFill>
-                <a:latin typeface="Calibri"/>
-              </a:defRPr>
-            </a:pPr>
-            <a:r>
-              <a:t>137%</a:t>
-            </a:r>
-          </a:p>
-        </p:txBody>
-      </p:sp>
-      <p:sp>
-        <p:nvSpPr>
-          <p:cNvPr id="82" name="TextBox 81"/>
-          <p:cNvSpPr txBox="1"/>
-          <p:nvPr/>
-        </p:nvSpPr>
-        <p:spPr>
-          <a:xfrm>
-            <a:off x="256032" y="3223260"/>
-            <a:ext cx="1828800" cy="429768"/>
+              <a:t>Ron Douglas</a:t>
+            </a:r>
+          </a:p>
+        </p:txBody>
+      </p:sp>
+      <p:sp>
+        <p:nvSpPr>
+          <p:cNvPr id="134" name="TextBox 133"/>
+          <p:cNvSpPr txBox="1"/>
+          <p:nvPr/>
+        </p:nvSpPr>
+        <p:spPr>
+          <a:xfrm>
+            <a:off x="1554480" y="4809744"/>
+            <a:ext cx="594360" cy="201168"/>
+          </a:xfrm>
+          <a:prstGeom prst="rect">
+            <a:avLst/>
+          </a:prstGeom>
+          <a:noFill/>
+        </p:spPr>
+        <p:txBody>
+          <a:bodyPr wrap="square">
+            <a:spAutoFit/>
+          </a:bodyPr>
+          <a:lstStyle/>
+          <a:p>
+            <a:pPr algn="ctr">
+              <a:defRPr sz="900" b="0">
+                <a:solidFill>
+                  <a:srgbClr val="6B7280"/>
+                </a:solidFill>
+                <a:latin typeface="Calibri"/>
+              </a:defRPr>
+            </a:pPr>
+            <a:r>
+              <a:t>BDM</a:t>
+            </a:r>
+          </a:p>
+        </p:txBody>
+      </p:sp>
+      <p:sp>
+        <p:nvSpPr>
+          <p:cNvPr id="135" name="TextBox 134"/>
+          <p:cNvSpPr txBox="1"/>
+          <p:nvPr/>
+        </p:nvSpPr>
+        <p:spPr>
+          <a:xfrm>
+            <a:off x="2148840" y="4809744"/>
+            <a:ext cx="1188720" cy="201168"/>
+          </a:xfrm>
+          <a:prstGeom prst="rect">
+            <a:avLst/>
+          </a:prstGeom>
+          <a:noFill/>
+        </p:spPr>
+        <p:txBody>
+          <a:bodyPr wrap="square">
+            <a:spAutoFit/>
+          </a:bodyPr>
+          <a:lstStyle/>
+          <a:p>
+            <a:pPr algn="ctr">
+              <a:defRPr sz="900" b="0">
+                <a:solidFill>
+                  <a:srgbClr val="111827"/>
+                </a:solidFill>
+                <a:latin typeface="Calibri"/>
+              </a:defRPr>
+            </a:pPr>
+            <a:r>
+              <a:t>188</a:t>
+            </a:r>
+          </a:p>
+        </p:txBody>
+      </p:sp>
+      <p:sp>
+        <p:nvSpPr>
+          <p:cNvPr id="136" name="TextBox 135"/>
+          <p:cNvSpPr txBox="1"/>
+          <p:nvPr/>
+        </p:nvSpPr>
+        <p:spPr>
+          <a:xfrm>
+            <a:off x="3337560" y="4809744"/>
+            <a:ext cx="914400" cy="201168"/>
+          </a:xfrm>
+          <a:prstGeom prst="rect">
+            <a:avLst/>
+          </a:prstGeom>
+          <a:noFill/>
+        </p:spPr>
+        <p:txBody>
+          <a:bodyPr wrap="square">
+            <a:spAutoFit/>
+          </a:bodyPr>
+          <a:lstStyle/>
+          <a:p>
+            <a:pPr algn="ctr">
+              <a:defRPr sz="900" b="0">
+                <a:solidFill>
+                  <a:srgbClr val="111827"/>
+                </a:solidFill>
+                <a:latin typeface="Calibri"/>
+              </a:defRPr>
+            </a:pPr>
+            <a:r>
+              <a:t>23</a:t>
+            </a:r>
+          </a:p>
+        </p:txBody>
+      </p:sp>
+      <p:sp>
+        <p:nvSpPr>
+          <p:cNvPr id="137" name="TextBox 136"/>
+          <p:cNvSpPr txBox="1"/>
+          <p:nvPr/>
+        </p:nvSpPr>
+        <p:spPr>
+          <a:xfrm>
+            <a:off x="4251960" y="4809744"/>
+            <a:ext cx="777240" cy="201168"/>
+          </a:xfrm>
+          <a:prstGeom prst="rect">
+            <a:avLst/>
+          </a:prstGeom>
+          <a:noFill/>
+        </p:spPr>
+        <p:txBody>
+          <a:bodyPr wrap="square">
+            <a:spAutoFit/>
+          </a:bodyPr>
+          <a:lstStyle/>
+          <a:p>
+            <a:pPr algn="ctr">
+              <a:defRPr sz="900" b="0">
+                <a:solidFill>
+                  <a:srgbClr val="6B7280"/>
+                </a:solidFill>
+                <a:latin typeface="Calibri"/>
+              </a:defRPr>
+            </a:pPr>
+            <a:r>
+              <a:t>73</a:t>
+            </a:r>
+          </a:p>
+        </p:txBody>
+      </p:sp>
+      <p:sp>
+        <p:nvSpPr>
+          <p:cNvPr id="138" name="TextBox 137"/>
+          <p:cNvSpPr txBox="1"/>
+          <p:nvPr/>
+        </p:nvSpPr>
+        <p:spPr>
+          <a:xfrm>
+            <a:off x="5029200" y="4809744"/>
+            <a:ext cx="777240" cy="201168"/>
+          </a:xfrm>
+          <a:prstGeom prst="rect">
+            <a:avLst/>
+          </a:prstGeom>
+          <a:noFill/>
+        </p:spPr>
+        <p:txBody>
+          <a:bodyPr wrap="square">
+            <a:spAutoFit/>
+          </a:bodyPr>
+          <a:lstStyle/>
+          <a:p>
+            <a:pPr algn="ctr">
+              <a:defRPr sz="900" b="0">
+                <a:solidFill>
+                  <a:srgbClr val="111827"/>
+                </a:solidFill>
+                <a:latin typeface="Calibri"/>
+              </a:defRPr>
+            </a:pPr>
+            <a:r>
+              <a:t>211</a:t>
+            </a:r>
+          </a:p>
+        </p:txBody>
+      </p:sp>
+      <p:sp>
+        <p:nvSpPr>
+          <p:cNvPr id="139" name="TextBox 138"/>
+          <p:cNvSpPr txBox="1"/>
+          <p:nvPr/>
+        </p:nvSpPr>
+        <p:spPr>
+          <a:xfrm>
+            <a:off x="5806440" y="4809744"/>
+            <a:ext cx="777240" cy="201168"/>
+          </a:xfrm>
+          <a:prstGeom prst="rect">
+            <a:avLst/>
+          </a:prstGeom>
+          <a:noFill/>
+        </p:spPr>
+        <p:txBody>
+          <a:bodyPr wrap="square">
+            <a:spAutoFit/>
+          </a:bodyPr>
+          <a:lstStyle/>
+          <a:p>
+            <a:pPr algn="ctr">
+              <a:defRPr sz="900" b="0">
+                <a:solidFill>
+                  <a:srgbClr val="111827"/>
+                </a:solidFill>
+                <a:latin typeface="Calibri"/>
+              </a:defRPr>
+            </a:pPr>
+            <a:r>
+              <a:t>33.0</a:t>
+            </a:r>
+          </a:p>
+        </p:txBody>
+      </p:sp>
+      <p:sp>
+        <p:nvSpPr>
+          <p:cNvPr id="140" name="TextBox 139"/>
+          <p:cNvSpPr txBox="1"/>
+          <p:nvPr/>
+        </p:nvSpPr>
+        <p:spPr>
+          <a:xfrm>
+            <a:off x="6583679" y="4809744"/>
+            <a:ext cx="914400" cy="201168"/>
+          </a:xfrm>
+          <a:prstGeom prst="rect">
+            <a:avLst/>
+          </a:prstGeom>
+          <a:noFill/>
+        </p:spPr>
+        <p:txBody>
+          <a:bodyPr wrap="square">
+            <a:spAutoFit/>
+          </a:bodyPr>
+          <a:lstStyle/>
+          <a:p>
+            <a:pPr algn="ctr">
+              <a:defRPr sz="900" b="0">
+                <a:solidFill>
+                  <a:srgbClr val="D97706"/>
+                </a:solidFill>
+                <a:latin typeface="Calibri"/>
+              </a:defRPr>
+            </a:pPr>
+            <a:r>
+              <a:t>82%</a:t>
+            </a:r>
+          </a:p>
+        </p:txBody>
+      </p:sp>
+      <p:sp>
+        <p:nvSpPr>
+          <p:cNvPr id="141" name="TextBox 140"/>
+          <p:cNvSpPr txBox="1"/>
+          <p:nvPr/>
+        </p:nvSpPr>
+        <p:spPr>
+          <a:xfrm>
+            <a:off x="182880" y="5065776"/>
+            <a:ext cx="1371600" cy="201168"/>
           </a:xfrm>
           <a:prstGeom prst="rect">
             <a:avLst/>
@@ -23349,610 +25592,273 @@
               </a:defRPr>
             </a:pPr>
             <a:r>
-              <a:t>Westy McLaughlin</a:t>
-            </a:r>
-          </a:p>
-        </p:txBody>
-      </p:sp>
-      <p:sp>
-        <p:nvSpPr>
-          <p:cNvPr id="83" name="Rectangle 82"/>
+              <a:t>Christopher Hayes</a:t>
+            </a:r>
+          </a:p>
+        </p:txBody>
+      </p:sp>
+      <p:sp>
+        <p:nvSpPr>
+          <p:cNvPr id="142" name="TextBox 141"/>
+          <p:cNvSpPr txBox="1"/>
+          <p:nvPr/>
+        </p:nvSpPr>
+        <p:spPr>
+          <a:xfrm>
+            <a:off x="1554480" y="5065776"/>
+            <a:ext cx="594360" cy="201168"/>
+          </a:xfrm>
+          <a:prstGeom prst="rect">
+            <a:avLst/>
+          </a:prstGeom>
+          <a:noFill/>
+        </p:spPr>
+        <p:txBody>
+          <a:bodyPr wrap="square">
+            <a:spAutoFit/>
+          </a:bodyPr>
+          <a:lstStyle/>
+          <a:p>
+            <a:pPr algn="ctr">
+              <a:defRPr sz="900" b="0">
+                <a:solidFill>
+                  <a:srgbClr val="6B7280"/>
+                </a:solidFill>
+                <a:latin typeface="Calibri"/>
+              </a:defRPr>
+            </a:pPr>
+            <a:r>
+              <a:t>BDM</a:t>
+            </a:r>
+          </a:p>
+        </p:txBody>
+      </p:sp>
+      <p:sp>
+        <p:nvSpPr>
+          <p:cNvPr id="143" name="TextBox 142"/>
+          <p:cNvSpPr txBox="1"/>
+          <p:nvPr/>
+        </p:nvSpPr>
+        <p:spPr>
+          <a:xfrm>
+            <a:off x="2148840" y="5065776"/>
+            <a:ext cx="1188720" cy="201168"/>
+          </a:xfrm>
+          <a:prstGeom prst="rect">
+            <a:avLst/>
+          </a:prstGeom>
+          <a:noFill/>
+        </p:spPr>
+        <p:txBody>
+          <a:bodyPr wrap="square">
+            <a:spAutoFit/>
+          </a:bodyPr>
+          <a:lstStyle/>
+          <a:p>
+            <a:pPr algn="ctr">
+              <a:defRPr sz="900" b="0">
+                <a:solidFill>
+                  <a:srgbClr val="111827"/>
+                </a:solidFill>
+                <a:latin typeface="Calibri"/>
+              </a:defRPr>
+            </a:pPr>
+            <a:r>
+              <a:t>213</a:t>
+            </a:r>
+          </a:p>
+        </p:txBody>
+      </p:sp>
+      <p:sp>
+        <p:nvSpPr>
+          <p:cNvPr id="144" name="TextBox 143"/>
+          <p:cNvSpPr txBox="1"/>
+          <p:nvPr/>
+        </p:nvSpPr>
+        <p:spPr>
+          <a:xfrm>
+            <a:off x="3337560" y="5065776"/>
+            <a:ext cx="914400" cy="201168"/>
+          </a:xfrm>
+          <a:prstGeom prst="rect">
+            <a:avLst/>
+          </a:prstGeom>
+          <a:noFill/>
+        </p:spPr>
+        <p:txBody>
+          <a:bodyPr wrap="square">
+            <a:spAutoFit/>
+          </a:bodyPr>
+          <a:lstStyle/>
+          <a:p>
+            <a:pPr algn="ctr">
+              <a:defRPr sz="900" b="0">
+                <a:solidFill>
+                  <a:srgbClr val="111827"/>
+                </a:solidFill>
+                <a:latin typeface="Calibri"/>
+              </a:defRPr>
+            </a:pPr>
+            <a:r>
+              <a:t>11</a:t>
+            </a:r>
+          </a:p>
+        </p:txBody>
+      </p:sp>
+      <p:sp>
+        <p:nvSpPr>
+          <p:cNvPr id="145" name="TextBox 144"/>
+          <p:cNvSpPr txBox="1"/>
+          <p:nvPr/>
+        </p:nvSpPr>
+        <p:spPr>
+          <a:xfrm>
+            <a:off x="4251960" y="5065776"/>
+            <a:ext cx="777240" cy="201168"/>
+          </a:xfrm>
+          <a:prstGeom prst="rect">
+            <a:avLst/>
+          </a:prstGeom>
+          <a:noFill/>
+        </p:spPr>
+        <p:txBody>
+          <a:bodyPr wrap="square">
+            <a:spAutoFit/>
+          </a:bodyPr>
+          <a:lstStyle/>
+          <a:p>
+            <a:pPr algn="ctr">
+              <a:defRPr sz="900" b="0">
+                <a:solidFill>
+                  <a:srgbClr val="6B7280"/>
+                </a:solidFill>
+                <a:latin typeface="Calibri"/>
+              </a:defRPr>
+            </a:pPr>
+            <a:r>
+              <a:t>37</a:t>
+            </a:r>
+          </a:p>
+        </p:txBody>
+      </p:sp>
+      <p:sp>
+        <p:nvSpPr>
+          <p:cNvPr id="146" name="TextBox 145"/>
+          <p:cNvSpPr txBox="1"/>
+          <p:nvPr/>
+        </p:nvSpPr>
+        <p:spPr>
+          <a:xfrm>
+            <a:off x="5029200" y="5065776"/>
+            <a:ext cx="777240" cy="201168"/>
+          </a:xfrm>
+          <a:prstGeom prst="rect">
+            <a:avLst/>
+          </a:prstGeom>
+          <a:noFill/>
+        </p:spPr>
+        <p:txBody>
+          <a:bodyPr wrap="square">
+            <a:spAutoFit/>
+          </a:bodyPr>
+          <a:lstStyle/>
+          <a:p>
+            <a:pPr algn="ctr">
+              <a:defRPr sz="900" b="0">
+                <a:solidFill>
+                  <a:srgbClr val="111827"/>
+                </a:solidFill>
+                <a:latin typeface="Calibri"/>
+              </a:defRPr>
+            </a:pPr>
+            <a:r>
+              <a:t>224</a:t>
+            </a:r>
+          </a:p>
+        </p:txBody>
+      </p:sp>
+      <p:sp>
+        <p:nvSpPr>
+          <p:cNvPr id="147" name="TextBox 146"/>
+          <p:cNvSpPr txBox="1"/>
+          <p:nvPr/>
+        </p:nvSpPr>
+        <p:spPr>
+          <a:xfrm>
+            <a:off x="5806440" y="5065776"/>
+            <a:ext cx="777240" cy="201168"/>
+          </a:xfrm>
+          <a:prstGeom prst="rect">
+            <a:avLst/>
+          </a:prstGeom>
+          <a:noFill/>
+        </p:spPr>
+        <p:txBody>
+          <a:bodyPr wrap="square">
+            <a:spAutoFit/>
+          </a:bodyPr>
+          <a:lstStyle/>
+          <a:p>
+            <a:pPr algn="ctr">
+              <a:defRPr sz="900" b="0">
+                <a:solidFill>
+                  <a:srgbClr val="111827"/>
+                </a:solidFill>
+                <a:latin typeface="Calibri"/>
+              </a:defRPr>
+            </a:pPr>
+            <a:r>
+              <a:t>34.3</a:t>
+            </a:r>
+          </a:p>
+        </p:txBody>
+      </p:sp>
+      <p:sp>
+        <p:nvSpPr>
+          <p:cNvPr id="148" name="TextBox 147"/>
+          <p:cNvSpPr txBox="1"/>
+          <p:nvPr/>
+        </p:nvSpPr>
+        <p:spPr>
+          <a:xfrm>
+            <a:off x="6583679" y="5065776"/>
+            <a:ext cx="914400" cy="201168"/>
+          </a:xfrm>
+          <a:prstGeom prst="rect">
+            <a:avLst/>
+          </a:prstGeom>
+          <a:noFill/>
+        </p:spPr>
+        <p:txBody>
+          <a:bodyPr wrap="square">
+            <a:spAutoFit/>
+          </a:bodyPr>
+          <a:lstStyle/>
+          <a:p>
+            <a:pPr algn="ctr">
+              <a:defRPr sz="900" b="0">
+                <a:solidFill>
+                  <a:srgbClr val="D97706"/>
+                </a:solidFill>
+                <a:latin typeface="Calibri"/>
+              </a:defRPr>
+            </a:pPr>
+            <a:r>
+              <a:t>86%</a:t>
+            </a:r>
+          </a:p>
+        </p:txBody>
+      </p:sp>
+      <p:sp>
+        <p:nvSpPr>
+          <p:cNvPr id="149" name="Rectangle 148"/>
           <p:cNvSpPr/>
           <p:nvPr/>
         </p:nvSpPr>
         <p:spPr>
           <a:xfrm>
-            <a:off x="2048256" y="3145536"/>
-            <a:ext cx="1024127" cy="393192"/>
-          </a:xfrm>
-          <a:prstGeom prst="rect">
-            <a:avLst/>
-          </a:prstGeom>
-          <a:solidFill>
-            <a:srgbClr val="05784C"/>
-          </a:solidFill>
-          <a:ln>
-            <a:noFill/>
-          </a:ln>
-        </p:spPr>
-        <p:style>
-          <a:lnRef idx="1">
-            <a:schemeClr val="accent1"/>
-          </a:lnRef>
-          <a:fillRef idx="3">
-            <a:schemeClr val="accent1"/>
-          </a:fillRef>
-          <a:effectRef idx="2">
-            <a:schemeClr val="accent1"/>
-          </a:effectRef>
-          <a:fontRef idx="minor">
-            <a:schemeClr val="lt1"/>
-          </a:fontRef>
-        </p:style>
-        <p:txBody>
-          <a:bodyPr rtlCol="0" anchor="ctr"/>
-          <a:lstStyle/>
-          <a:p>
-            <a:pPr algn="ctr"/>
-          </a:p>
-        </p:txBody>
-      </p:sp>
-      <p:sp>
-        <p:nvSpPr>
-          <p:cNvPr id="84" name="TextBox 83"/>
-          <p:cNvSpPr txBox="1"/>
-          <p:nvPr/>
-        </p:nvSpPr>
-        <p:spPr>
-          <a:xfrm>
-            <a:off x="2011680" y="3223260"/>
-            <a:ext cx="1097280" cy="411480"/>
-          </a:xfrm>
-          <a:prstGeom prst="rect">
-            <a:avLst/>
-          </a:prstGeom>
-          <a:noFill/>
-        </p:spPr>
-        <p:txBody>
-          <a:bodyPr wrap="square">
-            <a:spAutoFit/>
-          </a:bodyPr>
-          <a:lstStyle/>
-          <a:p>
-            <a:pPr algn="ctr">
-              <a:defRPr sz="1100" b="1">
-                <a:solidFill>
-                  <a:srgbClr val="FFFFFF"/>
-                </a:solidFill>
-                <a:latin typeface="Calibri"/>
-              </a:defRPr>
-            </a:pPr>
-            <a:r>
-              <a:t>46</a:t>
-            </a:r>
-          </a:p>
-        </p:txBody>
-      </p:sp>
-      <p:sp>
-        <p:nvSpPr>
-          <p:cNvPr id="85" name="Rectangle 84"/>
-          <p:cNvSpPr/>
-          <p:nvPr/>
-        </p:nvSpPr>
-        <p:spPr>
-          <a:xfrm>
-            <a:off x="3145536" y="3145536"/>
-            <a:ext cx="1024127" cy="393192"/>
-          </a:xfrm>
-          <a:prstGeom prst="rect">
-            <a:avLst/>
-          </a:prstGeom>
-          <a:solidFill>
-            <a:srgbClr val="DC2626"/>
-          </a:solidFill>
-          <a:ln>
-            <a:noFill/>
-          </a:ln>
-        </p:spPr>
-        <p:style>
-          <a:lnRef idx="1">
-            <a:schemeClr val="accent1"/>
-          </a:lnRef>
-          <a:fillRef idx="3">
-            <a:schemeClr val="accent1"/>
-          </a:fillRef>
-          <a:effectRef idx="2">
-            <a:schemeClr val="accent1"/>
-          </a:effectRef>
-          <a:fontRef idx="minor">
-            <a:schemeClr val="lt1"/>
-          </a:fontRef>
-        </p:style>
-        <p:txBody>
-          <a:bodyPr rtlCol="0" anchor="ctr"/>
-          <a:lstStyle/>
-          <a:p>
-            <a:pPr algn="ctr"/>
-          </a:p>
-        </p:txBody>
-      </p:sp>
-      <p:sp>
-        <p:nvSpPr>
-          <p:cNvPr id="86" name="TextBox 85"/>
-          <p:cNvSpPr txBox="1"/>
-          <p:nvPr/>
-        </p:nvSpPr>
-        <p:spPr>
-          <a:xfrm>
-            <a:off x="3108960" y="3223260"/>
-            <a:ext cx="1097280" cy="411480"/>
-          </a:xfrm>
-          <a:prstGeom prst="rect">
-            <a:avLst/>
-          </a:prstGeom>
-          <a:noFill/>
-        </p:spPr>
-        <p:txBody>
-          <a:bodyPr wrap="square">
-            <a:spAutoFit/>
-          </a:bodyPr>
-          <a:lstStyle/>
-          <a:p>
-            <a:pPr algn="ctr">
-              <a:defRPr sz="1100" b="1">
-                <a:solidFill>
-                  <a:srgbClr val="FFFFFF"/>
-                </a:solidFill>
-                <a:latin typeface="Calibri"/>
-              </a:defRPr>
-            </a:pPr>
-            <a:r>
-              <a:t>29</a:t>
-            </a:r>
-          </a:p>
-        </p:txBody>
-      </p:sp>
-      <p:sp>
-        <p:nvSpPr>
-          <p:cNvPr id="87" name="Rectangle 86"/>
-          <p:cNvSpPr/>
-          <p:nvPr/>
-        </p:nvSpPr>
-        <p:spPr>
-          <a:xfrm>
-            <a:off x="4242816" y="3145536"/>
-            <a:ext cx="1024127" cy="393192"/>
-          </a:xfrm>
-          <a:prstGeom prst="rect">
-            <a:avLst/>
-          </a:prstGeom>
-          <a:solidFill>
-            <a:srgbClr val="DC2626"/>
-          </a:solidFill>
-          <a:ln>
-            <a:noFill/>
-          </a:ln>
-        </p:spPr>
-        <p:style>
-          <a:lnRef idx="1">
-            <a:schemeClr val="accent1"/>
-          </a:lnRef>
-          <a:fillRef idx="3">
-            <a:schemeClr val="accent1"/>
-          </a:fillRef>
-          <a:effectRef idx="2">
-            <a:schemeClr val="accent1"/>
-          </a:effectRef>
-          <a:fontRef idx="minor">
-            <a:schemeClr val="lt1"/>
-          </a:fontRef>
-        </p:style>
-        <p:txBody>
-          <a:bodyPr rtlCol="0" anchor="ctr"/>
-          <a:lstStyle/>
-          <a:p>
-            <a:pPr algn="ctr"/>
-          </a:p>
-        </p:txBody>
-      </p:sp>
-      <p:sp>
-        <p:nvSpPr>
-          <p:cNvPr id="88" name="TextBox 87"/>
-          <p:cNvSpPr txBox="1"/>
-          <p:nvPr/>
-        </p:nvSpPr>
-        <p:spPr>
-          <a:xfrm>
-            <a:off x="4206240" y="3223260"/>
-            <a:ext cx="1097280" cy="411480"/>
-          </a:xfrm>
-          <a:prstGeom prst="rect">
-            <a:avLst/>
-          </a:prstGeom>
-          <a:noFill/>
-        </p:spPr>
-        <p:txBody>
-          <a:bodyPr wrap="square">
-            <a:spAutoFit/>
-          </a:bodyPr>
-          <a:lstStyle/>
-          <a:p>
-            <a:pPr algn="ctr">
-              <a:defRPr sz="1100" b="1">
-                <a:solidFill>
-                  <a:srgbClr val="FFFFFF"/>
-                </a:solidFill>
-                <a:latin typeface="Calibri"/>
-              </a:defRPr>
-            </a:pPr>
-            <a:r>
-              <a:t>28</a:t>
-            </a:r>
-          </a:p>
-        </p:txBody>
-      </p:sp>
-      <p:sp>
-        <p:nvSpPr>
-          <p:cNvPr id="89" name="Rectangle 88"/>
-          <p:cNvSpPr/>
-          <p:nvPr/>
-        </p:nvSpPr>
-        <p:spPr>
-          <a:xfrm>
-            <a:off x="5340096" y="3145536"/>
-            <a:ext cx="1024127" cy="393192"/>
-          </a:xfrm>
-          <a:prstGeom prst="rect">
-            <a:avLst/>
-          </a:prstGeom>
-          <a:solidFill>
-            <a:srgbClr val="D97706"/>
-          </a:solidFill>
-          <a:ln>
-            <a:noFill/>
-          </a:ln>
-        </p:spPr>
-        <p:style>
-          <a:lnRef idx="1">
-            <a:schemeClr val="accent1"/>
-          </a:lnRef>
-          <a:fillRef idx="3">
-            <a:schemeClr val="accent1"/>
-          </a:fillRef>
-          <a:effectRef idx="2">
-            <a:schemeClr val="accent1"/>
-          </a:effectRef>
-          <a:fontRef idx="minor">
-            <a:schemeClr val="lt1"/>
-          </a:fontRef>
-        </p:style>
-        <p:txBody>
-          <a:bodyPr rtlCol="0" anchor="ctr"/>
-          <a:lstStyle/>
-          <a:p>
-            <a:pPr algn="ctr"/>
-          </a:p>
-        </p:txBody>
-      </p:sp>
-      <p:sp>
-        <p:nvSpPr>
-          <p:cNvPr id="90" name="TextBox 89"/>
-          <p:cNvSpPr txBox="1"/>
-          <p:nvPr/>
-        </p:nvSpPr>
-        <p:spPr>
-          <a:xfrm>
-            <a:off x="5303520" y="3223260"/>
-            <a:ext cx="1097280" cy="411480"/>
-          </a:xfrm>
-          <a:prstGeom prst="rect">
-            <a:avLst/>
-          </a:prstGeom>
-          <a:noFill/>
-        </p:spPr>
-        <p:txBody>
-          <a:bodyPr wrap="square">
-            <a:spAutoFit/>
-          </a:bodyPr>
-          <a:lstStyle/>
-          <a:p>
-            <a:pPr algn="ctr">
-              <a:defRPr sz="1100" b="1">
-                <a:solidFill>
-                  <a:srgbClr val="FFFFFF"/>
-                </a:solidFill>
-                <a:latin typeface="Calibri"/>
-              </a:defRPr>
-            </a:pPr>
-            <a:r>
-              <a:t>39</a:t>
-            </a:r>
-          </a:p>
-        </p:txBody>
-      </p:sp>
-      <p:sp>
-        <p:nvSpPr>
-          <p:cNvPr id="91" name="Rectangle 90"/>
-          <p:cNvSpPr/>
-          <p:nvPr/>
-        </p:nvSpPr>
-        <p:spPr>
-          <a:xfrm>
-            <a:off x="6437376" y="3145536"/>
-            <a:ext cx="1024127" cy="393192"/>
-          </a:xfrm>
-          <a:prstGeom prst="rect">
-            <a:avLst/>
-          </a:prstGeom>
-          <a:solidFill>
-            <a:srgbClr val="DC2626"/>
-          </a:solidFill>
-          <a:ln>
-            <a:noFill/>
-          </a:ln>
-        </p:spPr>
-        <p:style>
-          <a:lnRef idx="1">
-            <a:schemeClr val="accent1"/>
-          </a:lnRef>
-          <a:fillRef idx="3">
-            <a:schemeClr val="accent1"/>
-          </a:fillRef>
-          <a:effectRef idx="2">
-            <a:schemeClr val="accent1"/>
-          </a:effectRef>
-          <a:fontRef idx="minor">
-            <a:schemeClr val="lt1"/>
-          </a:fontRef>
-        </p:style>
-        <p:txBody>
-          <a:bodyPr rtlCol="0" anchor="ctr"/>
-          <a:lstStyle/>
-          <a:p>
-            <a:pPr algn="ctr"/>
-          </a:p>
-        </p:txBody>
-      </p:sp>
-      <p:sp>
-        <p:nvSpPr>
-          <p:cNvPr id="92" name="TextBox 91"/>
-          <p:cNvSpPr txBox="1"/>
-          <p:nvPr/>
-        </p:nvSpPr>
-        <p:spPr>
-          <a:xfrm>
-            <a:off x="6400800" y="3223260"/>
-            <a:ext cx="1097280" cy="411480"/>
-          </a:xfrm>
-          <a:prstGeom prst="rect">
-            <a:avLst/>
-          </a:prstGeom>
-          <a:noFill/>
-        </p:spPr>
-        <p:txBody>
-          <a:bodyPr wrap="square">
-            <a:spAutoFit/>
-          </a:bodyPr>
-          <a:lstStyle/>
-          <a:p>
-            <a:pPr algn="ctr">
-              <a:defRPr sz="1100" b="1">
-                <a:solidFill>
-                  <a:srgbClr val="FFFFFF"/>
-                </a:solidFill>
-                <a:latin typeface="Calibri"/>
-              </a:defRPr>
-            </a:pPr>
-            <a:r>
-              <a:t>25</a:t>
-            </a:r>
-          </a:p>
-        </p:txBody>
-      </p:sp>
-      <p:sp>
-        <p:nvSpPr>
-          <p:cNvPr id="93" name="Rectangle 92"/>
-          <p:cNvSpPr/>
-          <p:nvPr/>
-        </p:nvSpPr>
-        <p:spPr>
-          <a:xfrm>
-            <a:off x="7534655" y="3145536"/>
-            <a:ext cx="1024127" cy="393192"/>
-          </a:xfrm>
-          <a:prstGeom prst="rect">
-            <a:avLst/>
-          </a:prstGeom>
-          <a:solidFill>
-            <a:srgbClr val="05784C"/>
-          </a:solidFill>
-          <a:ln>
-            <a:noFill/>
-          </a:ln>
-        </p:spPr>
-        <p:style>
-          <a:lnRef idx="1">
-            <a:schemeClr val="accent1"/>
-          </a:lnRef>
-          <a:fillRef idx="3">
-            <a:schemeClr val="accent1"/>
-          </a:fillRef>
-          <a:effectRef idx="2">
-            <a:schemeClr val="accent1"/>
-          </a:effectRef>
-          <a:fontRef idx="minor">
-            <a:schemeClr val="lt1"/>
-          </a:fontRef>
-        </p:style>
-        <p:txBody>
-          <a:bodyPr rtlCol="0" anchor="ctr"/>
-          <a:lstStyle/>
-          <a:p>
-            <a:pPr algn="ctr"/>
-          </a:p>
-        </p:txBody>
-      </p:sp>
-      <p:sp>
-        <p:nvSpPr>
-          <p:cNvPr id="94" name="TextBox 93"/>
-          <p:cNvSpPr txBox="1"/>
-          <p:nvPr/>
-        </p:nvSpPr>
-        <p:spPr>
-          <a:xfrm>
-            <a:off x="7498079" y="3223260"/>
-            <a:ext cx="1097280" cy="411480"/>
-          </a:xfrm>
-          <a:prstGeom prst="rect">
-            <a:avLst/>
-          </a:prstGeom>
-          <a:noFill/>
-        </p:spPr>
-        <p:txBody>
-          <a:bodyPr wrap="square">
-            <a:spAutoFit/>
-          </a:bodyPr>
-          <a:lstStyle/>
-          <a:p>
-            <a:pPr algn="ctr">
-              <a:defRPr sz="1100" b="1">
-                <a:solidFill>
-                  <a:srgbClr val="FFFFFF"/>
-                </a:solidFill>
-                <a:latin typeface="Calibri"/>
-              </a:defRPr>
-            </a:pPr>
-            <a:r>
-              <a:t>45</a:t>
-            </a:r>
-          </a:p>
-        </p:txBody>
-      </p:sp>
-      <p:sp>
-        <p:nvSpPr>
-          <p:cNvPr id="95" name="Rectangle 94"/>
-          <p:cNvSpPr/>
-          <p:nvPr/>
-        </p:nvSpPr>
-        <p:spPr>
-          <a:xfrm>
-            <a:off x="8631935" y="3145536"/>
-            <a:ext cx="1024127" cy="393192"/>
-          </a:xfrm>
-          <a:prstGeom prst="rect">
-            <a:avLst/>
-          </a:prstGeom>
-          <a:solidFill>
-            <a:srgbClr val="DC2626"/>
-          </a:solidFill>
-          <a:ln>
-            <a:noFill/>
-          </a:ln>
-        </p:spPr>
-        <p:style>
-          <a:lnRef idx="1">
-            <a:schemeClr val="accent1"/>
-          </a:lnRef>
-          <a:fillRef idx="3">
-            <a:schemeClr val="accent1"/>
-          </a:fillRef>
-          <a:effectRef idx="2">
-            <a:schemeClr val="accent1"/>
-          </a:effectRef>
-          <a:fontRef idx="minor">
-            <a:schemeClr val="lt1"/>
-          </a:fontRef>
-        </p:style>
-        <p:txBody>
-          <a:bodyPr rtlCol="0" anchor="ctr"/>
-          <a:lstStyle/>
-          <a:p>
-            <a:pPr algn="ctr"/>
-          </a:p>
-        </p:txBody>
-      </p:sp>
-      <p:sp>
-        <p:nvSpPr>
-          <p:cNvPr id="96" name="TextBox 95"/>
-          <p:cNvSpPr txBox="1"/>
-          <p:nvPr/>
-        </p:nvSpPr>
-        <p:spPr>
-          <a:xfrm>
-            <a:off x="8595359" y="3223260"/>
-            <a:ext cx="1097280" cy="411480"/>
-          </a:xfrm>
-          <a:prstGeom prst="rect">
-            <a:avLst/>
-          </a:prstGeom>
-          <a:noFill/>
-        </p:spPr>
-        <p:txBody>
-          <a:bodyPr wrap="square">
-            <a:spAutoFit/>
-          </a:bodyPr>
-          <a:lstStyle/>
-          <a:p>
-            <a:pPr algn="ctr">
-              <a:defRPr sz="1100" b="1">
-                <a:solidFill>
-                  <a:srgbClr val="FFFFFF"/>
-                </a:solidFill>
-                <a:latin typeface="Calibri"/>
-              </a:defRPr>
-            </a:pPr>
-            <a:r>
-              <a:t>1</a:t>
-            </a:r>
-          </a:p>
-        </p:txBody>
-      </p:sp>
-      <p:sp>
-        <p:nvSpPr>
-          <p:cNvPr id="97" name="TextBox 96"/>
-          <p:cNvSpPr txBox="1"/>
-          <p:nvPr/>
-        </p:nvSpPr>
-        <p:spPr>
-          <a:xfrm>
-            <a:off x="9692640" y="3223260"/>
-            <a:ext cx="822960" cy="429768"/>
-          </a:xfrm>
-          <a:prstGeom prst="rect">
-            <a:avLst/>
-          </a:prstGeom>
-          <a:noFill/>
-        </p:spPr>
-        <p:txBody>
-          <a:bodyPr wrap="square">
-            <a:spAutoFit/>
-          </a:bodyPr>
-          <a:lstStyle/>
-          <a:p>
-            <a:pPr algn="ctr">
-              <a:defRPr sz="1100" b="1">
-                <a:solidFill>
-                  <a:srgbClr val="D97706"/>
-                </a:solidFill>
-                <a:latin typeface="Calibri"/>
-              </a:defRPr>
-            </a:pPr>
-            <a:r>
-              <a:t>88%</a:t>
-            </a:r>
-          </a:p>
-        </p:txBody>
-      </p:sp>
-      <p:sp>
-        <p:nvSpPr>
-          <p:cNvPr id="98" name="Rectangle 97"/>
-          <p:cNvSpPr/>
-          <p:nvPr/>
-        </p:nvSpPr>
-        <p:spPr>
-          <a:xfrm>
-            <a:off x="182880" y="3593591"/>
-            <a:ext cx="10332720" cy="502920"/>
+            <a:off x="182880" y="5303520"/>
+            <a:ext cx="7315200" cy="228600"/>
           </a:xfrm>
           <a:prstGeom prst="rect">
             <a:avLst/>
@@ -23988,14 +25894,14 @@
       </p:sp>
       <p:sp>
         <p:nvSpPr>
-          <p:cNvPr id="99" name="TextBox 98"/>
-          <p:cNvSpPr txBox="1"/>
-          <p:nvPr/>
-        </p:nvSpPr>
-        <p:spPr>
-          <a:xfrm>
-            <a:off x="256032" y="3726180"/>
-            <a:ext cx="1828800" cy="429768"/>
+          <p:cNvPr id="150" name="TextBox 149"/>
+          <p:cNvSpPr txBox="1"/>
+          <p:nvPr/>
+        </p:nvSpPr>
+        <p:spPr>
+          <a:xfrm>
+            <a:off x="182880" y="5321808"/>
+            <a:ext cx="1371600" cy="201168"/>
           </a:xfrm>
           <a:prstGeom prst="rect">
             <a:avLst/>
@@ -24017,667 +25923,35 @@
               </a:defRPr>
             </a:pPr>
             <a:r>
-              <a:t>Alexis Berry-Smith</a:t>
-            </a:r>
-          </a:p>
-        </p:txBody>
-      </p:sp>
-      <p:sp>
-        <p:nvSpPr>
-          <p:cNvPr id="100" name="Rectangle 99"/>
-          <p:cNvSpPr/>
-          <p:nvPr/>
-        </p:nvSpPr>
-        <p:spPr>
-          <a:xfrm>
-            <a:off x="2048256" y="3648456"/>
-            <a:ext cx="1024127" cy="393192"/>
-          </a:xfrm>
-          <a:prstGeom prst="rect">
-            <a:avLst/>
-          </a:prstGeom>
-          <a:solidFill>
-            <a:srgbClr val="D1D5DB"/>
-          </a:solidFill>
-          <a:ln>
-            <a:noFill/>
-          </a:ln>
-        </p:spPr>
-        <p:style>
-          <a:lnRef idx="1">
-            <a:schemeClr val="accent1"/>
-          </a:lnRef>
-          <a:fillRef idx="3">
-            <a:schemeClr val="accent1"/>
-          </a:fillRef>
-          <a:effectRef idx="2">
-            <a:schemeClr val="accent1"/>
-          </a:effectRef>
-          <a:fontRef idx="minor">
-            <a:schemeClr val="lt1"/>
-          </a:fontRef>
-        </p:style>
-        <p:txBody>
-          <a:bodyPr rtlCol="0" anchor="ctr"/>
-          <a:lstStyle/>
-          <a:p>
-            <a:pPr algn="ctr"/>
-          </a:p>
-        </p:txBody>
-      </p:sp>
-      <p:sp>
-        <p:nvSpPr>
-          <p:cNvPr id="101" name="TextBox 100"/>
-          <p:cNvSpPr txBox="1"/>
-          <p:nvPr/>
-        </p:nvSpPr>
-        <p:spPr>
-          <a:xfrm>
-            <a:off x="2011680" y="3726180"/>
-            <a:ext cx="1097280" cy="411480"/>
-          </a:xfrm>
-          <a:prstGeom prst="rect">
-            <a:avLst/>
-          </a:prstGeom>
-          <a:noFill/>
-        </p:spPr>
-        <p:txBody>
-          <a:bodyPr wrap="square">
-            <a:spAutoFit/>
-          </a:bodyPr>
-          <a:lstStyle/>
-          <a:p>
-            <a:pPr algn="ctr">
-              <a:defRPr sz="1100" b="1">
-                <a:solidFill>
-                  <a:srgbClr val="FFFFFF"/>
-                </a:solidFill>
-                <a:latin typeface="Calibri"/>
-              </a:defRPr>
-            </a:pPr>
-            <a:r>
-              <a:t>0</a:t>
-            </a:r>
-          </a:p>
-        </p:txBody>
-      </p:sp>
-      <p:sp>
-        <p:nvSpPr>
-          <p:cNvPr id="102" name="Rectangle 101"/>
-          <p:cNvSpPr/>
-          <p:nvPr/>
-        </p:nvSpPr>
-        <p:spPr>
-          <a:xfrm>
-            <a:off x="3145536" y="3648456"/>
-            <a:ext cx="1024127" cy="393192"/>
-          </a:xfrm>
-          <a:prstGeom prst="rect">
-            <a:avLst/>
-          </a:prstGeom>
-          <a:solidFill>
-            <a:srgbClr val="D1D5DB"/>
-          </a:solidFill>
-          <a:ln>
-            <a:noFill/>
-          </a:ln>
-        </p:spPr>
-        <p:style>
-          <a:lnRef idx="1">
-            <a:schemeClr val="accent1"/>
-          </a:lnRef>
-          <a:fillRef idx="3">
-            <a:schemeClr val="accent1"/>
-          </a:fillRef>
-          <a:effectRef idx="2">
-            <a:schemeClr val="accent1"/>
-          </a:effectRef>
-          <a:fontRef idx="minor">
-            <a:schemeClr val="lt1"/>
-          </a:fontRef>
-        </p:style>
-        <p:txBody>
-          <a:bodyPr rtlCol="0" anchor="ctr"/>
-          <a:lstStyle/>
-          <a:p>
-            <a:pPr algn="ctr"/>
-          </a:p>
-        </p:txBody>
-      </p:sp>
-      <p:sp>
-        <p:nvSpPr>
-          <p:cNvPr id="103" name="TextBox 102"/>
-          <p:cNvSpPr txBox="1"/>
-          <p:nvPr/>
-        </p:nvSpPr>
-        <p:spPr>
-          <a:xfrm>
-            <a:off x="3108960" y="3726180"/>
-            <a:ext cx="1097280" cy="411480"/>
-          </a:xfrm>
-          <a:prstGeom prst="rect">
-            <a:avLst/>
-          </a:prstGeom>
-          <a:noFill/>
-        </p:spPr>
-        <p:txBody>
-          <a:bodyPr wrap="square">
-            <a:spAutoFit/>
-          </a:bodyPr>
-          <a:lstStyle/>
-          <a:p>
-            <a:pPr algn="ctr">
-              <a:defRPr sz="1100" b="1">
-                <a:solidFill>
-                  <a:srgbClr val="FFFFFF"/>
-                </a:solidFill>
-                <a:latin typeface="Calibri"/>
-              </a:defRPr>
-            </a:pPr>
-            <a:r>
-              <a:t>0</a:t>
-            </a:r>
-          </a:p>
-        </p:txBody>
-      </p:sp>
-      <p:sp>
-        <p:nvSpPr>
-          <p:cNvPr id="104" name="Rectangle 103"/>
-          <p:cNvSpPr/>
-          <p:nvPr/>
-        </p:nvSpPr>
-        <p:spPr>
-          <a:xfrm>
-            <a:off x="4242816" y="3648456"/>
-            <a:ext cx="1024127" cy="393192"/>
-          </a:xfrm>
-          <a:prstGeom prst="rect">
-            <a:avLst/>
-          </a:prstGeom>
-          <a:solidFill>
-            <a:srgbClr val="DC2626"/>
-          </a:solidFill>
-          <a:ln>
-            <a:noFill/>
-          </a:ln>
-        </p:spPr>
-        <p:style>
-          <a:lnRef idx="1">
-            <a:schemeClr val="accent1"/>
-          </a:lnRef>
-          <a:fillRef idx="3">
-            <a:schemeClr val="accent1"/>
-          </a:fillRef>
-          <a:effectRef idx="2">
-            <a:schemeClr val="accent1"/>
-          </a:effectRef>
-          <a:fontRef idx="minor">
-            <a:schemeClr val="lt1"/>
-          </a:fontRef>
-        </p:style>
-        <p:txBody>
-          <a:bodyPr rtlCol="0" anchor="ctr"/>
-          <a:lstStyle/>
-          <a:p>
-            <a:pPr algn="ctr"/>
-          </a:p>
-        </p:txBody>
-      </p:sp>
-      <p:sp>
-        <p:nvSpPr>
-          <p:cNvPr id="105" name="TextBox 104"/>
-          <p:cNvSpPr txBox="1"/>
-          <p:nvPr/>
-        </p:nvSpPr>
-        <p:spPr>
-          <a:xfrm>
-            <a:off x="4206240" y="3726180"/>
-            <a:ext cx="1097280" cy="411480"/>
-          </a:xfrm>
-          <a:prstGeom prst="rect">
-            <a:avLst/>
-          </a:prstGeom>
-          <a:noFill/>
-        </p:spPr>
-        <p:txBody>
-          <a:bodyPr wrap="square">
-            <a:spAutoFit/>
-          </a:bodyPr>
-          <a:lstStyle/>
-          <a:p>
-            <a:pPr algn="ctr">
-              <a:defRPr sz="1100" b="1">
-                <a:solidFill>
-                  <a:srgbClr val="FFFFFF"/>
-                </a:solidFill>
-                <a:latin typeface="Calibri"/>
-              </a:defRPr>
-            </a:pPr>
-            <a:r>
-              <a:t>4</a:t>
-            </a:r>
-          </a:p>
-        </p:txBody>
-      </p:sp>
-      <p:sp>
-        <p:nvSpPr>
-          <p:cNvPr id="106" name="Rectangle 105"/>
-          <p:cNvSpPr/>
-          <p:nvPr/>
-        </p:nvSpPr>
-        <p:spPr>
-          <a:xfrm>
-            <a:off x="5340096" y="3648456"/>
-            <a:ext cx="1024127" cy="393192"/>
-          </a:xfrm>
-          <a:prstGeom prst="rect">
-            <a:avLst/>
-          </a:prstGeom>
-          <a:solidFill>
-            <a:srgbClr val="D1D5DB"/>
-          </a:solidFill>
-          <a:ln>
-            <a:noFill/>
-          </a:ln>
-        </p:spPr>
-        <p:style>
-          <a:lnRef idx="1">
-            <a:schemeClr val="accent1"/>
-          </a:lnRef>
-          <a:fillRef idx="3">
-            <a:schemeClr val="accent1"/>
-          </a:fillRef>
-          <a:effectRef idx="2">
-            <a:schemeClr val="accent1"/>
-          </a:effectRef>
-          <a:fontRef idx="minor">
-            <a:schemeClr val="lt1"/>
-          </a:fontRef>
-        </p:style>
-        <p:txBody>
-          <a:bodyPr rtlCol="0" anchor="ctr"/>
-          <a:lstStyle/>
-          <a:p>
-            <a:pPr algn="ctr"/>
-          </a:p>
-        </p:txBody>
-      </p:sp>
-      <p:sp>
-        <p:nvSpPr>
-          <p:cNvPr id="107" name="TextBox 106"/>
-          <p:cNvSpPr txBox="1"/>
-          <p:nvPr/>
-        </p:nvSpPr>
-        <p:spPr>
-          <a:xfrm>
-            <a:off x="5303520" y="3726180"/>
-            <a:ext cx="1097280" cy="411480"/>
-          </a:xfrm>
-          <a:prstGeom prst="rect">
-            <a:avLst/>
-          </a:prstGeom>
-          <a:noFill/>
-        </p:spPr>
-        <p:txBody>
-          <a:bodyPr wrap="square">
-            <a:spAutoFit/>
-          </a:bodyPr>
-          <a:lstStyle/>
-          <a:p>
-            <a:pPr algn="ctr">
-              <a:defRPr sz="1100" b="1">
-                <a:solidFill>
-                  <a:srgbClr val="FFFFFF"/>
-                </a:solidFill>
-                <a:latin typeface="Calibri"/>
-              </a:defRPr>
-            </a:pPr>
-            <a:r>
-              <a:t>0</a:t>
-            </a:r>
-          </a:p>
-        </p:txBody>
-      </p:sp>
-      <p:sp>
-        <p:nvSpPr>
-          <p:cNvPr id="108" name="Rectangle 107"/>
-          <p:cNvSpPr/>
-          <p:nvPr/>
-        </p:nvSpPr>
-        <p:spPr>
-          <a:xfrm>
-            <a:off x="6437376" y="3648456"/>
-            <a:ext cx="1024127" cy="393192"/>
-          </a:xfrm>
-          <a:prstGeom prst="rect">
-            <a:avLst/>
-          </a:prstGeom>
-          <a:solidFill>
-            <a:srgbClr val="D97706"/>
-          </a:solidFill>
-          <a:ln>
-            <a:noFill/>
-          </a:ln>
-        </p:spPr>
-        <p:style>
-          <a:lnRef idx="1">
-            <a:schemeClr val="accent1"/>
-          </a:lnRef>
-          <a:fillRef idx="3">
-            <a:schemeClr val="accent1"/>
-          </a:fillRef>
-          <a:effectRef idx="2">
-            <a:schemeClr val="accent1"/>
-          </a:effectRef>
-          <a:fontRef idx="minor">
-            <a:schemeClr val="lt1"/>
-          </a:fontRef>
-        </p:style>
-        <p:txBody>
-          <a:bodyPr rtlCol="0" anchor="ctr"/>
-          <a:lstStyle/>
-          <a:p>
-            <a:pPr algn="ctr"/>
-          </a:p>
-        </p:txBody>
-      </p:sp>
-      <p:sp>
-        <p:nvSpPr>
-          <p:cNvPr id="109" name="TextBox 108"/>
-          <p:cNvSpPr txBox="1"/>
-          <p:nvPr/>
-        </p:nvSpPr>
-        <p:spPr>
-          <a:xfrm>
-            <a:off x="6400800" y="3726180"/>
-            <a:ext cx="1097280" cy="411480"/>
-          </a:xfrm>
-          <a:prstGeom prst="rect">
-            <a:avLst/>
-          </a:prstGeom>
-          <a:noFill/>
-        </p:spPr>
-        <p:txBody>
-          <a:bodyPr wrap="square">
-            <a:spAutoFit/>
-          </a:bodyPr>
-          <a:lstStyle/>
-          <a:p>
-            <a:pPr algn="ctr">
-              <a:defRPr sz="1100" b="1">
-                <a:solidFill>
-                  <a:srgbClr val="FFFFFF"/>
-                </a:solidFill>
-                <a:latin typeface="Calibri"/>
-              </a:defRPr>
-            </a:pPr>
-            <a:r>
-              <a:t>32</a:t>
-            </a:r>
-          </a:p>
-        </p:txBody>
-      </p:sp>
-      <p:sp>
-        <p:nvSpPr>
-          <p:cNvPr id="110" name="Rectangle 109"/>
-          <p:cNvSpPr/>
-          <p:nvPr/>
-        </p:nvSpPr>
-        <p:spPr>
-          <a:xfrm>
-            <a:off x="7534655" y="3648456"/>
-            <a:ext cx="1024127" cy="393192"/>
-          </a:xfrm>
-          <a:prstGeom prst="rect">
-            <a:avLst/>
-          </a:prstGeom>
-          <a:solidFill>
-            <a:srgbClr val="05784C"/>
-          </a:solidFill>
-          <a:ln>
-            <a:noFill/>
-          </a:ln>
-        </p:spPr>
-        <p:style>
-          <a:lnRef idx="1">
-            <a:schemeClr val="accent1"/>
-          </a:lnRef>
-          <a:fillRef idx="3">
-            <a:schemeClr val="accent1"/>
-          </a:fillRef>
-          <a:effectRef idx="2">
-            <a:schemeClr val="accent1"/>
-          </a:effectRef>
-          <a:fontRef idx="minor">
-            <a:schemeClr val="lt1"/>
-          </a:fontRef>
-        </p:style>
-        <p:txBody>
-          <a:bodyPr rtlCol="0" anchor="ctr"/>
-          <a:lstStyle/>
-          <a:p>
-            <a:pPr algn="ctr"/>
-          </a:p>
-        </p:txBody>
-      </p:sp>
-      <p:sp>
-        <p:nvSpPr>
-          <p:cNvPr id="111" name="TextBox 110"/>
-          <p:cNvSpPr txBox="1"/>
-          <p:nvPr/>
-        </p:nvSpPr>
-        <p:spPr>
-          <a:xfrm>
-            <a:off x="7498079" y="3726180"/>
-            <a:ext cx="1097280" cy="411480"/>
-          </a:xfrm>
-          <a:prstGeom prst="rect">
-            <a:avLst/>
-          </a:prstGeom>
-          <a:noFill/>
-        </p:spPr>
-        <p:txBody>
-          <a:bodyPr wrap="square">
-            <a:spAutoFit/>
-          </a:bodyPr>
-          <a:lstStyle/>
-          <a:p>
-            <a:pPr algn="ctr">
-              <a:defRPr sz="1100" b="1">
-                <a:solidFill>
-                  <a:srgbClr val="FFFFFF"/>
-                </a:solidFill>
-                <a:latin typeface="Calibri"/>
-              </a:defRPr>
-            </a:pPr>
-            <a:r>
-              <a:t>45</a:t>
-            </a:r>
-          </a:p>
-        </p:txBody>
-      </p:sp>
-      <p:sp>
-        <p:nvSpPr>
-          <p:cNvPr id="112" name="Rectangle 111"/>
-          <p:cNvSpPr/>
-          <p:nvPr/>
-        </p:nvSpPr>
-        <p:spPr>
-          <a:xfrm>
-            <a:off x="8631935" y="3648456"/>
-            <a:ext cx="1024127" cy="393192"/>
-          </a:xfrm>
-          <a:prstGeom prst="rect">
-            <a:avLst/>
-          </a:prstGeom>
-          <a:solidFill>
-            <a:srgbClr val="D1D5DB"/>
-          </a:solidFill>
-          <a:ln>
-            <a:noFill/>
-          </a:ln>
-        </p:spPr>
-        <p:style>
-          <a:lnRef idx="1">
-            <a:schemeClr val="accent1"/>
-          </a:lnRef>
-          <a:fillRef idx="3">
-            <a:schemeClr val="accent1"/>
-          </a:fillRef>
-          <a:effectRef idx="2">
-            <a:schemeClr val="accent1"/>
-          </a:effectRef>
-          <a:fontRef idx="minor">
-            <a:schemeClr val="lt1"/>
-          </a:fontRef>
-        </p:style>
-        <p:txBody>
-          <a:bodyPr rtlCol="0" anchor="ctr"/>
-          <a:lstStyle/>
-          <a:p>
-            <a:pPr algn="ctr"/>
-          </a:p>
-        </p:txBody>
-      </p:sp>
-      <p:sp>
-        <p:nvSpPr>
-          <p:cNvPr id="113" name="TextBox 112"/>
-          <p:cNvSpPr txBox="1"/>
-          <p:nvPr/>
-        </p:nvSpPr>
-        <p:spPr>
-          <a:xfrm>
-            <a:off x="8595359" y="3726180"/>
-            <a:ext cx="1097280" cy="411480"/>
-          </a:xfrm>
-          <a:prstGeom prst="rect">
-            <a:avLst/>
-          </a:prstGeom>
-          <a:noFill/>
-        </p:spPr>
-        <p:txBody>
-          <a:bodyPr wrap="square">
-            <a:spAutoFit/>
-          </a:bodyPr>
-          <a:lstStyle/>
-          <a:p>
-            <a:pPr algn="ctr">
-              <a:defRPr sz="1100" b="1">
-                <a:solidFill>
-                  <a:srgbClr val="FFFFFF"/>
-                </a:solidFill>
-                <a:latin typeface="Calibri"/>
-              </a:defRPr>
-            </a:pPr>
-            <a:r>
-              <a:t>0</a:t>
-            </a:r>
-          </a:p>
-        </p:txBody>
-      </p:sp>
-      <p:sp>
-        <p:nvSpPr>
-          <p:cNvPr id="114" name="TextBox 113"/>
-          <p:cNvSpPr txBox="1"/>
-          <p:nvPr/>
-        </p:nvSpPr>
-        <p:spPr>
-          <a:xfrm>
-            <a:off x="9692640" y="3726180"/>
-            <a:ext cx="822960" cy="429768"/>
-          </a:xfrm>
-          <a:prstGeom prst="rect">
-            <a:avLst/>
-          </a:prstGeom>
-          <a:noFill/>
-        </p:spPr>
-        <p:txBody>
-          <a:bodyPr wrap="square">
-            <a:spAutoFit/>
-          </a:bodyPr>
-          <a:lstStyle/>
-          <a:p>
-            <a:pPr algn="ctr">
-              <a:defRPr sz="1100" b="1">
-                <a:solidFill>
-                  <a:srgbClr val="DC2626"/>
-                </a:solidFill>
-                <a:latin typeface="Calibri"/>
-              </a:defRPr>
-            </a:pPr>
-            <a:r>
-              <a:t>34%</a:t>
-            </a:r>
-          </a:p>
-        </p:txBody>
-      </p:sp>
-      <p:sp>
-        <p:nvSpPr>
-          <p:cNvPr id="115" name="Rectangle 114"/>
-          <p:cNvSpPr/>
-          <p:nvPr/>
-        </p:nvSpPr>
-        <p:spPr>
-          <a:xfrm>
-            <a:off x="0" y="4279392"/>
-            <a:ext cx="12191695" cy="9144"/>
-          </a:xfrm>
-          <a:prstGeom prst="rect">
-            <a:avLst/>
-          </a:prstGeom>
-          <a:solidFill>
-            <a:srgbClr val="E5E7EB"/>
-          </a:solidFill>
-          <a:ln>
-            <a:noFill/>
-          </a:ln>
-        </p:spPr>
-        <p:style>
-          <a:lnRef idx="1">
-            <a:schemeClr val="accent1"/>
-          </a:lnRef>
-          <a:fillRef idx="3">
-            <a:schemeClr val="accent1"/>
-          </a:fillRef>
-          <a:effectRef idx="2">
-            <a:schemeClr val="accent1"/>
-          </a:effectRef>
-          <a:fontRef idx="minor">
-            <a:schemeClr val="lt1"/>
-          </a:fontRef>
-        </p:style>
-        <p:txBody>
-          <a:bodyPr rtlCol="0" anchor="ctr"/>
-          <a:lstStyle/>
-          <a:p>
-            <a:pPr algn="ctr"/>
-          </a:p>
-        </p:txBody>
-      </p:sp>
-      <p:sp>
-        <p:nvSpPr>
-          <p:cNvPr id="116" name="TextBox 115"/>
-          <p:cNvSpPr txBox="1"/>
-          <p:nvPr/>
-        </p:nvSpPr>
-        <p:spPr>
-          <a:xfrm>
-            <a:off x="182880" y="4352544"/>
-            <a:ext cx="1371600" cy="201168"/>
-          </a:xfrm>
-          <a:prstGeom prst="rect">
-            <a:avLst/>
-          </a:prstGeom>
-          <a:noFill/>
-        </p:spPr>
-        <p:txBody>
-          <a:bodyPr wrap="square">
-            <a:spAutoFit/>
-          </a:bodyPr>
-          <a:lstStyle/>
-          <a:p>
-            <a:pPr algn="l">
-              <a:defRPr sz="850" b="1">
+              <a:t>Derrick Leroy</a:t>
+            </a:r>
+          </a:p>
+        </p:txBody>
+      </p:sp>
+      <p:sp>
+        <p:nvSpPr>
+          <p:cNvPr id="151" name="TextBox 150"/>
+          <p:cNvSpPr txBox="1"/>
+          <p:nvPr/>
+        </p:nvSpPr>
+        <p:spPr>
+          <a:xfrm>
+            <a:off x="1554480" y="5321808"/>
+            <a:ext cx="594360" cy="201168"/>
+          </a:xfrm>
+          <a:prstGeom prst="rect">
+            <a:avLst/>
+          </a:prstGeom>
+          <a:noFill/>
+        </p:spPr>
+        <p:txBody>
+          <a:bodyPr wrap="square">
+            <a:spAutoFit/>
+          </a:bodyPr>
+          <a:lstStyle/>
+          <a:p>
+            <a:pPr algn="ctr">
+              <a:defRPr sz="900" b="0">
                 <a:solidFill>
                   <a:srgbClr val="6B7280"/>
                 </a:solidFill>
@@ -24685,35 +25959,107 @@
               </a:defRPr>
             </a:pPr>
             <a:r>
-              <a:t>Rep</a:t>
-            </a:r>
-          </a:p>
-        </p:txBody>
-      </p:sp>
-      <p:sp>
-        <p:nvSpPr>
-          <p:cNvPr id="117" name="TextBox 116"/>
-          <p:cNvSpPr txBox="1"/>
-          <p:nvPr/>
-        </p:nvSpPr>
-        <p:spPr>
-          <a:xfrm>
-            <a:off x="1554480" y="4352544"/>
-            <a:ext cx="594360" cy="201168"/>
-          </a:xfrm>
-          <a:prstGeom prst="rect">
-            <a:avLst/>
-          </a:prstGeom>
-          <a:noFill/>
-        </p:spPr>
-        <p:txBody>
-          <a:bodyPr wrap="square">
-            <a:spAutoFit/>
-          </a:bodyPr>
-          <a:lstStyle/>
-          <a:p>
-            <a:pPr algn="ctr">
-              <a:defRPr sz="850" b="1">
+              <a:t>BDM</a:t>
+            </a:r>
+          </a:p>
+        </p:txBody>
+      </p:sp>
+      <p:sp>
+        <p:nvSpPr>
+          <p:cNvPr id="152" name="TextBox 151"/>
+          <p:cNvSpPr txBox="1"/>
+          <p:nvPr/>
+        </p:nvSpPr>
+        <p:spPr>
+          <a:xfrm>
+            <a:off x="2148840" y="5321808"/>
+            <a:ext cx="1188720" cy="201168"/>
+          </a:xfrm>
+          <a:prstGeom prst="rect">
+            <a:avLst/>
+          </a:prstGeom>
+          <a:noFill/>
+        </p:spPr>
+        <p:txBody>
+          <a:bodyPr wrap="square">
+            <a:spAutoFit/>
+          </a:bodyPr>
+          <a:lstStyle/>
+          <a:p>
+            <a:pPr algn="ctr">
+              <a:defRPr sz="900" b="0">
+                <a:solidFill>
+                  <a:srgbClr val="111827"/>
+                </a:solidFill>
+                <a:latin typeface="Calibri"/>
+              </a:defRPr>
+            </a:pPr>
+            <a:r>
+              <a:t>366</a:t>
+            </a:r>
+          </a:p>
+        </p:txBody>
+      </p:sp>
+      <p:sp>
+        <p:nvSpPr>
+          <p:cNvPr id="153" name="TextBox 152"/>
+          <p:cNvSpPr txBox="1"/>
+          <p:nvPr/>
+        </p:nvSpPr>
+        <p:spPr>
+          <a:xfrm>
+            <a:off x="3337560" y="5321808"/>
+            <a:ext cx="914400" cy="201168"/>
+          </a:xfrm>
+          <a:prstGeom prst="rect">
+            <a:avLst/>
+          </a:prstGeom>
+          <a:noFill/>
+        </p:spPr>
+        <p:txBody>
+          <a:bodyPr wrap="square">
+            <a:spAutoFit/>
+          </a:bodyPr>
+          <a:lstStyle/>
+          <a:p>
+            <a:pPr algn="ctr">
+              <a:defRPr sz="900" b="0">
+                <a:solidFill>
+                  <a:srgbClr val="111827"/>
+                </a:solidFill>
+                <a:latin typeface="Calibri"/>
+              </a:defRPr>
+            </a:pPr>
+            <a:r>
+              <a:t>14</a:t>
+            </a:r>
+          </a:p>
+        </p:txBody>
+      </p:sp>
+      <p:sp>
+        <p:nvSpPr>
+          <p:cNvPr id="154" name="TextBox 153"/>
+          <p:cNvSpPr txBox="1"/>
+          <p:nvPr/>
+        </p:nvSpPr>
+        <p:spPr>
+          <a:xfrm>
+            <a:off x="4251960" y="5321808"/>
+            <a:ext cx="777240" cy="201168"/>
+          </a:xfrm>
+          <a:prstGeom prst="rect">
+            <a:avLst/>
+          </a:prstGeom>
+          <a:noFill/>
+        </p:spPr>
+        <p:txBody>
+          <a:bodyPr wrap="square">
+            <a:spAutoFit/>
+          </a:bodyPr>
+          <a:lstStyle/>
+          <a:p>
+            <a:pPr algn="ctr">
+              <a:defRPr sz="900" b="0">
                 <a:solidFill>
                   <a:srgbClr val="6B7280"/>
                 </a:solidFill>
@@ -24721,56 +26067,92 @@
               </a:defRPr>
             </a:pPr>
             <a:r>
-              <a:t>Role</a:t>
-            </a:r>
-          </a:p>
-        </p:txBody>
-      </p:sp>
-      <p:sp>
-        <p:nvSpPr>
-          <p:cNvPr id="118" name="TextBox 117"/>
-          <p:cNvSpPr txBox="1"/>
-          <p:nvPr/>
-        </p:nvSpPr>
-        <p:spPr>
-          <a:xfrm>
-            <a:off x="2148840" y="4352544"/>
-            <a:ext cx="1188720" cy="201168"/>
-          </a:xfrm>
-          <a:prstGeom prst="rect">
-            <a:avLst/>
-          </a:prstGeom>
-          <a:noFill/>
-        </p:spPr>
-        <p:txBody>
-          <a:bodyPr wrap="square">
-            <a:spAutoFit/>
-          </a:bodyPr>
-          <a:lstStyle/>
-          <a:p>
-            <a:pPr algn="ctr">
-              <a:defRPr sz="850" b="1">
-                <a:solidFill>
-                  <a:srgbClr val="6B7280"/>
-                </a:solidFill>
-                <a:latin typeface="Calibri"/>
-              </a:defRPr>
-            </a:pPr>
-            <a:r>
-              <a:t>Calls</a:t>
-            </a:r>
-          </a:p>
-        </p:txBody>
-      </p:sp>
-      <p:sp>
-        <p:nvSpPr>
-          <p:cNvPr id="119" name="TextBox 118"/>
-          <p:cNvSpPr txBox="1"/>
-          <p:nvPr/>
-        </p:nvSpPr>
-        <p:spPr>
-          <a:xfrm>
-            <a:off x="3337560" y="4352544"/>
+              <a:t>43</a:t>
+            </a:r>
+          </a:p>
+        </p:txBody>
+      </p:sp>
+      <p:sp>
+        <p:nvSpPr>
+          <p:cNvPr id="155" name="TextBox 154"/>
+          <p:cNvSpPr txBox="1"/>
+          <p:nvPr/>
+        </p:nvSpPr>
+        <p:spPr>
+          <a:xfrm>
+            <a:off x="5029200" y="5321808"/>
+            <a:ext cx="777240" cy="201168"/>
+          </a:xfrm>
+          <a:prstGeom prst="rect">
+            <a:avLst/>
+          </a:prstGeom>
+          <a:noFill/>
+        </p:spPr>
+        <p:txBody>
+          <a:bodyPr wrap="square">
+            <a:spAutoFit/>
+          </a:bodyPr>
+          <a:lstStyle/>
+          <a:p>
+            <a:pPr algn="ctr">
+              <a:defRPr sz="900" b="0">
+                <a:solidFill>
+                  <a:srgbClr val="111827"/>
+                </a:solidFill>
+                <a:latin typeface="Calibri"/>
+              </a:defRPr>
+            </a:pPr>
+            <a:r>
+              <a:t>380</a:t>
+            </a:r>
+          </a:p>
+        </p:txBody>
+      </p:sp>
+      <p:sp>
+        <p:nvSpPr>
+          <p:cNvPr id="156" name="TextBox 155"/>
+          <p:cNvSpPr txBox="1"/>
+          <p:nvPr/>
+        </p:nvSpPr>
+        <p:spPr>
+          <a:xfrm>
+            <a:off x="5806440" y="5321808"/>
+            <a:ext cx="777240" cy="201168"/>
+          </a:xfrm>
+          <a:prstGeom prst="rect">
+            <a:avLst/>
+          </a:prstGeom>
+          <a:noFill/>
+        </p:spPr>
+        <p:txBody>
+          <a:bodyPr wrap="square">
+            <a:spAutoFit/>
+          </a:bodyPr>
+          <a:lstStyle/>
+          <a:p>
+            <a:pPr algn="ctr">
+              <a:defRPr sz="900" b="0">
+                <a:solidFill>
+                  <a:srgbClr val="111827"/>
+                </a:solidFill>
+                <a:latin typeface="Calibri"/>
+              </a:defRPr>
+            </a:pPr>
+            <a:r>
+              <a:t>54.7</a:t>
+            </a:r>
+          </a:p>
+        </p:txBody>
+      </p:sp>
+      <p:sp>
+        <p:nvSpPr>
+          <p:cNvPr id="157" name="TextBox 156"/>
+          <p:cNvSpPr txBox="1"/>
+          <p:nvPr/>
+        </p:nvSpPr>
+        <p:spPr>
+          <a:xfrm>
+            <a:off x="6583679" y="5321808"/>
             <a:ext cx="914400" cy="201168"/>
           </a:xfrm>
           <a:prstGeom prst="rect">
@@ -24785,172 +26167,28 @@
           <a:lstStyle/>
           <a:p>
             <a:pPr algn="ctr">
-              <a:defRPr sz="850" b="1">
-                <a:solidFill>
-                  <a:srgbClr val="6B7280"/>
-                </a:solidFill>
-                <a:latin typeface="Calibri"/>
-              </a:defRPr>
-            </a:pPr>
-            <a:r>
-              <a:t>Meetings</a:t>
-            </a:r>
-          </a:p>
-        </p:txBody>
-      </p:sp>
-      <p:sp>
-        <p:nvSpPr>
-          <p:cNvPr id="120" name="TextBox 119"/>
-          <p:cNvSpPr txBox="1"/>
-          <p:nvPr/>
-        </p:nvSpPr>
-        <p:spPr>
-          <a:xfrm>
-            <a:off x="4251960" y="4352544"/>
-            <a:ext cx="777240" cy="201168"/>
-          </a:xfrm>
-          <a:prstGeom prst="rect">
-            <a:avLst/>
-          </a:prstGeom>
-          <a:noFill/>
-        </p:spPr>
-        <p:txBody>
-          <a:bodyPr wrap="square">
-            <a:spAutoFit/>
-          </a:bodyPr>
-          <a:lstStyle/>
-          <a:p>
-            <a:pPr algn="ctr">
-              <a:defRPr sz="850" b="1">
-                <a:solidFill>
-                  <a:srgbClr val="6B7280"/>
-                </a:solidFill>
-                <a:latin typeface="Calibri"/>
-              </a:defRPr>
-            </a:pPr>
-            <a:r>
-              <a:t>Inbound</a:t>
-            </a:r>
-          </a:p>
-        </p:txBody>
-      </p:sp>
-      <p:sp>
-        <p:nvSpPr>
-          <p:cNvPr id="121" name="TextBox 120"/>
-          <p:cNvSpPr txBox="1"/>
-          <p:nvPr/>
-        </p:nvSpPr>
-        <p:spPr>
-          <a:xfrm>
-            <a:off x="5029200" y="4352544"/>
-            <a:ext cx="777240" cy="201168"/>
-          </a:xfrm>
-          <a:prstGeom prst="rect">
-            <a:avLst/>
-          </a:prstGeom>
-          <a:noFill/>
-        </p:spPr>
-        <p:txBody>
-          <a:bodyPr wrap="square">
-            <a:spAutoFit/>
-          </a:bodyPr>
-          <a:lstStyle/>
-          <a:p>
-            <a:pPr algn="ctr">
-              <a:defRPr sz="850" b="1">
-                <a:solidFill>
-                  <a:srgbClr val="6B7280"/>
-                </a:solidFill>
-                <a:latin typeface="Calibri"/>
-              </a:defRPr>
-            </a:pPr>
-            <a:r>
-              <a:t>Total</a:t>
-            </a:r>
-          </a:p>
-        </p:txBody>
-      </p:sp>
-      <p:sp>
-        <p:nvSpPr>
-          <p:cNvPr id="122" name="TextBox 121"/>
-          <p:cNvSpPr txBox="1"/>
-          <p:nvPr/>
-        </p:nvSpPr>
-        <p:spPr>
-          <a:xfrm>
-            <a:off x="5806440" y="4352544"/>
-            <a:ext cx="777240" cy="201168"/>
-          </a:xfrm>
-          <a:prstGeom prst="rect">
-            <a:avLst/>
-          </a:prstGeom>
-          <a:noFill/>
-        </p:spPr>
-        <p:txBody>
-          <a:bodyPr wrap="square">
-            <a:spAutoFit/>
-          </a:bodyPr>
-          <a:lstStyle/>
-          <a:p>
-            <a:pPr algn="ctr">
-              <a:defRPr sz="850" b="1">
-                <a:solidFill>
-                  <a:srgbClr val="6B7280"/>
-                </a:solidFill>
-                <a:latin typeface="Calibri"/>
-              </a:defRPr>
-            </a:pPr>
-            <a:r>
-              <a:t>Avg/Wk</a:t>
-            </a:r>
-          </a:p>
-        </p:txBody>
-      </p:sp>
-      <p:sp>
-        <p:nvSpPr>
-          <p:cNvPr id="123" name="TextBox 122"/>
-          <p:cNvSpPr txBox="1"/>
-          <p:nvPr/>
-        </p:nvSpPr>
-        <p:spPr>
-          <a:xfrm>
-            <a:off x="6583679" y="4352544"/>
-            <a:ext cx="914400" cy="201168"/>
-          </a:xfrm>
-          <a:prstGeom prst="rect">
-            <a:avLst/>
-          </a:prstGeom>
-          <a:noFill/>
-        </p:spPr>
-        <p:txBody>
-          <a:bodyPr wrap="square">
-            <a:spAutoFit/>
-          </a:bodyPr>
-          <a:lstStyle/>
-          <a:p>
-            <a:pPr algn="ctr">
-              <a:defRPr sz="850" b="1">
-                <a:solidFill>
-                  <a:srgbClr val="6B7280"/>
-                </a:solidFill>
-                <a:latin typeface="Calibri"/>
-              </a:defRPr>
-            </a:pPr>
-            <a:r>
-              <a:t>% to Goal</a:t>
-            </a:r>
-          </a:p>
-        </p:txBody>
-      </p:sp>
-      <p:sp>
-        <p:nvSpPr>
-          <p:cNvPr id="124" name="TextBox 123"/>
-          <p:cNvSpPr txBox="1"/>
-          <p:nvPr/>
-        </p:nvSpPr>
-        <p:spPr>
-          <a:xfrm>
-            <a:off x="182880" y="4553712"/>
+              <a:defRPr sz="900" b="0">
+                <a:solidFill>
+                  <a:srgbClr val="059669"/>
+                </a:solidFill>
+                <a:latin typeface="Calibri"/>
+              </a:defRPr>
+            </a:pPr>
+            <a:r>
+              <a:t>137%</a:t>
+            </a:r>
+          </a:p>
+        </p:txBody>
+      </p:sp>
+      <p:sp>
+        <p:nvSpPr>
+          <p:cNvPr id="158" name="TextBox 157"/>
+          <p:cNvSpPr txBox="1"/>
+          <p:nvPr/>
+        </p:nvSpPr>
+        <p:spPr>
+          <a:xfrm>
+            <a:off x="182880" y="5577840"/>
             <a:ext cx="1371600" cy="201168"/>
           </a:xfrm>
           <a:prstGeom prst="rect">
@@ -24973,1244 +26211,6 @@
               </a:defRPr>
             </a:pPr>
             <a:r>
-              <a:t>Derek Janssen</a:t>
-            </a:r>
-          </a:p>
-        </p:txBody>
-      </p:sp>
-      <p:sp>
-        <p:nvSpPr>
-          <p:cNvPr id="125" name="TextBox 124"/>
-          <p:cNvSpPr txBox="1"/>
-          <p:nvPr/>
-        </p:nvSpPr>
-        <p:spPr>
-          <a:xfrm>
-            <a:off x="1554480" y="4553712"/>
-            <a:ext cx="594360" cy="201168"/>
-          </a:xfrm>
-          <a:prstGeom prst="rect">
-            <a:avLst/>
-          </a:prstGeom>
-          <a:noFill/>
-        </p:spPr>
-        <p:txBody>
-          <a:bodyPr wrap="square">
-            <a:spAutoFit/>
-          </a:bodyPr>
-          <a:lstStyle/>
-          <a:p>
-            <a:pPr algn="ctr">
-              <a:defRPr sz="900" b="0">
-                <a:solidFill>
-                  <a:srgbClr val="6B7280"/>
-                </a:solidFill>
-                <a:latin typeface="Calibri"/>
-              </a:defRPr>
-            </a:pPr>
-            <a:r>
-              <a:t>BDM</a:t>
-            </a:r>
-          </a:p>
-        </p:txBody>
-      </p:sp>
-      <p:sp>
-        <p:nvSpPr>
-          <p:cNvPr id="126" name="TextBox 125"/>
-          <p:cNvSpPr txBox="1"/>
-          <p:nvPr/>
-        </p:nvSpPr>
-        <p:spPr>
-          <a:xfrm>
-            <a:off x="2148840" y="4553712"/>
-            <a:ext cx="1188720" cy="201168"/>
-          </a:xfrm>
-          <a:prstGeom prst="rect">
-            <a:avLst/>
-          </a:prstGeom>
-          <a:noFill/>
-        </p:spPr>
-        <p:txBody>
-          <a:bodyPr wrap="square">
-            <a:spAutoFit/>
-          </a:bodyPr>
-          <a:lstStyle/>
-          <a:p>
-            <a:pPr algn="ctr">
-              <a:defRPr sz="900" b="0">
-                <a:solidFill>
-                  <a:srgbClr val="111827"/>
-                </a:solidFill>
-                <a:latin typeface="Calibri"/>
-              </a:defRPr>
-            </a:pPr>
-            <a:r>
-              <a:t>381</a:t>
-            </a:r>
-          </a:p>
-        </p:txBody>
-      </p:sp>
-      <p:sp>
-        <p:nvSpPr>
-          <p:cNvPr id="127" name="TextBox 126"/>
-          <p:cNvSpPr txBox="1"/>
-          <p:nvPr/>
-        </p:nvSpPr>
-        <p:spPr>
-          <a:xfrm>
-            <a:off x="3337560" y="4553712"/>
-            <a:ext cx="914400" cy="201168"/>
-          </a:xfrm>
-          <a:prstGeom prst="rect">
-            <a:avLst/>
-          </a:prstGeom>
-          <a:noFill/>
-        </p:spPr>
-        <p:txBody>
-          <a:bodyPr wrap="square">
-            <a:spAutoFit/>
-          </a:bodyPr>
-          <a:lstStyle/>
-          <a:p>
-            <a:pPr algn="ctr">
-              <a:defRPr sz="900" b="0">
-                <a:solidFill>
-                  <a:srgbClr val="111827"/>
-                </a:solidFill>
-                <a:latin typeface="Calibri"/>
-              </a:defRPr>
-            </a:pPr>
-            <a:r>
-              <a:t>47</a:t>
-            </a:r>
-          </a:p>
-        </p:txBody>
-      </p:sp>
-      <p:sp>
-        <p:nvSpPr>
-          <p:cNvPr id="128" name="TextBox 127"/>
-          <p:cNvSpPr txBox="1"/>
-          <p:nvPr/>
-        </p:nvSpPr>
-        <p:spPr>
-          <a:xfrm>
-            <a:off x="4251960" y="4553712"/>
-            <a:ext cx="777240" cy="201168"/>
-          </a:xfrm>
-          <a:prstGeom prst="rect">
-            <a:avLst/>
-          </a:prstGeom>
-          <a:noFill/>
-        </p:spPr>
-        <p:txBody>
-          <a:bodyPr wrap="square">
-            <a:spAutoFit/>
-          </a:bodyPr>
-          <a:lstStyle/>
-          <a:p>
-            <a:pPr algn="ctr">
-              <a:defRPr sz="900" b="0">
-                <a:solidFill>
-                  <a:srgbClr val="6B7280"/>
-                </a:solidFill>
-                <a:latin typeface="Calibri"/>
-              </a:defRPr>
-            </a:pPr>
-            <a:r>
-              <a:t>74</a:t>
-            </a:r>
-          </a:p>
-        </p:txBody>
-      </p:sp>
-      <p:sp>
-        <p:nvSpPr>
-          <p:cNvPr id="129" name="TextBox 128"/>
-          <p:cNvSpPr txBox="1"/>
-          <p:nvPr/>
-        </p:nvSpPr>
-        <p:spPr>
-          <a:xfrm>
-            <a:off x="5029200" y="4553712"/>
-            <a:ext cx="777240" cy="201168"/>
-          </a:xfrm>
-          <a:prstGeom prst="rect">
-            <a:avLst/>
-          </a:prstGeom>
-          <a:noFill/>
-        </p:spPr>
-        <p:txBody>
-          <a:bodyPr wrap="square">
-            <a:spAutoFit/>
-          </a:bodyPr>
-          <a:lstStyle/>
-          <a:p>
-            <a:pPr algn="ctr">
-              <a:defRPr sz="900" b="0">
-                <a:solidFill>
-                  <a:srgbClr val="111827"/>
-                </a:solidFill>
-                <a:latin typeface="Calibri"/>
-              </a:defRPr>
-            </a:pPr>
-            <a:r>
-              <a:t>428</a:t>
-            </a:r>
-          </a:p>
-        </p:txBody>
-      </p:sp>
-      <p:sp>
-        <p:nvSpPr>
-          <p:cNvPr id="130" name="TextBox 129"/>
-          <p:cNvSpPr txBox="1"/>
-          <p:nvPr/>
-        </p:nvSpPr>
-        <p:spPr>
-          <a:xfrm>
-            <a:off x="5806440" y="4553712"/>
-            <a:ext cx="777240" cy="201168"/>
-          </a:xfrm>
-          <a:prstGeom prst="rect">
-            <a:avLst/>
-          </a:prstGeom>
-          <a:noFill/>
-        </p:spPr>
-        <p:txBody>
-          <a:bodyPr wrap="square">
-            <a:spAutoFit/>
-          </a:bodyPr>
-          <a:lstStyle/>
-          <a:p>
-            <a:pPr algn="ctr">
-              <a:defRPr sz="900" b="0">
-                <a:solidFill>
-                  <a:srgbClr val="111827"/>
-                </a:solidFill>
-                <a:latin typeface="Calibri"/>
-              </a:defRPr>
-            </a:pPr>
-            <a:r>
-              <a:t>62.2</a:t>
-            </a:r>
-          </a:p>
-        </p:txBody>
-      </p:sp>
-      <p:sp>
-        <p:nvSpPr>
-          <p:cNvPr id="131" name="TextBox 130"/>
-          <p:cNvSpPr txBox="1"/>
-          <p:nvPr/>
-        </p:nvSpPr>
-        <p:spPr>
-          <a:xfrm>
-            <a:off x="6583679" y="4553712"/>
-            <a:ext cx="914400" cy="201168"/>
-          </a:xfrm>
-          <a:prstGeom prst="rect">
-            <a:avLst/>
-          </a:prstGeom>
-          <a:noFill/>
-        </p:spPr>
-        <p:txBody>
-          <a:bodyPr wrap="square">
-            <a:spAutoFit/>
-          </a:bodyPr>
-          <a:lstStyle/>
-          <a:p>
-            <a:pPr algn="ctr">
-              <a:defRPr sz="900" b="0">
-                <a:solidFill>
-                  <a:srgbClr val="059669"/>
-                </a:solidFill>
-                <a:latin typeface="Calibri"/>
-              </a:defRPr>
-            </a:pPr>
-            <a:r>
-              <a:t>155%</a:t>
-            </a:r>
-          </a:p>
-        </p:txBody>
-      </p:sp>
-      <p:sp>
-        <p:nvSpPr>
-          <p:cNvPr id="132" name="Rectangle 131"/>
-          <p:cNvSpPr/>
-          <p:nvPr/>
-        </p:nvSpPr>
-        <p:spPr>
-          <a:xfrm>
-            <a:off x="182880" y="4791456"/>
-            <a:ext cx="7315200" cy="228600"/>
-          </a:xfrm>
-          <a:prstGeom prst="rect">
-            <a:avLst/>
-          </a:prstGeom>
-          <a:solidFill>
-            <a:srgbClr val="F9FAFB"/>
-          </a:solidFill>
-          <a:ln>
-            <a:noFill/>
-          </a:ln>
-        </p:spPr>
-        <p:style>
-          <a:lnRef idx="1">
-            <a:schemeClr val="accent1"/>
-          </a:lnRef>
-          <a:fillRef idx="3">
-            <a:schemeClr val="accent1"/>
-          </a:fillRef>
-          <a:effectRef idx="2">
-            <a:schemeClr val="accent1"/>
-          </a:effectRef>
-          <a:fontRef idx="minor">
-            <a:schemeClr val="lt1"/>
-          </a:fontRef>
-        </p:style>
-        <p:txBody>
-          <a:bodyPr rtlCol="0" anchor="ctr"/>
-          <a:lstStyle/>
-          <a:p>
-            <a:pPr algn="ctr"/>
-          </a:p>
-        </p:txBody>
-      </p:sp>
-      <p:sp>
-        <p:nvSpPr>
-          <p:cNvPr id="133" name="TextBox 132"/>
-          <p:cNvSpPr txBox="1"/>
-          <p:nvPr/>
-        </p:nvSpPr>
-        <p:spPr>
-          <a:xfrm>
-            <a:off x="182880" y="4809744"/>
-            <a:ext cx="1371600" cy="201168"/>
-          </a:xfrm>
-          <a:prstGeom prst="rect">
-            <a:avLst/>
-          </a:prstGeom>
-          <a:noFill/>
-        </p:spPr>
-        <p:txBody>
-          <a:bodyPr wrap="square">
-            <a:spAutoFit/>
-          </a:bodyPr>
-          <a:lstStyle/>
-          <a:p>
-            <a:pPr algn="l">
-              <a:defRPr sz="900" b="1">
-                <a:solidFill>
-                  <a:srgbClr val="111827"/>
-                </a:solidFill>
-                <a:latin typeface="Calibri"/>
-              </a:defRPr>
-            </a:pPr>
-            <a:r>
-              <a:t>Ron Douglas</a:t>
-            </a:r>
-          </a:p>
-        </p:txBody>
-      </p:sp>
-      <p:sp>
-        <p:nvSpPr>
-          <p:cNvPr id="134" name="TextBox 133"/>
-          <p:cNvSpPr txBox="1"/>
-          <p:nvPr/>
-        </p:nvSpPr>
-        <p:spPr>
-          <a:xfrm>
-            <a:off x="1554480" y="4809744"/>
-            <a:ext cx="594360" cy="201168"/>
-          </a:xfrm>
-          <a:prstGeom prst="rect">
-            <a:avLst/>
-          </a:prstGeom>
-          <a:noFill/>
-        </p:spPr>
-        <p:txBody>
-          <a:bodyPr wrap="square">
-            <a:spAutoFit/>
-          </a:bodyPr>
-          <a:lstStyle/>
-          <a:p>
-            <a:pPr algn="ctr">
-              <a:defRPr sz="900" b="0">
-                <a:solidFill>
-                  <a:srgbClr val="6B7280"/>
-                </a:solidFill>
-                <a:latin typeface="Calibri"/>
-              </a:defRPr>
-            </a:pPr>
-            <a:r>
-              <a:t>BDM</a:t>
-            </a:r>
-          </a:p>
-        </p:txBody>
-      </p:sp>
-      <p:sp>
-        <p:nvSpPr>
-          <p:cNvPr id="135" name="TextBox 134"/>
-          <p:cNvSpPr txBox="1"/>
-          <p:nvPr/>
-        </p:nvSpPr>
-        <p:spPr>
-          <a:xfrm>
-            <a:off x="2148840" y="4809744"/>
-            <a:ext cx="1188720" cy="201168"/>
-          </a:xfrm>
-          <a:prstGeom prst="rect">
-            <a:avLst/>
-          </a:prstGeom>
-          <a:noFill/>
-        </p:spPr>
-        <p:txBody>
-          <a:bodyPr wrap="square">
-            <a:spAutoFit/>
-          </a:bodyPr>
-          <a:lstStyle/>
-          <a:p>
-            <a:pPr algn="ctr">
-              <a:defRPr sz="900" b="0">
-                <a:solidFill>
-                  <a:srgbClr val="111827"/>
-                </a:solidFill>
-                <a:latin typeface="Calibri"/>
-              </a:defRPr>
-            </a:pPr>
-            <a:r>
-              <a:t>177</a:t>
-            </a:r>
-          </a:p>
-        </p:txBody>
-      </p:sp>
-      <p:sp>
-        <p:nvSpPr>
-          <p:cNvPr id="136" name="TextBox 135"/>
-          <p:cNvSpPr txBox="1"/>
-          <p:nvPr/>
-        </p:nvSpPr>
-        <p:spPr>
-          <a:xfrm>
-            <a:off x="3337560" y="4809744"/>
-            <a:ext cx="914400" cy="201168"/>
-          </a:xfrm>
-          <a:prstGeom prst="rect">
-            <a:avLst/>
-          </a:prstGeom>
-          <a:noFill/>
-        </p:spPr>
-        <p:txBody>
-          <a:bodyPr wrap="square">
-            <a:spAutoFit/>
-          </a:bodyPr>
-          <a:lstStyle/>
-          <a:p>
-            <a:pPr algn="ctr">
-              <a:defRPr sz="900" b="0">
-                <a:solidFill>
-                  <a:srgbClr val="111827"/>
-                </a:solidFill>
-                <a:latin typeface="Calibri"/>
-              </a:defRPr>
-            </a:pPr>
-            <a:r>
-              <a:t>23</a:t>
-            </a:r>
-          </a:p>
-        </p:txBody>
-      </p:sp>
-      <p:sp>
-        <p:nvSpPr>
-          <p:cNvPr id="137" name="TextBox 136"/>
-          <p:cNvSpPr txBox="1"/>
-          <p:nvPr/>
-        </p:nvSpPr>
-        <p:spPr>
-          <a:xfrm>
-            <a:off x="4251960" y="4809744"/>
-            <a:ext cx="777240" cy="201168"/>
-          </a:xfrm>
-          <a:prstGeom prst="rect">
-            <a:avLst/>
-          </a:prstGeom>
-          <a:noFill/>
-        </p:spPr>
-        <p:txBody>
-          <a:bodyPr wrap="square">
-            <a:spAutoFit/>
-          </a:bodyPr>
-          <a:lstStyle/>
-          <a:p>
-            <a:pPr algn="ctr">
-              <a:defRPr sz="900" b="0">
-                <a:solidFill>
-                  <a:srgbClr val="6B7280"/>
-                </a:solidFill>
-                <a:latin typeface="Calibri"/>
-              </a:defRPr>
-            </a:pPr>
-            <a:r>
-              <a:t>72</a:t>
-            </a:r>
-          </a:p>
-        </p:txBody>
-      </p:sp>
-      <p:sp>
-        <p:nvSpPr>
-          <p:cNvPr id="138" name="TextBox 137"/>
-          <p:cNvSpPr txBox="1"/>
-          <p:nvPr/>
-        </p:nvSpPr>
-        <p:spPr>
-          <a:xfrm>
-            <a:off x="5029200" y="4809744"/>
-            <a:ext cx="777240" cy="201168"/>
-          </a:xfrm>
-          <a:prstGeom prst="rect">
-            <a:avLst/>
-          </a:prstGeom>
-          <a:noFill/>
-        </p:spPr>
-        <p:txBody>
-          <a:bodyPr wrap="square">
-            <a:spAutoFit/>
-          </a:bodyPr>
-          <a:lstStyle/>
-          <a:p>
-            <a:pPr algn="ctr">
-              <a:defRPr sz="900" b="0">
-                <a:solidFill>
-                  <a:srgbClr val="111827"/>
-                </a:solidFill>
-                <a:latin typeface="Calibri"/>
-              </a:defRPr>
-            </a:pPr>
-            <a:r>
-              <a:t>200</a:t>
-            </a:r>
-          </a:p>
-        </p:txBody>
-      </p:sp>
-      <p:sp>
-        <p:nvSpPr>
-          <p:cNvPr id="139" name="TextBox 138"/>
-          <p:cNvSpPr txBox="1"/>
-          <p:nvPr/>
-        </p:nvSpPr>
-        <p:spPr>
-          <a:xfrm>
-            <a:off x="5806440" y="4809744"/>
-            <a:ext cx="777240" cy="201168"/>
-          </a:xfrm>
-          <a:prstGeom prst="rect">
-            <a:avLst/>
-          </a:prstGeom>
-          <a:noFill/>
-        </p:spPr>
-        <p:txBody>
-          <a:bodyPr wrap="square">
-            <a:spAutoFit/>
-          </a:bodyPr>
-          <a:lstStyle/>
-          <a:p>
-            <a:pPr algn="ctr">
-              <a:defRPr sz="900" b="0">
-                <a:solidFill>
-                  <a:srgbClr val="111827"/>
-                </a:solidFill>
-                <a:latin typeface="Calibri"/>
-              </a:defRPr>
-            </a:pPr>
-            <a:r>
-              <a:t>32.8</a:t>
-            </a:r>
-          </a:p>
-        </p:txBody>
-      </p:sp>
-      <p:sp>
-        <p:nvSpPr>
-          <p:cNvPr id="140" name="TextBox 139"/>
-          <p:cNvSpPr txBox="1"/>
-          <p:nvPr/>
-        </p:nvSpPr>
-        <p:spPr>
-          <a:xfrm>
-            <a:off x="6583679" y="4809744"/>
-            <a:ext cx="914400" cy="201168"/>
-          </a:xfrm>
-          <a:prstGeom prst="rect">
-            <a:avLst/>
-          </a:prstGeom>
-          <a:noFill/>
-        </p:spPr>
-        <p:txBody>
-          <a:bodyPr wrap="square">
-            <a:spAutoFit/>
-          </a:bodyPr>
-          <a:lstStyle/>
-          <a:p>
-            <a:pPr algn="ctr">
-              <a:defRPr sz="900" b="0">
-                <a:solidFill>
-                  <a:srgbClr val="D97706"/>
-                </a:solidFill>
-                <a:latin typeface="Calibri"/>
-              </a:defRPr>
-            </a:pPr>
-            <a:r>
-              <a:t>82%</a:t>
-            </a:r>
-          </a:p>
-        </p:txBody>
-      </p:sp>
-      <p:sp>
-        <p:nvSpPr>
-          <p:cNvPr id="141" name="TextBox 140"/>
-          <p:cNvSpPr txBox="1"/>
-          <p:nvPr/>
-        </p:nvSpPr>
-        <p:spPr>
-          <a:xfrm>
-            <a:off x="182880" y="5065776"/>
-            <a:ext cx="1371600" cy="201168"/>
-          </a:xfrm>
-          <a:prstGeom prst="rect">
-            <a:avLst/>
-          </a:prstGeom>
-          <a:noFill/>
-        </p:spPr>
-        <p:txBody>
-          <a:bodyPr wrap="square">
-            <a:spAutoFit/>
-          </a:bodyPr>
-          <a:lstStyle/>
-          <a:p>
-            <a:pPr algn="l">
-              <a:defRPr sz="900" b="1">
-                <a:solidFill>
-                  <a:srgbClr val="111827"/>
-                </a:solidFill>
-                <a:latin typeface="Calibri"/>
-              </a:defRPr>
-            </a:pPr>
-            <a:r>
-              <a:t>Christopher Hayes</a:t>
-            </a:r>
-          </a:p>
-        </p:txBody>
-      </p:sp>
-      <p:sp>
-        <p:nvSpPr>
-          <p:cNvPr id="142" name="TextBox 141"/>
-          <p:cNvSpPr txBox="1"/>
-          <p:nvPr/>
-        </p:nvSpPr>
-        <p:spPr>
-          <a:xfrm>
-            <a:off x="1554480" y="5065776"/>
-            <a:ext cx="594360" cy="201168"/>
-          </a:xfrm>
-          <a:prstGeom prst="rect">
-            <a:avLst/>
-          </a:prstGeom>
-          <a:noFill/>
-        </p:spPr>
-        <p:txBody>
-          <a:bodyPr wrap="square">
-            <a:spAutoFit/>
-          </a:bodyPr>
-          <a:lstStyle/>
-          <a:p>
-            <a:pPr algn="ctr">
-              <a:defRPr sz="900" b="0">
-                <a:solidFill>
-                  <a:srgbClr val="6B7280"/>
-                </a:solidFill>
-                <a:latin typeface="Calibri"/>
-              </a:defRPr>
-            </a:pPr>
-            <a:r>
-              <a:t>BDM</a:t>
-            </a:r>
-          </a:p>
-        </p:txBody>
-      </p:sp>
-      <p:sp>
-        <p:nvSpPr>
-          <p:cNvPr id="143" name="TextBox 142"/>
-          <p:cNvSpPr txBox="1"/>
-          <p:nvPr/>
-        </p:nvSpPr>
-        <p:spPr>
-          <a:xfrm>
-            <a:off x="2148840" y="5065776"/>
-            <a:ext cx="1188720" cy="201168"/>
-          </a:xfrm>
-          <a:prstGeom prst="rect">
-            <a:avLst/>
-          </a:prstGeom>
-          <a:noFill/>
-        </p:spPr>
-        <p:txBody>
-          <a:bodyPr wrap="square">
-            <a:spAutoFit/>
-          </a:bodyPr>
-          <a:lstStyle/>
-          <a:p>
-            <a:pPr algn="ctr">
-              <a:defRPr sz="900" b="0">
-                <a:solidFill>
-                  <a:srgbClr val="111827"/>
-                </a:solidFill>
-                <a:latin typeface="Calibri"/>
-              </a:defRPr>
-            </a:pPr>
-            <a:r>
-              <a:t>208</a:t>
-            </a:r>
-          </a:p>
-        </p:txBody>
-      </p:sp>
-      <p:sp>
-        <p:nvSpPr>
-          <p:cNvPr id="144" name="TextBox 143"/>
-          <p:cNvSpPr txBox="1"/>
-          <p:nvPr/>
-        </p:nvSpPr>
-        <p:spPr>
-          <a:xfrm>
-            <a:off x="3337560" y="5065776"/>
-            <a:ext cx="914400" cy="201168"/>
-          </a:xfrm>
-          <a:prstGeom prst="rect">
-            <a:avLst/>
-          </a:prstGeom>
-          <a:noFill/>
-        </p:spPr>
-        <p:txBody>
-          <a:bodyPr wrap="square">
-            <a:spAutoFit/>
-          </a:bodyPr>
-          <a:lstStyle/>
-          <a:p>
-            <a:pPr algn="ctr">
-              <a:defRPr sz="900" b="0">
-                <a:solidFill>
-                  <a:srgbClr val="111827"/>
-                </a:solidFill>
-                <a:latin typeface="Calibri"/>
-              </a:defRPr>
-            </a:pPr>
-            <a:r>
-              <a:t>11</a:t>
-            </a:r>
-          </a:p>
-        </p:txBody>
-      </p:sp>
-      <p:sp>
-        <p:nvSpPr>
-          <p:cNvPr id="145" name="TextBox 144"/>
-          <p:cNvSpPr txBox="1"/>
-          <p:nvPr/>
-        </p:nvSpPr>
-        <p:spPr>
-          <a:xfrm>
-            <a:off x="4251960" y="5065776"/>
-            <a:ext cx="777240" cy="201168"/>
-          </a:xfrm>
-          <a:prstGeom prst="rect">
-            <a:avLst/>
-          </a:prstGeom>
-          <a:noFill/>
-        </p:spPr>
-        <p:txBody>
-          <a:bodyPr wrap="square">
-            <a:spAutoFit/>
-          </a:bodyPr>
-          <a:lstStyle/>
-          <a:p>
-            <a:pPr algn="ctr">
-              <a:defRPr sz="900" b="0">
-                <a:solidFill>
-                  <a:srgbClr val="6B7280"/>
-                </a:solidFill>
-                <a:latin typeface="Calibri"/>
-              </a:defRPr>
-            </a:pPr>
-            <a:r>
-              <a:t>37</a:t>
-            </a:r>
-          </a:p>
-        </p:txBody>
-      </p:sp>
-      <p:sp>
-        <p:nvSpPr>
-          <p:cNvPr id="146" name="TextBox 145"/>
-          <p:cNvSpPr txBox="1"/>
-          <p:nvPr/>
-        </p:nvSpPr>
-        <p:spPr>
-          <a:xfrm>
-            <a:off x="5029200" y="5065776"/>
-            <a:ext cx="777240" cy="201168"/>
-          </a:xfrm>
-          <a:prstGeom prst="rect">
-            <a:avLst/>
-          </a:prstGeom>
-          <a:noFill/>
-        </p:spPr>
-        <p:txBody>
-          <a:bodyPr wrap="square">
-            <a:spAutoFit/>
-          </a:bodyPr>
-          <a:lstStyle/>
-          <a:p>
-            <a:pPr algn="ctr">
-              <a:defRPr sz="900" b="0">
-                <a:solidFill>
-                  <a:srgbClr val="111827"/>
-                </a:solidFill>
-                <a:latin typeface="Calibri"/>
-              </a:defRPr>
-            </a:pPr>
-            <a:r>
-              <a:t>219</a:t>
-            </a:r>
-          </a:p>
-        </p:txBody>
-      </p:sp>
-      <p:sp>
-        <p:nvSpPr>
-          <p:cNvPr id="147" name="TextBox 146"/>
-          <p:cNvSpPr txBox="1"/>
-          <p:nvPr/>
-        </p:nvSpPr>
-        <p:spPr>
-          <a:xfrm>
-            <a:off x="5806440" y="5065776"/>
-            <a:ext cx="777240" cy="201168"/>
-          </a:xfrm>
-          <a:prstGeom prst="rect">
-            <a:avLst/>
-          </a:prstGeom>
-          <a:noFill/>
-        </p:spPr>
-        <p:txBody>
-          <a:bodyPr wrap="square">
-            <a:spAutoFit/>
-          </a:bodyPr>
-          <a:lstStyle/>
-          <a:p>
-            <a:pPr algn="ctr">
-              <a:defRPr sz="900" b="0">
-                <a:solidFill>
-                  <a:srgbClr val="111827"/>
-                </a:solidFill>
-                <a:latin typeface="Calibri"/>
-              </a:defRPr>
-            </a:pPr>
-            <a:r>
-              <a:t>34.3</a:t>
-            </a:r>
-          </a:p>
-        </p:txBody>
-      </p:sp>
-      <p:sp>
-        <p:nvSpPr>
-          <p:cNvPr id="148" name="TextBox 147"/>
-          <p:cNvSpPr txBox="1"/>
-          <p:nvPr/>
-        </p:nvSpPr>
-        <p:spPr>
-          <a:xfrm>
-            <a:off x="6583679" y="5065776"/>
-            <a:ext cx="914400" cy="201168"/>
-          </a:xfrm>
-          <a:prstGeom prst="rect">
-            <a:avLst/>
-          </a:prstGeom>
-          <a:noFill/>
-        </p:spPr>
-        <p:txBody>
-          <a:bodyPr wrap="square">
-            <a:spAutoFit/>
-          </a:bodyPr>
-          <a:lstStyle/>
-          <a:p>
-            <a:pPr algn="ctr">
-              <a:defRPr sz="900" b="0">
-                <a:solidFill>
-                  <a:srgbClr val="D97706"/>
-                </a:solidFill>
-                <a:latin typeface="Calibri"/>
-              </a:defRPr>
-            </a:pPr>
-            <a:r>
-              <a:t>86%</a:t>
-            </a:r>
-          </a:p>
-        </p:txBody>
-      </p:sp>
-      <p:sp>
-        <p:nvSpPr>
-          <p:cNvPr id="149" name="Rectangle 148"/>
-          <p:cNvSpPr/>
-          <p:nvPr/>
-        </p:nvSpPr>
-        <p:spPr>
-          <a:xfrm>
-            <a:off x="182880" y="5303520"/>
-            <a:ext cx="7315200" cy="228600"/>
-          </a:xfrm>
-          <a:prstGeom prst="rect">
-            <a:avLst/>
-          </a:prstGeom>
-          <a:solidFill>
-            <a:srgbClr val="F9FAFB"/>
-          </a:solidFill>
-          <a:ln>
-            <a:noFill/>
-          </a:ln>
-        </p:spPr>
-        <p:style>
-          <a:lnRef idx="1">
-            <a:schemeClr val="accent1"/>
-          </a:lnRef>
-          <a:fillRef idx="3">
-            <a:schemeClr val="accent1"/>
-          </a:fillRef>
-          <a:effectRef idx="2">
-            <a:schemeClr val="accent1"/>
-          </a:effectRef>
-          <a:fontRef idx="minor">
-            <a:schemeClr val="lt1"/>
-          </a:fontRef>
-        </p:style>
-        <p:txBody>
-          <a:bodyPr rtlCol="0" anchor="ctr"/>
-          <a:lstStyle/>
-          <a:p>
-            <a:pPr algn="ctr"/>
-          </a:p>
-        </p:txBody>
-      </p:sp>
-      <p:sp>
-        <p:nvSpPr>
-          <p:cNvPr id="150" name="TextBox 149"/>
-          <p:cNvSpPr txBox="1"/>
-          <p:nvPr/>
-        </p:nvSpPr>
-        <p:spPr>
-          <a:xfrm>
-            <a:off x="182880" y="5321808"/>
-            <a:ext cx="1371600" cy="201168"/>
-          </a:xfrm>
-          <a:prstGeom prst="rect">
-            <a:avLst/>
-          </a:prstGeom>
-          <a:noFill/>
-        </p:spPr>
-        <p:txBody>
-          <a:bodyPr wrap="square">
-            <a:spAutoFit/>
-          </a:bodyPr>
-          <a:lstStyle/>
-          <a:p>
-            <a:pPr algn="l">
-              <a:defRPr sz="900" b="1">
-                <a:solidFill>
-                  <a:srgbClr val="111827"/>
-                </a:solidFill>
-                <a:latin typeface="Calibri"/>
-              </a:defRPr>
-            </a:pPr>
-            <a:r>
-              <a:t>Derrick Leroy</a:t>
-            </a:r>
-          </a:p>
-        </p:txBody>
-      </p:sp>
-      <p:sp>
-        <p:nvSpPr>
-          <p:cNvPr id="151" name="TextBox 150"/>
-          <p:cNvSpPr txBox="1"/>
-          <p:nvPr/>
-        </p:nvSpPr>
-        <p:spPr>
-          <a:xfrm>
-            <a:off x="1554480" y="5321808"/>
-            <a:ext cx="594360" cy="201168"/>
-          </a:xfrm>
-          <a:prstGeom prst="rect">
-            <a:avLst/>
-          </a:prstGeom>
-          <a:noFill/>
-        </p:spPr>
-        <p:txBody>
-          <a:bodyPr wrap="square">
-            <a:spAutoFit/>
-          </a:bodyPr>
-          <a:lstStyle/>
-          <a:p>
-            <a:pPr algn="ctr">
-              <a:defRPr sz="900" b="0">
-                <a:solidFill>
-                  <a:srgbClr val="6B7280"/>
-                </a:solidFill>
-                <a:latin typeface="Calibri"/>
-              </a:defRPr>
-            </a:pPr>
-            <a:r>
-              <a:t>BDM</a:t>
-            </a:r>
-          </a:p>
-        </p:txBody>
-      </p:sp>
-      <p:sp>
-        <p:nvSpPr>
-          <p:cNvPr id="152" name="TextBox 151"/>
-          <p:cNvSpPr txBox="1"/>
-          <p:nvPr/>
-        </p:nvSpPr>
-        <p:spPr>
-          <a:xfrm>
-            <a:off x="2148840" y="5321808"/>
-            <a:ext cx="1188720" cy="201168"/>
-          </a:xfrm>
-          <a:prstGeom prst="rect">
-            <a:avLst/>
-          </a:prstGeom>
-          <a:noFill/>
-        </p:spPr>
-        <p:txBody>
-          <a:bodyPr wrap="square">
-            <a:spAutoFit/>
-          </a:bodyPr>
-          <a:lstStyle/>
-          <a:p>
-            <a:pPr algn="ctr">
-              <a:defRPr sz="900" b="0">
-                <a:solidFill>
-                  <a:srgbClr val="111827"/>
-                </a:solidFill>
-                <a:latin typeface="Calibri"/>
-              </a:defRPr>
-            </a:pPr>
-            <a:r>
-              <a:t>365</a:t>
-            </a:r>
-          </a:p>
-        </p:txBody>
-      </p:sp>
-      <p:sp>
-        <p:nvSpPr>
-          <p:cNvPr id="153" name="TextBox 152"/>
-          <p:cNvSpPr txBox="1"/>
-          <p:nvPr/>
-        </p:nvSpPr>
-        <p:spPr>
-          <a:xfrm>
-            <a:off x="3337560" y="5321808"/>
-            <a:ext cx="914400" cy="201168"/>
-          </a:xfrm>
-          <a:prstGeom prst="rect">
-            <a:avLst/>
-          </a:prstGeom>
-          <a:noFill/>
-        </p:spPr>
-        <p:txBody>
-          <a:bodyPr wrap="square">
-            <a:spAutoFit/>
-          </a:bodyPr>
-          <a:lstStyle/>
-          <a:p>
-            <a:pPr algn="ctr">
-              <a:defRPr sz="900" b="0">
-                <a:solidFill>
-                  <a:srgbClr val="111827"/>
-                </a:solidFill>
-                <a:latin typeface="Calibri"/>
-              </a:defRPr>
-            </a:pPr>
-            <a:r>
-              <a:t>14</a:t>
-            </a:r>
-          </a:p>
-        </p:txBody>
-      </p:sp>
-      <p:sp>
-        <p:nvSpPr>
-          <p:cNvPr id="154" name="TextBox 153"/>
-          <p:cNvSpPr txBox="1"/>
-          <p:nvPr/>
-        </p:nvSpPr>
-        <p:spPr>
-          <a:xfrm>
-            <a:off x="4251960" y="5321808"/>
-            <a:ext cx="777240" cy="201168"/>
-          </a:xfrm>
-          <a:prstGeom prst="rect">
-            <a:avLst/>
-          </a:prstGeom>
-          <a:noFill/>
-        </p:spPr>
-        <p:txBody>
-          <a:bodyPr wrap="square">
-            <a:spAutoFit/>
-          </a:bodyPr>
-          <a:lstStyle/>
-          <a:p>
-            <a:pPr algn="ctr">
-              <a:defRPr sz="900" b="0">
-                <a:solidFill>
-                  <a:srgbClr val="6B7280"/>
-                </a:solidFill>
-                <a:latin typeface="Calibri"/>
-              </a:defRPr>
-            </a:pPr>
-            <a:r>
-              <a:t>40</a:t>
-            </a:r>
-          </a:p>
-        </p:txBody>
-      </p:sp>
-      <p:sp>
-        <p:nvSpPr>
-          <p:cNvPr id="155" name="TextBox 154"/>
-          <p:cNvSpPr txBox="1"/>
-          <p:nvPr/>
-        </p:nvSpPr>
-        <p:spPr>
-          <a:xfrm>
-            <a:off x="5029200" y="5321808"/>
-            <a:ext cx="777240" cy="201168"/>
-          </a:xfrm>
-          <a:prstGeom prst="rect">
-            <a:avLst/>
-          </a:prstGeom>
-          <a:noFill/>
-        </p:spPr>
-        <p:txBody>
-          <a:bodyPr wrap="square">
-            <a:spAutoFit/>
-          </a:bodyPr>
-          <a:lstStyle/>
-          <a:p>
-            <a:pPr algn="ctr">
-              <a:defRPr sz="900" b="0">
-                <a:solidFill>
-                  <a:srgbClr val="111827"/>
-                </a:solidFill>
-                <a:latin typeface="Calibri"/>
-              </a:defRPr>
-            </a:pPr>
-            <a:r>
-              <a:t>379</a:t>
-            </a:r>
-          </a:p>
-        </p:txBody>
-      </p:sp>
-      <p:sp>
-        <p:nvSpPr>
-          <p:cNvPr id="156" name="TextBox 155"/>
-          <p:cNvSpPr txBox="1"/>
-          <p:nvPr/>
-        </p:nvSpPr>
-        <p:spPr>
-          <a:xfrm>
-            <a:off x="5806440" y="5321808"/>
-            <a:ext cx="777240" cy="201168"/>
-          </a:xfrm>
-          <a:prstGeom prst="rect">
-            <a:avLst/>
-          </a:prstGeom>
-          <a:noFill/>
-        </p:spPr>
-        <p:txBody>
-          <a:bodyPr wrap="square">
-            <a:spAutoFit/>
-          </a:bodyPr>
-          <a:lstStyle/>
-          <a:p>
-            <a:pPr algn="ctr">
-              <a:defRPr sz="900" b="0">
-                <a:solidFill>
-                  <a:srgbClr val="111827"/>
-                </a:solidFill>
-                <a:latin typeface="Calibri"/>
-              </a:defRPr>
-            </a:pPr>
-            <a:r>
-              <a:t>54.7</a:t>
-            </a:r>
-          </a:p>
-        </p:txBody>
-      </p:sp>
-      <p:sp>
-        <p:nvSpPr>
-          <p:cNvPr id="157" name="TextBox 156"/>
-          <p:cNvSpPr txBox="1"/>
-          <p:nvPr/>
-        </p:nvSpPr>
-        <p:spPr>
-          <a:xfrm>
-            <a:off x="6583679" y="5321808"/>
-            <a:ext cx="914400" cy="201168"/>
-          </a:xfrm>
-          <a:prstGeom prst="rect">
-            <a:avLst/>
-          </a:prstGeom>
-          <a:noFill/>
-        </p:spPr>
-        <p:txBody>
-          <a:bodyPr wrap="square">
-            <a:spAutoFit/>
-          </a:bodyPr>
-          <a:lstStyle/>
-          <a:p>
-            <a:pPr algn="ctr">
-              <a:defRPr sz="900" b="0">
-                <a:solidFill>
-                  <a:srgbClr val="059669"/>
-                </a:solidFill>
-                <a:latin typeface="Calibri"/>
-              </a:defRPr>
-            </a:pPr>
-            <a:r>
-              <a:t>137%</a:t>
-            </a:r>
-          </a:p>
-        </p:txBody>
-      </p:sp>
-      <p:sp>
-        <p:nvSpPr>
-          <p:cNvPr id="158" name="TextBox 157"/>
-          <p:cNvSpPr txBox="1"/>
-          <p:nvPr/>
-        </p:nvSpPr>
-        <p:spPr>
-          <a:xfrm>
-            <a:off x="182880" y="5577840"/>
-            <a:ext cx="1371600" cy="201168"/>
-          </a:xfrm>
-          <a:prstGeom prst="rect">
-            <a:avLst/>
-          </a:prstGeom>
-          <a:noFill/>
-        </p:spPr>
-        <p:txBody>
-          <a:bodyPr wrap="square">
-            <a:spAutoFit/>
-          </a:bodyPr>
-          <a:lstStyle/>
-          <a:p>
-            <a:pPr algn="l">
-              <a:defRPr sz="900" b="1">
-                <a:solidFill>
-                  <a:srgbClr val="111827"/>
-                </a:solidFill>
-                <a:latin typeface="Calibri"/>
-              </a:defRPr>
-            </a:pPr>
-            <a:r>
               <a:t>Westy McLaughlin</a:t>
             </a:r>
           </a:p>
@@ -26283,7 +26283,7 @@
               </a:defRPr>
             </a:pPr>
             <a:r>
-              <a:t>214</a:t>
+              <a:t>220</a:t>
             </a:r>
           </a:p>
         </p:txBody>
@@ -26319,7 +26319,7 @@
               </a:defRPr>
             </a:pPr>
             <a:r>
-              <a:t>11</a:t>
+              <a:t>13</a:t>
             </a:r>
           </a:p>
         </p:txBody>
@@ -26355,7 +26355,7 @@
               </a:defRPr>
             </a:pPr>
             <a:r>
-              <a:t>43</a:t>
+              <a:t>44</a:t>
             </a:r>
           </a:p>
         </p:txBody>
@@ -26391,7 +26391,7 @@
               </a:defRPr>
             </a:pPr>
             <a:r>
-              <a:t>225</a:t>
+              <a:t>233</a:t>
             </a:r>
           </a:p>
         </p:txBody>
@@ -27868,7 +27868,7 @@
             <a:avLst/>
           </a:prstGeom>
           <a:solidFill>
-            <a:srgbClr val="D1D5DB"/>
+            <a:srgbClr val="DC2626"/>
           </a:solidFill>
           <a:ln>
             <a:noFill/>
@@ -27927,7 +27927,7 @@
               </a:defRPr>
             </a:pPr>
             <a:r>
-              <a:t>0</a:t>
+              <a:t>3</a:t>
             </a:r>
           </a:p>
         </p:txBody>
@@ -28464,7 +28464,7 @@
             <a:avLst/>
           </a:prstGeom>
           <a:solidFill>
-            <a:srgbClr val="D1D5DB"/>
+            <a:srgbClr val="DC2626"/>
           </a:solidFill>
           <a:ln>
             <a:noFill/>
@@ -28523,7 +28523,7 @@
               </a:defRPr>
             </a:pPr>
             <a:r>
-              <a:t>0</a:t>
+              <a:t>10</a:t>
             </a:r>
           </a:p>
         </p:txBody>
@@ -28559,7 +28559,7 @@
               </a:defRPr>
             </a:pPr>
             <a:r>
-              <a:t>52%</a:t>
+              <a:t>56%</a:t>
             </a:r>
           </a:p>
         </p:txBody>
@@ -29017,7 +29017,7 @@
             <a:avLst/>
           </a:prstGeom>
           <a:solidFill>
-            <a:srgbClr val="D1D5DB"/>
+            <a:srgbClr val="DC2626"/>
           </a:solidFill>
           <a:ln>
             <a:noFill/>
@@ -29076,7 +29076,7 @@
               </a:defRPr>
             </a:pPr>
             <a:r>
-              <a:t>0</a:t>
+              <a:t>8</a:t>
             </a:r>
           </a:p>
         </p:txBody>
@@ -29112,7 +29112,7 @@
               </a:defRPr>
             </a:pPr>
             <a:r>
-              <a:t>65%</a:t>
+              <a:t>68%</a:t>
             </a:r>
           </a:p>
         </p:txBody>
@@ -30238,7 +30238,7 @@
             <a:avLst/>
           </a:prstGeom>
           <a:solidFill>
-            <a:srgbClr val="D1D5DB"/>
+            <a:srgbClr val="DC2626"/>
           </a:solidFill>
           <a:ln>
             <a:noFill/>
@@ -30297,7 +30297,7 @@
               </a:defRPr>
             </a:pPr>
             <a:r>
-              <a:t>0</a:t>
+              <a:t>5</a:t>
             </a:r>
           </a:p>
         </p:txBody>
@@ -30772,7 +30772,7 @@
               </a:defRPr>
             </a:pPr>
             <a:r>
-              <a:t>308</a:t>
+              <a:t>311</a:t>
             </a:r>
           </a:p>
         </p:txBody>
@@ -30880,7 +30880,7 @@
               </a:defRPr>
             </a:pPr>
             <a:r>
-              <a:t>317</a:t>
+              <a:t>320</a:t>
             </a:r>
           </a:p>
         </p:txBody>
@@ -31103,7 +31103,7 @@
               </a:defRPr>
             </a:pPr>
             <a:r>
-              <a:t>124</a:t>
+              <a:t>134</a:t>
             </a:r>
           </a:p>
         </p:txBody>
@@ -31175,7 +31175,7 @@
               </a:defRPr>
             </a:pPr>
             <a:r>
-              <a:t>8</a:t>
+              <a:t>9</a:t>
             </a:r>
           </a:p>
         </p:txBody>
@@ -31211,7 +31211,7 @@
               </a:defRPr>
             </a:pPr>
             <a:r>
-              <a:t>131</a:t>
+              <a:t>141</a:t>
             </a:r>
           </a:p>
         </p:txBody>
@@ -31247,7 +31247,7 @@
               </a:defRPr>
             </a:pPr>
             <a:r>
-              <a:t>26.2</a:t>
+              <a:t>28.2</a:t>
             </a:r>
           </a:p>
         </p:txBody>
@@ -31283,7 +31283,7 @@
               </a:defRPr>
             </a:pPr>
             <a:r>
-              <a:t>52%</a:t>
+              <a:t>56%</a:t>
             </a:r>
           </a:p>
         </p:txBody>
@@ -31391,7 +31391,7 @@
               </a:defRPr>
             </a:pPr>
             <a:r>
-              <a:t>154</a:t>
+              <a:t>162</a:t>
             </a:r>
           </a:p>
         </p:txBody>
@@ -31463,7 +31463,7 @@
               </a:defRPr>
             </a:pPr>
             <a:r>
-              <a:t>18</a:t>
+              <a:t>23</a:t>
             </a:r>
           </a:p>
         </p:txBody>
@@ -31499,7 +31499,7 @@
               </a:defRPr>
             </a:pPr>
             <a:r>
-              <a:t>163</a:t>
+              <a:t>171</a:t>
             </a:r>
           </a:p>
         </p:txBody>
@@ -31535,7 +31535,7 @@
               </a:defRPr>
             </a:pPr>
             <a:r>
-              <a:t>32.6</a:t>
+              <a:t>34.2</a:t>
             </a:r>
           </a:p>
         </p:txBody>
@@ -31571,7 +31571,7 @@
               </a:defRPr>
             </a:pPr>
             <a:r>
-              <a:t>65%</a:t>
+              <a:t>68%</a:t>
             </a:r>
           </a:p>
         </p:txBody>
@@ -32010,7 +32010,7 @@
               </a:defRPr>
             </a:pPr>
             <a:r>
-              <a:t>98</a:t>
+              <a:t>102</a:t>
             </a:r>
           </a:p>
         </p:txBody>
@@ -32046,7 +32046,7 @@
               </a:defRPr>
             </a:pPr>
             <a:r>
-              <a:t>3</a:t>
+              <a:t>4</a:t>
             </a:r>
           </a:p>
         </p:txBody>
@@ -32118,7 +32118,7 @@
               </a:defRPr>
             </a:pPr>
             <a:r>
-              <a:t>101</a:t>
+              <a:t>106</a:t>
             </a:r>
           </a:p>
         </p:txBody>
@@ -39321,7 +39321,7 @@
               </a:defRPr>
             </a:pPr>
             <a:r>
-              <a:t>Sebanda Insurance</a:t>
+              <a:t>Simplex Group</a:t>
             </a:r>
           </a:p>
         </p:txBody>
@@ -39393,7 +39393,7 @@
               </a:defRPr>
             </a:pPr>
             <a:r>
-              <a:t>Simplex Group</a:t>
+              <a:t>True Coverage Insurance Agency, Llc</a:t>
             </a:r>
           </a:p>
         </p:txBody>

--- a/generated/Sales Dashboards/BD Rep Scoreboard.pptx
+++ b/generated/Sales Dashboards/BD Rep Scoreboard.pptx
@@ -578,7 +578,7 @@
           </a:p>
           <a:p>
             <a:r>
-              <a:t>- YTD chart: total company GWP per month (new business + renewals + endorsements) for each month of 2026.</a:t>
+              <a:t>- YTD chart: total company Production per month (New + Renewal + Endorsement) for each month of 2026. GWP elsewhere on the deck is net of Cancellations and Reinstatements per Nyles's definition; Production is the gross "what was written" view used here.</a:t>
             </a:r>
           </a:p>
           <a:p/>
@@ -5019,7 +5019,7 @@
               </a:defRPr>
             </a:pPr>
             <a:r>
-              <a:t>$37.2M</a:t>
+              <a:t>$17.2M</a:t>
             </a:r>
           </a:p>
         </p:txBody>
@@ -5055,7 +5055,7 @@
               </a:defRPr>
             </a:pPr>
             <a:r>
-              <a:t>Team GWP Q2 YTD  |  Proj. $70.4M</a:t>
+              <a:t>Team GWP Q2 YTD  |  Proj. $32.7M</a:t>
             </a:r>
           </a:p>
         </p:txBody>
@@ -5134,7 +5134,7 @@
               </a:defRPr>
             </a:pPr>
             <a:r>
-              <a:t>Pacing 116% of Q1 Final</a:t>
+              <a:t>Pacing 177% of Q1 Final</a:t>
             </a:r>
           </a:p>
         </p:txBody>
@@ -5752,13 +5752,13 @@
             <a:pPr algn="ctr">
               <a:defRPr sz="900" b="1">
                 <a:solidFill>
-                  <a:srgbClr val="DC2626"/>
-                </a:solidFill>
-                <a:latin typeface="Calibri"/>
-              </a:defRPr>
-            </a:pPr>
-            <a:r>
-              <a:t>▼ $2.3M vs Apr pace</a:t>
+                  <a:srgbClr val="059669"/>
+                </a:solidFill>
+                <a:latin typeface="Calibri"/>
+              </a:defRPr>
+            </a:pPr>
+            <a:r>
+              <a:t>▲ $3.1M vs Apr pace</a:t>
             </a:r>
           </a:p>
         </p:txBody>
@@ -6107,7 +6107,7 @@
               </a:defRPr>
             </a:pPr>
             <a:r>
-              <a:t>New Business (64%)</a:t>
+              <a:t>New Business (70%)</a:t>
             </a:r>
           </a:p>
         </p:txBody>
@@ -6179,7 +6179,7 @@
               </a:defRPr>
             </a:pPr>
             <a:r>
-              <a:t>Renewals (20%)</a:t>
+              <a:t>Renewals (22%)</a:t>
             </a:r>
           </a:p>
         </p:txBody>
@@ -6215,7 +6215,7 @@
               </a:defRPr>
             </a:pPr>
             <a:r>
-              <a:t>$5.7M</a:t>
+              <a:t>$2.7M</a:t>
             </a:r>
           </a:p>
         </p:txBody>
@@ -6251,7 +6251,7 @@
               </a:defRPr>
             </a:pPr>
             <a:r>
-              <a:t>Endorsements (15%)</a:t>
+              <a:t>Endorsements (8%)</a:t>
             </a:r>
           </a:p>
         </p:txBody>
@@ -6456,7 +6456,7 @@
               </a:defRPr>
             </a:pPr>
             <a:r>
-              <a:t>$60.8M</a:t>
+              <a:t>$18.4M</a:t>
             </a:r>
           </a:p>
         </p:txBody>
@@ -6787,7 +6787,7 @@
               </a:defRPr>
             </a:pPr>
             <a:r>
-              <a:t>MTD (May):  $12.80M written  ·  $22.04M pace  ·  18/31 days elapsed</a:t>
+              <a:t>MTD (May):  $7.47M written  ·  $12.86M pace  ·  18/31 days elapsed</a:t>
             </a:r>
           </a:p>
         </p:txBody>
@@ -21984,7 +21984,7 @@
               </a:defRPr>
             </a:pPr>
             <a:r>
-              <a:t>10</a:t>
+              <a:t>11</a:t>
             </a:r>
           </a:p>
         </p:txBody>
@@ -25376,7 +25376,7 @@
               </a:defRPr>
             </a:pPr>
             <a:r>
-              <a:t>188</a:t>
+              <a:t>189</a:t>
             </a:r>
           </a:p>
         </p:txBody>
@@ -25484,7 +25484,7 @@
               </a:defRPr>
             </a:pPr>
             <a:r>
-              <a:t>211</a:t>
+              <a:t>212</a:t>
             </a:r>
           </a:p>
         </p:txBody>
@@ -26067,7 +26067,7 @@
               </a:defRPr>
             </a:pPr>
             <a:r>
-              <a:t>43</a:t>
+              <a:t>44</a:t>
             </a:r>
           </a:p>
         </p:txBody>
@@ -28523,7 +28523,7 @@
               </a:defRPr>
             </a:pPr>
             <a:r>
-              <a:t>10</a:t>
+              <a:t>11</a:t>
             </a:r>
           </a:p>
         </p:txBody>
@@ -28559,7 +28559,7 @@
               </a:defRPr>
             </a:pPr>
             <a:r>
-              <a:t>56%</a:t>
+              <a:t>57%</a:t>
             </a:r>
           </a:p>
         </p:txBody>
@@ -31103,7 +31103,7 @@
               </a:defRPr>
             </a:pPr>
             <a:r>
-              <a:t>134</a:t>
+              <a:t>135</a:t>
             </a:r>
           </a:p>
         </p:txBody>
@@ -31211,7 +31211,7 @@
               </a:defRPr>
             </a:pPr>
             <a:r>
-              <a:t>141</a:t>
+              <a:t>142</a:t>
             </a:r>
           </a:p>
         </p:txBody>
@@ -31247,7 +31247,7 @@
               </a:defRPr>
             </a:pPr>
             <a:r>
-              <a:t>28.2</a:t>
+              <a:t>28.4</a:t>
             </a:r>
           </a:p>
         </p:txBody>
@@ -31283,7 +31283,7 @@
               </a:defRPr>
             </a:pPr>
             <a:r>
-              <a:t>56%</a:t>
+              <a:t>57%</a:t>
             </a:r>
           </a:p>
         </p:txBody>

--- a/generated/Sales Dashboards/BD Rep Scoreboard.pptx
+++ b/generated/Sales Dashboards/BD Rep Scoreboard.pptx
@@ -23277,7 +23277,7 @@
               </a:defRPr>
             </a:pPr>
             <a:r>
-              <a:t>12</a:t>
+              <a:t>13</a:t>
             </a:r>
           </a:p>
         </p:txBody>
@@ -25995,7 +25995,7 @@
               </a:defRPr>
             </a:pPr>
             <a:r>
-              <a:t>370</a:t>
+              <a:t>371</a:t>
             </a:r>
           </a:p>
         </p:txBody>
@@ -26103,7 +26103,7 @@
               </a:defRPr>
             </a:pPr>
             <a:r>
-              <a:t>389</a:t>
+              <a:t>390</a:t>
             </a:r>
           </a:p>
         </p:txBody>
@@ -29076,7 +29076,7 @@
               </a:defRPr>
             </a:pPr>
             <a:r>
-              <a:t>17</a:t>
+              <a:t>18</a:t>
             </a:r>
           </a:p>
         </p:txBody>
@@ -31391,7 +31391,7 @@
               </a:defRPr>
             </a:pPr>
             <a:r>
-              <a:t>170</a:t>
+              <a:t>171</a:t>
             </a:r>
           </a:p>
         </p:txBody>
@@ -31499,7 +31499,7 @@
               </a:defRPr>
             </a:pPr>
             <a:r>
-              <a:t>180</a:t>
+              <a:t>181</a:t>
             </a:r>
           </a:p>
         </p:txBody>
@@ -31535,7 +31535,7 @@
               </a:defRPr>
             </a:pPr>
             <a:r>
-              <a:t>36.0</a:t>
+              <a:t>36.2</a:t>
             </a:r>
           </a:p>
         </p:txBody>

--- a/generated/Sales Dashboards/BD Rep Scoreboard.pptx
+++ b/generated/Sales Dashboards/BD Rep Scoreboard.pptx
@@ -1661,7 +1661,7 @@
           </a:p>
           <a:p>
             <a:r>
-              <a:t>- We are 50 days into a 91-day quarter.</a:t>
+              <a:t>- We are 51 days into a 91-day quarter.</a:t>
             </a:r>
           </a:p>
         </p:txBody>
@@ -4902,7 +4902,7 @@
               </a:defRPr>
             </a:pPr>
             <a:r>
-              <a:t>As of May 20, 2026  |  50 days into Q2  |  41 days remaining</a:t>
+              <a:t>As of May 21, 2026  |  51 days into Q2  |  40 days remaining</a:t>
             </a:r>
           </a:p>
         </p:txBody>
@@ -4938,7 +4938,7 @@
               </a:defRPr>
             </a:pPr>
             <a:r>
-              <a:t>Generated May 20, 2026</a:t>
+              <a:t>Generated May 21, 2026</a:t>
             </a:r>
           </a:p>
         </p:txBody>
@@ -5019,7 +5019,7 @@
               </a:defRPr>
             </a:pPr>
             <a:r>
-              <a:t>$17.6M</a:t>
+              <a:t>$18.6M</a:t>
             </a:r>
           </a:p>
         </p:txBody>
@@ -5055,7 +5055,7 @@
               </a:defRPr>
             </a:pPr>
             <a:r>
-              <a:t>Team GWP Q2 YTD  |  Proj. $32.1M</a:t>
+              <a:t>Team GWP Q2 YTD  |  Proj. $33.1M</a:t>
             </a:r>
           </a:p>
         </p:txBody>
@@ -5134,7 +5134,7 @@
               </a:defRPr>
             </a:pPr>
             <a:r>
-              <a:t>Pacing 174% of Q1 Final</a:t>
+              <a:t>Pacing 179% of Q1 Final</a:t>
             </a:r>
           </a:p>
         </p:txBody>
@@ -5215,7 +5215,7 @@
               </a:defRPr>
             </a:pPr>
             <a:r>
-              <a:t>84%</a:t>
+              <a:t>85%</a:t>
             </a:r>
           </a:p>
         </p:txBody>
@@ -5411,7 +5411,7 @@
               </a:defRPr>
             </a:pPr>
             <a:r>
-              <a:t>28,464</a:t>
+              <a:t>29,226</a:t>
             </a:r>
           </a:p>
         </p:txBody>
@@ -5526,7 +5526,7 @@
               </a:defRPr>
             </a:pPr>
             <a:r>
-              <a:t>Pacing 113% of Q1 Final</a:t>
+              <a:t>Pacing 114% of Q1 Final</a:t>
             </a:r>
           </a:p>
         </p:txBody>
@@ -5758,7 +5758,7 @@
               </a:defRPr>
             </a:pPr>
             <a:r>
-              <a:t>▲ $2.4M vs Apr pace</a:t>
+              <a:t>▲ $3.3M vs Apr pace</a:t>
             </a:r>
           </a:p>
         </p:txBody>
@@ -5794,7 +5794,7 @@
               </a:defRPr>
             </a:pPr>
             <a:r>
-              <a:t>▲ 36pp vs Q1 avg (48%)</a:t>
+              <a:t>▲ 37pp vs Q1 avg (48%)</a:t>
             </a:r>
           </a:p>
         </p:txBody>
@@ -5830,7 +5830,7 @@
               </a:defRPr>
             </a:pPr>
             <a:r>
-              <a:t>▲ 10865 vs Apr (17599)</a:t>
+              <a:t>▲ 11632 vs Apr (17594)</a:t>
             </a:r>
           </a:p>
         </p:txBody>
@@ -6071,7 +6071,7 @@
               </a:defRPr>
             </a:pPr>
             <a:r>
-              <a:t>$24.7M</a:t>
+              <a:t>$25.8M</a:t>
             </a:r>
           </a:p>
         </p:txBody>
@@ -6143,7 +6143,7 @@
               </a:defRPr>
             </a:pPr>
             <a:r>
-              <a:t>$7.8M</a:t>
+              <a:t>$8.2M</a:t>
             </a:r>
           </a:p>
         </p:txBody>
@@ -6600,7 +6600,7 @@
               </a:defRPr>
             </a:pPr>
             <a:r>
-              <a:t>45,808</a:t>
+              <a:t>45,798</a:t>
             </a:r>
           </a:p>
         </p:txBody>
@@ -6787,7 +6787,7 @@
               </a:defRPr>
             </a:pPr>
             <a:r>
-              <a:t>MTD (May):  $7.85M written  ·  $12.17M pace  ·  20/31 days elapsed</a:t>
+              <a:t>MTD (May):  $8.84M written  ·  $13.05M pace  ·  21/31 days elapsed</a:t>
             </a:r>
           </a:p>
         </p:txBody>
@@ -6952,7 +6952,7 @@
               </a:defRPr>
             </a:pPr>
             <a:r>
-              <a:t>Largest fleet policies written Apr 1–May 20  ·  Ranked by premium  ·  Fleet = 4+ power units</a:t>
+              <a:t>Largest fleet policies written Apr 1–May 21  ·  Ranked by premium  ·  Fleet = 4+ power units</a:t>
             </a:r>
           </a:p>
         </p:txBody>
@@ -6988,7 +6988,7 @@
               </a:defRPr>
             </a:pPr>
             <a:r>
-              <a:t>Generated May 20, 2026</a:t>
+              <a:t>Generated May 21, 2026</a:t>
             </a:r>
           </a:p>
         </p:txBody>
@@ -7362,7 +7362,7 @@
               </a:defRPr>
             </a:pPr>
             <a:r>
-              <a:t>Jagdeep Singh Insurance Agency, Inc</a:t>
+              <a:t>Safeline Insurance Agency, Inc.</a:t>
             </a:r>
           </a:p>
         </p:txBody>
@@ -7398,7 +7398,7 @@
               </a:defRPr>
             </a:pPr>
             <a:r>
-              <a:t>$327K</a:t>
+              <a:t>$330K</a:t>
             </a:r>
           </a:p>
         </p:txBody>
@@ -7434,7 +7434,7 @@
               </a:defRPr>
             </a:pPr>
             <a:r>
-              <a:t>17</a:t>
+              <a:t>12</a:t>
             </a:r>
           </a:p>
         </p:txBody>
@@ -7585,7 +7585,7 @@
               </a:defRPr>
             </a:pPr>
             <a:r>
-              <a:t>Safeline Insurance Agency, Inc.</a:t>
+              <a:t>Jagdeep Singh Insurance Agency, Inc</a:t>
             </a:r>
           </a:p>
         </p:txBody>
@@ -7657,7 +7657,7 @@
               </a:defRPr>
             </a:pPr>
             <a:r>
-              <a:t>16</a:t>
+              <a:t>17</a:t>
             </a:r>
           </a:p>
         </p:txBody>
@@ -7808,7 +7808,7 @@
               </a:defRPr>
             </a:pPr>
             <a:r>
-              <a:t>Jtc Insurance Agency, Inc.</a:t>
+              <a:t>Safeline Insurance Agency, Inc.</a:t>
             </a:r>
           </a:p>
         </p:txBody>
@@ -7844,7 +7844,7 @@
               </a:defRPr>
             </a:pPr>
             <a:r>
-              <a:t>$318K</a:t>
+              <a:t>$327K</a:t>
             </a:r>
           </a:p>
         </p:txBody>
@@ -7880,7 +7880,7 @@
               </a:defRPr>
             </a:pPr>
             <a:r>
-              <a:t>21</a:t>
+              <a:t>16</a:t>
             </a:r>
           </a:p>
         </p:txBody>
@@ -7995,7 +7995,7 @@
               </a:defRPr>
             </a:pPr>
             <a:r>
-              <a:t>Christopher H.</a:t>
+              <a:t>Derek J.</a:t>
             </a:r>
           </a:p>
         </p:txBody>
@@ -8031,7 +8031,7 @@
               </a:defRPr>
             </a:pPr>
             <a:r>
-              <a:t>The Dorfman Organization, Ltd.</a:t>
+              <a:t>Jtc Insurance Agency, Inc.</a:t>
             </a:r>
           </a:p>
         </p:txBody>
@@ -8067,7 +8067,7 @@
               </a:defRPr>
             </a:pPr>
             <a:r>
-              <a:t>$308K</a:t>
+              <a:t>$318K</a:t>
             </a:r>
           </a:p>
         </p:txBody>
@@ -8103,7 +8103,7 @@
               </a:defRPr>
             </a:pPr>
             <a:r>
-              <a:t>22</a:t>
+              <a:t>21</a:t>
             </a:r>
           </a:p>
         </p:txBody>
@@ -8218,7 +8218,7 @@
               </a:defRPr>
             </a:pPr>
             <a:r>
-              <a:t>Derek J.</a:t>
+              <a:t>Christopher H.</a:t>
             </a:r>
           </a:p>
         </p:txBody>
@@ -8254,7 +8254,7 @@
               </a:defRPr>
             </a:pPr>
             <a:r>
-              <a:t>Safeline Insurance Agency, Inc.</a:t>
+              <a:t>The Dorfman Organization, Ltd.</a:t>
             </a:r>
           </a:p>
         </p:txBody>
@@ -8290,7 +8290,7 @@
               </a:defRPr>
             </a:pPr>
             <a:r>
-              <a:t>$303K</a:t>
+              <a:t>$308K</a:t>
             </a:r>
           </a:p>
         </p:txBody>
@@ -8326,7 +8326,7 @@
               </a:defRPr>
             </a:pPr>
             <a:r>
-              <a:t>11</a:t>
+              <a:t>22</a:t>
             </a:r>
           </a:p>
         </p:txBody>
@@ -8959,7 +8959,7 @@
               </a:defRPr>
             </a:pPr>
             <a:r>
-              <a:t>$243K</a:t>
+              <a:t>$254K</a:t>
             </a:r>
           </a:p>
         </p:txBody>
@@ -8995,7 +8995,7 @@
               </a:defRPr>
             </a:pPr>
             <a:r>
-              <a:t>20</a:t>
+              <a:t>21</a:t>
             </a:r>
           </a:p>
         </p:txBody>
@@ -11117,7 +11117,7 @@
               </a:defRPr>
             </a:pPr>
             <a:r>
-              <a:t>Christopher H.</a:t>
+              <a:t>Derek J.</a:t>
             </a:r>
           </a:p>
         </p:txBody>
@@ -11153,7 +11153,7 @@
               </a:defRPr>
             </a:pPr>
             <a:r>
-              <a:t>Truczone Insurance Agency LLC</a:t>
+              <a:t>Swan Insurance Sales, LLC</a:t>
             </a:r>
           </a:p>
         </p:txBody>
@@ -11189,7 +11189,7 @@
               </a:defRPr>
             </a:pPr>
             <a:r>
-              <a:t>$179K</a:t>
+              <a:t>$190K</a:t>
             </a:r>
           </a:p>
         </p:txBody>
@@ -11225,7 +11225,7 @@
               </a:defRPr>
             </a:pPr>
             <a:r>
-              <a:t>13</a:t>
+              <a:t>10</a:t>
             </a:r>
           </a:p>
         </p:txBody>
@@ -11340,7 +11340,7 @@
               </a:defRPr>
             </a:pPr>
             <a:r>
-              <a:t>Ron D.</a:t>
+              <a:t>Christopher H.</a:t>
             </a:r>
           </a:p>
         </p:txBody>
@@ -11376,7 +11376,7 @@
               </a:defRPr>
             </a:pPr>
             <a:r>
-              <a:t>USA SPECIALTY INSURANCE/DBA PREVENTTY</a:t>
+              <a:t>Truczone Insurance Agency LLC</a:t>
             </a:r>
           </a:p>
         </p:txBody>
@@ -11448,7 +11448,7 @@
               </a:defRPr>
             </a:pPr>
             <a:r>
-              <a:t>11</a:t>
+              <a:t>13</a:t>
             </a:r>
           </a:p>
         </p:txBody>
@@ -11563,7 +11563,7 @@
               </a:defRPr>
             </a:pPr>
             <a:r>
-              <a:t>Alexis B.</a:t>
+              <a:t>Ron D.</a:t>
             </a:r>
           </a:p>
         </p:txBody>
@@ -11599,7 +11599,7 @@
               </a:defRPr>
             </a:pPr>
             <a:r>
-              <a:t>Aic Insurance Agency LLC</a:t>
+              <a:t>USA SPECIALTY INSURANCE/DBA PREVENTTY</a:t>
             </a:r>
           </a:p>
         </p:txBody>
@@ -11635,7 +11635,7 @@
               </a:defRPr>
             </a:pPr>
             <a:r>
-              <a:t>$178K</a:t>
+              <a:t>$179K</a:t>
             </a:r>
           </a:p>
         </p:txBody>
@@ -11671,7 +11671,7 @@
               </a:defRPr>
             </a:pPr>
             <a:r>
-              <a:t>5</a:t>
+              <a:t>11</a:t>
             </a:r>
           </a:p>
         </p:txBody>
@@ -11750,7 +11750,7 @@
               </a:defRPr>
             </a:pPr>
             <a:r>
-              <a:t>Q2 Fleet Total: 203 fleet binds  ·  $19.0M bound premium</a:t>
+              <a:t>Q2 Fleet Total: 215 fleet binds  ·  $20.2M bound premium</a:t>
             </a:r>
           </a:p>
         </p:txBody>
@@ -11891,7 +11891,7 @@
               </a:defRPr>
             </a:pPr>
             <a:r>
-              <a:t>Ranked by bound GWP written  ·  Mint-shaded row = new vs last week’s deck  ·  Apr 1–May 20  ·  Individual producers</a:t>
+              <a:t>Ranked by bound GWP written  ·  Mint-shaded row = new vs last week’s deck  ·  Apr 1–May 21  ·  Individual producers</a:t>
             </a:r>
           </a:p>
         </p:txBody>
@@ -11927,7 +11927,7 @@
               </a:defRPr>
             </a:pPr>
             <a:r>
-              <a:t>Generated May 20, 2026</a:t>
+              <a:t>Generated May 21, 2026</a:t>
             </a:r>
           </a:p>
         </p:txBody>
@@ -12301,7 +12301,7 @@
               </a:defRPr>
             </a:pPr>
             <a:r>
-              <a:t>$3.8M</a:t>
+              <a:t>$3.9M</a:t>
             </a:r>
           </a:p>
         </p:txBody>
@@ -12488,7 +12488,7 @@
               </a:defRPr>
             </a:pPr>
             <a:r>
-              <a:t>$2.8M</a:t>
+              <a:t>$2.9M</a:t>
             </a:r>
           </a:p>
         </p:txBody>
@@ -12675,7 +12675,7 @@
               </a:defRPr>
             </a:pPr>
             <a:r>
-              <a:t>$1.5M</a:t>
+              <a:t>$1.6M</a:t>
             </a:r>
           </a:p>
         </p:txBody>
@@ -12790,7 +12790,7 @@
               </a:defRPr>
             </a:pPr>
             <a:r>
-              <a:t>Cecile Awad</a:t>
+              <a:t>Justin Feaster</a:t>
             </a:r>
           </a:p>
         </p:txBody>
@@ -12826,7 +12826,7 @@
               </a:defRPr>
             </a:pPr>
             <a:r>
-              <a:t>United Advantage Insurance Service…</a:t>
+              <a:t>American Fleet Insurance</a:t>
             </a:r>
           </a:p>
         </p:txBody>
@@ -12977,7 +12977,7 @@
               </a:defRPr>
             </a:pPr>
             <a:r>
-              <a:t>Justin Feaster</a:t>
+              <a:t>Cecile Awad</a:t>
             </a:r>
           </a:p>
         </p:txBody>
@@ -13013,7 +13013,7 @@
               </a:defRPr>
             </a:pPr>
             <a:r>
-              <a:t>American Fleet Insurance</a:t>
+              <a:t>United Advantage Insurance Service…</a:t>
             </a:r>
           </a:p>
         </p:txBody>
@@ -13049,7 +13049,7 @@
               </a:defRPr>
             </a:pPr>
             <a:r>
-              <a:t>$1.3M</a:t>
+              <a:t>$1.4M</a:t>
             </a:r>
           </a:p>
         </p:txBody>
@@ -13236,7 +13236,7 @@
               </a:defRPr>
             </a:pPr>
             <a:r>
-              <a:t>$1.2M</a:t>
+              <a:t>$1.3M</a:t>
             </a:r>
           </a:p>
         </p:txBody>
@@ -13423,7 +13423,7 @@
               </a:defRPr>
             </a:pPr>
             <a:r>
-              <a:t>$1.0M</a:t>
+              <a:t>$1.1M</a:t>
             </a:r>
           </a:p>
         </p:txBody>
@@ -13610,7 +13610,7 @@
               </a:defRPr>
             </a:pPr>
             <a:r>
-              <a:t>$978K</a:t>
+              <a:t>$979K</a:t>
             </a:r>
           </a:p>
         </p:txBody>
@@ -13797,7 +13797,7 @@
               </a:defRPr>
             </a:pPr>
             <a:r>
-              <a:t>$873K</a:t>
+              <a:t>$890K</a:t>
             </a:r>
           </a:p>
         </p:txBody>
@@ -14099,7 +14099,7 @@
               </a:defRPr>
             </a:pPr>
             <a:r>
-              <a:t>Raj Singh</a:t>
+              <a:t>Ateetpal Bansal</a:t>
             </a:r>
           </a:p>
         </p:txBody>
@@ -14135,7 +14135,7 @@
               </a:defRPr>
             </a:pPr>
             <a:r>
-              <a:t>Pride Insurance LLC</a:t>
+              <a:t>Jagdeep Singh Insurance Agency, In…</a:t>
             </a:r>
           </a:p>
         </p:txBody>
@@ -14171,7 +14171,7 @@
               </a:defRPr>
             </a:pPr>
             <a:r>
-              <a:t>$692K</a:t>
+              <a:t>$693K</a:t>
             </a:r>
           </a:p>
         </p:txBody>
@@ -14286,7 +14286,7 @@
               </a:defRPr>
             </a:pPr>
             <a:r>
-              <a:t>Ateetpal Bansal</a:t>
+              <a:t>Raj Singh</a:t>
             </a:r>
           </a:p>
         </p:txBody>
@@ -14322,7 +14322,7 @@
               </a:defRPr>
             </a:pPr>
             <a:r>
-              <a:t>Jagdeep Singh Insurance Agency, In…</a:t>
+              <a:t>Pride Insurance LLC</a:t>
             </a:r>
           </a:p>
         </p:txBody>
@@ -14358,7 +14358,7 @@
               </a:defRPr>
             </a:pPr>
             <a:r>
-              <a:t>$665K</a:t>
+              <a:t>$690K</a:t>
             </a:r>
           </a:p>
         </p:txBody>
@@ -14473,7 +14473,7 @@
               </a:defRPr>
             </a:pPr>
             <a:r>
-              <a:t>No Name Given Ankush</a:t>
+              <a:t>Shubham Kamra</a:t>
             </a:r>
           </a:p>
         </p:txBody>
@@ -14509,7 +14509,7 @@
               </a:defRPr>
             </a:pPr>
             <a:r>
-              <a:t>Vintage Insurance Agency Inc (The)</a:t>
+              <a:t>A.S.I.A Inc</a:t>
             </a:r>
           </a:p>
         </p:txBody>
@@ -14545,7 +14545,7 @@
               </a:defRPr>
             </a:pPr>
             <a:r>
-              <a:t>$606K</a:t>
+              <a:t>$647K</a:t>
             </a:r>
           </a:p>
         </p:txBody>
@@ -14660,7 +14660,7 @@
               </a:defRPr>
             </a:pPr>
             <a:r>
-              <a:t>Shubham Kamra</a:t>
+              <a:t>No Name Given Ankush</a:t>
             </a:r>
           </a:p>
         </p:txBody>
@@ -14696,7 +14696,7 @@
               </a:defRPr>
             </a:pPr>
             <a:r>
-              <a:t>A.S.I.A Inc</a:t>
+              <a:t>Vintage Insurance Agency Inc (The)</a:t>
             </a:r>
           </a:p>
         </p:txBody>
@@ -14732,7 +14732,7 @@
               </a:defRPr>
             </a:pPr>
             <a:r>
-              <a:t>$587K</a:t>
+              <a:t>$616K</a:t>
             </a:r>
           </a:p>
         </p:txBody>
@@ -14919,7 +14919,7 @@
               </a:defRPr>
             </a:pPr>
             <a:r>
-              <a:t>$574K</a:t>
+              <a:t>$592K</a:t>
             </a:r>
           </a:p>
         </p:txBody>
@@ -15408,7 +15408,7 @@
               </a:defRPr>
             </a:pPr>
             <a:r>
-              <a:t>Scott Procops</a:t>
+              <a:t>Diego Giraldo</a:t>
             </a:r>
           </a:p>
         </p:txBody>
@@ -15444,7 +15444,7 @@
               </a:defRPr>
             </a:pPr>
             <a:r>
-              <a:t>Specialty Coverage Insurance Agenc…</a:t>
+              <a:t>Horizons Insurance And Financial S…</a:t>
             </a:r>
           </a:p>
         </p:txBody>
@@ -15480,7 +15480,7 @@
               </a:defRPr>
             </a:pPr>
             <a:r>
-              <a:t>$454K</a:t>
+              <a:t>$458K</a:t>
             </a:r>
           </a:p>
         </p:txBody>
@@ -15595,7 +15595,7 @@
               </a:defRPr>
             </a:pPr>
             <a:r>
-              <a:t>Diego Giraldo</a:t>
+              <a:t>Scott Procops</a:t>
             </a:r>
           </a:p>
         </p:txBody>
@@ -15631,7 +15631,7 @@
               </a:defRPr>
             </a:pPr>
             <a:r>
-              <a:t>Horizons Insurance And Financial S…</a:t>
+              <a:t>Specialty Coverage Insurance Agenc…</a:t>
             </a:r>
           </a:p>
         </p:txBody>
@@ -15667,7 +15667,7 @@
               </a:defRPr>
             </a:pPr>
             <a:r>
-              <a:t>$446K</a:t>
+              <a:t>$454K</a:t>
             </a:r>
           </a:p>
         </p:txBody>
@@ -15782,7 +15782,7 @@
               </a:defRPr>
             </a:pPr>
             <a:r>
-              <a:t>Christian Gomez</a:t>
+              <a:t>Justin Robert</a:t>
             </a:r>
           </a:p>
         </p:txBody>
@@ -15818,7 +15818,7 @@
               </a:defRPr>
             </a:pPr>
             <a:r>
-              <a:t>Your Truck Shield LLC</a:t>
+              <a:t>Justin Robert Insurance Agency LLC</a:t>
             </a:r>
           </a:p>
         </p:txBody>
@@ -15854,7 +15854,7 @@
               </a:defRPr>
             </a:pPr>
             <a:r>
-              <a:t>$441K</a:t>
+              <a:t>$445K</a:t>
             </a:r>
           </a:p>
         </p:txBody>
@@ -16156,7 +16156,7 @@
               </a:defRPr>
             </a:pPr>
             <a:r>
-              <a:t>Gayane Yeghiazaryan</a:t>
+              <a:t>Christian Gomez</a:t>
             </a:r>
           </a:p>
         </p:txBody>
@@ -16192,7 +16192,7 @@
               </a:defRPr>
             </a:pPr>
             <a:r>
-              <a:t>Limosa Insurance Services Inc</a:t>
+              <a:t>Your Truck Shield LLC</a:t>
             </a:r>
           </a:p>
         </p:txBody>
@@ -16228,7 +16228,7 @@
               </a:defRPr>
             </a:pPr>
             <a:r>
-              <a:t>$427K</a:t>
+              <a:t>$441K</a:t>
             </a:r>
           </a:p>
         </p:txBody>
@@ -16343,7 +16343,7 @@
               </a:defRPr>
             </a:pPr>
             <a:r>
-              <a:t>Justin Robert</a:t>
+              <a:t>Gayane Yeghiazaryan</a:t>
             </a:r>
           </a:p>
         </p:txBody>
@@ -16379,7 +16379,7 @@
               </a:defRPr>
             </a:pPr>
             <a:r>
-              <a:t>Justin Robert Insurance Agency LLC</a:t>
+              <a:t>Limosa Insurance Services Inc</a:t>
             </a:r>
           </a:p>
         </p:txBody>
@@ -16415,7 +16415,7 @@
               </a:defRPr>
             </a:pPr>
             <a:r>
-              <a:t>$405K</a:t>
+              <a:t>$427K</a:t>
             </a:r>
           </a:p>
         </p:txBody>
@@ -16429,6 +16429,754 @@
         <p:spPr>
           <a:xfrm>
             <a:off x="6254496" y="1591056"/>
+            <a:ext cx="5705856" cy="256032"/>
+          </a:xfrm>
+          <a:prstGeom prst="rect">
+            <a:avLst/>
+          </a:prstGeom>
+          <a:solidFill>
+            <a:srgbClr val="D1FAE5"/>
+          </a:solidFill>
+          <a:ln>
+            <a:noFill/>
+          </a:ln>
+        </p:spPr>
+        <p:style>
+          <a:lnRef idx="1">
+            <a:schemeClr val="accent1"/>
+          </a:lnRef>
+          <a:fillRef idx="3">
+            <a:schemeClr val="accent1"/>
+          </a:fillRef>
+          <a:effectRef idx="2">
+            <a:schemeClr val="accent1"/>
+          </a:effectRef>
+          <a:fontRef idx="minor">
+            <a:schemeClr val="lt1"/>
+          </a:fontRef>
+        </p:style>
+        <p:txBody>
+          <a:bodyPr rtlCol="0" anchor="ctr"/>
+          <a:lstStyle/>
+          <a:p>
+            <a:pPr algn="ctr"/>
+          </a:p>
+        </p:txBody>
+      </p:sp>
+      <p:sp>
+        <p:nvSpPr>
+          <p:cNvPr id="127" name="TextBox 126"/>
+          <p:cNvSpPr txBox="1"/>
+          <p:nvPr/>
+        </p:nvSpPr>
+        <p:spPr>
+          <a:xfrm>
+            <a:off x="6254496" y="1609344"/>
+            <a:ext cx="411480" cy="237744"/>
+          </a:xfrm>
+          <a:prstGeom prst="rect">
+            <a:avLst/>
+          </a:prstGeom>
+          <a:noFill/>
+        </p:spPr>
+        <p:txBody>
+          <a:bodyPr wrap="none">
+            <a:spAutoFit/>
+          </a:bodyPr>
+          <a:lstStyle/>
+          <a:p>
+            <a:pPr algn="ctr">
+              <a:defRPr sz="950" b="1">
+                <a:solidFill>
+                  <a:srgbClr val="6B7280"/>
+                </a:solidFill>
+                <a:latin typeface="Calibri"/>
+              </a:defRPr>
+            </a:pPr>
+            <a:r>
+              <a:t>23</a:t>
+            </a:r>
+          </a:p>
+        </p:txBody>
+      </p:sp>
+      <p:sp>
+        <p:nvSpPr>
+          <p:cNvPr id="128" name="TextBox 127"/>
+          <p:cNvSpPr txBox="1"/>
+          <p:nvPr/>
+        </p:nvSpPr>
+        <p:spPr>
+          <a:xfrm>
+            <a:off x="6665976" y="1609344"/>
+            <a:ext cx="1920240" cy="237744"/>
+          </a:xfrm>
+          <a:prstGeom prst="rect">
+            <a:avLst/>
+          </a:prstGeom>
+          <a:noFill/>
+        </p:spPr>
+        <p:txBody>
+          <a:bodyPr wrap="none">
+            <a:spAutoFit/>
+          </a:bodyPr>
+          <a:lstStyle/>
+          <a:p>
+            <a:pPr algn="l">
+              <a:defRPr sz="950" b="1">
+                <a:solidFill>
+                  <a:srgbClr val="111827"/>
+                </a:solidFill>
+                <a:latin typeface="Calibri"/>
+              </a:defRPr>
+            </a:pPr>
+            <a:r>
+              <a:t>Arundeep Singh</a:t>
+            </a:r>
+          </a:p>
+        </p:txBody>
+      </p:sp>
+      <p:sp>
+        <p:nvSpPr>
+          <p:cNvPr id="129" name="TextBox 128"/>
+          <p:cNvSpPr txBox="1"/>
+          <p:nvPr/>
+        </p:nvSpPr>
+        <p:spPr>
+          <a:xfrm>
+            <a:off x="8586216" y="1609344"/>
+            <a:ext cx="2459736" cy="237744"/>
+          </a:xfrm>
+          <a:prstGeom prst="rect">
+            <a:avLst/>
+          </a:prstGeom>
+          <a:noFill/>
+        </p:spPr>
+        <p:txBody>
+          <a:bodyPr wrap="none">
+            <a:spAutoFit/>
+          </a:bodyPr>
+          <a:lstStyle/>
+          <a:p>
+            <a:pPr algn="l">
+              <a:defRPr sz="950" b="0">
+                <a:solidFill>
+                  <a:srgbClr val="6B7280"/>
+                </a:solidFill>
+                <a:latin typeface="Calibri"/>
+              </a:defRPr>
+            </a:pPr>
+            <a:r>
+              <a:t>Jagdeep Singh Insurance Agency, In…</a:t>
+            </a:r>
+          </a:p>
+        </p:txBody>
+      </p:sp>
+      <p:sp>
+        <p:nvSpPr>
+          <p:cNvPr id="130" name="TextBox 129"/>
+          <p:cNvSpPr txBox="1"/>
+          <p:nvPr/>
+        </p:nvSpPr>
+        <p:spPr>
+          <a:xfrm>
+            <a:off x="11045952" y="1609344"/>
+            <a:ext cx="914400" cy="237744"/>
+          </a:xfrm>
+          <a:prstGeom prst="rect">
+            <a:avLst/>
+          </a:prstGeom>
+          <a:noFill/>
+        </p:spPr>
+        <p:txBody>
+          <a:bodyPr wrap="none">
+            <a:spAutoFit/>
+          </a:bodyPr>
+          <a:lstStyle/>
+          <a:p>
+            <a:pPr algn="ctr">
+              <a:defRPr sz="950" b="1">
+                <a:solidFill>
+                  <a:srgbClr val="111827"/>
+                </a:solidFill>
+                <a:latin typeface="Calibri"/>
+              </a:defRPr>
+            </a:pPr>
+            <a:r>
+              <a:t>$413K</a:t>
+            </a:r>
+          </a:p>
+        </p:txBody>
+      </p:sp>
+      <p:sp>
+        <p:nvSpPr>
+          <p:cNvPr id="131" name="Rectangle 130"/>
+          <p:cNvSpPr/>
+          <p:nvPr/>
+        </p:nvSpPr>
+        <p:spPr>
+          <a:xfrm>
+            <a:off x="6254496" y="1847088"/>
+            <a:ext cx="5705856" cy="256032"/>
+          </a:xfrm>
+          <a:prstGeom prst="rect">
+            <a:avLst/>
+          </a:prstGeom>
+          <a:solidFill>
+            <a:srgbClr val="F9FAFB"/>
+          </a:solidFill>
+          <a:ln>
+            <a:noFill/>
+          </a:ln>
+        </p:spPr>
+        <p:style>
+          <a:lnRef idx="1">
+            <a:schemeClr val="accent1"/>
+          </a:lnRef>
+          <a:fillRef idx="3">
+            <a:schemeClr val="accent1"/>
+          </a:fillRef>
+          <a:effectRef idx="2">
+            <a:schemeClr val="accent1"/>
+          </a:effectRef>
+          <a:fontRef idx="minor">
+            <a:schemeClr val="lt1"/>
+          </a:fontRef>
+        </p:style>
+        <p:txBody>
+          <a:bodyPr rtlCol="0" anchor="ctr"/>
+          <a:lstStyle/>
+          <a:p>
+            <a:pPr algn="ctr"/>
+          </a:p>
+        </p:txBody>
+      </p:sp>
+      <p:sp>
+        <p:nvSpPr>
+          <p:cNvPr id="132" name="TextBox 131"/>
+          <p:cNvSpPr txBox="1"/>
+          <p:nvPr/>
+        </p:nvSpPr>
+        <p:spPr>
+          <a:xfrm>
+            <a:off x="6254496" y="1865376"/>
+            <a:ext cx="411480" cy="237744"/>
+          </a:xfrm>
+          <a:prstGeom prst="rect">
+            <a:avLst/>
+          </a:prstGeom>
+          <a:noFill/>
+        </p:spPr>
+        <p:txBody>
+          <a:bodyPr wrap="none">
+            <a:spAutoFit/>
+          </a:bodyPr>
+          <a:lstStyle/>
+          <a:p>
+            <a:pPr algn="ctr">
+              <a:defRPr sz="950" b="1">
+                <a:solidFill>
+                  <a:srgbClr val="6B7280"/>
+                </a:solidFill>
+                <a:latin typeface="Calibri"/>
+              </a:defRPr>
+            </a:pPr>
+            <a:r>
+              <a:t>24</a:t>
+            </a:r>
+          </a:p>
+        </p:txBody>
+      </p:sp>
+      <p:sp>
+        <p:nvSpPr>
+          <p:cNvPr id="133" name="TextBox 132"/>
+          <p:cNvSpPr txBox="1"/>
+          <p:nvPr/>
+        </p:nvSpPr>
+        <p:spPr>
+          <a:xfrm>
+            <a:off x="6665976" y="1865376"/>
+            <a:ext cx="1920240" cy="237744"/>
+          </a:xfrm>
+          <a:prstGeom prst="rect">
+            <a:avLst/>
+          </a:prstGeom>
+          <a:noFill/>
+        </p:spPr>
+        <p:txBody>
+          <a:bodyPr wrap="none">
+            <a:spAutoFit/>
+          </a:bodyPr>
+          <a:lstStyle/>
+          <a:p>
+            <a:pPr algn="l">
+              <a:defRPr sz="950" b="1">
+                <a:solidFill>
+                  <a:srgbClr val="111827"/>
+                </a:solidFill>
+                <a:latin typeface="Calibri"/>
+              </a:defRPr>
+            </a:pPr>
+            <a:r>
+              <a:t>Sapna Kharbanda</a:t>
+            </a:r>
+          </a:p>
+        </p:txBody>
+      </p:sp>
+      <p:sp>
+        <p:nvSpPr>
+          <p:cNvPr id="134" name="TextBox 133"/>
+          <p:cNvSpPr txBox="1"/>
+          <p:nvPr/>
+        </p:nvSpPr>
+        <p:spPr>
+          <a:xfrm>
+            <a:off x="8586216" y="1865376"/>
+            <a:ext cx="2459736" cy="237744"/>
+          </a:xfrm>
+          <a:prstGeom prst="rect">
+            <a:avLst/>
+          </a:prstGeom>
+          <a:noFill/>
+        </p:spPr>
+        <p:txBody>
+          <a:bodyPr wrap="none">
+            <a:spAutoFit/>
+          </a:bodyPr>
+          <a:lstStyle/>
+          <a:p>
+            <a:pPr algn="l">
+              <a:defRPr sz="950" b="0">
+                <a:solidFill>
+                  <a:srgbClr val="6B7280"/>
+                </a:solidFill>
+                <a:latin typeface="Calibri"/>
+              </a:defRPr>
+            </a:pPr>
+            <a:r>
+              <a:t>Sedge Insurance Agency LLC</a:t>
+            </a:r>
+          </a:p>
+        </p:txBody>
+      </p:sp>
+      <p:sp>
+        <p:nvSpPr>
+          <p:cNvPr id="135" name="TextBox 134"/>
+          <p:cNvSpPr txBox="1"/>
+          <p:nvPr/>
+        </p:nvSpPr>
+        <p:spPr>
+          <a:xfrm>
+            <a:off x="11045952" y="1865376"/>
+            <a:ext cx="914400" cy="237744"/>
+          </a:xfrm>
+          <a:prstGeom prst="rect">
+            <a:avLst/>
+          </a:prstGeom>
+          <a:noFill/>
+        </p:spPr>
+        <p:txBody>
+          <a:bodyPr wrap="none">
+            <a:spAutoFit/>
+          </a:bodyPr>
+          <a:lstStyle/>
+          <a:p>
+            <a:pPr algn="ctr">
+              <a:defRPr sz="950" b="1">
+                <a:solidFill>
+                  <a:srgbClr val="111827"/>
+                </a:solidFill>
+                <a:latin typeface="Calibri"/>
+              </a:defRPr>
+            </a:pPr>
+            <a:r>
+              <a:t>$399K</a:t>
+            </a:r>
+          </a:p>
+        </p:txBody>
+      </p:sp>
+      <p:sp>
+        <p:nvSpPr>
+          <p:cNvPr id="136" name="Rectangle 135"/>
+          <p:cNvSpPr/>
+          <p:nvPr/>
+        </p:nvSpPr>
+        <p:spPr>
+          <a:xfrm>
+            <a:off x="6254496" y="2103120"/>
+            <a:ext cx="5705856" cy="256032"/>
+          </a:xfrm>
+          <a:prstGeom prst="rect">
+            <a:avLst/>
+          </a:prstGeom>
+          <a:solidFill>
+            <a:srgbClr val="D1FAE5"/>
+          </a:solidFill>
+          <a:ln>
+            <a:noFill/>
+          </a:ln>
+        </p:spPr>
+        <p:style>
+          <a:lnRef idx="1">
+            <a:schemeClr val="accent1"/>
+          </a:lnRef>
+          <a:fillRef idx="3">
+            <a:schemeClr val="accent1"/>
+          </a:fillRef>
+          <a:effectRef idx="2">
+            <a:schemeClr val="accent1"/>
+          </a:effectRef>
+          <a:fontRef idx="minor">
+            <a:schemeClr val="lt1"/>
+          </a:fontRef>
+        </p:style>
+        <p:txBody>
+          <a:bodyPr rtlCol="0" anchor="ctr"/>
+          <a:lstStyle/>
+          <a:p>
+            <a:pPr algn="ctr"/>
+          </a:p>
+        </p:txBody>
+      </p:sp>
+      <p:sp>
+        <p:nvSpPr>
+          <p:cNvPr id="137" name="TextBox 136"/>
+          <p:cNvSpPr txBox="1"/>
+          <p:nvPr/>
+        </p:nvSpPr>
+        <p:spPr>
+          <a:xfrm>
+            <a:off x="6254496" y="2121408"/>
+            <a:ext cx="411480" cy="237744"/>
+          </a:xfrm>
+          <a:prstGeom prst="rect">
+            <a:avLst/>
+          </a:prstGeom>
+          <a:noFill/>
+        </p:spPr>
+        <p:txBody>
+          <a:bodyPr wrap="none">
+            <a:spAutoFit/>
+          </a:bodyPr>
+          <a:lstStyle/>
+          <a:p>
+            <a:pPr algn="ctr">
+              <a:defRPr sz="950" b="1">
+                <a:solidFill>
+                  <a:srgbClr val="6B7280"/>
+                </a:solidFill>
+                <a:latin typeface="Calibri"/>
+              </a:defRPr>
+            </a:pPr>
+            <a:r>
+              <a:t>25</a:t>
+            </a:r>
+          </a:p>
+        </p:txBody>
+      </p:sp>
+      <p:sp>
+        <p:nvSpPr>
+          <p:cNvPr id="138" name="TextBox 137"/>
+          <p:cNvSpPr txBox="1"/>
+          <p:nvPr/>
+        </p:nvSpPr>
+        <p:spPr>
+          <a:xfrm>
+            <a:off x="6665976" y="2121408"/>
+            <a:ext cx="1920240" cy="237744"/>
+          </a:xfrm>
+          <a:prstGeom prst="rect">
+            <a:avLst/>
+          </a:prstGeom>
+          <a:noFill/>
+        </p:spPr>
+        <p:txBody>
+          <a:bodyPr wrap="none">
+            <a:spAutoFit/>
+          </a:bodyPr>
+          <a:lstStyle/>
+          <a:p>
+            <a:pPr algn="l">
+              <a:defRPr sz="950" b="1">
+                <a:solidFill>
+                  <a:srgbClr val="111827"/>
+                </a:solidFill>
+                <a:latin typeface="Calibri"/>
+              </a:defRPr>
+            </a:pPr>
+            <a:r>
+              <a:t>Daven Loomba</a:t>
+            </a:r>
+          </a:p>
+        </p:txBody>
+      </p:sp>
+      <p:sp>
+        <p:nvSpPr>
+          <p:cNvPr id="139" name="TextBox 138"/>
+          <p:cNvSpPr txBox="1"/>
+          <p:nvPr/>
+        </p:nvSpPr>
+        <p:spPr>
+          <a:xfrm>
+            <a:off x="8586216" y="2121408"/>
+            <a:ext cx="2459736" cy="237744"/>
+          </a:xfrm>
+          <a:prstGeom prst="rect">
+            <a:avLst/>
+          </a:prstGeom>
+          <a:noFill/>
+        </p:spPr>
+        <p:txBody>
+          <a:bodyPr wrap="none">
+            <a:spAutoFit/>
+          </a:bodyPr>
+          <a:lstStyle/>
+          <a:p>
+            <a:pPr algn="l">
+              <a:defRPr sz="950" b="0">
+                <a:solidFill>
+                  <a:srgbClr val="6B7280"/>
+                </a:solidFill>
+                <a:latin typeface="Calibri"/>
+              </a:defRPr>
+            </a:pPr>
+            <a:r>
+              <a:t>GoldenEra Insurance Agency</a:t>
+            </a:r>
+          </a:p>
+        </p:txBody>
+      </p:sp>
+      <p:sp>
+        <p:nvSpPr>
+          <p:cNvPr id="140" name="TextBox 139"/>
+          <p:cNvSpPr txBox="1"/>
+          <p:nvPr/>
+        </p:nvSpPr>
+        <p:spPr>
+          <a:xfrm>
+            <a:off x="11045952" y="2121408"/>
+            <a:ext cx="914400" cy="237744"/>
+          </a:xfrm>
+          <a:prstGeom prst="rect">
+            <a:avLst/>
+          </a:prstGeom>
+          <a:noFill/>
+        </p:spPr>
+        <p:txBody>
+          <a:bodyPr wrap="none">
+            <a:spAutoFit/>
+          </a:bodyPr>
+          <a:lstStyle/>
+          <a:p>
+            <a:pPr algn="ctr">
+              <a:defRPr sz="950" b="1">
+                <a:solidFill>
+                  <a:srgbClr val="111827"/>
+                </a:solidFill>
+                <a:latin typeface="Calibri"/>
+              </a:defRPr>
+            </a:pPr>
+            <a:r>
+              <a:t>$396K</a:t>
+            </a:r>
+          </a:p>
+        </p:txBody>
+      </p:sp>
+      <p:sp>
+        <p:nvSpPr>
+          <p:cNvPr id="141" name="Rectangle 140"/>
+          <p:cNvSpPr/>
+          <p:nvPr/>
+        </p:nvSpPr>
+        <p:spPr>
+          <a:xfrm>
+            <a:off x="6254496" y="2359152"/>
+            <a:ext cx="5705856" cy="256032"/>
+          </a:xfrm>
+          <a:prstGeom prst="rect">
+            <a:avLst/>
+          </a:prstGeom>
+          <a:solidFill>
+            <a:srgbClr val="F9FAFB"/>
+          </a:solidFill>
+          <a:ln>
+            <a:noFill/>
+          </a:ln>
+        </p:spPr>
+        <p:style>
+          <a:lnRef idx="1">
+            <a:schemeClr val="accent1"/>
+          </a:lnRef>
+          <a:fillRef idx="3">
+            <a:schemeClr val="accent1"/>
+          </a:fillRef>
+          <a:effectRef idx="2">
+            <a:schemeClr val="accent1"/>
+          </a:effectRef>
+          <a:fontRef idx="minor">
+            <a:schemeClr val="lt1"/>
+          </a:fontRef>
+        </p:style>
+        <p:txBody>
+          <a:bodyPr rtlCol="0" anchor="ctr"/>
+          <a:lstStyle/>
+          <a:p>
+            <a:pPr algn="ctr"/>
+          </a:p>
+        </p:txBody>
+      </p:sp>
+      <p:sp>
+        <p:nvSpPr>
+          <p:cNvPr id="142" name="TextBox 141"/>
+          <p:cNvSpPr txBox="1"/>
+          <p:nvPr/>
+        </p:nvSpPr>
+        <p:spPr>
+          <a:xfrm>
+            <a:off x="6254496" y="2377440"/>
+            <a:ext cx="411480" cy="237744"/>
+          </a:xfrm>
+          <a:prstGeom prst="rect">
+            <a:avLst/>
+          </a:prstGeom>
+          <a:noFill/>
+        </p:spPr>
+        <p:txBody>
+          <a:bodyPr wrap="none">
+            <a:spAutoFit/>
+          </a:bodyPr>
+          <a:lstStyle/>
+          <a:p>
+            <a:pPr algn="ctr">
+              <a:defRPr sz="950" b="1">
+                <a:solidFill>
+                  <a:srgbClr val="6B7280"/>
+                </a:solidFill>
+                <a:latin typeface="Calibri"/>
+              </a:defRPr>
+            </a:pPr>
+            <a:r>
+              <a:t>26</a:t>
+            </a:r>
+          </a:p>
+        </p:txBody>
+      </p:sp>
+      <p:sp>
+        <p:nvSpPr>
+          <p:cNvPr id="143" name="TextBox 142"/>
+          <p:cNvSpPr txBox="1"/>
+          <p:nvPr/>
+        </p:nvSpPr>
+        <p:spPr>
+          <a:xfrm>
+            <a:off x="6665976" y="2377440"/>
+            <a:ext cx="1920240" cy="237744"/>
+          </a:xfrm>
+          <a:prstGeom prst="rect">
+            <a:avLst/>
+          </a:prstGeom>
+          <a:noFill/>
+        </p:spPr>
+        <p:txBody>
+          <a:bodyPr wrap="none">
+            <a:spAutoFit/>
+          </a:bodyPr>
+          <a:lstStyle/>
+          <a:p>
+            <a:pPr algn="l">
+              <a:defRPr sz="950" b="1">
+                <a:solidFill>
+                  <a:srgbClr val="111827"/>
+                </a:solidFill>
+                <a:latin typeface="Calibri"/>
+              </a:defRPr>
+            </a:pPr>
+            <a:r>
+              <a:t>Raul Fernandez</a:t>
+            </a:r>
+          </a:p>
+        </p:txBody>
+      </p:sp>
+      <p:sp>
+        <p:nvSpPr>
+          <p:cNvPr id="144" name="TextBox 143"/>
+          <p:cNvSpPr txBox="1"/>
+          <p:nvPr/>
+        </p:nvSpPr>
+        <p:spPr>
+          <a:xfrm>
+            <a:off x="8586216" y="2377440"/>
+            <a:ext cx="2459736" cy="237744"/>
+          </a:xfrm>
+          <a:prstGeom prst="rect">
+            <a:avLst/>
+          </a:prstGeom>
+          <a:noFill/>
+        </p:spPr>
+        <p:txBody>
+          <a:bodyPr wrap="none">
+            <a:spAutoFit/>
+          </a:bodyPr>
+          <a:lstStyle/>
+          <a:p>
+            <a:pPr algn="l">
+              <a:defRPr sz="950" b="0">
+                <a:solidFill>
+                  <a:srgbClr val="6B7280"/>
+                </a:solidFill>
+                <a:latin typeface="Calibri"/>
+              </a:defRPr>
+            </a:pPr>
+            <a:r>
+              <a:t>Ewall Insurance Company</a:t>
+            </a:r>
+          </a:p>
+        </p:txBody>
+      </p:sp>
+      <p:sp>
+        <p:nvSpPr>
+          <p:cNvPr id="145" name="TextBox 144"/>
+          <p:cNvSpPr txBox="1"/>
+          <p:nvPr/>
+        </p:nvSpPr>
+        <p:spPr>
+          <a:xfrm>
+            <a:off x="11045952" y="2377440"/>
+            <a:ext cx="914400" cy="237744"/>
+          </a:xfrm>
+          <a:prstGeom prst="rect">
+            <a:avLst/>
+          </a:prstGeom>
+          <a:noFill/>
+        </p:spPr>
+        <p:txBody>
+          <a:bodyPr wrap="none">
+            <a:spAutoFit/>
+          </a:bodyPr>
+          <a:lstStyle/>
+          <a:p>
+            <a:pPr algn="ctr">
+              <a:defRPr sz="950" b="1">
+                <a:solidFill>
+                  <a:srgbClr val="111827"/>
+                </a:solidFill>
+                <a:latin typeface="Calibri"/>
+              </a:defRPr>
+            </a:pPr>
+            <a:r>
+              <a:t>$391K</a:t>
+            </a:r>
+          </a:p>
+        </p:txBody>
+      </p:sp>
+      <p:sp>
+        <p:nvSpPr>
+          <p:cNvPr id="146" name="Rectangle 145"/>
+          <p:cNvSpPr/>
+          <p:nvPr/>
+        </p:nvSpPr>
+        <p:spPr>
+          <a:xfrm>
+            <a:off x="6254496" y="2615184"/>
             <a:ext cx="5705856" cy="256032"/>
           </a:xfrm>
           <a:prstGeom prst="rect">
@@ -16465,13 +17213,13 @@
       </p:sp>
       <p:sp>
         <p:nvSpPr>
-          <p:cNvPr id="127" name="TextBox 126"/>
-          <p:cNvSpPr txBox="1"/>
-          <p:nvPr/>
-        </p:nvSpPr>
-        <p:spPr>
-          <a:xfrm>
-            <a:off x="6254496" y="1609344"/>
+          <p:cNvPr id="147" name="TextBox 146"/>
+          <p:cNvSpPr txBox="1"/>
+          <p:nvPr/>
+        </p:nvSpPr>
+        <p:spPr>
+          <a:xfrm>
+            <a:off x="6254496" y="2633472"/>
             <a:ext cx="411480" cy="237744"/>
           </a:xfrm>
           <a:prstGeom prst="rect">
@@ -16494,20 +17242,20 @@
               </a:defRPr>
             </a:pPr>
             <a:r>
-              <a:t>23</a:t>
-            </a:r>
-          </a:p>
-        </p:txBody>
-      </p:sp>
-      <p:sp>
-        <p:nvSpPr>
-          <p:cNvPr id="128" name="TextBox 127"/>
-          <p:cNvSpPr txBox="1"/>
-          <p:nvPr/>
-        </p:nvSpPr>
-        <p:spPr>
-          <a:xfrm>
-            <a:off x="6665976" y="1609344"/>
+              <a:t>27</a:t>
+            </a:r>
+          </a:p>
+        </p:txBody>
+      </p:sp>
+      <p:sp>
+        <p:nvSpPr>
+          <p:cNvPr id="148" name="TextBox 147"/>
+          <p:cNvSpPr txBox="1"/>
+          <p:nvPr/>
+        </p:nvSpPr>
+        <p:spPr>
+          <a:xfrm>
+            <a:off x="6665976" y="2633472"/>
             <a:ext cx="1920240" cy="237744"/>
           </a:xfrm>
           <a:prstGeom prst="rect">
@@ -16530,20 +17278,20 @@
               </a:defRPr>
             </a:pPr>
             <a:r>
-              <a:t>Sapna Kharbanda</a:t>
-            </a:r>
-          </a:p>
-        </p:txBody>
-      </p:sp>
-      <p:sp>
-        <p:nvSpPr>
-          <p:cNvPr id="129" name="TextBox 128"/>
-          <p:cNvSpPr txBox="1"/>
-          <p:nvPr/>
-        </p:nvSpPr>
-        <p:spPr>
-          <a:xfrm>
-            <a:off x="8586216" y="1609344"/>
+              <a:t>Deepak Goswami</a:t>
+            </a:r>
+          </a:p>
+        </p:txBody>
+      </p:sp>
+      <p:sp>
+        <p:nvSpPr>
+          <p:cNvPr id="149" name="TextBox 148"/>
+          <p:cNvSpPr txBox="1"/>
+          <p:nvPr/>
+        </p:nvSpPr>
+        <p:spPr>
+          <a:xfrm>
+            <a:off x="8586216" y="2633472"/>
             <a:ext cx="2459736" cy="237744"/>
           </a:xfrm>
           <a:prstGeom prst="rect">
@@ -16566,20 +17314,20 @@
               </a:defRPr>
             </a:pPr>
             <a:r>
-              <a:t>Sedge Insurance Agency LLC</a:t>
-            </a:r>
-          </a:p>
-        </p:txBody>
-      </p:sp>
-      <p:sp>
-        <p:nvSpPr>
-          <p:cNvPr id="130" name="TextBox 129"/>
-          <p:cNvSpPr txBox="1"/>
-          <p:nvPr/>
-        </p:nvSpPr>
-        <p:spPr>
-          <a:xfrm>
-            <a:off x="11045952" y="1609344"/>
+              <a:t>A.S.I.A Inc</a:t>
+            </a:r>
+          </a:p>
+        </p:txBody>
+      </p:sp>
+      <p:sp>
+        <p:nvSpPr>
+          <p:cNvPr id="150" name="TextBox 149"/>
+          <p:cNvSpPr txBox="1"/>
+          <p:nvPr/>
+        </p:nvSpPr>
+        <p:spPr>
+          <a:xfrm>
+            <a:off x="11045952" y="2633472"/>
             <a:ext cx="914400" cy="237744"/>
           </a:xfrm>
           <a:prstGeom prst="rect">
@@ -16602,20 +17350,207 @@
               </a:defRPr>
             </a:pPr>
             <a:r>
-              <a:t>$399K</a:t>
-            </a:r>
-          </a:p>
-        </p:txBody>
-      </p:sp>
-      <p:sp>
-        <p:nvSpPr>
-          <p:cNvPr id="131" name="Rectangle 130"/>
+              <a:t>$388K</a:t>
+            </a:r>
+          </a:p>
+        </p:txBody>
+      </p:sp>
+      <p:sp>
+        <p:nvSpPr>
+          <p:cNvPr id="151" name="Rectangle 150"/>
           <p:cNvSpPr/>
           <p:nvPr/>
         </p:nvSpPr>
         <p:spPr>
           <a:xfrm>
-            <a:off x="6254496" y="1847088"/>
+            <a:off x="6254496" y="2871216"/>
+            <a:ext cx="5705856" cy="256032"/>
+          </a:xfrm>
+          <a:prstGeom prst="rect">
+            <a:avLst/>
+          </a:prstGeom>
+          <a:solidFill>
+            <a:srgbClr val="F9FAFB"/>
+          </a:solidFill>
+          <a:ln>
+            <a:noFill/>
+          </a:ln>
+        </p:spPr>
+        <p:style>
+          <a:lnRef idx="1">
+            <a:schemeClr val="accent1"/>
+          </a:lnRef>
+          <a:fillRef idx="3">
+            <a:schemeClr val="accent1"/>
+          </a:fillRef>
+          <a:effectRef idx="2">
+            <a:schemeClr val="accent1"/>
+          </a:effectRef>
+          <a:fontRef idx="minor">
+            <a:schemeClr val="lt1"/>
+          </a:fontRef>
+        </p:style>
+        <p:txBody>
+          <a:bodyPr rtlCol="0" anchor="ctr"/>
+          <a:lstStyle/>
+          <a:p>
+            <a:pPr algn="ctr"/>
+          </a:p>
+        </p:txBody>
+      </p:sp>
+      <p:sp>
+        <p:nvSpPr>
+          <p:cNvPr id="152" name="TextBox 151"/>
+          <p:cNvSpPr txBox="1"/>
+          <p:nvPr/>
+        </p:nvSpPr>
+        <p:spPr>
+          <a:xfrm>
+            <a:off x="6254496" y="2889504"/>
+            <a:ext cx="411480" cy="237744"/>
+          </a:xfrm>
+          <a:prstGeom prst="rect">
+            <a:avLst/>
+          </a:prstGeom>
+          <a:noFill/>
+        </p:spPr>
+        <p:txBody>
+          <a:bodyPr wrap="none">
+            <a:spAutoFit/>
+          </a:bodyPr>
+          <a:lstStyle/>
+          <a:p>
+            <a:pPr algn="ctr">
+              <a:defRPr sz="950" b="1">
+                <a:solidFill>
+                  <a:srgbClr val="6B7280"/>
+                </a:solidFill>
+                <a:latin typeface="Calibri"/>
+              </a:defRPr>
+            </a:pPr>
+            <a:r>
+              <a:t>28</a:t>
+            </a:r>
+          </a:p>
+        </p:txBody>
+      </p:sp>
+      <p:sp>
+        <p:nvSpPr>
+          <p:cNvPr id="153" name="TextBox 152"/>
+          <p:cNvSpPr txBox="1"/>
+          <p:nvPr/>
+        </p:nvSpPr>
+        <p:spPr>
+          <a:xfrm>
+            <a:off x="6665976" y="2889504"/>
+            <a:ext cx="1920240" cy="237744"/>
+          </a:xfrm>
+          <a:prstGeom prst="rect">
+            <a:avLst/>
+          </a:prstGeom>
+          <a:noFill/>
+        </p:spPr>
+        <p:txBody>
+          <a:bodyPr wrap="none">
+            <a:spAutoFit/>
+          </a:bodyPr>
+          <a:lstStyle/>
+          <a:p>
+            <a:pPr algn="l">
+              <a:defRPr sz="950" b="1">
+                <a:solidFill>
+                  <a:srgbClr val="111827"/>
+                </a:solidFill>
+                <a:latin typeface="Calibri"/>
+              </a:defRPr>
+            </a:pPr>
+            <a:r>
+              <a:t>Daliborka Savovic</a:t>
+            </a:r>
+          </a:p>
+        </p:txBody>
+      </p:sp>
+      <p:sp>
+        <p:nvSpPr>
+          <p:cNvPr id="154" name="TextBox 153"/>
+          <p:cNvSpPr txBox="1"/>
+          <p:nvPr/>
+        </p:nvSpPr>
+        <p:spPr>
+          <a:xfrm>
+            <a:off x="8586216" y="2889504"/>
+            <a:ext cx="2459736" cy="237744"/>
+          </a:xfrm>
+          <a:prstGeom prst="rect">
+            <a:avLst/>
+          </a:prstGeom>
+          <a:noFill/>
+        </p:spPr>
+        <p:txBody>
+          <a:bodyPr wrap="none">
+            <a:spAutoFit/>
+          </a:bodyPr>
+          <a:lstStyle/>
+          <a:p>
+            <a:pPr algn="l">
+              <a:defRPr sz="950" b="0">
+                <a:solidFill>
+                  <a:srgbClr val="6B7280"/>
+                </a:solidFill>
+                <a:latin typeface="Calibri"/>
+              </a:defRPr>
+            </a:pPr>
+            <a:r>
+              <a:t>Alpha Trucking Insurance Agency In…</a:t>
+            </a:r>
+          </a:p>
+        </p:txBody>
+      </p:sp>
+      <p:sp>
+        <p:nvSpPr>
+          <p:cNvPr id="155" name="TextBox 154"/>
+          <p:cNvSpPr txBox="1"/>
+          <p:nvPr/>
+        </p:nvSpPr>
+        <p:spPr>
+          <a:xfrm>
+            <a:off x="11045952" y="2889504"/>
+            <a:ext cx="914400" cy="237744"/>
+          </a:xfrm>
+          <a:prstGeom prst="rect">
+            <a:avLst/>
+          </a:prstGeom>
+          <a:noFill/>
+        </p:spPr>
+        <p:txBody>
+          <a:bodyPr wrap="none">
+            <a:spAutoFit/>
+          </a:bodyPr>
+          <a:lstStyle/>
+          <a:p>
+            <a:pPr algn="ctr">
+              <a:defRPr sz="950" b="1">
+                <a:solidFill>
+                  <a:srgbClr val="111827"/>
+                </a:solidFill>
+                <a:latin typeface="Calibri"/>
+              </a:defRPr>
+            </a:pPr>
+            <a:r>
+              <a:t>$380K</a:t>
+            </a:r>
+          </a:p>
+        </p:txBody>
+      </p:sp>
+      <p:sp>
+        <p:nvSpPr>
+          <p:cNvPr id="156" name="Rectangle 155"/>
+          <p:cNvSpPr/>
+          <p:nvPr/>
+        </p:nvSpPr>
+        <p:spPr>
+          <a:xfrm>
+            <a:off x="6254496" y="3127248"/>
             <a:ext cx="5705856" cy="256032"/>
           </a:xfrm>
           <a:prstGeom prst="rect">
@@ -16652,13 +17587,13 @@
       </p:sp>
       <p:sp>
         <p:nvSpPr>
-          <p:cNvPr id="132" name="TextBox 131"/>
-          <p:cNvSpPr txBox="1"/>
-          <p:nvPr/>
-        </p:nvSpPr>
-        <p:spPr>
-          <a:xfrm>
-            <a:off x="6254496" y="1865376"/>
+          <p:cNvPr id="157" name="TextBox 156"/>
+          <p:cNvSpPr txBox="1"/>
+          <p:nvPr/>
+        </p:nvSpPr>
+        <p:spPr>
+          <a:xfrm>
+            <a:off x="6254496" y="3145536"/>
             <a:ext cx="411480" cy="237744"/>
           </a:xfrm>
           <a:prstGeom prst="rect">
@@ -16681,20 +17616,20 @@
               </a:defRPr>
             </a:pPr>
             <a:r>
-              <a:t>24</a:t>
-            </a:r>
-          </a:p>
-        </p:txBody>
-      </p:sp>
-      <p:sp>
-        <p:nvSpPr>
-          <p:cNvPr id="133" name="TextBox 132"/>
-          <p:cNvSpPr txBox="1"/>
-          <p:nvPr/>
-        </p:nvSpPr>
-        <p:spPr>
-          <a:xfrm>
-            <a:off x="6665976" y="1865376"/>
+              <a:t>29</a:t>
+            </a:r>
+          </a:p>
+        </p:txBody>
+      </p:sp>
+      <p:sp>
+        <p:nvSpPr>
+          <p:cNvPr id="158" name="TextBox 157"/>
+          <p:cNvSpPr txBox="1"/>
+          <p:nvPr/>
+        </p:nvSpPr>
+        <p:spPr>
+          <a:xfrm>
+            <a:off x="6665976" y="3145536"/>
             <a:ext cx="1920240" cy="237744"/>
           </a:xfrm>
           <a:prstGeom prst="rect">
@@ -16717,20 +17652,20 @@
               </a:defRPr>
             </a:pPr>
             <a:r>
-              <a:t>Arundeep Singh</a:t>
-            </a:r>
-          </a:p>
-        </p:txBody>
-      </p:sp>
-      <p:sp>
-        <p:nvSpPr>
-          <p:cNvPr id="134" name="TextBox 133"/>
-          <p:cNvSpPr txBox="1"/>
-          <p:nvPr/>
-        </p:nvSpPr>
-        <p:spPr>
-          <a:xfrm>
-            <a:off x="8586216" y="1865376"/>
+              <a:t>Inderjit Singh</a:t>
+            </a:r>
+          </a:p>
+        </p:txBody>
+      </p:sp>
+      <p:sp>
+        <p:nvSpPr>
+          <p:cNvPr id="159" name="TextBox 158"/>
+          <p:cNvSpPr txBox="1"/>
+          <p:nvPr/>
+        </p:nvSpPr>
+        <p:spPr>
+          <a:xfrm>
+            <a:off x="8586216" y="3145536"/>
             <a:ext cx="2459736" cy="237744"/>
           </a:xfrm>
           <a:prstGeom prst="rect">
@@ -16753,20 +17688,20 @@
               </a:defRPr>
             </a:pPr>
             <a:r>
-              <a:t>Jagdeep Singh Insurance Agency, In…</a:t>
-            </a:r>
-          </a:p>
-        </p:txBody>
-      </p:sp>
-      <p:sp>
-        <p:nvSpPr>
-          <p:cNvPr id="135" name="TextBox 134"/>
-          <p:cNvSpPr txBox="1"/>
-          <p:nvPr/>
-        </p:nvSpPr>
-        <p:spPr>
-          <a:xfrm>
-            <a:off x="11045952" y="1865376"/>
+              <a:t>American Insurance Agency LLC</a:t>
+            </a:r>
+          </a:p>
+        </p:txBody>
+      </p:sp>
+      <p:sp>
+        <p:nvSpPr>
+          <p:cNvPr id="160" name="TextBox 159"/>
+          <p:cNvSpPr txBox="1"/>
+          <p:nvPr/>
+        </p:nvSpPr>
+        <p:spPr>
+          <a:xfrm>
+            <a:off x="11045952" y="3145536"/>
             <a:ext cx="914400" cy="237744"/>
           </a:xfrm>
           <a:prstGeom prst="rect">
@@ -16789,20 +17724,207 @@
               </a:defRPr>
             </a:pPr>
             <a:r>
-              <a:t>$392K</a:t>
-            </a:r>
-          </a:p>
-        </p:txBody>
-      </p:sp>
-      <p:sp>
-        <p:nvSpPr>
-          <p:cNvPr id="136" name="Rectangle 135"/>
+              <a:t>$372K</a:t>
+            </a:r>
+          </a:p>
+        </p:txBody>
+      </p:sp>
+      <p:sp>
+        <p:nvSpPr>
+          <p:cNvPr id="161" name="Rectangle 160"/>
           <p:cNvSpPr/>
           <p:nvPr/>
         </p:nvSpPr>
         <p:spPr>
           <a:xfrm>
-            <a:off x="6254496" y="2103120"/>
+            <a:off x="6254496" y="3383280"/>
+            <a:ext cx="5705856" cy="256032"/>
+          </a:xfrm>
+          <a:prstGeom prst="rect">
+            <a:avLst/>
+          </a:prstGeom>
+          <a:solidFill>
+            <a:srgbClr val="F9FAFB"/>
+          </a:solidFill>
+          <a:ln>
+            <a:noFill/>
+          </a:ln>
+        </p:spPr>
+        <p:style>
+          <a:lnRef idx="1">
+            <a:schemeClr val="accent1"/>
+          </a:lnRef>
+          <a:fillRef idx="3">
+            <a:schemeClr val="accent1"/>
+          </a:fillRef>
+          <a:effectRef idx="2">
+            <a:schemeClr val="accent1"/>
+          </a:effectRef>
+          <a:fontRef idx="minor">
+            <a:schemeClr val="lt1"/>
+          </a:fontRef>
+        </p:style>
+        <p:txBody>
+          <a:bodyPr rtlCol="0" anchor="ctr"/>
+          <a:lstStyle/>
+          <a:p>
+            <a:pPr algn="ctr"/>
+          </a:p>
+        </p:txBody>
+      </p:sp>
+      <p:sp>
+        <p:nvSpPr>
+          <p:cNvPr id="162" name="TextBox 161"/>
+          <p:cNvSpPr txBox="1"/>
+          <p:nvPr/>
+        </p:nvSpPr>
+        <p:spPr>
+          <a:xfrm>
+            <a:off x="6254496" y="3401568"/>
+            <a:ext cx="411480" cy="237744"/>
+          </a:xfrm>
+          <a:prstGeom prst="rect">
+            <a:avLst/>
+          </a:prstGeom>
+          <a:noFill/>
+        </p:spPr>
+        <p:txBody>
+          <a:bodyPr wrap="none">
+            <a:spAutoFit/>
+          </a:bodyPr>
+          <a:lstStyle/>
+          <a:p>
+            <a:pPr algn="ctr">
+              <a:defRPr sz="950" b="1">
+                <a:solidFill>
+                  <a:srgbClr val="6B7280"/>
+                </a:solidFill>
+                <a:latin typeface="Calibri"/>
+              </a:defRPr>
+            </a:pPr>
+            <a:r>
+              <a:t>30</a:t>
+            </a:r>
+          </a:p>
+        </p:txBody>
+      </p:sp>
+      <p:sp>
+        <p:nvSpPr>
+          <p:cNvPr id="163" name="TextBox 162"/>
+          <p:cNvSpPr txBox="1"/>
+          <p:nvPr/>
+        </p:nvSpPr>
+        <p:spPr>
+          <a:xfrm>
+            <a:off x="6665976" y="3401568"/>
+            <a:ext cx="1920240" cy="237744"/>
+          </a:xfrm>
+          <a:prstGeom prst="rect">
+            <a:avLst/>
+          </a:prstGeom>
+          <a:noFill/>
+        </p:spPr>
+        <p:txBody>
+          <a:bodyPr wrap="none">
+            <a:spAutoFit/>
+          </a:bodyPr>
+          <a:lstStyle/>
+          <a:p>
+            <a:pPr algn="l">
+              <a:defRPr sz="950" b="1">
+                <a:solidFill>
+                  <a:srgbClr val="111827"/>
+                </a:solidFill>
+                <a:latin typeface="Calibri"/>
+              </a:defRPr>
+            </a:pPr>
+            <a:r>
+              <a:t>Michael Su</a:t>
+            </a:r>
+          </a:p>
+        </p:txBody>
+      </p:sp>
+      <p:sp>
+        <p:nvSpPr>
+          <p:cNvPr id="164" name="TextBox 163"/>
+          <p:cNvSpPr txBox="1"/>
+          <p:nvPr/>
+        </p:nvSpPr>
+        <p:spPr>
+          <a:xfrm>
+            <a:off x="8586216" y="3401568"/>
+            <a:ext cx="2459736" cy="237744"/>
+          </a:xfrm>
+          <a:prstGeom prst="rect">
+            <a:avLst/>
+          </a:prstGeom>
+          <a:noFill/>
+        </p:spPr>
+        <p:txBody>
+          <a:bodyPr wrap="none">
+            <a:spAutoFit/>
+          </a:bodyPr>
+          <a:lstStyle/>
+          <a:p>
+            <a:pPr algn="l">
+              <a:defRPr sz="950" b="0">
+                <a:solidFill>
+                  <a:srgbClr val="6B7280"/>
+                </a:solidFill>
+                <a:latin typeface="Calibri"/>
+              </a:defRPr>
+            </a:pPr>
+            <a:r>
+              <a:t>Jtc Insurance Agency, Inc.</a:t>
+            </a:r>
+          </a:p>
+        </p:txBody>
+      </p:sp>
+      <p:sp>
+        <p:nvSpPr>
+          <p:cNvPr id="165" name="TextBox 164"/>
+          <p:cNvSpPr txBox="1"/>
+          <p:nvPr/>
+        </p:nvSpPr>
+        <p:spPr>
+          <a:xfrm>
+            <a:off x="11045952" y="3401568"/>
+            <a:ext cx="914400" cy="237744"/>
+          </a:xfrm>
+          <a:prstGeom prst="rect">
+            <a:avLst/>
+          </a:prstGeom>
+          <a:noFill/>
+        </p:spPr>
+        <p:txBody>
+          <a:bodyPr wrap="none">
+            <a:spAutoFit/>
+          </a:bodyPr>
+          <a:lstStyle/>
+          <a:p>
+            <a:pPr algn="ctr">
+              <a:defRPr sz="950" b="1">
+                <a:solidFill>
+                  <a:srgbClr val="111827"/>
+                </a:solidFill>
+                <a:latin typeface="Calibri"/>
+              </a:defRPr>
+            </a:pPr>
+            <a:r>
+              <a:t>$367K</a:t>
+            </a:r>
+          </a:p>
+        </p:txBody>
+      </p:sp>
+      <p:sp>
+        <p:nvSpPr>
+          <p:cNvPr id="166" name="Rectangle 165"/>
+          <p:cNvSpPr/>
+          <p:nvPr/>
+        </p:nvSpPr>
+        <p:spPr>
+          <a:xfrm>
+            <a:off x="6254496" y="3639312"/>
             <a:ext cx="5705856" cy="256032"/>
           </a:xfrm>
           <a:prstGeom prst="rect">
@@ -16839,13 +17961,13 @@
       </p:sp>
       <p:sp>
         <p:nvSpPr>
-          <p:cNvPr id="137" name="TextBox 136"/>
-          <p:cNvSpPr txBox="1"/>
-          <p:nvPr/>
-        </p:nvSpPr>
-        <p:spPr>
-          <a:xfrm>
-            <a:off x="6254496" y="2121408"/>
+          <p:cNvPr id="167" name="TextBox 166"/>
+          <p:cNvSpPr txBox="1"/>
+          <p:nvPr/>
+        </p:nvSpPr>
+        <p:spPr>
+          <a:xfrm>
+            <a:off x="6254496" y="3657600"/>
             <a:ext cx="411480" cy="237744"/>
           </a:xfrm>
           <a:prstGeom prst="rect">
@@ -16868,20 +17990,20 @@
               </a:defRPr>
             </a:pPr>
             <a:r>
-              <a:t>25</a:t>
-            </a:r>
-          </a:p>
-        </p:txBody>
-      </p:sp>
-      <p:sp>
-        <p:nvSpPr>
-          <p:cNvPr id="138" name="TextBox 137"/>
-          <p:cNvSpPr txBox="1"/>
-          <p:nvPr/>
-        </p:nvSpPr>
-        <p:spPr>
-          <a:xfrm>
-            <a:off x="6665976" y="2121408"/>
+              <a:t>31</a:t>
+            </a:r>
+          </a:p>
+        </p:txBody>
+      </p:sp>
+      <p:sp>
+        <p:nvSpPr>
+          <p:cNvPr id="168" name="TextBox 167"/>
+          <p:cNvSpPr txBox="1"/>
+          <p:nvPr/>
+        </p:nvSpPr>
+        <p:spPr>
+          <a:xfrm>
+            <a:off x="6665976" y="3657600"/>
             <a:ext cx="1920240" cy="237744"/>
           </a:xfrm>
           <a:prstGeom prst="rect">
@@ -16904,20 +18026,20 @@
               </a:defRPr>
             </a:pPr>
             <a:r>
-              <a:t>Raul Fernandez</a:t>
-            </a:r>
-          </a:p>
-        </p:txBody>
-      </p:sp>
-      <p:sp>
-        <p:nvSpPr>
-          <p:cNvPr id="139" name="TextBox 138"/>
-          <p:cNvSpPr txBox="1"/>
-          <p:nvPr/>
-        </p:nvSpPr>
-        <p:spPr>
-          <a:xfrm>
-            <a:off x="8586216" y="2121408"/>
+              <a:t>Patricia Galindoparedes</a:t>
+            </a:r>
+          </a:p>
+        </p:txBody>
+      </p:sp>
+      <p:sp>
+        <p:nvSpPr>
+          <p:cNvPr id="169" name="TextBox 168"/>
+          <p:cNvSpPr txBox="1"/>
+          <p:nvPr/>
+        </p:nvSpPr>
+        <p:spPr>
+          <a:xfrm>
+            <a:off x="8586216" y="3657600"/>
             <a:ext cx="2459736" cy="237744"/>
           </a:xfrm>
           <a:prstGeom prst="rect">
@@ -16940,20 +18062,20 @@
               </a:defRPr>
             </a:pPr>
             <a:r>
-              <a:t>Ewall Insurance Company</a:t>
-            </a:r>
-          </a:p>
-        </p:txBody>
-      </p:sp>
-      <p:sp>
-        <p:nvSpPr>
-          <p:cNvPr id="140" name="TextBox 139"/>
-          <p:cNvSpPr txBox="1"/>
-          <p:nvPr/>
-        </p:nvSpPr>
-        <p:spPr>
-          <a:xfrm>
-            <a:off x="11045952" y="2121408"/>
+              <a:t>Call Patty Insurance Services</a:t>
+            </a:r>
+          </a:p>
+        </p:txBody>
+      </p:sp>
+      <p:sp>
+        <p:nvSpPr>
+          <p:cNvPr id="170" name="TextBox 169"/>
+          <p:cNvSpPr txBox="1"/>
+          <p:nvPr/>
+        </p:nvSpPr>
+        <p:spPr>
+          <a:xfrm>
+            <a:off x="11045952" y="3657600"/>
             <a:ext cx="914400" cy="237744"/>
           </a:xfrm>
           <a:prstGeom prst="rect">
@@ -16976,20 +18098,768 @@
               </a:defRPr>
             </a:pPr>
             <a:r>
-              <a:t>$390K</a:t>
-            </a:r>
-          </a:p>
-        </p:txBody>
-      </p:sp>
-      <p:sp>
-        <p:nvSpPr>
-          <p:cNvPr id="141" name="Rectangle 140"/>
+              <a:t>$362K</a:t>
+            </a:r>
+          </a:p>
+        </p:txBody>
+      </p:sp>
+      <p:sp>
+        <p:nvSpPr>
+          <p:cNvPr id="171" name="Rectangle 170"/>
           <p:cNvSpPr/>
           <p:nvPr/>
         </p:nvSpPr>
         <p:spPr>
           <a:xfrm>
-            <a:off x="6254496" y="2359152"/>
+            <a:off x="6254496" y="3895344"/>
+            <a:ext cx="5705856" cy="256032"/>
+          </a:xfrm>
+          <a:prstGeom prst="rect">
+            <a:avLst/>
+          </a:prstGeom>
+          <a:solidFill>
+            <a:srgbClr val="D1FAE5"/>
+          </a:solidFill>
+          <a:ln>
+            <a:noFill/>
+          </a:ln>
+        </p:spPr>
+        <p:style>
+          <a:lnRef idx="1">
+            <a:schemeClr val="accent1"/>
+          </a:lnRef>
+          <a:fillRef idx="3">
+            <a:schemeClr val="accent1"/>
+          </a:fillRef>
+          <a:effectRef idx="2">
+            <a:schemeClr val="accent1"/>
+          </a:effectRef>
+          <a:fontRef idx="minor">
+            <a:schemeClr val="lt1"/>
+          </a:fontRef>
+        </p:style>
+        <p:txBody>
+          <a:bodyPr rtlCol="0" anchor="ctr"/>
+          <a:lstStyle/>
+          <a:p>
+            <a:pPr algn="ctr"/>
+          </a:p>
+        </p:txBody>
+      </p:sp>
+      <p:sp>
+        <p:nvSpPr>
+          <p:cNvPr id="172" name="TextBox 171"/>
+          <p:cNvSpPr txBox="1"/>
+          <p:nvPr/>
+        </p:nvSpPr>
+        <p:spPr>
+          <a:xfrm>
+            <a:off x="6254496" y="3913632"/>
+            <a:ext cx="411480" cy="237744"/>
+          </a:xfrm>
+          <a:prstGeom prst="rect">
+            <a:avLst/>
+          </a:prstGeom>
+          <a:noFill/>
+        </p:spPr>
+        <p:txBody>
+          <a:bodyPr wrap="none">
+            <a:spAutoFit/>
+          </a:bodyPr>
+          <a:lstStyle/>
+          <a:p>
+            <a:pPr algn="ctr">
+              <a:defRPr sz="950" b="1">
+                <a:solidFill>
+                  <a:srgbClr val="6B7280"/>
+                </a:solidFill>
+                <a:latin typeface="Calibri"/>
+              </a:defRPr>
+            </a:pPr>
+            <a:r>
+              <a:t>32</a:t>
+            </a:r>
+          </a:p>
+        </p:txBody>
+      </p:sp>
+      <p:sp>
+        <p:nvSpPr>
+          <p:cNvPr id="173" name="TextBox 172"/>
+          <p:cNvSpPr txBox="1"/>
+          <p:nvPr/>
+        </p:nvSpPr>
+        <p:spPr>
+          <a:xfrm>
+            <a:off x="6665976" y="3913632"/>
+            <a:ext cx="1920240" cy="237744"/>
+          </a:xfrm>
+          <a:prstGeom prst="rect">
+            <a:avLst/>
+          </a:prstGeom>
+          <a:noFill/>
+        </p:spPr>
+        <p:txBody>
+          <a:bodyPr wrap="none">
+            <a:spAutoFit/>
+          </a:bodyPr>
+          <a:lstStyle/>
+          <a:p>
+            <a:pPr algn="l">
+              <a:defRPr sz="950" b="1">
+                <a:solidFill>
+                  <a:srgbClr val="111827"/>
+                </a:solidFill>
+                <a:latin typeface="Calibri"/>
+              </a:defRPr>
+            </a:pPr>
+            <a:r>
+              <a:t>Kurtis Gautz</a:t>
+            </a:r>
+          </a:p>
+        </p:txBody>
+      </p:sp>
+      <p:sp>
+        <p:nvSpPr>
+          <p:cNvPr id="174" name="TextBox 173"/>
+          <p:cNvSpPr txBox="1"/>
+          <p:nvPr/>
+        </p:nvSpPr>
+        <p:spPr>
+          <a:xfrm>
+            <a:off x="8586216" y="3913632"/>
+            <a:ext cx="2459736" cy="237744"/>
+          </a:xfrm>
+          <a:prstGeom prst="rect">
+            <a:avLst/>
+          </a:prstGeom>
+          <a:noFill/>
+        </p:spPr>
+        <p:txBody>
+          <a:bodyPr wrap="none">
+            <a:spAutoFit/>
+          </a:bodyPr>
+          <a:lstStyle/>
+          <a:p>
+            <a:pPr algn="l">
+              <a:defRPr sz="950" b="0">
+                <a:solidFill>
+                  <a:srgbClr val="6B7280"/>
+                </a:solidFill>
+                <a:latin typeface="Calibri"/>
+              </a:defRPr>
+            </a:pPr>
+            <a:r>
+              <a:t>CRC Insurance Services, Inc</a:t>
+            </a:r>
+          </a:p>
+        </p:txBody>
+      </p:sp>
+      <p:sp>
+        <p:nvSpPr>
+          <p:cNvPr id="175" name="TextBox 174"/>
+          <p:cNvSpPr txBox="1"/>
+          <p:nvPr/>
+        </p:nvSpPr>
+        <p:spPr>
+          <a:xfrm>
+            <a:off x="11045952" y="3913632"/>
+            <a:ext cx="914400" cy="237744"/>
+          </a:xfrm>
+          <a:prstGeom prst="rect">
+            <a:avLst/>
+          </a:prstGeom>
+          <a:noFill/>
+        </p:spPr>
+        <p:txBody>
+          <a:bodyPr wrap="none">
+            <a:spAutoFit/>
+          </a:bodyPr>
+          <a:lstStyle/>
+          <a:p>
+            <a:pPr algn="ctr">
+              <a:defRPr sz="950" b="1">
+                <a:solidFill>
+                  <a:srgbClr val="111827"/>
+                </a:solidFill>
+                <a:latin typeface="Calibri"/>
+              </a:defRPr>
+            </a:pPr>
+            <a:r>
+              <a:t>$355K</a:t>
+            </a:r>
+          </a:p>
+        </p:txBody>
+      </p:sp>
+      <p:sp>
+        <p:nvSpPr>
+          <p:cNvPr id="176" name="Rectangle 175"/>
+          <p:cNvSpPr/>
+          <p:nvPr/>
+        </p:nvSpPr>
+        <p:spPr>
+          <a:xfrm>
+            <a:off x="6254496" y="4151376"/>
+            <a:ext cx="5705856" cy="256032"/>
+          </a:xfrm>
+          <a:prstGeom prst="rect">
+            <a:avLst/>
+          </a:prstGeom>
+          <a:solidFill>
+            <a:srgbClr val="FFFFFF"/>
+          </a:solidFill>
+          <a:ln>
+            <a:noFill/>
+          </a:ln>
+        </p:spPr>
+        <p:style>
+          <a:lnRef idx="1">
+            <a:schemeClr val="accent1"/>
+          </a:lnRef>
+          <a:fillRef idx="3">
+            <a:schemeClr val="accent1"/>
+          </a:fillRef>
+          <a:effectRef idx="2">
+            <a:schemeClr val="accent1"/>
+          </a:effectRef>
+          <a:fontRef idx="minor">
+            <a:schemeClr val="lt1"/>
+          </a:fontRef>
+        </p:style>
+        <p:txBody>
+          <a:bodyPr rtlCol="0" anchor="ctr"/>
+          <a:lstStyle/>
+          <a:p>
+            <a:pPr algn="ctr"/>
+          </a:p>
+        </p:txBody>
+      </p:sp>
+      <p:sp>
+        <p:nvSpPr>
+          <p:cNvPr id="177" name="TextBox 176"/>
+          <p:cNvSpPr txBox="1"/>
+          <p:nvPr/>
+        </p:nvSpPr>
+        <p:spPr>
+          <a:xfrm>
+            <a:off x="6254496" y="4169664"/>
+            <a:ext cx="411480" cy="237744"/>
+          </a:xfrm>
+          <a:prstGeom prst="rect">
+            <a:avLst/>
+          </a:prstGeom>
+          <a:noFill/>
+        </p:spPr>
+        <p:txBody>
+          <a:bodyPr wrap="none">
+            <a:spAutoFit/>
+          </a:bodyPr>
+          <a:lstStyle/>
+          <a:p>
+            <a:pPr algn="ctr">
+              <a:defRPr sz="950" b="1">
+                <a:solidFill>
+                  <a:srgbClr val="6B7280"/>
+                </a:solidFill>
+                <a:latin typeface="Calibri"/>
+              </a:defRPr>
+            </a:pPr>
+            <a:r>
+              <a:t>33</a:t>
+            </a:r>
+          </a:p>
+        </p:txBody>
+      </p:sp>
+      <p:sp>
+        <p:nvSpPr>
+          <p:cNvPr id="178" name="TextBox 177"/>
+          <p:cNvSpPr txBox="1"/>
+          <p:nvPr/>
+        </p:nvSpPr>
+        <p:spPr>
+          <a:xfrm>
+            <a:off x="6665976" y="4169664"/>
+            <a:ext cx="1920240" cy="237744"/>
+          </a:xfrm>
+          <a:prstGeom prst="rect">
+            <a:avLst/>
+          </a:prstGeom>
+          <a:noFill/>
+        </p:spPr>
+        <p:txBody>
+          <a:bodyPr wrap="none">
+            <a:spAutoFit/>
+          </a:bodyPr>
+          <a:lstStyle/>
+          <a:p>
+            <a:pPr algn="l">
+              <a:defRPr sz="950" b="1">
+                <a:solidFill>
+                  <a:srgbClr val="111827"/>
+                </a:solidFill>
+                <a:latin typeface="Calibri"/>
+              </a:defRPr>
+            </a:pPr>
+            <a:r>
+              <a:t>Damandeep Singh</a:t>
+            </a:r>
+          </a:p>
+        </p:txBody>
+      </p:sp>
+      <p:sp>
+        <p:nvSpPr>
+          <p:cNvPr id="179" name="TextBox 178"/>
+          <p:cNvSpPr txBox="1"/>
+          <p:nvPr/>
+        </p:nvSpPr>
+        <p:spPr>
+          <a:xfrm>
+            <a:off x="8586216" y="4169664"/>
+            <a:ext cx="2459736" cy="237744"/>
+          </a:xfrm>
+          <a:prstGeom prst="rect">
+            <a:avLst/>
+          </a:prstGeom>
+          <a:noFill/>
+        </p:spPr>
+        <p:txBody>
+          <a:bodyPr wrap="none">
+            <a:spAutoFit/>
+          </a:bodyPr>
+          <a:lstStyle/>
+          <a:p>
+            <a:pPr algn="l">
+              <a:defRPr sz="950" b="0">
+                <a:solidFill>
+                  <a:srgbClr val="6B7280"/>
+                </a:solidFill>
+                <a:latin typeface="Calibri"/>
+              </a:defRPr>
+            </a:pPr>
+            <a:r>
+              <a:t>Mayflower Insurance Services</a:t>
+            </a:r>
+          </a:p>
+        </p:txBody>
+      </p:sp>
+      <p:sp>
+        <p:nvSpPr>
+          <p:cNvPr id="180" name="TextBox 179"/>
+          <p:cNvSpPr txBox="1"/>
+          <p:nvPr/>
+        </p:nvSpPr>
+        <p:spPr>
+          <a:xfrm>
+            <a:off x="11045952" y="4169664"/>
+            <a:ext cx="914400" cy="237744"/>
+          </a:xfrm>
+          <a:prstGeom prst="rect">
+            <a:avLst/>
+          </a:prstGeom>
+          <a:noFill/>
+        </p:spPr>
+        <p:txBody>
+          <a:bodyPr wrap="none">
+            <a:spAutoFit/>
+          </a:bodyPr>
+          <a:lstStyle/>
+          <a:p>
+            <a:pPr algn="ctr">
+              <a:defRPr sz="950" b="1">
+                <a:solidFill>
+                  <a:srgbClr val="111827"/>
+                </a:solidFill>
+                <a:latin typeface="Calibri"/>
+              </a:defRPr>
+            </a:pPr>
+            <a:r>
+              <a:t>$341K</a:t>
+            </a:r>
+          </a:p>
+        </p:txBody>
+      </p:sp>
+      <p:sp>
+        <p:nvSpPr>
+          <p:cNvPr id="181" name="Rectangle 180"/>
+          <p:cNvSpPr/>
+          <p:nvPr/>
+        </p:nvSpPr>
+        <p:spPr>
+          <a:xfrm>
+            <a:off x="6254496" y="4407408"/>
+            <a:ext cx="5705856" cy="256032"/>
+          </a:xfrm>
+          <a:prstGeom prst="rect">
+            <a:avLst/>
+          </a:prstGeom>
+          <a:solidFill>
+            <a:srgbClr val="D1FAE5"/>
+          </a:solidFill>
+          <a:ln>
+            <a:noFill/>
+          </a:ln>
+        </p:spPr>
+        <p:style>
+          <a:lnRef idx="1">
+            <a:schemeClr val="accent1"/>
+          </a:lnRef>
+          <a:fillRef idx="3">
+            <a:schemeClr val="accent1"/>
+          </a:fillRef>
+          <a:effectRef idx="2">
+            <a:schemeClr val="accent1"/>
+          </a:effectRef>
+          <a:fontRef idx="minor">
+            <a:schemeClr val="lt1"/>
+          </a:fontRef>
+        </p:style>
+        <p:txBody>
+          <a:bodyPr rtlCol="0" anchor="ctr"/>
+          <a:lstStyle/>
+          <a:p>
+            <a:pPr algn="ctr"/>
+          </a:p>
+        </p:txBody>
+      </p:sp>
+      <p:sp>
+        <p:nvSpPr>
+          <p:cNvPr id="182" name="TextBox 181"/>
+          <p:cNvSpPr txBox="1"/>
+          <p:nvPr/>
+        </p:nvSpPr>
+        <p:spPr>
+          <a:xfrm>
+            <a:off x="6254496" y="4425696"/>
+            <a:ext cx="411480" cy="237744"/>
+          </a:xfrm>
+          <a:prstGeom prst="rect">
+            <a:avLst/>
+          </a:prstGeom>
+          <a:noFill/>
+        </p:spPr>
+        <p:txBody>
+          <a:bodyPr wrap="none">
+            <a:spAutoFit/>
+          </a:bodyPr>
+          <a:lstStyle/>
+          <a:p>
+            <a:pPr algn="ctr">
+              <a:defRPr sz="950" b="1">
+                <a:solidFill>
+                  <a:srgbClr val="6B7280"/>
+                </a:solidFill>
+                <a:latin typeface="Calibri"/>
+              </a:defRPr>
+            </a:pPr>
+            <a:r>
+              <a:t>34</a:t>
+            </a:r>
+          </a:p>
+        </p:txBody>
+      </p:sp>
+      <p:sp>
+        <p:nvSpPr>
+          <p:cNvPr id="183" name="TextBox 182"/>
+          <p:cNvSpPr txBox="1"/>
+          <p:nvPr/>
+        </p:nvSpPr>
+        <p:spPr>
+          <a:xfrm>
+            <a:off x="6665976" y="4425696"/>
+            <a:ext cx="1920240" cy="237744"/>
+          </a:xfrm>
+          <a:prstGeom prst="rect">
+            <a:avLst/>
+          </a:prstGeom>
+          <a:noFill/>
+        </p:spPr>
+        <p:txBody>
+          <a:bodyPr wrap="none">
+            <a:spAutoFit/>
+          </a:bodyPr>
+          <a:lstStyle/>
+          <a:p>
+            <a:pPr algn="l">
+              <a:defRPr sz="950" b="1">
+                <a:solidFill>
+                  <a:srgbClr val="111827"/>
+                </a:solidFill>
+                <a:latin typeface="Calibri"/>
+              </a:defRPr>
+            </a:pPr>
+            <a:r>
+              <a:t>Lynda Inderjeet</a:t>
+            </a:r>
+          </a:p>
+        </p:txBody>
+      </p:sp>
+      <p:sp>
+        <p:nvSpPr>
+          <p:cNvPr id="184" name="TextBox 183"/>
+          <p:cNvSpPr txBox="1"/>
+          <p:nvPr/>
+        </p:nvSpPr>
+        <p:spPr>
+          <a:xfrm>
+            <a:off x="8586216" y="4425696"/>
+            <a:ext cx="2459736" cy="237744"/>
+          </a:xfrm>
+          <a:prstGeom prst="rect">
+            <a:avLst/>
+          </a:prstGeom>
+          <a:noFill/>
+        </p:spPr>
+        <p:txBody>
+          <a:bodyPr wrap="none">
+            <a:spAutoFit/>
+          </a:bodyPr>
+          <a:lstStyle/>
+          <a:p>
+            <a:pPr algn="l">
+              <a:defRPr sz="950" b="0">
+                <a:solidFill>
+                  <a:srgbClr val="6B7280"/>
+                </a:solidFill>
+                <a:latin typeface="Calibri"/>
+              </a:defRPr>
+            </a:pPr>
+            <a:r>
+              <a:t>R-T Specialty, LLC</a:t>
+            </a:r>
+          </a:p>
+        </p:txBody>
+      </p:sp>
+      <p:sp>
+        <p:nvSpPr>
+          <p:cNvPr id="185" name="TextBox 184"/>
+          <p:cNvSpPr txBox="1"/>
+          <p:nvPr/>
+        </p:nvSpPr>
+        <p:spPr>
+          <a:xfrm>
+            <a:off x="11045952" y="4425696"/>
+            <a:ext cx="914400" cy="237744"/>
+          </a:xfrm>
+          <a:prstGeom prst="rect">
+            <a:avLst/>
+          </a:prstGeom>
+          <a:noFill/>
+        </p:spPr>
+        <p:txBody>
+          <a:bodyPr wrap="none">
+            <a:spAutoFit/>
+          </a:bodyPr>
+          <a:lstStyle/>
+          <a:p>
+            <a:pPr algn="ctr">
+              <a:defRPr sz="950" b="1">
+                <a:solidFill>
+                  <a:srgbClr val="111827"/>
+                </a:solidFill>
+                <a:latin typeface="Calibri"/>
+              </a:defRPr>
+            </a:pPr>
+            <a:r>
+              <a:t>$327K</a:t>
+            </a:r>
+          </a:p>
+        </p:txBody>
+      </p:sp>
+      <p:sp>
+        <p:nvSpPr>
+          <p:cNvPr id="186" name="Rectangle 185"/>
+          <p:cNvSpPr/>
+          <p:nvPr/>
+        </p:nvSpPr>
+        <p:spPr>
+          <a:xfrm>
+            <a:off x="6254496" y="4663440"/>
+            <a:ext cx="5705856" cy="256032"/>
+          </a:xfrm>
+          <a:prstGeom prst="rect">
+            <a:avLst/>
+          </a:prstGeom>
+          <a:solidFill>
+            <a:srgbClr val="FFFFFF"/>
+          </a:solidFill>
+          <a:ln>
+            <a:noFill/>
+          </a:ln>
+        </p:spPr>
+        <p:style>
+          <a:lnRef idx="1">
+            <a:schemeClr val="accent1"/>
+          </a:lnRef>
+          <a:fillRef idx="3">
+            <a:schemeClr val="accent1"/>
+          </a:fillRef>
+          <a:effectRef idx="2">
+            <a:schemeClr val="accent1"/>
+          </a:effectRef>
+          <a:fontRef idx="minor">
+            <a:schemeClr val="lt1"/>
+          </a:fontRef>
+        </p:style>
+        <p:txBody>
+          <a:bodyPr rtlCol="0" anchor="ctr"/>
+          <a:lstStyle/>
+          <a:p>
+            <a:pPr algn="ctr"/>
+          </a:p>
+        </p:txBody>
+      </p:sp>
+      <p:sp>
+        <p:nvSpPr>
+          <p:cNvPr id="187" name="TextBox 186"/>
+          <p:cNvSpPr txBox="1"/>
+          <p:nvPr/>
+        </p:nvSpPr>
+        <p:spPr>
+          <a:xfrm>
+            <a:off x="6254496" y="4681728"/>
+            <a:ext cx="411480" cy="237744"/>
+          </a:xfrm>
+          <a:prstGeom prst="rect">
+            <a:avLst/>
+          </a:prstGeom>
+          <a:noFill/>
+        </p:spPr>
+        <p:txBody>
+          <a:bodyPr wrap="none">
+            <a:spAutoFit/>
+          </a:bodyPr>
+          <a:lstStyle/>
+          <a:p>
+            <a:pPr algn="ctr">
+              <a:defRPr sz="950" b="1">
+                <a:solidFill>
+                  <a:srgbClr val="6B7280"/>
+                </a:solidFill>
+                <a:latin typeface="Calibri"/>
+              </a:defRPr>
+            </a:pPr>
+            <a:r>
+              <a:t>35</a:t>
+            </a:r>
+          </a:p>
+        </p:txBody>
+      </p:sp>
+      <p:sp>
+        <p:nvSpPr>
+          <p:cNvPr id="188" name="TextBox 187"/>
+          <p:cNvSpPr txBox="1"/>
+          <p:nvPr/>
+        </p:nvSpPr>
+        <p:spPr>
+          <a:xfrm>
+            <a:off x="6665976" y="4681728"/>
+            <a:ext cx="1920240" cy="237744"/>
+          </a:xfrm>
+          <a:prstGeom prst="rect">
+            <a:avLst/>
+          </a:prstGeom>
+          <a:noFill/>
+        </p:spPr>
+        <p:txBody>
+          <a:bodyPr wrap="none">
+            <a:spAutoFit/>
+          </a:bodyPr>
+          <a:lstStyle/>
+          <a:p>
+            <a:pPr algn="l">
+              <a:defRPr sz="950" b="1">
+                <a:solidFill>
+                  <a:srgbClr val="111827"/>
+                </a:solidFill>
+                <a:latin typeface="Calibri"/>
+              </a:defRPr>
+            </a:pPr>
+            <a:r>
+              <a:t>Nicholas Banks</a:t>
+            </a:r>
+          </a:p>
+        </p:txBody>
+      </p:sp>
+      <p:sp>
+        <p:nvSpPr>
+          <p:cNvPr id="189" name="TextBox 188"/>
+          <p:cNvSpPr txBox="1"/>
+          <p:nvPr/>
+        </p:nvSpPr>
+        <p:spPr>
+          <a:xfrm>
+            <a:off x="8586216" y="4681728"/>
+            <a:ext cx="2459736" cy="237744"/>
+          </a:xfrm>
+          <a:prstGeom prst="rect">
+            <a:avLst/>
+          </a:prstGeom>
+          <a:noFill/>
+        </p:spPr>
+        <p:txBody>
+          <a:bodyPr wrap="none">
+            <a:spAutoFit/>
+          </a:bodyPr>
+          <a:lstStyle/>
+          <a:p>
+            <a:pPr algn="l">
+              <a:defRPr sz="950" b="0">
+                <a:solidFill>
+                  <a:srgbClr val="6B7280"/>
+                </a:solidFill>
+                <a:latin typeface="Calibri"/>
+              </a:defRPr>
+            </a:pPr>
+            <a:r>
+              <a:t>Reliance Partners, LLC</a:t>
+            </a:r>
+          </a:p>
+        </p:txBody>
+      </p:sp>
+      <p:sp>
+        <p:nvSpPr>
+          <p:cNvPr id="190" name="TextBox 189"/>
+          <p:cNvSpPr txBox="1"/>
+          <p:nvPr/>
+        </p:nvSpPr>
+        <p:spPr>
+          <a:xfrm>
+            <a:off x="11045952" y="4681728"/>
+            <a:ext cx="914400" cy="237744"/>
+          </a:xfrm>
+          <a:prstGeom prst="rect">
+            <a:avLst/>
+          </a:prstGeom>
+          <a:noFill/>
+        </p:spPr>
+        <p:txBody>
+          <a:bodyPr wrap="none">
+            <a:spAutoFit/>
+          </a:bodyPr>
+          <a:lstStyle/>
+          <a:p>
+            <a:pPr algn="ctr">
+              <a:defRPr sz="950" b="1">
+                <a:solidFill>
+                  <a:srgbClr val="111827"/>
+                </a:solidFill>
+                <a:latin typeface="Calibri"/>
+              </a:defRPr>
+            </a:pPr>
+            <a:r>
+              <a:t>$326K</a:t>
+            </a:r>
+          </a:p>
+        </p:txBody>
+      </p:sp>
+      <p:sp>
+        <p:nvSpPr>
+          <p:cNvPr id="191" name="Rectangle 190"/>
+          <p:cNvSpPr/>
+          <p:nvPr/>
+        </p:nvSpPr>
+        <p:spPr>
+          <a:xfrm>
+            <a:off x="6254496" y="4919472"/>
             <a:ext cx="5705856" cy="256032"/>
           </a:xfrm>
           <a:prstGeom prst="rect">
@@ -17026,13 +18896,13 @@
       </p:sp>
       <p:sp>
         <p:nvSpPr>
-          <p:cNvPr id="142" name="TextBox 141"/>
-          <p:cNvSpPr txBox="1"/>
-          <p:nvPr/>
-        </p:nvSpPr>
-        <p:spPr>
-          <a:xfrm>
-            <a:off x="6254496" y="2377440"/>
+          <p:cNvPr id="192" name="TextBox 191"/>
+          <p:cNvSpPr txBox="1"/>
+          <p:nvPr/>
+        </p:nvSpPr>
+        <p:spPr>
+          <a:xfrm>
+            <a:off x="6254496" y="4937760"/>
             <a:ext cx="411480" cy="237744"/>
           </a:xfrm>
           <a:prstGeom prst="rect">
@@ -17055,20 +18925,20 @@
               </a:defRPr>
             </a:pPr>
             <a:r>
-              <a:t>26</a:t>
-            </a:r>
-          </a:p>
-        </p:txBody>
-      </p:sp>
-      <p:sp>
-        <p:nvSpPr>
-          <p:cNvPr id="143" name="TextBox 142"/>
-          <p:cNvSpPr txBox="1"/>
-          <p:nvPr/>
-        </p:nvSpPr>
-        <p:spPr>
-          <a:xfrm>
-            <a:off x="6665976" y="2377440"/>
+              <a:t>36</a:t>
+            </a:r>
+          </a:p>
+        </p:txBody>
+      </p:sp>
+      <p:sp>
+        <p:nvSpPr>
+          <p:cNvPr id="193" name="TextBox 192"/>
+          <p:cNvSpPr txBox="1"/>
+          <p:nvPr/>
+        </p:nvSpPr>
+        <p:spPr>
+          <a:xfrm>
+            <a:off x="6665976" y="4937760"/>
             <a:ext cx="1920240" cy="237744"/>
           </a:xfrm>
           <a:prstGeom prst="rect">
@@ -17091,20 +18961,20 @@
               </a:defRPr>
             </a:pPr>
             <a:r>
-              <a:t>Daliborka Savovic</a:t>
-            </a:r>
-          </a:p>
-        </p:txBody>
-      </p:sp>
-      <p:sp>
-        <p:nvSpPr>
-          <p:cNvPr id="144" name="TextBox 143"/>
-          <p:cNvSpPr txBox="1"/>
-          <p:nvPr/>
-        </p:nvSpPr>
-        <p:spPr>
-          <a:xfrm>
-            <a:off x="8586216" y="2377440"/>
+              <a:t>Vladimir Tesler</a:t>
+            </a:r>
+          </a:p>
+        </p:txBody>
+      </p:sp>
+      <p:sp>
+        <p:nvSpPr>
+          <p:cNvPr id="194" name="TextBox 193"/>
+          <p:cNvSpPr txBox="1"/>
+          <p:nvPr/>
+        </p:nvSpPr>
+        <p:spPr>
+          <a:xfrm>
+            <a:off x="8586216" y="4937760"/>
             <a:ext cx="2459736" cy="237744"/>
           </a:xfrm>
           <a:prstGeom prst="rect">
@@ -17127,20 +18997,20 @@
               </a:defRPr>
             </a:pPr>
             <a:r>
-              <a:t>Alpha Trucking Insurance Agency In…</a:t>
-            </a:r>
-          </a:p>
-        </p:txBody>
-      </p:sp>
-      <p:sp>
-        <p:nvSpPr>
-          <p:cNvPr id="145" name="TextBox 144"/>
-          <p:cNvSpPr txBox="1"/>
-          <p:nvPr/>
-        </p:nvSpPr>
-        <p:spPr>
-          <a:xfrm>
-            <a:off x="11045952" y="2377440"/>
+              <a:t>Insurance Planet</a:t>
+            </a:r>
+          </a:p>
+        </p:txBody>
+      </p:sp>
+      <p:sp>
+        <p:nvSpPr>
+          <p:cNvPr id="195" name="TextBox 194"/>
+          <p:cNvSpPr txBox="1"/>
+          <p:nvPr/>
+        </p:nvSpPr>
+        <p:spPr>
+          <a:xfrm>
+            <a:off x="11045952" y="4937760"/>
             <a:ext cx="914400" cy="237744"/>
           </a:xfrm>
           <a:prstGeom prst="rect">
@@ -17163,27 +19033,27 @@
               </a:defRPr>
             </a:pPr>
             <a:r>
-              <a:t>$380K</a:t>
-            </a:r>
-          </a:p>
-        </p:txBody>
-      </p:sp>
-      <p:sp>
-        <p:nvSpPr>
-          <p:cNvPr id="146" name="Rectangle 145"/>
+              <a:t>$326K</a:t>
+            </a:r>
+          </a:p>
+        </p:txBody>
+      </p:sp>
+      <p:sp>
+        <p:nvSpPr>
+          <p:cNvPr id="196" name="Rectangle 195"/>
           <p:cNvSpPr/>
           <p:nvPr/>
         </p:nvSpPr>
         <p:spPr>
           <a:xfrm>
-            <a:off x="6254496" y="2615184"/>
+            <a:off x="6254496" y="5175504"/>
             <a:ext cx="5705856" cy="256032"/>
           </a:xfrm>
           <a:prstGeom prst="rect">
             <a:avLst/>
           </a:prstGeom>
           <a:solidFill>
-            <a:srgbClr val="D1FAE5"/>
+            <a:srgbClr val="FFFFFF"/>
           </a:solidFill>
           <a:ln>
             <a:noFill/>
@@ -17213,13 +19083,13 @@
       </p:sp>
       <p:sp>
         <p:nvSpPr>
-          <p:cNvPr id="147" name="TextBox 146"/>
-          <p:cNvSpPr txBox="1"/>
-          <p:nvPr/>
-        </p:nvSpPr>
-        <p:spPr>
-          <a:xfrm>
-            <a:off x="6254496" y="2633472"/>
+          <p:cNvPr id="197" name="TextBox 196"/>
+          <p:cNvSpPr txBox="1"/>
+          <p:nvPr/>
+        </p:nvSpPr>
+        <p:spPr>
+          <a:xfrm>
+            <a:off x="6254496" y="5193792"/>
             <a:ext cx="411480" cy="237744"/>
           </a:xfrm>
           <a:prstGeom prst="rect">
@@ -17242,20 +19112,20 @@
               </a:defRPr>
             </a:pPr>
             <a:r>
-              <a:t>27</a:t>
-            </a:r>
-          </a:p>
-        </p:txBody>
-      </p:sp>
-      <p:sp>
-        <p:nvSpPr>
-          <p:cNvPr id="148" name="TextBox 147"/>
-          <p:cNvSpPr txBox="1"/>
-          <p:nvPr/>
-        </p:nvSpPr>
-        <p:spPr>
-          <a:xfrm>
-            <a:off x="6665976" y="2633472"/>
+              <a:t>37</a:t>
+            </a:r>
+          </a:p>
+        </p:txBody>
+      </p:sp>
+      <p:sp>
+        <p:nvSpPr>
+          <p:cNvPr id="198" name="TextBox 197"/>
+          <p:cNvSpPr txBox="1"/>
+          <p:nvPr/>
+        </p:nvSpPr>
+        <p:spPr>
+          <a:xfrm>
+            <a:off x="6665976" y="5193792"/>
             <a:ext cx="1920240" cy="237744"/>
           </a:xfrm>
           <a:prstGeom prst="rect">
@@ -17278,20 +19148,20 @@
               </a:defRPr>
             </a:pPr>
             <a:r>
-              <a:t>Inderjit Singh</a:t>
-            </a:r>
-          </a:p>
-        </p:txBody>
-      </p:sp>
-      <p:sp>
-        <p:nvSpPr>
-          <p:cNvPr id="149" name="TextBox 148"/>
-          <p:cNvSpPr txBox="1"/>
-          <p:nvPr/>
-        </p:nvSpPr>
-        <p:spPr>
-          <a:xfrm>
-            <a:off x="8586216" y="2633472"/>
+              <a:t>Venizelos Papadopulos</a:t>
+            </a:r>
+          </a:p>
+        </p:txBody>
+      </p:sp>
+      <p:sp>
+        <p:nvSpPr>
+          <p:cNvPr id="199" name="TextBox 198"/>
+          <p:cNvSpPr txBox="1"/>
+          <p:nvPr/>
+        </p:nvSpPr>
+        <p:spPr>
+          <a:xfrm>
+            <a:off x="8586216" y="5193792"/>
             <a:ext cx="2459736" cy="237744"/>
           </a:xfrm>
           <a:prstGeom prst="rect">
@@ -17314,20 +19184,20 @@
               </a:defRPr>
             </a:pPr>
             <a:r>
-              <a:t>American Insurance Agency LLC</a:t>
-            </a:r>
-          </a:p>
-        </p:txBody>
-      </p:sp>
-      <p:sp>
-        <p:nvSpPr>
-          <p:cNvPr id="150" name="TextBox 149"/>
-          <p:cNvSpPr txBox="1"/>
-          <p:nvPr/>
-        </p:nvSpPr>
-        <p:spPr>
-          <a:xfrm>
-            <a:off x="11045952" y="2633472"/>
+              <a:t>Exclusive Financial Services, Inc</a:t>
+            </a:r>
+          </a:p>
+        </p:txBody>
+      </p:sp>
+      <p:sp>
+        <p:nvSpPr>
+          <p:cNvPr id="200" name="TextBox 199"/>
+          <p:cNvSpPr txBox="1"/>
+          <p:nvPr/>
+        </p:nvSpPr>
+        <p:spPr>
+          <a:xfrm>
+            <a:off x="11045952" y="5193792"/>
             <a:ext cx="914400" cy="237744"/>
           </a:xfrm>
           <a:prstGeom prst="rect">
@@ -17350,20 +19220,20 @@
               </a:defRPr>
             </a:pPr>
             <a:r>
-              <a:t>$372K</a:t>
-            </a:r>
-          </a:p>
-        </p:txBody>
-      </p:sp>
-      <p:sp>
-        <p:nvSpPr>
-          <p:cNvPr id="151" name="Rectangle 150"/>
+              <a:t>$321K</a:t>
+            </a:r>
+          </a:p>
+        </p:txBody>
+      </p:sp>
+      <p:sp>
+        <p:nvSpPr>
+          <p:cNvPr id="201" name="Rectangle 200"/>
           <p:cNvSpPr/>
           <p:nvPr/>
         </p:nvSpPr>
         <p:spPr>
           <a:xfrm>
-            <a:off x="6254496" y="2871216"/>
+            <a:off x="6254496" y="5431536"/>
             <a:ext cx="5705856" cy="256032"/>
           </a:xfrm>
           <a:prstGeom prst="rect">
@@ -17400,13 +19270,13 @@
       </p:sp>
       <p:sp>
         <p:nvSpPr>
-          <p:cNvPr id="152" name="TextBox 151"/>
-          <p:cNvSpPr txBox="1"/>
-          <p:nvPr/>
-        </p:nvSpPr>
-        <p:spPr>
-          <a:xfrm>
-            <a:off x="6254496" y="2889504"/>
+          <p:cNvPr id="202" name="TextBox 201"/>
+          <p:cNvSpPr txBox="1"/>
+          <p:nvPr/>
+        </p:nvSpPr>
+        <p:spPr>
+          <a:xfrm>
+            <a:off x="6254496" y="5449824"/>
             <a:ext cx="411480" cy="237744"/>
           </a:xfrm>
           <a:prstGeom prst="rect">
@@ -17429,20 +19299,20 @@
               </a:defRPr>
             </a:pPr>
             <a:r>
-              <a:t>28</a:t>
-            </a:r>
-          </a:p>
-        </p:txBody>
-      </p:sp>
-      <p:sp>
-        <p:nvSpPr>
-          <p:cNvPr id="153" name="TextBox 152"/>
-          <p:cNvSpPr txBox="1"/>
-          <p:nvPr/>
-        </p:nvSpPr>
-        <p:spPr>
-          <a:xfrm>
-            <a:off x="6665976" y="2889504"/>
+              <a:t>38</a:t>
+            </a:r>
+          </a:p>
+        </p:txBody>
+      </p:sp>
+      <p:sp>
+        <p:nvSpPr>
+          <p:cNvPr id="203" name="TextBox 202"/>
+          <p:cNvSpPr txBox="1"/>
+          <p:nvPr/>
+        </p:nvSpPr>
+        <p:spPr>
+          <a:xfrm>
+            <a:off x="6665976" y="5449824"/>
             <a:ext cx="1920240" cy="237744"/>
           </a:xfrm>
           <a:prstGeom prst="rect">
@@ -17465,20 +19335,20 @@
               </a:defRPr>
             </a:pPr>
             <a:r>
-              <a:t>Deepak Goswami</a:t>
-            </a:r>
-          </a:p>
-        </p:txBody>
-      </p:sp>
-      <p:sp>
-        <p:nvSpPr>
-          <p:cNvPr id="154" name="TextBox 153"/>
-          <p:cNvSpPr txBox="1"/>
-          <p:nvPr/>
-        </p:nvSpPr>
-        <p:spPr>
-          <a:xfrm>
-            <a:off x="8586216" y="2889504"/>
+              <a:t>Scarlette Mcbrayer</a:t>
+            </a:r>
+          </a:p>
+        </p:txBody>
+      </p:sp>
+      <p:sp>
+        <p:nvSpPr>
+          <p:cNvPr id="204" name="TextBox 203"/>
+          <p:cNvSpPr txBox="1"/>
+          <p:nvPr/>
+        </p:nvSpPr>
+        <p:spPr>
+          <a:xfrm>
+            <a:off x="8586216" y="5449824"/>
             <a:ext cx="2459736" cy="237744"/>
           </a:xfrm>
           <a:prstGeom prst="rect">
@@ -17501,20 +19371,20 @@
               </a:defRPr>
             </a:pPr>
             <a:r>
-              <a:t>A.S.I.A Inc</a:t>
-            </a:r>
-          </a:p>
-        </p:txBody>
-      </p:sp>
-      <p:sp>
-        <p:nvSpPr>
-          <p:cNvPr id="155" name="TextBox 154"/>
-          <p:cNvSpPr txBox="1"/>
-          <p:nvPr/>
-        </p:nvSpPr>
-        <p:spPr>
-          <a:xfrm>
-            <a:off x="11045952" y="2889504"/>
+              <a:t>Reliance Partners, LLC</a:t>
+            </a:r>
+          </a:p>
+        </p:txBody>
+      </p:sp>
+      <p:sp>
+        <p:nvSpPr>
+          <p:cNvPr id="205" name="TextBox 204"/>
+          <p:cNvSpPr txBox="1"/>
+          <p:nvPr/>
+        </p:nvSpPr>
+        <p:spPr>
+          <a:xfrm>
+            <a:off x="11045952" y="5449824"/>
             <a:ext cx="914400" cy="237744"/>
           </a:xfrm>
           <a:prstGeom prst="rect">
@@ -17537,20 +19407,20 @@
               </a:defRPr>
             </a:pPr>
             <a:r>
-              <a:t>$368K</a:t>
-            </a:r>
-          </a:p>
-        </p:txBody>
-      </p:sp>
-      <p:sp>
-        <p:nvSpPr>
-          <p:cNvPr id="156" name="Rectangle 155"/>
+              <a:t>$315K</a:t>
+            </a:r>
+          </a:p>
+        </p:txBody>
+      </p:sp>
+      <p:sp>
+        <p:nvSpPr>
+          <p:cNvPr id="206" name="Rectangle 205"/>
           <p:cNvSpPr/>
           <p:nvPr/>
         </p:nvSpPr>
         <p:spPr>
           <a:xfrm>
-            <a:off x="6254496" y="3127248"/>
+            <a:off x="6254496" y="5687568"/>
             <a:ext cx="5705856" cy="256032"/>
           </a:xfrm>
           <a:prstGeom prst="rect">
@@ -17587,13 +19457,13 @@
       </p:sp>
       <p:sp>
         <p:nvSpPr>
-          <p:cNvPr id="157" name="TextBox 156"/>
-          <p:cNvSpPr txBox="1"/>
-          <p:nvPr/>
-        </p:nvSpPr>
-        <p:spPr>
-          <a:xfrm>
-            <a:off x="6254496" y="3145536"/>
+          <p:cNvPr id="207" name="TextBox 206"/>
+          <p:cNvSpPr txBox="1"/>
+          <p:nvPr/>
+        </p:nvSpPr>
+        <p:spPr>
+          <a:xfrm>
+            <a:off x="6254496" y="5705856"/>
             <a:ext cx="411480" cy="237744"/>
           </a:xfrm>
           <a:prstGeom prst="rect">
@@ -17616,20 +19486,20 @@
               </a:defRPr>
             </a:pPr>
             <a:r>
-              <a:t>29</a:t>
-            </a:r>
-          </a:p>
-        </p:txBody>
-      </p:sp>
-      <p:sp>
-        <p:nvSpPr>
-          <p:cNvPr id="158" name="TextBox 157"/>
-          <p:cNvSpPr txBox="1"/>
-          <p:nvPr/>
-        </p:nvSpPr>
-        <p:spPr>
-          <a:xfrm>
-            <a:off x="6665976" y="3145536"/>
+              <a:t>39</a:t>
+            </a:r>
+          </a:p>
+        </p:txBody>
+      </p:sp>
+      <p:sp>
+        <p:nvSpPr>
+          <p:cNvPr id="208" name="TextBox 207"/>
+          <p:cNvSpPr txBox="1"/>
+          <p:nvPr/>
+        </p:nvSpPr>
+        <p:spPr>
+          <a:xfrm>
+            <a:off x="6665976" y="5705856"/>
             <a:ext cx="1920240" cy="237744"/>
           </a:xfrm>
           <a:prstGeom prst="rect">
@@ -17652,20 +19522,20 @@
               </a:defRPr>
             </a:pPr>
             <a:r>
-              <a:t>Michael Su</a:t>
-            </a:r>
-          </a:p>
-        </p:txBody>
-      </p:sp>
-      <p:sp>
-        <p:nvSpPr>
-          <p:cNvPr id="159" name="TextBox 158"/>
-          <p:cNvSpPr txBox="1"/>
-          <p:nvPr/>
-        </p:nvSpPr>
-        <p:spPr>
-          <a:xfrm>
-            <a:off x="8586216" y="3145536"/>
+              <a:t>Omar Elmanzalawy</a:t>
+            </a:r>
+          </a:p>
+        </p:txBody>
+      </p:sp>
+      <p:sp>
+        <p:nvSpPr>
+          <p:cNvPr id="209" name="TextBox 208"/>
+          <p:cNvSpPr txBox="1"/>
+          <p:nvPr/>
+        </p:nvSpPr>
+        <p:spPr>
+          <a:xfrm>
+            <a:off x="8586216" y="5705856"/>
             <a:ext cx="2459736" cy="237744"/>
           </a:xfrm>
           <a:prstGeom prst="rect">
@@ -17688,20 +19558,20 @@
               </a:defRPr>
             </a:pPr>
             <a:r>
-              <a:t>Jtc Insurance Agency, Inc.</a:t>
-            </a:r>
-          </a:p>
-        </p:txBody>
-      </p:sp>
-      <p:sp>
-        <p:nvSpPr>
-          <p:cNvPr id="160" name="TextBox 159"/>
-          <p:cNvSpPr txBox="1"/>
-          <p:nvPr/>
-        </p:nvSpPr>
-        <p:spPr>
-          <a:xfrm>
-            <a:off x="11045952" y="3145536"/>
+              <a:t>First Connect Insurance</a:t>
+            </a:r>
+          </a:p>
+        </p:txBody>
+      </p:sp>
+      <p:sp>
+        <p:nvSpPr>
+          <p:cNvPr id="210" name="TextBox 209"/>
+          <p:cNvSpPr txBox="1"/>
+          <p:nvPr/>
+        </p:nvSpPr>
+        <p:spPr>
+          <a:xfrm>
+            <a:off x="11045952" y="5705856"/>
             <a:ext cx="914400" cy="237744"/>
           </a:xfrm>
           <a:prstGeom prst="rect">
@@ -17724,20 +19594,20 @@
               </a:defRPr>
             </a:pPr>
             <a:r>
-              <a:t>$367K</a:t>
-            </a:r>
-          </a:p>
-        </p:txBody>
-      </p:sp>
-      <p:sp>
-        <p:nvSpPr>
-          <p:cNvPr id="161" name="Rectangle 160"/>
+              <a:t>$310K</a:t>
+            </a:r>
+          </a:p>
+        </p:txBody>
+      </p:sp>
+      <p:sp>
+        <p:nvSpPr>
+          <p:cNvPr id="211" name="Rectangle 210"/>
           <p:cNvSpPr/>
           <p:nvPr/>
         </p:nvSpPr>
         <p:spPr>
           <a:xfrm>
-            <a:off x="6254496" y="3383280"/>
+            <a:off x="6254496" y="5943600"/>
             <a:ext cx="5705856" cy="256032"/>
           </a:xfrm>
           <a:prstGeom prst="rect">
@@ -17774,13 +19644,13 @@
       </p:sp>
       <p:sp>
         <p:nvSpPr>
-          <p:cNvPr id="162" name="TextBox 161"/>
-          <p:cNvSpPr txBox="1"/>
-          <p:nvPr/>
-        </p:nvSpPr>
-        <p:spPr>
-          <a:xfrm>
-            <a:off x="6254496" y="3401568"/>
+          <p:cNvPr id="212" name="TextBox 211"/>
+          <p:cNvSpPr txBox="1"/>
+          <p:nvPr/>
+        </p:nvSpPr>
+        <p:spPr>
+          <a:xfrm>
+            <a:off x="6254496" y="5961888"/>
             <a:ext cx="411480" cy="237744"/>
           </a:xfrm>
           <a:prstGeom prst="rect">
@@ -17803,20 +19673,20 @@
               </a:defRPr>
             </a:pPr>
             <a:r>
-              <a:t>30</a:t>
-            </a:r>
-          </a:p>
-        </p:txBody>
-      </p:sp>
-      <p:sp>
-        <p:nvSpPr>
-          <p:cNvPr id="163" name="TextBox 162"/>
-          <p:cNvSpPr txBox="1"/>
-          <p:nvPr/>
-        </p:nvSpPr>
-        <p:spPr>
-          <a:xfrm>
-            <a:off x="6665976" y="3401568"/>
+              <a:t>40</a:t>
+            </a:r>
+          </a:p>
+        </p:txBody>
+      </p:sp>
+      <p:sp>
+        <p:nvSpPr>
+          <p:cNvPr id="213" name="TextBox 212"/>
+          <p:cNvSpPr txBox="1"/>
+          <p:nvPr/>
+        </p:nvSpPr>
+        <p:spPr>
+          <a:xfrm>
+            <a:off x="6665976" y="5961888"/>
             <a:ext cx="1920240" cy="237744"/>
           </a:xfrm>
           <a:prstGeom prst="rect">
@@ -17839,20 +19709,20 @@
               </a:defRPr>
             </a:pPr>
             <a:r>
-              <a:t>Patricia Galindoparedes</a:t>
-            </a:r>
-          </a:p>
-        </p:txBody>
-      </p:sp>
-      <p:sp>
-        <p:nvSpPr>
-          <p:cNvPr id="164" name="TextBox 163"/>
-          <p:cNvSpPr txBox="1"/>
-          <p:nvPr/>
-        </p:nvSpPr>
-        <p:spPr>
-          <a:xfrm>
-            <a:off x="8586216" y="3401568"/>
+              <a:t>Ibrahim Mammo</a:t>
+            </a:r>
+          </a:p>
+        </p:txBody>
+      </p:sp>
+      <p:sp>
+        <p:nvSpPr>
+          <p:cNvPr id="214" name="TextBox 213"/>
+          <p:cNvSpPr txBox="1"/>
+          <p:nvPr/>
+        </p:nvSpPr>
+        <p:spPr>
+          <a:xfrm>
+            <a:off x="8586216" y="5961888"/>
             <a:ext cx="2459736" cy="237744"/>
           </a:xfrm>
           <a:prstGeom prst="rect">
@@ -17875,1877 +19745,7 @@
               </a:defRPr>
             </a:pPr>
             <a:r>
-              <a:t>Call Patty Insurance Services</a:t>
-            </a:r>
-          </a:p>
-        </p:txBody>
-      </p:sp>
-      <p:sp>
-        <p:nvSpPr>
-          <p:cNvPr id="165" name="TextBox 164"/>
-          <p:cNvSpPr txBox="1"/>
-          <p:nvPr/>
-        </p:nvSpPr>
-        <p:spPr>
-          <a:xfrm>
-            <a:off x="11045952" y="3401568"/>
-            <a:ext cx="914400" cy="237744"/>
-          </a:xfrm>
-          <a:prstGeom prst="rect">
-            <a:avLst/>
-          </a:prstGeom>
-          <a:noFill/>
-        </p:spPr>
-        <p:txBody>
-          <a:bodyPr wrap="none">
-            <a:spAutoFit/>
-          </a:bodyPr>
-          <a:lstStyle/>
-          <a:p>
-            <a:pPr algn="ctr">
-              <a:defRPr sz="950" b="1">
-                <a:solidFill>
-                  <a:srgbClr val="111827"/>
-                </a:solidFill>
-                <a:latin typeface="Calibri"/>
-              </a:defRPr>
-            </a:pPr>
-            <a:r>
-              <a:t>$362K</a:t>
-            </a:r>
-          </a:p>
-        </p:txBody>
-      </p:sp>
-      <p:sp>
-        <p:nvSpPr>
-          <p:cNvPr id="166" name="Rectangle 165"/>
-          <p:cNvSpPr/>
-          <p:nvPr/>
-        </p:nvSpPr>
-        <p:spPr>
-          <a:xfrm>
-            <a:off x="6254496" y="3639312"/>
-            <a:ext cx="5705856" cy="256032"/>
-          </a:xfrm>
-          <a:prstGeom prst="rect">
-            <a:avLst/>
-          </a:prstGeom>
-          <a:solidFill>
-            <a:srgbClr val="D1FAE5"/>
-          </a:solidFill>
-          <a:ln>
-            <a:noFill/>
-          </a:ln>
-        </p:spPr>
-        <p:style>
-          <a:lnRef idx="1">
-            <a:schemeClr val="accent1"/>
-          </a:lnRef>
-          <a:fillRef idx="3">
-            <a:schemeClr val="accent1"/>
-          </a:fillRef>
-          <a:effectRef idx="2">
-            <a:schemeClr val="accent1"/>
-          </a:effectRef>
-          <a:fontRef idx="minor">
-            <a:schemeClr val="lt1"/>
-          </a:fontRef>
-        </p:style>
-        <p:txBody>
-          <a:bodyPr rtlCol="0" anchor="ctr"/>
-          <a:lstStyle/>
-          <a:p>
-            <a:pPr algn="ctr"/>
-          </a:p>
-        </p:txBody>
-      </p:sp>
-      <p:sp>
-        <p:nvSpPr>
-          <p:cNvPr id="167" name="TextBox 166"/>
-          <p:cNvSpPr txBox="1"/>
-          <p:nvPr/>
-        </p:nvSpPr>
-        <p:spPr>
-          <a:xfrm>
-            <a:off x="6254496" y="3657600"/>
-            <a:ext cx="411480" cy="237744"/>
-          </a:xfrm>
-          <a:prstGeom prst="rect">
-            <a:avLst/>
-          </a:prstGeom>
-          <a:noFill/>
-        </p:spPr>
-        <p:txBody>
-          <a:bodyPr wrap="none">
-            <a:spAutoFit/>
-          </a:bodyPr>
-          <a:lstStyle/>
-          <a:p>
-            <a:pPr algn="ctr">
-              <a:defRPr sz="950" b="1">
-                <a:solidFill>
-                  <a:srgbClr val="6B7280"/>
-                </a:solidFill>
-                <a:latin typeface="Calibri"/>
-              </a:defRPr>
-            </a:pPr>
-            <a:r>
-              <a:t>31</a:t>
-            </a:r>
-          </a:p>
-        </p:txBody>
-      </p:sp>
-      <p:sp>
-        <p:nvSpPr>
-          <p:cNvPr id="168" name="TextBox 167"/>
-          <p:cNvSpPr txBox="1"/>
-          <p:nvPr/>
-        </p:nvSpPr>
-        <p:spPr>
-          <a:xfrm>
-            <a:off x="6665976" y="3657600"/>
-            <a:ext cx="1920240" cy="237744"/>
-          </a:xfrm>
-          <a:prstGeom prst="rect">
-            <a:avLst/>
-          </a:prstGeom>
-          <a:noFill/>
-        </p:spPr>
-        <p:txBody>
-          <a:bodyPr wrap="none">
-            <a:spAutoFit/>
-          </a:bodyPr>
-          <a:lstStyle/>
-          <a:p>
-            <a:pPr algn="l">
-              <a:defRPr sz="950" b="1">
-                <a:solidFill>
-                  <a:srgbClr val="111827"/>
-                </a:solidFill>
-                <a:latin typeface="Calibri"/>
-              </a:defRPr>
-            </a:pPr>
-            <a:r>
-              <a:t>Kurtis Gautz</a:t>
-            </a:r>
-          </a:p>
-        </p:txBody>
-      </p:sp>
-      <p:sp>
-        <p:nvSpPr>
-          <p:cNvPr id="169" name="TextBox 168"/>
-          <p:cNvSpPr txBox="1"/>
-          <p:nvPr/>
-        </p:nvSpPr>
-        <p:spPr>
-          <a:xfrm>
-            <a:off x="8586216" y="3657600"/>
-            <a:ext cx="2459736" cy="237744"/>
-          </a:xfrm>
-          <a:prstGeom prst="rect">
-            <a:avLst/>
-          </a:prstGeom>
-          <a:noFill/>
-        </p:spPr>
-        <p:txBody>
-          <a:bodyPr wrap="none">
-            <a:spAutoFit/>
-          </a:bodyPr>
-          <a:lstStyle/>
-          <a:p>
-            <a:pPr algn="l">
-              <a:defRPr sz="950" b="0">
-                <a:solidFill>
-                  <a:srgbClr val="6B7280"/>
-                </a:solidFill>
-                <a:latin typeface="Calibri"/>
-              </a:defRPr>
-            </a:pPr>
-            <a:r>
-              <a:t>CRC Insurance Services, Inc</a:t>
-            </a:r>
-          </a:p>
-        </p:txBody>
-      </p:sp>
-      <p:sp>
-        <p:nvSpPr>
-          <p:cNvPr id="170" name="TextBox 169"/>
-          <p:cNvSpPr txBox="1"/>
-          <p:nvPr/>
-        </p:nvSpPr>
-        <p:spPr>
-          <a:xfrm>
-            <a:off x="11045952" y="3657600"/>
-            <a:ext cx="914400" cy="237744"/>
-          </a:xfrm>
-          <a:prstGeom prst="rect">
-            <a:avLst/>
-          </a:prstGeom>
-          <a:noFill/>
-        </p:spPr>
-        <p:txBody>
-          <a:bodyPr wrap="none">
-            <a:spAutoFit/>
-          </a:bodyPr>
-          <a:lstStyle/>
-          <a:p>
-            <a:pPr algn="ctr">
-              <a:defRPr sz="950" b="1">
-                <a:solidFill>
-                  <a:srgbClr val="111827"/>
-                </a:solidFill>
-                <a:latin typeface="Calibri"/>
-              </a:defRPr>
-            </a:pPr>
-            <a:r>
-              <a:t>$353K</a:t>
-            </a:r>
-          </a:p>
-        </p:txBody>
-      </p:sp>
-      <p:sp>
-        <p:nvSpPr>
-          <p:cNvPr id="171" name="Rectangle 170"/>
-          <p:cNvSpPr/>
-          <p:nvPr/>
-        </p:nvSpPr>
-        <p:spPr>
-          <a:xfrm>
-            <a:off x="6254496" y="3895344"/>
-            <a:ext cx="5705856" cy="256032"/>
-          </a:xfrm>
-          <a:prstGeom prst="rect">
-            <a:avLst/>
-          </a:prstGeom>
-          <a:solidFill>
-            <a:srgbClr val="F9FAFB"/>
-          </a:solidFill>
-          <a:ln>
-            <a:noFill/>
-          </a:ln>
-        </p:spPr>
-        <p:style>
-          <a:lnRef idx="1">
-            <a:schemeClr val="accent1"/>
-          </a:lnRef>
-          <a:fillRef idx="3">
-            <a:schemeClr val="accent1"/>
-          </a:fillRef>
-          <a:effectRef idx="2">
-            <a:schemeClr val="accent1"/>
-          </a:effectRef>
-          <a:fontRef idx="minor">
-            <a:schemeClr val="lt1"/>
-          </a:fontRef>
-        </p:style>
-        <p:txBody>
-          <a:bodyPr rtlCol="0" anchor="ctr"/>
-          <a:lstStyle/>
-          <a:p>
-            <a:pPr algn="ctr"/>
-          </a:p>
-        </p:txBody>
-      </p:sp>
-      <p:sp>
-        <p:nvSpPr>
-          <p:cNvPr id="172" name="TextBox 171"/>
-          <p:cNvSpPr txBox="1"/>
-          <p:nvPr/>
-        </p:nvSpPr>
-        <p:spPr>
-          <a:xfrm>
-            <a:off x="6254496" y="3913632"/>
-            <a:ext cx="411480" cy="237744"/>
-          </a:xfrm>
-          <a:prstGeom prst="rect">
-            <a:avLst/>
-          </a:prstGeom>
-          <a:noFill/>
-        </p:spPr>
-        <p:txBody>
-          <a:bodyPr wrap="none">
-            <a:spAutoFit/>
-          </a:bodyPr>
-          <a:lstStyle/>
-          <a:p>
-            <a:pPr algn="ctr">
-              <a:defRPr sz="950" b="1">
-                <a:solidFill>
-                  <a:srgbClr val="6B7280"/>
-                </a:solidFill>
-                <a:latin typeface="Calibri"/>
-              </a:defRPr>
-            </a:pPr>
-            <a:r>
-              <a:t>32</a:t>
-            </a:r>
-          </a:p>
-        </p:txBody>
-      </p:sp>
-      <p:sp>
-        <p:nvSpPr>
-          <p:cNvPr id="173" name="TextBox 172"/>
-          <p:cNvSpPr txBox="1"/>
-          <p:nvPr/>
-        </p:nvSpPr>
-        <p:spPr>
-          <a:xfrm>
-            <a:off x="6665976" y="3913632"/>
-            <a:ext cx="1920240" cy="237744"/>
-          </a:xfrm>
-          <a:prstGeom prst="rect">
-            <a:avLst/>
-          </a:prstGeom>
-          <a:noFill/>
-        </p:spPr>
-        <p:txBody>
-          <a:bodyPr wrap="none">
-            <a:spAutoFit/>
-          </a:bodyPr>
-          <a:lstStyle/>
-          <a:p>
-            <a:pPr algn="l">
-              <a:defRPr sz="950" b="1">
-                <a:solidFill>
-                  <a:srgbClr val="111827"/>
-                </a:solidFill>
-                <a:latin typeface="Calibri"/>
-              </a:defRPr>
-            </a:pPr>
-            <a:r>
-              <a:t>Damandeep Singh</a:t>
-            </a:r>
-          </a:p>
-        </p:txBody>
-      </p:sp>
-      <p:sp>
-        <p:nvSpPr>
-          <p:cNvPr id="174" name="TextBox 173"/>
-          <p:cNvSpPr txBox="1"/>
-          <p:nvPr/>
-        </p:nvSpPr>
-        <p:spPr>
-          <a:xfrm>
-            <a:off x="8586216" y="3913632"/>
-            <a:ext cx="2459736" cy="237744"/>
-          </a:xfrm>
-          <a:prstGeom prst="rect">
-            <a:avLst/>
-          </a:prstGeom>
-          <a:noFill/>
-        </p:spPr>
-        <p:txBody>
-          <a:bodyPr wrap="none">
-            <a:spAutoFit/>
-          </a:bodyPr>
-          <a:lstStyle/>
-          <a:p>
-            <a:pPr algn="l">
-              <a:defRPr sz="950" b="0">
-                <a:solidFill>
-                  <a:srgbClr val="6B7280"/>
-                </a:solidFill>
-                <a:latin typeface="Calibri"/>
-              </a:defRPr>
-            </a:pPr>
-            <a:r>
-              <a:t>Mayflower Insurance Services</a:t>
-            </a:r>
-          </a:p>
-        </p:txBody>
-      </p:sp>
-      <p:sp>
-        <p:nvSpPr>
-          <p:cNvPr id="175" name="TextBox 174"/>
-          <p:cNvSpPr txBox="1"/>
-          <p:nvPr/>
-        </p:nvSpPr>
-        <p:spPr>
-          <a:xfrm>
-            <a:off x="11045952" y="3913632"/>
-            <a:ext cx="914400" cy="237744"/>
-          </a:xfrm>
-          <a:prstGeom prst="rect">
-            <a:avLst/>
-          </a:prstGeom>
-          <a:noFill/>
-        </p:spPr>
-        <p:txBody>
-          <a:bodyPr wrap="none">
-            <a:spAutoFit/>
-          </a:bodyPr>
-          <a:lstStyle/>
-          <a:p>
-            <a:pPr algn="ctr">
-              <a:defRPr sz="950" b="1">
-                <a:solidFill>
-                  <a:srgbClr val="111827"/>
-                </a:solidFill>
-                <a:latin typeface="Calibri"/>
-              </a:defRPr>
-            </a:pPr>
-            <a:r>
-              <a:t>$341K</a:t>
-            </a:r>
-          </a:p>
-        </p:txBody>
-      </p:sp>
-      <p:sp>
-        <p:nvSpPr>
-          <p:cNvPr id="176" name="Rectangle 175"/>
-          <p:cNvSpPr/>
-          <p:nvPr/>
-        </p:nvSpPr>
-        <p:spPr>
-          <a:xfrm>
-            <a:off x="6254496" y="4151376"/>
-            <a:ext cx="5705856" cy="256032"/>
-          </a:xfrm>
-          <a:prstGeom prst="rect">
-            <a:avLst/>
-          </a:prstGeom>
-          <a:solidFill>
-            <a:srgbClr val="FFFFFF"/>
-          </a:solidFill>
-          <a:ln>
-            <a:noFill/>
-          </a:ln>
-        </p:spPr>
-        <p:style>
-          <a:lnRef idx="1">
-            <a:schemeClr val="accent1"/>
-          </a:lnRef>
-          <a:fillRef idx="3">
-            <a:schemeClr val="accent1"/>
-          </a:fillRef>
-          <a:effectRef idx="2">
-            <a:schemeClr val="accent1"/>
-          </a:effectRef>
-          <a:fontRef idx="minor">
-            <a:schemeClr val="lt1"/>
-          </a:fontRef>
-        </p:style>
-        <p:txBody>
-          <a:bodyPr rtlCol="0" anchor="ctr"/>
-          <a:lstStyle/>
-          <a:p>
-            <a:pPr algn="ctr"/>
-          </a:p>
-        </p:txBody>
-      </p:sp>
-      <p:sp>
-        <p:nvSpPr>
-          <p:cNvPr id="177" name="TextBox 176"/>
-          <p:cNvSpPr txBox="1"/>
-          <p:nvPr/>
-        </p:nvSpPr>
-        <p:spPr>
-          <a:xfrm>
-            <a:off x="6254496" y="4169664"/>
-            <a:ext cx="411480" cy="237744"/>
-          </a:xfrm>
-          <a:prstGeom prst="rect">
-            <a:avLst/>
-          </a:prstGeom>
-          <a:noFill/>
-        </p:spPr>
-        <p:txBody>
-          <a:bodyPr wrap="none">
-            <a:spAutoFit/>
-          </a:bodyPr>
-          <a:lstStyle/>
-          <a:p>
-            <a:pPr algn="ctr">
-              <a:defRPr sz="950" b="1">
-                <a:solidFill>
-                  <a:srgbClr val="6B7280"/>
-                </a:solidFill>
-                <a:latin typeface="Calibri"/>
-              </a:defRPr>
-            </a:pPr>
-            <a:r>
-              <a:t>33</a:t>
-            </a:r>
-          </a:p>
-        </p:txBody>
-      </p:sp>
-      <p:sp>
-        <p:nvSpPr>
-          <p:cNvPr id="178" name="TextBox 177"/>
-          <p:cNvSpPr txBox="1"/>
-          <p:nvPr/>
-        </p:nvSpPr>
-        <p:spPr>
-          <a:xfrm>
-            <a:off x="6665976" y="4169664"/>
-            <a:ext cx="1920240" cy="237744"/>
-          </a:xfrm>
-          <a:prstGeom prst="rect">
-            <a:avLst/>
-          </a:prstGeom>
-          <a:noFill/>
-        </p:spPr>
-        <p:txBody>
-          <a:bodyPr wrap="none">
-            <a:spAutoFit/>
-          </a:bodyPr>
-          <a:lstStyle/>
-          <a:p>
-            <a:pPr algn="l">
-              <a:defRPr sz="950" b="1">
-                <a:solidFill>
-                  <a:srgbClr val="111827"/>
-                </a:solidFill>
-                <a:latin typeface="Calibri"/>
-              </a:defRPr>
-            </a:pPr>
-            <a:r>
-              <a:t>Nicholas Banks</a:t>
-            </a:r>
-          </a:p>
-        </p:txBody>
-      </p:sp>
-      <p:sp>
-        <p:nvSpPr>
-          <p:cNvPr id="179" name="TextBox 178"/>
-          <p:cNvSpPr txBox="1"/>
-          <p:nvPr/>
-        </p:nvSpPr>
-        <p:spPr>
-          <a:xfrm>
-            <a:off x="8586216" y="4169664"/>
-            <a:ext cx="2459736" cy="237744"/>
-          </a:xfrm>
-          <a:prstGeom prst="rect">
-            <a:avLst/>
-          </a:prstGeom>
-          <a:noFill/>
-        </p:spPr>
-        <p:txBody>
-          <a:bodyPr wrap="none">
-            <a:spAutoFit/>
-          </a:bodyPr>
-          <a:lstStyle/>
-          <a:p>
-            <a:pPr algn="l">
-              <a:defRPr sz="950" b="0">
-                <a:solidFill>
-                  <a:srgbClr val="6B7280"/>
-                </a:solidFill>
-                <a:latin typeface="Calibri"/>
-              </a:defRPr>
-            </a:pPr>
-            <a:r>
-              <a:t>Reliance Partners, LLC</a:t>
-            </a:r>
-          </a:p>
-        </p:txBody>
-      </p:sp>
-      <p:sp>
-        <p:nvSpPr>
-          <p:cNvPr id="180" name="TextBox 179"/>
-          <p:cNvSpPr txBox="1"/>
-          <p:nvPr/>
-        </p:nvSpPr>
-        <p:spPr>
-          <a:xfrm>
-            <a:off x="11045952" y="4169664"/>
-            <a:ext cx="914400" cy="237744"/>
-          </a:xfrm>
-          <a:prstGeom prst="rect">
-            <a:avLst/>
-          </a:prstGeom>
-          <a:noFill/>
-        </p:spPr>
-        <p:txBody>
-          <a:bodyPr wrap="none">
-            <a:spAutoFit/>
-          </a:bodyPr>
-          <a:lstStyle/>
-          <a:p>
-            <a:pPr algn="ctr">
-              <a:defRPr sz="950" b="1">
-                <a:solidFill>
-                  <a:srgbClr val="111827"/>
-                </a:solidFill>
-                <a:latin typeface="Calibri"/>
-              </a:defRPr>
-            </a:pPr>
-            <a:r>
-              <a:t>$326K</a:t>
-            </a:r>
-          </a:p>
-        </p:txBody>
-      </p:sp>
-      <p:sp>
-        <p:nvSpPr>
-          <p:cNvPr id="181" name="Rectangle 180"/>
-          <p:cNvSpPr/>
-          <p:nvPr/>
-        </p:nvSpPr>
-        <p:spPr>
-          <a:xfrm>
-            <a:off x="6254496" y="4407408"/>
-            <a:ext cx="5705856" cy="256032"/>
-          </a:xfrm>
-          <a:prstGeom prst="rect">
-            <a:avLst/>
-          </a:prstGeom>
-          <a:solidFill>
-            <a:srgbClr val="F9FAFB"/>
-          </a:solidFill>
-          <a:ln>
-            <a:noFill/>
-          </a:ln>
-        </p:spPr>
-        <p:style>
-          <a:lnRef idx="1">
-            <a:schemeClr val="accent1"/>
-          </a:lnRef>
-          <a:fillRef idx="3">
-            <a:schemeClr val="accent1"/>
-          </a:fillRef>
-          <a:effectRef idx="2">
-            <a:schemeClr val="accent1"/>
-          </a:effectRef>
-          <a:fontRef idx="minor">
-            <a:schemeClr val="lt1"/>
-          </a:fontRef>
-        </p:style>
-        <p:txBody>
-          <a:bodyPr rtlCol="0" anchor="ctr"/>
-          <a:lstStyle/>
-          <a:p>
-            <a:pPr algn="ctr"/>
-          </a:p>
-        </p:txBody>
-      </p:sp>
-      <p:sp>
-        <p:nvSpPr>
-          <p:cNvPr id="182" name="TextBox 181"/>
-          <p:cNvSpPr txBox="1"/>
-          <p:nvPr/>
-        </p:nvSpPr>
-        <p:spPr>
-          <a:xfrm>
-            <a:off x="6254496" y="4425696"/>
-            <a:ext cx="411480" cy="237744"/>
-          </a:xfrm>
-          <a:prstGeom prst="rect">
-            <a:avLst/>
-          </a:prstGeom>
-          <a:noFill/>
-        </p:spPr>
-        <p:txBody>
-          <a:bodyPr wrap="none">
-            <a:spAutoFit/>
-          </a:bodyPr>
-          <a:lstStyle/>
-          <a:p>
-            <a:pPr algn="ctr">
-              <a:defRPr sz="950" b="1">
-                <a:solidFill>
-                  <a:srgbClr val="6B7280"/>
-                </a:solidFill>
-                <a:latin typeface="Calibri"/>
-              </a:defRPr>
-            </a:pPr>
-            <a:r>
-              <a:t>34</a:t>
-            </a:r>
-          </a:p>
-        </p:txBody>
-      </p:sp>
-      <p:sp>
-        <p:nvSpPr>
-          <p:cNvPr id="183" name="TextBox 182"/>
-          <p:cNvSpPr txBox="1"/>
-          <p:nvPr/>
-        </p:nvSpPr>
-        <p:spPr>
-          <a:xfrm>
-            <a:off x="6665976" y="4425696"/>
-            <a:ext cx="1920240" cy="237744"/>
-          </a:xfrm>
-          <a:prstGeom prst="rect">
-            <a:avLst/>
-          </a:prstGeom>
-          <a:noFill/>
-        </p:spPr>
-        <p:txBody>
-          <a:bodyPr wrap="none">
-            <a:spAutoFit/>
-          </a:bodyPr>
-          <a:lstStyle/>
-          <a:p>
-            <a:pPr algn="l">
-              <a:defRPr sz="950" b="1">
-                <a:solidFill>
-                  <a:srgbClr val="111827"/>
-                </a:solidFill>
-                <a:latin typeface="Calibri"/>
-              </a:defRPr>
-            </a:pPr>
-            <a:r>
-              <a:t>Venizelos Papadopulos</a:t>
-            </a:r>
-          </a:p>
-        </p:txBody>
-      </p:sp>
-      <p:sp>
-        <p:nvSpPr>
-          <p:cNvPr id="184" name="TextBox 183"/>
-          <p:cNvSpPr txBox="1"/>
-          <p:nvPr/>
-        </p:nvSpPr>
-        <p:spPr>
-          <a:xfrm>
-            <a:off x="8586216" y="4425696"/>
-            <a:ext cx="2459736" cy="237744"/>
-          </a:xfrm>
-          <a:prstGeom prst="rect">
-            <a:avLst/>
-          </a:prstGeom>
-          <a:noFill/>
-        </p:spPr>
-        <p:txBody>
-          <a:bodyPr wrap="none">
-            <a:spAutoFit/>
-          </a:bodyPr>
-          <a:lstStyle/>
-          <a:p>
-            <a:pPr algn="l">
-              <a:defRPr sz="950" b="0">
-                <a:solidFill>
-                  <a:srgbClr val="6B7280"/>
-                </a:solidFill>
-                <a:latin typeface="Calibri"/>
-              </a:defRPr>
-            </a:pPr>
-            <a:r>
-              <a:t>Exclusive Financial Services, Inc</a:t>
-            </a:r>
-          </a:p>
-        </p:txBody>
-      </p:sp>
-      <p:sp>
-        <p:nvSpPr>
-          <p:cNvPr id="185" name="TextBox 184"/>
-          <p:cNvSpPr txBox="1"/>
-          <p:nvPr/>
-        </p:nvSpPr>
-        <p:spPr>
-          <a:xfrm>
-            <a:off x="11045952" y="4425696"/>
-            <a:ext cx="914400" cy="237744"/>
-          </a:xfrm>
-          <a:prstGeom prst="rect">
-            <a:avLst/>
-          </a:prstGeom>
-          <a:noFill/>
-        </p:spPr>
-        <p:txBody>
-          <a:bodyPr wrap="none">
-            <a:spAutoFit/>
-          </a:bodyPr>
-          <a:lstStyle/>
-          <a:p>
-            <a:pPr algn="ctr">
-              <a:defRPr sz="950" b="1">
-                <a:solidFill>
-                  <a:srgbClr val="111827"/>
-                </a:solidFill>
-                <a:latin typeface="Calibri"/>
-              </a:defRPr>
-            </a:pPr>
-            <a:r>
-              <a:t>$321K</a:t>
-            </a:r>
-          </a:p>
-        </p:txBody>
-      </p:sp>
-      <p:sp>
-        <p:nvSpPr>
-          <p:cNvPr id="186" name="Rectangle 185"/>
-          <p:cNvSpPr/>
-          <p:nvPr/>
-        </p:nvSpPr>
-        <p:spPr>
-          <a:xfrm>
-            <a:off x="6254496" y="4663440"/>
-            <a:ext cx="5705856" cy="256032"/>
-          </a:xfrm>
-          <a:prstGeom prst="rect">
-            <a:avLst/>
-          </a:prstGeom>
-          <a:solidFill>
-            <a:srgbClr val="FFFFFF"/>
-          </a:solidFill>
-          <a:ln>
-            <a:noFill/>
-          </a:ln>
-        </p:spPr>
-        <p:style>
-          <a:lnRef idx="1">
-            <a:schemeClr val="accent1"/>
-          </a:lnRef>
-          <a:fillRef idx="3">
-            <a:schemeClr val="accent1"/>
-          </a:fillRef>
-          <a:effectRef idx="2">
-            <a:schemeClr val="accent1"/>
-          </a:effectRef>
-          <a:fontRef idx="minor">
-            <a:schemeClr val="lt1"/>
-          </a:fontRef>
-        </p:style>
-        <p:txBody>
-          <a:bodyPr rtlCol="0" anchor="ctr"/>
-          <a:lstStyle/>
-          <a:p>
-            <a:pPr algn="ctr"/>
-          </a:p>
-        </p:txBody>
-      </p:sp>
-      <p:sp>
-        <p:nvSpPr>
-          <p:cNvPr id="187" name="TextBox 186"/>
-          <p:cNvSpPr txBox="1"/>
-          <p:nvPr/>
-        </p:nvSpPr>
-        <p:spPr>
-          <a:xfrm>
-            <a:off x="6254496" y="4681728"/>
-            <a:ext cx="411480" cy="237744"/>
-          </a:xfrm>
-          <a:prstGeom prst="rect">
-            <a:avLst/>
-          </a:prstGeom>
-          <a:noFill/>
-        </p:spPr>
-        <p:txBody>
-          <a:bodyPr wrap="none">
-            <a:spAutoFit/>
-          </a:bodyPr>
-          <a:lstStyle/>
-          <a:p>
-            <a:pPr algn="ctr">
-              <a:defRPr sz="950" b="1">
-                <a:solidFill>
-                  <a:srgbClr val="6B7280"/>
-                </a:solidFill>
-                <a:latin typeface="Calibri"/>
-              </a:defRPr>
-            </a:pPr>
-            <a:r>
-              <a:t>35</a:t>
-            </a:r>
-          </a:p>
-        </p:txBody>
-      </p:sp>
-      <p:sp>
-        <p:nvSpPr>
-          <p:cNvPr id="188" name="TextBox 187"/>
-          <p:cNvSpPr txBox="1"/>
-          <p:nvPr/>
-        </p:nvSpPr>
-        <p:spPr>
-          <a:xfrm>
-            <a:off x="6665976" y="4681728"/>
-            <a:ext cx="1920240" cy="237744"/>
-          </a:xfrm>
-          <a:prstGeom prst="rect">
-            <a:avLst/>
-          </a:prstGeom>
-          <a:noFill/>
-        </p:spPr>
-        <p:txBody>
-          <a:bodyPr wrap="none">
-            <a:spAutoFit/>
-          </a:bodyPr>
-          <a:lstStyle/>
-          <a:p>
-            <a:pPr algn="l">
-              <a:defRPr sz="950" b="1">
-                <a:solidFill>
-                  <a:srgbClr val="111827"/>
-                </a:solidFill>
-                <a:latin typeface="Calibri"/>
-              </a:defRPr>
-            </a:pPr>
-            <a:r>
-              <a:t>Scarlette Mcbrayer</a:t>
-            </a:r>
-          </a:p>
-        </p:txBody>
-      </p:sp>
-      <p:sp>
-        <p:nvSpPr>
-          <p:cNvPr id="189" name="TextBox 188"/>
-          <p:cNvSpPr txBox="1"/>
-          <p:nvPr/>
-        </p:nvSpPr>
-        <p:spPr>
-          <a:xfrm>
-            <a:off x="8586216" y="4681728"/>
-            <a:ext cx="2459736" cy="237744"/>
-          </a:xfrm>
-          <a:prstGeom prst="rect">
-            <a:avLst/>
-          </a:prstGeom>
-          <a:noFill/>
-        </p:spPr>
-        <p:txBody>
-          <a:bodyPr wrap="none">
-            <a:spAutoFit/>
-          </a:bodyPr>
-          <a:lstStyle/>
-          <a:p>
-            <a:pPr algn="l">
-              <a:defRPr sz="950" b="0">
-                <a:solidFill>
-                  <a:srgbClr val="6B7280"/>
-                </a:solidFill>
-                <a:latin typeface="Calibri"/>
-              </a:defRPr>
-            </a:pPr>
-            <a:r>
-              <a:t>Reliance Partners, LLC</a:t>
-            </a:r>
-          </a:p>
-        </p:txBody>
-      </p:sp>
-      <p:sp>
-        <p:nvSpPr>
-          <p:cNvPr id="190" name="TextBox 189"/>
-          <p:cNvSpPr txBox="1"/>
-          <p:nvPr/>
-        </p:nvSpPr>
-        <p:spPr>
-          <a:xfrm>
-            <a:off x="11045952" y="4681728"/>
-            <a:ext cx="914400" cy="237744"/>
-          </a:xfrm>
-          <a:prstGeom prst="rect">
-            <a:avLst/>
-          </a:prstGeom>
-          <a:noFill/>
-        </p:spPr>
-        <p:txBody>
-          <a:bodyPr wrap="none">
-            <a:spAutoFit/>
-          </a:bodyPr>
-          <a:lstStyle/>
-          <a:p>
-            <a:pPr algn="ctr">
-              <a:defRPr sz="950" b="1">
-                <a:solidFill>
-                  <a:srgbClr val="111827"/>
-                </a:solidFill>
-                <a:latin typeface="Calibri"/>
-              </a:defRPr>
-            </a:pPr>
-            <a:r>
-              <a:t>$315K</a:t>
-            </a:r>
-          </a:p>
-        </p:txBody>
-      </p:sp>
-      <p:sp>
-        <p:nvSpPr>
-          <p:cNvPr id="191" name="Rectangle 190"/>
-          <p:cNvSpPr/>
-          <p:nvPr/>
-        </p:nvSpPr>
-        <p:spPr>
-          <a:xfrm>
-            <a:off x="6254496" y="4919472"/>
-            <a:ext cx="5705856" cy="256032"/>
-          </a:xfrm>
-          <a:prstGeom prst="rect">
-            <a:avLst/>
-          </a:prstGeom>
-          <a:solidFill>
-            <a:srgbClr val="F9FAFB"/>
-          </a:solidFill>
-          <a:ln>
-            <a:noFill/>
-          </a:ln>
-        </p:spPr>
-        <p:style>
-          <a:lnRef idx="1">
-            <a:schemeClr val="accent1"/>
-          </a:lnRef>
-          <a:fillRef idx="3">
-            <a:schemeClr val="accent1"/>
-          </a:fillRef>
-          <a:effectRef idx="2">
-            <a:schemeClr val="accent1"/>
-          </a:effectRef>
-          <a:fontRef idx="minor">
-            <a:schemeClr val="lt1"/>
-          </a:fontRef>
-        </p:style>
-        <p:txBody>
-          <a:bodyPr rtlCol="0" anchor="ctr"/>
-          <a:lstStyle/>
-          <a:p>
-            <a:pPr algn="ctr"/>
-          </a:p>
-        </p:txBody>
-      </p:sp>
-      <p:sp>
-        <p:nvSpPr>
-          <p:cNvPr id="192" name="TextBox 191"/>
-          <p:cNvSpPr txBox="1"/>
-          <p:nvPr/>
-        </p:nvSpPr>
-        <p:spPr>
-          <a:xfrm>
-            <a:off x="6254496" y="4937760"/>
-            <a:ext cx="411480" cy="237744"/>
-          </a:xfrm>
-          <a:prstGeom prst="rect">
-            <a:avLst/>
-          </a:prstGeom>
-          <a:noFill/>
-        </p:spPr>
-        <p:txBody>
-          <a:bodyPr wrap="none">
-            <a:spAutoFit/>
-          </a:bodyPr>
-          <a:lstStyle/>
-          <a:p>
-            <a:pPr algn="ctr">
-              <a:defRPr sz="950" b="1">
-                <a:solidFill>
-                  <a:srgbClr val="6B7280"/>
-                </a:solidFill>
-                <a:latin typeface="Calibri"/>
-              </a:defRPr>
-            </a:pPr>
-            <a:r>
-              <a:t>36</a:t>
-            </a:r>
-          </a:p>
-        </p:txBody>
-      </p:sp>
-      <p:sp>
-        <p:nvSpPr>
-          <p:cNvPr id="193" name="TextBox 192"/>
-          <p:cNvSpPr txBox="1"/>
-          <p:nvPr/>
-        </p:nvSpPr>
-        <p:spPr>
-          <a:xfrm>
-            <a:off x="6665976" y="4937760"/>
-            <a:ext cx="1920240" cy="237744"/>
-          </a:xfrm>
-          <a:prstGeom prst="rect">
-            <a:avLst/>
-          </a:prstGeom>
-          <a:noFill/>
-        </p:spPr>
-        <p:txBody>
-          <a:bodyPr wrap="none">
-            <a:spAutoFit/>
-          </a:bodyPr>
-          <a:lstStyle/>
-          <a:p>
-            <a:pPr algn="l">
-              <a:defRPr sz="950" b="1">
-                <a:solidFill>
-                  <a:srgbClr val="111827"/>
-                </a:solidFill>
-                <a:latin typeface="Calibri"/>
-              </a:defRPr>
-            </a:pPr>
-            <a:r>
-              <a:t>Ibrahim Mammo</a:t>
-            </a:r>
-          </a:p>
-        </p:txBody>
-      </p:sp>
-      <p:sp>
-        <p:nvSpPr>
-          <p:cNvPr id="194" name="TextBox 193"/>
-          <p:cNvSpPr txBox="1"/>
-          <p:nvPr/>
-        </p:nvSpPr>
-        <p:spPr>
-          <a:xfrm>
-            <a:off x="8586216" y="4937760"/>
-            <a:ext cx="2459736" cy="237744"/>
-          </a:xfrm>
-          <a:prstGeom prst="rect">
-            <a:avLst/>
-          </a:prstGeom>
-          <a:noFill/>
-        </p:spPr>
-        <p:txBody>
-          <a:bodyPr wrap="none">
-            <a:spAutoFit/>
-          </a:bodyPr>
-          <a:lstStyle/>
-          <a:p>
-            <a:pPr algn="l">
-              <a:defRPr sz="950" b="0">
-                <a:solidFill>
-                  <a:srgbClr val="6B7280"/>
-                </a:solidFill>
-                <a:latin typeface="Calibri"/>
-              </a:defRPr>
-            </a:pPr>
-            <a:r>
               <a:t>Surefire Insurance Agency Corp.</a:t>
-            </a:r>
-          </a:p>
-        </p:txBody>
-      </p:sp>
-      <p:sp>
-        <p:nvSpPr>
-          <p:cNvPr id="195" name="TextBox 194"/>
-          <p:cNvSpPr txBox="1"/>
-          <p:nvPr/>
-        </p:nvSpPr>
-        <p:spPr>
-          <a:xfrm>
-            <a:off x="11045952" y="4937760"/>
-            <a:ext cx="914400" cy="237744"/>
-          </a:xfrm>
-          <a:prstGeom prst="rect">
-            <a:avLst/>
-          </a:prstGeom>
-          <a:noFill/>
-        </p:spPr>
-        <p:txBody>
-          <a:bodyPr wrap="none">
-            <a:spAutoFit/>
-          </a:bodyPr>
-          <a:lstStyle/>
-          <a:p>
-            <a:pPr algn="ctr">
-              <a:defRPr sz="950" b="1">
-                <a:solidFill>
-                  <a:srgbClr val="111827"/>
-                </a:solidFill>
-                <a:latin typeface="Calibri"/>
-              </a:defRPr>
-            </a:pPr>
-            <a:r>
-              <a:t>$313K</a:t>
-            </a:r>
-          </a:p>
-        </p:txBody>
-      </p:sp>
-      <p:sp>
-        <p:nvSpPr>
-          <p:cNvPr id="196" name="Rectangle 195"/>
-          <p:cNvSpPr/>
-          <p:nvPr/>
-        </p:nvSpPr>
-        <p:spPr>
-          <a:xfrm>
-            <a:off x="6254496" y="5175504"/>
-            <a:ext cx="5705856" cy="256032"/>
-          </a:xfrm>
-          <a:prstGeom prst="rect">
-            <a:avLst/>
-          </a:prstGeom>
-          <a:solidFill>
-            <a:srgbClr val="FFFFFF"/>
-          </a:solidFill>
-          <a:ln>
-            <a:noFill/>
-          </a:ln>
-        </p:spPr>
-        <p:style>
-          <a:lnRef idx="1">
-            <a:schemeClr val="accent1"/>
-          </a:lnRef>
-          <a:fillRef idx="3">
-            <a:schemeClr val="accent1"/>
-          </a:fillRef>
-          <a:effectRef idx="2">
-            <a:schemeClr val="accent1"/>
-          </a:effectRef>
-          <a:fontRef idx="minor">
-            <a:schemeClr val="lt1"/>
-          </a:fontRef>
-        </p:style>
-        <p:txBody>
-          <a:bodyPr rtlCol="0" anchor="ctr"/>
-          <a:lstStyle/>
-          <a:p>
-            <a:pPr algn="ctr"/>
-          </a:p>
-        </p:txBody>
-      </p:sp>
-      <p:sp>
-        <p:nvSpPr>
-          <p:cNvPr id="197" name="TextBox 196"/>
-          <p:cNvSpPr txBox="1"/>
-          <p:nvPr/>
-        </p:nvSpPr>
-        <p:spPr>
-          <a:xfrm>
-            <a:off x="6254496" y="5193792"/>
-            <a:ext cx="411480" cy="237744"/>
-          </a:xfrm>
-          <a:prstGeom prst="rect">
-            <a:avLst/>
-          </a:prstGeom>
-          <a:noFill/>
-        </p:spPr>
-        <p:txBody>
-          <a:bodyPr wrap="none">
-            <a:spAutoFit/>
-          </a:bodyPr>
-          <a:lstStyle/>
-          <a:p>
-            <a:pPr algn="ctr">
-              <a:defRPr sz="950" b="1">
-                <a:solidFill>
-                  <a:srgbClr val="6B7280"/>
-                </a:solidFill>
-                <a:latin typeface="Calibri"/>
-              </a:defRPr>
-            </a:pPr>
-            <a:r>
-              <a:t>37</a:t>
-            </a:r>
-          </a:p>
-        </p:txBody>
-      </p:sp>
-      <p:sp>
-        <p:nvSpPr>
-          <p:cNvPr id="198" name="TextBox 197"/>
-          <p:cNvSpPr txBox="1"/>
-          <p:nvPr/>
-        </p:nvSpPr>
-        <p:spPr>
-          <a:xfrm>
-            <a:off x="6665976" y="5193792"/>
-            <a:ext cx="1920240" cy="237744"/>
-          </a:xfrm>
-          <a:prstGeom prst="rect">
-            <a:avLst/>
-          </a:prstGeom>
-          <a:noFill/>
-        </p:spPr>
-        <p:txBody>
-          <a:bodyPr wrap="none">
-            <a:spAutoFit/>
-          </a:bodyPr>
-          <a:lstStyle/>
-          <a:p>
-            <a:pPr algn="l">
-              <a:defRPr sz="950" b="1">
-                <a:solidFill>
-                  <a:srgbClr val="111827"/>
-                </a:solidFill>
-                <a:latin typeface="Calibri"/>
-              </a:defRPr>
-            </a:pPr>
-            <a:r>
-              <a:t>Vladimir Tesler</a:t>
-            </a:r>
-          </a:p>
-        </p:txBody>
-      </p:sp>
-      <p:sp>
-        <p:nvSpPr>
-          <p:cNvPr id="199" name="TextBox 198"/>
-          <p:cNvSpPr txBox="1"/>
-          <p:nvPr/>
-        </p:nvSpPr>
-        <p:spPr>
-          <a:xfrm>
-            <a:off x="8586216" y="5193792"/>
-            <a:ext cx="2459736" cy="237744"/>
-          </a:xfrm>
-          <a:prstGeom prst="rect">
-            <a:avLst/>
-          </a:prstGeom>
-          <a:noFill/>
-        </p:spPr>
-        <p:txBody>
-          <a:bodyPr wrap="none">
-            <a:spAutoFit/>
-          </a:bodyPr>
-          <a:lstStyle/>
-          <a:p>
-            <a:pPr algn="l">
-              <a:defRPr sz="950" b="0">
-                <a:solidFill>
-                  <a:srgbClr val="6B7280"/>
-                </a:solidFill>
-                <a:latin typeface="Calibri"/>
-              </a:defRPr>
-            </a:pPr>
-            <a:r>
-              <a:t>Insurance Planet</a:t>
-            </a:r>
-          </a:p>
-        </p:txBody>
-      </p:sp>
-      <p:sp>
-        <p:nvSpPr>
-          <p:cNvPr id="200" name="TextBox 199"/>
-          <p:cNvSpPr txBox="1"/>
-          <p:nvPr/>
-        </p:nvSpPr>
-        <p:spPr>
-          <a:xfrm>
-            <a:off x="11045952" y="5193792"/>
-            <a:ext cx="914400" cy="237744"/>
-          </a:xfrm>
-          <a:prstGeom prst="rect">
-            <a:avLst/>
-          </a:prstGeom>
-          <a:noFill/>
-        </p:spPr>
-        <p:txBody>
-          <a:bodyPr wrap="none">
-            <a:spAutoFit/>
-          </a:bodyPr>
-          <a:lstStyle/>
-          <a:p>
-            <a:pPr algn="ctr">
-              <a:defRPr sz="950" b="1">
-                <a:solidFill>
-                  <a:srgbClr val="111827"/>
-                </a:solidFill>
-                <a:latin typeface="Calibri"/>
-              </a:defRPr>
-            </a:pPr>
-            <a:r>
-              <a:t>$313K</a:t>
-            </a:r>
-          </a:p>
-        </p:txBody>
-      </p:sp>
-      <p:sp>
-        <p:nvSpPr>
-          <p:cNvPr id="201" name="Rectangle 200"/>
-          <p:cNvSpPr/>
-          <p:nvPr/>
-        </p:nvSpPr>
-        <p:spPr>
-          <a:xfrm>
-            <a:off x="6254496" y="5431536"/>
-            <a:ext cx="5705856" cy="256032"/>
-          </a:xfrm>
-          <a:prstGeom prst="rect">
-            <a:avLst/>
-          </a:prstGeom>
-          <a:solidFill>
-            <a:srgbClr val="F9FAFB"/>
-          </a:solidFill>
-          <a:ln>
-            <a:noFill/>
-          </a:ln>
-        </p:spPr>
-        <p:style>
-          <a:lnRef idx="1">
-            <a:schemeClr val="accent1"/>
-          </a:lnRef>
-          <a:fillRef idx="3">
-            <a:schemeClr val="accent1"/>
-          </a:fillRef>
-          <a:effectRef idx="2">
-            <a:schemeClr val="accent1"/>
-          </a:effectRef>
-          <a:fontRef idx="minor">
-            <a:schemeClr val="lt1"/>
-          </a:fontRef>
-        </p:style>
-        <p:txBody>
-          <a:bodyPr rtlCol="0" anchor="ctr"/>
-          <a:lstStyle/>
-          <a:p>
-            <a:pPr algn="ctr"/>
-          </a:p>
-        </p:txBody>
-      </p:sp>
-      <p:sp>
-        <p:nvSpPr>
-          <p:cNvPr id="202" name="TextBox 201"/>
-          <p:cNvSpPr txBox="1"/>
-          <p:nvPr/>
-        </p:nvSpPr>
-        <p:spPr>
-          <a:xfrm>
-            <a:off x="6254496" y="5449824"/>
-            <a:ext cx="411480" cy="237744"/>
-          </a:xfrm>
-          <a:prstGeom prst="rect">
-            <a:avLst/>
-          </a:prstGeom>
-          <a:noFill/>
-        </p:spPr>
-        <p:txBody>
-          <a:bodyPr wrap="none">
-            <a:spAutoFit/>
-          </a:bodyPr>
-          <a:lstStyle/>
-          <a:p>
-            <a:pPr algn="ctr">
-              <a:defRPr sz="950" b="1">
-                <a:solidFill>
-                  <a:srgbClr val="6B7280"/>
-                </a:solidFill>
-                <a:latin typeface="Calibri"/>
-              </a:defRPr>
-            </a:pPr>
-            <a:r>
-              <a:t>38</a:t>
-            </a:r>
-          </a:p>
-        </p:txBody>
-      </p:sp>
-      <p:sp>
-        <p:nvSpPr>
-          <p:cNvPr id="203" name="TextBox 202"/>
-          <p:cNvSpPr txBox="1"/>
-          <p:nvPr/>
-        </p:nvSpPr>
-        <p:spPr>
-          <a:xfrm>
-            <a:off x="6665976" y="5449824"/>
-            <a:ext cx="1920240" cy="237744"/>
-          </a:xfrm>
-          <a:prstGeom prst="rect">
-            <a:avLst/>
-          </a:prstGeom>
-          <a:noFill/>
-        </p:spPr>
-        <p:txBody>
-          <a:bodyPr wrap="none">
-            <a:spAutoFit/>
-          </a:bodyPr>
-          <a:lstStyle/>
-          <a:p>
-            <a:pPr algn="l">
-              <a:defRPr sz="950" b="1">
-                <a:solidFill>
-                  <a:srgbClr val="111827"/>
-                </a:solidFill>
-                <a:latin typeface="Calibri"/>
-              </a:defRPr>
-            </a:pPr>
-            <a:r>
-              <a:t>Omar Elmanzalawy</a:t>
-            </a:r>
-          </a:p>
-        </p:txBody>
-      </p:sp>
-      <p:sp>
-        <p:nvSpPr>
-          <p:cNvPr id="204" name="TextBox 203"/>
-          <p:cNvSpPr txBox="1"/>
-          <p:nvPr/>
-        </p:nvSpPr>
-        <p:spPr>
-          <a:xfrm>
-            <a:off x="8586216" y="5449824"/>
-            <a:ext cx="2459736" cy="237744"/>
-          </a:xfrm>
-          <a:prstGeom prst="rect">
-            <a:avLst/>
-          </a:prstGeom>
-          <a:noFill/>
-        </p:spPr>
-        <p:txBody>
-          <a:bodyPr wrap="none">
-            <a:spAutoFit/>
-          </a:bodyPr>
-          <a:lstStyle/>
-          <a:p>
-            <a:pPr algn="l">
-              <a:defRPr sz="950" b="0">
-                <a:solidFill>
-                  <a:srgbClr val="6B7280"/>
-                </a:solidFill>
-                <a:latin typeface="Calibri"/>
-              </a:defRPr>
-            </a:pPr>
-            <a:r>
-              <a:t>First Connect Insurance</a:t>
-            </a:r>
-          </a:p>
-        </p:txBody>
-      </p:sp>
-      <p:sp>
-        <p:nvSpPr>
-          <p:cNvPr id="205" name="TextBox 204"/>
-          <p:cNvSpPr txBox="1"/>
-          <p:nvPr/>
-        </p:nvSpPr>
-        <p:spPr>
-          <a:xfrm>
-            <a:off x="11045952" y="5449824"/>
-            <a:ext cx="914400" cy="237744"/>
-          </a:xfrm>
-          <a:prstGeom prst="rect">
-            <a:avLst/>
-          </a:prstGeom>
-          <a:noFill/>
-        </p:spPr>
-        <p:txBody>
-          <a:bodyPr wrap="none">
-            <a:spAutoFit/>
-          </a:bodyPr>
-          <a:lstStyle/>
-          <a:p>
-            <a:pPr algn="ctr">
-              <a:defRPr sz="950" b="1">
-                <a:solidFill>
-                  <a:srgbClr val="111827"/>
-                </a:solidFill>
-                <a:latin typeface="Calibri"/>
-              </a:defRPr>
-            </a:pPr>
-            <a:r>
-              <a:t>$310K</a:t>
-            </a:r>
-          </a:p>
-        </p:txBody>
-      </p:sp>
-      <p:sp>
-        <p:nvSpPr>
-          <p:cNvPr id="206" name="Rectangle 205"/>
-          <p:cNvSpPr/>
-          <p:nvPr/>
-        </p:nvSpPr>
-        <p:spPr>
-          <a:xfrm>
-            <a:off x="6254496" y="5687568"/>
-            <a:ext cx="5705856" cy="256032"/>
-          </a:xfrm>
-          <a:prstGeom prst="rect">
-            <a:avLst/>
-          </a:prstGeom>
-          <a:solidFill>
-            <a:srgbClr val="FFFFFF"/>
-          </a:solidFill>
-          <a:ln>
-            <a:noFill/>
-          </a:ln>
-        </p:spPr>
-        <p:style>
-          <a:lnRef idx="1">
-            <a:schemeClr val="accent1"/>
-          </a:lnRef>
-          <a:fillRef idx="3">
-            <a:schemeClr val="accent1"/>
-          </a:fillRef>
-          <a:effectRef idx="2">
-            <a:schemeClr val="accent1"/>
-          </a:effectRef>
-          <a:fontRef idx="minor">
-            <a:schemeClr val="lt1"/>
-          </a:fontRef>
-        </p:style>
-        <p:txBody>
-          <a:bodyPr rtlCol="0" anchor="ctr"/>
-          <a:lstStyle/>
-          <a:p>
-            <a:pPr algn="ctr"/>
-          </a:p>
-        </p:txBody>
-      </p:sp>
-      <p:sp>
-        <p:nvSpPr>
-          <p:cNvPr id="207" name="TextBox 206"/>
-          <p:cNvSpPr txBox="1"/>
-          <p:nvPr/>
-        </p:nvSpPr>
-        <p:spPr>
-          <a:xfrm>
-            <a:off x="6254496" y="5705856"/>
-            <a:ext cx="411480" cy="237744"/>
-          </a:xfrm>
-          <a:prstGeom prst="rect">
-            <a:avLst/>
-          </a:prstGeom>
-          <a:noFill/>
-        </p:spPr>
-        <p:txBody>
-          <a:bodyPr wrap="none">
-            <a:spAutoFit/>
-          </a:bodyPr>
-          <a:lstStyle/>
-          <a:p>
-            <a:pPr algn="ctr">
-              <a:defRPr sz="950" b="1">
-                <a:solidFill>
-                  <a:srgbClr val="6B7280"/>
-                </a:solidFill>
-                <a:latin typeface="Calibri"/>
-              </a:defRPr>
-            </a:pPr>
-            <a:r>
-              <a:t>39</a:t>
-            </a:r>
-          </a:p>
-        </p:txBody>
-      </p:sp>
-      <p:sp>
-        <p:nvSpPr>
-          <p:cNvPr id="208" name="TextBox 207"/>
-          <p:cNvSpPr txBox="1"/>
-          <p:nvPr/>
-        </p:nvSpPr>
-        <p:spPr>
-          <a:xfrm>
-            <a:off x="6665976" y="5705856"/>
-            <a:ext cx="1920240" cy="237744"/>
-          </a:xfrm>
-          <a:prstGeom prst="rect">
-            <a:avLst/>
-          </a:prstGeom>
-          <a:noFill/>
-        </p:spPr>
-        <p:txBody>
-          <a:bodyPr wrap="none">
-            <a:spAutoFit/>
-          </a:bodyPr>
-          <a:lstStyle/>
-          <a:p>
-            <a:pPr algn="l">
-              <a:defRPr sz="950" b="1">
-                <a:solidFill>
-                  <a:srgbClr val="111827"/>
-                </a:solidFill>
-                <a:latin typeface="Calibri"/>
-              </a:defRPr>
-            </a:pPr>
-            <a:r>
-              <a:t>Rubjot Singh</a:t>
-            </a:r>
-          </a:p>
-        </p:txBody>
-      </p:sp>
-      <p:sp>
-        <p:nvSpPr>
-          <p:cNvPr id="209" name="TextBox 208"/>
-          <p:cNvSpPr txBox="1"/>
-          <p:nvPr/>
-        </p:nvSpPr>
-        <p:spPr>
-          <a:xfrm>
-            <a:off x="8586216" y="5705856"/>
-            <a:ext cx="2459736" cy="237744"/>
-          </a:xfrm>
-          <a:prstGeom prst="rect">
-            <a:avLst/>
-          </a:prstGeom>
-          <a:noFill/>
-        </p:spPr>
-        <p:txBody>
-          <a:bodyPr wrap="none">
-            <a:spAutoFit/>
-          </a:bodyPr>
-          <a:lstStyle/>
-          <a:p>
-            <a:pPr algn="l">
-              <a:defRPr sz="950" b="0">
-                <a:solidFill>
-                  <a:srgbClr val="6B7280"/>
-                </a:solidFill>
-                <a:latin typeface="Calibri"/>
-              </a:defRPr>
-            </a:pPr>
-            <a:r>
-              <a:t>Indi Insurance LLC</a:t>
-            </a:r>
-          </a:p>
-        </p:txBody>
-      </p:sp>
-      <p:sp>
-        <p:nvSpPr>
-          <p:cNvPr id="210" name="TextBox 209"/>
-          <p:cNvSpPr txBox="1"/>
-          <p:nvPr/>
-        </p:nvSpPr>
-        <p:spPr>
-          <a:xfrm>
-            <a:off x="11045952" y="5705856"/>
-            <a:ext cx="914400" cy="237744"/>
-          </a:xfrm>
-          <a:prstGeom prst="rect">
-            <a:avLst/>
-          </a:prstGeom>
-          <a:noFill/>
-        </p:spPr>
-        <p:txBody>
-          <a:bodyPr wrap="none">
-            <a:spAutoFit/>
-          </a:bodyPr>
-          <a:lstStyle/>
-          <a:p>
-            <a:pPr algn="ctr">
-              <a:defRPr sz="950" b="1">
-                <a:solidFill>
-                  <a:srgbClr val="111827"/>
-                </a:solidFill>
-                <a:latin typeface="Calibri"/>
-              </a:defRPr>
-            </a:pPr>
-            <a:r>
-              <a:t>$296K</a:t>
-            </a:r>
-          </a:p>
-        </p:txBody>
-      </p:sp>
-      <p:sp>
-        <p:nvSpPr>
-          <p:cNvPr id="211" name="Rectangle 210"/>
-          <p:cNvSpPr/>
-          <p:nvPr/>
-        </p:nvSpPr>
-        <p:spPr>
-          <a:xfrm>
-            <a:off x="6254496" y="5943600"/>
-            <a:ext cx="5705856" cy="256032"/>
-          </a:xfrm>
-          <a:prstGeom prst="rect">
-            <a:avLst/>
-          </a:prstGeom>
-          <a:solidFill>
-            <a:srgbClr val="F9FAFB"/>
-          </a:solidFill>
-          <a:ln>
-            <a:noFill/>
-          </a:ln>
-        </p:spPr>
-        <p:style>
-          <a:lnRef idx="1">
-            <a:schemeClr val="accent1"/>
-          </a:lnRef>
-          <a:fillRef idx="3">
-            <a:schemeClr val="accent1"/>
-          </a:fillRef>
-          <a:effectRef idx="2">
-            <a:schemeClr val="accent1"/>
-          </a:effectRef>
-          <a:fontRef idx="minor">
-            <a:schemeClr val="lt1"/>
-          </a:fontRef>
-        </p:style>
-        <p:txBody>
-          <a:bodyPr rtlCol="0" anchor="ctr"/>
-          <a:lstStyle/>
-          <a:p>
-            <a:pPr algn="ctr"/>
-          </a:p>
-        </p:txBody>
-      </p:sp>
-      <p:sp>
-        <p:nvSpPr>
-          <p:cNvPr id="212" name="TextBox 211"/>
-          <p:cNvSpPr txBox="1"/>
-          <p:nvPr/>
-        </p:nvSpPr>
-        <p:spPr>
-          <a:xfrm>
-            <a:off x="6254496" y="5961888"/>
-            <a:ext cx="411480" cy="237744"/>
-          </a:xfrm>
-          <a:prstGeom prst="rect">
-            <a:avLst/>
-          </a:prstGeom>
-          <a:noFill/>
-        </p:spPr>
-        <p:txBody>
-          <a:bodyPr wrap="none">
-            <a:spAutoFit/>
-          </a:bodyPr>
-          <a:lstStyle/>
-          <a:p>
-            <a:pPr algn="ctr">
-              <a:defRPr sz="950" b="1">
-                <a:solidFill>
-                  <a:srgbClr val="6B7280"/>
-                </a:solidFill>
-                <a:latin typeface="Calibri"/>
-              </a:defRPr>
-            </a:pPr>
-            <a:r>
-              <a:t>40</a:t>
-            </a:r>
-          </a:p>
-        </p:txBody>
-      </p:sp>
-      <p:sp>
-        <p:nvSpPr>
-          <p:cNvPr id="213" name="TextBox 212"/>
-          <p:cNvSpPr txBox="1"/>
-          <p:nvPr/>
-        </p:nvSpPr>
-        <p:spPr>
-          <a:xfrm>
-            <a:off x="6665976" y="5961888"/>
-            <a:ext cx="1920240" cy="237744"/>
-          </a:xfrm>
-          <a:prstGeom prst="rect">
-            <a:avLst/>
-          </a:prstGeom>
-          <a:noFill/>
-        </p:spPr>
-        <p:txBody>
-          <a:bodyPr wrap="none">
-            <a:spAutoFit/>
-          </a:bodyPr>
-          <a:lstStyle/>
-          <a:p>
-            <a:pPr algn="l">
-              <a:defRPr sz="950" b="1">
-                <a:solidFill>
-                  <a:srgbClr val="111827"/>
-                </a:solidFill>
-                <a:latin typeface="Calibri"/>
-              </a:defRPr>
-            </a:pPr>
-            <a:r>
-              <a:t>Salman Arzu</a:t>
-            </a:r>
-          </a:p>
-        </p:txBody>
-      </p:sp>
-      <p:sp>
-        <p:nvSpPr>
-          <p:cNvPr id="214" name="TextBox 213"/>
-          <p:cNvSpPr txBox="1"/>
-          <p:nvPr/>
-        </p:nvSpPr>
-        <p:spPr>
-          <a:xfrm>
-            <a:off x="8586216" y="5961888"/>
-            <a:ext cx="2459736" cy="237744"/>
-          </a:xfrm>
-          <a:prstGeom prst="rect">
-            <a:avLst/>
-          </a:prstGeom>
-          <a:noFill/>
-        </p:spPr>
-        <p:txBody>
-          <a:bodyPr wrap="none">
-            <a:spAutoFit/>
-          </a:bodyPr>
-          <a:lstStyle/>
-          <a:p>
-            <a:pPr algn="l">
-              <a:defRPr sz="950" b="0">
-                <a:solidFill>
-                  <a:srgbClr val="6B7280"/>
-                </a:solidFill>
-                <a:latin typeface="Calibri"/>
-              </a:defRPr>
-            </a:pPr>
-            <a:r>
-              <a:t>Statewide Risk Management I</a:t>
             </a:r>
           </a:p>
         </p:txBody>
@@ -19781,7 +19781,7 @@
               </a:defRPr>
             </a:pPr>
             <a:r>
-              <a:t>$291K</a:t>
+              <a:t>$310K</a:t>
             </a:r>
           </a:p>
         </p:txBody>
@@ -19922,7 +19922,7 @@
               </a:defRPr>
             </a:pPr>
             <a:r>
-              <a:t>Q2 2026 YTD (Apr 1–May 20)  |  Green = on target  |  Amber = at risk  |  Red = behind  |  Goal: ≥40 acts/wk  |  Ranked by composite OKR score</a:t>
+              <a:t>Q2 2026 YTD (Apr 1–May 21)  |  Green = on target  |  Amber = at risk  |  Red = behind  |  Goal: ≥40 acts/wk  |  Ranked by composite OKR score</a:t>
             </a:r>
           </a:p>
         </p:txBody>
@@ -19958,7 +19958,7 @@
               </a:defRPr>
             </a:pPr>
             <a:r>
-              <a:t>Generated May 20, 2026</a:t>
+              <a:t>Generated May 21, 2026</a:t>
             </a:r>
           </a:p>
         </p:txBody>
@@ -20123,7 +20123,7 @@
               </a:defRPr>
             </a:pPr>
             <a:r>
-              <a:t>Q2 2026 YTD (Apr 1–May 20)  |  Green = on target  |  Amber = at risk  |  Red = behind  |  Goal: ≥50 acts/wk  |  Ranked by composite OKR score</a:t>
+              <a:t>Q2 2026 YTD (Apr 1–May 21)  |  Green = on target  |  Amber = at risk  |  Red = behind  |  Goal: ≥50 acts/wk  |  Ranked by composite OKR score</a:t>
             </a:r>
           </a:p>
         </p:txBody>
@@ -20159,7 +20159,7 @@
               </a:defRPr>
             </a:pPr>
             <a:r>
-              <a:t>Generated May 20, 2026</a:t>
+              <a:t>Generated May 21, 2026</a:t>
             </a:r>
           </a:p>
         </p:txBody>
@@ -20324,7 +20324,7 @@
               </a:defRPr>
             </a:pPr>
             <a:r>
-              <a:t>Q2 YTD  |  Apr 1–May 20  |  BDMs Only  |  Goal: 40 acts/wk  |  Emails excluded</a:t>
+              <a:t>Q2 YTD  |  Apr 1–May 21  |  BDMs Only  |  Goal: 40 acts/wk  |  Emails excluded</a:t>
             </a:r>
           </a:p>
         </p:txBody>
@@ -20360,7 +20360,7 @@
               </a:defRPr>
             </a:pPr>
             <a:r>
-              <a:t>Generated May 20, 2026</a:t>
+              <a:t>Generated May 21, 2026</a:t>
             </a:r>
           </a:p>
         </p:txBody>
@@ -20691,7 +20691,7 @@
               </a:defRPr>
             </a:pPr>
             <a:r>
-              <a:t>May 18-20</a:t>
+              <a:t>May 18-21</a:t>
             </a:r>
           </a:p>
         </p:txBody>
@@ -21316,7 +21316,7 @@
               </a:defRPr>
             </a:pPr>
             <a:r>
-              <a:t>19</a:t>
+              <a:t>28</a:t>
             </a:r>
           </a:p>
         </p:txBody>
@@ -21925,7 +21925,7 @@
             <a:avLst/>
           </a:prstGeom>
           <a:solidFill>
-            <a:srgbClr val="D97706"/>
+            <a:srgbClr val="05784C"/>
           </a:solidFill>
           <a:ln>
             <a:noFill/>
@@ -21984,7 +21984,7 @@
               </a:defRPr>
             </a:pPr>
             <a:r>
-              <a:t>33</a:t>
+              <a:t>42</a:t>
             </a:r>
           </a:p>
         </p:txBody>
@@ -23277,7 +23277,7 @@
               </a:defRPr>
             </a:pPr>
             <a:r>
-              <a:t>13</a:t>
+              <a:t>26</a:t>
             </a:r>
           </a:p>
         </p:txBody>
@@ -23843,7 +23843,7 @@
             <a:avLst/>
           </a:prstGeom>
           <a:solidFill>
-            <a:srgbClr val="DC2626"/>
+            <a:srgbClr val="D97706"/>
           </a:solidFill>
           <a:ln>
             <a:noFill/>
@@ -23902,7 +23902,7 @@
               </a:defRPr>
             </a:pPr>
             <a:r>
-              <a:t>28</a:t>
+              <a:t>33</a:t>
             </a:r>
           </a:p>
         </p:txBody>
@@ -24570,7 +24570,7 @@
               </a:defRPr>
             </a:pPr>
             <a:r>
-              <a:t>9</a:t>
+              <a:t>12</a:t>
             </a:r>
           </a:p>
         </p:txBody>
@@ -25045,7 +25045,7 @@
               </a:defRPr>
             </a:pPr>
             <a:r>
-              <a:t>400</a:t>
+              <a:t>409</a:t>
             </a:r>
           </a:p>
         </p:txBody>
@@ -25153,7 +25153,7 @@
               </a:defRPr>
             </a:pPr>
             <a:r>
-              <a:t>447</a:t>
+              <a:t>456</a:t>
             </a:r>
           </a:p>
         </p:txBody>
@@ -25376,7 +25376,7 @@
               </a:defRPr>
             </a:pPr>
             <a:r>
-              <a:t>210</a:t>
+              <a:t>220</a:t>
             </a:r>
           </a:p>
         </p:txBody>
@@ -25412,7 +25412,7 @@
               </a:defRPr>
             </a:pPr>
             <a:r>
-              <a:t>24</a:t>
+              <a:t>23</a:t>
             </a:r>
           </a:p>
         </p:txBody>
@@ -25448,7 +25448,7 @@
               </a:defRPr>
             </a:pPr>
             <a:r>
-              <a:t>80</a:t>
+              <a:t>82</a:t>
             </a:r>
           </a:p>
         </p:txBody>
@@ -25484,7 +25484,7 @@
               </a:defRPr>
             </a:pPr>
             <a:r>
-              <a:t>234</a:t>
+              <a:t>243</a:t>
             </a:r>
           </a:p>
         </p:txBody>
@@ -25995,7 +25995,7 @@
               </a:defRPr>
             </a:pPr>
             <a:r>
-              <a:t>371</a:t>
+              <a:t>383</a:t>
             </a:r>
           </a:p>
         </p:txBody>
@@ -26031,7 +26031,7 @@
               </a:defRPr>
             </a:pPr>
             <a:r>
-              <a:t>19</a:t>
+              <a:t>20</a:t>
             </a:r>
           </a:p>
         </p:txBody>
@@ -26103,7 +26103,7 @@
               </a:defRPr>
             </a:pPr>
             <a:r>
-              <a:t>390</a:t>
+              <a:t>403</a:t>
             </a:r>
           </a:p>
         </p:txBody>
@@ -26283,7 +26283,7 @@
               </a:defRPr>
             </a:pPr>
             <a:r>
-              <a:t>237</a:t>
+              <a:t>241</a:t>
             </a:r>
           </a:p>
         </p:txBody>
@@ -26319,7 +26319,7 @@
               </a:defRPr>
             </a:pPr>
             <a:r>
-              <a:t>15</a:t>
+              <a:t>16</a:t>
             </a:r>
           </a:p>
         </p:txBody>
@@ -26355,7 +26355,7 @@
               </a:defRPr>
             </a:pPr>
             <a:r>
-              <a:t>45</a:t>
+              <a:t>46</a:t>
             </a:r>
           </a:p>
         </p:txBody>
@@ -26391,7 +26391,7 @@
               </a:defRPr>
             </a:pPr>
             <a:r>
-              <a:t>252</a:t>
+              <a:t>257</a:t>
             </a:r>
           </a:p>
         </p:txBody>
@@ -26614,7 +26614,7 @@
               </a:defRPr>
             </a:pPr>
             <a:r>
-              <a:t>78</a:t>
+              <a:t>80</a:t>
             </a:r>
           </a:p>
         </p:txBody>
@@ -26650,7 +26650,7 @@
               </a:defRPr>
             </a:pPr>
             <a:r>
-              <a:t>12</a:t>
+              <a:t>13</a:t>
             </a:r>
           </a:p>
         </p:txBody>
@@ -26686,7 +26686,7 @@
               </a:defRPr>
             </a:pPr>
             <a:r>
-              <a:t>7</a:t>
+              <a:t>10</a:t>
             </a:r>
           </a:p>
         </p:txBody>
@@ -26722,7 +26722,7 @@
               </a:defRPr>
             </a:pPr>
             <a:r>
-              <a:t>90</a:t>
+              <a:t>93</a:t>
             </a:r>
           </a:p>
         </p:txBody>
@@ -26935,7 +26935,7 @@
               </a:defRPr>
             </a:pPr>
             <a:r>
-              <a:t>Q2 YTD  |  Apr 1–May 20  |  BDAs Only  |  Goal: 50 acts/wk  |  Emails excluded</a:t>
+              <a:t>Q2 YTD  |  Apr 1–May 21  |  BDAs Only  |  Goal: 50 acts/wk  |  Emails excluded</a:t>
             </a:r>
           </a:p>
         </p:txBody>
@@ -26971,7 +26971,7 @@
               </a:defRPr>
             </a:pPr>
             <a:r>
-              <a:t>Generated May 20, 2026</a:t>
+              <a:t>Generated May 21, 2026</a:t>
             </a:r>
           </a:p>
         </p:txBody>
@@ -27302,7 +27302,7 @@
               </a:defRPr>
             </a:pPr>
             <a:r>
-              <a:t>May 18-20</a:t>
+              <a:t>May 18-21</a:t>
             </a:r>
           </a:p>
         </p:txBody>
@@ -27927,7 +27927,7 @@
               </a:defRPr>
             </a:pPr>
             <a:r>
-              <a:t>16</a:t>
+              <a:t>28</a:t>
             </a:r>
           </a:p>
         </p:txBody>
@@ -28523,7 +28523,7 @@
               </a:defRPr>
             </a:pPr>
             <a:r>
-              <a:t>15</a:t>
+              <a:t>27</a:t>
             </a:r>
           </a:p>
         </p:txBody>
@@ -28559,7 +28559,7 @@
               </a:defRPr>
             </a:pPr>
             <a:r>
-              <a:t>58%</a:t>
+              <a:t>63%</a:t>
             </a:r>
           </a:p>
         </p:txBody>
@@ -28997,7 +28997,7 @@
               </a:defRPr>
             </a:pPr>
             <a:r>
-              <a:t>43</a:t>
+              <a:t>42</a:t>
             </a:r>
           </a:p>
         </p:txBody>
@@ -29076,7 +29076,7 @@
               </a:defRPr>
             </a:pPr>
             <a:r>
-              <a:t>18</a:t>
+              <a:t>30</a:t>
             </a:r>
           </a:p>
         </p:txBody>
@@ -29106,13 +29106,13 @@
             <a:pPr algn="ctr">
               <a:defRPr sz="1100" b="1">
                 <a:solidFill>
-                  <a:srgbClr val="DC2626"/>
-                </a:solidFill>
-                <a:latin typeface="Calibri"/>
-              </a:defRPr>
-            </a:pPr>
-            <a:r>
-              <a:t>72%</a:t>
+                  <a:srgbClr val="D97706"/>
+                </a:solidFill>
+                <a:latin typeface="Calibri"/>
+              </a:defRPr>
+            </a:pPr>
+            <a:r>
+              <a:t>77%</a:t>
             </a:r>
           </a:p>
         </p:txBody>
@@ -29672,7 +29672,7 @@
               </a:defRPr>
             </a:pPr>
             <a:r>
-              <a:t>2</a:t>
+              <a:t>14</a:t>
             </a:r>
           </a:p>
         </p:txBody>
@@ -29708,7 +29708,7 @@
               </a:defRPr>
             </a:pPr>
             <a:r>
-              <a:t>82%</a:t>
+              <a:t>87%</a:t>
             </a:r>
           </a:p>
         </p:txBody>
@@ -30297,7 +30297,7 @@
               </a:defRPr>
             </a:pPr>
             <a:r>
-              <a:t>20</a:t>
+              <a:t>33</a:t>
             </a:r>
           </a:p>
         </p:txBody>
@@ -30772,7 +30772,7 @@
               </a:defRPr>
             </a:pPr>
             <a:r>
-              <a:t>323</a:t>
+              <a:t>335</a:t>
             </a:r>
           </a:p>
         </p:txBody>
@@ -30844,7 +30844,7 @@
               </a:defRPr>
             </a:pPr>
             <a:r>
-              <a:t>34</a:t>
+              <a:t>35</a:t>
             </a:r>
           </a:p>
         </p:txBody>
@@ -30880,7 +30880,7 @@
               </a:defRPr>
             </a:pPr>
             <a:r>
-              <a:t>333</a:t>
+              <a:t>345</a:t>
             </a:r>
           </a:p>
         </p:txBody>
@@ -31103,7 +31103,7 @@
               </a:defRPr>
             </a:pPr>
             <a:r>
-              <a:t>139</a:t>
+              <a:t>150</a:t>
             </a:r>
           </a:p>
         </p:txBody>
@@ -31139,7 +31139,7 @@
               </a:defRPr>
             </a:pPr>
             <a:r>
-              <a:t>7</a:t>
+              <a:t>8</a:t>
             </a:r>
           </a:p>
         </p:txBody>
@@ -31175,7 +31175,7 @@
               </a:defRPr>
             </a:pPr>
             <a:r>
-              <a:t>9</a:t>
+              <a:t>10</a:t>
             </a:r>
           </a:p>
         </p:txBody>
@@ -31211,7 +31211,7 @@
               </a:defRPr>
             </a:pPr>
             <a:r>
-              <a:t>146</a:t>
+              <a:t>158</a:t>
             </a:r>
           </a:p>
         </p:txBody>
@@ -31247,7 +31247,7 @@
               </a:defRPr>
             </a:pPr>
             <a:r>
-              <a:t>29.2</a:t>
+              <a:t>31.6</a:t>
             </a:r>
           </a:p>
         </p:txBody>
@@ -31283,7 +31283,7 @@
               </a:defRPr>
             </a:pPr>
             <a:r>
-              <a:t>58%</a:t>
+              <a:t>63%</a:t>
             </a:r>
           </a:p>
         </p:txBody>
@@ -31391,7 +31391,7 @@
               </a:defRPr>
             </a:pPr>
             <a:r>
-              <a:t>171</a:t>
+              <a:t>181</a:t>
             </a:r>
           </a:p>
         </p:txBody>
@@ -31427,7 +31427,7 @@
               </a:defRPr>
             </a:pPr>
             <a:r>
-              <a:t>10</a:t>
+              <a:t>11</a:t>
             </a:r>
           </a:p>
         </p:txBody>
@@ -31499,7 +31499,7 @@
               </a:defRPr>
             </a:pPr>
             <a:r>
-              <a:t>181</a:t>
+              <a:t>192</a:t>
             </a:r>
           </a:p>
         </p:txBody>
@@ -31535,7 +31535,7 @@
               </a:defRPr>
             </a:pPr>
             <a:r>
-              <a:t>36.2</a:t>
+              <a:t>38.4</a:t>
             </a:r>
           </a:p>
         </p:txBody>
@@ -31565,13 +31565,13 @@
             <a:pPr algn="ctr">
               <a:defRPr sz="900" b="0">
                 <a:solidFill>
-                  <a:srgbClr val="DC2626"/>
-                </a:solidFill>
-                <a:latin typeface="Calibri"/>
-              </a:defRPr>
-            </a:pPr>
-            <a:r>
-              <a:t>72%</a:t>
+                  <a:srgbClr val="D97706"/>
+                </a:solidFill>
+                <a:latin typeface="Calibri"/>
+              </a:defRPr>
+            </a:pPr>
+            <a:r>
+              <a:t>77%</a:t>
             </a:r>
           </a:p>
         </p:txBody>
@@ -31722,7 +31722,7 @@
               </a:defRPr>
             </a:pPr>
             <a:r>
-              <a:t>195</a:t>
+              <a:t>205</a:t>
             </a:r>
           </a:p>
         </p:txBody>
@@ -31758,7 +31758,7 @@
               </a:defRPr>
             </a:pPr>
             <a:r>
-              <a:t>10</a:t>
+              <a:t>12</a:t>
             </a:r>
           </a:p>
         </p:txBody>
@@ -31830,7 +31830,7 @@
               </a:defRPr>
             </a:pPr>
             <a:r>
-              <a:t>205</a:t>
+              <a:t>217</a:t>
             </a:r>
           </a:p>
         </p:txBody>
@@ -31866,7 +31866,7 @@
               </a:defRPr>
             </a:pPr>
             <a:r>
-              <a:t>41.0</a:t>
+              <a:t>43.4</a:t>
             </a:r>
           </a:p>
         </p:txBody>
@@ -31902,7 +31902,7 @@
               </a:defRPr>
             </a:pPr>
             <a:r>
-              <a:t>82%</a:t>
+              <a:t>87%</a:t>
             </a:r>
           </a:p>
         </p:txBody>
@@ -32010,7 +32010,7 @@
               </a:defRPr>
             </a:pPr>
             <a:r>
-              <a:t>115</a:t>
+              <a:t>128</a:t>
             </a:r>
           </a:p>
         </p:txBody>
@@ -32082,7 +32082,7 @@
               </a:defRPr>
             </a:pPr>
             <a:r>
-              <a:t>6</a:t>
+              <a:t>10</a:t>
             </a:r>
           </a:p>
         </p:txBody>
@@ -32118,7 +32118,7 @@
               </a:defRPr>
             </a:pPr>
             <a:r>
-              <a:t>121</a:t>
+              <a:t>134</a:t>
             </a:r>
           </a:p>
         </p:txBody>
@@ -32367,7 +32367,7 @@
               </a:defRPr>
             </a:pPr>
             <a:r>
-              <a:t>Generated May 20, 2026</a:t>
+              <a:t>Generated May 21, 2026</a:t>
             </a:r>
           </a:p>
         </p:txBody>
@@ -33058,7 +33058,7 @@
               </a:defRPr>
             </a:pPr>
             <a:r>
-              <a:t>6530</a:t>
+              <a:t>6681</a:t>
             </a:r>
           </a:p>
         </p:txBody>
@@ -33094,7 +33094,7 @@
               </a:defRPr>
             </a:pPr>
             <a:r>
-              <a:t>470</a:t>
+              <a:t>472</a:t>
             </a:r>
           </a:p>
         </p:txBody>
@@ -33130,7 +33130,7 @@
               </a:defRPr>
             </a:pPr>
             <a:r>
-              <a:t>$16.9M</a:t>
+              <a:t>$17.3M</a:t>
             </a:r>
           </a:p>
         </p:txBody>
@@ -33166,7 +33166,7 @@
               </a:defRPr>
             </a:pPr>
             <a:r>
-              <a:t>$4.2M</a:t>
+              <a:t>$4.3M</a:t>
             </a:r>
           </a:p>
         </p:txBody>
@@ -33497,7 +33497,7 @@
               </a:defRPr>
             </a:pPr>
             <a:r>
-              <a:t>3132</a:t>
+              <a:t>3215</a:t>
             </a:r>
           </a:p>
         </p:txBody>
@@ -33533,7 +33533,7 @@
               </a:defRPr>
             </a:pPr>
             <a:r>
-              <a:t>311</a:t>
+              <a:t>328</a:t>
             </a:r>
           </a:p>
         </p:txBody>
@@ -33569,7 +33569,7 @@
               </a:defRPr>
             </a:pPr>
             <a:r>
-              <a:t>$9.1M</a:t>
+              <a:t>$9.8M</a:t>
             </a:r>
           </a:p>
         </p:txBody>
@@ -33605,7 +33605,7 @@
               </a:defRPr>
             </a:pPr>
             <a:r>
-              <a:t>$1.0M</a:t>
+              <a:t>$1.3M</a:t>
             </a:r>
           </a:p>
         </p:txBody>
@@ -33641,7 +33641,7 @@
               </a:defRPr>
             </a:pPr>
             <a:r>
-              <a:t>$2.7M</a:t>
+              <a:t>$2.8M</a:t>
             </a:r>
           </a:p>
         </p:txBody>
@@ -33893,7 +33893,7 @@
               </a:defRPr>
             </a:pPr>
             <a:r>
-              <a:t>4974</a:t>
+              <a:t>5091</a:t>
             </a:r>
           </a:p>
         </p:txBody>
@@ -33929,7 +33929,7 @@
               </a:defRPr>
             </a:pPr>
             <a:r>
-              <a:t>273</a:t>
+              <a:t>288</a:t>
             </a:r>
           </a:p>
         </p:txBody>
@@ -33965,7 +33965,7 @@
               </a:defRPr>
             </a:pPr>
             <a:r>
-              <a:t>$7.7M</a:t>
+              <a:t>$8.1M</a:t>
             </a:r>
           </a:p>
         </p:txBody>
@@ -34037,7 +34037,7 @@
               </a:defRPr>
             </a:pPr>
             <a:r>
-              <a:t>$3.4M</a:t>
+              <a:t>$3.5M</a:t>
             </a:r>
           </a:p>
         </p:txBody>
@@ -34332,7 +34332,7 @@
               </a:defRPr>
             </a:pPr>
             <a:r>
-              <a:t>3001</a:t>
+              <a:t>3096</a:t>
             </a:r>
           </a:p>
         </p:txBody>
@@ -34368,7 +34368,7 @@
               </a:defRPr>
             </a:pPr>
             <a:r>
-              <a:t>235</a:t>
+              <a:t>247</a:t>
             </a:r>
           </a:p>
         </p:txBody>
@@ -34404,7 +34404,7 @@
               </a:defRPr>
             </a:pPr>
             <a:r>
-              <a:t>$5.7M</a:t>
+              <a:t>$6.0M</a:t>
             </a:r>
           </a:p>
         </p:txBody>
@@ -34440,7 +34440,7 @@
               </a:defRPr>
             </a:pPr>
             <a:r>
-              <a:t>$729K</a:t>
+              <a:t>$756K</a:t>
             </a:r>
           </a:p>
         </p:txBody>
@@ -34476,7 +34476,7 @@
               </a:defRPr>
             </a:pPr>
             <a:r>
-              <a:t>$1.5M</a:t>
+              <a:t>$1.6M</a:t>
             </a:r>
           </a:p>
         </p:txBody>
@@ -34728,7 +34728,7 @@
               </a:defRPr>
             </a:pPr>
             <a:r>
-              <a:t>1675</a:t>
+              <a:t>1717</a:t>
             </a:r>
           </a:p>
         </p:txBody>
@@ -34764,7 +34764,7 @@
               </a:defRPr>
             </a:pPr>
             <a:r>
-              <a:t>119</a:t>
+              <a:t>123</a:t>
             </a:r>
           </a:p>
         </p:txBody>
@@ -34836,7 +34836,7 @@
               </a:defRPr>
             </a:pPr>
             <a:r>
-              <a:t>$118K</a:t>
+              <a:t>$126K</a:t>
             </a:r>
           </a:p>
         </p:txBody>
@@ -35246,7 +35246,7 @@
               </a:defRPr>
             </a:pPr>
             <a:r>
-              <a:t>3643</a:t>
+              <a:t>3743</a:t>
             </a:r>
           </a:p>
         </p:txBody>
@@ -35282,7 +35282,7 @@
               </a:defRPr>
             </a:pPr>
             <a:r>
-              <a:t>105</a:t>
+              <a:t>103</a:t>
             </a:r>
           </a:p>
         </p:txBody>
@@ -35318,7 +35318,7 @@
               </a:defRPr>
             </a:pPr>
             <a:r>
-              <a:t>$2.7M</a:t>
+              <a:t>$2.5M</a:t>
             </a:r>
           </a:p>
         </p:txBody>
@@ -35354,7 +35354,7 @@
               </a:defRPr>
             </a:pPr>
             <a:r>
-              <a:t>$75K</a:t>
+              <a:t>$105K</a:t>
             </a:r>
           </a:p>
         </p:txBody>
@@ -35390,7 +35390,7 @@
               </a:defRPr>
             </a:pPr>
             <a:r>
-              <a:t>$665K</a:t>
+              <a:t>$684K</a:t>
             </a:r>
           </a:p>
         </p:txBody>
@@ -35642,7 +35642,7 @@
               </a:defRPr>
             </a:pPr>
             <a:r>
-              <a:t>2522</a:t>
+              <a:t>2575</a:t>
             </a:r>
           </a:p>
         </p:txBody>
@@ -36081,7 +36081,7 @@
               </a:defRPr>
             </a:pPr>
             <a:r>
-              <a:t>1449</a:t>
+              <a:t>1492</a:t>
             </a:r>
           </a:p>
         </p:txBody>
@@ -36117,7 +36117,7 @@
               </a:defRPr>
             </a:pPr>
             <a:r>
-              <a:t>32</a:t>
+              <a:t>34</a:t>
             </a:r>
           </a:p>
         </p:txBody>
@@ -36153,7 +36153,7 @@
               </a:defRPr>
             </a:pPr>
             <a:r>
-              <a:t>$1.1M</a:t>
+              <a:t>$1.2M</a:t>
             </a:r>
           </a:p>
         </p:txBody>
@@ -36225,7 +36225,7 @@
               </a:defRPr>
             </a:pPr>
             <a:r>
-              <a:t>$289K</a:t>
+              <a:t>$307K</a:t>
             </a:r>
           </a:p>
         </p:txBody>
@@ -36477,7 +36477,7 @@
               </a:defRPr>
             </a:pPr>
             <a:r>
-              <a:t>829</a:t>
+              <a:t>855</a:t>
             </a:r>
           </a:p>
         </p:txBody>
@@ -36549,7 +36549,7 @@
               </a:defRPr>
             </a:pPr>
             <a:r>
-              <a:t>$901K</a:t>
+              <a:t>$889K</a:t>
             </a:r>
           </a:p>
         </p:txBody>
@@ -36772,7 +36772,7 @@
               </a:defRPr>
             </a:pPr>
             <a:r>
-              <a:t>26</a:t>
+              <a:t>27</a:t>
             </a:r>
           </a:p>
         </p:txBody>
@@ -36808,7 +36808,7 @@
               </a:defRPr>
             </a:pPr>
             <a:r>
-              <a:t>2</a:t>
+              <a:t>1</a:t>
             </a:r>
           </a:p>
         </p:txBody>
@@ -36844,7 +36844,7 @@
               </a:defRPr>
             </a:pPr>
             <a:r>
-              <a:t>93%</a:t>
+              <a:t>96%</a:t>
             </a:r>
           </a:p>
         </p:txBody>
@@ -36916,7 +36916,7 @@
               </a:defRPr>
             </a:pPr>
             <a:r>
-              <a:t>531</a:t>
+              <a:t>575</a:t>
             </a:r>
           </a:p>
         </p:txBody>
@@ -36952,7 +36952,7 @@
               </a:defRPr>
             </a:pPr>
             <a:r>
-              <a:t>20</a:t>
+              <a:t>23</a:t>
             </a:r>
           </a:p>
         </p:txBody>
@@ -36988,7 +36988,7 @@
               </a:defRPr>
             </a:pPr>
             <a:r>
-              <a:t>$686K</a:t>
+              <a:t>$789K</a:t>
             </a:r>
           </a:p>
         </p:txBody>
@@ -37254,7 +37254,7 @@
               </a:defRPr>
             </a:pPr>
             <a:r>
-              <a:t>215</a:t>
+              <a:t>214</a:t>
             </a:r>
           </a:p>
         </p:txBody>
@@ -37290,7 +37290,7 @@
               </a:defRPr>
             </a:pPr>
             <a:r>
-              <a:t>215</a:t>
+              <a:t>214</a:t>
             </a:r>
           </a:p>
         </p:txBody>
@@ -37434,7 +37434,7 @@
               </a:defRPr>
             </a:pPr>
             <a:r>
-              <a:t>6922</a:t>
+              <a:t>7071</a:t>
             </a:r>
           </a:p>
         </p:txBody>
@@ -37470,7 +37470,7 @@
               </a:defRPr>
             </a:pPr>
             <a:r>
-              <a:t>288</a:t>
+              <a:t>295</a:t>
             </a:r>
           </a:p>
         </p:txBody>
@@ -37542,7 +37542,7 @@
               </a:defRPr>
             </a:pPr>
             <a:r>
-              <a:t>$1.5M</a:t>
+              <a:t>$1.6M</a:t>
             </a:r>
           </a:p>
         </p:txBody>
@@ -37578,7 +37578,7 @@
               </a:defRPr>
             </a:pPr>
             <a:r>
-              <a:t>$2.3M</a:t>
+              <a:t>$2.4M</a:t>
             </a:r>
           </a:p>
         </p:txBody>
@@ -37894,7 +37894,7 @@
               </a:defRPr>
             </a:pPr>
             <a:r>
-              <a:t>219 portfolio  ·  203 active  ·  16 dormant</a:t>
+              <a:t>219 portfolio  ·  204 active  ·  15 dormant</a:t>
             </a:r>
           </a:p>
         </p:txBody>
@@ -38052,7 +38052,7 @@
               </a:defRPr>
             </a:pPr>
             <a:r>
-              <a:t>403 portfolio  ·  384 active  ·  95% engaged</a:t>
+              <a:t>403 portfolio  ·  385 active  ·  96% engaged</a:t>
             </a:r>
           </a:p>
         </p:txBody>
@@ -38193,7 +38193,7 @@
               </a:defRPr>
             </a:pPr>
             <a:r>
-              <a:t>Retail-vertical agencies in each rep's HubSpot portfolio with zero 2026 submissions  |  Refreshed 2026-05-20</a:t>
+              <a:t>Retail-vertical agencies in each rep's HubSpot portfolio with zero 2026 submissions  |  Refreshed 2026-05-21</a:t>
             </a:r>
           </a:p>
         </p:txBody>
@@ -38229,7 +38229,7 @@
               </a:defRPr>
             </a:pPr>
             <a:r>
-              <a:t>Generated May 20, 2026</a:t>
+              <a:t>Generated May 21, 2026</a:t>
             </a:r>
           </a:p>
         </p:txBody>
@@ -40107,7 +40107,7 @@
         <p:spPr>
           <a:xfrm>
             <a:off x="6263640" y="4956048"/>
-            <a:ext cx="5623560" cy="841247"/>
+            <a:ext cx="5623560" cy="676656"/>
           </a:xfrm>
           <a:prstGeom prst="rect">
             <a:avLst/>
@@ -40152,7 +40152,7 @@
         <p:spPr>
           <a:xfrm>
             <a:off x="6263640" y="4956048"/>
-            <a:ext cx="54864" cy="841247"/>
+            <a:ext cx="54864" cy="676656"/>
           </a:xfrm>
           <a:prstGeom prst="rect">
             <a:avLst/>
@@ -40253,7 +40253,7 @@
               </a:defRPr>
             </a:pPr>
             <a:r>
-              <a:t>2 dormant</a:t>
+              <a:t>1 dormant</a:t>
             </a:r>
           </a:p>
         </p:txBody>
@@ -40289,7 +40289,7 @@
               </a:defRPr>
             </a:pPr>
             <a:r>
-              <a:t>2 of 28 agencies dormant</a:t>
+              <a:t>1 of 28 agencies dormant</a:t>
             </a:r>
           </a:p>
         </p:txBody>
@@ -40361,78 +40361,6 @@
               </a:defRPr>
             </a:pPr>
             <a:r>
-              <a:t>Safeguard Insurance Solutions Llc</a:t>
-            </a:r>
-          </a:p>
-        </p:txBody>
-      </p:sp>
-      <p:sp>
-        <p:nvSpPr>
-          <p:cNvPr id="63" name="TextBox 62"/>
-          <p:cNvSpPr txBox="1"/>
-          <p:nvPr/>
-        </p:nvSpPr>
-        <p:spPr>
-          <a:xfrm>
-            <a:off x="6446520" y="5532120"/>
-            <a:ext cx="91440" cy="164592"/>
-          </a:xfrm>
-          <a:prstGeom prst="rect">
-            <a:avLst/>
-          </a:prstGeom>
-          <a:noFill/>
-        </p:spPr>
-        <p:txBody>
-          <a:bodyPr wrap="none">
-            <a:spAutoFit/>
-          </a:bodyPr>
-          <a:lstStyle/>
-          <a:p>
-            <a:pPr algn="l">
-              <a:defRPr sz="900" b="1">
-                <a:solidFill>
-                  <a:srgbClr val="D97706"/>
-                </a:solidFill>
-                <a:latin typeface="Calibri"/>
-              </a:defRPr>
-            </a:pPr>
-            <a:r>
-              <a:t>•</a:t>
-            </a:r>
-          </a:p>
-        </p:txBody>
-      </p:sp>
-      <p:sp>
-        <p:nvSpPr>
-          <p:cNvPr id="64" name="TextBox 63"/>
-          <p:cNvSpPr txBox="1"/>
-          <p:nvPr/>
-        </p:nvSpPr>
-        <p:spPr>
-          <a:xfrm>
-            <a:off x="6574536" y="5513832"/>
-            <a:ext cx="5221224" cy="182880"/>
-          </a:xfrm>
-          <a:prstGeom prst="rect">
-            <a:avLst/>
-          </a:prstGeom>
-          <a:noFill/>
-        </p:spPr>
-        <p:txBody>
-          <a:bodyPr wrap="none">
-            <a:spAutoFit/>
-          </a:bodyPr>
-          <a:lstStyle/>
-          <a:p>
-            <a:pPr algn="l">
-              <a:defRPr sz="1000" b="0">
-                <a:solidFill>
-                  <a:srgbClr val="374151"/>
-                </a:solidFill>
-                <a:latin typeface="Calibri"/>
-              </a:defRPr>
-            </a:pPr>
-            <a:r>
               <a:t>Titanic Insurance Services Inc.</a:t>
             </a:r>
           </a:p>
@@ -40440,13 +40368,13 @@
       </p:sp>
       <p:sp>
         <p:nvSpPr>
-          <p:cNvPr id="65" name="Rectangle 64"/>
+          <p:cNvPr id="63" name="Rectangle 62"/>
           <p:cNvSpPr/>
           <p:nvPr/>
         </p:nvSpPr>
         <p:spPr>
           <a:xfrm>
-            <a:off x="6263640" y="5888736"/>
+            <a:off x="6263640" y="5724144"/>
             <a:ext cx="5623560" cy="1014984"/>
           </a:xfrm>
           <a:prstGeom prst="rect">
@@ -40485,13 +40413,13 @@
       </p:sp>
       <p:sp>
         <p:nvSpPr>
-          <p:cNvPr id="66" name="Rectangle 65"/>
+          <p:cNvPr id="64" name="Rectangle 63"/>
           <p:cNvSpPr/>
           <p:nvPr/>
         </p:nvSpPr>
         <p:spPr>
           <a:xfrm>
-            <a:off x="6263640" y="5888736"/>
+            <a:off x="6263640" y="5724144"/>
             <a:ext cx="54864" cy="1014984"/>
           </a:xfrm>
           <a:prstGeom prst="rect">
@@ -40528,13 +40456,13 @@
       </p:sp>
       <p:sp>
         <p:nvSpPr>
-          <p:cNvPr id="67" name="TextBox 66"/>
-          <p:cNvSpPr txBox="1"/>
-          <p:nvPr/>
-        </p:nvSpPr>
-        <p:spPr>
-          <a:xfrm>
-            <a:off x="6409944" y="5925312"/>
+          <p:cNvPr id="65" name="TextBox 64"/>
+          <p:cNvSpPr txBox="1"/>
+          <p:nvPr/>
+        </p:nvSpPr>
+        <p:spPr>
+          <a:xfrm>
+            <a:off x="6409944" y="5760720"/>
             <a:ext cx="4251960" cy="219456"/>
           </a:xfrm>
           <a:prstGeom prst="rect">
@@ -40564,13 +40492,13 @@
       </p:sp>
       <p:sp>
         <p:nvSpPr>
-          <p:cNvPr id="68" name="TextBox 67"/>
-          <p:cNvSpPr txBox="1"/>
-          <p:nvPr/>
-        </p:nvSpPr>
-        <p:spPr>
-          <a:xfrm>
-            <a:off x="10652760" y="5943599"/>
+          <p:cNvPr id="66" name="TextBox 65"/>
+          <p:cNvSpPr txBox="1"/>
+          <p:nvPr/>
+        </p:nvSpPr>
+        <p:spPr>
+          <a:xfrm>
+            <a:off x="10652760" y="5779007"/>
             <a:ext cx="1097280" cy="201168"/>
           </a:xfrm>
           <a:prstGeom prst="rect">
@@ -40600,13 +40528,13 @@
       </p:sp>
       <p:sp>
         <p:nvSpPr>
-          <p:cNvPr id="69" name="TextBox 68"/>
-          <p:cNvSpPr txBox="1"/>
-          <p:nvPr/>
-        </p:nvSpPr>
-        <p:spPr>
-          <a:xfrm>
-            <a:off x="6409944" y="6126479"/>
+          <p:cNvPr id="67" name="TextBox 66"/>
+          <p:cNvSpPr txBox="1"/>
+          <p:nvPr/>
+        </p:nvSpPr>
+        <p:spPr>
+          <a:xfrm>
+            <a:off x="6409944" y="5961888"/>
             <a:ext cx="5349240" cy="146304"/>
           </a:xfrm>
           <a:prstGeom prst="rect">
@@ -40636,13 +40564,13 @@
       </p:sp>
       <p:sp>
         <p:nvSpPr>
-          <p:cNvPr id="70" name="TextBox 69"/>
-          <p:cNvSpPr txBox="1"/>
-          <p:nvPr/>
-        </p:nvSpPr>
-        <p:spPr>
-          <a:xfrm>
-            <a:off x="6446520" y="6291072"/>
+          <p:cNvPr id="68" name="TextBox 67"/>
+          <p:cNvSpPr txBox="1"/>
+          <p:nvPr/>
+        </p:nvSpPr>
+        <p:spPr>
+          <a:xfrm>
+            <a:off x="6446520" y="6126480"/>
             <a:ext cx="91440" cy="164592"/>
           </a:xfrm>
           <a:prstGeom prst="rect">
@@ -40672,13 +40600,13 @@
       </p:sp>
       <p:sp>
         <p:nvSpPr>
-          <p:cNvPr id="71" name="TextBox 70"/>
-          <p:cNvSpPr txBox="1"/>
-          <p:nvPr/>
-        </p:nvSpPr>
-        <p:spPr>
-          <a:xfrm>
-            <a:off x="6574536" y="6272784"/>
+          <p:cNvPr id="69" name="TextBox 68"/>
+          <p:cNvSpPr txBox="1"/>
+          <p:nvPr/>
+        </p:nvSpPr>
+        <p:spPr>
+          <a:xfrm>
+            <a:off x="6574536" y="6108192"/>
             <a:ext cx="5221224" cy="182880"/>
           </a:xfrm>
           <a:prstGeom prst="rect">
@@ -40708,13 +40636,13 @@
       </p:sp>
       <p:sp>
         <p:nvSpPr>
-          <p:cNvPr id="72" name="TextBox 71"/>
-          <p:cNvSpPr txBox="1"/>
-          <p:nvPr/>
-        </p:nvSpPr>
-        <p:spPr>
-          <a:xfrm>
-            <a:off x="6446520" y="6464808"/>
+          <p:cNvPr id="70" name="TextBox 69"/>
+          <p:cNvSpPr txBox="1"/>
+          <p:nvPr/>
+        </p:nvSpPr>
+        <p:spPr>
+          <a:xfrm>
+            <a:off x="6446520" y="6300216"/>
             <a:ext cx="91440" cy="164592"/>
           </a:xfrm>
           <a:prstGeom prst="rect">
@@ -40744,13 +40672,13 @@
       </p:sp>
       <p:sp>
         <p:nvSpPr>
-          <p:cNvPr id="73" name="TextBox 72"/>
-          <p:cNvSpPr txBox="1"/>
-          <p:nvPr/>
-        </p:nvSpPr>
-        <p:spPr>
-          <a:xfrm>
-            <a:off x="6574536" y="6446520"/>
+          <p:cNvPr id="71" name="TextBox 70"/>
+          <p:cNvSpPr txBox="1"/>
+          <p:nvPr/>
+        </p:nvSpPr>
+        <p:spPr>
+          <a:xfrm>
+            <a:off x="6574536" y="6281928"/>
             <a:ext cx="5221224" cy="182880"/>
           </a:xfrm>
           <a:prstGeom prst="rect">
@@ -40780,13 +40708,13 @@
       </p:sp>
       <p:sp>
         <p:nvSpPr>
-          <p:cNvPr id="74" name="TextBox 73"/>
-          <p:cNvSpPr txBox="1"/>
-          <p:nvPr/>
-        </p:nvSpPr>
-        <p:spPr>
-          <a:xfrm>
-            <a:off x="6446520" y="6638544"/>
+          <p:cNvPr id="72" name="TextBox 71"/>
+          <p:cNvSpPr txBox="1"/>
+          <p:nvPr/>
+        </p:nvSpPr>
+        <p:spPr>
+          <a:xfrm>
+            <a:off x="6446520" y="6473952"/>
             <a:ext cx="91440" cy="164592"/>
           </a:xfrm>
           <a:prstGeom prst="rect">
@@ -40816,13 +40744,13 @@
       </p:sp>
       <p:sp>
         <p:nvSpPr>
-          <p:cNvPr id="75" name="TextBox 74"/>
-          <p:cNvSpPr txBox="1"/>
-          <p:nvPr/>
-        </p:nvSpPr>
-        <p:spPr>
-          <a:xfrm>
-            <a:off x="6574536" y="6620256"/>
+          <p:cNvPr id="73" name="TextBox 72"/>
+          <p:cNvSpPr txBox="1"/>
+          <p:nvPr/>
+        </p:nvSpPr>
+        <p:spPr>
+          <a:xfrm>
+            <a:off x="6574536" y="6455664"/>
             <a:ext cx="5221224" cy="182880"/>
           </a:xfrm>
           <a:prstGeom prst="rect">
@@ -40852,7 +40780,7 @@
       </p:sp>
       <p:sp>
         <p:nvSpPr>
-          <p:cNvPr id="76" name="TextBox 75"/>
+          <p:cNvPr id="74" name="TextBox 73"/>
           <p:cNvSpPr txBox="1"/>
           <p:nvPr/>
         </p:nvSpPr>
@@ -41058,7 +40986,7 @@
               </a:defRPr>
             </a:pPr>
             <a:r>
-              <a:t>Generated May 20, 2026</a:t>
+              <a:t>Generated May 21, 2026</a:t>
             </a:r>
           </a:p>
         </p:txBody>
@@ -41223,7 +41151,7 @@
               </a:defRPr>
             </a:pPr>
             <a:r>
-              <a:t>Ranked by Q2 GWP (left) and Q2 Submissions (right)  ·  Mint-shaded row = new vs last week’s deck  ·  Apr 1–May 20</a:t>
+              <a:t>Ranked by Q2 GWP (left) and Q2 Submissions (right)  ·  Mint-shaded row = new vs last week’s deck  ·  Apr 1–May 21</a:t>
             </a:r>
           </a:p>
         </p:txBody>
@@ -41259,7 +41187,7 @@
               </a:defRPr>
             </a:pPr>
             <a:r>
-              <a:t>Generated May 20, 2026</a:t>
+              <a:t>Generated May 21, 2026</a:t>
             </a:r>
           </a:p>
         </p:txBody>
@@ -41712,7 +41640,7 @@
               </a:defRPr>
             </a:pPr>
             <a:r>
-              <a:t>$2.7M</a:t>
+              <a:t>$3.0M</a:t>
             </a:r>
           </a:p>
         </p:txBody>
@@ -41899,7 +41827,7 @@
               </a:defRPr>
             </a:pPr>
             <a:r>
-              <a:t>$2.5M</a:t>
+              <a:t>$2.6M</a:t>
             </a:r>
           </a:p>
         </p:txBody>
@@ -42086,7 +42014,7 @@
               </a:defRPr>
             </a:pPr>
             <a:r>
-              <a:t>$2.2M</a:t>
+              <a:t>$2.4M</a:t>
             </a:r>
           </a:p>
         </p:txBody>
@@ -42237,7 +42165,7 @@
               </a:defRPr>
             </a:pPr>
             <a:r>
-              <a:t>United Advantage Insurance Services</a:t>
+              <a:t>Reliance Partners, LLC</a:t>
             </a:r>
           </a:p>
         </p:txBody>
@@ -42273,7 +42201,7 @@
               </a:defRPr>
             </a:pPr>
             <a:r>
-              <a:t>$1.8M</a:t>
+              <a:t>$2.0M</a:t>
             </a:r>
           </a:p>
         </p:txBody>
@@ -42424,7 +42352,7 @@
               </a:defRPr>
             </a:pPr>
             <a:r>
-              <a:t>Reliance Partners, LLC</a:t>
+              <a:t>United Advantage Insurance Services</a:t>
             </a:r>
           </a:p>
         </p:txBody>
@@ -42647,7 +42575,7 @@
               </a:defRPr>
             </a:pPr>
             <a:r>
-              <a:t>$1.6M</a:t>
+              <a:t>$1.7M</a:t>
             </a:r>
           </a:p>
         </p:txBody>
@@ -42762,7 +42690,7 @@
               </a:defRPr>
             </a:pPr>
             <a:r>
-              <a:t>Derek J.</a:t>
+              <a:t>Derrick L.</a:t>
             </a:r>
           </a:p>
         </p:txBody>
@@ -42798,7 +42726,7 @@
               </a:defRPr>
             </a:pPr>
             <a:r>
-              <a:t>CASCADE INSURANCE SERVICES INC DBA: CASC…</a:t>
+              <a:t>American Fleet Insurance</a:t>
             </a:r>
           </a:p>
         </p:txBody>
@@ -42834,7 +42762,7 @@
               </a:defRPr>
             </a:pPr>
             <a:r>
-              <a:t>$1.4M</a:t>
+              <a:t>$1.6M</a:t>
             </a:r>
           </a:p>
         </p:txBody>
@@ -42949,7 +42877,7 @@
               </a:defRPr>
             </a:pPr>
             <a:r>
-              <a:t>Derrick L.</a:t>
+              <a:t>Christopher H.</a:t>
             </a:r>
           </a:p>
         </p:txBody>
@@ -42985,7 +42913,7 @@
               </a:defRPr>
             </a:pPr>
             <a:r>
-              <a:t>American Fleet Insurance</a:t>
+              <a:t>DNIS Inc.</a:t>
             </a:r>
           </a:p>
         </p:txBody>
@@ -43021,7 +42949,7 @@
               </a:defRPr>
             </a:pPr>
             <a:r>
-              <a:t>$1.4M</a:t>
+              <a:t>$1.6M</a:t>
             </a:r>
           </a:p>
         </p:txBody>
@@ -43136,7 +43064,7 @@
               </a:defRPr>
             </a:pPr>
             <a:r>
-              <a:t>Christopher H.</a:t>
+              <a:t>Derek J.</a:t>
             </a:r>
           </a:p>
         </p:txBody>
@@ -43172,7 +43100,7 @@
               </a:defRPr>
             </a:pPr>
             <a:r>
-              <a:t>DNIS Inc.</a:t>
+              <a:t>CASCADE INSURANCE SERVICES INC DBA: CASC…</a:t>
             </a:r>
           </a:p>
         </p:txBody>
@@ -43582,7 +43510,7 @@
               </a:defRPr>
             </a:pPr>
             <a:r>
-              <a:t>$1.2M</a:t>
+              <a:t>$1.3M</a:t>
             </a:r>
           </a:p>
         </p:txBody>
@@ -43956,7 +43884,7 @@
               </a:defRPr>
             </a:pPr>
             <a:r>
-              <a:t>$942K</a:t>
+              <a:t>$892K</a:t>
             </a:r>
           </a:p>
         </p:txBody>
@@ -44143,7 +44071,7 @@
               </a:defRPr>
             </a:pPr>
             <a:r>
-              <a:t>$917K</a:t>
+              <a:t>$859K</a:t>
             </a:r>
           </a:p>
         </p:txBody>
@@ -44258,7 +44186,7 @@
               </a:defRPr>
             </a:pPr>
             <a:r>
-              <a:t>Derek J.</a:t>
+              <a:t>Ron D.</a:t>
             </a:r>
           </a:p>
         </p:txBody>
@@ -44294,7 +44222,7 @@
               </a:defRPr>
             </a:pPr>
             <a:r>
-              <a:t>Surefire Insurance Agency Corp.</a:t>
+              <a:t>Prestige International Insurance Group I…</a:t>
             </a:r>
           </a:p>
         </p:txBody>
@@ -44330,7 +44258,7 @@
               </a:defRPr>
             </a:pPr>
             <a:r>
-              <a:t>$847K</a:t>
+              <a:t>$796K</a:t>
             </a:r>
           </a:p>
         </p:txBody>
@@ -44517,7 +44445,7 @@
               </a:defRPr>
             </a:pPr>
             <a:r>
-              <a:t>$786K</a:t>
+              <a:t>$770K</a:t>
             </a:r>
           </a:p>
         </p:txBody>
@@ -44632,7 +44560,7 @@
               </a:defRPr>
             </a:pPr>
             <a:r>
-              <a:t>Ron D.</a:t>
+              <a:t>Derek J.</a:t>
             </a:r>
           </a:p>
         </p:txBody>
@@ -44668,7 +44596,7 @@
               </a:defRPr>
             </a:pPr>
             <a:r>
-              <a:t>Prestige International Insurance Group I…</a:t>
+              <a:t>Surefire Insurance Agency Corp.</a:t>
             </a:r>
           </a:p>
         </p:txBody>
@@ -44704,7 +44632,7 @@
               </a:defRPr>
             </a:pPr>
             <a:r>
-              <a:t>$775K</a:t>
+              <a:t>$765K</a:t>
             </a:r>
           </a:p>
         </p:txBody>
@@ -44855,7 +44783,7 @@
               </a:defRPr>
             </a:pPr>
             <a:r>
-              <a:t>Ewall Insurance Company</a:t>
+              <a:t>Vintage Insurance Agency Inc (The)</a:t>
             </a:r>
           </a:p>
         </p:txBody>
@@ -44891,7 +44819,7 @@
               </a:defRPr>
             </a:pPr>
             <a:r>
-              <a:t>$696K</a:t>
+              <a:t>$722K</a:t>
             </a:r>
           </a:p>
         </p:txBody>
@@ -45042,7 +44970,7 @@
               </a:defRPr>
             </a:pPr>
             <a:r>
-              <a:t>Vintage Insurance Agency Inc (The)</a:t>
+              <a:t>Ewall Insurance Company</a:t>
             </a:r>
           </a:p>
         </p:txBody>
@@ -45078,7 +45006,7 @@
               </a:defRPr>
             </a:pPr>
             <a:r>
-              <a:t>$672K</a:t>
+              <a:t>$696K</a:t>
             </a:r>
           </a:p>
         </p:txBody>
@@ -45265,7 +45193,7 @@
               </a:defRPr>
             </a:pPr>
             <a:r>
-              <a:t>$554K</a:t>
+              <a:t>$636K</a:t>
             </a:r>
           </a:p>
         </p:txBody>
@@ -45718,7 +45646,7 @@
               </a:defRPr>
             </a:pPr>
             <a:r>
-              <a:t>2048</a:t>
+              <a:t>2117</a:t>
             </a:r>
           </a:p>
         </p:txBody>
@@ -45905,7 +45833,7 @@
               </a:defRPr>
             </a:pPr>
             <a:r>
-              <a:t>1932</a:t>
+              <a:t>1979</a:t>
             </a:r>
           </a:p>
         </p:txBody>
@@ -46092,7 +46020,7 @@
               </a:defRPr>
             </a:pPr>
             <a:r>
-              <a:t>1425</a:t>
+              <a:t>1472</a:t>
             </a:r>
           </a:p>
         </p:txBody>
@@ -46279,7 +46207,7 @@
               </a:defRPr>
             </a:pPr>
             <a:r>
-              <a:t>1164</a:t>
+              <a:t>1200</a:t>
             </a:r>
           </a:p>
         </p:txBody>
@@ -46466,7 +46394,7 @@
               </a:defRPr>
             </a:pPr>
             <a:r>
-              <a:t>1085</a:t>
+              <a:t>1104</a:t>
             </a:r>
           </a:p>
         </p:txBody>
@@ -46653,7 +46581,7 @@
               </a:defRPr>
             </a:pPr>
             <a:r>
-              <a:t>944</a:t>
+              <a:t>974</a:t>
             </a:r>
           </a:p>
         </p:txBody>
@@ -46840,7 +46768,7 @@
               </a:defRPr>
             </a:pPr>
             <a:r>
-              <a:t>899</a:t>
+              <a:t>930</a:t>
             </a:r>
           </a:p>
         </p:txBody>
@@ -47027,7 +46955,7 @@
               </a:defRPr>
             </a:pPr>
             <a:r>
-              <a:t>865</a:t>
+              <a:t>878</a:t>
             </a:r>
           </a:p>
         </p:txBody>
@@ -47214,7 +47142,7 @@
               </a:defRPr>
             </a:pPr>
             <a:r>
-              <a:t>654</a:t>
+              <a:t>670</a:t>
             </a:r>
           </a:p>
         </p:txBody>
@@ -47401,7 +47329,7 @@
               </a:defRPr>
             </a:pPr>
             <a:r>
-              <a:t>513</a:t>
+              <a:t>525</a:t>
             </a:r>
           </a:p>
         </p:txBody>
@@ -47588,7 +47516,7 @@
               </a:defRPr>
             </a:pPr>
             <a:r>
-              <a:t>497</a:t>
+              <a:t>508</a:t>
             </a:r>
           </a:p>
         </p:txBody>
@@ -47775,7 +47703,7 @@
               </a:defRPr>
             </a:pPr>
             <a:r>
-              <a:t>457</a:t>
+              <a:t>466</a:t>
             </a:r>
           </a:p>
         </p:txBody>
@@ -47962,7 +47890,7 @@
               </a:defRPr>
             </a:pPr>
             <a:r>
-              <a:t>418</a:t>
+              <a:t>429</a:t>
             </a:r>
           </a:p>
         </p:txBody>
@@ -48149,7 +48077,7 @@
               </a:defRPr>
             </a:pPr>
             <a:r>
-              <a:t>404</a:t>
+              <a:t>418</a:t>
             </a:r>
           </a:p>
         </p:txBody>
@@ -48336,7 +48264,7 @@
               </a:defRPr>
             </a:pPr>
             <a:r>
-              <a:t>364</a:t>
+              <a:t>371</a:t>
             </a:r>
           </a:p>
         </p:txBody>
@@ -48523,7 +48451,7 @@
               </a:defRPr>
             </a:pPr>
             <a:r>
-              <a:t>344</a:t>
+              <a:t>345</a:t>
             </a:r>
           </a:p>
         </p:txBody>
@@ -48710,7 +48638,7 @@
               </a:defRPr>
             </a:pPr>
             <a:r>
-              <a:t>336</a:t>
+              <a:t>345</a:t>
             </a:r>
           </a:p>
         </p:txBody>
@@ -48897,7 +48825,7 @@
               </a:defRPr>
             </a:pPr>
             <a:r>
-              <a:t>321</a:t>
+              <a:t>329</a:t>
             </a:r>
           </a:p>
         </p:txBody>
@@ -49084,7 +49012,7 @@
               </a:defRPr>
             </a:pPr>
             <a:r>
-              <a:t>309</a:t>
+              <a:t>319</a:t>
             </a:r>
           </a:p>
         </p:txBody>
@@ -49271,7 +49199,7 @@
               </a:defRPr>
             </a:pPr>
             <a:r>
-              <a:t>293</a:t>
+              <a:t>299</a:t>
             </a:r>
           </a:p>
         </p:txBody>

--- a/generated/Sales Dashboards/BD Rep Scoreboard.pptx
+++ b/generated/Sales Dashboards/BD Rep Scoreboard.pptx
@@ -1661,7 +1661,7 @@
           </a:p>
           <a:p>
             <a:r>
-              <a:t>- We are 51 days into a 91-day quarter.</a:t>
+              <a:t>- We are 52 days into a 91-day quarter.</a:t>
             </a:r>
           </a:p>
         </p:txBody>
@@ -4902,7 +4902,7 @@
               </a:defRPr>
             </a:pPr>
             <a:r>
-              <a:t>As of May 21, 2026  |  51 days into Q2  |  40 days remaining</a:t>
+              <a:t>As of May 22, 2026  |  52 days into Q2  |  39 days remaining</a:t>
             </a:r>
           </a:p>
         </p:txBody>
@@ -4938,7 +4938,7 @@
               </a:defRPr>
             </a:pPr>
             <a:r>
-              <a:t>Generated May 21, 2026</a:t>
+              <a:t>Generated May 22, 2026</a:t>
             </a:r>
           </a:p>
         </p:txBody>
@@ -5019,7 +5019,7 @@
               </a:defRPr>
             </a:pPr>
             <a:r>
-              <a:t>$18.6M</a:t>
+              <a:t>$19.0M</a:t>
             </a:r>
           </a:p>
         </p:txBody>
@@ -5055,7 +5055,7 @@
               </a:defRPr>
             </a:pPr>
             <a:r>
-              <a:t>Team GWP Q2 YTD  |  Proj. $33.1M</a:t>
+              <a:t>Team GWP Q2 YTD  |  Proj. $33.3M</a:t>
             </a:r>
           </a:p>
         </p:txBody>
@@ -5134,7 +5134,7 @@
               </a:defRPr>
             </a:pPr>
             <a:r>
-              <a:t>Pacing 179% of Q1 Final</a:t>
+              <a:t>Pacing 180% of Q1 Final</a:t>
             </a:r>
           </a:p>
         </p:txBody>
@@ -5215,7 +5215,7 @@
               </a:defRPr>
             </a:pPr>
             <a:r>
-              <a:t>85%</a:t>
+              <a:t>86%</a:t>
             </a:r>
           </a:p>
         </p:txBody>
@@ -5411,7 +5411,7 @@
               </a:defRPr>
             </a:pPr>
             <a:r>
-              <a:t>29,226</a:t>
+              <a:t>29,898</a:t>
             </a:r>
           </a:p>
         </p:txBody>
@@ -5758,7 +5758,7 @@
               </a:defRPr>
             </a:pPr>
             <a:r>
-              <a:t>▲ $3.3M vs Apr pace</a:t>
+              <a:t>▲ $3.4M vs Apr pace</a:t>
             </a:r>
           </a:p>
         </p:txBody>
@@ -5794,7 +5794,7 @@
               </a:defRPr>
             </a:pPr>
             <a:r>
-              <a:t>▲ 37pp vs Q1 avg (48%)</a:t>
+              <a:t>▲ 38pp vs Q1 avg (48%)</a:t>
             </a:r>
           </a:p>
         </p:txBody>
@@ -5830,7 +5830,7 @@
               </a:defRPr>
             </a:pPr>
             <a:r>
-              <a:t>▲ 11632 vs Apr (17594)</a:t>
+              <a:t>▲ 12283 vs Apr (17615)</a:t>
             </a:r>
           </a:p>
         </p:txBody>
@@ -6071,7 +6071,7 @@
               </a:defRPr>
             </a:pPr>
             <a:r>
-              <a:t>$25.8M</a:t>
+              <a:t>$26.5M</a:t>
             </a:r>
           </a:p>
         </p:txBody>
@@ -6107,7 +6107,7 @@
               </a:defRPr>
             </a:pPr>
             <a:r>
-              <a:t>New Business (71%)</a:t>
+              <a:t>New Business (70%)</a:t>
             </a:r>
           </a:p>
         </p:txBody>
@@ -6143,7 +6143,7 @@
               </a:defRPr>
             </a:pPr>
             <a:r>
-              <a:t>$8.2M</a:t>
+              <a:t>$8.5M</a:t>
             </a:r>
           </a:p>
         </p:txBody>
@@ -6179,7 +6179,7 @@
               </a:defRPr>
             </a:pPr>
             <a:r>
-              <a:t>Renewals (22%)</a:t>
+              <a:t>Renewals (23%)</a:t>
             </a:r>
           </a:p>
         </p:txBody>
@@ -6215,7 +6215,7 @@
               </a:defRPr>
             </a:pPr>
             <a:r>
-              <a:t>$2.5M</a:t>
+              <a:t>$2.6M</a:t>
             </a:r>
           </a:p>
         </p:txBody>
@@ -6600,7 +6600,7 @@
               </a:defRPr>
             </a:pPr>
             <a:r>
-              <a:t>45,798</a:t>
+              <a:t>45,825</a:t>
             </a:r>
           </a:p>
         </p:txBody>
@@ -6787,7 +6787,7 @@
               </a:defRPr>
             </a:pPr>
             <a:r>
-              <a:t>MTD (May):  $8.84M written  ·  $13.05M pace  ·  21/31 days elapsed</a:t>
+              <a:t>MTD (May):  $9.32M written  ·  $13.13M pace  ·  22/31 days elapsed</a:t>
             </a:r>
           </a:p>
         </p:txBody>
@@ -6952,7 +6952,7 @@
               </a:defRPr>
             </a:pPr>
             <a:r>
-              <a:t>Largest fleet policies written Apr 1–May 21  ·  Ranked by premium  ·  Fleet = 4+ power units</a:t>
+              <a:t>Largest fleet policies written Apr 1–May 22  ·  Ranked by premium  ·  Fleet = 4+ power units</a:t>
             </a:r>
           </a:p>
         </p:txBody>
@@ -6988,7 +6988,7 @@
               </a:defRPr>
             </a:pPr>
             <a:r>
-              <a:t>Generated May 21, 2026</a:t>
+              <a:t>Generated May 22, 2026</a:t>
             </a:r>
           </a:p>
         </p:txBody>
@@ -7326,7 +7326,7 @@
               </a:defRPr>
             </a:pPr>
             <a:r>
-              <a:t>Derek J.</a:t>
+              <a:t>Ron D.</a:t>
             </a:r>
           </a:p>
         </p:txBody>
@@ -7362,7 +7362,7 @@
               </a:defRPr>
             </a:pPr>
             <a:r>
-              <a:t>Safeline Insurance Agency, Inc.</a:t>
+              <a:t>Ameritrans Risk Solutions, Inc DBA American Transportation &amp; Ener</a:t>
             </a:r>
           </a:p>
         </p:txBody>
@@ -7398,7 +7398,7 @@
               </a:defRPr>
             </a:pPr>
             <a:r>
-              <a:t>$330K</a:t>
+              <a:t>$371K</a:t>
             </a:r>
           </a:p>
         </p:txBody>
@@ -7434,7 +7434,7 @@
               </a:defRPr>
             </a:pPr>
             <a:r>
-              <a:t>12</a:t>
+              <a:t>33</a:t>
             </a:r>
           </a:p>
         </p:txBody>
@@ -7585,7 +7585,7 @@
               </a:defRPr>
             </a:pPr>
             <a:r>
-              <a:t>Jagdeep Singh Insurance Agency, Inc</a:t>
+              <a:t>Safeline Insurance Agency, Inc.</a:t>
             </a:r>
           </a:p>
         </p:txBody>
@@ -7657,7 +7657,7 @@
               </a:defRPr>
             </a:pPr>
             <a:r>
-              <a:t>17</a:t>
+              <a:t>16</a:t>
             </a:r>
           </a:p>
         </p:txBody>
@@ -7808,7 +7808,7 @@
               </a:defRPr>
             </a:pPr>
             <a:r>
-              <a:t>Safeline Insurance Agency, Inc.</a:t>
+              <a:t>Jtc Insurance Agency, Inc.</a:t>
             </a:r>
           </a:p>
         </p:txBody>
@@ -7844,7 +7844,7 @@
               </a:defRPr>
             </a:pPr>
             <a:r>
-              <a:t>$327K</a:t>
+              <a:t>$318K</a:t>
             </a:r>
           </a:p>
         </p:txBody>
@@ -7880,7 +7880,7 @@
               </a:defRPr>
             </a:pPr>
             <a:r>
-              <a:t>16</a:t>
+              <a:t>21</a:t>
             </a:r>
           </a:p>
         </p:txBody>
@@ -7995,7 +7995,7 @@
               </a:defRPr>
             </a:pPr>
             <a:r>
-              <a:t>Derek J.</a:t>
+              <a:t>Christopher H.</a:t>
             </a:r>
           </a:p>
         </p:txBody>
@@ -8031,7 +8031,7 @@
               </a:defRPr>
             </a:pPr>
             <a:r>
-              <a:t>Jtc Insurance Agency, Inc.</a:t>
+              <a:t>The Dorfman Organization, Ltd.</a:t>
             </a:r>
           </a:p>
         </p:txBody>
@@ -8067,7 +8067,7 @@
               </a:defRPr>
             </a:pPr>
             <a:r>
-              <a:t>$318K</a:t>
+              <a:t>$308K</a:t>
             </a:r>
           </a:p>
         </p:txBody>
@@ -8103,7 +8103,7 @@
               </a:defRPr>
             </a:pPr>
             <a:r>
-              <a:t>21</a:t>
+              <a:t>22</a:t>
             </a:r>
           </a:p>
         </p:txBody>
@@ -8218,7 +8218,7 @@
               </a:defRPr>
             </a:pPr>
             <a:r>
-              <a:t>Christopher H.</a:t>
+              <a:t>Derek J.</a:t>
             </a:r>
           </a:p>
         </p:txBody>
@@ -8254,7 +8254,7 @@
               </a:defRPr>
             </a:pPr>
             <a:r>
-              <a:t>The Dorfman Organization, Ltd.</a:t>
+              <a:t>Sedge Insurance Agency LLC</a:t>
             </a:r>
           </a:p>
         </p:txBody>
@@ -8290,7 +8290,7 @@
               </a:defRPr>
             </a:pPr>
             <a:r>
-              <a:t>$308K</a:t>
+              <a:t>$277K</a:t>
             </a:r>
           </a:p>
         </p:txBody>
@@ -8326,7 +8326,7 @@
               </a:defRPr>
             </a:pPr>
             <a:r>
-              <a:t>22</a:t>
+              <a:t>12</a:t>
             </a:r>
           </a:p>
         </p:txBody>
@@ -8441,7 +8441,7 @@
               </a:defRPr>
             </a:pPr>
             <a:r>
-              <a:t>Derek J.</a:t>
+              <a:t>Christopher H.</a:t>
             </a:r>
           </a:p>
         </p:txBody>
@@ -8477,7 +8477,7 @@
               </a:defRPr>
             </a:pPr>
             <a:r>
-              <a:t>Sedge Insurance Agency LLC</a:t>
+              <a:t>Insurox Group, Inc</a:t>
             </a:r>
           </a:p>
         </p:txBody>
@@ -8513,7 +8513,7 @@
               </a:defRPr>
             </a:pPr>
             <a:r>
-              <a:t>$277K</a:t>
+              <a:t>$275K</a:t>
             </a:r>
           </a:p>
         </p:txBody>
@@ -8549,7 +8549,7 @@
               </a:defRPr>
             </a:pPr>
             <a:r>
-              <a:t>12</a:t>
+              <a:t>9</a:t>
             </a:r>
           </a:p>
         </p:txBody>
@@ -8664,7 +8664,7 @@
               </a:defRPr>
             </a:pPr>
             <a:r>
-              <a:t>Christopher H.</a:t>
+              <a:t>Derrick L.</a:t>
             </a:r>
           </a:p>
         </p:txBody>
@@ -8700,7 +8700,7 @@
               </a:defRPr>
             </a:pPr>
             <a:r>
-              <a:t>Insurox Group, Inc</a:t>
+              <a:t>Lone Star Direct Insurance Agency LLC</a:t>
             </a:r>
           </a:p>
         </p:txBody>
@@ -8736,7 +8736,7 @@
               </a:defRPr>
             </a:pPr>
             <a:r>
-              <a:t>$275K</a:t>
+              <a:t>$254K</a:t>
             </a:r>
           </a:p>
         </p:txBody>
@@ -8772,7 +8772,7 @@
               </a:defRPr>
             </a:pPr>
             <a:r>
-              <a:t>9</a:t>
+              <a:t>21</a:t>
             </a:r>
           </a:p>
         </p:txBody>
@@ -8887,7 +8887,7 @@
               </a:defRPr>
             </a:pPr>
             <a:r>
-              <a:t>Derrick L.</a:t>
+              <a:t>Christopher H.</a:t>
             </a:r>
           </a:p>
         </p:txBody>
@@ -8923,7 +8923,7 @@
               </a:defRPr>
             </a:pPr>
             <a:r>
-              <a:t>Lone Star Direct Insurance Agency LLC</a:t>
+              <a:t>TR Insurance Agency Inc</a:t>
             </a:r>
           </a:p>
         </p:txBody>
@@ -8959,7 +8959,7 @@
               </a:defRPr>
             </a:pPr>
             <a:r>
-              <a:t>$254K</a:t>
+              <a:t>$241K</a:t>
             </a:r>
           </a:p>
         </p:txBody>
@@ -8995,7 +8995,7 @@
               </a:defRPr>
             </a:pPr>
             <a:r>
-              <a:t>21</a:t>
+              <a:t>12</a:t>
             </a:r>
           </a:p>
         </p:txBody>
@@ -9110,7 +9110,7 @@
               </a:defRPr>
             </a:pPr>
             <a:r>
-              <a:t>Christopher H.</a:t>
+              <a:t>Alexis B.</a:t>
             </a:r>
           </a:p>
         </p:txBody>
@@ -9146,7 +9146,7 @@
               </a:defRPr>
             </a:pPr>
             <a:r>
-              <a:t>TR Insurance Agency Inc</a:t>
+              <a:t>Amerigo Insurance Agency</a:t>
             </a:r>
           </a:p>
         </p:txBody>
@@ -9182,7 +9182,7 @@
               </a:defRPr>
             </a:pPr>
             <a:r>
-              <a:t>$241K</a:t>
+              <a:t>$234K</a:t>
             </a:r>
           </a:p>
         </p:txBody>
@@ -9218,7 +9218,7 @@
               </a:defRPr>
             </a:pPr>
             <a:r>
-              <a:t>12</a:t>
+              <a:t>10</a:t>
             </a:r>
           </a:p>
         </p:txBody>
@@ -9333,7 +9333,7 @@
               </a:defRPr>
             </a:pPr>
             <a:r>
-              <a:t>Alexis B.</a:t>
+              <a:t>Christopher H.</a:t>
             </a:r>
           </a:p>
         </p:txBody>
@@ -9369,7 +9369,7 @@
               </a:defRPr>
             </a:pPr>
             <a:r>
-              <a:t>Amerigo Insurance Agency</a:t>
+              <a:t>Commercial Trucking Insurance Agency LLC</a:t>
             </a:r>
           </a:p>
         </p:txBody>
@@ -9405,7 +9405,7 @@
               </a:defRPr>
             </a:pPr>
             <a:r>
-              <a:t>$234K</a:t>
+              <a:t>$232K</a:t>
             </a:r>
           </a:p>
         </p:txBody>
@@ -9441,7 +9441,7 @@
               </a:defRPr>
             </a:pPr>
             <a:r>
-              <a:t>10</a:t>
+              <a:t>13</a:t>
             </a:r>
           </a:p>
         </p:txBody>
@@ -9556,7 +9556,7 @@
               </a:defRPr>
             </a:pPr>
             <a:r>
-              <a:t>Christopher H.</a:t>
+              <a:t>Derek J.</a:t>
             </a:r>
           </a:p>
         </p:txBody>
@@ -9592,7 +9592,7 @@
               </a:defRPr>
             </a:pPr>
             <a:r>
-              <a:t>Commercial Trucking Insurance Agency LLC</a:t>
+              <a:t>Reliance Partners, LLC</a:t>
             </a:r>
           </a:p>
         </p:txBody>
@@ -9628,7 +9628,7 @@
               </a:defRPr>
             </a:pPr>
             <a:r>
-              <a:t>$232K</a:t>
+              <a:t>$231K</a:t>
             </a:r>
           </a:p>
         </p:txBody>
@@ -9815,7 +9815,7 @@
               </a:defRPr>
             </a:pPr>
             <a:r>
-              <a:t>Jagdeep Singh Insurance Agency, Inc</a:t>
+              <a:t>Paramount Exclusive Insurance Services, Inc.</a:t>
             </a:r>
           </a:p>
         </p:txBody>
@@ -9851,7 +9851,7 @@
               </a:defRPr>
             </a:pPr>
             <a:r>
-              <a:t>$217K</a:t>
+              <a:t>$220K</a:t>
             </a:r>
           </a:p>
         </p:txBody>
@@ -10038,7 +10038,7 @@
               </a:defRPr>
             </a:pPr>
             <a:r>
-              <a:t>Surefire Insurance Agency Corp.</a:t>
+              <a:t>Jagdeep Singh Insurance Agency, Inc</a:t>
             </a:r>
           </a:p>
         </p:txBody>
@@ -10074,7 +10074,7 @@
               </a:defRPr>
             </a:pPr>
             <a:r>
-              <a:t>$216K</a:t>
+              <a:t>$217K</a:t>
             </a:r>
           </a:p>
         </p:txBody>
@@ -10110,7 +10110,7 @@
               </a:defRPr>
             </a:pPr>
             <a:r>
-              <a:t>17</a:t>
+              <a:t>11</a:t>
             </a:r>
           </a:p>
         </p:txBody>
@@ -10225,7 +10225,7 @@
               </a:defRPr>
             </a:pPr>
             <a:r>
-              <a:t>Ron D.</a:t>
+              <a:t>Derek J.</a:t>
             </a:r>
           </a:p>
         </p:txBody>
@@ -10261,7 +10261,7 @@
               </a:defRPr>
             </a:pPr>
             <a:r>
-              <a:t>Eagle National Insurance Services, Inc.</a:t>
+              <a:t>Surefire Insurance Agency Corp.</a:t>
             </a:r>
           </a:p>
         </p:txBody>
@@ -10297,7 +10297,7 @@
               </a:defRPr>
             </a:pPr>
             <a:r>
-              <a:t>$202K</a:t>
+              <a:t>$216K</a:t>
             </a:r>
           </a:p>
         </p:txBody>
@@ -10333,7 +10333,7 @@
               </a:defRPr>
             </a:pPr>
             <a:r>
-              <a:t>8</a:t>
+              <a:t>17</a:t>
             </a:r>
           </a:p>
         </p:txBody>
@@ -10448,7 +10448,7 @@
               </a:defRPr>
             </a:pPr>
             <a:r>
-              <a:t>Derek J.</a:t>
+              <a:t>Ron D.</a:t>
             </a:r>
           </a:p>
         </p:txBody>
@@ -10484,7 +10484,7 @@
               </a:defRPr>
             </a:pPr>
             <a:r>
-              <a:t>CASCADE INSURANCE SERVICES INC DBA: CASCADE MUTUAL INSURANCE SERV</a:t>
+              <a:t>Eagle National Insurance Services, Inc.</a:t>
             </a:r>
           </a:p>
         </p:txBody>
@@ -10556,7 +10556,7 @@
               </a:defRPr>
             </a:pPr>
             <a:r>
-              <a:t>11</a:t>
+              <a:t>8</a:t>
             </a:r>
           </a:p>
         </p:txBody>
@@ -10671,7 +10671,7 @@
               </a:defRPr>
             </a:pPr>
             <a:r>
-              <a:t>Derrick L.</a:t>
+              <a:t>Derek J.</a:t>
             </a:r>
           </a:p>
         </p:txBody>
@@ -10707,7 +10707,7 @@
               </a:defRPr>
             </a:pPr>
             <a:r>
-              <a:t>Justin Wilson</a:t>
+              <a:t>CASCADE INSURANCE SERVICES INC DBA: CASCADE MUTUAL INSURANCE SERV</a:t>
             </a:r>
           </a:p>
         </p:txBody>
@@ -10743,7 +10743,7 @@
               </a:defRPr>
             </a:pPr>
             <a:r>
-              <a:t>$194K</a:t>
+              <a:t>$202K</a:t>
             </a:r>
           </a:p>
         </p:txBody>
@@ -10779,7 +10779,7 @@
               </a:defRPr>
             </a:pPr>
             <a:r>
-              <a:t>9</a:t>
+              <a:t>11</a:t>
             </a:r>
           </a:p>
         </p:txBody>
@@ -10894,7 +10894,7 @@
               </a:defRPr>
             </a:pPr>
             <a:r>
-              <a:t>Derek J.</a:t>
+              <a:t>Derrick L.</a:t>
             </a:r>
           </a:p>
         </p:txBody>
@@ -10930,7 +10930,7 @@
               </a:defRPr>
             </a:pPr>
             <a:r>
-              <a:t>Reliance Partners, LLC</a:t>
+              <a:t>Justin Wilson</a:t>
             </a:r>
           </a:p>
         </p:txBody>
@@ -10966,7 +10966,7 @@
               </a:defRPr>
             </a:pPr>
             <a:r>
-              <a:t>$190K</a:t>
+              <a:t>$194K</a:t>
             </a:r>
           </a:p>
         </p:txBody>
@@ -11117,7 +11117,7 @@
               </a:defRPr>
             </a:pPr>
             <a:r>
-              <a:t>Derek J.</a:t>
+              <a:t>Alexis B.</a:t>
             </a:r>
           </a:p>
         </p:txBody>
@@ -11153,7 +11153,7 @@
               </a:defRPr>
             </a:pPr>
             <a:r>
-              <a:t>Swan Insurance Sales, LLC</a:t>
+              <a:t>Stellar Management, Inc</a:t>
             </a:r>
           </a:p>
         </p:txBody>
@@ -11225,7 +11225,7 @@
               </a:defRPr>
             </a:pPr>
             <a:r>
-              <a:t>10</a:t>
+              <a:t>13</a:t>
             </a:r>
           </a:p>
         </p:txBody>
@@ -11340,7 +11340,7 @@
               </a:defRPr>
             </a:pPr>
             <a:r>
-              <a:t>Christopher H.</a:t>
+              <a:t>Westy M.</a:t>
             </a:r>
           </a:p>
         </p:txBody>
@@ -11376,7 +11376,7 @@
               </a:defRPr>
             </a:pPr>
             <a:r>
-              <a:t>Truczone Insurance Agency LLC</a:t>
+              <a:t>Acrisure LLC DBA RRL Insurance Agency</a:t>
             </a:r>
           </a:p>
         </p:txBody>
@@ -11412,7 +11412,7 @@
               </a:defRPr>
             </a:pPr>
             <a:r>
-              <a:t>$179K</a:t>
+              <a:t>$184K</a:t>
             </a:r>
           </a:p>
         </p:txBody>
@@ -11448,7 +11448,7 @@
               </a:defRPr>
             </a:pPr>
             <a:r>
-              <a:t>13</a:t>
+              <a:t>10</a:t>
             </a:r>
           </a:p>
         </p:txBody>
@@ -11563,7 +11563,7 @@
               </a:defRPr>
             </a:pPr>
             <a:r>
-              <a:t>Ron D.</a:t>
+              <a:t>Christopher H.</a:t>
             </a:r>
           </a:p>
         </p:txBody>
@@ -11599,7 +11599,7 @@
               </a:defRPr>
             </a:pPr>
             <a:r>
-              <a:t>USA SPECIALTY INSURANCE/DBA PREVENTTY</a:t>
+              <a:t>Truczone Insurance Agency LLC</a:t>
             </a:r>
           </a:p>
         </p:txBody>
@@ -11671,7 +11671,7 @@
               </a:defRPr>
             </a:pPr>
             <a:r>
-              <a:t>11</a:t>
+              <a:t>13</a:t>
             </a:r>
           </a:p>
         </p:txBody>
@@ -11750,7 +11750,7 @@
               </a:defRPr>
             </a:pPr>
             <a:r>
-              <a:t>Q2 Fleet Total: 215 fleet binds  ·  $20.2M bound premium</a:t>
+              <a:t>Q2 Fleet Total: 221 fleet binds  ·  $20.8M bound premium</a:t>
             </a:r>
           </a:p>
         </p:txBody>
@@ -11891,7 +11891,7 @@
               </a:defRPr>
             </a:pPr>
             <a:r>
-              <a:t>Ranked by bound GWP written  ·  Mint-shaded row = new vs last week’s deck  ·  Apr 1–May 21  ·  Individual producers</a:t>
+              <a:t>Ranked by bound GWP written  ·  Mint-shaded row = new vs last week’s deck  ·  Apr 1–May 22  ·  Individual producers</a:t>
             </a:r>
           </a:p>
         </p:txBody>
@@ -11927,7 +11927,7 @@
               </a:defRPr>
             </a:pPr>
             <a:r>
-              <a:t>Generated May 21, 2026</a:t>
+              <a:t>Generated May 22, 2026</a:t>
             </a:r>
           </a:p>
         </p:txBody>
@@ -12301,7 +12301,7 @@
               </a:defRPr>
             </a:pPr>
             <a:r>
-              <a:t>$3.9M</a:t>
+              <a:t>$4.0M</a:t>
             </a:r>
           </a:p>
         </p:txBody>
@@ -12488,7 +12488,7 @@
               </a:defRPr>
             </a:pPr>
             <a:r>
-              <a:t>$2.9M</a:t>
+              <a:t>$3.1M</a:t>
             </a:r>
           </a:p>
         </p:txBody>
@@ -12862,7 +12862,7 @@
               </a:defRPr>
             </a:pPr>
             <a:r>
-              <a:t>$1.4M</a:t>
+              <a:t>$1.5M</a:t>
             </a:r>
           </a:p>
         </p:txBody>
@@ -13236,7 +13236,7 @@
               </a:defRPr>
             </a:pPr>
             <a:r>
-              <a:t>$1.3M</a:t>
+              <a:t>$1.4M</a:t>
             </a:r>
           </a:p>
         </p:txBody>
@@ -13423,7 +13423,7 @@
               </a:defRPr>
             </a:pPr>
             <a:r>
-              <a:t>$1.1M</a:t>
+              <a:t>$1.2M</a:t>
             </a:r>
           </a:p>
         </p:txBody>
@@ -13610,7 +13610,7 @@
               </a:defRPr>
             </a:pPr>
             <a:r>
-              <a:t>$979K</a:t>
+              <a:t>$977K</a:t>
             </a:r>
           </a:p>
         </p:txBody>
@@ -13797,7 +13797,7 @@
               </a:defRPr>
             </a:pPr>
             <a:r>
-              <a:t>$890K</a:t>
+              <a:t>$932K</a:t>
             </a:r>
           </a:p>
         </p:txBody>
@@ -13984,7 +13984,7 @@
               </a:defRPr>
             </a:pPr>
             <a:r>
-              <a:t>$791K</a:t>
+              <a:t>$836K</a:t>
             </a:r>
           </a:p>
         </p:txBody>
@@ -14545,7 +14545,7 @@
               </a:defRPr>
             </a:pPr>
             <a:r>
-              <a:t>$647K</a:t>
+              <a:t>$688K</a:t>
             </a:r>
           </a:p>
         </p:txBody>
@@ -14732,7 +14732,7 @@
               </a:defRPr>
             </a:pPr>
             <a:r>
-              <a:t>$616K</a:t>
+              <a:t>$650K</a:t>
             </a:r>
           </a:p>
         </p:txBody>
@@ -15106,7 +15106,7 @@
               </a:defRPr>
             </a:pPr>
             <a:r>
-              <a:t>$556K</a:t>
+              <a:t>$572K</a:t>
             </a:r>
           </a:p>
         </p:txBody>
@@ -15221,7 +15221,7 @@
               </a:defRPr>
             </a:pPr>
             <a:r>
-              <a:t>Anastasiya Nabokov</a:t>
+              <a:t>Sapna Kharbanda</a:t>
             </a:r>
           </a:p>
         </p:txBody>
@@ -15257,7 +15257,7 @@
               </a:defRPr>
             </a:pPr>
             <a:r>
-              <a:t>Drive Safe Group LLC</a:t>
+              <a:t>Sedge Insurance Agency LLC</a:t>
             </a:r>
           </a:p>
         </p:txBody>
@@ -15293,7 +15293,7 @@
               </a:defRPr>
             </a:pPr>
             <a:r>
-              <a:t>$524K</a:t>
+              <a:t>$549K</a:t>
             </a:r>
           </a:p>
         </p:txBody>
@@ -15408,7 +15408,7 @@
               </a:defRPr>
             </a:pPr>
             <a:r>
-              <a:t>Diego Giraldo</a:t>
+              <a:t>Anastasiya Nabokov</a:t>
             </a:r>
           </a:p>
         </p:txBody>
@@ -15444,7 +15444,7 @@
               </a:defRPr>
             </a:pPr>
             <a:r>
-              <a:t>Horizons Insurance And Financial S…</a:t>
+              <a:t>Drive Safe Group LLC</a:t>
             </a:r>
           </a:p>
         </p:txBody>
@@ -15480,7 +15480,7 @@
               </a:defRPr>
             </a:pPr>
             <a:r>
-              <a:t>$458K</a:t>
+              <a:t>$524K</a:t>
             </a:r>
           </a:p>
         </p:txBody>
@@ -15494,6 +15494,567 @@
         <p:spPr>
           <a:xfrm>
             <a:off x="228600" y="5687568"/>
+            <a:ext cx="5705856" cy="256032"/>
+          </a:xfrm>
+          <a:prstGeom prst="rect">
+            <a:avLst/>
+          </a:prstGeom>
+          <a:solidFill>
+            <a:srgbClr val="D1FAE5"/>
+          </a:solidFill>
+          <a:ln>
+            <a:noFill/>
+          </a:ln>
+        </p:spPr>
+        <p:style>
+          <a:lnRef idx="1">
+            <a:schemeClr val="accent1"/>
+          </a:lnRef>
+          <a:fillRef idx="3">
+            <a:schemeClr val="accent1"/>
+          </a:fillRef>
+          <a:effectRef idx="2">
+            <a:schemeClr val="accent1"/>
+          </a:effectRef>
+          <a:fontRef idx="minor">
+            <a:schemeClr val="lt1"/>
+          </a:fontRef>
+        </p:style>
+        <p:txBody>
+          <a:bodyPr rtlCol="0" anchor="ctr"/>
+          <a:lstStyle/>
+          <a:p>
+            <a:pPr algn="ctr"/>
+          </a:p>
+        </p:txBody>
+      </p:sp>
+      <p:sp>
+        <p:nvSpPr>
+          <p:cNvPr id="102" name="TextBox 101"/>
+          <p:cNvSpPr txBox="1"/>
+          <p:nvPr/>
+        </p:nvSpPr>
+        <p:spPr>
+          <a:xfrm>
+            <a:off x="228600" y="5705856"/>
+            <a:ext cx="411480" cy="237744"/>
+          </a:xfrm>
+          <a:prstGeom prst="rect">
+            <a:avLst/>
+          </a:prstGeom>
+          <a:noFill/>
+        </p:spPr>
+        <p:txBody>
+          <a:bodyPr wrap="none">
+            <a:spAutoFit/>
+          </a:bodyPr>
+          <a:lstStyle/>
+          <a:p>
+            <a:pPr algn="ctr">
+              <a:defRPr sz="950" b="1">
+                <a:solidFill>
+                  <a:srgbClr val="6B7280"/>
+                </a:solidFill>
+                <a:latin typeface="Calibri"/>
+              </a:defRPr>
+            </a:pPr>
+            <a:r>
+              <a:t>19</a:t>
+            </a:r>
+          </a:p>
+        </p:txBody>
+      </p:sp>
+      <p:sp>
+        <p:nvSpPr>
+          <p:cNvPr id="103" name="TextBox 102"/>
+          <p:cNvSpPr txBox="1"/>
+          <p:nvPr/>
+        </p:nvSpPr>
+        <p:spPr>
+          <a:xfrm>
+            <a:off x="640080" y="5705856"/>
+            <a:ext cx="1920240" cy="237744"/>
+          </a:xfrm>
+          <a:prstGeom prst="rect">
+            <a:avLst/>
+          </a:prstGeom>
+          <a:noFill/>
+        </p:spPr>
+        <p:txBody>
+          <a:bodyPr wrap="none">
+            <a:spAutoFit/>
+          </a:bodyPr>
+          <a:lstStyle/>
+          <a:p>
+            <a:pPr algn="l">
+              <a:defRPr sz="950" b="1">
+                <a:solidFill>
+                  <a:srgbClr val="111827"/>
+                </a:solidFill>
+                <a:latin typeface="Calibri"/>
+              </a:defRPr>
+            </a:pPr>
+            <a:r>
+              <a:t>Daven Loomba</a:t>
+            </a:r>
+          </a:p>
+        </p:txBody>
+      </p:sp>
+      <p:sp>
+        <p:nvSpPr>
+          <p:cNvPr id="104" name="TextBox 103"/>
+          <p:cNvSpPr txBox="1"/>
+          <p:nvPr/>
+        </p:nvSpPr>
+        <p:spPr>
+          <a:xfrm>
+            <a:off x="2560320" y="5705856"/>
+            <a:ext cx="2459736" cy="237744"/>
+          </a:xfrm>
+          <a:prstGeom prst="rect">
+            <a:avLst/>
+          </a:prstGeom>
+          <a:noFill/>
+        </p:spPr>
+        <p:txBody>
+          <a:bodyPr wrap="none">
+            <a:spAutoFit/>
+          </a:bodyPr>
+          <a:lstStyle/>
+          <a:p>
+            <a:pPr algn="l">
+              <a:defRPr sz="950" b="0">
+                <a:solidFill>
+                  <a:srgbClr val="6B7280"/>
+                </a:solidFill>
+                <a:latin typeface="Calibri"/>
+              </a:defRPr>
+            </a:pPr>
+            <a:r>
+              <a:t>GoldenEra Insurance Agency</a:t>
+            </a:r>
+          </a:p>
+        </p:txBody>
+      </p:sp>
+      <p:sp>
+        <p:nvSpPr>
+          <p:cNvPr id="105" name="TextBox 104"/>
+          <p:cNvSpPr txBox="1"/>
+          <p:nvPr/>
+        </p:nvSpPr>
+        <p:spPr>
+          <a:xfrm>
+            <a:off x="5020056" y="5705856"/>
+            <a:ext cx="914400" cy="237744"/>
+          </a:xfrm>
+          <a:prstGeom prst="rect">
+            <a:avLst/>
+          </a:prstGeom>
+          <a:noFill/>
+        </p:spPr>
+        <p:txBody>
+          <a:bodyPr wrap="none">
+            <a:spAutoFit/>
+          </a:bodyPr>
+          <a:lstStyle/>
+          <a:p>
+            <a:pPr algn="ctr">
+              <a:defRPr sz="950" b="1">
+                <a:solidFill>
+                  <a:srgbClr val="111827"/>
+                </a:solidFill>
+                <a:latin typeface="Calibri"/>
+              </a:defRPr>
+            </a:pPr>
+            <a:r>
+              <a:t>$503K</a:t>
+            </a:r>
+          </a:p>
+        </p:txBody>
+      </p:sp>
+      <p:sp>
+        <p:nvSpPr>
+          <p:cNvPr id="106" name="Rectangle 105"/>
+          <p:cNvSpPr/>
+          <p:nvPr/>
+        </p:nvSpPr>
+        <p:spPr>
+          <a:xfrm>
+            <a:off x="228600" y="5943600"/>
+            <a:ext cx="5705856" cy="256032"/>
+          </a:xfrm>
+          <a:prstGeom prst="rect">
+            <a:avLst/>
+          </a:prstGeom>
+          <a:solidFill>
+            <a:srgbClr val="F9FAFB"/>
+          </a:solidFill>
+          <a:ln>
+            <a:noFill/>
+          </a:ln>
+        </p:spPr>
+        <p:style>
+          <a:lnRef idx="1">
+            <a:schemeClr val="accent1"/>
+          </a:lnRef>
+          <a:fillRef idx="3">
+            <a:schemeClr val="accent1"/>
+          </a:fillRef>
+          <a:effectRef idx="2">
+            <a:schemeClr val="accent1"/>
+          </a:effectRef>
+          <a:fontRef idx="minor">
+            <a:schemeClr val="lt1"/>
+          </a:fontRef>
+        </p:style>
+        <p:txBody>
+          <a:bodyPr rtlCol="0" anchor="ctr"/>
+          <a:lstStyle/>
+          <a:p>
+            <a:pPr algn="ctr"/>
+          </a:p>
+        </p:txBody>
+      </p:sp>
+      <p:sp>
+        <p:nvSpPr>
+          <p:cNvPr id="107" name="TextBox 106"/>
+          <p:cNvSpPr txBox="1"/>
+          <p:nvPr/>
+        </p:nvSpPr>
+        <p:spPr>
+          <a:xfrm>
+            <a:off x="228600" y="5961888"/>
+            <a:ext cx="411480" cy="237744"/>
+          </a:xfrm>
+          <a:prstGeom prst="rect">
+            <a:avLst/>
+          </a:prstGeom>
+          <a:noFill/>
+        </p:spPr>
+        <p:txBody>
+          <a:bodyPr wrap="none">
+            <a:spAutoFit/>
+          </a:bodyPr>
+          <a:lstStyle/>
+          <a:p>
+            <a:pPr algn="ctr">
+              <a:defRPr sz="950" b="1">
+                <a:solidFill>
+                  <a:srgbClr val="6B7280"/>
+                </a:solidFill>
+                <a:latin typeface="Calibri"/>
+              </a:defRPr>
+            </a:pPr>
+            <a:r>
+              <a:t>20</a:t>
+            </a:r>
+          </a:p>
+        </p:txBody>
+      </p:sp>
+      <p:sp>
+        <p:nvSpPr>
+          <p:cNvPr id="108" name="TextBox 107"/>
+          <p:cNvSpPr txBox="1"/>
+          <p:nvPr/>
+        </p:nvSpPr>
+        <p:spPr>
+          <a:xfrm>
+            <a:off x="640080" y="5961888"/>
+            <a:ext cx="1920240" cy="237744"/>
+          </a:xfrm>
+          <a:prstGeom prst="rect">
+            <a:avLst/>
+          </a:prstGeom>
+          <a:noFill/>
+        </p:spPr>
+        <p:txBody>
+          <a:bodyPr wrap="none">
+            <a:spAutoFit/>
+          </a:bodyPr>
+          <a:lstStyle/>
+          <a:p>
+            <a:pPr algn="l">
+              <a:defRPr sz="950" b="1">
+                <a:solidFill>
+                  <a:srgbClr val="111827"/>
+                </a:solidFill>
+                <a:latin typeface="Calibri"/>
+              </a:defRPr>
+            </a:pPr>
+            <a:r>
+              <a:t>Justin Robert</a:t>
+            </a:r>
+          </a:p>
+        </p:txBody>
+      </p:sp>
+      <p:sp>
+        <p:nvSpPr>
+          <p:cNvPr id="109" name="TextBox 108"/>
+          <p:cNvSpPr txBox="1"/>
+          <p:nvPr/>
+        </p:nvSpPr>
+        <p:spPr>
+          <a:xfrm>
+            <a:off x="2560320" y="5961888"/>
+            <a:ext cx="2459736" cy="237744"/>
+          </a:xfrm>
+          <a:prstGeom prst="rect">
+            <a:avLst/>
+          </a:prstGeom>
+          <a:noFill/>
+        </p:spPr>
+        <p:txBody>
+          <a:bodyPr wrap="none">
+            <a:spAutoFit/>
+          </a:bodyPr>
+          <a:lstStyle/>
+          <a:p>
+            <a:pPr algn="l">
+              <a:defRPr sz="950" b="0">
+                <a:solidFill>
+                  <a:srgbClr val="6B7280"/>
+                </a:solidFill>
+                <a:latin typeface="Calibri"/>
+              </a:defRPr>
+            </a:pPr>
+            <a:r>
+              <a:t>Justin Robert Insurance Agency LLC</a:t>
+            </a:r>
+          </a:p>
+        </p:txBody>
+      </p:sp>
+      <p:sp>
+        <p:nvSpPr>
+          <p:cNvPr id="110" name="TextBox 109"/>
+          <p:cNvSpPr txBox="1"/>
+          <p:nvPr/>
+        </p:nvSpPr>
+        <p:spPr>
+          <a:xfrm>
+            <a:off x="5020056" y="5961888"/>
+            <a:ext cx="914400" cy="237744"/>
+          </a:xfrm>
+          <a:prstGeom prst="rect">
+            <a:avLst/>
+          </a:prstGeom>
+          <a:noFill/>
+        </p:spPr>
+        <p:txBody>
+          <a:bodyPr wrap="none">
+            <a:spAutoFit/>
+          </a:bodyPr>
+          <a:lstStyle/>
+          <a:p>
+            <a:pPr algn="ctr">
+              <a:defRPr sz="950" b="1">
+                <a:solidFill>
+                  <a:srgbClr val="111827"/>
+                </a:solidFill>
+                <a:latin typeface="Calibri"/>
+              </a:defRPr>
+            </a:pPr>
+            <a:r>
+              <a:t>$479K</a:t>
+            </a:r>
+          </a:p>
+        </p:txBody>
+      </p:sp>
+      <p:sp>
+        <p:nvSpPr>
+          <p:cNvPr id="111" name="TextBox 110"/>
+          <p:cNvSpPr txBox="1"/>
+          <p:nvPr/>
+        </p:nvSpPr>
+        <p:spPr>
+          <a:xfrm>
+            <a:off x="6254496" y="841248"/>
+            <a:ext cx="411480" cy="201168"/>
+          </a:xfrm>
+          <a:prstGeom prst="rect">
+            <a:avLst/>
+          </a:prstGeom>
+          <a:noFill/>
+        </p:spPr>
+        <p:txBody>
+          <a:bodyPr wrap="none">
+            <a:spAutoFit/>
+          </a:bodyPr>
+          <a:lstStyle/>
+          <a:p>
+            <a:pPr algn="ctr">
+              <a:defRPr sz="850" b="1">
+                <a:solidFill>
+                  <a:srgbClr val="6B7280"/>
+                </a:solidFill>
+                <a:latin typeface="Calibri"/>
+              </a:defRPr>
+            </a:pPr>
+            <a:r>
+              <a:t>Rank</a:t>
+            </a:r>
+          </a:p>
+        </p:txBody>
+      </p:sp>
+      <p:sp>
+        <p:nvSpPr>
+          <p:cNvPr id="112" name="TextBox 111"/>
+          <p:cNvSpPr txBox="1"/>
+          <p:nvPr/>
+        </p:nvSpPr>
+        <p:spPr>
+          <a:xfrm>
+            <a:off x="6665976" y="841248"/>
+            <a:ext cx="1920240" cy="201168"/>
+          </a:xfrm>
+          <a:prstGeom prst="rect">
+            <a:avLst/>
+          </a:prstGeom>
+          <a:noFill/>
+        </p:spPr>
+        <p:txBody>
+          <a:bodyPr wrap="none">
+            <a:spAutoFit/>
+          </a:bodyPr>
+          <a:lstStyle/>
+          <a:p>
+            <a:pPr algn="l">
+              <a:defRPr sz="850" b="1">
+                <a:solidFill>
+                  <a:srgbClr val="6B7280"/>
+                </a:solidFill>
+                <a:latin typeface="Calibri"/>
+              </a:defRPr>
+            </a:pPr>
+            <a:r>
+              <a:t>Agent</a:t>
+            </a:r>
+          </a:p>
+        </p:txBody>
+      </p:sp>
+      <p:sp>
+        <p:nvSpPr>
+          <p:cNvPr id="113" name="TextBox 112"/>
+          <p:cNvSpPr txBox="1"/>
+          <p:nvPr/>
+        </p:nvSpPr>
+        <p:spPr>
+          <a:xfrm>
+            <a:off x="8586216" y="841248"/>
+            <a:ext cx="2459736" cy="201168"/>
+          </a:xfrm>
+          <a:prstGeom prst="rect">
+            <a:avLst/>
+          </a:prstGeom>
+          <a:noFill/>
+        </p:spPr>
+        <p:txBody>
+          <a:bodyPr wrap="none">
+            <a:spAutoFit/>
+          </a:bodyPr>
+          <a:lstStyle/>
+          <a:p>
+            <a:pPr algn="l">
+              <a:defRPr sz="850" b="1">
+                <a:solidFill>
+                  <a:srgbClr val="6B7280"/>
+                </a:solidFill>
+                <a:latin typeface="Calibri"/>
+              </a:defRPr>
+            </a:pPr>
+            <a:r>
+              <a:t>Agency</a:t>
+            </a:r>
+          </a:p>
+        </p:txBody>
+      </p:sp>
+      <p:sp>
+        <p:nvSpPr>
+          <p:cNvPr id="114" name="TextBox 113"/>
+          <p:cNvSpPr txBox="1"/>
+          <p:nvPr/>
+        </p:nvSpPr>
+        <p:spPr>
+          <a:xfrm>
+            <a:off x="11045952" y="841248"/>
+            <a:ext cx="914400" cy="201168"/>
+          </a:xfrm>
+          <a:prstGeom prst="rect">
+            <a:avLst/>
+          </a:prstGeom>
+          <a:noFill/>
+        </p:spPr>
+        <p:txBody>
+          <a:bodyPr wrap="none">
+            <a:spAutoFit/>
+          </a:bodyPr>
+          <a:lstStyle/>
+          <a:p>
+            <a:pPr algn="ctr">
+              <a:defRPr sz="850" b="1">
+                <a:solidFill>
+                  <a:srgbClr val="6B7280"/>
+                </a:solidFill>
+                <a:latin typeface="Calibri"/>
+              </a:defRPr>
+            </a:pPr>
+            <a:r>
+              <a:t>Q2 GWP</a:t>
+            </a:r>
+          </a:p>
+        </p:txBody>
+      </p:sp>
+      <p:sp>
+        <p:nvSpPr>
+          <p:cNvPr id="115" name="Rectangle 114"/>
+          <p:cNvSpPr/>
+          <p:nvPr/>
+        </p:nvSpPr>
+        <p:spPr>
+          <a:xfrm>
+            <a:off x="6254496" y="1042416"/>
+            <a:ext cx="5705856" cy="9144"/>
+          </a:xfrm>
+          <a:prstGeom prst="rect">
+            <a:avLst/>
+          </a:prstGeom>
+          <a:solidFill>
+            <a:srgbClr val="E5E7EB"/>
+          </a:solidFill>
+          <a:ln>
+            <a:noFill/>
+          </a:ln>
+        </p:spPr>
+        <p:style>
+          <a:lnRef idx="1">
+            <a:schemeClr val="accent1"/>
+          </a:lnRef>
+          <a:fillRef idx="3">
+            <a:schemeClr val="accent1"/>
+          </a:fillRef>
+          <a:effectRef idx="2">
+            <a:schemeClr val="accent1"/>
+          </a:effectRef>
+          <a:fontRef idx="minor">
+            <a:schemeClr val="lt1"/>
+          </a:fontRef>
+        </p:style>
+        <p:txBody>
+          <a:bodyPr rtlCol="0" anchor="ctr"/>
+          <a:lstStyle/>
+          <a:p>
+            <a:pPr algn="ctr"/>
+          </a:p>
+        </p:txBody>
+      </p:sp>
+      <p:sp>
+        <p:nvSpPr>
+          <p:cNvPr id="116" name="Rectangle 115"/>
+          <p:cNvSpPr/>
+          <p:nvPr/>
+        </p:nvSpPr>
+        <p:spPr>
+          <a:xfrm>
+            <a:off x="6254496" y="1078992"/>
             <a:ext cx="5705856" cy="256032"/>
           </a:xfrm>
           <a:prstGeom prst="rect">
@@ -15530,13 +16091,13 @@
       </p:sp>
       <p:sp>
         <p:nvSpPr>
-          <p:cNvPr id="102" name="TextBox 101"/>
-          <p:cNvSpPr txBox="1"/>
-          <p:nvPr/>
-        </p:nvSpPr>
-        <p:spPr>
-          <a:xfrm>
-            <a:off x="228600" y="5705856"/>
+          <p:cNvPr id="117" name="TextBox 116"/>
+          <p:cNvSpPr txBox="1"/>
+          <p:nvPr/>
+        </p:nvSpPr>
+        <p:spPr>
+          <a:xfrm>
+            <a:off x="6254496" y="1097280"/>
             <a:ext cx="411480" cy="237744"/>
           </a:xfrm>
           <a:prstGeom prst="rect">
@@ -15559,20 +16120,20 @@
               </a:defRPr>
             </a:pPr>
             <a:r>
-              <a:t>19</a:t>
-            </a:r>
-          </a:p>
-        </p:txBody>
-      </p:sp>
-      <p:sp>
-        <p:nvSpPr>
-          <p:cNvPr id="103" name="TextBox 102"/>
-          <p:cNvSpPr txBox="1"/>
-          <p:nvPr/>
-        </p:nvSpPr>
-        <p:spPr>
-          <a:xfrm>
-            <a:off x="640080" y="5705856"/>
+              <a:t>21</a:t>
+            </a:r>
+          </a:p>
+        </p:txBody>
+      </p:sp>
+      <p:sp>
+        <p:nvSpPr>
+          <p:cNvPr id="118" name="TextBox 117"/>
+          <p:cNvSpPr txBox="1"/>
+          <p:nvPr/>
+        </p:nvSpPr>
+        <p:spPr>
+          <a:xfrm>
+            <a:off x="6665976" y="1097280"/>
             <a:ext cx="1920240" cy="237744"/>
           </a:xfrm>
           <a:prstGeom prst="rect">
@@ -15595,20 +16156,20 @@
               </a:defRPr>
             </a:pPr>
             <a:r>
-              <a:t>Scott Procops</a:t>
-            </a:r>
-          </a:p>
-        </p:txBody>
-      </p:sp>
-      <p:sp>
-        <p:nvSpPr>
-          <p:cNvPr id="104" name="TextBox 103"/>
-          <p:cNvSpPr txBox="1"/>
-          <p:nvPr/>
-        </p:nvSpPr>
-        <p:spPr>
-          <a:xfrm>
-            <a:off x="2560320" y="5705856"/>
+              <a:t>Diego Giraldo</a:t>
+            </a:r>
+          </a:p>
+        </p:txBody>
+      </p:sp>
+      <p:sp>
+        <p:nvSpPr>
+          <p:cNvPr id="119" name="TextBox 118"/>
+          <p:cNvSpPr txBox="1"/>
+          <p:nvPr/>
+        </p:nvSpPr>
+        <p:spPr>
+          <a:xfrm>
+            <a:off x="8586216" y="1097280"/>
             <a:ext cx="2459736" cy="237744"/>
           </a:xfrm>
           <a:prstGeom prst="rect">
@@ -15631,20 +16192,20 @@
               </a:defRPr>
             </a:pPr>
             <a:r>
-              <a:t>Specialty Coverage Insurance Agenc…</a:t>
-            </a:r>
-          </a:p>
-        </p:txBody>
-      </p:sp>
-      <p:sp>
-        <p:nvSpPr>
-          <p:cNvPr id="105" name="TextBox 104"/>
-          <p:cNvSpPr txBox="1"/>
-          <p:nvPr/>
-        </p:nvSpPr>
-        <p:spPr>
-          <a:xfrm>
-            <a:off x="5020056" y="5705856"/>
+              <a:t>Horizons Insurance And Financial S…</a:t>
+            </a:r>
+          </a:p>
+        </p:txBody>
+      </p:sp>
+      <p:sp>
+        <p:nvSpPr>
+          <p:cNvPr id="120" name="TextBox 119"/>
+          <p:cNvSpPr txBox="1"/>
+          <p:nvPr/>
+        </p:nvSpPr>
+        <p:spPr>
+          <a:xfrm>
+            <a:off x="11045952" y="1097280"/>
             <a:ext cx="914400" cy="237744"/>
           </a:xfrm>
           <a:prstGeom prst="rect">
@@ -15667,20 +16228,20 @@
               </a:defRPr>
             </a:pPr>
             <a:r>
-              <a:t>$454K</a:t>
-            </a:r>
-          </a:p>
-        </p:txBody>
-      </p:sp>
-      <p:sp>
-        <p:nvSpPr>
-          <p:cNvPr id="106" name="Rectangle 105"/>
+              <a:t>$472K</a:t>
+            </a:r>
+          </a:p>
+        </p:txBody>
+      </p:sp>
+      <p:sp>
+        <p:nvSpPr>
+          <p:cNvPr id="121" name="Rectangle 120"/>
           <p:cNvSpPr/>
           <p:nvPr/>
         </p:nvSpPr>
         <p:spPr>
           <a:xfrm>
-            <a:off x="228600" y="5943600"/>
+            <a:off x="6254496" y="1335024"/>
             <a:ext cx="5705856" cy="256032"/>
           </a:xfrm>
           <a:prstGeom prst="rect">
@@ -15717,13 +16278,13 @@
       </p:sp>
       <p:sp>
         <p:nvSpPr>
-          <p:cNvPr id="107" name="TextBox 106"/>
-          <p:cNvSpPr txBox="1"/>
-          <p:nvPr/>
-        </p:nvSpPr>
-        <p:spPr>
-          <a:xfrm>
-            <a:off x="228600" y="5961888"/>
+          <p:cNvPr id="122" name="TextBox 121"/>
+          <p:cNvSpPr txBox="1"/>
+          <p:nvPr/>
+        </p:nvSpPr>
+        <p:spPr>
+          <a:xfrm>
+            <a:off x="6254496" y="1353312"/>
             <a:ext cx="411480" cy="237744"/>
           </a:xfrm>
           <a:prstGeom prst="rect">
@@ -15746,20 +16307,20 @@
               </a:defRPr>
             </a:pPr>
             <a:r>
-              <a:t>20</a:t>
-            </a:r>
-          </a:p>
-        </p:txBody>
-      </p:sp>
-      <p:sp>
-        <p:nvSpPr>
-          <p:cNvPr id="108" name="TextBox 107"/>
-          <p:cNvSpPr txBox="1"/>
-          <p:nvPr/>
-        </p:nvSpPr>
-        <p:spPr>
-          <a:xfrm>
-            <a:off x="640080" y="5961888"/>
+              <a:t>22</a:t>
+            </a:r>
+          </a:p>
+        </p:txBody>
+      </p:sp>
+      <p:sp>
+        <p:nvSpPr>
+          <p:cNvPr id="123" name="TextBox 122"/>
+          <p:cNvSpPr txBox="1"/>
+          <p:nvPr/>
+        </p:nvSpPr>
+        <p:spPr>
+          <a:xfrm>
+            <a:off x="6665976" y="1353312"/>
             <a:ext cx="1920240" cy="237744"/>
           </a:xfrm>
           <a:prstGeom prst="rect">
@@ -15782,20 +16343,20 @@
               </a:defRPr>
             </a:pPr>
             <a:r>
-              <a:t>Justin Robert</a:t>
-            </a:r>
-          </a:p>
-        </p:txBody>
-      </p:sp>
-      <p:sp>
-        <p:nvSpPr>
-          <p:cNvPr id="109" name="TextBox 108"/>
-          <p:cNvSpPr txBox="1"/>
-          <p:nvPr/>
-        </p:nvSpPr>
-        <p:spPr>
-          <a:xfrm>
-            <a:off x="2560320" y="5961888"/>
+              <a:t>Scott Procops</a:t>
+            </a:r>
+          </a:p>
+        </p:txBody>
+      </p:sp>
+      <p:sp>
+        <p:nvSpPr>
+          <p:cNvPr id="124" name="TextBox 123"/>
+          <p:cNvSpPr txBox="1"/>
+          <p:nvPr/>
+        </p:nvSpPr>
+        <p:spPr>
+          <a:xfrm>
+            <a:off x="8586216" y="1353312"/>
             <a:ext cx="2459736" cy="237744"/>
           </a:xfrm>
           <a:prstGeom prst="rect">
@@ -15818,20 +16379,20 @@
               </a:defRPr>
             </a:pPr>
             <a:r>
-              <a:t>Justin Robert Insurance Agency LLC</a:t>
-            </a:r>
-          </a:p>
-        </p:txBody>
-      </p:sp>
-      <p:sp>
-        <p:nvSpPr>
-          <p:cNvPr id="110" name="TextBox 109"/>
-          <p:cNvSpPr txBox="1"/>
-          <p:nvPr/>
-        </p:nvSpPr>
-        <p:spPr>
-          <a:xfrm>
-            <a:off x="5020056" y="5961888"/>
+              <a:t>Specialty Coverage Insurance Agenc…</a:t>
+            </a:r>
+          </a:p>
+        </p:txBody>
+      </p:sp>
+      <p:sp>
+        <p:nvSpPr>
+          <p:cNvPr id="125" name="TextBox 124"/>
+          <p:cNvSpPr txBox="1"/>
+          <p:nvPr/>
+        </p:nvSpPr>
+        <p:spPr>
+          <a:xfrm>
+            <a:off x="11045952" y="1353312"/>
             <a:ext cx="914400" cy="237744"/>
           </a:xfrm>
           <a:prstGeom prst="rect">
@@ -15854,207 +16415,20 @@
               </a:defRPr>
             </a:pPr>
             <a:r>
-              <a:t>$445K</a:t>
-            </a:r>
-          </a:p>
-        </p:txBody>
-      </p:sp>
-      <p:sp>
-        <p:nvSpPr>
-          <p:cNvPr id="111" name="TextBox 110"/>
-          <p:cNvSpPr txBox="1"/>
-          <p:nvPr/>
-        </p:nvSpPr>
-        <p:spPr>
-          <a:xfrm>
-            <a:off x="6254496" y="841248"/>
-            <a:ext cx="411480" cy="201168"/>
-          </a:xfrm>
-          <a:prstGeom prst="rect">
-            <a:avLst/>
-          </a:prstGeom>
-          <a:noFill/>
-        </p:spPr>
-        <p:txBody>
-          <a:bodyPr wrap="none">
-            <a:spAutoFit/>
-          </a:bodyPr>
-          <a:lstStyle/>
-          <a:p>
-            <a:pPr algn="ctr">
-              <a:defRPr sz="850" b="1">
-                <a:solidFill>
-                  <a:srgbClr val="6B7280"/>
-                </a:solidFill>
-                <a:latin typeface="Calibri"/>
-              </a:defRPr>
-            </a:pPr>
-            <a:r>
-              <a:t>Rank</a:t>
-            </a:r>
-          </a:p>
-        </p:txBody>
-      </p:sp>
-      <p:sp>
-        <p:nvSpPr>
-          <p:cNvPr id="112" name="TextBox 111"/>
-          <p:cNvSpPr txBox="1"/>
-          <p:nvPr/>
-        </p:nvSpPr>
-        <p:spPr>
-          <a:xfrm>
-            <a:off x="6665976" y="841248"/>
-            <a:ext cx="1920240" cy="201168"/>
-          </a:xfrm>
-          <a:prstGeom prst="rect">
-            <a:avLst/>
-          </a:prstGeom>
-          <a:noFill/>
-        </p:spPr>
-        <p:txBody>
-          <a:bodyPr wrap="none">
-            <a:spAutoFit/>
-          </a:bodyPr>
-          <a:lstStyle/>
-          <a:p>
-            <a:pPr algn="l">
-              <a:defRPr sz="850" b="1">
-                <a:solidFill>
-                  <a:srgbClr val="6B7280"/>
-                </a:solidFill>
-                <a:latin typeface="Calibri"/>
-              </a:defRPr>
-            </a:pPr>
-            <a:r>
-              <a:t>Agent</a:t>
-            </a:r>
-          </a:p>
-        </p:txBody>
-      </p:sp>
-      <p:sp>
-        <p:nvSpPr>
-          <p:cNvPr id="113" name="TextBox 112"/>
-          <p:cNvSpPr txBox="1"/>
-          <p:nvPr/>
-        </p:nvSpPr>
-        <p:spPr>
-          <a:xfrm>
-            <a:off x="8586216" y="841248"/>
-            <a:ext cx="2459736" cy="201168"/>
-          </a:xfrm>
-          <a:prstGeom prst="rect">
-            <a:avLst/>
-          </a:prstGeom>
-          <a:noFill/>
-        </p:spPr>
-        <p:txBody>
-          <a:bodyPr wrap="none">
-            <a:spAutoFit/>
-          </a:bodyPr>
-          <a:lstStyle/>
-          <a:p>
-            <a:pPr algn="l">
-              <a:defRPr sz="850" b="1">
-                <a:solidFill>
-                  <a:srgbClr val="6B7280"/>
-                </a:solidFill>
-                <a:latin typeface="Calibri"/>
-              </a:defRPr>
-            </a:pPr>
-            <a:r>
-              <a:t>Agency</a:t>
-            </a:r>
-          </a:p>
-        </p:txBody>
-      </p:sp>
-      <p:sp>
-        <p:nvSpPr>
-          <p:cNvPr id="114" name="TextBox 113"/>
-          <p:cNvSpPr txBox="1"/>
-          <p:nvPr/>
-        </p:nvSpPr>
-        <p:spPr>
-          <a:xfrm>
-            <a:off x="11045952" y="841248"/>
-            <a:ext cx="914400" cy="201168"/>
-          </a:xfrm>
-          <a:prstGeom prst="rect">
-            <a:avLst/>
-          </a:prstGeom>
-          <a:noFill/>
-        </p:spPr>
-        <p:txBody>
-          <a:bodyPr wrap="none">
-            <a:spAutoFit/>
-          </a:bodyPr>
-          <a:lstStyle/>
-          <a:p>
-            <a:pPr algn="ctr">
-              <a:defRPr sz="850" b="1">
-                <a:solidFill>
-                  <a:srgbClr val="6B7280"/>
-                </a:solidFill>
-                <a:latin typeface="Calibri"/>
-              </a:defRPr>
-            </a:pPr>
-            <a:r>
-              <a:t>Q2 GWP</a:t>
-            </a:r>
-          </a:p>
-        </p:txBody>
-      </p:sp>
-      <p:sp>
-        <p:nvSpPr>
-          <p:cNvPr id="115" name="Rectangle 114"/>
+              <a:t>$454K</a:t>
+            </a:r>
+          </a:p>
+        </p:txBody>
+      </p:sp>
+      <p:sp>
+        <p:nvSpPr>
+          <p:cNvPr id="126" name="Rectangle 125"/>
           <p:cNvSpPr/>
           <p:nvPr/>
         </p:nvSpPr>
         <p:spPr>
           <a:xfrm>
-            <a:off x="6254496" y="1042416"/>
-            <a:ext cx="5705856" cy="9144"/>
-          </a:xfrm>
-          <a:prstGeom prst="rect">
-            <a:avLst/>
-          </a:prstGeom>
-          <a:solidFill>
-            <a:srgbClr val="E5E7EB"/>
-          </a:solidFill>
-          <a:ln>
-            <a:noFill/>
-          </a:ln>
-        </p:spPr>
-        <p:style>
-          <a:lnRef idx="1">
-            <a:schemeClr val="accent1"/>
-          </a:lnRef>
-          <a:fillRef idx="3">
-            <a:schemeClr val="accent1"/>
-          </a:fillRef>
-          <a:effectRef idx="2">
-            <a:schemeClr val="accent1"/>
-          </a:effectRef>
-          <a:fontRef idx="minor">
-            <a:schemeClr val="lt1"/>
-          </a:fontRef>
-        </p:style>
-        <p:txBody>
-          <a:bodyPr rtlCol="0" anchor="ctr"/>
-          <a:lstStyle/>
-          <a:p>
-            <a:pPr algn="ctr"/>
-          </a:p>
-        </p:txBody>
-      </p:sp>
-      <p:sp>
-        <p:nvSpPr>
-          <p:cNvPr id="116" name="Rectangle 115"/>
-          <p:cNvSpPr/>
-          <p:nvPr/>
-        </p:nvSpPr>
-        <p:spPr>
-          <a:xfrm>
-            <a:off x="6254496" y="1078992"/>
+            <a:off x="6254496" y="1591056"/>
             <a:ext cx="5705856" cy="256032"/>
           </a:xfrm>
           <a:prstGeom prst="rect">
@@ -16091,13 +16465,13 @@
       </p:sp>
       <p:sp>
         <p:nvSpPr>
-          <p:cNvPr id="117" name="TextBox 116"/>
-          <p:cNvSpPr txBox="1"/>
-          <p:nvPr/>
-        </p:nvSpPr>
-        <p:spPr>
-          <a:xfrm>
-            <a:off x="6254496" y="1097280"/>
+          <p:cNvPr id="127" name="TextBox 126"/>
+          <p:cNvSpPr txBox="1"/>
+          <p:nvPr/>
+        </p:nvSpPr>
+        <p:spPr>
+          <a:xfrm>
+            <a:off x="6254496" y="1609344"/>
             <a:ext cx="411480" cy="237744"/>
           </a:xfrm>
           <a:prstGeom prst="rect">
@@ -16120,20 +16494,20 @@
               </a:defRPr>
             </a:pPr>
             <a:r>
-              <a:t>21</a:t>
-            </a:r>
-          </a:p>
-        </p:txBody>
-      </p:sp>
-      <p:sp>
-        <p:nvSpPr>
-          <p:cNvPr id="118" name="TextBox 117"/>
-          <p:cNvSpPr txBox="1"/>
-          <p:nvPr/>
-        </p:nvSpPr>
-        <p:spPr>
-          <a:xfrm>
-            <a:off x="6665976" y="1097280"/>
+              <a:t>23</a:t>
+            </a:r>
+          </a:p>
+        </p:txBody>
+      </p:sp>
+      <p:sp>
+        <p:nvSpPr>
+          <p:cNvPr id="128" name="TextBox 127"/>
+          <p:cNvSpPr txBox="1"/>
+          <p:nvPr/>
+        </p:nvSpPr>
+        <p:spPr>
+          <a:xfrm>
+            <a:off x="6665976" y="1609344"/>
             <a:ext cx="1920240" cy="237744"/>
           </a:xfrm>
           <a:prstGeom prst="rect">
@@ -16163,13 +16537,13 @@
       </p:sp>
       <p:sp>
         <p:nvSpPr>
-          <p:cNvPr id="119" name="TextBox 118"/>
-          <p:cNvSpPr txBox="1"/>
-          <p:nvPr/>
-        </p:nvSpPr>
-        <p:spPr>
-          <a:xfrm>
-            <a:off x="8586216" y="1097280"/>
+          <p:cNvPr id="129" name="TextBox 128"/>
+          <p:cNvSpPr txBox="1"/>
+          <p:nvPr/>
+        </p:nvSpPr>
+        <p:spPr>
+          <a:xfrm>
+            <a:off x="8586216" y="1609344"/>
             <a:ext cx="2459736" cy="237744"/>
           </a:xfrm>
           <a:prstGeom prst="rect">
@@ -16199,13 +16573,13 @@
       </p:sp>
       <p:sp>
         <p:nvSpPr>
-          <p:cNvPr id="120" name="TextBox 119"/>
-          <p:cNvSpPr txBox="1"/>
-          <p:nvPr/>
-        </p:nvSpPr>
-        <p:spPr>
-          <a:xfrm>
-            <a:off x="11045952" y="1097280"/>
+          <p:cNvPr id="130" name="TextBox 129"/>
+          <p:cNvSpPr txBox="1"/>
+          <p:nvPr/>
+        </p:nvSpPr>
+        <p:spPr>
+          <a:xfrm>
+            <a:off x="11045952" y="1609344"/>
             <a:ext cx="914400" cy="237744"/>
           </a:xfrm>
           <a:prstGeom prst="rect">
@@ -16235,13 +16609,13 @@
       </p:sp>
       <p:sp>
         <p:nvSpPr>
-          <p:cNvPr id="121" name="Rectangle 120"/>
+          <p:cNvPr id="131" name="Rectangle 130"/>
           <p:cNvSpPr/>
           <p:nvPr/>
         </p:nvSpPr>
         <p:spPr>
           <a:xfrm>
-            <a:off x="6254496" y="1335024"/>
+            <a:off x="6254496" y="1847088"/>
             <a:ext cx="5705856" cy="256032"/>
           </a:xfrm>
           <a:prstGeom prst="rect">
@@ -16278,13 +16652,13 @@
       </p:sp>
       <p:sp>
         <p:nvSpPr>
-          <p:cNvPr id="122" name="TextBox 121"/>
-          <p:cNvSpPr txBox="1"/>
-          <p:nvPr/>
-        </p:nvSpPr>
-        <p:spPr>
-          <a:xfrm>
-            <a:off x="6254496" y="1353312"/>
+          <p:cNvPr id="132" name="TextBox 131"/>
+          <p:cNvSpPr txBox="1"/>
+          <p:nvPr/>
+        </p:nvSpPr>
+        <p:spPr>
+          <a:xfrm>
+            <a:off x="6254496" y="1865376"/>
             <a:ext cx="411480" cy="237744"/>
           </a:xfrm>
           <a:prstGeom prst="rect">
@@ -16307,20 +16681,20 @@
               </a:defRPr>
             </a:pPr>
             <a:r>
-              <a:t>22</a:t>
-            </a:r>
-          </a:p>
-        </p:txBody>
-      </p:sp>
-      <p:sp>
-        <p:nvSpPr>
-          <p:cNvPr id="123" name="TextBox 122"/>
-          <p:cNvSpPr txBox="1"/>
-          <p:nvPr/>
-        </p:nvSpPr>
-        <p:spPr>
-          <a:xfrm>
-            <a:off x="6665976" y="1353312"/>
+              <a:t>24</a:t>
+            </a:r>
+          </a:p>
+        </p:txBody>
+      </p:sp>
+      <p:sp>
+        <p:nvSpPr>
+          <p:cNvPr id="133" name="TextBox 132"/>
+          <p:cNvSpPr txBox="1"/>
+          <p:nvPr/>
+        </p:nvSpPr>
+        <p:spPr>
+          <a:xfrm>
+            <a:off x="6665976" y="1865376"/>
             <a:ext cx="1920240" cy="237744"/>
           </a:xfrm>
           <a:prstGeom prst="rect">
@@ -16343,20 +16717,20 @@
               </a:defRPr>
             </a:pPr>
             <a:r>
-              <a:t>Gayane Yeghiazaryan</a:t>
-            </a:r>
-          </a:p>
-        </p:txBody>
-      </p:sp>
-      <p:sp>
-        <p:nvSpPr>
-          <p:cNvPr id="124" name="TextBox 123"/>
-          <p:cNvSpPr txBox="1"/>
-          <p:nvPr/>
-        </p:nvSpPr>
-        <p:spPr>
-          <a:xfrm>
-            <a:off x="8586216" y="1353312"/>
+              <a:t>Deepak Goswami</a:t>
+            </a:r>
+          </a:p>
+        </p:txBody>
+      </p:sp>
+      <p:sp>
+        <p:nvSpPr>
+          <p:cNvPr id="134" name="TextBox 133"/>
+          <p:cNvSpPr txBox="1"/>
+          <p:nvPr/>
+        </p:nvSpPr>
+        <p:spPr>
+          <a:xfrm>
+            <a:off x="8586216" y="1865376"/>
             <a:ext cx="2459736" cy="237744"/>
           </a:xfrm>
           <a:prstGeom prst="rect">
@@ -16379,6 +16753,193 @@
               </a:defRPr>
             </a:pPr>
             <a:r>
+              <a:t>A.S.I.A Inc</a:t>
+            </a:r>
+          </a:p>
+        </p:txBody>
+      </p:sp>
+      <p:sp>
+        <p:nvSpPr>
+          <p:cNvPr id="135" name="TextBox 134"/>
+          <p:cNvSpPr txBox="1"/>
+          <p:nvPr/>
+        </p:nvSpPr>
+        <p:spPr>
+          <a:xfrm>
+            <a:off x="11045952" y="1865376"/>
+            <a:ext cx="914400" cy="237744"/>
+          </a:xfrm>
+          <a:prstGeom prst="rect">
+            <a:avLst/>
+          </a:prstGeom>
+          <a:noFill/>
+        </p:spPr>
+        <p:txBody>
+          <a:bodyPr wrap="none">
+            <a:spAutoFit/>
+          </a:bodyPr>
+          <a:lstStyle/>
+          <a:p>
+            <a:pPr algn="ctr">
+              <a:defRPr sz="950" b="1">
+                <a:solidFill>
+                  <a:srgbClr val="111827"/>
+                </a:solidFill>
+                <a:latin typeface="Calibri"/>
+              </a:defRPr>
+            </a:pPr>
+            <a:r>
+              <a:t>$439K</a:t>
+            </a:r>
+          </a:p>
+        </p:txBody>
+      </p:sp>
+      <p:sp>
+        <p:nvSpPr>
+          <p:cNvPr id="136" name="Rectangle 135"/>
+          <p:cNvSpPr/>
+          <p:nvPr/>
+        </p:nvSpPr>
+        <p:spPr>
+          <a:xfrm>
+            <a:off x="6254496" y="2103120"/>
+            <a:ext cx="5705856" cy="256032"/>
+          </a:xfrm>
+          <a:prstGeom prst="rect">
+            <a:avLst/>
+          </a:prstGeom>
+          <a:solidFill>
+            <a:srgbClr val="FFFFFF"/>
+          </a:solidFill>
+          <a:ln>
+            <a:noFill/>
+          </a:ln>
+        </p:spPr>
+        <p:style>
+          <a:lnRef idx="1">
+            <a:schemeClr val="accent1"/>
+          </a:lnRef>
+          <a:fillRef idx="3">
+            <a:schemeClr val="accent1"/>
+          </a:fillRef>
+          <a:effectRef idx="2">
+            <a:schemeClr val="accent1"/>
+          </a:effectRef>
+          <a:fontRef idx="minor">
+            <a:schemeClr val="lt1"/>
+          </a:fontRef>
+        </p:style>
+        <p:txBody>
+          <a:bodyPr rtlCol="0" anchor="ctr"/>
+          <a:lstStyle/>
+          <a:p>
+            <a:pPr algn="ctr"/>
+          </a:p>
+        </p:txBody>
+      </p:sp>
+      <p:sp>
+        <p:nvSpPr>
+          <p:cNvPr id="137" name="TextBox 136"/>
+          <p:cNvSpPr txBox="1"/>
+          <p:nvPr/>
+        </p:nvSpPr>
+        <p:spPr>
+          <a:xfrm>
+            <a:off x="6254496" y="2121408"/>
+            <a:ext cx="411480" cy="237744"/>
+          </a:xfrm>
+          <a:prstGeom prst="rect">
+            <a:avLst/>
+          </a:prstGeom>
+          <a:noFill/>
+        </p:spPr>
+        <p:txBody>
+          <a:bodyPr wrap="none">
+            <a:spAutoFit/>
+          </a:bodyPr>
+          <a:lstStyle/>
+          <a:p>
+            <a:pPr algn="ctr">
+              <a:defRPr sz="950" b="1">
+                <a:solidFill>
+                  <a:srgbClr val="6B7280"/>
+                </a:solidFill>
+                <a:latin typeface="Calibri"/>
+              </a:defRPr>
+            </a:pPr>
+            <a:r>
+              <a:t>25</a:t>
+            </a:r>
+          </a:p>
+        </p:txBody>
+      </p:sp>
+      <p:sp>
+        <p:nvSpPr>
+          <p:cNvPr id="138" name="TextBox 137"/>
+          <p:cNvSpPr txBox="1"/>
+          <p:nvPr/>
+        </p:nvSpPr>
+        <p:spPr>
+          <a:xfrm>
+            <a:off x="6665976" y="2121408"/>
+            <a:ext cx="1920240" cy="237744"/>
+          </a:xfrm>
+          <a:prstGeom prst="rect">
+            <a:avLst/>
+          </a:prstGeom>
+          <a:noFill/>
+        </p:spPr>
+        <p:txBody>
+          <a:bodyPr wrap="none">
+            <a:spAutoFit/>
+          </a:bodyPr>
+          <a:lstStyle/>
+          <a:p>
+            <a:pPr algn="l">
+              <a:defRPr sz="950" b="1">
+                <a:solidFill>
+                  <a:srgbClr val="111827"/>
+                </a:solidFill>
+                <a:latin typeface="Calibri"/>
+              </a:defRPr>
+            </a:pPr>
+            <a:r>
+              <a:t>Gayane Yeghiazaryan</a:t>
+            </a:r>
+          </a:p>
+        </p:txBody>
+      </p:sp>
+      <p:sp>
+        <p:nvSpPr>
+          <p:cNvPr id="139" name="TextBox 138"/>
+          <p:cNvSpPr txBox="1"/>
+          <p:nvPr/>
+        </p:nvSpPr>
+        <p:spPr>
+          <a:xfrm>
+            <a:off x="8586216" y="2121408"/>
+            <a:ext cx="2459736" cy="237744"/>
+          </a:xfrm>
+          <a:prstGeom prst="rect">
+            <a:avLst/>
+          </a:prstGeom>
+          <a:noFill/>
+        </p:spPr>
+        <p:txBody>
+          <a:bodyPr wrap="none">
+            <a:spAutoFit/>
+          </a:bodyPr>
+          <a:lstStyle/>
+          <a:p>
+            <a:pPr algn="l">
+              <a:defRPr sz="950" b="0">
+                <a:solidFill>
+                  <a:srgbClr val="6B7280"/>
+                </a:solidFill>
+                <a:latin typeface="Calibri"/>
+              </a:defRPr>
+            </a:pPr>
+            <a:r>
               <a:t>Limosa Insurance Services Inc</a:t>
             </a:r>
           </a:p>
@@ -16386,13 +16947,13 @@
       </p:sp>
       <p:sp>
         <p:nvSpPr>
-          <p:cNvPr id="125" name="TextBox 124"/>
-          <p:cNvSpPr txBox="1"/>
-          <p:nvPr/>
-        </p:nvSpPr>
-        <p:spPr>
-          <a:xfrm>
-            <a:off x="11045952" y="1353312"/>
+          <p:cNvPr id="140" name="TextBox 139"/>
+          <p:cNvSpPr txBox="1"/>
+          <p:nvPr/>
+        </p:nvSpPr>
+        <p:spPr>
+          <a:xfrm>
+            <a:off x="11045952" y="2121408"/>
             <a:ext cx="914400" cy="237744"/>
           </a:xfrm>
           <a:prstGeom prst="rect">
@@ -16422,13 +16983,13 @@
       </p:sp>
       <p:sp>
         <p:nvSpPr>
-          <p:cNvPr id="126" name="Rectangle 125"/>
+          <p:cNvPr id="141" name="Rectangle 140"/>
           <p:cNvSpPr/>
           <p:nvPr/>
         </p:nvSpPr>
         <p:spPr>
           <a:xfrm>
-            <a:off x="6254496" y="1591056"/>
+            <a:off x="6254496" y="2359152"/>
             <a:ext cx="5705856" cy="256032"/>
           </a:xfrm>
           <a:prstGeom prst="rect">
@@ -16465,13 +17026,13 @@
       </p:sp>
       <p:sp>
         <p:nvSpPr>
-          <p:cNvPr id="127" name="TextBox 126"/>
-          <p:cNvSpPr txBox="1"/>
-          <p:nvPr/>
-        </p:nvSpPr>
-        <p:spPr>
-          <a:xfrm>
-            <a:off x="6254496" y="1609344"/>
+          <p:cNvPr id="142" name="TextBox 141"/>
+          <p:cNvSpPr txBox="1"/>
+          <p:nvPr/>
+        </p:nvSpPr>
+        <p:spPr>
+          <a:xfrm>
+            <a:off x="6254496" y="2377440"/>
             <a:ext cx="411480" cy="237744"/>
           </a:xfrm>
           <a:prstGeom prst="rect">
@@ -16494,20 +17055,20 @@
               </a:defRPr>
             </a:pPr>
             <a:r>
-              <a:t>23</a:t>
-            </a:r>
-          </a:p>
-        </p:txBody>
-      </p:sp>
-      <p:sp>
-        <p:nvSpPr>
-          <p:cNvPr id="128" name="TextBox 127"/>
-          <p:cNvSpPr txBox="1"/>
-          <p:nvPr/>
-        </p:nvSpPr>
-        <p:spPr>
-          <a:xfrm>
-            <a:off x="6665976" y="1609344"/>
+              <a:t>26</a:t>
+            </a:r>
+          </a:p>
+        </p:txBody>
+      </p:sp>
+      <p:sp>
+        <p:nvSpPr>
+          <p:cNvPr id="143" name="TextBox 142"/>
+          <p:cNvSpPr txBox="1"/>
+          <p:nvPr/>
+        </p:nvSpPr>
+        <p:spPr>
+          <a:xfrm>
+            <a:off x="6665976" y="2377440"/>
             <a:ext cx="1920240" cy="237744"/>
           </a:xfrm>
           <a:prstGeom prst="rect">
@@ -16537,13 +17098,13 @@
       </p:sp>
       <p:sp>
         <p:nvSpPr>
-          <p:cNvPr id="129" name="TextBox 128"/>
-          <p:cNvSpPr txBox="1"/>
-          <p:nvPr/>
-        </p:nvSpPr>
-        <p:spPr>
-          <a:xfrm>
-            <a:off x="8586216" y="1609344"/>
+          <p:cNvPr id="144" name="TextBox 143"/>
+          <p:cNvSpPr txBox="1"/>
+          <p:nvPr/>
+        </p:nvSpPr>
+        <p:spPr>
+          <a:xfrm>
+            <a:off x="8586216" y="2377440"/>
             <a:ext cx="2459736" cy="237744"/>
           </a:xfrm>
           <a:prstGeom prst="rect">
@@ -16573,13 +17134,13 @@
       </p:sp>
       <p:sp>
         <p:nvSpPr>
-          <p:cNvPr id="130" name="TextBox 129"/>
-          <p:cNvSpPr txBox="1"/>
-          <p:nvPr/>
-        </p:nvSpPr>
-        <p:spPr>
-          <a:xfrm>
-            <a:off x="11045952" y="1609344"/>
+          <p:cNvPr id="145" name="TextBox 144"/>
+          <p:cNvSpPr txBox="1"/>
+          <p:nvPr/>
+        </p:nvSpPr>
+        <p:spPr>
+          <a:xfrm>
+            <a:off x="11045952" y="2377440"/>
             <a:ext cx="914400" cy="237744"/>
           </a:xfrm>
           <a:prstGeom prst="rect">
@@ -16609,13 +17170,948 @@
       </p:sp>
       <p:sp>
         <p:nvSpPr>
-          <p:cNvPr id="131" name="Rectangle 130"/>
+          <p:cNvPr id="146" name="Rectangle 145"/>
           <p:cNvSpPr/>
           <p:nvPr/>
         </p:nvSpPr>
         <p:spPr>
           <a:xfrm>
-            <a:off x="6254496" y="1847088"/>
+            <a:off x="6254496" y="2615184"/>
+            <a:ext cx="5705856" cy="256032"/>
+          </a:xfrm>
+          <a:prstGeom prst="rect">
+            <a:avLst/>
+          </a:prstGeom>
+          <a:solidFill>
+            <a:srgbClr val="FFFFFF"/>
+          </a:solidFill>
+          <a:ln>
+            <a:noFill/>
+          </a:ln>
+        </p:spPr>
+        <p:style>
+          <a:lnRef idx="1">
+            <a:schemeClr val="accent1"/>
+          </a:lnRef>
+          <a:fillRef idx="3">
+            <a:schemeClr val="accent1"/>
+          </a:fillRef>
+          <a:effectRef idx="2">
+            <a:schemeClr val="accent1"/>
+          </a:effectRef>
+          <a:fontRef idx="minor">
+            <a:schemeClr val="lt1"/>
+          </a:fontRef>
+        </p:style>
+        <p:txBody>
+          <a:bodyPr rtlCol="0" anchor="ctr"/>
+          <a:lstStyle/>
+          <a:p>
+            <a:pPr algn="ctr"/>
+          </a:p>
+        </p:txBody>
+      </p:sp>
+      <p:sp>
+        <p:nvSpPr>
+          <p:cNvPr id="147" name="TextBox 146"/>
+          <p:cNvSpPr txBox="1"/>
+          <p:nvPr/>
+        </p:nvSpPr>
+        <p:spPr>
+          <a:xfrm>
+            <a:off x="6254496" y="2633472"/>
+            <a:ext cx="411480" cy="237744"/>
+          </a:xfrm>
+          <a:prstGeom prst="rect">
+            <a:avLst/>
+          </a:prstGeom>
+          <a:noFill/>
+        </p:spPr>
+        <p:txBody>
+          <a:bodyPr wrap="none">
+            <a:spAutoFit/>
+          </a:bodyPr>
+          <a:lstStyle/>
+          <a:p>
+            <a:pPr algn="ctr">
+              <a:defRPr sz="950" b="1">
+                <a:solidFill>
+                  <a:srgbClr val="6B7280"/>
+                </a:solidFill>
+                <a:latin typeface="Calibri"/>
+              </a:defRPr>
+            </a:pPr>
+            <a:r>
+              <a:t>27</a:t>
+            </a:r>
+          </a:p>
+        </p:txBody>
+      </p:sp>
+      <p:sp>
+        <p:nvSpPr>
+          <p:cNvPr id="148" name="TextBox 147"/>
+          <p:cNvSpPr txBox="1"/>
+          <p:nvPr/>
+        </p:nvSpPr>
+        <p:spPr>
+          <a:xfrm>
+            <a:off x="6665976" y="2633472"/>
+            <a:ext cx="1920240" cy="237744"/>
+          </a:xfrm>
+          <a:prstGeom prst="rect">
+            <a:avLst/>
+          </a:prstGeom>
+          <a:noFill/>
+        </p:spPr>
+        <p:txBody>
+          <a:bodyPr wrap="none">
+            <a:spAutoFit/>
+          </a:bodyPr>
+          <a:lstStyle/>
+          <a:p>
+            <a:pPr algn="l">
+              <a:defRPr sz="950" b="1">
+                <a:solidFill>
+                  <a:srgbClr val="111827"/>
+                </a:solidFill>
+                <a:latin typeface="Calibri"/>
+              </a:defRPr>
+            </a:pPr>
+            <a:r>
+              <a:t>Raul Fernandez</a:t>
+            </a:r>
+          </a:p>
+        </p:txBody>
+      </p:sp>
+      <p:sp>
+        <p:nvSpPr>
+          <p:cNvPr id="149" name="TextBox 148"/>
+          <p:cNvSpPr txBox="1"/>
+          <p:nvPr/>
+        </p:nvSpPr>
+        <p:spPr>
+          <a:xfrm>
+            <a:off x="8586216" y="2633472"/>
+            <a:ext cx="2459736" cy="237744"/>
+          </a:xfrm>
+          <a:prstGeom prst="rect">
+            <a:avLst/>
+          </a:prstGeom>
+          <a:noFill/>
+        </p:spPr>
+        <p:txBody>
+          <a:bodyPr wrap="none">
+            <a:spAutoFit/>
+          </a:bodyPr>
+          <a:lstStyle/>
+          <a:p>
+            <a:pPr algn="l">
+              <a:defRPr sz="950" b="0">
+                <a:solidFill>
+                  <a:srgbClr val="6B7280"/>
+                </a:solidFill>
+                <a:latin typeface="Calibri"/>
+              </a:defRPr>
+            </a:pPr>
+            <a:r>
+              <a:t>Ewall Insurance Company</a:t>
+            </a:r>
+          </a:p>
+        </p:txBody>
+      </p:sp>
+      <p:sp>
+        <p:nvSpPr>
+          <p:cNvPr id="150" name="TextBox 149"/>
+          <p:cNvSpPr txBox="1"/>
+          <p:nvPr/>
+        </p:nvSpPr>
+        <p:spPr>
+          <a:xfrm>
+            <a:off x="11045952" y="2633472"/>
+            <a:ext cx="914400" cy="237744"/>
+          </a:xfrm>
+          <a:prstGeom prst="rect">
+            <a:avLst/>
+          </a:prstGeom>
+          <a:noFill/>
+        </p:spPr>
+        <p:txBody>
+          <a:bodyPr wrap="none">
+            <a:spAutoFit/>
+          </a:bodyPr>
+          <a:lstStyle/>
+          <a:p>
+            <a:pPr algn="ctr">
+              <a:defRPr sz="950" b="1">
+                <a:solidFill>
+                  <a:srgbClr val="111827"/>
+                </a:solidFill>
+                <a:latin typeface="Calibri"/>
+              </a:defRPr>
+            </a:pPr>
+            <a:r>
+              <a:t>$391K</a:t>
+            </a:r>
+          </a:p>
+        </p:txBody>
+      </p:sp>
+      <p:sp>
+        <p:nvSpPr>
+          <p:cNvPr id="151" name="Rectangle 150"/>
+          <p:cNvSpPr/>
+          <p:nvPr/>
+        </p:nvSpPr>
+        <p:spPr>
+          <a:xfrm>
+            <a:off x="6254496" y="2871216"/>
+            <a:ext cx="5705856" cy="256032"/>
+          </a:xfrm>
+          <a:prstGeom prst="rect">
+            <a:avLst/>
+          </a:prstGeom>
+          <a:solidFill>
+            <a:srgbClr val="D1FAE5"/>
+          </a:solidFill>
+          <a:ln>
+            <a:noFill/>
+          </a:ln>
+        </p:spPr>
+        <p:style>
+          <a:lnRef idx="1">
+            <a:schemeClr val="accent1"/>
+          </a:lnRef>
+          <a:fillRef idx="3">
+            <a:schemeClr val="accent1"/>
+          </a:fillRef>
+          <a:effectRef idx="2">
+            <a:schemeClr val="accent1"/>
+          </a:effectRef>
+          <a:fontRef idx="minor">
+            <a:schemeClr val="lt1"/>
+          </a:fontRef>
+        </p:style>
+        <p:txBody>
+          <a:bodyPr rtlCol="0" anchor="ctr"/>
+          <a:lstStyle/>
+          <a:p>
+            <a:pPr algn="ctr"/>
+          </a:p>
+        </p:txBody>
+      </p:sp>
+      <p:sp>
+        <p:nvSpPr>
+          <p:cNvPr id="152" name="TextBox 151"/>
+          <p:cNvSpPr txBox="1"/>
+          <p:nvPr/>
+        </p:nvSpPr>
+        <p:spPr>
+          <a:xfrm>
+            <a:off x="6254496" y="2889504"/>
+            <a:ext cx="411480" cy="237744"/>
+          </a:xfrm>
+          <a:prstGeom prst="rect">
+            <a:avLst/>
+          </a:prstGeom>
+          <a:noFill/>
+        </p:spPr>
+        <p:txBody>
+          <a:bodyPr wrap="none">
+            <a:spAutoFit/>
+          </a:bodyPr>
+          <a:lstStyle/>
+          <a:p>
+            <a:pPr algn="ctr">
+              <a:defRPr sz="950" b="1">
+                <a:solidFill>
+                  <a:srgbClr val="6B7280"/>
+                </a:solidFill>
+                <a:latin typeface="Calibri"/>
+              </a:defRPr>
+            </a:pPr>
+            <a:r>
+              <a:t>28</a:t>
+            </a:r>
+          </a:p>
+        </p:txBody>
+      </p:sp>
+      <p:sp>
+        <p:nvSpPr>
+          <p:cNvPr id="153" name="TextBox 152"/>
+          <p:cNvSpPr txBox="1"/>
+          <p:nvPr/>
+        </p:nvSpPr>
+        <p:spPr>
+          <a:xfrm>
+            <a:off x="6665976" y="2889504"/>
+            <a:ext cx="1920240" cy="237744"/>
+          </a:xfrm>
+          <a:prstGeom prst="rect">
+            <a:avLst/>
+          </a:prstGeom>
+          <a:noFill/>
+        </p:spPr>
+        <p:txBody>
+          <a:bodyPr wrap="none">
+            <a:spAutoFit/>
+          </a:bodyPr>
+          <a:lstStyle/>
+          <a:p>
+            <a:pPr algn="l">
+              <a:defRPr sz="950" b="1">
+                <a:solidFill>
+                  <a:srgbClr val="111827"/>
+                </a:solidFill>
+                <a:latin typeface="Calibri"/>
+              </a:defRPr>
+            </a:pPr>
+            <a:r>
+              <a:t>Lynda Inderjeet</a:t>
+            </a:r>
+          </a:p>
+        </p:txBody>
+      </p:sp>
+      <p:sp>
+        <p:nvSpPr>
+          <p:cNvPr id="154" name="TextBox 153"/>
+          <p:cNvSpPr txBox="1"/>
+          <p:nvPr/>
+        </p:nvSpPr>
+        <p:spPr>
+          <a:xfrm>
+            <a:off x="8586216" y="2889504"/>
+            <a:ext cx="2459736" cy="237744"/>
+          </a:xfrm>
+          <a:prstGeom prst="rect">
+            <a:avLst/>
+          </a:prstGeom>
+          <a:noFill/>
+        </p:spPr>
+        <p:txBody>
+          <a:bodyPr wrap="none">
+            <a:spAutoFit/>
+          </a:bodyPr>
+          <a:lstStyle/>
+          <a:p>
+            <a:pPr algn="l">
+              <a:defRPr sz="950" b="0">
+                <a:solidFill>
+                  <a:srgbClr val="6B7280"/>
+                </a:solidFill>
+                <a:latin typeface="Calibri"/>
+              </a:defRPr>
+            </a:pPr>
+            <a:r>
+              <a:t>R-T Specialty, LLC</a:t>
+            </a:r>
+          </a:p>
+        </p:txBody>
+      </p:sp>
+      <p:sp>
+        <p:nvSpPr>
+          <p:cNvPr id="155" name="TextBox 154"/>
+          <p:cNvSpPr txBox="1"/>
+          <p:nvPr/>
+        </p:nvSpPr>
+        <p:spPr>
+          <a:xfrm>
+            <a:off x="11045952" y="2889504"/>
+            <a:ext cx="914400" cy="237744"/>
+          </a:xfrm>
+          <a:prstGeom prst="rect">
+            <a:avLst/>
+          </a:prstGeom>
+          <a:noFill/>
+        </p:spPr>
+        <p:txBody>
+          <a:bodyPr wrap="none">
+            <a:spAutoFit/>
+          </a:bodyPr>
+          <a:lstStyle/>
+          <a:p>
+            <a:pPr algn="ctr">
+              <a:defRPr sz="950" b="1">
+                <a:solidFill>
+                  <a:srgbClr val="111827"/>
+                </a:solidFill>
+                <a:latin typeface="Calibri"/>
+              </a:defRPr>
+            </a:pPr>
+            <a:r>
+              <a:t>$382K</a:t>
+            </a:r>
+          </a:p>
+        </p:txBody>
+      </p:sp>
+      <p:sp>
+        <p:nvSpPr>
+          <p:cNvPr id="156" name="Rectangle 155"/>
+          <p:cNvSpPr/>
+          <p:nvPr/>
+        </p:nvSpPr>
+        <p:spPr>
+          <a:xfrm>
+            <a:off x="6254496" y="3127248"/>
+            <a:ext cx="5705856" cy="256032"/>
+          </a:xfrm>
+          <a:prstGeom prst="rect">
+            <a:avLst/>
+          </a:prstGeom>
+          <a:solidFill>
+            <a:srgbClr val="FFFFFF"/>
+          </a:solidFill>
+          <a:ln>
+            <a:noFill/>
+          </a:ln>
+        </p:spPr>
+        <p:style>
+          <a:lnRef idx="1">
+            <a:schemeClr val="accent1"/>
+          </a:lnRef>
+          <a:fillRef idx="3">
+            <a:schemeClr val="accent1"/>
+          </a:fillRef>
+          <a:effectRef idx="2">
+            <a:schemeClr val="accent1"/>
+          </a:effectRef>
+          <a:fontRef idx="minor">
+            <a:schemeClr val="lt1"/>
+          </a:fontRef>
+        </p:style>
+        <p:txBody>
+          <a:bodyPr rtlCol="0" anchor="ctr"/>
+          <a:lstStyle/>
+          <a:p>
+            <a:pPr algn="ctr"/>
+          </a:p>
+        </p:txBody>
+      </p:sp>
+      <p:sp>
+        <p:nvSpPr>
+          <p:cNvPr id="157" name="TextBox 156"/>
+          <p:cNvSpPr txBox="1"/>
+          <p:nvPr/>
+        </p:nvSpPr>
+        <p:spPr>
+          <a:xfrm>
+            <a:off x="6254496" y="3145536"/>
+            <a:ext cx="411480" cy="237744"/>
+          </a:xfrm>
+          <a:prstGeom prst="rect">
+            <a:avLst/>
+          </a:prstGeom>
+          <a:noFill/>
+        </p:spPr>
+        <p:txBody>
+          <a:bodyPr wrap="none">
+            <a:spAutoFit/>
+          </a:bodyPr>
+          <a:lstStyle/>
+          <a:p>
+            <a:pPr algn="ctr">
+              <a:defRPr sz="950" b="1">
+                <a:solidFill>
+                  <a:srgbClr val="6B7280"/>
+                </a:solidFill>
+                <a:latin typeface="Calibri"/>
+              </a:defRPr>
+            </a:pPr>
+            <a:r>
+              <a:t>29</a:t>
+            </a:r>
+          </a:p>
+        </p:txBody>
+      </p:sp>
+      <p:sp>
+        <p:nvSpPr>
+          <p:cNvPr id="158" name="TextBox 157"/>
+          <p:cNvSpPr txBox="1"/>
+          <p:nvPr/>
+        </p:nvSpPr>
+        <p:spPr>
+          <a:xfrm>
+            <a:off x="6665976" y="3145536"/>
+            <a:ext cx="1920240" cy="237744"/>
+          </a:xfrm>
+          <a:prstGeom prst="rect">
+            <a:avLst/>
+          </a:prstGeom>
+          <a:noFill/>
+        </p:spPr>
+        <p:txBody>
+          <a:bodyPr wrap="none">
+            <a:spAutoFit/>
+          </a:bodyPr>
+          <a:lstStyle/>
+          <a:p>
+            <a:pPr algn="l">
+              <a:defRPr sz="950" b="1">
+                <a:solidFill>
+                  <a:srgbClr val="111827"/>
+                </a:solidFill>
+                <a:latin typeface="Calibri"/>
+              </a:defRPr>
+            </a:pPr>
+            <a:r>
+              <a:t>Daliborka Savovic</a:t>
+            </a:r>
+          </a:p>
+        </p:txBody>
+      </p:sp>
+      <p:sp>
+        <p:nvSpPr>
+          <p:cNvPr id="159" name="TextBox 158"/>
+          <p:cNvSpPr txBox="1"/>
+          <p:nvPr/>
+        </p:nvSpPr>
+        <p:spPr>
+          <a:xfrm>
+            <a:off x="8586216" y="3145536"/>
+            <a:ext cx="2459736" cy="237744"/>
+          </a:xfrm>
+          <a:prstGeom prst="rect">
+            <a:avLst/>
+          </a:prstGeom>
+          <a:noFill/>
+        </p:spPr>
+        <p:txBody>
+          <a:bodyPr wrap="none">
+            <a:spAutoFit/>
+          </a:bodyPr>
+          <a:lstStyle/>
+          <a:p>
+            <a:pPr algn="l">
+              <a:defRPr sz="950" b="0">
+                <a:solidFill>
+                  <a:srgbClr val="6B7280"/>
+                </a:solidFill>
+                <a:latin typeface="Calibri"/>
+              </a:defRPr>
+            </a:pPr>
+            <a:r>
+              <a:t>Alpha Trucking Insurance Agency In…</a:t>
+            </a:r>
+          </a:p>
+        </p:txBody>
+      </p:sp>
+      <p:sp>
+        <p:nvSpPr>
+          <p:cNvPr id="160" name="TextBox 159"/>
+          <p:cNvSpPr txBox="1"/>
+          <p:nvPr/>
+        </p:nvSpPr>
+        <p:spPr>
+          <a:xfrm>
+            <a:off x="11045952" y="3145536"/>
+            <a:ext cx="914400" cy="237744"/>
+          </a:xfrm>
+          <a:prstGeom prst="rect">
+            <a:avLst/>
+          </a:prstGeom>
+          <a:noFill/>
+        </p:spPr>
+        <p:txBody>
+          <a:bodyPr wrap="none">
+            <a:spAutoFit/>
+          </a:bodyPr>
+          <a:lstStyle/>
+          <a:p>
+            <a:pPr algn="ctr">
+              <a:defRPr sz="950" b="1">
+                <a:solidFill>
+                  <a:srgbClr val="111827"/>
+                </a:solidFill>
+                <a:latin typeface="Calibri"/>
+              </a:defRPr>
+            </a:pPr>
+            <a:r>
+              <a:t>$380K</a:t>
+            </a:r>
+          </a:p>
+        </p:txBody>
+      </p:sp>
+      <p:sp>
+        <p:nvSpPr>
+          <p:cNvPr id="161" name="Rectangle 160"/>
+          <p:cNvSpPr/>
+          <p:nvPr/>
+        </p:nvSpPr>
+        <p:spPr>
+          <a:xfrm>
+            <a:off x="6254496" y="3383280"/>
+            <a:ext cx="5705856" cy="256032"/>
+          </a:xfrm>
+          <a:prstGeom prst="rect">
+            <a:avLst/>
+          </a:prstGeom>
+          <a:solidFill>
+            <a:srgbClr val="D1FAE5"/>
+          </a:solidFill>
+          <a:ln>
+            <a:noFill/>
+          </a:ln>
+        </p:spPr>
+        <p:style>
+          <a:lnRef idx="1">
+            <a:schemeClr val="accent1"/>
+          </a:lnRef>
+          <a:fillRef idx="3">
+            <a:schemeClr val="accent1"/>
+          </a:fillRef>
+          <a:effectRef idx="2">
+            <a:schemeClr val="accent1"/>
+          </a:effectRef>
+          <a:fontRef idx="minor">
+            <a:schemeClr val="lt1"/>
+          </a:fontRef>
+        </p:style>
+        <p:txBody>
+          <a:bodyPr rtlCol="0" anchor="ctr"/>
+          <a:lstStyle/>
+          <a:p>
+            <a:pPr algn="ctr"/>
+          </a:p>
+        </p:txBody>
+      </p:sp>
+      <p:sp>
+        <p:nvSpPr>
+          <p:cNvPr id="162" name="TextBox 161"/>
+          <p:cNvSpPr txBox="1"/>
+          <p:nvPr/>
+        </p:nvSpPr>
+        <p:spPr>
+          <a:xfrm>
+            <a:off x="6254496" y="3401568"/>
+            <a:ext cx="411480" cy="237744"/>
+          </a:xfrm>
+          <a:prstGeom prst="rect">
+            <a:avLst/>
+          </a:prstGeom>
+          <a:noFill/>
+        </p:spPr>
+        <p:txBody>
+          <a:bodyPr wrap="none">
+            <a:spAutoFit/>
+          </a:bodyPr>
+          <a:lstStyle/>
+          <a:p>
+            <a:pPr algn="ctr">
+              <a:defRPr sz="950" b="1">
+                <a:solidFill>
+                  <a:srgbClr val="6B7280"/>
+                </a:solidFill>
+                <a:latin typeface="Calibri"/>
+              </a:defRPr>
+            </a:pPr>
+            <a:r>
+              <a:t>30</a:t>
+            </a:r>
+          </a:p>
+        </p:txBody>
+      </p:sp>
+      <p:sp>
+        <p:nvSpPr>
+          <p:cNvPr id="163" name="TextBox 162"/>
+          <p:cNvSpPr txBox="1"/>
+          <p:nvPr/>
+        </p:nvSpPr>
+        <p:spPr>
+          <a:xfrm>
+            <a:off x="6665976" y="3401568"/>
+            <a:ext cx="1920240" cy="237744"/>
+          </a:xfrm>
+          <a:prstGeom prst="rect">
+            <a:avLst/>
+          </a:prstGeom>
+          <a:noFill/>
+        </p:spPr>
+        <p:txBody>
+          <a:bodyPr wrap="none">
+            <a:spAutoFit/>
+          </a:bodyPr>
+          <a:lstStyle/>
+          <a:p>
+            <a:pPr algn="l">
+              <a:defRPr sz="950" b="1">
+                <a:solidFill>
+                  <a:srgbClr val="111827"/>
+                </a:solidFill>
+                <a:latin typeface="Calibri"/>
+              </a:defRPr>
+            </a:pPr>
+            <a:r>
+              <a:t>Inderjit Singh</a:t>
+            </a:r>
+          </a:p>
+        </p:txBody>
+      </p:sp>
+      <p:sp>
+        <p:nvSpPr>
+          <p:cNvPr id="164" name="TextBox 163"/>
+          <p:cNvSpPr txBox="1"/>
+          <p:nvPr/>
+        </p:nvSpPr>
+        <p:spPr>
+          <a:xfrm>
+            <a:off x="8586216" y="3401568"/>
+            <a:ext cx="2459736" cy="237744"/>
+          </a:xfrm>
+          <a:prstGeom prst="rect">
+            <a:avLst/>
+          </a:prstGeom>
+          <a:noFill/>
+        </p:spPr>
+        <p:txBody>
+          <a:bodyPr wrap="none">
+            <a:spAutoFit/>
+          </a:bodyPr>
+          <a:lstStyle/>
+          <a:p>
+            <a:pPr algn="l">
+              <a:defRPr sz="950" b="0">
+                <a:solidFill>
+                  <a:srgbClr val="6B7280"/>
+                </a:solidFill>
+                <a:latin typeface="Calibri"/>
+              </a:defRPr>
+            </a:pPr>
+            <a:r>
+              <a:t>American Insurance Agency LLC</a:t>
+            </a:r>
+          </a:p>
+        </p:txBody>
+      </p:sp>
+      <p:sp>
+        <p:nvSpPr>
+          <p:cNvPr id="165" name="TextBox 164"/>
+          <p:cNvSpPr txBox="1"/>
+          <p:nvPr/>
+        </p:nvSpPr>
+        <p:spPr>
+          <a:xfrm>
+            <a:off x="11045952" y="3401568"/>
+            <a:ext cx="914400" cy="237744"/>
+          </a:xfrm>
+          <a:prstGeom prst="rect">
+            <a:avLst/>
+          </a:prstGeom>
+          <a:noFill/>
+        </p:spPr>
+        <p:txBody>
+          <a:bodyPr wrap="none">
+            <a:spAutoFit/>
+          </a:bodyPr>
+          <a:lstStyle/>
+          <a:p>
+            <a:pPr algn="ctr">
+              <a:defRPr sz="950" b="1">
+                <a:solidFill>
+                  <a:srgbClr val="111827"/>
+                </a:solidFill>
+                <a:latin typeface="Calibri"/>
+              </a:defRPr>
+            </a:pPr>
+            <a:r>
+              <a:t>$372K</a:t>
+            </a:r>
+          </a:p>
+        </p:txBody>
+      </p:sp>
+      <p:sp>
+        <p:nvSpPr>
+          <p:cNvPr id="166" name="Rectangle 165"/>
+          <p:cNvSpPr/>
+          <p:nvPr/>
+        </p:nvSpPr>
+        <p:spPr>
+          <a:xfrm>
+            <a:off x="6254496" y="3639312"/>
+            <a:ext cx="5705856" cy="256032"/>
+          </a:xfrm>
+          <a:prstGeom prst="rect">
+            <a:avLst/>
+          </a:prstGeom>
+          <a:solidFill>
+            <a:srgbClr val="FFFFFF"/>
+          </a:solidFill>
+          <a:ln>
+            <a:noFill/>
+          </a:ln>
+        </p:spPr>
+        <p:style>
+          <a:lnRef idx="1">
+            <a:schemeClr val="accent1"/>
+          </a:lnRef>
+          <a:fillRef idx="3">
+            <a:schemeClr val="accent1"/>
+          </a:fillRef>
+          <a:effectRef idx="2">
+            <a:schemeClr val="accent1"/>
+          </a:effectRef>
+          <a:fontRef idx="minor">
+            <a:schemeClr val="lt1"/>
+          </a:fontRef>
+        </p:style>
+        <p:txBody>
+          <a:bodyPr rtlCol="0" anchor="ctr"/>
+          <a:lstStyle/>
+          <a:p>
+            <a:pPr algn="ctr"/>
+          </a:p>
+        </p:txBody>
+      </p:sp>
+      <p:sp>
+        <p:nvSpPr>
+          <p:cNvPr id="167" name="TextBox 166"/>
+          <p:cNvSpPr txBox="1"/>
+          <p:nvPr/>
+        </p:nvSpPr>
+        <p:spPr>
+          <a:xfrm>
+            <a:off x="6254496" y="3657600"/>
+            <a:ext cx="411480" cy="237744"/>
+          </a:xfrm>
+          <a:prstGeom prst="rect">
+            <a:avLst/>
+          </a:prstGeom>
+          <a:noFill/>
+        </p:spPr>
+        <p:txBody>
+          <a:bodyPr wrap="none">
+            <a:spAutoFit/>
+          </a:bodyPr>
+          <a:lstStyle/>
+          <a:p>
+            <a:pPr algn="ctr">
+              <a:defRPr sz="950" b="1">
+                <a:solidFill>
+                  <a:srgbClr val="6B7280"/>
+                </a:solidFill>
+                <a:latin typeface="Calibri"/>
+              </a:defRPr>
+            </a:pPr>
+            <a:r>
+              <a:t>31</a:t>
+            </a:r>
+          </a:p>
+        </p:txBody>
+      </p:sp>
+      <p:sp>
+        <p:nvSpPr>
+          <p:cNvPr id="168" name="TextBox 167"/>
+          <p:cNvSpPr txBox="1"/>
+          <p:nvPr/>
+        </p:nvSpPr>
+        <p:spPr>
+          <a:xfrm>
+            <a:off x="6665976" y="3657600"/>
+            <a:ext cx="1920240" cy="237744"/>
+          </a:xfrm>
+          <a:prstGeom prst="rect">
+            <a:avLst/>
+          </a:prstGeom>
+          <a:noFill/>
+        </p:spPr>
+        <p:txBody>
+          <a:bodyPr wrap="none">
+            <a:spAutoFit/>
+          </a:bodyPr>
+          <a:lstStyle/>
+          <a:p>
+            <a:pPr algn="l">
+              <a:defRPr sz="950" b="1">
+                <a:solidFill>
+                  <a:srgbClr val="111827"/>
+                </a:solidFill>
+                <a:latin typeface="Calibri"/>
+              </a:defRPr>
+            </a:pPr>
+            <a:r>
+              <a:t>Michael Su</a:t>
+            </a:r>
+          </a:p>
+        </p:txBody>
+      </p:sp>
+      <p:sp>
+        <p:nvSpPr>
+          <p:cNvPr id="169" name="TextBox 168"/>
+          <p:cNvSpPr txBox="1"/>
+          <p:nvPr/>
+        </p:nvSpPr>
+        <p:spPr>
+          <a:xfrm>
+            <a:off x="8586216" y="3657600"/>
+            <a:ext cx="2459736" cy="237744"/>
+          </a:xfrm>
+          <a:prstGeom prst="rect">
+            <a:avLst/>
+          </a:prstGeom>
+          <a:noFill/>
+        </p:spPr>
+        <p:txBody>
+          <a:bodyPr wrap="none">
+            <a:spAutoFit/>
+          </a:bodyPr>
+          <a:lstStyle/>
+          <a:p>
+            <a:pPr algn="l">
+              <a:defRPr sz="950" b="0">
+                <a:solidFill>
+                  <a:srgbClr val="6B7280"/>
+                </a:solidFill>
+                <a:latin typeface="Calibri"/>
+              </a:defRPr>
+            </a:pPr>
+            <a:r>
+              <a:t>Jtc Insurance Agency, Inc.</a:t>
+            </a:r>
+          </a:p>
+        </p:txBody>
+      </p:sp>
+      <p:sp>
+        <p:nvSpPr>
+          <p:cNvPr id="170" name="TextBox 169"/>
+          <p:cNvSpPr txBox="1"/>
+          <p:nvPr/>
+        </p:nvSpPr>
+        <p:spPr>
+          <a:xfrm>
+            <a:off x="11045952" y="3657600"/>
+            <a:ext cx="914400" cy="237744"/>
+          </a:xfrm>
+          <a:prstGeom prst="rect">
+            <a:avLst/>
+          </a:prstGeom>
+          <a:noFill/>
+        </p:spPr>
+        <p:txBody>
+          <a:bodyPr wrap="none">
+            <a:spAutoFit/>
+          </a:bodyPr>
+          <a:lstStyle/>
+          <a:p>
+            <a:pPr algn="ctr">
+              <a:defRPr sz="950" b="1">
+                <a:solidFill>
+                  <a:srgbClr val="111827"/>
+                </a:solidFill>
+                <a:latin typeface="Calibri"/>
+              </a:defRPr>
+            </a:pPr>
+            <a:r>
+              <a:t>$367K</a:t>
+            </a:r>
+          </a:p>
+        </p:txBody>
+      </p:sp>
+      <p:sp>
+        <p:nvSpPr>
+          <p:cNvPr id="171" name="Rectangle 170"/>
+          <p:cNvSpPr/>
+          <p:nvPr/>
+        </p:nvSpPr>
+        <p:spPr>
+          <a:xfrm>
+            <a:off x="6254496" y="3895344"/>
             <a:ext cx="5705856" cy="256032"/>
           </a:xfrm>
           <a:prstGeom prst="rect">
@@ -16652,13 +18148,13 @@
       </p:sp>
       <p:sp>
         <p:nvSpPr>
-          <p:cNvPr id="132" name="TextBox 131"/>
-          <p:cNvSpPr txBox="1"/>
-          <p:nvPr/>
-        </p:nvSpPr>
-        <p:spPr>
-          <a:xfrm>
-            <a:off x="6254496" y="1865376"/>
+          <p:cNvPr id="172" name="TextBox 171"/>
+          <p:cNvSpPr txBox="1"/>
+          <p:nvPr/>
+        </p:nvSpPr>
+        <p:spPr>
+          <a:xfrm>
+            <a:off x="6254496" y="3913632"/>
             <a:ext cx="411480" cy="237744"/>
           </a:xfrm>
           <a:prstGeom prst="rect">
@@ -16681,20 +18177,20 @@
               </a:defRPr>
             </a:pPr>
             <a:r>
-              <a:t>24</a:t>
-            </a:r>
-          </a:p>
-        </p:txBody>
-      </p:sp>
-      <p:sp>
-        <p:nvSpPr>
-          <p:cNvPr id="133" name="TextBox 132"/>
-          <p:cNvSpPr txBox="1"/>
-          <p:nvPr/>
-        </p:nvSpPr>
-        <p:spPr>
-          <a:xfrm>
-            <a:off x="6665976" y="1865376"/>
+              <a:t>32</a:t>
+            </a:r>
+          </a:p>
+        </p:txBody>
+      </p:sp>
+      <p:sp>
+        <p:nvSpPr>
+          <p:cNvPr id="173" name="TextBox 172"/>
+          <p:cNvSpPr txBox="1"/>
+          <p:nvPr/>
+        </p:nvSpPr>
+        <p:spPr>
+          <a:xfrm>
+            <a:off x="6665976" y="3913632"/>
             <a:ext cx="1920240" cy="237744"/>
           </a:xfrm>
           <a:prstGeom prst="rect">
@@ -16717,20 +18213,20 @@
               </a:defRPr>
             </a:pPr>
             <a:r>
-              <a:t>Sapna Kharbanda</a:t>
-            </a:r>
-          </a:p>
-        </p:txBody>
-      </p:sp>
-      <p:sp>
-        <p:nvSpPr>
-          <p:cNvPr id="134" name="TextBox 133"/>
-          <p:cNvSpPr txBox="1"/>
-          <p:nvPr/>
-        </p:nvSpPr>
-        <p:spPr>
-          <a:xfrm>
-            <a:off x="8586216" y="1865376"/>
+              <a:t>Patricia Galindoparedes</a:t>
+            </a:r>
+          </a:p>
+        </p:txBody>
+      </p:sp>
+      <p:sp>
+        <p:nvSpPr>
+          <p:cNvPr id="174" name="TextBox 173"/>
+          <p:cNvSpPr txBox="1"/>
+          <p:nvPr/>
+        </p:nvSpPr>
+        <p:spPr>
+          <a:xfrm>
+            <a:off x="8586216" y="3913632"/>
             <a:ext cx="2459736" cy="237744"/>
           </a:xfrm>
           <a:prstGeom prst="rect">
@@ -16753,20 +18249,20 @@
               </a:defRPr>
             </a:pPr>
             <a:r>
-              <a:t>Sedge Insurance Agency LLC</a:t>
-            </a:r>
-          </a:p>
-        </p:txBody>
-      </p:sp>
-      <p:sp>
-        <p:nvSpPr>
-          <p:cNvPr id="135" name="TextBox 134"/>
-          <p:cNvSpPr txBox="1"/>
-          <p:nvPr/>
-        </p:nvSpPr>
-        <p:spPr>
-          <a:xfrm>
-            <a:off x="11045952" y="1865376"/>
+              <a:t>Call Patty Insurance Services</a:t>
+            </a:r>
+          </a:p>
+        </p:txBody>
+      </p:sp>
+      <p:sp>
+        <p:nvSpPr>
+          <p:cNvPr id="175" name="TextBox 174"/>
+          <p:cNvSpPr txBox="1"/>
+          <p:nvPr/>
+        </p:nvSpPr>
+        <p:spPr>
+          <a:xfrm>
+            <a:off x="11045952" y="3913632"/>
             <a:ext cx="914400" cy="237744"/>
           </a:xfrm>
           <a:prstGeom prst="rect">
@@ -16789,20 +18285,20 @@
               </a:defRPr>
             </a:pPr>
             <a:r>
-              <a:t>$399K</a:t>
-            </a:r>
-          </a:p>
-        </p:txBody>
-      </p:sp>
-      <p:sp>
-        <p:nvSpPr>
-          <p:cNvPr id="136" name="Rectangle 135"/>
+              <a:t>$364K</a:t>
+            </a:r>
+          </a:p>
+        </p:txBody>
+      </p:sp>
+      <p:sp>
+        <p:nvSpPr>
+          <p:cNvPr id="176" name="Rectangle 175"/>
           <p:cNvSpPr/>
           <p:nvPr/>
         </p:nvSpPr>
         <p:spPr>
           <a:xfrm>
-            <a:off x="6254496" y="2103120"/>
+            <a:off x="6254496" y="4151376"/>
             <a:ext cx="5705856" cy="256032"/>
           </a:xfrm>
           <a:prstGeom prst="rect">
@@ -16839,13 +18335,13 @@
       </p:sp>
       <p:sp>
         <p:nvSpPr>
-          <p:cNvPr id="137" name="TextBox 136"/>
-          <p:cNvSpPr txBox="1"/>
-          <p:nvPr/>
-        </p:nvSpPr>
-        <p:spPr>
-          <a:xfrm>
-            <a:off x="6254496" y="2121408"/>
+          <p:cNvPr id="177" name="TextBox 176"/>
+          <p:cNvSpPr txBox="1"/>
+          <p:nvPr/>
+        </p:nvSpPr>
+        <p:spPr>
+          <a:xfrm>
+            <a:off x="6254496" y="4169664"/>
             <a:ext cx="411480" cy="237744"/>
           </a:xfrm>
           <a:prstGeom prst="rect">
@@ -16868,20 +18364,20 @@
               </a:defRPr>
             </a:pPr>
             <a:r>
-              <a:t>25</a:t>
-            </a:r>
-          </a:p>
-        </p:txBody>
-      </p:sp>
-      <p:sp>
-        <p:nvSpPr>
-          <p:cNvPr id="138" name="TextBox 137"/>
-          <p:cNvSpPr txBox="1"/>
-          <p:nvPr/>
-        </p:nvSpPr>
-        <p:spPr>
-          <a:xfrm>
-            <a:off x="6665976" y="2121408"/>
+              <a:t>33</a:t>
+            </a:r>
+          </a:p>
+        </p:txBody>
+      </p:sp>
+      <p:sp>
+        <p:nvSpPr>
+          <p:cNvPr id="178" name="TextBox 177"/>
+          <p:cNvSpPr txBox="1"/>
+          <p:nvPr/>
+        </p:nvSpPr>
+        <p:spPr>
+          <a:xfrm>
+            <a:off x="6665976" y="4169664"/>
             <a:ext cx="1920240" cy="237744"/>
           </a:xfrm>
           <a:prstGeom prst="rect">
@@ -16904,20 +18400,20 @@
               </a:defRPr>
             </a:pPr>
             <a:r>
-              <a:t>Daven Loomba</a:t>
-            </a:r>
-          </a:p>
-        </p:txBody>
-      </p:sp>
-      <p:sp>
-        <p:nvSpPr>
-          <p:cNvPr id="139" name="TextBox 138"/>
-          <p:cNvSpPr txBox="1"/>
-          <p:nvPr/>
-        </p:nvSpPr>
-        <p:spPr>
-          <a:xfrm>
-            <a:off x="8586216" y="2121408"/>
+              <a:t>Kurtis Gautz</a:t>
+            </a:r>
+          </a:p>
+        </p:txBody>
+      </p:sp>
+      <p:sp>
+        <p:nvSpPr>
+          <p:cNvPr id="179" name="TextBox 178"/>
+          <p:cNvSpPr txBox="1"/>
+          <p:nvPr/>
+        </p:nvSpPr>
+        <p:spPr>
+          <a:xfrm>
+            <a:off x="8586216" y="4169664"/>
             <a:ext cx="2459736" cy="237744"/>
           </a:xfrm>
           <a:prstGeom prst="rect">
@@ -16940,20 +18436,20 @@
               </a:defRPr>
             </a:pPr>
             <a:r>
-              <a:t>GoldenEra Insurance Agency</a:t>
-            </a:r>
-          </a:p>
-        </p:txBody>
-      </p:sp>
-      <p:sp>
-        <p:nvSpPr>
-          <p:cNvPr id="140" name="TextBox 139"/>
-          <p:cNvSpPr txBox="1"/>
-          <p:nvPr/>
-        </p:nvSpPr>
-        <p:spPr>
-          <a:xfrm>
-            <a:off x="11045952" y="2121408"/>
+              <a:t>CRC Insurance Services, Inc</a:t>
+            </a:r>
+          </a:p>
+        </p:txBody>
+      </p:sp>
+      <p:sp>
+        <p:nvSpPr>
+          <p:cNvPr id="180" name="TextBox 179"/>
+          <p:cNvSpPr txBox="1"/>
+          <p:nvPr/>
+        </p:nvSpPr>
+        <p:spPr>
+          <a:xfrm>
+            <a:off x="11045952" y="4169664"/>
             <a:ext cx="914400" cy="237744"/>
           </a:xfrm>
           <a:prstGeom prst="rect">
@@ -16976,20 +18472,20 @@
               </a:defRPr>
             </a:pPr>
             <a:r>
-              <a:t>$396K</a:t>
-            </a:r>
-          </a:p>
-        </p:txBody>
-      </p:sp>
-      <p:sp>
-        <p:nvSpPr>
-          <p:cNvPr id="141" name="Rectangle 140"/>
+              <a:t>$355K</a:t>
+            </a:r>
+          </a:p>
+        </p:txBody>
+      </p:sp>
+      <p:sp>
+        <p:nvSpPr>
+          <p:cNvPr id="181" name="Rectangle 180"/>
           <p:cNvSpPr/>
           <p:nvPr/>
         </p:nvSpPr>
         <p:spPr>
           <a:xfrm>
-            <a:off x="6254496" y="2359152"/>
+            <a:off x="6254496" y="4407408"/>
             <a:ext cx="5705856" cy="256032"/>
           </a:xfrm>
           <a:prstGeom prst="rect">
@@ -17026,13 +18522,13 @@
       </p:sp>
       <p:sp>
         <p:nvSpPr>
-          <p:cNvPr id="142" name="TextBox 141"/>
-          <p:cNvSpPr txBox="1"/>
-          <p:nvPr/>
-        </p:nvSpPr>
-        <p:spPr>
-          <a:xfrm>
-            <a:off x="6254496" y="2377440"/>
+          <p:cNvPr id="182" name="TextBox 181"/>
+          <p:cNvSpPr txBox="1"/>
+          <p:nvPr/>
+        </p:nvSpPr>
+        <p:spPr>
+          <a:xfrm>
+            <a:off x="6254496" y="4425696"/>
             <a:ext cx="411480" cy="237744"/>
           </a:xfrm>
           <a:prstGeom prst="rect">
@@ -17055,20 +18551,20 @@
               </a:defRPr>
             </a:pPr>
             <a:r>
-              <a:t>26</a:t>
-            </a:r>
-          </a:p>
-        </p:txBody>
-      </p:sp>
-      <p:sp>
-        <p:nvSpPr>
-          <p:cNvPr id="143" name="TextBox 142"/>
-          <p:cNvSpPr txBox="1"/>
-          <p:nvPr/>
-        </p:nvSpPr>
-        <p:spPr>
-          <a:xfrm>
-            <a:off x="6665976" y="2377440"/>
+              <a:t>34</a:t>
+            </a:r>
+          </a:p>
+        </p:txBody>
+      </p:sp>
+      <p:sp>
+        <p:nvSpPr>
+          <p:cNvPr id="183" name="TextBox 182"/>
+          <p:cNvSpPr txBox="1"/>
+          <p:nvPr/>
+        </p:nvSpPr>
+        <p:spPr>
+          <a:xfrm>
+            <a:off x="6665976" y="4425696"/>
             <a:ext cx="1920240" cy="237744"/>
           </a:xfrm>
           <a:prstGeom prst="rect">
@@ -17091,20 +18587,20 @@
               </a:defRPr>
             </a:pPr>
             <a:r>
-              <a:t>Raul Fernandez</a:t>
-            </a:r>
-          </a:p>
-        </p:txBody>
-      </p:sp>
-      <p:sp>
-        <p:nvSpPr>
-          <p:cNvPr id="144" name="TextBox 143"/>
-          <p:cNvSpPr txBox="1"/>
-          <p:nvPr/>
-        </p:nvSpPr>
-        <p:spPr>
-          <a:xfrm>
-            <a:off x="8586216" y="2377440"/>
+              <a:t>Vladimir Tesler</a:t>
+            </a:r>
+          </a:p>
+        </p:txBody>
+      </p:sp>
+      <p:sp>
+        <p:nvSpPr>
+          <p:cNvPr id="184" name="TextBox 183"/>
+          <p:cNvSpPr txBox="1"/>
+          <p:nvPr/>
+        </p:nvSpPr>
+        <p:spPr>
+          <a:xfrm>
+            <a:off x="8586216" y="4425696"/>
             <a:ext cx="2459736" cy="237744"/>
           </a:xfrm>
           <a:prstGeom prst="rect">
@@ -17127,20 +18623,20 @@
               </a:defRPr>
             </a:pPr>
             <a:r>
-              <a:t>Ewall Insurance Company</a:t>
-            </a:r>
-          </a:p>
-        </p:txBody>
-      </p:sp>
-      <p:sp>
-        <p:nvSpPr>
-          <p:cNvPr id="145" name="TextBox 144"/>
-          <p:cNvSpPr txBox="1"/>
-          <p:nvPr/>
-        </p:nvSpPr>
-        <p:spPr>
-          <a:xfrm>
-            <a:off x="11045952" y="2377440"/>
+              <a:t>Insurance Planet</a:t>
+            </a:r>
+          </a:p>
+        </p:txBody>
+      </p:sp>
+      <p:sp>
+        <p:nvSpPr>
+          <p:cNvPr id="185" name="TextBox 184"/>
+          <p:cNvSpPr txBox="1"/>
+          <p:nvPr/>
+        </p:nvSpPr>
+        <p:spPr>
+          <a:xfrm>
+            <a:off x="11045952" y="4425696"/>
             <a:ext cx="914400" cy="237744"/>
           </a:xfrm>
           <a:prstGeom prst="rect">
@@ -17163,20 +18659,20 @@
               </a:defRPr>
             </a:pPr>
             <a:r>
-              <a:t>$391K</a:t>
-            </a:r>
-          </a:p>
-        </p:txBody>
-      </p:sp>
-      <p:sp>
-        <p:nvSpPr>
-          <p:cNvPr id="146" name="Rectangle 145"/>
+              <a:t>$342K</a:t>
+            </a:r>
+          </a:p>
+        </p:txBody>
+      </p:sp>
+      <p:sp>
+        <p:nvSpPr>
+          <p:cNvPr id="186" name="Rectangle 185"/>
           <p:cNvSpPr/>
           <p:nvPr/>
         </p:nvSpPr>
         <p:spPr>
           <a:xfrm>
-            <a:off x="6254496" y="2615184"/>
+            <a:off x="6254496" y="4663440"/>
             <a:ext cx="5705856" cy="256032"/>
           </a:xfrm>
           <a:prstGeom prst="rect">
@@ -17213,13 +18709,13 @@
       </p:sp>
       <p:sp>
         <p:nvSpPr>
-          <p:cNvPr id="147" name="TextBox 146"/>
-          <p:cNvSpPr txBox="1"/>
-          <p:nvPr/>
-        </p:nvSpPr>
-        <p:spPr>
-          <a:xfrm>
-            <a:off x="6254496" y="2633472"/>
+          <p:cNvPr id="187" name="TextBox 186"/>
+          <p:cNvSpPr txBox="1"/>
+          <p:nvPr/>
+        </p:nvSpPr>
+        <p:spPr>
+          <a:xfrm>
+            <a:off x="6254496" y="4681728"/>
             <a:ext cx="411480" cy="237744"/>
           </a:xfrm>
           <a:prstGeom prst="rect">
@@ -17242,20 +18738,20 @@
               </a:defRPr>
             </a:pPr>
             <a:r>
-              <a:t>27</a:t>
-            </a:r>
-          </a:p>
-        </p:txBody>
-      </p:sp>
-      <p:sp>
-        <p:nvSpPr>
-          <p:cNvPr id="148" name="TextBox 147"/>
-          <p:cNvSpPr txBox="1"/>
-          <p:nvPr/>
-        </p:nvSpPr>
-        <p:spPr>
-          <a:xfrm>
-            <a:off x="6665976" y="2633472"/>
+              <a:t>35</a:t>
+            </a:r>
+          </a:p>
+        </p:txBody>
+      </p:sp>
+      <p:sp>
+        <p:nvSpPr>
+          <p:cNvPr id="188" name="TextBox 187"/>
+          <p:cNvSpPr txBox="1"/>
+          <p:nvPr/>
+        </p:nvSpPr>
+        <p:spPr>
+          <a:xfrm>
+            <a:off x="6665976" y="4681728"/>
             <a:ext cx="1920240" cy="237744"/>
           </a:xfrm>
           <a:prstGeom prst="rect">
@@ -17278,20 +18774,20 @@
               </a:defRPr>
             </a:pPr>
             <a:r>
-              <a:t>Deepak Goswami</a:t>
-            </a:r>
-          </a:p>
-        </p:txBody>
-      </p:sp>
-      <p:sp>
-        <p:nvSpPr>
-          <p:cNvPr id="149" name="TextBox 148"/>
-          <p:cNvSpPr txBox="1"/>
-          <p:nvPr/>
-        </p:nvSpPr>
-        <p:spPr>
-          <a:xfrm>
-            <a:off x="8586216" y="2633472"/>
+              <a:t>Damandeep Singh</a:t>
+            </a:r>
+          </a:p>
+        </p:txBody>
+      </p:sp>
+      <p:sp>
+        <p:nvSpPr>
+          <p:cNvPr id="189" name="TextBox 188"/>
+          <p:cNvSpPr txBox="1"/>
+          <p:nvPr/>
+        </p:nvSpPr>
+        <p:spPr>
+          <a:xfrm>
+            <a:off x="8586216" y="4681728"/>
             <a:ext cx="2459736" cy="237744"/>
           </a:xfrm>
           <a:prstGeom prst="rect">
@@ -17314,20 +18810,20 @@
               </a:defRPr>
             </a:pPr>
             <a:r>
-              <a:t>A.S.I.A Inc</a:t>
-            </a:r>
-          </a:p>
-        </p:txBody>
-      </p:sp>
-      <p:sp>
-        <p:nvSpPr>
-          <p:cNvPr id="150" name="TextBox 149"/>
-          <p:cNvSpPr txBox="1"/>
-          <p:nvPr/>
-        </p:nvSpPr>
-        <p:spPr>
-          <a:xfrm>
-            <a:off x="11045952" y="2633472"/>
+              <a:t>Mayflower Insurance Services</a:t>
+            </a:r>
+          </a:p>
+        </p:txBody>
+      </p:sp>
+      <p:sp>
+        <p:nvSpPr>
+          <p:cNvPr id="190" name="TextBox 189"/>
+          <p:cNvSpPr txBox="1"/>
+          <p:nvPr/>
+        </p:nvSpPr>
+        <p:spPr>
+          <a:xfrm>
+            <a:off x="11045952" y="4681728"/>
             <a:ext cx="914400" cy="237744"/>
           </a:xfrm>
           <a:prstGeom prst="rect">
@@ -17350,20 +18846,20 @@
               </a:defRPr>
             </a:pPr>
             <a:r>
-              <a:t>$388K</a:t>
-            </a:r>
-          </a:p>
-        </p:txBody>
-      </p:sp>
-      <p:sp>
-        <p:nvSpPr>
-          <p:cNvPr id="151" name="Rectangle 150"/>
+              <a:t>$341K</a:t>
+            </a:r>
+          </a:p>
+        </p:txBody>
+      </p:sp>
+      <p:sp>
+        <p:nvSpPr>
+          <p:cNvPr id="191" name="Rectangle 190"/>
           <p:cNvSpPr/>
           <p:nvPr/>
         </p:nvSpPr>
         <p:spPr>
           <a:xfrm>
-            <a:off x="6254496" y="2871216"/>
+            <a:off x="6254496" y="4919472"/>
             <a:ext cx="5705856" cy="256032"/>
           </a:xfrm>
           <a:prstGeom prst="rect">
@@ -17400,13 +18896,13 @@
       </p:sp>
       <p:sp>
         <p:nvSpPr>
-          <p:cNvPr id="152" name="TextBox 151"/>
-          <p:cNvSpPr txBox="1"/>
-          <p:nvPr/>
-        </p:nvSpPr>
-        <p:spPr>
-          <a:xfrm>
-            <a:off x="6254496" y="2889504"/>
+          <p:cNvPr id="192" name="TextBox 191"/>
+          <p:cNvSpPr txBox="1"/>
+          <p:nvPr/>
+        </p:nvSpPr>
+        <p:spPr>
+          <a:xfrm>
+            <a:off x="6254496" y="4937760"/>
             <a:ext cx="411480" cy="237744"/>
           </a:xfrm>
           <a:prstGeom prst="rect">
@@ -17429,20 +18925,20 @@
               </a:defRPr>
             </a:pPr>
             <a:r>
-              <a:t>28</a:t>
-            </a:r>
-          </a:p>
-        </p:txBody>
-      </p:sp>
-      <p:sp>
-        <p:nvSpPr>
-          <p:cNvPr id="153" name="TextBox 152"/>
-          <p:cNvSpPr txBox="1"/>
-          <p:nvPr/>
-        </p:nvSpPr>
-        <p:spPr>
-          <a:xfrm>
-            <a:off x="6665976" y="2889504"/>
+              <a:t>36</a:t>
+            </a:r>
+          </a:p>
+        </p:txBody>
+      </p:sp>
+      <p:sp>
+        <p:nvSpPr>
+          <p:cNvPr id="193" name="TextBox 192"/>
+          <p:cNvSpPr txBox="1"/>
+          <p:nvPr/>
+        </p:nvSpPr>
+        <p:spPr>
+          <a:xfrm>
+            <a:off x="6665976" y="4937760"/>
             <a:ext cx="1920240" cy="237744"/>
           </a:xfrm>
           <a:prstGeom prst="rect">
@@ -17465,20 +18961,20 @@
               </a:defRPr>
             </a:pPr>
             <a:r>
-              <a:t>Daliborka Savovic</a:t>
-            </a:r>
-          </a:p>
-        </p:txBody>
-      </p:sp>
-      <p:sp>
-        <p:nvSpPr>
-          <p:cNvPr id="154" name="TextBox 153"/>
-          <p:cNvSpPr txBox="1"/>
-          <p:nvPr/>
-        </p:nvSpPr>
-        <p:spPr>
-          <a:xfrm>
-            <a:off x="8586216" y="2889504"/>
+              <a:t>Omar Elmanzalawy</a:t>
+            </a:r>
+          </a:p>
+        </p:txBody>
+      </p:sp>
+      <p:sp>
+        <p:nvSpPr>
+          <p:cNvPr id="194" name="TextBox 193"/>
+          <p:cNvSpPr txBox="1"/>
+          <p:nvPr/>
+        </p:nvSpPr>
+        <p:spPr>
+          <a:xfrm>
+            <a:off x="8586216" y="4937760"/>
             <a:ext cx="2459736" cy="237744"/>
           </a:xfrm>
           <a:prstGeom prst="rect">
@@ -17501,20 +18997,20 @@
               </a:defRPr>
             </a:pPr>
             <a:r>
-              <a:t>Alpha Trucking Insurance Agency In…</a:t>
-            </a:r>
-          </a:p>
-        </p:txBody>
-      </p:sp>
-      <p:sp>
-        <p:nvSpPr>
-          <p:cNvPr id="155" name="TextBox 154"/>
-          <p:cNvSpPr txBox="1"/>
-          <p:nvPr/>
-        </p:nvSpPr>
-        <p:spPr>
-          <a:xfrm>
-            <a:off x="11045952" y="2889504"/>
+              <a:t>First Connect Insurance</a:t>
+            </a:r>
+          </a:p>
+        </p:txBody>
+      </p:sp>
+      <p:sp>
+        <p:nvSpPr>
+          <p:cNvPr id="195" name="TextBox 194"/>
+          <p:cNvSpPr txBox="1"/>
+          <p:nvPr/>
+        </p:nvSpPr>
+        <p:spPr>
+          <a:xfrm>
+            <a:off x="11045952" y="4937760"/>
             <a:ext cx="914400" cy="237744"/>
           </a:xfrm>
           <a:prstGeom prst="rect">
@@ -17537,20 +19033,581 @@
               </a:defRPr>
             </a:pPr>
             <a:r>
-              <a:t>$380K</a:t>
-            </a:r>
-          </a:p>
-        </p:txBody>
-      </p:sp>
-      <p:sp>
-        <p:nvSpPr>
-          <p:cNvPr id="156" name="Rectangle 155"/>
+              <a:t>$339K</a:t>
+            </a:r>
+          </a:p>
+        </p:txBody>
+      </p:sp>
+      <p:sp>
+        <p:nvSpPr>
+          <p:cNvPr id="196" name="Rectangle 195"/>
           <p:cNvSpPr/>
           <p:nvPr/>
         </p:nvSpPr>
         <p:spPr>
           <a:xfrm>
-            <a:off x="6254496" y="3127248"/>
+            <a:off x="6254496" y="5175504"/>
+            <a:ext cx="5705856" cy="256032"/>
+          </a:xfrm>
+          <a:prstGeom prst="rect">
+            <a:avLst/>
+          </a:prstGeom>
+          <a:solidFill>
+            <a:srgbClr val="FFFFFF"/>
+          </a:solidFill>
+          <a:ln>
+            <a:noFill/>
+          </a:ln>
+        </p:spPr>
+        <p:style>
+          <a:lnRef idx="1">
+            <a:schemeClr val="accent1"/>
+          </a:lnRef>
+          <a:fillRef idx="3">
+            <a:schemeClr val="accent1"/>
+          </a:fillRef>
+          <a:effectRef idx="2">
+            <a:schemeClr val="accent1"/>
+          </a:effectRef>
+          <a:fontRef idx="minor">
+            <a:schemeClr val="lt1"/>
+          </a:fontRef>
+        </p:style>
+        <p:txBody>
+          <a:bodyPr rtlCol="0" anchor="ctr"/>
+          <a:lstStyle/>
+          <a:p>
+            <a:pPr algn="ctr"/>
+          </a:p>
+        </p:txBody>
+      </p:sp>
+      <p:sp>
+        <p:nvSpPr>
+          <p:cNvPr id="197" name="TextBox 196"/>
+          <p:cNvSpPr txBox="1"/>
+          <p:nvPr/>
+        </p:nvSpPr>
+        <p:spPr>
+          <a:xfrm>
+            <a:off x="6254496" y="5193792"/>
+            <a:ext cx="411480" cy="237744"/>
+          </a:xfrm>
+          <a:prstGeom prst="rect">
+            <a:avLst/>
+          </a:prstGeom>
+          <a:noFill/>
+        </p:spPr>
+        <p:txBody>
+          <a:bodyPr wrap="none">
+            <a:spAutoFit/>
+          </a:bodyPr>
+          <a:lstStyle/>
+          <a:p>
+            <a:pPr algn="ctr">
+              <a:defRPr sz="950" b="1">
+                <a:solidFill>
+                  <a:srgbClr val="6B7280"/>
+                </a:solidFill>
+                <a:latin typeface="Calibri"/>
+              </a:defRPr>
+            </a:pPr>
+            <a:r>
+              <a:t>37</a:t>
+            </a:r>
+          </a:p>
+        </p:txBody>
+      </p:sp>
+      <p:sp>
+        <p:nvSpPr>
+          <p:cNvPr id="198" name="TextBox 197"/>
+          <p:cNvSpPr txBox="1"/>
+          <p:nvPr/>
+        </p:nvSpPr>
+        <p:spPr>
+          <a:xfrm>
+            <a:off x="6665976" y="5193792"/>
+            <a:ext cx="1920240" cy="237744"/>
+          </a:xfrm>
+          <a:prstGeom prst="rect">
+            <a:avLst/>
+          </a:prstGeom>
+          <a:noFill/>
+        </p:spPr>
+        <p:txBody>
+          <a:bodyPr wrap="none">
+            <a:spAutoFit/>
+          </a:bodyPr>
+          <a:lstStyle/>
+          <a:p>
+            <a:pPr algn="l">
+              <a:defRPr sz="950" b="1">
+                <a:solidFill>
+                  <a:srgbClr val="111827"/>
+                </a:solidFill>
+                <a:latin typeface="Calibri"/>
+              </a:defRPr>
+            </a:pPr>
+            <a:r>
+              <a:t>Nicholas Banks</a:t>
+            </a:r>
+          </a:p>
+        </p:txBody>
+      </p:sp>
+      <p:sp>
+        <p:nvSpPr>
+          <p:cNvPr id="199" name="TextBox 198"/>
+          <p:cNvSpPr txBox="1"/>
+          <p:nvPr/>
+        </p:nvSpPr>
+        <p:spPr>
+          <a:xfrm>
+            <a:off x="8586216" y="5193792"/>
+            <a:ext cx="2459736" cy="237744"/>
+          </a:xfrm>
+          <a:prstGeom prst="rect">
+            <a:avLst/>
+          </a:prstGeom>
+          <a:noFill/>
+        </p:spPr>
+        <p:txBody>
+          <a:bodyPr wrap="none">
+            <a:spAutoFit/>
+          </a:bodyPr>
+          <a:lstStyle/>
+          <a:p>
+            <a:pPr algn="l">
+              <a:defRPr sz="950" b="0">
+                <a:solidFill>
+                  <a:srgbClr val="6B7280"/>
+                </a:solidFill>
+                <a:latin typeface="Calibri"/>
+              </a:defRPr>
+            </a:pPr>
+            <a:r>
+              <a:t>Reliance Partners, LLC</a:t>
+            </a:r>
+          </a:p>
+        </p:txBody>
+      </p:sp>
+      <p:sp>
+        <p:nvSpPr>
+          <p:cNvPr id="200" name="TextBox 199"/>
+          <p:cNvSpPr txBox="1"/>
+          <p:nvPr/>
+        </p:nvSpPr>
+        <p:spPr>
+          <a:xfrm>
+            <a:off x="11045952" y="5193792"/>
+            <a:ext cx="914400" cy="237744"/>
+          </a:xfrm>
+          <a:prstGeom prst="rect">
+            <a:avLst/>
+          </a:prstGeom>
+          <a:noFill/>
+        </p:spPr>
+        <p:txBody>
+          <a:bodyPr wrap="none">
+            <a:spAutoFit/>
+          </a:bodyPr>
+          <a:lstStyle/>
+          <a:p>
+            <a:pPr algn="ctr">
+              <a:defRPr sz="950" b="1">
+                <a:solidFill>
+                  <a:srgbClr val="111827"/>
+                </a:solidFill>
+                <a:latin typeface="Calibri"/>
+              </a:defRPr>
+            </a:pPr>
+            <a:r>
+              <a:t>$330K</a:t>
+            </a:r>
+          </a:p>
+        </p:txBody>
+      </p:sp>
+      <p:sp>
+        <p:nvSpPr>
+          <p:cNvPr id="201" name="Rectangle 200"/>
+          <p:cNvSpPr/>
+          <p:nvPr/>
+        </p:nvSpPr>
+        <p:spPr>
+          <a:xfrm>
+            <a:off x="6254496" y="5431536"/>
+            <a:ext cx="5705856" cy="256032"/>
+          </a:xfrm>
+          <a:prstGeom prst="rect">
+            <a:avLst/>
+          </a:prstGeom>
+          <a:solidFill>
+            <a:srgbClr val="F9FAFB"/>
+          </a:solidFill>
+          <a:ln>
+            <a:noFill/>
+          </a:ln>
+        </p:spPr>
+        <p:style>
+          <a:lnRef idx="1">
+            <a:schemeClr val="accent1"/>
+          </a:lnRef>
+          <a:fillRef idx="3">
+            <a:schemeClr val="accent1"/>
+          </a:fillRef>
+          <a:effectRef idx="2">
+            <a:schemeClr val="accent1"/>
+          </a:effectRef>
+          <a:fontRef idx="minor">
+            <a:schemeClr val="lt1"/>
+          </a:fontRef>
+        </p:style>
+        <p:txBody>
+          <a:bodyPr rtlCol="0" anchor="ctr"/>
+          <a:lstStyle/>
+          <a:p>
+            <a:pPr algn="ctr"/>
+          </a:p>
+        </p:txBody>
+      </p:sp>
+      <p:sp>
+        <p:nvSpPr>
+          <p:cNvPr id="202" name="TextBox 201"/>
+          <p:cNvSpPr txBox="1"/>
+          <p:nvPr/>
+        </p:nvSpPr>
+        <p:spPr>
+          <a:xfrm>
+            <a:off x="6254496" y="5449824"/>
+            <a:ext cx="411480" cy="237744"/>
+          </a:xfrm>
+          <a:prstGeom prst="rect">
+            <a:avLst/>
+          </a:prstGeom>
+          <a:noFill/>
+        </p:spPr>
+        <p:txBody>
+          <a:bodyPr wrap="none">
+            <a:spAutoFit/>
+          </a:bodyPr>
+          <a:lstStyle/>
+          <a:p>
+            <a:pPr algn="ctr">
+              <a:defRPr sz="950" b="1">
+                <a:solidFill>
+                  <a:srgbClr val="6B7280"/>
+                </a:solidFill>
+                <a:latin typeface="Calibri"/>
+              </a:defRPr>
+            </a:pPr>
+            <a:r>
+              <a:t>38</a:t>
+            </a:r>
+          </a:p>
+        </p:txBody>
+      </p:sp>
+      <p:sp>
+        <p:nvSpPr>
+          <p:cNvPr id="203" name="TextBox 202"/>
+          <p:cNvSpPr txBox="1"/>
+          <p:nvPr/>
+        </p:nvSpPr>
+        <p:spPr>
+          <a:xfrm>
+            <a:off x="6665976" y="5449824"/>
+            <a:ext cx="1920240" cy="237744"/>
+          </a:xfrm>
+          <a:prstGeom prst="rect">
+            <a:avLst/>
+          </a:prstGeom>
+          <a:noFill/>
+        </p:spPr>
+        <p:txBody>
+          <a:bodyPr wrap="none">
+            <a:spAutoFit/>
+          </a:bodyPr>
+          <a:lstStyle/>
+          <a:p>
+            <a:pPr algn="l">
+              <a:defRPr sz="950" b="1">
+                <a:solidFill>
+                  <a:srgbClr val="111827"/>
+                </a:solidFill>
+                <a:latin typeface="Calibri"/>
+              </a:defRPr>
+            </a:pPr>
+            <a:r>
+              <a:t>Venizelos Papadopulos</a:t>
+            </a:r>
+          </a:p>
+        </p:txBody>
+      </p:sp>
+      <p:sp>
+        <p:nvSpPr>
+          <p:cNvPr id="204" name="TextBox 203"/>
+          <p:cNvSpPr txBox="1"/>
+          <p:nvPr/>
+        </p:nvSpPr>
+        <p:spPr>
+          <a:xfrm>
+            <a:off x="8586216" y="5449824"/>
+            <a:ext cx="2459736" cy="237744"/>
+          </a:xfrm>
+          <a:prstGeom prst="rect">
+            <a:avLst/>
+          </a:prstGeom>
+          <a:noFill/>
+        </p:spPr>
+        <p:txBody>
+          <a:bodyPr wrap="none">
+            <a:spAutoFit/>
+          </a:bodyPr>
+          <a:lstStyle/>
+          <a:p>
+            <a:pPr algn="l">
+              <a:defRPr sz="950" b="0">
+                <a:solidFill>
+                  <a:srgbClr val="6B7280"/>
+                </a:solidFill>
+                <a:latin typeface="Calibri"/>
+              </a:defRPr>
+            </a:pPr>
+            <a:r>
+              <a:t>Exclusive Financial Services, Inc</a:t>
+            </a:r>
+          </a:p>
+        </p:txBody>
+      </p:sp>
+      <p:sp>
+        <p:nvSpPr>
+          <p:cNvPr id="205" name="TextBox 204"/>
+          <p:cNvSpPr txBox="1"/>
+          <p:nvPr/>
+        </p:nvSpPr>
+        <p:spPr>
+          <a:xfrm>
+            <a:off x="11045952" y="5449824"/>
+            <a:ext cx="914400" cy="237744"/>
+          </a:xfrm>
+          <a:prstGeom prst="rect">
+            <a:avLst/>
+          </a:prstGeom>
+          <a:noFill/>
+        </p:spPr>
+        <p:txBody>
+          <a:bodyPr wrap="none">
+            <a:spAutoFit/>
+          </a:bodyPr>
+          <a:lstStyle/>
+          <a:p>
+            <a:pPr algn="ctr">
+              <a:defRPr sz="950" b="1">
+                <a:solidFill>
+                  <a:srgbClr val="111827"/>
+                </a:solidFill>
+                <a:latin typeface="Calibri"/>
+              </a:defRPr>
+            </a:pPr>
+            <a:r>
+              <a:t>$321K</a:t>
+            </a:r>
+          </a:p>
+        </p:txBody>
+      </p:sp>
+      <p:sp>
+        <p:nvSpPr>
+          <p:cNvPr id="206" name="Rectangle 205"/>
+          <p:cNvSpPr/>
+          <p:nvPr/>
+        </p:nvSpPr>
+        <p:spPr>
+          <a:xfrm>
+            <a:off x="6254496" y="5687568"/>
+            <a:ext cx="5705856" cy="256032"/>
+          </a:xfrm>
+          <a:prstGeom prst="rect">
+            <a:avLst/>
+          </a:prstGeom>
+          <a:solidFill>
+            <a:srgbClr val="FFFFFF"/>
+          </a:solidFill>
+          <a:ln>
+            <a:noFill/>
+          </a:ln>
+        </p:spPr>
+        <p:style>
+          <a:lnRef idx="1">
+            <a:schemeClr val="accent1"/>
+          </a:lnRef>
+          <a:fillRef idx="3">
+            <a:schemeClr val="accent1"/>
+          </a:fillRef>
+          <a:effectRef idx="2">
+            <a:schemeClr val="accent1"/>
+          </a:effectRef>
+          <a:fontRef idx="minor">
+            <a:schemeClr val="lt1"/>
+          </a:fontRef>
+        </p:style>
+        <p:txBody>
+          <a:bodyPr rtlCol="0" anchor="ctr"/>
+          <a:lstStyle/>
+          <a:p>
+            <a:pPr algn="ctr"/>
+          </a:p>
+        </p:txBody>
+      </p:sp>
+      <p:sp>
+        <p:nvSpPr>
+          <p:cNvPr id="207" name="TextBox 206"/>
+          <p:cNvSpPr txBox="1"/>
+          <p:nvPr/>
+        </p:nvSpPr>
+        <p:spPr>
+          <a:xfrm>
+            <a:off x="6254496" y="5705856"/>
+            <a:ext cx="411480" cy="237744"/>
+          </a:xfrm>
+          <a:prstGeom prst="rect">
+            <a:avLst/>
+          </a:prstGeom>
+          <a:noFill/>
+        </p:spPr>
+        <p:txBody>
+          <a:bodyPr wrap="none">
+            <a:spAutoFit/>
+          </a:bodyPr>
+          <a:lstStyle/>
+          <a:p>
+            <a:pPr algn="ctr">
+              <a:defRPr sz="950" b="1">
+                <a:solidFill>
+                  <a:srgbClr val="6B7280"/>
+                </a:solidFill>
+                <a:latin typeface="Calibri"/>
+              </a:defRPr>
+            </a:pPr>
+            <a:r>
+              <a:t>39</a:t>
+            </a:r>
+          </a:p>
+        </p:txBody>
+      </p:sp>
+      <p:sp>
+        <p:nvSpPr>
+          <p:cNvPr id="208" name="TextBox 207"/>
+          <p:cNvSpPr txBox="1"/>
+          <p:nvPr/>
+        </p:nvSpPr>
+        <p:spPr>
+          <a:xfrm>
+            <a:off x="6665976" y="5705856"/>
+            <a:ext cx="1920240" cy="237744"/>
+          </a:xfrm>
+          <a:prstGeom prst="rect">
+            <a:avLst/>
+          </a:prstGeom>
+          <a:noFill/>
+        </p:spPr>
+        <p:txBody>
+          <a:bodyPr wrap="none">
+            <a:spAutoFit/>
+          </a:bodyPr>
+          <a:lstStyle/>
+          <a:p>
+            <a:pPr algn="l">
+              <a:defRPr sz="950" b="1">
+                <a:solidFill>
+                  <a:srgbClr val="111827"/>
+                </a:solidFill>
+                <a:latin typeface="Calibri"/>
+              </a:defRPr>
+            </a:pPr>
+            <a:r>
+              <a:t>Scarlette Mcbrayer</a:t>
+            </a:r>
+          </a:p>
+        </p:txBody>
+      </p:sp>
+      <p:sp>
+        <p:nvSpPr>
+          <p:cNvPr id="209" name="TextBox 208"/>
+          <p:cNvSpPr txBox="1"/>
+          <p:nvPr/>
+        </p:nvSpPr>
+        <p:spPr>
+          <a:xfrm>
+            <a:off x="8586216" y="5705856"/>
+            <a:ext cx="2459736" cy="237744"/>
+          </a:xfrm>
+          <a:prstGeom prst="rect">
+            <a:avLst/>
+          </a:prstGeom>
+          <a:noFill/>
+        </p:spPr>
+        <p:txBody>
+          <a:bodyPr wrap="none">
+            <a:spAutoFit/>
+          </a:bodyPr>
+          <a:lstStyle/>
+          <a:p>
+            <a:pPr algn="l">
+              <a:defRPr sz="950" b="0">
+                <a:solidFill>
+                  <a:srgbClr val="6B7280"/>
+                </a:solidFill>
+                <a:latin typeface="Calibri"/>
+              </a:defRPr>
+            </a:pPr>
+            <a:r>
+              <a:t>Reliance Partners, LLC</a:t>
+            </a:r>
+          </a:p>
+        </p:txBody>
+      </p:sp>
+      <p:sp>
+        <p:nvSpPr>
+          <p:cNvPr id="210" name="TextBox 209"/>
+          <p:cNvSpPr txBox="1"/>
+          <p:nvPr/>
+        </p:nvSpPr>
+        <p:spPr>
+          <a:xfrm>
+            <a:off x="11045952" y="5705856"/>
+            <a:ext cx="914400" cy="237744"/>
+          </a:xfrm>
+          <a:prstGeom prst="rect">
+            <a:avLst/>
+          </a:prstGeom>
+          <a:noFill/>
+        </p:spPr>
+        <p:txBody>
+          <a:bodyPr wrap="none">
+            <a:spAutoFit/>
+          </a:bodyPr>
+          <a:lstStyle/>
+          <a:p>
+            <a:pPr algn="ctr">
+              <a:defRPr sz="950" b="1">
+                <a:solidFill>
+                  <a:srgbClr val="111827"/>
+                </a:solidFill>
+                <a:latin typeface="Calibri"/>
+              </a:defRPr>
+            </a:pPr>
+            <a:r>
+              <a:t>$315K</a:t>
+            </a:r>
+          </a:p>
+        </p:txBody>
+      </p:sp>
+      <p:sp>
+        <p:nvSpPr>
+          <p:cNvPr id="211" name="Rectangle 210"/>
+          <p:cNvSpPr/>
+          <p:nvPr/>
+        </p:nvSpPr>
+        <p:spPr>
+          <a:xfrm>
+            <a:off x="6254496" y="5943600"/>
             <a:ext cx="5705856" cy="256032"/>
           </a:xfrm>
           <a:prstGeom prst="rect">
@@ -17587,13 +19644,13 @@
       </p:sp>
       <p:sp>
         <p:nvSpPr>
-          <p:cNvPr id="157" name="TextBox 156"/>
-          <p:cNvSpPr txBox="1"/>
-          <p:nvPr/>
-        </p:nvSpPr>
-        <p:spPr>
-          <a:xfrm>
-            <a:off x="6254496" y="3145536"/>
+          <p:cNvPr id="212" name="TextBox 211"/>
+          <p:cNvSpPr txBox="1"/>
+          <p:nvPr/>
+        </p:nvSpPr>
+        <p:spPr>
+          <a:xfrm>
+            <a:off x="6254496" y="5961888"/>
             <a:ext cx="411480" cy="237744"/>
           </a:xfrm>
           <a:prstGeom prst="rect">
@@ -17616,20 +19673,20 @@
               </a:defRPr>
             </a:pPr>
             <a:r>
-              <a:t>29</a:t>
-            </a:r>
-          </a:p>
-        </p:txBody>
-      </p:sp>
-      <p:sp>
-        <p:nvSpPr>
-          <p:cNvPr id="158" name="TextBox 157"/>
-          <p:cNvSpPr txBox="1"/>
-          <p:nvPr/>
-        </p:nvSpPr>
-        <p:spPr>
-          <a:xfrm>
-            <a:off x="6665976" y="3145536"/>
+              <a:t>40</a:t>
+            </a:r>
+          </a:p>
+        </p:txBody>
+      </p:sp>
+      <p:sp>
+        <p:nvSpPr>
+          <p:cNvPr id="213" name="TextBox 212"/>
+          <p:cNvSpPr txBox="1"/>
+          <p:nvPr/>
+        </p:nvSpPr>
+        <p:spPr>
+          <a:xfrm>
+            <a:off x="6665976" y="5961888"/>
             <a:ext cx="1920240" cy="237744"/>
           </a:xfrm>
           <a:prstGeom prst="rect">
@@ -17652,20 +19709,20 @@
               </a:defRPr>
             </a:pPr>
             <a:r>
-              <a:t>Inderjit Singh</a:t>
-            </a:r>
-          </a:p>
-        </p:txBody>
-      </p:sp>
-      <p:sp>
-        <p:nvSpPr>
-          <p:cNvPr id="159" name="TextBox 158"/>
-          <p:cNvSpPr txBox="1"/>
-          <p:nvPr/>
-        </p:nvSpPr>
-        <p:spPr>
-          <a:xfrm>
-            <a:off x="8586216" y="3145536"/>
+              <a:t>Christopher Salazar</a:t>
+            </a:r>
+          </a:p>
+        </p:txBody>
+      </p:sp>
+      <p:sp>
+        <p:nvSpPr>
+          <p:cNvPr id="214" name="TextBox 213"/>
+          <p:cNvSpPr txBox="1"/>
+          <p:nvPr/>
+        </p:nvSpPr>
+        <p:spPr>
+          <a:xfrm>
+            <a:off x="8586216" y="5961888"/>
             <a:ext cx="2459736" cy="237744"/>
           </a:xfrm>
           <a:prstGeom prst="rect">
@@ -17688,2064 +19745,7 @@
               </a:defRPr>
             </a:pPr>
             <a:r>
-              <a:t>American Insurance Agency LLC</a:t>
-            </a:r>
-          </a:p>
-        </p:txBody>
-      </p:sp>
-      <p:sp>
-        <p:nvSpPr>
-          <p:cNvPr id="160" name="TextBox 159"/>
-          <p:cNvSpPr txBox="1"/>
-          <p:nvPr/>
-        </p:nvSpPr>
-        <p:spPr>
-          <a:xfrm>
-            <a:off x="11045952" y="3145536"/>
-            <a:ext cx="914400" cy="237744"/>
-          </a:xfrm>
-          <a:prstGeom prst="rect">
-            <a:avLst/>
-          </a:prstGeom>
-          <a:noFill/>
-        </p:spPr>
-        <p:txBody>
-          <a:bodyPr wrap="none">
-            <a:spAutoFit/>
-          </a:bodyPr>
-          <a:lstStyle/>
-          <a:p>
-            <a:pPr algn="ctr">
-              <a:defRPr sz="950" b="1">
-                <a:solidFill>
-                  <a:srgbClr val="111827"/>
-                </a:solidFill>
-                <a:latin typeface="Calibri"/>
-              </a:defRPr>
-            </a:pPr>
-            <a:r>
-              <a:t>$372K</a:t>
-            </a:r>
-          </a:p>
-        </p:txBody>
-      </p:sp>
-      <p:sp>
-        <p:nvSpPr>
-          <p:cNvPr id="161" name="Rectangle 160"/>
-          <p:cNvSpPr/>
-          <p:nvPr/>
-        </p:nvSpPr>
-        <p:spPr>
-          <a:xfrm>
-            <a:off x="6254496" y="3383280"/>
-            <a:ext cx="5705856" cy="256032"/>
-          </a:xfrm>
-          <a:prstGeom prst="rect">
-            <a:avLst/>
-          </a:prstGeom>
-          <a:solidFill>
-            <a:srgbClr val="F9FAFB"/>
-          </a:solidFill>
-          <a:ln>
-            <a:noFill/>
-          </a:ln>
-        </p:spPr>
-        <p:style>
-          <a:lnRef idx="1">
-            <a:schemeClr val="accent1"/>
-          </a:lnRef>
-          <a:fillRef idx="3">
-            <a:schemeClr val="accent1"/>
-          </a:fillRef>
-          <a:effectRef idx="2">
-            <a:schemeClr val="accent1"/>
-          </a:effectRef>
-          <a:fontRef idx="minor">
-            <a:schemeClr val="lt1"/>
-          </a:fontRef>
-        </p:style>
-        <p:txBody>
-          <a:bodyPr rtlCol="0" anchor="ctr"/>
-          <a:lstStyle/>
-          <a:p>
-            <a:pPr algn="ctr"/>
-          </a:p>
-        </p:txBody>
-      </p:sp>
-      <p:sp>
-        <p:nvSpPr>
-          <p:cNvPr id="162" name="TextBox 161"/>
-          <p:cNvSpPr txBox="1"/>
-          <p:nvPr/>
-        </p:nvSpPr>
-        <p:spPr>
-          <a:xfrm>
-            <a:off x="6254496" y="3401568"/>
-            <a:ext cx="411480" cy="237744"/>
-          </a:xfrm>
-          <a:prstGeom prst="rect">
-            <a:avLst/>
-          </a:prstGeom>
-          <a:noFill/>
-        </p:spPr>
-        <p:txBody>
-          <a:bodyPr wrap="none">
-            <a:spAutoFit/>
-          </a:bodyPr>
-          <a:lstStyle/>
-          <a:p>
-            <a:pPr algn="ctr">
-              <a:defRPr sz="950" b="1">
-                <a:solidFill>
-                  <a:srgbClr val="6B7280"/>
-                </a:solidFill>
-                <a:latin typeface="Calibri"/>
-              </a:defRPr>
-            </a:pPr>
-            <a:r>
-              <a:t>30</a:t>
-            </a:r>
-          </a:p>
-        </p:txBody>
-      </p:sp>
-      <p:sp>
-        <p:nvSpPr>
-          <p:cNvPr id="163" name="TextBox 162"/>
-          <p:cNvSpPr txBox="1"/>
-          <p:nvPr/>
-        </p:nvSpPr>
-        <p:spPr>
-          <a:xfrm>
-            <a:off x="6665976" y="3401568"/>
-            <a:ext cx="1920240" cy="237744"/>
-          </a:xfrm>
-          <a:prstGeom prst="rect">
-            <a:avLst/>
-          </a:prstGeom>
-          <a:noFill/>
-        </p:spPr>
-        <p:txBody>
-          <a:bodyPr wrap="none">
-            <a:spAutoFit/>
-          </a:bodyPr>
-          <a:lstStyle/>
-          <a:p>
-            <a:pPr algn="l">
-              <a:defRPr sz="950" b="1">
-                <a:solidFill>
-                  <a:srgbClr val="111827"/>
-                </a:solidFill>
-                <a:latin typeface="Calibri"/>
-              </a:defRPr>
-            </a:pPr>
-            <a:r>
-              <a:t>Michael Su</a:t>
-            </a:r>
-          </a:p>
-        </p:txBody>
-      </p:sp>
-      <p:sp>
-        <p:nvSpPr>
-          <p:cNvPr id="164" name="TextBox 163"/>
-          <p:cNvSpPr txBox="1"/>
-          <p:nvPr/>
-        </p:nvSpPr>
-        <p:spPr>
-          <a:xfrm>
-            <a:off x="8586216" y="3401568"/>
-            <a:ext cx="2459736" cy="237744"/>
-          </a:xfrm>
-          <a:prstGeom prst="rect">
-            <a:avLst/>
-          </a:prstGeom>
-          <a:noFill/>
-        </p:spPr>
-        <p:txBody>
-          <a:bodyPr wrap="none">
-            <a:spAutoFit/>
-          </a:bodyPr>
-          <a:lstStyle/>
-          <a:p>
-            <a:pPr algn="l">
-              <a:defRPr sz="950" b="0">
-                <a:solidFill>
-                  <a:srgbClr val="6B7280"/>
-                </a:solidFill>
-                <a:latin typeface="Calibri"/>
-              </a:defRPr>
-            </a:pPr>
-            <a:r>
-              <a:t>Jtc Insurance Agency, Inc.</a:t>
-            </a:r>
-          </a:p>
-        </p:txBody>
-      </p:sp>
-      <p:sp>
-        <p:nvSpPr>
-          <p:cNvPr id="165" name="TextBox 164"/>
-          <p:cNvSpPr txBox="1"/>
-          <p:nvPr/>
-        </p:nvSpPr>
-        <p:spPr>
-          <a:xfrm>
-            <a:off x="11045952" y="3401568"/>
-            <a:ext cx="914400" cy="237744"/>
-          </a:xfrm>
-          <a:prstGeom prst="rect">
-            <a:avLst/>
-          </a:prstGeom>
-          <a:noFill/>
-        </p:spPr>
-        <p:txBody>
-          <a:bodyPr wrap="none">
-            <a:spAutoFit/>
-          </a:bodyPr>
-          <a:lstStyle/>
-          <a:p>
-            <a:pPr algn="ctr">
-              <a:defRPr sz="950" b="1">
-                <a:solidFill>
-                  <a:srgbClr val="111827"/>
-                </a:solidFill>
-                <a:latin typeface="Calibri"/>
-              </a:defRPr>
-            </a:pPr>
-            <a:r>
-              <a:t>$367K</a:t>
-            </a:r>
-          </a:p>
-        </p:txBody>
-      </p:sp>
-      <p:sp>
-        <p:nvSpPr>
-          <p:cNvPr id="166" name="Rectangle 165"/>
-          <p:cNvSpPr/>
-          <p:nvPr/>
-        </p:nvSpPr>
-        <p:spPr>
-          <a:xfrm>
-            <a:off x="6254496" y="3639312"/>
-            <a:ext cx="5705856" cy="256032"/>
-          </a:xfrm>
-          <a:prstGeom prst="rect">
-            <a:avLst/>
-          </a:prstGeom>
-          <a:solidFill>
-            <a:srgbClr val="FFFFFF"/>
-          </a:solidFill>
-          <a:ln>
-            <a:noFill/>
-          </a:ln>
-        </p:spPr>
-        <p:style>
-          <a:lnRef idx="1">
-            <a:schemeClr val="accent1"/>
-          </a:lnRef>
-          <a:fillRef idx="3">
-            <a:schemeClr val="accent1"/>
-          </a:fillRef>
-          <a:effectRef idx="2">
-            <a:schemeClr val="accent1"/>
-          </a:effectRef>
-          <a:fontRef idx="minor">
-            <a:schemeClr val="lt1"/>
-          </a:fontRef>
-        </p:style>
-        <p:txBody>
-          <a:bodyPr rtlCol="0" anchor="ctr"/>
-          <a:lstStyle/>
-          <a:p>
-            <a:pPr algn="ctr"/>
-          </a:p>
-        </p:txBody>
-      </p:sp>
-      <p:sp>
-        <p:nvSpPr>
-          <p:cNvPr id="167" name="TextBox 166"/>
-          <p:cNvSpPr txBox="1"/>
-          <p:nvPr/>
-        </p:nvSpPr>
-        <p:spPr>
-          <a:xfrm>
-            <a:off x="6254496" y="3657600"/>
-            <a:ext cx="411480" cy="237744"/>
-          </a:xfrm>
-          <a:prstGeom prst="rect">
-            <a:avLst/>
-          </a:prstGeom>
-          <a:noFill/>
-        </p:spPr>
-        <p:txBody>
-          <a:bodyPr wrap="none">
-            <a:spAutoFit/>
-          </a:bodyPr>
-          <a:lstStyle/>
-          <a:p>
-            <a:pPr algn="ctr">
-              <a:defRPr sz="950" b="1">
-                <a:solidFill>
-                  <a:srgbClr val="6B7280"/>
-                </a:solidFill>
-                <a:latin typeface="Calibri"/>
-              </a:defRPr>
-            </a:pPr>
-            <a:r>
-              <a:t>31</a:t>
-            </a:r>
-          </a:p>
-        </p:txBody>
-      </p:sp>
-      <p:sp>
-        <p:nvSpPr>
-          <p:cNvPr id="168" name="TextBox 167"/>
-          <p:cNvSpPr txBox="1"/>
-          <p:nvPr/>
-        </p:nvSpPr>
-        <p:spPr>
-          <a:xfrm>
-            <a:off x="6665976" y="3657600"/>
-            <a:ext cx="1920240" cy="237744"/>
-          </a:xfrm>
-          <a:prstGeom prst="rect">
-            <a:avLst/>
-          </a:prstGeom>
-          <a:noFill/>
-        </p:spPr>
-        <p:txBody>
-          <a:bodyPr wrap="none">
-            <a:spAutoFit/>
-          </a:bodyPr>
-          <a:lstStyle/>
-          <a:p>
-            <a:pPr algn="l">
-              <a:defRPr sz="950" b="1">
-                <a:solidFill>
-                  <a:srgbClr val="111827"/>
-                </a:solidFill>
-                <a:latin typeface="Calibri"/>
-              </a:defRPr>
-            </a:pPr>
-            <a:r>
-              <a:t>Patricia Galindoparedes</a:t>
-            </a:r>
-          </a:p>
-        </p:txBody>
-      </p:sp>
-      <p:sp>
-        <p:nvSpPr>
-          <p:cNvPr id="169" name="TextBox 168"/>
-          <p:cNvSpPr txBox="1"/>
-          <p:nvPr/>
-        </p:nvSpPr>
-        <p:spPr>
-          <a:xfrm>
-            <a:off x="8586216" y="3657600"/>
-            <a:ext cx="2459736" cy="237744"/>
-          </a:xfrm>
-          <a:prstGeom prst="rect">
-            <a:avLst/>
-          </a:prstGeom>
-          <a:noFill/>
-        </p:spPr>
-        <p:txBody>
-          <a:bodyPr wrap="none">
-            <a:spAutoFit/>
-          </a:bodyPr>
-          <a:lstStyle/>
-          <a:p>
-            <a:pPr algn="l">
-              <a:defRPr sz="950" b="0">
-                <a:solidFill>
-                  <a:srgbClr val="6B7280"/>
-                </a:solidFill>
-                <a:latin typeface="Calibri"/>
-              </a:defRPr>
-            </a:pPr>
-            <a:r>
-              <a:t>Call Patty Insurance Services</a:t>
-            </a:r>
-          </a:p>
-        </p:txBody>
-      </p:sp>
-      <p:sp>
-        <p:nvSpPr>
-          <p:cNvPr id="170" name="TextBox 169"/>
-          <p:cNvSpPr txBox="1"/>
-          <p:nvPr/>
-        </p:nvSpPr>
-        <p:spPr>
-          <a:xfrm>
-            <a:off x="11045952" y="3657600"/>
-            <a:ext cx="914400" cy="237744"/>
-          </a:xfrm>
-          <a:prstGeom prst="rect">
-            <a:avLst/>
-          </a:prstGeom>
-          <a:noFill/>
-        </p:spPr>
-        <p:txBody>
-          <a:bodyPr wrap="none">
-            <a:spAutoFit/>
-          </a:bodyPr>
-          <a:lstStyle/>
-          <a:p>
-            <a:pPr algn="ctr">
-              <a:defRPr sz="950" b="1">
-                <a:solidFill>
-                  <a:srgbClr val="111827"/>
-                </a:solidFill>
-                <a:latin typeface="Calibri"/>
-              </a:defRPr>
-            </a:pPr>
-            <a:r>
-              <a:t>$362K</a:t>
-            </a:r>
-          </a:p>
-        </p:txBody>
-      </p:sp>
-      <p:sp>
-        <p:nvSpPr>
-          <p:cNvPr id="171" name="Rectangle 170"/>
-          <p:cNvSpPr/>
-          <p:nvPr/>
-        </p:nvSpPr>
-        <p:spPr>
-          <a:xfrm>
-            <a:off x="6254496" y="3895344"/>
-            <a:ext cx="5705856" cy="256032"/>
-          </a:xfrm>
-          <a:prstGeom prst="rect">
-            <a:avLst/>
-          </a:prstGeom>
-          <a:solidFill>
-            <a:srgbClr val="D1FAE5"/>
-          </a:solidFill>
-          <a:ln>
-            <a:noFill/>
-          </a:ln>
-        </p:spPr>
-        <p:style>
-          <a:lnRef idx="1">
-            <a:schemeClr val="accent1"/>
-          </a:lnRef>
-          <a:fillRef idx="3">
-            <a:schemeClr val="accent1"/>
-          </a:fillRef>
-          <a:effectRef idx="2">
-            <a:schemeClr val="accent1"/>
-          </a:effectRef>
-          <a:fontRef idx="minor">
-            <a:schemeClr val="lt1"/>
-          </a:fontRef>
-        </p:style>
-        <p:txBody>
-          <a:bodyPr rtlCol="0" anchor="ctr"/>
-          <a:lstStyle/>
-          <a:p>
-            <a:pPr algn="ctr"/>
-          </a:p>
-        </p:txBody>
-      </p:sp>
-      <p:sp>
-        <p:nvSpPr>
-          <p:cNvPr id="172" name="TextBox 171"/>
-          <p:cNvSpPr txBox="1"/>
-          <p:nvPr/>
-        </p:nvSpPr>
-        <p:spPr>
-          <a:xfrm>
-            <a:off x="6254496" y="3913632"/>
-            <a:ext cx="411480" cy="237744"/>
-          </a:xfrm>
-          <a:prstGeom prst="rect">
-            <a:avLst/>
-          </a:prstGeom>
-          <a:noFill/>
-        </p:spPr>
-        <p:txBody>
-          <a:bodyPr wrap="none">
-            <a:spAutoFit/>
-          </a:bodyPr>
-          <a:lstStyle/>
-          <a:p>
-            <a:pPr algn="ctr">
-              <a:defRPr sz="950" b="1">
-                <a:solidFill>
-                  <a:srgbClr val="6B7280"/>
-                </a:solidFill>
-                <a:latin typeface="Calibri"/>
-              </a:defRPr>
-            </a:pPr>
-            <a:r>
-              <a:t>32</a:t>
-            </a:r>
-          </a:p>
-        </p:txBody>
-      </p:sp>
-      <p:sp>
-        <p:nvSpPr>
-          <p:cNvPr id="173" name="TextBox 172"/>
-          <p:cNvSpPr txBox="1"/>
-          <p:nvPr/>
-        </p:nvSpPr>
-        <p:spPr>
-          <a:xfrm>
-            <a:off x="6665976" y="3913632"/>
-            <a:ext cx="1920240" cy="237744"/>
-          </a:xfrm>
-          <a:prstGeom prst="rect">
-            <a:avLst/>
-          </a:prstGeom>
-          <a:noFill/>
-        </p:spPr>
-        <p:txBody>
-          <a:bodyPr wrap="none">
-            <a:spAutoFit/>
-          </a:bodyPr>
-          <a:lstStyle/>
-          <a:p>
-            <a:pPr algn="l">
-              <a:defRPr sz="950" b="1">
-                <a:solidFill>
-                  <a:srgbClr val="111827"/>
-                </a:solidFill>
-                <a:latin typeface="Calibri"/>
-              </a:defRPr>
-            </a:pPr>
-            <a:r>
-              <a:t>Kurtis Gautz</a:t>
-            </a:r>
-          </a:p>
-        </p:txBody>
-      </p:sp>
-      <p:sp>
-        <p:nvSpPr>
-          <p:cNvPr id="174" name="TextBox 173"/>
-          <p:cNvSpPr txBox="1"/>
-          <p:nvPr/>
-        </p:nvSpPr>
-        <p:spPr>
-          <a:xfrm>
-            <a:off x="8586216" y="3913632"/>
-            <a:ext cx="2459736" cy="237744"/>
-          </a:xfrm>
-          <a:prstGeom prst="rect">
-            <a:avLst/>
-          </a:prstGeom>
-          <a:noFill/>
-        </p:spPr>
-        <p:txBody>
-          <a:bodyPr wrap="none">
-            <a:spAutoFit/>
-          </a:bodyPr>
-          <a:lstStyle/>
-          <a:p>
-            <a:pPr algn="l">
-              <a:defRPr sz="950" b="0">
-                <a:solidFill>
-                  <a:srgbClr val="6B7280"/>
-                </a:solidFill>
-                <a:latin typeface="Calibri"/>
-              </a:defRPr>
-            </a:pPr>
-            <a:r>
-              <a:t>CRC Insurance Services, Inc</a:t>
-            </a:r>
-          </a:p>
-        </p:txBody>
-      </p:sp>
-      <p:sp>
-        <p:nvSpPr>
-          <p:cNvPr id="175" name="TextBox 174"/>
-          <p:cNvSpPr txBox="1"/>
-          <p:nvPr/>
-        </p:nvSpPr>
-        <p:spPr>
-          <a:xfrm>
-            <a:off x="11045952" y="3913632"/>
-            <a:ext cx="914400" cy="237744"/>
-          </a:xfrm>
-          <a:prstGeom prst="rect">
-            <a:avLst/>
-          </a:prstGeom>
-          <a:noFill/>
-        </p:spPr>
-        <p:txBody>
-          <a:bodyPr wrap="none">
-            <a:spAutoFit/>
-          </a:bodyPr>
-          <a:lstStyle/>
-          <a:p>
-            <a:pPr algn="ctr">
-              <a:defRPr sz="950" b="1">
-                <a:solidFill>
-                  <a:srgbClr val="111827"/>
-                </a:solidFill>
-                <a:latin typeface="Calibri"/>
-              </a:defRPr>
-            </a:pPr>
-            <a:r>
-              <a:t>$355K</a:t>
-            </a:r>
-          </a:p>
-        </p:txBody>
-      </p:sp>
-      <p:sp>
-        <p:nvSpPr>
-          <p:cNvPr id="176" name="Rectangle 175"/>
-          <p:cNvSpPr/>
-          <p:nvPr/>
-        </p:nvSpPr>
-        <p:spPr>
-          <a:xfrm>
-            <a:off x="6254496" y="4151376"/>
-            <a:ext cx="5705856" cy="256032"/>
-          </a:xfrm>
-          <a:prstGeom prst="rect">
-            <a:avLst/>
-          </a:prstGeom>
-          <a:solidFill>
-            <a:srgbClr val="FFFFFF"/>
-          </a:solidFill>
-          <a:ln>
-            <a:noFill/>
-          </a:ln>
-        </p:spPr>
-        <p:style>
-          <a:lnRef idx="1">
-            <a:schemeClr val="accent1"/>
-          </a:lnRef>
-          <a:fillRef idx="3">
-            <a:schemeClr val="accent1"/>
-          </a:fillRef>
-          <a:effectRef idx="2">
-            <a:schemeClr val="accent1"/>
-          </a:effectRef>
-          <a:fontRef idx="minor">
-            <a:schemeClr val="lt1"/>
-          </a:fontRef>
-        </p:style>
-        <p:txBody>
-          <a:bodyPr rtlCol="0" anchor="ctr"/>
-          <a:lstStyle/>
-          <a:p>
-            <a:pPr algn="ctr"/>
-          </a:p>
-        </p:txBody>
-      </p:sp>
-      <p:sp>
-        <p:nvSpPr>
-          <p:cNvPr id="177" name="TextBox 176"/>
-          <p:cNvSpPr txBox="1"/>
-          <p:nvPr/>
-        </p:nvSpPr>
-        <p:spPr>
-          <a:xfrm>
-            <a:off x="6254496" y="4169664"/>
-            <a:ext cx="411480" cy="237744"/>
-          </a:xfrm>
-          <a:prstGeom prst="rect">
-            <a:avLst/>
-          </a:prstGeom>
-          <a:noFill/>
-        </p:spPr>
-        <p:txBody>
-          <a:bodyPr wrap="none">
-            <a:spAutoFit/>
-          </a:bodyPr>
-          <a:lstStyle/>
-          <a:p>
-            <a:pPr algn="ctr">
-              <a:defRPr sz="950" b="1">
-                <a:solidFill>
-                  <a:srgbClr val="6B7280"/>
-                </a:solidFill>
-                <a:latin typeface="Calibri"/>
-              </a:defRPr>
-            </a:pPr>
-            <a:r>
-              <a:t>33</a:t>
-            </a:r>
-          </a:p>
-        </p:txBody>
-      </p:sp>
-      <p:sp>
-        <p:nvSpPr>
-          <p:cNvPr id="178" name="TextBox 177"/>
-          <p:cNvSpPr txBox="1"/>
-          <p:nvPr/>
-        </p:nvSpPr>
-        <p:spPr>
-          <a:xfrm>
-            <a:off x="6665976" y="4169664"/>
-            <a:ext cx="1920240" cy="237744"/>
-          </a:xfrm>
-          <a:prstGeom prst="rect">
-            <a:avLst/>
-          </a:prstGeom>
-          <a:noFill/>
-        </p:spPr>
-        <p:txBody>
-          <a:bodyPr wrap="none">
-            <a:spAutoFit/>
-          </a:bodyPr>
-          <a:lstStyle/>
-          <a:p>
-            <a:pPr algn="l">
-              <a:defRPr sz="950" b="1">
-                <a:solidFill>
-                  <a:srgbClr val="111827"/>
-                </a:solidFill>
-                <a:latin typeface="Calibri"/>
-              </a:defRPr>
-            </a:pPr>
-            <a:r>
-              <a:t>Damandeep Singh</a:t>
-            </a:r>
-          </a:p>
-        </p:txBody>
-      </p:sp>
-      <p:sp>
-        <p:nvSpPr>
-          <p:cNvPr id="179" name="TextBox 178"/>
-          <p:cNvSpPr txBox="1"/>
-          <p:nvPr/>
-        </p:nvSpPr>
-        <p:spPr>
-          <a:xfrm>
-            <a:off x="8586216" y="4169664"/>
-            <a:ext cx="2459736" cy="237744"/>
-          </a:xfrm>
-          <a:prstGeom prst="rect">
-            <a:avLst/>
-          </a:prstGeom>
-          <a:noFill/>
-        </p:spPr>
-        <p:txBody>
-          <a:bodyPr wrap="none">
-            <a:spAutoFit/>
-          </a:bodyPr>
-          <a:lstStyle/>
-          <a:p>
-            <a:pPr algn="l">
-              <a:defRPr sz="950" b="0">
-                <a:solidFill>
-                  <a:srgbClr val="6B7280"/>
-                </a:solidFill>
-                <a:latin typeface="Calibri"/>
-              </a:defRPr>
-            </a:pPr>
-            <a:r>
-              <a:t>Mayflower Insurance Services</a:t>
-            </a:r>
-          </a:p>
-        </p:txBody>
-      </p:sp>
-      <p:sp>
-        <p:nvSpPr>
-          <p:cNvPr id="180" name="TextBox 179"/>
-          <p:cNvSpPr txBox="1"/>
-          <p:nvPr/>
-        </p:nvSpPr>
-        <p:spPr>
-          <a:xfrm>
-            <a:off x="11045952" y="4169664"/>
-            <a:ext cx="914400" cy="237744"/>
-          </a:xfrm>
-          <a:prstGeom prst="rect">
-            <a:avLst/>
-          </a:prstGeom>
-          <a:noFill/>
-        </p:spPr>
-        <p:txBody>
-          <a:bodyPr wrap="none">
-            <a:spAutoFit/>
-          </a:bodyPr>
-          <a:lstStyle/>
-          <a:p>
-            <a:pPr algn="ctr">
-              <a:defRPr sz="950" b="1">
-                <a:solidFill>
-                  <a:srgbClr val="111827"/>
-                </a:solidFill>
-                <a:latin typeface="Calibri"/>
-              </a:defRPr>
-            </a:pPr>
-            <a:r>
-              <a:t>$341K</a:t>
-            </a:r>
-          </a:p>
-        </p:txBody>
-      </p:sp>
-      <p:sp>
-        <p:nvSpPr>
-          <p:cNvPr id="181" name="Rectangle 180"/>
-          <p:cNvSpPr/>
-          <p:nvPr/>
-        </p:nvSpPr>
-        <p:spPr>
-          <a:xfrm>
-            <a:off x="6254496" y="4407408"/>
-            <a:ext cx="5705856" cy="256032"/>
-          </a:xfrm>
-          <a:prstGeom prst="rect">
-            <a:avLst/>
-          </a:prstGeom>
-          <a:solidFill>
-            <a:srgbClr val="D1FAE5"/>
-          </a:solidFill>
-          <a:ln>
-            <a:noFill/>
-          </a:ln>
-        </p:spPr>
-        <p:style>
-          <a:lnRef idx="1">
-            <a:schemeClr val="accent1"/>
-          </a:lnRef>
-          <a:fillRef idx="3">
-            <a:schemeClr val="accent1"/>
-          </a:fillRef>
-          <a:effectRef idx="2">
-            <a:schemeClr val="accent1"/>
-          </a:effectRef>
-          <a:fontRef idx="minor">
-            <a:schemeClr val="lt1"/>
-          </a:fontRef>
-        </p:style>
-        <p:txBody>
-          <a:bodyPr rtlCol="0" anchor="ctr"/>
-          <a:lstStyle/>
-          <a:p>
-            <a:pPr algn="ctr"/>
-          </a:p>
-        </p:txBody>
-      </p:sp>
-      <p:sp>
-        <p:nvSpPr>
-          <p:cNvPr id="182" name="TextBox 181"/>
-          <p:cNvSpPr txBox="1"/>
-          <p:nvPr/>
-        </p:nvSpPr>
-        <p:spPr>
-          <a:xfrm>
-            <a:off x="6254496" y="4425696"/>
-            <a:ext cx="411480" cy="237744"/>
-          </a:xfrm>
-          <a:prstGeom prst="rect">
-            <a:avLst/>
-          </a:prstGeom>
-          <a:noFill/>
-        </p:spPr>
-        <p:txBody>
-          <a:bodyPr wrap="none">
-            <a:spAutoFit/>
-          </a:bodyPr>
-          <a:lstStyle/>
-          <a:p>
-            <a:pPr algn="ctr">
-              <a:defRPr sz="950" b="1">
-                <a:solidFill>
-                  <a:srgbClr val="6B7280"/>
-                </a:solidFill>
-                <a:latin typeface="Calibri"/>
-              </a:defRPr>
-            </a:pPr>
-            <a:r>
-              <a:t>34</a:t>
-            </a:r>
-          </a:p>
-        </p:txBody>
-      </p:sp>
-      <p:sp>
-        <p:nvSpPr>
-          <p:cNvPr id="183" name="TextBox 182"/>
-          <p:cNvSpPr txBox="1"/>
-          <p:nvPr/>
-        </p:nvSpPr>
-        <p:spPr>
-          <a:xfrm>
-            <a:off x="6665976" y="4425696"/>
-            <a:ext cx="1920240" cy="237744"/>
-          </a:xfrm>
-          <a:prstGeom prst="rect">
-            <a:avLst/>
-          </a:prstGeom>
-          <a:noFill/>
-        </p:spPr>
-        <p:txBody>
-          <a:bodyPr wrap="none">
-            <a:spAutoFit/>
-          </a:bodyPr>
-          <a:lstStyle/>
-          <a:p>
-            <a:pPr algn="l">
-              <a:defRPr sz="950" b="1">
-                <a:solidFill>
-                  <a:srgbClr val="111827"/>
-                </a:solidFill>
-                <a:latin typeface="Calibri"/>
-              </a:defRPr>
-            </a:pPr>
-            <a:r>
-              <a:t>Lynda Inderjeet</a:t>
-            </a:r>
-          </a:p>
-        </p:txBody>
-      </p:sp>
-      <p:sp>
-        <p:nvSpPr>
-          <p:cNvPr id="184" name="TextBox 183"/>
-          <p:cNvSpPr txBox="1"/>
-          <p:nvPr/>
-        </p:nvSpPr>
-        <p:spPr>
-          <a:xfrm>
-            <a:off x="8586216" y="4425696"/>
-            <a:ext cx="2459736" cy="237744"/>
-          </a:xfrm>
-          <a:prstGeom prst="rect">
-            <a:avLst/>
-          </a:prstGeom>
-          <a:noFill/>
-        </p:spPr>
-        <p:txBody>
-          <a:bodyPr wrap="none">
-            <a:spAutoFit/>
-          </a:bodyPr>
-          <a:lstStyle/>
-          <a:p>
-            <a:pPr algn="l">
-              <a:defRPr sz="950" b="0">
-                <a:solidFill>
-                  <a:srgbClr val="6B7280"/>
-                </a:solidFill>
-                <a:latin typeface="Calibri"/>
-              </a:defRPr>
-            </a:pPr>
-            <a:r>
-              <a:t>R-T Specialty, LLC</a:t>
-            </a:r>
-          </a:p>
-        </p:txBody>
-      </p:sp>
-      <p:sp>
-        <p:nvSpPr>
-          <p:cNvPr id="185" name="TextBox 184"/>
-          <p:cNvSpPr txBox="1"/>
-          <p:nvPr/>
-        </p:nvSpPr>
-        <p:spPr>
-          <a:xfrm>
-            <a:off x="11045952" y="4425696"/>
-            <a:ext cx="914400" cy="237744"/>
-          </a:xfrm>
-          <a:prstGeom prst="rect">
-            <a:avLst/>
-          </a:prstGeom>
-          <a:noFill/>
-        </p:spPr>
-        <p:txBody>
-          <a:bodyPr wrap="none">
-            <a:spAutoFit/>
-          </a:bodyPr>
-          <a:lstStyle/>
-          <a:p>
-            <a:pPr algn="ctr">
-              <a:defRPr sz="950" b="1">
-                <a:solidFill>
-                  <a:srgbClr val="111827"/>
-                </a:solidFill>
-                <a:latin typeface="Calibri"/>
-              </a:defRPr>
-            </a:pPr>
-            <a:r>
-              <a:t>$327K</a:t>
-            </a:r>
-          </a:p>
-        </p:txBody>
-      </p:sp>
-      <p:sp>
-        <p:nvSpPr>
-          <p:cNvPr id="186" name="Rectangle 185"/>
-          <p:cNvSpPr/>
-          <p:nvPr/>
-        </p:nvSpPr>
-        <p:spPr>
-          <a:xfrm>
-            <a:off x="6254496" y="4663440"/>
-            <a:ext cx="5705856" cy="256032"/>
-          </a:xfrm>
-          <a:prstGeom prst="rect">
-            <a:avLst/>
-          </a:prstGeom>
-          <a:solidFill>
-            <a:srgbClr val="FFFFFF"/>
-          </a:solidFill>
-          <a:ln>
-            <a:noFill/>
-          </a:ln>
-        </p:spPr>
-        <p:style>
-          <a:lnRef idx="1">
-            <a:schemeClr val="accent1"/>
-          </a:lnRef>
-          <a:fillRef idx="3">
-            <a:schemeClr val="accent1"/>
-          </a:fillRef>
-          <a:effectRef idx="2">
-            <a:schemeClr val="accent1"/>
-          </a:effectRef>
-          <a:fontRef idx="minor">
-            <a:schemeClr val="lt1"/>
-          </a:fontRef>
-        </p:style>
-        <p:txBody>
-          <a:bodyPr rtlCol="0" anchor="ctr"/>
-          <a:lstStyle/>
-          <a:p>
-            <a:pPr algn="ctr"/>
-          </a:p>
-        </p:txBody>
-      </p:sp>
-      <p:sp>
-        <p:nvSpPr>
-          <p:cNvPr id="187" name="TextBox 186"/>
-          <p:cNvSpPr txBox="1"/>
-          <p:nvPr/>
-        </p:nvSpPr>
-        <p:spPr>
-          <a:xfrm>
-            <a:off x="6254496" y="4681728"/>
-            <a:ext cx="411480" cy="237744"/>
-          </a:xfrm>
-          <a:prstGeom prst="rect">
-            <a:avLst/>
-          </a:prstGeom>
-          <a:noFill/>
-        </p:spPr>
-        <p:txBody>
-          <a:bodyPr wrap="none">
-            <a:spAutoFit/>
-          </a:bodyPr>
-          <a:lstStyle/>
-          <a:p>
-            <a:pPr algn="ctr">
-              <a:defRPr sz="950" b="1">
-                <a:solidFill>
-                  <a:srgbClr val="6B7280"/>
-                </a:solidFill>
-                <a:latin typeface="Calibri"/>
-              </a:defRPr>
-            </a:pPr>
-            <a:r>
-              <a:t>35</a:t>
-            </a:r>
-          </a:p>
-        </p:txBody>
-      </p:sp>
-      <p:sp>
-        <p:nvSpPr>
-          <p:cNvPr id="188" name="TextBox 187"/>
-          <p:cNvSpPr txBox="1"/>
-          <p:nvPr/>
-        </p:nvSpPr>
-        <p:spPr>
-          <a:xfrm>
-            <a:off x="6665976" y="4681728"/>
-            <a:ext cx="1920240" cy="237744"/>
-          </a:xfrm>
-          <a:prstGeom prst="rect">
-            <a:avLst/>
-          </a:prstGeom>
-          <a:noFill/>
-        </p:spPr>
-        <p:txBody>
-          <a:bodyPr wrap="none">
-            <a:spAutoFit/>
-          </a:bodyPr>
-          <a:lstStyle/>
-          <a:p>
-            <a:pPr algn="l">
-              <a:defRPr sz="950" b="1">
-                <a:solidFill>
-                  <a:srgbClr val="111827"/>
-                </a:solidFill>
-                <a:latin typeface="Calibri"/>
-              </a:defRPr>
-            </a:pPr>
-            <a:r>
-              <a:t>Nicholas Banks</a:t>
-            </a:r>
-          </a:p>
-        </p:txBody>
-      </p:sp>
-      <p:sp>
-        <p:nvSpPr>
-          <p:cNvPr id="189" name="TextBox 188"/>
-          <p:cNvSpPr txBox="1"/>
-          <p:nvPr/>
-        </p:nvSpPr>
-        <p:spPr>
-          <a:xfrm>
-            <a:off x="8586216" y="4681728"/>
-            <a:ext cx="2459736" cy="237744"/>
-          </a:xfrm>
-          <a:prstGeom prst="rect">
-            <a:avLst/>
-          </a:prstGeom>
-          <a:noFill/>
-        </p:spPr>
-        <p:txBody>
-          <a:bodyPr wrap="none">
-            <a:spAutoFit/>
-          </a:bodyPr>
-          <a:lstStyle/>
-          <a:p>
-            <a:pPr algn="l">
-              <a:defRPr sz="950" b="0">
-                <a:solidFill>
-                  <a:srgbClr val="6B7280"/>
-                </a:solidFill>
-                <a:latin typeface="Calibri"/>
-              </a:defRPr>
-            </a:pPr>
-            <a:r>
-              <a:t>Reliance Partners, LLC</a:t>
-            </a:r>
-          </a:p>
-        </p:txBody>
-      </p:sp>
-      <p:sp>
-        <p:nvSpPr>
-          <p:cNvPr id="190" name="TextBox 189"/>
-          <p:cNvSpPr txBox="1"/>
-          <p:nvPr/>
-        </p:nvSpPr>
-        <p:spPr>
-          <a:xfrm>
-            <a:off x="11045952" y="4681728"/>
-            <a:ext cx="914400" cy="237744"/>
-          </a:xfrm>
-          <a:prstGeom prst="rect">
-            <a:avLst/>
-          </a:prstGeom>
-          <a:noFill/>
-        </p:spPr>
-        <p:txBody>
-          <a:bodyPr wrap="none">
-            <a:spAutoFit/>
-          </a:bodyPr>
-          <a:lstStyle/>
-          <a:p>
-            <a:pPr algn="ctr">
-              <a:defRPr sz="950" b="1">
-                <a:solidFill>
-                  <a:srgbClr val="111827"/>
-                </a:solidFill>
-                <a:latin typeface="Calibri"/>
-              </a:defRPr>
-            </a:pPr>
-            <a:r>
-              <a:t>$326K</a:t>
-            </a:r>
-          </a:p>
-        </p:txBody>
-      </p:sp>
-      <p:sp>
-        <p:nvSpPr>
-          <p:cNvPr id="191" name="Rectangle 190"/>
-          <p:cNvSpPr/>
-          <p:nvPr/>
-        </p:nvSpPr>
-        <p:spPr>
-          <a:xfrm>
-            <a:off x="6254496" y="4919472"/>
-            <a:ext cx="5705856" cy="256032"/>
-          </a:xfrm>
-          <a:prstGeom prst="rect">
-            <a:avLst/>
-          </a:prstGeom>
-          <a:solidFill>
-            <a:srgbClr val="F9FAFB"/>
-          </a:solidFill>
-          <a:ln>
-            <a:noFill/>
-          </a:ln>
-        </p:spPr>
-        <p:style>
-          <a:lnRef idx="1">
-            <a:schemeClr val="accent1"/>
-          </a:lnRef>
-          <a:fillRef idx="3">
-            <a:schemeClr val="accent1"/>
-          </a:fillRef>
-          <a:effectRef idx="2">
-            <a:schemeClr val="accent1"/>
-          </a:effectRef>
-          <a:fontRef idx="minor">
-            <a:schemeClr val="lt1"/>
-          </a:fontRef>
-        </p:style>
-        <p:txBody>
-          <a:bodyPr rtlCol="0" anchor="ctr"/>
-          <a:lstStyle/>
-          <a:p>
-            <a:pPr algn="ctr"/>
-          </a:p>
-        </p:txBody>
-      </p:sp>
-      <p:sp>
-        <p:nvSpPr>
-          <p:cNvPr id="192" name="TextBox 191"/>
-          <p:cNvSpPr txBox="1"/>
-          <p:nvPr/>
-        </p:nvSpPr>
-        <p:spPr>
-          <a:xfrm>
-            <a:off x="6254496" y="4937760"/>
-            <a:ext cx="411480" cy="237744"/>
-          </a:xfrm>
-          <a:prstGeom prst="rect">
-            <a:avLst/>
-          </a:prstGeom>
-          <a:noFill/>
-        </p:spPr>
-        <p:txBody>
-          <a:bodyPr wrap="none">
-            <a:spAutoFit/>
-          </a:bodyPr>
-          <a:lstStyle/>
-          <a:p>
-            <a:pPr algn="ctr">
-              <a:defRPr sz="950" b="1">
-                <a:solidFill>
-                  <a:srgbClr val="6B7280"/>
-                </a:solidFill>
-                <a:latin typeface="Calibri"/>
-              </a:defRPr>
-            </a:pPr>
-            <a:r>
-              <a:t>36</a:t>
-            </a:r>
-          </a:p>
-        </p:txBody>
-      </p:sp>
-      <p:sp>
-        <p:nvSpPr>
-          <p:cNvPr id="193" name="TextBox 192"/>
-          <p:cNvSpPr txBox="1"/>
-          <p:nvPr/>
-        </p:nvSpPr>
-        <p:spPr>
-          <a:xfrm>
-            <a:off x="6665976" y="4937760"/>
-            <a:ext cx="1920240" cy="237744"/>
-          </a:xfrm>
-          <a:prstGeom prst="rect">
-            <a:avLst/>
-          </a:prstGeom>
-          <a:noFill/>
-        </p:spPr>
-        <p:txBody>
-          <a:bodyPr wrap="none">
-            <a:spAutoFit/>
-          </a:bodyPr>
-          <a:lstStyle/>
-          <a:p>
-            <a:pPr algn="l">
-              <a:defRPr sz="950" b="1">
-                <a:solidFill>
-                  <a:srgbClr val="111827"/>
-                </a:solidFill>
-                <a:latin typeface="Calibri"/>
-              </a:defRPr>
-            </a:pPr>
-            <a:r>
-              <a:t>Vladimir Tesler</a:t>
-            </a:r>
-          </a:p>
-        </p:txBody>
-      </p:sp>
-      <p:sp>
-        <p:nvSpPr>
-          <p:cNvPr id="194" name="TextBox 193"/>
-          <p:cNvSpPr txBox="1"/>
-          <p:nvPr/>
-        </p:nvSpPr>
-        <p:spPr>
-          <a:xfrm>
-            <a:off x="8586216" y="4937760"/>
-            <a:ext cx="2459736" cy="237744"/>
-          </a:xfrm>
-          <a:prstGeom prst="rect">
-            <a:avLst/>
-          </a:prstGeom>
-          <a:noFill/>
-        </p:spPr>
-        <p:txBody>
-          <a:bodyPr wrap="none">
-            <a:spAutoFit/>
-          </a:bodyPr>
-          <a:lstStyle/>
-          <a:p>
-            <a:pPr algn="l">
-              <a:defRPr sz="950" b="0">
-                <a:solidFill>
-                  <a:srgbClr val="6B7280"/>
-                </a:solidFill>
-                <a:latin typeface="Calibri"/>
-              </a:defRPr>
-            </a:pPr>
-            <a:r>
-              <a:t>Insurance Planet</a:t>
-            </a:r>
-          </a:p>
-        </p:txBody>
-      </p:sp>
-      <p:sp>
-        <p:nvSpPr>
-          <p:cNvPr id="195" name="TextBox 194"/>
-          <p:cNvSpPr txBox="1"/>
-          <p:nvPr/>
-        </p:nvSpPr>
-        <p:spPr>
-          <a:xfrm>
-            <a:off x="11045952" y="4937760"/>
-            <a:ext cx="914400" cy="237744"/>
-          </a:xfrm>
-          <a:prstGeom prst="rect">
-            <a:avLst/>
-          </a:prstGeom>
-          <a:noFill/>
-        </p:spPr>
-        <p:txBody>
-          <a:bodyPr wrap="none">
-            <a:spAutoFit/>
-          </a:bodyPr>
-          <a:lstStyle/>
-          <a:p>
-            <a:pPr algn="ctr">
-              <a:defRPr sz="950" b="1">
-                <a:solidFill>
-                  <a:srgbClr val="111827"/>
-                </a:solidFill>
-                <a:latin typeface="Calibri"/>
-              </a:defRPr>
-            </a:pPr>
-            <a:r>
-              <a:t>$326K</a:t>
-            </a:r>
-          </a:p>
-        </p:txBody>
-      </p:sp>
-      <p:sp>
-        <p:nvSpPr>
-          <p:cNvPr id="196" name="Rectangle 195"/>
-          <p:cNvSpPr/>
-          <p:nvPr/>
-        </p:nvSpPr>
-        <p:spPr>
-          <a:xfrm>
-            <a:off x="6254496" y="5175504"/>
-            <a:ext cx="5705856" cy="256032"/>
-          </a:xfrm>
-          <a:prstGeom prst="rect">
-            <a:avLst/>
-          </a:prstGeom>
-          <a:solidFill>
-            <a:srgbClr val="FFFFFF"/>
-          </a:solidFill>
-          <a:ln>
-            <a:noFill/>
-          </a:ln>
-        </p:spPr>
-        <p:style>
-          <a:lnRef idx="1">
-            <a:schemeClr val="accent1"/>
-          </a:lnRef>
-          <a:fillRef idx="3">
-            <a:schemeClr val="accent1"/>
-          </a:fillRef>
-          <a:effectRef idx="2">
-            <a:schemeClr val="accent1"/>
-          </a:effectRef>
-          <a:fontRef idx="minor">
-            <a:schemeClr val="lt1"/>
-          </a:fontRef>
-        </p:style>
-        <p:txBody>
-          <a:bodyPr rtlCol="0" anchor="ctr"/>
-          <a:lstStyle/>
-          <a:p>
-            <a:pPr algn="ctr"/>
-          </a:p>
-        </p:txBody>
-      </p:sp>
-      <p:sp>
-        <p:nvSpPr>
-          <p:cNvPr id="197" name="TextBox 196"/>
-          <p:cNvSpPr txBox="1"/>
-          <p:nvPr/>
-        </p:nvSpPr>
-        <p:spPr>
-          <a:xfrm>
-            <a:off x="6254496" y="5193792"/>
-            <a:ext cx="411480" cy="237744"/>
-          </a:xfrm>
-          <a:prstGeom prst="rect">
-            <a:avLst/>
-          </a:prstGeom>
-          <a:noFill/>
-        </p:spPr>
-        <p:txBody>
-          <a:bodyPr wrap="none">
-            <a:spAutoFit/>
-          </a:bodyPr>
-          <a:lstStyle/>
-          <a:p>
-            <a:pPr algn="ctr">
-              <a:defRPr sz="950" b="1">
-                <a:solidFill>
-                  <a:srgbClr val="6B7280"/>
-                </a:solidFill>
-                <a:latin typeface="Calibri"/>
-              </a:defRPr>
-            </a:pPr>
-            <a:r>
-              <a:t>37</a:t>
-            </a:r>
-          </a:p>
-        </p:txBody>
-      </p:sp>
-      <p:sp>
-        <p:nvSpPr>
-          <p:cNvPr id="198" name="TextBox 197"/>
-          <p:cNvSpPr txBox="1"/>
-          <p:nvPr/>
-        </p:nvSpPr>
-        <p:spPr>
-          <a:xfrm>
-            <a:off x="6665976" y="5193792"/>
-            <a:ext cx="1920240" cy="237744"/>
-          </a:xfrm>
-          <a:prstGeom prst="rect">
-            <a:avLst/>
-          </a:prstGeom>
-          <a:noFill/>
-        </p:spPr>
-        <p:txBody>
-          <a:bodyPr wrap="none">
-            <a:spAutoFit/>
-          </a:bodyPr>
-          <a:lstStyle/>
-          <a:p>
-            <a:pPr algn="l">
-              <a:defRPr sz="950" b="1">
-                <a:solidFill>
-                  <a:srgbClr val="111827"/>
-                </a:solidFill>
-                <a:latin typeface="Calibri"/>
-              </a:defRPr>
-            </a:pPr>
-            <a:r>
-              <a:t>Venizelos Papadopulos</a:t>
-            </a:r>
-          </a:p>
-        </p:txBody>
-      </p:sp>
-      <p:sp>
-        <p:nvSpPr>
-          <p:cNvPr id="199" name="TextBox 198"/>
-          <p:cNvSpPr txBox="1"/>
-          <p:nvPr/>
-        </p:nvSpPr>
-        <p:spPr>
-          <a:xfrm>
-            <a:off x="8586216" y="5193792"/>
-            <a:ext cx="2459736" cy="237744"/>
-          </a:xfrm>
-          <a:prstGeom prst="rect">
-            <a:avLst/>
-          </a:prstGeom>
-          <a:noFill/>
-        </p:spPr>
-        <p:txBody>
-          <a:bodyPr wrap="none">
-            <a:spAutoFit/>
-          </a:bodyPr>
-          <a:lstStyle/>
-          <a:p>
-            <a:pPr algn="l">
-              <a:defRPr sz="950" b="0">
-                <a:solidFill>
-                  <a:srgbClr val="6B7280"/>
-                </a:solidFill>
-                <a:latin typeface="Calibri"/>
-              </a:defRPr>
-            </a:pPr>
-            <a:r>
-              <a:t>Exclusive Financial Services, Inc</a:t>
-            </a:r>
-          </a:p>
-        </p:txBody>
-      </p:sp>
-      <p:sp>
-        <p:nvSpPr>
-          <p:cNvPr id="200" name="TextBox 199"/>
-          <p:cNvSpPr txBox="1"/>
-          <p:nvPr/>
-        </p:nvSpPr>
-        <p:spPr>
-          <a:xfrm>
-            <a:off x="11045952" y="5193792"/>
-            <a:ext cx="914400" cy="237744"/>
-          </a:xfrm>
-          <a:prstGeom prst="rect">
-            <a:avLst/>
-          </a:prstGeom>
-          <a:noFill/>
-        </p:spPr>
-        <p:txBody>
-          <a:bodyPr wrap="none">
-            <a:spAutoFit/>
-          </a:bodyPr>
-          <a:lstStyle/>
-          <a:p>
-            <a:pPr algn="ctr">
-              <a:defRPr sz="950" b="1">
-                <a:solidFill>
-                  <a:srgbClr val="111827"/>
-                </a:solidFill>
-                <a:latin typeface="Calibri"/>
-              </a:defRPr>
-            </a:pPr>
-            <a:r>
-              <a:t>$321K</a:t>
-            </a:r>
-          </a:p>
-        </p:txBody>
-      </p:sp>
-      <p:sp>
-        <p:nvSpPr>
-          <p:cNvPr id="201" name="Rectangle 200"/>
-          <p:cNvSpPr/>
-          <p:nvPr/>
-        </p:nvSpPr>
-        <p:spPr>
-          <a:xfrm>
-            <a:off x="6254496" y="5431536"/>
-            <a:ext cx="5705856" cy="256032"/>
-          </a:xfrm>
-          <a:prstGeom prst="rect">
-            <a:avLst/>
-          </a:prstGeom>
-          <a:solidFill>
-            <a:srgbClr val="F9FAFB"/>
-          </a:solidFill>
-          <a:ln>
-            <a:noFill/>
-          </a:ln>
-        </p:spPr>
-        <p:style>
-          <a:lnRef idx="1">
-            <a:schemeClr val="accent1"/>
-          </a:lnRef>
-          <a:fillRef idx="3">
-            <a:schemeClr val="accent1"/>
-          </a:fillRef>
-          <a:effectRef idx="2">
-            <a:schemeClr val="accent1"/>
-          </a:effectRef>
-          <a:fontRef idx="minor">
-            <a:schemeClr val="lt1"/>
-          </a:fontRef>
-        </p:style>
-        <p:txBody>
-          <a:bodyPr rtlCol="0" anchor="ctr"/>
-          <a:lstStyle/>
-          <a:p>
-            <a:pPr algn="ctr"/>
-          </a:p>
-        </p:txBody>
-      </p:sp>
-      <p:sp>
-        <p:nvSpPr>
-          <p:cNvPr id="202" name="TextBox 201"/>
-          <p:cNvSpPr txBox="1"/>
-          <p:nvPr/>
-        </p:nvSpPr>
-        <p:spPr>
-          <a:xfrm>
-            <a:off x="6254496" y="5449824"/>
-            <a:ext cx="411480" cy="237744"/>
-          </a:xfrm>
-          <a:prstGeom prst="rect">
-            <a:avLst/>
-          </a:prstGeom>
-          <a:noFill/>
-        </p:spPr>
-        <p:txBody>
-          <a:bodyPr wrap="none">
-            <a:spAutoFit/>
-          </a:bodyPr>
-          <a:lstStyle/>
-          <a:p>
-            <a:pPr algn="ctr">
-              <a:defRPr sz="950" b="1">
-                <a:solidFill>
-                  <a:srgbClr val="6B7280"/>
-                </a:solidFill>
-                <a:latin typeface="Calibri"/>
-              </a:defRPr>
-            </a:pPr>
-            <a:r>
-              <a:t>38</a:t>
-            </a:r>
-          </a:p>
-        </p:txBody>
-      </p:sp>
-      <p:sp>
-        <p:nvSpPr>
-          <p:cNvPr id="203" name="TextBox 202"/>
-          <p:cNvSpPr txBox="1"/>
-          <p:nvPr/>
-        </p:nvSpPr>
-        <p:spPr>
-          <a:xfrm>
-            <a:off x="6665976" y="5449824"/>
-            <a:ext cx="1920240" cy="237744"/>
-          </a:xfrm>
-          <a:prstGeom prst="rect">
-            <a:avLst/>
-          </a:prstGeom>
-          <a:noFill/>
-        </p:spPr>
-        <p:txBody>
-          <a:bodyPr wrap="none">
-            <a:spAutoFit/>
-          </a:bodyPr>
-          <a:lstStyle/>
-          <a:p>
-            <a:pPr algn="l">
-              <a:defRPr sz="950" b="1">
-                <a:solidFill>
-                  <a:srgbClr val="111827"/>
-                </a:solidFill>
-                <a:latin typeface="Calibri"/>
-              </a:defRPr>
-            </a:pPr>
-            <a:r>
-              <a:t>Scarlette Mcbrayer</a:t>
-            </a:r>
-          </a:p>
-        </p:txBody>
-      </p:sp>
-      <p:sp>
-        <p:nvSpPr>
-          <p:cNvPr id="204" name="TextBox 203"/>
-          <p:cNvSpPr txBox="1"/>
-          <p:nvPr/>
-        </p:nvSpPr>
-        <p:spPr>
-          <a:xfrm>
-            <a:off x="8586216" y="5449824"/>
-            <a:ext cx="2459736" cy="237744"/>
-          </a:xfrm>
-          <a:prstGeom prst="rect">
-            <a:avLst/>
-          </a:prstGeom>
-          <a:noFill/>
-        </p:spPr>
-        <p:txBody>
-          <a:bodyPr wrap="none">
-            <a:spAutoFit/>
-          </a:bodyPr>
-          <a:lstStyle/>
-          <a:p>
-            <a:pPr algn="l">
-              <a:defRPr sz="950" b="0">
-                <a:solidFill>
-                  <a:srgbClr val="6B7280"/>
-                </a:solidFill>
-                <a:latin typeface="Calibri"/>
-              </a:defRPr>
-            </a:pPr>
-            <a:r>
-              <a:t>Reliance Partners, LLC</a:t>
-            </a:r>
-          </a:p>
-        </p:txBody>
-      </p:sp>
-      <p:sp>
-        <p:nvSpPr>
-          <p:cNvPr id="205" name="TextBox 204"/>
-          <p:cNvSpPr txBox="1"/>
-          <p:nvPr/>
-        </p:nvSpPr>
-        <p:spPr>
-          <a:xfrm>
-            <a:off x="11045952" y="5449824"/>
-            <a:ext cx="914400" cy="237744"/>
-          </a:xfrm>
-          <a:prstGeom prst="rect">
-            <a:avLst/>
-          </a:prstGeom>
-          <a:noFill/>
-        </p:spPr>
-        <p:txBody>
-          <a:bodyPr wrap="none">
-            <a:spAutoFit/>
-          </a:bodyPr>
-          <a:lstStyle/>
-          <a:p>
-            <a:pPr algn="ctr">
-              <a:defRPr sz="950" b="1">
-                <a:solidFill>
-                  <a:srgbClr val="111827"/>
-                </a:solidFill>
-                <a:latin typeface="Calibri"/>
-              </a:defRPr>
-            </a:pPr>
-            <a:r>
-              <a:t>$315K</a:t>
-            </a:r>
-          </a:p>
-        </p:txBody>
-      </p:sp>
-      <p:sp>
-        <p:nvSpPr>
-          <p:cNvPr id="206" name="Rectangle 205"/>
-          <p:cNvSpPr/>
-          <p:nvPr/>
-        </p:nvSpPr>
-        <p:spPr>
-          <a:xfrm>
-            <a:off x="6254496" y="5687568"/>
-            <a:ext cx="5705856" cy="256032"/>
-          </a:xfrm>
-          <a:prstGeom prst="rect">
-            <a:avLst/>
-          </a:prstGeom>
-          <a:solidFill>
-            <a:srgbClr val="FFFFFF"/>
-          </a:solidFill>
-          <a:ln>
-            <a:noFill/>
-          </a:ln>
-        </p:spPr>
-        <p:style>
-          <a:lnRef idx="1">
-            <a:schemeClr val="accent1"/>
-          </a:lnRef>
-          <a:fillRef idx="3">
-            <a:schemeClr val="accent1"/>
-          </a:fillRef>
-          <a:effectRef idx="2">
-            <a:schemeClr val="accent1"/>
-          </a:effectRef>
-          <a:fontRef idx="minor">
-            <a:schemeClr val="lt1"/>
-          </a:fontRef>
-        </p:style>
-        <p:txBody>
-          <a:bodyPr rtlCol="0" anchor="ctr"/>
-          <a:lstStyle/>
-          <a:p>
-            <a:pPr algn="ctr"/>
-          </a:p>
-        </p:txBody>
-      </p:sp>
-      <p:sp>
-        <p:nvSpPr>
-          <p:cNvPr id="207" name="TextBox 206"/>
-          <p:cNvSpPr txBox="1"/>
-          <p:nvPr/>
-        </p:nvSpPr>
-        <p:spPr>
-          <a:xfrm>
-            <a:off x="6254496" y="5705856"/>
-            <a:ext cx="411480" cy="237744"/>
-          </a:xfrm>
-          <a:prstGeom prst="rect">
-            <a:avLst/>
-          </a:prstGeom>
-          <a:noFill/>
-        </p:spPr>
-        <p:txBody>
-          <a:bodyPr wrap="none">
-            <a:spAutoFit/>
-          </a:bodyPr>
-          <a:lstStyle/>
-          <a:p>
-            <a:pPr algn="ctr">
-              <a:defRPr sz="950" b="1">
-                <a:solidFill>
-                  <a:srgbClr val="6B7280"/>
-                </a:solidFill>
-                <a:latin typeface="Calibri"/>
-              </a:defRPr>
-            </a:pPr>
-            <a:r>
-              <a:t>39</a:t>
-            </a:r>
-          </a:p>
-        </p:txBody>
-      </p:sp>
-      <p:sp>
-        <p:nvSpPr>
-          <p:cNvPr id="208" name="TextBox 207"/>
-          <p:cNvSpPr txBox="1"/>
-          <p:nvPr/>
-        </p:nvSpPr>
-        <p:spPr>
-          <a:xfrm>
-            <a:off x="6665976" y="5705856"/>
-            <a:ext cx="1920240" cy="237744"/>
-          </a:xfrm>
-          <a:prstGeom prst="rect">
-            <a:avLst/>
-          </a:prstGeom>
-          <a:noFill/>
-        </p:spPr>
-        <p:txBody>
-          <a:bodyPr wrap="none">
-            <a:spAutoFit/>
-          </a:bodyPr>
-          <a:lstStyle/>
-          <a:p>
-            <a:pPr algn="l">
-              <a:defRPr sz="950" b="1">
-                <a:solidFill>
-                  <a:srgbClr val="111827"/>
-                </a:solidFill>
-                <a:latin typeface="Calibri"/>
-              </a:defRPr>
-            </a:pPr>
-            <a:r>
-              <a:t>Omar Elmanzalawy</a:t>
-            </a:r>
-          </a:p>
-        </p:txBody>
-      </p:sp>
-      <p:sp>
-        <p:nvSpPr>
-          <p:cNvPr id="209" name="TextBox 208"/>
-          <p:cNvSpPr txBox="1"/>
-          <p:nvPr/>
-        </p:nvSpPr>
-        <p:spPr>
-          <a:xfrm>
-            <a:off x="8586216" y="5705856"/>
-            <a:ext cx="2459736" cy="237744"/>
-          </a:xfrm>
-          <a:prstGeom prst="rect">
-            <a:avLst/>
-          </a:prstGeom>
-          <a:noFill/>
-        </p:spPr>
-        <p:txBody>
-          <a:bodyPr wrap="none">
-            <a:spAutoFit/>
-          </a:bodyPr>
-          <a:lstStyle/>
-          <a:p>
-            <a:pPr algn="l">
-              <a:defRPr sz="950" b="0">
-                <a:solidFill>
-                  <a:srgbClr val="6B7280"/>
-                </a:solidFill>
-                <a:latin typeface="Calibri"/>
-              </a:defRPr>
-            </a:pPr>
-            <a:r>
-              <a:t>First Connect Insurance</a:t>
-            </a:r>
-          </a:p>
-        </p:txBody>
-      </p:sp>
-      <p:sp>
-        <p:nvSpPr>
-          <p:cNvPr id="210" name="TextBox 209"/>
-          <p:cNvSpPr txBox="1"/>
-          <p:nvPr/>
-        </p:nvSpPr>
-        <p:spPr>
-          <a:xfrm>
-            <a:off x="11045952" y="5705856"/>
-            <a:ext cx="914400" cy="237744"/>
-          </a:xfrm>
-          <a:prstGeom prst="rect">
-            <a:avLst/>
-          </a:prstGeom>
-          <a:noFill/>
-        </p:spPr>
-        <p:txBody>
-          <a:bodyPr wrap="none">
-            <a:spAutoFit/>
-          </a:bodyPr>
-          <a:lstStyle/>
-          <a:p>
-            <a:pPr algn="ctr">
-              <a:defRPr sz="950" b="1">
-                <a:solidFill>
-                  <a:srgbClr val="111827"/>
-                </a:solidFill>
-                <a:latin typeface="Calibri"/>
-              </a:defRPr>
-            </a:pPr>
-            <a:r>
-              <a:t>$310K</a:t>
-            </a:r>
-          </a:p>
-        </p:txBody>
-      </p:sp>
-      <p:sp>
-        <p:nvSpPr>
-          <p:cNvPr id="211" name="Rectangle 210"/>
-          <p:cNvSpPr/>
-          <p:nvPr/>
-        </p:nvSpPr>
-        <p:spPr>
-          <a:xfrm>
-            <a:off x="6254496" y="5943600"/>
-            <a:ext cx="5705856" cy="256032"/>
-          </a:xfrm>
-          <a:prstGeom prst="rect">
-            <a:avLst/>
-          </a:prstGeom>
-          <a:solidFill>
-            <a:srgbClr val="F9FAFB"/>
-          </a:solidFill>
-          <a:ln>
-            <a:noFill/>
-          </a:ln>
-        </p:spPr>
-        <p:style>
-          <a:lnRef idx="1">
-            <a:schemeClr val="accent1"/>
-          </a:lnRef>
-          <a:fillRef idx="3">
-            <a:schemeClr val="accent1"/>
-          </a:fillRef>
-          <a:effectRef idx="2">
-            <a:schemeClr val="accent1"/>
-          </a:effectRef>
-          <a:fontRef idx="minor">
-            <a:schemeClr val="lt1"/>
-          </a:fontRef>
-        </p:style>
-        <p:txBody>
-          <a:bodyPr rtlCol="0" anchor="ctr"/>
-          <a:lstStyle/>
-          <a:p>
-            <a:pPr algn="ctr"/>
-          </a:p>
-        </p:txBody>
-      </p:sp>
-      <p:sp>
-        <p:nvSpPr>
-          <p:cNvPr id="212" name="TextBox 211"/>
-          <p:cNvSpPr txBox="1"/>
-          <p:nvPr/>
-        </p:nvSpPr>
-        <p:spPr>
-          <a:xfrm>
-            <a:off x="6254496" y="5961888"/>
-            <a:ext cx="411480" cy="237744"/>
-          </a:xfrm>
-          <a:prstGeom prst="rect">
-            <a:avLst/>
-          </a:prstGeom>
-          <a:noFill/>
-        </p:spPr>
-        <p:txBody>
-          <a:bodyPr wrap="none">
-            <a:spAutoFit/>
-          </a:bodyPr>
-          <a:lstStyle/>
-          <a:p>
-            <a:pPr algn="ctr">
-              <a:defRPr sz="950" b="1">
-                <a:solidFill>
-                  <a:srgbClr val="6B7280"/>
-                </a:solidFill>
-                <a:latin typeface="Calibri"/>
-              </a:defRPr>
-            </a:pPr>
-            <a:r>
-              <a:t>40</a:t>
-            </a:r>
-          </a:p>
-        </p:txBody>
-      </p:sp>
-      <p:sp>
-        <p:nvSpPr>
-          <p:cNvPr id="213" name="TextBox 212"/>
-          <p:cNvSpPr txBox="1"/>
-          <p:nvPr/>
-        </p:nvSpPr>
-        <p:spPr>
-          <a:xfrm>
-            <a:off x="6665976" y="5961888"/>
-            <a:ext cx="1920240" cy="237744"/>
-          </a:xfrm>
-          <a:prstGeom prst="rect">
-            <a:avLst/>
-          </a:prstGeom>
-          <a:noFill/>
-        </p:spPr>
-        <p:txBody>
-          <a:bodyPr wrap="none">
-            <a:spAutoFit/>
-          </a:bodyPr>
-          <a:lstStyle/>
-          <a:p>
-            <a:pPr algn="l">
-              <a:defRPr sz="950" b="1">
-                <a:solidFill>
-                  <a:srgbClr val="111827"/>
-                </a:solidFill>
-                <a:latin typeface="Calibri"/>
-              </a:defRPr>
-            </a:pPr>
-            <a:r>
-              <a:t>Ibrahim Mammo</a:t>
-            </a:r>
-          </a:p>
-        </p:txBody>
-      </p:sp>
-      <p:sp>
-        <p:nvSpPr>
-          <p:cNvPr id="214" name="TextBox 213"/>
-          <p:cNvSpPr txBox="1"/>
-          <p:nvPr/>
-        </p:nvSpPr>
-        <p:spPr>
-          <a:xfrm>
-            <a:off x="8586216" y="5961888"/>
-            <a:ext cx="2459736" cy="237744"/>
-          </a:xfrm>
-          <a:prstGeom prst="rect">
-            <a:avLst/>
-          </a:prstGeom>
-          <a:noFill/>
-        </p:spPr>
-        <p:txBody>
-          <a:bodyPr wrap="none">
-            <a:spAutoFit/>
-          </a:bodyPr>
-          <a:lstStyle/>
-          <a:p>
-            <a:pPr algn="l">
-              <a:defRPr sz="950" b="0">
-                <a:solidFill>
-                  <a:srgbClr val="6B7280"/>
-                </a:solidFill>
-                <a:latin typeface="Calibri"/>
-              </a:defRPr>
-            </a:pPr>
-            <a:r>
-              <a:t>Surefire Insurance Agency Corp.</a:t>
+              <a:t>Protectgo Services LLC</a:t>
             </a:r>
           </a:p>
         </p:txBody>
@@ -19781,7 +19781,7 @@
               </a:defRPr>
             </a:pPr>
             <a:r>
-              <a:t>$310K</a:t>
+              <a:t>$314K</a:t>
             </a:r>
           </a:p>
         </p:txBody>
@@ -19922,7 +19922,7 @@
               </a:defRPr>
             </a:pPr>
             <a:r>
-              <a:t>Q2 2026 YTD (Apr 1–May 21)  |  Green = on target  |  Amber = at risk  |  Red = behind  |  Goal: ≥40 acts/wk  |  Ranked by composite OKR score</a:t>
+              <a:t>Q2 2026 YTD (Apr 1–May 22)  |  Green = on target  |  Amber = at risk  |  Red = behind  |  Goal: ≥40 acts/wk  |  Ranked by composite OKR score</a:t>
             </a:r>
           </a:p>
         </p:txBody>
@@ -19958,7 +19958,7 @@
               </a:defRPr>
             </a:pPr>
             <a:r>
-              <a:t>Generated May 21, 2026</a:t>
+              <a:t>Generated May 22, 2026</a:t>
             </a:r>
           </a:p>
         </p:txBody>
@@ -20123,7 +20123,7 @@
               </a:defRPr>
             </a:pPr>
             <a:r>
-              <a:t>Q2 2026 YTD (Apr 1–May 21)  |  Green = on target  |  Amber = at risk  |  Red = behind  |  Goal: ≥50 acts/wk  |  Ranked by composite OKR score</a:t>
+              <a:t>Q2 2026 YTD (Apr 1–May 22)  |  Green = on target  |  Amber = at risk  |  Red = behind  |  Goal: ≥50 acts/wk  |  Ranked by composite OKR score</a:t>
             </a:r>
           </a:p>
         </p:txBody>
@@ -20159,7 +20159,7 @@
               </a:defRPr>
             </a:pPr>
             <a:r>
-              <a:t>Generated May 21, 2026</a:t>
+              <a:t>Generated May 22, 2026</a:t>
             </a:r>
           </a:p>
         </p:txBody>
@@ -20324,7 +20324,7 @@
               </a:defRPr>
             </a:pPr>
             <a:r>
-              <a:t>Q2 YTD  |  Apr 1–May 21  |  BDMs Only  |  Goal: 40 acts/wk  |  Emails excluded</a:t>
+              <a:t>Q2 YTD  |  Apr 1–May 22  |  BDMs Only  |  Goal: 40 acts/wk  |  Emails excluded</a:t>
             </a:r>
           </a:p>
         </p:txBody>
@@ -20360,7 +20360,7 @@
               </a:defRPr>
             </a:pPr>
             <a:r>
-              <a:t>Generated May 21, 2026</a:t>
+              <a:t>Generated May 22, 2026</a:t>
             </a:r>
           </a:p>
         </p:txBody>
@@ -20691,7 +20691,7 @@
               </a:defRPr>
             </a:pPr>
             <a:r>
-              <a:t>May 18-21</a:t>
+              <a:t>May 18-22</a:t>
             </a:r>
           </a:p>
         </p:txBody>
@@ -21257,7 +21257,7 @@
             <a:avLst/>
           </a:prstGeom>
           <a:solidFill>
-            <a:srgbClr val="DC2626"/>
+            <a:srgbClr val="05784C"/>
           </a:solidFill>
           <a:ln>
             <a:noFill/>
@@ -21316,7 +21316,7 @@
               </a:defRPr>
             </a:pPr>
             <a:r>
-              <a:t>28</a:t>
+              <a:t>43</a:t>
             </a:r>
           </a:p>
         </p:txBody>
@@ -21984,7 +21984,7 @@
               </a:defRPr>
             </a:pPr>
             <a:r>
-              <a:t>42</a:t>
+              <a:t>69</a:t>
             </a:r>
           </a:p>
         </p:txBody>
@@ -22550,7 +22550,7 @@
             <a:avLst/>
           </a:prstGeom>
           <a:solidFill>
-            <a:srgbClr val="DC2626"/>
+            <a:srgbClr val="D97706"/>
           </a:solidFill>
           <a:ln>
             <a:noFill/>
@@ -22609,7 +22609,7 @@
               </a:defRPr>
             </a:pPr>
             <a:r>
-              <a:t>23</a:t>
+              <a:t>35</a:t>
             </a:r>
           </a:p>
         </p:txBody>
@@ -23218,7 +23218,7 @@
             <a:avLst/>
           </a:prstGeom>
           <a:solidFill>
-            <a:srgbClr val="DC2626"/>
+            <a:srgbClr val="D97706"/>
           </a:solidFill>
           <a:ln>
             <a:noFill/>
@@ -23277,7 +23277,7 @@
               </a:defRPr>
             </a:pPr>
             <a:r>
-              <a:t>26</a:t>
+              <a:t>39</a:t>
             </a:r>
           </a:p>
         </p:txBody>
@@ -23902,7 +23902,7 @@
               </a:defRPr>
             </a:pPr>
             <a:r>
-              <a:t>33</a:t>
+              <a:t>34</a:t>
             </a:r>
           </a:p>
         </p:txBody>
@@ -24511,7 +24511,7 @@
             <a:avLst/>
           </a:prstGeom>
           <a:solidFill>
-            <a:srgbClr val="DC2626"/>
+            <a:srgbClr val="05784C"/>
           </a:solidFill>
           <a:ln>
             <a:noFill/>
@@ -24570,7 +24570,7 @@
               </a:defRPr>
             </a:pPr>
             <a:r>
-              <a:t>12</a:t>
+              <a:t>41</a:t>
             </a:r>
           </a:p>
         </p:txBody>
@@ -25045,7 +25045,7 @@
               </a:defRPr>
             </a:pPr>
             <a:r>
-              <a:t>409</a:t>
+              <a:t>424</a:t>
             </a:r>
           </a:p>
         </p:txBody>
@@ -25117,7 +25117,7 @@
               </a:defRPr>
             </a:pPr>
             <a:r>
-              <a:t>82</a:t>
+              <a:t>84</a:t>
             </a:r>
           </a:p>
         </p:txBody>
@@ -25153,7 +25153,7 @@
               </a:defRPr>
             </a:pPr>
             <a:r>
-              <a:t>456</a:t>
+              <a:t>471</a:t>
             </a:r>
           </a:p>
         </p:txBody>
@@ -25376,7 +25376,7 @@
               </a:defRPr>
             </a:pPr>
             <a:r>
-              <a:t>220</a:t>
+              <a:t>247</a:t>
             </a:r>
           </a:p>
         </p:txBody>
@@ -25448,7 +25448,7 @@
               </a:defRPr>
             </a:pPr>
             <a:r>
-              <a:t>82</a:t>
+              <a:t>87</a:t>
             </a:r>
           </a:p>
         </p:txBody>
@@ -25484,7 +25484,7 @@
               </a:defRPr>
             </a:pPr>
             <a:r>
-              <a:t>243</a:t>
+              <a:t>270</a:t>
             </a:r>
           </a:p>
         </p:txBody>
@@ -25664,7 +25664,7 @@
               </a:defRPr>
             </a:pPr>
             <a:r>
-              <a:t>229</a:t>
+              <a:t>241</a:t>
             </a:r>
           </a:p>
         </p:txBody>
@@ -25772,7 +25772,7 @@
               </a:defRPr>
             </a:pPr>
             <a:r>
-              <a:t>242</a:t>
+              <a:t>254</a:t>
             </a:r>
           </a:p>
         </p:txBody>
@@ -25995,7 +25995,7 @@
               </a:defRPr>
             </a:pPr>
             <a:r>
-              <a:t>383</a:t>
+              <a:t>396</a:t>
             </a:r>
           </a:p>
         </p:txBody>
@@ -26067,7 +26067,7 @@
               </a:defRPr>
             </a:pPr>
             <a:r>
-              <a:t>45</a:t>
+              <a:t>46</a:t>
             </a:r>
           </a:p>
         </p:txBody>
@@ -26103,7 +26103,7 @@
               </a:defRPr>
             </a:pPr>
             <a:r>
-              <a:t>403</a:t>
+              <a:t>416</a:t>
             </a:r>
           </a:p>
         </p:txBody>
@@ -26283,7 +26283,7 @@
               </a:defRPr>
             </a:pPr>
             <a:r>
-              <a:t>241</a:t>
+              <a:t>242</a:t>
             </a:r>
           </a:p>
         </p:txBody>
@@ -26355,7 +26355,7 @@
               </a:defRPr>
             </a:pPr>
             <a:r>
-              <a:t>46</a:t>
+              <a:t>47</a:t>
             </a:r>
           </a:p>
         </p:txBody>
@@ -26391,7 +26391,7 @@
               </a:defRPr>
             </a:pPr>
             <a:r>
-              <a:t>257</a:t>
+              <a:t>258</a:t>
             </a:r>
           </a:p>
         </p:txBody>
@@ -26614,7 +26614,7 @@
               </a:defRPr>
             </a:pPr>
             <a:r>
-              <a:t>80</a:t>
+              <a:t>107</a:t>
             </a:r>
           </a:p>
         </p:txBody>
@@ -26650,7 +26650,7 @@
               </a:defRPr>
             </a:pPr>
             <a:r>
-              <a:t>13</a:t>
+              <a:t>15</a:t>
             </a:r>
           </a:p>
         </p:txBody>
@@ -26686,7 +26686,7 @@
               </a:defRPr>
             </a:pPr>
             <a:r>
-              <a:t>10</a:t>
+              <a:t>14</a:t>
             </a:r>
           </a:p>
         </p:txBody>
@@ -26722,7 +26722,7 @@
               </a:defRPr>
             </a:pPr>
             <a:r>
-              <a:t>93</a:t>
+              <a:t>122</a:t>
             </a:r>
           </a:p>
         </p:txBody>
@@ -26935,7 +26935,7 @@
               </a:defRPr>
             </a:pPr>
             <a:r>
-              <a:t>Q2 YTD  |  Apr 1–May 21  |  BDAs Only  |  Goal: 50 acts/wk  |  Emails excluded</a:t>
+              <a:t>Q2 YTD  |  Apr 1–May 22  |  BDAs Only  |  Goal: 50 acts/wk  |  Emails excluded</a:t>
             </a:r>
           </a:p>
         </p:txBody>
@@ -26971,7 +26971,7 @@
               </a:defRPr>
             </a:pPr>
             <a:r>
-              <a:t>Generated May 21, 2026</a:t>
+              <a:t>Generated May 22, 2026</a:t>
             </a:r>
           </a:p>
         </p:txBody>
@@ -27302,7 +27302,7 @@
               </a:defRPr>
             </a:pPr>
             <a:r>
-              <a:t>May 18-21</a:t>
+              <a:t>May 18-22</a:t>
             </a:r>
           </a:p>
         </p:txBody>
@@ -27868,7 +27868,7 @@
             <a:avLst/>
           </a:prstGeom>
           <a:solidFill>
-            <a:srgbClr val="DC2626"/>
+            <a:srgbClr val="D97706"/>
           </a:solidFill>
           <a:ln>
             <a:noFill/>
@@ -27927,7 +27927,7 @@
               </a:defRPr>
             </a:pPr>
             <a:r>
-              <a:t>28</a:t>
+              <a:t>40</a:t>
             </a:r>
           </a:p>
         </p:txBody>
@@ -28464,7 +28464,7 @@
             <a:avLst/>
           </a:prstGeom>
           <a:solidFill>
-            <a:srgbClr val="DC2626"/>
+            <a:srgbClr val="D97706"/>
           </a:solidFill>
           <a:ln>
             <a:noFill/>
@@ -28523,7 +28523,7 @@
               </a:defRPr>
             </a:pPr>
             <a:r>
-              <a:t>27</a:t>
+              <a:t>38</a:t>
             </a:r>
           </a:p>
         </p:txBody>
@@ -28559,7 +28559,7 @@
               </a:defRPr>
             </a:pPr>
             <a:r>
-              <a:t>63%</a:t>
+              <a:t>68%</a:t>
             </a:r>
           </a:p>
         </p:txBody>
@@ -29017,7 +29017,7 @@
             <a:avLst/>
           </a:prstGeom>
           <a:solidFill>
-            <a:srgbClr val="DC2626"/>
+            <a:srgbClr val="D97706"/>
           </a:solidFill>
           <a:ln>
             <a:noFill/>
@@ -29076,7 +29076,7 @@
               </a:defRPr>
             </a:pPr>
             <a:r>
-              <a:t>30</a:t>
+              <a:t>43</a:t>
             </a:r>
           </a:p>
         </p:txBody>
@@ -29112,7 +29112,7 @@
               </a:defRPr>
             </a:pPr>
             <a:r>
-              <a:t>77%</a:t>
+              <a:t>82%</a:t>
             </a:r>
           </a:p>
         </p:txBody>
@@ -29672,7 +29672,7 @@
               </a:defRPr>
             </a:pPr>
             <a:r>
-              <a:t>14</a:t>
+              <a:t>23</a:t>
             </a:r>
           </a:p>
         </p:txBody>
@@ -29708,7 +29708,7 @@
               </a:defRPr>
             </a:pPr>
             <a:r>
-              <a:t>87%</a:t>
+              <a:t>90%</a:t>
             </a:r>
           </a:p>
         </p:txBody>
@@ -30238,7 +30238,7 @@
             <a:avLst/>
           </a:prstGeom>
           <a:solidFill>
-            <a:srgbClr val="DC2626"/>
+            <a:srgbClr val="D97706"/>
           </a:solidFill>
           <a:ln>
             <a:noFill/>
@@ -30297,7 +30297,7 @@
               </a:defRPr>
             </a:pPr>
             <a:r>
-              <a:t>33</a:t>
+              <a:t>49</a:t>
             </a:r>
           </a:p>
         </p:txBody>
@@ -30772,7 +30772,7 @@
               </a:defRPr>
             </a:pPr>
             <a:r>
-              <a:t>335</a:t>
+              <a:t>347</a:t>
             </a:r>
           </a:p>
         </p:txBody>
@@ -30844,7 +30844,7 @@
               </a:defRPr>
             </a:pPr>
             <a:r>
-              <a:t>35</a:t>
+              <a:t>38</a:t>
             </a:r>
           </a:p>
         </p:txBody>
@@ -30880,7 +30880,7 @@
               </a:defRPr>
             </a:pPr>
             <a:r>
-              <a:t>345</a:t>
+              <a:t>357</a:t>
             </a:r>
           </a:p>
         </p:txBody>
@@ -31103,7 +31103,7 @@
               </a:defRPr>
             </a:pPr>
             <a:r>
-              <a:t>150</a:t>
+              <a:t>159</a:t>
             </a:r>
           </a:p>
         </p:txBody>
@@ -31139,7 +31139,7 @@
               </a:defRPr>
             </a:pPr>
             <a:r>
-              <a:t>8</a:t>
+              <a:t>10</a:t>
             </a:r>
           </a:p>
         </p:txBody>
@@ -31175,7 +31175,7 @@
               </a:defRPr>
             </a:pPr>
             <a:r>
-              <a:t>10</a:t>
+              <a:t>11</a:t>
             </a:r>
           </a:p>
         </p:txBody>
@@ -31211,7 +31211,7 @@
               </a:defRPr>
             </a:pPr>
             <a:r>
-              <a:t>158</a:t>
+              <a:t>169</a:t>
             </a:r>
           </a:p>
         </p:txBody>
@@ -31247,7 +31247,7 @@
               </a:defRPr>
             </a:pPr>
             <a:r>
-              <a:t>31.6</a:t>
+              <a:t>33.8</a:t>
             </a:r>
           </a:p>
         </p:txBody>
@@ -31283,7 +31283,7 @@
               </a:defRPr>
             </a:pPr>
             <a:r>
-              <a:t>63%</a:t>
+              <a:t>68%</a:t>
             </a:r>
           </a:p>
         </p:txBody>
@@ -31391,7 +31391,7 @@
               </a:defRPr>
             </a:pPr>
             <a:r>
-              <a:t>181</a:t>
+              <a:t>194</a:t>
             </a:r>
           </a:p>
         </p:txBody>
@@ -31463,7 +31463,7 @@
               </a:defRPr>
             </a:pPr>
             <a:r>
-              <a:t>25</a:t>
+              <a:t>27</a:t>
             </a:r>
           </a:p>
         </p:txBody>
@@ -31499,7 +31499,7 @@
               </a:defRPr>
             </a:pPr>
             <a:r>
-              <a:t>192</a:t>
+              <a:t>205</a:t>
             </a:r>
           </a:p>
         </p:txBody>
@@ -31535,7 +31535,7 @@
               </a:defRPr>
             </a:pPr>
             <a:r>
-              <a:t>38.4</a:t>
+              <a:t>41.0</a:t>
             </a:r>
           </a:p>
         </p:txBody>
@@ -31571,7 +31571,7 @@
               </a:defRPr>
             </a:pPr>
             <a:r>
-              <a:t>77%</a:t>
+              <a:t>82%</a:t>
             </a:r>
           </a:p>
         </p:txBody>
@@ -31722,7 +31722,7 @@
               </a:defRPr>
             </a:pPr>
             <a:r>
-              <a:t>205</a:t>
+              <a:t>214</a:t>
             </a:r>
           </a:p>
         </p:txBody>
@@ -31830,7 +31830,7 @@
               </a:defRPr>
             </a:pPr>
             <a:r>
-              <a:t>217</a:t>
+              <a:t>226</a:t>
             </a:r>
           </a:p>
         </p:txBody>
@@ -31866,7 +31866,7 @@
               </a:defRPr>
             </a:pPr>
             <a:r>
-              <a:t>43.4</a:t>
+              <a:t>45.2</a:t>
             </a:r>
           </a:p>
         </p:txBody>
@@ -31902,7 +31902,7 @@
               </a:defRPr>
             </a:pPr>
             <a:r>
-              <a:t>87%</a:t>
+              <a:t>90%</a:t>
             </a:r>
           </a:p>
         </p:txBody>
@@ -32010,7 +32010,7 @@
               </a:defRPr>
             </a:pPr>
             <a:r>
-              <a:t>128</a:t>
+              <a:t>144</a:t>
             </a:r>
           </a:p>
         </p:txBody>
@@ -32082,7 +32082,7 @@
               </a:defRPr>
             </a:pPr>
             <a:r>
-              <a:t>10</a:t>
+              <a:t>11</a:t>
             </a:r>
           </a:p>
         </p:txBody>
@@ -32118,7 +32118,7 @@
               </a:defRPr>
             </a:pPr>
             <a:r>
-              <a:t>134</a:t>
+              <a:t>150</a:t>
             </a:r>
           </a:p>
         </p:txBody>
@@ -32367,7 +32367,7 @@
               </a:defRPr>
             </a:pPr>
             <a:r>
-              <a:t>Generated May 21, 2026</a:t>
+              <a:t>Generated May 22, 2026</a:t>
             </a:r>
           </a:p>
         </p:txBody>
@@ -33058,7 +33058,7 @@
               </a:defRPr>
             </a:pPr>
             <a:r>
-              <a:t>6681</a:t>
+              <a:t>6818</a:t>
             </a:r>
           </a:p>
         </p:txBody>
@@ -33094,7 +33094,7 @@
               </a:defRPr>
             </a:pPr>
             <a:r>
-              <a:t>472</a:t>
+              <a:t>487</a:t>
             </a:r>
           </a:p>
         </p:txBody>
@@ -33130,7 +33130,7 @@
               </a:defRPr>
             </a:pPr>
             <a:r>
-              <a:t>$17.3M</a:t>
+              <a:t>$17.4M</a:t>
             </a:r>
           </a:p>
         </p:txBody>
@@ -33166,7 +33166,7 @@
               </a:defRPr>
             </a:pPr>
             <a:r>
-              <a:t>$4.3M</a:t>
+              <a:t>$4.4M</a:t>
             </a:r>
           </a:p>
         </p:txBody>
@@ -33202,7 +33202,7 @@
               </a:defRPr>
             </a:pPr>
             <a:r>
-              <a:t>$3.7M</a:t>
+              <a:t>$3.9M</a:t>
             </a:r>
           </a:p>
         </p:txBody>
@@ -33497,7 +33497,7 @@
               </a:defRPr>
             </a:pPr>
             <a:r>
-              <a:t>3215</a:t>
+              <a:t>3274</a:t>
             </a:r>
           </a:p>
         </p:txBody>
@@ -33533,7 +33533,7 @@
               </a:defRPr>
             </a:pPr>
             <a:r>
-              <a:t>328</a:t>
+              <a:t>333</a:t>
             </a:r>
           </a:p>
         </p:txBody>
@@ -33569,7 +33569,7 @@
               </a:defRPr>
             </a:pPr>
             <a:r>
-              <a:t>$9.8M</a:t>
+              <a:t>$9.6M</a:t>
             </a:r>
           </a:p>
         </p:txBody>
@@ -33641,7 +33641,7 @@
               </a:defRPr>
             </a:pPr>
             <a:r>
-              <a:t>$2.8M</a:t>
+              <a:t>$2.9M</a:t>
             </a:r>
           </a:p>
         </p:txBody>
@@ -33893,7 +33893,7 @@
               </a:defRPr>
             </a:pPr>
             <a:r>
-              <a:t>5091</a:t>
+              <a:t>5190</a:t>
             </a:r>
           </a:p>
         </p:txBody>
@@ -33929,7 +33929,7 @@
               </a:defRPr>
             </a:pPr>
             <a:r>
-              <a:t>288</a:t>
+              <a:t>299</a:t>
             </a:r>
           </a:p>
         </p:txBody>
@@ -33965,7 +33965,7 @@
               </a:defRPr>
             </a:pPr>
             <a:r>
-              <a:t>$8.1M</a:t>
+              <a:t>$8.6M</a:t>
             </a:r>
           </a:p>
         </p:txBody>
@@ -34001,7 +34001,7 @@
               </a:defRPr>
             </a:pPr>
             <a:r>
-              <a:t>$1.2M</a:t>
+              <a:t>$1.3M</a:t>
             </a:r>
           </a:p>
         </p:txBody>
@@ -34037,7 +34037,7 @@
               </a:defRPr>
             </a:pPr>
             <a:r>
-              <a:t>$3.5M</a:t>
+              <a:t>$3.6M</a:t>
             </a:r>
           </a:p>
         </p:txBody>
@@ -34152,7 +34152,7 @@
               </a:defRPr>
             </a:pPr>
             <a:r>
-              <a:t>30</a:t>
+              <a:t>28</a:t>
             </a:r>
           </a:p>
         </p:txBody>
@@ -34224,7 +34224,7 @@
               </a:defRPr>
             </a:pPr>
             <a:r>
-              <a:t>3</a:t>
+              <a:t>1</a:t>
             </a:r>
           </a:p>
         </p:txBody>
@@ -34260,7 +34260,7 @@
               </a:defRPr>
             </a:pPr>
             <a:r>
-              <a:t>90%</a:t>
+              <a:t>96%</a:t>
             </a:r>
           </a:p>
         </p:txBody>
@@ -34332,7 +34332,7 @@
               </a:defRPr>
             </a:pPr>
             <a:r>
-              <a:t>3096</a:t>
+              <a:t>3166</a:t>
             </a:r>
           </a:p>
         </p:txBody>
@@ -34368,7 +34368,7 @@
               </a:defRPr>
             </a:pPr>
             <a:r>
-              <a:t>247</a:t>
+              <a:t>254</a:t>
             </a:r>
           </a:p>
         </p:txBody>
@@ -34404,7 +34404,7 @@
               </a:defRPr>
             </a:pPr>
             <a:r>
-              <a:t>$6.0M</a:t>
+              <a:t>$6.2M</a:t>
             </a:r>
           </a:p>
         </p:txBody>
@@ -34440,7 +34440,7 @@
               </a:defRPr>
             </a:pPr>
             <a:r>
-              <a:t>$756K</a:t>
+              <a:t>$760K</a:t>
             </a:r>
           </a:p>
         </p:txBody>
@@ -34728,7 +34728,7 @@
               </a:defRPr>
             </a:pPr>
             <a:r>
-              <a:t>1717</a:t>
+              <a:t>1760</a:t>
             </a:r>
           </a:p>
         </p:txBody>
@@ -34764,7 +34764,7 @@
               </a:defRPr>
             </a:pPr>
             <a:r>
-              <a:t>123</a:t>
+              <a:t>129</a:t>
             </a:r>
           </a:p>
         </p:txBody>
@@ -34800,7 +34800,7 @@
               </a:defRPr>
             </a:pPr>
             <a:r>
-              <a:t>$3.8M</a:t>
+              <a:t>$4.2M</a:t>
             </a:r>
           </a:p>
         </p:txBody>
@@ -34872,7 +34872,7 @@
               </a:defRPr>
             </a:pPr>
             <a:r>
-              <a:t>$1.4M</a:t>
+              <a:t>$1.5M</a:t>
             </a:r>
           </a:p>
         </p:txBody>
@@ -35246,7 +35246,7 @@
               </a:defRPr>
             </a:pPr>
             <a:r>
-              <a:t>3743</a:t>
+              <a:t>3853</a:t>
             </a:r>
           </a:p>
         </p:txBody>
@@ -35282,7 +35282,7 @@
               </a:defRPr>
             </a:pPr>
             <a:r>
-              <a:t>103</a:t>
+              <a:t>104</a:t>
             </a:r>
           </a:p>
         </p:txBody>
@@ -35390,7 +35390,7 @@
               </a:defRPr>
             </a:pPr>
             <a:r>
-              <a:t>$684K</a:t>
+              <a:t>$742K</a:t>
             </a:r>
           </a:p>
         </p:txBody>
@@ -35642,7 +35642,7 @@
               </a:defRPr>
             </a:pPr>
             <a:r>
-              <a:t>2575</a:t>
+              <a:t>2624</a:t>
             </a:r>
           </a:p>
         </p:txBody>
@@ -35678,7 +35678,7 @@
               </a:defRPr>
             </a:pPr>
             <a:r>
-              <a:t>48</a:t>
+              <a:t>50</a:t>
             </a:r>
           </a:p>
         </p:txBody>
@@ -35786,7 +35786,7 @@
               </a:defRPr>
             </a:pPr>
             <a:r>
-              <a:t>$191K</a:t>
+              <a:t>$207K</a:t>
             </a:r>
           </a:p>
         </p:txBody>
@@ -35937,7 +35937,7 @@
               </a:defRPr>
             </a:pPr>
             <a:r>
-              <a:t>46</a:t>
+              <a:t>47</a:t>
             </a:r>
           </a:p>
         </p:txBody>
@@ -35973,7 +35973,7 @@
               </a:defRPr>
             </a:pPr>
             <a:r>
-              <a:t>7</a:t>
+              <a:t>6</a:t>
             </a:r>
           </a:p>
         </p:txBody>
@@ -36009,7 +36009,7 @@
               </a:defRPr>
             </a:pPr>
             <a:r>
-              <a:t>87%</a:t>
+              <a:t>89%</a:t>
             </a:r>
           </a:p>
         </p:txBody>
@@ -36081,7 +36081,7 @@
               </a:defRPr>
             </a:pPr>
             <a:r>
-              <a:t>1492</a:t>
+              <a:t>1529</a:t>
             </a:r>
           </a:p>
         </p:txBody>
@@ -36297,7 +36297,7 @@
               </a:defRPr>
             </a:pPr>
             <a:r>
-              <a:t>48</a:t>
+              <a:t>50</a:t>
             </a:r>
           </a:p>
         </p:txBody>
@@ -36333,7 +36333,7 @@
               </a:defRPr>
             </a:pPr>
             <a:r>
-              <a:t>47</a:t>
+              <a:t>49</a:t>
             </a:r>
           </a:p>
         </p:txBody>
@@ -36477,7 +36477,7 @@
               </a:defRPr>
             </a:pPr>
             <a:r>
-              <a:t>855</a:t>
+              <a:t>892</a:t>
             </a:r>
           </a:p>
         </p:txBody>
@@ -36513,7 +36513,7 @@
               </a:defRPr>
             </a:pPr>
             <a:r>
-              <a:t>49</a:t>
+              <a:t>48</a:t>
             </a:r>
           </a:p>
         </p:txBody>
@@ -36916,7 +36916,7 @@
               </a:defRPr>
             </a:pPr>
             <a:r>
-              <a:t>575</a:t>
+              <a:t>584</a:t>
             </a:r>
           </a:p>
         </p:txBody>
@@ -36952,7 +36952,7 @@
               </a:defRPr>
             </a:pPr>
             <a:r>
-              <a:t>23</a:t>
+              <a:t>24</a:t>
             </a:r>
           </a:p>
         </p:txBody>
@@ -36988,7 +36988,7 @@
               </a:defRPr>
             </a:pPr>
             <a:r>
-              <a:t>$789K</a:t>
+              <a:t>$800K</a:t>
             </a:r>
           </a:p>
         </p:txBody>
@@ -37254,7 +37254,7 @@
               </a:defRPr>
             </a:pPr>
             <a:r>
-              <a:t>214</a:t>
+              <a:t>213</a:t>
             </a:r>
           </a:p>
         </p:txBody>
@@ -37290,7 +37290,7 @@
               </a:defRPr>
             </a:pPr>
             <a:r>
-              <a:t>214</a:t>
+              <a:t>213</a:t>
             </a:r>
           </a:p>
         </p:txBody>
@@ -37434,7 +37434,7 @@
               </a:defRPr>
             </a:pPr>
             <a:r>
-              <a:t>7071</a:t>
+              <a:t>7206</a:t>
             </a:r>
           </a:p>
         </p:txBody>
@@ -37470,7 +37470,7 @@
               </a:defRPr>
             </a:pPr>
             <a:r>
-              <a:t>295</a:t>
+              <a:t>285</a:t>
             </a:r>
           </a:p>
         </p:txBody>
@@ -37506,7 +37506,7 @@
               </a:defRPr>
             </a:pPr>
             <a:r>
-              <a:t>$8.0M</a:t>
+              <a:t>$8.1M</a:t>
             </a:r>
           </a:p>
         </p:txBody>
@@ -37578,7 +37578,7 @@
               </a:defRPr>
             </a:pPr>
             <a:r>
-              <a:t>$2.4M</a:t>
+              <a:t>$2.7M</a:t>
             </a:r>
           </a:p>
         </p:txBody>
@@ -37736,7 +37736,7 @@
               </a:defRPr>
             </a:pPr>
             <a:r>
-              <a:t>184 portfolio  ·  181 active  ·  3 dormant</a:t>
+              <a:t>182 portfolio  ·  181 active  ·  1 dormant</a:t>
             </a:r>
           </a:p>
         </p:txBody>
@@ -37894,7 +37894,7 @@
               </a:defRPr>
             </a:pPr>
             <a:r>
-              <a:t>219 portfolio  ·  204 active  ·  15 dormant</a:t>
+              <a:t>221 portfolio  ·  207 active  ·  14 dormant</a:t>
             </a:r>
           </a:p>
         </p:txBody>
@@ -38052,7 +38052,7 @@
               </a:defRPr>
             </a:pPr>
             <a:r>
-              <a:t>403 portfolio  ·  385 active  ·  96% engaged</a:t>
+              <a:t>403 portfolio  ·  388 active  ·  96% engaged</a:t>
             </a:r>
           </a:p>
         </p:txBody>
@@ -38193,7 +38193,7 @@
               </a:defRPr>
             </a:pPr>
             <a:r>
-              <a:t>Retail-vertical agencies in each rep's HubSpot portfolio with zero 2026 submissions  |  Refreshed 2026-05-21</a:t>
+              <a:t>Retail-vertical agencies in each rep's HubSpot portfolio with zero 2026 submissions  |  Refreshed 2026-05-22</a:t>
             </a:r>
           </a:p>
         </p:txBody>
@@ -38229,7 +38229,7 @@
               </a:defRPr>
             </a:pPr>
             <a:r>
-              <a:t>Generated May 21, 2026</a:t>
+              <a:t>Generated May 22, 2026</a:t>
             </a:r>
           </a:p>
         </p:txBody>
@@ -38315,7 +38315,7 @@
         <p:spPr>
           <a:xfrm>
             <a:off x="274320" y="1280160"/>
-            <a:ext cx="5623560" cy="1014984"/>
+            <a:ext cx="5623560" cy="676656"/>
           </a:xfrm>
           <a:prstGeom prst="rect">
             <a:avLst/>
@@ -38360,13 +38360,13 @@
         <p:spPr>
           <a:xfrm>
             <a:off x="274320" y="1280160"/>
-            <a:ext cx="54864" cy="1014984"/>
+            <a:ext cx="54864" cy="676656"/>
           </a:xfrm>
           <a:prstGeom prst="rect">
             <a:avLst/>
           </a:prstGeom>
           <a:solidFill>
-            <a:srgbClr val="EA580C"/>
+            <a:srgbClr val="D97706"/>
           </a:solidFill>
           <a:ln>
             <a:noFill/>
@@ -38455,13 +38455,13 @@
             <a:pPr algn="r">
               <a:defRPr sz="900" b="1">
                 <a:solidFill>
-                  <a:srgbClr val="EA580C"/>
-                </a:solidFill>
-                <a:latin typeface="Calibri"/>
-              </a:defRPr>
-            </a:pPr>
-            <a:r>
-              <a:t>3 dormant</a:t>
+                  <a:srgbClr val="D97706"/>
+                </a:solidFill>
+                <a:latin typeface="Calibri"/>
+              </a:defRPr>
+            </a:pPr>
+            <a:r>
+              <a:t>1 dormant</a:t>
             </a:r>
           </a:p>
         </p:txBody>
@@ -38497,7 +38497,7 @@
               </a:defRPr>
             </a:pPr>
             <a:r>
-              <a:t>3 of 30 agencies dormant</a:t>
+              <a:t>1 of 28 agencies dormant</a:t>
             </a:r>
           </a:p>
         </p:txBody>
@@ -38527,7 +38527,7 @@
             <a:pPr algn="l">
               <a:defRPr sz="900" b="1">
                 <a:solidFill>
-                  <a:srgbClr val="EA580C"/>
+                  <a:srgbClr val="D97706"/>
                 </a:solidFill>
                 <a:latin typeface="Calibri"/>
               </a:defRPr>
@@ -38569,78 +38569,6 @@
               </a:defRPr>
             </a:pPr>
             <a:r>
-              <a:t>Awesome Group Llc Dba Phoenix Services Ltd</a:t>
-            </a:r>
-          </a:p>
-        </p:txBody>
-      </p:sp>
-      <p:sp>
-        <p:nvSpPr>
-          <p:cNvPr id="15" name="TextBox 14"/>
-          <p:cNvSpPr txBox="1"/>
-          <p:nvPr/>
-        </p:nvSpPr>
-        <p:spPr>
-          <a:xfrm>
-            <a:off x="457200" y="1856231"/>
-            <a:ext cx="91440" cy="164592"/>
-          </a:xfrm>
-          <a:prstGeom prst="rect">
-            <a:avLst/>
-          </a:prstGeom>
-          <a:noFill/>
-        </p:spPr>
-        <p:txBody>
-          <a:bodyPr wrap="none">
-            <a:spAutoFit/>
-          </a:bodyPr>
-          <a:lstStyle/>
-          <a:p>
-            <a:pPr algn="l">
-              <a:defRPr sz="900" b="1">
-                <a:solidFill>
-                  <a:srgbClr val="EA580C"/>
-                </a:solidFill>
-                <a:latin typeface="Calibri"/>
-              </a:defRPr>
-            </a:pPr>
-            <a:r>
-              <a:t>•</a:t>
-            </a:r>
-          </a:p>
-        </p:txBody>
-      </p:sp>
-      <p:sp>
-        <p:nvSpPr>
-          <p:cNvPr id="16" name="TextBox 15"/>
-          <p:cNvSpPr txBox="1"/>
-          <p:nvPr/>
-        </p:nvSpPr>
-        <p:spPr>
-          <a:xfrm>
-            <a:off x="585216" y="1837943"/>
-            <a:ext cx="5221224" cy="182880"/>
-          </a:xfrm>
-          <a:prstGeom prst="rect">
-            <a:avLst/>
-          </a:prstGeom>
-          <a:noFill/>
-        </p:spPr>
-        <p:txBody>
-          <a:bodyPr wrap="none">
-            <a:spAutoFit/>
-          </a:bodyPr>
-          <a:lstStyle/>
-          <a:p>
-            <a:pPr algn="l">
-              <a:defRPr sz="1000" b="0">
-                <a:solidFill>
-                  <a:srgbClr val="374151"/>
-                </a:solidFill>
-                <a:latin typeface="Calibri"/>
-              </a:defRPr>
-            </a:pPr>
-            <a:r>
               <a:t>Eagles Insurnace Agency Llc</a:t>
             </a:r>
           </a:p>
@@ -38648,79 +38576,7 @@
       </p:sp>
       <p:sp>
         <p:nvSpPr>
-          <p:cNvPr id="17" name="TextBox 16"/>
-          <p:cNvSpPr txBox="1"/>
-          <p:nvPr/>
-        </p:nvSpPr>
-        <p:spPr>
-          <a:xfrm>
-            <a:off x="457200" y="2029967"/>
-            <a:ext cx="91440" cy="164592"/>
-          </a:xfrm>
-          <a:prstGeom prst="rect">
-            <a:avLst/>
-          </a:prstGeom>
-          <a:noFill/>
-        </p:spPr>
-        <p:txBody>
-          <a:bodyPr wrap="none">
-            <a:spAutoFit/>
-          </a:bodyPr>
-          <a:lstStyle/>
-          <a:p>
-            <a:pPr algn="l">
-              <a:defRPr sz="900" b="1">
-                <a:solidFill>
-                  <a:srgbClr val="EA580C"/>
-                </a:solidFill>
-                <a:latin typeface="Calibri"/>
-              </a:defRPr>
-            </a:pPr>
-            <a:r>
-              <a:t>•</a:t>
-            </a:r>
-          </a:p>
-        </p:txBody>
-      </p:sp>
-      <p:sp>
-        <p:nvSpPr>
-          <p:cNvPr id="18" name="TextBox 17"/>
-          <p:cNvSpPr txBox="1"/>
-          <p:nvPr/>
-        </p:nvSpPr>
-        <p:spPr>
-          <a:xfrm>
-            <a:off x="585216" y="2011679"/>
-            <a:ext cx="5221224" cy="182880"/>
-          </a:xfrm>
-          <a:prstGeom prst="rect">
-            <a:avLst/>
-          </a:prstGeom>
-          <a:noFill/>
-        </p:spPr>
-        <p:txBody>
-          <a:bodyPr wrap="none">
-            <a:spAutoFit/>
-          </a:bodyPr>
-          <a:lstStyle/>
-          <a:p>
-            <a:pPr algn="l">
-              <a:defRPr sz="1000" b="0">
-                <a:solidFill>
-                  <a:srgbClr val="374151"/>
-                </a:solidFill>
-                <a:latin typeface="Calibri"/>
-              </a:defRPr>
-            </a:pPr>
-            <a:r>
-              <a:t>Meadors Adams And Lee</a:t>
-            </a:r>
-          </a:p>
-        </p:txBody>
-      </p:sp>
-      <p:sp>
-        <p:nvSpPr>
-          <p:cNvPr id="19" name="Rectangle 18"/>
+          <p:cNvPr id="15" name="Rectangle 14"/>
           <p:cNvSpPr/>
           <p:nvPr/>
         </p:nvSpPr>
@@ -38765,7 +38621,7 @@
       </p:sp>
       <p:sp>
         <p:nvSpPr>
-          <p:cNvPr id="20" name="Rectangle 19"/>
+          <p:cNvPr id="16" name="Rectangle 15"/>
           <p:cNvSpPr/>
           <p:nvPr/>
         </p:nvSpPr>
@@ -38808,7 +38664,7 @@
       </p:sp>
       <p:sp>
         <p:nvSpPr>
-          <p:cNvPr id="21" name="TextBox 20"/>
+          <p:cNvPr id="17" name="TextBox 16"/>
           <p:cNvSpPr txBox="1"/>
           <p:nvPr/>
         </p:nvSpPr>
@@ -38844,7 +38700,7 @@
       </p:sp>
       <p:sp>
         <p:nvSpPr>
-          <p:cNvPr id="22" name="TextBox 21"/>
+          <p:cNvPr id="18" name="TextBox 17"/>
           <p:cNvSpPr txBox="1"/>
           <p:nvPr/>
         </p:nvSpPr>
@@ -38880,7 +38736,7 @@
       </p:sp>
       <p:sp>
         <p:nvSpPr>
-          <p:cNvPr id="23" name="TextBox 22"/>
+          <p:cNvPr id="19" name="TextBox 18"/>
           <p:cNvSpPr txBox="1"/>
           <p:nvPr/>
         </p:nvSpPr>
@@ -38909,14 +38765,14 @@
               </a:defRPr>
             </a:pPr>
             <a:r>
-              <a:t>1 of 48 agencies dormant</a:t>
-            </a:r>
-          </a:p>
-        </p:txBody>
-      </p:sp>
-      <p:sp>
-        <p:nvSpPr>
-          <p:cNvPr id="24" name="TextBox 23"/>
+              <a:t>1 of 50 agencies dormant</a:t>
+            </a:r>
+          </a:p>
+        </p:txBody>
+      </p:sp>
+      <p:sp>
+        <p:nvSpPr>
+          <p:cNvPr id="20" name="TextBox 19"/>
           <p:cNvSpPr txBox="1"/>
           <p:nvPr/>
         </p:nvSpPr>
@@ -38952,7 +38808,7 @@
       </p:sp>
       <p:sp>
         <p:nvSpPr>
-          <p:cNvPr id="25" name="TextBox 24"/>
+          <p:cNvPr id="21" name="TextBox 20"/>
           <p:cNvSpPr txBox="1"/>
           <p:nvPr/>
         </p:nvSpPr>
@@ -38988,7 +38844,7 @@
       </p:sp>
       <p:sp>
         <p:nvSpPr>
-          <p:cNvPr id="26" name="Rectangle 25"/>
+          <p:cNvPr id="22" name="Rectangle 21"/>
           <p:cNvSpPr/>
           <p:nvPr/>
         </p:nvSpPr>
@@ -39033,7 +38889,7 @@
       </p:sp>
       <p:sp>
         <p:nvSpPr>
-          <p:cNvPr id="27" name="Rectangle 26"/>
+          <p:cNvPr id="23" name="Rectangle 22"/>
           <p:cNvSpPr/>
           <p:nvPr/>
         </p:nvSpPr>
@@ -39076,7 +38932,7 @@
       </p:sp>
       <p:sp>
         <p:nvSpPr>
-          <p:cNvPr id="28" name="TextBox 27"/>
+          <p:cNvPr id="24" name="TextBox 23"/>
           <p:cNvSpPr txBox="1"/>
           <p:nvPr/>
         </p:nvSpPr>
@@ -39112,7 +38968,7 @@
       </p:sp>
       <p:sp>
         <p:nvSpPr>
-          <p:cNvPr id="29" name="TextBox 28"/>
+          <p:cNvPr id="25" name="TextBox 24"/>
           <p:cNvSpPr txBox="1"/>
           <p:nvPr/>
         </p:nvSpPr>
@@ -39148,7 +39004,7 @@
       </p:sp>
       <p:sp>
         <p:nvSpPr>
-          <p:cNvPr id="30" name="TextBox 29"/>
+          <p:cNvPr id="26" name="TextBox 25"/>
           <p:cNvSpPr txBox="1"/>
           <p:nvPr/>
         </p:nvSpPr>
@@ -39184,7 +39040,7 @@
       </p:sp>
       <p:sp>
         <p:nvSpPr>
-          <p:cNvPr id="31" name="TextBox 30"/>
+          <p:cNvPr id="27" name="TextBox 26"/>
           <p:cNvSpPr txBox="1"/>
           <p:nvPr/>
         </p:nvSpPr>
@@ -39220,7 +39076,7 @@
       </p:sp>
       <p:sp>
         <p:nvSpPr>
-          <p:cNvPr id="32" name="TextBox 31"/>
+          <p:cNvPr id="28" name="TextBox 27"/>
           <p:cNvSpPr txBox="1"/>
           <p:nvPr/>
         </p:nvSpPr>
@@ -39256,7 +39112,7 @@
       </p:sp>
       <p:sp>
         <p:nvSpPr>
-          <p:cNvPr id="33" name="TextBox 32"/>
+          <p:cNvPr id="29" name="TextBox 28"/>
           <p:cNvSpPr txBox="1"/>
           <p:nvPr/>
         </p:nvSpPr>
@@ -39292,7 +39148,7 @@
       </p:sp>
       <p:sp>
         <p:nvSpPr>
-          <p:cNvPr id="34" name="TextBox 33"/>
+          <p:cNvPr id="30" name="TextBox 29"/>
           <p:cNvSpPr txBox="1"/>
           <p:nvPr/>
         </p:nvSpPr>
@@ -39328,7 +39184,7 @@
       </p:sp>
       <p:sp>
         <p:nvSpPr>
-          <p:cNvPr id="35" name="TextBox 34"/>
+          <p:cNvPr id="31" name="TextBox 30"/>
           <p:cNvSpPr txBox="1"/>
           <p:nvPr/>
         </p:nvSpPr>
@@ -39364,7 +39220,7 @@
       </p:sp>
       <p:sp>
         <p:nvSpPr>
-          <p:cNvPr id="36" name="TextBox 35"/>
+          <p:cNvPr id="32" name="TextBox 31"/>
           <p:cNvSpPr txBox="1"/>
           <p:nvPr/>
         </p:nvSpPr>
@@ -39400,14 +39256,14 @@
       </p:sp>
       <p:sp>
         <p:nvSpPr>
-          <p:cNvPr id="37" name="Rectangle 36"/>
+          <p:cNvPr id="33" name="Rectangle 32"/>
           <p:cNvSpPr/>
           <p:nvPr/>
         </p:nvSpPr>
         <p:spPr>
           <a:xfrm>
             <a:off x="6263640" y="3154680"/>
-            <a:ext cx="5623560" cy="1709928"/>
+            <a:ext cx="5623560" cy="1536192"/>
           </a:xfrm>
           <a:prstGeom prst="rect">
             <a:avLst/>
@@ -39445,14 +39301,14 @@
       </p:sp>
       <p:sp>
         <p:nvSpPr>
-          <p:cNvPr id="38" name="Rectangle 37"/>
+          <p:cNvPr id="34" name="Rectangle 33"/>
           <p:cNvSpPr/>
           <p:nvPr/>
         </p:nvSpPr>
         <p:spPr>
           <a:xfrm>
             <a:off x="6263640" y="3154680"/>
-            <a:ext cx="54864" cy="1709928"/>
+            <a:ext cx="54864" cy="1536192"/>
           </a:xfrm>
           <a:prstGeom prst="rect">
             <a:avLst/>
@@ -39488,7 +39344,7 @@
       </p:sp>
       <p:sp>
         <p:nvSpPr>
-          <p:cNvPr id="39" name="TextBox 38"/>
+          <p:cNvPr id="35" name="TextBox 34"/>
           <p:cNvSpPr txBox="1"/>
           <p:nvPr/>
         </p:nvSpPr>
@@ -39524,7 +39380,7 @@
       </p:sp>
       <p:sp>
         <p:nvSpPr>
-          <p:cNvPr id="40" name="TextBox 39"/>
+          <p:cNvPr id="36" name="TextBox 35"/>
           <p:cNvSpPr txBox="1"/>
           <p:nvPr/>
         </p:nvSpPr>
@@ -39553,14 +39409,14 @@
               </a:defRPr>
             </a:pPr>
             <a:r>
-              <a:t>7 dormant</a:t>
-            </a:r>
-          </a:p>
-        </p:txBody>
-      </p:sp>
-      <p:sp>
-        <p:nvSpPr>
-          <p:cNvPr id="41" name="TextBox 40"/>
+              <a:t>6 dormant</a:t>
+            </a:r>
+          </a:p>
+        </p:txBody>
+      </p:sp>
+      <p:sp>
+        <p:nvSpPr>
+          <p:cNvPr id="37" name="TextBox 36"/>
           <p:cNvSpPr txBox="1"/>
           <p:nvPr/>
         </p:nvSpPr>
@@ -39589,14 +39445,14 @@
               </a:defRPr>
             </a:pPr>
             <a:r>
-              <a:t>7 of 53 agencies dormant</a:t>
-            </a:r>
-          </a:p>
-        </p:txBody>
-      </p:sp>
-      <p:sp>
-        <p:nvSpPr>
-          <p:cNvPr id="42" name="TextBox 41"/>
+              <a:t>6 of 53 agencies dormant</a:t>
+            </a:r>
+          </a:p>
+        </p:txBody>
+      </p:sp>
+      <p:sp>
+        <p:nvSpPr>
+          <p:cNvPr id="38" name="TextBox 37"/>
           <p:cNvSpPr txBox="1"/>
           <p:nvPr/>
         </p:nvSpPr>
@@ -39632,7 +39488,7 @@
       </p:sp>
       <p:sp>
         <p:nvSpPr>
-          <p:cNvPr id="43" name="TextBox 42"/>
+          <p:cNvPr id="39" name="TextBox 38"/>
           <p:cNvSpPr txBox="1"/>
           <p:nvPr/>
         </p:nvSpPr>
@@ -39661,14 +39517,14 @@
               </a:defRPr>
             </a:pPr>
             <a:r>
-              <a:t>Allcom Insurance Corporation</a:t>
-            </a:r>
-          </a:p>
-        </p:txBody>
-      </p:sp>
-      <p:sp>
-        <p:nvSpPr>
-          <p:cNvPr id="44" name="TextBox 43"/>
+              <a:t>Allstars Insurance Partners, Inc</a:t>
+            </a:r>
+          </a:p>
+        </p:txBody>
+      </p:sp>
+      <p:sp>
+        <p:nvSpPr>
+          <p:cNvPr id="40" name="TextBox 39"/>
           <p:cNvSpPr txBox="1"/>
           <p:nvPr/>
         </p:nvSpPr>
@@ -39704,7 +39560,7 @@
       </p:sp>
       <p:sp>
         <p:nvSpPr>
-          <p:cNvPr id="45" name="TextBox 44"/>
+          <p:cNvPr id="41" name="TextBox 40"/>
           <p:cNvSpPr txBox="1"/>
           <p:nvPr/>
         </p:nvSpPr>
@@ -39733,14 +39589,14 @@
               </a:defRPr>
             </a:pPr>
             <a:r>
-              <a:t>Allstars Insurance Partners, Inc</a:t>
-            </a:r>
-          </a:p>
-        </p:txBody>
-      </p:sp>
-      <p:sp>
-        <p:nvSpPr>
-          <p:cNvPr id="46" name="TextBox 45"/>
+              <a:t>Assured Insurance Consultants, LLC</a:t>
+            </a:r>
+          </a:p>
+        </p:txBody>
+      </p:sp>
+      <p:sp>
+        <p:nvSpPr>
+          <p:cNvPr id="42" name="TextBox 41"/>
           <p:cNvSpPr txBox="1"/>
           <p:nvPr/>
         </p:nvSpPr>
@@ -39776,7 +39632,7 @@
       </p:sp>
       <p:sp>
         <p:nvSpPr>
-          <p:cNvPr id="47" name="TextBox 46"/>
+          <p:cNvPr id="43" name="TextBox 42"/>
           <p:cNvSpPr txBox="1"/>
           <p:nvPr/>
         </p:nvSpPr>
@@ -39805,14 +39661,14 @@
               </a:defRPr>
             </a:pPr>
             <a:r>
-              <a:t>Assured Insurance Consultants, LLC</a:t>
-            </a:r>
-          </a:p>
-        </p:txBody>
-      </p:sp>
-      <p:sp>
-        <p:nvSpPr>
-          <p:cNvPr id="48" name="TextBox 47"/>
+              <a:t>Clark Farley Insurance Agency - A Relation Company</a:t>
+            </a:r>
+          </a:p>
+        </p:txBody>
+      </p:sp>
+      <p:sp>
+        <p:nvSpPr>
+          <p:cNvPr id="44" name="TextBox 43"/>
           <p:cNvSpPr txBox="1"/>
           <p:nvPr/>
         </p:nvSpPr>
@@ -39848,7 +39704,7 @@
       </p:sp>
       <p:sp>
         <p:nvSpPr>
-          <p:cNvPr id="49" name="TextBox 48"/>
+          <p:cNvPr id="45" name="TextBox 44"/>
           <p:cNvSpPr txBox="1"/>
           <p:nvPr/>
         </p:nvSpPr>
@@ -39877,14 +39733,14 @@
               </a:defRPr>
             </a:pPr>
             <a:r>
-              <a:t>Clark Farley Insurance Agency - A Relation Company</a:t>
-            </a:r>
-          </a:p>
-        </p:txBody>
-      </p:sp>
-      <p:sp>
-        <p:nvSpPr>
-          <p:cNvPr id="50" name="TextBox 49"/>
+              <a:t>Lake Marion Agency LLC</a:t>
+            </a:r>
+          </a:p>
+        </p:txBody>
+      </p:sp>
+      <p:sp>
+        <p:nvSpPr>
+          <p:cNvPr id="46" name="TextBox 45"/>
           <p:cNvSpPr txBox="1"/>
           <p:nvPr/>
         </p:nvSpPr>
@@ -39920,7 +39776,7 @@
       </p:sp>
       <p:sp>
         <p:nvSpPr>
-          <p:cNvPr id="51" name="TextBox 50"/>
+          <p:cNvPr id="47" name="TextBox 46"/>
           <p:cNvSpPr txBox="1"/>
           <p:nvPr/>
         </p:nvSpPr>
@@ -39949,14 +39805,14 @@
               </a:defRPr>
             </a:pPr>
             <a:r>
-              <a:t>Lake Marion Agency LLC</a:t>
-            </a:r>
-          </a:p>
-        </p:txBody>
-      </p:sp>
-      <p:sp>
-        <p:nvSpPr>
-          <p:cNvPr id="52" name="TextBox 51"/>
+              <a:t>Paramount Trucking Specialist Llc</a:t>
+            </a:r>
+          </a:p>
+        </p:txBody>
+      </p:sp>
+      <p:sp>
+        <p:nvSpPr>
+          <p:cNvPr id="48" name="TextBox 47"/>
           <p:cNvSpPr txBox="1"/>
           <p:nvPr/>
         </p:nvSpPr>
@@ -39992,7 +39848,7 @@
       </p:sp>
       <p:sp>
         <p:nvSpPr>
-          <p:cNvPr id="53" name="TextBox 52"/>
+          <p:cNvPr id="49" name="TextBox 48"/>
           <p:cNvSpPr txBox="1"/>
           <p:nvPr/>
         </p:nvSpPr>
@@ -40021,78 +39877,6 @@
               </a:defRPr>
             </a:pPr>
             <a:r>
-              <a:t>Paramount Trucking Specialist Llc</a:t>
-            </a:r>
-          </a:p>
-        </p:txBody>
-      </p:sp>
-      <p:sp>
-        <p:nvSpPr>
-          <p:cNvPr id="54" name="TextBox 53"/>
-          <p:cNvSpPr txBox="1"/>
-          <p:nvPr/>
-        </p:nvSpPr>
-        <p:spPr>
-          <a:xfrm>
-            <a:off x="6446520" y="4599432"/>
-            <a:ext cx="91440" cy="164592"/>
-          </a:xfrm>
-          <a:prstGeom prst="rect">
-            <a:avLst/>
-          </a:prstGeom>
-          <a:noFill/>
-        </p:spPr>
-        <p:txBody>
-          <a:bodyPr wrap="none">
-            <a:spAutoFit/>
-          </a:bodyPr>
-          <a:lstStyle/>
-          <a:p>
-            <a:pPr algn="l">
-              <a:defRPr sz="900" b="1">
-                <a:solidFill>
-                  <a:srgbClr val="DC2626"/>
-                </a:solidFill>
-                <a:latin typeface="Calibri"/>
-              </a:defRPr>
-            </a:pPr>
-            <a:r>
-              <a:t>•</a:t>
-            </a:r>
-          </a:p>
-        </p:txBody>
-      </p:sp>
-      <p:sp>
-        <p:nvSpPr>
-          <p:cNvPr id="55" name="TextBox 54"/>
-          <p:cNvSpPr txBox="1"/>
-          <p:nvPr/>
-        </p:nvSpPr>
-        <p:spPr>
-          <a:xfrm>
-            <a:off x="6574536" y="4581144"/>
-            <a:ext cx="5221224" cy="182880"/>
-          </a:xfrm>
-          <a:prstGeom prst="rect">
-            <a:avLst/>
-          </a:prstGeom>
-          <a:noFill/>
-        </p:spPr>
-        <p:txBody>
-          <a:bodyPr wrap="none">
-            <a:spAutoFit/>
-          </a:bodyPr>
-          <a:lstStyle/>
-          <a:p>
-            <a:pPr algn="l">
-              <a:defRPr sz="1000" b="0">
-                <a:solidFill>
-                  <a:srgbClr val="374151"/>
-                </a:solidFill>
-                <a:latin typeface="Calibri"/>
-              </a:defRPr>
-            </a:pPr>
-            <a:r>
               <a:t>Patrick Phillips Insurance Agency,</a:t>
             </a:r>
           </a:p>
@@ -40100,13 +39884,13 @@
       </p:sp>
       <p:sp>
         <p:nvSpPr>
-          <p:cNvPr id="56" name="Rectangle 55"/>
+          <p:cNvPr id="50" name="Rectangle 49"/>
           <p:cNvSpPr/>
           <p:nvPr/>
         </p:nvSpPr>
         <p:spPr>
           <a:xfrm>
-            <a:off x="6263640" y="4956048"/>
+            <a:off x="6263640" y="4782312"/>
             <a:ext cx="5623560" cy="676656"/>
           </a:xfrm>
           <a:prstGeom prst="rect">
@@ -40145,13 +39929,13 @@
       </p:sp>
       <p:sp>
         <p:nvSpPr>
-          <p:cNvPr id="57" name="Rectangle 56"/>
+          <p:cNvPr id="51" name="Rectangle 50"/>
           <p:cNvSpPr/>
           <p:nvPr/>
         </p:nvSpPr>
         <p:spPr>
           <a:xfrm>
-            <a:off x="6263640" y="4956048"/>
+            <a:off x="6263640" y="4782312"/>
             <a:ext cx="54864" cy="676656"/>
           </a:xfrm>
           <a:prstGeom prst="rect">
@@ -40188,13 +39972,13 @@
       </p:sp>
       <p:sp>
         <p:nvSpPr>
-          <p:cNvPr id="58" name="TextBox 57"/>
-          <p:cNvSpPr txBox="1"/>
-          <p:nvPr/>
-        </p:nvSpPr>
-        <p:spPr>
-          <a:xfrm>
-            <a:off x="6409944" y="4992624"/>
+          <p:cNvPr id="52" name="TextBox 51"/>
+          <p:cNvSpPr txBox="1"/>
+          <p:nvPr/>
+        </p:nvSpPr>
+        <p:spPr>
+          <a:xfrm>
+            <a:off x="6409944" y="4818888"/>
             <a:ext cx="4251960" cy="219456"/>
           </a:xfrm>
           <a:prstGeom prst="rect">
@@ -40224,13 +40008,13 @@
       </p:sp>
       <p:sp>
         <p:nvSpPr>
-          <p:cNvPr id="59" name="TextBox 58"/>
-          <p:cNvSpPr txBox="1"/>
-          <p:nvPr/>
-        </p:nvSpPr>
-        <p:spPr>
-          <a:xfrm>
-            <a:off x="10652760" y="5010912"/>
+          <p:cNvPr id="53" name="TextBox 52"/>
+          <p:cNvSpPr txBox="1"/>
+          <p:nvPr/>
+        </p:nvSpPr>
+        <p:spPr>
+          <a:xfrm>
+            <a:off x="10652760" y="4837176"/>
             <a:ext cx="1097280" cy="201168"/>
           </a:xfrm>
           <a:prstGeom prst="rect">
@@ -40260,13 +40044,13 @@
       </p:sp>
       <p:sp>
         <p:nvSpPr>
-          <p:cNvPr id="60" name="TextBox 59"/>
-          <p:cNvSpPr txBox="1"/>
-          <p:nvPr/>
-        </p:nvSpPr>
-        <p:spPr>
-          <a:xfrm>
-            <a:off x="6409944" y="5193792"/>
+          <p:cNvPr id="54" name="TextBox 53"/>
+          <p:cNvSpPr txBox="1"/>
+          <p:nvPr/>
+        </p:nvSpPr>
+        <p:spPr>
+          <a:xfrm>
+            <a:off x="6409944" y="5020056"/>
             <a:ext cx="5349240" cy="146304"/>
           </a:xfrm>
           <a:prstGeom prst="rect">
@@ -40296,13 +40080,13 @@
       </p:sp>
       <p:sp>
         <p:nvSpPr>
-          <p:cNvPr id="61" name="TextBox 60"/>
-          <p:cNvSpPr txBox="1"/>
-          <p:nvPr/>
-        </p:nvSpPr>
-        <p:spPr>
-          <a:xfrm>
-            <a:off x="6446520" y="5358384"/>
+          <p:cNvPr id="55" name="TextBox 54"/>
+          <p:cNvSpPr txBox="1"/>
+          <p:nvPr/>
+        </p:nvSpPr>
+        <p:spPr>
+          <a:xfrm>
+            <a:off x="6446520" y="5184648"/>
             <a:ext cx="91440" cy="164592"/>
           </a:xfrm>
           <a:prstGeom prst="rect">
@@ -40332,13 +40116,13 @@
       </p:sp>
       <p:sp>
         <p:nvSpPr>
-          <p:cNvPr id="62" name="TextBox 61"/>
-          <p:cNvSpPr txBox="1"/>
-          <p:nvPr/>
-        </p:nvSpPr>
-        <p:spPr>
-          <a:xfrm>
-            <a:off x="6574536" y="5340096"/>
+          <p:cNvPr id="56" name="TextBox 55"/>
+          <p:cNvSpPr txBox="1"/>
+          <p:nvPr/>
+        </p:nvSpPr>
+        <p:spPr>
+          <a:xfrm>
+            <a:off x="6574536" y="5166360"/>
             <a:ext cx="5221224" cy="182880"/>
           </a:xfrm>
           <a:prstGeom prst="rect">
@@ -40368,13 +40152,13 @@
       </p:sp>
       <p:sp>
         <p:nvSpPr>
-          <p:cNvPr id="63" name="Rectangle 62"/>
+          <p:cNvPr id="57" name="Rectangle 56"/>
           <p:cNvSpPr/>
           <p:nvPr/>
         </p:nvSpPr>
         <p:spPr>
           <a:xfrm>
-            <a:off x="6263640" y="5724144"/>
+            <a:off x="6263640" y="5550408"/>
             <a:ext cx="5623560" cy="1014984"/>
           </a:xfrm>
           <a:prstGeom prst="rect">
@@ -40413,13 +40197,13 @@
       </p:sp>
       <p:sp>
         <p:nvSpPr>
-          <p:cNvPr id="64" name="Rectangle 63"/>
+          <p:cNvPr id="58" name="Rectangle 57"/>
           <p:cNvSpPr/>
           <p:nvPr/>
         </p:nvSpPr>
         <p:spPr>
           <a:xfrm>
-            <a:off x="6263640" y="5724144"/>
+            <a:off x="6263640" y="5550408"/>
             <a:ext cx="54864" cy="1014984"/>
           </a:xfrm>
           <a:prstGeom prst="rect">
@@ -40456,13 +40240,13 @@
       </p:sp>
       <p:sp>
         <p:nvSpPr>
-          <p:cNvPr id="65" name="TextBox 64"/>
-          <p:cNvSpPr txBox="1"/>
-          <p:nvPr/>
-        </p:nvSpPr>
-        <p:spPr>
-          <a:xfrm>
-            <a:off x="6409944" y="5760720"/>
+          <p:cNvPr id="59" name="TextBox 58"/>
+          <p:cNvSpPr txBox="1"/>
+          <p:nvPr/>
+        </p:nvSpPr>
+        <p:spPr>
+          <a:xfrm>
+            <a:off x="6409944" y="5586984"/>
             <a:ext cx="4251960" cy="219456"/>
           </a:xfrm>
           <a:prstGeom prst="rect">
@@ -40492,13 +40276,13 @@
       </p:sp>
       <p:sp>
         <p:nvSpPr>
-          <p:cNvPr id="66" name="TextBox 65"/>
-          <p:cNvSpPr txBox="1"/>
-          <p:nvPr/>
-        </p:nvSpPr>
-        <p:spPr>
-          <a:xfrm>
-            <a:off x="10652760" y="5779007"/>
+          <p:cNvPr id="60" name="TextBox 59"/>
+          <p:cNvSpPr txBox="1"/>
+          <p:nvPr/>
+        </p:nvSpPr>
+        <p:spPr>
+          <a:xfrm>
+            <a:off x="10652760" y="5605272"/>
             <a:ext cx="1097280" cy="201168"/>
           </a:xfrm>
           <a:prstGeom prst="rect">
@@ -40528,13 +40312,13 @@
       </p:sp>
       <p:sp>
         <p:nvSpPr>
-          <p:cNvPr id="67" name="TextBox 66"/>
-          <p:cNvSpPr txBox="1"/>
-          <p:nvPr/>
-        </p:nvSpPr>
-        <p:spPr>
-          <a:xfrm>
-            <a:off x="6409944" y="5961888"/>
+          <p:cNvPr id="61" name="TextBox 60"/>
+          <p:cNvSpPr txBox="1"/>
+          <p:nvPr/>
+        </p:nvSpPr>
+        <p:spPr>
+          <a:xfrm>
+            <a:off x="6409944" y="5788152"/>
             <a:ext cx="5349240" cy="146304"/>
           </a:xfrm>
           <a:prstGeom prst="rect">
@@ -40564,7 +40348,79 @@
       </p:sp>
       <p:sp>
         <p:nvSpPr>
-          <p:cNvPr id="68" name="TextBox 67"/>
+          <p:cNvPr id="62" name="TextBox 61"/>
+          <p:cNvSpPr txBox="1"/>
+          <p:nvPr/>
+        </p:nvSpPr>
+        <p:spPr>
+          <a:xfrm>
+            <a:off x="6446520" y="5952744"/>
+            <a:ext cx="91440" cy="164592"/>
+          </a:xfrm>
+          <a:prstGeom prst="rect">
+            <a:avLst/>
+          </a:prstGeom>
+          <a:noFill/>
+        </p:spPr>
+        <p:txBody>
+          <a:bodyPr wrap="none">
+            <a:spAutoFit/>
+          </a:bodyPr>
+          <a:lstStyle/>
+          <a:p>
+            <a:pPr algn="l">
+              <a:defRPr sz="900" b="1">
+                <a:solidFill>
+                  <a:srgbClr val="EA580C"/>
+                </a:solidFill>
+                <a:latin typeface="Calibri"/>
+              </a:defRPr>
+            </a:pPr>
+            <a:r>
+              <a:t>•</a:t>
+            </a:r>
+          </a:p>
+        </p:txBody>
+      </p:sp>
+      <p:sp>
+        <p:nvSpPr>
+          <p:cNvPr id="63" name="TextBox 62"/>
+          <p:cNvSpPr txBox="1"/>
+          <p:nvPr/>
+        </p:nvSpPr>
+        <p:spPr>
+          <a:xfrm>
+            <a:off x="6574536" y="5934456"/>
+            <a:ext cx="5221224" cy="182880"/>
+          </a:xfrm>
+          <a:prstGeom prst="rect">
+            <a:avLst/>
+          </a:prstGeom>
+          <a:noFill/>
+        </p:spPr>
+        <p:txBody>
+          <a:bodyPr wrap="none">
+            <a:spAutoFit/>
+          </a:bodyPr>
+          <a:lstStyle/>
+          <a:p>
+            <a:pPr algn="l">
+              <a:defRPr sz="1000" b="0">
+                <a:solidFill>
+                  <a:srgbClr val="374151"/>
+                </a:solidFill>
+                <a:latin typeface="Calibri"/>
+              </a:defRPr>
+            </a:pPr>
+            <a:r>
+              <a:t>Eagles Insurnace Agency Llc</a:t>
+            </a:r>
+          </a:p>
+        </p:txBody>
+      </p:sp>
+      <p:sp>
+        <p:nvSpPr>
+          <p:cNvPr id="64" name="TextBox 63"/>
           <p:cNvSpPr txBox="1"/>
           <p:nvPr/>
         </p:nvSpPr>
@@ -40600,7 +40456,7 @@
       </p:sp>
       <p:sp>
         <p:nvSpPr>
-          <p:cNvPr id="69" name="TextBox 68"/>
+          <p:cNvPr id="65" name="TextBox 64"/>
           <p:cNvSpPr txBox="1"/>
           <p:nvPr/>
         </p:nvSpPr>
@@ -40629,14 +40485,14 @@
               </a:defRPr>
             </a:pPr>
             <a:r>
-              <a:t>Eagles Insurnace Agency Llc</a:t>
-            </a:r>
-          </a:p>
-        </p:txBody>
-      </p:sp>
-      <p:sp>
-        <p:nvSpPr>
-          <p:cNvPr id="70" name="TextBox 69"/>
+              <a:t>Laredo Commercial Insurance Agency, Inc.</a:t>
+            </a:r>
+          </a:p>
+        </p:txBody>
+      </p:sp>
+      <p:sp>
+        <p:nvSpPr>
+          <p:cNvPr id="66" name="TextBox 65"/>
           <p:cNvSpPr txBox="1"/>
           <p:nvPr/>
         </p:nvSpPr>
@@ -40672,7 +40528,7 @@
       </p:sp>
       <p:sp>
         <p:nvSpPr>
-          <p:cNvPr id="71" name="TextBox 70"/>
+          <p:cNvPr id="67" name="TextBox 66"/>
           <p:cNvSpPr txBox="1"/>
           <p:nvPr/>
         </p:nvSpPr>
@@ -40701,78 +40557,6 @@
               </a:defRPr>
             </a:pPr>
             <a:r>
-              <a:t>Laredo Commercial Insurance Agency, Inc.</a:t>
-            </a:r>
-          </a:p>
-        </p:txBody>
-      </p:sp>
-      <p:sp>
-        <p:nvSpPr>
-          <p:cNvPr id="72" name="TextBox 71"/>
-          <p:cNvSpPr txBox="1"/>
-          <p:nvPr/>
-        </p:nvSpPr>
-        <p:spPr>
-          <a:xfrm>
-            <a:off x="6446520" y="6473952"/>
-            <a:ext cx="91440" cy="164592"/>
-          </a:xfrm>
-          <a:prstGeom prst="rect">
-            <a:avLst/>
-          </a:prstGeom>
-          <a:noFill/>
-        </p:spPr>
-        <p:txBody>
-          <a:bodyPr wrap="none">
-            <a:spAutoFit/>
-          </a:bodyPr>
-          <a:lstStyle/>
-          <a:p>
-            <a:pPr algn="l">
-              <a:defRPr sz="900" b="1">
-                <a:solidFill>
-                  <a:srgbClr val="EA580C"/>
-                </a:solidFill>
-                <a:latin typeface="Calibri"/>
-              </a:defRPr>
-            </a:pPr>
-            <a:r>
-              <a:t>•</a:t>
-            </a:r>
-          </a:p>
-        </p:txBody>
-      </p:sp>
-      <p:sp>
-        <p:nvSpPr>
-          <p:cNvPr id="73" name="TextBox 72"/>
-          <p:cNvSpPr txBox="1"/>
-          <p:nvPr/>
-        </p:nvSpPr>
-        <p:spPr>
-          <a:xfrm>
-            <a:off x="6574536" y="6455664"/>
-            <a:ext cx="5221224" cy="182880"/>
-          </a:xfrm>
-          <a:prstGeom prst="rect">
-            <a:avLst/>
-          </a:prstGeom>
-          <a:noFill/>
-        </p:spPr>
-        <p:txBody>
-          <a:bodyPr wrap="none">
-            <a:spAutoFit/>
-          </a:bodyPr>
-          <a:lstStyle/>
-          <a:p>
-            <a:pPr algn="l">
-              <a:defRPr sz="1000" b="0">
-                <a:solidFill>
-                  <a:srgbClr val="374151"/>
-                </a:solidFill>
-                <a:latin typeface="Calibri"/>
-              </a:defRPr>
-            </a:pPr>
-            <a:r>
               <a:t>Meadors Adams And Lee</a:t>
             </a:r>
           </a:p>
@@ -40780,7 +40564,7 @@
       </p:sp>
       <p:sp>
         <p:nvSpPr>
-          <p:cNvPr id="74" name="TextBox 73"/>
+          <p:cNvPr id="68" name="TextBox 67"/>
           <p:cNvSpPr txBox="1"/>
           <p:nvPr/>
         </p:nvSpPr>
@@ -40986,7 +40770,7 @@
               </a:defRPr>
             </a:pPr>
             <a:r>
-              <a:t>Generated May 21, 2026</a:t>
+              <a:t>Generated May 22, 2026</a:t>
             </a:r>
           </a:p>
         </p:txBody>
@@ -41151,7 +40935,7 @@
               </a:defRPr>
             </a:pPr>
             <a:r>
-              <a:t>Ranked by Q2 GWP (left) and Q2 Submissions (right)  ·  Mint-shaded row = new vs last week’s deck  ·  Apr 1–May 21</a:t>
+              <a:t>Ranked by Q2 GWP (left) and Q2 Submissions (right)  ·  Mint-shaded row = new vs last week’s deck  ·  Apr 1–May 22</a:t>
             </a:r>
           </a:p>
         </p:txBody>
@@ -41187,7 +40971,7 @@
               </a:defRPr>
             </a:pPr>
             <a:r>
-              <a:t>Generated May 21, 2026</a:t>
+              <a:t>Generated May 22, 2026</a:t>
             </a:r>
           </a:p>
         </p:txBody>
@@ -41640,7 +41424,7 @@
               </a:defRPr>
             </a:pPr>
             <a:r>
-              <a:t>$3.0M</a:t>
+              <a:t>$3.1M</a:t>
             </a:r>
           </a:p>
         </p:txBody>
@@ -41827,7 +41611,7 @@
               </a:defRPr>
             </a:pPr>
             <a:r>
-              <a:t>$2.6M</a:t>
+              <a:t>$2.4M</a:t>
             </a:r>
           </a:p>
         </p:txBody>
@@ -42014,7 +41798,7 @@
               </a:defRPr>
             </a:pPr>
             <a:r>
-              <a:t>$2.4M</a:t>
+              <a:t>$2.0M</a:t>
             </a:r>
           </a:p>
         </p:txBody>
@@ -42201,7 +41985,7 @@
               </a:defRPr>
             </a:pPr>
             <a:r>
-              <a:t>$2.0M</a:t>
+              <a:t>$1.9M</a:t>
             </a:r>
           </a:p>
         </p:txBody>
@@ -42503,7 +42287,7 @@
               </a:defRPr>
             </a:pPr>
             <a:r>
-              <a:t>Derek J.</a:t>
+              <a:t>Christopher H.</a:t>
             </a:r>
           </a:p>
         </p:txBody>
@@ -42539,7 +42323,7 @@
               </a:defRPr>
             </a:pPr>
             <a:r>
-              <a:t>Safeline Insurance Agency, Inc.</a:t>
+              <a:t>DNIS Inc.</a:t>
             </a:r>
           </a:p>
         </p:txBody>
@@ -42575,7 +42359,7 @@
               </a:defRPr>
             </a:pPr>
             <a:r>
-              <a:t>$1.7M</a:t>
+              <a:t>$1.6M</a:t>
             </a:r>
           </a:p>
         </p:txBody>
@@ -42690,7 +42474,7 @@
               </a:defRPr>
             </a:pPr>
             <a:r>
-              <a:t>Derrick L.</a:t>
+              <a:t>Derek J.</a:t>
             </a:r>
           </a:p>
         </p:txBody>
@@ -42726,7 +42510,7 @@
               </a:defRPr>
             </a:pPr>
             <a:r>
-              <a:t>American Fleet Insurance</a:t>
+              <a:t>Safeline Insurance Agency, Inc.</a:t>
             </a:r>
           </a:p>
         </p:txBody>
@@ -42877,7 +42661,7 @@
               </a:defRPr>
             </a:pPr>
             <a:r>
-              <a:t>Christopher H.</a:t>
+              <a:t>Derrick L.</a:t>
             </a:r>
           </a:p>
         </p:txBody>
@@ -42913,7 +42697,7 @@
               </a:defRPr>
             </a:pPr>
             <a:r>
-              <a:t>DNIS Inc.</a:t>
+              <a:t>American Fleet Insurance</a:t>
             </a:r>
           </a:p>
         </p:txBody>
@@ -42949,7 +42733,7 @@
               </a:defRPr>
             </a:pPr>
             <a:r>
-              <a:t>$1.6M</a:t>
+              <a:t>$1.5M</a:t>
             </a:r>
           </a:p>
         </p:txBody>
@@ -43136,7 +42920,7 @@
               </a:defRPr>
             </a:pPr>
             <a:r>
-              <a:t>$1.4M</a:t>
+              <a:t>$1.3M</a:t>
             </a:r>
           </a:p>
         </p:txBody>
@@ -43251,7 +43035,7 @@
               </a:defRPr>
             </a:pPr>
             <a:r>
-              <a:t>Ron D.</a:t>
+              <a:t>Derrick L.</a:t>
             </a:r>
           </a:p>
         </p:txBody>
@@ -43287,7 +43071,7 @@
               </a:defRPr>
             </a:pPr>
             <a:r>
-              <a:t>Insurance4Truckers LLC</a:t>
+              <a:t>AMC Agents LLC</a:t>
             </a:r>
           </a:p>
         </p:txBody>
@@ -43438,7 +43222,7 @@
               </a:defRPr>
             </a:pPr>
             <a:r>
-              <a:t>Derrick L.</a:t>
+              <a:t>Ron D.</a:t>
             </a:r>
           </a:p>
         </p:txBody>
@@ -43474,7 +43258,7 @@
               </a:defRPr>
             </a:pPr>
             <a:r>
-              <a:t>AMC Agents LLC</a:t>
+              <a:t>Insurance4Truckers LLC</a:t>
             </a:r>
           </a:p>
         </p:txBody>
@@ -43510,7 +43294,7 @@
               </a:defRPr>
             </a:pPr>
             <a:r>
-              <a:t>$1.3M</a:t>
+              <a:t>$1.2M</a:t>
             </a:r>
           </a:p>
         </p:txBody>
@@ -43625,7 +43409,7 @@
               </a:defRPr>
             </a:pPr>
             <a:r>
-              <a:t>Ron D.</a:t>
+              <a:t>Alexis B.</a:t>
             </a:r>
           </a:p>
         </p:txBody>
@@ -43661,7 +43445,7 @@
               </a:defRPr>
             </a:pPr>
             <a:r>
-              <a:t>Valion Security LLC</a:t>
+              <a:t>A.S.I.A Inc</a:t>
             </a:r>
           </a:p>
         </p:txBody>
@@ -43697,7 +43481,7 @@
               </a:defRPr>
             </a:pPr>
             <a:r>
-              <a:t>$964K</a:t>
+              <a:t>$1.0M</a:t>
             </a:r>
           </a:p>
         </p:txBody>
@@ -43812,7 +43596,7 @@
               </a:defRPr>
             </a:pPr>
             <a:r>
-              <a:t>Alexis B.</a:t>
+              <a:t>Ron D.</a:t>
             </a:r>
           </a:p>
         </p:txBody>
@@ -43848,7 +43632,7 @@
               </a:defRPr>
             </a:pPr>
             <a:r>
-              <a:t>A.S.I.A Inc</a:t>
+              <a:t>Valion Security LLC</a:t>
             </a:r>
           </a:p>
         </p:txBody>
@@ -43884,7 +43668,7 @@
               </a:defRPr>
             </a:pPr>
             <a:r>
-              <a:t>$892K</a:t>
+              <a:t>$1.0M</a:t>
             </a:r>
           </a:p>
         </p:txBody>
@@ -43999,7 +43783,7 @@
               </a:defRPr>
             </a:pPr>
             <a:r>
-              <a:t>Kurt B.</a:t>
+              <a:t>Derek J.</a:t>
             </a:r>
           </a:p>
         </p:txBody>
@@ -44035,7 +43819,7 @@
               </a:defRPr>
             </a:pPr>
             <a:r>
-              <a:t>Fino Services LLC</a:t>
+              <a:t>Sedge Insurance Agency LLC</a:t>
             </a:r>
           </a:p>
         </p:txBody>
@@ -44071,7 +43855,7 @@
               </a:defRPr>
             </a:pPr>
             <a:r>
-              <a:t>$859K</a:t>
+              <a:t>$919K</a:t>
             </a:r>
           </a:p>
         </p:txBody>
@@ -44186,7 +43970,7 @@
               </a:defRPr>
             </a:pPr>
             <a:r>
-              <a:t>Ron D.</a:t>
+              <a:t>Derek J.</a:t>
             </a:r>
           </a:p>
         </p:txBody>
@@ -44222,7 +44006,7 @@
               </a:defRPr>
             </a:pPr>
             <a:r>
-              <a:t>Prestige International Insurance Group I…</a:t>
+              <a:t>Surefire Insurance Agency Corp.</a:t>
             </a:r>
           </a:p>
         </p:txBody>
@@ -44258,7 +44042,7 @@
               </a:defRPr>
             </a:pPr>
             <a:r>
-              <a:t>$796K</a:t>
+              <a:t>$890K</a:t>
             </a:r>
           </a:p>
         </p:txBody>
@@ -44373,7 +44157,7 @@
               </a:defRPr>
             </a:pPr>
             <a:r>
-              <a:t>Derek J.</a:t>
+              <a:t>Kurt B.</a:t>
             </a:r>
           </a:p>
         </p:txBody>
@@ -44409,7 +44193,7 @@
               </a:defRPr>
             </a:pPr>
             <a:r>
-              <a:t>Sedge Insurance Agency LLC</a:t>
+              <a:t>Fino Services LLC</a:t>
             </a:r>
           </a:p>
         </p:txBody>
@@ -44445,7 +44229,7 @@
               </a:defRPr>
             </a:pPr>
             <a:r>
-              <a:t>$770K</a:t>
+              <a:t>$884K</a:t>
             </a:r>
           </a:p>
         </p:txBody>
@@ -44596,7 +44380,7 @@
               </a:defRPr>
             </a:pPr>
             <a:r>
-              <a:t>Surefire Insurance Agency Corp.</a:t>
+              <a:t>Ewall Insurance Company</a:t>
             </a:r>
           </a:p>
         </p:txBody>
@@ -44632,7 +44416,7 @@
               </a:defRPr>
             </a:pPr>
             <a:r>
-              <a:t>$765K</a:t>
+              <a:t>$796K</a:t>
             </a:r>
           </a:p>
         </p:txBody>
@@ -44819,7 +44603,7 @@
               </a:defRPr>
             </a:pPr>
             <a:r>
-              <a:t>$722K</a:t>
+              <a:t>$753K</a:t>
             </a:r>
           </a:p>
         </p:txBody>
@@ -44934,7 +44718,7 @@
               </a:defRPr>
             </a:pPr>
             <a:r>
-              <a:t>Derek J.</a:t>
+              <a:t>Ron D.</a:t>
             </a:r>
           </a:p>
         </p:txBody>
@@ -44970,7 +44754,7 @@
               </a:defRPr>
             </a:pPr>
             <a:r>
-              <a:t>Ewall Insurance Company</a:t>
+              <a:t>Prestige International Insurance Group I…</a:t>
             </a:r>
           </a:p>
         </p:txBody>
@@ -45006,7 +44790,7 @@
               </a:defRPr>
             </a:pPr>
             <a:r>
-              <a:t>$696K</a:t>
+              <a:t>$752K</a:t>
             </a:r>
           </a:p>
         </p:txBody>
@@ -45193,7 +44977,7 @@
               </a:defRPr>
             </a:pPr>
             <a:r>
-              <a:t>$636K</a:t>
+              <a:t>$640K</a:t>
             </a:r>
           </a:p>
         </p:txBody>
@@ -45646,7 +45430,7 @@
               </a:defRPr>
             </a:pPr>
             <a:r>
-              <a:t>2117</a:t>
+              <a:t>2146</a:t>
             </a:r>
           </a:p>
         </p:txBody>
@@ -45833,7 +45617,7 @@
               </a:defRPr>
             </a:pPr>
             <a:r>
-              <a:t>1979</a:t>
+              <a:t>2002</a:t>
             </a:r>
           </a:p>
         </p:txBody>
@@ -46020,7 +45804,7 @@
               </a:defRPr>
             </a:pPr>
             <a:r>
-              <a:t>1472</a:t>
+              <a:t>1502</a:t>
             </a:r>
           </a:p>
         </p:txBody>
@@ -46207,7 +45991,7 @@
               </a:defRPr>
             </a:pPr>
             <a:r>
-              <a:t>1200</a:t>
+              <a:t>1225</a:t>
             </a:r>
           </a:p>
         </p:txBody>
@@ -46394,7 +46178,7 @@
               </a:defRPr>
             </a:pPr>
             <a:r>
-              <a:t>1104</a:t>
+              <a:t>1150</a:t>
             </a:r>
           </a:p>
         </p:txBody>
@@ -46581,7 +46365,7 @@
               </a:defRPr>
             </a:pPr>
             <a:r>
-              <a:t>974</a:t>
+              <a:t>996</a:t>
             </a:r>
           </a:p>
         </p:txBody>
@@ -46768,7 +46552,7 @@
               </a:defRPr>
             </a:pPr>
             <a:r>
-              <a:t>930</a:t>
+              <a:t>954</a:t>
             </a:r>
           </a:p>
         </p:txBody>
@@ -46955,7 +46739,7 @@
               </a:defRPr>
             </a:pPr>
             <a:r>
-              <a:t>878</a:t>
+              <a:t>890</a:t>
             </a:r>
           </a:p>
         </p:txBody>
@@ -47142,7 +46926,7 @@
               </a:defRPr>
             </a:pPr>
             <a:r>
-              <a:t>670</a:t>
+              <a:t>680</a:t>
             </a:r>
           </a:p>
         </p:txBody>
@@ -47329,7 +47113,7 @@
               </a:defRPr>
             </a:pPr>
             <a:r>
-              <a:t>525</a:t>
+              <a:t>539</a:t>
             </a:r>
           </a:p>
         </p:txBody>
@@ -47516,7 +47300,7 @@
               </a:defRPr>
             </a:pPr>
             <a:r>
-              <a:t>508</a:t>
+              <a:t>520</a:t>
             </a:r>
           </a:p>
         </p:txBody>
@@ -47703,7 +47487,7 @@
               </a:defRPr>
             </a:pPr>
             <a:r>
-              <a:t>466</a:t>
+              <a:t>484</a:t>
             </a:r>
           </a:p>
         </p:txBody>
@@ -47890,7 +47674,7 @@
               </a:defRPr>
             </a:pPr>
             <a:r>
-              <a:t>429</a:t>
+              <a:t>434</a:t>
             </a:r>
           </a:p>
         </p:txBody>
@@ -48077,7 +47861,7 @@
               </a:defRPr>
             </a:pPr>
             <a:r>
-              <a:t>418</a:t>
+              <a:t>424</a:t>
             </a:r>
           </a:p>
         </p:txBody>
@@ -48264,7 +48048,7 @@
               </a:defRPr>
             </a:pPr>
             <a:r>
-              <a:t>371</a:t>
+              <a:t>377</a:t>
             </a:r>
           </a:p>
         </p:txBody>
@@ -48379,7 +48163,7 @@
               </a:defRPr>
             </a:pPr>
             <a:r>
-              <a:t>Erika C.</a:t>
+              <a:t>Kurt B.</a:t>
             </a:r>
           </a:p>
         </p:txBody>
@@ -48415,7 +48199,7 @@
               </a:defRPr>
             </a:pPr>
             <a:r>
-              <a:t>Southwestern Insurance Services, Inc.</a:t>
+              <a:t>Rodriguez Insurance Agency LLC</a:t>
             </a:r>
           </a:p>
         </p:txBody>
@@ -48451,7 +48235,7 @@
               </a:defRPr>
             </a:pPr>
             <a:r>
-              <a:t>345</a:t>
+              <a:t>357</a:t>
             </a:r>
           </a:p>
         </p:txBody>
@@ -48566,7 +48350,7 @@
               </a:defRPr>
             </a:pPr>
             <a:r>
-              <a:t>Kurt B.</a:t>
+              <a:t>Erika C.</a:t>
             </a:r>
           </a:p>
         </p:txBody>
@@ -48602,7 +48386,7 @@
               </a:defRPr>
             </a:pPr>
             <a:r>
-              <a:t>Rodriguez Insurance Agency LLC</a:t>
+              <a:t>Southwestern Insurance Services, Inc.</a:t>
             </a:r>
           </a:p>
         </p:txBody>
@@ -48638,7 +48422,7 @@
               </a:defRPr>
             </a:pPr>
             <a:r>
-              <a:t>345</a:t>
+              <a:t>350</a:t>
             </a:r>
           </a:p>
         </p:txBody>
@@ -48753,7 +48537,7 @@
               </a:defRPr>
             </a:pPr>
             <a:r>
-              <a:t>Alexis B.</a:t>
+              <a:t>Kurt B.</a:t>
             </a:r>
           </a:p>
         </p:txBody>
@@ -48789,7 +48573,7 @@
               </a:defRPr>
             </a:pPr>
             <a:r>
-              <a:t>Stellar Management, Inc</a:t>
+              <a:t>The McClure Agency LLC</a:t>
             </a:r>
           </a:p>
         </p:txBody>
@@ -48825,7 +48609,7 @@
               </a:defRPr>
             </a:pPr>
             <a:r>
-              <a:t>329</a:t>
+              <a:t>343</a:t>
             </a:r>
           </a:p>
         </p:txBody>
@@ -48940,7 +48724,7 @@
               </a:defRPr>
             </a:pPr>
             <a:r>
-              <a:t>Kurt B.</a:t>
+              <a:t>Alexis B.</a:t>
             </a:r>
           </a:p>
         </p:txBody>
@@ -48976,7 +48760,7 @@
               </a:defRPr>
             </a:pPr>
             <a:r>
-              <a:t>The McClure Agency LLC</a:t>
+              <a:t>Stellar Management, Inc</a:t>
             </a:r>
           </a:p>
         </p:txBody>
@@ -49012,7 +48796,7 @@
               </a:defRPr>
             </a:pPr>
             <a:r>
-              <a:t>319</a:t>
+              <a:t>338</a:t>
             </a:r>
           </a:p>
         </p:txBody>
@@ -49199,7 +48983,7 @@
               </a:defRPr>
             </a:pPr>
             <a:r>
-              <a:t>299</a:t>
+              <a:t>304</a:t>
             </a:r>
           </a:p>
         </p:txBody>

--- a/generated/Sales Dashboards/BD Rep Scoreboard.pptx
+++ b/generated/Sales Dashboards/BD Rep Scoreboard.pptx
@@ -1661,7 +1661,7 @@
           </a:p>
           <a:p>
             <a:r>
-              <a:t>- We are 52 days into a 91-day quarter.</a:t>
+              <a:t>- We are 53 days into a 91-day quarter.</a:t>
             </a:r>
           </a:p>
         </p:txBody>
@@ -4902,7 +4902,7 @@
               </a:defRPr>
             </a:pPr>
             <a:r>
-              <a:t>As of May 22, 2026  |  52 days into Q2  |  39 days remaining</a:t>
+              <a:t>As of May 23, 2026  |  53 days into Q2  |  38 days remaining</a:t>
             </a:r>
           </a:p>
         </p:txBody>
@@ -4938,7 +4938,7 @@
               </a:defRPr>
             </a:pPr>
             <a:r>
-              <a:t>Generated May 22, 2026</a:t>
+              <a:t>Generated May 23, 2026</a:t>
             </a:r>
           </a:p>
         </p:txBody>
@@ -5019,7 +5019,7 @@
               </a:defRPr>
             </a:pPr>
             <a:r>
-              <a:t>$19.0M</a:t>
+              <a:t>$19.8M</a:t>
             </a:r>
           </a:p>
         </p:txBody>
@@ -5055,7 +5055,7 @@
               </a:defRPr>
             </a:pPr>
             <a:r>
-              <a:t>Team GWP Q2 YTD  |  Proj. $33.3M</a:t>
+              <a:t>Team GWP Q2 YTD  |  Proj. $34.0M</a:t>
             </a:r>
           </a:p>
         </p:txBody>
@@ -5134,7 +5134,7 @@
               </a:defRPr>
             </a:pPr>
             <a:r>
-              <a:t>Pacing 180% of Q1 Final</a:t>
+              <a:t>Pacing 184% of Q1 Final</a:t>
             </a:r>
           </a:p>
         </p:txBody>
@@ -5215,7 +5215,7 @@
               </a:defRPr>
             </a:pPr>
             <a:r>
-              <a:t>86%</a:t>
+              <a:t>87%</a:t>
             </a:r>
           </a:p>
         </p:txBody>
@@ -5411,7 +5411,7 @@
               </a:defRPr>
             </a:pPr>
             <a:r>
-              <a:t>29,898</a:t>
+              <a:t>30,471</a:t>
             </a:r>
           </a:p>
         </p:txBody>
@@ -5758,7 +5758,7 @@
               </a:defRPr>
             </a:pPr>
             <a:r>
-              <a:t>▲ $3.4M vs Apr pace</a:t>
+              <a:t>▲ $4.0M vs Apr pace</a:t>
             </a:r>
           </a:p>
         </p:txBody>
@@ -5794,7 +5794,7 @@
               </a:defRPr>
             </a:pPr>
             <a:r>
-              <a:t>▲ 38pp vs Q1 avg (48%)</a:t>
+              <a:t>▲ 39pp vs Q1 avg (48%)</a:t>
             </a:r>
           </a:p>
         </p:txBody>
@@ -5830,7 +5830,7 @@
               </a:defRPr>
             </a:pPr>
             <a:r>
-              <a:t>▲ 12283 vs Apr (17615)</a:t>
+              <a:t>▲ 12906 vs Apr (17565)</a:t>
             </a:r>
           </a:p>
         </p:txBody>
@@ -6071,7 +6071,7 @@
               </a:defRPr>
             </a:pPr>
             <a:r>
-              <a:t>$26.5M</a:t>
+              <a:t>$27.2M</a:t>
             </a:r>
           </a:p>
         </p:txBody>
@@ -6143,7 +6143,7 @@
               </a:defRPr>
             </a:pPr>
             <a:r>
-              <a:t>$8.5M</a:t>
+              <a:t>$8.6M</a:t>
             </a:r>
           </a:p>
         </p:txBody>
@@ -6179,7 +6179,7 @@
               </a:defRPr>
             </a:pPr>
             <a:r>
-              <a:t>Renewals (23%)</a:t>
+              <a:t>Renewals (22%)</a:t>
             </a:r>
           </a:p>
         </p:txBody>
@@ -6215,7 +6215,7 @@
               </a:defRPr>
             </a:pPr>
             <a:r>
-              <a:t>$2.6M</a:t>
+              <a:t>$2.8M</a:t>
             </a:r>
           </a:p>
         </p:txBody>
@@ -6600,7 +6600,7 @@
               </a:defRPr>
             </a:pPr>
             <a:r>
-              <a:t>45,825</a:t>
+              <a:t>45,795</a:t>
             </a:r>
           </a:p>
         </p:txBody>
@@ -6787,7 +6787,7 @@
               </a:defRPr>
             </a:pPr>
             <a:r>
-              <a:t>MTD (May):  $9.32M written  ·  $13.13M pace  ·  22/31 days elapsed</a:t>
+              <a:t>MTD (May):  $10.14M written  ·  $13.67M pace  ·  23/31 days elapsed</a:t>
             </a:r>
           </a:p>
         </p:txBody>
@@ -6952,7 +6952,7 @@
               </a:defRPr>
             </a:pPr>
             <a:r>
-              <a:t>Largest fleet policies written Apr 1–May 22  ·  Ranked by premium  ·  Fleet = 4+ power units</a:t>
+              <a:t>Largest fleet policies written Apr 1–May 23  ·  Ranked by premium  ·  Fleet = 4+ power units</a:t>
             </a:r>
           </a:p>
         </p:txBody>
@@ -6988,7 +6988,7 @@
               </a:defRPr>
             </a:pPr>
             <a:r>
-              <a:t>Generated May 22, 2026</a:t>
+              <a:t>Generated May 23, 2026</a:t>
             </a:r>
           </a:p>
         </p:txBody>
@@ -8031,7 +8031,7 @@
               </a:defRPr>
             </a:pPr>
             <a:r>
-              <a:t>The Dorfman Organization, Ltd.</a:t>
+              <a:t>Insurox Group, Inc</a:t>
             </a:r>
           </a:p>
         </p:txBody>
@@ -8067,7 +8067,7 @@
               </a:defRPr>
             </a:pPr>
             <a:r>
-              <a:t>$308K</a:t>
+              <a:t>$275K</a:t>
             </a:r>
           </a:p>
         </p:txBody>
@@ -8103,7 +8103,7 @@
               </a:defRPr>
             </a:pPr>
             <a:r>
-              <a:t>22</a:t>
+              <a:t>9</a:t>
             </a:r>
           </a:p>
         </p:txBody>
@@ -8218,7 +8218,7 @@
               </a:defRPr>
             </a:pPr>
             <a:r>
-              <a:t>Derek J.</a:t>
+              <a:t>Derrick L.</a:t>
             </a:r>
           </a:p>
         </p:txBody>
@@ -8254,7 +8254,7 @@
               </a:defRPr>
             </a:pPr>
             <a:r>
-              <a:t>Sedge Insurance Agency LLC</a:t>
+              <a:t>Lone Star Direct Insurance Agency LLC</a:t>
             </a:r>
           </a:p>
         </p:txBody>
@@ -8290,7 +8290,7 @@
               </a:defRPr>
             </a:pPr>
             <a:r>
-              <a:t>$277K</a:t>
+              <a:t>$254K</a:t>
             </a:r>
           </a:p>
         </p:txBody>
@@ -8326,7 +8326,7 @@
               </a:defRPr>
             </a:pPr>
             <a:r>
-              <a:t>12</a:t>
+              <a:t>21</a:t>
             </a:r>
           </a:p>
         </p:txBody>
@@ -8477,7 +8477,7 @@
               </a:defRPr>
             </a:pPr>
             <a:r>
-              <a:t>Insurox Group, Inc</a:t>
+              <a:t>TR Insurance Agency Inc</a:t>
             </a:r>
           </a:p>
         </p:txBody>
@@ -8513,7 +8513,7 @@
               </a:defRPr>
             </a:pPr>
             <a:r>
-              <a:t>$275K</a:t>
+              <a:t>$241K</a:t>
             </a:r>
           </a:p>
         </p:txBody>
@@ -8549,7 +8549,7 @@
               </a:defRPr>
             </a:pPr>
             <a:r>
-              <a:t>9</a:t>
+              <a:t>12</a:t>
             </a:r>
           </a:p>
         </p:txBody>
@@ -8664,7 +8664,7 @@
               </a:defRPr>
             </a:pPr>
             <a:r>
-              <a:t>Derrick L.</a:t>
+              <a:t>Alexis B.</a:t>
             </a:r>
           </a:p>
         </p:txBody>
@@ -8700,7 +8700,7 @@
               </a:defRPr>
             </a:pPr>
             <a:r>
-              <a:t>Lone Star Direct Insurance Agency LLC</a:t>
+              <a:t>Amerigo Insurance Agency</a:t>
             </a:r>
           </a:p>
         </p:txBody>
@@ -8736,7 +8736,7 @@
               </a:defRPr>
             </a:pPr>
             <a:r>
-              <a:t>$254K</a:t>
+              <a:t>$234K</a:t>
             </a:r>
           </a:p>
         </p:txBody>
@@ -8772,7 +8772,7 @@
               </a:defRPr>
             </a:pPr>
             <a:r>
-              <a:t>21</a:t>
+              <a:t>10</a:t>
             </a:r>
           </a:p>
         </p:txBody>
@@ -8887,7 +8887,7 @@
               </a:defRPr>
             </a:pPr>
             <a:r>
-              <a:t>Christopher H.</a:t>
+              <a:t>Derek J.</a:t>
             </a:r>
           </a:p>
         </p:txBody>
@@ -8923,7 +8923,7 @@
               </a:defRPr>
             </a:pPr>
             <a:r>
-              <a:t>TR Insurance Agency Inc</a:t>
+              <a:t>Reliance Partners, LLC</a:t>
             </a:r>
           </a:p>
         </p:txBody>
@@ -8959,7 +8959,7 @@
               </a:defRPr>
             </a:pPr>
             <a:r>
-              <a:t>$241K</a:t>
+              <a:t>$231K</a:t>
             </a:r>
           </a:p>
         </p:txBody>
@@ -8995,7 +8995,7 @@
               </a:defRPr>
             </a:pPr>
             <a:r>
-              <a:t>12</a:t>
+              <a:t>13</a:t>
             </a:r>
           </a:p>
         </p:txBody>
@@ -9110,7 +9110,7 @@
               </a:defRPr>
             </a:pPr>
             <a:r>
-              <a:t>Alexis B.</a:t>
+              <a:t>Derek J.</a:t>
             </a:r>
           </a:p>
         </p:txBody>
@@ -9146,7 +9146,7 @@
               </a:defRPr>
             </a:pPr>
             <a:r>
-              <a:t>Amerigo Insurance Agency</a:t>
+              <a:t>Paramount Exclusive Insurance Services, Inc.</a:t>
             </a:r>
           </a:p>
         </p:txBody>
@@ -9182,7 +9182,7 @@
               </a:defRPr>
             </a:pPr>
             <a:r>
-              <a:t>$234K</a:t>
+              <a:t>$220K</a:t>
             </a:r>
           </a:p>
         </p:txBody>
@@ -9218,7 +9218,7 @@
               </a:defRPr>
             </a:pPr>
             <a:r>
-              <a:t>10</a:t>
+              <a:t>11</a:t>
             </a:r>
           </a:p>
         </p:txBody>
@@ -9333,7 +9333,7 @@
               </a:defRPr>
             </a:pPr>
             <a:r>
-              <a:t>Christopher H.</a:t>
+              <a:t>Derek J.</a:t>
             </a:r>
           </a:p>
         </p:txBody>
@@ -9369,7 +9369,7 @@
               </a:defRPr>
             </a:pPr>
             <a:r>
-              <a:t>Commercial Trucking Insurance Agency LLC</a:t>
+              <a:t>Jagdeep Singh Insurance Agency, Inc</a:t>
             </a:r>
           </a:p>
         </p:txBody>
@@ -9405,7 +9405,7 @@
               </a:defRPr>
             </a:pPr>
             <a:r>
-              <a:t>$232K</a:t>
+              <a:t>$217K</a:t>
             </a:r>
           </a:p>
         </p:txBody>
@@ -9441,7 +9441,7 @@
               </a:defRPr>
             </a:pPr>
             <a:r>
-              <a:t>13</a:t>
+              <a:t>11</a:t>
             </a:r>
           </a:p>
         </p:txBody>
@@ -9592,7 +9592,7 @@
               </a:defRPr>
             </a:pPr>
             <a:r>
-              <a:t>Reliance Partners, LLC</a:t>
+              <a:t>Surefire Insurance Agency Corp.</a:t>
             </a:r>
           </a:p>
         </p:txBody>
@@ -9628,7 +9628,7 @@
               </a:defRPr>
             </a:pPr>
             <a:r>
-              <a:t>$231K</a:t>
+              <a:t>$216K</a:t>
             </a:r>
           </a:p>
         </p:txBody>
@@ -9664,7 +9664,7 @@
               </a:defRPr>
             </a:pPr>
             <a:r>
-              <a:t>13</a:t>
+              <a:t>17</a:t>
             </a:r>
           </a:p>
         </p:txBody>
@@ -9779,7 +9779,7 @@
               </a:defRPr>
             </a:pPr>
             <a:r>
-              <a:t>Derek J.</a:t>
+              <a:t>Ron D.</a:t>
             </a:r>
           </a:p>
         </p:txBody>
@@ -9815,7 +9815,7 @@
               </a:defRPr>
             </a:pPr>
             <a:r>
-              <a:t>Paramount Exclusive Insurance Services, Inc.</a:t>
+              <a:t>Eagle National Insurance Services, Inc.</a:t>
             </a:r>
           </a:p>
         </p:txBody>
@@ -9851,7 +9851,7 @@
               </a:defRPr>
             </a:pPr>
             <a:r>
-              <a:t>$220K</a:t>
+              <a:t>$202K</a:t>
             </a:r>
           </a:p>
         </p:txBody>
@@ -9887,7 +9887,7 @@
               </a:defRPr>
             </a:pPr>
             <a:r>
-              <a:t>11</a:t>
+              <a:t>8</a:t>
             </a:r>
           </a:p>
         </p:txBody>
@@ -10038,7 +10038,7 @@
               </a:defRPr>
             </a:pPr>
             <a:r>
-              <a:t>Jagdeep Singh Insurance Agency, Inc</a:t>
+              <a:t>CASCADE INSURANCE SERVICES INC DBA: CASCADE MUTUAL INSURANCE SERV</a:t>
             </a:r>
           </a:p>
         </p:txBody>
@@ -10074,7 +10074,7 @@
               </a:defRPr>
             </a:pPr>
             <a:r>
-              <a:t>$217K</a:t>
+              <a:t>$202K</a:t>
             </a:r>
           </a:p>
         </p:txBody>
@@ -10225,7 +10225,7 @@
               </a:defRPr>
             </a:pPr>
             <a:r>
-              <a:t>Derek J.</a:t>
+              <a:t>Derrick L.</a:t>
             </a:r>
           </a:p>
         </p:txBody>
@@ -10261,7 +10261,7 @@
               </a:defRPr>
             </a:pPr>
             <a:r>
-              <a:t>Surefire Insurance Agency Corp.</a:t>
+              <a:t>Justin Wilson</a:t>
             </a:r>
           </a:p>
         </p:txBody>
@@ -10297,7 +10297,7 @@
               </a:defRPr>
             </a:pPr>
             <a:r>
-              <a:t>$216K</a:t>
+              <a:t>$194K</a:t>
             </a:r>
           </a:p>
         </p:txBody>
@@ -10333,7 +10333,7 @@
               </a:defRPr>
             </a:pPr>
             <a:r>
-              <a:t>17</a:t>
+              <a:t>9</a:t>
             </a:r>
           </a:p>
         </p:txBody>
@@ -10448,7 +10448,7 @@
               </a:defRPr>
             </a:pPr>
             <a:r>
-              <a:t>Ron D.</a:t>
+              <a:t>Alexis B.</a:t>
             </a:r>
           </a:p>
         </p:txBody>
@@ -10484,7 +10484,7 @@
               </a:defRPr>
             </a:pPr>
             <a:r>
-              <a:t>Eagle National Insurance Services, Inc.</a:t>
+              <a:t>Stellar Management, Inc</a:t>
             </a:r>
           </a:p>
         </p:txBody>
@@ -10520,7 +10520,7 @@
               </a:defRPr>
             </a:pPr>
             <a:r>
-              <a:t>$202K</a:t>
+              <a:t>$190K</a:t>
             </a:r>
           </a:p>
         </p:txBody>
@@ -10556,7 +10556,7 @@
               </a:defRPr>
             </a:pPr>
             <a:r>
-              <a:t>8</a:t>
+              <a:t>13</a:t>
             </a:r>
           </a:p>
         </p:txBody>
@@ -10671,7 +10671,7 @@
               </a:defRPr>
             </a:pPr>
             <a:r>
-              <a:t>Derek J.</a:t>
+              <a:t>Westy M.</a:t>
             </a:r>
           </a:p>
         </p:txBody>
@@ -10707,7 +10707,7 @@
               </a:defRPr>
             </a:pPr>
             <a:r>
-              <a:t>CASCADE INSURANCE SERVICES INC DBA: CASCADE MUTUAL INSURANCE SERV</a:t>
+              <a:t>Acrisure LLC DBA RRL Insurance Agency</a:t>
             </a:r>
           </a:p>
         </p:txBody>
@@ -10743,7 +10743,7 @@
               </a:defRPr>
             </a:pPr>
             <a:r>
-              <a:t>$202K</a:t>
+              <a:t>$184K</a:t>
             </a:r>
           </a:p>
         </p:txBody>
@@ -10779,7 +10779,7 @@
               </a:defRPr>
             </a:pPr>
             <a:r>
-              <a:t>11</a:t>
+              <a:t>10</a:t>
             </a:r>
           </a:p>
         </p:txBody>
@@ -10894,7 +10894,7 @@
               </a:defRPr>
             </a:pPr>
             <a:r>
-              <a:t>Derrick L.</a:t>
+              <a:t>Christopher H.</a:t>
             </a:r>
           </a:p>
         </p:txBody>
@@ -10930,7 +10930,7 @@
               </a:defRPr>
             </a:pPr>
             <a:r>
-              <a:t>Justin Wilson</a:t>
+              <a:t>Truczone Insurance Agency LLC</a:t>
             </a:r>
           </a:p>
         </p:txBody>
@@ -10966,7 +10966,7 @@
               </a:defRPr>
             </a:pPr>
             <a:r>
-              <a:t>$194K</a:t>
+              <a:t>$179K</a:t>
             </a:r>
           </a:p>
         </p:txBody>
@@ -11002,7 +11002,7 @@
               </a:defRPr>
             </a:pPr>
             <a:r>
-              <a:t>9</a:t>
+              <a:t>13</a:t>
             </a:r>
           </a:p>
         </p:txBody>
@@ -11117,7 +11117,7 @@
               </a:defRPr>
             </a:pPr>
             <a:r>
-              <a:t>Alexis B.</a:t>
+              <a:t>Ron D.</a:t>
             </a:r>
           </a:p>
         </p:txBody>
@@ -11153,7 +11153,7 @@
               </a:defRPr>
             </a:pPr>
             <a:r>
-              <a:t>Stellar Management, Inc</a:t>
+              <a:t>USA SPECIALTY INSURANCE/DBA PREVENTTY</a:t>
             </a:r>
           </a:p>
         </p:txBody>
@@ -11189,7 +11189,7 @@
               </a:defRPr>
             </a:pPr>
             <a:r>
-              <a:t>$190K</a:t>
+              <a:t>$179K</a:t>
             </a:r>
           </a:p>
         </p:txBody>
@@ -11225,7 +11225,7 @@
               </a:defRPr>
             </a:pPr>
             <a:r>
-              <a:t>13</a:t>
+              <a:t>11</a:t>
             </a:r>
           </a:p>
         </p:txBody>
@@ -11340,7 +11340,7 @@
               </a:defRPr>
             </a:pPr>
             <a:r>
-              <a:t>Westy M.</a:t>
+              <a:t>Alexis B.</a:t>
             </a:r>
           </a:p>
         </p:txBody>
@@ -11376,7 +11376,7 @@
               </a:defRPr>
             </a:pPr>
             <a:r>
-              <a:t>Acrisure LLC DBA RRL Insurance Agency</a:t>
+              <a:t>MST INSURANCE SERVICES INC</a:t>
             </a:r>
           </a:p>
         </p:txBody>
@@ -11412,7 +11412,7 @@
               </a:defRPr>
             </a:pPr>
             <a:r>
-              <a:t>$184K</a:t>
+              <a:t>$175K</a:t>
             </a:r>
           </a:p>
         </p:txBody>
@@ -11448,7 +11448,7 @@
               </a:defRPr>
             </a:pPr>
             <a:r>
-              <a:t>10</a:t>
+              <a:t>9</a:t>
             </a:r>
           </a:p>
         </p:txBody>
@@ -11563,7 +11563,7 @@
               </a:defRPr>
             </a:pPr>
             <a:r>
-              <a:t>Christopher H.</a:t>
+              <a:t>Westy M.</a:t>
             </a:r>
           </a:p>
         </p:txBody>
@@ -11599,7 +11599,7 @@
               </a:defRPr>
             </a:pPr>
             <a:r>
-              <a:t>Truczone Insurance Agency LLC</a:t>
+              <a:t>Acrisure LLC DBA RRL Insurance Agency</a:t>
             </a:r>
           </a:p>
         </p:txBody>
@@ -11635,7 +11635,7 @@
               </a:defRPr>
             </a:pPr>
             <a:r>
-              <a:t>$179K</a:t>
+              <a:t>$174K</a:t>
             </a:r>
           </a:p>
         </p:txBody>
@@ -11750,7 +11750,7 @@
               </a:defRPr>
             </a:pPr>
             <a:r>
-              <a:t>Q2 Fleet Total: 221 fleet binds  ·  $20.8M bound premium</a:t>
+              <a:t>Q2 Fleet Total: 217 fleet binds  ·  $20.0M bound premium</a:t>
             </a:r>
           </a:p>
         </p:txBody>
@@ -11891,7 +11891,7 @@
               </a:defRPr>
             </a:pPr>
             <a:r>
-              <a:t>Ranked by bound GWP written  ·  Mint-shaded row = new vs last week’s deck  ·  Apr 1–May 22  ·  Individual producers</a:t>
+              <a:t>Ranked by bound GWP written  ·  Mint-shaded row = new vs last week’s deck  ·  Apr 1–May 23  ·  Individual producers</a:t>
             </a:r>
           </a:p>
         </p:txBody>
@@ -11927,7 +11927,7 @@
               </a:defRPr>
             </a:pPr>
             <a:r>
-              <a:t>Generated May 22, 2026</a:t>
+              <a:t>Generated May 23, 2026</a:t>
             </a:r>
           </a:p>
         </p:txBody>
@@ -12301,7 +12301,7 @@
               </a:defRPr>
             </a:pPr>
             <a:r>
-              <a:t>$4.0M</a:t>
+              <a:t>$4.1M</a:t>
             </a:r>
           </a:p>
         </p:txBody>
@@ -13610,7 +13610,7 @@
               </a:defRPr>
             </a:pPr>
             <a:r>
-              <a:t>$977K</a:t>
+              <a:t>$1.0M</a:t>
             </a:r>
           </a:p>
         </p:txBody>
@@ -14099,7 +14099,7 @@
               </a:defRPr>
             </a:pPr>
             <a:r>
-              <a:t>Ateetpal Bansal</a:t>
+              <a:t>Larisa Davtyan</a:t>
             </a:r>
           </a:p>
         </p:txBody>
@@ -14135,7 +14135,7 @@
               </a:defRPr>
             </a:pPr>
             <a:r>
-              <a:t>Jagdeep Singh Insurance Agency, In…</a:t>
+              <a:t>Safeline Insurance Agency, Inc.</a:t>
             </a:r>
           </a:p>
         </p:txBody>
@@ -14171,7 +14171,7 @@
               </a:defRPr>
             </a:pPr>
             <a:r>
-              <a:t>$693K</a:t>
+              <a:t>$708K</a:t>
             </a:r>
           </a:p>
         </p:txBody>
@@ -14286,7 +14286,7 @@
               </a:defRPr>
             </a:pPr>
             <a:r>
-              <a:t>Raj Singh</a:t>
+              <a:t>Ateetpal Bansal</a:t>
             </a:r>
           </a:p>
         </p:txBody>
@@ -14322,7 +14322,7 @@
               </a:defRPr>
             </a:pPr>
             <a:r>
-              <a:t>Pride Insurance LLC</a:t>
+              <a:t>Jagdeep Singh Insurance Agency, In…</a:t>
             </a:r>
           </a:p>
         </p:txBody>
@@ -14358,7 +14358,7 @@
               </a:defRPr>
             </a:pPr>
             <a:r>
-              <a:t>$690K</a:t>
+              <a:t>$692K</a:t>
             </a:r>
           </a:p>
         </p:txBody>
@@ -14473,7 +14473,7 @@
               </a:defRPr>
             </a:pPr>
             <a:r>
-              <a:t>Shubham Kamra</a:t>
+              <a:t>Raj Singh</a:t>
             </a:r>
           </a:p>
         </p:txBody>
@@ -14509,7 +14509,7 @@
               </a:defRPr>
             </a:pPr>
             <a:r>
-              <a:t>A.S.I.A Inc</a:t>
+              <a:t>Pride Insurance LLC</a:t>
             </a:r>
           </a:p>
         </p:txBody>
@@ -14545,7 +14545,7 @@
               </a:defRPr>
             </a:pPr>
             <a:r>
-              <a:t>$688K</a:t>
+              <a:t>$690K</a:t>
             </a:r>
           </a:p>
         </p:txBody>
@@ -14660,7 +14660,7 @@
               </a:defRPr>
             </a:pPr>
             <a:r>
-              <a:t>No Name Given Ankush</a:t>
+              <a:t>Shubham Kamra</a:t>
             </a:r>
           </a:p>
         </p:txBody>
@@ -14696,7 +14696,7 @@
               </a:defRPr>
             </a:pPr>
             <a:r>
-              <a:t>Vintage Insurance Agency Inc (The)</a:t>
+              <a:t>A.S.I.A Inc</a:t>
             </a:r>
           </a:p>
         </p:txBody>
@@ -14732,7 +14732,7 @@
               </a:defRPr>
             </a:pPr>
             <a:r>
-              <a:t>$650K</a:t>
+              <a:t>$688K</a:t>
             </a:r>
           </a:p>
         </p:txBody>
@@ -14847,7 +14847,7 @@
               </a:defRPr>
             </a:pPr>
             <a:r>
-              <a:t>Larisa Davtyan</a:t>
+              <a:t>No Name Given Ankush</a:t>
             </a:r>
           </a:p>
         </p:txBody>
@@ -14883,7 +14883,7 @@
               </a:defRPr>
             </a:pPr>
             <a:r>
-              <a:t>Safeline Insurance Agency, Inc.</a:t>
+              <a:t>Vintage Insurance Agency Inc (The)</a:t>
             </a:r>
           </a:p>
         </p:txBody>
@@ -14919,7 +14919,7 @@
               </a:defRPr>
             </a:pPr>
             <a:r>
-              <a:t>$592K</a:t>
+              <a:t>$663K</a:t>
             </a:r>
           </a:p>
         </p:txBody>
@@ -15106,7 +15106,7 @@
               </a:defRPr>
             </a:pPr>
             <a:r>
-              <a:t>$572K</a:t>
+              <a:t>$584K</a:t>
             </a:r>
           </a:p>
         </p:txBody>
@@ -15500,6 +15500,193 @@
             <a:avLst/>
           </a:prstGeom>
           <a:solidFill>
+            <a:srgbClr val="FFFFFF"/>
+          </a:solidFill>
+          <a:ln>
+            <a:noFill/>
+          </a:ln>
+        </p:spPr>
+        <p:style>
+          <a:lnRef idx="1">
+            <a:schemeClr val="accent1"/>
+          </a:lnRef>
+          <a:fillRef idx="3">
+            <a:schemeClr val="accent1"/>
+          </a:fillRef>
+          <a:effectRef idx="2">
+            <a:schemeClr val="accent1"/>
+          </a:effectRef>
+          <a:fontRef idx="minor">
+            <a:schemeClr val="lt1"/>
+          </a:fontRef>
+        </p:style>
+        <p:txBody>
+          <a:bodyPr rtlCol="0" anchor="ctr"/>
+          <a:lstStyle/>
+          <a:p>
+            <a:pPr algn="ctr"/>
+          </a:p>
+        </p:txBody>
+      </p:sp>
+      <p:sp>
+        <p:nvSpPr>
+          <p:cNvPr id="102" name="TextBox 101"/>
+          <p:cNvSpPr txBox="1"/>
+          <p:nvPr/>
+        </p:nvSpPr>
+        <p:spPr>
+          <a:xfrm>
+            <a:off x="228600" y="5705856"/>
+            <a:ext cx="411480" cy="237744"/>
+          </a:xfrm>
+          <a:prstGeom prst="rect">
+            <a:avLst/>
+          </a:prstGeom>
+          <a:noFill/>
+        </p:spPr>
+        <p:txBody>
+          <a:bodyPr wrap="none">
+            <a:spAutoFit/>
+          </a:bodyPr>
+          <a:lstStyle/>
+          <a:p>
+            <a:pPr algn="ctr">
+              <a:defRPr sz="950" b="1">
+                <a:solidFill>
+                  <a:srgbClr val="6B7280"/>
+                </a:solidFill>
+                <a:latin typeface="Calibri"/>
+              </a:defRPr>
+            </a:pPr>
+            <a:r>
+              <a:t>19</a:t>
+            </a:r>
+          </a:p>
+        </p:txBody>
+      </p:sp>
+      <p:sp>
+        <p:nvSpPr>
+          <p:cNvPr id="103" name="TextBox 102"/>
+          <p:cNvSpPr txBox="1"/>
+          <p:nvPr/>
+        </p:nvSpPr>
+        <p:spPr>
+          <a:xfrm>
+            <a:off x="640080" y="5705856"/>
+            <a:ext cx="1920240" cy="237744"/>
+          </a:xfrm>
+          <a:prstGeom prst="rect">
+            <a:avLst/>
+          </a:prstGeom>
+          <a:noFill/>
+        </p:spPr>
+        <p:txBody>
+          <a:bodyPr wrap="none">
+            <a:spAutoFit/>
+          </a:bodyPr>
+          <a:lstStyle/>
+          <a:p>
+            <a:pPr algn="l">
+              <a:defRPr sz="950" b="1">
+                <a:solidFill>
+                  <a:srgbClr val="111827"/>
+                </a:solidFill>
+                <a:latin typeface="Calibri"/>
+              </a:defRPr>
+            </a:pPr>
+            <a:r>
+              <a:t>Diego Giraldo</a:t>
+            </a:r>
+          </a:p>
+        </p:txBody>
+      </p:sp>
+      <p:sp>
+        <p:nvSpPr>
+          <p:cNvPr id="104" name="TextBox 103"/>
+          <p:cNvSpPr txBox="1"/>
+          <p:nvPr/>
+        </p:nvSpPr>
+        <p:spPr>
+          <a:xfrm>
+            <a:off x="2560320" y="5705856"/>
+            <a:ext cx="2459736" cy="237744"/>
+          </a:xfrm>
+          <a:prstGeom prst="rect">
+            <a:avLst/>
+          </a:prstGeom>
+          <a:noFill/>
+        </p:spPr>
+        <p:txBody>
+          <a:bodyPr wrap="none">
+            <a:spAutoFit/>
+          </a:bodyPr>
+          <a:lstStyle/>
+          <a:p>
+            <a:pPr algn="l">
+              <a:defRPr sz="950" b="0">
+                <a:solidFill>
+                  <a:srgbClr val="6B7280"/>
+                </a:solidFill>
+                <a:latin typeface="Calibri"/>
+              </a:defRPr>
+            </a:pPr>
+            <a:r>
+              <a:t>Horizons Insurance And Financial S…</a:t>
+            </a:r>
+          </a:p>
+        </p:txBody>
+      </p:sp>
+      <p:sp>
+        <p:nvSpPr>
+          <p:cNvPr id="105" name="TextBox 104"/>
+          <p:cNvSpPr txBox="1"/>
+          <p:nvPr/>
+        </p:nvSpPr>
+        <p:spPr>
+          <a:xfrm>
+            <a:off x="5020056" y="5705856"/>
+            <a:ext cx="914400" cy="237744"/>
+          </a:xfrm>
+          <a:prstGeom prst="rect">
+            <a:avLst/>
+          </a:prstGeom>
+          <a:noFill/>
+        </p:spPr>
+        <p:txBody>
+          <a:bodyPr wrap="none">
+            <a:spAutoFit/>
+          </a:bodyPr>
+          <a:lstStyle/>
+          <a:p>
+            <a:pPr algn="ctr">
+              <a:defRPr sz="950" b="1">
+                <a:solidFill>
+                  <a:srgbClr val="111827"/>
+                </a:solidFill>
+                <a:latin typeface="Calibri"/>
+              </a:defRPr>
+            </a:pPr>
+            <a:r>
+              <a:t>$516K</a:t>
+            </a:r>
+          </a:p>
+        </p:txBody>
+      </p:sp>
+      <p:sp>
+        <p:nvSpPr>
+          <p:cNvPr id="106" name="Rectangle 105"/>
+          <p:cNvSpPr/>
+          <p:nvPr/>
+        </p:nvSpPr>
+        <p:spPr>
+          <a:xfrm>
+            <a:off x="228600" y="5943600"/>
+            <a:ext cx="5705856" cy="256032"/>
+          </a:xfrm>
+          <a:prstGeom prst="rect">
+            <a:avLst/>
+          </a:prstGeom>
+          <a:solidFill>
             <a:srgbClr val="D1FAE5"/>
           </a:solidFill>
           <a:ln>
@@ -15530,13 +15717,13 @@
       </p:sp>
       <p:sp>
         <p:nvSpPr>
-          <p:cNvPr id="102" name="TextBox 101"/>
-          <p:cNvSpPr txBox="1"/>
-          <p:nvPr/>
-        </p:nvSpPr>
-        <p:spPr>
-          <a:xfrm>
-            <a:off x="228600" y="5705856"/>
+          <p:cNvPr id="107" name="TextBox 106"/>
+          <p:cNvSpPr txBox="1"/>
+          <p:nvPr/>
+        </p:nvSpPr>
+        <p:spPr>
+          <a:xfrm>
+            <a:off x="228600" y="5961888"/>
             <a:ext cx="411480" cy="237744"/>
           </a:xfrm>
           <a:prstGeom prst="rect">
@@ -15559,20 +15746,20 @@
               </a:defRPr>
             </a:pPr>
             <a:r>
-              <a:t>19</a:t>
-            </a:r>
-          </a:p>
-        </p:txBody>
-      </p:sp>
-      <p:sp>
-        <p:nvSpPr>
-          <p:cNvPr id="103" name="TextBox 102"/>
-          <p:cNvSpPr txBox="1"/>
-          <p:nvPr/>
-        </p:nvSpPr>
-        <p:spPr>
-          <a:xfrm>
-            <a:off x="640080" y="5705856"/>
+              <a:t>20</a:t>
+            </a:r>
+          </a:p>
+        </p:txBody>
+      </p:sp>
+      <p:sp>
+        <p:nvSpPr>
+          <p:cNvPr id="108" name="TextBox 107"/>
+          <p:cNvSpPr txBox="1"/>
+          <p:nvPr/>
+        </p:nvSpPr>
+        <p:spPr>
+          <a:xfrm>
+            <a:off x="640080" y="5961888"/>
             <a:ext cx="1920240" cy="237744"/>
           </a:xfrm>
           <a:prstGeom prst="rect">
@@ -15602,13 +15789,13 @@
       </p:sp>
       <p:sp>
         <p:nvSpPr>
-          <p:cNvPr id="104" name="TextBox 103"/>
-          <p:cNvSpPr txBox="1"/>
-          <p:nvPr/>
-        </p:nvSpPr>
-        <p:spPr>
-          <a:xfrm>
-            <a:off x="2560320" y="5705856"/>
+          <p:cNvPr id="109" name="TextBox 108"/>
+          <p:cNvSpPr txBox="1"/>
+          <p:nvPr/>
+        </p:nvSpPr>
+        <p:spPr>
+          <a:xfrm>
+            <a:off x="2560320" y="5961888"/>
             <a:ext cx="2459736" cy="237744"/>
           </a:xfrm>
           <a:prstGeom prst="rect">
@@ -15638,13 +15825,13 @@
       </p:sp>
       <p:sp>
         <p:nvSpPr>
-          <p:cNvPr id="105" name="TextBox 104"/>
-          <p:cNvSpPr txBox="1"/>
-          <p:nvPr/>
-        </p:nvSpPr>
-        <p:spPr>
-          <a:xfrm>
-            <a:off x="5020056" y="5705856"/>
+          <p:cNvPr id="110" name="TextBox 109"/>
+          <p:cNvSpPr txBox="1"/>
+          <p:nvPr/>
+        </p:nvSpPr>
+        <p:spPr>
+          <a:xfrm>
+            <a:off x="5020056" y="5961888"/>
             <a:ext cx="914400" cy="237744"/>
           </a:xfrm>
           <a:prstGeom prst="rect">
@@ -15674,13 +15861,387 @@
       </p:sp>
       <p:sp>
         <p:nvSpPr>
-          <p:cNvPr id="106" name="Rectangle 105"/>
+          <p:cNvPr id="111" name="TextBox 110"/>
+          <p:cNvSpPr txBox="1"/>
+          <p:nvPr/>
+        </p:nvSpPr>
+        <p:spPr>
+          <a:xfrm>
+            <a:off x="6254496" y="841248"/>
+            <a:ext cx="411480" cy="201168"/>
+          </a:xfrm>
+          <a:prstGeom prst="rect">
+            <a:avLst/>
+          </a:prstGeom>
+          <a:noFill/>
+        </p:spPr>
+        <p:txBody>
+          <a:bodyPr wrap="none">
+            <a:spAutoFit/>
+          </a:bodyPr>
+          <a:lstStyle/>
+          <a:p>
+            <a:pPr algn="ctr">
+              <a:defRPr sz="850" b="1">
+                <a:solidFill>
+                  <a:srgbClr val="6B7280"/>
+                </a:solidFill>
+                <a:latin typeface="Calibri"/>
+              </a:defRPr>
+            </a:pPr>
+            <a:r>
+              <a:t>Rank</a:t>
+            </a:r>
+          </a:p>
+        </p:txBody>
+      </p:sp>
+      <p:sp>
+        <p:nvSpPr>
+          <p:cNvPr id="112" name="TextBox 111"/>
+          <p:cNvSpPr txBox="1"/>
+          <p:nvPr/>
+        </p:nvSpPr>
+        <p:spPr>
+          <a:xfrm>
+            <a:off x="6665976" y="841248"/>
+            <a:ext cx="1920240" cy="201168"/>
+          </a:xfrm>
+          <a:prstGeom prst="rect">
+            <a:avLst/>
+          </a:prstGeom>
+          <a:noFill/>
+        </p:spPr>
+        <p:txBody>
+          <a:bodyPr wrap="none">
+            <a:spAutoFit/>
+          </a:bodyPr>
+          <a:lstStyle/>
+          <a:p>
+            <a:pPr algn="l">
+              <a:defRPr sz="850" b="1">
+                <a:solidFill>
+                  <a:srgbClr val="6B7280"/>
+                </a:solidFill>
+                <a:latin typeface="Calibri"/>
+              </a:defRPr>
+            </a:pPr>
+            <a:r>
+              <a:t>Agent</a:t>
+            </a:r>
+          </a:p>
+        </p:txBody>
+      </p:sp>
+      <p:sp>
+        <p:nvSpPr>
+          <p:cNvPr id="113" name="TextBox 112"/>
+          <p:cNvSpPr txBox="1"/>
+          <p:nvPr/>
+        </p:nvSpPr>
+        <p:spPr>
+          <a:xfrm>
+            <a:off x="8586216" y="841248"/>
+            <a:ext cx="2459736" cy="201168"/>
+          </a:xfrm>
+          <a:prstGeom prst="rect">
+            <a:avLst/>
+          </a:prstGeom>
+          <a:noFill/>
+        </p:spPr>
+        <p:txBody>
+          <a:bodyPr wrap="none">
+            <a:spAutoFit/>
+          </a:bodyPr>
+          <a:lstStyle/>
+          <a:p>
+            <a:pPr algn="l">
+              <a:defRPr sz="850" b="1">
+                <a:solidFill>
+                  <a:srgbClr val="6B7280"/>
+                </a:solidFill>
+                <a:latin typeface="Calibri"/>
+              </a:defRPr>
+            </a:pPr>
+            <a:r>
+              <a:t>Agency</a:t>
+            </a:r>
+          </a:p>
+        </p:txBody>
+      </p:sp>
+      <p:sp>
+        <p:nvSpPr>
+          <p:cNvPr id="114" name="TextBox 113"/>
+          <p:cNvSpPr txBox="1"/>
+          <p:nvPr/>
+        </p:nvSpPr>
+        <p:spPr>
+          <a:xfrm>
+            <a:off x="11045952" y="841248"/>
+            <a:ext cx="914400" cy="201168"/>
+          </a:xfrm>
+          <a:prstGeom prst="rect">
+            <a:avLst/>
+          </a:prstGeom>
+          <a:noFill/>
+        </p:spPr>
+        <p:txBody>
+          <a:bodyPr wrap="none">
+            <a:spAutoFit/>
+          </a:bodyPr>
+          <a:lstStyle/>
+          <a:p>
+            <a:pPr algn="ctr">
+              <a:defRPr sz="850" b="1">
+                <a:solidFill>
+                  <a:srgbClr val="6B7280"/>
+                </a:solidFill>
+                <a:latin typeface="Calibri"/>
+              </a:defRPr>
+            </a:pPr>
+            <a:r>
+              <a:t>Q2 GWP</a:t>
+            </a:r>
+          </a:p>
+        </p:txBody>
+      </p:sp>
+      <p:sp>
+        <p:nvSpPr>
+          <p:cNvPr id="115" name="Rectangle 114"/>
           <p:cNvSpPr/>
           <p:nvPr/>
         </p:nvSpPr>
         <p:spPr>
           <a:xfrm>
-            <a:off x="228600" y="5943600"/>
+            <a:off x="6254496" y="1042416"/>
+            <a:ext cx="5705856" cy="9144"/>
+          </a:xfrm>
+          <a:prstGeom prst="rect">
+            <a:avLst/>
+          </a:prstGeom>
+          <a:solidFill>
+            <a:srgbClr val="E5E7EB"/>
+          </a:solidFill>
+          <a:ln>
+            <a:noFill/>
+          </a:ln>
+        </p:spPr>
+        <p:style>
+          <a:lnRef idx="1">
+            <a:schemeClr val="accent1"/>
+          </a:lnRef>
+          <a:fillRef idx="3">
+            <a:schemeClr val="accent1"/>
+          </a:fillRef>
+          <a:effectRef idx="2">
+            <a:schemeClr val="accent1"/>
+          </a:effectRef>
+          <a:fontRef idx="minor">
+            <a:schemeClr val="lt1"/>
+          </a:fontRef>
+        </p:style>
+        <p:txBody>
+          <a:bodyPr rtlCol="0" anchor="ctr"/>
+          <a:lstStyle/>
+          <a:p>
+            <a:pPr algn="ctr"/>
+          </a:p>
+        </p:txBody>
+      </p:sp>
+      <p:sp>
+        <p:nvSpPr>
+          <p:cNvPr id="116" name="Rectangle 115"/>
+          <p:cNvSpPr/>
+          <p:nvPr/>
+        </p:nvSpPr>
+        <p:spPr>
+          <a:xfrm>
+            <a:off x="6254496" y="1078992"/>
+            <a:ext cx="5705856" cy="256032"/>
+          </a:xfrm>
+          <a:prstGeom prst="rect">
+            <a:avLst/>
+          </a:prstGeom>
+          <a:solidFill>
+            <a:srgbClr val="FFFFFF"/>
+          </a:solidFill>
+          <a:ln>
+            <a:noFill/>
+          </a:ln>
+        </p:spPr>
+        <p:style>
+          <a:lnRef idx="1">
+            <a:schemeClr val="accent1"/>
+          </a:lnRef>
+          <a:fillRef idx="3">
+            <a:schemeClr val="accent1"/>
+          </a:fillRef>
+          <a:effectRef idx="2">
+            <a:schemeClr val="accent1"/>
+          </a:effectRef>
+          <a:fontRef idx="minor">
+            <a:schemeClr val="lt1"/>
+          </a:fontRef>
+        </p:style>
+        <p:txBody>
+          <a:bodyPr rtlCol="0" anchor="ctr"/>
+          <a:lstStyle/>
+          <a:p>
+            <a:pPr algn="ctr"/>
+          </a:p>
+        </p:txBody>
+      </p:sp>
+      <p:sp>
+        <p:nvSpPr>
+          <p:cNvPr id="117" name="TextBox 116"/>
+          <p:cNvSpPr txBox="1"/>
+          <p:nvPr/>
+        </p:nvSpPr>
+        <p:spPr>
+          <a:xfrm>
+            <a:off x="6254496" y="1097280"/>
+            <a:ext cx="411480" cy="237744"/>
+          </a:xfrm>
+          <a:prstGeom prst="rect">
+            <a:avLst/>
+          </a:prstGeom>
+          <a:noFill/>
+        </p:spPr>
+        <p:txBody>
+          <a:bodyPr wrap="none">
+            <a:spAutoFit/>
+          </a:bodyPr>
+          <a:lstStyle/>
+          <a:p>
+            <a:pPr algn="ctr">
+              <a:defRPr sz="950" b="1">
+                <a:solidFill>
+                  <a:srgbClr val="6B7280"/>
+                </a:solidFill>
+                <a:latin typeface="Calibri"/>
+              </a:defRPr>
+            </a:pPr>
+            <a:r>
+              <a:t>21</a:t>
+            </a:r>
+          </a:p>
+        </p:txBody>
+      </p:sp>
+      <p:sp>
+        <p:nvSpPr>
+          <p:cNvPr id="118" name="TextBox 117"/>
+          <p:cNvSpPr txBox="1"/>
+          <p:nvPr/>
+        </p:nvSpPr>
+        <p:spPr>
+          <a:xfrm>
+            <a:off x="6665976" y="1097280"/>
+            <a:ext cx="1920240" cy="237744"/>
+          </a:xfrm>
+          <a:prstGeom prst="rect">
+            <a:avLst/>
+          </a:prstGeom>
+          <a:noFill/>
+        </p:spPr>
+        <p:txBody>
+          <a:bodyPr wrap="none">
+            <a:spAutoFit/>
+          </a:bodyPr>
+          <a:lstStyle/>
+          <a:p>
+            <a:pPr algn="l">
+              <a:defRPr sz="950" b="1">
+                <a:solidFill>
+                  <a:srgbClr val="111827"/>
+                </a:solidFill>
+                <a:latin typeface="Calibri"/>
+              </a:defRPr>
+            </a:pPr>
+            <a:r>
+              <a:t>Justin Robert</a:t>
+            </a:r>
+          </a:p>
+        </p:txBody>
+      </p:sp>
+      <p:sp>
+        <p:nvSpPr>
+          <p:cNvPr id="119" name="TextBox 118"/>
+          <p:cNvSpPr txBox="1"/>
+          <p:nvPr/>
+        </p:nvSpPr>
+        <p:spPr>
+          <a:xfrm>
+            <a:off x="8586216" y="1097280"/>
+            <a:ext cx="2459736" cy="237744"/>
+          </a:xfrm>
+          <a:prstGeom prst="rect">
+            <a:avLst/>
+          </a:prstGeom>
+          <a:noFill/>
+        </p:spPr>
+        <p:txBody>
+          <a:bodyPr wrap="none">
+            <a:spAutoFit/>
+          </a:bodyPr>
+          <a:lstStyle/>
+          <a:p>
+            <a:pPr algn="l">
+              <a:defRPr sz="950" b="0">
+                <a:solidFill>
+                  <a:srgbClr val="6B7280"/>
+                </a:solidFill>
+                <a:latin typeface="Calibri"/>
+              </a:defRPr>
+            </a:pPr>
+            <a:r>
+              <a:t>Justin Robert Insurance Agency LLC</a:t>
+            </a:r>
+          </a:p>
+        </p:txBody>
+      </p:sp>
+      <p:sp>
+        <p:nvSpPr>
+          <p:cNvPr id="120" name="TextBox 119"/>
+          <p:cNvSpPr txBox="1"/>
+          <p:nvPr/>
+        </p:nvSpPr>
+        <p:spPr>
+          <a:xfrm>
+            <a:off x="11045952" y="1097280"/>
+            <a:ext cx="914400" cy="237744"/>
+          </a:xfrm>
+          <a:prstGeom prst="rect">
+            <a:avLst/>
+          </a:prstGeom>
+          <a:noFill/>
+        </p:spPr>
+        <p:txBody>
+          <a:bodyPr wrap="none">
+            <a:spAutoFit/>
+          </a:bodyPr>
+          <a:lstStyle/>
+          <a:p>
+            <a:pPr algn="ctr">
+              <a:defRPr sz="950" b="1">
+                <a:solidFill>
+                  <a:srgbClr val="111827"/>
+                </a:solidFill>
+                <a:latin typeface="Calibri"/>
+              </a:defRPr>
+            </a:pPr>
+            <a:r>
+              <a:t>$502K</a:t>
+            </a:r>
+          </a:p>
+        </p:txBody>
+      </p:sp>
+      <p:sp>
+        <p:nvSpPr>
+          <p:cNvPr id="121" name="Rectangle 120"/>
+          <p:cNvSpPr/>
+          <p:nvPr/>
+        </p:nvSpPr>
+        <p:spPr>
+          <a:xfrm>
+            <a:off x="6254496" y="1335024"/>
             <a:ext cx="5705856" cy="256032"/>
           </a:xfrm>
           <a:prstGeom prst="rect">
@@ -15717,13 +16278,13 @@
       </p:sp>
       <p:sp>
         <p:nvSpPr>
-          <p:cNvPr id="107" name="TextBox 106"/>
-          <p:cNvSpPr txBox="1"/>
-          <p:nvPr/>
-        </p:nvSpPr>
-        <p:spPr>
-          <a:xfrm>
-            <a:off x="228600" y="5961888"/>
+          <p:cNvPr id="122" name="TextBox 121"/>
+          <p:cNvSpPr txBox="1"/>
+          <p:nvPr/>
+        </p:nvSpPr>
+        <p:spPr>
+          <a:xfrm>
+            <a:off x="6254496" y="1353312"/>
             <a:ext cx="411480" cy="237744"/>
           </a:xfrm>
           <a:prstGeom prst="rect">
@@ -15746,20 +16307,20 @@
               </a:defRPr>
             </a:pPr>
             <a:r>
-              <a:t>20</a:t>
-            </a:r>
-          </a:p>
-        </p:txBody>
-      </p:sp>
-      <p:sp>
-        <p:nvSpPr>
-          <p:cNvPr id="108" name="TextBox 107"/>
-          <p:cNvSpPr txBox="1"/>
-          <p:nvPr/>
-        </p:nvSpPr>
-        <p:spPr>
-          <a:xfrm>
-            <a:off x="640080" y="5961888"/>
+              <a:t>22</a:t>
+            </a:r>
+          </a:p>
+        </p:txBody>
+      </p:sp>
+      <p:sp>
+        <p:nvSpPr>
+          <p:cNvPr id="123" name="TextBox 122"/>
+          <p:cNvSpPr txBox="1"/>
+          <p:nvPr/>
+        </p:nvSpPr>
+        <p:spPr>
+          <a:xfrm>
+            <a:off x="6665976" y="1353312"/>
             <a:ext cx="1920240" cy="237744"/>
           </a:xfrm>
           <a:prstGeom prst="rect">
@@ -15782,20 +16343,20 @@
               </a:defRPr>
             </a:pPr>
             <a:r>
-              <a:t>Justin Robert</a:t>
-            </a:r>
-          </a:p>
-        </p:txBody>
-      </p:sp>
-      <p:sp>
-        <p:nvSpPr>
-          <p:cNvPr id="109" name="TextBox 108"/>
-          <p:cNvSpPr txBox="1"/>
-          <p:nvPr/>
-        </p:nvSpPr>
-        <p:spPr>
-          <a:xfrm>
-            <a:off x="2560320" y="5961888"/>
+              <a:t>Scott Procops</a:t>
+            </a:r>
+          </a:p>
+        </p:txBody>
+      </p:sp>
+      <p:sp>
+        <p:nvSpPr>
+          <p:cNvPr id="124" name="TextBox 123"/>
+          <p:cNvSpPr txBox="1"/>
+          <p:nvPr/>
+        </p:nvSpPr>
+        <p:spPr>
+          <a:xfrm>
+            <a:off x="8586216" y="1353312"/>
             <a:ext cx="2459736" cy="237744"/>
           </a:xfrm>
           <a:prstGeom prst="rect">
@@ -15818,20 +16379,20 @@
               </a:defRPr>
             </a:pPr>
             <a:r>
-              <a:t>Justin Robert Insurance Agency LLC</a:t>
-            </a:r>
-          </a:p>
-        </p:txBody>
-      </p:sp>
-      <p:sp>
-        <p:nvSpPr>
-          <p:cNvPr id="110" name="TextBox 109"/>
-          <p:cNvSpPr txBox="1"/>
-          <p:nvPr/>
-        </p:nvSpPr>
-        <p:spPr>
-          <a:xfrm>
-            <a:off x="5020056" y="5961888"/>
+              <a:t>Specialty Coverage Insurance Agenc…</a:t>
+            </a:r>
+          </a:p>
+        </p:txBody>
+      </p:sp>
+      <p:sp>
+        <p:nvSpPr>
+          <p:cNvPr id="125" name="TextBox 124"/>
+          <p:cNvSpPr txBox="1"/>
+          <p:nvPr/>
+        </p:nvSpPr>
+        <p:spPr>
+          <a:xfrm>
+            <a:off x="11045952" y="1353312"/>
             <a:ext cx="914400" cy="237744"/>
           </a:xfrm>
           <a:prstGeom prst="rect">
@@ -15854,207 +16415,20 @@
               </a:defRPr>
             </a:pPr>
             <a:r>
-              <a:t>$479K</a:t>
-            </a:r>
-          </a:p>
-        </p:txBody>
-      </p:sp>
-      <p:sp>
-        <p:nvSpPr>
-          <p:cNvPr id="111" name="TextBox 110"/>
-          <p:cNvSpPr txBox="1"/>
-          <p:nvPr/>
-        </p:nvSpPr>
-        <p:spPr>
-          <a:xfrm>
-            <a:off x="6254496" y="841248"/>
-            <a:ext cx="411480" cy="201168"/>
-          </a:xfrm>
-          <a:prstGeom prst="rect">
-            <a:avLst/>
-          </a:prstGeom>
-          <a:noFill/>
-        </p:spPr>
-        <p:txBody>
-          <a:bodyPr wrap="none">
-            <a:spAutoFit/>
-          </a:bodyPr>
-          <a:lstStyle/>
-          <a:p>
-            <a:pPr algn="ctr">
-              <a:defRPr sz="850" b="1">
-                <a:solidFill>
-                  <a:srgbClr val="6B7280"/>
-                </a:solidFill>
-                <a:latin typeface="Calibri"/>
-              </a:defRPr>
-            </a:pPr>
-            <a:r>
-              <a:t>Rank</a:t>
-            </a:r>
-          </a:p>
-        </p:txBody>
-      </p:sp>
-      <p:sp>
-        <p:nvSpPr>
-          <p:cNvPr id="112" name="TextBox 111"/>
-          <p:cNvSpPr txBox="1"/>
-          <p:nvPr/>
-        </p:nvSpPr>
-        <p:spPr>
-          <a:xfrm>
-            <a:off x="6665976" y="841248"/>
-            <a:ext cx="1920240" cy="201168"/>
-          </a:xfrm>
-          <a:prstGeom prst="rect">
-            <a:avLst/>
-          </a:prstGeom>
-          <a:noFill/>
-        </p:spPr>
-        <p:txBody>
-          <a:bodyPr wrap="none">
-            <a:spAutoFit/>
-          </a:bodyPr>
-          <a:lstStyle/>
-          <a:p>
-            <a:pPr algn="l">
-              <a:defRPr sz="850" b="1">
-                <a:solidFill>
-                  <a:srgbClr val="6B7280"/>
-                </a:solidFill>
-                <a:latin typeface="Calibri"/>
-              </a:defRPr>
-            </a:pPr>
-            <a:r>
-              <a:t>Agent</a:t>
-            </a:r>
-          </a:p>
-        </p:txBody>
-      </p:sp>
-      <p:sp>
-        <p:nvSpPr>
-          <p:cNvPr id="113" name="TextBox 112"/>
-          <p:cNvSpPr txBox="1"/>
-          <p:nvPr/>
-        </p:nvSpPr>
-        <p:spPr>
-          <a:xfrm>
-            <a:off x="8586216" y="841248"/>
-            <a:ext cx="2459736" cy="201168"/>
-          </a:xfrm>
-          <a:prstGeom prst="rect">
-            <a:avLst/>
-          </a:prstGeom>
-          <a:noFill/>
-        </p:spPr>
-        <p:txBody>
-          <a:bodyPr wrap="none">
-            <a:spAutoFit/>
-          </a:bodyPr>
-          <a:lstStyle/>
-          <a:p>
-            <a:pPr algn="l">
-              <a:defRPr sz="850" b="1">
-                <a:solidFill>
-                  <a:srgbClr val="6B7280"/>
-                </a:solidFill>
-                <a:latin typeface="Calibri"/>
-              </a:defRPr>
-            </a:pPr>
-            <a:r>
-              <a:t>Agency</a:t>
-            </a:r>
-          </a:p>
-        </p:txBody>
-      </p:sp>
-      <p:sp>
-        <p:nvSpPr>
-          <p:cNvPr id="114" name="TextBox 113"/>
-          <p:cNvSpPr txBox="1"/>
-          <p:nvPr/>
-        </p:nvSpPr>
-        <p:spPr>
-          <a:xfrm>
-            <a:off x="11045952" y="841248"/>
-            <a:ext cx="914400" cy="201168"/>
-          </a:xfrm>
-          <a:prstGeom prst="rect">
-            <a:avLst/>
-          </a:prstGeom>
-          <a:noFill/>
-        </p:spPr>
-        <p:txBody>
-          <a:bodyPr wrap="none">
-            <a:spAutoFit/>
-          </a:bodyPr>
-          <a:lstStyle/>
-          <a:p>
-            <a:pPr algn="ctr">
-              <a:defRPr sz="850" b="1">
-                <a:solidFill>
-                  <a:srgbClr val="6B7280"/>
-                </a:solidFill>
-                <a:latin typeface="Calibri"/>
-              </a:defRPr>
-            </a:pPr>
-            <a:r>
-              <a:t>Q2 GWP</a:t>
-            </a:r>
-          </a:p>
-        </p:txBody>
-      </p:sp>
-      <p:sp>
-        <p:nvSpPr>
-          <p:cNvPr id="115" name="Rectangle 114"/>
+              <a:t>$472K</a:t>
+            </a:r>
+          </a:p>
+        </p:txBody>
+      </p:sp>
+      <p:sp>
+        <p:nvSpPr>
+          <p:cNvPr id="126" name="Rectangle 125"/>
           <p:cNvSpPr/>
           <p:nvPr/>
         </p:nvSpPr>
         <p:spPr>
           <a:xfrm>
-            <a:off x="6254496" y="1042416"/>
-            <a:ext cx="5705856" cy="9144"/>
-          </a:xfrm>
-          <a:prstGeom prst="rect">
-            <a:avLst/>
-          </a:prstGeom>
-          <a:solidFill>
-            <a:srgbClr val="E5E7EB"/>
-          </a:solidFill>
-          <a:ln>
-            <a:noFill/>
-          </a:ln>
-        </p:spPr>
-        <p:style>
-          <a:lnRef idx="1">
-            <a:schemeClr val="accent1"/>
-          </a:lnRef>
-          <a:fillRef idx="3">
-            <a:schemeClr val="accent1"/>
-          </a:fillRef>
-          <a:effectRef idx="2">
-            <a:schemeClr val="accent1"/>
-          </a:effectRef>
-          <a:fontRef idx="minor">
-            <a:schemeClr val="lt1"/>
-          </a:fontRef>
-        </p:style>
-        <p:txBody>
-          <a:bodyPr rtlCol="0" anchor="ctr"/>
-          <a:lstStyle/>
-          <a:p>
-            <a:pPr algn="ctr"/>
-          </a:p>
-        </p:txBody>
-      </p:sp>
-      <p:sp>
-        <p:nvSpPr>
-          <p:cNvPr id="116" name="Rectangle 115"/>
-          <p:cNvSpPr/>
-          <p:nvPr/>
-        </p:nvSpPr>
-        <p:spPr>
-          <a:xfrm>
-            <a:off x="6254496" y="1078992"/>
+            <a:off x="6254496" y="1591056"/>
             <a:ext cx="5705856" cy="256032"/>
           </a:xfrm>
           <a:prstGeom prst="rect">
@@ -16091,13 +16465,13 @@
       </p:sp>
       <p:sp>
         <p:nvSpPr>
-          <p:cNvPr id="117" name="TextBox 116"/>
-          <p:cNvSpPr txBox="1"/>
-          <p:nvPr/>
-        </p:nvSpPr>
-        <p:spPr>
-          <a:xfrm>
-            <a:off x="6254496" y="1097280"/>
+          <p:cNvPr id="127" name="TextBox 126"/>
+          <p:cNvSpPr txBox="1"/>
+          <p:nvPr/>
+        </p:nvSpPr>
+        <p:spPr>
+          <a:xfrm>
+            <a:off x="6254496" y="1609344"/>
             <a:ext cx="411480" cy="237744"/>
           </a:xfrm>
           <a:prstGeom prst="rect">
@@ -16120,20 +16494,20 @@
               </a:defRPr>
             </a:pPr>
             <a:r>
-              <a:t>21</a:t>
-            </a:r>
-          </a:p>
-        </p:txBody>
-      </p:sp>
-      <p:sp>
-        <p:nvSpPr>
-          <p:cNvPr id="118" name="TextBox 117"/>
-          <p:cNvSpPr txBox="1"/>
-          <p:nvPr/>
-        </p:nvSpPr>
-        <p:spPr>
-          <a:xfrm>
-            <a:off x="6665976" y="1097280"/>
+              <a:t>23</a:t>
+            </a:r>
+          </a:p>
+        </p:txBody>
+      </p:sp>
+      <p:sp>
+        <p:nvSpPr>
+          <p:cNvPr id="128" name="TextBox 127"/>
+          <p:cNvSpPr txBox="1"/>
+          <p:nvPr/>
+        </p:nvSpPr>
+        <p:spPr>
+          <a:xfrm>
+            <a:off x="6665976" y="1609344"/>
             <a:ext cx="1920240" cy="237744"/>
           </a:xfrm>
           <a:prstGeom prst="rect">
@@ -16156,20 +16530,20 @@
               </a:defRPr>
             </a:pPr>
             <a:r>
-              <a:t>Diego Giraldo</a:t>
-            </a:r>
-          </a:p>
-        </p:txBody>
-      </p:sp>
-      <p:sp>
-        <p:nvSpPr>
-          <p:cNvPr id="119" name="TextBox 118"/>
-          <p:cNvSpPr txBox="1"/>
-          <p:nvPr/>
-        </p:nvSpPr>
-        <p:spPr>
-          <a:xfrm>
-            <a:off x="8586216" y="1097280"/>
+              <a:t>Christian Gomez</a:t>
+            </a:r>
+          </a:p>
+        </p:txBody>
+      </p:sp>
+      <p:sp>
+        <p:nvSpPr>
+          <p:cNvPr id="129" name="TextBox 128"/>
+          <p:cNvSpPr txBox="1"/>
+          <p:nvPr/>
+        </p:nvSpPr>
+        <p:spPr>
+          <a:xfrm>
+            <a:off x="8586216" y="1609344"/>
             <a:ext cx="2459736" cy="237744"/>
           </a:xfrm>
           <a:prstGeom prst="rect">
@@ -16192,20 +16566,20 @@
               </a:defRPr>
             </a:pPr>
             <a:r>
-              <a:t>Horizons Insurance And Financial S…</a:t>
-            </a:r>
-          </a:p>
-        </p:txBody>
-      </p:sp>
-      <p:sp>
-        <p:nvSpPr>
-          <p:cNvPr id="120" name="TextBox 119"/>
-          <p:cNvSpPr txBox="1"/>
-          <p:nvPr/>
-        </p:nvSpPr>
-        <p:spPr>
-          <a:xfrm>
-            <a:off x="11045952" y="1097280"/>
+              <a:t>Your Truck Shield LLC</a:t>
+            </a:r>
+          </a:p>
+        </p:txBody>
+      </p:sp>
+      <p:sp>
+        <p:nvSpPr>
+          <p:cNvPr id="130" name="TextBox 129"/>
+          <p:cNvSpPr txBox="1"/>
+          <p:nvPr/>
+        </p:nvSpPr>
+        <p:spPr>
+          <a:xfrm>
+            <a:off x="11045952" y="1609344"/>
             <a:ext cx="914400" cy="237744"/>
           </a:xfrm>
           <a:prstGeom prst="rect">
@@ -16228,20 +16602,20 @@
               </a:defRPr>
             </a:pPr>
             <a:r>
-              <a:t>$472K</a:t>
-            </a:r>
-          </a:p>
-        </p:txBody>
-      </p:sp>
-      <p:sp>
-        <p:nvSpPr>
-          <p:cNvPr id="121" name="Rectangle 120"/>
+              <a:t>$441K</a:t>
+            </a:r>
+          </a:p>
+        </p:txBody>
+      </p:sp>
+      <p:sp>
+        <p:nvSpPr>
+          <p:cNvPr id="131" name="Rectangle 130"/>
           <p:cNvSpPr/>
           <p:nvPr/>
         </p:nvSpPr>
         <p:spPr>
           <a:xfrm>
-            <a:off x="6254496" y="1335024"/>
+            <a:off x="6254496" y="1847088"/>
             <a:ext cx="5705856" cy="256032"/>
           </a:xfrm>
           <a:prstGeom prst="rect">
@@ -16278,13 +16652,13 @@
       </p:sp>
       <p:sp>
         <p:nvSpPr>
-          <p:cNvPr id="122" name="TextBox 121"/>
-          <p:cNvSpPr txBox="1"/>
-          <p:nvPr/>
-        </p:nvSpPr>
-        <p:spPr>
-          <a:xfrm>
-            <a:off x="6254496" y="1353312"/>
+          <p:cNvPr id="132" name="TextBox 131"/>
+          <p:cNvSpPr txBox="1"/>
+          <p:nvPr/>
+        </p:nvSpPr>
+        <p:spPr>
+          <a:xfrm>
+            <a:off x="6254496" y="1865376"/>
             <a:ext cx="411480" cy="237744"/>
           </a:xfrm>
           <a:prstGeom prst="rect">
@@ -16307,20 +16681,20 @@
               </a:defRPr>
             </a:pPr>
             <a:r>
-              <a:t>22</a:t>
-            </a:r>
-          </a:p>
-        </p:txBody>
-      </p:sp>
-      <p:sp>
-        <p:nvSpPr>
-          <p:cNvPr id="123" name="TextBox 122"/>
-          <p:cNvSpPr txBox="1"/>
-          <p:nvPr/>
-        </p:nvSpPr>
-        <p:spPr>
-          <a:xfrm>
-            <a:off x="6665976" y="1353312"/>
+              <a:t>24</a:t>
+            </a:r>
+          </a:p>
+        </p:txBody>
+      </p:sp>
+      <p:sp>
+        <p:nvSpPr>
+          <p:cNvPr id="133" name="TextBox 132"/>
+          <p:cNvSpPr txBox="1"/>
+          <p:nvPr/>
+        </p:nvSpPr>
+        <p:spPr>
+          <a:xfrm>
+            <a:off x="6665976" y="1865376"/>
             <a:ext cx="1920240" cy="237744"/>
           </a:xfrm>
           <a:prstGeom prst="rect">
@@ -16343,20 +16717,20 @@
               </a:defRPr>
             </a:pPr>
             <a:r>
-              <a:t>Scott Procops</a:t>
-            </a:r>
-          </a:p>
-        </p:txBody>
-      </p:sp>
-      <p:sp>
-        <p:nvSpPr>
-          <p:cNvPr id="124" name="TextBox 123"/>
-          <p:cNvSpPr txBox="1"/>
-          <p:nvPr/>
-        </p:nvSpPr>
-        <p:spPr>
-          <a:xfrm>
-            <a:off x="8586216" y="1353312"/>
+              <a:t>Deepak Goswami</a:t>
+            </a:r>
+          </a:p>
+        </p:txBody>
+      </p:sp>
+      <p:sp>
+        <p:nvSpPr>
+          <p:cNvPr id="134" name="TextBox 133"/>
+          <p:cNvSpPr txBox="1"/>
+          <p:nvPr/>
+        </p:nvSpPr>
+        <p:spPr>
+          <a:xfrm>
+            <a:off x="8586216" y="1865376"/>
             <a:ext cx="2459736" cy="237744"/>
           </a:xfrm>
           <a:prstGeom prst="rect">
@@ -16379,20 +16753,20 @@
               </a:defRPr>
             </a:pPr>
             <a:r>
-              <a:t>Specialty Coverage Insurance Agenc…</a:t>
-            </a:r>
-          </a:p>
-        </p:txBody>
-      </p:sp>
-      <p:sp>
-        <p:nvSpPr>
-          <p:cNvPr id="125" name="TextBox 124"/>
-          <p:cNvSpPr txBox="1"/>
-          <p:nvPr/>
-        </p:nvSpPr>
-        <p:spPr>
-          <a:xfrm>
-            <a:off x="11045952" y="1353312"/>
+              <a:t>A.S.I.A Inc</a:t>
+            </a:r>
+          </a:p>
+        </p:txBody>
+      </p:sp>
+      <p:sp>
+        <p:nvSpPr>
+          <p:cNvPr id="135" name="TextBox 134"/>
+          <p:cNvSpPr txBox="1"/>
+          <p:nvPr/>
+        </p:nvSpPr>
+        <p:spPr>
+          <a:xfrm>
+            <a:off x="11045952" y="1865376"/>
             <a:ext cx="914400" cy="237744"/>
           </a:xfrm>
           <a:prstGeom prst="rect">
@@ -16415,20 +16789,20 @@
               </a:defRPr>
             </a:pPr>
             <a:r>
-              <a:t>$454K</a:t>
-            </a:r>
-          </a:p>
-        </p:txBody>
-      </p:sp>
-      <p:sp>
-        <p:nvSpPr>
-          <p:cNvPr id="126" name="Rectangle 125"/>
+              <a:t>$439K</a:t>
+            </a:r>
+          </a:p>
+        </p:txBody>
+      </p:sp>
+      <p:sp>
+        <p:nvSpPr>
+          <p:cNvPr id="136" name="Rectangle 135"/>
           <p:cNvSpPr/>
           <p:nvPr/>
         </p:nvSpPr>
         <p:spPr>
           <a:xfrm>
-            <a:off x="6254496" y="1591056"/>
+            <a:off x="6254496" y="2103120"/>
             <a:ext cx="5705856" cy="256032"/>
           </a:xfrm>
           <a:prstGeom prst="rect">
@@ -16465,13 +16839,13 @@
       </p:sp>
       <p:sp>
         <p:nvSpPr>
-          <p:cNvPr id="127" name="TextBox 126"/>
-          <p:cNvSpPr txBox="1"/>
-          <p:nvPr/>
-        </p:nvSpPr>
-        <p:spPr>
-          <a:xfrm>
-            <a:off x="6254496" y="1609344"/>
+          <p:cNvPr id="137" name="TextBox 136"/>
+          <p:cNvSpPr txBox="1"/>
+          <p:nvPr/>
+        </p:nvSpPr>
+        <p:spPr>
+          <a:xfrm>
+            <a:off x="6254496" y="2121408"/>
             <a:ext cx="411480" cy="237744"/>
           </a:xfrm>
           <a:prstGeom prst="rect">
@@ -16494,20 +16868,20 @@
               </a:defRPr>
             </a:pPr>
             <a:r>
-              <a:t>23</a:t>
-            </a:r>
-          </a:p>
-        </p:txBody>
-      </p:sp>
-      <p:sp>
-        <p:nvSpPr>
-          <p:cNvPr id="128" name="TextBox 127"/>
-          <p:cNvSpPr txBox="1"/>
-          <p:nvPr/>
-        </p:nvSpPr>
-        <p:spPr>
-          <a:xfrm>
-            <a:off x="6665976" y="1609344"/>
+              <a:t>25</a:t>
+            </a:r>
+          </a:p>
+        </p:txBody>
+      </p:sp>
+      <p:sp>
+        <p:nvSpPr>
+          <p:cNvPr id="138" name="TextBox 137"/>
+          <p:cNvSpPr txBox="1"/>
+          <p:nvPr/>
+        </p:nvSpPr>
+        <p:spPr>
+          <a:xfrm>
+            <a:off x="6665976" y="2121408"/>
             <a:ext cx="1920240" cy="237744"/>
           </a:xfrm>
           <a:prstGeom prst="rect">
@@ -16530,20 +16904,20 @@
               </a:defRPr>
             </a:pPr>
             <a:r>
-              <a:t>Christian Gomez</a:t>
-            </a:r>
-          </a:p>
-        </p:txBody>
-      </p:sp>
-      <p:sp>
-        <p:nvSpPr>
-          <p:cNvPr id="129" name="TextBox 128"/>
-          <p:cNvSpPr txBox="1"/>
-          <p:nvPr/>
-        </p:nvSpPr>
-        <p:spPr>
-          <a:xfrm>
-            <a:off x="8586216" y="1609344"/>
+              <a:t>Gayane Yeghiazaryan</a:t>
+            </a:r>
+          </a:p>
+        </p:txBody>
+      </p:sp>
+      <p:sp>
+        <p:nvSpPr>
+          <p:cNvPr id="139" name="TextBox 138"/>
+          <p:cNvSpPr txBox="1"/>
+          <p:nvPr/>
+        </p:nvSpPr>
+        <p:spPr>
+          <a:xfrm>
+            <a:off x="8586216" y="2121408"/>
             <a:ext cx="2459736" cy="237744"/>
           </a:xfrm>
           <a:prstGeom prst="rect">
@@ -16566,20 +16940,20 @@
               </a:defRPr>
             </a:pPr>
             <a:r>
-              <a:t>Your Truck Shield LLC</a:t>
-            </a:r>
-          </a:p>
-        </p:txBody>
-      </p:sp>
-      <p:sp>
-        <p:nvSpPr>
-          <p:cNvPr id="130" name="TextBox 129"/>
-          <p:cNvSpPr txBox="1"/>
-          <p:nvPr/>
-        </p:nvSpPr>
-        <p:spPr>
-          <a:xfrm>
-            <a:off x="11045952" y="1609344"/>
+              <a:t>Limosa Insurance Services Inc</a:t>
+            </a:r>
+          </a:p>
+        </p:txBody>
+      </p:sp>
+      <p:sp>
+        <p:nvSpPr>
+          <p:cNvPr id="140" name="TextBox 139"/>
+          <p:cNvSpPr txBox="1"/>
+          <p:nvPr/>
+        </p:nvSpPr>
+        <p:spPr>
+          <a:xfrm>
+            <a:off x="11045952" y="2121408"/>
             <a:ext cx="914400" cy="237744"/>
           </a:xfrm>
           <a:prstGeom prst="rect">
@@ -16602,20 +16976,394 @@
               </a:defRPr>
             </a:pPr>
             <a:r>
-              <a:t>$441K</a:t>
-            </a:r>
-          </a:p>
-        </p:txBody>
-      </p:sp>
-      <p:sp>
-        <p:nvSpPr>
-          <p:cNvPr id="131" name="Rectangle 130"/>
+              <a:t>$427K</a:t>
+            </a:r>
+          </a:p>
+        </p:txBody>
+      </p:sp>
+      <p:sp>
+        <p:nvSpPr>
+          <p:cNvPr id="141" name="Rectangle 140"/>
           <p:cNvSpPr/>
           <p:nvPr/>
         </p:nvSpPr>
         <p:spPr>
           <a:xfrm>
-            <a:off x="6254496" y="1847088"/>
+            <a:off x="6254496" y="2359152"/>
+            <a:ext cx="5705856" cy="256032"/>
+          </a:xfrm>
+          <a:prstGeom prst="rect">
+            <a:avLst/>
+          </a:prstGeom>
+          <a:solidFill>
+            <a:srgbClr val="D1FAE5"/>
+          </a:solidFill>
+          <a:ln>
+            <a:noFill/>
+          </a:ln>
+        </p:spPr>
+        <p:style>
+          <a:lnRef idx="1">
+            <a:schemeClr val="accent1"/>
+          </a:lnRef>
+          <a:fillRef idx="3">
+            <a:schemeClr val="accent1"/>
+          </a:fillRef>
+          <a:effectRef idx="2">
+            <a:schemeClr val="accent1"/>
+          </a:effectRef>
+          <a:fontRef idx="minor">
+            <a:schemeClr val="lt1"/>
+          </a:fontRef>
+        </p:style>
+        <p:txBody>
+          <a:bodyPr rtlCol="0" anchor="ctr"/>
+          <a:lstStyle/>
+          <a:p>
+            <a:pPr algn="ctr"/>
+          </a:p>
+        </p:txBody>
+      </p:sp>
+      <p:sp>
+        <p:nvSpPr>
+          <p:cNvPr id="142" name="TextBox 141"/>
+          <p:cNvSpPr txBox="1"/>
+          <p:nvPr/>
+        </p:nvSpPr>
+        <p:spPr>
+          <a:xfrm>
+            <a:off x="6254496" y="2377440"/>
+            <a:ext cx="411480" cy="237744"/>
+          </a:xfrm>
+          <a:prstGeom prst="rect">
+            <a:avLst/>
+          </a:prstGeom>
+          <a:noFill/>
+        </p:spPr>
+        <p:txBody>
+          <a:bodyPr wrap="none">
+            <a:spAutoFit/>
+          </a:bodyPr>
+          <a:lstStyle/>
+          <a:p>
+            <a:pPr algn="ctr">
+              <a:defRPr sz="950" b="1">
+                <a:solidFill>
+                  <a:srgbClr val="6B7280"/>
+                </a:solidFill>
+                <a:latin typeface="Calibri"/>
+              </a:defRPr>
+            </a:pPr>
+            <a:r>
+              <a:t>26</a:t>
+            </a:r>
+          </a:p>
+        </p:txBody>
+      </p:sp>
+      <p:sp>
+        <p:nvSpPr>
+          <p:cNvPr id="143" name="TextBox 142"/>
+          <p:cNvSpPr txBox="1"/>
+          <p:nvPr/>
+        </p:nvSpPr>
+        <p:spPr>
+          <a:xfrm>
+            <a:off x="6665976" y="2377440"/>
+            <a:ext cx="1920240" cy="237744"/>
+          </a:xfrm>
+          <a:prstGeom prst="rect">
+            <a:avLst/>
+          </a:prstGeom>
+          <a:noFill/>
+        </p:spPr>
+        <p:txBody>
+          <a:bodyPr wrap="none">
+            <a:spAutoFit/>
+          </a:bodyPr>
+          <a:lstStyle/>
+          <a:p>
+            <a:pPr algn="l">
+              <a:defRPr sz="950" b="1">
+                <a:solidFill>
+                  <a:srgbClr val="111827"/>
+                </a:solidFill>
+                <a:latin typeface="Calibri"/>
+              </a:defRPr>
+            </a:pPr>
+            <a:r>
+              <a:t>Arundeep Singh</a:t>
+            </a:r>
+          </a:p>
+        </p:txBody>
+      </p:sp>
+      <p:sp>
+        <p:nvSpPr>
+          <p:cNvPr id="144" name="TextBox 143"/>
+          <p:cNvSpPr txBox="1"/>
+          <p:nvPr/>
+        </p:nvSpPr>
+        <p:spPr>
+          <a:xfrm>
+            <a:off x="8586216" y="2377440"/>
+            <a:ext cx="2459736" cy="237744"/>
+          </a:xfrm>
+          <a:prstGeom prst="rect">
+            <a:avLst/>
+          </a:prstGeom>
+          <a:noFill/>
+        </p:spPr>
+        <p:txBody>
+          <a:bodyPr wrap="none">
+            <a:spAutoFit/>
+          </a:bodyPr>
+          <a:lstStyle/>
+          <a:p>
+            <a:pPr algn="l">
+              <a:defRPr sz="950" b="0">
+                <a:solidFill>
+                  <a:srgbClr val="6B7280"/>
+                </a:solidFill>
+                <a:latin typeface="Calibri"/>
+              </a:defRPr>
+            </a:pPr>
+            <a:r>
+              <a:t>Jagdeep Singh Insurance Agency, In…</a:t>
+            </a:r>
+          </a:p>
+        </p:txBody>
+      </p:sp>
+      <p:sp>
+        <p:nvSpPr>
+          <p:cNvPr id="145" name="TextBox 144"/>
+          <p:cNvSpPr txBox="1"/>
+          <p:nvPr/>
+        </p:nvSpPr>
+        <p:spPr>
+          <a:xfrm>
+            <a:off x="11045952" y="2377440"/>
+            <a:ext cx="914400" cy="237744"/>
+          </a:xfrm>
+          <a:prstGeom prst="rect">
+            <a:avLst/>
+          </a:prstGeom>
+          <a:noFill/>
+        </p:spPr>
+        <p:txBody>
+          <a:bodyPr wrap="none">
+            <a:spAutoFit/>
+          </a:bodyPr>
+          <a:lstStyle/>
+          <a:p>
+            <a:pPr algn="ctr">
+              <a:defRPr sz="950" b="1">
+                <a:solidFill>
+                  <a:srgbClr val="111827"/>
+                </a:solidFill>
+                <a:latin typeface="Calibri"/>
+              </a:defRPr>
+            </a:pPr>
+            <a:r>
+              <a:t>$413K</a:t>
+            </a:r>
+          </a:p>
+        </p:txBody>
+      </p:sp>
+      <p:sp>
+        <p:nvSpPr>
+          <p:cNvPr id="146" name="Rectangle 145"/>
+          <p:cNvSpPr/>
+          <p:nvPr/>
+        </p:nvSpPr>
+        <p:spPr>
+          <a:xfrm>
+            <a:off x="6254496" y="2615184"/>
+            <a:ext cx="5705856" cy="256032"/>
+          </a:xfrm>
+          <a:prstGeom prst="rect">
+            <a:avLst/>
+          </a:prstGeom>
+          <a:solidFill>
+            <a:srgbClr val="FFFFFF"/>
+          </a:solidFill>
+          <a:ln>
+            <a:noFill/>
+          </a:ln>
+        </p:spPr>
+        <p:style>
+          <a:lnRef idx="1">
+            <a:schemeClr val="accent1"/>
+          </a:lnRef>
+          <a:fillRef idx="3">
+            <a:schemeClr val="accent1"/>
+          </a:fillRef>
+          <a:effectRef idx="2">
+            <a:schemeClr val="accent1"/>
+          </a:effectRef>
+          <a:fontRef idx="minor">
+            <a:schemeClr val="lt1"/>
+          </a:fontRef>
+        </p:style>
+        <p:txBody>
+          <a:bodyPr rtlCol="0" anchor="ctr"/>
+          <a:lstStyle/>
+          <a:p>
+            <a:pPr algn="ctr"/>
+          </a:p>
+        </p:txBody>
+      </p:sp>
+      <p:sp>
+        <p:nvSpPr>
+          <p:cNvPr id="147" name="TextBox 146"/>
+          <p:cNvSpPr txBox="1"/>
+          <p:nvPr/>
+        </p:nvSpPr>
+        <p:spPr>
+          <a:xfrm>
+            <a:off x="6254496" y="2633472"/>
+            <a:ext cx="411480" cy="237744"/>
+          </a:xfrm>
+          <a:prstGeom prst="rect">
+            <a:avLst/>
+          </a:prstGeom>
+          <a:noFill/>
+        </p:spPr>
+        <p:txBody>
+          <a:bodyPr wrap="none">
+            <a:spAutoFit/>
+          </a:bodyPr>
+          <a:lstStyle/>
+          <a:p>
+            <a:pPr algn="ctr">
+              <a:defRPr sz="950" b="1">
+                <a:solidFill>
+                  <a:srgbClr val="6B7280"/>
+                </a:solidFill>
+                <a:latin typeface="Calibri"/>
+              </a:defRPr>
+            </a:pPr>
+            <a:r>
+              <a:t>27</a:t>
+            </a:r>
+          </a:p>
+        </p:txBody>
+      </p:sp>
+      <p:sp>
+        <p:nvSpPr>
+          <p:cNvPr id="148" name="TextBox 147"/>
+          <p:cNvSpPr txBox="1"/>
+          <p:nvPr/>
+        </p:nvSpPr>
+        <p:spPr>
+          <a:xfrm>
+            <a:off x="6665976" y="2633472"/>
+            <a:ext cx="1920240" cy="237744"/>
+          </a:xfrm>
+          <a:prstGeom prst="rect">
+            <a:avLst/>
+          </a:prstGeom>
+          <a:noFill/>
+        </p:spPr>
+        <p:txBody>
+          <a:bodyPr wrap="none">
+            <a:spAutoFit/>
+          </a:bodyPr>
+          <a:lstStyle/>
+          <a:p>
+            <a:pPr algn="l">
+              <a:defRPr sz="950" b="1">
+                <a:solidFill>
+                  <a:srgbClr val="111827"/>
+                </a:solidFill>
+                <a:latin typeface="Calibri"/>
+              </a:defRPr>
+            </a:pPr>
+            <a:r>
+              <a:t>Vladimir Tesler</a:t>
+            </a:r>
+          </a:p>
+        </p:txBody>
+      </p:sp>
+      <p:sp>
+        <p:nvSpPr>
+          <p:cNvPr id="149" name="TextBox 148"/>
+          <p:cNvSpPr txBox="1"/>
+          <p:nvPr/>
+        </p:nvSpPr>
+        <p:spPr>
+          <a:xfrm>
+            <a:off x="8586216" y="2633472"/>
+            <a:ext cx="2459736" cy="237744"/>
+          </a:xfrm>
+          <a:prstGeom prst="rect">
+            <a:avLst/>
+          </a:prstGeom>
+          <a:noFill/>
+        </p:spPr>
+        <p:txBody>
+          <a:bodyPr wrap="none">
+            <a:spAutoFit/>
+          </a:bodyPr>
+          <a:lstStyle/>
+          <a:p>
+            <a:pPr algn="l">
+              <a:defRPr sz="950" b="0">
+                <a:solidFill>
+                  <a:srgbClr val="6B7280"/>
+                </a:solidFill>
+                <a:latin typeface="Calibri"/>
+              </a:defRPr>
+            </a:pPr>
+            <a:r>
+              <a:t>Insurance Planet</a:t>
+            </a:r>
+          </a:p>
+        </p:txBody>
+      </p:sp>
+      <p:sp>
+        <p:nvSpPr>
+          <p:cNvPr id="150" name="TextBox 149"/>
+          <p:cNvSpPr txBox="1"/>
+          <p:nvPr/>
+        </p:nvSpPr>
+        <p:spPr>
+          <a:xfrm>
+            <a:off x="11045952" y="2633472"/>
+            <a:ext cx="914400" cy="237744"/>
+          </a:xfrm>
+          <a:prstGeom prst="rect">
+            <a:avLst/>
+          </a:prstGeom>
+          <a:noFill/>
+        </p:spPr>
+        <p:txBody>
+          <a:bodyPr wrap="none">
+            <a:spAutoFit/>
+          </a:bodyPr>
+          <a:lstStyle/>
+          <a:p>
+            <a:pPr algn="ctr">
+              <a:defRPr sz="950" b="1">
+                <a:solidFill>
+                  <a:srgbClr val="111827"/>
+                </a:solidFill>
+                <a:latin typeface="Calibri"/>
+              </a:defRPr>
+            </a:pPr>
+            <a:r>
+              <a:t>$412K</a:t>
+            </a:r>
+          </a:p>
+        </p:txBody>
+      </p:sp>
+      <p:sp>
+        <p:nvSpPr>
+          <p:cNvPr id="151" name="Rectangle 150"/>
+          <p:cNvSpPr/>
+          <p:nvPr/>
+        </p:nvSpPr>
+        <p:spPr>
+          <a:xfrm>
+            <a:off x="6254496" y="2871216"/>
             <a:ext cx="5705856" cy="256032"/>
           </a:xfrm>
           <a:prstGeom prst="rect">
@@ -16652,13 +17400,13 @@
       </p:sp>
       <p:sp>
         <p:nvSpPr>
-          <p:cNvPr id="132" name="TextBox 131"/>
-          <p:cNvSpPr txBox="1"/>
-          <p:nvPr/>
-        </p:nvSpPr>
-        <p:spPr>
-          <a:xfrm>
-            <a:off x="6254496" y="1865376"/>
+          <p:cNvPr id="152" name="TextBox 151"/>
+          <p:cNvSpPr txBox="1"/>
+          <p:nvPr/>
+        </p:nvSpPr>
+        <p:spPr>
+          <a:xfrm>
+            <a:off x="6254496" y="2889504"/>
             <a:ext cx="411480" cy="237744"/>
           </a:xfrm>
           <a:prstGeom prst="rect">
@@ -16681,20 +17429,20 @@
               </a:defRPr>
             </a:pPr>
             <a:r>
-              <a:t>24</a:t>
-            </a:r>
-          </a:p>
-        </p:txBody>
-      </p:sp>
-      <p:sp>
-        <p:nvSpPr>
-          <p:cNvPr id="133" name="TextBox 132"/>
-          <p:cNvSpPr txBox="1"/>
-          <p:nvPr/>
-        </p:nvSpPr>
-        <p:spPr>
-          <a:xfrm>
-            <a:off x="6665976" y="1865376"/>
+              <a:t>28</a:t>
+            </a:r>
+          </a:p>
+        </p:txBody>
+      </p:sp>
+      <p:sp>
+        <p:nvSpPr>
+          <p:cNvPr id="153" name="TextBox 152"/>
+          <p:cNvSpPr txBox="1"/>
+          <p:nvPr/>
+        </p:nvSpPr>
+        <p:spPr>
+          <a:xfrm>
+            <a:off x="6665976" y="2889504"/>
             <a:ext cx="1920240" cy="237744"/>
           </a:xfrm>
           <a:prstGeom prst="rect">
@@ -16717,20 +17465,20 @@
               </a:defRPr>
             </a:pPr>
             <a:r>
-              <a:t>Deepak Goswami</a:t>
-            </a:r>
-          </a:p>
-        </p:txBody>
-      </p:sp>
-      <p:sp>
-        <p:nvSpPr>
-          <p:cNvPr id="134" name="TextBox 133"/>
-          <p:cNvSpPr txBox="1"/>
-          <p:nvPr/>
-        </p:nvSpPr>
-        <p:spPr>
-          <a:xfrm>
-            <a:off x="8586216" y="1865376"/>
+              <a:t>Raul Fernandez</a:t>
+            </a:r>
+          </a:p>
+        </p:txBody>
+      </p:sp>
+      <p:sp>
+        <p:nvSpPr>
+          <p:cNvPr id="154" name="TextBox 153"/>
+          <p:cNvSpPr txBox="1"/>
+          <p:nvPr/>
+        </p:nvSpPr>
+        <p:spPr>
+          <a:xfrm>
+            <a:off x="8586216" y="2889504"/>
             <a:ext cx="2459736" cy="237744"/>
           </a:xfrm>
           <a:prstGeom prst="rect">
@@ -16753,20 +17501,20 @@
               </a:defRPr>
             </a:pPr>
             <a:r>
-              <a:t>A.S.I.A Inc</a:t>
-            </a:r>
-          </a:p>
-        </p:txBody>
-      </p:sp>
-      <p:sp>
-        <p:nvSpPr>
-          <p:cNvPr id="135" name="TextBox 134"/>
-          <p:cNvSpPr txBox="1"/>
-          <p:nvPr/>
-        </p:nvSpPr>
-        <p:spPr>
-          <a:xfrm>
-            <a:off x="11045952" y="1865376"/>
+              <a:t>Ewall Insurance Company</a:t>
+            </a:r>
+          </a:p>
+        </p:txBody>
+      </p:sp>
+      <p:sp>
+        <p:nvSpPr>
+          <p:cNvPr id="155" name="TextBox 154"/>
+          <p:cNvSpPr txBox="1"/>
+          <p:nvPr/>
+        </p:nvSpPr>
+        <p:spPr>
+          <a:xfrm>
+            <a:off x="11045952" y="2889504"/>
             <a:ext cx="914400" cy="237744"/>
           </a:xfrm>
           <a:prstGeom prst="rect">
@@ -16789,20 +17537,768 @@
               </a:defRPr>
             </a:pPr>
             <a:r>
-              <a:t>$439K</a:t>
-            </a:r>
-          </a:p>
-        </p:txBody>
-      </p:sp>
-      <p:sp>
-        <p:nvSpPr>
-          <p:cNvPr id="136" name="Rectangle 135"/>
+              <a:t>$408K</a:t>
+            </a:r>
+          </a:p>
+        </p:txBody>
+      </p:sp>
+      <p:sp>
+        <p:nvSpPr>
+          <p:cNvPr id="156" name="Rectangle 155"/>
           <p:cNvSpPr/>
           <p:nvPr/>
         </p:nvSpPr>
         <p:spPr>
           <a:xfrm>
-            <a:off x="6254496" y="2103120"/>
+            <a:off x="6254496" y="3127248"/>
+            <a:ext cx="5705856" cy="256032"/>
+          </a:xfrm>
+          <a:prstGeom prst="rect">
+            <a:avLst/>
+          </a:prstGeom>
+          <a:solidFill>
+            <a:srgbClr val="D1FAE5"/>
+          </a:solidFill>
+          <a:ln>
+            <a:noFill/>
+          </a:ln>
+        </p:spPr>
+        <p:style>
+          <a:lnRef idx="1">
+            <a:schemeClr val="accent1"/>
+          </a:lnRef>
+          <a:fillRef idx="3">
+            <a:schemeClr val="accent1"/>
+          </a:fillRef>
+          <a:effectRef idx="2">
+            <a:schemeClr val="accent1"/>
+          </a:effectRef>
+          <a:fontRef idx="minor">
+            <a:schemeClr val="lt1"/>
+          </a:fontRef>
+        </p:style>
+        <p:txBody>
+          <a:bodyPr rtlCol="0" anchor="ctr"/>
+          <a:lstStyle/>
+          <a:p>
+            <a:pPr algn="ctr"/>
+          </a:p>
+        </p:txBody>
+      </p:sp>
+      <p:sp>
+        <p:nvSpPr>
+          <p:cNvPr id="157" name="TextBox 156"/>
+          <p:cNvSpPr txBox="1"/>
+          <p:nvPr/>
+        </p:nvSpPr>
+        <p:spPr>
+          <a:xfrm>
+            <a:off x="6254496" y="3145536"/>
+            <a:ext cx="411480" cy="237744"/>
+          </a:xfrm>
+          <a:prstGeom prst="rect">
+            <a:avLst/>
+          </a:prstGeom>
+          <a:noFill/>
+        </p:spPr>
+        <p:txBody>
+          <a:bodyPr wrap="none">
+            <a:spAutoFit/>
+          </a:bodyPr>
+          <a:lstStyle/>
+          <a:p>
+            <a:pPr algn="ctr">
+              <a:defRPr sz="950" b="1">
+                <a:solidFill>
+                  <a:srgbClr val="6B7280"/>
+                </a:solidFill>
+                <a:latin typeface="Calibri"/>
+              </a:defRPr>
+            </a:pPr>
+            <a:r>
+              <a:t>29</a:t>
+            </a:r>
+          </a:p>
+        </p:txBody>
+      </p:sp>
+      <p:sp>
+        <p:nvSpPr>
+          <p:cNvPr id="158" name="TextBox 157"/>
+          <p:cNvSpPr txBox="1"/>
+          <p:nvPr/>
+        </p:nvSpPr>
+        <p:spPr>
+          <a:xfrm>
+            <a:off x="6665976" y="3145536"/>
+            <a:ext cx="1920240" cy="237744"/>
+          </a:xfrm>
+          <a:prstGeom prst="rect">
+            <a:avLst/>
+          </a:prstGeom>
+          <a:noFill/>
+        </p:spPr>
+        <p:txBody>
+          <a:bodyPr wrap="none">
+            <a:spAutoFit/>
+          </a:bodyPr>
+          <a:lstStyle/>
+          <a:p>
+            <a:pPr algn="l">
+              <a:defRPr sz="950" b="1">
+                <a:solidFill>
+                  <a:srgbClr val="111827"/>
+                </a:solidFill>
+                <a:latin typeface="Calibri"/>
+              </a:defRPr>
+            </a:pPr>
+            <a:r>
+              <a:t>Lynda Inderjeet</a:t>
+            </a:r>
+          </a:p>
+        </p:txBody>
+      </p:sp>
+      <p:sp>
+        <p:nvSpPr>
+          <p:cNvPr id="159" name="TextBox 158"/>
+          <p:cNvSpPr txBox="1"/>
+          <p:nvPr/>
+        </p:nvSpPr>
+        <p:spPr>
+          <a:xfrm>
+            <a:off x="8586216" y="3145536"/>
+            <a:ext cx="2459736" cy="237744"/>
+          </a:xfrm>
+          <a:prstGeom prst="rect">
+            <a:avLst/>
+          </a:prstGeom>
+          <a:noFill/>
+        </p:spPr>
+        <p:txBody>
+          <a:bodyPr wrap="none">
+            <a:spAutoFit/>
+          </a:bodyPr>
+          <a:lstStyle/>
+          <a:p>
+            <a:pPr algn="l">
+              <a:defRPr sz="950" b="0">
+                <a:solidFill>
+                  <a:srgbClr val="6B7280"/>
+                </a:solidFill>
+                <a:latin typeface="Calibri"/>
+              </a:defRPr>
+            </a:pPr>
+            <a:r>
+              <a:t>R-T Specialty, LLC</a:t>
+            </a:r>
+          </a:p>
+        </p:txBody>
+      </p:sp>
+      <p:sp>
+        <p:nvSpPr>
+          <p:cNvPr id="160" name="TextBox 159"/>
+          <p:cNvSpPr txBox="1"/>
+          <p:nvPr/>
+        </p:nvSpPr>
+        <p:spPr>
+          <a:xfrm>
+            <a:off x="11045952" y="3145536"/>
+            <a:ext cx="914400" cy="237744"/>
+          </a:xfrm>
+          <a:prstGeom prst="rect">
+            <a:avLst/>
+          </a:prstGeom>
+          <a:noFill/>
+        </p:spPr>
+        <p:txBody>
+          <a:bodyPr wrap="none">
+            <a:spAutoFit/>
+          </a:bodyPr>
+          <a:lstStyle/>
+          <a:p>
+            <a:pPr algn="ctr">
+              <a:defRPr sz="950" b="1">
+                <a:solidFill>
+                  <a:srgbClr val="111827"/>
+                </a:solidFill>
+                <a:latin typeface="Calibri"/>
+              </a:defRPr>
+            </a:pPr>
+            <a:r>
+              <a:t>$388K</a:t>
+            </a:r>
+          </a:p>
+        </p:txBody>
+      </p:sp>
+      <p:sp>
+        <p:nvSpPr>
+          <p:cNvPr id="161" name="Rectangle 160"/>
+          <p:cNvSpPr/>
+          <p:nvPr/>
+        </p:nvSpPr>
+        <p:spPr>
+          <a:xfrm>
+            <a:off x="6254496" y="3383280"/>
+            <a:ext cx="5705856" cy="256032"/>
+          </a:xfrm>
+          <a:prstGeom prst="rect">
+            <a:avLst/>
+          </a:prstGeom>
+          <a:solidFill>
+            <a:srgbClr val="F9FAFB"/>
+          </a:solidFill>
+          <a:ln>
+            <a:noFill/>
+          </a:ln>
+        </p:spPr>
+        <p:style>
+          <a:lnRef idx="1">
+            <a:schemeClr val="accent1"/>
+          </a:lnRef>
+          <a:fillRef idx="3">
+            <a:schemeClr val="accent1"/>
+          </a:fillRef>
+          <a:effectRef idx="2">
+            <a:schemeClr val="accent1"/>
+          </a:effectRef>
+          <a:fontRef idx="minor">
+            <a:schemeClr val="lt1"/>
+          </a:fontRef>
+        </p:style>
+        <p:txBody>
+          <a:bodyPr rtlCol="0" anchor="ctr"/>
+          <a:lstStyle/>
+          <a:p>
+            <a:pPr algn="ctr"/>
+          </a:p>
+        </p:txBody>
+      </p:sp>
+      <p:sp>
+        <p:nvSpPr>
+          <p:cNvPr id="162" name="TextBox 161"/>
+          <p:cNvSpPr txBox="1"/>
+          <p:nvPr/>
+        </p:nvSpPr>
+        <p:spPr>
+          <a:xfrm>
+            <a:off x="6254496" y="3401568"/>
+            <a:ext cx="411480" cy="237744"/>
+          </a:xfrm>
+          <a:prstGeom prst="rect">
+            <a:avLst/>
+          </a:prstGeom>
+          <a:noFill/>
+        </p:spPr>
+        <p:txBody>
+          <a:bodyPr wrap="none">
+            <a:spAutoFit/>
+          </a:bodyPr>
+          <a:lstStyle/>
+          <a:p>
+            <a:pPr algn="ctr">
+              <a:defRPr sz="950" b="1">
+                <a:solidFill>
+                  <a:srgbClr val="6B7280"/>
+                </a:solidFill>
+                <a:latin typeface="Calibri"/>
+              </a:defRPr>
+            </a:pPr>
+            <a:r>
+              <a:t>30</a:t>
+            </a:r>
+          </a:p>
+        </p:txBody>
+      </p:sp>
+      <p:sp>
+        <p:nvSpPr>
+          <p:cNvPr id="163" name="TextBox 162"/>
+          <p:cNvSpPr txBox="1"/>
+          <p:nvPr/>
+        </p:nvSpPr>
+        <p:spPr>
+          <a:xfrm>
+            <a:off x="6665976" y="3401568"/>
+            <a:ext cx="1920240" cy="237744"/>
+          </a:xfrm>
+          <a:prstGeom prst="rect">
+            <a:avLst/>
+          </a:prstGeom>
+          <a:noFill/>
+        </p:spPr>
+        <p:txBody>
+          <a:bodyPr wrap="none">
+            <a:spAutoFit/>
+          </a:bodyPr>
+          <a:lstStyle/>
+          <a:p>
+            <a:pPr algn="l">
+              <a:defRPr sz="950" b="1">
+                <a:solidFill>
+                  <a:srgbClr val="111827"/>
+                </a:solidFill>
+                <a:latin typeface="Calibri"/>
+              </a:defRPr>
+            </a:pPr>
+            <a:r>
+              <a:t>Daliborka Savovic</a:t>
+            </a:r>
+          </a:p>
+        </p:txBody>
+      </p:sp>
+      <p:sp>
+        <p:nvSpPr>
+          <p:cNvPr id="164" name="TextBox 163"/>
+          <p:cNvSpPr txBox="1"/>
+          <p:nvPr/>
+        </p:nvSpPr>
+        <p:spPr>
+          <a:xfrm>
+            <a:off x="8586216" y="3401568"/>
+            <a:ext cx="2459736" cy="237744"/>
+          </a:xfrm>
+          <a:prstGeom prst="rect">
+            <a:avLst/>
+          </a:prstGeom>
+          <a:noFill/>
+        </p:spPr>
+        <p:txBody>
+          <a:bodyPr wrap="none">
+            <a:spAutoFit/>
+          </a:bodyPr>
+          <a:lstStyle/>
+          <a:p>
+            <a:pPr algn="l">
+              <a:defRPr sz="950" b="0">
+                <a:solidFill>
+                  <a:srgbClr val="6B7280"/>
+                </a:solidFill>
+                <a:latin typeface="Calibri"/>
+              </a:defRPr>
+            </a:pPr>
+            <a:r>
+              <a:t>Alpha Trucking Insurance Agency In…</a:t>
+            </a:r>
+          </a:p>
+        </p:txBody>
+      </p:sp>
+      <p:sp>
+        <p:nvSpPr>
+          <p:cNvPr id="165" name="TextBox 164"/>
+          <p:cNvSpPr txBox="1"/>
+          <p:nvPr/>
+        </p:nvSpPr>
+        <p:spPr>
+          <a:xfrm>
+            <a:off x="11045952" y="3401568"/>
+            <a:ext cx="914400" cy="237744"/>
+          </a:xfrm>
+          <a:prstGeom prst="rect">
+            <a:avLst/>
+          </a:prstGeom>
+          <a:noFill/>
+        </p:spPr>
+        <p:txBody>
+          <a:bodyPr wrap="none">
+            <a:spAutoFit/>
+          </a:bodyPr>
+          <a:lstStyle/>
+          <a:p>
+            <a:pPr algn="ctr">
+              <a:defRPr sz="950" b="1">
+                <a:solidFill>
+                  <a:srgbClr val="111827"/>
+                </a:solidFill>
+                <a:latin typeface="Calibri"/>
+              </a:defRPr>
+            </a:pPr>
+            <a:r>
+              <a:t>$380K</a:t>
+            </a:r>
+          </a:p>
+        </p:txBody>
+      </p:sp>
+      <p:sp>
+        <p:nvSpPr>
+          <p:cNvPr id="166" name="Rectangle 165"/>
+          <p:cNvSpPr/>
+          <p:nvPr/>
+        </p:nvSpPr>
+        <p:spPr>
+          <a:xfrm>
+            <a:off x="6254496" y="3639312"/>
+            <a:ext cx="5705856" cy="256032"/>
+          </a:xfrm>
+          <a:prstGeom prst="rect">
+            <a:avLst/>
+          </a:prstGeom>
+          <a:solidFill>
+            <a:srgbClr val="D1FAE5"/>
+          </a:solidFill>
+          <a:ln>
+            <a:noFill/>
+          </a:ln>
+        </p:spPr>
+        <p:style>
+          <a:lnRef idx="1">
+            <a:schemeClr val="accent1"/>
+          </a:lnRef>
+          <a:fillRef idx="3">
+            <a:schemeClr val="accent1"/>
+          </a:fillRef>
+          <a:effectRef idx="2">
+            <a:schemeClr val="accent1"/>
+          </a:effectRef>
+          <a:fontRef idx="minor">
+            <a:schemeClr val="lt1"/>
+          </a:fontRef>
+        </p:style>
+        <p:txBody>
+          <a:bodyPr rtlCol="0" anchor="ctr"/>
+          <a:lstStyle/>
+          <a:p>
+            <a:pPr algn="ctr"/>
+          </a:p>
+        </p:txBody>
+      </p:sp>
+      <p:sp>
+        <p:nvSpPr>
+          <p:cNvPr id="167" name="TextBox 166"/>
+          <p:cNvSpPr txBox="1"/>
+          <p:nvPr/>
+        </p:nvSpPr>
+        <p:spPr>
+          <a:xfrm>
+            <a:off x="6254496" y="3657600"/>
+            <a:ext cx="411480" cy="237744"/>
+          </a:xfrm>
+          <a:prstGeom prst="rect">
+            <a:avLst/>
+          </a:prstGeom>
+          <a:noFill/>
+        </p:spPr>
+        <p:txBody>
+          <a:bodyPr wrap="none">
+            <a:spAutoFit/>
+          </a:bodyPr>
+          <a:lstStyle/>
+          <a:p>
+            <a:pPr algn="ctr">
+              <a:defRPr sz="950" b="1">
+                <a:solidFill>
+                  <a:srgbClr val="6B7280"/>
+                </a:solidFill>
+                <a:latin typeface="Calibri"/>
+              </a:defRPr>
+            </a:pPr>
+            <a:r>
+              <a:t>31</a:t>
+            </a:r>
+          </a:p>
+        </p:txBody>
+      </p:sp>
+      <p:sp>
+        <p:nvSpPr>
+          <p:cNvPr id="168" name="TextBox 167"/>
+          <p:cNvSpPr txBox="1"/>
+          <p:nvPr/>
+        </p:nvSpPr>
+        <p:spPr>
+          <a:xfrm>
+            <a:off x="6665976" y="3657600"/>
+            <a:ext cx="1920240" cy="237744"/>
+          </a:xfrm>
+          <a:prstGeom prst="rect">
+            <a:avLst/>
+          </a:prstGeom>
+          <a:noFill/>
+        </p:spPr>
+        <p:txBody>
+          <a:bodyPr wrap="none">
+            <a:spAutoFit/>
+          </a:bodyPr>
+          <a:lstStyle/>
+          <a:p>
+            <a:pPr algn="l">
+              <a:defRPr sz="950" b="1">
+                <a:solidFill>
+                  <a:srgbClr val="111827"/>
+                </a:solidFill>
+                <a:latin typeface="Calibri"/>
+              </a:defRPr>
+            </a:pPr>
+            <a:r>
+              <a:t>Inderjit Singh</a:t>
+            </a:r>
+          </a:p>
+        </p:txBody>
+      </p:sp>
+      <p:sp>
+        <p:nvSpPr>
+          <p:cNvPr id="169" name="TextBox 168"/>
+          <p:cNvSpPr txBox="1"/>
+          <p:nvPr/>
+        </p:nvSpPr>
+        <p:spPr>
+          <a:xfrm>
+            <a:off x="8586216" y="3657600"/>
+            <a:ext cx="2459736" cy="237744"/>
+          </a:xfrm>
+          <a:prstGeom prst="rect">
+            <a:avLst/>
+          </a:prstGeom>
+          <a:noFill/>
+        </p:spPr>
+        <p:txBody>
+          <a:bodyPr wrap="none">
+            <a:spAutoFit/>
+          </a:bodyPr>
+          <a:lstStyle/>
+          <a:p>
+            <a:pPr algn="l">
+              <a:defRPr sz="950" b="0">
+                <a:solidFill>
+                  <a:srgbClr val="6B7280"/>
+                </a:solidFill>
+                <a:latin typeface="Calibri"/>
+              </a:defRPr>
+            </a:pPr>
+            <a:r>
+              <a:t>American Insurance Agency LLC</a:t>
+            </a:r>
+          </a:p>
+        </p:txBody>
+      </p:sp>
+      <p:sp>
+        <p:nvSpPr>
+          <p:cNvPr id="170" name="TextBox 169"/>
+          <p:cNvSpPr txBox="1"/>
+          <p:nvPr/>
+        </p:nvSpPr>
+        <p:spPr>
+          <a:xfrm>
+            <a:off x="11045952" y="3657600"/>
+            <a:ext cx="914400" cy="237744"/>
+          </a:xfrm>
+          <a:prstGeom prst="rect">
+            <a:avLst/>
+          </a:prstGeom>
+          <a:noFill/>
+        </p:spPr>
+        <p:txBody>
+          <a:bodyPr wrap="none">
+            <a:spAutoFit/>
+          </a:bodyPr>
+          <a:lstStyle/>
+          <a:p>
+            <a:pPr algn="ctr">
+              <a:defRPr sz="950" b="1">
+                <a:solidFill>
+                  <a:srgbClr val="111827"/>
+                </a:solidFill>
+                <a:latin typeface="Calibri"/>
+              </a:defRPr>
+            </a:pPr>
+            <a:r>
+              <a:t>$372K</a:t>
+            </a:r>
+          </a:p>
+        </p:txBody>
+      </p:sp>
+      <p:sp>
+        <p:nvSpPr>
+          <p:cNvPr id="171" name="Rectangle 170"/>
+          <p:cNvSpPr/>
+          <p:nvPr/>
+        </p:nvSpPr>
+        <p:spPr>
+          <a:xfrm>
+            <a:off x="6254496" y="3895344"/>
+            <a:ext cx="5705856" cy="256032"/>
+          </a:xfrm>
+          <a:prstGeom prst="rect">
+            <a:avLst/>
+          </a:prstGeom>
+          <a:solidFill>
+            <a:srgbClr val="F9FAFB"/>
+          </a:solidFill>
+          <a:ln>
+            <a:noFill/>
+          </a:ln>
+        </p:spPr>
+        <p:style>
+          <a:lnRef idx="1">
+            <a:schemeClr val="accent1"/>
+          </a:lnRef>
+          <a:fillRef idx="3">
+            <a:schemeClr val="accent1"/>
+          </a:fillRef>
+          <a:effectRef idx="2">
+            <a:schemeClr val="accent1"/>
+          </a:effectRef>
+          <a:fontRef idx="minor">
+            <a:schemeClr val="lt1"/>
+          </a:fontRef>
+        </p:style>
+        <p:txBody>
+          <a:bodyPr rtlCol="0" anchor="ctr"/>
+          <a:lstStyle/>
+          <a:p>
+            <a:pPr algn="ctr"/>
+          </a:p>
+        </p:txBody>
+      </p:sp>
+      <p:sp>
+        <p:nvSpPr>
+          <p:cNvPr id="172" name="TextBox 171"/>
+          <p:cNvSpPr txBox="1"/>
+          <p:nvPr/>
+        </p:nvSpPr>
+        <p:spPr>
+          <a:xfrm>
+            <a:off x="6254496" y="3913632"/>
+            <a:ext cx="411480" cy="237744"/>
+          </a:xfrm>
+          <a:prstGeom prst="rect">
+            <a:avLst/>
+          </a:prstGeom>
+          <a:noFill/>
+        </p:spPr>
+        <p:txBody>
+          <a:bodyPr wrap="none">
+            <a:spAutoFit/>
+          </a:bodyPr>
+          <a:lstStyle/>
+          <a:p>
+            <a:pPr algn="ctr">
+              <a:defRPr sz="950" b="1">
+                <a:solidFill>
+                  <a:srgbClr val="6B7280"/>
+                </a:solidFill>
+                <a:latin typeface="Calibri"/>
+              </a:defRPr>
+            </a:pPr>
+            <a:r>
+              <a:t>32</a:t>
+            </a:r>
+          </a:p>
+        </p:txBody>
+      </p:sp>
+      <p:sp>
+        <p:nvSpPr>
+          <p:cNvPr id="173" name="TextBox 172"/>
+          <p:cNvSpPr txBox="1"/>
+          <p:nvPr/>
+        </p:nvSpPr>
+        <p:spPr>
+          <a:xfrm>
+            <a:off x="6665976" y="3913632"/>
+            <a:ext cx="1920240" cy="237744"/>
+          </a:xfrm>
+          <a:prstGeom prst="rect">
+            <a:avLst/>
+          </a:prstGeom>
+          <a:noFill/>
+        </p:spPr>
+        <p:txBody>
+          <a:bodyPr wrap="none">
+            <a:spAutoFit/>
+          </a:bodyPr>
+          <a:lstStyle/>
+          <a:p>
+            <a:pPr algn="l">
+              <a:defRPr sz="950" b="1">
+                <a:solidFill>
+                  <a:srgbClr val="111827"/>
+                </a:solidFill>
+                <a:latin typeface="Calibri"/>
+              </a:defRPr>
+            </a:pPr>
+            <a:r>
+              <a:t>Michael Su</a:t>
+            </a:r>
+          </a:p>
+        </p:txBody>
+      </p:sp>
+      <p:sp>
+        <p:nvSpPr>
+          <p:cNvPr id="174" name="TextBox 173"/>
+          <p:cNvSpPr txBox="1"/>
+          <p:nvPr/>
+        </p:nvSpPr>
+        <p:spPr>
+          <a:xfrm>
+            <a:off x="8586216" y="3913632"/>
+            <a:ext cx="2459736" cy="237744"/>
+          </a:xfrm>
+          <a:prstGeom prst="rect">
+            <a:avLst/>
+          </a:prstGeom>
+          <a:noFill/>
+        </p:spPr>
+        <p:txBody>
+          <a:bodyPr wrap="none">
+            <a:spAutoFit/>
+          </a:bodyPr>
+          <a:lstStyle/>
+          <a:p>
+            <a:pPr algn="l">
+              <a:defRPr sz="950" b="0">
+                <a:solidFill>
+                  <a:srgbClr val="6B7280"/>
+                </a:solidFill>
+                <a:latin typeface="Calibri"/>
+              </a:defRPr>
+            </a:pPr>
+            <a:r>
+              <a:t>Jtc Insurance Agency, Inc.</a:t>
+            </a:r>
+          </a:p>
+        </p:txBody>
+      </p:sp>
+      <p:sp>
+        <p:nvSpPr>
+          <p:cNvPr id="175" name="TextBox 174"/>
+          <p:cNvSpPr txBox="1"/>
+          <p:nvPr/>
+        </p:nvSpPr>
+        <p:spPr>
+          <a:xfrm>
+            <a:off x="11045952" y="3913632"/>
+            <a:ext cx="914400" cy="237744"/>
+          </a:xfrm>
+          <a:prstGeom prst="rect">
+            <a:avLst/>
+          </a:prstGeom>
+          <a:noFill/>
+        </p:spPr>
+        <p:txBody>
+          <a:bodyPr wrap="none">
+            <a:spAutoFit/>
+          </a:bodyPr>
+          <a:lstStyle/>
+          <a:p>
+            <a:pPr algn="ctr">
+              <a:defRPr sz="950" b="1">
+                <a:solidFill>
+                  <a:srgbClr val="111827"/>
+                </a:solidFill>
+                <a:latin typeface="Calibri"/>
+              </a:defRPr>
+            </a:pPr>
+            <a:r>
+              <a:t>$367K</a:t>
+            </a:r>
+          </a:p>
+        </p:txBody>
+      </p:sp>
+      <p:sp>
+        <p:nvSpPr>
+          <p:cNvPr id="176" name="Rectangle 175"/>
+          <p:cNvSpPr/>
+          <p:nvPr/>
+        </p:nvSpPr>
+        <p:spPr>
+          <a:xfrm>
+            <a:off x="6254496" y="4151376"/>
             <a:ext cx="5705856" cy="256032"/>
           </a:xfrm>
           <a:prstGeom prst="rect">
@@ -16839,13 +18335,13 @@
       </p:sp>
       <p:sp>
         <p:nvSpPr>
-          <p:cNvPr id="137" name="TextBox 136"/>
-          <p:cNvSpPr txBox="1"/>
-          <p:nvPr/>
-        </p:nvSpPr>
-        <p:spPr>
-          <a:xfrm>
-            <a:off x="6254496" y="2121408"/>
+          <p:cNvPr id="177" name="TextBox 176"/>
+          <p:cNvSpPr txBox="1"/>
+          <p:nvPr/>
+        </p:nvSpPr>
+        <p:spPr>
+          <a:xfrm>
+            <a:off x="6254496" y="4169664"/>
             <a:ext cx="411480" cy="237744"/>
           </a:xfrm>
           <a:prstGeom prst="rect">
@@ -16868,20 +18364,20 @@
               </a:defRPr>
             </a:pPr>
             <a:r>
-              <a:t>25</a:t>
-            </a:r>
-          </a:p>
-        </p:txBody>
-      </p:sp>
-      <p:sp>
-        <p:nvSpPr>
-          <p:cNvPr id="138" name="TextBox 137"/>
-          <p:cNvSpPr txBox="1"/>
-          <p:nvPr/>
-        </p:nvSpPr>
-        <p:spPr>
-          <a:xfrm>
-            <a:off x="6665976" y="2121408"/>
+              <a:t>33</a:t>
+            </a:r>
+          </a:p>
+        </p:txBody>
+      </p:sp>
+      <p:sp>
+        <p:nvSpPr>
+          <p:cNvPr id="178" name="TextBox 177"/>
+          <p:cNvSpPr txBox="1"/>
+          <p:nvPr/>
+        </p:nvSpPr>
+        <p:spPr>
+          <a:xfrm>
+            <a:off x="6665976" y="4169664"/>
             <a:ext cx="1920240" cy="237744"/>
           </a:xfrm>
           <a:prstGeom prst="rect">
@@ -16904,20 +18400,20 @@
               </a:defRPr>
             </a:pPr>
             <a:r>
-              <a:t>Gayane Yeghiazaryan</a:t>
-            </a:r>
-          </a:p>
-        </p:txBody>
-      </p:sp>
-      <p:sp>
-        <p:nvSpPr>
-          <p:cNvPr id="139" name="TextBox 138"/>
-          <p:cNvSpPr txBox="1"/>
-          <p:nvPr/>
-        </p:nvSpPr>
-        <p:spPr>
-          <a:xfrm>
-            <a:off x="8586216" y="2121408"/>
+              <a:t>Patricia Galindoparedes</a:t>
+            </a:r>
+          </a:p>
+        </p:txBody>
+      </p:sp>
+      <p:sp>
+        <p:nvSpPr>
+          <p:cNvPr id="179" name="TextBox 178"/>
+          <p:cNvSpPr txBox="1"/>
+          <p:nvPr/>
+        </p:nvSpPr>
+        <p:spPr>
+          <a:xfrm>
+            <a:off x="8586216" y="4169664"/>
             <a:ext cx="2459736" cy="237744"/>
           </a:xfrm>
           <a:prstGeom prst="rect">
@@ -16940,20 +18436,20 @@
               </a:defRPr>
             </a:pPr>
             <a:r>
-              <a:t>Limosa Insurance Services Inc</a:t>
-            </a:r>
-          </a:p>
-        </p:txBody>
-      </p:sp>
-      <p:sp>
-        <p:nvSpPr>
-          <p:cNvPr id="140" name="TextBox 139"/>
-          <p:cNvSpPr txBox="1"/>
-          <p:nvPr/>
-        </p:nvSpPr>
-        <p:spPr>
-          <a:xfrm>
-            <a:off x="11045952" y="2121408"/>
+              <a:t>Call Patty Insurance Services</a:t>
+            </a:r>
+          </a:p>
+        </p:txBody>
+      </p:sp>
+      <p:sp>
+        <p:nvSpPr>
+          <p:cNvPr id="180" name="TextBox 179"/>
+          <p:cNvSpPr txBox="1"/>
+          <p:nvPr/>
+        </p:nvSpPr>
+        <p:spPr>
+          <a:xfrm>
+            <a:off x="11045952" y="4169664"/>
             <a:ext cx="914400" cy="237744"/>
           </a:xfrm>
           <a:prstGeom prst="rect">
@@ -16976,20 +18472,20 @@
               </a:defRPr>
             </a:pPr>
             <a:r>
-              <a:t>$427K</a:t>
-            </a:r>
-          </a:p>
-        </p:txBody>
-      </p:sp>
-      <p:sp>
-        <p:nvSpPr>
-          <p:cNvPr id="141" name="Rectangle 140"/>
+              <a:t>$365K</a:t>
+            </a:r>
+          </a:p>
+        </p:txBody>
+      </p:sp>
+      <p:sp>
+        <p:nvSpPr>
+          <p:cNvPr id="181" name="Rectangle 180"/>
           <p:cNvSpPr/>
           <p:nvPr/>
         </p:nvSpPr>
         <p:spPr>
           <a:xfrm>
-            <a:off x="6254496" y="2359152"/>
+            <a:off x="6254496" y="4407408"/>
             <a:ext cx="5705856" cy="256032"/>
           </a:xfrm>
           <a:prstGeom prst="rect">
@@ -17026,13 +18522,13 @@
       </p:sp>
       <p:sp>
         <p:nvSpPr>
-          <p:cNvPr id="142" name="TextBox 141"/>
-          <p:cNvSpPr txBox="1"/>
-          <p:nvPr/>
-        </p:nvSpPr>
-        <p:spPr>
-          <a:xfrm>
-            <a:off x="6254496" y="2377440"/>
+          <p:cNvPr id="182" name="TextBox 181"/>
+          <p:cNvSpPr txBox="1"/>
+          <p:nvPr/>
+        </p:nvSpPr>
+        <p:spPr>
+          <a:xfrm>
+            <a:off x="6254496" y="4425696"/>
             <a:ext cx="411480" cy="237744"/>
           </a:xfrm>
           <a:prstGeom prst="rect">
@@ -17055,20 +18551,20 @@
               </a:defRPr>
             </a:pPr>
             <a:r>
-              <a:t>26</a:t>
-            </a:r>
-          </a:p>
-        </p:txBody>
-      </p:sp>
-      <p:sp>
-        <p:nvSpPr>
-          <p:cNvPr id="143" name="TextBox 142"/>
-          <p:cNvSpPr txBox="1"/>
-          <p:nvPr/>
-        </p:nvSpPr>
-        <p:spPr>
-          <a:xfrm>
-            <a:off x="6665976" y="2377440"/>
+              <a:t>34</a:t>
+            </a:r>
+          </a:p>
+        </p:txBody>
+      </p:sp>
+      <p:sp>
+        <p:nvSpPr>
+          <p:cNvPr id="183" name="TextBox 182"/>
+          <p:cNvSpPr txBox="1"/>
+          <p:nvPr/>
+        </p:nvSpPr>
+        <p:spPr>
+          <a:xfrm>
+            <a:off x="6665976" y="4425696"/>
             <a:ext cx="1920240" cy="237744"/>
           </a:xfrm>
           <a:prstGeom prst="rect">
@@ -17091,20 +18587,20 @@
               </a:defRPr>
             </a:pPr>
             <a:r>
-              <a:t>Arundeep Singh</a:t>
-            </a:r>
-          </a:p>
-        </p:txBody>
-      </p:sp>
-      <p:sp>
-        <p:nvSpPr>
-          <p:cNvPr id="144" name="TextBox 143"/>
-          <p:cNvSpPr txBox="1"/>
-          <p:nvPr/>
-        </p:nvSpPr>
-        <p:spPr>
-          <a:xfrm>
-            <a:off x="8586216" y="2377440"/>
+              <a:t>Kurtis Gautz</a:t>
+            </a:r>
+          </a:p>
+        </p:txBody>
+      </p:sp>
+      <p:sp>
+        <p:nvSpPr>
+          <p:cNvPr id="184" name="TextBox 183"/>
+          <p:cNvSpPr txBox="1"/>
+          <p:nvPr/>
+        </p:nvSpPr>
+        <p:spPr>
+          <a:xfrm>
+            <a:off x="8586216" y="4425696"/>
             <a:ext cx="2459736" cy="237744"/>
           </a:xfrm>
           <a:prstGeom prst="rect">
@@ -17127,20 +18623,20 @@
               </a:defRPr>
             </a:pPr>
             <a:r>
-              <a:t>Jagdeep Singh Insurance Agency, In…</a:t>
-            </a:r>
-          </a:p>
-        </p:txBody>
-      </p:sp>
-      <p:sp>
-        <p:nvSpPr>
-          <p:cNvPr id="145" name="TextBox 144"/>
-          <p:cNvSpPr txBox="1"/>
-          <p:nvPr/>
-        </p:nvSpPr>
-        <p:spPr>
-          <a:xfrm>
-            <a:off x="11045952" y="2377440"/>
+              <a:t>CRC Insurance Services, Inc</a:t>
+            </a:r>
+          </a:p>
+        </p:txBody>
+      </p:sp>
+      <p:sp>
+        <p:nvSpPr>
+          <p:cNvPr id="185" name="TextBox 184"/>
+          <p:cNvSpPr txBox="1"/>
+          <p:nvPr/>
+        </p:nvSpPr>
+        <p:spPr>
+          <a:xfrm>
+            <a:off x="11045952" y="4425696"/>
             <a:ext cx="914400" cy="237744"/>
           </a:xfrm>
           <a:prstGeom prst="rect">
@@ -17163,20 +18659,20 @@
               </a:defRPr>
             </a:pPr>
             <a:r>
-              <a:t>$413K</a:t>
-            </a:r>
-          </a:p>
-        </p:txBody>
-      </p:sp>
-      <p:sp>
-        <p:nvSpPr>
-          <p:cNvPr id="146" name="Rectangle 145"/>
+              <a:t>$352K</a:t>
+            </a:r>
+          </a:p>
+        </p:txBody>
+      </p:sp>
+      <p:sp>
+        <p:nvSpPr>
+          <p:cNvPr id="186" name="Rectangle 185"/>
           <p:cNvSpPr/>
           <p:nvPr/>
         </p:nvSpPr>
         <p:spPr>
           <a:xfrm>
-            <a:off x="6254496" y="2615184"/>
+            <a:off x="6254496" y="4663440"/>
             <a:ext cx="5705856" cy="256032"/>
           </a:xfrm>
           <a:prstGeom prst="rect">
@@ -17213,13 +18709,13 @@
       </p:sp>
       <p:sp>
         <p:nvSpPr>
-          <p:cNvPr id="147" name="TextBox 146"/>
-          <p:cNvSpPr txBox="1"/>
-          <p:nvPr/>
-        </p:nvSpPr>
-        <p:spPr>
-          <a:xfrm>
-            <a:off x="6254496" y="2633472"/>
+          <p:cNvPr id="187" name="TextBox 186"/>
+          <p:cNvSpPr txBox="1"/>
+          <p:nvPr/>
+        </p:nvSpPr>
+        <p:spPr>
+          <a:xfrm>
+            <a:off x="6254496" y="4681728"/>
             <a:ext cx="411480" cy="237744"/>
           </a:xfrm>
           <a:prstGeom prst="rect">
@@ -17242,20 +18738,20 @@
               </a:defRPr>
             </a:pPr>
             <a:r>
-              <a:t>27</a:t>
-            </a:r>
-          </a:p>
-        </p:txBody>
-      </p:sp>
-      <p:sp>
-        <p:nvSpPr>
-          <p:cNvPr id="148" name="TextBox 147"/>
-          <p:cNvSpPr txBox="1"/>
-          <p:nvPr/>
-        </p:nvSpPr>
-        <p:spPr>
-          <a:xfrm>
-            <a:off x="6665976" y="2633472"/>
+              <a:t>35</a:t>
+            </a:r>
+          </a:p>
+        </p:txBody>
+      </p:sp>
+      <p:sp>
+        <p:nvSpPr>
+          <p:cNvPr id="188" name="TextBox 187"/>
+          <p:cNvSpPr txBox="1"/>
+          <p:nvPr/>
+        </p:nvSpPr>
+        <p:spPr>
+          <a:xfrm>
+            <a:off x="6665976" y="4681728"/>
             <a:ext cx="1920240" cy="237744"/>
           </a:xfrm>
           <a:prstGeom prst="rect">
@@ -17278,20 +18774,20 @@
               </a:defRPr>
             </a:pPr>
             <a:r>
-              <a:t>Raul Fernandez</a:t>
-            </a:r>
-          </a:p>
-        </p:txBody>
-      </p:sp>
-      <p:sp>
-        <p:nvSpPr>
-          <p:cNvPr id="149" name="TextBox 148"/>
-          <p:cNvSpPr txBox="1"/>
-          <p:nvPr/>
-        </p:nvSpPr>
-        <p:spPr>
-          <a:xfrm>
-            <a:off x="8586216" y="2633472"/>
+              <a:t>Damandeep Singh</a:t>
+            </a:r>
+          </a:p>
+        </p:txBody>
+      </p:sp>
+      <p:sp>
+        <p:nvSpPr>
+          <p:cNvPr id="189" name="TextBox 188"/>
+          <p:cNvSpPr txBox="1"/>
+          <p:nvPr/>
+        </p:nvSpPr>
+        <p:spPr>
+          <a:xfrm>
+            <a:off x="8586216" y="4681728"/>
             <a:ext cx="2459736" cy="237744"/>
           </a:xfrm>
           <a:prstGeom prst="rect">
@@ -17314,20 +18810,20 @@
               </a:defRPr>
             </a:pPr>
             <a:r>
-              <a:t>Ewall Insurance Company</a:t>
-            </a:r>
-          </a:p>
-        </p:txBody>
-      </p:sp>
-      <p:sp>
-        <p:nvSpPr>
-          <p:cNvPr id="150" name="TextBox 149"/>
-          <p:cNvSpPr txBox="1"/>
-          <p:nvPr/>
-        </p:nvSpPr>
-        <p:spPr>
-          <a:xfrm>
-            <a:off x="11045952" y="2633472"/>
+              <a:t>Mayflower Insurance Services</a:t>
+            </a:r>
+          </a:p>
+        </p:txBody>
+      </p:sp>
+      <p:sp>
+        <p:nvSpPr>
+          <p:cNvPr id="190" name="TextBox 189"/>
+          <p:cNvSpPr txBox="1"/>
+          <p:nvPr/>
+        </p:nvSpPr>
+        <p:spPr>
+          <a:xfrm>
+            <a:off x="11045952" y="4681728"/>
             <a:ext cx="914400" cy="237744"/>
           </a:xfrm>
           <a:prstGeom prst="rect">
@@ -17350,20 +18846,207 @@
               </a:defRPr>
             </a:pPr>
             <a:r>
-              <a:t>$391K</a:t>
-            </a:r>
-          </a:p>
-        </p:txBody>
-      </p:sp>
-      <p:sp>
-        <p:nvSpPr>
-          <p:cNvPr id="151" name="Rectangle 150"/>
+              <a:t>$341K</a:t>
+            </a:r>
+          </a:p>
+        </p:txBody>
+      </p:sp>
+      <p:sp>
+        <p:nvSpPr>
+          <p:cNvPr id="191" name="Rectangle 190"/>
           <p:cNvSpPr/>
           <p:nvPr/>
         </p:nvSpPr>
         <p:spPr>
           <a:xfrm>
-            <a:off x="6254496" y="2871216"/>
+            <a:off x="6254496" y="4919472"/>
+            <a:ext cx="5705856" cy="256032"/>
+          </a:xfrm>
+          <a:prstGeom prst="rect">
+            <a:avLst/>
+          </a:prstGeom>
+          <a:solidFill>
+            <a:srgbClr val="F9FAFB"/>
+          </a:solidFill>
+          <a:ln>
+            <a:noFill/>
+          </a:ln>
+        </p:spPr>
+        <p:style>
+          <a:lnRef idx="1">
+            <a:schemeClr val="accent1"/>
+          </a:lnRef>
+          <a:fillRef idx="3">
+            <a:schemeClr val="accent1"/>
+          </a:fillRef>
+          <a:effectRef idx="2">
+            <a:schemeClr val="accent1"/>
+          </a:effectRef>
+          <a:fontRef idx="minor">
+            <a:schemeClr val="lt1"/>
+          </a:fontRef>
+        </p:style>
+        <p:txBody>
+          <a:bodyPr rtlCol="0" anchor="ctr"/>
+          <a:lstStyle/>
+          <a:p>
+            <a:pPr algn="ctr"/>
+          </a:p>
+        </p:txBody>
+      </p:sp>
+      <p:sp>
+        <p:nvSpPr>
+          <p:cNvPr id="192" name="TextBox 191"/>
+          <p:cNvSpPr txBox="1"/>
+          <p:nvPr/>
+        </p:nvSpPr>
+        <p:spPr>
+          <a:xfrm>
+            <a:off x="6254496" y="4937760"/>
+            <a:ext cx="411480" cy="237744"/>
+          </a:xfrm>
+          <a:prstGeom prst="rect">
+            <a:avLst/>
+          </a:prstGeom>
+          <a:noFill/>
+        </p:spPr>
+        <p:txBody>
+          <a:bodyPr wrap="none">
+            <a:spAutoFit/>
+          </a:bodyPr>
+          <a:lstStyle/>
+          <a:p>
+            <a:pPr algn="ctr">
+              <a:defRPr sz="950" b="1">
+                <a:solidFill>
+                  <a:srgbClr val="6B7280"/>
+                </a:solidFill>
+                <a:latin typeface="Calibri"/>
+              </a:defRPr>
+            </a:pPr>
+            <a:r>
+              <a:t>36</a:t>
+            </a:r>
+          </a:p>
+        </p:txBody>
+      </p:sp>
+      <p:sp>
+        <p:nvSpPr>
+          <p:cNvPr id="193" name="TextBox 192"/>
+          <p:cNvSpPr txBox="1"/>
+          <p:nvPr/>
+        </p:nvSpPr>
+        <p:spPr>
+          <a:xfrm>
+            <a:off x="6665976" y="4937760"/>
+            <a:ext cx="1920240" cy="237744"/>
+          </a:xfrm>
+          <a:prstGeom prst="rect">
+            <a:avLst/>
+          </a:prstGeom>
+          <a:noFill/>
+        </p:spPr>
+        <p:txBody>
+          <a:bodyPr wrap="none">
+            <a:spAutoFit/>
+          </a:bodyPr>
+          <a:lstStyle/>
+          <a:p>
+            <a:pPr algn="l">
+              <a:defRPr sz="950" b="1">
+                <a:solidFill>
+                  <a:srgbClr val="111827"/>
+                </a:solidFill>
+                <a:latin typeface="Calibri"/>
+              </a:defRPr>
+            </a:pPr>
+            <a:r>
+              <a:t>Omar Elmanzalawy</a:t>
+            </a:r>
+          </a:p>
+        </p:txBody>
+      </p:sp>
+      <p:sp>
+        <p:nvSpPr>
+          <p:cNvPr id="194" name="TextBox 193"/>
+          <p:cNvSpPr txBox="1"/>
+          <p:nvPr/>
+        </p:nvSpPr>
+        <p:spPr>
+          <a:xfrm>
+            <a:off x="8586216" y="4937760"/>
+            <a:ext cx="2459736" cy="237744"/>
+          </a:xfrm>
+          <a:prstGeom prst="rect">
+            <a:avLst/>
+          </a:prstGeom>
+          <a:noFill/>
+        </p:spPr>
+        <p:txBody>
+          <a:bodyPr wrap="none">
+            <a:spAutoFit/>
+          </a:bodyPr>
+          <a:lstStyle/>
+          <a:p>
+            <a:pPr algn="l">
+              <a:defRPr sz="950" b="0">
+                <a:solidFill>
+                  <a:srgbClr val="6B7280"/>
+                </a:solidFill>
+                <a:latin typeface="Calibri"/>
+              </a:defRPr>
+            </a:pPr>
+            <a:r>
+              <a:t>First Connect Insurance</a:t>
+            </a:r>
+          </a:p>
+        </p:txBody>
+      </p:sp>
+      <p:sp>
+        <p:nvSpPr>
+          <p:cNvPr id="195" name="TextBox 194"/>
+          <p:cNvSpPr txBox="1"/>
+          <p:nvPr/>
+        </p:nvSpPr>
+        <p:spPr>
+          <a:xfrm>
+            <a:off x="11045952" y="4937760"/>
+            <a:ext cx="914400" cy="237744"/>
+          </a:xfrm>
+          <a:prstGeom prst="rect">
+            <a:avLst/>
+          </a:prstGeom>
+          <a:noFill/>
+        </p:spPr>
+        <p:txBody>
+          <a:bodyPr wrap="none">
+            <a:spAutoFit/>
+          </a:bodyPr>
+          <a:lstStyle/>
+          <a:p>
+            <a:pPr algn="ctr">
+              <a:defRPr sz="950" b="1">
+                <a:solidFill>
+                  <a:srgbClr val="111827"/>
+                </a:solidFill>
+                <a:latin typeface="Calibri"/>
+              </a:defRPr>
+            </a:pPr>
+            <a:r>
+              <a:t>$339K</a:t>
+            </a:r>
+          </a:p>
+        </p:txBody>
+      </p:sp>
+      <p:sp>
+        <p:nvSpPr>
+          <p:cNvPr id="196" name="Rectangle 195"/>
+          <p:cNvSpPr/>
+          <p:nvPr/>
+        </p:nvSpPr>
+        <p:spPr>
+          <a:xfrm>
+            <a:off x="6254496" y="5175504"/>
             <a:ext cx="5705856" cy="256032"/>
           </a:xfrm>
           <a:prstGeom prst="rect">
@@ -17400,13 +19083,13 @@
       </p:sp>
       <p:sp>
         <p:nvSpPr>
-          <p:cNvPr id="152" name="TextBox 151"/>
-          <p:cNvSpPr txBox="1"/>
-          <p:nvPr/>
-        </p:nvSpPr>
-        <p:spPr>
-          <a:xfrm>
-            <a:off x="6254496" y="2889504"/>
+          <p:cNvPr id="197" name="TextBox 196"/>
+          <p:cNvSpPr txBox="1"/>
+          <p:nvPr/>
+        </p:nvSpPr>
+        <p:spPr>
+          <a:xfrm>
+            <a:off x="6254496" y="5193792"/>
             <a:ext cx="411480" cy="237744"/>
           </a:xfrm>
           <a:prstGeom prst="rect">
@@ -17429,20 +19112,20 @@
               </a:defRPr>
             </a:pPr>
             <a:r>
-              <a:t>28</a:t>
-            </a:r>
-          </a:p>
-        </p:txBody>
-      </p:sp>
-      <p:sp>
-        <p:nvSpPr>
-          <p:cNvPr id="153" name="TextBox 152"/>
-          <p:cNvSpPr txBox="1"/>
-          <p:nvPr/>
-        </p:nvSpPr>
-        <p:spPr>
-          <a:xfrm>
-            <a:off x="6665976" y="2889504"/>
+              <a:t>37</a:t>
+            </a:r>
+          </a:p>
+        </p:txBody>
+      </p:sp>
+      <p:sp>
+        <p:nvSpPr>
+          <p:cNvPr id="198" name="TextBox 197"/>
+          <p:cNvSpPr txBox="1"/>
+          <p:nvPr/>
+        </p:nvSpPr>
+        <p:spPr>
+          <a:xfrm>
+            <a:off x="6665976" y="5193792"/>
             <a:ext cx="1920240" cy="237744"/>
           </a:xfrm>
           <a:prstGeom prst="rect">
@@ -17465,20 +19148,20 @@
               </a:defRPr>
             </a:pPr>
             <a:r>
-              <a:t>Lynda Inderjeet</a:t>
-            </a:r>
-          </a:p>
-        </p:txBody>
-      </p:sp>
-      <p:sp>
-        <p:nvSpPr>
-          <p:cNvPr id="154" name="TextBox 153"/>
-          <p:cNvSpPr txBox="1"/>
-          <p:nvPr/>
-        </p:nvSpPr>
-        <p:spPr>
-          <a:xfrm>
-            <a:off x="8586216" y="2889504"/>
+              <a:t>Elena Tchernogorova</a:t>
+            </a:r>
+          </a:p>
+        </p:txBody>
+      </p:sp>
+      <p:sp>
+        <p:nvSpPr>
+          <p:cNvPr id="199" name="TextBox 198"/>
+          <p:cNvSpPr txBox="1"/>
+          <p:nvPr/>
+        </p:nvSpPr>
+        <p:spPr>
+          <a:xfrm>
+            <a:off x="8586216" y="5193792"/>
             <a:ext cx="2459736" cy="237744"/>
           </a:xfrm>
           <a:prstGeom prst="rect">
@@ -17501,20 +19184,20 @@
               </a:defRPr>
             </a:pPr>
             <a:r>
-              <a:t>R-T Specialty, LLC</a:t>
-            </a:r>
-          </a:p>
-        </p:txBody>
-      </p:sp>
-      <p:sp>
-        <p:nvSpPr>
-          <p:cNvPr id="155" name="TextBox 154"/>
-          <p:cNvSpPr txBox="1"/>
-          <p:nvPr/>
-        </p:nvSpPr>
-        <p:spPr>
-          <a:xfrm>
-            <a:off x="11045952" y="2889504"/>
+              <a:t>First Connect Insurance</a:t>
+            </a:r>
+          </a:p>
+        </p:txBody>
+      </p:sp>
+      <p:sp>
+        <p:nvSpPr>
+          <p:cNvPr id="200" name="TextBox 199"/>
+          <p:cNvSpPr txBox="1"/>
+          <p:nvPr/>
+        </p:nvSpPr>
+        <p:spPr>
+          <a:xfrm>
+            <a:off x="11045952" y="5193792"/>
             <a:ext cx="914400" cy="237744"/>
           </a:xfrm>
           <a:prstGeom prst="rect">
@@ -17537,20 +19220,207 @@
               </a:defRPr>
             </a:pPr>
             <a:r>
-              <a:t>$382K</a:t>
-            </a:r>
-          </a:p>
-        </p:txBody>
-      </p:sp>
-      <p:sp>
-        <p:nvSpPr>
-          <p:cNvPr id="156" name="Rectangle 155"/>
+              <a:t>$331K</a:t>
+            </a:r>
+          </a:p>
+        </p:txBody>
+      </p:sp>
+      <p:sp>
+        <p:nvSpPr>
+          <p:cNvPr id="201" name="Rectangle 200"/>
           <p:cNvSpPr/>
           <p:nvPr/>
         </p:nvSpPr>
         <p:spPr>
           <a:xfrm>
-            <a:off x="6254496" y="3127248"/>
+            <a:off x="6254496" y="5431536"/>
+            <a:ext cx="5705856" cy="256032"/>
+          </a:xfrm>
+          <a:prstGeom prst="rect">
+            <a:avLst/>
+          </a:prstGeom>
+          <a:solidFill>
+            <a:srgbClr val="F9FAFB"/>
+          </a:solidFill>
+          <a:ln>
+            <a:noFill/>
+          </a:ln>
+        </p:spPr>
+        <p:style>
+          <a:lnRef idx="1">
+            <a:schemeClr val="accent1"/>
+          </a:lnRef>
+          <a:fillRef idx="3">
+            <a:schemeClr val="accent1"/>
+          </a:fillRef>
+          <a:effectRef idx="2">
+            <a:schemeClr val="accent1"/>
+          </a:effectRef>
+          <a:fontRef idx="minor">
+            <a:schemeClr val="lt1"/>
+          </a:fontRef>
+        </p:style>
+        <p:txBody>
+          <a:bodyPr rtlCol="0" anchor="ctr"/>
+          <a:lstStyle/>
+          <a:p>
+            <a:pPr algn="ctr"/>
+          </a:p>
+        </p:txBody>
+      </p:sp>
+      <p:sp>
+        <p:nvSpPr>
+          <p:cNvPr id="202" name="TextBox 201"/>
+          <p:cNvSpPr txBox="1"/>
+          <p:nvPr/>
+        </p:nvSpPr>
+        <p:spPr>
+          <a:xfrm>
+            <a:off x="6254496" y="5449824"/>
+            <a:ext cx="411480" cy="237744"/>
+          </a:xfrm>
+          <a:prstGeom prst="rect">
+            <a:avLst/>
+          </a:prstGeom>
+          <a:noFill/>
+        </p:spPr>
+        <p:txBody>
+          <a:bodyPr wrap="none">
+            <a:spAutoFit/>
+          </a:bodyPr>
+          <a:lstStyle/>
+          <a:p>
+            <a:pPr algn="ctr">
+              <a:defRPr sz="950" b="1">
+                <a:solidFill>
+                  <a:srgbClr val="6B7280"/>
+                </a:solidFill>
+                <a:latin typeface="Calibri"/>
+              </a:defRPr>
+            </a:pPr>
+            <a:r>
+              <a:t>38</a:t>
+            </a:r>
+          </a:p>
+        </p:txBody>
+      </p:sp>
+      <p:sp>
+        <p:nvSpPr>
+          <p:cNvPr id="203" name="TextBox 202"/>
+          <p:cNvSpPr txBox="1"/>
+          <p:nvPr/>
+        </p:nvSpPr>
+        <p:spPr>
+          <a:xfrm>
+            <a:off x="6665976" y="5449824"/>
+            <a:ext cx="1920240" cy="237744"/>
+          </a:xfrm>
+          <a:prstGeom prst="rect">
+            <a:avLst/>
+          </a:prstGeom>
+          <a:noFill/>
+        </p:spPr>
+        <p:txBody>
+          <a:bodyPr wrap="none">
+            <a:spAutoFit/>
+          </a:bodyPr>
+          <a:lstStyle/>
+          <a:p>
+            <a:pPr algn="l">
+              <a:defRPr sz="950" b="1">
+                <a:solidFill>
+                  <a:srgbClr val="111827"/>
+                </a:solidFill>
+                <a:latin typeface="Calibri"/>
+              </a:defRPr>
+            </a:pPr>
+            <a:r>
+              <a:t>Nicholas Banks</a:t>
+            </a:r>
+          </a:p>
+        </p:txBody>
+      </p:sp>
+      <p:sp>
+        <p:nvSpPr>
+          <p:cNvPr id="204" name="TextBox 203"/>
+          <p:cNvSpPr txBox="1"/>
+          <p:nvPr/>
+        </p:nvSpPr>
+        <p:spPr>
+          <a:xfrm>
+            <a:off x="8586216" y="5449824"/>
+            <a:ext cx="2459736" cy="237744"/>
+          </a:xfrm>
+          <a:prstGeom prst="rect">
+            <a:avLst/>
+          </a:prstGeom>
+          <a:noFill/>
+        </p:spPr>
+        <p:txBody>
+          <a:bodyPr wrap="none">
+            <a:spAutoFit/>
+          </a:bodyPr>
+          <a:lstStyle/>
+          <a:p>
+            <a:pPr algn="l">
+              <a:defRPr sz="950" b="0">
+                <a:solidFill>
+                  <a:srgbClr val="6B7280"/>
+                </a:solidFill>
+                <a:latin typeface="Calibri"/>
+              </a:defRPr>
+            </a:pPr>
+            <a:r>
+              <a:t>Reliance Partners, LLC</a:t>
+            </a:r>
+          </a:p>
+        </p:txBody>
+      </p:sp>
+      <p:sp>
+        <p:nvSpPr>
+          <p:cNvPr id="205" name="TextBox 204"/>
+          <p:cNvSpPr txBox="1"/>
+          <p:nvPr/>
+        </p:nvSpPr>
+        <p:spPr>
+          <a:xfrm>
+            <a:off x="11045952" y="5449824"/>
+            <a:ext cx="914400" cy="237744"/>
+          </a:xfrm>
+          <a:prstGeom prst="rect">
+            <a:avLst/>
+          </a:prstGeom>
+          <a:noFill/>
+        </p:spPr>
+        <p:txBody>
+          <a:bodyPr wrap="none">
+            <a:spAutoFit/>
+          </a:bodyPr>
+          <a:lstStyle/>
+          <a:p>
+            <a:pPr algn="ctr">
+              <a:defRPr sz="950" b="1">
+                <a:solidFill>
+                  <a:srgbClr val="111827"/>
+                </a:solidFill>
+                <a:latin typeface="Calibri"/>
+              </a:defRPr>
+            </a:pPr>
+            <a:r>
+              <a:t>$330K</a:t>
+            </a:r>
+          </a:p>
+        </p:txBody>
+      </p:sp>
+      <p:sp>
+        <p:nvSpPr>
+          <p:cNvPr id="206" name="Rectangle 205"/>
+          <p:cNvSpPr/>
+          <p:nvPr/>
+        </p:nvSpPr>
+        <p:spPr>
+          <a:xfrm>
+            <a:off x="6254496" y="5687568"/>
             <a:ext cx="5705856" cy="256032"/>
           </a:xfrm>
           <a:prstGeom prst="rect">
@@ -17587,13 +19457,13 @@
       </p:sp>
       <p:sp>
         <p:nvSpPr>
-          <p:cNvPr id="157" name="TextBox 156"/>
-          <p:cNvSpPr txBox="1"/>
-          <p:nvPr/>
-        </p:nvSpPr>
-        <p:spPr>
-          <a:xfrm>
-            <a:off x="6254496" y="3145536"/>
+          <p:cNvPr id="207" name="TextBox 206"/>
+          <p:cNvSpPr txBox="1"/>
+          <p:nvPr/>
+        </p:nvSpPr>
+        <p:spPr>
+          <a:xfrm>
+            <a:off x="6254496" y="5705856"/>
             <a:ext cx="411480" cy="237744"/>
           </a:xfrm>
           <a:prstGeom prst="rect">
@@ -17616,20 +19486,20 @@
               </a:defRPr>
             </a:pPr>
             <a:r>
-              <a:t>29</a:t>
-            </a:r>
-          </a:p>
-        </p:txBody>
-      </p:sp>
-      <p:sp>
-        <p:nvSpPr>
-          <p:cNvPr id="158" name="TextBox 157"/>
-          <p:cNvSpPr txBox="1"/>
-          <p:nvPr/>
-        </p:nvSpPr>
-        <p:spPr>
-          <a:xfrm>
-            <a:off x="6665976" y="3145536"/>
+              <a:t>39</a:t>
+            </a:r>
+          </a:p>
+        </p:txBody>
+      </p:sp>
+      <p:sp>
+        <p:nvSpPr>
+          <p:cNvPr id="208" name="TextBox 207"/>
+          <p:cNvSpPr txBox="1"/>
+          <p:nvPr/>
+        </p:nvSpPr>
+        <p:spPr>
+          <a:xfrm>
+            <a:off x="6665976" y="5705856"/>
             <a:ext cx="1920240" cy="237744"/>
           </a:xfrm>
           <a:prstGeom prst="rect">
@@ -17652,20 +19522,20 @@
               </a:defRPr>
             </a:pPr>
             <a:r>
-              <a:t>Daliborka Savovic</a:t>
-            </a:r>
-          </a:p>
-        </p:txBody>
-      </p:sp>
-      <p:sp>
-        <p:nvSpPr>
-          <p:cNvPr id="159" name="TextBox 158"/>
-          <p:cNvSpPr txBox="1"/>
-          <p:nvPr/>
-        </p:nvSpPr>
-        <p:spPr>
-          <a:xfrm>
-            <a:off x="8586216" y="3145536"/>
+              <a:t>Ibrahim Mammo</a:t>
+            </a:r>
+          </a:p>
+        </p:txBody>
+      </p:sp>
+      <p:sp>
+        <p:nvSpPr>
+          <p:cNvPr id="209" name="TextBox 208"/>
+          <p:cNvSpPr txBox="1"/>
+          <p:nvPr/>
+        </p:nvSpPr>
+        <p:spPr>
+          <a:xfrm>
+            <a:off x="8586216" y="5705856"/>
             <a:ext cx="2459736" cy="237744"/>
           </a:xfrm>
           <a:prstGeom prst="rect">
@@ -17688,20 +19558,20 @@
               </a:defRPr>
             </a:pPr>
             <a:r>
-              <a:t>Alpha Trucking Insurance Agency In…</a:t>
-            </a:r>
-          </a:p>
-        </p:txBody>
-      </p:sp>
-      <p:sp>
-        <p:nvSpPr>
-          <p:cNvPr id="160" name="TextBox 159"/>
-          <p:cNvSpPr txBox="1"/>
-          <p:nvPr/>
-        </p:nvSpPr>
-        <p:spPr>
-          <a:xfrm>
-            <a:off x="11045952" y="3145536"/>
+              <a:t>Surefire Insurance Agency Corp.</a:t>
+            </a:r>
+          </a:p>
+        </p:txBody>
+      </p:sp>
+      <p:sp>
+        <p:nvSpPr>
+          <p:cNvPr id="210" name="TextBox 209"/>
+          <p:cNvSpPr txBox="1"/>
+          <p:nvPr/>
+        </p:nvSpPr>
+        <p:spPr>
+          <a:xfrm>
+            <a:off x="11045952" y="5705856"/>
             <a:ext cx="914400" cy="237744"/>
           </a:xfrm>
           <a:prstGeom prst="rect">
@@ -17724,394 +19594,20 @@
               </a:defRPr>
             </a:pPr>
             <a:r>
-              <a:t>$380K</a:t>
-            </a:r>
-          </a:p>
-        </p:txBody>
-      </p:sp>
-      <p:sp>
-        <p:nvSpPr>
-          <p:cNvPr id="161" name="Rectangle 160"/>
+              <a:t>$323K</a:t>
+            </a:r>
+          </a:p>
+        </p:txBody>
+      </p:sp>
+      <p:sp>
+        <p:nvSpPr>
+          <p:cNvPr id="211" name="Rectangle 210"/>
           <p:cNvSpPr/>
           <p:nvPr/>
         </p:nvSpPr>
         <p:spPr>
           <a:xfrm>
-            <a:off x="6254496" y="3383280"/>
-            <a:ext cx="5705856" cy="256032"/>
-          </a:xfrm>
-          <a:prstGeom prst="rect">
-            <a:avLst/>
-          </a:prstGeom>
-          <a:solidFill>
-            <a:srgbClr val="D1FAE5"/>
-          </a:solidFill>
-          <a:ln>
-            <a:noFill/>
-          </a:ln>
-        </p:spPr>
-        <p:style>
-          <a:lnRef idx="1">
-            <a:schemeClr val="accent1"/>
-          </a:lnRef>
-          <a:fillRef idx="3">
-            <a:schemeClr val="accent1"/>
-          </a:fillRef>
-          <a:effectRef idx="2">
-            <a:schemeClr val="accent1"/>
-          </a:effectRef>
-          <a:fontRef idx="minor">
-            <a:schemeClr val="lt1"/>
-          </a:fontRef>
-        </p:style>
-        <p:txBody>
-          <a:bodyPr rtlCol="0" anchor="ctr"/>
-          <a:lstStyle/>
-          <a:p>
-            <a:pPr algn="ctr"/>
-          </a:p>
-        </p:txBody>
-      </p:sp>
-      <p:sp>
-        <p:nvSpPr>
-          <p:cNvPr id="162" name="TextBox 161"/>
-          <p:cNvSpPr txBox="1"/>
-          <p:nvPr/>
-        </p:nvSpPr>
-        <p:spPr>
-          <a:xfrm>
-            <a:off x="6254496" y="3401568"/>
-            <a:ext cx="411480" cy="237744"/>
-          </a:xfrm>
-          <a:prstGeom prst="rect">
-            <a:avLst/>
-          </a:prstGeom>
-          <a:noFill/>
-        </p:spPr>
-        <p:txBody>
-          <a:bodyPr wrap="none">
-            <a:spAutoFit/>
-          </a:bodyPr>
-          <a:lstStyle/>
-          <a:p>
-            <a:pPr algn="ctr">
-              <a:defRPr sz="950" b="1">
-                <a:solidFill>
-                  <a:srgbClr val="6B7280"/>
-                </a:solidFill>
-                <a:latin typeface="Calibri"/>
-              </a:defRPr>
-            </a:pPr>
-            <a:r>
-              <a:t>30</a:t>
-            </a:r>
-          </a:p>
-        </p:txBody>
-      </p:sp>
-      <p:sp>
-        <p:nvSpPr>
-          <p:cNvPr id="163" name="TextBox 162"/>
-          <p:cNvSpPr txBox="1"/>
-          <p:nvPr/>
-        </p:nvSpPr>
-        <p:spPr>
-          <a:xfrm>
-            <a:off x="6665976" y="3401568"/>
-            <a:ext cx="1920240" cy="237744"/>
-          </a:xfrm>
-          <a:prstGeom prst="rect">
-            <a:avLst/>
-          </a:prstGeom>
-          <a:noFill/>
-        </p:spPr>
-        <p:txBody>
-          <a:bodyPr wrap="none">
-            <a:spAutoFit/>
-          </a:bodyPr>
-          <a:lstStyle/>
-          <a:p>
-            <a:pPr algn="l">
-              <a:defRPr sz="950" b="1">
-                <a:solidFill>
-                  <a:srgbClr val="111827"/>
-                </a:solidFill>
-                <a:latin typeface="Calibri"/>
-              </a:defRPr>
-            </a:pPr>
-            <a:r>
-              <a:t>Inderjit Singh</a:t>
-            </a:r>
-          </a:p>
-        </p:txBody>
-      </p:sp>
-      <p:sp>
-        <p:nvSpPr>
-          <p:cNvPr id="164" name="TextBox 163"/>
-          <p:cNvSpPr txBox="1"/>
-          <p:nvPr/>
-        </p:nvSpPr>
-        <p:spPr>
-          <a:xfrm>
-            <a:off x="8586216" y="3401568"/>
-            <a:ext cx="2459736" cy="237744"/>
-          </a:xfrm>
-          <a:prstGeom prst="rect">
-            <a:avLst/>
-          </a:prstGeom>
-          <a:noFill/>
-        </p:spPr>
-        <p:txBody>
-          <a:bodyPr wrap="none">
-            <a:spAutoFit/>
-          </a:bodyPr>
-          <a:lstStyle/>
-          <a:p>
-            <a:pPr algn="l">
-              <a:defRPr sz="950" b="0">
-                <a:solidFill>
-                  <a:srgbClr val="6B7280"/>
-                </a:solidFill>
-                <a:latin typeface="Calibri"/>
-              </a:defRPr>
-            </a:pPr>
-            <a:r>
-              <a:t>American Insurance Agency LLC</a:t>
-            </a:r>
-          </a:p>
-        </p:txBody>
-      </p:sp>
-      <p:sp>
-        <p:nvSpPr>
-          <p:cNvPr id="165" name="TextBox 164"/>
-          <p:cNvSpPr txBox="1"/>
-          <p:nvPr/>
-        </p:nvSpPr>
-        <p:spPr>
-          <a:xfrm>
-            <a:off x="11045952" y="3401568"/>
-            <a:ext cx="914400" cy="237744"/>
-          </a:xfrm>
-          <a:prstGeom prst="rect">
-            <a:avLst/>
-          </a:prstGeom>
-          <a:noFill/>
-        </p:spPr>
-        <p:txBody>
-          <a:bodyPr wrap="none">
-            <a:spAutoFit/>
-          </a:bodyPr>
-          <a:lstStyle/>
-          <a:p>
-            <a:pPr algn="ctr">
-              <a:defRPr sz="950" b="1">
-                <a:solidFill>
-                  <a:srgbClr val="111827"/>
-                </a:solidFill>
-                <a:latin typeface="Calibri"/>
-              </a:defRPr>
-            </a:pPr>
-            <a:r>
-              <a:t>$372K</a:t>
-            </a:r>
-          </a:p>
-        </p:txBody>
-      </p:sp>
-      <p:sp>
-        <p:nvSpPr>
-          <p:cNvPr id="166" name="Rectangle 165"/>
-          <p:cNvSpPr/>
-          <p:nvPr/>
-        </p:nvSpPr>
-        <p:spPr>
-          <a:xfrm>
-            <a:off x="6254496" y="3639312"/>
-            <a:ext cx="5705856" cy="256032"/>
-          </a:xfrm>
-          <a:prstGeom prst="rect">
-            <a:avLst/>
-          </a:prstGeom>
-          <a:solidFill>
-            <a:srgbClr val="FFFFFF"/>
-          </a:solidFill>
-          <a:ln>
-            <a:noFill/>
-          </a:ln>
-        </p:spPr>
-        <p:style>
-          <a:lnRef idx="1">
-            <a:schemeClr val="accent1"/>
-          </a:lnRef>
-          <a:fillRef idx="3">
-            <a:schemeClr val="accent1"/>
-          </a:fillRef>
-          <a:effectRef idx="2">
-            <a:schemeClr val="accent1"/>
-          </a:effectRef>
-          <a:fontRef idx="minor">
-            <a:schemeClr val="lt1"/>
-          </a:fontRef>
-        </p:style>
-        <p:txBody>
-          <a:bodyPr rtlCol="0" anchor="ctr"/>
-          <a:lstStyle/>
-          <a:p>
-            <a:pPr algn="ctr"/>
-          </a:p>
-        </p:txBody>
-      </p:sp>
-      <p:sp>
-        <p:nvSpPr>
-          <p:cNvPr id="167" name="TextBox 166"/>
-          <p:cNvSpPr txBox="1"/>
-          <p:nvPr/>
-        </p:nvSpPr>
-        <p:spPr>
-          <a:xfrm>
-            <a:off x="6254496" y="3657600"/>
-            <a:ext cx="411480" cy="237744"/>
-          </a:xfrm>
-          <a:prstGeom prst="rect">
-            <a:avLst/>
-          </a:prstGeom>
-          <a:noFill/>
-        </p:spPr>
-        <p:txBody>
-          <a:bodyPr wrap="none">
-            <a:spAutoFit/>
-          </a:bodyPr>
-          <a:lstStyle/>
-          <a:p>
-            <a:pPr algn="ctr">
-              <a:defRPr sz="950" b="1">
-                <a:solidFill>
-                  <a:srgbClr val="6B7280"/>
-                </a:solidFill>
-                <a:latin typeface="Calibri"/>
-              </a:defRPr>
-            </a:pPr>
-            <a:r>
-              <a:t>31</a:t>
-            </a:r>
-          </a:p>
-        </p:txBody>
-      </p:sp>
-      <p:sp>
-        <p:nvSpPr>
-          <p:cNvPr id="168" name="TextBox 167"/>
-          <p:cNvSpPr txBox="1"/>
-          <p:nvPr/>
-        </p:nvSpPr>
-        <p:spPr>
-          <a:xfrm>
-            <a:off x="6665976" y="3657600"/>
-            <a:ext cx="1920240" cy="237744"/>
-          </a:xfrm>
-          <a:prstGeom prst="rect">
-            <a:avLst/>
-          </a:prstGeom>
-          <a:noFill/>
-        </p:spPr>
-        <p:txBody>
-          <a:bodyPr wrap="none">
-            <a:spAutoFit/>
-          </a:bodyPr>
-          <a:lstStyle/>
-          <a:p>
-            <a:pPr algn="l">
-              <a:defRPr sz="950" b="1">
-                <a:solidFill>
-                  <a:srgbClr val="111827"/>
-                </a:solidFill>
-                <a:latin typeface="Calibri"/>
-              </a:defRPr>
-            </a:pPr>
-            <a:r>
-              <a:t>Michael Su</a:t>
-            </a:r>
-          </a:p>
-        </p:txBody>
-      </p:sp>
-      <p:sp>
-        <p:nvSpPr>
-          <p:cNvPr id="169" name="TextBox 168"/>
-          <p:cNvSpPr txBox="1"/>
-          <p:nvPr/>
-        </p:nvSpPr>
-        <p:spPr>
-          <a:xfrm>
-            <a:off x="8586216" y="3657600"/>
-            <a:ext cx="2459736" cy="237744"/>
-          </a:xfrm>
-          <a:prstGeom prst="rect">
-            <a:avLst/>
-          </a:prstGeom>
-          <a:noFill/>
-        </p:spPr>
-        <p:txBody>
-          <a:bodyPr wrap="none">
-            <a:spAutoFit/>
-          </a:bodyPr>
-          <a:lstStyle/>
-          <a:p>
-            <a:pPr algn="l">
-              <a:defRPr sz="950" b="0">
-                <a:solidFill>
-                  <a:srgbClr val="6B7280"/>
-                </a:solidFill>
-                <a:latin typeface="Calibri"/>
-              </a:defRPr>
-            </a:pPr>
-            <a:r>
-              <a:t>Jtc Insurance Agency, Inc.</a:t>
-            </a:r>
-          </a:p>
-        </p:txBody>
-      </p:sp>
-      <p:sp>
-        <p:nvSpPr>
-          <p:cNvPr id="170" name="TextBox 169"/>
-          <p:cNvSpPr txBox="1"/>
-          <p:nvPr/>
-        </p:nvSpPr>
-        <p:spPr>
-          <a:xfrm>
-            <a:off x="11045952" y="3657600"/>
-            <a:ext cx="914400" cy="237744"/>
-          </a:xfrm>
-          <a:prstGeom prst="rect">
-            <a:avLst/>
-          </a:prstGeom>
-          <a:noFill/>
-        </p:spPr>
-        <p:txBody>
-          <a:bodyPr wrap="none">
-            <a:spAutoFit/>
-          </a:bodyPr>
-          <a:lstStyle/>
-          <a:p>
-            <a:pPr algn="ctr">
-              <a:defRPr sz="950" b="1">
-                <a:solidFill>
-                  <a:srgbClr val="111827"/>
-                </a:solidFill>
-                <a:latin typeface="Calibri"/>
-              </a:defRPr>
-            </a:pPr>
-            <a:r>
-              <a:t>$367K</a:t>
-            </a:r>
-          </a:p>
-        </p:txBody>
-      </p:sp>
-      <p:sp>
-        <p:nvSpPr>
-          <p:cNvPr id="171" name="Rectangle 170"/>
-          <p:cNvSpPr/>
-          <p:nvPr/>
-        </p:nvSpPr>
-        <p:spPr>
-          <a:xfrm>
-            <a:off x="6254496" y="3895344"/>
+            <a:off x="6254496" y="5943600"/>
             <a:ext cx="5705856" cy="256032"/>
           </a:xfrm>
           <a:prstGeom prst="rect">
@@ -18148,13 +19644,13 @@
       </p:sp>
       <p:sp>
         <p:nvSpPr>
-          <p:cNvPr id="172" name="TextBox 171"/>
-          <p:cNvSpPr txBox="1"/>
-          <p:nvPr/>
-        </p:nvSpPr>
-        <p:spPr>
-          <a:xfrm>
-            <a:off x="6254496" y="3913632"/>
+          <p:cNvPr id="212" name="TextBox 211"/>
+          <p:cNvSpPr txBox="1"/>
+          <p:nvPr/>
+        </p:nvSpPr>
+        <p:spPr>
+          <a:xfrm>
+            <a:off x="6254496" y="5961888"/>
             <a:ext cx="411480" cy="237744"/>
           </a:xfrm>
           <a:prstGeom prst="rect">
@@ -18177,20 +19673,20 @@
               </a:defRPr>
             </a:pPr>
             <a:r>
-              <a:t>32</a:t>
-            </a:r>
-          </a:p>
-        </p:txBody>
-      </p:sp>
-      <p:sp>
-        <p:nvSpPr>
-          <p:cNvPr id="173" name="TextBox 172"/>
-          <p:cNvSpPr txBox="1"/>
-          <p:nvPr/>
-        </p:nvSpPr>
-        <p:spPr>
-          <a:xfrm>
-            <a:off x="6665976" y="3913632"/>
+              <a:t>40</a:t>
+            </a:r>
+          </a:p>
+        </p:txBody>
+      </p:sp>
+      <p:sp>
+        <p:nvSpPr>
+          <p:cNvPr id="213" name="TextBox 212"/>
+          <p:cNvSpPr txBox="1"/>
+          <p:nvPr/>
+        </p:nvSpPr>
+        <p:spPr>
+          <a:xfrm>
+            <a:off x="6665976" y="5961888"/>
             <a:ext cx="1920240" cy="237744"/>
           </a:xfrm>
           <a:prstGeom prst="rect">
@@ -18213,20 +19709,20 @@
               </a:defRPr>
             </a:pPr>
             <a:r>
-              <a:t>Patricia Galindoparedes</a:t>
-            </a:r>
-          </a:p>
-        </p:txBody>
-      </p:sp>
-      <p:sp>
-        <p:nvSpPr>
-          <p:cNvPr id="174" name="TextBox 173"/>
-          <p:cNvSpPr txBox="1"/>
-          <p:nvPr/>
-        </p:nvSpPr>
-        <p:spPr>
-          <a:xfrm>
-            <a:off x="8586216" y="3913632"/>
+              <a:t>Venizelos Papadopulos</a:t>
+            </a:r>
+          </a:p>
+        </p:txBody>
+      </p:sp>
+      <p:sp>
+        <p:nvSpPr>
+          <p:cNvPr id="214" name="TextBox 213"/>
+          <p:cNvSpPr txBox="1"/>
+          <p:nvPr/>
+        </p:nvSpPr>
+        <p:spPr>
+          <a:xfrm>
+            <a:off x="8586216" y="5961888"/>
             <a:ext cx="2459736" cy="237744"/>
           </a:xfrm>
           <a:prstGeom prst="rect">
@@ -18249,1503 +19745,7 @@
               </a:defRPr>
             </a:pPr>
             <a:r>
-              <a:t>Call Patty Insurance Services</a:t>
-            </a:r>
-          </a:p>
-        </p:txBody>
-      </p:sp>
-      <p:sp>
-        <p:nvSpPr>
-          <p:cNvPr id="175" name="TextBox 174"/>
-          <p:cNvSpPr txBox="1"/>
-          <p:nvPr/>
-        </p:nvSpPr>
-        <p:spPr>
-          <a:xfrm>
-            <a:off x="11045952" y="3913632"/>
-            <a:ext cx="914400" cy="237744"/>
-          </a:xfrm>
-          <a:prstGeom prst="rect">
-            <a:avLst/>
-          </a:prstGeom>
-          <a:noFill/>
-        </p:spPr>
-        <p:txBody>
-          <a:bodyPr wrap="none">
-            <a:spAutoFit/>
-          </a:bodyPr>
-          <a:lstStyle/>
-          <a:p>
-            <a:pPr algn="ctr">
-              <a:defRPr sz="950" b="1">
-                <a:solidFill>
-                  <a:srgbClr val="111827"/>
-                </a:solidFill>
-                <a:latin typeface="Calibri"/>
-              </a:defRPr>
-            </a:pPr>
-            <a:r>
-              <a:t>$364K</a:t>
-            </a:r>
-          </a:p>
-        </p:txBody>
-      </p:sp>
-      <p:sp>
-        <p:nvSpPr>
-          <p:cNvPr id="176" name="Rectangle 175"/>
-          <p:cNvSpPr/>
-          <p:nvPr/>
-        </p:nvSpPr>
-        <p:spPr>
-          <a:xfrm>
-            <a:off x="6254496" y="4151376"/>
-            <a:ext cx="5705856" cy="256032"/>
-          </a:xfrm>
-          <a:prstGeom prst="rect">
-            <a:avLst/>
-          </a:prstGeom>
-          <a:solidFill>
-            <a:srgbClr val="D1FAE5"/>
-          </a:solidFill>
-          <a:ln>
-            <a:noFill/>
-          </a:ln>
-        </p:spPr>
-        <p:style>
-          <a:lnRef idx="1">
-            <a:schemeClr val="accent1"/>
-          </a:lnRef>
-          <a:fillRef idx="3">
-            <a:schemeClr val="accent1"/>
-          </a:fillRef>
-          <a:effectRef idx="2">
-            <a:schemeClr val="accent1"/>
-          </a:effectRef>
-          <a:fontRef idx="minor">
-            <a:schemeClr val="lt1"/>
-          </a:fontRef>
-        </p:style>
-        <p:txBody>
-          <a:bodyPr rtlCol="0" anchor="ctr"/>
-          <a:lstStyle/>
-          <a:p>
-            <a:pPr algn="ctr"/>
-          </a:p>
-        </p:txBody>
-      </p:sp>
-      <p:sp>
-        <p:nvSpPr>
-          <p:cNvPr id="177" name="TextBox 176"/>
-          <p:cNvSpPr txBox="1"/>
-          <p:nvPr/>
-        </p:nvSpPr>
-        <p:spPr>
-          <a:xfrm>
-            <a:off x="6254496" y="4169664"/>
-            <a:ext cx="411480" cy="237744"/>
-          </a:xfrm>
-          <a:prstGeom prst="rect">
-            <a:avLst/>
-          </a:prstGeom>
-          <a:noFill/>
-        </p:spPr>
-        <p:txBody>
-          <a:bodyPr wrap="none">
-            <a:spAutoFit/>
-          </a:bodyPr>
-          <a:lstStyle/>
-          <a:p>
-            <a:pPr algn="ctr">
-              <a:defRPr sz="950" b="1">
-                <a:solidFill>
-                  <a:srgbClr val="6B7280"/>
-                </a:solidFill>
-                <a:latin typeface="Calibri"/>
-              </a:defRPr>
-            </a:pPr>
-            <a:r>
-              <a:t>33</a:t>
-            </a:r>
-          </a:p>
-        </p:txBody>
-      </p:sp>
-      <p:sp>
-        <p:nvSpPr>
-          <p:cNvPr id="178" name="TextBox 177"/>
-          <p:cNvSpPr txBox="1"/>
-          <p:nvPr/>
-        </p:nvSpPr>
-        <p:spPr>
-          <a:xfrm>
-            <a:off x="6665976" y="4169664"/>
-            <a:ext cx="1920240" cy="237744"/>
-          </a:xfrm>
-          <a:prstGeom prst="rect">
-            <a:avLst/>
-          </a:prstGeom>
-          <a:noFill/>
-        </p:spPr>
-        <p:txBody>
-          <a:bodyPr wrap="none">
-            <a:spAutoFit/>
-          </a:bodyPr>
-          <a:lstStyle/>
-          <a:p>
-            <a:pPr algn="l">
-              <a:defRPr sz="950" b="1">
-                <a:solidFill>
-                  <a:srgbClr val="111827"/>
-                </a:solidFill>
-                <a:latin typeface="Calibri"/>
-              </a:defRPr>
-            </a:pPr>
-            <a:r>
-              <a:t>Kurtis Gautz</a:t>
-            </a:r>
-          </a:p>
-        </p:txBody>
-      </p:sp>
-      <p:sp>
-        <p:nvSpPr>
-          <p:cNvPr id="179" name="TextBox 178"/>
-          <p:cNvSpPr txBox="1"/>
-          <p:nvPr/>
-        </p:nvSpPr>
-        <p:spPr>
-          <a:xfrm>
-            <a:off x="8586216" y="4169664"/>
-            <a:ext cx="2459736" cy="237744"/>
-          </a:xfrm>
-          <a:prstGeom prst="rect">
-            <a:avLst/>
-          </a:prstGeom>
-          <a:noFill/>
-        </p:spPr>
-        <p:txBody>
-          <a:bodyPr wrap="none">
-            <a:spAutoFit/>
-          </a:bodyPr>
-          <a:lstStyle/>
-          <a:p>
-            <a:pPr algn="l">
-              <a:defRPr sz="950" b="0">
-                <a:solidFill>
-                  <a:srgbClr val="6B7280"/>
-                </a:solidFill>
-                <a:latin typeface="Calibri"/>
-              </a:defRPr>
-            </a:pPr>
-            <a:r>
-              <a:t>CRC Insurance Services, Inc</a:t>
-            </a:r>
-          </a:p>
-        </p:txBody>
-      </p:sp>
-      <p:sp>
-        <p:nvSpPr>
-          <p:cNvPr id="180" name="TextBox 179"/>
-          <p:cNvSpPr txBox="1"/>
-          <p:nvPr/>
-        </p:nvSpPr>
-        <p:spPr>
-          <a:xfrm>
-            <a:off x="11045952" y="4169664"/>
-            <a:ext cx="914400" cy="237744"/>
-          </a:xfrm>
-          <a:prstGeom prst="rect">
-            <a:avLst/>
-          </a:prstGeom>
-          <a:noFill/>
-        </p:spPr>
-        <p:txBody>
-          <a:bodyPr wrap="none">
-            <a:spAutoFit/>
-          </a:bodyPr>
-          <a:lstStyle/>
-          <a:p>
-            <a:pPr algn="ctr">
-              <a:defRPr sz="950" b="1">
-                <a:solidFill>
-                  <a:srgbClr val="111827"/>
-                </a:solidFill>
-                <a:latin typeface="Calibri"/>
-              </a:defRPr>
-            </a:pPr>
-            <a:r>
-              <a:t>$355K</a:t>
-            </a:r>
-          </a:p>
-        </p:txBody>
-      </p:sp>
-      <p:sp>
-        <p:nvSpPr>
-          <p:cNvPr id="181" name="Rectangle 180"/>
-          <p:cNvSpPr/>
-          <p:nvPr/>
-        </p:nvSpPr>
-        <p:spPr>
-          <a:xfrm>
-            <a:off x="6254496" y="4407408"/>
-            <a:ext cx="5705856" cy="256032"/>
-          </a:xfrm>
-          <a:prstGeom prst="rect">
-            <a:avLst/>
-          </a:prstGeom>
-          <a:solidFill>
-            <a:srgbClr val="F9FAFB"/>
-          </a:solidFill>
-          <a:ln>
-            <a:noFill/>
-          </a:ln>
-        </p:spPr>
-        <p:style>
-          <a:lnRef idx="1">
-            <a:schemeClr val="accent1"/>
-          </a:lnRef>
-          <a:fillRef idx="3">
-            <a:schemeClr val="accent1"/>
-          </a:fillRef>
-          <a:effectRef idx="2">
-            <a:schemeClr val="accent1"/>
-          </a:effectRef>
-          <a:fontRef idx="minor">
-            <a:schemeClr val="lt1"/>
-          </a:fontRef>
-        </p:style>
-        <p:txBody>
-          <a:bodyPr rtlCol="0" anchor="ctr"/>
-          <a:lstStyle/>
-          <a:p>
-            <a:pPr algn="ctr"/>
-          </a:p>
-        </p:txBody>
-      </p:sp>
-      <p:sp>
-        <p:nvSpPr>
-          <p:cNvPr id="182" name="TextBox 181"/>
-          <p:cNvSpPr txBox="1"/>
-          <p:nvPr/>
-        </p:nvSpPr>
-        <p:spPr>
-          <a:xfrm>
-            <a:off x="6254496" y="4425696"/>
-            <a:ext cx="411480" cy="237744"/>
-          </a:xfrm>
-          <a:prstGeom prst="rect">
-            <a:avLst/>
-          </a:prstGeom>
-          <a:noFill/>
-        </p:spPr>
-        <p:txBody>
-          <a:bodyPr wrap="none">
-            <a:spAutoFit/>
-          </a:bodyPr>
-          <a:lstStyle/>
-          <a:p>
-            <a:pPr algn="ctr">
-              <a:defRPr sz="950" b="1">
-                <a:solidFill>
-                  <a:srgbClr val="6B7280"/>
-                </a:solidFill>
-                <a:latin typeface="Calibri"/>
-              </a:defRPr>
-            </a:pPr>
-            <a:r>
-              <a:t>34</a:t>
-            </a:r>
-          </a:p>
-        </p:txBody>
-      </p:sp>
-      <p:sp>
-        <p:nvSpPr>
-          <p:cNvPr id="183" name="TextBox 182"/>
-          <p:cNvSpPr txBox="1"/>
-          <p:nvPr/>
-        </p:nvSpPr>
-        <p:spPr>
-          <a:xfrm>
-            <a:off x="6665976" y="4425696"/>
-            <a:ext cx="1920240" cy="237744"/>
-          </a:xfrm>
-          <a:prstGeom prst="rect">
-            <a:avLst/>
-          </a:prstGeom>
-          <a:noFill/>
-        </p:spPr>
-        <p:txBody>
-          <a:bodyPr wrap="none">
-            <a:spAutoFit/>
-          </a:bodyPr>
-          <a:lstStyle/>
-          <a:p>
-            <a:pPr algn="l">
-              <a:defRPr sz="950" b="1">
-                <a:solidFill>
-                  <a:srgbClr val="111827"/>
-                </a:solidFill>
-                <a:latin typeface="Calibri"/>
-              </a:defRPr>
-            </a:pPr>
-            <a:r>
-              <a:t>Vladimir Tesler</a:t>
-            </a:r>
-          </a:p>
-        </p:txBody>
-      </p:sp>
-      <p:sp>
-        <p:nvSpPr>
-          <p:cNvPr id="184" name="TextBox 183"/>
-          <p:cNvSpPr txBox="1"/>
-          <p:nvPr/>
-        </p:nvSpPr>
-        <p:spPr>
-          <a:xfrm>
-            <a:off x="8586216" y="4425696"/>
-            <a:ext cx="2459736" cy="237744"/>
-          </a:xfrm>
-          <a:prstGeom prst="rect">
-            <a:avLst/>
-          </a:prstGeom>
-          <a:noFill/>
-        </p:spPr>
-        <p:txBody>
-          <a:bodyPr wrap="none">
-            <a:spAutoFit/>
-          </a:bodyPr>
-          <a:lstStyle/>
-          <a:p>
-            <a:pPr algn="l">
-              <a:defRPr sz="950" b="0">
-                <a:solidFill>
-                  <a:srgbClr val="6B7280"/>
-                </a:solidFill>
-                <a:latin typeface="Calibri"/>
-              </a:defRPr>
-            </a:pPr>
-            <a:r>
-              <a:t>Insurance Planet</a:t>
-            </a:r>
-          </a:p>
-        </p:txBody>
-      </p:sp>
-      <p:sp>
-        <p:nvSpPr>
-          <p:cNvPr id="185" name="TextBox 184"/>
-          <p:cNvSpPr txBox="1"/>
-          <p:nvPr/>
-        </p:nvSpPr>
-        <p:spPr>
-          <a:xfrm>
-            <a:off x="11045952" y="4425696"/>
-            <a:ext cx="914400" cy="237744"/>
-          </a:xfrm>
-          <a:prstGeom prst="rect">
-            <a:avLst/>
-          </a:prstGeom>
-          <a:noFill/>
-        </p:spPr>
-        <p:txBody>
-          <a:bodyPr wrap="none">
-            <a:spAutoFit/>
-          </a:bodyPr>
-          <a:lstStyle/>
-          <a:p>
-            <a:pPr algn="ctr">
-              <a:defRPr sz="950" b="1">
-                <a:solidFill>
-                  <a:srgbClr val="111827"/>
-                </a:solidFill>
-                <a:latin typeface="Calibri"/>
-              </a:defRPr>
-            </a:pPr>
-            <a:r>
-              <a:t>$342K</a:t>
-            </a:r>
-          </a:p>
-        </p:txBody>
-      </p:sp>
-      <p:sp>
-        <p:nvSpPr>
-          <p:cNvPr id="186" name="Rectangle 185"/>
-          <p:cNvSpPr/>
-          <p:nvPr/>
-        </p:nvSpPr>
-        <p:spPr>
-          <a:xfrm>
-            <a:off x="6254496" y="4663440"/>
-            <a:ext cx="5705856" cy="256032"/>
-          </a:xfrm>
-          <a:prstGeom prst="rect">
-            <a:avLst/>
-          </a:prstGeom>
-          <a:solidFill>
-            <a:srgbClr val="FFFFFF"/>
-          </a:solidFill>
-          <a:ln>
-            <a:noFill/>
-          </a:ln>
-        </p:spPr>
-        <p:style>
-          <a:lnRef idx="1">
-            <a:schemeClr val="accent1"/>
-          </a:lnRef>
-          <a:fillRef idx="3">
-            <a:schemeClr val="accent1"/>
-          </a:fillRef>
-          <a:effectRef idx="2">
-            <a:schemeClr val="accent1"/>
-          </a:effectRef>
-          <a:fontRef idx="minor">
-            <a:schemeClr val="lt1"/>
-          </a:fontRef>
-        </p:style>
-        <p:txBody>
-          <a:bodyPr rtlCol="0" anchor="ctr"/>
-          <a:lstStyle/>
-          <a:p>
-            <a:pPr algn="ctr"/>
-          </a:p>
-        </p:txBody>
-      </p:sp>
-      <p:sp>
-        <p:nvSpPr>
-          <p:cNvPr id="187" name="TextBox 186"/>
-          <p:cNvSpPr txBox="1"/>
-          <p:nvPr/>
-        </p:nvSpPr>
-        <p:spPr>
-          <a:xfrm>
-            <a:off x="6254496" y="4681728"/>
-            <a:ext cx="411480" cy="237744"/>
-          </a:xfrm>
-          <a:prstGeom prst="rect">
-            <a:avLst/>
-          </a:prstGeom>
-          <a:noFill/>
-        </p:spPr>
-        <p:txBody>
-          <a:bodyPr wrap="none">
-            <a:spAutoFit/>
-          </a:bodyPr>
-          <a:lstStyle/>
-          <a:p>
-            <a:pPr algn="ctr">
-              <a:defRPr sz="950" b="1">
-                <a:solidFill>
-                  <a:srgbClr val="6B7280"/>
-                </a:solidFill>
-                <a:latin typeface="Calibri"/>
-              </a:defRPr>
-            </a:pPr>
-            <a:r>
-              <a:t>35</a:t>
-            </a:r>
-          </a:p>
-        </p:txBody>
-      </p:sp>
-      <p:sp>
-        <p:nvSpPr>
-          <p:cNvPr id="188" name="TextBox 187"/>
-          <p:cNvSpPr txBox="1"/>
-          <p:nvPr/>
-        </p:nvSpPr>
-        <p:spPr>
-          <a:xfrm>
-            <a:off x="6665976" y="4681728"/>
-            <a:ext cx="1920240" cy="237744"/>
-          </a:xfrm>
-          <a:prstGeom prst="rect">
-            <a:avLst/>
-          </a:prstGeom>
-          <a:noFill/>
-        </p:spPr>
-        <p:txBody>
-          <a:bodyPr wrap="none">
-            <a:spAutoFit/>
-          </a:bodyPr>
-          <a:lstStyle/>
-          <a:p>
-            <a:pPr algn="l">
-              <a:defRPr sz="950" b="1">
-                <a:solidFill>
-                  <a:srgbClr val="111827"/>
-                </a:solidFill>
-                <a:latin typeface="Calibri"/>
-              </a:defRPr>
-            </a:pPr>
-            <a:r>
-              <a:t>Damandeep Singh</a:t>
-            </a:r>
-          </a:p>
-        </p:txBody>
-      </p:sp>
-      <p:sp>
-        <p:nvSpPr>
-          <p:cNvPr id="189" name="TextBox 188"/>
-          <p:cNvSpPr txBox="1"/>
-          <p:nvPr/>
-        </p:nvSpPr>
-        <p:spPr>
-          <a:xfrm>
-            <a:off x="8586216" y="4681728"/>
-            <a:ext cx="2459736" cy="237744"/>
-          </a:xfrm>
-          <a:prstGeom prst="rect">
-            <a:avLst/>
-          </a:prstGeom>
-          <a:noFill/>
-        </p:spPr>
-        <p:txBody>
-          <a:bodyPr wrap="none">
-            <a:spAutoFit/>
-          </a:bodyPr>
-          <a:lstStyle/>
-          <a:p>
-            <a:pPr algn="l">
-              <a:defRPr sz="950" b="0">
-                <a:solidFill>
-                  <a:srgbClr val="6B7280"/>
-                </a:solidFill>
-                <a:latin typeface="Calibri"/>
-              </a:defRPr>
-            </a:pPr>
-            <a:r>
-              <a:t>Mayflower Insurance Services</a:t>
-            </a:r>
-          </a:p>
-        </p:txBody>
-      </p:sp>
-      <p:sp>
-        <p:nvSpPr>
-          <p:cNvPr id="190" name="TextBox 189"/>
-          <p:cNvSpPr txBox="1"/>
-          <p:nvPr/>
-        </p:nvSpPr>
-        <p:spPr>
-          <a:xfrm>
-            <a:off x="11045952" y="4681728"/>
-            <a:ext cx="914400" cy="237744"/>
-          </a:xfrm>
-          <a:prstGeom prst="rect">
-            <a:avLst/>
-          </a:prstGeom>
-          <a:noFill/>
-        </p:spPr>
-        <p:txBody>
-          <a:bodyPr wrap="none">
-            <a:spAutoFit/>
-          </a:bodyPr>
-          <a:lstStyle/>
-          <a:p>
-            <a:pPr algn="ctr">
-              <a:defRPr sz="950" b="1">
-                <a:solidFill>
-                  <a:srgbClr val="111827"/>
-                </a:solidFill>
-                <a:latin typeface="Calibri"/>
-              </a:defRPr>
-            </a:pPr>
-            <a:r>
-              <a:t>$341K</a:t>
-            </a:r>
-          </a:p>
-        </p:txBody>
-      </p:sp>
-      <p:sp>
-        <p:nvSpPr>
-          <p:cNvPr id="191" name="Rectangle 190"/>
-          <p:cNvSpPr/>
-          <p:nvPr/>
-        </p:nvSpPr>
-        <p:spPr>
-          <a:xfrm>
-            <a:off x="6254496" y="4919472"/>
-            <a:ext cx="5705856" cy="256032"/>
-          </a:xfrm>
-          <a:prstGeom prst="rect">
-            <a:avLst/>
-          </a:prstGeom>
-          <a:solidFill>
-            <a:srgbClr val="F9FAFB"/>
-          </a:solidFill>
-          <a:ln>
-            <a:noFill/>
-          </a:ln>
-        </p:spPr>
-        <p:style>
-          <a:lnRef idx="1">
-            <a:schemeClr val="accent1"/>
-          </a:lnRef>
-          <a:fillRef idx="3">
-            <a:schemeClr val="accent1"/>
-          </a:fillRef>
-          <a:effectRef idx="2">
-            <a:schemeClr val="accent1"/>
-          </a:effectRef>
-          <a:fontRef idx="minor">
-            <a:schemeClr val="lt1"/>
-          </a:fontRef>
-        </p:style>
-        <p:txBody>
-          <a:bodyPr rtlCol="0" anchor="ctr"/>
-          <a:lstStyle/>
-          <a:p>
-            <a:pPr algn="ctr"/>
-          </a:p>
-        </p:txBody>
-      </p:sp>
-      <p:sp>
-        <p:nvSpPr>
-          <p:cNvPr id="192" name="TextBox 191"/>
-          <p:cNvSpPr txBox="1"/>
-          <p:nvPr/>
-        </p:nvSpPr>
-        <p:spPr>
-          <a:xfrm>
-            <a:off x="6254496" y="4937760"/>
-            <a:ext cx="411480" cy="237744"/>
-          </a:xfrm>
-          <a:prstGeom prst="rect">
-            <a:avLst/>
-          </a:prstGeom>
-          <a:noFill/>
-        </p:spPr>
-        <p:txBody>
-          <a:bodyPr wrap="none">
-            <a:spAutoFit/>
-          </a:bodyPr>
-          <a:lstStyle/>
-          <a:p>
-            <a:pPr algn="ctr">
-              <a:defRPr sz="950" b="1">
-                <a:solidFill>
-                  <a:srgbClr val="6B7280"/>
-                </a:solidFill>
-                <a:latin typeface="Calibri"/>
-              </a:defRPr>
-            </a:pPr>
-            <a:r>
-              <a:t>36</a:t>
-            </a:r>
-          </a:p>
-        </p:txBody>
-      </p:sp>
-      <p:sp>
-        <p:nvSpPr>
-          <p:cNvPr id="193" name="TextBox 192"/>
-          <p:cNvSpPr txBox="1"/>
-          <p:nvPr/>
-        </p:nvSpPr>
-        <p:spPr>
-          <a:xfrm>
-            <a:off x="6665976" y="4937760"/>
-            <a:ext cx="1920240" cy="237744"/>
-          </a:xfrm>
-          <a:prstGeom prst="rect">
-            <a:avLst/>
-          </a:prstGeom>
-          <a:noFill/>
-        </p:spPr>
-        <p:txBody>
-          <a:bodyPr wrap="none">
-            <a:spAutoFit/>
-          </a:bodyPr>
-          <a:lstStyle/>
-          <a:p>
-            <a:pPr algn="l">
-              <a:defRPr sz="950" b="1">
-                <a:solidFill>
-                  <a:srgbClr val="111827"/>
-                </a:solidFill>
-                <a:latin typeface="Calibri"/>
-              </a:defRPr>
-            </a:pPr>
-            <a:r>
-              <a:t>Omar Elmanzalawy</a:t>
-            </a:r>
-          </a:p>
-        </p:txBody>
-      </p:sp>
-      <p:sp>
-        <p:nvSpPr>
-          <p:cNvPr id="194" name="TextBox 193"/>
-          <p:cNvSpPr txBox="1"/>
-          <p:nvPr/>
-        </p:nvSpPr>
-        <p:spPr>
-          <a:xfrm>
-            <a:off x="8586216" y="4937760"/>
-            <a:ext cx="2459736" cy="237744"/>
-          </a:xfrm>
-          <a:prstGeom prst="rect">
-            <a:avLst/>
-          </a:prstGeom>
-          <a:noFill/>
-        </p:spPr>
-        <p:txBody>
-          <a:bodyPr wrap="none">
-            <a:spAutoFit/>
-          </a:bodyPr>
-          <a:lstStyle/>
-          <a:p>
-            <a:pPr algn="l">
-              <a:defRPr sz="950" b="0">
-                <a:solidFill>
-                  <a:srgbClr val="6B7280"/>
-                </a:solidFill>
-                <a:latin typeface="Calibri"/>
-              </a:defRPr>
-            </a:pPr>
-            <a:r>
-              <a:t>First Connect Insurance</a:t>
-            </a:r>
-          </a:p>
-        </p:txBody>
-      </p:sp>
-      <p:sp>
-        <p:nvSpPr>
-          <p:cNvPr id="195" name="TextBox 194"/>
-          <p:cNvSpPr txBox="1"/>
-          <p:nvPr/>
-        </p:nvSpPr>
-        <p:spPr>
-          <a:xfrm>
-            <a:off x="11045952" y="4937760"/>
-            <a:ext cx="914400" cy="237744"/>
-          </a:xfrm>
-          <a:prstGeom prst="rect">
-            <a:avLst/>
-          </a:prstGeom>
-          <a:noFill/>
-        </p:spPr>
-        <p:txBody>
-          <a:bodyPr wrap="none">
-            <a:spAutoFit/>
-          </a:bodyPr>
-          <a:lstStyle/>
-          <a:p>
-            <a:pPr algn="ctr">
-              <a:defRPr sz="950" b="1">
-                <a:solidFill>
-                  <a:srgbClr val="111827"/>
-                </a:solidFill>
-                <a:latin typeface="Calibri"/>
-              </a:defRPr>
-            </a:pPr>
-            <a:r>
-              <a:t>$339K</a:t>
-            </a:r>
-          </a:p>
-        </p:txBody>
-      </p:sp>
-      <p:sp>
-        <p:nvSpPr>
-          <p:cNvPr id="196" name="Rectangle 195"/>
-          <p:cNvSpPr/>
-          <p:nvPr/>
-        </p:nvSpPr>
-        <p:spPr>
-          <a:xfrm>
-            <a:off x="6254496" y="5175504"/>
-            <a:ext cx="5705856" cy="256032"/>
-          </a:xfrm>
-          <a:prstGeom prst="rect">
-            <a:avLst/>
-          </a:prstGeom>
-          <a:solidFill>
-            <a:srgbClr val="FFFFFF"/>
-          </a:solidFill>
-          <a:ln>
-            <a:noFill/>
-          </a:ln>
-        </p:spPr>
-        <p:style>
-          <a:lnRef idx="1">
-            <a:schemeClr val="accent1"/>
-          </a:lnRef>
-          <a:fillRef idx="3">
-            <a:schemeClr val="accent1"/>
-          </a:fillRef>
-          <a:effectRef idx="2">
-            <a:schemeClr val="accent1"/>
-          </a:effectRef>
-          <a:fontRef idx="minor">
-            <a:schemeClr val="lt1"/>
-          </a:fontRef>
-        </p:style>
-        <p:txBody>
-          <a:bodyPr rtlCol="0" anchor="ctr"/>
-          <a:lstStyle/>
-          <a:p>
-            <a:pPr algn="ctr"/>
-          </a:p>
-        </p:txBody>
-      </p:sp>
-      <p:sp>
-        <p:nvSpPr>
-          <p:cNvPr id="197" name="TextBox 196"/>
-          <p:cNvSpPr txBox="1"/>
-          <p:nvPr/>
-        </p:nvSpPr>
-        <p:spPr>
-          <a:xfrm>
-            <a:off x="6254496" y="5193792"/>
-            <a:ext cx="411480" cy="237744"/>
-          </a:xfrm>
-          <a:prstGeom prst="rect">
-            <a:avLst/>
-          </a:prstGeom>
-          <a:noFill/>
-        </p:spPr>
-        <p:txBody>
-          <a:bodyPr wrap="none">
-            <a:spAutoFit/>
-          </a:bodyPr>
-          <a:lstStyle/>
-          <a:p>
-            <a:pPr algn="ctr">
-              <a:defRPr sz="950" b="1">
-                <a:solidFill>
-                  <a:srgbClr val="6B7280"/>
-                </a:solidFill>
-                <a:latin typeface="Calibri"/>
-              </a:defRPr>
-            </a:pPr>
-            <a:r>
-              <a:t>37</a:t>
-            </a:r>
-          </a:p>
-        </p:txBody>
-      </p:sp>
-      <p:sp>
-        <p:nvSpPr>
-          <p:cNvPr id="198" name="TextBox 197"/>
-          <p:cNvSpPr txBox="1"/>
-          <p:nvPr/>
-        </p:nvSpPr>
-        <p:spPr>
-          <a:xfrm>
-            <a:off x="6665976" y="5193792"/>
-            <a:ext cx="1920240" cy="237744"/>
-          </a:xfrm>
-          <a:prstGeom prst="rect">
-            <a:avLst/>
-          </a:prstGeom>
-          <a:noFill/>
-        </p:spPr>
-        <p:txBody>
-          <a:bodyPr wrap="none">
-            <a:spAutoFit/>
-          </a:bodyPr>
-          <a:lstStyle/>
-          <a:p>
-            <a:pPr algn="l">
-              <a:defRPr sz="950" b="1">
-                <a:solidFill>
-                  <a:srgbClr val="111827"/>
-                </a:solidFill>
-                <a:latin typeface="Calibri"/>
-              </a:defRPr>
-            </a:pPr>
-            <a:r>
-              <a:t>Nicholas Banks</a:t>
-            </a:r>
-          </a:p>
-        </p:txBody>
-      </p:sp>
-      <p:sp>
-        <p:nvSpPr>
-          <p:cNvPr id="199" name="TextBox 198"/>
-          <p:cNvSpPr txBox="1"/>
-          <p:nvPr/>
-        </p:nvSpPr>
-        <p:spPr>
-          <a:xfrm>
-            <a:off x="8586216" y="5193792"/>
-            <a:ext cx="2459736" cy="237744"/>
-          </a:xfrm>
-          <a:prstGeom prst="rect">
-            <a:avLst/>
-          </a:prstGeom>
-          <a:noFill/>
-        </p:spPr>
-        <p:txBody>
-          <a:bodyPr wrap="none">
-            <a:spAutoFit/>
-          </a:bodyPr>
-          <a:lstStyle/>
-          <a:p>
-            <a:pPr algn="l">
-              <a:defRPr sz="950" b="0">
-                <a:solidFill>
-                  <a:srgbClr val="6B7280"/>
-                </a:solidFill>
-                <a:latin typeface="Calibri"/>
-              </a:defRPr>
-            </a:pPr>
-            <a:r>
-              <a:t>Reliance Partners, LLC</a:t>
-            </a:r>
-          </a:p>
-        </p:txBody>
-      </p:sp>
-      <p:sp>
-        <p:nvSpPr>
-          <p:cNvPr id="200" name="TextBox 199"/>
-          <p:cNvSpPr txBox="1"/>
-          <p:nvPr/>
-        </p:nvSpPr>
-        <p:spPr>
-          <a:xfrm>
-            <a:off x="11045952" y="5193792"/>
-            <a:ext cx="914400" cy="237744"/>
-          </a:xfrm>
-          <a:prstGeom prst="rect">
-            <a:avLst/>
-          </a:prstGeom>
-          <a:noFill/>
-        </p:spPr>
-        <p:txBody>
-          <a:bodyPr wrap="none">
-            <a:spAutoFit/>
-          </a:bodyPr>
-          <a:lstStyle/>
-          <a:p>
-            <a:pPr algn="ctr">
-              <a:defRPr sz="950" b="1">
-                <a:solidFill>
-                  <a:srgbClr val="111827"/>
-                </a:solidFill>
-                <a:latin typeface="Calibri"/>
-              </a:defRPr>
-            </a:pPr>
-            <a:r>
-              <a:t>$330K</a:t>
-            </a:r>
-          </a:p>
-        </p:txBody>
-      </p:sp>
-      <p:sp>
-        <p:nvSpPr>
-          <p:cNvPr id="201" name="Rectangle 200"/>
-          <p:cNvSpPr/>
-          <p:nvPr/>
-        </p:nvSpPr>
-        <p:spPr>
-          <a:xfrm>
-            <a:off x="6254496" y="5431536"/>
-            <a:ext cx="5705856" cy="256032"/>
-          </a:xfrm>
-          <a:prstGeom prst="rect">
-            <a:avLst/>
-          </a:prstGeom>
-          <a:solidFill>
-            <a:srgbClr val="F9FAFB"/>
-          </a:solidFill>
-          <a:ln>
-            <a:noFill/>
-          </a:ln>
-        </p:spPr>
-        <p:style>
-          <a:lnRef idx="1">
-            <a:schemeClr val="accent1"/>
-          </a:lnRef>
-          <a:fillRef idx="3">
-            <a:schemeClr val="accent1"/>
-          </a:fillRef>
-          <a:effectRef idx="2">
-            <a:schemeClr val="accent1"/>
-          </a:effectRef>
-          <a:fontRef idx="minor">
-            <a:schemeClr val="lt1"/>
-          </a:fontRef>
-        </p:style>
-        <p:txBody>
-          <a:bodyPr rtlCol="0" anchor="ctr"/>
-          <a:lstStyle/>
-          <a:p>
-            <a:pPr algn="ctr"/>
-          </a:p>
-        </p:txBody>
-      </p:sp>
-      <p:sp>
-        <p:nvSpPr>
-          <p:cNvPr id="202" name="TextBox 201"/>
-          <p:cNvSpPr txBox="1"/>
-          <p:nvPr/>
-        </p:nvSpPr>
-        <p:spPr>
-          <a:xfrm>
-            <a:off x="6254496" y="5449824"/>
-            <a:ext cx="411480" cy="237744"/>
-          </a:xfrm>
-          <a:prstGeom prst="rect">
-            <a:avLst/>
-          </a:prstGeom>
-          <a:noFill/>
-        </p:spPr>
-        <p:txBody>
-          <a:bodyPr wrap="none">
-            <a:spAutoFit/>
-          </a:bodyPr>
-          <a:lstStyle/>
-          <a:p>
-            <a:pPr algn="ctr">
-              <a:defRPr sz="950" b="1">
-                <a:solidFill>
-                  <a:srgbClr val="6B7280"/>
-                </a:solidFill>
-                <a:latin typeface="Calibri"/>
-              </a:defRPr>
-            </a:pPr>
-            <a:r>
-              <a:t>38</a:t>
-            </a:r>
-          </a:p>
-        </p:txBody>
-      </p:sp>
-      <p:sp>
-        <p:nvSpPr>
-          <p:cNvPr id="203" name="TextBox 202"/>
-          <p:cNvSpPr txBox="1"/>
-          <p:nvPr/>
-        </p:nvSpPr>
-        <p:spPr>
-          <a:xfrm>
-            <a:off x="6665976" y="5449824"/>
-            <a:ext cx="1920240" cy="237744"/>
-          </a:xfrm>
-          <a:prstGeom prst="rect">
-            <a:avLst/>
-          </a:prstGeom>
-          <a:noFill/>
-        </p:spPr>
-        <p:txBody>
-          <a:bodyPr wrap="none">
-            <a:spAutoFit/>
-          </a:bodyPr>
-          <a:lstStyle/>
-          <a:p>
-            <a:pPr algn="l">
-              <a:defRPr sz="950" b="1">
-                <a:solidFill>
-                  <a:srgbClr val="111827"/>
-                </a:solidFill>
-                <a:latin typeface="Calibri"/>
-              </a:defRPr>
-            </a:pPr>
-            <a:r>
-              <a:t>Venizelos Papadopulos</a:t>
-            </a:r>
-          </a:p>
-        </p:txBody>
-      </p:sp>
-      <p:sp>
-        <p:nvSpPr>
-          <p:cNvPr id="204" name="TextBox 203"/>
-          <p:cNvSpPr txBox="1"/>
-          <p:nvPr/>
-        </p:nvSpPr>
-        <p:spPr>
-          <a:xfrm>
-            <a:off x="8586216" y="5449824"/>
-            <a:ext cx="2459736" cy="237744"/>
-          </a:xfrm>
-          <a:prstGeom prst="rect">
-            <a:avLst/>
-          </a:prstGeom>
-          <a:noFill/>
-        </p:spPr>
-        <p:txBody>
-          <a:bodyPr wrap="none">
-            <a:spAutoFit/>
-          </a:bodyPr>
-          <a:lstStyle/>
-          <a:p>
-            <a:pPr algn="l">
-              <a:defRPr sz="950" b="0">
-                <a:solidFill>
-                  <a:srgbClr val="6B7280"/>
-                </a:solidFill>
-                <a:latin typeface="Calibri"/>
-              </a:defRPr>
-            </a:pPr>
-            <a:r>
               <a:t>Exclusive Financial Services, Inc</a:t>
-            </a:r>
-          </a:p>
-        </p:txBody>
-      </p:sp>
-      <p:sp>
-        <p:nvSpPr>
-          <p:cNvPr id="205" name="TextBox 204"/>
-          <p:cNvSpPr txBox="1"/>
-          <p:nvPr/>
-        </p:nvSpPr>
-        <p:spPr>
-          <a:xfrm>
-            <a:off x="11045952" y="5449824"/>
-            <a:ext cx="914400" cy="237744"/>
-          </a:xfrm>
-          <a:prstGeom prst="rect">
-            <a:avLst/>
-          </a:prstGeom>
-          <a:noFill/>
-        </p:spPr>
-        <p:txBody>
-          <a:bodyPr wrap="none">
-            <a:spAutoFit/>
-          </a:bodyPr>
-          <a:lstStyle/>
-          <a:p>
-            <a:pPr algn="ctr">
-              <a:defRPr sz="950" b="1">
-                <a:solidFill>
-                  <a:srgbClr val="111827"/>
-                </a:solidFill>
-                <a:latin typeface="Calibri"/>
-              </a:defRPr>
-            </a:pPr>
-            <a:r>
-              <a:t>$321K</a:t>
-            </a:r>
-          </a:p>
-        </p:txBody>
-      </p:sp>
-      <p:sp>
-        <p:nvSpPr>
-          <p:cNvPr id="206" name="Rectangle 205"/>
-          <p:cNvSpPr/>
-          <p:nvPr/>
-        </p:nvSpPr>
-        <p:spPr>
-          <a:xfrm>
-            <a:off x="6254496" y="5687568"/>
-            <a:ext cx="5705856" cy="256032"/>
-          </a:xfrm>
-          <a:prstGeom prst="rect">
-            <a:avLst/>
-          </a:prstGeom>
-          <a:solidFill>
-            <a:srgbClr val="FFFFFF"/>
-          </a:solidFill>
-          <a:ln>
-            <a:noFill/>
-          </a:ln>
-        </p:spPr>
-        <p:style>
-          <a:lnRef idx="1">
-            <a:schemeClr val="accent1"/>
-          </a:lnRef>
-          <a:fillRef idx="3">
-            <a:schemeClr val="accent1"/>
-          </a:fillRef>
-          <a:effectRef idx="2">
-            <a:schemeClr val="accent1"/>
-          </a:effectRef>
-          <a:fontRef idx="minor">
-            <a:schemeClr val="lt1"/>
-          </a:fontRef>
-        </p:style>
-        <p:txBody>
-          <a:bodyPr rtlCol="0" anchor="ctr"/>
-          <a:lstStyle/>
-          <a:p>
-            <a:pPr algn="ctr"/>
-          </a:p>
-        </p:txBody>
-      </p:sp>
-      <p:sp>
-        <p:nvSpPr>
-          <p:cNvPr id="207" name="TextBox 206"/>
-          <p:cNvSpPr txBox="1"/>
-          <p:nvPr/>
-        </p:nvSpPr>
-        <p:spPr>
-          <a:xfrm>
-            <a:off x="6254496" y="5705856"/>
-            <a:ext cx="411480" cy="237744"/>
-          </a:xfrm>
-          <a:prstGeom prst="rect">
-            <a:avLst/>
-          </a:prstGeom>
-          <a:noFill/>
-        </p:spPr>
-        <p:txBody>
-          <a:bodyPr wrap="none">
-            <a:spAutoFit/>
-          </a:bodyPr>
-          <a:lstStyle/>
-          <a:p>
-            <a:pPr algn="ctr">
-              <a:defRPr sz="950" b="1">
-                <a:solidFill>
-                  <a:srgbClr val="6B7280"/>
-                </a:solidFill>
-                <a:latin typeface="Calibri"/>
-              </a:defRPr>
-            </a:pPr>
-            <a:r>
-              <a:t>39</a:t>
-            </a:r>
-          </a:p>
-        </p:txBody>
-      </p:sp>
-      <p:sp>
-        <p:nvSpPr>
-          <p:cNvPr id="208" name="TextBox 207"/>
-          <p:cNvSpPr txBox="1"/>
-          <p:nvPr/>
-        </p:nvSpPr>
-        <p:spPr>
-          <a:xfrm>
-            <a:off x="6665976" y="5705856"/>
-            <a:ext cx="1920240" cy="237744"/>
-          </a:xfrm>
-          <a:prstGeom prst="rect">
-            <a:avLst/>
-          </a:prstGeom>
-          <a:noFill/>
-        </p:spPr>
-        <p:txBody>
-          <a:bodyPr wrap="none">
-            <a:spAutoFit/>
-          </a:bodyPr>
-          <a:lstStyle/>
-          <a:p>
-            <a:pPr algn="l">
-              <a:defRPr sz="950" b="1">
-                <a:solidFill>
-                  <a:srgbClr val="111827"/>
-                </a:solidFill>
-                <a:latin typeface="Calibri"/>
-              </a:defRPr>
-            </a:pPr>
-            <a:r>
-              <a:t>Scarlette Mcbrayer</a:t>
-            </a:r>
-          </a:p>
-        </p:txBody>
-      </p:sp>
-      <p:sp>
-        <p:nvSpPr>
-          <p:cNvPr id="209" name="TextBox 208"/>
-          <p:cNvSpPr txBox="1"/>
-          <p:nvPr/>
-        </p:nvSpPr>
-        <p:spPr>
-          <a:xfrm>
-            <a:off x="8586216" y="5705856"/>
-            <a:ext cx="2459736" cy="237744"/>
-          </a:xfrm>
-          <a:prstGeom prst="rect">
-            <a:avLst/>
-          </a:prstGeom>
-          <a:noFill/>
-        </p:spPr>
-        <p:txBody>
-          <a:bodyPr wrap="none">
-            <a:spAutoFit/>
-          </a:bodyPr>
-          <a:lstStyle/>
-          <a:p>
-            <a:pPr algn="l">
-              <a:defRPr sz="950" b="0">
-                <a:solidFill>
-                  <a:srgbClr val="6B7280"/>
-                </a:solidFill>
-                <a:latin typeface="Calibri"/>
-              </a:defRPr>
-            </a:pPr>
-            <a:r>
-              <a:t>Reliance Partners, LLC</a:t>
-            </a:r>
-          </a:p>
-        </p:txBody>
-      </p:sp>
-      <p:sp>
-        <p:nvSpPr>
-          <p:cNvPr id="210" name="TextBox 209"/>
-          <p:cNvSpPr txBox="1"/>
-          <p:nvPr/>
-        </p:nvSpPr>
-        <p:spPr>
-          <a:xfrm>
-            <a:off x="11045952" y="5705856"/>
-            <a:ext cx="914400" cy="237744"/>
-          </a:xfrm>
-          <a:prstGeom prst="rect">
-            <a:avLst/>
-          </a:prstGeom>
-          <a:noFill/>
-        </p:spPr>
-        <p:txBody>
-          <a:bodyPr wrap="none">
-            <a:spAutoFit/>
-          </a:bodyPr>
-          <a:lstStyle/>
-          <a:p>
-            <a:pPr algn="ctr">
-              <a:defRPr sz="950" b="1">
-                <a:solidFill>
-                  <a:srgbClr val="111827"/>
-                </a:solidFill>
-                <a:latin typeface="Calibri"/>
-              </a:defRPr>
-            </a:pPr>
-            <a:r>
-              <a:t>$315K</a:t>
-            </a:r>
-          </a:p>
-        </p:txBody>
-      </p:sp>
-      <p:sp>
-        <p:nvSpPr>
-          <p:cNvPr id="211" name="Rectangle 210"/>
-          <p:cNvSpPr/>
-          <p:nvPr/>
-        </p:nvSpPr>
-        <p:spPr>
-          <a:xfrm>
-            <a:off x="6254496" y="5943600"/>
-            <a:ext cx="5705856" cy="256032"/>
-          </a:xfrm>
-          <a:prstGeom prst="rect">
-            <a:avLst/>
-          </a:prstGeom>
-          <a:solidFill>
-            <a:srgbClr val="D1FAE5"/>
-          </a:solidFill>
-          <a:ln>
-            <a:noFill/>
-          </a:ln>
-        </p:spPr>
-        <p:style>
-          <a:lnRef idx="1">
-            <a:schemeClr val="accent1"/>
-          </a:lnRef>
-          <a:fillRef idx="3">
-            <a:schemeClr val="accent1"/>
-          </a:fillRef>
-          <a:effectRef idx="2">
-            <a:schemeClr val="accent1"/>
-          </a:effectRef>
-          <a:fontRef idx="minor">
-            <a:schemeClr val="lt1"/>
-          </a:fontRef>
-        </p:style>
-        <p:txBody>
-          <a:bodyPr rtlCol="0" anchor="ctr"/>
-          <a:lstStyle/>
-          <a:p>
-            <a:pPr algn="ctr"/>
-          </a:p>
-        </p:txBody>
-      </p:sp>
-      <p:sp>
-        <p:nvSpPr>
-          <p:cNvPr id="212" name="TextBox 211"/>
-          <p:cNvSpPr txBox="1"/>
-          <p:nvPr/>
-        </p:nvSpPr>
-        <p:spPr>
-          <a:xfrm>
-            <a:off x="6254496" y="5961888"/>
-            <a:ext cx="411480" cy="237744"/>
-          </a:xfrm>
-          <a:prstGeom prst="rect">
-            <a:avLst/>
-          </a:prstGeom>
-          <a:noFill/>
-        </p:spPr>
-        <p:txBody>
-          <a:bodyPr wrap="none">
-            <a:spAutoFit/>
-          </a:bodyPr>
-          <a:lstStyle/>
-          <a:p>
-            <a:pPr algn="ctr">
-              <a:defRPr sz="950" b="1">
-                <a:solidFill>
-                  <a:srgbClr val="6B7280"/>
-                </a:solidFill>
-                <a:latin typeface="Calibri"/>
-              </a:defRPr>
-            </a:pPr>
-            <a:r>
-              <a:t>40</a:t>
-            </a:r>
-          </a:p>
-        </p:txBody>
-      </p:sp>
-      <p:sp>
-        <p:nvSpPr>
-          <p:cNvPr id="213" name="TextBox 212"/>
-          <p:cNvSpPr txBox="1"/>
-          <p:nvPr/>
-        </p:nvSpPr>
-        <p:spPr>
-          <a:xfrm>
-            <a:off x="6665976" y="5961888"/>
-            <a:ext cx="1920240" cy="237744"/>
-          </a:xfrm>
-          <a:prstGeom prst="rect">
-            <a:avLst/>
-          </a:prstGeom>
-          <a:noFill/>
-        </p:spPr>
-        <p:txBody>
-          <a:bodyPr wrap="none">
-            <a:spAutoFit/>
-          </a:bodyPr>
-          <a:lstStyle/>
-          <a:p>
-            <a:pPr algn="l">
-              <a:defRPr sz="950" b="1">
-                <a:solidFill>
-                  <a:srgbClr val="111827"/>
-                </a:solidFill>
-                <a:latin typeface="Calibri"/>
-              </a:defRPr>
-            </a:pPr>
-            <a:r>
-              <a:t>Christopher Salazar</a:t>
-            </a:r>
-          </a:p>
-        </p:txBody>
-      </p:sp>
-      <p:sp>
-        <p:nvSpPr>
-          <p:cNvPr id="214" name="TextBox 213"/>
-          <p:cNvSpPr txBox="1"/>
-          <p:nvPr/>
-        </p:nvSpPr>
-        <p:spPr>
-          <a:xfrm>
-            <a:off x="8586216" y="5961888"/>
-            <a:ext cx="2459736" cy="237744"/>
-          </a:xfrm>
-          <a:prstGeom prst="rect">
-            <a:avLst/>
-          </a:prstGeom>
-          <a:noFill/>
-        </p:spPr>
-        <p:txBody>
-          <a:bodyPr wrap="none">
-            <a:spAutoFit/>
-          </a:bodyPr>
-          <a:lstStyle/>
-          <a:p>
-            <a:pPr algn="l">
-              <a:defRPr sz="950" b="0">
-                <a:solidFill>
-                  <a:srgbClr val="6B7280"/>
-                </a:solidFill>
-                <a:latin typeface="Calibri"/>
-              </a:defRPr>
-            </a:pPr>
-            <a:r>
-              <a:t>Protectgo Services LLC</a:t>
             </a:r>
           </a:p>
         </p:txBody>
@@ -19781,7 +19781,7 @@
               </a:defRPr>
             </a:pPr>
             <a:r>
-              <a:t>$314K</a:t>
+              <a:t>$321K</a:t>
             </a:r>
           </a:p>
         </p:txBody>
@@ -19922,7 +19922,7 @@
               </a:defRPr>
             </a:pPr>
             <a:r>
-              <a:t>Q2 2026 YTD (Apr 1–May 22)  |  Green = on target  |  Amber = at risk  |  Red = behind  |  Goal: ≥40 acts/wk  |  Ranked by composite OKR score</a:t>
+              <a:t>Q2 2026 YTD (Apr 1–May 23)  |  Green = on target  |  Amber = at risk  |  Red = behind  |  Goal: ≥40 acts/wk  |  Ranked by composite OKR score</a:t>
             </a:r>
           </a:p>
         </p:txBody>
@@ -19958,7 +19958,7 @@
               </a:defRPr>
             </a:pPr>
             <a:r>
-              <a:t>Generated May 22, 2026</a:t>
+              <a:t>Generated May 23, 2026</a:t>
             </a:r>
           </a:p>
         </p:txBody>
@@ -20123,7 +20123,7 @@
               </a:defRPr>
             </a:pPr>
             <a:r>
-              <a:t>Q2 2026 YTD (Apr 1–May 22)  |  Green = on target  |  Amber = at risk  |  Red = behind  |  Goal: ≥50 acts/wk  |  Ranked by composite OKR score</a:t>
+              <a:t>Q2 2026 YTD (Apr 1–May 23)  |  Green = on target  |  Amber = at risk  |  Red = behind  |  Goal: ≥50 acts/wk  |  Ranked by composite OKR score</a:t>
             </a:r>
           </a:p>
         </p:txBody>
@@ -20159,7 +20159,7 @@
               </a:defRPr>
             </a:pPr>
             <a:r>
-              <a:t>Generated May 22, 2026</a:t>
+              <a:t>Generated May 23, 2026</a:t>
             </a:r>
           </a:p>
         </p:txBody>
@@ -20324,7 +20324,7 @@
               </a:defRPr>
             </a:pPr>
             <a:r>
-              <a:t>Q2 YTD  |  Apr 1–May 22  |  BDMs Only  |  Goal: 40 acts/wk  |  Emails excluded</a:t>
+              <a:t>Q2 YTD  |  Apr 1–May 23  |  BDMs Only  |  Goal: 40 acts/wk  |  Emails excluded</a:t>
             </a:r>
           </a:p>
         </p:txBody>
@@ -20360,7 +20360,7 @@
               </a:defRPr>
             </a:pPr>
             <a:r>
-              <a:t>Generated May 22, 2026</a:t>
+              <a:t>Generated May 23, 2026</a:t>
             </a:r>
           </a:p>
         </p:txBody>
@@ -20691,7 +20691,7 @@
               </a:defRPr>
             </a:pPr>
             <a:r>
-              <a:t>May 18-22</a:t>
+              <a:t>May 18-23</a:t>
             </a:r>
           </a:p>
         </p:txBody>
@@ -21316,7 +21316,7 @@
               </a:defRPr>
             </a:pPr>
             <a:r>
-              <a:t>43</a:t>
+              <a:t>48</a:t>
             </a:r>
           </a:p>
         </p:txBody>
@@ -21984,7 +21984,7 @@
               </a:defRPr>
             </a:pPr>
             <a:r>
-              <a:t>69</a:t>
+              <a:t>72</a:t>
             </a:r>
           </a:p>
         </p:txBody>
@@ -23218,7 +23218,7 @@
             <a:avLst/>
           </a:prstGeom>
           <a:solidFill>
-            <a:srgbClr val="D97706"/>
+            <a:srgbClr val="05784C"/>
           </a:solidFill>
           <a:ln>
             <a:noFill/>
@@ -23277,7 +23277,7 @@
               </a:defRPr>
             </a:pPr>
             <a:r>
-              <a:t>39</a:t>
+              <a:t>42</a:t>
             </a:r>
           </a:p>
         </p:txBody>
@@ -23902,7 +23902,7 @@
               </a:defRPr>
             </a:pPr>
             <a:r>
-              <a:t>34</a:t>
+              <a:t>35</a:t>
             </a:r>
           </a:p>
         </p:txBody>
@@ -24570,7 +24570,7 @@
               </a:defRPr>
             </a:pPr>
             <a:r>
-              <a:t>41</a:t>
+              <a:t>43</a:t>
             </a:r>
           </a:p>
         </p:txBody>
@@ -25045,7 +25045,7 @@
               </a:defRPr>
             </a:pPr>
             <a:r>
-              <a:t>424</a:t>
+              <a:t>429</a:t>
             </a:r>
           </a:p>
         </p:txBody>
@@ -25117,7 +25117,7 @@
               </a:defRPr>
             </a:pPr>
             <a:r>
-              <a:t>84</a:t>
+              <a:t>87</a:t>
             </a:r>
           </a:p>
         </p:txBody>
@@ -25153,7 +25153,7 @@
               </a:defRPr>
             </a:pPr>
             <a:r>
-              <a:t>471</a:t>
+              <a:t>476</a:t>
             </a:r>
           </a:p>
         </p:txBody>
@@ -25376,7 +25376,7 @@
               </a:defRPr>
             </a:pPr>
             <a:r>
-              <a:t>247</a:t>
+              <a:t>250</a:t>
             </a:r>
           </a:p>
         </p:txBody>
@@ -25484,7 +25484,7 @@
               </a:defRPr>
             </a:pPr>
             <a:r>
-              <a:t>270</a:t>
+              <a:t>273</a:t>
             </a:r>
           </a:p>
         </p:txBody>
@@ -25995,7 +25995,7 @@
               </a:defRPr>
             </a:pPr>
             <a:r>
-              <a:t>396</a:t>
+              <a:t>399</a:t>
             </a:r>
           </a:p>
         </p:txBody>
@@ -26067,7 +26067,7 @@
               </a:defRPr>
             </a:pPr>
             <a:r>
-              <a:t>46</a:t>
+              <a:t>48</a:t>
             </a:r>
           </a:p>
         </p:txBody>
@@ -26103,7 +26103,7 @@
               </a:defRPr>
             </a:pPr>
             <a:r>
-              <a:t>416</a:t>
+              <a:t>419</a:t>
             </a:r>
           </a:p>
         </p:txBody>
@@ -26283,7 +26283,7 @@
               </a:defRPr>
             </a:pPr>
             <a:r>
-              <a:t>242</a:t>
+              <a:t>243</a:t>
             </a:r>
           </a:p>
         </p:txBody>
@@ -26391,7 +26391,7 @@
               </a:defRPr>
             </a:pPr>
             <a:r>
-              <a:t>258</a:t>
+              <a:t>259</a:t>
             </a:r>
           </a:p>
         </p:txBody>
@@ -26614,7 +26614,7 @@
               </a:defRPr>
             </a:pPr>
             <a:r>
-              <a:t>107</a:t>
+              <a:t>109</a:t>
             </a:r>
           </a:p>
         </p:txBody>
@@ -26686,7 +26686,7 @@
               </a:defRPr>
             </a:pPr>
             <a:r>
-              <a:t>14</a:t>
+              <a:t>15</a:t>
             </a:r>
           </a:p>
         </p:txBody>
@@ -26722,7 +26722,7 @@
               </a:defRPr>
             </a:pPr>
             <a:r>
-              <a:t>122</a:t>
+              <a:t>124</a:t>
             </a:r>
           </a:p>
         </p:txBody>
@@ -26935,7 +26935,7 @@
               </a:defRPr>
             </a:pPr>
             <a:r>
-              <a:t>Q2 YTD  |  Apr 1–May 22  |  BDAs Only  |  Goal: 50 acts/wk  |  Emails excluded</a:t>
+              <a:t>Q2 YTD  |  Apr 1–May 23  |  BDAs Only  |  Goal: 50 acts/wk  |  Emails excluded</a:t>
             </a:r>
           </a:p>
         </p:txBody>
@@ -26971,7 +26971,7 @@
               </a:defRPr>
             </a:pPr>
             <a:r>
-              <a:t>Generated May 22, 2026</a:t>
+              <a:t>Generated May 23, 2026</a:t>
             </a:r>
           </a:p>
         </p:txBody>
@@ -27302,7 +27302,7 @@
               </a:defRPr>
             </a:pPr>
             <a:r>
-              <a:t>May 18-22</a:t>
+              <a:t>May 18-23</a:t>
             </a:r>
           </a:p>
         </p:txBody>
@@ -27927,7 +27927,7 @@
               </a:defRPr>
             </a:pPr>
             <a:r>
-              <a:t>40</a:t>
+              <a:t>43</a:t>
             </a:r>
           </a:p>
         </p:txBody>
@@ -28464,7 +28464,7 @@
             <a:avLst/>
           </a:prstGeom>
           <a:solidFill>
-            <a:srgbClr val="D97706"/>
+            <a:srgbClr val="05784C"/>
           </a:solidFill>
           <a:ln>
             <a:noFill/>
@@ -28523,7 +28523,7 @@
               </a:defRPr>
             </a:pPr>
             <a:r>
-              <a:t>38</a:t>
+              <a:t>54</a:t>
             </a:r>
           </a:p>
         </p:txBody>
@@ -28559,7 +28559,7 @@
               </a:defRPr>
             </a:pPr>
             <a:r>
-              <a:t>68%</a:t>
+              <a:t>74%</a:t>
             </a:r>
           </a:p>
         </p:txBody>
@@ -29672,7 +29672,7 @@
               </a:defRPr>
             </a:pPr>
             <a:r>
-              <a:t>23</a:t>
+              <a:t>31</a:t>
             </a:r>
           </a:p>
         </p:txBody>
@@ -29708,7 +29708,7 @@
               </a:defRPr>
             </a:pPr>
             <a:r>
-              <a:t>90%</a:t>
+              <a:t>94%</a:t>
             </a:r>
           </a:p>
         </p:txBody>
@@ -30238,7 +30238,7 @@
             <a:avLst/>
           </a:prstGeom>
           <a:solidFill>
-            <a:srgbClr val="D97706"/>
+            <a:srgbClr val="05784C"/>
           </a:solidFill>
           <a:ln>
             <a:noFill/>
@@ -30297,7 +30297,7 @@
               </a:defRPr>
             </a:pPr>
             <a:r>
-              <a:t>49</a:t>
+              <a:t>60</a:t>
             </a:r>
           </a:p>
         </p:txBody>
@@ -30772,7 +30772,7 @@
               </a:defRPr>
             </a:pPr>
             <a:r>
-              <a:t>347</a:t>
+              <a:t>350</a:t>
             </a:r>
           </a:p>
         </p:txBody>
@@ -30880,7 +30880,7 @@
               </a:defRPr>
             </a:pPr>
             <a:r>
-              <a:t>357</a:t>
+              <a:t>360</a:t>
             </a:r>
           </a:p>
         </p:txBody>
@@ -31103,7 +31103,7 @@
               </a:defRPr>
             </a:pPr>
             <a:r>
-              <a:t>159</a:t>
+              <a:t>175</a:t>
             </a:r>
           </a:p>
         </p:txBody>
@@ -31211,7 +31211,7 @@
               </a:defRPr>
             </a:pPr>
             <a:r>
-              <a:t>169</a:t>
+              <a:t>185</a:t>
             </a:r>
           </a:p>
         </p:txBody>
@@ -31247,7 +31247,7 @@
               </a:defRPr>
             </a:pPr>
             <a:r>
-              <a:t>33.8</a:t>
+              <a:t>37.0</a:t>
             </a:r>
           </a:p>
         </p:txBody>
@@ -31283,7 +31283,7 @@
               </a:defRPr>
             </a:pPr>
             <a:r>
-              <a:t>68%</a:t>
+              <a:t>74%</a:t>
             </a:r>
           </a:p>
         </p:txBody>
@@ -31463,7 +31463,7 @@
               </a:defRPr>
             </a:pPr>
             <a:r>
-              <a:t>27</a:t>
+              <a:t>28</a:t>
             </a:r>
           </a:p>
         </p:txBody>
@@ -31722,7 +31722,7 @@
               </a:defRPr>
             </a:pPr>
             <a:r>
-              <a:t>214</a:t>
+              <a:t>222</a:t>
             </a:r>
           </a:p>
         </p:txBody>
@@ -31830,7 +31830,7 @@
               </a:defRPr>
             </a:pPr>
             <a:r>
-              <a:t>226</a:t>
+              <a:t>234</a:t>
             </a:r>
           </a:p>
         </p:txBody>
@@ -31866,7 +31866,7 @@
               </a:defRPr>
             </a:pPr>
             <a:r>
-              <a:t>45.2</a:t>
+              <a:t>46.8</a:t>
             </a:r>
           </a:p>
         </p:txBody>
@@ -31902,7 +31902,7 @@
               </a:defRPr>
             </a:pPr>
             <a:r>
-              <a:t>90%</a:t>
+              <a:t>94%</a:t>
             </a:r>
           </a:p>
         </p:txBody>
@@ -32010,7 +32010,7 @@
               </a:defRPr>
             </a:pPr>
             <a:r>
-              <a:t>144</a:t>
+              <a:t>155</a:t>
             </a:r>
           </a:p>
         </p:txBody>
@@ -32118,7 +32118,7 @@
               </a:defRPr>
             </a:pPr>
             <a:r>
-              <a:t>150</a:t>
+              <a:t>161</a:t>
             </a:r>
           </a:p>
         </p:txBody>
@@ -32367,7 +32367,7 @@
               </a:defRPr>
             </a:pPr>
             <a:r>
-              <a:t>Generated May 22, 2026</a:t>
+              <a:t>Generated May 23, 2026</a:t>
             </a:r>
           </a:p>
         </p:txBody>
@@ -33058,7 +33058,7 @@
               </a:defRPr>
             </a:pPr>
             <a:r>
-              <a:t>6818</a:t>
+              <a:t>6932</a:t>
             </a:r>
           </a:p>
         </p:txBody>
@@ -33094,7 +33094,7 @@
               </a:defRPr>
             </a:pPr>
             <a:r>
-              <a:t>487</a:t>
+              <a:t>478</a:t>
             </a:r>
           </a:p>
         </p:txBody>
@@ -33130,7 +33130,7 @@
               </a:defRPr>
             </a:pPr>
             <a:r>
-              <a:t>$17.4M</a:t>
+              <a:t>$16.5M</a:t>
             </a:r>
           </a:p>
         </p:txBody>
@@ -33166,7 +33166,7 @@
               </a:defRPr>
             </a:pPr>
             <a:r>
-              <a:t>$4.4M</a:t>
+              <a:t>$4.5M</a:t>
             </a:r>
           </a:p>
         </p:txBody>
@@ -33497,7 +33497,7 @@
               </a:defRPr>
             </a:pPr>
             <a:r>
-              <a:t>3274</a:t>
+              <a:t>3336</a:t>
             </a:r>
           </a:p>
         </p:txBody>
@@ -33533,7 +33533,7 @@
               </a:defRPr>
             </a:pPr>
             <a:r>
-              <a:t>333</a:t>
+              <a:t>335</a:t>
             </a:r>
           </a:p>
         </p:txBody>
@@ -33569,7 +33569,7 @@
               </a:defRPr>
             </a:pPr>
             <a:r>
-              <a:t>$9.6M</a:t>
+              <a:t>$9.3M</a:t>
             </a:r>
           </a:p>
         </p:txBody>
@@ -33893,7 +33893,7 @@
               </a:defRPr>
             </a:pPr>
             <a:r>
-              <a:t>5190</a:t>
+              <a:t>5294</a:t>
             </a:r>
           </a:p>
         </p:txBody>
@@ -33929,7 +33929,7 @@
               </a:defRPr>
             </a:pPr>
             <a:r>
-              <a:t>299</a:t>
+              <a:t>297</a:t>
             </a:r>
           </a:p>
         </p:txBody>
@@ -33965,7 +33965,7 @@
               </a:defRPr>
             </a:pPr>
             <a:r>
-              <a:t>$8.6M</a:t>
+              <a:t>$8.7M</a:t>
             </a:r>
           </a:p>
         </p:txBody>
@@ -34001,7 +34001,7 @@
               </a:defRPr>
             </a:pPr>
             <a:r>
-              <a:t>$1.3M</a:t>
+              <a:t>$1.4M</a:t>
             </a:r>
           </a:p>
         </p:txBody>
@@ -34332,7 +34332,7 @@
               </a:defRPr>
             </a:pPr>
             <a:r>
-              <a:t>3166</a:t>
+              <a:t>3227</a:t>
             </a:r>
           </a:p>
         </p:txBody>
@@ -34368,7 +34368,7 @@
               </a:defRPr>
             </a:pPr>
             <a:r>
-              <a:t>254</a:t>
+              <a:t>259</a:t>
             </a:r>
           </a:p>
         </p:txBody>
@@ -34404,7 +34404,7 @@
               </a:defRPr>
             </a:pPr>
             <a:r>
-              <a:t>$6.2M</a:t>
+              <a:t>$6.3M</a:t>
             </a:r>
           </a:p>
         </p:txBody>
@@ -34728,7 +34728,7 @@
               </a:defRPr>
             </a:pPr>
             <a:r>
-              <a:t>1760</a:t>
+              <a:t>1802</a:t>
             </a:r>
           </a:p>
         </p:txBody>
@@ -34764,7 +34764,7 @@
               </a:defRPr>
             </a:pPr>
             <a:r>
-              <a:t>129</a:t>
+              <a:t>126</a:t>
             </a:r>
           </a:p>
         </p:txBody>
@@ -34800,7 +34800,7 @@
               </a:defRPr>
             </a:pPr>
             <a:r>
-              <a:t>$4.2M</a:t>
+              <a:t>$4.1M</a:t>
             </a:r>
           </a:p>
         </p:txBody>
@@ -35246,7 +35246,7 @@
               </a:defRPr>
             </a:pPr>
             <a:r>
-              <a:t>3853</a:t>
+              <a:t>3932</a:t>
             </a:r>
           </a:p>
         </p:txBody>
@@ -35390,7 +35390,7 @@
               </a:defRPr>
             </a:pPr>
             <a:r>
-              <a:t>$742K</a:t>
+              <a:t>$770K</a:t>
             </a:r>
           </a:p>
         </p:txBody>
@@ -35642,7 +35642,7 @@
               </a:defRPr>
             </a:pPr>
             <a:r>
-              <a:t>2624</a:t>
+              <a:t>2675</a:t>
             </a:r>
           </a:p>
         </p:txBody>
@@ -35678,7 +35678,7 @@
               </a:defRPr>
             </a:pPr>
             <a:r>
-              <a:t>50</a:t>
+              <a:t>51</a:t>
             </a:r>
           </a:p>
         </p:txBody>
@@ -35786,7 +35786,7 @@
               </a:defRPr>
             </a:pPr>
             <a:r>
-              <a:t>$207K</a:t>
+              <a:t>$224K</a:t>
             </a:r>
           </a:p>
         </p:txBody>
@@ -36081,7 +36081,7 @@
               </a:defRPr>
             </a:pPr>
             <a:r>
-              <a:t>1529</a:t>
+              <a:t>1560</a:t>
             </a:r>
           </a:p>
         </p:txBody>
@@ -36153,7 +36153,7 @@
               </a:defRPr>
             </a:pPr>
             <a:r>
-              <a:t>$1.2M</a:t>
+              <a:t>$1.1M</a:t>
             </a:r>
           </a:p>
         </p:txBody>
@@ -36477,7 +36477,7 @@
               </a:defRPr>
             </a:pPr>
             <a:r>
-              <a:t>892</a:t>
+              <a:t>909</a:t>
             </a:r>
           </a:p>
         </p:txBody>
@@ -36513,7 +36513,7 @@
               </a:defRPr>
             </a:pPr>
             <a:r>
-              <a:t>48</a:t>
+              <a:t>52</a:t>
             </a:r>
           </a:p>
         </p:txBody>
@@ -36549,7 +36549,7 @@
               </a:defRPr>
             </a:pPr>
             <a:r>
-              <a:t>$889K</a:t>
+              <a:t>$1.1M</a:t>
             </a:r>
           </a:p>
         </p:txBody>
@@ -36585,7 +36585,7 @@
               </a:defRPr>
             </a:pPr>
             <a:r>
-              <a:t>$307K</a:t>
+              <a:t>$316K</a:t>
             </a:r>
           </a:p>
         </p:txBody>
@@ -36736,7 +36736,7 @@
               </a:defRPr>
             </a:pPr>
             <a:r>
-              <a:t>28</a:t>
+              <a:t>27</a:t>
             </a:r>
           </a:p>
         </p:txBody>
@@ -36772,7 +36772,7 @@
               </a:defRPr>
             </a:pPr>
             <a:r>
-              <a:t>27</a:t>
+              <a:t>26</a:t>
             </a:r>
           </a:p>
         </p:txBody>
@@ -36916,7 +36916,7 @@
               </a:defRPr>
             </a:pPr>
             <a:r>
-              <a:t>584</a:t>
+              <a:t>594</a:t>
             </a:r>
           </a:p>
         </p:txBody>
@@ -36988,7 +36988,7 @@
               </a:defRPr>
             </a:pPr>
             <a:r>
-              <a:t>$800K</a:t>
+              <a:t>$801K</a:t>
             </a:r>
           </a:p>
         </p:txBody>
@@ -37434,7 +37434,7 @@
               </a:defRPr>
             </a:pPr>
             <a:r>
-              <a:t>7206</a:t>
+              <a:t>7404</a:t>
             </a:r>
           </a:p>
         </p:txBody>
@@ -37470,7 +37470,7 @@
               </a:defRPr>
             </a:pPr>
             <a:r>
-              <a:t>285</a:t>
+              <a:t>288</a:t>
             </a:r>
           </a:p>
         </p:txBody>
@@ -37506,7 +37506,7 @@
               </a:defRPr>
             </a:pPr>
             <a:r>
-              <a:t>$8.1M</a:t>
+              <a:t>$8.3M</a:t>
             </a:r>
           </a:p>
         </p:txBody>
@@ -37894,7 +37894,7 @@
               </a:defRPr>
             </a:pPr>
             <a:r>
-              <a:t>221 portfolio  ·  207 active  ·  14 dormant</a:t>
+              <a:t>220 portfolio  ·  206 active  ·  14 dormant</a:t>
             </a:r>
           </a:p>
         </p:txBody>
@@ -38052,7 +38052,7 @@
               </a:defRPr>
             </a:pPr>
             <a:r>
-              <a:t>403 portfolio  ·  388 active  ·  96% engaged</a:t>
+              <a:t>402 portfolio  ·  387 active  ·  96% engaged</a:t>
             </a:r>
           </a:p>
         </p:txBody>
@@ -38193,7 +38193,7 @@
               </a:defRPr>
             </a:pPr>
             <a:r>
-              <a:t>Retail-vertical agencies in each rep's HubSpot portfolio with zero 2026 submissions  |  Refreshed 2026-05-22</a:t>
+              <a:t>Retail-vertical agencies in each rep's HubSpot portfolio with zero 2026 submissions  |  Refreshed 2026-05-23</a:t>
             </a:r>
           </a:p>
         </p:txBody>
@@ -38229,7 +38229,7 @@
               </a:defRPr>
             </a:pPr>
             <a:r>
-              <a:t>Generated May 22, 2026</a:t>
+              <a:t>Generated May 23, 2026</a:t>
             </a:r>
           </a:p>
         </p:txBody>
@@ -40073,7 +40073,7 @@
               </a:defRPr>
             </a:pPr>
             <a:r>
-              <a:t>1 of 28 agencies dormant</a:t>
+              <a:t>1 of 27 agencies dormant</a:t>
             </a:r>
           </a:p>
         </p:txBody>
@@ -40770,7 +40770,7 @@
               </a:defRPr>
             </a:pPr>
             <a:r>
-              <a:t>Generated May 22, 2026</a:t>
+              <a:t>Generated May 23, 2026</a:t>
             </a:r>
           </a:p>
         </p:txBody>
@@ -40935,7 +40935,7 @@
               </a:defRPr>
             </a:pPr>
             <a:r>
-              <a:t>Ranked by Q2 GWP (left) and Q2 Submissions (right)  ·  Mint-shaded row = new vs last week’s deck  ·  Apr 1–May 22</a:t>
+              <a:t>Ranked by Q2 GWP (left) and Q2 Submissions (right)  ·  Mint-shaded row = new vs last week’s deck  ·  Apr 1–May 23</a:t>
             </a:r>
           </a:p>
         </p:txBody>
@@ -40971,7 +40971,7 @@
               </a:defRPr>
             </a:pPr>
             <a:r>
-              <a:t>Generated May 22, 2026</a:t>
+              <a:t>Generated May 23, 2026</a:t>
             </a:r>
           </a:p>
         </p:txBody>
@@ -41539,7 +41539,7 @@
               </a:defRPr>
             </a:pPr>
             <a:r>
-              <a:t>Christopher H.</a:t>
+              <a:t>Derek J.</a:t>
             </a:r>
           </a:p>
         </p:txBody>
@@ -41575,7 +41575,7 @@
               </a:defRPr>
             </a:pPr>
             <a:r>
-              <a:t>Commercial Trucking Insurance Agency LLC</a:t>
+              <a:t>Jagdeep Singh Insurance Agency, Inc</a:t>
             </a:r>
           </a:p>
         </p:txBody>
@@ -41611,7 +41611,7 @@
               </a:defRPr>
             </a:pPr>
             <a:r>
-              <a:t>$2.4M</a:t>
+              <a:t>$1.9M</a:t>
             </a:r>
           </a:p>
         </p:txBody>
@@ -41762,7 +41762,7 @@
               </a:defRPr>
             </a:pPr>
             <a:r>
-              <a:t>Jagdeep Singh Insurance Agency, Inc</a:t>
+              <a:t>Reliance Partners, LLC</a:t>
             </a:r>
           </a:p>
         </p:txBody>
@@ -41798,7 +41798,7 @@
               </a:defRPr>
             </a:pPr>
             <a:r>
-              <a:t>$2.0M</a:t>
+              <a:t>$1.9M</a:t>
             </a:r>
           </a:p>
         </p:txBody>
@@ -41913,7 +41913,7 @@
               </a:defRPr>
             </a:pPr>
             <a:r>
-              <a:t>Derek J.</a:t>
+              <a:t>Christopher H.</a:t>
             </a:r>
           </a:p>
         </p:txBody>
@@ -41949,7 +41949,7 @@
               </a:defRPr>
             </a:pPr>
             <a:r>
-              <a:t>Reliance Partners, LLC</a:t>
+              <a:t>Commercial Trucking Insurance Agency LLC</a:t>
             </a:r>
           </a:p>
         </p:txBody>
@@ -42100,7 +42100,7 @@
               </a:defRPr>
             </a:pPr>
             <a:r>
-              <a:t>Derek J.</a:t>
+              <a:t>Christopher H.</a:t>
             </a:r>
           </a:p>
         </p:txBody>
@@ -42136,7 +42136,7 @@
               </a:defRPr>
             </a:pPr>
             <a:r>
-              <a:t>United Advantage Insurance Services</a:t>
+              <a:t>DNIS Inc.</a:t>
             </a:r>
           </a:p>
         </p:txBody>
@@ -42172,7 +42172,7 @@
               </a:defRPr>
             </a:pPr>
             <a:r>
-              <a:t>$1.8M</a:t>
+              <a:t>$1.7M</a:t>
             </a:r>
           </a:p>
         </p:txBody>
@@ -42287,7 +42287,7 @@
               </a:defRPr>
             </a:pPr>
             <a:r>
-              <a:t>Christopher H.</a:t>
+              <a:t>Derek J.</a:t>
             </a:r>
           </a:p>
         </p:txBody>
@@ -42323,7 +42323,7 @@
               </a:defRPr>
             </a:pPr>
             <a:r>
-              <a:t>DNIS Inc.</a:t>
+              <a:t>United Advantage Insurance Services</a:t>
             </a:r>
           </a:p>
         </p:txBody>
@@ -42474,7 +42474,7 @@
               </a:defRPr>
             </a:pPr>
             <a:r>
-              <a:t>Derek J.</a:t>
+              <a:t>Derrick L.</a:t>
             </a:r>
           </a:p>
         </p:txBody>
@@ -42510,7 +42510,7 @@
               </a:defRPr>
             </a:pPr>
             <a:r>
-              <a:t>Safeline Insurance Agency, Inc.</a:t>
+              <a:t>American Fleet Insurance</a:t>
             </a:r>
           </a:p>
         </p:txBody>
@@ -42546,7 +42546,7 @@
               </a:defRPr>
             </a:pPr>
             <a:r>
-              <a:t>$1.6M</a:t>
+              <a:t>$1.5M</a:t>
             </a:r>
           </a:p>
         </p:txBody>
@@ -42661,7 +42661,7 @@
               </a:defRPr>
             </a:pPr>
             <a:r>
-              <a:t>Derrick L.</a:t>
+              <a:t>Derek J.</a:t>
             </a:r>
           </a:p>
         </p:txBody>
@@ -42697,7 +42697,7 @@
               </a:defRPr>
             </a:pPr>
             <a:r>
-              <a:t>American Fleet Insurance</a:t>
+              <a:t>Safeline Insurance Agency, Inc.</a:t>
             </a:r>
           </a:p>
         </p:txBody>
@@ -42848,7 +42848,7 @@
               </a:defRPr>
             </a:pPr>
             <a:r>
-              <a:t>Derek J.</a:t>
+              <a:t>Derrick L.</a:t>
             </a:r>
           </a:p>
         </p:txBody>
@@ -42884,7 +42884,7 @@
               </a:defRPr>
             </a:pPr>
             <a:r>
-              <a:t>CASCADE INSURANCE SERVICES INC DBA: CASC…</a:t>
+              <a:t>AMC Agents LLC</a:t>
             </a:r>
           </a:p>
         </p:txBody>
@@ -42920,7 +42920,7 @@
               </a:defRPr>
             </a:pPr>
             <a:r>
-              <a:t>$1.3M</a:t>
+              <a:t>$1.4M</a:t>
             </a:r>
           </a:p>
         </p:txBody>
@@ -43035,7 +43035,7 @@
               </a:defRPr>
             </a:pPr>
             <a:r>
-              <a:t>Derrick L.</a:t>
+              <a:t>Derek J.</a:t>
             </a:r>
           </a:p>
         </p:txBody>
@@ -43071,7 +43071,7 @@
               </a:defRPr>
             </a:pPr>
             <a:r>
-              <a:t>AMC Agents LLC</a:t>
+              <a:t>CASCADE INSURANCE SERVICES INC DBA: CASC…</a:t>
             </a:r>
           </a:p>
         </p:txBody>
@@ -43107,7 +43107,7 @@
               </a:defRPr>
             </a:pPr>
             <a:r>
-              <a:t>$1.3M</a:t>
+              <a:t>$1.4M</a:t>
             </a:r>
           </a:p>
         </p:txBody>
@@ -43294,7 +43294,7 @@
               </a:defRPr>
             </a:pPr>
             <a:r>
-              <a:t>$1.2M</a:t>
+              <a:t>$1.3M</a:t>
             </a:r>
           </a:p>
         </p:txBody>
@@ -43409,7 +43409,7 @@
               </a:defRPr>
             </a:pPr>
             <a:r>
-              <a:t>Alexis B.</a:t>
+              <a:t>Ron D.</a:t>
             </a:r>
           </a:p>
         </p:txBody>
@@ -43445,7 +43445,7 @@
               </a:defRPr>
             </a:pPr>
             <a:r>
-              <a:t>A.S.I.A Inc</a:t>
+              <a:t>Valion Security LLC</a:t>
             </a:r>
           </a:p>
         </p:txBody>
@@ -43481,7 +43481,7 @@
               </a:defRPr>
             </a:pPr>
             <a:r>
-              <a:t>$1.0M</a:t>
+              <a:t>$997K</a:t>
             </a:r>
           </a:p>
         </p:txBody>
@@ -43596,7 +43596,7 @@
               </a:defRPr>
             </a:pPr>
             <a:r>
-              <a:t>Ron D.</a:t>
+              <a:t>Alexis B.</a:t>
             </a:r>
           </a:p>
         </p:txBody>
@@ -43632,7 +43632,7 @@
               </a:defRPr>
             </a:pPr>
             <a:r>
-              <a:t>Valion Security LLC</a:t>
+              <a:t>A.S.I.A Inc</a:t>
             </a:r>
           </a:p>
         </p:txBody>
@@ -43668,7 +43668,7 @@
               </a:defRPr>
             </a:pPr>
             <a:r>
-              <a:t>$1.0M</a:t>
+              <a:t>$980K</a:t>
             </a:r>
           </a:p>
         </p:txBody>
@@ -43783,7 +43783,7 @@
               </a:defRPr>
             </a:pPr>
             <a:r>
-              <a:t>Derek J.</a:t>
+              <a:t>Kurt B.</a:t>
             </a:r>
           </a:p>
         </p:txBody>
@@ -43819,7 +43819,7 @@
               </a:defRPr>
             </a:pPr>
             <a:r>
-              <a:t>Sedge Insurance Agency LLC</a:t>
+              <a:t>Fino Services LLC</a:t>
             </a:r>
           </a:p>
         </p:txBody>
@@ -43855,7 +43855,7 @@
               </a:defRPr>
             </a:pPr>
             <a:r>
-              <a:t>$919K</a:t>
+              <a:t>$896K</a:t>
             </a:r>
           </a:p>
         </p:txBody>
@@ -44042,7 +44042,7 @@
               </a:defRPr>
             </a:pPr>
             <a:r>
-              <a:t>$890K</a:t>
+              <a:t>$893K</a:t>
             </a:r>
           </a:p>
         </p:txBody>
@@ -44157,7 +44157,7 @@
               </a:defRPr>
             </a:pPr>
             <a:r>
-              <a:t>Kurt B.</a:t>
+              <a:t>Ron D.</a:t>
             </a:r>
           </a:p>
         </p:txBody>
@@ -44193,7 +44193,7 @@
               </a:defRPr>
             </a:pPr>
             <a:r>
-              <a:t>Fino Services LLC</a:t>
+              <a:t>Prestige International Insurance Group I…</a:t>
             </a:r>
           </a:p>
         </p:txBody>
@@ -44229,7 +44229,7 @@
               </a:defRPr>
             </a:pPr>
             <a:r>
-              <a:t>$884K</a:t>
+              <a:t>$797K</a:t>
             </a:r>
           </a:p>
         </p:txBody>
@@ -44380,7 +44380,7 @@
               </a:defRPr>
             </a:pPr>
             <a:r>
-              <a:t>Ewall Insurance Company</a:t>
+              <a:t>Vintage Insurance Agency Inc (The)</a:t>
             </a:r>
           </a:p>
         </p:txBody>
@@ -44416,7 +44416,7 @@
               </a:defRPr>
             </a:pPr>
             <a:r>
-              <a:t>$796K</a:t>
+              <a:t>$753K</a:t>
             </a:r>
           </a:p>
         </p:txBody>
@@ -44567,7 +44567,7 @@
               </a:defRPr>
             </a:pPr>
             <a:r>
-              <a:t>Vintage Insurance Agency Inc (The)</a:t>
+              <a:t>Ewall Insurance Company</a:t>
             </a:r>
           </a:p>
         </p:txBody>
@@ -44603,7 +44603,7 @@
               </a:defRPr>
             </a:pPr>
             <a:r>
-              <a:t>$753K</a:t>
+              <a:t>$665K</a:t>
             </a:r>
           </a:p>
         </p:txBody>
@@ -44718,7 +44718,7 @@
               </a:defRPr>
             </a:pPr>
             <a:r>
-              <a:t>Ron D.</a:t>
+              <a:t>Derrick L.</a:t>
             </a:r>
           </a:p>
         </p:txBody>
@@ -44754,7 +44754,7 @@
               </a:defRPr>
             </a:pPr>
             <a:r>
-              <a:t>Prestige International Insurance Group I…</a:t>
+              <a:t>Justin Wilson</a:t>
             </a:r>
           </a:p>
         </p:txBody>
@@ -44790,7 +44790,7 @@
               </a:defRPr>
             </a:pPr>
             <a:r>
-              <a:t>$752K</a:t>
+              <a:t>$640K</a:t>
             </a:r>
           </a:p>
         </p:txBody>
@@ -44905,7 +44905,7 @@
               </a:defRPr>
             </a:pPr>
             <a:r>
-              <a:t>Derrick L.</a:t>
+              <a:t>Derek J.</a:t>
             </a:r>
           </a:p>
         </p:txBody>
@@ -44941,7 +44941,7 @@
               </a:defRPr>
             </a:pPr>
             <a:r>
-              <a:t>Justin Wilson</a:t>
+              <a:t>Sedge Insurance Agency LLC</a:t>
             </a:r>
           </a:p>
         </p:txBody>
@@ -44977,7 +44977,7 @@
               </a:defRPr>
             </a:pPr>
             <a:r>
-              <a:t>$640K</a:t>
+              <a:t>$582K</a:t>
             </a:r>
           </a:p>
         </p:txBody>
@@ -45430,7 +45430,7 @@
               </a:defRPr>
             </a:pPr>
             <a:r>
-              <a:t>2146</a:t>
+              <a:t>2191</a:t>
             </a:r>
           </a:p>
         </p:txBody>
@@ -45617,7 +45617,7 @@
               </a:defRPr>
             </a:pPr>
             <a:r>
-              <a:t>2002</a:t>
+              <a:t>2032</a:t>
             </a:r>
           </a:p>
         </p:txBody>
@@ -45804,7 +45804,7 @@
               </a:defRPr>
             </a:pPr>
             <a:r>
-              <a:t>1502</a:t>
+              <a:t>1542</a:t>
             </a:r>
           </a:p>
         </p:txBody>
@@ -45991,7 +45991,7 @@
               </a:defRPr>
             </a:pPr>
             <a:r>
-              <a:t>1225</a:t>
+              <a:t>1259</a:t>
             </a:r>
           </a:p>
         </p:txBody>
@@ -46178,7 +46178,7 @@
               </a:defRPr>
             </a:pPr>
             <a:r>
-              <a:t>1150</a:t>
+              <a:t>1171</a:t>
             </a:r>
           </a:p>
         </p:txBody>
@@ -46365,7 +46365,7 @@
               </a:defRPr>
             </a:pPr>
             <a:r>
-              <a:t>996</a:t>
+              <a:t>1004</a:t>
             </a:r>
           </a:p>
         </p:txBody>
@@ -46552,7 +46552,7 @@
               </a:defRPr>
             </a:pPr>
             <a:r>
-              <a:t>954</a:t>
+              <a:t>972</a:t>
             </a:r>
           </a:p>
         </p:txBody>
@@ -46739,7 +46739,7 @@
               </a:defRPr>
             </a:pPr>
             <a:r>
-              <a:t>890</a:t>
+              <a:t>903</a:t>
             </a:r>
           </a:p>
         </p:txBody>
@@ -46926,7 +46926,7 @@
               </a:defRPr>
             </a:pPr>
             <a:r>
-              <a:t>680</a:t>
+              <a:t>690</a:t>
             </a:r>
           </a:p>
         </p:txBody>
@@ -47113,7 +47113,7 @@
               </a:defRPr>
             </a:pPr>
             <a:r>
-              <a:t>539</a:t>
+              <a:t>552</a:t>
             </a:r>
           </a:p>
         </p:txBody>
@@ -47300,7 +47300,7 @@
               </a:defRPr>
             </a:pPr>
             <a:r>
-              <a:t>520</a:t>
+              <a:t>525</a:t>
             </a:r>
           </a:p>
         </p:txBody>
@@ -47487,7 +47487,7 @@
               </a:defRPr>
             </a:pPr>
             <a:r>
-              <a:t>484</a:t>
+              <a:t>493</a:t>
             </a:r>
           </a:p>
         </p:txBody>
@@ -47674,7 +47674,7 @@
               </a:defRPr>
             </a:pPr>
             <a:r>
-              <a:t>434</a:t>
+              <a:t>447</a:t>
             </a:r>
           </a:p>
         </p:txBody>
@@ -47861,7 +47861,7 @@
               </a:defRPr>
             </a:pPr>
             <a:r>
-              <a:t>424</a:t>
+              <a:t>432</a:t>
             </a:r>
           </a:p>
         </p:txBody>
@@ -48048,7 +48048,7 @@
               </a:defRPr>
             </a:pPr>
             <a:r>
-              <a:t>377</a:t>
+              <a:t>384</a:t>
             </a:r>
           </a:p>
         </p:txBody>
@@ -48235,7 +48235,7 @@
               </a:defRPr>
             </a:pPr>
             <a:r>
-              <a:t>357</a:t>
+              <a:t>368</a:t>
             </a:r>
           </a:p>
         </p:txBody>
@@ -48422,7 +48422,7 @@
               </a:defRPr>
             </a:pPr>
             <a:r>
-              <a:t>350</a:t>
+              <a:t>358</a:t>
             </a:r>
           </a:p>
         </p:txBody>
@@ -48537,7 +48537,7 @@
               </a:defRPr>
             </a:pPr>
             <a:r>
-              <a:t>Kurt B.</a:t>
+              <a:t>Alexis B.</a:t>
             </a:r>
           </a:p>
         </p:txBody>
@@ -48573,7 +48573,7 @@
               </a:defRPr>
             </a:pPr>
             <a:r>
-              <a:t>The McClure Agency LLC</a:t>
+              <a:t>Stellar Management, Inc</a:t>
             </a:r>
           </a:p>
         </p:txBody>
@@ -48609,7 +48609,7 @@
               </a:defRPr>
             </a:pPr>
             <a:r>
-              <a:t>343</a:t>
+              <a:t>350</a:t>
             </a:r>
           </a:p>
         </p:txBody>
@@ -48724,7 +48724,7 @@
               </a:defRPr>
             </a:pPr>
             <a:r>
-              <a:t>Alexis B.</a:t>
+              <a:t>Kurt B.</a:t>
             </a:r>
           </a:p>
         </p:txBody>
@@ -48760,7 +48760,7 @@
               </a:defRPr>
             </a:pPr>
             <a:r>
-              <a:t>Stellar Management, Inc</a:t>
+              <a:t>The McClure Agency LLC</a:t>
             </a:r>
           </a:p>
         </p:txBody>
@@ -48796,7 +48796,7 @@
               </a:defRPr>
             </a:pPr>
             <a:r>
-              <a:t>338</a:t>
+              <a:t>346</a:t>
             </a:r>
           </a:p>
         </p:txBody>
@@ -48983,7 +48983,7 @@
               </a:defRPr>
             </a:pPr>
             <a:r>
-              <a:t>304</a:t>
+              <a:t>318</a:t>
             </a:r>
           </a:p>
         </p:txBody>

--- a/generated/Sales Dashboards/BD Rep Scoreboard.pptx
+++ b/generated/Sales Dashboards/BD Rep Scoreboard.pptx
@@ -1661,7 +1661,7 @@
           </a:p>
           <a:p>
             <a:r>
-              <a:t>- We are 53 days into a 91-day quarter.</a:t>
+              <a:t>- We are 54 days into a 91-day quarter.</a:t>
             </a:r>
           </a:p>
         </p:txBody>
@@ -4902,7 +4902,7 @@
               </a:defRPr>
             </a:pPr>
             <a:r>
-              <a:t>As of May 23, 2026  |  53 days into Q2  |  38 days remaining</a:t>
+              <a:t>As of May 24, 2026  |  54 days into Q2  |  37 days remaining</a:t>
             </a:r>
           </a:p>
         </p:txBody>
@@ -4938,7 +4938,7 @@
               </a:defRPr>
             </a:pPr>
             <a:r>
-              <a:t>Generated May 23, 2026</a:t>
+              <a:t>Generated May 24, 2026</a:t>
             </a:r>
           </a:p>
         </p:txBody>
@@ -5019,7 +5019,7 @@
               </a:defRPr>
             </a:pPr>
             <a:r>
-              <a:t>$19.8M</a:t>
+              <a:t>$19.7M</a:t>
             </a:r>
           </a:p>
         </p:txBody>
@@ -5055,7 +5055,7 @@
               </a:defRPr>
             </a:pPr>
             <a:r>
-              <a:t>Team GWP Q2 YTD  |  Proj. $34.0M</a:t>
+              <a:t>Team GWP Q2 YTD  |  Proj. $33.2M</a:t>
             </a:r>
           </a:p>
         </p:txBody>
@@ -5134,7 +5134,7 @@
               </a:defRPr>
             </a:pPr>
             <a:r>
-              <a:t>Pacing 184% of Q1 Final</a:t>
+              <a:t>Pacing 180% of Q1 Final</a:t>
             </a:r>
           </a:p>
         </p:txBody>
@@ -5411,7 +5411,7 @@
               </a:defRPr>
             </a:pPr>
             <a:r>
-              <a:t>30,471</a:t>
+              <a:t>30,528</a:t>
             </a:r>
           </a:p>
         </p:txBody>
@@ -5526,7 +5526,7 @@
               </a:defRPr>
             </a:pPr>
             <a:r>
-              <a:t>Pacing 114% of Q1 Final</a:t>
+              <a:t>Pacing 112% of Q1 Final</a:t>
             </a:r>
           </a:p>
         </p:txBody>
@@ -5758,7 +5758,7 @@
               </a:defRPr>
             </a:pPr>
             <a:r>
-              <a:t>▲ $4.0M vs Apr pace</a:t>
+              <a:t>▲ $3.3M vs Apr pace</a:t>
             </a:r>
           </a:p>
         </p:txBody>
@@ -5830,7 +5830,7 @@
               </a:defRPr>
             </a:pPr>
             <a:r>
-              <a:t>▲ 12906 vs Apr (17565)</a:t>
+              <a:t>▲ 12967 vs Apr (17561)</a:t>
             </a:r>
           </a:p>
         </p:txBody>
@@ -6071,7 +6071,7 @@
               </a:defRPr>
             </a:pPr>
             <a:r>
-              <a:t>$27.2M</a:t>
+              <a:t>$27.3M</a:t>
             </a:r>
           </a:p>
         </p:txBody>
@@ -6107,7 +6107,7 @@
               </a:defRPr>
             </a:pPr>
             <a:r>
-              <a:t>New Business (70%)</a:t>
+              <a:t>New Business (71%)</a:t>
             </a:r>
           </a:p>
         </p:txBody>
@@ -6600,7 +6600,7 @@
               </a:defRPr>
             </a:pPr>
             <a:r>
-              <a:t>45,795</a:t>
+              <a:t>45,794</a:t>
             </a:r>
           </a:p>
         </p:txBody>
@@ -6787,7 +6787,7 @@
               </a:defRPr>
             </a:pPr>
             <a:r>
-              <a:t>MTD (May):  $10.14M written  ·  $13.67M pace  ·  23/31 days elapsed</a:t>
+              <a:t>MTD (May):  $10.06M written  ·  $12.99M pace  ·  24/31 days elapsed</a:t>
             </a:r>
           </a:p>
         </p:txBody>
@@ -6952,7 +6952,7 @@
               </a:defRPr>
             </a:pPr>
             <a:r>
-              <a:t>Largest fleet policies written Apr 1–May 23  ·  Ranked by premium  ·  Fleet = 4+ power units</a:t>
+              <a:t>Largest fleet policies written Apr 1–May 24  ·  Ranked by premium  ·  Fleet = 4+ power units</a:t>
             </a:r>
           </a:p>
         </p:txBody>
@@ -6988,7 +6988,7 @@
               </a:defRPr>
             </a:pPr>
             <a:r>
-              <a:t>Generated May 23, 2026</a:t>
+              <a:t>Generated May 24, 2026</a:t>
             </a:r>
           </a:p>
         </p:txBody>
@@ -11750,7 +11750,7 @@
               </a:defRPr>
             </a:pPr>
             <a:r>
-              <a:t>Q2 Fleet Total: 217 fleet binds  ·  $20.0M bound premium</a:t>
+              <a:t>Q2 Fleet Total: 216 fleet binds  ·  $19.9M bound premium</a:t>
             </a:r>
           </a:p>
         </p:txBody>
@@ -11891,7 +11891,7 @@
               </a:defRPr>
             </a:pPr>
             <a:r>
-              <a:t>Ranked by bound GWP written  ·  Mint-shaded row = new vs last week’s deck  ·  Apr 1–May 23  ·  Individual producers</a:t>
+              <a:t>Ranked by bound GWP written  ·  Mint-shaded row = new vs last week’s deck  ·  Apr 1–May 24  ·  Individual producers</a:t>
             </a:r>
           </a:p>
         </p:txBody>
@@ -11927,7 +11927,7 @@
               </a:defRPr>
             </a:pPr>
             <a:r>
-              <a:t>Generated May 23, 2026</a:t>
+              <a:t>Generated May 24, 2026</a:t>
             </a:r>
           </a:p>
         </p:txBody>
@@ -12301,7 +12301,7 @@
               </a:defRPr>
             </a:pPr>
             <a:r>
-              <a:t>$4.1M</a:t>
+              <a:t>$4.2M</a:t>
             </a:r>
           </a:p>
         </p:txBody>
@@ -13423,7 +13423,7 @@
               </a:defRPr>
             </a:pPr>
             <a:r>
-              <a:t>$1.2M</a:t>
+              <a:t>$1.3M</a:t>
             </a:r>
           </a:p>
         </p:txBody>
@@ -15854,7 +15854,7 @@
               </a:defRPr>
             </a:pPr>
             <a:r>
-              <a:t>$503K</a:t>
+              <a:t>$507K</a:t>
             </a:r>
           </a:p>
         </p:txBody>
@@ -17557,6 +17557,193 @@
             <a:avLst/>
           </a:prstGeom>
           <a:solidFill>
+            <a:srgbClr val="FFFFFF"/>
+          </a:solidFill>
+          <a:ln>
+            <a:noFill/>
+          </a:ln>
+        </p:spPr>
+        <p:style>
+          <a:lnRef idx="1">
+            <a:schemeClr val="accent1"/>
+          </a:lnRef>
+          <a:fillRef idx="3">
+            <a:schemeClr val="accent1"/>
+          </a:fillRef>
+          <a:effectRef idx="2">
+            <a:schemeClr val="accent1"/>
+          </a:effectRef>
+          <a:fontRef idx="minor">
+            <a:schemeClr val="lt1"/>
+          </a:fontRef>
+        </p:style>
+        <p:txBody>
+          <a:bodyPr rtlCol="0" anchor="ctr"/>
+          <a:lstStyle/>
+          <a:p>
+            <a:pPr algn="ctr"/>
+          </a:p>
+        </p:txBody>
+      </p:sp>
+      <p:sp>
+        <p:nvSpPr>
+          <p:cNvPr id="157" name="TextBox 156"/>
+          <p:cNvSpPr txBox="1"/>
+          <p:nvPr/>
+        </p:nvSpPr>
+        <p:spPr>
+          <a:xfrm>
+            <a:off x="6254496" y="3145536"/>
+            <a:ext cx="411480" cy="237744"/>
+          </a:xfrm>
+          <a:prstGeom prst="rect">
+            <a:avLst/>
+          </a:prstGeom>
+          <a:noFill/>
+        </p:spPr>
+        <p:txBody>
+          <a:bodyPr wrap="none">
+            <a:spAutoFit/>
+          </a:bodyPr>
+          <a:lstStyle/>
+          <a:p>
+            <a:pPr algn="ctr">
+              <a:defRPr sz="950" b="1">
+                <a:solidFill>
+                  <a:srgbClr val="6B7280"/>
+                </a:solidFill>
+                <a:latin typeface="Calibri"/>
+              </a:defRPr>
+            </a:pPr>
+            <a:r>
+              <a:t>29</a:t>
+            </a:r>
+          </a:p>
+        </p:txBody>
+      </p:sp>
+      <p:sp>
+        <p:nvSpPr>
+          <p:cNvPr id="158" name="TextBox 157"/>
+          <p:cNvSpPr txBox="1"/>
+          <p:nvPr/>
+        </p:nvSpPr>
+        <p:spPr>
+          <a:xfrm>
+            <a:off x="6665976" y="3145536"/>
+            <a:ext cx="1920240" cy="237744"/>
+          </a:xfrm>
+          <a:prstGeom prst="rect">
+            <a:avLst/>
+          </a:prstGeom>
+          <a:noFill/>
+        </p:spPr>
+        <p:txBody>
+          <a:bodyPr wrap="none">
+            <a:spAutoFit/>
+          </a:bodyPr>
+          <a:lstStyle/>
+          <a:p>
+            <a:pPr algn="l">
+              <a:defRPr sz="950" b="1">
+                <a:solidFill>
+                  <a:srgbClr val="111827"/>
+                </a:solidFill>
+                <a:latin typeface="Calibri"/>
+              </a:defRPr>
+            </a:pPr>
+            <a:r>
+              <a:t>Daliborka Savovic</a:t>
+            </a:r>
+          </a:p>
+        </p:txBody>
+      </p:sp>
+      <p:sp>
+        <p:nvSpPr>
+          <p:cNvPr id="159" name="TextBox 158"/>
+          <p:cNvSpPr txBox="1"/>
+          <p:nvPr/>
+        </p:nvSpPr>
+        <p:spPr>
+          <a:xfrm>
+            <a:off x="8586216" y="3145536"/>
+            <a:ext cx="2459736" cy="237744"/>
+          </a:xfrm>
+          <a:prstGeom prst="rect">
+            <a:avLst/>
+          </a:prstGeom>
+          <a:noFill/>
+        </p:spPr>
+        <p:txBody>
+          <a:bodyPr wrap="none">
+            <a:spAutoFit/>
+          </a:bodyPr>
+          <a:lstStyle/>
+          <a:p>
+            <a:pPr algn="l">
+              <a:defRPr sz="950" b="0">
+                <a:solidFill>
+                  <a:srgbClr val="6B7280"/>
+                </a:solidFill>
+                <a:latin typeface="Calibri"/>
+              </a:defRPr>
+            </a:pPr>
+            <a:r>
+              <a:t>Alpha Trucking Insurance Agency In…</a:t>
+            </a:r>
+          </a:p>
+        </p:txBody>
+      </p:sp>
+      <p:sp>
+        <p:nvSpPr>
+          <p:cNvPr id="160" name="TextBox 159"/>
+          <p:cNvSpPr txBox="1"/>
+          <p:nvPr/>
+        </p:nvSpPr>
+        <p:spPr>
+          <a:xfrm>
+            <a:off x="11045952" y="3145536"/>
+            <a:ext cx="914400" cy="237744"/>
+          </a:xfrm>
+          <a:prstGeom prst="rect">
+            <a:avLst/>
+          </a:prstGeom>
+          <a:noFill/>
+        </p:spPr>
+        <p:txBody>
+          <a:bodyPr wrap="none">
+            <a:spAutoFit/>
+          </a:bodyPr>
+          <a:lstStyle/>
+          <a:p>
+            <a:pPr algn="ctr">
+              <a:defRPr sz="950" b="1">
+                <a:solidFill>
+                  <a:srgbClr val="111827"/>
+                </a:solidFill>
+                <a:latin typeface="Calibri"/>
+              </a:defRPr>
+            </a:pPr>
+            <a:r>
+              <a:t>$396K</a:t>
+            </a:r>
+          </a:p>
+        </p:txBody>
+      </p:sp>
+      <p:sp>
+        <p:nvSpPr>
+          <p:cNvPr id="161" name="Rectangle 160"/>
+          <p:cNvSpPr/>
+          <p:nvPr/>
+        </p:nvSpPr>
+        <p:spPr>
+          <a:xfrm>
+            <a:off x="6254496" y="3383280"/>
+            <a:ext cx="5705856" cy="256032"/>
+          </a:xfrm>
+          <a:prstGeom prst="rect">
+            <a:avLst/>
+          </a:prstGeom>
+          <a:solidFill>
             <a:srgbClr val="D1FAE5"/>
           </a:solidFill>
           <a:ln>
@@ -17587,13 +17774,13 @@
       </p:sp>
       <p:sp>
         <p:nvSpPr>
-          <p:cNvPr id="157" name="TextBox 156"/>
-          <p:cNvSpPr txBox="1"/>
-          <p:nvPr/>
-        </p:nvSpPr>
-        <p:spPr>
-          <a:xfrm>
-            <a:off x="6254496" y="3145536"/>
+          <p:cNvPr id="162" name="TextBox 161"/>
+          <p:cNvSpPr txBox="1"/>
+          <p:nvPr/>
+        </p:nvSpPr>
+        <p:spPr>
+          <a:xfrm>
+            <a:off x="6254496" y="3401568"/>
             <a:ext cx="411480" cy="237744"/>
           </a:xfrm>
           <a:prstGeom prst="rect">
@@ -17616,20 +17803,20 @@
               </a:defRPr>
             </a:pPr>
             <a:r>
-              <a:t>29</a:t>
-            </a:r>
-          </a:p>
-        </p:txBody>
-      </p:sp>
-      <p:sp>
-        <p:nvSpPr>
-          <p:cNvPr id="158" name="TextBox 157"/>
-          <p:cNvSpPr txBox="1"/>
-          <p:nvPr/>
-        </p:nvSpPr>
-        <p:spPr>
-          <a:xfrm>
-            <a:off x="6665976" y="3145536"/>
+              <a:t>30</a:t>
+            </a:r>
+          </a:p>
+        </p:txBody>
+      </p:sp>
+      <p:sp>
+        <p:nvSpPr>
+          <p:cNvPr id="163" name="TextBox 162"/>
+          <p:cNvSpPr txBox="1"/>
+          <p:nvPr/>
+        </p:nvSpPr>
+        <p:spPr>
+          <a:xfrm>
+            <a:off x="6665976" y="3401568"/>
             <a:ext cx="1920240" cy="237744"/>
           </a:xfrm>
           <a:prstGeom prst="rect">
@@ -17659,13 +17846,13 @@
       </p:sp>
       <p:sp>
         <p:nvSpPr>
-          <p:cNvPr id="159" name="TextBox 158"/>
-          <p:cNvSpPr txBox="1"/>
-          <p:nvPr/>
-        </p:nvSpPr>
-        <p:spPr>
-          <a:xfrm>
-            <a:off x="8586216" y="3145536"/>
+          <p:cNvPr id="164" name="TextBox 163"/>
+          <p:cNvSpPr txBox="1"/>
+          <p:nvPr/>
+        </p:nvSpPr>
+        <p:spPr>
+          <a:xfrm>
+            <a:off x="8586216" y="3401568"/>
             <a:ext cx="2459736" cy="237744"/>
           </a:xfrm>
           <a:prstGeom prst="rect">
@@ -17695,193 +17882,6 @@
       </p:sp>
       <p:sp>
         <p:nvSpPr>
-          <p:cNvPr id="160" name="TextBox 159"/>
-          <p:cNvSpPr txBox="1"/>
-          <p:nvPr/>
-        </p:nvSpPr>
-        <p:spPr>
-          <a:xfrm>
-            <a:off x="11045952" y="3145536"/>
-            <a:ext cx="914400" cy="237744"/>
-          </a:xfrm>
-          <a:prstGeom prst="rect">
-            <a:avLst/>
-          </a:prstGeom>
-          <a:noFill/>
-        </p:spPr>
-        <p:txBody>
-          <a:bodyPr wrap="none">
-            <a:spAutoFit/>
-          </a:bodyPr>
-          <a:lstStyle/>
-          <a:p>
-            <a:pPr algn="ctr">
-              <a:defRPr sz="950" b="1">
-                <a:solidFill>
-                  <a:srgbClr val="111827"/>
-                </a:solidFill>
-                <a:latin typeface="Calibri"/>
-              </a:defRPr>
-            </a:pPr>
-            <a:r>
-              <a:t>$388K</a:t>
-            </a:r>
-          </a:p>
-        </p:txBody>
-      </p:sp>
-      <p:sp>
-        <p:nvSpPr>
-          <p:cNvPr id="161" name="Rectangle 160"/>
-          <p:cNvSpPr/>
-          <p:nvPr/>
-        </p:nvSpPr>
-        <p:spPr>
-          <a:xfrm>
-            <a:off x="6254496" y="3383280"/>
-            <a:ext cx="5705856" cy="256032"/>
-          </a:xfrm>
-          <a:prstGeom prst="rect">
-            <a:avLst/>
-          </a:prstGeom>
-          <a:solidFill>
-            <a:srgbClr val="F9FAFB"/>
-          </a:solidFill>
-          <a:ln>
-            <a:noFill/>
-          </a:ln>
-        </p:spPr>
-        <p:style>
-          <a:lnRef idx="1">
-            <a:schemeClr val="accent1"/>
-          </a:lnRef>
-          <a:fillRef idx="3">
-            <a:schemeClr val="accent1"/>
-          </a:fillRef>
-          <a:effectRef idx="2">
-            <a:schemeClr val="accent1"/>
-          </a:effectRef>
-          <a:fontRef idx="minor">
-            <a:schemeClr val="lt1"/>
-          </a:fontRef>
-        </p:style>
-        <p:txBody>
-          <a:bodyPr rtlCol="0" anchor="ctr"/>
-          <a:lstStyle/>
-          <a:p>
-            <a:pPr algn="ctr"/>
-          </a:p>
-        </p:txBody>
-      </p:sp>
-      <p:sp>
-        <p:nvSpPr>
-          <p:cNvPr id="162" name="TextBox 161"/>
-          <p:cNvSpPr txBox="1"/>
-          <p:nvPr/>
-        </p:nvSpPr>
-        <p:spPr>
-          <a:xfrm>
-            <a:off x="6254496" y="3401568"/>
-            <a:ext cx="411480" cy="237744"/>
-          </a:xfrm>
-          <a:prstGeom prst="rect">
-            <a:avLst/>
-          </a:prstGeom>
-          <a:noFill/>
-        </p:spPr>
-        <p:txBody>
-          <a:bodyPr wrap="none">
-            <a:spAutoFit/>
-          </a:bodyPr>
-          <a:lstStyle/>
-          <a:p>
-            <a:pPr algn="ctr">
-              <a:defRPr sz="950" b="1">
-                <a:solidFill>
-                  <a:srgbClr val="6B7280"/>
-                </a:solidFill>
-                <a:latin typeface="Calibri"/>
-              </a:defRPr>
-            </a:pPr>
-            <a:r>
-              <a:t>30</a:t>
-            </a:r>
-          </a:p>
-        </p:txBody>
-      </p:sp>
-      <p:sp>
-        <p:nvSpPr>
-          <p:cNvPr id="163" name="TextBox 162"/>
-          <p:cNvSpPr txBox="1"/>
-          <p:nvPr/>
-        </p:nvSpPr>
-        <p:spPr>
-          <a:xfrm>
-            <a:off x="6665976" y="3401568"/>
-            <a:ext cx="1920240" cy="237744"/>
-          </a:xfrm>
-          <a:prstGeom prst="rect">
-            <a:avLst/>
-          </a:prstGeom>
-          <a:noFill/>
-        </p:spPr>
-        <p:txBody>
-          <a:bodyPr wrap="none">
-            <a:spAutoFit/>
-          </a:bodyPr>
-          <a:lstStyle/>
-          <a:p>
-            <a:pPr algn="l">
-              <a:defRPr sz="950" b="1">
-                <a:solidFill>
-                  <a:srgbClr val="111827"/>
-                </a:solidFill>
-                <a:latin typeface="Calibri"/>
-              </a:defRPr>
-            </a:pPr>
-            <a:r>
-              <a:t>Daliborka Savovic</a:t>
-            </a:r>
-          </a:p>
-        </p:txBody>
-      </p:sp>
-      <p:sp>
-        <p:nvSpPr>
-          <p:cNvPr id="164" name="TextBox 163"/>
-          <p:cNvSpPr txBox="1"/>
-          <p:nvPr/>
-        </p:nvSpPr>
-        <p:spPr>
-          <a:xfrm>
-            <a:off x="8586216" y="3401568"/>
-            <a:ext cx="2459736" cy="237744"/>
-          </a:xfrm>
-          <a:prstGeom prst="rect">
-            <a:avLst/>
-          </a:prstGeom>
-          <a:noFill/>
-        </p:spPr>
-        <p:txBody>
-          <a:bodyPr wrap="none">
-            <a:spAutoFit/>
-          </a:bodyPr>
-          <a:lstStyle/>
-          <a:p>
-            <a:pPr algn="l">
-              <a:defRPr sz="950" b="0">
-                <a:solidFill>
-                  <a:srgbClr val="6B7280"/>
-                </a:solidFill>
-                <a:latin typeface="Calibri"/>
-              </a:defRPr>
-            </a:pPr>
-            <a:r>
-              <a:t>Alpha Trucking Insurance Agency In…</a:t>
-            </a:r>
-          </a:p>
-        </p:txBody>
-      </p:sp>
-      <p:sp>
-        <p:nvSpPr>
           <p:cNvPr id="165" name="TextBox 164"/>
           <p:cNvSpPr txBox="1"/>
           <p:nvPr/>
@@ -17911,7 +17911,7 @@
               </a:defRPr>
             </a:pPr>
             <a:r>
-              <a:t>$380K</a:t>
+              <a:t>$388K</a:t>
             </a:r>
           </a:p>
         </p:txBody>
@@ -19922,7 +19922,7 @@
               </a:defRPr>
             </a:pPr>
             <a:r>
-              <a:t>Q2 2026 YTD (Apr 1–May 23)  |  Green = on target  |  Amber = at risk  |  Red = behind  |  Goal: ≥40 acts/wk  |  Ranked by composite OKR score</a:t>
+              <a:t>Q2 2026 YTD (Apr 1–May 24)  |  Green = on target  |  Amber = at risk  |  Red = behind  |  Goal: ≥40 acts/wk  |  Ranked by composite OKR score</a:t>
             </a:r>
           </a:p>
         </p:txBody>
@@ -19958,7 +19958,7 @@
               </a:defRPr>
             </a:pPr>
             <a:r>
-              <a:t>Generated May 23, 2026</a:t>
+              <a:t>Generated May 24, 2026</a:t>
             </a:r>
           </a:p>
         </p:txBody>
@@ -20123,7 +20123,7 @@
               </a:defRPr>
             </a:pPr>
             <a:r>
-              <a:t>Q2 2026 YTD (Apr 1–May 23)  |  Green = on target  |  Amber = at risk  |  Red = behind  |  Goal: ≥50 acts/wk  |  Ranked by composite OKR score</a:t>
+              <a:t>Q2 2026 YTD (Apr 1–May 24)  |  Green = on target  |  Amber = at risk  |  Red = behind  |  Goal: ≥50 acts/wk  |  Ranked by composite OKR score</a:t>
             </a:r>
           </a:p>
         </p:txBody>
@@ -20159,7 +20159,7 @@
               </a:defRPr>
             </a:pPr>
             <a:r>
-              <a:t>Generated May 23, 2026</a:t>
+              <a:t>Generated May 24, 2026</a:t>
             </a:r>
           </a:p>
         </p:txBody>
@@ -20324,7 +20324,7 @@
               </a:defRPr>
             </a:pPr>
             <a:r>
-              <a:t>Q2 YTD  |  Apr 1–May 23  |  BDMs Only  |  Goal: 40 acts/wk  |  Emails excluded</a:t>
+              <a:t>Q2 YTD  |  Apr 1–May 24  |  BDMs Only  |  Goal: 40 acts/wk  |  Emails excluded</a:t>
             </a:r>
           </a:p>
         </p:txBody>
@@ -20360,7 +20360,7 @@
               </a:defRPr>
             </a:pPr>
             <a:r>
-              <a:t>Generated May 23, 2026</a:t>
+              <a:t>Generated May 24, 2026</a:t>
             </a:r>
           </a:p>
         </p:txBody>
@@ -20691,7 +20691,7 @@
               </a:defRPr>
             </a:pPr>
             <a:r>
-              <a:t>May 18-23</a:t>
+              <a:t>May 18-24</a:t>
             </a:r>
           </a:p>
         </p:txBody>
@@ -26935,7 +26935,7 @@
               </a:defRPr>
             </a:pPr>
             <a:r>
-              <a:t>Q2 YTD  |  Apr 1–May 23  |  BDAs Only  |  Goal: 50 acts/wk  |  Emails excluded</a:t>
+              <a:t>Q2 YTD  |  Apr 1–May 24  |  BDAs Only  |  Goal: 50 acts/wk  |  Emails excluded</a:t>
             </a:r>
           </a:p>
         </p:txBody>
@@ -26971,7 +26971,7 @@
               </a:defRPr>
             </a:pPr>
             <a:r>
-              <a:t>Generated May 23, 2026</a:t>
+              <a:t>Generated May 24, 2026</a:t>
             </a:r>
           </a:p>
         </p:txBody>
@@ -27302,7 +27302,7 @@
               </a:defRPr>
             </a:pPr>
             <a:r>
-              <a:t>May 18-23</a:t>
+              <a:t>May 18-24</a:t>
             </a:r>
           </a:p>
         </p:txBody>
@@ -32367,7 +32367,7 @@
               </a:defRPr>
             </a:pPr>
             <a:r>
-              <a:t>Generated May 23, 2026</a:t>
+              <a:t>Generated May 24, 2026</a:t>
             </a:r>
           </a:p>
         </p:txBody>
@@ -33058,7 +33058,7 @@
               </a:defRPr>
             </a:pPr>
             <a:r>
-              <a:t>6932</a:t>
+              <a:t>6943</a:t>
             </a:r>
           </a:p>
         </p:txBody>
@@ -33130,7 +33130,7 @@
               </a:defRPr>
             </a:pPr>
             <a:r>
-              <a:t>$16.5M</a:t>
+              <a:t>$16.4M</a:t>
             </a:r>
           </a:p>
         </p:txBody>
@@ -33497,7 +33497,7 @@
               </a:defRPr>
             </a:pPr>
             <a:r>
-              <a:t>3336</a:t>
+              <a:t>3341</a:t>
             </a:r>
           </a:p>
         </p:txBody>
@@ -33533,7 +33533,7 @@
               </a:defRPr>
             </a:pPr>
             <a:r>
-              <a:t>335</a:t>
+              <a:t>331</a:t>
             </a:r>
           </a:p>
         </p:txBody>
@@ -33569,7 +33569,7 @@
               </a:defRPr>
             </a:pPr>
             <a:r>
-              <a:t>$9.3M</a:t>
+              <a:t>$9.2M</a:t>
             </a:r>
           </a:p>
         </p:txBody>
@@ -33893,7 +33893,7 @@
               </a:defRPr>
             </a:pPr>
             <a:r>
-              <a:t>5294</a:t>
+              <a:t>5304</a:t>
             </a:r>
           </a:p>
         </p:txBody>
@@ -34332,7 +34332,7 @@
               </a:defRPr>
             </a:pPr>
             <a:r>
-              <a:t>3227</a:t>
+              <a:t>3236</a:t>
             </a:r>
           </a:p>
         </p:txBody>
@@ -34368,7 +34368,7 @@
               </a:defRPr>
             </a:pPr>
             <a:r>
-              <a:t>259</a:t>
+              <a:t>257</a:t>
             </a:r>
           </a:p>
         </p:txBody>
@@ -34476,7 +34476,7 @@
               </a:defRPr>
             </a:pPr>
             <a:r>
-              <a:t>$1.6M</a:t>
+              <a:t>$1.7M</a:t>
             </a:r>
           </a:p>
         </p:txBody>
@@ -34728,7 +34728,7 @@
               </a:defRPr>
             </a:pPr>
             <a:r>
-              <a:t>1802</a:t>
+              <a:t>1809</a:t>
             </a:r>
           </a:p>
         </p:txBody>
@@ -34764,7 +34764,7 @@
               </a:defRPr>
             </a:pPr>
             <a:r>
-              <a:t>126</a:t>
+              <a:t>127</a:t>
             </a:r>
           </a:p>
         </p:txBody>
@@ -35246,7 +35246,7 @@
               </a:defRPr>
             </a:pPr>
             <a:r>
-              <a:t>3932</a:t>
+              <a:t>3937</a:t>
             </a:r>
           </a:p>
         </p:txBody>
@@ -35642,7 +35642,7 @@
               </a:defRPr>
             </a:pPr>
             <a:r>
-              <a:t>2675</a:t>
+              <a:t>2682</a:t>
             </a:r>
           </a:p>
         </p:txBody>
@@ -35786,7 +35786,7 @@
               </a:defRPr>
             </a:pPr>
             <a:r>
-              <a:t>$224K</a:t>
+              <a:t>$246K</a:t>
             </a:r>
           </a:p>
         </p:txBody>
@@ -36081,7 +36081,7 @@
               </a:defRPr>
             </a:pPr>
             <a:r>
-              <a:t>1560</a:t>
+              <a:t>1561</a:t>
             </a:r>
           </a:p>
         </p:txBody>
@@ -36477,7 +36477,7 @@
               </a:defRPr>
             </a:pPr>
             <a:r>
-              <a:t>909</a:t>
+              <a:t>910</a:t>
             </a:r>
           </a:p>
         </p:txBody>
@@ -36513,7 +36513,7 @@
               </a:defRPr>
             </a:pPr>
             <a:r>
-              <a:t>52</a:t>
+              <a:t>51</a:t>
             </a:r>
           </a:p>
         </p:txBody>
@@ -37434,7 +37434,7 @@
               </a:defRPr>
             </a:pPr>
             <a:r>
-              <a:t>7404</a:t>
+              <a:t>7416</a:t>
             </a:r>
           </a:p>
         </p:txBody>
@@ -37470,7 +37470,7 @@
               </a:defRPr>
             </a:pPr>
             <a:r>
-              <a:t>288</a:t>
+              <a:t>287</a:t>
             </a:r>
           </a:p>
         </p:txBody>
@@ -38193,7 +38193,7 @@
               </a:defRPr>
             </a:pPr>
             <a:r>
-              <a:t>Retail-vertical agencies in each rep's HubSpot portfolio with zero 2026 submissions  |  Refreshed 2026-05-23</a:t>
+              <a:t>Retail-vertical agencies in each rep's HubSpot portfolio with zero 2026 submissions  |  Refreshed 2026-05-24</a:t>
             </a:r>
           </a:p>
         </p:txBody>
@@ -38229,7 +38229,7 @@
               </a:defRPr>
             </a:pPr>
             <a:r>
-              <a:t>Generated May 23, 2026</a:t>
+              <a:t>Generated May 24, 2026</a:t>
             </a:r>
           </a:p>
         </p:txBody>
@@ -40770,7 +40770,7 @@
               </a:defRPr>
             </a:pPr>
             <a:r>
-              <a:t>Generated May 23, 2026</a:t>
+              <a:t>Generated May 24, 2026</a:t>
             </a:r>
           </a:p>
         </p:txBody>
@@ -40935,7 +40935,7 @@
               </a:defRPr>
             </a:pPr>
             <a:r>
-              <a:t>Ranked by Q2 GWP (left) and Q2 Submissions (right)  ·  Mint-shaded row = new vs last week’s deck  ·  Apr 1–May 23</a:t>
+              <a:t>Ranked by Q2 GWP (left) and Q2 Submissions (right)  ·  Mint-shaded row = new vs last week’s deck  ·  Apr 1–May 24</a:t>
             </a:r>
           </a:p>
         </p:txBody>
@@ -40971,7 +40971,7 @@
               </a:defRPr>
             </a:pPr>
             <a:r>
-              <a:t>Generated May 23, 2026</a:t>
+              <a:t>Generated May 24, 2026</a:t>
             </a:r>
           </a:p>
         </p:txBody>
@@ -41424,7 +41424,7 @@
               </a:defRPr>
             </a:pPr>
             <a:r>
-              <a:t>$3.1M</a:t>
+              <a:t>$3.0M</a:t>
             </a:r>
           </a:p>
         </p:txBody>
@@ -41575,7 +41575,7 @@
               </a:defRPr>
             </a:pPr>
             <a:r>
-              <a:t>Jagdeep Singh Insurance Agency, Inc</a:t>
+              <a:t>Reliance Partners, LLC</a:t>
             </a:r>
           </a:p>
         </p:txBody>
@@ -41726,7 +41726,7 @@
               </a:defRPr>
             </a:pPr>
             <a:r>
-              <a:t>Derek J.</a:t>
+              <a:t>Christopher H.</a:t>
             </a:r>
           </a:p>
         </p:txBody>
@@ -41762,7 +41762,7 @@
               </a:defRPr>
             </a:pPr>
             <a:r>
-              <a:t>Reliance Partners, LLC</a:t>
+              <a:t>Commercial Trucking Insurance Agency LLC</a:t>
             </a:r>
           </a:p>
         </p:txBody>
@@ -41913,7 +41913,7 @@
               </a:defRPr>
             </a:pPr>
             <a:r>
-              <a:t>Christopher H.</a:t>
+              <a:t>Derek J.</a:t>
             </a:r>
           </a:p>
         </p:txBody>
@@ -41949,7 +41949,7 @@
               </a:defRPr>
             </a:pPr>
             <a:r>
-              <a:t>Commercial Trucking Insurance Agency LLC</a:t>
+              <a:t>Jagdeep Singh Insurance Agency, Inc</a:t>
             </a:r>
           </a:p>
         </p:txBody>
@@ -41985,7 +41985,7 @@
               </a:defRPr>
             </a:pPr>
             <a:r>
-              <a:t>$1.9M</a:t>
+              <a:t>$1.8M</a:t>
             </a:r>
           </a:p>
         </p:txBody>
@@ -42172,7 +42172,7 @@
               </a:defRPr>
             </a:pPr>
             <a:r>
-              <a:t>$1.7M</a:t>
+              <a:t>$1.6M</a:t>
             </a:r>
           </a:p>
         </p:txBody>
@@ -42848,7 +42848,7 @@
               </a:defRPr>
             </a:pPr>
             <a:r>
-              <a:t>Derrick L.</a:t>
+              <a:t>Derek J.</a:t>
             </a:r>
           </a:p>
         </p:txBody>
@@ -42884,7 +42884,7 @@
               </a:defRPr>
             </a:pPr>
             <a:r>
-              <a:t>AMC Agents LLC</a:t>
+              <a:t>CASCADE INSURANCE SERVICES INC DBA: CASC…</a:t>
             </a:r>
           </a:p>
         </p:txBody>
@@ -43035,7 +43035,7 @@
               </a:defRPr>
             </a:pPr>
             <a:r>
-              <a:t>Derek J.</a:t>
+              <a:t>Derrick L.</a:t>
             </a:r>
           </a:p>
         </p:txBody>
@@ -43071,7 +43071,7 @@
               </a:defRPr>
             </a:pPr>
             <a:r>
-              <a:t>CASCADE INSURANCE SERVICES INC DBA: CASC…</a:t>
+              <a:t>AMC Agents LLC</a:t>
             </a:r>
           </a:p>
         </p:txBody>
@@ -43668,7 +43668,7 @@
               </a:defRPr>
             </a:pPr>
             <a:r>
-              <a:t>$980K</a:t>
+              <a:t>$981K</a:t>
             </a:r>
           </a:p>
         </p:txBody>
@@ -45430,7 +45430,7 @@
               </a:defRPr>
             </a:pPr>
             <a:r>
-              <a:t>2191</a:t>
+              <a:t>2193</a:t>
             </a:r>
           </a:p>
         </p:txBody>
@@ -45617,7 +45617,7 @@
               </a:defRPr>
             </a:pPr>
             <a:r>
-              <a:t>2032</a:t>
+              <a:t>2039</a:t>
             </a:r>
           </a:p>
         </p:txBody>
@@ -45804,7 +45804,7 @@
               </a:defRPr>
             </a:pPr>
             <a:r>
-              <a:t>1542</a:t>
+              <a:t>1543</a:t>
             </a:r>
           </a:p>
         </p:txBody>
@@ -46365,7 +46365,7 @@
               </a:defRPr>
             </a:pPr>
             <a:r>
-              <a:t>1004</a:t>
+              <a:t>1008</a:t>
             </a:r>
           </a:p>
         </p:txBody>
@@ -46552,7 +46552,7 @@
               </a:defRPr>
             </a:pPr>
             <a:r>
-              <a:t>972</a:t>
+              <a:t>974</a:t>
             </a:r>
           </a:p>
         </p:txBody>
@@ -46739,7 +46739,7 @@
               </a:defRPr>
             </a:pPr>
             <a:r>
-              <a:t>903</a:t>
+              <a:t>909</a:t>
             </a:r>
           </a:p>
         </p:txBody>
@@ -47487,7 +47487,7 @@
               </a:defRPr>
             </a:pPr>
             <a:r>
-              <a:t>493</a:t>
+              <a:t>496</a:t>
             </a:r>
           </a:p>
         </p:txBody>
@@ -47674,7 +47674,7 @@
               </a:defRPr>
             </a:pPr>
             <a:r>
-              <a:t>447</a:t>
+              <a:t>450</a:t>
             </a:r>
           </a:p>
         </p:txBody>

--- a/generated/Sales Dashboards/BD Rep Scoreboard.pptx
+++ b/generated/Sales Dashboards/BD Rep Scoreboard.pptx
@@ -1661,7 +1661,7 @@
           </a:p>
           <a:p>
             <a:r>
-              <a:t>- We are 54 days into a 91-day quarter.</a:t>
+              <a:t>- We are 55 days into a 91-day quarter.</a:t>
             </a:r>
           </a:p>
         </p:txBody>
@@ -4902,7 +4902,7 @@
               </a:defRPr>
             </a:pPr>
             <a:r>
-              <a:t>As of May 24, 2026  |  54 days into Q2  |  37 days remaining</a:t>
+              <a:t>As of May 25, 2026  |  55 days into Q2  |  36 days remaining</a:t>
             </a:r>
           </a:p>
         </p:txBody>
@@ -4938,7 +4938,7 @@
               </a:defRPr>
             </a:pPr>
             <a:r>
-              <a:t>Generated May 24, 2026</a:t>
+              <a:t>Generated May 25, 2026</a:t>
             </a:r>
           </a:p>
         </p:txBody>
@@ -5055,7 +5055,7 @@
               </a:defRPr>
             </a:pPr>
             <a:r>
-              <a:t>Team GWP Q2 YTD  |  Proj. $33.2M</a:t>
+              <a:t>Team GWP Q2 YTD  |  Proj. $32.5M</a:t>
             </a:r>
           </a:p>
         </p:txBody>
@@ -5134,7 +5134,7 @@
               </a:defRPr>
             </a:pPr>
             <a:r>
-              <a:t>Pacing 180% of Q1 Final</a:t>
+              <a:t>Pacing 176% of Q1 Final</a:t>
             </a:r>
           </a:p>
         </p:txBody>
@@ -5215,7 +5215,7 @@
               </a:defRPr>
             </a:pPr>
             <a:r>
-              <a:t>87%</a:t>
+              <a:t>86%</a:t>
             </a:r>
           </a:p>
         </p:txBody>
@@ -5411,7 +5411,7 @@
               </a:defRPr>
             </a:pPr>
             <a:r>
-              <a:t>30,528</a:t>
+              <a:t>30,570</a:t>
             </a:r>
           </a:p>
         </p:txBody>
@@ -5526,7 +5526,7 @@
               </a:defRPr>
             </a:pPr>
             <a:r>
-              <a:t>Pacing 112% of Q1 Final</a:t>
+              <a:t>Pacing 110% of Q1 Final</a:t>
             </a:r>
           </a:p>
         </p:txBody>
@@ -5758,7 +5758,7 @@
               </a:defRPr>
             </a:pPr>
             <a:r>
-              <a:t>▲ $3.3M vs Apr pace</a:t>
+              <a:t>▲ $2.8M vs Apr pace</a:t>
             </a:r>
           </a:p>
         </p:txBody>
@@ -5794,7 +5794,7 @@
               </a:defRPr>
             </a:pPr>
             <a:r>
-              <a:t>▲ 39pp vs Q1 avg (48%)</a:t>
+              <a:t>▲ 38pp vs Q1 avg (48%)</a:t>
             </a:r>
           </a:p>
         </p:txBody>
@@ -5830,7 +5830,7 @@
               </a:defRPr>
             </a:pPr>
             <a:r>
-              <a:t>▲ 12967 vs Apr (17561)</a:t>
+              <a:t>▲ 13010 vs Apr (17560)</a:t>
             </a:r>
           </a:p>
         </p:txBody>
@@ -6071,7 +6071,7 @@
               </a:defRPr>
             </a:pPr>
             <a:r>
-              <a:t>$27.3M</a:t>
+              <a:t>$27.4M</a:t>
             </a:r>
           </a:p>
         </p:txBody>
@@ -6600,7 +6600,7 @@
               </a:defRPr>
             </a:pPr>
             <a:r>
-              <a:t>45,794</a:t>
+              <a:t>45,791</a:t>
             </a:r>
           </a:p>
         </p:txBody>
@@ -6787,7 +6787,7 @@
               </a:defRPr>
             </a:pPr>
             <a:r>
-              <a:t>MTD (May):  $10.06M written  ·  $12.99M pace  ·  24/31 days elapsed</a:t>
+              <a:t>MTD (May):  $10.03M written  ·  $12.43M pace  ·  25/31 days elapsed</a:t>
             </a:r>
           </a:p>
         </p:txBody>
@@ -6952,7 +6952,7 @@
               </a:defRPr>
             </a:pPr>
             <a:r>
-              <a:t>Largest fleet policies written Apr 1–May 24  ·  Ranked by premium  ·  Fleet = 4+ power units</a:t>
+              <a:t>Largest fleet policies written Apr 1–May 25  ·  Ranked by premium  ·  Fleet = 4+ power units</a:t>
             </a:r>
           </a:p>
         </p:txBody>
@@ -6988,7 +6988,7 @@
               </a:defRPr>
             </a:pPr>
             <a:r>
-              <a:t>Generated May 24, 2026</a:t>
+              <a:t>Generated May 25, 2026</a:t>
             </a:r>
           </a:p>
         </p:txBody>
@@ -11750,7 +11750,7 @@
               </a:defRPr>
             </a:pPr>
             <a:r>
-              <a:t>Q2 Fleet Total: 216 fleet binds  ·  $19.9M bound premium</a:t>
+              <a:t>Q2 Fleet Total: 217 fleet binds  ·  $20.0M bound premium</a:t>
             </a:r>
           </a:p>
         </p:txBody>
@@ -11891,7 +11891,7 @@
               </a:defRPr>
             </a:pPr>
             <a:r>
-              <a:t>Ranked by bound GWP written  ·  Mint-shaded row = new vs last week’s deck  ·  Apr 1–May 24  ·  Individual producers</a:t>
+              <a:t>Ranked by bound GWP written  ·  Mint-shaded row = new vs last week’s deck  ·  Apr 1–May 25  ·  Individual producers</a:t>
             </a:r>
           </a:p>
         </p:txBody>
@@ -11927,7 +11927,7 @@
               </a:defRPr>
             </a:pPr>
             <a:r>
-              <a:t>Generated May 24, 2026</a:t>
+              <a:t>Generated May 25, 2026</a:t>
             </a:r>
           </a:p>
         </p:txBody>
@@ -12488,7 +12488,7 @@
               </a:defRPr>
             </a:pPr>
             <a:r>
-              <a:t>$3.1M</a:t>
+              <a:t>$3.2M</a:t>
             </a:r>
           </a:p>
         </p:txBody>
@@ -13610,7 +13610,7 @@
               </a:defRPr>
             </a:pPr>
             <a:r>
-              <a:t>$1.0M</a:t>
+              <a:t>$1.1M</a:t>
             </a:r>
           </a:p>
         </p:txBody>
@@ -13797,7 +13797,7 @@
               </a:defRPr>
             </a:pPr>
             <a:r>
-              <a:t>$932K</a:t>
+              <a:t>$944K</a:t>
             </a:r>
           </a:p>
         </p:txBody>
@@ -15106,7 +15106,7 @@
               </a:defRPr>
             </a:pPr>
             <a:r>
-              <a:t>$584K</a:t>
+              <a:t>$601K</a:t>
             </a:r>
           </a:p>
         </p:txBody>
@@ -15687,7 +15687,7 @@
             <a:avLst/>
           </a:prstGeom>
           <a:solidFill>
-            <a:srgbClr val="D1FAE5"/>
+            <a:srgbClr val="F9FAFB"/>
           </a:solidFill>
           <a:ln>
             <a:noFill/>
@@ -17931,7 +17931,7 @@
             <a:avLst/>
           </a:prstGeom>
           <a:solidFill>
-            <a:srgbClr val="D1FAE5"/>
+            <a:srgbClr val="FFFFFF"/>
           </a:solidFill>
           <a:ln>
             <a:noFill/>
@@ -18492,7 +18492,7 @@
             <a:avLst/>
           </a:prstGeom>
           <a:solidFill>
-            <a:srgbClr val="D1FAE5"/>
+            <a:srgbClr val="F9FAFB"/>
           </a:solidFill>
           <a:ln>
             <a:noFill/>
@@ -19922,7 +19922,7 @@
               </a:defRPr>
             </a:pPr>
             <a:r>
-              <a:t>Q2 2026 YTD (Apr 1–May 24)  |  Green = on target  |  Amber = at risk  |  Red = behind  |  Goal: ≥40 acts/wk  |  Ranked by composite OKR score</a:t>
+              <a:t>Q2 2026 YTD (Apr 1–May 25)  |  Green = on target  |  Amber = at risk  |  Red = behind  |  Goal: ≥40 acts/wk  |  Ranked by composite OKR score</a:t>
             </a:r>
           </a:p>
         </p:txBody>
@@ -19958,7 +19958,7 @@
               </a:defRPr>
             </a:pPr>
             <a:r>
-              <a:t>Generated May 24, 2026</a:t>
+              <a:t>Generated May 25, 2026</a:t>
             </a:r>
           </a:p>
         </p:txBody>
@@ -20123,7 +20123,7 @@
               </a:defRPr>
             </a:pPr>
             <a:r>
-              <a:t>Q2 2026 YTD (Apr 1–May 24)  |  Green = on target  |  Amber = at risk  |  Red = behind  |  Goal: ≥50 acts/wk  |  Ranked by composite OKR score</a:t>
+              <a:t>Q2 2026 YTD (Apr 1–May 25)  |  Green = on target  |  Amber = at risk  |  Red = behind  |  Goal: ≥50 acts/wk  |  Ranked by composite OKR score</a:t>
             </a:r>
           </a:p>
         </p:txBody>
@@ -20159,7 +20159,7 @@
               </a:defRPr>
             </a:pPr>
             <a:r>
-              <a:t>Generated May 24, 2026</a:t>
+              <a:t>Generated May 25, 2026</a:t>
             </a:r>
           </a:p>
         </p:txBody>
@@ -20324,7 +20324,7 @@
               </a:defRPr>
             </a:pPr>
             <a:r>
-              <a:t>Q2 YTD  |  Apr 1–May 24  |  BDMs Only  |  Goal: 40 acts/wk  |  Emails excluded</a:t>
+              <a:t>Q2 YTD  |  Apr 1–May 25  |  BDMs Only  |  Goal: 40 acts/wk  |  Emails excluded</a:t>
             </a:r>
           </a:p>
         </p:txBody>
@@ -20360,7 +20360,7 @@
               </a:defRPr>
             </a:pPr>
             <a:r>
-              <a:t>Generated May 24, 2026</a:t>
+              <a:t>Generated May 25, 2026</a:t>
             </a:r>
           </a:p>
         </p:txBody>
@@ -20374,7 +20374,7 @@
         <p:spPr>
           <a:xfrm>
             <a:off x="182880" y="804672"/>
-            <a:ext cx="10332720" cy="274320"/>
+            <a:ext cx="11430000" cy="274320"/>
           </a:xfrm>
           <a:prstGeom prst="rect">
             <a:avLst/>
@@ -20705,6 +20705,42 @@
         <p:spPr>
           <a:xfrm>
             <a:off x="9692640" y="850392"/>
+            <a:ext cx="1097280" cy="201168"/>
+          </a:xfrm>
+          <a:prstGeom prst="rect">
+            <a:avLst/>
+          </a:prstGeom>
+          <a:noFill/>
+        </p:spPr>
+        <p:txBody>
+          <a:bodyPr wrap="square">
+            <a:spAutoFit/>
+          </a:bodyPr>
+          <a:lstStyle/>
+          <a:p>
+            <a:pPr algn="ctr">
+              <a:defRPr sz="900" b="1">
+                <a:solidFill>
+                  <a:srgbClr val="FFFFFF"/>
+                </a:solidFill>
+                <a:latin typeface="Calibri"/>
+              </a:defRPr>
+            </a:pPr>
+            <a:r>
+              <a:t>May 25-25</a:t>
+            </a:r>
+          </a:p>
+        </p:txBody>
+      </p:sp>
+      <p:sp>
+        <p:nvSpPr>
+          <p:cNvPr id="16" name="TextBox 15"/>
+          <p:cNvSpPr txBox="1"/>
+          <p:nvPr/>
+        </p:nvSpPr>
+        <p:spPr>
+          <a:xfrm>
+            <a:off x="10789920" y="850392"/>
             <a:ext cx="822960" cy="201168"/>
           </a:xfrm>
           <a:prstGeom prst="rect">
@@ -20734,7 +20770,7 @@
       </p:sp>
       <p:sp>
         <p:nvSpPr>
-          <p:cNvPr id="16" name="TextBox 15"/>
+          <p:cNvPr id="17" name="TextBox 16"/>
           <p:cNvSpPr txBox="1"/>
           <p:nvPr/>
         </p:nvSpPr>
@@ -20770,7 +20806,7 @@
       </p:sp>
       <p:sp>
         <p:nvSpPr>
-          <p:cNvPr id="17" name="Rectangle 16"/>
+          <p:cNvPr id="18" name="Rectangle 17"/>
           <p:cNvSpPr/>
           <p:nvPr/>
         </p:nvSpPr>
@@ -20813,7 +20849,7 @@
       </p:sp>
       <p:sp>
         <p:nvSpPr>
-          <p:cNvPr id="18" name="TextBox 17"/>
+          <p:cNvPr id="19" name="TextBox 18"/>
           <p:cNvSpPr txBox="1"/>
           <p:nvPr/>
         </p:nvSpPr>
@@ -20849,7 +20885,7 @@
       </p:sp>
       <p:sp>
         <p:nvSpPr>
-          <p:cNvPr id="19" name="Rectangle 18"/>
+          <p:cNvPr id="20" name="Rectangle 19"/>
           <p:cNvSpPr/>
           <p:nvPr/>
         </p:nvSpPr>
@@ -20892,7 +20928,7 @@
       </p:sp>
       <p:sp>
         <p:nvSpPr>
-          <p:cNvPr id="20" name="TextBox 19"/>
+          <p:cNvPr id="21" name="TextBox 20"/>
           <p:cNvSpPr txBox="1"/>
           <p:nvPr/>
         </p:nvSpPr>
@@ -20928,7 +20964,7 @@
       </p:sp>
       <p:sp>
         <p:nvSpPr>
-          <p:cNvPr id="21" name="Rectangle 20"/>
+          <p:cNvPr id="22" name="Rectangle 21"/>
           <p:cNvSpPr/>
           <p:nvPr/>
         </p:nvSpPr>
@@ -20971,7 +21007,7 @@
       </p:sp>
       <p:sp>
         <p:nvSpPr>
-          <p:cNvPr id="22" name="TextBox 21"/>
+          <p:cNvPr id="23" name="TextBox 22"/>
           <p:cNvSpPr txBox="1"/>
           <p:nvPr/>
         </p:nvSpPr>
@@ -21007,7 +21043,7 @@
       </p:sp>
       <p:sp>
         <p:nvSpPr>
-          <p:cNvPr id="23" name="Rectangle 22"/>
+          <p:cNvPr id="24" name="Rectangle 23"/>
           <p:cNvSpPr/>
           <p:nvPr/>
         </p:nvSpPr>
@@ -21050,7 +21086,7 @@
       </p:sp>
       <p:sp>
         <p:nvSpPr>
-          <p:cNvPr id="24" name="TextBox 23"/>
+          <p:cNvPr id="25" name="TextBox 24"/>
           <p:cNvSpPr txBox="1"/>
           <p:nvPr/>
         </p:nvSpPr>
@@ -21086,7 +21122,7 @@
       </p:sp>
       <p:sp>
         <p:nvSpPr>
-          <p:cNvPr id="25" name="Rectangle 24"/>
+          <p:cNvPr id="26" name="Rectangle 25"/>
           <p:cNvSpPr/>
           <p:nvPr/>
         </p:nvSpPr>
@@ -21129,7 +21165,7 @@
       </p:sp>
       <p:sp>
         <p:nvSpPr>
-          <p:cNvPr id="26" name="TextBox 25"/>
+          <p:cNvPr id="27" name="TextBox 26"/>
           <p:cNvSpPr txBox="1"/>
           <p:nvPr/>
         </p:nvSpPr>
@@ -21165,7 +21201,7 @@
       </p:sp>
       <p:sp>
         <p:nvSpPr>
-          <p:cNvPr id="27" name="Rectangle 26"/>
+          <p:cNvPr id="28" name="Rectangle 27"/>
           <p:cNvSpPr/>
           <p:nvPr/>
         </p:nvSpPr>
@@ -21208,7 +21244,7 @@
       </p:sp>
       <p:sp>
         <p:nvSpPr>
-          <p:cNvPr id="28" name="TextBox 27"/>
+          <p:cNvPr id="29" name="TextBox 28"/>
           <p:cNvSpPr txBox="1"/>
           <p:nvPr/>
         </p:nvSpPr>
@@ -21244,7 +21280,7 @@
       </p:sp>
       <p:sp>
         <p:nvSpPr>
-          <p:cNvPr id="29" name="Rectangle 28"/>
+          <p:cNvPr id="30" name="Rectangle 29"/>
           <p:cNvSpPr/>
           <p:nvPr/>
         </p:nvSpPr>
@@ -21287,7 +21323,7 @@
       </p:sp>
       <p:sp>
         <p:nvSpPr>
-          <p:cNvPr id="30" name="TextBox 29"/>
+          <p:cNvPr id="31" name="TextBox 30"/>
           <p:cNvSpPr txBox="1"/>
           <p:nvPr/>
         </p:nvSpPr>
@@ -21323,50 +21359,129 @@
       </p:sp>
       <p:sp>
         <p:nvSpPr>
-          <p:cNvPr id="31" name="TextBox 30"/>
-          <p:cNvSpPr txBox="1"/>
-          <p:nvPr/>
-        </p:nvSpPr>
-        <p:spPr>
-          <a:xfrm>
-            <a:off x="9692640" y="1211580"/>
-            <a:ext cx="822960" cy="429768"/>
-          </a:xfrm>
-          <a:prstGeom prst="rect">
-            <a:avLst/>
-          </a:prstGeom>
-          <a:noFill/>
-        </p:spPr>
-        <p:txBody>
-          <a:bodyPr wrap="square">
-            <a:spAutoFit/>
-          </a:bodyPr>
-          <a:lstStyle/>
-          <a:p>
-            <a:pPr algn="ctr">
-              <a:defRPr sz="1100" b="1">
-                <a:solidFill>
-                  <a:srgbClr val="059669"/>
-                </a:solidFill>
-                <a:latin typeface="Calibri"/>
-              </a:defRPr>
-            </a:pPr>
-            <a:r>
-              <a:t>155%</a:t>
-            </a:r>
-          </a:p>
-        </p:txBody>
-      </p:sp>
-      <p:sp>
-        <p:nvSpPr>
           <p:cNvPr id="32" name="Rectangle 31"/>
           <p:cNvSpPr/>
           <p:nvPr/>
         </p:nvSpPr>
         <p:spPr>
           <a:xfrm>
+            <a:off x="9729216" y="1133856"/>
+            <a:ext cx="1024127" cy="393192"/>
+          </a:xfrm>
+          <a:prstGeom prst="rect">
+            <a:avLst/>
+          </a:prstGeom>
+          <a:solidFill>
+            <a:srgbClr val="D1D5DB"/>
+          </a:solidFill>
+          <a:ln>
+            <a:noFill/>
+          </a:ln>
+        </p:spPr>
+        <p:style>
+          <a:lnRef idx="1">
+            <a:schemeClr val="accent1"/>
+          </a:lnRef>
+          <a:fillRef idx="3">
+            <a:schemeClr val="accent1"/>
+          </a:fillRef>
+          <a:effectRef idx="2">
+            <a:schemeClr val="accent1"/>
+          </a:effectRef>
+          <a:fontRef idx="minor">
+            <a:schemeClr val="lt1"/>
+          </a:fontRef>
+        </p:style>
+        <p:txBody>
+          <a:bodyPr rtlCol="0" anchor="ctr"/>
+          <a:lstStyle/>
+          <a:p>
+            <a:pPr algn="ctr"/>
+          </a:p>
+        </p:txBody>
+      </p:sp>
+      <p:sp>
+        <p:nvSpPr>
+          <p:cNvPr id="33" name="TextBox 32"/>
+          <p:cNvSpPr txBox="1"/>
+          <p:nvPr/>
+        </p:nvSpPr>
+        <p:spPr>
+          <a:xfrm>
+            <a:off x="9692640" y="1211580"/>
+            <a:ext cx="1097280" cy="411480"/>
+          </a:xfrm>
+          <a:prstGeom prst="rect">
+            <a:avLst/>
+          </a:prstGeom>
+          <a:noFill/>
+        </p:spPr>
+        <p:txBody>
+          <a:bodyPr wrap="square">
+            <a:spAutoFit/>
+          </a:bodyPr>
+          <a:lstStyle/>
+          <a:p>
+            <a:pPr algn="ctr">
+              <a:defRPr sz="1100" b="1">
+                <a:solidFill>
+                  <a:srgbClr val="FFFFFF"/>
+                </a:solidFill>
+                <a:latin typeface="Calibri"/>
+              </a:defRPr>
+            </a:pPr>
+            <a:r>
+              <a:t>0</a:t>
+            </a:r>
+          </a:p>
+        </p:txBody>
+      </p:sp>
+      <p:sp>
+        <p:nvSpPr>
+          <p:cNvPr id="34" name="TextBox 33"/>
+          <p:cNvSpPr txBox="1"/>
+          <p:nvPr/>
+        </p:nvSpPr>
+        <p:spPr>
+          <a:xfrm>
+            <a:off x="10789920" y="1211580"/>
+            <a:ext cx="822960" cy="429768"/>
+          </a:xfrm>
+          <a:prstGeom prst="rect">
+            <a:avLst/>
+          </a:prstGeom>
+          <a:noFill/>
+        </p:spPr>
+        <p:txBody>
+          <a:bodyPr wrap="square">
+            <a:spAutoFit/>
+          </a:bodyPr>
+          <a:lstStyle/>
+          <a:p>
+            <a:pPr algn="ctr">
+              <a:defRPr sz="1100" b="1">
+                <a:solidFill>
+                  <a:srgbClr val="059669"/>
+                </a:solidFill>
+                <a:latin typeface="Calibri"/>
+              </a:defRPr>
+            </a:pPr>
+            <a:r>
+              <a:t>150%</a:t>
+            </a:r>
+          </a:p>
+        </p:txBody>
+      </p:sp>
+      <p:sp>
+        <p:nvSpPr>
+          <p:cNvPr id="35" name="Rectangle 34"/>
+          <p:cNvSpPr/>
+          <p:nvPr/>
+        </p:nvSpPr>
+        <p:spPr>
+          <a:xfrm>
             <a:off x="182880" y="1581912"/>
-            <a:ext cx="10332720" cy="502920"/>
+            <a:ext cx="11430000" cy="502920"/>
           </a:xfrm>
           <a:prstGeom prst="rect">
             <a:avLst/>
@@ -21402,7 +21517,7 @@
       </p:sp>
       <p:sp>
         <p:nvSpPr>
-          <p:cNvPr id="33" name="TextBox 32"/>
+          <p:cNvPr id="36" name="TextBox 35"/>
           <p:cNvSpPr txBox="1"/>
           <p:nvPr/>
         </p:nvSpPr>
@@ -21438,7 +21553,7 @@
       </p:sp>
       <p:sp>
         <p:nvSpPr>
-          <p:cNvPr id="34" name="Rectangle 33"/>
+          <p:cNvPr id="37" name="Rectangle 36"/>
           <p:cNvSpPr/>
           <p:nvPr/>
         </p:nvSpPr>
@@ -21481,7 +21596,7 @@
       </p:sp>
       <p:sp>
         <p:nvSpPr>
-          <p:cNvPr id="35" name="TextBox 34"/>
+          <p:cNvPr id="38" name="TextBox 37"/>
           <p:cNvSpPr txBox="1"/>
           <p:nvPr/>
         </p:nvSpPr>
@@ -21517,7 +21632,7 @@
       </p:sp>
       <p:sp>
         <p:nvSpPr>
-          <p:cNvPr id="36" name="Rectangle 35"/>
+          <p:cNvPr id="39" name="Rectangle 38"/>
           <p:cNvSpPr/>
           <p:nvPr/>
         </p:nvSpPr>
@@ -21560,7 +21675,7 @@
       </p:sp>
       <p:sp>
         <p:nvSpPr>
-          <p:cNvPr id="37" name="TextBox 36"/>
+          <p:cNvPr id="40" name="TextBox 39"/>
           <p:cNvSpPr txBox="1"/>
           <p:nvPr/>
         </p:nvSpPr>
@@ -21596,7 +21711,7 @@
       </p:sp>
       <p:sp>
         <p:nvSpPr>
-          <p:cNvPr id="38" name="Rectangle 37"/>
+          <p:cNvPr id="41" name="Rectangle 40"/>
           <p:cNvSpPr/>
           <p:nvPr/>
         </p:nvSpPr>
@@ -21639,7 +21754,7 @@
       </p:sp>
       <p:sp>
         <p:nvSpPr>
-          <p:cNvPr id="39" name="TextBox 38"/>
+          <p:cNvPr id="42" name="TextBox 41"/>
           <p:cNvSpPr txBox="1"/>
           <p:nvPr/>
         </p:nvSpPr>
@@ -21675,7 +21790,7 @@
       </p:sp>
       <p:sp>
         <p:nvSpPr>
-          <p:cNvPr id="40" name="Rectangle 39"/>
+          <p:cNvPr id="43" name="Rectangle 42"/>
           <p:cNvSpPr/>
           <p:nvPr/>
         </p:nvSpPr>
@@ -21718,7 +21833,7 @@
       </p:sp>
       <p:sp>
         <p:nvSpPr>
-          <p:cNvPr id="41" name="TextBox 40"/>
+          <p:cNvPr id="44" name="TextBox 43"/>
           <p:cNvSpPr txBox="1"/>
           <p:nvPr/>
         </p:nvSpPr>
@@ -21754,7 +21869,7 @@
       </p:sp>
       <p:sp>
         <p:nvSpPr>
-          <p:cNvPr id="42" name="Rectangle 41"/>
+          <p:cNvPr id="45" name="Rectangle 44"/>
           <p:cNvSpPr/>
           <p:nvPr/>
         </p:nvSpPr>
@@ -21797,7 +21912,7 @@
       </p:sp>
       <p:sp>
         <p:nvSpPr>
-          <p:cNvPr id="43" name="TextBox 42"/>
+          <p:cNvPr id="46" name="TextBox 45"/>
           <p:cNvSpPr txBox="1"/>
           <p:nvPr/>
         </p:nvSpPr>
@@ -21833,7 +21948,7 @@
       </p:sp>
       <p:sp>
         <p:nvSpPr>
-          <p:cNvPr id="44" name="Rectangle 43"/>
+          <p:cNvPr id="47" name="Rectangle 46"/>
           <p:cNvSpPr/>
           <p:nvPr/>
         </p:nvSpPr>
@@ -21876,7 +21991,7 @@
       </p:sp>
       <p:sp>
         <p:nvSpPr>
-          <p:cNvPr id="45" name="TextBox 44"/>
+          <p:cNvPr id="48" name="TextBox 47"/>
           <p:cNvSpPr txBox="1"/>
           <p:nvPr/>
         </p:nvSpPr>
@@ -21912,7 +22027,7 @@
       </p:sp>
       <p:sp>
         <p:nvSpPr>
-          <p:cNvPr id="46" name="Rectangle 45"/>
+          <p:cNvPr id="49" name="Rectangle 48"/>
           <p:cNvSpPr/>
           <p:nvPr/>
         </p:nvSpPr>
@@ -21955,7 +22070,7 @@
       </p:sp>
       <p:sp>
         <p:nvSpPr>
-          <p:cNvPr id="47" name="TextBox 46"/>
+          <p:cNvPr id="50" name="TextBox 49"/>
           <p:cNvSpPr txBox="1"/>
           <p:nvPr/>
         </p:nvSpPr>
@@ -21991,13 +22106,92 @@
       </p:sp>
       <p:sp>
         <p:nvSpPr>
-          <p:cNvPr id="48" name="TextBox 47"/>
+          <p:cNvPr id="51" name="Rectangle 50"/>
+          <p:cNvSpPr/>
+          <p:nvPr/>
+        </p:nvSpPr>
+        <p:spPr>
+          <a:xfrm>
+            <a:off x="9729216" y="1636776"/>
+            <a:ext cx="1024127" cy="393192"/>
+          </a:xfrm>
+          <a:prstGeom prst="rect">
+            <a:avLst/>
+          </a:prstGeom>
+          <a:solidFill>
+            <a:srgbClr val="D1D5DB"/>
+          </a:solidFill>
+          <a:ln>
+            <a:noFill/>
+          </a:ln>
+        </p:spPr>
+        <p:style>
+          <a:lnRef idx="1">
+            <a:schemeClr val="accent1"/>
+          </a:lnRef>
+          <a:fillRef idx="3">
+            <a:schemeClr val="accent1"/>
+          </a:fillRef>
+          <a:effectRef idx="2">
+            <a:schemeClr val="accent1"/>
+          </a:effectRef>
+          <a:fontRef idx="minor">
+            <a:schemeClr val="lt1"/>
+          </a:fontRef>
+        </p:style>
+        <p:txBody>
+          <a:bodyPr rtlCol="0" anchor="ctr"/>
+          <a:lstStyle/>
+          <a:p>
+            <a:pPr algn="ctr"/>
+          </a:p>
+        </p:txBody>
+      </p:sp>
+      <p:sp>
+        <p:nvSpPr>
+          <p:cNvPr id="52" name="TextBox 51"/>
           <p:cNvSpPr txBox="1"/>
           <p:nvPr/>
         </p:nvSpPr>
         <p:spPr>
           <a:xfrm>
             <a:off x="9692640" y="1714500"/>
+            <a:ext cx="1097280" cy="411480"/>
+          </a:xfrm>
+          <a:prstGeom prst="rect">
+            <a:avLst/>
+          </a:prstGeom>
+          <a:noFill/>
+        </p:spPr>
+        <p:txBody>
+          <a:bodyPr wrap="square">
+            <a:spAutoFit/>
+          </a:bodyPr>
+          <a:lstStyle/>
+          <a:p>
+            <a:pPr algn="ctr">
+              <a:defRPr sz="1100" b="1">
+                <a:solidFill>
+                  <a:srgbClr val="FFFFFF"/>
+                </a:solidFill>
+                <a:latin typeface="Calibri"/>
+              </a:defRPr>
+            </a:pPr>
+            <a:r>
+              <a:t>0</a:t>
+            </a:r>
+          </a:p>
+        </p:txBody>
+      </p:sp>
+      <p:sp>
+        <p:nvSpPr>
+          <p:cNvPr id="53" name="TextBox 52"/>
+          <p:cNvSpPr txBox="1"/>
+          <p:nvPr/>
+        </p:nvSpPr>
+        <p:spPr>
+          <a:xfrm>
+            <a:off x="10789920" y="1714500"/>
             <a:ext cx="822960" cy="429768"/>
           </a:xfrm>
           <a:prstGeom prst="rect">
@@ -22020,14 +22214,14 @@
               </a:defRPr>
             </a:pPr>
             <a:r>
-              <a:t>82%</a:t>
-            </a:r>
-          </a:p>
-        </p:txBody>
-      </p:sp>
-      <p:sp>
-        <p:nvSpPr>
-          <p:cNvPr id="49" name="TextBox 48"/>
+              <a:t>96%</a:t>
+            </a:r>
+          </a:p>
+        </p:txBody>
+      </p:sp>
+      <p:sp>
+        <p:nvSpPr>
+          <p:cNvPr id="54" name="TextBox 53"/>
           <p:cNvSpPr txBox="1"/>
           <p:nvPr/>
         </p:nvSpPr>
@@ -22063,7 +22257,7 @@
       </p:sp>
       <p:sp>
         <p:nvSpPr>
-          <p:cNvPr id="50" name="Rectangle 49"/>
+          <p:cNvPr id="55" name="Rectangle 54"/>
           <p:cNvSpPr/>
           <p:nvPr/>
         </p:nvSpPr>
@@ -22106,7 +22300,7 @@
       </p:sp>
       <p:sp>
         <p:nvSpPr>
-          <p:cNvPr id="51" name="TextBox 50"/>
+          <p:cNvPr id="56" name="TextBox 55"/>
           <p:cNvSpPr txBox="1"/>
           <p:nvPr/>
         </p:nvSpPr>
@@ -22142,7 +22336,7 @@
       </p:sp>
       <p:sp>
         <p:nvSpPr>
-          <p:cNvPr id="52" name="Rectangle 51"/>
+          <p:cNvPr id="57" name="Rectangle 56"/>
           <p:cNvSpPr/>
           <p:nvPr/>
         </p:nvSpPr>
@@ -22185,7 +22379,7 @@
       </p:sp>
       <p:sp>
         <p:nvSpPr>
-          <p:cNvPr id="53" name="TextBox 52"/>
+          <p:cNvPr id="58" name="TextBox 57"/>
           <p:cNvSpPr txBox="1"/>
           <p:nvPr/>
         </p:nvSpPr>
@@ -22221,7 +22415,7 @@
       </p:sp>
       <p:sp>
         <p:nvSpPr>
-          <p:cNvPr id="54" name="Rectangle 53"/>
+          <p:cNvPr id="59" name="Rectangle 58"/>
           <p:cNvSpPr/>
           <p:nvPr/>
         </p:nvSpPr>
@@ -22264,7 +22458,7 @@
       </p:sp>
       <p:sp>
         <p:nvSpPr>
-          <p:cNvPr id="55" name="TextBox 54"/>
+          <p:cNvPr id="60" name="TextBox 59"/>
           <p:cNvSpPr txBox="1"/>
           <p:nvPr/>
         </p:nvSpPr>
@@ -22300,7 +22494,7 @@
       </p:sp>
       <p:sp>
         <p:nvSpPr>
-          <p:cNvPr id="56" name="Rectangle 55"/>
+          <p:cNvPr id="61" name="Rectangle 60"/>
           <p:cNvSpPr/>
           <p:nvPr/>
         </p:nvSpPr>
@@ -22343,7 +22537,7 @@
       </p:sp>
       <p:sp>
         <p:nvSpPr>
-          <p:cNvPr id="57" name="TextBox 56"/>
+          <p:cNvPr id="62" name="TextBox 61"/>
           <p:cNvSpPr txBox="1"/>
           <p:nvPr/>
         </p:nvSpPr>
@@ -22379,7 +22573,7 @@
       </p:sp>
       <p:sp>
         <p:nvSpPr>
-          <p:cNvPr id="58" name="Rectangle 57"/>
+          <p:cNvPr id="63" name="Rectangle 62"/>
           <p:cNvSpPr/>
           <p:nvPr/>
         </p:nvSpPr>
@@ -22422,7 +22616,7 @@
       </p:sp>
       <p:sp>
         <p:nvSpPr>
-          <p:cNvPr id="59" name="TextBox 58"/>
+          <p:cNvPr id="64" name="TextBox 63"/>
           <p:cNvSpPr txBox="1"/>
           <p:nvPr/>
         </p:nvSpPr>
@@ -22458,7 +22652,7 @@
       </p:sp>
       <p:sp>
         <p:nvSpPr>
-          <p:cNvPr id="60" name="Rectangle 59"/>
+          <p:cNvPr id="65" name="Rectangle 64"/>
           <p:cNvSpPr/>
           <p:nvPr/>
         </p:nvSpPr>
@@ -22501,7 +22695,7 @@
       </p:sp>
       <p:sp>
         <p:nvSpPr>
-          <p:cNvPr id="61" name="TextBox 60"/>
+          <p:cNvPr id="66" name="TextBox 65"/>
           <p:cNvSpPr txBox="1"/>
           <p:nvPr/>
         </p:nvSpPr>
@@ -22537,7 +22731,7 @@
       </p:sp>
       <p:sp>
         <p:nvSpPr>
-          <p:cNvPr id="62" name="Rectangle 61"/>
+          <p:cNvPr id="67" name="Rectangle 66"/>
           <p:cNvSpPr/>
           <p:nvPr/>
         </p:nvSpPr>
@@ -22580,7 +22774,7 @@
       </p:sp>
       <p:sp>
         <p:nvSpPr>
-          <p:cNvPr id="63" name="TextBox 62"/>
+          <p:cNvPr id="68" name="TextBox 67"/>
           <p:cNvSpPr txBox="1"/>
           <p:nvPr/>
         </p:nvSpPr>
@@ -22616,13 +22810,92 @@
       </p:sp>
       <p:sp>
         <p:nvSpPr>
-          <p:cNvPr id="64" name="TextBox 63"/>
+          <p:cNvPr id="69" name="Rectangle 68"/>
+          <p:cNvSpPr/>
+          <p:nvPr/>
+        </p:nvSpPr>
+        <p:spPr>
+          <a:xfrm>
+            <a:off x="9729216" y="2139696"/>
+            <a:ext cx="1024127" cy="393192"/>
+          </a:xfrm>
+          <a:prstGeom prst="rect">
+            <a:avLst/>
+          </a:prstGeom>
+          <a:solidFill>
+            <a:srgbClr val="D1D5DB"/>
+          </a:solidFill>
+          <a:ln>
+            <a:noFill/>
+          </a:ln>
+        </p:spPr>
+        <p:style>
+          <a:lnRef idx="1">
+            <a:schemeClr val="accent1"/>
+          </a:lnRef>
+          <a:fillRef idx="3">
+            <a:schemeClr val="accent1"/>
+          </a:fillRef>
+          <a:effectRef idx="2">
+            <a:schemeClr val="accent1"/>
+          </a:effectRef>
+          <a:fontRef idx="minor">
+            <a:schemeClr val="lt1"/>
+          </a:fontRef>
+        </p:style>
+        <p:txBody>
+          <a:bodyPr rtlCol="0" anchor="ctr"/>
+          <a:lstStyle/>
+          <a:p>
+            <a:pPr algn="ctr"/>
+          </a:p>
+        </p:txBody>
+      </p:sp>
+      <p:sp>
+        <p:nvSpPr>
+          <p:cNvPr id="70" name="TextBox 69"/>
           <p:cNvSpPr txBox="1"/>
           <p:nvPr/>
         </p:nvSpPr>
         <p:spPr>
           <a:xfrm>
             <a:off x="9692640" y="2217420"/>
+            <a:ext cx="1097280" cy="411480"/>
+          </a:xfrm>
+          <a:prstGeom prst="rect">
+            <a:avLst/>
+          </a:prstGeom>
+          <a:noFill/>
+        </p:spPr>
+        <p:txBody>
+          <a:bodyPr wrap="square">
+            <a:spAutoFit/>
+          </a:bodyPr>
+          <a:lstStyle/>
+          <a:p>
+            <a:pPr algn="ctr">
+              <a:defRPr sz="1100" b="1">
+                <a:solidFill>
+                  <a:srgbClr val="FFFFFF"/>
+                </a:solidFill>
+                <a:latin typeface="Calibri"/>
+              </a:defRPr>
+            </a:pPr>
+            <a:r>
+              <a:t>0</a:t>
+            </a:r>
+          </a:p>
+        </p:txBody>
+      </p:sp>
+      <p:sp>
+        <p:nvSpPr>
+          <p:cNvPr id="71" name="TextBox 70"/>
+          <p:cNvSpPr txBox="1"/>
+          <p:nvPr/>
+        </p:nvSpPr>
+        <p:spPr>
+          <a:xfrm>
+            <a:off x="10789920" y="2217420"/>
             <a:ext cx="822960" cy="429768"/>
           </a:xfrm>
           <a:prstGeom prst="rect">
@@ -22652,14 +22925,14 @@
       </p:sp>
       <p:sp>
         <p:nvSpPr>
-          <p:cNvPr id="65" name="Rectangle 64"/>
+          <p:cNvPr id="72" name="Rectangle 71"/>
           <p:cNvSpPr/>
           <p:nvPr/>
         </p:nvSpPr>
         <p:spPr>
           <a:xfrm>
             <a:off x="182880" y="2587752"/>
-            <a:ext cx="10332720" cy="502920"/>
+            <a:ext cx="11430000" cy="502920"/>
           </a:xfrm>
           <a:prstGeom prst="rect">
             <a:avLst/>
@@ -22695,7 +22968,7 @@
       </p:sp>
       <p:sp>
         <p:nvSpPr>
-          <p:cNvPr id="66" name="TextBox 65"/>
+          <p:cNvPr id="73" name="TextBox 72"/>
           <p:cNvSpPr txBox="1"/>
           <p:nvPr/>
         </p:nvSpPr>
@@ -22731,7 +23004,7 @@
       </p:sp>
       <p:sp>
         <p:nvSpPr>
-          <p:cNvPr id="67" name="Rectangle 66"/>
+          <p:cNvPr id="74" name="Rectangle 73"/>
           <p:cNvSpPr/>
           <p:nvPr/>
         </p:nvSpPr>
@@ -22774,7 +23047,7 @@
       </p:sp>
       <p:sp>
         <p:nvSpPr>
-          <p:cNvPr id="68" name="TextBox 67"/>
+          <p:cNvPr id="75" name="TextBox 74"/>
           <p:cNvSpPr txBox="1"/>
           <p:nvPr/>
         </p:nvSpPr>
@@ -22810,7 +23083,7 @@
       </p:sp>
       <p:sp>
         <p:nvSpPr>
-          <p:cNvPr id="69" name="Rectangle 68"/>
+          <p:cNvPr id="76" name="Rectangle 75"/>
           <p:cNvSpPr/>
           <p:nvPr/>
         </p:nvSpPr>
@@ -22853,7 +23126,7 @@
       </p:sp>
       <p:sp>
         <p:nvSpPr>
-          <p:cNvPr id="70" name="TextBox 69"/>
+          <p:cNvPr id="77" name="TextBox 76"/>
           <p:cNvSpPr txBox="1"/>
           <p:nvPr/>
         </p:nvSpPr>
@@ -22889,7 +23162,7 @@
       </p:sp>
       <p:sp>
         <p:nvSpPr>
-          <p:cNvPr id="71" name="Rectangle 70"/>
+          <p:cNvPr id="78" name="Rectangle 77"/>
           <p:cNvSpPr/>
           <p:nvPr/>
         </p:nvSpPr>
@@ -22932,7 +23205,7 @@
       </p:sp>
       <p:sp>
         <p:nvSpPr>
-          <p:cNvPr id="72" name="TextBox 71"/>
+          <p:cNvPr id="79" name="TextBox 78"/>
           <p:cNvSpPr txBox="1"/>
           <p:nvPr/>
         </p:nvSpPr>
@@ -22968,7 +23241,7 @@
       </p:sp>
       <p:sp>
         <p:nvSpPr>
-          <p:cNvPr id="73" name="Rectangle 72"/>
+          <p:cNvPr id="80" name="Rectangle 79"/>
           <p:cNvSpPr/>
           <p:nvPr/>
         </p:nvSpPr>
@@ -23011,7 +23284,7 @@
       </p:sp>
       <p:sp>
         <p:nvSpPr>
-          <p:cNvPr id="74" name="TextBox 73"/>
+          <p:cNvPr id="81" name="TextBox 80"/>
           <p:cNvSpPr txBox="1"/>
           <p:nvPr/>
         </p:nvSpPr>
@@ -23047,7 +23320,7 @@
       </p:sp>
       <p:sp>
         <p:nvSpPr>
-          <p:cNvPr id="75" name="Rectangle 74"/>
+          <p:cNvPr id="82" name="Rectangle 81"/>
           <p:cNvSpPr/>
           <p:nvPr/>
         </p:nvSpPr>
@@ -23090,7 +23363,7 @@
       </p:sp>
       <p:sp>
         <p:nvSpPr>
-          <p:cNvPr id="76" name="TextBox 75"/>
+          <p:cNvPr id="83" name="TextBox 82"/>
           <p:cNvSpPr txBox="1"/>
           <p:nvPr/>
         </p:nvSpPr>
@@ -23126,7 +23399,7 @@
       </p:sp>
       <p:sp>
         <p:nvSpPr>
-          <p:cNvPr id="77" name="Rectangle 76"/>
+          <p:cNvPr id="84" name="Rectangle 83"/>
           <p:cNvSpPr/>
           <p:nvPr/>
         </p:nvSpPr>
@@ -23169,7 +23442,7 @@
       </p:sp>
       <p:sp>
         <p:nvSpPr>
-          <p:cNvPr id="78" name="TextBox 77"/>
+          <p:cNvPr id="85" name="TextBox 84"/>
           <p:cNvSpPr txBox="1"/>
           <p:nvPr/>
         </p:nvSpPr>
@@ -23205,7 +23478,7 @@
       </p:sp>
       <p:sp>
         <p:nvSpPr>
-          <p:cNvPr id="79" name="Rectangle 78"/>
+          <p:cNvPr id="86" name="Rectangle 85"/>
           <p:cNvSpPr/>
           <p:nvPr/>
         </p:nvSpPr>
@@ -23248,7 +23521,7 @@
       </p:sp>
       <p:sp>
         <p:nvSpPr>
-          <p:cNvPr id="80" name="TextBox 79"/>
+          <p:cNvPr id="87" name="TextBox 86"/>
           <p:cNvSpPr txBox="1"/>
           <p:nvPr/>
         </p:nvSpPr>
@@ -23284,13 +23557,92 @@
       </p:sp>
       <p:sp>
         <p:nvSpPr>
-          <p:cNvPr id="81" name="TextBox 80"/>
+          <p:cNvPr id="88" name="Rectangle 87"/>
+          <p:cNvSpPr/>
+          <p:nvPr/>
+        </p:nvSpPr>
+        <p:spPr>
+          <a:xfrm>
+            <a:off x="9729216" y="2642616"/>
+            <a:ext cx="1024127" cy="393192"/>
+          </a:xfrm>
+          <a:prstGeom prst="rect">
+            <a:avLst/>
+          </a:prstGeom>
+          <a:solidFill>
+            <a:srgbClr val="D1D5DB"/>
+          </a:solidFill>
+          <a:ln>
+            <a:noFill/>
+          </a:ln>
+        </p:spPr>
+        <p:style>
+          <a:lnRef idx="1">
+            <a:schemeClr val="accent1"/>
+          </a:lnRef>
+          <a:fillRef idx="3">
+            <a:schemeClr val="accent1"/>
+          </a:fillRef>
+          <a:effectRef idx="2">
+            <a:schemeClr val="accent1"/>
+          </a:effectRef>
+          <a:fontRef idx="minor">
+            <a:schemeClr val="lt1"/>
+          </a:fontRef>
+        </p:style>
+        <p:txBody>
+          <a:bodyPr rtlCol="0" anchor="ctr"/>
+          <a:lstStyle/>
+          <a:p>
+            <a:pPr algn="ctr"/>
+          </a:p>
+        </p:txBody>
+      </p:sp>
+      <p:sp>
+        <p:nvSpPr>
+          <p:cNvPr id="89" name="TextBox 88"/>
           <p:cNvSpPr txBox="1"/>
           <p:nvPr/>
         </p:nvSpPr>
         <p:spPr>
           <a:xfrm>
             <a:off x="9692640" y="2720340"/>
+            <a:ext cx="1097280" cy="411480"/>
+          </a:xfrm>
+          <a:prstGeom prst="rect">
+            <a:avLst/>
+          </a:prstGeom>
+          <a:noFill/>
+        </p:spPr>
+        <p:txBody>
+          <a:bodyPr wrap="square">
+            <a:spAutoFit/>
+          </a:bodyPr>
+          <a:lstStyle/>
+          <a:p>
+            <a:pPr algn="ctr">
+              <a:defRPr sz="1100" b="1">
+                <a:solidFill>
+                  <a:srgbClr val="FFFFFF"/>
+                </a:solidFill>
+                <a:latin typeface="Calibri"/>
+              </a:defRPr>
+            </a:pPr>
+            <a:r>
+              <a:t>0</a:t>
+            </a:r>
+          </a:p>
+        </p:txBody>
+      </p:sp>
+      <p:sp>
+        <p:nvSpPr>
+          <p:cNvPr id="90" name="TextBox 89"/>
+          <p:cNvSpPr txBox="1"/>
+          <p:nvPr/>
+        </p:nvSpPr>
+        <p:spPr>
+          <a:xfrm>
+            <a:off x="10789920" y="2720340"/>
             <a:ext cx="822960" cy="429768"/>
           </a:xfrm>
           <a:prstGeom prst="rect">
@@ -23313,14 +23665,14 @@
               </a:defRPr>
             </a:pPr>
             <a:r>
-              <a:t>137%</a:t>
-            </a:r>
-          </a:p>
-        </p:txBody>
-      </p:sp>
-      <p:sp>
-        <p:nvSpPr>
-          <p:cNvPr id="82" name="TextBox 81"/>
+              <a:t>132%</a:t>
+            </a:r>
+          </a:p>
+        </p:txBody>
+      </p:sp>
+      <p:sp>
+        <p:nvSpPr>
+          <p:cNvPr id="91" name="TextBox 90"/>
           <p:cNvSpPr txBox="1"/>
           <p:nvPr/>
         </p:nvSpPr>
@@ -23356,7 +23708,7 @@
       </p:sp>
       <p:sp>
         <p:nvSpPr>
-          <p:cNvPr id="83" name="Rectangle 82"/>
+          <p:cNvPr id="92" name="Rectangle 91"/>
           <p:cNvSpPr/>
           <p:nvPr/>
         </p:nvSpPr>
@@ -23399,7 +23751,7 @@
       </p:sp>
       <p:sp>
         <p:nvSpPr>
-          <p:cNvPr id="84" name="TextBox 83"/>
+          <p:cNvPr id="93" name="TextBox 92"/>
           <p:cNvSpPr txBox="1"/>
           <p:nvPr/>
         </p:nvSpPr>
@@ -23435,7 +23787,7 @@
       </p:sp>
       <p:sp>
         <p:nvSpPr>
-          <p:cNvPr id="85" name="Rectangle 84"/>
+          <p:cNvPr id="94" name="Rectangle 93"/>
           <p:cNvSpPr/>
           <p:nvPr/>
         </p:nvSpPr>
@@ -23478,7 +23830,7 @@
       </p:sp>
       <p:sp>
         <p:nvSpPr>
-          <p:cNvPr id="86" name="TextBox 85"/>
+          <p:cNvPr id="95" name="TextBox 94"/>
           <p:cNvSpPr txBox="1"/>
           <p:nvPr/>
         </p:nvSpPr>
@@ -23514,7 +23866,7 @@
       </p:sp>
       <p:sp>
         <p:nvSpPr>
-          <p:cNvPr id="87" name="Rectangle 86"/>
+          <p:cNvPr id="96" name="Rectangle 95"/>
           <p:cNvSpPr/>
           <p:nvPr/>
         </p:nvSpPr>
@@ -23557,7 +23909,7 @@
       </p:sp>
       <p:sp>
         <p:nvSpPr>
-          <p:cNvPr id="88" name="TextBox 87"/>
+          <p:cNvPr id="97" name="TextBox 96"/>
           <p:cNvSpPr txBox="1"/>
           <p:nvPr/>
         </p:nvSpPr>
@@ -23593,7 +23945,7 @@
       </p:sp>
       <p:sp>
         <p:nvSpPr>
-          <p:cNvPr id="89" name="Rectangle 88"/>
+          <p:cNvPr id="98" name="Rectangle 97"/>
           <p:cNvSpPr/>
           <p:nvPr/>
         </p:nvSpPr>
@@ -23636,7 +23988,7 @@
       </p:sp>
       <p:sp>
         <p:nvSpPr>
-          <p:cNvPr id="90" name="TextBox 89"/>
+          <p:cNvPr id="99" name="TextBox 98"/>
           <p:cNvSpPr txBox="1"/>
           <p:nvPr/>
         </p:nvSpPr>
@@ -23672,7 +24024,7 @@
       </p:sp>
       <p:sp>
         <p:nvSpPr>
-          <p:cNvPr id="91" name="Rectangle 90"/>
+          <p:cNvPr id="100" name="Rectangle 99"/>
           <p:cNvSpPr/>
           <p:nvPr/>
         </p:nvSpPr>
@@ -23715,7 +24067,7 @@
       </p:sp>
       <p:sp>
         <p:nvSpPr>
-          <p:cNvPr id="92" name="TextBox 91"/>
+          <p:cNvPr id="101" name="TextBox 100"/>
           <p:cNvSpPr txBox="1"/>
           <p:nvPr/>
         </p:nvSpPr>
@@ -23751,7 +24103,7 @@
       </p:sp>
       <p:sp>
         <p:nvSpPr>
-          <p:cNvPr id="93" name="Rectangle 92"/>
+          <p:cNvPr id="102" name="Rectangle 101"/>
           <p:cNvSpPr/>
           <p:nvPr/>
         </p:nvSpPr>
@@ -23794,7 +24146,7 @@
       </p:sp>
       <p:sp>
         <p:nvSpPr>
-          <p:cNvPr id="94" name="TextBox 93"/>
+          <p:cNvPr id="103" name="TextBox 102"/>
           <p:cNvSpPr txBox="1"/>
           <p:nvPr/>
         </p:nvSpPr>
@@ -23830,7 +24182,7 @@
       </p:sp>
       <p:sp>
         <p:nvSpPr>
-          <p:cNvPr id="95" name="Rectangle 94"/>
+          <p:cNvPr id="104" name="Rectangle 103"/>
           <p:cNvSpPr/>
           <p:nvPr/>
         </p:nvSpPr>
@@ -23873,7 +24225,7 @@
       </p:sp>
       <p:sp>
         <p:nvSpPr>
-          <p:cNvPr id="96" name="TextBox 95"/>
+          <p:cNvPr id="105" name="TextBox 104"/>
           <p:cNvSpPr txBox="1"/>
           <p:nvPr/>
         </p:nvSpPr>
@@ -23909,13 +24261,92 @@
       </p:sp>
       <p:sp>
         <p:nvSpPr>
-          <p:cNvPr id="97" name="TextBox 96"/>
+          <p:cNvPr id="106" name="Rectangle 105"/>
+          <p:cNvSpPr/>
+          <p:nvPr/>
+        </p:nvSpPr>
+        <p:spPr>
+          <a:xfrm>
+            <a:off x="9729216" y="3145536"/>
+            <a:ext cx="1024127" cy="393192"/>
+          </a:xfrm>
+          <a:prstGeom prst="rect">
+            <a:avLst/>
+          </a:prstGeom>
+          <a:solidFill>
+            <a:srgbClr val="D1D5DB"/>
+          </a:solidFill>
+          <a:ln>
+            <a:noFill/>
+          </a:ln>
+        </p:spPr>
+        <p:style>
+          <a:lnRef idx="1">
+            <a:schemeClr val="accent1"/>
+          </a:lnRef>
+          <a:fillRef idx="3">
+            <a:schemeClr val="accent1"/>
+          </a:fillRef>
+          <a:effectRef idx="2">
+            <a:schemeClr val="accent1"/>
+          </a:effectRef>
+          <a:fontRef idx="minor">
+            <a:schemeClr val="lt1"/>
+          </a:fontRef>
+        </p:style>
+        <p:txBody>
+          <a:bodyPr rtlCol="0" anchor="ctr"/>
+          <a:lstStyle/>
+          <a:p>
+            <a:pPr algn="ctr"/>
+          </a:p>
+        </p:txBody>
+      </p:sp>
+      <p:sp>
+        <p:nvSpPr>
+          <p:cNvPr id="107" name="TextBox 106"/>
           <p:cNvSpPr txBox="1"/>
           <p:nvPr/>
         </p:nvSpPr>
         <p:spPr>
           <a:xfrm>
             <a:off x="9692640" y="3223260"/>
+            <a:ext cx="1097280" cy="411480"/>
+          </a:xfrm>
+          <a:prstGeom prst="rect">
+            <a:avLst/>
+          </a:prstGeom>
+          <a:noFill/>
+        </p:spPr>
+        <p:txBody>
+          <a:bodyPr wrap="square">
+            <a:spAutoFit/>
+          </a:bodyPr>
+          <a:lstStyle/>
+          <a:p>
+            <a:pPr algn="ctr">
+              <a:defRPr sz="1100" b="1">
+                <a:solidFill>
+                  <a:srgbClr val="FFFFFF"/>
+                </a:solidFill>
+                <a:latin typeface="Calibri"/>
+              </a:defRPr>
+            </a:pPr>
+            <a:r>
+              <a:t>0</a:t>
+            </a:r>
+          </a:p>
+        </p:txBody>
+      </p:sp>
+      <p:sp>
+        <p:nvSpPr>
+          <p:cNvPr id="108" name="TextBox 107"/>
+          <p:cNvSpPr txBox="1"/>
+          <p:nvPr/>
+        </p:nvSpPr>
+        <p:spPr>
+          <a:xfrm>
+            <a:off x="10789920" y="3223260"/>
             <a:ext cx="822960" cy="429768"/>
           </a:xfrm>
           <a:prstGeom prst="rect">
@@ -23945,14 +24376,14 @@
       </p:sp>
       <p:sp>
         <p:nvSpPr>
-          <p:cNvPr id="98" name="Rectangle 97"/>
+          <p:cNvPr id="109" name="Rectangle 108"/>
           <p:cNvSpPr/>
           <p:nvPr/>
         </p:nvSpPr>
         <p:spPr>
           <a:xfrm>
             <a:off x="182880" y="3593591"/>
-            <a:ext cx="10332720" cy="502920"/>
+            <a:ext cx="11430000" cy="502920"/>
           </a:xfrm>
           <a:prstGeom prst="rect">
             <a:avLst/>
@@ -23988,7 +24419,7 @@
       </p:sp>
       <p:sp>
         <p:nvSpPr>
-          <p:cNvPr id="99" name="TextBox 98"/>
+          <p:cNvPr id="110" name="TextBox 109"/>
           <p:cNvSpPr txBox="1"/>
           <p:nvPr/>
         </p:nvSpPr>
@@ -24024,7 +24455,7 @@
       </p:sp>
       <p:sp>
         <p:nvSpPr>
-          <p:cNvPr id="100" name="Rectangle 99"/>
+          <p:cNvPr id="111" name="Rectangle 110"/>
           <p:cNvSpPr/>
           <p:nvPr/>
         </p:nvSpPr>
@@ -24067,7 +24498,7 @@
       </p:sp>
       <p:sp>
         <p:nvSpPr>
-          <p:cNvPr id="101" name="TextBox 100"/>
+          <p:cNvPr id="112" name="TextBox 111"/>
           <p:cNvSpPr txBox="1"/>
           <p:nvPr/>
         </p:nvSpPr>
@@ -24103,7 +24534,7 @@
       </p:sp>
       <p:sp>
         <p:nvSpPr>
-          <p:cNvPr id="102" name="Rectangle 101"/>
+          <p:cNvPr id="113" name="Rectangle 112"/>
           <p:cNvSpPr/>
           <p:nvPr/>
         </p:nvSpPr>
@@ -24146,7 +24577,7 @@
       </p:sp>
       <p:sp>
         <p:nvSpPr>
-          <p:cNvPr id="103" name="TextBox 102"/>
+          <p:cNvPr id="114" name="TextBox 113"/>
           <p:cNvSpPr txBox="1"/>
           <p:nvPr/>
         </p:nvSpPr>
@@ -24182,7 +24613,7 @@
       </p:sp>
       <p:sp>
         <p:nvSpPr>
-          <p:cNvPr id="104" name="Rectangle 103"/>
+          <p:cNvPr id="115" name="Rectangle 114"/>
           <p:cNvSpPr/>
           <p:nvPr/>
         </p:nvSpPr>
@@ -24225,7 +24656,7 @@
       </p:sp>
       <p:sp>
         <p:nvSpPr>
-          <p:cNvPr id="105" name="TextBox 104"/>
+          <p:cNvPr id="116" name="TextBox 115"/>
           <p:cNvSpPr txBox="1"/>
           <p:nvPr/>
         </p:nvSpPr>
@@ -24261,7 +24692,7 @@
       </p:sp>
       <p:sp>
         <p:nvSpPr>
-          <p:cNvPr id="106" name="Rectangle 105"/>
+          <p:cNvPr id="117" name="Rectangle 116"/>
           <p:cNvSpPr/>
           <p:nvPr/>
         </p:nvSpPr>
@@ -24304,7 +24735,7 @@
       </p:sp>
       <p:sp>
         <p:nvSpPr>
-          <p:cNvPr id="107" name="TextBox 106"/>
+          <p:cNvPr id="118" name="TextBox 117"/>
           <p:cNvSpPr txBox="1"/>
           <p:nvPr/>
         </p:nvSpPr>
@@ -24340,7 +24771,7 @@
       </p:sp>
       <p:sp>
         <p:nvSpPr>
-          <p:cNvPr id="108" name="Rectangle 107"/>
+          <p:cNvPr id="119" name="Rectangle 118"/>
           <p:cNvSpPr/>
           <p:nvPr/>
         </p:nvSpPr>
@@ -24383,7 +24814,7 @@
       </p:sp>
       <p:sp>
         <p:nvSpPr>
-          <p:cNvPr id="109" name="TextBox 108"/>
+          <p:cNvPr id="120" name="TextBox 119"/>
           <p:cNvSpPr txBox="1"/>
           <p:nvPr/>
         </p:nvSpPr>
@@ -24419,7 +24850,7 @@
       </p:sp>
       <p:sp>
         <p:nvSpPr>
-          <p:cNvPr id="110" name="Rectangle 109"/>
+          <p:cNvPr id="121" name="Rectangle 120"/>
           <p:cNvSpPr/>
           <p:nvPr/>
         </p:nvSpPr>
@@ -24462,7 +24893,7 @@
       </p:sp>
       <p:sp>
         <p:nvSpPr>
-          <p:cNvPr id="111" name="TextBox 110"/>
+          <p:cNvPr id="122" name="TextBox 121"/>
           <p:cNvSpPr txBox="1"/>
           <p:nvPr/>
         </p:nvSpPr>
@@ -24498,7 +24929,7 @@
       </p:sp>
       <p:sp>
         <p:nvSpPr>
-          <p:cNvPr id="112" name="Rectangle 111"/>
+          <p:cNvPr id="123" name="Rectangle 122"/>
           <p:cNvSpPr/>
           <p:nvPr/>
         </p:nvSpPr>
@@ -24541,7 +24972,7 @@
       </p:sp>
       <p:sp>
         <p:nvSpPr>
-          <p:cNvPr id="113" name="TextBox 112"/>
+          <p:cNvPr id="124" name="TextBox 123"/>
           <p:cNvSpPr txBox="1"/>
           <p:nvPr/>
         </p:nvSpPr>
@@ -24577,13 +25008,92 @@
       </p:sp>
       <p:sp>
         <p:nvSpPr>
-          <p:cNvPr id="114" name="TextBox 113"/>
+          <p:cNvPr id="125" name="Rectangle 124"/>
+          <p:cNvSpPr/>
+          <p:nvPr/>
+        </p:nvSpPr>
+        <p:spPr>
+          <a:xfrm>
+            <a:off x="9729216" y="3648456"/>
+            <a:ext cx="1024127" cy="393192"/>
+          </a:xfrm>
+          <a:prstGeom prst="rect">
+            <a:avLst/>
+          </a:prstGeom>
+          <a:solidFill>
+            <a:srgbClr val="D1D5DB"/>
+          </a:solidFill>
+          <a:ln>
+            <a:noFill/>
+          </a:ln>
+        </p:spPr>
+        <p:style>
+          <a:lnRef idx="1">
+            <a:schemeClr val="accent1"/>
+          </a:lnRef>
+          <a:fillRef idx="3">
+            <a:schemeClr val="accent1"/>
+          </a:fillRef>
+          <a:effectRef idx="2">
+            <a:schemeClr val="accent1"/>
+          </a:effectRef>
+          <a:fontRef idx="minor">
+            <a:schemeClr val="lt1"/>
+          </a:fontRef>
+        </p:style>
+        <p:txBody>
+          <a:bodyPr rtlCol="0" anchor="ctr"/>
+          <a:lstStyle/>
+          <a:p>
+            <a:pPr algn="ctr"/>
+          </a:p>
+        </p:txBody>
+      </p:sp>
+      <p:sp>
+        <p:nvSpPr>
+          <p:cNvPr id="126" name="TextBox 125"/>
           <p:cNvSpPr txBox="1"/>
           <p:nvPr/>
         </p:nvSpPr>
         <p:spPr>
           <a:xfrm>
             <a:off x="9692640" y="3726180"/>
+            <a:ext cx="1097280" cy="411480"/>
+          </a:xfrm>
+          <a:prstGeom prst="rect">
+            <a:avLst/>
+          </a:prstGeom>
+          <a:noFill/>
+        </p:spPr>
+        <p:txBody>
+          <a:bodyPr wrap="square">
+            <a:spAutoFit/>
+          </a:bodyPr>
+          <a:lstStyle/>
+          <a:p>
+            <a:pPr algn="ctr">
+              <a:defRPr sz="1100" b="1">
+                <a:solidFill>
+                  <a:srgbClr val="FFFFFF"/>
+                </a:solidFill>
+                <a:latin typeface="Calibri"/>
+              </a:defRPr>
+            </a:pPr>
+            <a:r>
+              <a:t>0</a:t>
+            </a:r>
+          </a:p>
+        </p:txBody>
+      </p:sp>
+      <p:sp>
+        <p:nvSpPr>
+          <p:cNvPr id="127" name="TextBox 126"/>
+          <p:cNvSpPr txBox="1"/>
+          <p:nvPr/>
+        </p:nvSpPr>
+        <p:spPr>
+          <a:xfrm>
+            <a:off x="10789920" y="3726180"/>
             <a:ext cx="822960" cy="429768"/>
           </a:xfrm>
           <a:prstGeom prst="rect">
@@ -24606,14 +25116,14 @@
               </a:defRPr>
             </a:pPr>
             <a:r>
-              <a:t>34%</a:t>
-            </a:r>
-          </a:p>
-        </p:txBody>
-      </p:sp>
-      <p:sp>
-        <p:nvSpPr>
-          <p:cNvPr id="115" name="Rectangle 114"/>
+              <a:t>44%</a:t>
+            </a:r>
+          </a:p>
+        </p:txBody>
+      </p:sp>
+      <p:sp>
+        <p:nvSpPr>
+          <p:cNvPr id="128" name="Rectangle 127"/>
           <p:cNvSpPr/>
           <p:nvPr/>
         </p:nvSpPr>
@@ -24656,7 +25166,7 @@
       </p:sp>
       <p:sp>
         <p:nvSpPr>
-          <p:cNvPr id="116" name="TextBox 115"/>
+          <p:cNvPr id="129" name="TextBox 128"/>
           <p:cNvSpPr txBox="1"/>
           <p:nvPr/>
         </p:nvSpPr>
@@ -24692,7 +25202,7 @@
       </p:sp>
       <p:sp>
         <p:nvSpPr>
-          <p:cNvPr id="117" name="TextBox 116"/>
+          <p:cNvPr id="130" name="TextBox 129"/>
           <p:cNvSpPr txBox="1"/>
           <p:nvPr/>
         </p:nvSpPr>
@@ -24728,7 +25238,7 @@
       </p:sp>
       <p:sp>
         <p:nvSpPr>
-          <p:cNvPr id="118" name="TextBox 117"/>
+          <p:cNvPr id="131" name="TextBox 130"/>
           <p:cNvSpPr txBox="1"/>
           <p:nvPr/>
         </p:nvSpPr>
@@ -24764,7 +25274,7 @@
       </p:sp>
       <p:sp>
         <p:nvSpPr>
-          <p:cNvPr id="119" name="TextBox 118"/>
+          <p:cNvPr id="132" name="TextBox 131"/>
           <p:cNvSpPr txBox="1"/>
           <p:nvPr/>
         </p:nvSpPr>
@@ -24800,7 +25310,7 @@
       </p:sp>
       <p:sp>
         <p:nvSpPr>
-          <p:cNvPr id="120" name="TextBox 119"/>
+          <p:cNvPr id="133" name="TextBox 132"/>
           <p:cNvSpPr txBox="1"/>
           <p:nvPr/>
         </p:nvSpPr>
@@ -24836,7 +25346,7 @@
       </p:sp>
       <p:sp>
         <p:nvSpPr>
-          <p:cNvPr id="121" name="TextBox 120"/>
+          <p:cNvPr id="134" name="TextBox 133"/>
           <p:cNvSpPr txBox="1"/>
           <p:nvPr/>
         </p:nvSpPr>
@@ -24872,7 +25382,7 @@
       </p:sp>
       <p:sp>
         <p:nvSpPr>
-          <p:cNvPr id="122" name="TextBox 121"/>
+          <p:cNvPr id="135" name="TextBox 134"/>
           <p:cNvSpPr txBox="1"/>
           <p:nvPr/>
         </p:nvSpPr>
@@ -24908,7 +25418,7 @@
       </p:sp>
       <p:sp>
         <p:nvSpPr>
-          <p:cNvPr id="123" name="TextBox 122"/>
+          <p:cNvPr id="136" name="TextBox 135"/>
           <p:cNvSpPr txBox="1"/>
           <p:nvPr/>
         </p:nvSpPr>
@@ -24944,7 +25454,7 @@
       </p:sp>
       <p:sp>
         <p:nvSpPr>
-          <p:cNvPr id="124" name="TextBox 123"/>
+          <p:cNvPr id="137" name="TextBox 136"/>
           <p:cNvSpPr txBox="1"/>
           <p:nvPr/>
         </p:nvSpPr>
@@ -24980,7 +25490,7 @@
       </p:sp>
       <p:sp>
         <p:nvSpPr>
-          <p:cNvPr id="125" name="TextBox 124"/>
+          <p:cNvPr id="138" name="TextBox 137"/>
           <p:cNvSpPr txBox="1"/>
           <p:nvPr/>
         </p:nvSpPr>
@@ -25016,7 +25526,7 @@
       </p:sp>
       <p:sp>
         <p:nvSpPr>
-          <p:cNvPr id="126" name="TextBox 125"/>
+          <p:cNvPr id="139" name="TextBox 138"/>
           <p:cNvSpPr txBox="1"/>
           <p:nvPr/>
         </p:nvSpPr>
@@ -25052,7 +25562,7 @@
       </p:sp>
       <p:sp>
         <p:nvSpPr>
-          <p:cNvPr id="127" name="TextBox 126"/>
+          <p:cNvPr id="140" name="TextBox 139"/>
           <p:cNvSpPr txBox="1"/>
           <p:nvPr/>
         </p:nvSpPr>
@@ -25088,7 +25598,7 @@
       </p:sp>
       <p:sp>
         <p:nvSpPr>
-          <p:cNvPr id="128" name="TextBox 127"/>
+          <p:cNvPr id="141" name="TextBox 140"/>
           <p:cNvSpPr txBox="1"/>
           <p:nvPr/>
         </p:nvSpPr>
@@ -25124,7 +25634,7 @@
       </p:sp>
       <p:sp>
         <p:nvSpPr>
-          <p:cNvPr id="129" name="TextBox 128"/>
+          <p:cNvPr id="142" name="TextBox 141"/>
           <p:cNvSpPr txBox="1"/>
           <p:nvPr/>
         </p:nvSpPr>
@@ -25160,7 +25670,7 @@
       </p:sp>
       <p:sp>
         <p:nvSpPr>
-          <p:cNvPr id="130" name="TextBox 129"/>
+          <p:cNvPr id="143" name="TextBox 142"/>
           <p:cNvSpPr txBox="1"/>
           <p:nvPr/>
         </p:nvSpPr>
@@ -25189,14 +25699,14 @@
               </a:defRPr>
             </a:pPr>
             <a:r>
-              <a:t>62.2</a:t>
-            </a:r>
-          </a:p>
-        </p:txBody>
-      </p:sp>
-      <p:sp>
-        <p:nvSpPr>
-          <p:cNvPr id="131" name="TextBox 130"/>
+              <a:t>60.1</a:t>
+            </a:r>
+          </a:p>
+        </p:txBody>
+      </p:sp>
+      <p:sp>
+        <p:nvSpPr>
+          <p:cNvPr id="144" name="TextBox 143"/>
           <p:cNvSpPr txBox="1"/>
           <p:nvPr/>
         </p:nvSpPr>
@@ -25225,14 +25735,14 @@
               </a:defRPr>
             </a:pPr>
             <a:r>
-              <a:t>155%</a:t>
-            </a:r>
-          </a:p>
-        </p:txBody>
-      </p:sp>
-      <p:sp>
-        <p:nvSpPr>
-          <p:cNvPr id="132" name="Rectangle 131"/>
+              <a:t>150%</a:t>
+            </a:r>
+          </a:p>
+        </p:txBody>
+      </p:sp>
+      <p:sp>
+        <p:nvSpPr>
+          <p:cNvPr id="145" name="Rectangle 144"/>
           <p:cNvSpPr/>
           <p:nvPr/>
         </p:nvSpPr>
@@ -25275,7 +25785,7 @@
       </p:sp>
       <p:sp>
         <p:nvSpPr>
-          <p:cNvPr id="133" name="TextBox 132"/>
+          <p:cNvPr id="146" name="TextBox 145"/>
           <p:cNvSpPr txBox="1"/>
           <p:nvPr/>
         </p:nvSpPr>
@@ -25311,7 +25821,7 @@
       </p:sp>
       <p:sp>
         <p:nvSpPr>
-          <p:cNvPr id="134" name="TextBox 133"/>
+          <p:cNvPr id="147" name="TextBox 146"/>
           <p:cNvSpPr txBox="1"/>
           <p:nvPr/>
         </p:nvSpPr>
@@ -25347,7 +25857,7 @@
       </p:sp>
       <p:sp>
         <p:nvSpPr>
-          <p:cNvPr id="135" name="TextBox 134"/>
+          <p:cNvPr id="148" name="TextBox 147"/>
           <p:cNvSpPr txBox="1"/>
           <p:nvPr/>
         </p:nvSpPr>
@@ -25383,7 +25893,7 @@
       </p:sp>
       <p:sp>
         <p:nvSpPr>
-          <p:cNvPr id="136" name="TextBox 135"/>
+          <p:cNvPr id="149" name="TextBox 148"/>
           <p:cNvSpPr txBox="1"/>
           <p:nvPr/>
         </p:nvSpPr>
@@ -25419,7 +25929,7 @@
       </p:sp>
       <p:sp>
         <p:nvSpPr>
-          <p:cNvPr id="137" name="TextBox 136"/>
+          <p:cNvPr id="150" name="TextBox 149"/>
           <p:cNvSpPr txBox="1"/>
           <p:nvPr/>
         </p:nvSpPr>
@@ -25455,7 +25965,7 @@
       </p:sp>
       <p:sp>
         <p:nvSpPr>
-          <p:cNvPr id="138" name="TextBox 137"/>
+          <p:cNvPr id="151" name="TextBox 150"/>
           <p:cNvSpPr txBox="1"/>
           <p:nvPr/>
         </p:nvSpPr>
@@ -25491,7 +26001,7 @@
       </p:sp>
       <p:sp>
         <p:nvSpPr>
-          <p:cNvPr id="139" name="TextBox 138"/>
+          <p:cNvPr id="152" name="TextBox 151"/>
           <p:cNvSpPr txBox="1"/>
           <p:nvPr/>
         </p:nvSpPr>
@@ -25520,14 +26030,14 @@
               </a:defRPr>
             </a:pPr>
             <a:r>
-              <a:t>33.0</a:t>
-            </a:r>
-          </a:p>
-        </p:txBody>
-      </p:sp>
-      <p:sp>
-        <p:nvSpPr>
-          <p:cNvPr id="140" name="TextBox 139"/>
+              <a:t>38.6</a:t>
+            </a:r>
+          </a:p>
+        </p:txBody>
+      </p:sp>
+      <p:sp>
+        <p:nvSpPr>
+          <p:cNvPr id="153" name="TextBox 152"/>
           <p:cNvSpPr txBox="1"/>
           <p:nvPr/>
         </p:nvSpPr>
@@ -25556,14 +26066,14 @@
               </a:defRPr>
             </a:pPr>
             <a:r>
-              <a:t>82%</a:t>
-            </a:r>
-          </a:p>
-        </p:txBody>
-      </p:sp>
-      <p:sp>
-        <p:nvSpPr>
-          <p:cNvPr id="141" name="TextBox 140"/>
+              <a:t>96%</a:t>
+            </a:r>
+          </a:p>
+        </p:txBody>
+      </p:sp>
+      <p:sp>
+        <p:nvSpPr>
+          <p:cNvPr id="154" name="TextBox 153"/>
           <p:cNvSpPr txBox="1"/>
           <p:nvPr/>
         </p:nvSpPr>
@@ -25599,7 +26109,7 @@
       </p:sp>
       <p:sp>
         <p:nvSpPr>
-          <p:cNvPr id="142" name="TextBox 141"/>
+          <p:cNvPr id="155" name="TextBox 154"/>
           <p:cNvSpPr txBox="1"/>
           <p:nvPr/>
         </p:nvSpPr>
@@ -25635,7 +26145,7 @@
       </p:sp>
       <p:sp>
         <p:nvSpPr>
-          <p:cNvPr id="143" name="TextBox 142"/>
+          <p:cNvPr id="156" name="TextBox 155"/>
           <p:cNvSpPr txBox="1"/>
           <p:nvPr/>
         </p:nvSpPr>
@@ -25671,7 +26181,7 @@
       </p:sp>
       <p:sp>
         <p:nvSpPr>
-          <p:cNvPr id="144" name="TextBox 143"/>
+          <p:cNvPr id="157" name="TextBox 156"/>
           <p:cNvSpPr txBox="1"/>
           <p:nvPr/>
         </p:nvSpPr>
@@ -25707,7 +26217,7 @@
       </p:sp>
       <p:sp>
         <p:nvSpPr>
-          <p:cNvPr id="145" name="TextBox 144"/>
+          <p:cNvPr id="158" name="TextBox 157"/>
           <p:cNvSpPr txBox="1"/>
           <p:nvPr/>
         </p:nvSpPr>
@@ -25743,7 +26253,7 @@
       </p:sp>
       <p:sp>
         <p:nvSpPr>
-          <p:cNvPr id="146" name="TextBox 145"/>
+          <p:cNvPr id="159" name="TextBox 158"/>
           <p:cNvSpPr txBox="1"/>
           <p:nvPr/>
         </p:nvSpPr>
@@ -25779,7 +26289,7 @@
       </p:sp>
       <p:sp>
         <p:nvSpPr>
-          <p:cNvPr id="147" name="TextBox 146"/>
+          <p:cNvPr id="160" name="TextBox 159"/>
           <p:cNvSpPr txBox="1"/>
           <p:nvPr/>
         </p:nvSpPr>
@@ -25808,14 +26318,14 @@
               </a:defRPr>
             </a:pPr>
             <a:r>
-              <a:t>34.3</a:t>
-            </a:r>
-          </a:p>
-        </p:txBody>
-      </p:sp>
-      <p:sp>
-        <p:nvSpPr>
-          <p:cNvPr id="148" name="TextBox 147"/>
+              <a:t>34.4</a:t>
+            </a:r>
+          </a:p>
+        </p:txBody>
+      </p:sp>
+      <p:sp>
+        <p:nvSpPr>
+          <p:cNvPr id="161" name="TextBox 160"/>
           <p:cNvSpPr txBox="1"/>
           <p:nvPr/>
         </p:nvSpPr>
@@ -25851,7 +26361,7 @@
       </p:sp>
       <p:sp>
         <p:nvSpPr>
-          <p:cNvPr id="149" name="Rectangle 148"/>
+          <p:cNvPr id="162" name="Rectangle 161"/>
           <p:cNvSpPr/>
           <p:nvPr/>
         </p:nvSpPr>
@@ -25894,7 +26404,7 @@
       </p:sp>
       <p:sp>
         <p:nvSpPr>
-          <p:cNvPr id="150" name="TextBox 149"/>
+          <p:cNvPr id="163" name="TextBox 162"/>
           <p:cNvSpPr txBox="1"/>
           <p:nvPr/>
         </p:nvSpPr>
@@ -25930,7 +26440,7 @@
       </p:sp>
       <p:sp>
         <p:nvSpPr>
-          <p:cNvPr id="151" name="TextBox 150"/>
+          <p:cNvPr id="164" name="TextBox 163"/>
           <p:cNvSpPr txBox="1"/>
           <p:nvPr/>
         </p:nvSpPr>
@@ -25966,7 +26476,7 @@
       </p:sp>
       <p:sp>
         <p:nvSpPr>
-          <p:cNvPr id="152" name="TextBox 151"/>
+          <p:cNvPr id="165" name="TextBox 164"/>
           <p:cNvSpPr txBox="1"/>
           <p:nvPr/>
         </p:nvSpPr>
@@ -26002,7 +26512,7 @@
       </p:sp>
       <p:sp>
         <p:nvSpPr>
-          <p:cNvPr id="153" name="TextBox 152"/>
+          <p:cNvPr id="166" name="TextBox 165"/>
           <p:cNvSpPr txBox="1"/>
           <p:nvPr/>
         </p:nvSpPr>
@@ -26038,7 +26548,7 @@
       </p:sp>
       <p:sp>
         <p:nvSpPr>
-          <p:cNvPr id="154" name="TextBox 153"/>
+          <p:cNvPr id="167" name="TextBox 166"/>
           <p:cNvSpPr txBox="1"/>
           <p:nvPr/>
         </p:nvSpPr>
@@ -26074,7 +26584,7 @@
       </p:sp>
       <p:sp>
         <p:nvSpPr>
-          <p:cNvPr id="155" name="TextBox 154"/>
+          <p:cNvPr id="168" name="TextBox 167"/>
           <p:cNvSpPr txBox="1"/>
           <p:nvPr/>
         </p:nvSpPr>
@@ -26110,7 +26620,7 @@
       </p:sp>
       <p:sp>
         <p:nvSpPr>
-          <p:cNvPr id="156" name="TextBox 155"/>
+          <p:cNvPr id="169" name="TextBox 168"/>
           <p:cNvSpPr txBox="1"/>
           <p:nvPr/>
         </p:nvSpPr>
@@ -26139,14 +26649,14 @@
               </a:defRPr>
             </a:pPr>
             <a:r>
-              <a:t>54.7</a:t>
-            </a:r>
-          </a:p>
-        </p:txBody>
-      </p:sp>
-      <p:sp>
-        <p:nvSpPr>
-          <p:cNvPr id="157" name="TextBox 156"/>
+              <a:t>52.9</a:t>
+            </a:r>
+          </a:p>
+        </p:txBody>
+      </p:sp>
+      <p:sp>
+        <p:nvSpPr>
+          <p:cNvPr id="170" name="TextBox 169"/>
           <p:cNvSpPr txBox="1"/>
           <p:nvPr/>
         </p:nvSpPr>
@@ -26175,14 +26685,14 @@
               </a:defRPr>
             </a:pPr>
             <a:r>
-              <a:t>137%</a:t>
-            </a:r>
-          </a:p>
-        </p:txBody>
-      </p:sp>
-      <p:sp>
-        <p:nvSpPr>
-          <p:cNvPr id="158" name="TextBox 157"/>
+              <a:t>132%</a:t>
+            </a:r>
+          </a:p>
+        </p:txBody>
+      </p:sp>
+      <p:sp>
+        <p:nvSpPr>
+          <p:cNvPr id="171" name="TextBox 170"/>
           <p:cNvSpPr txBox="1"/>
           <p:nvPr/>
         </p:nvSpPr>
@@ -26218,7 +26728,7 @@
       </p:sp>
       <p:sp>
         <p:nvSpPr>
-          <p:cNvPr id="159" name="TextBox 158"/>
+          <p:cNvPr id="172" name="TextBox 171"/>
           <p:cNvSpPr txBox="1"/>
           <p:nvPr/>
         </p:nvSpPr>
@@ -26254,7 +26764,7 @@
       </p:sp>
       <p:sp>
         <p:nvSpPr>
-          <p:cNvPr id="160" name="TextBox 159"/>
+          <p:cNvPr id="173" name="TextBox 172"/>
           <p:cNvSpPr txBox="1"/>
           <p:nvPr/>
         </p:nvSpPr>
@@ -26290,7 +26800,7 @@
       </p:sp>
       <p:sp>
         <p:nvSpPr>
-          <p:cNvPr id="161" name="TextBox 160"/>
+          <p:cNvPr id="174" name="TextBox 173"/>
           <p:cNvSpPr txBox="1"/>
           <p:nvPr/>
         </p:nvSpPr>
@@ -26326,7 +26836,7 @@
       </p:sp>
       <p:sp>
         <p:nvSpPr>
-          <p:cNvPr id="162" name="TextBox 161"/>
+          <p:cNvPr id="175" name="TextBox 174"/>
           <p:cNvSpPr txBox="1"/>
           <p:nvPr/>
         </p:nvSpPr>
@@ -26362,7 +26872,7 @@
       </p:sp>
       <p:sp>
         <p:nvSpPr>
-          <p:cNvPr id="163" name="TextBox 162"/>
+          <p:cNvPr id="176" name="TextBox 175"/>
           <p:cNvSpPr txBox="1"/>
           <p:nvPr/>
         </p:nvSpPr>
@@ -26398,7 +26908,7 @@
       </p:sp>
       <p:sp>
         <p:nvSpPr>
-          <p:cNvPr id="164" name="TextBox 163"/>
+          <p:cNvPr id="177" name="TextBox 176"/>
           <p:cNvSpPr txBox="1"/>
           <p:nvPr/>
         </p:nvSpPr>
@@ -26434,7 +26944,7 @@
       </p:sp>
       <p:sp>
         <p:nvSpPr>
-          <p:cNvPr id="165" name="TextBox 164"/>
+          <p:cNvPr id="178" name="TextBox 177"/>
           <p:cNvSpPr txBox="1"/>
           <p:nvPr/>
         </p:nvSpPr>
@@ -26470,7 +26980,7 @@
       </p:sp>
       <p:sp>
         <p:nvSpPr>
-          <p:cNvPr id="166" name="Rectangle 165"/>
+          <p:cNvPr id="179" name="Rectangle 178"/>
           <p:cNvSpPr/>
           <p:nvPr/>
         </p:nvSpPr>
@@ -26513,7 +27023,7 @@
       </p:sp>
       <p:sp>
         <p:nvSpPr>
-          <p:cNvPr id="167" name="TextBox 166"/>
+          <p:cNvPr id="180" name="TextBox 179"/>
           <p:cNvSpPr txBox="1"/>
           <p:nvPr/>
         </p:nvSpPr>
@@ -26549,7 +27059,7 @@
       </p:sp>
       <p:sp>
         <p:nvSpPr>
-          <p:cNvPr id="168" name="TextBox 167"/>
+          <p:cNvPr id="181" name="TextBox 180"/>
           <p:cNvSpPr txBox="1"/>
           <p:nvPr/>
         </p:nvSpPr>
@@ -26585,7 +27095,7 @@
       </p:sp>
       <p:sp>
         <p:nvSpPr>
-          <p:cNvPr id="169" name="TextBox 168"/>
+          <p:cNvPr id="182" name="TextBox 181"/>
           <p:cNvSpPr txBox="1"/>
           <p:nvPr/>
         </p:nvSpPr>
@@ -26621,7 +27131,7 @@
       </p:sp>
       <p:sp>
         <p:nvSpPr>
-          <p:cNvPr id="170" name="TextBox 169"/>
+          <p:cNvPr id="183" name="TextBox 182"/>
           <p:cNvSpPr txBox="1"/>
           <p:nvPr/>
         </p:nvSpPr>
@@ -26657,7 +27167,7 @@
       </p:sp>
       <p:sp>
         <p:nvSpPr>
-          <p:cNvPr id="171" name="TextBox 170"/>
+          <p:cNvPr id="184" name="TextBox 183"/>
           <p:cNvSpPr txBox="1"/>
           <p:nvPr/>
         </p:nvSpPr>
@@ -26693,7 +27203,7 @@
       </p:sp>
       <p:sp>
         <p:nvSpPr>
-          <p:cNvPr id="172" name="TextBox 171"/>
+          <p:cNvPr id="185" name="TextBox 184"/>
           <p:cNvSpPr txBox="1"/>
           <p:nvPr/>
         </p:nvSpPr>
@@ -26729,7 +27239,7 @@
       </p:sp>
       <p:sp>
         <p:nvSpPr>
-          <p:cNvPr id="173" name="TextBox 172"/>
+          <p:cNvPr id="186" name="TextBox 185"/>
           <p:cNvSpPr txBox="1"/>
           <p:nvPr/>
         </p:nvSpPr>
@@ -26758,14 +27268,14 @@
               </a:defRPr>
             </a:pPr>
             <a:r>
-              <a:t>13.5</a:t>
-            </a:r>
-          </a:p>
-        </p:txBody>
-      </p:sp>
-      <p:sp>
-        <p:nvSpPr>
-          <p:cNvPr id="174" name="TextBox 173"/>
+              <a:t>17.7</a:t>
+            </a:r>
+          </a:p>
+        </p:txBody>
+      </p:sp>
+      <p:sp>
+        <p:nvSpPr>
+          <p:cNvPr id="187" name="TextBox 186"/>
           <p:cNvSpPr txBox="1"/>
           <p:nvPr/>
         </p:nvSpPr>
@@ -26794,7 +27304,7 @@
               </a:defRPr>
             </a:pPr>
             <a:r>
-              <a:t>34%</a:t>
+              <a:t>44%</a:t>
             </a:r>
           </a:p>
         </p:txBody>
@@ -26935,7 +27445,7 @@
               </a:defRPr>
             </a:pPr>
             <a:r>
-              <a:t>Q2 YTD  |  Apr 1–May 24  |  BDAs Only  |  Goal: 50 acts/wk  |  Emails excluded</a:t>
+              <a:t>Q2 YTD  |  Apr 1–May 25  |  BDAs Only  |  Goal: 50 acts/wk  |  Emails excluded</a:t>
             </a:r>
           </a:p>
         </p:txBody>
@@ -26971,7 +27481,7 @@
               </a:defRPr>
             </a:pPr>
             <a:r>
-              <a:t>Generated May 24, 2026</a:t>
+              <a:t>Generated May 25, 2026</a:t>
             </a:r>
           </a:p>
         </p:txBody>
@@ -26985,7 +27495,7 @@
         <p:spPr>
           <a:xfrm>
             <a:off x="182880" y="804672"/>
-            <a:ext cx="10332720" cy="274320"/>
+            <a:ext cx="11430000" cy="274320"/>
           </a:xfrm>
           <a:prstGeom prst="rect">
             <a:avLst/>
@@ -27316,6 +27826,42 @@
         <p:spPr>
           <a:xfrm>
             <a:off x="9692640" y="850392"/>
+            <a:ext cx="1097280" cy="201168"/>
+          </a:xfrm>
+          <a:prstGeom prst="rect">
+            <a:avLst/>
+          </a:prstGeom>
+          <a:noFill/>
+        </p:spPr>
+        <p:txBody>
+          <a:bodyPr wrap="square">
+            <a:spAutoFit/>
+          </a:bodyPr>
+          <a:lstStyle/>
+          <a:p>
+            <a:pPr algn="ctr">
+              <a:defRPr sz="900" b="1">
+                <a:solidFill>
+                  <a:srgbClr val="FFFFFF"/>
+                </a:solidFill>
+                <a:latin typeface="Calibri"/>
+              </a:defRPr>
+            </a:pPr>
+            <a:r>
+              <a:t>May 25-25</a:t>
+            </a:r>
+          </a:p>
+        </p:txBody>
+      </p:sp>
+      <p:sp>
+        <p:nvSpPr>
+          <p:cNvPr id="16" name="TextBox 15"/>
+          <p:cNvSpPr txBox="1"/>
+          <p:nvPr/>
+        </p:nvSpPr>
+        <p:spPr>
+          <a:xfrm>
+            <a:off x="10789920" y="850392"/>
             <a:ext cx="822960" cy="201168"/>
           </a:xfrm>
           <a:prstGeom prst="rect">
@@ -27345,7 +27891,7 @@
       </p:sp>
       <p:sp>
         <p:nvSpPr>
-          <p:cNvPr id="16" name="TextBox 15"/>
+          <p:cNvPr id="17" name="TextBox 16"/>
           <p:cNvSpPr txBox="1"/>
           <p:nvPr/>
         </p:nvSpPr>
@@ -27381,7 +27927,7 @@
       </p:sp>
       <p:sp>
         <p:nvSpPr>
-          <p:cNvPr id="17" name="Rectangle 16"/>
+          <p:cNvPr id="18" name="Rectangle 17"/>
           <p:cNvSpPr/>
           <p:nvPr/>
         </p:nvSpPr>
@@ -27424,7 +27970,7 @@
       </p:sp>
       <p:sp>
         <p:nvSpPr>
-          <p:cNvPr id="18" name="TextBox 17"/>
+          <p:cNvPr id="19" name="TextBox 18"/>
           <p:cNvSpPr txBox="1"/>
           <p:nvPr/>
         </p:nvSpPr>
@@ -27460,7 +28006,7 @@
       </p:sp>
       <p:sp>
         <p:nvSpPr>
-          <p:cNvPr id="19" name="Rectangle 18"/>
+          <p:cNvPr id="20" name="Rectangle 19"/>
           <p:cNvSpPr/>
           <p:nvPr/>
         </p:nvSpPr>
@@ -27503,7 +28049,7 @@
       </p:sp>
       <p:sp>
         <p:nvSpPr>
-          <p:cNvPr id="20" name="TextBox 19"/>
+          <p:cNvPr id="21" name="TextBox 20"/>
           <p:cNvSpPr txBox="1"/>
           <p:nvPr/>
         </p:nvSpPr>
@@ -27539,7 +28085,7 @@
       </p:sp>
       <p:sp>
         <p:nvSpPr>
-          <p:cNvPr id="21" name="Rectangle 20"/>
+          <p:cNvPr id="22" name="Rectangle 21"/>
           <p:cNvSpPr/>
           <p:nvPr/>
         </p:nvSpPr>
@@ -27582,7 +28128,7 @@
       </p:sp>
       <p:sp>
         <p:nvSpPr>
-          <p:cNvPr id="22" name="TextBox 21"/>
+          <p:cNvPr id="23" name="TextBox 22"/>
           <p:cNvSpPr txBox="1"/>
           <p:nvPr/>
         </p:nvSpPr>
@@ -27618,7 +28164,7 @@
       </p:sp>
       <p:sp>
         <p:nvSpPr>
-          <p:cNvPr id="23" name="Rectangle 22"/>
+          <p:cNvPr id="24" name="Rectangle 23"/>
           <p:cNvSpPr/>
           <p:nvPr/>
         </p:nvSpPr>
@@ -27661,7 +28207,7 @@
       </p:sp>
       <p:sp>
         <p:nvSpPr>
-          <p:cNvPr id="24" name="TextBox 23"/>
+          <p:cNvPr id="25" name="TextBox 24"/>
           <p:cNvSpPr txBox="1"/>
           <p:nvPr/>
         </p:nvSpPr>
@@ -27697,7 +28243,7 @@
       </p:sp>
       <p:sp>
         <p:nvSpPr>
-          <p:cNvPr id="25" name="Rectangle 24"/>
+          <p:cNvPr id="26" name="Rectangle 25"/>
           <p:cNvSpPr/>
           <p:nvPr/>
         </p:nvSpPr>
@@ -27740,7 +28286,7 @@
       </p:sp>
       <p:sp>
         <p:nvSpPr>
-          <p:cNvPr id="26" name="TextBox 25"/>
+          <p:cNvPr id="27" name="TextBox 26"/>
           <p:cNvSpPr txBox="1"/>
           <p:nvPr/>
         </p:nvSpPr>
@@ -27776,7 +28322,7 @@
       </p:sp>
       <p:sp>
         <p:nvSpPr>
-          <p:cNvPr id="27" name="Rectangle 26"/>
+          <p:cNvPr id="28" name="Rectangle 27"/>
           <p:cNvSpPr/>
           <p:nvPr/>
         </p:nvSpPr>
@@ -27819,7 +28365,7 @@
       </p:sp>
       <p:sp>
         <p:nvSpPr>
-          <p:cNvPr id="28" name="TextBox 27"/>
+          <p:cNvPr id="29" name="TextBox 28"/>
           <p:cNvSpPr txBox="1"/>
           <p:nvPr/>
         </p:nvSpPr>
@@ -27855,7 +28401,7 @@
       </p:sp>
       <p:sp>
         <p:nvSpPr>
-          <p:cNvPr id="29" name="Rectangle 28"/>
+          <p:cNvPr id="30" name="Rectangle 29"/>
           <p:cNvSpPr/>
           <p:nvPr/>
         </p:nvSpPr>
@@ -27898,7 +28444,7 @@
       </p:sp>
       <p:sp>
         <p:nvSpPr>
-          <p:cNvPr id="30" name="TextBox 29"/>
+          <p:cNvPr id="31" name="TextBox 30"/>
           <p:cNvSpPr txBox="1"/>
           <p:nvPr/>
         </p:nvSpPr>
@@ -27934,50 +28480,129 @@
       </p:sp>
       <p:sp>
         <p:nvSpPr>
-          <p:cNvPr id="31" name="TextBox 30"/>
-          <p:cNvSpPr txBox="1"/>
-          <p:nvPr/>
-        </p:nvSpPr>
-        <p:spPr>
-          <a:xfrm>
-            <a:off x="9692640" y="1234440"/>
-            <a:ext cx="822960" cy="475488"/>
-          </a:xfrm>
-          <a:prstGeom prst="rect">
-            <a:avLst/>
-          </a:prstGeom>
-          <a:noFill/>
-        </p:spPr>
-        <p:txBody>
-          <a:bodyPr wrap="square">
-            <a:spAutoFit/>
-          </a:bodyPr>
-          <a:lstStyle/>
-          <a:p>
-            <a:pPr algn="ctr">
-              <a:defRPr sz="1100" b="1">
-                <a:solidFill>
-                  <a:srgbClr val="D97706"/>
-                </a:solidFill>
-                <a:latin typeface="Calibri"/>
-              </a:defRPr>
-            </a:pPr>
-            <a:r>
-              <a:t>95%</a:t>
-            </a:r>
-          </a:p>
-        </p:txBody>
-      </p:sp>
-      <p:sp>
-        <p:nvSpPr>
           <p:cNvPr id="32" name="Rectangle 31"/>
           <p:cNvSpPr/>
           <p:nvPr/>
         </p:nvSpPr>
         <p:spPr>
           <a:xfrm>
+            <a:off x="9729216" y="1133856"/>
+            <a:ext cx="1024127" cy="438912"/>
+          </a:xfrm>
+          <a:prstGeom prst="rect">
+            <a:avLst/>
+          </a:prstGeom>
+          <a:solidFill>
+            <a:srgbClr val="D1D5DB"/>
+          </a:solidFill>
+          <a:ln>
+            <a:noFill/>
+          </a:ln>
+        </p:spPr>
+        <p:style>
+          <a:lnRef idx="1">
+            <a:schemeClr val="accent1"/>
+          </a:lnRef>
+          <a:fillRef idx="3">
+            <a:schemeClr val="accent1"/>
+          </a:fillRef>
+          <a:effectRef idx="2">
+            <a:schemeClr val="accent1"/>
+          </a:effectRef>
+          <a:fontRef idx="minor">
+            <a:schemeClr val="lt1"/>
+          </a:fontRef>
+        </p:style>
+        <p:txBody>
+          <a:bodyPr rtlCol="0" anchor="ctr"/>
+          <a:lstStyle/>
+          <a:p>
+            <a:pPr algn="ctr"/>
+          </a:p>
+        </p:txBody>
+      </p:sp>
+      <p:sp>
+        <p:nvSpPr>
+          <p:cNvPr id="33" name="TextBox 32"/>
+          <p:cNvSpPr txBox="1"/>
+          <p:nvPr/>
+        </p:nvSpPr>
+        <p:spPr>
+          <a:xfrm>
+            <a:off x="9692640" y="1234440"/>
+            <a:ext cx="1097280" cy="457200"/>
+          </a:xfrm>
+          <a:prstGeom prst="rect">
+            <a:avLst/>
+          </a:prstGeom>
+          <a:noFill/>
+        </p:spPr>
+        <p:txBody>
+          <a:bodyPr wrap="square">
+            <a:spAutoFit/>
+          </a:bodyPr>
+          <a:lstStyle/>
+          <a:p>
+            <a:pPr algn="ctr">
+              <a:defRPr sz="1100" b="1">
+                <a:solidFill>
+                  <a:srgbClr val="FFFFFF"/>
+                </a:solidFill>
+                <a:latin typeface="Calibri"/>
+              </a:defRPr>
+            </a:pPr>
+            <a:r>
+              <a:t>0</a:t>
+            </a:r>
+          </a:p>
+        </p:txBody>
+      </p:sp>
+      <p:sp>
+        <p:nvSpPr>
+          <p:cNvPr id="34" name="TextBox 33"/>
+          <p:cNvSpPr txBox="1"/>
+          <p:nvPr/>
+        </p:nvSpPr>
+        <p:spPr>
+          <a:xfrm>
+            <a:off x="10789920" y="1234440"/>
+            <a:ext cx="822960" cy="475488"/>
+          </a:xfrm>
+          <a:prstGeom prst="rect">
+            <a:avLst/>
+          </a:prstGeom>
+          <a:noFill/>
+        </p:spPr>
+        <p:txBody>
+          <a:bodyPr wrap="square">
+            <a:spAutoFit/>
+          </a:bodyPr>
+          <a:lstStyle/>
+          <a:p>
+            <a:pPr algn="ctr">
+              <a:defRPr sz="1100" b="1">
+                <a:solidFill>
+                  <a:srgbClr val="D97706"/>
+                </a:solidFill>
+                <a:latin typeface="Calibri"/>
+              </a:defRPr>
+            </a:pPr>
+            <a:r>
+              <a:t>94%</a:t>
+            </a:r>
+          </a:p>
+        </p:txBody>
+      </p:sp>
+      <p:sp>
+        <p:nvSpPr>
+          <p:cNvPr id="35" name="Rectangle 34"/>
+          <p:cNvSpPr/>
+          <p:nvPr/>
+        </p:nvSpPr>
+        <p:spPr>
+          <a:xfrm>
             <a:off x="182880" y="1627631"/>
-            <a:ext cx="10332720" cy="548640"/>
+            <a:ext cx="11430000" cy="548640"/>
           </a:xfrm>
           <a:prstGeom prst="rect">
             <a:avLst/>
@@ -28013,7 +28638,7 @@
       </p:sp>
       <p:sp>
         <p:nvSpPr>
-          <p:cNvPr id="33" name="TextBox 32"/>
+          <p:cNvPr id="36" name="TextBox 35"/>
           <p:cNvSpPr txBox="1"/>
           <p:nvPr/>
         </p:nvSpPr>
@@ -28049,7 +28674,7 @@
       </p:sp>
       <p:sp>
         <p:nvSpPr>
-          <p:cNvPr id="34" name="Rectangle 33"/>
+          <p:cNvPr id="37" name="Rectangle 36"/>
           <p:cNvSpPr/>
           <p:nvPr/>
         </p:nvSpPr>
@@ -28092,7 +28717,7 @@
       </p:sp>
       <p:sp>
         <p:nvSpPr>
-          <p:cNvPr id="35" name="Rectangle 34"/>
+          <p:cNvPr id="38" name="Rectangle 37"/>
           <p:cNvSpPr/>
           <p:nvPr/>
         </p:nvSpPr>
@@ -28135,7 +28760,7 @@
       </p:sp>
       <p:sp>
         <p:nvSpPr>
-          <p:cNvPr id="36" name="Rectangle 35"/>
+          <p:cNvPr id="39" name="Rectangle 38"/>
           <p:cNvSpPr/>
           <p:nvPr/>
         </p:nvSpPr>
@@ -28178,7 +28803,7 @@
       </p:sp>
       <p:sp>
         <p:nvSpPr>
-          <p:cNvPr id="37" name="TextBox 36"/>
+          <p:cNvPr id="40" name="TextBox 39"/>
           <p:cNvSpPr txBox="1"/>
           <p:nvPr/>
         </p:nvSpPr>
@@ -28214,7 +28839,7 @@
       </p:sp>
       <p:sp>
         <p:nvSpPr>
-          <p:cNvPr id="38" name="Rectangle 37"/>
+          <p:cNvPr id="41" name="Rectangle 40"/>
           <p:cNvSpPr/>
           <p:nvPr/>
         </p:nvSpPr>
@@ -28257,7 +28882,7 @@
       </p:sp>
       <p:sp>
         <p:nvSpPr>
-          <p:cNvPr id="39" name="TextBox 38"/>
+          <p:cNvPr id="42" name="TextBox 41"/>
           <p:cNvSpPr txBox="1"/>
           <p:nvPr/>
         </p:nvSpPr>
@@ -28293,7 +28918,7 @@
       </p:sp>
       <p:sp>
         <p:nvSpPr>
-          <p:cNvPr id="40" name="Rectangle 39"/>
+          <p:cNvPr id="43" name="Rectangle 42"/>
           <p:cNvSpPr/>
           <p:nvPr/>
         </p:nvSpPr>
@@ -28336,7 +28961,7 @@
       </p:sp>
       <p:sp>
         <p:nvSpPr>
-          <p:cNvPr id="41" name="TextBox 40"/>
+          <p:cNvPr id="44" name="TextBox 43"/>
           <p:cNvSpPr txBox="1"/>
           <p:nvPr/>
         </p:nvSpPr>
@@ -28372,7 +28997,7 @@
       </p:sp>
       <p:sp>
         <p:nvSpPr>
-          <p:cNvPr id="42" name="Rectangle 41"/>
+          <p:cNvPr id="45" name="Rectangle 44"/>
           <p:cNvSpPr/>
           <p:nvPr/>
         </p:nvSpPr>
@@ -28415,7 +29040,7 @@
       </p:sp>
       <p:sp>
         <p:nvSpPr>
-          <p:cNvPr id="43" name="TextBox 42"/>
+          <p:cNvPr id="46" name="TextBox 45"/>
           <p:cNvSpPr txBox="1"/>
           <p:nvPr/>
         </p:nvSpPr>
@@ -28451,7 +29076,7 @@
       </p:sp>
       <p:sp>
         <p:nvSpPr>
-          <p:cNvPr id="44" name="Rectangle 43"/>
+          <p:cNvPr id="47" name="Rectangle 46"/>
           <p:cNvSpPr/>
           <p:nvPr/>
         </p:nvSpPr>
@@ -28494,7 +29119,7 @@
       </p:sp>
       <p:sp>
         <p:nvSpPr>
-          <p:cNvPr id="45" name="TextBox 44"/>
+          <p:cNvPr id="48" name="TextBox 47"/>
           <p:cNvSpPr txBox="1"/>
           <p:nvPr/>
         </p:nvSpPr>
@@ -28530,85 +29155,13 @@
       </p:sp>
       <p:sp>
         <p:nvSpPr>
-          <p:cNvPr id="46" name="TextBox 45"/>
-          <p:cNvSpPr txBox="1"/>
-          <p:nvPr/>
-        </p:nvSpPr>
-        <p:spPr>
-          <a:xfrm>
-            <a:off x="9692640" y="1783079"/>
-            <a:ext cx="822960" cy="475488"/>
-          </a:xfrm>
-          <a:prstGeom prst="rect">
-            <a:avLst/>
-          </a:prstGeom>
-          <a:noFill/>
-        </p:spPr>
-        <p:txBody>
-          <a:bodyPr wrap="square">
-            <a:spAutoFit/>
-          </a:bodyPr>
-          <a:lstStyle/>
-          <a:p>
-            <a:pPr algn="ctr">
-              <a:defRPr sz="1100" b="1">
-                <a:solidFill>
-                  <a:srgbClr val="DC2626"/>
-                </a:solidFill>
-                <a:latin typeface="Calibri"/>
-              </a:defRPr>
-            </a:pPr>
-            <a:r>
-              <a:t>74%</a:t>
-            </a:r>
-          </a:p>
-        </p:txBody>
-      </p:sp>
-      <p:sp>
-        <p:nvSpPr>
-          <p:cNvPr id="47" name="TextBox 46"/>
-          <p:cNvSpPr txBox="1"/>
-          <p:nvPr/>
-        </p:nvSpPr>
-        <p:spPr>
-          <a:xfrm>
-            <a:off x="256032" y="2331720"/>
-            <a:ext cx="1828800" cy="475488"/>
-          </a:xfrm>
-          <a:prstGeom prst="rect">
-            <a:avLst/>
-          </a:prstGeom>
-          <a:noFill/>
-        </p:spPr>
-        <p:txBody>
-          <a:bodyPr wrap="square">
-            <a:spAutoFit/>
-          </a:bodyPr>
-          <a:lstStyle/>
-          <a:p>
-            <a:pPr algn="l">
-              <a:defRPr sz="900" b="1">
-                <a:solidFill>
-                  <a:srgbClr val="111827"/>
-                </a:solidFill>
-                <a:latin typeface="Calibri"/>
-              </a:defRPr>
-            </a:pPr>
-            <a:r>
-              <a:t>Portia Lewis</a:t>
-            </a:r>
-          </a:p>
-        </p:txBody>
-      </p:sp>
-      <p:sp>
-        <p:nvSpPr>
-          <p:cNvPr id="48" name="Rectangle 47"/>
+          <p:cNvPr id="49" name="Rectangle 48"/>
           <p:cNvSpPr/>
           <p:nvPr/>
         </p:nvSpPr>
         <p:spPr>
           <a:xfrm>
-            <a:off x="2048256" y="2231136"/>
+            <a:off x="9729216" y="1682495"/>
             <a:ext cx="1024127" cy="438912"/>
           </a:xfrm>
           <a:prstGeom prst="rect">
@@ -28645,13 +29198,121 @@
       </p:sp>
       <p:sp>
         <p:nvSpPr>
-          <p:cNvPr id="49" name="Rectangle 48"/>
+          <p:cNvPr id="50" name="TextBox 49"/>
+          <p:cNvSpPr txBox="1"/>
+          <p:nvPr/>
+        </p:nvSpPr>
+        <p:spPr>
+          <a:xfrm>
+            <a:off x="9692640" y="1783079"/>
+            <a:ext cx="1097280" cy="457200"/>
+          </a:xfrm>
+          <a:prstGeom prst="rect">
+            <a:avLst/>
+          </a:prstGeom>
+          <a:noFill/>
+        </p:spPr>
+        <p:txBody>
+          <a:bodyPr wrap="square">
+            <a:spAutoFit/>
+          </a:bodyPr>
+          <a:lstStyle/>
+          <a:p>
+            <a:pPr algn="ctr">
+              <a:defRPr sz="1100" b="1">
+                <a:solidFill>
+                  <a:srgbClr val="FFFFFF"/>
+                </a:solidFill>
+                <a:latin typeface="Calibri"/>
+              </a:defRPr>
+            </a:pPr>
+            <a:r>
+              <a:t>0</a:t>
+            </a:r>
+          </a:p>
+        </p:txBody>
+      </p:sp>
+      <p:sp>
+        <p:nvSpPr>
+          <p:cNvPr id="51" name="TextBox 50"/>
+          <p:cNvSpPr txBox="1"/>
+          <p:nvPr/>
+        </p:nvSpPr>
+        <p:spPr>
+          <a:xfrm>
+            <a:off x="10789920" y="1783079"/>
+            <a:ext cx="822960" cy="475488"/>
+          </a:xfrm>
+          <a:prstGeom prst="rect">
+            <a:avLst/>
+          </a:prstGeom>
+          <a:noFill/>
+        </p:spPr>
+        <p:txBody>
+          <a:bodyPr wrap="square">
+            <a:spAutoFit/>
+          </a:bodyPr>
+          <a:lstStyle/>
+          <a:p>
+            <a:pPr algn="ctr">
+              <a:defRPr sz="1100" b="1">
+                <a:solidFill>
+                  <a:srgbClr val="DC2626"/>
+                </a:solidFill>
+                <a:latin typeface="Calibri"/>
+              </a:defRPr>
+            </a:pPr>
+            <a:r>
+              <a:t>62%</a:t>
+            </a:r>
+          </a:p>
+        </p:txBody>
+      </p:sp>
+      <p:sp>
+        <p:nvSpPr>
+          <p:cNvPr id="52" name="TextBox 51"/>
+          <p:cNvSpPr txBox="1"/>
+          <p:nvPr/>
+        </p:nvSpPr>
+        <p:spPr>
+          <a:xfrm>
+            <a:off x="256032" y="2331720"/>
+            <a:ext cx="1828800" cy="475488"/>
+          </a:xfrm>
+          <a:prstGeom prst="rect">
+            <a:avLst/>
+          </a:prstGeom>
+          <a:noFill/>
+        </p:spPr>
+        <p:txBody>
+          <a:bodyPr wrap="square">
+            <a:spAutoFit/>
+          </a:bodyPr>
+          <a:lstStyle/>
+          <a:p>
+            <a:pPr algn="l">
+              <a:defRPr sz="900" b="1">
+                <a:solidFill>
+                  <a:srgbClr val="111827"/>
+                </a:solidFill>
+                <a:latin typeface="Calibri"/>
+              </a:defRPr>
+            </a:pPr>
+            <a:r>
+              <a:t>Portia Lewis</a:t>
+            </a:r>
+          </a:p>
+        </p:txBody>
+      </p:sp>
+      <p:sp>
+        <p:nvSpPr>
+          <p:cNvPr id="53" name="Rectangle 52"/>
           <p:cNvSpPr/>
           <p:nvPr/>
         </p:nvSpPr>
         <p:spPr>
           <a:xfrm>
-            <a:off x="3145536" y="2231136"/>
+            <a:off x="2048256" y="2231136"/>
             <a:ext cx="1024127" cy="438912"/>
           </a:xfrm>
           <a:prstGeom prst="rect">
@@ -28688,7 +29349,50 @@
       </p:sp>
       <p:sp>
         <p:nvSpPr>
-          <p:cNvPr id="50" name="Rectangle 49"/>
+          <p:cNvPr id="54" name="Rectangle 53"/>
+          <p:cNvSpPr/>
+          <p:nvPr/>
+        </p:nvSpPr>
+        <p:spPr>
+          <a:xfrm>
+            <a:off x="3145536" y="2231136"/>
+            <a:ext cx="1024127" cy="438912"/>
+          </a:xfrm>
+          <a:prstGeom prst="rect">
+            <a:avLst/>
+          </a:prstGeom>
+          <a:solidFill>
+            <a:srgbClr val="D1D5DB"/>
+          </a:solidFill>
+          <a:ln>
+            <a:noFill/>
+          </a:ln>
+        </p:spPr>
+        <p:style>
+          <a:lnRef idx="1">
+            <a:schemeClr val="accent1"/>
+          </a:lnRef>
+          <a:fillRef idx="3">
+            <a:schemeClr val="accent1"/>
+          </a:fillRef>
+          <a:effectRef idx="2">
+            <a:schemeClr val="accent1"/>
+          </a:effectRef>
+          <a:fontRef idx="minor">
+            <a:schemeClr val="lt1"/>
+          </a:fontRef>
+        </p:style>
+        <p:txBody>
+          <a:bodyPr rtlCol="0" anchor="ctr"/>
+          <a:lstStyle/>
+          <a:p>
+            <a:pPr algn="ctr"/>
+          </a:p>
+        </p:txBody>
+      </p:sp>
+      <p:sp>
+        <p:nvSpPr>
+          <p:cNvPr id="55" name="Rectangle 54"/>
           <p:cNvSpPr/>
           <p:nvPr/>
         </p:nvSpPr>
@@ -28731,7 +29435,7 @@
       </p:sp>
       <p:sp>
         <p:nvSpPr>
-          <p:cNvPr id="51" name="TextBox 50"/>
+          <p:cNvPr id="56" name="TextBox 55"/>
           <p:cNvSpPr txBox="1"/>
           <p:nvPr/>
         </p:nvSpPr>
@@ -28767,7 +29471,7 @@
       </p:sp>
       <p:sp>
         <p:nvSpPr>
-          <p:cNvPr id="52" name="Rectangle 51"/>
+          <p:cNvPr id="57" name="Rectangle 56"/>
           <p:cNvSpPr/>
           <p:nvPr/>
         </p:nvSpPr>
@@ -28810,7 +29514,7 @@
       </p:sp>
       <p:sp>
         <p:nvSpPr>
-          <p:cNvPr id="53" name="TextBox 52"/>
+          <p:cNvPr id="58" name="TextBox 57"/>
           <p:cNvSpPr txBox="1"/>
           <p:nvPr/>
         </p:nvSpPr>
@@ -28846,7 +29550,7 @@
       </p:sp>
       <p:sp>
         <p:nvSpPr>
-          <p:cNvPr id="54" name="Rectangle 53"/>
+          <p:cNvPr id="59" name="Rectangle 58"/>
           <p:cNvSpPr/>
           <p:nvPr/>
         </p:nvSpPr>
@@ -28889,7 +29593,7 @@
       </p:sp>
       <p:sp>
         <p:nvSpPr>
-          <p:cNvPr id="55" name="TextBox 54"/>
+          <p:cNvPr id="60" name="TextBox 59"/>
           <p:cNvSpPr txBox="1"/>
           <p:nvPr/>
         </p:nvSpPr>
@@ -28925,7 +29629,7 @@
       </p:sp>
       <p:sp>
         <p:nvSpPr>
-          <p:cNvPr id="56" name="Rectangle 55"/>
+          <p:cNvPr id="61" name="Rectangle 60"/>
           <p:cNvSpPr/>
           <p:nvPr/>
         </p:nvSpPr>
@@ -28968,7 +29672,7 @@
       </p:sp>
       <p:sp>
         <p:nvSpPr>
-          <p:cNvPr id="57" name="TextBox 56"/>
+          <p:cNvPr id="62" name="TextBox 61"/>
           <p:cNvSpPr txBox="1"/>
           <p:nvPr/>
         </p:nvSpPr>
@@ -29004,7 +29708,7 @@
       </p:sp>
       <p:sp>
         <p:nvSpPr>
-          <p:cNvPr id="58" name="Rectangle 57"/>
+          <p:cNvPr id="63" name="Rectangle 62"/>
           <p:cNvSpPr/>
           <p:nvPr/>
         </p:nvSpPr>
@@ -29047,7 +29751,7 @@
       </p:sp>
       <p:sp>
         <p:nvSpPr>
-          <p:cNvPr id="59" name="TextBox 58"/>
+          <p:cNvPr id="64" name="TextBox 63"/>
           <p:cNvSpPr txBox="1"/>
           <p:nvPr/>
         </p:nvSpPr>
@@ -29083,13 +29787,92 @@
       </p:sp>
       <p:sp>
         <p:nvSpPr>
-          <p:cNvPr id="60" name="TextBox 59"/>
+          <p:cNvPr id="65" name="Rectangle 64"/>
+          <p:cNvSpPr/>
+          <p:nvPr/>
+        </p:nvSpPr>
+        <p:spPr>
+          <a:xfrm>
+            <a:off x="9729216" y="2231136"/>
+            <a:ext cx="1024127" cy="438912"/>
+          </a:xfrm>
+          <a:prstGeom prst="rect">
+            <a:avLst/>
+          </a:prstGeom>
+          <a:solidFill>
+            <a:srgbClr val="D1D5DB"/>
+          </a:solidFill>
+          <a:ln>
+            <a:noFill/>
+          </a:ln>
+        </p:spPr>
+        <p:style>
+          <a:lnRef idx="1">
+            <a:schemeClr val="accent1"/>
+          </a:lnRef>
+          <a:fillRef idx="3">
+            <a:schemeClr val="accent1"/>
+          </a:fillRef>
+          <a:effectRef idx="2">
+            <a:schemeClr val="accent1"/>
+          </a:effectRef>
+          <a:fontRef idx="minor">
+            <a:schemeClr val="lt1"/>
+          </a:fontRef>
+        </p:style>
+        <p:txBody>
+          <a:bodyPr rtlCol="0" anchor="ctr"/>
+          <a:lstStyle/>
+          <a:p>
+            <a:pPr algn="ctr"/>
+          </a:p>
+        </p:txBody>
+      </p:sp>
+      <p:sp>
+        <p:nvSpPr>
+          <p:cNvPr id="66" name="TextBox 65"/>
           <p:cNvSpPr txBox="1"/>
           <p:nvPr/>
         </p:nvSpPr>
         <p:spPr>
           <a:xfrm>
             <a:off x="9692640" y="2331720"/>
+            <a:ext cx="1097280" cy="457200"/>
+          </a:xfrm>
+          <a:prstGeom prst="rect">
+            <a:avLst/>
+          </a:prstGeom>
+          <a:noFill/>
+        </p:spPr>
+        <p:txBody>
+          <a:bodyPr wrap="square">
+            <a:spAutoFit/>
+          </a:bodyPr>
+          <a:lstStyle/>
+          <a:p>
+            <a:pPr algn="ctr">
+              <a:defRPr sz="1100" b="1">
+                <a:solidFill>
+                  <a:srgbClr val="FFFFFF"/>
+                </a:solidFill>
+                <a:latin typeface="Calibri"/>
+              </a:defRPr>
+            </a:pPr>
+            <a:r>
+              <a:t>0</a:t>
+            </a:r>
+          </a:p>
+        </p:txBody>
+      </p:sp>
+      <p:sp>
+        <p:nvSpPr>
+          <p:cNvPr id="67" name="TextBox 66"/>
+          <p:cNvSpPr txBox="1"/>
+          <p:nvPr/>
+        </p:nvSpPr>
+        <p:spPr>
+          <a:xfrm>
+            <a:off x="10789920" y="2331720"/>
             <a:ext cx="822960" cy="475488"/>
           </a:xfrm>
           <a:prstGeom prst="rect">
@@ -29106,27 +29889,27 @@
             <a:pPr algn="ctr">
               <a:defRPr sz="1100" b="1">
                 <a:solidFill>
-                  <a:srgbClr val="D97706"/>
-                </a:solidFill>
-                <a:latin typeface="Calibri"/>
-              </a:defRPr>
-            </a:pPr>
-            <a:r>
-              <a:t>82%</a:t>
-            </a:r>
-          </a:p>
-        </p:txBody>
-      </p:sp>
-      <p:sp>
-        <p:nvSpPr>
-          <p:cNvPr id="61" name="Rectangle 60"/>
+                  <a:srgbClr val="DC2626"/>
+                </a:solidFill>
+                <a:latin typeface="Calibri"/>
+              </a:defRPr>
+            </a:pPr>
+            <a:r>
+              <a:t>68%</a:t>
+            </a:r>
+          </a:p>
+        </p:txBody>
+      </p:sp>
+      <p:sp>
+        <p:nvSpPr>
+          <p:cNvPr id="68" name="Rectangle 67"/>
           <p:cNvSpPr/>
           <p:nvPr/>
         </p:nvSpPr>
         <p:spPr>
           <a:xfrm>
             <a:off x="182880" y="2724911"/>
-            <a:ext cx="10332720" cy="548640"/>
+            <a:ext cx="11430000" cy="548640"/>
           </a:xfrm>
           <a:prstGeom prst="rect">
             <a:avLst/>
@@ -29162,7 +29945,7 @@
       </p:sp>
       <p:sp>
         <p:nvSpPr>
-          <p:cNvPr id="62" name="TextBox 61"/>
+          <p:cNvPr id="69" name="TextBox 68"/>
           <p:cNvSpPr txBox="1"/>
           <p:nvPr/>
         </p:nvSpPr>
@@ -29198,7 +29981,7 @@
       </p:sp>
       <p:sp>
         <p:nvSpPr>
-          <p:cNvPr id="63" name="Rectangle 62"/>
+          <p:cNvPr id="70" name="Rectangle 69"/>
           <p:cNvSpPr/>
           <p:nvPr/>
         </p:nvSpPr>
@@ -29241,7 +30024,7 @@
       </p:sp>
       <p:sp>
         <p:nvSpPr>
-          <p:cNvPr id="64" name="Rectangle 63"/>
+          <p:cNvPr id="71" name="Rectangle 70"/>
           <p:cNvSpPr/>
           <p:nvPr/>
         </p:nvSpPr>
@@ -29284,7 +30067,7 @@
       </p:sp>
       <p:sp>
         <p:nvSpPr>
-          <p:cNvPr id="65" name="Rectangle 64"/>
+          <p:cNvPr id="72" name="Rectangle 71"/>
           <p:cNvSpPr/>
           <p:nvPr/>
         </p:nvSpPr>
@@ -29327,7 +30110,7 @@
       </p:sp>
       <p:sp>
         <p:nvSpPr>
-          <p:cNvPr id="66" name="TextBox 65"/>
+          <p:cNvPr id="73" name="TextBox 72"/>
           <p:cNvSpPr txBox="1"/>
           <p:nvPr/>
         </p:nvSpPr>
@@ -29363,7 +30146,7 @@
       </p:sp>
       <p:sp>
         <p:nvSpPr>
-          <p:cNvPr id="67" name="Rectangle 66"/>
+          <p:cNvPr id="74" name="Rectangle 73"/>
           <p:cNvSpPr/>
           <p:nvPr/>
         </p:nvSpPr>
@@ -29406,7 +30189,7 @@
       </p:sp>
       <p:sp>
         <p:nvSpPr>
-          <p:cNvPr id="68" name="TextBox 67"/>
+          <p:cNvPr id="75" name="TextBox 74"/>
           <p:cNvSpPr txBox="1"/>
           <p:nvPr/>
         </p:nvSpPr>
@@ -29442,7 +30225,7 @@
       </p:sp>
       <p:sp>
         <p:nvSpPr>
-          <p:cNvPr id="69" name="Rectangle 68"/>
+          <p:cNvPr id="76" name="Rectangle 75"/>
           <p:cNvSpPr/>
           <p:nvPr/>
         </p:nvSpPr>
@@ -29485,7 +30268,7 @@
       </p:sp>
       <p:sp>
         <p:nvSpPr>
-          <p:cNvPr id="70" name="TextBox 69"/>
+          <p:cNvPr id="77" name="TextBox 76"/>
           <p:cNvSpPr txBox="1"/>
           <p:nvPr/>
         </p:nvSpPr>
@@ -29521,7 +30304,7 @@
       </p:sp>
       <p:sp>
         <p:nvSpPr>
-          <p:cNvPr id="71" name="Rectangle 70"/>
+          <p:cNvPr id="78" name="Rectangle 77"/>
           <p:cNvSpPr/>
           <p:nvPr/>
         </p:nvSpPr>
@@ -29564,7 +30347,7 @@
       </p:sp>
       <p:sp>
         <p:nvSpPr>
-          <p:cNvPr id="72" name="TextBox 71"/>
+          <p:cNvPr id="79" name="TextBox 78"/>
           <p:cNvSpPr txBox="1"/>
           <p:nvPr/>
         </p:nvSpPr>
@@ -29600,7 +30383,7 @@
       </p:sp>
       <p:sp>
         <p:nvSpPr>
-          <p:cNvPr id="73" name="Rectangle 72"/>
+          <p:cNvPr id="80" name="Rectangle 79"/>
           <p:cNvSpPr/>
           <p:nvPr/>
         </p:nvSpPr>
@@ -29643,7 +30426,7 @@
       </p:sp>
       <p:sp>
         <p:nvSpPr>
-          <p:cNvPr id="74" name="TextBox 73"/>
+          <p:cNvPr id="81" name="TextBox 80"/>
           <p:cNvSpPr txBox="1"/>
           <p:nvPr/>
         </p:nvSpPr>
@@ -29679,85 +30462,13 @@
       </p:sp>
       <p:sp>
         <p:nvSpPr>
-          <p:cNvPr id="75" name="TextBox 74"/>
-          <p:cNvSpPr txBox="1"/>
-          <p:nvPr/>
-        </p:nvSpPr>
-        <p:spPr>
-          <a:xfrm>
-            <a:off x="9692640" y="2880359"/>
-            <a:ext cx="822960" cy="475488"/>
-          </a:xfrm>
-          <a:prstGeom prst="rect">
-            <a:avLst/>
-          </a:prstGeom>
-          <a:noFill/>
-        </p:spPr>
-        <p:txBody>
-          <a:bodyPr wrap="square">
-            <a:spAutoFit/>
-          </a:bodyPr>
-          <a:lstStyle/>
-          <a:p>
-            <a:pPr algn="ctr">
-              <a:defRPr sz="1100" b="1">
-                <a:solidFill>
-                  <a:srgbClr val="D97706"/>
-                </a:solidFill>
-                <a:latin typeface="Calibri"/>
-              </a:defRPr>
-            </a:pPr>
-            <a:r>
-              <a:t>94%</a:t>
-            </a:r>
-          </a:p>
-        </p:txBody>
-      </p:sp>
-      <p:sp>
-        <p:nvSpPr>
-          <p:cNvPr id="76" name="TextBox 75"/>
-          <p:cNvSpPr txBox="1"/>
-          <p:nvPr/>
-        </p:nvSpPr>
-        <p:spPr>
-          <a:xfrm>
-            <a:off x="256032" y="3429000"/>
-            <a:ext cx="1828800" cy="475488"/>
-          </a:xfrm>
-          <a:prstGeom prst="rect">
-            <a:avLst/>
-          </a:prstGeom>
-          <a:noFill/>
-        </p:spPr>
-        <p:txBody>
-          <a:bodyPr wrap="square">
-            <a:spAutoFit/>
-          </a:bodyPr>
-          <a:lstStyle/>
-          <a:p>
-            <a:pPr algn="l">
-              <a:defRPr sz="900" b="1">
-                <a:solidFill>
-                  <a:srgbClr val="111827"/>
-                </a:solidFill>
-                <a:latin typeface="Calibri"/>
-              </a:defRPr>
-            </a:pPr>
-            <a:r>
-              <a:t>Kurt Butterfield</a:t>
-            </a:r>
-          </a:p>
-        </p:txBody>
-      </p:sp>
-      <p:sp>
-        <p:nvSpPr>
-          <p:cNvPr id="77" name="Rectangle 76"/>
+          <p:cNvPr id="82" name="Rectangle 81"/>
           <p:cNvSpPr/>
           <p:nvPr/>
         </p:nvSpPr>
         <p:spPr>
           <a:xfrm>
-            <a:off x="2048256" y="3328416"/>
+            <a:off x="9729216" y="2779775"/>
             <a:ext cx="1024127" cy="438912"/>
           </a:xfrm>
           <a:prstGeom prst="rect">
@@ -29794,13 +30505,13 @@
       </p:sp>
       <p:sp>
         <p:nvSpPr>
-          <p:cNvPr id="78" name="TextBox 77"/>
-          <p:cNvSpPr txBox="1"/>
-          <p:nvPr/>
-        </p:nvSpPr>
-        <p:spPr>
-          <a:xfrm>
-            <a:off x="2011680" y="3429000"/>
+          <p:cNvPr id="83" name="TextBox 82"/>
+          <p:cNvSpPr txBox="1"/>
+          <p:nvPr/>
+        </p:nvSpPr>
+        <p:spPr>
+          <a:xfrm>
+            <a:off x="9692640" y="2880359"/>
             <a:ext cx="1097280" cy="457200"/>
           </a:xfrm>
           <a:prstGeom prst="rect">
@@ -29830,13 +30541,85 @@
       </p:sp>
       <p:sp>
         <p:nvSpPr>
-          <p:cNvPr id="79" name="Rectangle 78"/>
+          <p:cNvPr id="84" name="TextBox 83"/>
+          <p:cNvSpPr txBox="1"/>
+          <p:nvPr/>
+        </p:nvSpPr>
+        <p:spPr>
+          <a:xfrm>
+            <a:off x="10789920" y="2880359"/>
+            <a:ext cx="822960" cy="475488"/>
+          </a:xfrm>
+          <a:prstGeom prst="rect">
+            <a:avLst/>
+          </a:prstGeom>
+          <a:noFill/>
+        </p:spPr>
+        <p:txBody>
+          <a:bodyPr wrap="square">
+            <a:spAutoFit/>
+          </a:bodyPr>
+          <a:lstStyle/>
+          <a:p>
+            <a:pPr algn="ctr">
+              <a:defRPr sz="1100" b="1">
+                <a:solidFill>
+                  <a:srgbClr val="D97706"/>
+                </a:solidFill>
+                <a:latin typeface="Calibri"/>
+              </a:defRPr>
+            </a:pPr>
+            <a:r>
+              <a:t>78%</a:t>
+            </a:r>
+          </a:p>
+        </p:txBody>
+      </p:sp>
+      <p:sp>
+        <p:nvSpPr>
+          <p:cNvPr id="85" name="TextBox 84"/>
+          <p:cNvSpPr txBox="1"/>
+          <p:nvPr/>
+        </p:nvSpPr>
+        <p:spPr>
+          <a:xfrm>
+            <a:off x="256032" y="3429000"/>
+            <a:ext cx="1828800" cy="475488"/>
+          </a:xfrm>
+          <a:prstGeom prst="rect">
+            <a:avLst/>
+          </a:prstGeom>
+          <a:noFill/>
+        </p:spPr>
+        <p:txBody>
+          <a:bodyPr wrap="square">
+            <a:spAutoFit/>
+          </a:bodyPr>
+          <a:lstStyle/>
+          <a:p>
+            <a:pPr algn="l">
+              <a:defRPr sz="900" b="1">
+                <a:solidFill>
+                  <a:srgbClr val="111827"/>
+                </a:solidFill>
+                <a:latin typeface="Calibri"/>
+              </a:defRPr>
+            </a:pPr>
+            <a:r>
+              <a:t>Kurt Butterfield</a:t>
+            </a:r>
+          </a:p>
+        </p:txBody>
+      </p:sp>
+      <p:sp>
+        <p:nvSpPr>
+          <p:cNvPr id="86" name="Rectangle 85"/>
           <p:cNvSpPr/>
           <p:nvPr/>
         </p:nvSpPr>
         <p:spPr>
           <a:xfrm>
-            <a:off x="3145536" y="3328416"/>
+            <a:off x="2048256" y="3328416"/>
             <a:ext cx="1024127" cy="438912"/>
           </a:xfrm>
           <a:prstGeom prst="rect">
@@ -29873,7 +30656,86 @@
       </p:sp>
       <p:sp>
         <p:nvSpPr>
-          <p:cNvPr id="80" name="TextBox 79"/>
+          <p:cNvPr id="87" name="TextBox 86"/>
+          <p:cNvSpPr txBox="1"/>
+          <p:nvPr/>
+        </p:nvSpPr>
+        <p:spPr>
+          <a:xfrm>
+            <a:off x="2011680" y="3429000"/>
+            <a:ext cx="1097280" cy="457200"/>
+          </a:xfrm>
+          <a:prstGeom prst="rect">
+            <a:avLst/>
+          </a:prstGeom>
+          <a:noFill/>
+        </p:spPr>
+        <p:txBody>
+          <a:bodyPr wrap="square">
+            <a:spAutoFit/>
+          </a:bodyPr>
+          <a:lstStyle/>
+          <a:p>
+            <a:pPr algn="ctr">
+              <a:defRPr sz="1100" b="1">
+                <a:solidFill>
+                  <a:srgbClr val="FFFFFF"/>
+                </a:solidFill>
+                <a:latin typeface="Calibri"/>
+              </a:defRPr>
+            </a:pPr>
+            <a:r>
+              <a:t>0</a:t>
+            </a:r>
+          </a:p>
+        </p:txBody>
+      </p:sp>
+      <p:sp>
+        <p:nvSpPr>
+          <p:cNvPr id="88" name="Rectangle 87"/>
+          <p:cNvSpPr/>
+          <p:nvPr/>
+        </p:nvSpPr>
+        <p:spPr>
+          <a:xfrm>
+            <a:off x="3145536" y="3328416"/>
+            <a:ext cx="1024127" cy="438912"/>
+          </a:xfrm>
+          <a:prstGeom prst="rect">
+            <a:avLst/>
+          </a:prstGeom>
+          <a:solidFill>
+            <a:srgbClr val="D1D5DB"/>
+          </a:solidFill>
+          <a:ln>
+            <a:noFill/>
+          </a:ln>
+        </p:spPr>
+        <p:style>
+          <a:lnRef idx="1">
+            <a:schemeClr val="accent1"/>
+          </a:lnRef>
+          <a:fillRef idx="3">
+            <a:schemeClr val="accent1"/>
+          </a:fillRef>
+          <a:effectRef idx="2">
+            <a:schemeClr val="accent1"/>
+          </a:effectRef>
+          <a:fontRef idx="minor">
+            <a:schemeClr val="lt1"/>
+          </a:fontRef>
+        </p:style>
+        <p:txBody>
+          <a:bodyPr rtlCol="0" anchor="ctr"/>
+          <a:lstStyle/>
+          <a:p>
+            <a:pPr algn="ctr"/>
+          </a:p>
+        </p:txBody>
+      </p:sp>
+      <p:sp>
+        <p:nvSpPr>
+          <p:cNvPr id="89" name="TextBox 88"/>
           <p:cNvSpPr txBox="1"/>
           <p:nvPr/>
         </p:nvSpPr>
@@ -29909,7 +30771,7 @@
       </p:sp>
       <p:sp>
         <p:nvSpPr>
-          <p:cNvPr id="81" name="Rectangle 80"/>
+          <p:cNvPr id="90" name="Rectangle 89"/>
           <p:cNvSpPr/>
           <p:nvPr/>
         </p:nvSpPr>
@@ -29952,7 +30814,7 @@
       </p:sp>
       <p:sp>
         <p:nvSpPr>
-          <p:cNvPr id="82" name="TextBox 81"/>
+          <p:cNvPr id="91" name="TextBox 90"/>
           <p:cNvSpPr txBox="1"/>
           <p:nvPr/>
         </p:nvSpPr>
@@ -29988,7 +30850,7 @@
       </p:sp>
       <p:sp>
         <p:nvSpPr>
-          <p:cNvPr id="83" name="Rectangle 82"/>
+          <p:cNvPr id="92" name="Rectangle 91"/>
           <p:cNvSpPr/>
           <p:nvPr/>
         </p:nvSpPr>
@@ -30031,7 +30893,7 @@
       </p:sp>
       <p:sp>
         <p:nvSpPr>
-          <p:cNvPr id="84" name="TextBox 83"/>
+          <p:cNvPr id="93" name="TextBox 92"/>
           <p:cNvSpPr txBox="1"/>
           <p:nvPr/>
         </p:nvSpPr>
@@ -30067,7 +30929,7 @@
       </p:sp>
       <p:sp>
         <p:nvSpPr>
-          <p:cNvPr id="85" name="Rectangle 84"/>
+          <p:cNvPr id="94" name="Rectangle 93"/>
           <p:cNvSpPr/>
           <p:nvPr/>
         </p:nvSpPr>
@@ -30110,7 +30972,7 @@
       </p:sp>
       <p:sp>
         <p:nvSpPr>
-          <p:cNvPr id="86" name="TextBox 85"/>
+          <p:cNvPr id="95" name="TextBox 94"/>
           <p:cNvSpPr txBox="1"/>
           <p:nvPr/>
         </p:nvSpPr>
@@ -30146,7 +31008,7 @@
       </p:sp>
       <p:sp>
         <p:nvSpPr>
-          <p:cNvPr id="87" name="Rectangle 86"/>
+          <p:cNvPr id="96" name="Rectangle 95"/>
           <p:cNvSpPr/>
           <p:nvPr/>
         </p:nvSpPr>
@@ -30189,7 +31051,7 @@
       </p:sp>
       <p:sp>
         <p:nvSpPr>
-          <p:cNvPr id="88" name="TextBox 87"/>
+          <p:cNvPr id="97" name="TextBox 96"/>
           <p:cNvSpPr txBox="1"/>
           <p:nvPr/>
         </p:nvSpPr>
@@ -30225,7 +31087,7 @@
       </p:sp>
       <p:sp>
         <p:nvSpPr>
-          <p:cNvPr id="89" name="Rectangle 88"/>
+          <p:cNvPr id="98" name="Rectangle 97"/>
           <p:cNvSpPr/>
           <p:nvPr/>
         </p:nvSpPr>
@@ -30268,7 +31130,7 @@
       </p:sp>
       <p:sp>
         <p:nvSpPr>
-          <p:cNvPr id="90" name="TextBox 89"/>
+          <p:cNvPr id="99" name="TextBox 98"/>
           <p:cNvSpPr txBox="1"/>
           <p:nvPr/>
         </p:nvSpPr>
@@ -30304,13 +31166,92 @@
       </p:sp>
       <p:sp>
         <p:nvSpPr>
-          <p:cNvPr id="91" name="TextBox 90"/>
+          <p:cNvPr id="100" name="Rectangle 99"/>
+          <p:cNvSpPr/>
+          <p:nvPr/>
+        </p:nvSpPr>
+        <p:spPr>
+          <a:xfrm>
+            <a:off x="9729216" y="3328416"/>
+            <a:ext cx="1024127" cy="438912"/>
+          </a:xfrm>
+          <a:prstGeom prst="rect">
+            <a:avLst/>
+          </a:prstGeom>
+          <a:solidFill>
+            <a:srgbClr val="D1D5DB"/>
+          </a:solidFill>
+          <a:ln>
+            <a:noFill/>
+          </a:ln>
+        </p:spPr>
+        <p:style>
+          <a:lnRef idx="1">
+            <a:schemeClr val="accent1"/>
+          </a:lnRef>
+          <a:fillRef idx="3">
+            <a:schemeClr val="accent1"/>
+          </a:fillRef>
+          <a:effectRef idx="2">
+            <a:schemeClr val="accent1"/>
+          </a:effectRef>
+          <a:fontRef idx="minor">
+            <a:schemeClr val="lt1"/>
+          </a:fontRef>
+        </p:style>
+        <p:txBody>
+          <a:bodyPr rtlCol="0" anchor="ctr"/>
+          <a:lstStyle/>
+          <a:p>
+            <a:pPr algn="ctr"/>
+          </a:p>
+        </p:txBody>
+      </p:sp>
+      <p:sp>
+        <p:nvSpPr>
+          <p:cNvPr id="101" name="TextBox 100"/>
           <p:cNvSpPr txBox="1"/>
           <p:nvPr/>
         </p:nvSpPr>
         <p:spPr>
           <a:xfrm>
             <a:off x="9692640" y="3429000"/>
+            <a:ext cx="1097280" cy="457200"/>
+          </a:xfrm>
+          <a:prstGeom prst="rect">
+            <a:avLst/>
+          </a:prstGeom>
+          <a:noFill/>
+        </p:spPr>
+        <p:txBody>
+          <a:bodyPr wrap="square">
+            <a:spAutoFit/>
+          </a:bodyPr>
+          <a:lstStyle/>
+          <a:p>
+            <a:pPr algn="ctr">
+              <a:defRPr sz="1100" b="1">
+                <a:solidFill>
+                  <a:srgbClr val="FFFFFF"/>
+                </a:solidFill>
+                <a:latin typeface="Calibri"/>
+              </a:defRPr>
+            </a:pPr>
+            <a:r>
+              <a:t>0</a:t>
+            </a:r>
+          </a:p>
+        </p:txBody>
+      </p:sp>
+      <p:sp>
+        <p:nvSpPr>
+          <p:cNvPr id="102" name="TextBox 101"/>
+          <p:cNvSpPr txBox="1"/>
+          <p:nvPr/>
+        </p:nvSpPr>
+        <p:spPr>
+          <a:xfrm>
+            <a:off x="10789920" y="3429000"/>
             <a:ext cx="822960" cy="475488"/>
           </a:xfrm>
           <a:prstGeom prst="rect">
@@ -30333,14 +31274,14 @@
               </a:defRPr>
             </a:pPr>
             <a:r>
-              <a:t>34%</a:t>
-            </a:r>
-          </a:p>
-        </p:txBody>
-      </p:sp>
-      <p:sp>
-        <p:nvSpPr>
-          <p:cNvPr id="92" name="Rectangle 91"/>
+              <a:t>46%</a:t>
+            </a:r>
+          </a:p>
+        </p:txBody>
+      </p:sp>
+      <p:sp>
+        <p:nvSpPr>
+          <p:cNvPr id="103" name="Rectangle 102"/>
           <p:cNvSpPr/>
           <p:nvPr/>
         </p:nvSpPr>
@@ -30383,7 +31324,7 @@
       </p:sp>
       <p:sp>
         <p:nvSpPr>
-          <p:cNvPr id="93" name="TextBox 92"/>
+          <p:cNvPr id="104" name="TextBox 103"/>
           <p:cNvSpPr txBox="1"/>
           <p:nvPr/>
         </p:nvSpPr>
@@ -30419,7 +31360,7 @@
       </p:sp>
       <p:sp>
         <p:nvSpPr>
-          <p:cNvPr id="94" name="TextBox 93"/>
+          <p:cNvPr id="105" name="TextBox 104"/>
           <p:cNvSpPr txBox="1"/>
           <p:nvPr/>
         </p:nvSpPr>
@@ -30455,7 +31396,7 @@
       </p:sp>
       <p:sp>
         <p:nvSpPr>
-          <p:cNvPr id="95" name="TextBox 94"/>
+          <p:cNvPr id="106" name="TextBox 105"/>
           <p:cNvSpPr txBox="1"/>
           <p:nvPr/>
         </p:nvSpPr>
@@ -30491,7 +31432,7 @@
       </p:sp>
       <p:sp>
         <p:nvSpPr>
-          <p:cNvPr id="96" name="TextBox 95"/>
+          <p:cNvPr id="107" name="TextBox 106"/>
           <p:cNvSpPr txBox="1"/>
           <p:nvPr/>
         </p:nvSpPr>
@@ -30527,7 +31468,7 @@
       </p:sp>
       <p:sp>
         <p:nvSpPr>
-          <p:cNvPr id="97" name="TextBox 96"/>
+          <p:cNvPr id="108" name="TextBox 107"/>
           <p:cNvSpPr txBox="1"/>
           <p:nvPr/>
         </p:nvSpPr>
@@ -30563,7 +31504,7 @@
       </p:sp>
       <p:sp>
         <p:nvSpPr>
-          <p:cNvPr id="98" name="TextBox 97"/>
+          <p:cNvPr id="109" name="TextBox 108"/>
           <p:cNvSpPr txBox="1"/>
           <p:nvPr/>
         </p:nvSpPr>
@@ -30599,7 +31540,7 @@
       </p:sp>
       <p:sp>
         <p:nvSpPr>
-          <p:cNvPr id="99" name="TextBox 98"/>
+          <p:cNvPr id="110" name="TextBox 109"/>
           <p:cNvSpPr txBox="1"/>
           <p:nvPr/>
         </p:nvSpPr>
@@ -30635,7 +31576,7 @@
       </p:sp>
       <p:sp>
         <p:nvSpPr>
-          <p:cNvPr id="100" name="TextBox 99"/>
+          <p:cNvPr id="111" name="TextBox 110"/>
           <p:cNvSpPr txBox="1"/>
           <p:nvPr/>
         </p:nvSpPr>
@@ -30671,7 +31612,7 @@
       </p:sp>
       <p:sp>
         <p:nvSpPr>
-          <p:cNvPr id="101" name="TextBox 100"/>
+          <p:cNvPr id="112" name="TextBox 111"/>
           <p:cNvSpPr txBox="1"/>
           <p:nvPr/>
         </p:nvSpPr>
@@ -30707,7 +31648,7 @@
       </p:sp>
       <p:sp>
         <p:nvSpPr>
-          <p:cNvPr id="102" name="TextBox 101"/>
+          <p:cNvPr id="113" name="TextBox 112"/>
           <p:cNvSpPr txBox="1"/>
           <p:nvPr/>
         </p:nvSpPr>
@@ -30743,7 +31684,7 @@
       </p:sp>
       <p:sp>
         <p:nvSpPr>
-          <p:cNvPr id="103" name="TextBox 102"/>
+          <p:cNvPr id="114" name="TextBox 113"/>
           <p:cNvSpPr txBox="1"/>
           <p:nvPr/>
         </p:nvSpPr>
@@ -30779,7 +31720,7 @@
       </p:sp>
       <p:sp>
         <p:nvSpPr>
-          <p:cNvPr id="104" name="TextBox 103"/>
+          <p:cNvPr id="115" name="TextBox 114"/>
           <p:cNvSpPr txBox="1"/>
           <p:nvPr/>
         </p:nvSpPr>
@@ -30815,7 +31756,7 @@
       </p:sp>
       <p:sp>
         <p:nvSpPr>
-          <p:cNvPr id="105" name="TextBox 104"/>
+          <p:cNvPr id="116" name="TextBox 115"/>
           <p:cNvSpPr txBox="1"/>
           <p:nvPr/>
         </p:nvSpPr>
@@ -30851,7 +31792,7 @@
       </p:sp>
       <p:sp>
         <p:nvSpPr>
-          <p:cNvPr id="106" name="TextBox 105"/>
+          <p:cNvPr id="117" name="TextBox 116"/>
           <p:cNvSpPr txBox="1"/>
           <p:nvPr/>
         </p:nvSpPr>
@@ -30887,7 +31828,7 @@
       </p:sp>
       <p:sp>
         <p:nvSpPr>
-          <p:cNvPr id="107" name="TextBox 106"/>
+          <p:cNvPr id="118" name="TextBox 117"/>
           <p:cNvSpPr txBox="1"/>
           <p:nvPr/>
         </p:nvSpPr>
@@ -30916,14 +31857,14 @@
               </a:defRPr>
             </a:pPr>
             <a:r>
-              <a:t>47.5</a:t>
-            </a:r>
-          </a:p>
-        </p:txBody>
-      </p:sp>
-      <p:sp>
-        <p:nvSpPr>
-          <p:cNvPr id="108" name="TextBox 107"/>
+              <a:t>46.9</a:t>
+            </a:r>
+          </a:p>
+        </p:txBody>
+      </p:sp>
+      <p:sp>
+        <p:nvSpPr>
+          <p:cNvPr id="119" name="TextBox 118"/>
           <p:cNvSpPr txBox="1"/>
           <p:nvPr/>
         </p:nvSpPr>
@@ -30952,14 +31893,14 @@
               </a:defRPr>
             </a:pPr>
             <a:r>
-              <a:t>95%</a:t>
-            </a:r>
-          </a:p>
-        </p:txBody>
-      </p:sp>
-      <p:sp>
-        <p:nvSpPr>
-          <p:cNvPr id="109" name="Rectangle 108"/>
+              <a:t>94%</a:t>
+            </a:r>
+          </a:p>
+        </p:txBody>
+      </p:sp>
+      <p:sp>
+        <p:nvSpPr>
+          <p:cNvPr id="120" name="Rectangle 119"/>
           <p:cNvSpPr/>
           <p:nvPr/>
         </p:nvSpPr>
@@ -31002,7 +31943,7 @@
       </p:sp>
       <p:sp>
         <p:nvSpPr>
-          <p:cNvPr id="110" name="TextBox 109"/>
+          <p:cNvPr id="121" name="TextBox 120"/>
           <p:cNvSpPr txBox="1"/>
           <p:nvPr/>
         </p:nvSpPr>
@@ -31038,7 +31979,7 @@
       </p:sp>
       <p:sp>
         <p:nvSpPr>
-          <p:cNvPr id="111" name="TextBox 110"/>
+          <p:cNvPr id="122" name="TextBox 121"/>
           <p:cNvSpPr txBox="1"/>
           <p:nvPr/>
         </p:nvSpPr>
@@ -31074,7 +32015,7 @@
       </p:sp>
       <p:sp>
         <p:nvSpPr>
-          <p:cNvPr id="112" name="TextBox 111"/>
+          <p:cNvPr id="123" name="TextBox 122"/>
           <p:cNvSpPr txBox="1"/>
           <p:nvPr/>
         </p:nvSpPr>
@@ -31110,7 +32051,7 @@
       </p:sp>
       <p:sp>
         <p:nvSpPr>
-          <p:cNvPr id="113" name="TextBox 112"/>
+          <p:cNvPr id="124" name="TextBox 123"/>
           <p:cNvSpPr txBox="1"/>
           <p:nvPr/>
         </p:nvSpPr>
@@ -31146,7 +32087,7 @@
       </p:sp>
       <p:sp>
         <p:nvSpPr>
-          <p:cNvPr id="114" name="TextBox 113"/>
+          <p:cNvPr id="125" name="TextBox 124"/>
           <p:cNvSpPr txBox="1"/>
           <p:nvPr/>
         </p:nvSpPr>
@@ -31182,7 +32123,7 @@
       </p:sp>
       <p:sp>
         <p:nvSpPr>
-          <p:cNvPr id="115" name="TextBox 114"/>
+          <p:cNvPr id="126" name="TextBox 125"/>
           <p:cNvSpPr txBox="1"/>
           <p:nvPr/>
         </p:nvSpPr>
@@ -31218,7 +32159,7 @@
       </p:sp>
       <p:sp>
         <p:nvSpPr>
-          <p:cNvPr id="116" name="TextBox 115"/>
+          <p:cNvPr id="127" name="TextBox 126"/>
           <p:cNvSpPr txBox="1"/>
           <p:nvPr/>
         </p:nvSpPr>
@@ -31247,14 +32188,14 @@
               </a:defRPr>
             </a:pPr>
             <a:r>
-              <a:t>37.0</a:t>
-            </a:r>
-          </a:p>
-        </p:txBody>
-      </p:sp>
-      <p:sp>
-        <p:nvSpPr>
-          <p:cNvPr id="117" name="TextBox 116"/>
+              <a:t>30.8</a:t>
+            </a:r>
+          </a:p>
+        </p:txBody>
+      </p:sp>
+      <p:sp>
+        <p:nvSpPr>
+          <p:cNvPr id="128" name="TextBox 127"/>
           <p:cNvSpPr txBox="1"/>
           <p:nvPr/>
         </p:nvSpPr>
@@ -31283,14 +32224,14 @@
               </a:defRPr>
             </a:pPr>
             <a:r>
-              <a:t>74%</a:t>
-            </a:r>
-          </a:p>
-        </p:txBody>
-      </p:sp>
-      <p:sp>
-        <p:nvSpPr>
-          <p:cNvPr id="118" name="TextBox 117"/>
+              <a:t>62%</a:t>
+            </a:r>
+          </a:p>
+        </p:txBody>
+      </p:sp>
+      <p:sp>
+        <p:nvSpPr>
+          <p:cNvPr id="129" name="TextBox 128"/>
           <p:cNvSpPr txBox="1"/>
           <p:nvPr/>
         </p:nvSpPr>
@@ -31326,7 +32267,7 @@
       </p:sp>
       <p:sp>
         <p:nvSpPr>
-          <p:cNvPr id="119" name="TextBox 118"/>
+          <p:cNvPr id="130" name="TextBox 129"/>
           <p:cNvSpPr txBox="1"/>
           <p:nvPr/>
         </p:nvSpPr>
@@ -31362,7 +32303,7 @@
       </p:sp>
       <p:sp>
         <p:nvSpPr>
-          <p:cNvPr id="120" name="TextBox 119"/>
+          <p:cNvPr id="131" name="TextBox 130"/>
           <p:cNvSpPr txBox="1"/>
           <p:nvPr/>
         </p:nvSpPr>
@@ -31398,7 +32339,7 @@
       </p:sp>
       <p:sp>
         <p:nvSpPr>
-          <p:cNvPr id="121" name="TextBox 120"/>
+          <p:cNvPr id="132" name="TextBox 131"/>
           <p:cNvSpPr txBox="1"/>
           <p:nvPr/>
         </p:nvSpPr>
@@ -31434,7 +32375,7 @@
       </p:sp>
       <p:sp>
         <p:nvSpPr>
-          <p:cNvPr id="122" name="TextBox 121"/>
+          <p:cNvPr id="133" name="TextBox 132"/>
           <p:cNvSpPr txBox="1"/>
           <p:nvPr/>
         </p:nvSpPr>
@@ -31470,7 +32411,7 @@
       </p:sp>
       <p:sp>
         <p:nvSpPr>
-          <p:cNvPr id="123" name="TextBox 122"/>
+          <p:cNvPr id="134" name="TextBox 133"/>
           <p:cNvSpPr txBox="1"/>
           <p:nvPr/>
         </p:nvSpPr>
@@ -31506,7 +32447,7 @@
       </p:sp>
       <p:sp>
         <p:nvSpPr>
-          <p:cNvPr id="124" name="TextBox 123"/>
+          <p:cNvPr id="135" name="TextBox 134"/>
           <p:cNvSpPr txBox="1"/>
           <p:nvPr/>
         </p:nvSpPr>
@@ -31535,14 +32476,14 @@
               </a:defRPr>
             </a:pPr>
             <a:r>
-              <a:t>41.0</a:t>
-            </a:r>
-          </a:p>
-        </p:txBody>
-      </p:sp>
-      <p:sp>
-        <p:nvSpPr>
-          <p:cNvPr id="125" name="TextBox 124"/>
+              <a:t>34.2</a:t>
+            </a:r>
+          </a:p>
+        </p:txBody>
+      </p:sp>
+      <p:sp>
+        <p:nvSpPr>
+          <p:cNvPr id="136" name="TextBox 135"/>
           <p:cNvSpPr txBox="1"/>
           <p:nvPr/>
         </p:nvSpPr>
@@ -31565,20 +32506,20 @@
             <a:pPr algn="ctr">
               <a:defRPr sz="900" b="0">
                 <a:solidFill>
-                  <a:srgbClr val="D97706"/>
-                </a:solidFill>
-                <a:latin typeface="Calibri"/>
-              </a:defRPr>
-            </a:pPr>
-            <a:r>
-              <a:t>82%</a:t>
-            </a:r>
-          </a:p>
-        </p:txBody>
-      </p:sp>
-      <p:sp>
-        <p:nvSpPr>
-          <p:cNvPr id="126" name="Rectangle 125"/>
+                  <a:srgbClr val="DC2626"/>
+                </a:solidFill>
+                <a:latin typeface="Calibri"/>
+              </a:defRPr>
+            </a:pPr>
+            <a:r>
+              <a:t>68%</a:t>
+            </a:r>
+          </a:p>
+        </p:txBody>
+      </p:sp>
+      <p:sp>
+        <p:nvSpPr>
+          <p:cNvPr id="137" name="Rectangle 136"/>
           <p:cNvSpPr/>
           <p:nvPr/>
         </p:nvSpPr>
@@ -31621,7 +32562,7 @@
       </p:sp>
       <p:sp>
         <p:nvSpPr>
-          <p:cNvPr id="127" name="TextBox 126"/>
+          <p:cNvPr id="138" name="TextBox 137"/>
           <p:cNvSpPr txBox="1"/>
           <p:nvPr/>
         </p:nvSpPr>
@@ -31657,7 +32598,7 @@
       </p:sp>
       <p:sp>
         <p:nvSpPr>
-          <p:cNvPr id="128" name="TextBox 127"/>
+          <p:cNvPr id="139" name="TextBox 138"/>
           <p:cNvSpPr txBox="1"/>
           <p:nvPr/>
         </p:nvSpPr>
@@ -31693,7 +32634,7 @@
       </p:sp>
       <p:sp>
         <p:nvSpPr>
-          <p:cNvPr id="129" name="TextBox 128"/>
+          <p:cNvPr id="140" name="TextBox 139"/>
           <p:cNvSpPr txBox="1"/>
           <p:nvPr/>
         </p:nvSpPr>
@@ -31729,7 +32670,7 @@
       </p:sp>
       <p:sp>
         <p:nvSpPr>
-          <p:cNvPr id="130" name="TextBox 129"/>
+          <p:cNvPr id="141" name="TextBox 140"/>
           <p:cNvSpPr txBox="1"/>
           <p:nvPr/>
         </p:nvSpPr>
@@ -31765,7 +32706,7 @@
       </p:sp>
       <p:sp>
         <p:nvSpPr>
-          <p:cNvPr id="131" name="TextBox 130"/>
+          <p:cNvPr id="142" name="TextBox 141"/>
           <p:cNvSpPr txBox="1"/>
           <p:nvPr/>
         </p:nvSpPr>
@@ -31801,7 +32742,7 @@
       </p:sp>
       <p:sp>
         <p:nvSpPr>
-          <p:cNvPr id="132" name="TextBox 131"/>
+          <p:cNvPr id="143" name="TextBox 142"/>
           <p:cNvSpPr txBox="1"/>
           <p:nvPr/>
         </p:nvSpPr>
@@ -31837,7 +32778,7 @@
       </p:sp>
       <p:sp>
         <p:nvSpPr>
-          <p:cNvPr id="133" name="TextBox 132"/>
+          <p:cNvPr id="144" name="TextBox 143"/>
           <p:cNvSpPr txBox="1"/>
           <p:nvPr/>
         </p:nvSpPr>
@@ -31866,14 +32807,14 @@
               </a:defRPr>
             </a:pPr>
             <a:r>
-              <a:t>46.8</a:t>
-            </a:r>
-          </a:p>
-        </p:txBody>
-      </p:sp>
-      <p:sp>
-        <p:nvSpPr>
-          <p:cNvPr id="134" name="TextBox 133"/>
+              <a:t>39.0</a:t>
+            </a:r>
+          </a:p>
+        </p:txBody>
+      </p:sp>
+      <p:sp>
+        <p:nvSpPr>
+          <p:cNvPr id="145" name="TextBox 144"/>
           <p:cNvSpPr txBox="1"/>
           <p:nvPr/>
         </p:nvSpPr>
@@ -31902,14 +32843,14 @@
               </a:defRPr>
             </a:pPr>
             <a:r>
-              <a:t>94%</a:t>
-            </a:r>
-          </a:p>
-        </p:txBody>
-      </p:sp>
-      <p:sp>
-        <p:nvSpPr>
-          <p:cNvPr id="135" name="TextBox 134"/>
+              <a:t>78%</a:t>
+            </a:r>
+          </a:p>
+        </p:txBody>
+      </p:sp>
+      <p:sp>
+        <p:nvSpPr>
+          <p:cNvPr id="146" name="TextBox 145"/>
           <p:cNvSpPr txBox="1"/>
           <p:nvPr/>
         </p:nvSpPr>
@@ -31945,7 +32886,7 @@
       </p:sp>
       <p:sp>
         <p:nvSpPr>
-          <p:cNvPr id="136" name="TextBox 135"/>
+          <p:cNvPr id="147" name="TextBox 146"/>
           <p:cNvSpPr txBox="1"/>
           <p:nvPr/>
         </p:nvSpPr>
@@ -31981,7 +32922,7 @@
       </p:sp>
       <p:sp>
         <p:nvSpPr>
-          <p:cNvPr id="137" name="TextBox 136"/>
+          <p:cNvPr id="148" name="TextBox 147"/>
           <p:cNvSpPr txBox="1"/>
           <p:nvPr/>
         </p:nvSpPr>
@@ -32017,7 +32958,7 @@
       </p:sp>
       <p:sp>
         <p:nvSpPr>
-          <p:cNvPr id="138" name="TextBox 137"/>
+          <p:cNvPr id="149" name="TextBox 148"/>
           <p:cNvSpPr txBox="1"/>
           <p:nvPr/>
         </p:nvSpPr>
@@ -32053,7 +32994,7 @@
       </p:sp>
       <p:sp>
         <p:nvSpPr>
-          <p:cNvPr id="139" name="TextBox 138"/>
+          <p:cNvPr id="150" name="TextBox 149"/>
           <p:cNvSpPr txBox="1"/>
           <p:nvPr/>
         </p:nvSpPr>
@@ -32089,7 +33030,7 @@
       </p:sp>
       <p:sp>
         <p:nvSpPr>
-          <p:cNvPr id="140" name="TextBox 139"/>
+          <p:cNvPr id="151" name="TextBox 150"/>
           <p:cNvSpPr txBox="1"/>
           <p:nvPr/>
         </p:nvSpPr>
@@ -32125,7 +33066,7 @@
       </p:sp>
       <p:sp>
         <p:nvSpPr>
-          <p:cNvPr id="141" name="TextBox 140"/>
+          <p:cNvPr id="152" name="TextBox 151"/>
           <p:cNvSpPr txBox="1"/>
           <p:nvPr/>
         </p:nvSpPr>
@@ -32154,14 +33095,14 @@
               </a:defRPr>
             </a:pPr>
             <a:r>
-              <a:t>16.8</a:t>
-            </a:r>
-          </a:p>
-        </p:txBody>
-      </p:sp>
-      <p:sp>
-        <p:nvSpPr>
-          <p:cNvPr id="142" name="TextBox 141"/>
+              <a:t>23.0</a:t>
+            </a:r>
+          </a:p>
+        </p:txBody>
+      </p:sp>
+      <p:sp>
+        <p:nvSpPr>
+          <p:cNvPr id="153" name="TextBox 152"/>
           <p:cNvSpPr txBox="1"/>
           <p:nvPr/>
         </p:nvSpPr>
@@ -32190,7 +33131,7 @@
               </a:defRPr>
             </a:pPr>
             <a:r>
-              <a:t>34%</a:t>
+              <a:t>46%</a:t>
             </a:r>
           </a:p>
         </p:txBody>
@@ -32367,7 +33308,7 @@
               </a:defRPr>
             </a:pPr>
             <a:r>
-              <a:t>Generated May 24, 2026</a:t>
+              <a:t>Generated May 25, 2026</a:t>
             </a:r>
           </a:p>
         </p:txBody>
@@ -33058,7 +33999,7 @@
               </a:defRPr>
             </a:pPr>
             <a:r>
-              <a:t>6943</a:t>
+              <a:t>6954</a:t>
             </a:r>
           </a:p>
         </p:txBody>
@@ -33497,7 +34438,7 @@
               </a:defRPr>
             </a:pPr>
             <a:r>
-              <a:t>3341</a:t>
+              <a:t>3347</a:t>
             </a:r>
           </a:p>
         </p:txBody>
@@ -33533,7 +34474,7 @@
               </a:defRPr>
             </a:pPr>
             <a:r>
-              <a:t>331</a:t>
+              <a:t>334</a:t>
             </a:r>
           </a:p>
         </p:txBody>
@@ -33569,7 +34510,7 @@
               </a:defRPr>
             </a:pPr>
             <a:r>
-              <a:t>$9.2M</a:t>
+              <a:t>$9.3M</a:t>
             </a:r>
           </a:p>
         </p:txBody>
@@ -33641,7 +34582,7 @@
               </a:defRPr>
             </a:pPr>
             <a:r>
-              <a:t>$2.9M</a:t>
+              <a:t>$3.0M</a:t>
             </a:r>
           </a:p>
         </p:txBody>
@@ -33893,7 +34834,7 @@
               </a:defRPr>
             </a:pPr>
             <a:r>
-              <a:t>5304</a:t>
+              <a:t>5311</a:t>
             </a:r>
           </a:p>
         </p:txBody>
@@ -34332,7 +35273,7 @@
               </a:defRPr>
             </a:pPr>
             <a:r>
-              <a:t>3236</a:t>
+              <a:t>3241</a:t>
             </a:r>
           </a:p>
         </p:txBody>
@@ -34368,7 +35309,7 @@
               </a:defRPr>
             </a:pPr>
             <a:r>
-              <a:t>257</a:t>
+              <a:t>256</a:t>
             </a:r>
           </a:p>
         </p:txBody>
@@ -34404,7 +35345,7 @@
               </a:defRPr>
             </a:pPr>
             <a:r>
-              <a:t>$6.3M</a:t>
+              <a:t>$6.2M</a:t>
             </a:r>
           </a:p>
         </p:txBody>
@@ -34476,7 +35417,7 @@
               </a:defRPr>
             </a:pPr>
             <a:r>
-              <a:t>$1.7M</a:t>
+              <a:t>$1.8M</a:t>
             </a:r>
           </a:p>
         </p:txBody>
@@ -34728,7 +35669,7 @@
               </a:defRPr>
             </a:pPr>
             <a:r>
-              <a:t>1809</a:t>
+              <a:t>1810</a:t>
             </a:r>
           </a:p>
         </p:txBody>
@@ -34764,7 +35705,7 @@
               </a:defRPr>
             </a:pPr>
             <a:r>
-              <a:t>127</a:t>
+              <a:t>124</a:t>
             </a:r>
           </a:p>
         </p:txBody>
@@ -35246,7 +36187,7 @@
               </a:defRPr>
             </a:pPr>
             <a:r>
-              <a:t>3937</a:t>
+              <a:t>3939</a:t>
             </a:r>
           </a:p>
         </p:txBody>
@@ -35282,7 +36223,7 @@
               </a:defRPr>
             </a:pPr>
             <a:r>
-              <a:t>104</a:t>
+              <a:t>103</a:t>
             </a:r>
           </a:p>
         </p:txBody>
@@ -35390,7 +36331,7 @@
               </a:defRPr>
             </a:pPr>
             <a:r>
-              <a:t>$770K</a:t>
+              <a:t>$794K</a:t>
             </a:r>
           </a:p>
         </p:txBody>
@@ -35642,7 +36583,7 @@
               </a:defRPr>
             </a:pPr>
             <a:r>
-              <a:t>2682</a:t>
+              <a:t>2689</a:t>
             </a:r>
           </a:p>
         </p:txBody>
@@ -36081,7 +37022,7 @@
               </a:defRPr>
             </a:pPr>
             <a:r>
-              <a:t>1561</a:t>
+              <a:t>1563</a:t>
             </a:r>
           </a:p>
         </p:txBody>
@@ -36153,7 +37094,7 @@
               </a:defRPr>
             </a:pPr>
             <a:r>
-              <a:t>$1.1M</a:t>
+              <a:t>$1.2M</a:t>
             </a:r>
           </a:p>
         </p:txBody>
@@ -36513,7 +37454,7 @@
               </a:defRPr>
             </a:pPr>
             <a:r>
-              <a:t>51</a:t>
+              <a:t>50</a:t>
             </a:r>
           </a:p>
         </p:txBody>
@@ -36916,7 +37857,7 @@
               </a:defRPr>
             </a:pPr>
             <a:r>
-              <a:t>594</a:t>
+              <a:t>595</a:t>
             </a:r>
           </a:p>
         </p:txBody>
@@ -37434,7 +38375,7 @@
               </a:defRPr>
             </a:pPr>
             <a:r>
-              <a:t>7416</a:t>
+              <a:t>7428</a:t>
             </a:r>
           </a:p>
         </p:txBody>
@@ -38193,7 +39134,7 @@
               </a:defRPr>
             </a:pPr>
             <a:r>
-              <a:t>Retail-vertical agencies in each rep's HubSpot portfolio with zero 2026 submissions  |  Refreshed 2026-05-24</a:t>
+              <a:t>Retail-vertical agencies in each rep's HubSpot portfolio with zero 2026 submissions  |  Refreshed 2026-05-25</a:t>
             </a:r>
           </a:p>
         </p:txBody>
@@ -38229,7 +39170,7 @@
               </a:defRPr>
             </a:pPr>
             <a:r>
-              <a:t>Generated May 24, 2026</a:t>
+              <a:t>Generated May 25, 2026</a:t>
             </a:r>
           </a:p>
         </p:txBody>
@@ -40770,7 +41711,7 @@
               </a:defRPr>
             </a:pPr>
             <a:r>
-              <a:t>Generated May 24, 2026</a:t>
+              <a:t>Generated May 25, 2026</a:t>
             </a:r>
           </a:p>
         </p:txBody>
@@ -40935,7 +41876,7 @@
               </a:defRPr>
             </a:pPr>
             <a:r>
-              <a:t>Ranked by Q2 GWP (left) and Q2 Submissions (right)  ·  Mint-shaded row = new vs last week’s deck  ·  Apr 1–May 24</a:t>
+              <a:t>Ranked by Q2 GWP (left) and Q2 Submissions (right)  ·  Mint-shaded row = new vs last week’s deck  ·  Apr 1–May 25</a:t>
             </a:r>
           </a:p>
         </p:txBody>
@@ -40971,7 +41912,7 @@
               </a:defRPr>
             </a:pPr>
             <a:r>
-              <a:t>Generated May 24, 2026</a:t>
+              <a:t>Generated May 25, 2026</a:t>
             </a:r>
           </a:p>
         </p:txBody>
@@ -41424,7 +42365,7 @@
               </a:defRPr>
             </a:pPr>
             <a:r>
-              <a:t>$3.0M</a:t>
+              <a:t>$3.1M</a:t>
             </a:r>
           </a:p>
         </p:txBody>
@@ -42172,7 +43113,7 @@
               </a:defRPr>
             </a:pPr>
             <a:r>
-              <a:t>$1.6M</a:t>
+              <a:t>$1.7M</a:t>
             </a:r>
           </a:p>
         </p:txBody>
@@ -43481,7 +44422,7 @@
               </a:defRPr>
             </a:pPr>
             <a:r>
-              <a:t>$997K</a:t>
+              <a:t>$982K</a:t>
             </a:r>
           </a:p>
         </p:txBody>
@@ -43668,7 +44609,7 @@
               </a:defRPr>
             </a:pPr>
             <a:r>
-              <a:t>$981K</a:t>
+              <a:t>$962K</a:t>
             </a:r>
           </a:p>
         </p:txBody>
@@ -44603,7 +45544,7 @@
               </a:defRPr>
             </a:pPr>
             <a:r>
-              <a:t>$665K</a:t>
+              <a:t>$722K</a:t>
             </a:r>
           </a:p>
         </p:txBody>
@@ -44718,7 +45659,7 @@
               </a:defRPr>
             </a:pPr>
             <a:r>
-              <a:t>Derrick L.</a:t>
+              <a:t>Derek J.</a:t>
             </a:r>
           </a:p>
         </p:txBody>
@@ -44754,7 +45695,7 @@
               </a:defRPr>
             </a:pPr>
             <a:r>
-              <a:t>Justin Wilson</a:t>
+              <a:t>Sedge Insurance Agency LLC</a:t>
             </a:r>
           </a:p>
         </p:txBody>
@@ -44790,7 +45731,7 @@
               </a:defRPr>
             </a:pPr>
             <a:r>
-              <a:t>$640K</a:t>
+              <a:t>$582K</a:t>
             </a:r>
           </a:p>
         </p:txBody>
@@ -44905,7 +45846,7 @@
               </a:defRPr>
             </a:pPr>
             <a:r>
-              <a:t>Derek J.</a:t>
+              <a:t>Derrick L.</a:t>
             </a:r>
           </a:p>
         </p:txBody>
@@ -44941,7 +45882,7 @@
               </a:defRPr>
             </a:pPr>
             <a:r>
-              <a:t>Sedge Insurance Agency LLC</a:t>
+              <a:t>Justin Wilson</a:t>
             </a:r>
           </a:p>
         </p:txBody>
@@ -44977,7 +45918,7 @@
               </a:defRPr>
             </a:pPr>
             <a:r>
-              <a:t>$582K</a:t>
+              <a:t>$559K</a:t>
             </a:r>
           </a:p>
         </p:txBody>
@@ -45430,7 +46371,7 @@
               </a:defRPr>
             </a:pPr>
             <a:r>
-              <a:t>2193</a:t>
+              <a:t>2196</a:t>
             </a:r>
           </a:p>
         </p:txBody>
@@ -45617,7 +46558,7 @@
               </a:defRPr>
             </a:pPr>
             <a:r>
-              <a:t>2039</a:t>
+              <a:t>2042</a:t>
             </a:r>
           </a:p>
         </p:txBody>
@@ -45804,7 +46745,7 @@
               </a:defRPr>
             </a:pPr>
             <a:r>
-              <a:t>1543</a:t>
+              <a:t>1544</a:t>
             </a:r>
           </a:p>
         </p:txBody>
@@ -45991,7 +46932,7 @@
               </a:defRPr>
             </a:pPr>
             <a:r>
-              <a:t>1259</a:t>
+              <a:t>1261</a:t>
             </a:r>
           </a:p>
         </p:txBody>
@@ -46178,7 +47119,7 @@
               </a:defRPr>
             </a:pPr>
             <a:r>
-              <a:t>1171</a:t>
+              <a:t>1174</a:t>
             </a:r>
           </a:p>
         </p:txBody>
@@ -46365,7 +47306,7 @@
               </a:defRPr>
             </a:pPr>
             <a:r>
-              <a:t>1008</a:t>
+              <a:t>1010</a:t>
             </a:r>
           </a:p>
         </p:txBody>
@@ -46552,7 +47493,7 @@
               </a:defRPr>
             </a:pPr>
             <a:r>
-              <a:t>974</a:t>
+              <a:t>976</a:t>
             </a:r>
           </a:p>
         </p:txBody>
@@ -46739,7 +47680,7 @@
               </a:defRPr>
             </a:pPr>
             <a:r>
-              <a:t>909</a:t>
+              <a:t>915</a:t>
             </a:r>
           </a:p>
         </p:txBody>
@@ -46926,7 +47867,7 @@
               </a:defRPr>
             </a:pPr>
             <a:r>
-              <a:t>690</a:t>
+              <a:t>691</a:t>
             </a:r>
           </a:p>
         </p:txBody>
@@ -47113,7 +48054,7 @@
               </a:defRPr>
             </a:pPr>
             <a:r>
-              <a:t>552</a:t>
+              <a:t>553</a:t>
             </a:r>
           </a:p>
         </p:txBody>
@@ -47300,7 +48241,7 @@
               </a:defRPr>
             </a:pPr>
             <a:r>
-              <a:t>525</a:t>
+              <a:t>526</a:t>
             </a:r>
           </a:p>
         </p:txBody>
@@ -47487,7 +48428,7 @@
               </a:defRPr>
             </a:pPr>
             <a:r>
-              <a:t>496</a:t>
+              <a:t>497</a:t>
             </a:r>
           </a:p>
         </p:txBody>
@@ -47861,7 +48802,7 @@
               </a:defRPr>
             </a:pPr>
             <a:r>
-              <a:t>432</a:t>
+              <a:t>433</a:t>
             </a:r>
           </a:p>
         </p:txBody>
@@ -48048,7 +48989,7 @@
               </a:defRPr>
             </a:pPr>
             <a:r>
-              <a:t>384</a:t>
+              <a:t>383</a:t>
             </a:r>
           </a:p>
         </p:txBody>
@@ -48609,7 +49550,7 @@
               </a:defRPr>
             </a:pPr>
             <a:r>
-              <a:t>350</a:t>
+              <a:t>351</a:t>
             </a:r>
           </a:p>
         </p:txBody>
@@ -48816,7 +49757,7 @@
             <a:avLst/>
           </a:prstGeom>
           <a:solidFill>
-            <a:srgbClr val="D1FAE5"/>
+            <a:srgbClr val="F9FAFB"/>
           </a:solidFill>
           <a:ln>
             <a:noFill/>

--- a/generated/Sales Dashboards/BD Rep Scoreboard.pptx
+++ b/generated/Sales Dashboards/BD Rep Scoreboard.pptx
@@ -1661,7 +1661,7 @@
           </a:p>
           <a:p>
             <a:r>
-              <a:t>- We are 55 days into a 91-day quarter.</a:t>
+              <a:t>- We are 56 days into a 91-day quarter.</a:t>
             </a:r>
           </a:p>
         </p:txBody>
@@ -4902,7 +4902,7 @@
               </a:defRPr>
             </a:pPr>
             <a:r>
-              <a:t>As of May 25, 2026  |  55 days into Q2  |  36 days remaining</a:t>
+              <a:t>As of May 26, 2026  |  56 days into Q2  |  35 days remaining</a:t>
             </a:r>
           </a:p>
         </p:txBody>
@@ -4938,7 +4938,7 @@
               </a:defRPr>
             </a:pPr>
             <a:r>
-              <a:t>Generated May 25, 2026</a:t>
+              <a:t>Generated May 26, 2026</a:t>
             </a:r>
           </a:p>
         </p:txBody>
@@ -5019,7 +5019,7 @@
               </a:defRPr>
             </a:pPr>
             <a:r>
-              <a:t>$19.7M</a:t>
+              <a:t>$19.6M</a:t>
             </a:r>
           </a:p>
         </p:txBody>
@@ -5055,7 +5055,7 @@
               </a:defRPr>
             </a:pPr>
             <a:r>
-              <a:t>Team GWP Q2 YTD  |  Proj. $32.5M</a:t>
+              <a:t>Team GWP Q2 YTD  |  Proj. $31.8M</a:t>
             </a:r>
           </a:p>
         </p:txBody>
@@ -5134,7 +5134,7 @@
               </a:defRPr>
             </a:pPr>
             <a:r>
-              <a:t>Pacing 176% of Q1 Final</a:t>
+              <a:t>Pacing 172% of Q1 Final</a:t>
             </a:r>
           </a:p>
         </p:txBody>
@@ -5411,7 +5411,7 @@
               </a:defRPr>
             </a:pPr>
             <a:r>
-              <a:t>30,570</a:t>
+              <a:t>30,703</a:t>
             </a:r>
           </a:p>
         </p:txBody>
@@ -5526,7 +5526,7 @@
               </a:defRPr>
             </a:pPr>
             <a:r>
-              <a:t>Pacing 110% of Q1 Final</a:t>
+              <a:t>Pacing 109% of Q1 Final</a:t>
             </a:r>
           </a:p>
         </p:txBody>
@@ -5758,7 +5758,7 @@
               </a:defRPr>
             </a:pPr>
             <a:r>
-              <a:t>▲ $2.8M vs Apr pace</a:t>
+              <a:t>▲ $2.2M vs Apr pace</a:t>
             </a:r>
           </a:p>
         </p:txBody>
@@ -5830,7 +5830,7 @@
               </a:defRPr>
             </a:pPr>
             <a:r>
-              <a:t>▲ 13010 vs Apr (17560)</a:t>
+              <a:t>▲ 13138 vs Apr (17565)</a:t>
             </a:r>
           </a:p>
         </p:txBody>
@@ -6071,7 +6071,7 @@
               </a:defRPr>
             </a:pPr>
             <a:r>
-              <a:t>$27.4M</a:t>
+              <a:t>$27.5M</a:t>
             </a:r>
           </a:p>
         </p:txBody>
@@ -6600,7 +6600,7 @@
               </a:defRPr>
             </a:pPr>
             <a:r>
-              <a:t>45,791</a:t>
+              <a:t>45,795</a:t>
             </a:r>
           </a:p>
         </p:txBody>
@@ -6787,7 +6787,7 @@
               </a:defRPr>
             </a:pPr>
             <a:r>
-              <a:t>MTD (May):  $10.03M written  ·  $12.43M pace  ·  25/31 days elapsed</a:t>
+              <a:t>MTD (May):  $9.93M written  ·  $11.84M pace  ·  26/31 days elapsed</a:t>
             </a:r>
           </a:p>
         </p:txBody>
@@ -6952,7 +6952,7 @@
               </a:defRPr>
             </a:pPr>
             <a:r>
-              <a:t>Largest fleet policies written Apr 1–May 25  ·  Ranked by premium  ·  Fleet = 4+ power units</a:t>
+              <a:t>Largest fleet policies written Apr 1–May 26  ·  Ranked by premium  ·  Fleet = 4+ power units</a:t>
             </a:r>
           </a:p>
         </p:txBody>
@@ -6988,7 +6988,7 @@
               </a:defRPr>
             </a:pPr>
             <a:r>
-              <a:t>Generated May 25, 2026</a:t>
+              <a:t>Generated May 26, 2026</a:t>
             </a:r>
           </a:p>
         </p:txBody>
@@ -11750,7 +11750,7 @@
               </a:defRPr>
             </a:pPr>
             <a:r>
-              <a:t>Q2 Fleet Total: 217 fleet binds  ·  $20.0M bound premium</a:t>
+              <a:t>Q2 Fleet Total: 221 fleet binds  ·  $20.3M bound premium</a:t>
             </a:r>
           </a:p>
         </p:txBody>
@@ -11891,7 +11891,7 @@
               </a:defRPr>
             </a:pPr>
             <a:r>
-              <a:t>Ranked by bound GWP written  ·  Mint-shaded row = new vs last week’s deck  ·  Apr 1–May 25  ·  Individual producers</a:t>
+              <a:t>Ranked by bound GWP written  ·  Mint-shaded row = new vs last week’s deck  ·  Apr 1–May 26  ·  Individual producers</a:t>
             </a:r>
           </a:p>
         </p:txBody>
@@ -11927,7 +11927,7 @@
               </a:defRPr>
             </a:pPr>
             <a:r>
-              <a:t>Generated May 25, 2026</a:t>
+              <a:t>Generated May 26, 2026</a:t>
             </a:r>
           </a:p>
         </p:txBody>
@@ -12675,7 +12675,7 @@
               </a:defRPr>
             </a:pPr>
             <a:r>
-              <a:t>$1.6M</a:t>
+              <a:t>$1.7M</a:t>
             </a:r>
           </a:p>
         </p:txBody>
@@ -15480,7 +15480,7 @@
               </a:defRPr>
             </a:pPr>
             <a:r>
-              <a:t>$524K</a:t>
+              <a:t>$544K</a:t>
             </a:r>
           </a:p>
         </p:txBody>
@@ -16415,7 +16415,7 @@
               </a:defRPr>
             </a:pPr>
             <a:r>
-              <a:t>$472K</a:t>
+              <a:t>$492K</a:t>
             </a:r>
           </a:p>
         </p:txBody>
@@ -18213,7 +18213,7 @@
               </a:defRPr>
             </a:pPr>
             <a:r>
-              <a:t>Michael Su</a:t>
+              <a:t>Ibrahim Mammo</a:t>
             </a:r>
           </a:p>
         </p:txBody>
@@ -18249,7 +18249,7 @@
               </a:defRPr>
             </a:pPr>
             <a:r>
-              <a:t>Jtc Insurance Agency, Inc.</a:t>
+              <a:t>Surefire Insurance Agency Corp.</a:t>
             </a:r>
           </a:p>
         </p:txBody>
@@ -18285,7 +18285,7 @@
               </a:defRPr>
             </a:pPr>
             <a:r>
-              <a:t>$367K</a:t>
+              <a:t>$372K</a:t>
             </a:r>
           </a:p>
         </p:txBody>
@@ -18400,7 +18400,7 @@
               </a:defRPr>
             </a:pPr>
             <a:r>
-              <a:t>Patricia Galindoparedes</a:t>
+              <a:t>Michael Su</a:t>
             </a:r>
           </a:p>
         </p:txBody>
@@ -18436,7 +18436,7 @@
               </a:defRPr>
             </a:pPr>
             <a:r>
-              <a:t>Call Patty Insurance Services</a:t>
+              <a:t>Jtc Insurance Agency, Inc.</a:t>
             </a:r>
           </a:p>
         </p:txBody>
@@ -18472,7 +18472,7 @@
               </a:defRPr>
             </a:pPr>
             <a:r>
-              <a:t>$365K</a:t>
+              <a:t>$367K</a:t>
             </a:r>
           </a:p>
         </p:txBody>
@@ -18587,7 +18587,7 @@
               </a:defRPr>
             </a:pPr>
             <a:r>
-              <a:t>Kurtis Gautz</a:t>
+              <a:t>Patricia Galindoparedes</a:t>
             </a:r>
           </a:p>
         </p:txBody>
@@ -18623,7 +18623,7 @@
               </a:defRPr>
             </a:pPr>
             <a:r>
-              <a:t>CRC Insurance Services, Inc</a:t>
+              <a:t>Call Patty Insurance Services</a:t>
             </a:r>
           </a:p>
         </p:txBody>
@@ -18659,7 +18659,7 @@
               </a:defRPr>
             </a:pPr>
             <a:r>
-              <a:t>$352K</a:t>
+              <a:t>$365K</a:t>
             </a:r>
           </a:p>
         </p:txBody>
@@ -18774,7 +18774,7 @@
               </a:defRPr>
             </a:pPr>
             <a:r>
-              <a:t>Damandeep Singh</a:t>
+              <a:t>Kurtis Gautz</a:t>
             </a:r>
           </a:p>
         </p:txBody>
@@ -18810,7 +18810,7 @@
               </a:defRPr>
             </a:pPr>
             <a:r>
-              <a:t>Mayflower Insurance Services</a:t>
+              <a:t>CRC Insurance Services, Inc</a:t>
             </a:r>
           </a:p>
         </p:txBody>
@@ -18846,7 +18846,7 @@
               </a:defRPr>
             </a:pPr>
             <a:r>
-              <a:t>$341K</a:t>
+              <a:t>$352K</a:t>
             </a:r>
           </a:p>
         </p:txBody>
@@ -18961,7 +18961,7 @@
               </a:defRPr>
             </a:pPr>
             <a:r>
-              <a:t>Omar Elmanzalawy</a:t>
+              <a:t>Damandeep Singh</a:t>
             </a:r>
           </a:p>
         </p:txBody>
@@ -18997,7 +18997,7 @@
               </a:defRPr>
             </a:pPr>
             <a:r>
-              <a:t>First Connect Insurance</a:t>
+              <a:t>Mayflower Insurance Services</a:t>
             </a:r>
           </a:p>
         </p:txBody>
@@ -19033,7 +19033,7 @@
               </a:defRPr>
             </a:pPr>
             <a:r>
-              <a:t>$339K</a:t>
+              <a:t>$341K</a:t>
             </a:r>
           </a:p>
         </p:txBody>
@@ -19047,6 +19047,193 @@
         <p:spPr>
           <a:xfrm>
             <a:off x="6254496" y="5175504"/>
+            <a:ext cx="5705856" cy="256032"/>
+          </a:xfrm>
+          <a:prstGeom prst="rect">
+            <a:avLst/>
+          </a:prstGeom>
+          <a:solidFill>
+            <a:srgbClr val="FFFFFF"/>
+          </a:solidFill>
+          <a:ln>
+            <a:noFill/>
+          </a:ln>
+        </p:spPr>
+        <p:style>
+          <a:lnRef idx="1">
+            <a:schemeClr val="accent1"/>
+          </a:lnRef>
+          <a:fillRef idx="3">
+            <a:schemeClr val="accent1"/>
+          </a:fillRef>
+          <a:effectRef idx="2">
+            <a:schemeClr val="accent1"/>
+          </a:effectRef>
+          <a:fontRef idx="minor">
+            <a:schemeClr val="lt1"/>
+          </a:fontRef>
+        </p:style>
+        <p:txBody>
+          <a:bodyPr rtlCol="0" anchor="ctr"/>
+          <a:lstStyle/>
+          <a:p>
+            <a:pPr algn="ctr"/>
+          </a:p>
+        </p:txBody>
+      </p:sp>
+      <p:sp>
+        <p:nvSpPr>
+          <p:cNvPr id="197" name="TextBox 196"/>
+          <p:cNvSpPr txBox="1"/>
+          <p:nvPr/>
+        </p:nvSpPr>
+        <p:spPr>
+          <a:xfrm>
+            <a:off x="6254496" y="5193792"/>
+            <a:ext cx="411480" cy="237744"/>
+          </a:xfrm>
+          <a:prstGeom prst="rect">
+            <a:avLst/>
+          </a:prstGeom>
+          <a:noFill/>
+        </p:spPr>
+        <p:txBody>
+          <a:bodyPr wrap="none">
+            <a:spAutoFit/>
+          </a:bodyPr>
+          <a:lstStyle/>
+          <a:p>
+            <a:pPr algn="ctr">
+              <a:defRPr sz="950" b="1">
+                <a:solidFill>
+                  <a:srgbClr val="6B7280"/>
+                </a:solidFill>
+                <a:latin typeface="Calibri"/>
+              </a:defRPr>
+            </a:pPr>
+            <a:r>
+              <a:t>37</a:t>
+            </a:r>
+          </a:p>
+        </p:txBody>
+      </p:sp>
+      <p:sp>
+        <p:nvSpPr>
+          <p:cNvPr id="198" name="TextBox 197"/>
+          <p:cNvSpPr txBox="1"/>
+          <p:nvPr/>
+        </p:nvSpPr>
+        <p:spPr>
+          <a:xfrm>
+            <a:off x="6665976" y="5193792"/>
+            <a:ext cx="1920240" cy="237744"/>
+          </a:xfrm>
+          <a:prstGeom prst="rect">
+            <a:avLst/>
+          </a:prstGeom>
+          <a:noFill/>
+        </p:spPr>
+        <p:txBody>
+          <a:bodyPr wrap="none">
+            <a:spAutoFit/>
+          </a:bodyPr>
+          <a:lstStyle/>
+          <a:p>
+            <a:pPr algn="l">
+              <a:defRPr sz="950" b="1">
+                <a:solidFill>
+                  <a:srgbClr val="111827"/>
+                </a:solidFill>
+                <a:latin typeface="Calibri"/>
+              </a:defRPr>
+            </a:pPr>
+            <a:r>
+              <a:t>Omar Elmanzalawy</a:t>
+            </a:r>
+          </a:p>
+        </p:txBody>
+      </p:sp>
+      <p:sp>
+        <p:nvSpPr>
+          <p:cNvPr id="199" name="TextBox 198"/>
+          <p:cNvSpPr txBox="1"/>
+          <p:nvPr/>
+        </p:nvSpPr>
+        <p:spPr>
+          <a:xfrm>
+            <a:off x="8586216" y="5193792"/>
+            <a:ext cx="2459736" cy="237744"/>
+          </a:xfrm>
+          <a:prstGeom prst="rect">
+            <a:avLst/>
+          </a:prstGeom>
+          <a:noFill/>
+        </p:spPr>
+        <p:txBody>
+          <a:bodyPr wrap="none">
+            <a:spAutoFit/>
+          </a:bodyPr>
+          <a:lstStyle/>
+          <a:p>
+            <a:pPr algn="l">
+              <a:defRPr sz="950" b="0">
+                <a:solidFill>
+                  <a:srgbClr val="6B7280"/>
+                </a:solidFill>
+                <a:latin typeface="Calibri"/>
+              </a:defRPr>
+            </a:pPr>
+            <a:r>
+              <a:t>First Connect Insurance</a:t>
+            </a:r>
+          </a:p>
+        </p:txBody>
+      </p:sp>
+      <p:sp>
+        <p:nvSpPr>
+          <p:cNvPr id="200" name="TextBox 199"/>
+          <p:cNvSpPr txBox="1"/>
+          <p:nvPr/>
+        </p:nvSpPr>
+        <p:spPr>
+          <a:xfrm>
+            <a:off x="11045952" y="5193792"/>
+            <a:ext cx="914400" cy="237744"/>
+          </a:xfrm>
+          <a:prstGeom prst="rect">
+            <a:avLst/>
+          </a:prstGeom>
+          <a:noFill/>
+        </p:spPr>
+        <p:txBody>
+          <a:bodyPr wrap="none">
+            <a:spAutoFit/>
+          </a:bodyPr>
+          <a:lstStyle/>
+          <a:p>
+            <a:pPr algn="ctr">
+              <a:defRPr sz="950" b="1">
+                <a:solidFill>
+                  <a:srgbClr val="111827"/>
+                </a:solidFill>
+                <a:latin typeface="Calibri"/>
+              </a:defRPr>
+            </a:pPr>
+            <a:r>
+              <a:t>$339K</a:t>
+            </a:r>
+          </a:p>
+        </p:txBody>
+      </p:sp>
+      <p:sp>
+        <p:nvSpPr>
+          <p:cNvPr id="201" name="Rectangle 200"/>
+          <p:cNvSpPr/>
+          <p:nvPr/>
+        </p:nvSpPr>
+        <p:spPr>
+          <a:xfrm>
+            <a:off x="6254496" y="5431536"/>
             <a:ext cx="5705856" cy="256032"/>
           </a:xfrm>
           <a:prstGeom prst="rect">
@@ -19083,13 +19270,13 @@
       </p:sp>
       <p:sp>
         <p:nvSpPr>
-          <p:cNvPr id="197" name="TextBox 196"/>
-          <p:cNvSpPr txBox="1"/>
-          <p:nvPr/>
-        </p:nvSpPr>
-        <p:spPr>
-          <a:xfrm>
-            <a:off x="6254496" y="5193792"/>
+          <p:cNvPr id="202" name="TextBox 201"/>
+          <p:cNvSpPr txBox="1"/>
+          <p:nvPr/>
+        </p:nvSpPr>
+        <p:spPr>
+          <a:xfrm>
+            <a:off x="6254496" y="5449824"/>
             <a:ext cx="411480" cy="237744"/>
           </a:xfrm>
           <a:prstGeom prst="rect">
@@ -19112,20 +19299,20 @@
               </a:defRPr>
             </a:pPr>
             <a:r>
-              <a:t>37</a:t>
-            </a:r>
-          </a:p>
-        </p:txBody>
-      </p:sp>
-      <p:sp>
-        <p:nvSpPr>
-          <p:cNvPr id="198" name="TextBox 197"/>
-          <p:cNvSpPr txBox="1"/>
-          <p:nvPr/>
-        </p:nvSpPr>
-        <p:spPr>
-          <a:xfrm>
-            <a:off x="6665976" y="5193792"/>
+              <a:t>38</a:t>
+            </a:r>
+          </a:p>
+        </p:txBody>
+      </p:sp>
+      <p:sp>
+        <p:nvSpPr>
+          <p:cNvPr id="203" name="TextBox 202"/>
+          <p:cNvSpPr txBox="1"/>
+          <p:nvPr/>
+        </p:nvSpPr>
+        <p:spPr>
+          <a:xfrm>
+            <a:off x="6665976" y="5449824"/>
             <a:ext cx="1920240" cy="237744"/>
           </a:xfrm>
           <a:prstGeom prst="rect">
@@ -19155,13 +19342,13 @@
       </p:sp>
       <p:sp>
         <p:nvSpPr>
-          <p:cNvPr id="199" name="TextBox 198"/>
-          <p:cNvSpPr txBox="1"/>
-          <p:nvPr/>
-        </p:nvSpPr>
-        <p:spPr>
-          <a:xfrm>
-            <a:off x="8586216" y="5193792"/>
+          <p:cNvPr id="204" name="TextBox 203"/>
+          <p:cNvSpPr txBox="1"/>
+          <p:nvPr/>
+        </p:nvSpPr>
+        <p:spPr>
+          <a:xfrm>
+            <a:off x="8586216" y="5449824"/>
             <a:ext cx="2459736" cy="237744"/>
           </a:xfrm>
           <a:prstGeom prst="rect">
@@ -19191,193 +19378,6 @@
       </p:sp>
       <p:sp>
         <p:nvSpPr>
-          <p:cNvPr id="200" name="TextBox 199"/>
-          <p:cNvSpPr txBox="1"/>
-          <p:nvPr/>
-        </p:nvSpPr>
-        <p:spPr>
-          <a:xfrm>
-            <a:off x="11045952" y="5193792"/>
-            <a:ext cx="914400" cy="237744"/>
-          </a:xfrm>
-          <a:prstGeom prst="rect">
-            <a:avLst/>
-          </a:prstGeom>
-          <a:noFill/>
-        </p:spPr>
-        <p:txBody>
-          <a:bodyPr wrap="none">
-            <a:spAutoFit/>
-          </a:bodyPr>
-          <a:lstStyle/>
-          <a:p>
-            <a:pPr algn="ctr">
-              <a:defRPr sz="950" b="1">
-                <a:solidFill>
-                  <a:srgbClr val="111827"/>
-                </a:solidFill>
-                <a:latin typeface="Calibri"/>
-              </a:defRPr>
-            </a:pPr>
-            <a:r>
-              <a:t>$331K</a:t>
-            </a:r>
-          </a:p>
-        </p:txBody>
-      </p:sp>
-      <p:sp>
-        <p:nvSpPr>
-          <p:cNvPr id="201" name="Rectangle 200"/>
-          <p:cNvSpPr/>
-          <p:nvPr/>
-        </p:nvSpPr>
-        <p:spPr>
-          <a:xfrm>
-            <a:off x="6254496" y="5431536"/>
-            <a:ext cx="5705856" cy="256032"/>
-          </a:xfrm>
-          <a:prstGeom prst="rect">
-            <a:avLst/>
-          </a:prstGeom>
-          <a:solidFill>
-            <a:srgbClr val="F9FAFB"/>
-          </a:solidFill>
-          <a:ln>
-            <a:noFill/>
-          </a:ln>
-        </p:spPr>
-        <p:style>
-          <a:lnRef idx="1">
-            <a:schemeClr val="accent1"/>
-          </a:lnRef>
-          <a:fillRef idx="3">
-            <a:schemeClr val="accent1"/>
-          </a:fillRef>
-          <a:effectRef idx="2">
-            <a:schemeClr val="accent1"/>
-          </a:effectRef>
-          <a:fontRef idx="minor">
-            <a:schemeClr val="lt1"/>
-          </a:fontRef>
-        </p:style>
-        <p:txBody>
-          <a:bodyPr rtlCol="0" anchor="ctr"/>
-          <a:lstStyle/>
-          <a:p>
-            <a:pPr algn="ctr"/>
-          </a:p>
-        </p:txBody>
-      </p:sp>
-      <p:sp>
-        <p:nvSpPr>
-          <p:cNvPr id="202" name="TextBox 201"/>
-          <p:cNvSpPr txBox="1"/>
-          <p:nvPr/>
-        </p:nvSpPr>
-        <p:spPr>
-          <a:xfrm>
-            <a:off x="6254496" y="5449824"/>
-            <a:ext cx="411480" cy="237744"/>
-          </a:xfrm>
-          <a:prstGeom prst="rect">
-            <a:avLst/>
-          </a:prstGeom>
-          <a:noFill/>
-        </p:spPr>
-        <p:txBody>
-          <a:bodyPr wrap="none">
-            <a:spAutoFit/>
-          </a:bodyPr>
-          <a:lstStyle/>
-          <a:p>
-            <a:pPr algn="ctr">
-              <a:defRPr sz="950" b="1">
-                <a:solidFill>
-                  <a:srgbClr val="6B7280"/>
-                </a:solidFill>
-                <a:latin typeface="Calibri"/>
-              </a:defRPr>
-            </a:pPr>
-            <a:r>
-              <a:t>38</a:t>
-            </a:r>
-          </a:p>
-        </p:txBody>
-      </p:sp>
-      <p:sp>
-        <p:nvSpPr>
-          <p:cNvPr id="203" name="TextBox 202"/>
-          <p:cNvSpPr txBox="1"/>
-          <p:nvPr/>
-        </p:nvSpPr>
-        <p:spPr>
-          <a:xfrm>
-            <a:off x="6665976" y="5449824"/>
-            <a:ext cx="1920240" cy="237744"/>
-          </a:xfrm>
-          <a:prstGeom prst="rect">
-            <a:avLst/>
-          </a:prstGeom>
-          <a:noFill/>
-        </p:spPr>
-        <p:txBody>
-          <a:bodyPr wrap="none">
-            <a:spAutoFit/>
-          </a:bodyPr>
-          <a:lstStyle/>
-          <a:p>
-            <a:pPr algn="l">
-              <a:defRPr sz="950" b="1">
-                <a:solidFill>
-                  <a:srgbClr val="111827"/>
-                </a:solidFill>
-                <a:latin typeface="Calibri"/>
-              </a:defRPr>
-            </a:pPr>
-            <a:r>
-              <a:t>Nicholas Banks</a:t>
-            </a:r>
-          </a:p>
-        </p:txBody>
-      </p:sp>
-      <p:sp>
-        <p:nvSpPr>
-          <p:cNvPr id="204" name="TextBox 203"/>
-          <p:cNvSpPr txBox="1"/>
-          <p:nvPr/>
-        </p:nvSpPr>
-        <p:spPr>
-          <a:xfrm>
-            <a:off x="8586216" y="5449824"/>
-            <a:ext cx="2459736" cy="237744"/>
-          </a:xfrm>
-          <a:prstGeom prst="rect">
-            <a:avLst/>
-          </a:prstGeom>
-          <a:noFill/>
-        </p:spPr>
-        <p:txBody>
-          <a:bodyPr wrap="none">
-            <a:spAutoFit/>
-          </a:bodyPr>
-          <a:lstStyle/>
-          <a:p>
-            <a:pPr algn="l">
-              <a:defRPr sz="950" b="0">
-                <a:solidFill>
-                  <a:srgbClr val="6B7280"/>
-                </a:solidFill>
-                <a:latin typeface="Calibri"/>
-              </a:defRPr>
-            </a:pPr>
-            <a:r>
-              <a:t>Reliance Partners, LLC</a:t>
-            </a:r>
-          </a:p>
-        </p:txBody>
-      </p:sp>
-      <p:sp>
-        <p:nvSpPr>
           <p:cNvPr id="205" name="TextBox 204"/>
           <p:cNvSpPr txBox="1"/>
           <p:nvPr/>
@@ -19407,7 +19407,7 @@
               </a:defRPr>
             </a:pPr>
             <a:r>
-              <a:t>$330K</a:t>
+              <a:t>$331K</a:t>
             </a:r>
           </a:p>
         </p:txBody>
@@ -19522,7 +19522,7 @@
               </a:defRPr>
             </a:pPr>
             <a:r>
-              <a:t>Ibrahim Mammo</a:t>
+              <a:t>Nicholas Banks</a:t>
             </a:r>
           </a:p>
         </p:txBody>
@@ -19558,7 +19558,7 @@
               </a:defRPr>
             </a:pPr>
             <a:r>
-              <a:t>Surefire Insurance Agency Corp.</a:t>
+              <a:t>Reliance Partners, LLC</a:t>
             </a:r>
           </a:p>
         </p:txBody>
@@ -19594,7 +19594,7 @@
               </a:defRPr>
             </a:pPr>
             <a:r>
-              <a:t>$323K</a:t>
+              <a:t>$330K</a:t>
             </a:r>
           </a:p>
         </p:txBody>
@@ -19922,7 +19922,7 @@
               </a:defRPr>
             </a:pPr>
             <a:r>
-              <a:t>Q2 2026 YTD (Apr 1–May 25)  |  Green = on target  |  Amber = at risk  |  Red = behind  |  Goal: ≥40 acts/wk  |  Ranked by composite OKR score</a:t>
+              <a:t>Q2 2026 YTD (Apr 1–May 26)  |  Green = on target  |  Amber = at risk  |  Red = behind  |  Goal: ≥40 acts/wk  |  Ranked by composite OKR score</a:t>
             </a:r>
           </a:p>
         </p:txBody>
@@ -19958,7 +19958,7 @@
               </a:defRPr>
             </a:pPr>
             <a:r>
-              <a:t>Generated May 25, 2026</a:t>
+              <a:t>Generated May 26, 2026</a:t>
             </a:r>
           </a:p>
         </p:txBody>
@@ -20123,7 +20123,7 @@
               </a:defRPr>
             </a:pPr>
             <a:r>
-              <a:t>Q2 2026 YTD (Apr 1–May 25)  |  Green = on target  |  Amber = at risk  |  Red = behind  |  Goal: ≥50 acts/wk  |  Ranked by composite OKR score</a:t>
+              <a:t>Q2 2026 YTD (Apr 1–May 26)  |  Green = on target  |  Amber = at risk  |  Red = behind  |  Goal: ≥50 acts/wk  |  Ranked by composite OKR score</a:t>
             </a:r>
           </a:p>
         </p:txBody>
@@ -20159,7 +20159,7 @@
               </a:defRPr>
             </a:pPr>
             <a:r>
-              <a:t>Generated May 25, 2026</a:t>
+              <a:t>Generated May 26, 2026</a:t>
             </a:r>
           </a:p>
         </p:txBody>
@@ -20324,7 +20324,7 @@
               </a:defRPr>
             </a:pPr>
             <a:r>
-              <a:t>Q2 YTD  |  Apr 1–May 25  |  BDMs Only  |  Goal: 40 acts/wk  |  Emails excluded</a:t>
+              <a:t>Q2 YTD  |  Apr 1–May 26  |  BDMs Only  |  Goal: 40 acts/wk  |  Emails excluded</a:t>
             </a:r>
           </a:p>
         </p:txBody>
@@ -20360,7 +20360,7 @@
               </a:defRPr>
             </a:pPr>
             <a:r>
-              <a:t>Generated May 25, 2026</a:t>
+              <a:t>Generated May 26, 2026</a:t>
             </a:r>
           </a:p>
         </p:txBody>
@@ -20727,7 +20727,7 @@
               </a:defRPr>
             </a:pPr>
             <a:r>
-              <a:t>May 25-25</a:t>
+              <a:t>May 25-26</a:t>
             </a:r>
           </a:p>
         </p:txBody>
@@ -23570,7 +23570,7 @@
             <a:avLst/>
           </a:prstGeom>
           <a:solidFill>
-            <a:srgbClr val="D1D5DB"/>
+            <a:srgbClr val="DC2626"/>
           </a:solidFill>
           <a:ln>
             <a:noFill/>
@@ -23629,7 +23629,7 @@
               </a:defRPr>
             </a:pPr>
             <a:r>
-              <a:t>0</a:t>
+              <a:t>8</a:t>
             </a:r>
           </a:p>
         </p:txBody>
@@ -26505,7 +26505,7 @@
               </a:defRPr>
             </a:pPr>
             <a:r>
-              <a:t>399</a:t>
+              <a:t>406</a:t>
             </a:r>
           </a:p>
         </p:txBody>
@@ -26541,7 +26541,7 @@
               </a:defRPr>
             </a:pPr>
             <a:r>
-              <a:t>20</a:t>
+              <a:t>21</a:t>
             </a:r>
           </a:p>
         </p:txBody>
@@ -26613,7 +26613,7 @@
               </a:defRPr>
             </a:pPr>
             <a:r>
-              <a:t>419</a:t>
+              <a:t>427</a:t>
             </a:r>
           </a:p>
         </p:txBody>
@@ -27445,7 +27445,7 @@
               </a:defRPr>
             </a:pPr>
             <a:r>
-              <a:t>Q2 YTD  |  Apr 1–May 25  |  BDAs Only  |  Goal: 50 acts/wk  |  Emails excluded</a:t>
+              <a:t>Q2 YTD  |  Apr 1–May 26  |  BDAs Only  |  Goal: 50 acts/wk  |  Emails excluded</a:t>
             </a:r>
           </a:p>
         </p:txBody>
@@ -27481,7 +27481,7 @@
               </a:defRPr>
             </a:pPr>
             <a:r>
-              <a:t>Generated May 25, 2026</a:t>
+              <a:t>Generated May 26, 2026</a:t>
             </a:r>
           </a:p>
         </p:txBody>
@@ -27848,7 +27848,7 @@
               </a:defRPr>
             </a:pPr>
             <a:r>
-              <a:t>May 25-25</a:t>
+              <a:t>May 25-26</a:t>
             </a:r>
           </a:p>
         </p:txBody>
@@ -28493,7 +28493,7 @@
             <a:avLst/>
           </a:prstGeom>
           <a:solidFill>
-            <a:srgbClr val="D1D5DB"/>
+            <a:srgbClr val="DC2626"/>
           </a:solidFill>
           <a:ln>
             <a:noFill/>
@@ -28552,7 +28552,7 @@
               </a:defRPr>
             </a:pPr>
             <a:r>
-              <a:t>0</a:t>
+              <a:t>1</a:t>
             </a:r>
           </a:p>
         </p:txBody>
@@ -30475,7 +30475,7 @@
             <a:avLst/>
           </a:prstGeom>
           <a:solidFill>
-            <a:srgbClr val="D1D5DB"/>
+            <a:srgbClr val="DC2626"/>
           </a:solidFill>
           <a:ln>
             <a:noFill/>
@@ -30534,7 +30534,7 @@
               </a:defRPr>
             </a:pPr>
             <a:r>
-              <a:t>0</a:t>
+              <a:t>1</a:t>
             </a:r>
           </a:p>
         </p:txBody>
@@ -31713,7 +31713,7 @@
               </a:defRPr>
             </a:pPr>
             <a:r>
-              <a:t>350</a:t>
+              <a:t>351</a:t>
             </a:r>
           </a:p>
         </p:txBody>
@@ -31821,7 +31821,7 @@
               </a:defRPr>
             </a:pPr>
             <a:r>
-              <a:t>360</a:t>
+              <a:t>361</a:t>
             </a:r>
           </a:p>
         </p:txBody>
@@ -32116,7 +32116,7 @@
               </a:defRPr>
             </a:pPr>
             <a:r>
-              <a:t>11</a:t>
+              <a:t>12</a:t>
             </a:r>
           </a:p>
         </p:txBody>
@@ -32404,7 +32404,7 @@
               </a:defRPr>
             </a:pPr>
             <a:r>
-              <a:t>28</a:t>
+              <a:t>29</a:t>
             </a:r>
           </a:p>
         </p:txBody>
@@ -32699,7 +32699,7 @@
               </a:defRPr>
             </a:pPr>
             <a:r>
-              <a:t>12</a:t>
+              <a:t>13</a:t>
             </a:r>
           </a:p>
         </p:txBody>
@@ -32771,7 +32771,7 @@
               </a:defRPr>
             </a:pPr>
             <a:r>
-              <a:t>234</a:t>
+              <a:t>235</a:t>
             </a:r>
           </a:p>
         </p:txBody>
@@ -32807,7 +32807,7 @@
               </a:defRPr>
             </a:pPr>
             <a:r>
-              <a:t>39.0</a:t>
+              <a:t>39.2</a:t>
             </a:r>
           </a:p>
         </p:txBody>
@@ -33308,7 +33308,7 @@
               </a:defRPr>
             </a:pPr>
             <a:r>
-              <a:t>Generated May 25, 2026</a:t>
+              <a:t>Generated May 26, 2026</a:t>
             </a:r>
           </a:p>
         </p:txBody>
@@ -33999,7 +33999,7 @@
               </a:defRPr>
             </a:pPr>
             <a:r>
-              <a:t>6954</a:t>
+              <a:t>6966</a:t>
             </a:r>
           </a:p>
         </p:txBody>
@@ -34035,7 +34035,7 @@
               </a:defRPr>
             </a:pPr>
             <a:r>
-              <a:t>478</a:t>
+              <a:t>481</a:t>
             </a:r>
           </a:p>
         </p:txBody>
@@ -34071,7 +34071,7 @@
               </a:defRPr>
             </a:pPr>
             <a:r>
-              <a:t>$16.4M</a:t>
+              <a:t>$16.7M</a:t>
             </a:r>
           </a:p>
         </p:txBody>
@@ -34143,7 +34143,7 @@
               </a:defRPr>
             </a:pPr>
             <a:r>
-              <a:t>$3.9M</a:t>
+              <a:t>$4.0M</a:t>
             </a:r>
           </a:p>
         </p:txBody>
@@ -34438,7 +34438,7 @@
               </a:defRPr>
             </a:pPr>
             <a:r>
-              <a:t>3347</a:t>
+              <a:t>3356</a:t>
             </a:r>
           </a:p>
         </p:txBody>
@@ -34474,7 +34474,7 @@
               </a:defRPr>
             </a:pPr>
             <a:r>
-              <a:t>334</a:t>
+              <a:t>339</a:t>
             </a:r>
           </a:p>
         </p:txBody>
@@ -34510,7 +34510,7 @@
               </a:defRPr>
             </a:pPr>
             <a:r>
-              <a:t>$9.3M</a:t>
+              <a:t>$9.4M</a:t>
             </a:r>
           </a:p>
         </p:txBody>
@@ -34834,7 +34834,7 @@
               </a:defRPr>
             </a:pPr>
             <a:r>
-              <a:t>5311</a:t>
+              <a:t>5374</a:t>
             </a:r>
           </a:p>
         </p:txBody>
@@ -34870,7 +34870,7 @@
               </a:defRPr>
             </a:pPr>
             <a:r>
-              <a:t>297</a:t>
+              <a:t>302</a:t>
             </a:r>
           </a:p>
         </p:txBody>
@@ -34906,7 +34906,7 @@
               </a:defRPr>
             </a:pPr>
             <a:r>
-              <a:t>$8.7M</a:t>
+              <a:t>$8.8M</a:t>
             </a:r>
           </a:p>
         </p:txBody>
@@ -35273,7 +35273,7 @@
               </a:defRPr>
             </a:pPr>
             <a:r>
-              <a:t>3241</a:t>
+              <a:t>3244</a:t>
             </a:r>
           </a:p>
         </p:txBody>
@@ -35309,7 +35309,7 @@
               </a:defRPr>
             </a:pPr>
             <a:r>
-              <a:t>256</a:t>
+              <a:t>255</a:t>
             </a:r>
           </a:p>
         </p:txBody>
@@ -35669,7 +35669,7 @@
               </a:defRPr>
             </a:pPr>
             <a:r>
-              <a:t>1810</a:t>
+              <a:t>1811</a:t>
             </a:r>
           </a:p>
         </p:txBody>
@@ -35705,7 +35705,7 @@
               </a:defRPr>
             </a:pPr>
             <a:r>
-              <a:t>124</a:t>
+              <a:t>126</a:t>
             </a:r>
           </a:p>
         </p:txBody>
@@ -35741,7 +35741,7 @@
               </a:defRPr>
             </a:pPr>
             <a:r>
-              <a:t>$4.1M</a:t>
+              <a:t>$4.2M</a:t>
             </a:r>
           </a:p>
         </p:txBody>
@@ -36187,7 +36187,7 @@
               </a:defRPr>
             </a:pPr>
             <a:r>
-              <a:t>3939</a:t>
+              <a:t>3956</a:t>
             </a:r>
           </a:p>
         </p:txBody>
@@ -36223,7 +36223,7 @@
               </a:defRPr>
             </a:pPr>
             <a:r>
-              <a:t>103</a:t>
+              <a:t>107</a:t>
             </a:r>
           </a:p>
         </p:txBody>
@@ -36259,7 +36259,7 @@
               </a:defRPr>
             </a:pPr>
             <a:r>
-              <a:t>$2.5M</a:t>
+              <a:t>$2.6M</a:t>
             </a:r>
           </a:p>
         </p:txBody>
@@ -36583,7 +36583,7 @@
               </a:defRPr>
             </a:pPr>
             <a:r>
-              <a:t>2689</a:t>
+              <a:t>2706</a:t>
             </a:r>
           </a:p>
         </p:txBody>
@@ -36619,7 +36619,7 @@
               </a:defRPr>
             </a:pPr>
             <a:r>
-              <a:t>51</a:t>
+              <a:t>50</a:t>
             </a:r>
           </a:p>
         </p:txBody>
@@ -37022,7 +37022,7 @@
               </a:defRPr>
             </a:pPr>
             <a:r>
-              <a:t>1563</a:t>
+              <a:t>1569</a:t>
             </a:r>
           </a:p>
         </p:txBody>
@@ -37058,7 +37058,7 @@
               </a:defRPr>
             </a:pPr>
             <a:r>
-              <a:t>34</a:t>
+              <a:t>33</a:t>
             </a:r>
           </a:p>
         </p:txBody>
@@ -37094,7 +37094,7 @@
               </a:defRPr>
             </a:pPr>
             <a:r>
-              <a:t>$1.2M</a:t>
+              <a:t>$1.1M</a:t>
             </a:r>
           </a:p>
         </p:txBody>
@@ -37418,7 +37418,7 @@
               </a:defRPr>
             </a:pPr>
             <a:r>
-              <a:t>910</a:t>
+              <a:t>912</a:t>
             </a:r>
           </a:p>
         </p:txBody>
@@ -37454,7 +37454,7 @@
               </a:defRPr>
             </a:pPr>
             <a:r>
-              <a:t>50</a:t>
+              <a:t>51</a:t>
             </a:r>
           </a:p>
         </p:txBody>
@@ -37857,7 +37857,7 @@
               </a:defRPr>
             </a:pPr>
             <a:r>
-              <a:t>595</a:t>
+              <a:t>598</a:t>
             </a:r>
           </a:p>
         </p:txBody>
@@ -38375,7 +38375,7 @@
               </a:defRPr>
             </a:pPr>
             <a:r>
-              <a:t>7428</a:t>
+              <a:t>7458</a:t>
             </a:r>
           </a:p>
         </p:txBody>
@@ -38411,7 +38411,7 @@
               </a:defRPr>
             </a:pPr>
             <a:r>
-              <a:t>287</a:t>
+              <a:t>288</a:t>
             </a:r>
           </a:p>
         </p:txBody>
@@ -38519,7 +38519,7 @@
               </a:defRPr>
             </a:pPr>
             <a:r>
-              <a:t>$2.7M</a:t>
+              <a:t>$2.8M</a:t>
             </a:r>
           </a:p>
         </p:txBody>
@@ -39134,7 +39134,7 @@
               </a:defRPr>
             </a:pPr>
             <a:r>
-              <a:t>Retail-vertical agencies in each rep's HubSpot portfolio with zero 2026 submissions  |  Refreshed 2026-05-25</a:t>
+              <a:t>Retail-vertical agencies in each rep's HubSpot portfolio with zero 2026 submissions  |  Refreshed 2026-05-26</a:t>
             </a:r>
           </a:p>
         </p:txBody>
@@ -39170,7 +39170,7 @@
               </a:defRPr>
             </a:pPr>
             <a:r>
-              <a:t>Generated May 25, 2026</a:t>
+              <a:t>Generated May 26, 2026</a:t>
             </a:r>
           </a:p>
         </p:txBody>
@@ -41711,7 +41711,7 @@
               </a:defRPr>
             </a:pPr>
             <a:r>
-              <a:t>Generated May 25, 2026</a:t>
+              <a:t>Generated May 26, 2026</a:t>
             </a:r>
           </a:p>
         </p:txBody>
@@ -41876,7 +41876,7 @@
               </a:defRPr>
             </a:pPr>
             <a:r>
-              <a:t>Ranked by Q2 GWP (left) and Q2 Submissions (right)  ·  Mint-shaded row = new vs last week’s deck  ·  Apr 1–May 25</a:t>
+              <a:t>Ranked by Q2 GWP (left) and Q2 Submissions (right)  ·  Mint-shaded row = new vs last week’s deck  ·  Apr 1–May 26</a:t>
             </a:r>
           </a:p>
         </p:txBody>
@@ -41912,7 +41912,7 @@
               </a:defRPr>
             </a:pPr>
             <a:r>
-              <a:t>Generated May 25, 2026</a:t>
+              <a:t>Generated May 26, 2026</a:t>
             </a:r>
           </a:p>
         </p:txBody>
@@ -42365,7 +42365,7 @@
               </a:defRPr>
             </a:pPr>
             <a:r>
-              <a:t>$3.1M</a:t>
+              <a:t>$3.2M</a:t>
             </a:r>
           </a:p>
         </p:txBody>
@@ -42480,7 +42480,7 @@
               </a:defRPr>
             </a:pPr>
             <a:r>
-              <a:t>Derek J.</a:t>
+              <a:t>Christopher H.</a:t>
             </a:r>
           </a:p>
         </p:txBody>
@@ -42516,7 +42516,7 @@
               </a:defRPr>
             </a:pPr>
             <a:r>
-              <a:t>Reliance Partners, LLC</a:t>
+              <a:t>Commercial Trucking Insurance Agency LLC</a:t>
             </a:r>
           </a:p>
         </p:txBody>
@@ -42552,7 +42552,7 @@
               </a:defRPr>
             </a:pPr>
             <a:r>
-              <a:t>$1.9M</a:t>
+              <a:t>$2.0M</a:t>
             </a:r>
           </a:p>
         </p:txBody>
@@ -42667,7 +42667,7 @@
               </a:defRPr>
             </a:pPr>
             <a:r>
-              <a:t>Christopher H.</a:t>
+              <a:t>Derek J.</a:t>
             </a:r>
           </a:p>
         </p:txBody>
@@ -42703,7 +42703,7 @@
               </a:defRPr>
             </a:pPr>
             <a:r>
-              <a:t>Commercial Trucking Insurance Agency LLC</a:t>
+              <a:t>Reliance Partners, LLC</a:t>
             </a:r>
           </a:p>
         </p:txBody>
@@ -43300,7 +43300,7 @@
               </a:defRPr>
             </a:pPr>
             <a:r>
-              <a:t>$1.6M</a:t>
+              <a:t>$1.5M</a:t>
             </a:r>
           </a:p>
         </p:txBody>
@@ -43415,7 +43415,7 @@
               </a:defRPr>
             </a:pPr>
             <a:r>
-              <a:t>Derrick L.</a:t>
+              <a:t>Derek J.</a:t>
             </a:r>
           </a:p>
         </p:txBody>
@@ -43451,7 +43451,7 @@
               </a:defRPr>
             </a:pPr>
             <a:r>
-              <a:t>American Fleet Insurance</a:t>
+              <a:t>Safeline Insurance Agency, Inc.</a:t>
             </a:r>
           </a:p>
         </p:txBody>
@@ -43602,7 +43602,7 @@
               </a:defRPr>
             </a:pPr>
             <a:r>
-              <a:t>Derek J.</a:t>
+              <a:t>Derrick L.</a:t>
             </a:r>
           </a:p>
         </p:txBody>
@@ -43638,7 +43638,7 @@
               </a:defRPr>
             </a:pPr>
             <a:r>
-              <a:t>Safeline Insurance Agency, Inc.</a:t>
+              <a:t>American Fleet Insurance</a:t>
             </a:r>
           </a:p>
         </p:txBody>
@@ -44350,7 +44350,7 @@
               </a:defRPr>
             </a:pPr>
             <a:r>
-              <a:t>Ron D.</a:t>
+              <a:t>Alexis B.</a:t>
             </a:r>
           </a:p>
         </p:txBody>
@@ -44386,7 +44386,7 @@
               </a:defRPr>
             </a:pPr>
             <a:r>
-              <a:t>Valion Security LLC</a:t>
+              <a:t>A.S.I.A Inc</a:t>
             </a:r>
           </a:p>
         </p:txBody>
@@ -44422,7 +44422,7 @@
               </a:defRPr>
             </a:pPr>
             <a:r>
-              <a:t>$982K</a:t>
+              <a:t>$1.1M</a:t>
             </a:r>
           </a:p>
         </p:txBody>
@@ -44537,7 +44537,7 @@
               </a:defRPr>
             </a:pPr>
             <a:r>
-              <a:t>Alexis B.</a:t>
+              <a:t>Derek J.</a:t>
             </a:r>
           </a:p>
         </p:txBody>
@@ -44573,7 +44573,7 @@
               </a:defRPr>
             </a:pPr>
             <a:r>
-              <a:t>A.S.I.A Inc</a:t>
+              <a:t>Surefire Insurance Agency Corp.</a:t>
             </a:r>
           </a:p>
         </p:txBody>
@@ -44609,7 +44609,7 @@
               </a:defRPr>
             </a:pPr>
             <a:r>
-              <a:t>$962K</a:t>
+              <a:t>$1.0M</a:t>
             </a:r>
           </a:p>
         </p:txBody>
@@ -44724,7 +44724,7 @@
               </a:defRPr>
             </a:pPr>
             <a:r>
-              <a:t>Kurt B.</a:t>
+              <a:t>Ron D.</a:t>
             </a:r>
           </a:p>
         </p:txBody>
@@ -44760,7 +44760,7 @@
               </a:defRPr>
             </a:pPr>
             <a:r>
-              <a:t>Fino Services LLC</a:t>
+              <a:t>Valion Security LLC</a:t>
             </a:r>
           </a:p>
         </p:txBody>
@@ -44796,7 +44796,7 @@
               </a:defRPr>
             </a:pPr>
             <a:r>
-              <a:t>$896K</a:t>
+              <a:t>$982K</a:t>
             </a:r>
           </a:p>
         </p:txBody>
@@ -44911,7 +44911,7 @@
               </a:defRPr>
             </a:pPr>
             <a:r>
-              <a:t>Derek J.</a:t>
+              <a:t>Kurt B.</a:t>
             </a:r>
           </a:p>
         </p:txBody>
@@ -44947,7 +44947,7 @@
               </a:defRPr>
             </a:pPr>
             <a:r>
-              <a:t>Surefire Insurance Agency Corp.</a:t>
+              <a:t>Fino Services LLC</a:t>
             </a:r>
           </a:p>
         </p:txBody>
@@ -44983,7 +44983,7 @@
               </a:defRPr>
             </a:pPr>
             <a:r>
-              <a:t>$893K</a:t>
+              <a:t>$934K</a:t>
             </a:r>
           </a:p>
         </p:txBody>
@@ -45170,7 +45170,7 @@
               </a:defRPr>
             </a:pPr>
             <a:r>
-              <a:t>$797K</a:t>
+              <a:t>$828K</a:t>
             </a:r>
           </a:p>
         </p:txBody>
@@ -45544,7 +45544,7 @@
               </a:defRPr>
             </a:pPr>
             <a:r>
-              <a:t>$722K</a:t>
+              <a:t>$743K</a:t>
             </a:r>
           </a:p>
         </p:txBody>
@@ -45659,7 +45659,7 @@
               </a:defRPr>
             </a:pPr>
             <a:r>
-              <a:t>Derek J.</a:t>
+              <a:t>Derrick L.</a:t>
             </a:r>
           </a:p>
         </p:txBody>
@@ -45695,7 +45695,7 @@
               </a:defRPr>
             </a:pPr>
             <a:r>
-              <a:t>Sedge Insurance Agency LLC</a:t>
+              <a:t>Justin Wilson</a:t>
             </a:r>
           </a:p>
         </p:txBody>
@@ -45731,7 +45731,7 @@
               </a:defRPr>
             </a:pPr>
             <a:r>
-              <a:t>$582K</a:t>
+              <a:t>$640K</a:t>
             </a:r>
           </a:p>
         </p:txBody>
@@ -45846,7 +45846,7 @@
               </a:defRPr>
             </a:pPr>
             <a:r>
-              <a:t>Derrick L.</a:t>
+              <a:t>Derek J.</a:t>
             </a:r>
           </a:p>
         </p:txBody>
@@ -45882,7 +45882,7 @@
               </a:defRPr>
             </a:pPr>
             <a:r>
-              <a:t>Justin Wilson</a:t>
+              <a:t>Sedge Insurance Agency LLC</a:t>
             </a:r>
           </a:p>
         </p:txBody>
@@ -45918,7 +45918,7 @@
               </a:defRPr>
             </a:pPr>
             <a:r>
-              <a:t>$559K</a:t>
+              <a:t>$582K</a:t>
             </a:r>
           </a:p>
         </p:txBody>
@@ -46371,7 +46371,7 @@
               </a:defRPr>
             </a:pPr>
             <a:r>
-              <a:t>2196</a:t>
+              <a:t>2195</a:t>
             </a:r>
           </a:p>
         </p:txBody>
@@ -46558,7 +46558,7 @@
               </a:defRPr>
             </a:pPr>
             <a:r>
-              <a:t>2042</a:t>
+              <a:t>2061</a:t>
             </a:r>
           </a:p>
         </p:txBody>
@@ -46932,7 +46932,7 @@
               </a:defRPr>
             </a:pPr>
             <a:r>
-              <a:t>1261</a:t>
+              <a:t>1296</a:t>
             </a:r>
           </a:p>
         </p:txBody>
@@ -47119,7 +47119,7 @@
               </a:defRPr>
             </a:pPr>
             <a:r>
-              <a:t>1174</a:t>
+              <a:t>1175</a:t>
             </a:r>
           </a:p>
         </p:txBody>
@@ -47306,7 +47306,7 @@
               </a:defRPr>
             </a:pPr>
             <a:r>
-              <a:t>1010</a:t>
+              <a:t>1009</a:t>
             </a:r>
           </a:p>
         </p:txBody>
@@ -47680,7 +47680,7 @@
               </a:defRPr>
             </a:pPr>
             <a:r>
-              <a:t>915</a:t>
+              <a:t>928</a:t>
             </a:r>
           </a:p>
         </p:txBody>
@@ -48054,7 +48054,7 @@
               </a:defRPr>
             </a:pPr>
             <a:r>
-              <a:t>553</a:t>
+              <a:t>554</a:t>
             </a:r>
           </a:p>
         </p:txBody>
@@ -48241,7 +48241,7 @@
               </a:defRPr>
             </a:pPr>
             <a:r>
-              <a:t>526</a:t>
+              <a:t>527</a:t>
             </a:r>
           </a:p>
         </p:txBody>
@@ -48428,7 +48428,7 @@
               </a:defRPr>
             </a:pPr>
             <a:r>
-              <a:t>497</a:t>
+              <a:t>508</a:t>
             </a:r>
           </a:p>
         </p:txBody>
@@ -49363,7 +49363,7 @@
               </a:defRPr>
             </a:pPr>
             <a:r>
-              <a:t>358</a:t>
+              <a:t>361</a:t>
             </a:r>
           </a:p>
         </p:txBody>
@@ -49737,7 +49737,7 @@
               </a:defRPr>
             </a:pPr>
             <a:r>
-              <a:t>346</a:t>
+              <a:t>347</a:t>
             </a:r>
           </a:p>
         </p:txBody>

--- a/generated/Sales Dashboards/BD Rep Scoreboard.pptx
+++ b/generated/Sales Dashboards/BD Rep Scoreboard.pptx
@@ -1661,7 +1661,7 @@
           </a:p>
           <a:p>
             <a:r>
-              <a:t>- We are 56 days into a 91-day quarter.</a:t>
+              <a:t>- We are 57 days into a 91-day quarter.</a:t>
             </a:r>
           </a:p>
         </p:txBody>
@@ -4902,7 +4902,7 @@
               </a:defRPr>
             </a:pPr>
             <a:r>
-              <a:t>As of May 26, 2026  |  56 days into Q2  |  35 days remaining</a:t>
+              <a:t>As of May 27, 2026  |  57 days into Q2  |  34 days remaining</a:t>
             </a:r>
           </a:p>
         </p:txBody>
@@ -4938,7 +4938,7 @@
               </a:defRPr>
             </a:pPr>
             <a:r>
-              <a:t>Generated May 26, 2026</a:t>
+              <a:t>Generated May 27, 2026</a:t>
             </a:r>
           </a:p>
         </p:txBody>
@@ -5019,7 +5019,7 @@
               </a:defRPr>
             </a:pPr>
             <a:r>
-              <a:t>$19.6M</a:t>
+              <a:t>$20.0M</a:t>
             </a:r>
           </a:p>
         </p:txBody>
@@ -5055,7 +5055,7 @@
               </a:defRPr>
             </a:pPr>
             <a:r>
-              <a:t>Team GWP Q2 YTD  |  Proj. $31.8M</a:t>
+              <a:t>Team GWP Q2 YTD  |  Proj. $31.9M</a:t>
             </a:r>
           </a:p>
         </p:txBody>
@@ -5134,7 +5134,7 @@
               </a:defRPr>
             </a:pPr>
             <a:r>
-              <a:t>Pacing 172% of Q1 Final</a:t>
+              <a:t>Pacing 173% of Q1 Final</a:t>
             </a:r>
           </a:p>
         </p:txBody>
@@ -5215,7 +5215,7 @@
               </a:defRPr>
             </a:pPr>
             <a:r>
-              <a:t>86%</a:t>
+              <a:t>87%</a:t>
             </a:r>
           </a:p>
         </p:txBody>
@@ -5411,7 +5411,7 @@
               </a:defRPr>
             </a:pPr>
             <a:r>
-              <a:t>30,703</a:t>
+              <a:t>31,336</a:t>
             </a:r>
           </a:p>
         </p:txBody>
@@ -5794,7 +5794,7 @@
               </a:defRPr>
             </a:pPr>
             <a:r>
-              <a:t>▲ 38pp vs Q1 avg (48%)</a:t>
+              <a:t>▲ 39pp vs Q1 avg (48%)</a:t>
             </a:r>
           </a:p>
         </p:txBody>
@@ -5830,7 +5830,7 @@
               </a:defRPr>
             </a:pPr>
             <a:r>
-              <a:t>▲ 13138 vs Apr (17565)</a:t>
+              <a:t>▲ 13799 vs Apr (17537)</a:t>
             </a:r>
           </a:p>
         </p:txBody>
@@ -6071,7 +6071,7 @@
               </a:defRPr>
             </a:pPr>
             <a:r>
-              <a:t>$27.5M</a:t>
+              <a:t>$28.0M</a:t>
             </a:r>
           </a:p>
         </p:txBody>
@@ -6143,7 +6143,7 @@
               </a:defRPr>
             </a:pPr>
             <a:r>
-              <a:t>$8.6M</a:t>
+              <a:t>$8.7M</a:t>
             </a:r>
           </a:p>
         </p:txBody>
@@ -6215,7 +6215,7 @@
               </a:defRPr>
             </a:pPr>
             <a:r>
-              <a:t>$2.8M</a:t>
+              <a:t>$2.9M</a:t>
             </a:r>
           </a:p>
         </p:txBody>
@@ -6600,7 +6600,7 @@
               </a:defRPr>
             </a:pPr>
             <a:r>
-              <a:t>45,795</a:t>
+              <a:t>45,772</a:t>
             </a:r>
           </a:p>
         </p:txBody>
@@ -6787,7 +6787,7 @@
               </a:defRPr>
             </a:pPr>
             <a:r>
-              <a:t>MTD (May):  $9.93M written  ·  $11.84M pace  ·  26/31 days elapsed</a:t>
+              <a:t>MTD (May):  $10.33M written  ·  $11.86M pace  ·  27/31 days elapsed</a:t>
             </a:r>
           </a:p>
         </p:txBody>
@@ -6952,7 +6952,7 @@
               </a:defRPr>
             </a:pPr>
             <a:r>
-              <a:t>Largest fleet policies written Apr 1–May 26  ·  Ranked by premium  ·  Fleet = 4+ power units</a:t>
+              <a:t>Largest fleet policies written Apr 1–May 27  ·  Ranked by premium  ·  Fleet = 4+ power units</a:t>
             </a:r>
           </a:p>
         </p:txBody>
@@ -6988,7 +6988,7 @@
               </a:defRPr>
             </a:pPr>
             <a:r>
-              <a:t>Generated May 26, 2026</a:t>
+              <a:t>Generated May 27, 2026</a:t>
             </a:r>
           </a:p>
         </p:txBody>
@@ -7585,7 +7585,7 @@
               </a:defRPr>
             </a:pPr>
             <a:r>
-              <a:t>Safeline Insurance Agency, Inc.</a:t>
+              <a:t>Jtc Insurance Agency, Inc.</a:t>
             </a:r>
           </a:p>
         </p:txBody>
@@ -7621,7 +7621,7 @@
               </a:defRPr>
             </a:pPr>
             <a:r>
-              <a:t>$327K</a:t>
+              <a:t>$318K</a:t>
             </a:r>
           </a:p>
         </p:txBody>
@@ -7657,7 +7657,7 @@
               </a:defRPr>
             </a:pPr>
             <a:r>
-              <a:t>16</a:t>
+              <a:t>21</a:t>
             </a:r>
           </a:p>
         </p:txBody>
@@ -7808,7 +7808,7 @@
               </a:defRPr>
             </a:pPr>
             <a:r>
-              <a:t>Jtc Insurance Agency, Inc.</a:t>
+              <a:t>Safeline Insurance Agency, Inc.</a:t>
             </a:r>
           </a:p>
         </p:txBody>
@@ -7844,7 +7844,7 @@
               </a:defRPr>
             </a:pPr>
             <a:r>
-              <a:t>$318K</a:t>
+              <a:t>$315K</a:t>
             </a:r>
           </a:p>
         </p:txBody>
@@ -7880,7 +7880,7 @@
               </a:defRPr>
             </a:pPr>
             <a:r>
-              <a:t>21</a:t>
+              <a:t>15</a:t>
             </a:r>
           </a:p>
         </p:txBody>
@@ -8923,7 +8923,7 @@
               </a:defRPr>
             </a:pPr>
             <a:r>
-              <a:t>Reliance Partners, LLC</a:t>
+              <a:t>Paramount Exclusive Insurance Services, Inc.</a:t>
             </a:r>
           </a:p>
         </p:txBody>
@@ -8959,7 +8959,7 @@
               </a:defRPr>
             </a:pPr>
             <a:r>
-              <a:t>$231K</a:t>
+              <a:t>$220K</a:t>
             </a:r>
           </a:p>
         </p:txBody>
@@ -8995,7 +8995,7 @@
               </a:defRPr>
             </a:pPr>
             <a:r>
-              <a:t>13</a:t>
+              <a:t>11</a:t>
             </a:r>
           </a:p>
         </p:txBody>
@@ -9146,7 +9146,7 @@
               </a:defRPr>
             </a:pPr>
             <a:r>
-              <a:t>Paramount Exclusive Insurance Services, Inc.</a:t>
+              <a:t>Jagdeep Singh Insurance Agency, Inc</a:t>
             </a:r>
           </a:p>
         </p:txBody>
@@ -9182,7 +9182,7 @@
               </a:defRPr>
             </a:pPr>
             <a:r>
-              <a:t>$220K</a:t>
+              <a:t>$217K</a:t>
             </a:r>
           </a:p>
         </p:txBody>
@@ -9369,7 +9369,7 @@
               </a:defRPr>
             </a:pPr>
             <a:r>
-              <a:t>Jagdeep Singh Insurance Agency, Inc</a:t>
+              <a:t>Surefire Insurance Agency Corp.</a:t>
             </a:r>
           </a:p>
         </p:txBody>
@@ -9405,7 +9405,7 @@
               </a:defRPr>
             </a:pPr>
             <a:r>
-              <a:t>$217K</a:t>
+              <a:t>$216K</a:t>
             </a:r>
           </a:p>
         </p:txBody>
@@ -9441,7 +9441,7 @@
               </a:defRPr>
             </a:pPr>
             <a:r>
-              <a:t>11</a:t>
+              <a:t>17</a:t>
             </a:r>
           </a:p>
         </p:txBody>
@@ -9592,7 +9592,7 @@
               </a:defRPr>
             </a:pPr>
             <a:r>
-              <a:t>Surefire Insurance Agency Corp.</a:t>
+              <a:t>Reliance Partners, LLC</a:t>
             </a:r>
           </a:p>
         </p:txBody>
@@ -9628,7 +9628,7 @@
               </a:defRPr>
             </a:pPr>
             <a:r>
-              <a:t>$216K</a:t>
+              <a:t>$215K</a:t>
             </a:r>
           </a:p>
         </p:txBody>
@@ -9664,7 +9664,7 @@
               </a:defRPr>
             </a:pPr>
             <a:r>
-              <a:t>17</a:t>
+              <a:t>12</a:t>
             </a:r>
           </a:p>
         </p:txBody>
@@ -9779,7 +9779,7 @@
               </a:defRPr>
             </a:pPr>
             <a:r>
-              <a:t>Ron D.</a:t>
+              <a:t>Christopher H.</a:t>
             </a:r>
           </a:p>
         </p:txBody>
@@ -9815,7 +9815,7 @@
               </a:defRPr>
             </a:pPr>
             <a:r>
-              <a:t>Eagle National Insurance Services, Inc.</a:t>
+              <a:t>Velocity Insurance Multiservices LLC</a:t>
             </a:r>
           </a:p>
         </p:txBody>
@@ -9851,7 +9851,7 @@
               </a:defRPr>
             </a:pPr>
             <a:r>
-              <a:t>$202K</a:t>
+              <a:t>$203K</a:t>
             </a:r>
           </a:p>
         </p:txBody>
@@ -10002,7 +10002,7 @@
               </a:defRPr>
             </a:pPr>
             <a:r>
-              <a:t>Derek J.</a:t>
+              <a:t>Ron D.</a:t>
             </a:r>
           </a:p>
         </p:txBody>
@@ -10038,7 +10038,7 @@
               </a:defRPr>
             </a:pPr>
             <a:r>
-              <a:t>CASCADE INSURANCE SERVICES INC DBA: CASCADE MUTUAL INSURANCE SERV</a:t>
+              <a:t>Eagle National Insurance Services, Inc.</a:t>
             </a:r>
           </a:p>
         </p:txBody>
@@ -10110,7 +10110,7 @@
               </a:defRPr>
             </a:pPr>
             <a:r>
-              <a:t>11</a:t>
+              <a:t>8</a:t>
             </a:r>
           </a:p>
         </p:txBody>
@@ -10225,7 +10225,7 @@
               </a:defRPr>
             </a:pPr>
             <a:r>
-              <a:t>Derrick L.</a:t>
+              <a:t>Derek J.</a:t>
             </a:r>
           </a:p>
         </p:txBody>
@@ -10261,7 +10261,7 @@
               </a:defRPr>
             </a:pPr>
             <a:r>
-              <a:t>Justin Wilson</a:t>
+              <a:t>CASCADE INSURANCE SERVICES INC DBA: CASCADE MUTUAL INSURANCE SERV</a:t>
             </a:r>
           </a:p>
         </p:txBody>
@@ -10297,7 +10297,7 @@
               </a:defRPr>
             </a:pPr>
             <a:r>
-              <a:t>$194K</a:t>
+              <a:t>$202K</a:t>
             </a:r>
           </a:p>
         </p:txBody>
@@ -10333,7 +10333,7 @@
               </a:defRPr>
             </a:pPr>
             <a:r>
-              <a:t>9</a:t>
+              <a:t>11</a:t>
             </a:r>
           </a:p>
         </p:txBody>
@@ -10448,7 +10448,7 @@
               </a:defRPr>
             </a:pPr>
             <a:r>
-              <a:t>Alexis B.</a:t>
+              <a:t>Derrick L.</a:t>
             </a:r>
           </a:p>
         </p:txBody>
@@ -10484,7 +10484,7 @@
               </a:defRPr>
             </a:pPr>
             <a:r>
-              <a:t>Stellar Management, Inc</a:t>
+              <a:t>Justin Wilson</a:t>
             </a:r>
           </a:p>
         </p:txBody>
@@ -10520,7 +10520,7 @@
               </a:defRPr>
             </a:pPr>
             <a:r>
-              <a:t>$190K</a:t>
+              <a:t>$194K</a:t>
             </a:r>
           </a:p>
         </p:txBody>
@@ -10556,7 +10556,7 @@
               </a:defRPr>
             </a:pPr>
             <a:r>
-              <a:t>13</a:t>
+              <a:t>9</a:t>
             </a:r>
           </a:p>
         </p:txBody>
@@ -10671,7 +10671,7 @@
               </a:defRPr>
             </a:pPr>
             <a:r>
-              <a:t>Westy M.</a:t>
+              <a:t>Alexis B.</a:t>
             </a:r>
           </a:p>
         </p:txBody>
@@ -10707,7 +10707,7 @@
               </a:defRPr>
             </a:pPr>
             <a:r>
-              <a:t>Acrisure LLC DBA RRL Insurance Agency</a:t>
+              <a:t>Stellar Management, Inc</a:t>
             </a:r>
           </a:p>
         </p:txBody>
@@ -10743,7 +10743,7 @@
               </a:defRPr>
             </a:pPr>
             <a:r>
-              <a:t>$184K</a:t>
+              <a:t>$190K</a:t>
             </a:r>
           </a:p>
         </p:txBody>
@@ -10779,7 +10779,7 @@
               </a:defRPr>
             </a:pPr>
             <a:r>
-              <a:t>10</a:t>
+              <a:t>13</a:t>
             </a:r>
           </a:p>
         </p:txBody>
@@ -11750,7 +11750,7 @@
               </a:defRPr>
             </a:pPr>
             <a:r>
-              <a:t>Q2 Fleet Total: 221 fleet binds  ·  $20.3M bound premium</a:t>
+              <a:t>Q2 Fleet Total: 221 fleet binds  ·  $20.2M bound premium</a:t>
             </a:r>
           </a:p>
         </p:txBody>
@@ -11891,7 +11891,7 @@
               </a:defRPr>
             </a:pPr>
             <a:r>
-              <a:t>Ranked by bound GWP written  ·  Mint-shaded row = new vs last week’s deck  ·  Apr 1–May 26  ·  Individual producers</a:t>
+              <a:t>Ranked by bound GWP written  ·  Mint-shaded row = new vs last week’s deck  ·  Apr 1–May 27  ·  Individual producers</a:t>
             </a:r>
           </a:p>
         </p:txBody>
@@ -11927,7 +11927,7 @@
               </a:defRPr>
             </a:pPr>
             <a:r>
-              <a:t>Generated May 26, 2026</a:t>
+              <a:t>Generated May 27, 2026</a:t>
             </a:r>
           </a:p>
         </p:txBody>
@@ -12301,7 +12301,7 @@
               </a:defRPr>
             </a:pPr>
             <a:r>
-              <a:t>$4.2M</a:t>
+              <a:t>$4.6M</a:t>
             </a:r>
           </a:p>
         </p:txBody>
@@ -12488,7 +12488,7 @@
               </a:defRPr>
             </a:pPr>
             <a:r>
-              <a:t>$3.2M</a:t>
+              <a:t>$3.3M</a:t>
             </a:r>
           </a:p>
         </p:txBody>
@@ -12862,7 +12862,7 @@
               </a:defRPr>
             </a:pPr>
             <a:r>
-              <a:t>$1.5M</a:t>
+              <a:t>$1.6M</a:t>
             </a:r>
           </a:p>
         </p:txBody>
@@ -13797,7 +13797,7 @@
               </a:defRPr>
             </a:pPr>
             <a:r>
-              <a:t>$944K</a:t>
+              <a:t>$990K</a:t>
             </a:r>
           </a:p>
         </p:txBody>
@@ -13984,7 +13984,7 @@
               </a:defRPr>
             </a:pPr>
             <a:r>
-              <a:t>$836K</a:t>
+              <a:t>$834K</a:t>
             </a:r>
           </a:p>
         </p:txBody>
@@ -14099,7 +14099,7 @@
               </a:defRPr>
             </a:pPr>
             <a:r>
-              <a:t>Larisa Davtyan</a:t>
+              <a:t>Raj Singh</a:t>
             </a:r>
           </a:p>
         </p:txBody>
@@ -14135,7 +14135,7 @@
               </a:defRPr>
             </a:pPr>
             <a:r>
-              <a:t>Safeline Insurance Agency, Inc.</a:t>
+              <a:t>Pride Insurance LLC</a:t>
             </a:r>
           </a:p>
         </p:txBody>
@@ -14171,7 +14171,7 @@
               </a:defRPr>
             </a:pPr>
             <a:r>
-              <a:t>$708K</a:t>
+              <a:t>$706K</a:t>
             </a:r>
           </a:p>
         </p:txBody>
@@ -14286,7 +14286,7 @@
               </a:defRPr>
             </a:pPr>
             <a:r>
-              <a:t>Ateetpal Bansal</a:t>
+              <a:t>Larisa Davtyan</a:t>
             </a:r>
           </a:p>
         </p:txBody>
@@ -14322,7 +14322,7 @@
               </a:defRPr>
             </a:pPr>
             <a:r>
-              <a:t>Jagdeep Singh Insurance Agency, In…</a:t>
+              <a:t>Safeline Insurance Agency, Inc.</a:t>
             </a:r>
           </a:p>
         </p:txBody>
@@ -14358,7 +14358,7 @@
               </a:defRPr>
             </a:pPr>
             <a:r>
-              <a:t>$692K</a:t>
+              <a:t>$700K</a:t>
             </a:r>
           </a:p>
         </p:txBody>
@@ -14473,7 +14473,7 @@
               </a:defRPr>
             </a:pPr>
             <a:r>
-              <a:t>Raj Singh</a:t>
+              <a:t>Ateetpal Bansal</a:t>
             </a:r>
           </a:p>
         </p:txBody>
@@ -14509,7 +14509,7 @@
               </a:defRPr>
             </a:pPr>
             <a:r>
-              <a:t>Pride Insurance LLC</a:t>
+              <a:t>Jagdeep Singh Insurance Agency, In…</a:t>
             </a:r>
           </a:p>
         </p:txBody>
@@ -14545,7 +14545,7 @@
               </a:defRPr>
             </a:pPr>
             <a:r>
-              <a:t>$690K</a:t>
+              <a:t>$692K</a:t>
             </a:r>
           </a:p>
         </p:txBody>
@@ -14919,7 +14919,7 @@
               </a:defRPr>
             </a:pPr>
             <a:r>
-              <a:t>$663K</a:t>
+              <a:t>$652K</a:t>
             </a:r>
           </a:p>
         </p:txBody>
@@ -15106,7 +15106,7 @@
               </a:defRPr>
             </a:pPr>
             <a:r>
-              <a:t>$601K</a:t>
+              <a:t>$617K</a:t>
             </a:r>
           </a:p>
         </p:txBody>
@@ -15221,7 +15221,7 @@
               </a:defRPr>
             </a:pPr>
             <a:r>
-              <a:t>Sapna Kharbanda</a:t>
+              <a:t>Anastasiya Nabokov</a:t>
             </a:r>
           </a:p>
         </p:txBody>
@@ -15257,7 +15257,7 @@
               </a:defRPr>
             </a:pPr>
             <a:r>
-              <a:t>Sedge Insurance Agency LLC</a:t>
+              <a:t>Drive Safe Group LLC</a:t>
             </a:r>
           </a:p>
         </p:txBody>
@@ -15293,7 +15293,7 @@
               </a:defRPr>
             </a:pPr>
             <a:r>
-              <a:t>$549K</a:t>
+              <a:t>$545K</a:t>
             </a:r>
           </a:p>
         </p:txBody>
@@ -15408,7 +15408,7 @@
               </a:defRPr>
             </a:pPr>
             <a:r>
-              <a:t>Anastasiya Nabokov</a:t>
+              <a:t>Diego Giraldo</a:t>
             </a:r>
           </a:p>
         </p:txBody>
@@ -15444,7 +15444,7 @@
               </a:defRPr>
             </a:pPr>
             <a:r>
-              <a:t>Drive Safe Group LLC</a:t>
+              <a:t>Horizons Insurance And Financial S…</a:t>
             </a:r>
           </a:p>
         </p:txBody>
@@ -15480,7 +15480,7 @@
               </a:defRPr>
             </a:pPr>
             <a:r>
-              <a:t>$544K</a:t>
+              <a:t>$542K</a:t>
             </a:r>
           </a:p>
         </p:txBody>
@@ -15595,7 +15595,7 @@
               </a:defRPr>
             </a:pPr>
             <a:r>
-              <a:t>Diego Giraldo</a:t>
+              <a:t>Sapna Kharbanda</a:t>
             </a:r>
           </a:p>
         </p:txBody>
@@ -15631,7 +15631,7 @@
               </a:defRPr>
             </a:pPr>
             <a:r>
-              <a:t>Horizons Insurance And Financial S…</a:t>
+              <a:t>Sedge Insurance Agency LLC</a:t>
             </a:r>
           </a:p>
         </p:txBody>
@@ -15667,7 +15667,7 @@
               </a:defRPr>
             </a:pPr>
             <a:r>
-              <a:t>$516K</a:t>
+              <a:t>$531K</a:t>
             </a:r>
           </a:p>
         </p:txBody>
@@ -15854,7 +15854,7 @@
               </a:defRPr>
             </a:pPr>
             <a:r>
-              <a:t>$507K</a:t>
+              <a:t>$505K</a:t>
             </a:r>
           </a:p>
         </p:txBody>
@@ -16415,7 +16415,7 @@
               </a:defRPr>
             </a:pPr>
             <a:r>
-              <a:t>$492K</a:t>
+              <a:t>$493K</a:t>
             </a:r>
           </a:p>
         </p:txBody>
@@ -16530,7 +16530,7 @@
               </a:defRPr>
             </a:pPr>
             <a:r>
-              <a:t>Christian Gomez</a:t>
+              <a:t>Koraima Pino</a:t>
             </a:r>
           </a:p>
         </p:txBody>
@@ -16566,7 +16566,7 @@
               </a:defRPr>
             </a:pPr>
             <a:r>
-              <a:t>Your Truck Shield LLC</a:t>
+              <a:t>Vantage Ins LLC</a:t>
             </a:r>
           </a:p>
         </p:txBody>
@@ -16602,7 +16602,7 @@
               </a:defRPr>
             </a:pPr>
             <a:r>
-              <a:t>$441K</a:t>
+              <a:t>$445K</a:t>
             </a:r>
           </a:p>
         </p:txBody>
@@ -16717,7 +16717,7 @@
               </a:defRPr>
             </a:pPr>
             <a:r>
-              <a:t>Deepak Goswami</a:t>
+              <a:t>Christian Gomez</a:t>
             </a:r>
           </a:p>
         </p:txBody>
@@ -16753,7 +16753,7 @@
               </a:defRPr>
             </a:pPr>
             <a:r>
-              <a:t>A.S.I.A Inc</a:t>
+              <a:t>Your Truck Shield LLC</a:t>
             </a:r>
           </a:p>
         </p:txBody>
@@ -16789,7 +16789,7 @@
               </a:defRPr>
             </a:pPr>
             <a:r>
-              <a:t>$439K</a:t>
+              <a:t>$442K</a:t>
             </a:r>
           </a:p>
         </p:txBody>
@@ -16904,7 +16904,7 @@
               </a:defRPr>
             </a:pPr>
             <a:r>
-              <a:t>Gayane Yeghiazaryan</a:t>
+              <a:t>Deepak Goswami</a:t>
             </a:r>
           </a:p>
         </p:txBody>
@@ -16940,7 +16940,7 @@
               </a:defRPr>
             </a:pPr>
             <a:r>
-              <a:t>Limosa Insurance Services Inc</a:t>
+              <a:t>A.S.I.A Inc</a:t>
             </a:r>
           </a:p>
         </p:txBody>
@@ -16976,7 +16976,7 @@
               </a:defRPr>
             </a:pPr>
             <a:r>
-              <a:t>$427K</a:t>
+              <a:t>$439K</a:t>
             </a:r>
           </a:p>
         </p:txBody>
@@ -16990,6 +16990,567 @@
         <p:spPr>
           <a:xfrm>
             <a:off x="6254496" y="2359152"/>
+            <a:ext cx="5705856" cy="256032"/>
+          </a:xfrm>
+          <a:prstGeom prst="rect">
+            <a:avLst/>
+          </a:prstGeom>
+          <a:solidFill>
+            <a:srgbClr val="F9FAFB"/>
+          </a:solidFill>
+          <a:ln>
+            <a:noFill/>
+          </a:ln>
+        </p:spPr>
+        <p:style>
+          <a:lnRef idx="1">
+            <a:schemeClr val="accent1"/>
+          </a:lnRef>
+          <a:fillRef idx="3">
+            <a:schemeClr val="accent1"/>
+          </a:fillRef>
+          <a:effectRef idx="2">
+            <a:schemeClr val="accent1"/>
+          </a:effectRef>
+          <a:fontRef idx="minor">
+            <a:schemeClr val="lt1"/>
+          </a:fontRef>
+        </p:style>
+        <p:txBody>
+          <a:bodyPr rtlCol="0" anchor="ctr"/>
+          <a:lstStyle/>
+          <a:p>
+            <a:pPr algn="ctr"/>
+          </a:p>
+        </p:txBody>
+      </p:sp>
+      <p:sp>
+        <p:nvSpPr>
+          <p:cNvPr id="142" name="TextBox 141"/>
+          <p:cNvSpPr txBox="1"/>
+          <p:nvPr/>
+        </p:nvSpPr>
+        <p:spPr>
+          <a:xfrm>
+            <a:off x="6254496" y="2377440"/>
+            <a:ext cx="411480" cy="237744"/>
+          </a:xfrm>
+          <a:prstGeom prst="rect">
+            <a:avLst/>
+          </a:prstGeom>
+          <a:noFill/>
+        </p:spPr>
+        <p:txBody>
+          <a:bodyPr wrap="none">
+            <a:spAutoFit/>
+          </a:bodyPr>
+          <a:lstStyle/>
+          <a:p>
+            <a:pPr algn="ctr">
+              <a:defRPr sz="950" b="1">
+                <a:solidFill>
+                  <a:srgbClr val="6B7280"/>
+                </a:solidFill>
+                <a:latin typeface="Calibri"/>
+              </a:defRPr>
+            </a:pPr>
+            <a:r>
+              <a:t>26</a:t>
+            </a:r>
+          </a:p>
+        </p:txBody>
+      </p:sp>
+      <p:sp>
+        <p:nvSpPr>
+          <p:cNvPr id="143" name="TextBox 142"/>
+          <p:cNvSpPr txBox="1"/>
+          <p:nvPr/>
+        </p:nvSpPr>
+        <p:spPr>
+          <a:xfrm>
+            <a:off x="6665976" y="2377440"/>
+            <a:ext cx="1920240" cy="237744"/>
+          </a:xfrm>
+          <a:prstGeom prst="rect">
+            <a:avLst/>
+          </a:prstGeom>
+          <a:noFill/>
+        </p:spPr>
+        <p:txBody>
+          <a:bodyPr wrap="none">
+            <a:spAutoFit/>
+          </a:bodyPr>
+          <a:lstStyle/>
+          <a:p>
+            <a:pPr algn="l">
+              <a:defRPr sz="950" b="1">
+                <a:solidFill>
+                  <a:srgbClr val="111827"/>
+                </a:solidFill>
+                <a:latin typeface="Calibri"/>
+              </a:defRPr>
+            </a:pPr>
+            <a:r>
+              <a:t>Gayane Yeghiazaryan</a:t>
+            </a:r>
+          </a:p>
+        </p:txBody>
+      </p:sp>
+      <p:sp>
+        <p:nvSpPr>
+          <p:cNvPr id="144" name="TextBox 143"/>
+          <p:cNvSpPr txBox="1"/>
+          <p:nvPr/>
+        </p:nvSpPr>
+        <p:spPr>
+          <a:xfrm>
+            <a:off x="8586216" y="2377440"/>
+            <a:ext cx="2459736" cy="237744"/>
+          </a:xfrm>
+          <a:prstGeom prst="rect">
+            <a:avLst/>
+          </a:prstGeom>
+          <a:noFill/>
+        </p:spPr>
+        <p:txBody>
+          <a:bodyPr wrap="none">
+            <a:spAutoFit/>
+          </a:bodyPr>
+          <a:lstStyle/>
+          <a:p>
+            <a:pPr algn="l">
+              <a:defRPr sz="950" b="0">
+                <a:solidFill>
+                  <a:srgbClr val="6B7280"/>
+                </a:solidFill>
+                <a:latin typeface="Calibri"/>
+              </a:defRPr>
+            </a:pPr>
+            <a:r>
+              <a:t>Limosa Insurance Services Inc</a:t>
+            </a:r>
+          </a:p>
+        </p:txBody>
+      </p:sp>
+      <p:sp>
+        <p:nvSpPr>
+          <p:cNvPr id="145" name="TextBox 144"/>
+          <p:cNvSpPr txBox="1"/>
+          <p:nvPr/>
+        </p:nvSpPr>
+        <p:spPr>
+          <a:xfrm>
+            <a:off x="11045952" y="2377440"/>
+            <a:ext cx="914400" cy="237744"/>
+          </a:xfrm>
+          <a:prstGeom prst="rect">
+            <a:avLst/>
+          </a:prstGeom>
+          <a:noFill/>
+        </p:spPr>
+        <p:txBody>
+          <a:bodyPr wrap="none">
+            <a:spAutoFit/>
+          </a:bodyPr>
+          <a:lstStyle/>
+          <a:p>
+            <a:pPr algn="ctr">
+              <a:defRPr sz="950" b="1">
+                <a:solidFill>
+                  <a:srgbClr val="111827"/>
+                </a:solidFill>
+                <a:latin typeface="Calibri"/>
+              </a:defRPr>
+            </a:pPr>
+            <a:r>
+              <a:t>$427K</a:t>
+            </a:r>
+          </a:p>
+        </p:txBody>
+      </p:sp>
+      <p:sp>
+        <p:nvSpPr>
+          <p:cNvPr id="146" name="Rectangle 145"/>
+          <p:cNvSpPr/>
+          <p:nvPr/>
+        </p:nvSpPr>
+        <p:spPr>
+          <a:xfrm>
+            <a:off x="6254496" y="2615184"/>
+            <a:ext cx="5705856" cy="256032"/>
+          </a:xfrm>
+          <a:prstGeom prst="rect">
+            <a:avLst/>
+          </a:prstGeom>
+          <a:solidFill>
+            <a:srgbClr val="FFFFFF"/>
+          </a:solidFill>
+          <a:ln>
+            <a:noFill/>
+          </a:ln>
+        </p:spPr>
+        <p:style>
+          <a:lnRef idx="1">
+            <a:schemeClr val="accent1"/>
+          </a:lnRef>
+          <a:fillRef idx="3">
+            <a:schemeClr val="accent1"/>
+          </a:fillRef>
+          <a:effectRef idx="2">
+            <a:schemeClr val="accent1"/>
+          </a:effectRef>
+          <a:fontRef idx="minor">
+            <a:schemeClr val="lt1"/>
+          </a:fontRef>
+        </p:style>
+        <p:txBody>
+          <a:bodyPr rtlCol="0" anchor="ctr"/>
+          <a:lstStyle/>
+          <a:p>
+            <a:pPr algn="ctr"/>
+          </a:p>
+        </p:txBody>
+      </p:sp>
+      <p:sp>
+        <p:nvSpPr>
+          <p:cNvPr id="147" name="TextBox 146"/>
+          <p:cNvSpPr txBox="1"/>
+          <p:nvPr/>
+        </p:nvSpPr>
+        <p:spPr>
+          <a:xfrm>
+            <a:off x="6254496" y="2633472"/>
+            <a:ext cx="411480" cy="237744"/>
+          </a:xfrm>
+          <a:prstGeom prst="rect">
+            <a:avLst/>
+          </a:prstGeom>
+          <a:noFill/>
+        </p:spPr>
+        <p:txBody>
+          <a:bodyPr wrap="none">
+            <a:spAutoFit/>
+          </a:bodyPr>
+          <a:lstStyle/>
+          <a:p>
+            <a:pPr algn="ctr">
+              <a:defRPr sz="950" b="1">
+                <a:solidFill>
+                  <a:srgbClr val="6B7280"/>
+                </a:solidFill>
+                <a:latin typeface="Calibri"/>
+              </a:defRPr>
+            </a:pPr>
+            <a:r>
+              <a:t>27</a:t>
+            </a:r>
+          </a:p>
+        </p:txBody>
+      </p:sp>
+      <p:sp>
+        <p:nvSpPr>
+          <p:cNvPr id="148" name="TextBox 147"/>
+          <p:cNvSpPr txBox="1"/>
+          <p:nvPr/>
+        </p:nvSpPr>
+        <p:spPr>
+          <a:xfrm>
+            <a:off x="6665976" y="2633472"/>
+            <a:ext cx="1920240" cy="237744"/>
+          </a:xfrm>
+          <a:prstGeom prst="rect">
+            <a:avLst/>
+          </a:prstGeom>
+          <a:noFill/>
+        </p:spPr>
+        <p:txBody>
+          <a:bodyPr wrap="none">
+            <a:spAutoFit/>
+          </a:bodyPr>
+          <a:lstStyle/>
+          <a:p>
+            <a:pPr algn="l">
+              <a:defRPr sz="950" b="1">
+                <a:solidFill>
+                  <a:srgbClr val="111827"/>
+                </a:solidFill>
+                <a:latin typeface="Calibri"/>
+              </a:defRPr>
+            </a:pPr>
+            <a:r>
+              <a:t>Vladimir Tesler</a:t>
+            </a:r>
+          </a:p>
+        </p:txBody>
+      </p:sp>
+      <p:sp>
+        <p:nvSpPr>
+          <p:cNvPr id="149" name="TextBox 148"/>
+          <p:cNvSpPr txBox="1"/>
+          <p:nvPr/>
+        </p:nvSpPr>
+        <p:spPr>
+          <a:xfrm>
+            <a:off x="8586216" y="2633472"/>
+            <a:ext cx="2459736" cy="237744"/>
+          </a:xfrm>
+          <a:prstGeom prst="rect">
+            <a:avLst/>
+          </a:prstGeom>
+          <a:noFill/>
+        </p:spPr>
+        <p:txBody>
+          <a:bodyPr wrap="none">
+            <a:spAutoFit/>
+          </a:bodyPr>
+          <a:lstStyle/>
+          <a:p>
+            <a:pPr algn="l">
+              <a:defRPr sz="950" b="0">
+                <a:solidFill>
+                  <a:srgbClr val="6B7280"/>
+                </a:solidFill>
+                <a:latin typeface="Calibri"/>
+              </a:defRPr>
+            </a:pPr>
+            <a:r>
+              <a:t>Insurance Planet</a:t>
+            </a:r>
+          </a:p>
+        </p:txBody>
+      </p:sp>
+      <p:sp>
+        <p:nvSpPr>
+          <p:cNvPr id="150" name="TextBox 149"/>
+          <p:cNvSpPr txBox="1"/>
+          <p:nvPr/>
+        </p:nvSpPr>
+        <p:spPr>
+          <a:xfrm>
+            <a:off x="11045952" y="2633472"/>
+            <a:ext cx="914400" cy="237744"/>
+          </a:xfrm>
+          <a:prstGeom prst="rect">
+            <a:avLst/>
+          </a:prstGeom>
+          <a:noFill/>
+        </p:spPr>
+        <p:txBody>
+          <a:bodyPr wrap="none">
+            <a:spAutoFit/>
+          </a:bodyPr>
+          <a:lstStyle/>
+          <a:p>
+            <a:pPr algn="ctr">
+              <a:defRPr sz="950" b="1">
+                <a:solidFill>
+                  <a:srgbClr val="111827"/>
+                </a:solidFill>
+                <a:latin typeface="Calibri"/>
+              </a:defRPr>
+            </a:pPr>
+            <a:r>
+              <a:t>$412K</a:t>
+            </a:r>
+          </a:p>
+        </p:txBody>
+      </p:sp>
+      <p:sp>
+        <p:nvSpPr>
+          <p:cNvPr id="151" name="Rectangle 150"/>
+          <p:cNvSpPr/>
+          <p:nvPr/>
+        </p:nvSpPr>
+        <p:spPr>
+          <a:xfrm>
+            <a:off x="6254496" y="2871216"/>
+            <a:ext cx="5705856" cy="256032"/>
+          </a:xfrm>
+          <a:prstGeom prst="rect">
+            <a:avLst/>
+          </a:prstGeom>
+          <a:solidFill>
+            <a:srgbClr val="F9FAFB"/>
+          </a:solidFill>
+          <a:ln>
+            <a:noFill/>
+          </a:ln>
+        </p:spPr>
+        <p:style>
+          <a:lnRef idx="1">
+            <a:schemeClr val="accent1"/>
+          </a:lnRef>
+          <a:fillRef idx="3">
+            <a:schemeClr val="accent1"/>
+          </a:fillRef>
+          <a:effectRef idx="2">
+            <a:schemeClr val="accent1"/>
+          </a:effectRef>
+          <a:fontRef idx="minor">
+            <a:schemeClr val="lt1"/>
+          </a:fontRef>
+        </p:style>
+        <p:txBody>
+          <a:bodyPr rtlCol="0" anchor="ctr"/>
+          <a:lstStyle/>
+          <a:p>
+            <a:pPr algn="ctr"/>
+          </a:p>
+        </p:txBody>
+      </p:sp>
+      <p:sp>
+        <p:nvSpPr>
+          <p:cNvPr id="152" name="TextBox 151"/>
+          <p:cNvSpPr txBox="1"/>
+          <p:nvPr/>
+        </p:nvSpPr>
+        <p:spPr>
+          <a:xfrm>
+            <a:off x="6254496" y="2889504"/>
+            <a:ext cx="411480" cy="237744"/>
+          </a:xfrm>
+          <a:prstGeom prst="rect">
+            <a:avLst/>
+          </a:prstGeom>
+          <a:noFill/>
+        </p:spPr>
+        <p:txBody>
+          <a:bodyPr wrap="none">
+            <a:spAutoFit/>
+          </a:bodyPr>
+          <a:lstStyle/>
+          <a:p>
+            <a:pPr algn="ctr">
+              <a:defRPr sz="950" b="1">
+                <a:solidFill>
+                  <a:srgbClr val="6B7280"/>
+                </a:solidFill>
+                <a:latin typeface="Calibri"/>
+              </a:defRPr>
+            </a:pPr>
+            <a:r>
+              <a:t>28</a:t>
+            </a:r>
+          </a:p>
+        </p:txBody>
+      </p:sp>
+      <p:sp>
+        <p:nvSpPr>
+          <p:cNvPr id="153" name="TextBox 152"/>
+          <p:cNvSpPr txBox="1"/>
+          <p:nvPr/>
+        </p:nvSpPr>
+        <p:spPr>
+          <a:xfrm>
+            <a:off x="6665976" y="2889504"/>
+            <a:ext cx="1920240" cy="237744"/>
+          </a:xfrm>
+          <a:prstGeom prst="rect">
+            <a:avLst/>
+          </a:prstGeom>
+          <a:noFill/>
+        </p:spPr>
+        <p:txBody>
+          <a:bodyPr wrap="none">
+            <a:spAutoFit/>
+          </a:bodyPr>
+          <a:lstStyle/>
+          <a:p>
+            <a:pPr algn="l">
+              <a:defRPr sz="950" b="1">
+                <a:solidFill>
+                  <a:srgbClr val="111827"/>
+                </a:solidFill>
+                <a:latin typeface="Calibri"/>
+              </a:defRPr>
+            </a:pPr>
+            <a:r>
+              <a:t>Raul Fernandez</a:t>
+            </a:r>
+          </a:p>
+        </p:txBody>
+      </p:sp>
+      <p:sp>
+        <p:nvSpPr>
+          <p:cNvPr id="154" name="TextBox 153"/>
+          <p:cNvSpPr txBox="1"/>
+          <p:nvPr/>
+        </p:nvSpPr>
+        <p:spPr>
+          <a:xfrm>
+            <a:off x="8586216" y="2889504"/>
+            <a:ext cx="2459736" cy="237744"/>
+          </a:xfrm>
+          <a:prstGeom prst="rect">
+            <a:avLst/>
+          </a:prstGeom>
+          <a:noFill/>
+        </p:spPr>
+        <p:txBody>
+          <a:bodyPr wrap="none">
+            <a:spAutoFit/>
+          </a:bodyPr>
+          <a:lstStyle/>
+          <a:p>
+            <a:pPr algn="l">
+              <a:defRPr sz="950" b="0">
+                <a:solidFill>
+                  <a:srgbClr val="6B7280"/>
+                </a:solidFill>
+                <a:latin typeface="Calibri"/>
+              </a:defRPr>
+            </a:pPr>
+            <a:r>
+              <a:t>Ewall Insurance Company</a:t>
+            </a:r>
+          </a:p>
+        </p:txBody>
+      </p:sp>
+      <p:sp>
+        <p:nvSpPr>
+          <p:cNvPr id="155" name="TextBox 154"/>
+          <p:cNvSpPr txBox="1"/>
+          <p:nvPr/>
+        </p:nvSpPr>
+        <p:spPr>
+          <a:xfrm>
+            <a:off x="11045952" y="2889504"/>
+            <a:ext cx="914400" cy="237744"/>
+          </a:xfrm>
+          <a:prstGeom prst="rect">
+            <a:avLst/>
+          </a:prstGeom>
+          <a:noFill/>
+        </p:spPr>
+        <p:txBody>
+          <a:bodyPr wrap="none">
+            <a:spAutoFit/>
+          </a:bodyPr>
+          <a:lstStyle/>
+          <a:p>
+            <a:pPr algn="ctr">
+              <a:defRPr sz="950" b="1">
+                <a:solidFill>
+                  <a:srgbClr val="111827"/>
+                </a:solidFill>
+                <a:latin typeface="Calibri"/>
+              </a:defRPr>
+            </a:pPr>
+            <a:r>
+              <a:t>$408K</a:t>
+            </a:r>
+          </a:p>
+        </p:txBody>
+      </p:sp>
+      <p:sp>
+        <p:nvSpPr>
+          <p:cNvPr id="156" name="Rectangle 155"/>
+          <p:cNvSpPr/>
+          <p:nvPr/>
+        </p:nvSpPr>
+        <p:spPr>
+          <a:xfrm>
+            <a:off x="6254496" y="3127248"/>
             <a:ext cx="5705856" cy="256032"/>
           </a:xfrm>
           <a:prstGeom prst="rect">
@@ -17026,13 +17587,13 @@
       </p:sp>
       <p:sp>
         <p:nvSpPr>
-          <p:cNvPr id="142" name="TextBox 141"/>
-          <p:cNvSpPr txBox="1"/>
-          <p:nvPr/>
-        </p:nvSpPr>
-        <p:spPr>
-          <a:xfrm>
-            <a:off x="6254496" y="2377440"/>
+          <p:cNvPr id="157" name="TextBox 156"/>
+          <p:cNvSpPr txBox="1"/>
+          <p:nvPr/>
+        </p:nvSpPr>
+        <p:spPr>
+          <a:xfrm>
+            <a:off x="6254496" y="3145536"/>
             <a:ext cx="411480" cy="237744"/>
           </a:xfrm>
           <a:prstGeom prst="rect">
@@ -17055,20 +17616,20 @@
               </a:defRPr>
             </a:pPr>
             <a:r>
-              <a:t>26</a:t>
-            </a:r>
-          </a:p>
-        </p:txBody>
-      </p:sp>
-      <p:sp>
-        <p:nvSpPr>
-          <p:cNvPr id="143" name="TextBox 142"/>
-          <p:cNvSpPr txBox="1"/>
-          <p:nvPr/>
-        </p:nvSpPr>
-        <p:spPr>
-          <a:xfrm>
-            <a:off x="6665976" y="2377440"/>
+              <a:t>29</a:t>
+            </a:r>
+          </a:p>
+        </p:txBody>
+      </p:sp>
+      <p:sp>
+        <p:nvSpPr>
+          <p:cNvPr id="158" name="TextBox 157"/>
+          <p:cNvSpPr txBox="1"/>
+          <p:nvPr/>
+        </p:nvSpPr>
+        <p:spPr>
+          <a:xfrm>
+            <a:off x="6665976" y="3145536"/>
             <a:ext cx="1920240" cy="237744"/>
           </a:xfrm>
           <a:prstGeom prst="rect">
@@ -17098,13 +17659,13 @@
       </p:sp>
       <p:sp>
         <p:nvSpPr>
-          <p:cNvPr id="144" name="TextBox 143"/>
-          <p:cNvSpPr txBox="1"/>
-          <p:nvPr/>
-        </p:nvSpPr>
-        <p:spPr>
-          <a:xfrm>
-            <a:off x="8586216" y="2377440"/>
+          <p:cNvPr id="159" name="TextBox 158"/>
+          <p:cNvSpPr txBox="1"/>
+          <p:nvPr/>
+        </p:nvSpPr>
+        <p:spPr>
+          <a:xfrm>
+            <a:off x="8586216" y="3145536"/>
             <a:ext cx="2459736" cy="237744"/>
           </a:xfrm>
           <a:prstGeom prst="rect">
@@ -17134,13 +17695,13 @@
       </p:sp>
       <p:sp>
         <p:nvSpPr>
-          <p:cNvPr id="145" name="TextBox 144"/>
-          <p:cNvSpPr txBox="1"/>
-          <p:nvPr/>
-        </p:nvSpPr>
-        <p:spPr>
-          <a:xfrm>
-            <a:off x="11045952" y="2377440"/>
+          <p:cNvPr id="160" name="TextBox 159"/>
+          <p:cNvSpPr txBox="1"/>
+          <p:nvPr/>
+        </p:nvSpPr>
+        <p:spPr>
+          <a:xfrm>
+            <a:off x="11045952" y="3145536"/>
             <a:ext cx="914400" cy="237744"/>
           </a:xfrm>
           <a:prstGeom prst="rect">
@@ -17163,20 +17724,581 @@
               </a:defRPr>
             </a:pPr>
             <a:r>
-              <a:t>$413K</a:t>
-            </a:r>
-          </a:p>
-        </p:txBody>
-      </p:sp>
-      <p:sp>
-        <p:nvSpPr>
-          <p:cNvPr id="146" name="Rectangle 145"/>
+              <a:t>$407K</a:t>
+            </a:r>
+          </a:p>
+        </p:txBody>
+      </p:sp>
+      <p:sp>
+        <p:nvSpPr>
+          <p:cNvPr id="161" name="Rectangle 160"/>
           <p:cNvSpPr/>
           <p:nvPr/>
         </p:nvSpPr>
         <p:spPr>
           <a:xfrm>
-            <a:off x="6254496" y="2615184"/>
+            <a:off x="6254496" y="3383280"/>
+            <a:ext cx="5705856" cy="256032"/>
+          </a:xfrm>
+          <a:prstGeom prst="rect">
+            <a:avLst/>
+          </a:prstGeom>
+          <a:solidFill>
+            <a:srgbClr val="F9FAFB"/>
+          </a:solidFill>
+          <a:ln>
+            <a:noFill/>
+          </a:ln>
+        </p:spPr>
+        <p:style>
+          <a:lnRef idx="1">
+            <a:schemeClr val="accent1"/>
+          </a:lnRef>
+          <a:fillRef idx="3">
+            <a:schemeClr val="accent1"/>
+          </a:fillRef>
+          <a:effectRef idx="2">
+            <a:schemeClr val="accent1"/>
+          </a:effectRef>
+          <a:fontRef idx="minor">
+            <a:schemeClr val="lt1"/>
+          </a:fontRef>
+        </p:style>
+        <p:txBody>
+          <a:bodyPr rtlCol="0" anchor="ctr"/>
+          <a:lstStyle/>
+          <a:p>
+            <a:pPr algn="ctr"/>
+          </a:p>
+        </p:txBody>
+      </p:sp>
+      <p:sp>
+        <p:nvSpPr>
+          <p:cNvPr id="162" name="TextBox 161"/>
+          <p:cNvSpPr txBox="1"/>
+          <p:nvPr/>
+        </p:nvSpPr>
+        <p:spPr>
+          <a:xfrm>
+            <a:off x="6254496" y="3401568"/>
+            <a:ext cx="411480" cy="237744"/>
+          </a:xfrm>
+          <a:prstGeom prst="rect">
+            <a:avLst/>
+          </a:prstGeom>
+          <a:noFill/>
+        </p:spPr>
+        <p:txBody>
+          <a:bodyPr wrap="none">
+            <a:spAutoFit/>
+          </a:bodyPr>
+          <a:lstStyle/>
+          <a:p>
+            <a:pPr algn="ctr">
+              <a:defRPr sz="950" b="1">
+                <a:solidFill>
+                  <a:srgbClr val="6B7280"/>
+                </a:solidFill>
+                <a:latin typeface="Calibri"/>
+              </a:defRPr>
+            </a:pPr>
+            <a:r>
+              <a:t>30</a:t>
+            </a:r>
+          </a:p>
+        </p:txBody>
+      </p:sp>
+      <p:sp>
+        <p:nvSpPr>
+          <p:cNvPr id="163" name="TextBox 162"/>
+          <p:cNvSpPr txBox="1"/>
+          <p:nvPr/>
+        </p:nvSpPr>
+        <p:spPr>
+          <a:xfrm>
+            <a:off x="6665976" y="3401568"/>
+            <a:ext cx="1920240" cy="237744"/>
+          </a:xfrm>
+          <a:prstGeom prst="rect">
+            <a:avLst/>
+          </a:prstGeom>
+          <a:noFill/>
+        </p:spPr>
+        <p:txBody>
+          <a:bodyPr wrap="none">
+            <a:spAutoFit/>
+          </a:bodyPr>
+          <a:lstStyle/>
+          <a:p>
+            <a:pPr algn="l">
+              <a:defRPr sz="950" b="1">
+                <a:solidFill>
+                  <a:srgbClr val="111827"/>
+                </a:solidFill>
+                <a:latin typeface="Calibri"/>
+              </a:defRPr>
+            </a:pPr>
+            <a:r>
+              <a:t>Daliborka Savovic</a:t>
+            </a:r>
+          </a:p>
+        </p:txBody>
+      </p:sp>
+      <p:sp>
+        <p:nvSpPr>
+          <p:cNvPr id="164" name="TextBox 163"/>
+          <p:cNvSpPr txBox="1"/>
+          <p:nvPr/>
+        </p:nvSpPr>
+        <p:spPr>
+          <a:xfrm>
+            <a:off x="8586216" y="3401568"/>
+            <a:ext cx="2459736" cy="237744"/>
+          </a:xfrm>
+          <a:prstGeom prst="rect">
+            <a:avLst/>
+          </a:prstGeom>
+          <a:noFill/>
+        </p:spPr>
+        <p:txBody>
+          <a:bodyPr wrap="none">
+            <a:spAutoFit/>
+          </a:bodyPr>
+          <a:lstStyle/>
+          <a:p>
+            <a:pPr algn="l">
+              <a:defRPr sz="950" b="0">
+                <a:solidFill>
+                  <a:srgbClr val="6B7280"/>
+                </a:solidFill>
+                <a:latin typeface="Calibri"/>
+              </a:defRPr>
+            </a:pPr>
+            <a:r>
+              <a:t>Alpha Trucking Insurance Agency In…</a:t>
+            </a:r>
+          </a:p>
+        </p:txBody>
+      </p:sp>
+      <p:sp>
+        <p:nvSpPr>
+          <p:cNvPr id="165" name="TextBox 164"/>
+          <p:cNvSpPr txBox="1"/>
+          <p:nvPr/>
+        </p:nvSpPr>
+        <p:spPr>
+          <a:xfrm>
+            <a:off x="11045952" y="3401568"/>
+            <a:ext cx="914400" cy="237744"/>
+          </a:xfrm>
+          <a:prstGeom prst="rect">
+            <a:avLst/>
+          </a:prstGeom>
+          <a:noFill/>
+        </p:spPr>
+        <p:txBody>
+          <a:bodyPr wrap="none">
+            <a:spAutoFit/>
+          </a:bodyPr>
+          <a:lstStyle/>
+          <a:p>
+            <a:pPr algn="ctr">
+              <a:defRPr sz="950" b="1">
+                <a:solidFill>
+                  <a:srgbClr val="111827"/>
+                </a:solidFill>
+                <a:latin typeface="Calibri"/>
+              </a:defRPr>
+            </a:pPr>
+            <a:r>
+              <a:t>$396K</a:t>
+            </a:r>
+          </a:p>
+        </p:txBody>
+      </p:sp>
+      <p:sp>
+        <p:nvSpPr>
+          <p:cNvPr id="166" name="Rectangle 165"/>
+          <p:cNvSpPr/>
+          <p:nvPr/>
+        </p:nvSpPr>
+        <p:spPr>
+          <a:xfrm>
+            <a:off x="6254496" y="3639312"/>
+            <a:ext cx="5705856" cy="256032"/>
+          </a:xfrm>
+          <a:prstGeom prst="rect">
+            <a:avLst/>
+          </a:prstGeom>
+          <a:solidFill>
+            <a:srgbClr val="D1FAE5"/>
+          </a:solidFill>
+          <a:ln>
+            <a:noFill/>
+          </a:ln>
+        </p:spPr>
+        <p:style>
+          <a:lnRef idx="1">
+            <a:schemeClr val="accent1"/>
+          </a:lnRef>
+          <a:fillRef idx="3">
+            <a:schemeClr val="accent1"/>
+          </a:fillRef>
+          <a:effectRef idx="2">
+            <a:schemeClr val="accent1"/>
+          </a:effectRef>
+          <a:fontRef idx="minor">
+            <a:schemeClr val="lt1"/>
+          </a:fontRef>
+        </p:style>
+        <p:txBody>
+          <a:bodyPr rtlCol="0" anchor="ctr"/>
+          <a:lstStyle/>
+          <a:p>
+            <a:pPr algn="ctr"/>
+          </a:p>
+        </p:txBody>
+      </p:sp>
+      <p:sp>
+        <p:nvSpPr>
+          <p:cNvPr id="167" name="TextBox 166"/>
+          <p:cNvSpPr txBox="1"/>
+          <p:nvPr/>
+        </p:nvSpPr>
+        <p:spPr>
+          <a:xfrm>
+            <a:off x="6254496" y="3657600"/>
+            <a:ext cx="411480" cy="237744"/>
+          </a:xfrm>
+          <a:prstGeom prst="rect">
+            <a:avLst/>
+          </a:prstGeom>
+          <a:noFill/>
+        </p:spPr>
+        <p:txBody>
+          <a:bodyPr wrap="none">
+            <a:spAutoFit/>
+          </a:bodyPr>
+          <a:lstStyle/>
+          <a:p>
+            <a:pPr algn="ctr">
+              <a:defRPr sz="950" b="1">
+                <a:solidFill>
+                  <a:srgbClr val="6B7280"/>
+                </a:solidFill>
+                <a:latin typeface="Calibri"/>
+              </a:defRPr>
+            </a:pPr>
+            <a:r>
+              <a:t>31</a:t>
+            </a:r>
+          </a:p>
+        </p:txBody>
+      </p:sp>
+      <p:sp>
+        <p:nvSpPr>
+          <p:cNvPr id="168" name="TextBox 167"/>
+          <p:cNvSpPr txBox="1"/>
+          <p:nvPr/>
+        </p:nvSpPr>
+        <p:spPr>
+          <a:xfrm>
+            <a:off x="6665976" y="3657600"/>
+            <a:ext cx="1920240" cy="237744"/>
+          </a:xfrm>
+          <a:prstGeom prst="rect">
+            <a:avLst/>
+          </a:prstGeom>
+          <a:noFill/>
+        </p:spPr>
+        <p:txBody>
+          <a:bodyPr wrap="none">
+            <a:spAutoFit/>
+          </a:bodyPr>
+          <a:lstStyle/>
+          <a:p>
+            <a:pPr algn="l">
+              <a:defRPr sz="950" b="1">
+                <a:solidFill>
+                  <a:srgbClr val="111827"/>
+                </a:solidFill>
+                <a:latin typeface="Calibri"/>
+              </a:defRPr>
+            </a:pPr>
+            <a:r>
+              <a:t>Lynda Inderjeet</a:t>
+            </a:r>
+          </a:p>
+        </p:txBody>
+      </p:sp>
+      <p:sp>
+        <p:nvSpPr>
+          <p:cNvPr id="169" name="TextBox 168"/>
+          <p:cNvSpPr txBox="1"/>
+          <p:nvPr/>
+        </p:nvSpPr>
+        <p:spPr>
+          <a:xfrm>
+            <a:off x="8586216" y="3657600"/>
+            <a:ext cx="2459736" cy="237744"/>
+          </a:xfrm>
+          <a:prstGeom prst="rect">
+            <a:avLst/>
+          </a:prstGeom>
+          <a:noFill/>
+        </p:spPr>
+        <p:txBody>
+          <a:bodyPr wrap="none">
+            <a:spAutoFit/>
+          </a:bodyPr>
+          <a:lstStyle/>
+          <a:p>
+            <a:pPr algn="l">
+              <a:defRPr sz="950" b="0">
+                <a:solidFill>
+                  <a:srgbClr val="6B7280"/>
+                </a:solidFill>
+                <a:latin typeface="Calibri"/>
+              </a:defRPr>
+            </a:pPr>
+            <a:r>
+              <a:t>R-T Specialty, LLC</a:t>
+            </a:r>
+          </a:p>
+        </p:txBody>
+      </p:sp>
+      <p:sp>
+        <p:nvSpPr>
+          <p:cNvPr id="170" name="TextBox 169"/>
+          <p:cNvSpPr txBox="1"/>
+          <p:nvPr/>
+        </p:nvSpPr>
+        <p:spPr>
+          <a:xfrm>
+            <a:off x="11045952" y="3657600"/>
+            <a:ext cx="914400" cy="237744"/>
+          </a:xfrm>
+          <a:prstGeom prst="rect">
+            <a:avLst/>
+          </a:prstGeom>
+          <a:noFill/>
+        </p:spPr>
+        <p:txBody>
+          <a:bodyPr wrap="none">
+            <a:spAutoFit/>
+          </a:bodyPr>
+          <a:lstStyle/>
+          <a:p>
+            <a:pPr algn="ctr">
+              <a:defRPr sz="950" b="1">
+                <a:solidFill>
+                  <a:srgbClr val="111827"/>
+                </a:solidFill>
+                <a:latin typeface="Calibri"/>
+              </a:defRPr>
+            </a:pPr>
+            <a:r>
+              <a:t>$388K</a:t>
+            </a:r>
+          </a:p>
+        </p:txBody>
+      </p:sp>
+      <p:sp>
+        <p:nvSpPr>
+          <p:cNvPr id="171" name="Rectangle 170"/>
+          <p:cNvSpPr/>
+          <p:nvPr/>
+        </p:nvSpPr>
+        <p:spPr>
+          <a:xfrm>
+            <a:off x="6254496" y="3895344"/>
+            <a:ext cx="5705856" cy="256032"/>
+          </a:xfrm>
+          <a:prstGeom prst="rect">
+            <a:avLst/>
+          </a:prstGeom>
+          <a:solidFill>
+            <a:srgbClr val="F9FAFB"/>
+          </a:solidFill>
+          <a:ln>
+            <a:noFill/>
+          </a:ln>
+        </p:spPr>
+        <p:style>
+          <a:lnRef idx="1">
+            <a:schemeClr val="accent1"/>
+          </a:lnRef>
+          <a:fillRef idx="3">
+            <a:schemeClr val="accent1"/>
+          </a:fillRef>
+          <a:effectRef idx="2">
+            <a:schemeClr val="accent1"/>
+          </a:effectRef>
+          <a:fontRef idx="minor">
+            <a:schemeClr val="lt1"/>
+          </a:fontRef>
+        </p:style>
+        <p:txBody>
+          <a:bodyPr rtlCol="0" anchor="ctr"/>
+          <a:lstStyle/>
+          <a:p>
+            <a:pPr algn="ctr"/>
+          </a:p>
+        </p:txBody>
+      </p:sp>
+      <p:sp>
+        <p:nvSpPr>
+          <p:cNvPr id="172" name="TextBox 171"/>
+          <p:cNvSpPr txBox="1"/>
+          <p:nvPr/>
+        </p:nvSpPr>
+        <p:spPr>
+          <a:xfrm>
+            <a:off x="6254496" y="3913632"/>
+            <a:ext cx="411480" cy="237744"/>
+          </a:xfrm>
+          <a:prstGeom prst="rect">
+            <a:avLst/>
+          </a:prstGeom>
+          <a:noFill/>
+        </p:spPr>
+        <p:txBody>
+          <a:bodyPr wrap="none">
+            <a:spAutoFit/>
+          </a:bodyPr>
+          <a:lstStyle/>
+          <a:p>
+            <a:pPr algn="ctr">
+              <a:defRPr sz="950" b="1">
+                <a:solidFill>
+                  <a:srgbClr val="6B7280"/>
+                </a:solidFill>
+                <a:latin typeface="Calibri"/>
+              </a:defRPr>
+            </a:pPr>
+            <a:r>
+              <a:t>32</a:t>
+            </a:r>
+          </a:p>
+        </p:txBody>
+      </p:sp>
+      <p:sp>
+        <p:nvSpPr>
+          <p:cNvPr id="173" name="TextBox 172"/>
+          <p:cNvSpPr txBox="1"/>
+          <p:nvPr/>
+        </p:nvSpPr>
+        <p:spPr>
+          <a:xfrm>
+            <a:off x="6665976" y="3913632"/>
+            <a:ext cx="1920240" cy="237744"/>
+          </a:xfrm>
+          <a:prstGeom prst="rect">
+            <a:avLst/>
+          </a:prstGeom>
+          <a:noFill/>
+        </p:spPr>
+        <p:txBody>
+          <a:bodyPr wrap="none">
+            <a:spAutoFit/>
+          </a:bodyPr>
+          <a:lstStyle/>
+          <a:p>
+            <a:pPr algn="l">
+              <a:defRPr sz="950" b="1">
+                <a:solidFill>
+                  <a:srgbClr val="111827"/>
+                </a:solidFill>
+                <a:latin typeface="Calibri"/>
+              </a:defRPr>
+            </a:pPr>
+            <a:r>
+              <a:t>Inderjit Singh</a:t>
+            </a:r>
+          </a:p>
+        </p:txBody>
+      </p:sp>
+      <p:sp>
+        <p:nvSpPr>
+          <p:cNvPr id="174" name="TextBox 173"/>
+          <p:cNvSpPr txBox="1"/>
+          <p:nvPr/>
+        </p:nvSpPr>
+        <p:spPr>
+          <a:xfrm>
+            <a:off x="8586216" y="3913632"/>
+            <a:ext cx="2459736" cy="237744"/>
+          </a:xfrm>
+          <a:prstGeom prst="rect">
+            <a:avLst/>
+          </a:prstGeom>
+          <a:noFill/>
+        </p:spPr>
+        <p:txBody>
+          <a:bodyPr wrap="none">
+            <a:spAutoFit/>
+          </a:bodyPr>
+          <a:lstStyle/>
+          <a:p>
+            <a:pPr algn="l">
+              <a:defRPr sz="950" b="0">
+                <a:solidFill>
+                  <a:srgbClr val="6B7280"/>
+                </a:solidFill>
+                <a:latin typeface="Calibri"/>
+              </a:defRPr>
+            </a:pPr>
+            <a:r>
+              <a:t>American Insurance Agency LLC</a:t>
+            </a:r>
+          </a:p>
+        </p:txBody>
+      </p:sp>
+      <p:sp>
+        <p:nvSpPr>
+          <p:cNvPr id="175" name="TextBox 174"/>
+          <p:cNvSpPr txBox="1"/>
+          <p:nvPr/>
+        </p:nvSpPr>
+        <p:spPr>
+          <a:xfrm>
+            <a:off x="11045952" y="3913632"/>
+            <a:ext cx="914400" cy="237744"/>
+          </a:xfrm>
+          <a:prstGeom prst="rect">
+            <a:avLst/>
+          </a:prstGeom>
+          <a:noFill/>
+        </p:spPr>
+        <p:txBody>
+          <a:bodyPr wrap="none">
+            <a:spAutoFit/>
+          </a:bodyPr>
+          <a:lstStyle/>
+          <a:p>
+            <a:pPr algn="ctr">
+              <a:defRPr sz="950" b="1">
+                <a:solidFill>
+                  <a:srgbClr val="111827"/>
+                </a:solidFill>
+                <a:latin typeface="Calibri"/>
+              </a:defRPr>
+            </a:pPr>
+            <a:r>
+              <a:t>$372K</a:t>
+            </a:r>
+          </a:p>
+        </p:txBody>
+      </p:sp>
+      <p:sp>
+        <p:nvSpPr>
+          <p:cNvPr id="176" name="Rectangle 175"/>
+          <p:cNvSpPr/>
+          <p:nvPr/>
+        </p:nvSpPr>
+        <p:spPr>
+          <a:xfrm>
+            <a:off x="6254496" y="4151376"/>
             <a:ext cx="5705856" cy="256032"/>
           </a:xfrm>
           <a:prstGeom prst="rect">
@@ -17213,13 +18335,13 @@
       </p:sp>
       <p:sp>
         <p:nvSpPr>
-          <p:cNvPr id="147" name="TextBox 146"/>
-          <p:cNvSpPr txBox="1"/>
-          <p:nvPr/>
-        </p:nvSpPr>
-        <p:spPr>
-          <a:xfrm>
-            <a:off x="6254496" y="2633472"/>
+          <p:cNvPr id="177" name="TextBox 176"/>
+          <p:cNvSpPr txBox="1"/>
+          <p:nvPr/>
+        </p:nvSpPr>
+        <p:spPr>
+          <a:xfrm>
+            <a:off x="6254496" y="4169664"/>
             <a:ext cx="411480" cy="237744"/>
           </a:xfrm>
           <a:prstGeom prst="rect">
@@ -17242,20 +18364,20 @@
               </a:defRPr>
             </a:pPr>
             <a:r>
-              <a:t>27</a:t>
-            </a:r>
-          </a:p>
-        </p:txBody>
-      </p:sp>
-      <p:sp>
-        <p:nvSpPr>
-          <p:cNvPr id="148" name="TextBox 147"/>
-          <p:cNvSpPr txBox="1"/>
-          <p:nvPr/>
-        </p:nvSpPr>
-        <p:spPr>
-          <a:xfrm>
-            <a:off x="6665976" y="2633472"/>
+              <a:t>33</a:t>
+            </a:r>
+          </a:p>
+        </p:txBody>
+      </p:sp>
+      <p:sp>
+        <p:nvSpPr>
+          <p:cNvPr id="178" name="TextBox 177"/>
+          <p:cNvSpPr txBox="1"/>
+          <p:nvPr/>
+        </p:nvSpPr>
+        <p:spPr>
+          <a:xfrm>
+            <a:off x="6665976" y="4169664"/>
             <a:ext cx="1920240" cy="237744"/>
           </a:xfrm>
           <a:prstGeom prst="rect">
@@ -17278,20 +18400,20 @@
               </a:defRPr>
             </a:pPr>
             <a:r>
-              <a:t>Vladimir Tesler</a:t>
-            </a:r>
-          </a:p>
-        </p:txBody>
-      </p:sp>
-      <p:sp>
-        <p:nvSpPr>
-          <p:cNvPr id="149" name="TextBox 148"/>
-          <p:cNvSpPr txBox="1"/>
-          <p:nvPr/>
-        </p:nvSpPr>
-        <p:spPr>
-          <a:xfrm>
-            <a:off x="8586216" y="2633472"/>
+              <a:t>Ibrahim Mammo</a:t>
+            </a:r>
+          </a:p>
+        </p:txBody>
+      </p:sp>
+      <p:sp>
+        <p:nvSpPr>
+          <p:cNvPr id="179" name="TextBox 178"/>
+          <p:cNvSpPr txBox="1"/>
+          <p:nvPr/>
+        </p:nvSpPr>
+        <p:spPr>
+          <a:xfrm>
+            <a:off x="8586216" y="4169664"/>
             <a:ext cx="2459736" cy="237744"/>
           </a:xfrm>
           <a:prstGeom prst="rect">
@@ -17314,20 +18436,20 @@
               </a:defRPr>
             </a:pPr>
             <a:r>
-              <a:t>Insurance Planet</a:t>
-            </a:r>
-          </a:p>
-        </p:txBody>
-      </p:sp>
-      <p:sp>
-        <p:nvSpPr>
-          <p:cNvPr id="150" name="TextBox 149"/>
-          <p:cNvSpPr txBox="1"/>
-          <p:nvPr/>
-        </p:nvSpPr>
-        <p:spPr>
-          <a:xfrm>
-            <a:off x="11045952" y="2633472"/>
+              <a:t>Surefire Insurance Agency Corp.</a:t>
+            </a:r>
+          </a:p>
+        </p:txBody>
+      </p:sp>
+      <p:sp>
+        <p:nvSpPr>
+          <p:cNvPr id="180" name="TextBox 179"/>
+          <p:cNvSpPr txBox="1"/>
+          <p:nvPr/>
+        </p:nvSpPr>
+        <p:spPr>
+          <a:xfrm>
+            <a:off x="11045952" y="4169664"/>
             <a:ext cx="914400" cy="237744"/>
           </a:xfrm>
           <a:prstGeom prst="rect">
@@ -17350,20 +18472,20 @@
               </a:defRPr>
             </a:pPr>
             <a:r>
-              <a:t>$412K</a:t>
-            </a:r>
-          </a:p>
-        </p:txBody>
-      </p:sp>
-      <p:sp>
-        <p:nvSpPr>
-          <p:cNvPr id="151" name="Rectangle 150"/>
+              <a:t>$372K</a:t>
+            </a:r>
+          </a:p>
+        </p:txBody>
+      </p:sp>
+      <p:sp>
+        <p:nvSpPr>
+          <p:cNvPr id="181" name="Rectangle 180"/>
           <p:cNvSpPr/>
           <p:nvPr/>
         </p:nvSpPr>
         <p:spPr>
           <a:xfrm>
-            <a:off x="6254496" y="2871216"/>
+            <a:off x="6254496" y="4407408"/>
             <a:ext cx="5705856" cy="256032"/>
           </a:xfrm>
           <a:prstGeom prst="rect">
@@ -17400,13 +18522,13 @@
       </p:sp>
       <p:sp>
         <p:nvSpPr>
-          <p:cNvPr id="152" name="TextBox 151"/>
-          <p:cNvSpPr txBox="1"/>
-          <p:nvPr/>
-        </p:nvSpPr>
-        <p:spPr>
-          <a:xfrm>
-            <a:off x="6254496" y="2889504"/>
+          <p:cNvPr id="182" name="TextBox 181"/>
+          <p:cNvSpPr txBox="1"/>
+          <p:nvPr/>
+        </p:nvSpPr>
+        <p:spPr>
+          <a:xfrm>
+            <a:off x="6254496" y="4425696"/>
             <a:ext cx="411480" cy="237744"/>
           </a:xfrm>
           <a:prstGeom prst="rect">
@@ -17429,20 +18551,20 @@
               </a:defRPr>
             </a:pPr>
             <a:r>
-              <a:t>28</a:t>
-            </a:r>
-          </a:p>
-        </p:txBody>
-      </p:sp>
-      <p:sp>
-        <p:nvSpPr>
-          <p:cNvPr id="153" name="TextBox 152"/>
-          <p:cNvSpPr txBox="1"/>
-          <p:nvPr/>
-        </p:nvSpPr>
-        <p:spPr>
-          <a:xfrm>
-            <a:off x="6665976" y="2889504"/>
+              <a:t>34</a:t>
+            </a:r>
+          </a:p>
+        </p:txBody>
+      </p:sp>
+      <p:sp>
+        <p:nvSpPr>
+          <p:cNvPr id="183" name="TextBox 182"/>
+          <p:cNvSpPr txBox="1"/>
+          <p:nvPr/>
+        </p:nvSpPr>
+        <p:spPr>
+          <a:xfrm>
+            <a:off x="6665976" y="4425696"/>
             <a:ext cx="1920240" cy="237744"/>
           </a:xfrm>
           <a:prstGeom prst="rect">
@@ -17465,20 +18587,20 @@
               </a:defRPr>
             </a:pPr>
             <a:r>
-              <a:t>Raul Fernandez</a:t>
-            </a:r>
-          </a:p>
-        </p:txBody>
-      </p:sp>
-      <p:sp>
-        <p:nvSpPr>
-          <p:cNvPr id="154" name="TextBox 153"/>
-          <p:cNvSpPr txBox="1"/>
-          <p:nvPr/>
-        </p:nvSpPr>
-        <p:spPr>
-          <a:xfrm>
-            <a:off x="8586216" y="2889504"/>
+              <a:t>Michael Su</a:t>
+            </a:r>
+          </a:p>
+        </p:txBody>
+      </p:sp>
+      <p:sp>
+        <p:nvSpPr>
+          <p:cNvPr id="184" name="TextBox 183"/>
+          <p:cNvSpPr txBox="1"/>
+          <p:nvPr/>
+        </p:nvSpPr>
+        <p:spPr>
+          <a:xfrm>
+            <a:off x="8586216" y="4425696"/>
             <a:ext cx="2459736" cy="237744"/>
           </a:xfrm>
           <a:prstGeom prst="rect">
@@ -17501,20 +18623,20 @@
               </a:defRPr>
             </a:pPr>
             <a:r>
-              <a:t>Ewall Insurance Company</a:t>
-            </a:r>
-          </a:p>
-        </p:txBody>
-      </p:sp>
-      <p:sp>
-        <p:nvSpPr>
-          <p:cNvPr id="155" name="TextBox 154"/>
-          <p:cNvSpPr txBox="1"/>
-          <p:nvPr/>
-        </p:nvSpPr>
-        <p:spPr>
-          <a:xfrm>
-            <a:off x="11045952" y="2889504"/>
+              <a:t>Jtc Insurance Agency, Inc.</a:t>
+            </a:r>
+          </a:p>
+        </p:txBody>
+      </p:sp>
+      <p:sp>
+        <p:nvSpPr>
+          <p:cNvPr id="185" name="TextBox 184"/>
+          <p:cNvSpPr txBox="1"/>
+          <p:nvPr/>
+        </p:nvSpPr>
+        <p:spPr>
+          <a:xfrm>
+            <a:off x="11045952" y="4425696"/>
             <a:ext cx="914400" cy="237744"/>
           </a:xfrm>
           <a:prstGeom prst="rect">
@@ -17537,20 +18659,394 @@
               </a:defRPr>
             </a:pPr>
             <a:r>
-              <a:t>$408K</a:t>
-            </a:r>
-          </a:p>
-        </p:txBody>
-      </p:sp>
-      <p:sp>
-        <p:nvSpPr>
-          <p:cNvPr id="156" name="Rectangle 155"/>
+              <a:t>$368K</a:t>
+            </a:r>
+          </a:p>
+        </p:txBody>
+      </p:sp>
+      <p:sp>
+        <p:nvSpPr>
+          <p:cNvPr id="186" name="Rectangle 185"/>
           <p:cNvSpPr/>
           <p:nvPr/>
         </p:nvSpPr>
         <p:spPr>
           <a:xfrm>
-            <a:off x="6254496" y="3127248"/>
+            <a:off x="6254496" y="4663440"/>
+            <a:ext cx="5705856" cy="256032"/>
+          </a:xfrm>
+          <a:prstGeom prst="rect">
+            <a:avLst/>
+          </a:prstGeom>
+          <a:solidFill>
+            <a:srgbClr val="D1FAE5"/>
+          </a:solidFill>
+          <a:ln>
+            <a:noFill/>
+          </a:ln>
+        </p:spPr>
+        <p:style>
+          <a:lnRef idx="1">
+            <a:schemeClr val="accent1"/>
+          </a:lnRef>
+          <a:fillRef idx="3">
+            <a:schemeClr val="accent1"/>
+          </a:fillRef>
+          <a:effectRef idx="2">
+            <a:schemeClr val="accent1"/>
+          </a:effectRef>
+          <a:fontRef idx="minor">
+            <a:schemeClr val="lt1"/>
+          </a:fontRef>
+        </p:style>
+        <p:txBody>
+          <a:bodyPr rtlCol="0" anchor="ctr"/>
+          <a:lstStyle/>
+          <a:p>
+            <a:pPr algn="ctr"/>
+          </a:p>
+        </p:txBody>
+      </p:sp>
+      <p:sp>
+        <p:nvSpPr>
+          <p:cNvPr id="187" name="TextBox 186"/>
+          <p:cNvSpPr txBox="1"/>
+          <p:nvPr/>
+        </p:nvSpPr>
+        <p:spPr>
+          <a:xfrm>
+            <a:off x="6254496" y="4681728"/>
+            <a:ext cx="411480" cy="237744"/>
+          </a:xfrm>
+          <a:prstGeom prst="rect">
+            <a:avLst/>
+          </a:prstGeom>
+          <a:noFill/>
+        </p:spPr>
+        <p:txBody>
+          <a:bodyPr wrap="none">
+            <a:spAutoFit/>
+          </a:bodyPr>
+          <a:lstStyle/>
+          <a:p>
+            <a:pPr algn="ctr">
+              <a:defRPr sz="950" b="1">
+                <a:solidFill>
+                  <a:srgbClr val="6B7280"/>
+                </a:solidFill>
+                <a:latin typeface="Calibri"/>
+              </a:defRPr>
+            </a:pPr>
+            <a:r>
+              <a:t>35</a:t>
+            </a:r>
+          </a:p>
+        </p:txBody>
+      </p:sp>
+      <p:sp>
+        <p:nvSpPr>
+          <p:cNvPr id="188" name="TextBox 187"/>
+          <p:cNvSpPr txBox="1"/>
+          <p:nvPr/>
+        </p:nvSpPr>
+        <p:spPr>
+          <a:xfrm>
+            <a:off x="6665976" y="4681728"/>
+            <a:ext cx="1920240" cy="237744"/>
+          </a:xfrm>
+          <a:prstGeom prst="rect">
+            <a:avLst/>
+          </a:prstGeom>
+          <a:noFill/>
+        </p:spPr>
+        <p:txBody>
+          <a:bodyPr wrap="none">
+            <a:spAutoFit/>
+          </a:bodyPr>
+          <a:lstStyle/>
+          <a:p>
+            <a:pPr algn="l">
+              <a:defRPr sz="950" b="1">
+                <a:solidFill>
+                  <a:srgbClr val="111827"/>
+                </a:solidFill>
+                <a:latin typeface="Calibri"/>
+              </a:defRPr>
+            </a:pPr>
+            <a:r>
+              <a:t>Elena Tchernogorova</a:t>
+            </a:r>
+          </a:p>
+        </p:txBody>
+      </p:sp>
+      <p:sp>
+        <p:nvSpPr>
+          <p:cNvPr id="189" name="TextBox 188"/>
+          <p:cNvSpPr txBox="1"/>
+          <p:nvPr/>
+        </p:nvSpPr>
+        <p:spPr>
+          <a:xfrm>
+            <a:off x="8586216" y="4681728"/>
+            <a:ext cx="2459736" cy="237744"/>
+          </a:xfrm>
+          <a:prstGeom prst="rect">
+            <a:avLst/>
+          </a:prstGeom>
+          <a:noFill/>
+        </p:spPr>
+        <p:txBody>
+          <a:bodyPr wrap="none">
+            <a:spAutoFit/>
+          </a:bodyPr>
+          <a:lstStyle/>
+          <a:p>
+            <a:pPr algn="l">
+              <a:defRPr sz="950" b="0">
+                <a:solidFill>
+                  <a:srgbClr val="6B7280"/>
+                </a:solidFill>
+                <a:latin typeface="Calibri"/>
+              </a:defRPr>
+            </a:pPr>
+            <a:r>
+              <a:t>First Connect Insurance</a:t>
+            </a:r>
+          </a:p>
+        </p:txBody>
+      </p:sp>
+      <p:sp>
+        <p:nvSpPr>
+          <p:cNvPr id="190" name="TextBox 189"/>
+          <p:cNvSpPr txBox="1"/>
+          <p:nvPr/>
+        </p:nvSpPr>
+        <p:spPr>
+          <a:xfrm>
+            <a:off x="11045952" y="4681728"/>
+            <a:ext cx="914400" cy="237744"/>
+          </a:xfrm>
+          <a:prstGeom prst="rect">
+            <a:avLst/>
+          </a:prstGeom>
+          <a:noFill/>
+        </p:spPr>
+        <p:txBody>
+          <a:bodyPr wrap="none">
+            <a:spAutoFit/>
+          </a:bodyPr>
+          <a:lstStyle/>
+          <a:p>
+            <a:pPr algn="ctr">
+              <a:defRPr sz="950" b="1">
+                <a:solidFill>
+                  <a:srgbClr val="111827"/>
+                </a:solidFill>
+                <a:latin typeface="Calibri"/>
+              </a:defRPr>
+            </a:pPr>
+            <a:r>
+              <a:t>$367K</a:t>
+            </a:r>
+          </a:p>
+        </p:txBody>
+      </p:sp>
+      <p:sp>
+        <p:nvSpPr>
+          <p:cNvPr id="191" name="Rectangle 190"/>
+          <p:cNvSpPr/>
+          <p:nvPr/>
+        </p:nvSpPr>
+        <p:spPr>
+          <a:xfrm>
+            <a:off x="6254496" y="4919472"/>
+            <a:ext cx="5705856" cy="256032"/>
+          </a:xfrm>
+          <a:prstGeom prst="rect">
+            <a:avLst/>
+          </a:prstGeom>
+          <a:solidFill>
+            <a:srgbClr val="F9FAFB"/>
+          </a:solidFill>
+          <a:ln>
+            <a:noFill/>
+          </a:ln>
+        </p:spPr>
+        <p:style>
+          <a:lnRef idx="1">
+            <a:schemeClr val="accent1"/>
+          </a:lnRef>
+          <a:fillRef idx="3">
+            <a:schemeClr val="accent1"/>
+          </a:fillRef>
+          <a:effectRef idx="2">
+            <a:schemeClr val="accent1"/>
+          </a:effectRef>
+          <a:fontRef idx="minor">
+            <a:schemeClr val="lt1"/>
+          </a:fontRef>
+        </p:style>
+        <p:txBody>
+          <a:bodyPr rtlCol="0" anchor="ctr"/>
+          <a:lstStyle/>
+          <a:p>
+            <a:pPr algn="ctr"/>
+          </a:p>
+        </p:txBody>
+      </p:sp>
+      <p:sp>
+        <p:nvSpPr>
+          <p:cNvPr id="192" name="TextBox 191"/>
+          <p:cNvSpPr txBox="1"/>
+          <p:nvPr/>
+        </p:nvSpPr>
+        <p:spPr>
+          <a:xfrm>
+            <a:off x="6254496" y="4937760"/>
+            <a:ext cx="411480" cy="237744"/>
+          </a:xfrm>
+          <a:prstGeom prst="rect">
+            <a:avLst/>
+          </a:prstGeom>
+          <a:noFill/>
+        </p:spPr>
+        <p:txBody>
+          <a:bodyPr wrap="none">
+            <a:spAutoFit/>
+          </a:bodyPr>
+          <a:lstStyle/>
+          <a:p>
+            <a:pPr algn="ctr">
+              <a:defRPr sz="950" b="1">
+                <a:solidFill>
+                  <a:srgbClr val="6B7280"/>
+                </a:solidFill>
+                <a:latin typeface="Calibri"/>
+              </a:defRPr>
+            </a:pPr>
+            <a:r>
+              <a:t>36</a:t>
+            </a:r>
+          </a:p>
+        </p:txBody>
+      </p:sp>
+      <p:sp>
+        <p:nvSpPr>
+          <p:cNvPr id="193" name="TextBox 192"/>
+          <p:cNvSpPr txBox="1"/>
+          <p:nvPr/>
+        </p:nvSpPr>
+        <p:spPr>
+          <a:xfrm>
+            <a:off x="6665976" y="4937760"/>
+            <a:ext cx="1920240" cy="237744"/>
+          </a:xfrm>
+          <a:prstGeom prst="rect">
+            <a:avLst/>
+          </a:prstGeom>
+          <a:noFill/>
+        </p:spPr>
+        <p:txBody>
+          <a:bodyPr wrap="none">
+            <a:spAutoFit/>
+          </a:bodyPr>
+          <a:lstStyle/>
+          <a:p>
+            <a:pPr algn="l">
+              <a:defRPr sz="950" b="1">
+                <a:solidFill>
+                  <a:srgbClr val="111827"/>
+                </a:solidFill>
+                <a:latin typeface="Calibri"/>
+              </a:defRPr>
+            </a:pPr>
+            <a:r>
+              <a:t>Patricia Galindoparedes</a:t>
+            </a:r>
+          </a:p>
+        </p:txBody>
+      </p:sp>
+      <p:sp>
+        <p:nvSpPr>
+          <p:cNvPr id="194" name="TextBox 193"/>
+          <p:cNvSpPr txBox="1"/>
+          <p:nvPr/>
+        </p:nvSpPr>
+        <p:spPr>
+          <a:xfrm>
+            <a:off x="8586216" y="4937760"/>
+            <a:ext cx="2459736" cy="237744"/>
+          </a:xfrm>
+          <a:prstGeom prst="rect">
+            <a:avLst/>
+          </a:prstGeom>
+          <a:noFill/>
+        </p:spPr>
+        <p:txBody>
+          <a:bodyPr wrap="none">
+            <a:spAutoFit/>
+          </a:bodyPr>
+          <a:lstStyle/>
+          <a:p>
+            <a:pPr algn="l">
+              <a:defRPr sz="950" b="0">
+                <a:solidFill>
+                  <a:srgbClr val="6B7280"/>
+                </a:solidFill>
+                <a:latin typeface="Calibri"/>
+              </a:defRPr>
+            </a:pPr>
+            <a:r>
+              <a:t>Call Patty Insurance Services</a:t>
+            </a:r>
+          </a:p>
+        </p:txBody>
+      </p:sp>
+      <p:sp>
+        <p:nvSpPr>
+          <p:cNvPr id="195" name="TextBox 194"/>
+          <p:cNvSpPr txBox="1"/>
+          <p:nvPr/>
+        </p:nvSpPr>
+        <p:spPr>
+          <a:xfrm>
+            <a:off x="11045952" y="4937760"/>
+            <a:ext cx="914400" cy="237744"/>
+          </a:xfrm>
+          <a:prstGeom prst="rect">
+            <a:avLst/>
+          </a:prstGeom>
+          <a:noFill/>
+        </p:spPr>
+        <p:txBody>
+          <a:bodyPr wrap="none">
+            <a:spAutoFit/>
+          </a:bodyPr>
+          <a:lstStyle/>
+          <a:p>
+            <a:pPr algn="ctr">
+              <a:defRPr sz="950" b="1">
+                <a:solidFill>
+                  <a:srgbClr val="111827"/>
+                </a:solidFill>
+                <a:latin typeface="Calibri"/>
+              </a:defRPr>
+            </a:pPr>
+            <a:r>
+              <a:t>$361K</a:t>
+            </a:r>
+          </a:p>
+        </p:txBody>
+      </p:sp>
+      <p:sp>
+        <p:nvSpPr>
+          <p:cNvPr id="196" name="Rectangle 195"/>
+          <p:cNvSpPr/>
+          <p:nvPr/>
+        </p:nvSpPr>
+        <p:spPr>
+          <a:xfrm>
+            <a:off x="6254496" y="5175504"/>
             <a:ext cx="5705856" cy="256032"/>
           </a:xfrm>
           <a:prstGeom prst="rect">
@@ -17587,13 +19083,13 @@
       </p:sp>
       <p:sp>
         <p:nvSpPr>
-          <p:cNvPr id="157" name="TextBox 156"/>
-          <p:cNvSpPr txBox="1"/>
-          <p:nvPr/>
-        </p:nvSpPr>
-        <p:spPr>
-          <a:xfrm>
-            <a:off x="6254496" y="3145536"/>
+          <p:cNvPr id="197" name="TextBox 196"/>
+          <p:cNvSpPr txBox="1"/>
+          <p:nvPr/>
+        </p:nvSpPr>
+        <p:spPr>
+          <a:xfrm>
+            <a:off x="6254496" y="5193792"/>
             <a:ext cx="411480" cy="237744"/>
           </a:xfrm>
           <a:prstGeom prst="rect">
@@ -17616,20 +19112,20 @@
               </a:defRPr>
             </a:pPr>
             <a:r>
-              <a:t>29</a:t>
-            </a:r>
-          </a:p>
-        </p:txBody>
-      </p:sp>
-      <p:sp>
-        <p:nvSpPr>
-          <p:cNvPr id="158" name="TextBox 157"/>
-          <p:cNvSpPr txBox="1"/>
-          <p:nvPr/>
-        </p:nvSpPr>
-        <p:spPr>
-          <a:xfrm>
-            <a:off x="6665976" y="3145536"/>
+              <a:t>37</a:t>
+            </a:r>
+          </a:p>
+        </p:txBody>
+      </p:sp>
+      <p:sp>
+        <p:nvSpPr>
+          <p:cNvPr id="198" name="TextBox 197"/>
+          <p:cNvSpPr txBox="1"/>
+          <p:nvPr/>
+        </p:nvSpPr>
+        <p:spPr>
+          <a:xfrm>
+            <a:off x="6665976" y="5193792"/>
             <a:ext cx="1920240" cy="237744"/>
           </a:xfrm>
           <a:prstGeom prst="rect">
@@ -17652,20 +19148,20 @@
               </a:defRPr>
             </a:pPr>
             <a:r>
-              <a:t>Daliborka Savovic</a:t>
-            </a:r>
-          </a:p>
-        </p:txBody>
-      </p:sp>
-      <p:sp>
-        <p:nvSpPr>
-          <p:cNvPr id="159" name="TextBox 158"/>
-          <p:cNvSpPr txBox="1"/>
-          <p:nvPr/>
-        </p:nvSpPr>
-        <p:spPr>
-          <a:xfrm>
-            <a:off x="8586216" y="3145536"/>
+              <a:t>Kurtis Gautz</a:t>
+            </a:r>
+          </a:p>
+        </p:txBody>
+      </p:sp>
+      <p:sp>
+        <p:nvSpPr>
+          <p:cNvPr id="199" name="TextBox 198"/>
+          <p:cNvSpPr txBox="1"/>
+          <p:nvPr/>
+        </p:nvSpPr>
+        <p:spPr>
+          <a:xfrm>
+            <a:off x="8586216" y="5193792"/>
             <a:ext cx="2459736" cy="237744"/>
           </a:xfrm>
           <a:prstGeom prst="rect">
@@ -17688,20 +19184,20 @@
               </a:defRPr>
             </a:pPr>
             <a:r>
-              <a:t>Alpha Trucking Insurance Agency In…</a:t>
-            </a:r>
-          </a:p>
-        </p:txBody>
-      </p:sp>
-      <p:sp>
-        <p:nvSpPr>
-          <p:cNvPr id="160" name="TextBox 159"/>
-          <p:cNvSpPr txBox="1"/>
-          <p:nvPr/>
-        </p:nvSpPr>
-        <p:spPr>
-          <a:xfrm>
-            <a:off x="11045952" y="3145536"/>
+              <a:t>CRC Insurance Services, Inc</a:t>
+            </a:r>
+          </a:p>
+        </p:txBody>
+      </p:sp>
+      <p:sp>
+        <p:nvSpPr>
+          <p:cNvPr id="200" name="TextBox 199"/>
+          <p:cNvSpPr txBox="1"/>
+          <p:nvPr/>
+        </p:nvSpPr>
+        <p:spPr>
+          <a:xfrm>
+            <a:off x="11045952" y="5193792"/>
             <a:ext cx="914400" cy="237744"/>
           </a:xfrm>
           <a:prstGeom prst="rect">
@@ -17724,27 +19220,27 @@
               </a:defRPr>
             </a:pPr>
             <a:r>
-              <a:t>$396K</a:t>
-            </a:r>
-          </a:p>
-        </p:txBody>
-      </p:sp>
-      <p:sp>
-        <p:nvSpPr>
-          <p:cNvPr id="161" name="Rectangle 160"/>
+              <a:t>$352K</a:t>
+            </a:r>
+          </a:p>
+        </p:txBody>
+      </p:sp>
+      <p:sp>
+        <p:nvSpPr>
+          <p:cNvPr id="201" name="Rectangle 200"/>
           <p:cNvSpPr/>
           <p:nvPr/>
         </p:nvSpPr>
         <p:spPr>
           <a:xfrm>
-            <a:off x="6254496" y="3383280"/>
+            <a:off x="6254496" y="5431536"/>
             <a:ext cx="5705856" cy="256032"/>
           </a:xfrm>
           <a:prstGeom prst="rect">
             <a:avLst/>
           </a:prstGeom>
           <a:solidFill>
-            <a:srgbClr val="D1FAE5"/>
+            <a:srgbClr val="F9FAFB"/>
           </a:solidFill>
           <a:ln>
             <a:noFill/>
@@ -17774,13 +19270,13 @@
       </p:sp>
       <p:sp>
         <p:nvSpPr>
-          <p:cNvPr id="162" name="TextBox 161"/>
-          <p:cNvSpPr txBox="1"/>
-          <p:nvPr/>
-        </p:nvSpPr>
-        <p:spPr>
-          <a:xfrm>
-            <a:off x="6254496" y="3401568"/>
+          <p:cNvPr id="202" name="TextBox 201"/>
+          <p:cNvSpPr txBox="1"/>
+          <p:nvPr/>
+        </p:nvSpPr>
+        <p:spPr>
+          <a:xfrm>
+            <a:off x="6254496" y="5449824"/>
             <a:ext cx="411480" cy="237744"/>
           </a:xfrm>
           <a:prstGeom prst="rect">
@@ -17803,20 +19299,20 @@
               </a:defRPr>
             </a:pPr>
             <a:r>
-              <a:t>30</a:t>
-            </a:r>
-          </a:p>
-        </p:txBody>
-      </p:sp>
-      <p:sp>
-        <p:nvSpPr>
-          <p:cNvPr id="163" name="TextBox 162"/>
-          <p:cNvSpPr txBox="1"/>
-          <p:nvPr/>
-        </p:nvSpPr>
-        <p:spPr>
-          <a:xfrm>
-            <a:off x="6665976" y="3401568"/>
+              <a:t>38</a:t>
+            </a:r>
+          </a:p>
+        </p:txBody>
+      </p:sp>
+      <p:sp>
+        <p:nvSpPr>
+          <p:cNvPr id="203" name="TextBox 202"/>
+          <p:cNvSpPr txBox="1"/>
+          <p:nvPr/>
+        </p:nvSpPr>
+        <p:spPr>
+          <a:xfrm>
+            <a:off x="6665976" y="5449824"/>
             <a:ext cx="1920240" cy="237744"/>
           </a:xfrm>
           <a:prstGeom prst="rect">
@@ -17839,20 +19335,20 @@
               </a:defRPr>
             </a:pPr>
             <a:r>
-              <a:t>Lynda Inderjeet</a:t>
-            </a:r>
-          </a:p>
-        </p:txBody>
-      </p:sp>
-      <p:sp>
-        <p:nvSpPr>
-          <p:cNvPr id="164" name="TextBox 163"/>
-          <p:cNvSpPr txBox="1"/>
-          <p:nvPr/>
-        </p:nvSpPr>
-        <p:spPr>
-          <a:xfrm>
-            <a:off x="8586216" y="3401568"/>
+              <a:t>Damandeep Singh</a:t>
+            </a:r>
+          </a:p>
+        </p:txBody>
+      </p:sp>
+      <p:sp>
+        <p:nvSpPr>
+          <p:cNvPr id="204" name="TextBox 203"/>
+          <p:cNvSpPr txBox="1"/>
+          <p:nvPr/>
+        </p:nvSpPr>
+        <p:spPr>
+          <a:xfrm>
+            <a:off x="8586216" y="5449824"/>
             <a:ext cx="2459736" cy="237744"/>
           </a:xfrm>
           <a:prstGeom prst="rect">
@@ -17875,20 +19371,20 @@
               </a:defRPr>
             </a:pPr>
             <a:r>
-              <a:t>R-T Specialty, LLC</a:t>
-            </a:r>
-          </a:p>
-        </p:txBody>
-      </p:sp>
-      <p:sp>
-        <p:nvSpPr>
-          <p:cNvPr id="165" name="TextBox 164"/>
-          <p:cNvSpPr txBox="1"/>
-          <p:nvPr/>
-        </p:nvSpPr>
-        <p:spPr>
-          <a:xfrm>
-            <a:off x="11045952" y="3401568"/>
+              <a:t>Mayflower Insurance Services</a:t>
+            </a:r>
+          </a:p>
+        </p:txBody>
+      </p:sp>
+      <p:sp>
+        <p:nvSpPr>
+          <p:cNvPr id="205" name="TextBox 204"/>
+          <p:cNvSpPr txBox="1"/>
+          <p:nvPr/>
+        </p:nvSpPr>
+        <p:spPr>
+          <a:xfrm>
+            <a:off x="11045952" y="5449824"/>
             <a:ext cx="914400" cy="237744"/>
           </a:xfrm>
           <a:prstGeom prst="rect">
@@ -17911,20 +19407,20 @@
               </a:defRPr>
             </a:pPr>
             <a:r>
-              <a:t>$388K</a:t>
-            </a:r>
-          </a:p>
-        </p:txBody>
-      </p:sp>
-      <p:sp>
-        <p:nvSpPr>
-          <p:cNvPr id="166" name="Rectangle 165"/>
+              <a:t>$341K</a:t>
+            </a:r>
+          </a:p>
+        </p:txBody>
+      </p:sp>
+      <p:sp>
+        <p:nvSpPr>
+          <p:cNvPr id="206" name="Rectangle 205"/>
           <p:cNvSpPr/>
           <p:nvPr/>
         </p:nvSpPr>
         <p:spPr>
           <a:xfrm>
-            <a:off x="6254496" y="3639312"/>
+            <a:off x="6254496" y="5687568"/>
             <a:ext cx="5705856" cy="256032"/>
           </a:xfrm>
           <a:prstGeom prst="rect">
@@ -17961,13 +19457,13 @@
       </p:sp>
       <p:sp>
         <p:nvSpPr>
-          <p:cNvPr id="167" name="TextBox 166"/>
-          <p:cNvSpPr txBox="1"/>
-          <p:nvPr/>
-        </p:nvSpPr>
-        <p:spPr>
-          <a:xfrm>
-            <a:off x="6254496" y="3657600"/>
+          <p:cNvPr id="207" name="TextBox 206"/>
+          <p:cNvSpPr txBox="1"/>
+          <p:nvPr/>
+        </p:nvSpPr>
+        <p:spPr>
+          <a:xfrm>
+            <a:off x="6254496" y="5705856"/>
             <a:ext cx="411480" cy="237744"/>
           </a:xfrm>
           <a:prstGeom prst="rect">
@@ -17990,20 +19486,20 @@
               </a:defRPr>
             </a:pPr>
             <a:r>
-              <a:t>31</a:t>
-            </a:r>
-          </a:p>
-        </p:txBody>
-      </p:sp>
-      <p:sp>
-        <p:nvSpPr>
-          <p:cNvPr id="168" name="TextBox 167"/>
-          <p:cNvSpPr txBox="1"/>
-          <p:nvPr/>
-        </p:nvSpPr>
-        <p:spPr>
-          <a:xfrm>
-            <a:off x="6665976" y="3657600"/>
+              <a:t>39</a:t>
+            </a:r>
+          </a:p>
+        </p:txBody>
+      </p:sp>
+      <p:sp>
+        <p:nvSpPr>
+          <p:cNvPr id="208" name="TextBox 207"/>
+          <p:cNvSpPr txBox="1"/>
+          <p:nvPr/>
+        </p:nvSpPr>
+        <p:spPr>
+          <a:xfrm>
+            <a:off x="6665976" y="5705856"/>
             <a:ext cx="1920240" cy="237744"/>
           </a:xfrm>
           <a:prstGeom prst="rect">
@@ -18026,20 +19522,20 @@
               </a:defRPr>
             </a:pPr>
             <a:r>
-              <a:t>Inderjit Singh</a:t>
-            </a:r>
-          </a:p>
-        </p:txBody>
-      </p:sp>
-      <p:sp>
-        <p:nvSpPr>
-          <p:cNvPr id="169" name="TextBox 168"/>
-          <p:cNvSpPr txBox="1"/>
-          <p:nvPr/>
-        </p:nvSpPr>
-        <p:spPr>
-          <a:xfrm>
-            <a:off x="8586216" y="3657600"/>
+              <a:t>Omar Elmanzalawy</a:t>
+            </a:r>
+          </a:p>
+        </p:txBody>
+      </p:sp>
+      <p:sp>
+        <p:nvSpPr>
+          <p:cNvPr id="209" name="TextBox 208"/>
+          <p:cNvSpPr txBox="1"/>
+          <p:nvPr/>
+        </p:nvSpPr>
+        <p:spPr>
+          <a:xfrm>
+            <a:off x="8586216" y="5705856"/>
             <a:ext cx="2459736" cy="237744"/>
           </a:xfrm>
           <a:prstGeom prst="rect">
@@ -18062,20 +19558,20 @@
               </a:defRPr>
             </a:pPr>
             <a:r>
-              <a:t>American Insurance Agency LLC</a:t>
-            </a:r>
-          </a:p>
-        </p:txBody>
-      </p:sp>
-      <p:sp>
-        <p:nvSpPr>
-          <p:cNvPr id="170" name="TextBox 169"/>
-          <p:cNvSpPr txBox="1"/>
-          <p:nvPr/>
-        </p:nvSpPr>
-        <p:spPr>
-          <a:xfrm>
-            <a:off x="11045952" y="3657600"/>
+              <a:t>First Connect Insurance</a:t>
+            </a:r>
+          </a:p>
+        </p:txBody>
+      </p:sp>
+      <p:sp>
+        <p:nvSpPr>
+          <p:cNvPr id="210" name="TextBox 209"/>
+          <p:cNvSpPr txBox="1"/>
+          <p:nvPr/>
+        </p:nvSpPr>
+        <p:spPr>
+          <a:xfrm>
+            <a:off x="11045952" y="5705856"/>
             <a:ext cx="914400" cy="237744"/>
           </a:xfrm>
           <a:prstGeom prst="rect">
@@ -18098,20 +19594,20 @@
               </a:defRPr>
             </a:pPr>
             <a:r>
-              <a:t>$372K</a:t>
-            </a:r>
-          </a:p>
-        </p:txBody>
-      </p:sp>
-      <p:sp>
-        <p:nvSpPr>
-          <p:cNvPr id="171" name="Rectangle 170"/>
+              <a:t>$339K</a:t>
+            </a:r>
+          </a:p>
+        </p:txBody>
+      </p:sp>
+      <p:sp>
+        <p:nvSpPr>
+          <p:cNvPr id="211" name="Rectangle 210"/>
           <p:cNvSpPr/>
           <p:nvPr/>
         </p:nvSpPr>
         <p:spPr>
           <a:xfrm>
-            <a:off x="6254496" y="3895344"/>
+            <a:off x="6254496" y="5943600"/>
             <a:ext cx="5705856" cy="256032"/>
           </a:xfrm>
           <a:prstGeom prst="rect">
@@ -18148,13 +19644,13 @@
       </p:sp>
       <p:sp>
         <p:nvSpPr>
-          <p:cNvPr id="172" name="TextBox 171"/>
-          <p:cNvSpPr txBox="1"/>
-          <p:nvPr/>
-        </p:nvSpPr>
-        <p:spPr>
-          <a:xfrm>
-            <a:off x="6254496" y="3913632"/>
+          <p:cNvPr id="212" name="TextBox 211"/>
+          <p:cNvSpPr txBox="1"/>
+          <p:nvPr/>
+        </p:nvSpPr>
+        <p:spPr>
+          <a:xfrm>
+            <a:off x="6254496" y="5961888"/>
             <a:ext cx="411480" cy="237744"/>
           </a:xfrm>
           <a:prstGeom prst="rect">
@@ -18177,20 +19673,20 @@
               </a:defRPr>
             </a:pPr>
             <a:r>
-              <a:t>32</a:t>
-            </a:r>
-          </a:p>
-        </p:txBody>
-      </p:sp>
-      <p:sp>
-        <p:nvSpPr>
-          <p:cNvPr id="173" name="TextBox 172"/>
-          <p:cNvSpPr txBox="1"/>
-          <p:nvPr/>
-        </p:nvSpPr>
-        <p:spPr>
-          <a:xfrm>
-            <a:off x="6665976" y="3913632"/>
+              <a:t>40</a:t>
+            </a:r>
+          </a:p>
+        </p:txBody>
+      </p:sp>
+      <p:sp>
+        <p:nvSpPr>
+          <p:cNvPr id="213" name="TextBox 212"/>
+          <p:cNvSpPr txBox="1"/>
+          <p:nvPr/>
+        </p:nvSpPr>
+        <p:spPr>
+          <a:xfrm>
+            <a:off x="6665976" y="5961888"/>
             <a:ext cx="1920240" cy="237744"/>
           </a:xfrm>
           <a:prstGeom prst="rect">
@@ -18213,20 +19709,20 @@
               </a:defRPr>
             </a:pPr>
             <a:r>
-              <a:t>Ibrahim Mammo</a:t>
-            </a:r>
-          </a:p>
-        </p:txBody>
-      </p:sp>
-      <p:sp>
-        <p:nvSpPr>
-          <p:cNvPr id="174" name="TextBox 173"/>
-          <p:cNvSpPr txBox="1"/>
-          <p:nvPr/>
-        </p:nvSpPr>
-        <p:spPr>
-          <a:xfrm>
-            <a:off x="8586216" y="3913632"/>
+              <a:t>Nicholas Banks</a:t>
+            </a:r>
+          </a:p>
+        </p:txBody>
+      </p:sp>
+      <p:sp>
+        <p:nvSpPr>
+          <p:cNvPr id="214" name="TextBox 213"/>
+          <p:cNvSpPr txBox="1"/>
+          <p:nvPr/>
+        </p:nvSpPr>
+        <p:spPr>
+          <a:xfrm>
+            <a:off x="8586216" y="5961888"/>
             <a:ext cx="2459736" cy="237744"/>
           </a:xfrm>
           <a:prstGeom prst="rect">
@@ -18249,1503 +19745,7 @@
               </a:defRPr>
             </a:pPr>
             <a:r>
-              <a:t>Surefire Insurance Agency Corp.</a:t>
-            </a:r>
-          </a:p>
-        </p:txBody>
-      </p:sp>
-      <p:sp>
-        <p:nvSpPr>
-          <p:cNvPr id="175" name="TextBox 174"/>
-          <p:cNvSpPr txBox="1"/>
-          <p:nvPr/>
-        </p:nvSpPr>
-        <p:spPr>
-          <a:xfrm>
-            <a:off x="11045952" y="3913632"/>
-            <a:ext cx="914400" cy="237744"/>
-          </a:xfrm>
-          <a:prstGeom prst="rect">
-            <a:avLst/>
-          </a:prstGeom>
-          <a:noFill/>
-        </p:spPr>
-        <p:txBody>
-          <a:bodyPr wrap="none">
-            <a:spAutoFit/>
-          </a:bodyPr>
-          <a:lstStyle/>
-          <a:p>
-            <a:pPr algn="ctr">
-              <a:defRPr sz="950" b="1">
-                <a:solidFill>
-                  <a:srgbClr val="111827"/>
-                </a:solidFill>
-                <a:latin typeface="Calibri"/>
-              </a:defRPr>
-            </a:pPr>
-            <a:r>
-              <a:t>$372K</a:t>
-            </a:r>
-          </a:p>
-        </p:txBody>
-      </p:sp>
-      <p:sp>
-        <p:nvSpPr>
-          <p:cNvPr id="176" name="Rectangle 175"/>
-          <p:cNvSpPr/>
-          <p:nvPr/>
-        </p:nvSpPr>
-        <p:spPr>
-          <a:xfrm>
-            <a:off x="6254496" y="4151376"/>
-            <a:ext cx="5705856" cy="256032"/>
-          </a:xfrm>
-          <a:prstGeom prst="rect">
-            <a:avLst/>
-          </a:prstGeom>
-          <a:solidFill>
-            <a:srgbClr val="FFFFFF"/>
-          </a:solidFill>
-          <a:ln>
-            <a:noFill/>
-          </a:ln>
-        </p:spPr>
-        <p:style>
-          <a:lnRef idx="1">
-            <a:schemeClr val="accent1"/>
-          </a:lnRef>
-          <a:fillRef idx="3">
-            <a:schemeClr val="accent1"/>
-          </a:fillRef>
-          <a:effectRef idx="2">
-            <a:schemeClr val="accent1"/>
-          </a:effectRef>
-          <a:fontRef idx="minor">
-            <a:schemeClr val="lt1"/>
-          </a:fontRef>
-        </p:style>
-        <p:txBody>
-          <a:bodyPr rtlCol="0" anchor="ctr"/>
-          <a:lstStyle/>
-          <a:p>
-            <a:pPr algn="ctr"/>
-          </a:p>
-        </p:txBody>
-      </p:sp>
-      <p:sp>
-        <p:nvSpPr>
-          <p:cNvPr id="177" name="TextBox 176"/>
-          <p:cNvSpPr txBox="1"/>
-          <p:nvPr/>
-        </p:nvSpPr>
-        <p:spPr>
-          <a:xfrm>
-            <a:off x="6254496" y="4169664"/>
-            <a:ext cx="411480" cy="237744"/>
-          </a:xfrm>
-          <a:prstGeom prst="rect">
-            <a:avLst/>
-          </a:prstGeom>
-          <a:noFill/>
-        </p:spPr>
-        <p:txBody>
-          <a:bodyPr wrap="none">
-            <a:spAutoFit/>
-          </a:bodyPr>
-          <a:lstStyle/>
-          <a:p>
-            <a:pPr algn="ctr">
-              <a:defRPr sz="950" b="1">
-                <a:solidFill>
-                  <a:srgbClr val="6B7280"/>
-                </a:solidFill>
-                <a:latin typeface="Calibri"/>
-              </a:defRPr>
-            </a:pPr>
-            <a:r>
-              <a:t>33</a:t>
-            </a:r>
-          </a:p>
-        </p:txBody>
-      </p:sp>
-      <p:sp>
-        <p:nvSpPr>
-          <p:cNvPr id="178" name="TextBox 177"/>
-          <p:cNvSpPr txBox="1"/>
-          <p:nvPr/>
-        </p:nvSpPr>
-        <p:spPr>
-          <a:xfrm>
-            <a:off x="6665976" y="4169664"/>
-            <a:ext cx="1920240" cy="237744"/>
-          </a:xfrm>
-          <a:prstGeom prst="rect">
-            <a:avLst/>
-          </a:prstGeom>
-          <a:noFill/>
-        </p:spPr>
-        <p:txBody>
-          <a:bodyPr wrap="none">
-            <a:spAutoFit/>
-          </a:bodyPr>
-          <a:lstStyle/>
-          <a:p>
-            <a:pPr algn="l">
-              <a:defRPr sz="950" b="1">
-                <a:solidFill>
-                  <a:srgbClr val="111827"/>
-                </a:solidFill>
-                <a:latin typeface="Calibri"/>
-              </a:defRPr>
-            </a:pPr>
-            <a:r>
-              <a:t>Michael Su</a:t>
-            </a:r>
-          </a:p>
-        </p:txBody>
-      </p:sp>
-      <p:sp>
-        <p:nvSpPr>
-          <p:cNvPr id="179" name="TextBox 178"/>
-          <p:cNvSpPr txBox="1"/>
-          <p:nvPr/>
-        </p:nvSpPr>
-        <p:spPr>
-          <a:xfrm>
-            <a:off x="8586216" y="4169664"/>
-            <a:ext cx="2459736" cy="237744"/>
-          </a:xfrm>
-          <a:prstGeom prst="rect">
-            <a:avLst/>
-          </a:prstGeom>
-          <a:noFill/>
-        </p:spPr>
-        <p:txBody>
-          <a:bodyPr wrap="none">
-            <a:spAutoFit/>
-          </a:bodyPr>
-          <a:lstStyle/>
-          <a:p>
-            <a:pPr algn="l">
-              <a:defRPr sz="950" b="0">
-                <a:solidFill>
-                  <a:srgbClr val="6B7280"/>
-                </a:solidFill>
-                <a:latin typeface="Calibri"/>
-              </a:defRPr>
-            </a:pPr>
-            <a:r>
-              <a:t>Jtc Insurance Agency, Inc.</a:t>
-            </a:r>
-          </a:p>
-        </p:txBody>
-      </p:sp>
-      <p:sp>
-        <p:nvSpPr>
-          <p:cNvPr id="180" name="TextBox 179"/>
-          <p:cNvSpPr txBox="1"/>
-          <p:nvPr/>
-        </p:nvSpPr>
-        <p:spPr>
-          <a:xfrm>
-            <a:off x="11045952" y="4169664"/>
-            <a:ext cx="914400" cy="237744"/>
-          </a:xfrm>
-          <a:prstGeom prst="rect">
-            <a:avLst/>
-          </a:prstGeom>
-          <a:noFill/>
-        </p:spPr>
-        <p:txBody>
-          <a:bodyPr wrap="none">
-            <a:spAutoFit/>
-          </a:bodyPr>
-          <a:lstStyle/>
-          <a:p>
-            <a:pPr algn="ctr">
-              <a:defRPr sz="950" b="1">
-                <a:solidFill>
-                  <a:srgbClr val="111827"/>
-                </a:solidFill>
-                <a:latin typeface="Calibri"/>
-              </a:defRPr>
-            </a:pPr>
-            <a:r>
-              <a:t>$367K</a:t>
-            </a:r>
-          </a:p>
-        </p:txBody>
-      </p:sp>
-      <p:sp>
-        <p:nvSpPr>
-          <p:cNvPr id="181" name="Rectangle 180"/>
-          <p:cNvSpPr/>
-          <p:nvPr/>
-        </p:nvSpPr>
-        <p:spPr>
-          <a:xfrm>
-            <a:off x="6254496" y="4407408"/>
-            <a:ext cx="5705856" cy="256032"/>
-          </a:xfrm>
-          <a:prstGeom prst="rect">
-            <a:avLst/>
-          </a:prstGeom>
-          <a:solidFill>
-            <a:srgbClr val="F9FAFB"/>
-          </a:solidFill>
-          <a:ln>
-            <a:noFill/>
-          </a:ln>
-        </p:spPr>
-        <p:style>
-          <a:lnRef idx="1">
-            <a:schemeClr val="accent1"/>
-          </a:lnRef>
-          <a:fillRef idx="3">
-            <a:schemeClr val="accent1"/>
-          </a:fillRef>
-          <a:effectRef idx="2">
-            <a:schemeClr val="accent1"/>
-          </a:effectRef>
-          <a:fontRef idx="minor">
-            <a:schemeClr val="lt1"/>
-          </a:fontRef>
-        </p:style>
-        <p:txBody>
-          <a:bodyPr rtlCol="0" anchor="ctr"/>
-          <a:lstStyle/>
-          <a:p>
-            <a:pPr algn="ctr"/>
-          </a:p>
-        </p:txBody>
-      </p:sp>
-      <p:sp>
-        <p:nvSpPr>
-          <p:cNvPr id="182" name="TextBox 181"/>
-          <p:cNvSpPr txBox="1"/>
-          <p:nvPr/>
-        </p:nvSpPr>
-        <p:spPr>
-          <a:xfrm>
-            <a:off x="6254496" y="4425696"/>
-            <a:ext cx="411480" cy="237744"/>
-          </a:xfrm>
-          <a:prstGeom prst="rect">
-            <a:avLst/>
-          </a:prstGeom>
-          <a:noFill/>
-        </p:spPr>
-        <p:txBody>
-          <a:bodyPr wrap="none">
-            <a:spAutoFit/>
-          </a:bodyPr>
-          <a:lstStyle/>
-          <a:p>
-            <a:pPr algn="ctr">
-              <a:defRPr sz="950" b="1">
-                <a:solidFill>
-                  <a:srgbClr val="6B7280"/>
-                </a:solidFill>
-                <a:latin typeface="Calibri"/>
-              </a:defRPr>
-            </a:pPr>
-            <a:r>
-              <a:t>34</a:t>
-            </a:r>
-          </a:p>
-        </p:txBody>
-      </p:sp>
-      <p:sp>
-        <p:nvSpPr>
-          <p:cNvPr id="183" name="TextBox 182"/>
-          <p:cNvSpPr txBox="1"/>
-          <p:nvPr/>
-        </p:nvSpPr>
-        <p:spPr>
-          <a:xfrm>
-            <a:off x="6665976" y="4425696"/>
-            <a:ext cx="1920240" cy="237744"/>
-          </a:xfrm>
-          <a:prstGeom prst="rect">
-            <a:avLst/>
-          </a:prstGeom>
-          <a:noFill/>
-        </p:spPr>
-        <p:txBody>
-          <a:bodyPr wrap="none">
-            <a:spAutoFit/>
-          </a:bodyPr>
-          <a:lstStyle/>
-          <a:p>
-            <a:pPr algn="l">
-              <a:defRPr sz="950" b="1">
-                <a:solidFill>
-                  <a:srgbClr val="111827"/>
-                </a:solidFill>
-                <a:latin typeface="Calibri"/>
-              </a:defRPr>
-            </a:pPr>
-            <a:r>
-              <a:t>Patricia Galindoparedes</a:t>
-            </a:r>
-          </a:p>
-        </p:txBody>
-      </p:sp>
-      <p:sp>
-        <p:nvSpPr>
-          <p:cNvPr id="184" name="TextBox 183"/>
-          <p:cNvSpPr txBox="1"/>
-          <p:nvPr/>
-        </p:nvSpPr>
-        <p:spPr>
-          <a:xfrm>
-            <a:off x="8586216" y="4425696"/>
-            <a:ext cx="2459736" cy="237744"/>
-          </a:xfrm>
-          <a:prstGeom prst="rect">
-            <a:avLst/>
-          </a:prstGeom>
-          <a:noFill/>
-        </p:spPr>
-        <p:txBody>
-          <a:bodyPr wrap="none">
-            <a:spAutoFit/>
-          </a:bodyPr>
-          <a:lstStyle/>
-          <a:p>
-            <a:pPr algn="l">
-              <a:defRPr sz="950" b="0">
-                <a:solidFill>
-                  <a:srgbClr val="6B7280"/>
-                </a:solidFill>
-                <a:latin typeface="Calibri"/>
-              </a:defRPr>
-            </a:pPr>
-            <a:r>
-              <a:t>Call Patty Insurance Services</a:t>
-            </a:r>
-          </a:p>
-        </p:txBody>
-      </p:sp>
-      <p:sp>
-        <p:nvSpPr>
-          <p:cNvPr id="185" name="TextBox 184"/>
-          <p:cNvSpPr txBox="1"/>
-          <p:nvPr/>
-        </p:nvSpPr>
-        <p:spPr>
-          <a:xfrm>
-            <a:off x="11045952" y="4425696"/>
-            <a:ext cx="914400" cy="237744"/>
-          </a:xfrm>
-          <a:prstGeom prst="rect">
-            <a:avLst/>
-          </a:prstGeom>
-          <a:noFill/>
-        </p:spPr>
-        <p:txBody>
-          <a:bodyPr wrap="none">
-            <a:spAutoFit/>
-          </a:bodyPr>
-          <a:lstStyle/>
-          <a:p>
-            <a:pPr algn="ctr">
-              <a:defRPr sz="950" b="1">
-                <a:solidFill>
-                  <a:srgbClr val="111827"/>
-                </a:solidFill>
-                <a:latin typeface="Calibri"/>
-              </a:defRPr>
-            </a:pPr>
-            <a:r>
-              <a:t>$365K</a:t>
-            </a:r>
-          </a:p>
-        </p:txBody>
-      </p:sp>
-      <p:sp>
-        <p:nvSpPr>
-          <p:cNvPr id="186" name="Rectangle 185"/>
-          <p:cNvSpPr/>
-          <p:nvPr/>
-        </p:nvSpPr>
-        <p:spPr>
-          <a:xfrm>
-            <a:off x="6254496" y="4663440"/>
-            <a:ext cx="5705856" cy="256032"/>
-          </a:xfrm>
-          <a:prstGeom prst="rect">
-            <a:avLst/>
-          </a:prstGeom>
-          <a:solidFill>
-            <a:srgbClr val="FFFFFF"/>
-          </a:solidFill>
-          <a:ln>
-            <a:noFill/>
-          </a:ln>
-        </p:spPr>
-        <p:style>
-          <a:lnRef idx="1">
-            <a:schemeClr val="accent1"/>
-          </a:lnRef>
-          <a:fillRef idx="3">
-            <a:schemeClr val="accent1"/>
-          </a:fillRef>
-          <a:effectRef idx="2">
-            <a:schemeClr val="accent1"/>
-          </a:effectRef>
-          <a:fontRef idx="minor">
-            <a:schemeClr val="lt1"/>
-          </a:fontRef>
-        </p:style>
-        <p:txBody>
-          <a:bodyPr rtlCol="0" anchor="ctr"/>
-          <a:lstStyle/>
-          <a:p>
-            <a:pPr algn="ctr"/>
-          </a:p>
-        </p:txBody>
-      </p:sp>
-      <p:sp>
-        <p:nvSpPr>
-          <p:cNvPr id="187" name="TextBox 186"/>
-          <p:cNvSpPr txBox="1"/>
-          <p:nvPr/>
-        </p:nvSpPr>
-        <p:spPr>
-          <a:xfrm>
-            <a:off x="6254496" y="4681728"/>
-            <a:ext cx="411480" cy="237744"/>
-          </a:xfrm>
-          <a:prstGeom prst="rect">
-            <a:avLst/>
-          </a:prstGeom>
-          <a:noFill/>
-        </p:spPr>
-        <p:txBody>
-          <a:bodyPr wrap="none">
-            <a:spAutoFit/>
-          </a:bodyPr>
-          <a:lstStyle/>
-          <a:p>
-            <a:pPr algn="ctr">
-              <a:defRPr sz="950" b="1">
-                <a:solidFill>
-                  <a:srgbClr val="6B7280"/>
-                </a:solidFill>
-                <a:latin typeface="Calibri"/>
-              </a:defRPr>
-            </a:pPr>
-            <a:r>
-              <a:t>35</a:t>
-            </a:r>
-          </a:p>
-        </p:txBody>
-      </p:sp>
-      <p:sp>
-        <p:nvSpPr>
-          <p:cNvPr id="188" name="TextBox 187"/>
-          <p:cNvSpPr txBox="1"/>
-          <p:nvPr/>
-        </p:nvSpPr>
-        <p:spPr>
-          <a:xfrm>
-            <a:off x="6665976" y="4681728"/>
-            <a:ext cx="1920240" cy="237744"/>
-          </a:xfrm>
-          <a:prstGeom prst="rect">
-            <a:avLst/>
-          </a:prstGeom>
-          <a:noFill/>
-        </p:spPr>
-        <p:txBody>
-          <a:bodyPr wrap="none">
-            <a:spAutoFit/>
-          </a:bodyPr>
-          <a:lstStyle/>
-          <a:p>
-            <a:pPr algn="l">
-              <a:defRPr sz="950" b="1">
-                <a:solidFill>
-                  <a:srgbClr val="111827"/>
-                </a:solidFill>
-                <a:latin typeface="Calibri"/>
-              </a:defRPr>
-            </a:pPr>
-            <a:r>
-              <a:t>Kurtis Gautz</a:t>
-            </a:r>
-          </a:p>
-        </p:txBody>
-      </p:sp>
-      <p:sp>
-        <p:nvSpPr>
-          <p:cNvPr id="189" name="TextBox 188"/>
-          <p:cNvSpPr txBox="1"/>
-          <p:nvPr/>
-        </p:nvSpPr>
-        <p:spPr>
-          <a:xfrm>
-            <a:off x="8586216" y="4681728"/>
-            <a:ext cx="2459736" cy="237744"/>
-          </a:xfrm>
-          <a:prstGeom prst="rect">
-            <a:avLst/>
-          </a:prstGeom>
-          <a:noFill/>
-        </p:spPr>
-        <p:txBody>
-          <a:bodyPr wrap="none">
-            <a:spAutoFit/>
-          </a:bodyPr>
-          <a:lstStyle/>
-          <a:p>
-            <a:pPr algn="l">
-              <a:defRPr sz="950" b="0">
-                <a:solidFill>
-                  <a:srgbClr val="6B7280"/>
-                </a:solidFill>
-                <a:latin typeface="Calibri"/>
-              </a:defRPr>
-            </a:pPr>
-            <a:r>
-              <a:t>CRC Insurance Services, Inc</a:t>
-            </a:r>
-          </a:p>
-        </p:txBody>
-      </p:sp>
-      <p:sp>
-        <p:nvSpPr>
-          <p:cNvPr id="190" name="TextBox 189"/>
-          <p:cNvSpPr txBox="1"/>
-          <p:nvPr/>
-        </p:nvSpPr>
-        <p:spPr>
-          <a:xfrm>
-            <a:off x="11045952" y="4681728"/>
-            <a:ext cx="914400" cy="237744"/>
-          </a:xfrm>
-          <a:prstGeom prst="rect">
-            <a:avLst/>
-          </a:prstGeom>
-          <a:noFill/>
-        </p:spPr>
-        <p:txBody>
-          <a:bodyPr wrap="none">
-            <a:spAutoFit/>
-          </a:bodyPr>
-          <a:lstStyle/>
-          <a:p>
-            <a:pPr algn="ctr">
-              <a:defRPr sz="950" b="1">
-                <a:solidFill>
-                  <a:srgbClr val="111827"/>
-                </a:solidFill>
-                <a:latin typeface="Calibri"/>
-              </a:defRPr>
-            </a:pPr>
-            <a:r>
-              <a:t>$352K</a:t>
-            </a:r>
-          </a:p>
-        </p:txBody>
-      </p:sp>
-      <p:sp>
-        <p:nvSpPr>
-          <p:cNvPr id="191" name="Rectangle 190"/>
-          <p:cNvSpPr/>
-          <p:nvPr/>
-        </p:nvSpPr>
-        <p:spPr>
-          <a:xfrm>
-            <a:off x="6254496" y="4919472"/>
-            <a:ext cx="5705856" cy="256032"/>
-          </a:xfrm>
-          <a:prstGeom prst="rect">
-            <a:avLst/>
-          </a:prstGeom>
-          <a:solidFill>
-            <a:srgbClr val="F9FAFB"/>
-          </a:solidFill>
-          <a:ln>
-            <a:noFill/>
-          </a:ln>
-        </p:spPr>
-        <p:style>
-          <a:lnRef idx="1">
-            <a:schemeClr val="accent1"/>
-          </a:lnRef>
-          <a:fillRef idx="3">
-            <a:schemeClr val="accent1"/>
-          </a:fillRef>
-          <a:effectRef idx="2">
-            <a:schemeClr val="accent1"/>
-          </a:effectRef>
-          <a:fontRef idx="minor">
-            <a:schemeClr val="lt1"/>
-          </a:fontRef>
-        </p:style>
-        <p:txBody>
-          <a:bodyPr rtlCol="0" anchor="ctr"/>
-          <a:lstStyle/>
-          <a:p>
-            <a:pPr algn="ctr"/>
-          </a:p>
-        </p:txBody>
-      </p:sp>
-      <p:sp>
-        <p:nvSpPr>
-          <p:cNvPr id="192" name="TextBox 191"/>
-          <p:cNvSpPr txBox="1"/>
-          <p:nvPr/>
-        </p:nvSpPr>
-        <p:spPr>
-          <a:xfrm>
-            <a:off x="6254496" y="4937760"/>
-            <a:ext cx="411480" cy="237744"/>
-          </a:xfrm>
-          <a:prstGeom prst="rect">
-            <a:avLst/>
-          </a:prstGeom>
-          <a:noFill/>
-        </p:spPr>
-        <p:txBody>
-          <a:bodyPr wrap="none">
-            <a:spAutoFit/>
-          </a:bodyPr>
-          <a:lstStyle/>
-          <a:p>
-            <a:pPr algn="ctr">
-              <a:defRPr sz="950" b="1">
-                <a:solidFill>
-                  <a:srgbClr val="6B7280"/>
-                </a:solidFill>
-                <a:latin typeface="Calibri"/>
-              </a:defRPr>
-            </a:pPr>
-            <a:r>
-              <a:t>36</a:t>
-            </a:r>
-          </a:p>
-        </p:txBody>
-      </p:sp>
-      <p:sp>
-        <p:nvSpPr>
-          <p:cNvPr id="193" name="TextBox 192"/>
-          <p:cNvSpPr txBox="1"/>
-          <p:nvPr/>
-        </p:nvSpPr>
-        <p:spPr>
-          <a:xfrm>
-            <a:off x="6665976" y="4937760"/>
-            <a:ext cx="1920240" cy="237744"/>
-          </a:xfrm>
-          <a:prstGeom prst="rect">
-            <a:avLst/>
-          </a:prstGeom>
-          <a:noFill/>
-        </p:spPr>
-        <p:txBody>
-          <a:bodyPr wrap="none">
-            <a:spAutoFit/>
-          </a:bodyPr>
-          <a:lstStyle/>
-          <a:p>
-            <a:pPr algn="l">
-              <a:defRPr sz="950" b="1">
-                <a:solidFill>
-                  <a:srgbClr val="111827"/>
-                </a:solidFill>
-                <a:latin typeface="Calibri"/>
-              </a:defRPr>
-            </a:pPr>
-            <a:r>
-              <a:t>Damandeep Singh</a:t>
-            </a:r>
-          </a:p>
-        </p:txBody>
-      </p:sp>
-      <p:sp>
-        <p:nvSpPr>
-          <p:cNvPr id="194" name="TextBox 193"/>
-          <p:cNvSpPr txBox="1"/>
-          <p:nvPr/>
-        </p:nvSpPr>
-        <p:spPr>
-          <a:xfrm>
-            <a:off x="8586216" y="4937760"/>
-            <a:ext cx="2459736" cy="237744"/>
-          </a:xfrm>
-          <a:prstGeom prst="rect">
-            <a:avLst/>
-          </a:prstGeom>
-          <a:noFill/>
-        </p:spPr>
-        <p:txBody>
-          <a:bodyPr wrap="none">
-            <a:spAutoFit/>
-          </a:bodyPr>
-          <a:lstStyle/>
-          <a:p>
-            <a:pPr algn="l">
-              <a:defRPr sz="950" b="0">
-                <a:solidFill>
-                  <a:srgbClr val="6B7280"/>
-                </a:solidFill>
-                <a:latin typeface="Calibri"/>
-              </a:defRPr>
-            </a:pPr>
-            <a:r>
-              <a:t>Mayflower Insurance Services</a:t>
-            </a:r>
-          </a:p>
-        </p:txBody>
-      </p:sp>
-      <p:sp>
-        <p:nvSpPr>
-          <p:cNvPr id="195" name="TextBox 194"/>
-          <p:cNvSpPr txBox="1"/>
-          <p:nvPr/>
-        </p:nvSpPr>
-        <p:spPr>
-          <a:xfrm>
-            <a:off x="11045952" y="4937760"/>
-            <a:ext cx="914400" cy="237744"/>
-          </a:xfrm>
-          <a:prstGeom prst="rect">
-            <a:avLst/>
-          </a:prstGeom>
-          <a:noFill/>
-        </p:spPr>
-        <p:txBody>
-          <a:bodyPr wrap="none">
-            <a:spAutoFit/>
-          </a:bodyPr>
-          <a:lstStyle/>
-          <a:p>
-            <a:pPr algn="ctr">
-              <a:defRPr sz="950" b="1">
-                <a:solidFill>
-                  <a:srgbClr val="111827"/>
-                </a:solidFill>
-                <a:latin typeface="Calibri"/>
-              </a:defRPr>
-            </a:pPr>
-            <a:r>
-              <a:t>$341K</a:t>
-            </a:r>
-          </a:p>
-        </p:txBody>
-      </p:sp>
-      <p:sp>
-        <p:nvSpPr>
-          <p:cNvPr id="196" name="Rectangle 195"/>
-          <p:cNvSpPr/>
-          <p:nvPr/>
-        </p:nvSpPr>
-        <p:spPr>
-          <a:xfrm>
-            <a:off x="6254496" y="5175504"/>
-            <a:ext cx="5705856" cy="256032"/>
-          </a:xfrm>
-          <a:prstGeom prst="rect">
-            <a:avLst/>
-          </a:prstGeom>
-          <a:solidFill>
-            <a:srgbClr val="FFFFFF"/>
-          </a:solidFill>
-          <a:ln>
-            <a:noFill/>
-          </a:ln>
-        </p:spPr>
-        <p:style>
-          <a:lnRef idx="1">
-            <a:schemeClr val="accent1"/>
-          </a:lnRef>
-          <a:fillRef idx="3">
-            <a:schemeClr val="accent1"/>
-          </a:fillRef>
-          <a:effectRef idx="2">
-            <a:schemeClr val="accent1"/>
-          </a:effectRef>
-          <a:fontRef idx="minor">
-            <a:schemeClr val="lt1"/>
-          </a:fontRef>
-        </p:style>
-        <p:txBody>
-          <a:bodyPr rtlCol="0" anchor="ctr"/>
-          <a:lstStyle/>
-          <a:p>
-            <a:pPr algn="ctr"/>
-          </a:p>
-        </p:txBody>
-      </p:sp>
-      <p:sp>
-        <p:nvSpPr>
-          <p:cNvPr id="197" name="TextBox 196"/>
-          <p:cNvSpPr txBox="1"/>
-          <p:nvPr/>
-        </p:nvSpPr>
-        <p:spPr>
-          <a:xfrm>
-            <a:off x="6254496" y="5193792"/>
-            <a:ext cx="411480" cy="237744"/>
-          </a:xfrm>
-          <a:prstGeom prst="rect">
-            <a:avLst/>
-          </a:prstGeom>
-          <a:noFill/>
-        </p:spPr>
-        <p:txBody>
-          <a:bodyPr wrap="none">
-            <a:spAutoFit/>
-          </a:bodyPr>
-          <a:lstStyle/>
-          <a:p>
-            <a:pPr algn="ctr">
-              <a:defRPr sz="950" b="1">
-                <a:solidFill>
-                  <a:srgbClr val="6B7280"/>
-                </a:solidFill>
-                <a:latin typeface="Calibri"/>
-              </a:defRPr>
-            </a:pPr>
-            <a:r>
-              <a:t>37</a:t>
-            </a:r>
-          </a:p>
-        </p:txBody>
-      </p:sp>
-      <p:sp>
-        <p:nvSpPr>
-          <p:cNvPr id="198" name="TextBox 197"/>
-          <p:cNvSpPr txBox="1"/>
-          <p:nvPr/>
-        </p:nvSpPr>
-        <p:spPr>
-          <a:xfrm>
-            <a:off x="6665976" y="5193792"/>
-            <a:ext cx="1920240" cy="237744"/>
-          </a:xfrm>
-          <a:prstGeom prst="rect">
-            <a:avLst/>
-          </a:prstGeom>
-          <a:noFill/>
-        </p:spPr>
-        <p:txBody>
-          <a:bodyPr wrap="none">
-            <a:spAutoFit/>
-          </a:bodyPr>
-          <a:lstStyle/>
-          <a:p>
-            <a:pPr algn="l">
-              <a:defRPr sz="950" b="1">
-                <a:solidFill>
-                  <a:srgbClr val="111827"/>
-                </a:solidFill>
-                <a:latin typeface="Calibri"/>
-              </a:defRPr>
-            </a:pPr>
-            <a:r>
-              <a:t>Omar Elmanzalawy</a:t>
-            </a:r>
-          </a:p>
-        </p:txBody>
-      </p:sp>
-      <p:sp>
-        <p:nvSpPr>
-          <p:cNvPr id="199" name="TextBox 198"/>
-          <p:cNvSpPr txBox="1"/>
-          <p:nvPr/>
-        </p:nvSpPr>
-        <p:spPr>
-          <a:xfrm>
-            <a:off x="8586216" y="5193792"/>
-            <a:ext cx="2459736" cy="237744"/>
-          </a:xfrm>
-          <a:prstGeom prst="rect">
-            <a:avLst/>
-          </a:prstGeom>
-          <a:noFill/>
-        </p:spPr>
-        <p:txBody>
-          <a:bodyPr wrap="none">
-            <a:spAutoFit/>
-          </a:bodyPr>
-          <a:lstStyle/>
-          <a:p>
-            <a:pPr algn="l">
-              <a:defRPr sz="950" b="0">
-                <a:solidFill>
-                  <a:srgbClr val="6B7280"/>
-                </a:solidFill>
-                <a:latin typeface="Calibri"/>
-              </a:defRPr>
-            </a:pPr>
-            <a:r>
-              <a:t>First Connect Insurance</a:t>
-            </a:r>
-          </a:p>
-        </p:txBody>
-      </p:sp>
-      <p:sp>
-        <p:nvSpPr>
-          <p:cNvPr id="200" name="TextBox 199"/>
-          <p:cNvSpPr txBox="1"/>
-          <p:nvPr/>
-        </p:nvSpPr>
-        <p:spPr>
-          <a:xfrm>
-            <a:off x="11045952" y="5193792"/>
-            <a:ext cx="914400" cy="237744"/>
-          </a:xfrm>
-          <a:prstGeom prst="rect">
-            <a:avLst/>
-          </a:prstGeom>
-          <a:noFill/>
-        </p:spPr>
-        <p:txBody>
-          <a:bodyPr wrap="none">
-            <a:spAutoFit/>
-          </a:bodyPr>
-          <a:lstStyle/>
-          <a:p>
-            <a:pPr algn="ctr">
-              <a:defRPr sz="950" b="1">
-                <a:solidFill>
-                  <a:srgbClr val="111827"/>
-                </a:solidFill>
-                <a:latin typeface="Calibri"/>
-              </a:defRPr>
-            </a:pPr>
-            <a:r>
-              <a:t>$339K</a:t>
-            </a:r>
-          </a:p>
-        </p:txBody>
-      </p:sp>
-      <p:sp>
-        <p:nvSpPr>
-          <p:cNvPr id="201" name="Rectangle 200"/>
-          <p:cNvSpPr/>
-          <p:nvPr/>
-        </p:nvSpPr>
-        <p:spPr>
-          <a:xfrm>
-            <a:off x="6254496" y="5431536"/>
-            <a:ext cx="5705856" cy="256032"/>
-          </a:xfrm>
-          <a:prstGeom prst="rect">
-            <a:avLst/>
-          </a:prstGeom>
-          <a:solidFill>
-            <a:srgbClr val="D1FAE5"/>
-          </a:solidFill>
-          <a:ln>
-            <a:noFill/>
-          </a:ln>
-        </p:spPr>
-        <p:style>
-          <a:lnRef idx="1">
-            <a:schemeClr val="accent1"/>
-          </a:lnRef>
-          <a:fillRef idx="3">
-            <a:schemeClr val="accent1"/>
-          </a:fillRef>
-          <a:effectRef idx="2">
-            <a:schemeClr val="accent1"/>
-          </a:effectRef>
-          <a:fontRef idx="minor">
-            <a:schemeClr val="lt1"/>
-          </a:fontRef>
-        </p:style>
-        <p:txBody>
-          <a:bodyPr rtlCol="0" anchor="ctr"/>
-          <a:lstStyle/>
-          <a:p>
-            <a:pPr algn="ctr"/>
-          </a:p>
-        </p:txBody>
-      </p:sp>
-      <p:sp>
-        <p:nvSpPr>
-          <p:cNvPr id="202" name="TextBox 201"/>
-          <p:cNvSpPr txBox="1"/>
-          <p:nvPr/>
-        </p:nvSpPr>
-        <p:spPr>
-          <a:xfrm>
-            <a:off x="6254496" y="5449824"/>
-            <a:ext cx="411480" cy="237744"/>
-          </a:xfrm>
-          <a:prstGeom prst="rect">
-            <a:avLst/>
-          </a:prstGeom>
-          <a:noFill/>
-        </p:spPr>
-        <p:txBody>
-          <a:bodyPr wrap="none">
-            <a:spAutoFit/>
-          </a:bodyPr>
-          <a:lstStyle/>
-          <a:p>
-            <a:pPr algn="ctr">
-              <a:defRPr sz="950" b="1">
-                <a:solidFill>
-                  <a:srgbClr val="6B7280"/>
-                </a:solidFill>
-                <a:latin typeface="Calibri"/>
-              </a:defRPr>
-            </a:pPr>
-            <a:r>
-              <a:t>38</a:t>
-            </a:r>
-          </a:p>
-        </p:txBody>
-      </p:sp>
-      <p:sp>
-        <p:nvSpPr>
-          <p:cNvPr id="203" name="TextBox 202"/>
-          <p:cNvSpPr txBox="1"/>
-          <p:nvPr/>
-        </p:nvSpPr>
-        <p:spPr>
-          <a:xfrm>
-            <a:off x="6665976" y="5449824"/>
-            <a:ext cx="1920240" cy="237744"/>
-          </a:xfrm>
-          <a:prstGeom prst="rect">
-            <a:avLst/>
-          </a:prstGeom>
-          <a:noFill/>
-        </p:spPr>
-        <p:txBody>
-          <a:bodyPr wrap="none">
-            <a:spAutoFit/>
-          </a:bodyPr>
-          <a:lstStyle/>
-          <a:p>
-            <a:pPr algn="l">
-              <a:defRPr sz="950" b="1">
-                <a:solidFill>
-                  <a:srgbClr val="111827"/>
-                </a:solidFill>
-                <a:latin typeface="Calibri"/>
-              </a:defRPr>
-            </a:pPr>
-            <a:r>
-              <a:t>Elena Tchernogorova</a:t>
-            </a:r>
-          </a:p>
-        </p:txBody>
-      </p:sp>
-      <p:sp>
-        <p:nvSpPr>
-          <p:cNvPr id="204" name="TextBox 203"/>
-          <p:cNvSpPr txBox="1"/>
-          <p:nvPr/>
-        </p:nvSpPr>
-        <p:spPr>
-          <a:xfrm>
-            <a:off x="8586216" y="5449824"/>
-            <a:ext cx="2459736" cy="237744"/>
-          </a:xfrm>
-          <a:prstGeom prst="rect">
-            <a:avLst/>
-          </a:prstGeom>
-          <a:noFill/>
-        </p:spPr>
-        <p:txBody>
-          <a:bodyPr wrap="none">
-            <a:spAutoFit/>
-          </a:bodyPr>
-          <a:lstStyle/>
-          <a:p>
-            <a:pPr algn="l">
-              <a:defRPr sz="950" b="0">
-                <a:solidFill>
-                  <a:srgbClr val="6B7280"/>
-                </a:solidFill>
-                <a:latin typeface="Calibri"/>
-              </a:defRPr>
-            </a:pPr>
-            <a:r>
-              <a:t>First Connect Insurance</a:t>
-            </a:r>
-          </a:p>
-        </p:txBody>
-      </p:sp>
-      <p:sp>
-        <p:nvSpPr>
-          <p:cNvPr id="205" name="TextBox 204"/>
-          <p:cNvSpPr txBox="1"/>
-          <p:nvPr/>
-        </p:nvSpPr>
-        <p:spPr>
-          <a:xfrm>
-            <a:off x="11045952" y="5449824"/>
-            <a:ext cx="914400" cy="237744"/>
-          </a:xfrm>
-          <a:prstGeom prst="rect">
-            <a:avLst/>
-          </a:prstGeom>
-          <a:noFill/>
-        </p:spPr>
-        <p:txBody>
-          <a:bodyPr wrap="none">
-            <a:spAutoFit/>
-          </a:bodyPr>
-          <a:lstStyle/>
-          <a:p>
-            <a:pPr algn="ctr">
-              <a:defRPr sz="950" b="1">
-                <a:solidFill>
-                  <a:srgbClr val="111827"/>
-                </a:solidFill>
-                <a:latin typeface="Calibri"/>
-              </a:defRPr>
-            </a:pPr>
-            <a:r>
-              <a:t>$331K</a:t>
-            </a:r>
-          </a:p>
-        </p:txBody>
-      </p:sp>
-      <p:sp>
-        <p:nvSpPr>
-          <p:cNvPr id="206" name="Rectangle 205"/>
-          <p:cNvSpPr/>
-          <p:nvPr/>
-        </p:nvSpPr>
-        <p:spPr>
-          <a:xfrm>
-            <a:off x="6254496" y="5687568"/>
-            <a:ext cx="5705856" cy="256032"/>
-          </a:xfrm>
-          <a:prstGeom prst="rect">
-            <a:avLst/>
-          </a:prstGeom>
-          <a:solidFill>
-            <a:srgbClr val="FFFFFF"/>
-          </a:solidFill>
-          <a:ln>
-            <a:noFill/>
-          </a:ln>
-        </p:spPr>
-        <p:style>
-          <a:lnRef idx="1">
-            <a:schemeClr val="accent1"/>
-          </a:lnRef>
-          <a:fillRef idx="3">
-            <a:schemeClr val="accent1"/>
-          </a:fillRef>
-          <a:effectRef idx="2">
-            <a:schemeClr val="accent1"/>
-          </a:effectRef>
-          <a:fontRef idx="minor">
-            <a:schemeClr val="lt1"/>
-          </a:fontRef>
-        </p:style>
-        <p:txBody>
-          <a:bodyPr rtlCol="0" anchor="ctr"/>
-          <a:lstStyle/>
-          <a:p>
-            <a:pPr algn="ctr"/>
-          </a:p>
-        </p:txBody>
-      </p:sp>
-      <p:sp>
-        <p:nvSpPr>
-          <p:cNvPr id="207" name="TextBox 206"/>
-          <p:cNvSpPr txBox="1"/>
-          <p:nvPr/>
-        </p:nvSpPr>
-        <p:spPr>
-          <a:xfrm>
-            <a:off x="6254496" y="5705856"/>
-            <a:ext cx="411480" cy="237744"/>
-          </a:xfrm>
-          <a:prstGeom prst="rect">
-            <a:avLst/>
-          </a:prstGeom>
-          <a:noFill/>
-        </p:spPr>
-        <p:txBody>
-          <a:bodyPr wrap="none">
-            <a:spAutoFit/>
-          </a:bodyPr>
-          <a:lstStyle/>
-          <a:p>
-            <a:pPr algn="ctr">
-              <a:defRPr sz="950" b="1">
-                <a:solidFill>
-                  <a:srgbClr val="6B7280"/>
-                </a:solidFill>
-                <a:latin typeface="Calibri"/>
-              </a:defRPr>
-            </a:pPr>
-            <a:r>
-              <a:t>39</a:t>
-            </a:r>
-          </a:p>
-        </p:txBody>
-      </p:sp>
-      <p:sp>
-        <p:nvSpPr>
-          <p:cNvPr id="208" name="TextBox 207"/>
-          <p:cNvSpPr txBox="1"/>
-          <p:nvPr/>
-        </p:nvSpPr>
-        <p:spPr>
-          <a:xfrm>
-            <a:off x="6665976" y="5705856"/>
-            <a:ext cx="1920240" cy="237744"/>
-          </a:xfrm>
-          <a:prstGeom prst="rect">
-            <a:avLst/>
-          </a:prstGeom>
-          <a:noFill/>
-        </p:spPr>
-        <p:txBody>
-          <a:bodyPr wrap="none">
-            <a:spAutoFit/>
-          </a:bodyPr>
-          <a:lstStyle/>
-          <a:p>
-            <a:pPr algn="l">
-              <a:defRPr sz="950" b="1">
-                <a:solidFill>
-                  <a:srgbClr val="111827"/>
-                </a:solidFill>
-                <a:latin typeface="Calibri"/>
-              </a:defRPr>
-            </a:pPr>
-            <a:r>
-              <a:t>Nicholas Banks</a:t>
-            </a:r>
-          </a:p>
-        </p:txBody>
-      </p:sp>
-      <p:sp>
-        <p:nvSpPr>
-          <p:cNvPr id="209" name="TextBox 208"/>
-          <p:cNvSpPr txBox="1"/>
-          <p:nvPr/>
-        </p:nvSpPr>
-        <p:spPr>
-          <a:xfrm>
-            <a:off x="8586216" y="5705856"/>
-            <a:ext cx="2459736" cy="237744"/>
-          </a:xfrm>
-          <a:prstGeom prst="rect">
-            <a:avLst/>
-          </a:prstGeom>
-          <a:noFill/>
-        </p:spPr>
-        <p:txBody>
-          <a:bodyPr wrap="none">
-            <a:spAutoFit/>
-          </a:bodyPr>
-          <a:lstStyle/>
-          <a:p>
-            <a:pPr algn="l">
-              <a:defRPr sz="950" b="0">
-                <a:solidFill>
-                  <a:srgbClr val="6B7280"/>
-                </a:solidFill>
-                <a:latin typeface="Calibri"/>
-              </a:defRPr>
-            </a:pPr>
-            <a:r>
               <a:t>Reliance Partners, LLC</a:t>
-            </a:r>
-          </a:p>
-        </p:txBody>
-      </p:sp>
-      <p:sp>
-        <p:nvSpPr>
-          <p:cNvPr id="210" name="TextBox 209"/>
-          <p:cNvSpPr txBox="1"/>
-          <p:nvPr/>
-        </p:nvSpPr>
-        <p:spPr>
-          <a:xfrm>
-            <a:off x="11045952" y="5705856"/>
-            <a:ext cx="914400" cy="237744"/>
-          </a:xfrm>
-          <a:prstGeom prst="rect">
-            <a:avLst/>
-          </a:prstGeom>
-          <a:noFill/>
-        </p:spPr>
-        <p:txBody>
-          <a:bodyPr wrap="none">
-            <a:spAutoFit/>
-          </a:bodyPr>
-          <a:lstStyle/>
-          <a:p>
-            <a:pPr algn="ctr">
-              <a:defRPr sz="950" b="1">
-                <a:solidFill>
-                  <a:srgbClr val="111827"/>
-                </a:solidFill>
-                <a:latin typeface="Calibri"/>
-              </a:defRPr>
-            </a:pPr>
-            <a:r>
-              <a:t>$330K</a:t>
-            </a:r>
-          </a:p>
-        </p:txBody>
-      </p:sp>
-      <p:sp>
-        <p:nvSpPr>
-          <p:cNvPr id="211" name="Rectangle 210"/>
-          <p:cNvSpPr/>
-          <p:nvPr/>
-        </p:nvSpPr>
-        <p:spPr>
-          <a:xfrm>
-            <a:off x="6254496" y="5943600"/>
-            <a:ext cx="5705856" cy="256032"/>
-          </a:xfrm>
-          <a:prstGeom prst="rect">
-            <a:avLst/>
-          </a:prstGeom>
-          <a:solidFill>
-            <a:srgbClr val="F9FAFB"/>
-          </a:solidFill>
-          <a:ln>
-            <a:noFill/>
-          </a:ln>
-        </p:spPr>
-        <p:style>
-          <a:lnRef idx="1">
-            <a:schemeClr val="accent1"/>
-          </a:lnRef>
-          <a:fillRef idx="3">
-            <a:schemeClr val="accent1"/>
-          </a:fillRef>
-          <a:effectRef idx="2">
-            <a:schemeClr val="accent1"/>
-          </a:effectRef>
-          <a:fontRef idx="minor">
-            <a:schemeClr val="lt1"/>
-          </a:fontRef>
-        </p:style>
-        <p:txBody>
-          <a:bodyPr rtlCol="0" anchor="ctr"/>
-          <a:lstStyle/>
-          <a:p>
-            <a:pPr algn="ctr"/>
-          </a:p>
-        </p:txBody>
-      </p:sp>
-      <p:sp>
-        <p:nvSpPr>
-          <p:cNvPr id="212" name="TextBox 211"/>
-          <p:cNvSpPr txBox="1"/>
-          <p:nvPr/>
-        </p:nvSpPr>
-        <p:spPr>
-          <a:xfrm>
-            <a:off x="6254496" y="5961888"/>
-            <a:ext cx="411480" cy="237744"/>
-          </a:xfrm>
-          <a:prstGeom prst="rect">
-            <a:avLst/>
-          </a:prstGeom>
-          <a:noFill/>
-        </p:spPr>
-        <p:txBody>
-          <a:bodyPr wrap="none">
-            <a:spAutoFit/>
-          </a:bodyPr>
-          <a:lstStyle/>
-          <a:p>
-            <a:pPr algn="ctr">
-              <a:defRPr sz="950" b="1">
-                <a:solidFill>
-                  <a:srgbClr val="6B7280"/>
-                </a:solidFill>
-                <a:latin typeface="Calibri"/>
-              </a:defRPr>
-            </a:pPr>
-            <a:r>
-              <a:t>40</a:t>
-            </a:r>
-          </a:p>
-        </p:txBody>
-      </p:sp>
-      <p:sp>
-        <p:nvSpPr>
-          <p:cNvPr id="213" name="TextBox 212"/>
-          <p:cNvSpPr txBox="1"/>
-          <p:nvPr/>
-        </p:nvSpPr>
-        <p:spPr>
-          <a:xfrm>
-            <a:off x="6665976" y="5961888"/>
-            <a:ext cx="1920240" cy="237744"/>
-          </a:xfrm>
-          <a:prstGeom prst="rect">
-            <a:avLst/>
-          </a:prstGeom>
-          <a:noFill/>
-        </p:spPr>
-        <p:txBody>
-          <a:bodyPr wrap="none">
-            <a:spAutoFit/>
-          </a:bodyPr>
-          <a:lstStyle/>
-          <a:p>
-            <a:pPr algn="l">
-              <a:defRPr sz="950" b="1">
-                <a:solidFill>
-                  <a:srgbClr val="111827"/>
-                </a:solidFill>
-                <a:latin typeface="Calibri"/>
-              </a:defRPr>
-            </a:pPr>
-            <a:r>
-              <a:t>Venizelos Papadopulos</a:t>
-            </a:r>
-          </a:p>
-        </p:txBody>
-      </p:sp>
-      <p:sp>
-        <p:nvSpPr>
-          <p:cNvPr id="214" name="TextBox 213"/>
-          <p:cNvSpPr txBox="1"/>
-          <p:nvPr/>
-        </p:nvSpPr>
-        <p:spPr>
-          <a:xfrm>
-            <a:off x="8586216" y="5961888"/>
-            <a:ext cx="2459736" cy="237744"/>
-          </a:xfrm>
-          <a:prstGeom prst="rect">
-            <a:avLst/>
-          </a:prstGeom>
-          <a:noFill/>
-        </p:spPr>
-        <p:txBody>
-          <a:bodyPr wrap="none">
-            <a:spAutoFit/>
-          </a:bodyPr>
-          <a:lstStyle/>
-          <a:p>
-            <a:pPr algn="l">
-              <a:defRPr sz="950" b="0">
-                <a:solidFill>
-                  <a:srgbClr val="6B7280"/>
-                </a:solidFill>
-                <a:latin typeface="Calibri"/>
-              </a:defRPr>
-            </a:pPr>
-            <a:r>
-              <a:t>Exclusive Financial Services, Inc</a:t>
             </a:r>
           </a:p>
         </p:txBody>
@@ -19781,7 +19781,7 @@
               </a:defRPr>
             </a:pPr>
             <a:r>
-              <a:t>$321K</a:t>
+              <a:t>$330K</a:t>
             </a:r>
           </a:p>
         </p:txBody>
@@ -19922,7 +19922,7 @@
               </a:defRPr>
             </a:pPr>
             <a:r>
-              <a:t>Q2 2026 YTD (Apr 1–May 26)  |  Green = on target  |  Amber = at risk  |  Red = behind  |  Goal: ≥40 acts/wk  |  Ranked by composite OKR score</a:t>
+              <a:t>Q2 2026 YTD (Apr 1–May 27)  |  Green = on target  |  Amber = at risk  |  Red = behind  |  Goal: ≥40 acts/wk  |  Ranked by composite OKR score</a:t>
             </a:r>
           </a:p>
         </p:txBody>
@@ -19958,7 +19958,7 @@
               </a:defRPr>
             </a:pPr>
             <a:r>
-              <a:t>Generated May 26, 2026</a:t>
+              <a:t>Generated May 27, 2026</a:t>
             </a:r>
           </a:p>
         </p:txBody>
@@ -20123,7 +20123,7 @@
               </a:defRPr>
             </a:pPr>
             <a:r>
-              <a:t>Q2 2026 YTD (Apr 1–May 26)  |  Green = on target  |  Amber = at risk  |  Red = behind  |  Goal: ≥50 acts/wk  |  Ranked by composite OKR score</a:t>
+              <a:t>Q2 2026 YTD (Apr 1–May 27)  |  Green = on target  |  Amber = at risk  |  Red = behind  |  Goal: ≥50 acts/wk  |  Ranked by composite OKR score</a:t>
             </a:r>
           </a:p>
         </p:txBody>
@@ -20159,7 +20159,7 @@
               </a:defRPr>
             </a:pPr>
             <a:r>
-              <a:t>Generated May 26, 2026</a:t>
+              <a:t>Generated May 27, 2026</a:t>
             </a:r>
           </a:p>
         </p:txBody>
@@ -20324,7 +20324,7 @@
               </a:defRPr>
             </a:pPr>
             <a:r>
-              <a:t>Q2 YTD  |  Apr 1–May 26  |  BDMs Only  |  Goal: 40 acts/wk  |  Emails excluded</a:t>
+              <a:t>Q2 YTD  |  Apr 1–May 27  |  BDMs Only  |  Goal: 40 acts/wk  |  Emails excluded</a:t>
             </a:r>
           </a:p>
         </p:txBody>
@@ -20360,7 +20360,7 @@
               </a:defRPr>
             </a:pPr>
             <a:r>
-              <a:t>Generated May 26, 2026</a:t>
+              <a:t>Generated May 27, 2026</a:t>
             </a:r>
           </a:p>
         </p:txBody>
@@ -20727,7 +20727,7 @@
               </a:defRPr>
             </a:pPr>
             <a:r>
-              <a:t>May 25-26</a:t>
+              <a:t>May 25-27</a:t>
             </a:r>
           </a:p>
         </p:txBody>
@@ -21372,7 +21372,7 @@
             <a:avLst/>
           </a:prstGeom>
           <a:solidFill>
-            <a:srgbClr val="D1D5DB"/>
+            <a:srgbClr val="DC2626"/>
           </a:solidFill>
           <a:ln>
             <a:noFill/>
@@ -21431,7 +21431,7 @@
               </a:defRPr>
             </a:pPr>
             <a:r>
-              <a:t>0</a:t>
+              <a:t>12</a:t>
             </a:r>
           </a:p>
         </p:txBody>
@@ -22119,7 +22119,7 @@
             <a:avLst/>
           </a:prstGeom>
           <a:solidFill>
-            <a:srgbClr val="D1D5DB"/>
+            <a:srgbClr val="DC2626"/>
           </a:solidFill>
           <a:ln>
             <a:noFill/>
@@ -22178,7 +22178,7 @@
               </a:defRPr>
             </a:pPr>
             <a:r>
-              <a:t>0</a:t>
+              <a:t>6</a:t>
             </a:r>
           </a:p>
         </p:txBody>
@@ -23234,7 +23234,7 @@
               </a:defRPr>
             </a:pPr>
             <a:r>
-              <a:t>65</a:t>
+              <a:t>64</a:t>
             </a:r>
           </a:p>
         </p:txBody>
@@ -23629,7 +23629,7 @@
               </a:defRPr>
             </a:pPr>
             <a:r>
-              <a:t>8</a:t>
+              <a:t>20</a:t>
             </a:r>
           </a:p>
         </p:txBody>
@@ -24274,7 +24274,7 @@
             <a:avLst/>
           </a:prstGeom>
           <a:solidFill>
-            <a:srgbClr val="D1D5DB"/>
+            <a:srgbClr val="DC2626"/>
           </a:solidFill>
           <a:ln>
             <a:noFill/>
@@ -24333,7 +24333,7 @@
               </a:defRPr>
             </a:pPr>
             <a:r>
-              <a:t>0</a:t>
+              <a:t>4</a:t>
             </a:r>
           </a:p>
         </p:txBody>
@@ -25021,7 +25021,7 @@
             <a:avLst/>
           </a:prstGeom>
           <a:solidFill>
-            <a:srgbClr val="D1D5DB"/>
+            <a:srgbClr val="DC2626"/>
           </a:solidFill>
           <a:ln>
             <a:noFill/>
@@ -25080,7 +25080,7 @@
               </a:defRPr>
             </a:pPr>
             <a:r>
-              <a:t>0</a:t>
+              <a:t>4</a:t>
             </a:r>
           </a:p>
         </p:txBody>
@@ -25555,7 +25555,7 @@
               </a:defRPr>
             </a:pPr>
             <a:r>
-              <a:t>429</a:t>
+              <a:t>441</a:t>
             </a:r>
           </a:p>
         </p:txBody>
@@ -25627,7 +25627,7 @@
               </a:defRPr>
             </a:pPr>
             <a:r>
-              <a:t>87</a:t>
+              <a:t>91</a:t>
             </a:r>
           </a:p>
         </p:txBody>
@@ -25663,7 +25663,7 @@
               </a:defRPr>
             </a:pPr>
             <a:r>
-              <a:t>476</a:t>
+              <a:t>488</a:t>
             </a:r>
           </a:p>
         </p:txBody>
@@ -25886,7 +25886,7 @@
               </a:defRPr>
             </a:pPr>
             <a:r>
-              <a:t>250</a:t>
+              <a:t>255</a:t>
             </a:r>
           </a:p>
         </p:txBody>
@@ -25922,7 +25922,7 @@
               </a:defRPr>
             </a:pPr>
             <a:r>
-              <a:t>23</a:t>
+              <a:t>24</a:t>
             </a:r>
           </a:p>
         </p:txBody>
@@ -25994,7 +25994,7 @@
               </a:defRPr>
             </a:pPr>
             <a:r>
-              <a:t>273</a:t>
+              <a:t>279</a:t>
             </a:r>
           </a:p>
         </p:txBody>
@@ -26505,7 +26505,7 @@
               </a:defRPr>
             </a:pPr>
             <a:r>
-              <a:t>406</a:t>
+              <a:t>418</a:t>
             </a:r>
           </a:p>
         </p:txBody>
@@ -26541,7 +26541,7 @@
               </a:defRPr>
             </a:pPr>
             <a:r>
-              <a:t>21</a:t>
+              <a:t>20</a:t>
             </a:r>
           </a:p>
         </p:txBody>
@@ -26577,7 +26577,7 @@
               </a:defRPr>
             </a:pPr>
             <a:r>
-              <a:t>48</a:t>
+              <a:t>52</a:t>
             </a:r>
           </a:p>
         </p:txBody>
@@ -26613,7 +26613,7 @@
               </a:defRPr>
             </a:pPr>
             <a:r>
-              <a:t>427</a:t>
+              <a:t>438</a:t>
             </a:r>
           </a:p>
         </p:txBody>
@@ -26649,7 +26649,7 @@
               </a:defRPr>
             </a:pPr>
             <a:r>
-              <a:t>52.9</a:t>
+              <a:t>52.7</a:t>
             </a:r>
           </a:p>
         </p:txBody>
@@ -26793,7 +26793,7 @@
               </a:defRPr>
             </a:pPr>
             <a:r>
-              <a:t>243</a:t>
+              <a:t>247</a:t>
             </a:r>
           </a:p>
         </p:txBody>
@@ -26865,7 +26865,7 @@
               </a:defRPr>
             </a:pPr>
             <a:r>
-              <a:t>47</a:t>
+              <a:t>48</a:t>
             </a:r>
           </a:p>
         </p:txBody>
@@ -26901,7 +26901,7 @@
               </a:defRPr>
             </a:pPr>
             <a:r>
-              <a:t>259</a:t>
+              <a:t>263</a:t>
             </a:r>
           </a:p>
         </p:txBody>
@@ -27124,7 +27124,7 @@
               </a:defRPr>
             </a:pPr>
             <a:r>
-              <a:t>109</a:t>
+              <a:t>113</a:t>
             </a:r>
           </a:p>
         </p:txBody>
@@ -27232,7 +27232,7 @@
               </a:defRPr>
             </a:pPr>
             <a:r>
-              <a:t>124</a:t>
+              <a:t>128</a:t>
             </a:r>
           </a:p>
         </p:txBody>
@@ -27445,7 +27445,7 @@
               </a:defRPr>
             </a:pPr>
             <a:r>
-              <a:t>Q2 YTD  |  Apr 1–May 26  |  BDAs Only  |  Goal: 50 acts/wk  |  Emails excluded</a:t>
+              <a:t>Q2 YTD  |  Apr 1–May 27  |  BDAs Only  |  Goal: 50 acts/wk  |  Emails excluded</a:t>
             </a:r>
           </a:p>
         </p:txBody>
@@ -27481,7 +27481,7 @@
               </a:defRPr>
             </a:pPr>
             <a:r>
-              <a:t>Generated May 26, 2026</a:t>
+              <a:t>Generated May 27, 2026</a:t>
             </a:r>
           </a:p>
         </p:txBody>
@@ -27848,7 +27848,7 @@
               </a:defRPr>
             </a:pPr>
             <a:r>
-              <a:t>May 25-26</a:t>
+              <a:t>May 25-27</a:t>
             </a:r>
           </a:p>
         </p:txBody>
@@ -28552,7 +28552,7 @@
               </a:defRPr>
             </a:pPr>
             <a:r>
-              <a:t>1</a:t>
+              <a:t>25</a:t>
             </a:r>
           </a:p>
         </p:txBody>
@@ -29168,7 +29168,7 @@
             <a:avLst/>
           </a:prstGeom>
           <a:solidFill>
-            <a:srgbClr val="D1D5DB"/>
+            <a:srgbClr val="DC2626"/>
           </a:solidFill>
           <a:ln>
             <a:noFill/>
@@ -29227,7 +29227,7 @@
               </a:defRPr>
             </a:pPr>
             <a:r>
-              <a:t>0</a:t>
+              <a:t>10</a:t>
             </a:r>
           </a:p>
         </p:txBody>
@@ -29263,7 +29263,7 @@
               </a:defRPr>
             </a:pPr>
             <a:r>
-              <a:t>62%</a:t>
+              <a:t>65%</a:t>
             </a:r>
           </a:p>
         </p:txBody>
@@ -29800,7 +29800,7 @@
             <a:avLst/>
           </a:prstGeom>
           <a:solidFill>
-            <a:srgbClr val="D1D5DB"/>
+            <a:srgbClr val="DC2626"/>
           </a:solidFill>
           <a:ln>
             <a:noFill/>
@@ -29859,7 +29859,7 @@
               </a:defRPr>
             </a:pPr>
             <a:r>
-              <a:t>0</a:t>
+              <a:t>10</a:t>
             </a:r>
           </a:p>
         </p:txBody>
@@ -29895,7 +29895,7 @@
               </a:defRPr>
             </a:pPr>
             <a:r>
-              <a:t>68%</a:t>
+              <a:t>72%</a:t>
             </a:r>
           </a:p>
         </p:txBody>
@@ -30534,7 +30534,7 @@
               </a:defRPr>
             </a:pPr>
             <a:r>
-              <a:t>1</a:t>
+              <a:t>12</a:t>
             </a:r>
           </a:p>
         </p:txBody>
@@ -30570,7 +30570,7 @@
               </a:defRPr>
             </a:pPr>
             <a:r>
-              <a:t>78%</a:t>
+              <a:t>82%</a:t>
             </a:r>
           </a:p>
         </p:txBody>
@@ -31179,7 +31179,7 @@
             <a:avLst/>
           </a:prstGeom>
           <a:solidFill>
-            <a:srgbClr val="D1D5DB"/>
+            <a:srgbClr val="DC2626"/>
           </a:solidFill>
           <a:ln>
             <a:noFill/>
@@ -31238,7 +31238,7 @@
               </a:defRPr>
             </a:pPr>
             <a:r>
-              <a:t>0</a:t>
+              <a:t>11</a:t>
             </a:r>
           </a:p>
         </p:txBody>
@@ -31713,7 +31713,7 @@
               </a:defRPr>
             </a:pPr>
             <a:r>
-              <a:t>351</a:t>
+              <a:t>375</a:t>
             </a:r>
           </a:p>
         </p:txBody>
@@ -31821,7 +31821,7 @@
               </a:defRPr>
             </a:pPr>
             <a:r>
-              <a:t>361</a:t>
+              <a:t>385</a:t>
             </a:r>
           </a:p>
         </p:txBody>
@@ -32044,7 +32044,7 @@
               </a:defRPr>
             </a:pPr>
             <a:r>
-              <a:t>175</a:t>
+              <a:t>183</a:t>
             </a:r>
           </a:p>
         </p:txBody>
@@ -32080,7 +32080,7 @@
               </a:defRPr>
             </a:pPr>
             <a:r>
-              <a:t>10</a:t>
+              <a:t>12</a:t>
             </a:r>
           </a:p>
         </p:txBody>
@@ -32116,7 +32116,7 @@
               </a:defRPr>
             </a:pPr>
             <a:r>
-              <a:t>12</a:t>
+              <a:t>14</a:t>
             </a:r>
           </a:p>
         </p:txBody>
@@ -32152,7 +32152,7 @@
               </a:defRPr>
             </a:pPr>
             <a:r>
-              <a:t>185</a:t>
+              <a:t>195</a:t>
             </a:r>
           </a:p>
         </p:txBody>
@@ -32188,7 +32188,7 @@
               </a:defRPr>
             </a:pPr>
             <a:r>
-              <a:t>30.8</a:t>
+              <a:t>32.5</a:t>
             </a:r>
           </a:p>
         </p:txBody>
@@ -32224,7 +32224,7 @@
               </a:defRPr>
             </a:pPr>
             <a:r>
-              <a:t>62%</a:t>
+              <a:t>65%</a:t>
             </a:r>
           </a:p>
         </p:txBody>
@@ -32332,7 +32332,7 @@
               </a:defRPr>
             </a:pPr>
             <a:r>
-              <a:t>194</a:t>
+              <a:t>204</a:t>
             </a:r>
           </a:p>
         </p:txBody>
@@ -32404,7 +32404,7 @@
               </a:defRPr>
             </a:pPr>
             <a:r>
-              <a:t>29</a:t>
+              <a:t>30</a:t>
             </a:r>
           </a:p>
         </p:txBody>
@@ -32440,7 +32440,7 @@
               </a:defRPr>
             </a:pPr>
             <a:r>
-              <a:t>205</a:t>
+              <a:t>215</a:t>
             </a:r>
           </a:p>
         </p:txBody>
@@ -32476,7 +32476,7 @@
               </a:defRPr>
             </a:pPr>
             <a:r>
-              <a:t>34.2</a:t>
+              <a:t>35.8</a:t>
             </a:r>
           </a:p>
         </p:txBody>
@@ -32512,7 +32512,7 @@
               </a:defRPr>
             </a:pPr>
             <a:r>
-              <a:t>68%</a:t>
+              <a:t>72%</a:t>
             </a:r>
           </a:p>
         </p:txBody>
@@ -32663,7 +32663,7 @@
               </a:defRPr>
             </a:pPr>
             <a:r>
-              <a:t>222</a:t>
+              <a:t>233</a:t>
             </a:r>
           </a:p>
         </p:txBody>
@@ -32771,7 +32771,7 @@
               </a:defRPr>
             </a:pPr>
             <a:r>
-              <a:t>235</a:t>
+              <a:t>246</a:t>
             </a:r>
           </a:p>
         </p:txBody>
@@ -32807,7 +32807,7 @@
               </a:defRPr>
             </a:pPr>
             <a:r>
-              <a:t>39.2</a:t>
+              <a:t>41.0</a:t>
             </a:r>
           </a:p>
         </p:txBody>
@@ -32843,7 +32843,7 @@
               </a:defRPr>
             </a:pPr>
             <a:r>
-              <a:t>78%</a:t>
+              <a:t>82%</a:t>
             </a:r>
           </a:p>
         </p:txBody>
@@ -32951,7 +32951,7 @@
               </a:defRPr>
             </a:pPr>
             <a:r>
-              <a:t>155</a:t>
+              <a:t>165</a:t>
             </a:r>
           </a:p>
         </p:txBody>
@@ -32987,7 +32987,7 @@
               </a:defRPr>
             </a:pPr>
             <a:r>
-              <a:t>6</a:t>
+              <a:t>7</a:t>
             </a:r>
           </a:p>
         </p:txBody>
@@ -33059,7 +33059,7 @@
               </a:defRPr>
             </a:pPr>
             <a:r>
-              <a:t>161</a:t>
+              <a:t>172</a:t>
             </a:r>
           </a:p>
         </p:txBody>
@@ -33308,7 +33308,7 @@
               </a:defRPr>
             </a:pPr>
             <a:r>
-              <a:t>Generated May 26, 2026</a:t>
+              <a:t>Generated May 27, 2026</a:t>
             </a:r>
           </a:p>
         </p:txBody>
@@ -33999,7 +33999,7 @@
               </a:defRPr>
             </a:pPr>
             <a:r>
-              <a:t>6966</a:t>
+              <a:t>7075</a:t>
             </a:r>
           </a:p>
         </p:txBody>
@@ -34035,7 +34035,7 @@
               </a:defRPr>
             </a:pPr>
             <a:r>
-              <a:t>481</a:t>
+              <a:t>497</a:t>
             </a:r>
           </a:p>
         </p:txBody>
@@ -34071,7 +34071,7 @@
               </a:defRPr>
             </a:pPr>
             <a:r>
-              <a:t>$16.7M</a:t>
+              <a:t>$17.2M</a:t>
             </a:r>
           </a:p>
         </p:txBody>
@@ -34143,7 +34143,7 @@
               </a:defRPr>
             </a:pPr>
             <a:r>
-              <a:t>$4.0M</a:t>
+              <a:t>$4.1M</a:t>
             </a:r>
           </a:p>
         </p:txBody>
@@ -34438,7 +34438,7 @@
               </a:defRPr>
             </a:pPr>
             <a:r>
-              <a:t>3356</a:t>
+              <a:t>3418</a:t>
             </a:r>
           </a:p>
         </p:txBody>
@@ -34474,7 +34474,7 @@
               </a:defRPr>
             </a:pPr>
             <a:r>
-              <a:t>339</a:t>
+              <a:t>347</a:t>
             </a:r>
           </a:p>
         </p:txBody>
@@ -34510,7 +34510,7 @@
               </a:defRPr>
             </a:pPr>
             <a:r>
-              <a:t>$9.4M</a:t>
+              <a:t>$9.8M</a:t>
             </a:r>
           </a:p>
         </p:txBody>
@@ -34834,7 +34834,7 @@
               </a:defRPr>
             </a:pPr>
             <a:r>
-              <a:t>5374</a:t>
+              <a:t>5477</a:t>
             </a:r>
           </a:p>
         </p:txBody>
@@ -34870,7 +34870,7 @@
               </a:defRPr>
             </a:pPr>
             <a:r>
-              <a:t>302</a:t>
+              <a:t>307</a:t>
             </a:r>
           </a:p>
         </p:txBody>
@@ -34906,7 +34906,7 @@
               </a:defRPr>
             </a:pPr>
             <a:r>
-              <a:t>$8.8M</a:t>
+              <a:t>$8.9M</a:t>
             </a:r>
           </a:p>
         </p:txBody>
@@ -35273,7 +35273,7 @@
               </a:defRPr>
             </a:pPr>
             <a:r>
-              <a:t>3244</a:t>
+              <a:t>3317</a:t>
             </a:r>
           </a:p>
         </p:txBody>
@@ -35309,7 +35309,7 @@
               </a:defRPr>
             </a:pPr>
             <a:r>
-              <a:t>255</a:t>
+              <a:t>257</a:t>
             </a:r>
           </a:p>
         </p:txBody>
@@ -35345,7 +35345,7 @@
               </a:defRPr>
             </a:pPr>
             <a:r>
-              <a:t>$6.2M</a:t>
+              <a:t>$6.3M</a:t>
             </a:r>
           </a:p>
         </p:txBody>
@@ -35381,7 +35381,7 @@
               </a:defRPr>
             </a:pPr>
             <a:r>
-              <a:t>$760K</a:t>
+              <a:t>$778K</a:t>
             </a:r>
           </a:p>
         </p:txBody>
@@ -35669,7 +35669,7 @@
               </a:defRPr>
             </a:pPr>
             <a:r>
-              <a:t>1811</a:t>
+              <a:t>1850</a:t>
             </a:r>
           </a:p>
         </p:txBody>
@@ -35705,7 +35705,7 @@
               </a:defRPr>
             </a:pPr>
             <a:r>
-              <a:t>126</a:t>
+              <a:t>130</a:t>
             </a:r>
           </a:p>
         </p:txBody>
@@ -36187,7 +36187,7 @@
               </a:defRPr>
             </a:pPr>
             <a:r>
-              <a:t>3956</a:t>
+              <a:t>4047</a:t>
             </a:r>
           </a:p>
         </p:txBody>
@@ -36223,7 +36223,7 @@
               </a:defRPr>
             </a:pPr>
             <a:r>
-              <a:t>107</a:t>
+              <a:t>110</a:t>
             </a:r>
           </a:p>
         </p:txBody>
@@ -36259,7 +36259,7 @@
               </a:defRPr>
             </a:pPr>
             <a:r>
-              <a:t>$2.6M</a:t>
+              <a:t>$2.7M</a:t>
             </a:r>
           </a:p>
         </p:txBody>
@@ -36583,7 +36583,7 @@
               </a:defRPr>
             </a:pPr>
             <a:r>
-              <a:t>2706</a:t>
+              <a:t>2781</a:t>
             </a:r>
           </a:p>
         </p:txBody>
@@ -36619,7 +36619,7 @@
               </a:defRPr>
             </a:pPr>
             <a:r>
-              <a:t>50</a:t>
+              <a:t>53</a:t>
             </a:r>
           </a:p>
         </p:txBody>
@@ -36655,7 +36655,7 @@
               </a:defRPr>
             </a:pPr>
             <a:r>
-              <a:t>$1.2M</a:t>
+              <a:t>$1.3M</a:t>
             </a:r>
           </a:p>
         </p:txBody>
@@ -37022,7 +37022,7 @@
               </a:defRPr>
             </a:pPr>
             <a:r>
-              <a:t>1569</a:t>
+              <a:t>1610</a:t>
             </a:r>
           </a:p>
         </p:txBody>
@@ -37058,7 +37058,7 @@
               </a:defRPr>
             </a:pPr>
             <a:r>
-              <a:t>33</a:t>
+              <a:t>34</a:t>
             </a:r>
           </a:p>
         </p:txBody>
@@ -37130,7 +37130,7 @@
               </a:defRPr>
             </a:pPr>
             <a:r>
-              <a:t>$24K</a:t>
+              <a:t>$38K</a:t>
             </a:r>
           </a:p>
         </p:txBody>
@@ -37418,7 +37418,7 @@
               </a:defRPr>
             </a:pPr>
             <a:r>
-              <a:t>912</a:t>
+              <a:t>931</a:t>
             </a:r>
           </a:p>
         </p:txBody>
@@ -37454,7 +37454,7 @@
               </a:defRPr>
             </a:pPr>
             <a:r>
-              <a:t>51</a:t>
+              <a:t>50</a:t>
             </a:r>
           </a:p>
         </p:txBody>
@@ -37490,7 +37490,7 @@
               </a:defRPr>
             </a:pPr>
             <a:r>
-              <a:t>$1.1M</a:t>
+              <a:t>$917K</a:t>
             </a:r>
           </a:p>
         </p:txBody>
@@ -37713,7 +37713,7 @@
               </a:defRPr>
             </a:pPr>
             <a:r>
-              <a:t>26</a:t>
+              <a:t>27</a:t>
             </a:r>
           </a:p>
         </p:txBody>
@@ -37749,7 +37749,7 @@
               </a:defRPr>
             </a:pPr>
             <a:r>
-              <a:t>1</a:t>
+              <a:t>0</a:t>
             </a:r>
           </a:p>
         </p:txBody>
@@ -37779,13 +37779,13 @@
             <a:pPr algn="ctr">
               <a:defRPr sz="950" b="1">
                 <a:solidFill>
-                  <a:srgbClr val="D97706"/>
-                </a:solidFill>
-                <a:latin typeface="Calibri"/>
-              </a:defRPr>
-            </a:pPr>
-            <a:r>
-              <a:t>96%</a:t>
+                  <a:srgbClr val="059669"/>
+                </a:solidFill>
+                <a:latin typeface="Calibri"/>
+              </a:defRPr>
+            </a:pPr>
+            <a:r>
+              <a:t>100%</a:t>
             </a:r>
           </a:p>
         </p:txBody>
@@ -37857,7 +37857,7 @@
               </a:defRPr>
             </a:pPr>
             <a:r>
-              <a:t>598</a:t>
+              <a:t>614</a:t>
             </a:r>
           </a:p>
         </p:txBody>
@@ -38195,7 +38195,7 @@
               </a:defRPr>
             </a:pPr>
             <a:r>
-              <a:t>213</a:t>
+              <a:t>214</a:t>
             </a:r>
           </a:p>
         </p:txBody>
@@ -38231,7 +38231,7 @@
               </a:defRPr>
             </a:pPr>
             <a:r>
-              <a:t>213</a:t>
+              <a:t>214</a:t>
             </a:r>
           </a:p>
         </p:txBody>
@@ -38375,7 +38375,7 @@
               </a:defRPr>
             </a:pPr>
             <a:r>
-              <a:t>7458</a:t>
+              <a:t>7626</a:t>
             </a:r>
           </a:p>
         </p:txBody>
@@ -38411,7 +38411,7 @@
               </a:defRPr>
             </a:pPr>
             <a:r>
-              <a:t>288</a:t>
+              <a:t>297</a:t>
             </a:r>
           </a:p>
         </p:txBody>
@@ -38835,7 +38835,7 @@
               </a:defRPr>
             </a:pPr>
             <a:r>
-              <a:t>220 portfolio  ·  206 active  ·  14 dormant</a:t>
+              <a:t>220 portfolio  ·  207 active  ·  13 dormant</a:t>
             </a:r>
           </a:p>
         </p:txBody>
@@ -38993,7 +38993,7 @@
               </a:defRPr>
             </a:pPr>
             <a:r>
-              <a:t>402 portfolio  ·  387 active  ·  96% engaged</a:t>
+              <a:t>402 portfolio  ·  388 active  ·  97% engaged</a:t>
             </a:r>
           </a:p>
         </p:txBody>
@@ -39134,7 +39134,7 @@
               </a:defRPr>
             </a:pPr>
             <a:r>
-              <a:t>Retail-vertical agencies in each rep's HubSpot portfolio with zero 2026 submissions  |  Refreshed 2026-05-26</a:t>
+              <a:t>Retail-vertical agencies in each rep's HubSpot portfolio with zero 2026 submissions  |  Refreshed 2026-05-27</a:t>
             </a:r>
           </a:p>
         </p:txBody>
@@ -39170,7 +39170,7 @@
               </a:defRPr>
             </a:pPr>
             <a:r>
-              <a:t>Generated May 26, 2026</a:t>
+              <a:t>Generated May 27, 2026</a:t>
             </a:r>
           </a:p>
         </p:txBody>
@@ -39242,7 +39242,7 @@
               </a:defRPr>
             </a:pPr>
             <a:r>
-              <a:t>BDAs  (5 reps with dormant agencies)</a:t>
+              <a:t>BDAs  (4 reps with dormant agencies)</a:t>
             </a:r>
           </a:p>
         </p:txBody>
@@ -40832,7 +40832,7 @@
         <p:spPr>
           <a:xfrm>
             <a:off x="6263640" y="4782312"/>
-            <a:ext cx="5623560" cy="676656"/>
+            <a:ext cx="5623560" cy="1014984"/>
           </a:xfrm>
           <a:prstGeom prst="rect">
             <a:avLst/>
@@ -40877,274 +40877,6 @@
         <p:spPr>
           <a:xfrm>
             <a:off x="6263640" y="4782312"/>
-            <a:ext cx="54864" cy="676656"/>
-          </a:xfrm>
-          <a:prstGeom prst="rect">
-            <a:avLst/>
-          </a:prstGeom>
-          <a:solidFill>
-            <a:srgbClr val="D97706"/>
-          </a:solidFill>
-          <a:ln>
-            <a:noFill/>
-          </a:ln>
-        </p:spPr>
-        <p:style>
-          <a:lnRef idx="1">
-            <a:schemeClr val="accent1"/>
-          </a:lnRef>
-          <a:fillRef idx="3">
-            <a:schemeClr val="accent1"/>
-          </a:fillRef>
-          <a:effectRef idx="2">
-            <a:schemeClr val="accent1"/>
-          </a:effectRef>
-          <a:fontRef idx="minor">
-            <a:schemeClr val="lt1"/>
-          </a:fontRef>
-        </p:style>
-        <p:txBody>
-          <a:bodyPr rtlCol="0" anchor="ctr"/>
-          <a:lstStyle/>
-          <a:p>
-            <a:pPr algn="ctr"/>
-          </a:p>
-        </p:txBody>
-      </p:sp>
-      <p:sp>
-        <p:nvSpPr>
-          <p:cNvPr id="52" name="TextBox 51"/>
-          <p:cNvSpPr txBox="1"/>
-          <p:nvPr/>
-        </p:nvSpPr>
-        <p:spPr>
-          <a:xfrm>
-            <a:off x="6409944" y="4818888"/>
-            <a:ext cx="4251960" cy="219456"/>
-          </a:xfrm>
-          <a:prstGeom prst="rect">
-            <a:avLst/>
-          </a:prstGeom>
-          <a:noFill/>
-        </p:spPr>
-        <p:txBody>
-          <a:bodyPr wrap="none">
-            <a:spAutoFit/>
-          </a:bodyPr>
-          <a:lstStyle/>
-          <a:p>
-            <a:pPr algn="l">
-              <a:defRPr sz="1100" b="1">
-                <a:solidFill>
-                  <a:srgbClr val="111827"/>
-                </a:solidFill>
-                <a:latin typeface="Calibri"/>
-              </a:defRPr>
-            </a:pPr>
-            <a:r>
-              <a:t>Taylor Sloan</a:t>
-            </a:r>
-          </a:p>
-        </p:txBody>
-      </p:sp>
-      <p:sp>
-        <p:nvSpPr>
-          <p:cNvPr id="53" name="TextBox 52"/>
-          <p:cNvSpPr txBox="1"/>
-          <p:nvPr/>
-        </p:nvSpPr>
-        <p:spPr>
-          <a:xfrm>
-            <a:off x="10652760" y="4837176"/>
-            <a:ext cx="1097280" cy="201168"/>
-          </a:xfrm>
-          <a:prstGeom prst="rect">
-            <a:avLst/>
-          </a:prstGeom>
-          <a:noFill/>
-        </p:spPr>
-        <p:txBody>
-          <a:bodyPr wrap="none">
-            <a:spAutoFit/>
-          </a:bodyPr>
-          <a:lstStyle/>
-          <a:p>
-            <a:pPr algn="r">
-              <a:defRPr sz="900" b="1">
-                <a:solidFill>
-                  <a:srgbClr val="D97706"/>
-                </a:solidFill>
-                <a:latin typeface="Calibri"/>
-              </a:defRPr>
-            </a:pPr>
-            <a:r>
-              <a:t>1 dormant</a:t>
-            </a:r>
-          </a:p>
-        </p:txBody>
-      </p:sp>
-      <p:sp>
-        <p:nvSpPr>
-          <p:cNvPr id="54" name="TextBox 53"/>
-          <p:cNvSpPr txBox="1"/>
-          <p:nvPr/>
-        </p:nvSpPr>
-        <p:spPr>
-          <a:xfrm>
-            <a:off x="6409944" y="5020056"/>
-            <a:ext cx="5349240" cy="146304"/>
-          </a:xfrm>
-          <a:prstGeom prst="rect">
-            <a:avLst/>
-          </a:prstGeom>
-          <a:noFill/>
-        </p:spPr>
-        <p:txBody>
-          <a:bodyPr wrap="none">
-            <a:spAutoFit/>
-          </a:bodyPr>
-          <a:lstStyle/>
-          <a:p>
-            <a:pPr algn="l">
-              <a:defRPr sz="900" b="0">
-                <a:solidFill>
-                  <a:srgbClr val="6B7280"/>
-                </a:solidFill>
-                <a:latin typeface="Calibri"/>
-              </a:defRPr>
-            </a:pPr>
-            <a:r>
-              <a:t>1 of 27 agencies dormant</a:t>
-            </a:r>
-          </a:p>
-        </p:txBody>
-      </p:sp>
-      <p:sp>
-        <p:nvSpPr>
-          <p:cNvPr id="55" name="TextBox 54"/>
-          <p:cNvSpPr txBox="1"/>
-          <p:nvPr/>
-        </p:nvSpPr>
-        <p:spPr>
-          <a:xfrm>
-            <a:off x="6446520" y="5184648"/>
-            <a:ext cx="91440" cy="164592"/>
-          </a:xfrm>
-          <a:prstGeom prst="rect">
-            <a:avLst/>
-          </a:prstGeom>
-          <a:noFill/>
-        </p:spPr>
-        <p:txBody>
-          <a:bodyPr wrap="none">
-            <a:spAutoFit/>
-          </a:bodyPr>
-          <a:lstStyle/>
-          <a:p>
-            <a:pPr algn="l">
-              <a:defRPr sz="900" b="1">
-                <a:solidFill>
-                  <a:srgbClr val="D97706"/>
-                </a:solidFill>
-                <a:latin typeface="Calibri"/>
-              </a:defRPr>
-            </a:pPr>
-            <a:r>
-              <a:t>•</a:t>
-            </a:r>
-          </a:p>
-        </p:txBody>
-      </p:sp>
-      <p:sp>
-        <p:nvSpPr>
-          <p:cNvPr id="56" name="TextBox 55"/>
-          <p:cNvSpPr txBox="1"/>
-          <p:nvPr/>
-        </p:nvSpPr>
-        <p:spPr>
-          <a:xfrm>
-            <a:off x="6574536" y="5166360"/>
-            <a:ext cx="5221224" cy="182880"/>
-          </a:xfrm>
-          <a:prstGeom prst="rect">
-            <a:avLst/>
-          </a:prstGeom>
-          <a:noFill/>
-        </p:spPr>
-        <p:txBody>
-          <a:bodyPr wrap="none">
-            <a:spAutoFit/>
-          </a:bodyPr>
-          <a:lstStyle/>
-          <a:p>
-            <a:pPr algn="l">
-              <a:defRPr sz="1000" b="0">
-                <a:solidFill>
-                  <a:srgbClr val="374151"/>
-                </a:solidFill>
-                <a:latin typeface="Calibri"/>
-              </a:defRPr>
-            </a:pPr>
-            <a:r>
-              <a:t>Titanic Insurance Services Inc.</a:t>
-            </a:r>
-          </a:p>
-        </p:txBody>
-      </p:sp>
-      <p:sp>
-        <p:nvSpPr>
-          <p:cNvPr id="57" name="Rectangle 56"/>
-          <p:cNvSpPr/>
-          <p:nvPr/>
-        </p:nvSpPr>
-        <p:spPr>
-          <a:xfrm>
-            <a:off x="6263640" y="5550408"/>
-            <a:ext cx="5623560" cy="1014984"/>
-          </a:xfrm>
-          <a:prstGeom prst="rect">
-            <a:avLst/>
-          </a:prstGeom>
-          <a:solidFill>
-            <a:srgbClr val="F9FAFB"/>
-          </a:solidFill>
-          <a:ln>
-            <a:solidFill>
-              <a:srgbClr val="E5E7EB"/>
-            </a:solidFill>
-          </a:ln>
-        </p:spPr>
-        <p:style>
-          <a:lnRef idx="1">
-            <a:schemeClr val="accent1"/>
-          </a:lnRef>
-          <a:fillRef idx="3">
-            <a:schemeClr val="accent1"/>
-          </a:fillRef>
-          <a:effectRef idx="2">
-            <a:schemeClr val="accent1"/>
-          </a:effectRef>
-          <a:fontRef idx="minor">
-            <a:schemeClr val="lt1"/>
-          </a:fontRef>
-        </p:style>
-        <p:txBody>
-          <a:bodyPr rtlCol="0" anchor="ctr"/>
-          <a:lstStyle/>
-          <a:p>
-            <a:pPr algn="ctr"/>
-          </a:p>
-        </p:txBody>
-      </p:sp>
-      <p:sp>
-        <p:nvSpPr>
-          <p:cNvPr id="58" name="Rectangle 57"/>
-          <p:cNvSpPr/>
-          <p:nvPr/>
-        </p:nvSpPr>
-        <p:spPr>
-          <a:xfrm>
-            <a:off x="6263640" y="5550408"/>
             <a:ext cx="54864" cy="1014984"/>
           </a:xfrm>
           <a:prstGeom prst="rect">
@@ -41181,13 +40913,13 @@
       </p:sp>
       <p:sp>
         <p:nvSpPr>
-          <p:cNvPr id="59" name="TextBox 58"/>
-          <p:cNvSpPr txBox="1"/>
-          <p:nvPr/>
-        </p:nvSpPr>
-        <p:spPr>
-          <a:xfrm>
-            <a:off x="6409944" y="5586984"/>
+          <p:cNvPr id="52" name="TextBox 51"/>
+          <p:cNvSpPr txBox="1"/>
+          <p:nvPr/>
+        </p:nvSpPr>
+        <p:spPr>
+          <a:xfrm>
+            <a:off x="6409944" y="4818888"/>
             <a:ext cx="4251960" cy="219456"/>
           </a:xfrm>
           <a:prstGeom prst="rect">
@@ -41217,13 +40949,13 @@
       </p:sp>
       <p:sp>
         <p:nvSpPr>
-          <p:cNvPr id="60" name="TextBox 59"/>
-          <p:cNvSpPr txBox="1"/>
-          <p:nvPr/>
-        </p:nvSpPr>
-        <p:spPr>
-          <a:xfrm>
-            <a:off x="10652760" y="5605272"/>
+          <p:cNvPr id="53" name="TextBox 52"/>
+          <p:cNvSpPr txBox="1"/>
+          <p:nvPr/>
+        </p:nvSpPr>
+        <p:spPr>
+          <a:xfrm>
+            <a:off x="10652760" y="4837176"/>
             <a:ext cx="1097280" cy="201168"/>
           </a:xfrm>
           <a:prstGeom prst="rect">
@@ -41253,13 +40985,13 @@
       </p:sp>
       <p:sp>
         <p:nvSpPr>
-          <p:cNvPr id="61" name="TextBox 60"/>
-          <p:cNvSpPr txBox="1"/>
-          <p:nvPr/>
-        </p:nvSpPr>
-        <p:spPr>
-          <a:xfrm>
-            <a:off x="6409944" y="5788152"/>
+          <p:cNvPr id="54" name="TextBox 53"/>
+          <p:cNvSpPr txBox="1"/>
+          <p:nvPr/>
+        </p:nvSpPr>
+        <p:spPr>
+          <a:xfrm>
+            <a:off x="6409944" y="5020056"/>
             <a:ext cx="5349240" cy="146304"/>
           </a:xfrm>
           <a:prstGeom prst="rect">
@@ -41289,13 +41021,13 @@
       </p:sp>
       <p:sp>
         <p:nvSpPr>
-          <p:cNvPr id="62" name="TextBox 61"/>
-          <p:cNvSpPr txBox="1"/>
-          <p:nvPr/>
-        </p:nvSpPr>
-        <p:spPr>
-          <a:xfrm>
-            <a:off x="6446520" y="5952744"/>
+          <p:cNvPr id="55" name="TextBox 54"/>
+          <p:cNvSpPr txBox="1"/>
+          <p:nvPr/>
+        </p:nvSpPr>
+        <p:spPr>
+          <a:xfrm>
+            <a:off x="6446520" y="5184648"/>
             <a:ext cx="91440" cy="164592"/>
           </a:xfrm>
           <a:prstGeom prst="rect">
@@ -41325,13 +41057,13 @@
       </p:sp>
       <p:sp>
         <p:nvSpPr>
-          <p:cNvPr id="63" name="TextBox 62"/>
-          <p:cNvSpPr txBox="1"/>
-          <p:nvPr/>
-        </p:nvSpPr>
-        <p:spPr>
-          <a:xfrm>
-            <a:off x="6574536" y="5934456"/>
+          <p:cNvPr id="56" name="TextBox 55"/>
+          <p:cNvSpPr txBox="1"/>
+          <p:nvPr/>
+        </p:nvSpPr>
+        <p:spPr>
+          <a:xfrm>
+            <a:off x="6574536" y="5166360"/>
             <a:ext cx="5221224" cy="182880"/>
           </a:xfrm>
           <a:prstGeom prst="rect">
@@ -41361,13 +41093,13 @@
       </p:sp>
       <p:sp>
         <p:nvSpPr>
-          <p:cNvPr id="64" name="TextBox 63"/>
-          <p:cNvSpPr txBox="1"/>
-          <p:nvPr/>
-        </p:nvSpPr>
-        <p:spPr>
-          <a:xfrm>
-            <a:off x="6446520" y="6126480"/>
+          <p:cNvPr id="57" name="TextBox 56"/>
+          <p:cNvSpPr txBox="1"/>
+          <p:nvPr/>
+        </p:nvSpPr>
+        <p:spPr>
+          <a:xfrm>
+            <a:off x="6446520" y="5358384"/>
             <a:ext cx="91440" cy="164592"/>
           </a:xfrm>
           <a:prstGeom prst="rect">
@@ -41397,13 +41129,13 @@
       </p:sp>
       <p:sp>
         <p:nvSpPr>
-          <p:cNvPr id="65" name="TextBox 64"/>
-          <p:cNvSpPr txBox="1"/>
-          <p:nvPr/>
-        </p:nvSpPr>
-        <p:spPr>
-          <a:xfrm>
-            <a:off x="6574536" y="6108192"/>
+          <p:cNvPr id="58" name="TextBox 57"/>
+          <p:cNvSpPr txBox="1"/>
+          <p:nvPr/>
+        </p:nvSpPr>
+        <p:spPr>
+          <a:xfrm>
+            <a:off x="6574536" y="5340096"/>
             <a:ext cx="5221224" cy="182880"/>
           </a:xfrm>
           <a:prstGeom prst="rect">
@@ -41433,13 +41165,13 @@
       </p:sp>
       <p:sp>
         <p:nvSpPr>
-          <p:cNvPr id="66" name="TextBox 65"/>
-          <p:cNvSpPr txBox="1"/>
-          <p:nvPr/>
-        </p:nvSpPr>
-        <p:spPr>
-          <a:xfrm>
-            <a:off x="6446520" y="6300216"/>
+          <p:cNvPr id="59" name="TextBox 58"/>
+          <p:cNvSpPr txBox="1"/>
+          <p:nvPr/>
+        </p:nvSpPr>
+        <p:spPr>
+          <a:xfrm>
+            <a:off x="6446520" y="5532120"/>
             <a:ext cx="91440" cy="164592"/>
           </a:xfrm>
           <a:prstGeom prst="rect">
@@ -41469,13 +41201,13 @@
       </p:sp>
       <p:sp>
         <p:nvSpPr>
-          <p:cNvPr id="67" name="TextBox 66"/>
-          <p:cNvSpPr txBox="1"/>
-          <p:nvPr/>
-        </p:nvSpPr>
-        <p:spPr>
-          <a:xfrm>
-            <a:off x="6574536" y="6281928"/>
+          <p:cNvPr id="60" name="TextBox 59"/>
+          <p:cNvSpPr txBox="1"/>
+          <p:nvPr/>
+        </p:nvSpPr>
+        <p:spPr>
+          <a:xfrm>
+            <a:off x="6574536" y="5513832"/>
             <a:ext cx="5221224" cy="182880"/>
           </a:xfrm>
           <a:prstGeom prst="rect">
@@ -41505,7 +41237,7 @@
       </p:sp>
       <p:sp>
         <p:nvSpPr>
-          <p:cNvPr id="68" name="TextBox 67"/>
+          <p:cNvPr id="61" name="TextBox 60"/>
           <p:cNvSpPr txBox="1"/>
           <p:nvPr/>
         </p:nvSpPr>
@@ -41534,7 +41266,7 @@
               </a:defRPr>
             </a:pPr>
             <a:r>
-              <a:t>+ 4 reps with 100% active portfolios are not shown (zero dormant agencies).</a:t>
+              <a:t>+ 5 reps with 100% active portfolios are not shown (zero dormant agencies).</a:t>
             </a:r>
           </a:p>
         </p:txBody>
@@ -41711,7 +41443,7 @@
               </a:defRPr>
             </a:pPr>
             <a:r>
-              <a:t>Generated May 26, 2026</a:t>
+              <a:t>Generated May 27, 2026</a:t>
             </a:r>
           </a:p>
         </p:txBody>
@@ -41876,7 +41608,7 @@
               </a:defRPr>
             </a:pPr>
             <a:r>
-              <a:t>Ranked by Q2 GWP (left) and Q2 Submissions (right)  ·  Mint-shaded row = new vs last week’s deck  ·  Apr 1–May 26</a:t>
+              <a:t>Ranked by Q2 GWP (left) and Q2 Submissions (right)  ·  Mint-shaded row = new vs last week’s deck  ·  Apr 1–May 27</a:t>
             </a:r>
           </a:p>
         </p:txBody>
@@ -41912,7 +41644,7 @@
               </a:defRPr>
             </a:pPr>
             <a:r>
-              <a:t>Generated May 26, 2026</a:t>
+              <a:t>Generated May 27, 2026</a:t>
             </a:r>
           </a:p>
         </p:txBody>
@@ -42365,7 +42097,7 @@
               </a:defRPr>
             </a:pPr>
             <a:r>
-              <a:t>$3.2M</a:t>
+              <a:t>$3.1M</a:t>
             </a:r>
           </a:p>
         </p:txBody>
@@ -42552,7 +42284,7 @@
               </a:defRPr>
             </a:pPr>
             <a:r>
-              <a:t>$2.0M</a:t>
+              <a:t>$2.2M</a:t>
             </a:r>
           </a:p>
         </p:txBody>
@@ -42739,7 +42471,7 @@
               </a:defRPr>
             </a:pPr>
             <a:r>
-              <a:t>$1.9M</a:t>
+              <a:t>$2.1M</a:t>
             </a:r>
           </a:p>
         </p:txBody>
@@ -42926,7 +42658,7 @@
               </a:defRPr>
             </a:pPr>
             <a:r>
-              <a:t>$1.8M</a:t>
+              <a:t>$1.9M</a:t>
             </a:r>
           </a:p>
         </p:txBody>
@@ -43113,7 +42845,7 @@
               </a:defRPr>
             </a:pPr>
             <a:r>
-              <a:t>$1.7M</a:t>
+              <a:t>$1.8M</a:t>
             </a:r>
           </a:p>
         </p:txBody>
@@ -43300,7 +43032,7 @@
               </a:defRPr>
             </a:pPr>
             <a:r>
-              <a:t>$1.5M</a:t>
+              <a:t>$1.6M</a:t>
             </a:r>
           </a:p>
         </p:txBody>
@@ -43674,7 +43406,7 @@
               </a:defRPr>
             </a:pPr>
             <a:r>
-              <a:t>$1.5M</a:t>
+              <a:t>$1.4M</a:t>
             </a:r>
           </a:p>
         </p:txBody>
@@ -43789,7 +43521,7 @@
               </a:defRPr>
             </a:pPr>
             <a:r>
-              <a:t>Derek J.</a:t>
+              <a:t>Derrick L.</a:t>
             </a:r>
           </a:p>
         </p:txBody>
@@ -43825,7 +43557,7 @@
               </a:defRPr>
             </a:pPr>
             <a:r>
-              <a:t>CASCADE INSURANCE SERVICES INC DBA: CASC…</a:t>
+              <a:t>AMC Agents LLC</a:t>
             </a:r>
           </a:p>
         </p:txBody>
@@ -43976,7 +43708,7 @@
               </a:defRPr>
             </a:pPr>
             <a:r>
-              <a:t>Derrick L.</a:t>
+              <a:t>Derek J.</a:t>
             </a:r>
           </a:p>
         </p:txBody>
@@ -44012,7 +43744,7 @@
               </a:defRPr>
             </a:pPr>
             <a:r>
-              <a:t>AMC Agents LLC</a:t>
+              <a:t>CASCADE INSURANCE SERVICES INC DBA: CASC…</a:t>
             </a:r>
           </a:p>
         </p:txBody>
@@ -44350,7 +44082,7 @@
               </a:defRPr>
             </a:pPr>
             <a:r>
-              <a:t>Alexis B.</a:t>
+              <a:t>Derek J.</a:t>
             </a:r>
           </a:p>
         </p:txBody>
@@ -44386,7 +44118,7 @@
               </a:defRPr>
             </a:pPr>
             <a:r>
-              <a:t>A.S.I.A Inc</a:t>
+              <a:t>Surefire Insurance Agency Corp.</a:t>
             </a:r>
           </a:p>
         </p:txBody>
@@ -44422,7 +44154,7 @@
               </a:defRPr>
             </a:pPr>
             <a:r>
-              <a:t>$1.1M</a:t>
+              <a:t>$1.0M</a:t>
             </a:r>
           </a:p>
         </p:txBody>
@@ -44537,7 +44269,7 @@
               </a:defRPr>
             </a:pPr>
             <a:r>
-              <a:t>Derek J.</a:t>
+              <a:t>Alexis B.</a:t>
             </a:r>
           </a:p>
         </p:txBody>
@@ -44573,7 +44305,7 @@
               </a:defRPr>
             </a:pPr>
             <a:r>
-              <a:t>Surefire Insurance Agency Corp.</a:t>
+              <a:t>A.S.I.A Inc</a:t>
             </a:r>
           </a:p>
         </p:txBody>
@@ -44724,7 +44456,7 @@
               </a:defRPr>
             </a:pPr>
             <a:r>
-              <a:t>Ron D.</a:t>
+              <a:t>Kurt B.</a:t>
             </a:r>
           </a:p>
         </p:txBody>
@@ -44760,7 +44492,7 @@
               </a:defRPr>
             </a:pPr>
             <a:r>
-              <a:t>Valion Security LLC</a:t>
+              <a:t>Fino Services LLC</a:t>
             </a:r>
           </a:p>
         </p:txBody>
@@ -44796,7 +44528,7 @@
               </a:defRPr>
             </a:pPr>
             <a:r>
-              <a:t>$982K</a:t>
+              <a:t>$966K</a:t>
             </a:r>
           </a:p>
         </p:txBody>
@@ -44911,7 +44643,7 @@
               </a:defRPr>
             </a:pPr>
             <a:r>
-              <a:t>Kurt B.</a:t>
+              <a:t>Ron D.</a:t>
             </a:r>
           </a:p>
         </p:txBody>
@@ -44947,7 +44679,7 @@
               </a:defRPr>
             </a:pPr>
             <a:r>
-              <a:t>Fino Services LLC</a:t>
+              <a:t>Valion Security LLC</a:t>
             </a:r>
           </a:p>
         </p:txBody>
@@ -44983,7 +44715,7 @@
               </a:defRPr>
             </a:pPr>
             <a:r>
-              <a:t>$934K</a:t>
+              <a:t>$957K</a:t>
             </a:r>
           </a:p>
         </p:txBody>
@@ -45170,7 +44902,7 @@
               </a:defRPr>
             </a:pPr>
             <a:r>
-              <a:t>$828K</a:t>
+              <a:t>$831K</a:t>
             </a:r>
           </a:p>
         </p:txBody>
@@ -45321,7 +45053,7 @@
               </a:defRPr>
             </a:pPr>
             <a:r>
-              <a:t>Vintage Insurance Agency Inc (The)</a:t>
+              <a:t>Ewall Insurance Company</a:t>
             </a:r>
           </a:p>
         </p:txBody>
@@ -45357,7 +45089,7 @@
               </a:defRPr>
             </a:pPr>
             <a:r>
-              <a:t>$753K</a:t>
+              <a:t>$774K</a:t>
             </a:r>
           </a:p>
         </p:txBody>
@@ -45508,7 +45240,7 @@
               </a:defRPr>
             </a:pPr>
             <a:r>
-              <a:t>Ewall Insurance Company</a:t>
+              <a:t>Vintage Insurance Agency Inc (The)</a:t>
             </a:r>
           </a:p>
         </p:txBody>
@@ -45544,7 +45276,7 @@
               </a:defRPr>
             </a:pPr>
             <a:r>
-              <a:t>$743K</a:t>
+              <a:t>$723K</a:t>
             </a:r>
           </a:p>
         </p:txBody>
@@ -45751,7 +45483,7 @@
             <a:avLst/>
           </a:prstGeom>
           <a:solidFill>
-            <a:srgbClr val="F9FAFB"/>
+            <a:srgbClr val="D1FAE5"/>
           </a:solidFill>
           <a:ln>
             <a:noFill/>
@@ -45846,7 +45578,7 @@
               </a:defRPr>
             </a:pPr>
             <a:r>
-              <a:t>Derek J.</a:t>
+              <a:t>Christopher H.</a:t>
             </a:r>
           </a:p>
         </p:txBody>
@@ -45882,7 +45614,7 @@
               </a:defRPr>
             </a:pPr>
             <a:r>
-              <a:t>Sedge Insurance Agency LLC</a:t>
+              <a:t>Velocity Insurance Multiservices LLC</a:t>
             </a:r>
           </a:p>
         </p:txBody>
@@ -45918,7 +45650,7 @@
               </a:defRPr>
             </a:pPr>
             <a:r>
-              <a:t>$582K</a:t>
+              <a:t>$598K</a:t>
             </a:r>
           </a:p>
         </p:txBody>
@@ -46371,7 +46103,7 @@
               </a:defRPr>
             </a:pPr>
             <a:r>
-              <a:t>2195</a:t>
+              <a:t>2224</a:t>
             </a:r>
           </a:p>
         </p:txBody>
@@ -46558,7 +46290,7 @@
               </a:defRPr>
             </a:pPr>
             <a:r>
-              <a:t>2061</a:t>
+              <a:t>2096</a:t>
             </a:r>
           </a:p>
         </p:txBody>
@@ -46745,7 +46477,7 @@
               </a:defRPr>
             </a:pPr>
             <a:r>
-              <a:t>1544</a:t>
+              <a:t>1578</a:t>
             </a:r>
           </a:p>
         </p:txBody>
@@ -46932,7 +46664,7 @@
               </a:defRPr>
             </a:pPr>
             <a:r>
-              <a:t>1296</a:t>
+              <a:t>1323</a:t>
             </a:r>
           </a:p>
         </p:txBody>
@@ -47119,7 +46851,7 @@
               </a:defRPr>
             </a:pPr>
             <a:r>
-              <a:t>1175</a:t>
+              <a:t>1184</a:t>
             </a:r>
           </a:p>
         </p:txBody>
@@ -47306,7 +47038,7 @@
               </a:defRPr>
             </a:pPr>
             <a:r>
-              <a:t>1009</a:t>
+              <a:t>1030</a:t>
             </a:r>
           </a:p>
         </p:txBody>
@@ -47493,7 +47225,7 @@
               </a:defRPr>
             </a:pPr>
             <a:r>
-              <a:t>976</a:t>
+              <a:t>1001</a:t>
             </a:r>
           </a:p>
         </p:txBody>
@@ -47680,7 +47412,7 @@
               </a:defRPr>
             </a:pPr>
             <a:r>
-              <a:t>928</a:t>
+              <a:t>956</a:t>
             </a:r>
           </a:p>
         </p:txBody>
@@ -47867,7 +47599,7 @@
               </a:defRPr>
             </a:pPr>
             <a:r>
-              <a:t>691</a:t>
+              <a:t>705</a:t>
             </a:r>
           </a:p>
         </p:txBody>
@@ -48054,7 +47786,7 @@
               </a:defRPr>
             </a:pPr>
             <a:r>
-              <a:t>554</a:t>
+              <a:t>566</a:t>
             </a:r>
           </a:p>
         </p:txBody>
@@ -48241,7 +47973,7 @@
               </a:defRPr>
             </a:pPr>
             <a:r>
-              <a:t>527</a:t>
+              <a:t>533</a:t>
             </a:r>
           </a:p>
         </p:txBody>
@@ -48428,7 +48160,7 @@
               </a:defRPr>
             </a:pPr>
             <a:r>
-              <a:t>508</a:t>
+              <a:t>517</a:t>
             </a:r>
           </a:p>
         </p:txBody>
@@ -48615,7 +48347,7 @@
               </a:defRPr>
             </a:pPr>
             <a:r>
-              <a:t>450</a:t>
+              <a:t>463</a:t>
             </a:r>
           </a:p>
         </p:txBody>
@@ -48802,7 +48534,7 @@
               </a:defRPr>
             </a:pPr>
             <a:r>
-              <a:t>433</a:t>
+              <a:t>446</a:t>
             </a:r>
           </a:p>
         </p:txBody>
@@ -48989,7 +48721,7 @@
               </a:defRPr>
             </a:pPr>
             <a:r>
-              <a:t>383</a:t>
+              <a:t>392</a:t>
             </a:r>
           </a:p>
         </p:txBody>
@@ -49176,7 +48908,7 @@
               </a:defRPr>
             </a:pPr>
             <a:r>
-              <a:t>368</a:t>
+              <a:t>375</a:t>
             </a:r>
           </a:p>
         </p:txBody>
@@ -49363,7 +49095,7 @@
               </a:defRPr>
             </a:pPr>
             <a:r>
-              <a:t>361</a:t>
+              <a:t>367</a:t>
             </a:r>
           </a:p>
         </p:txBody>
@@ -49550,7 +49282,7 @@
               </a:defRPr>
             </a:pPr>
             <a:r>
-              <a:t>351</a:t>
+              <a:t>357</a:t>
             </a:r>
           </a:p>
         </p:txBody>
@@ -49737,7 +49469,7 @@
               </a:defRPr>
             </a:pPr>
             <a:r>
-              <a:t>347</a:t>
+              <a:t>350</a:t>
             </a:r>
           </a:p>
         </p:txBody>
@@ -49924,7 +49656,7 @@
               </a:defRPr>
             </a:pPr>
             <a:r>
-              <a:t>318</a:t>
+              <a:t>323</a:t>
             </a:r>
           </a:p>
         </p:txBody>

--- a/generated/Sales Dashboards/BD Rep Scoreboard.pptx
+++ b/generated/Sales Dashboards/BD Rep Scoreboard.pptx
@@ -1661,7 +1661,7 @@
           </a:p>
           <a:p>
             <a:r>
-              <a:t>- We are 57 days into a 91-day quarter.</a:t>
+              <a:t>- We are 58 days into a 91-day quarter.</a:t>
             </a:r>
           </a:p>
         </p:txBody>
@@ -4902,7 +4902,7 @@
               </a:defRPr>
             </a:pPr>
             <a:r>
-              <a:t>As of May 27, 2026  |  57 days into Q2  |  34 days remaining</a:t>
+              <a:t>As of May 28, 2026  |  58 days into Q2  |  33 days remaining</a:t>
             </a:r>
           </a:p>
         </p:txBody>
@@ -4938,7 +4938,7 @@
               </a:defRPr>
             </a:pPr>
             <a:r>
-              <a:t>Generated May 27, 2026</a:t>
+              <a:t>Generated May 28, 2026</a:t>
             </a:r>
           </a:p>
         </p:txBody>
@@ -5019,7 +5019,7 @@
               </a:defRPr>
             </a:pPr>
             <a:r>
-              <a:t>$20.0M</a:t>
+              <a:t>$19.9M</a:t>
             </a:r>
           </a:p>
         </p:txBody>
@@ -5055,7 +5055,7 @@
               </a:defRPr>
             </a:pPr>
             <a:r>
-              <a:t>Team GWP Q2 YTD  |  Proj. $31.9M</a:t>
+              <a:t>Team GWP Q2 YTD  |  Proj. $31.3M</a:t>
             </a:r>
           </a:p>
         </p:txBody>
@@ -5134,7 +5134,7 @@
               </a:defRPr>
             </a:pPr>
             <a:r>
-              <a:t>Pacing 173% of Q1 Final</a:t>
+              <a:t>Pacing 170% of Q1 Final</a:t>
             </a:r>
           </a:p>
         </p:txBody>
@@ -5215,7 +5215,7 @@
               </a:defRPr>
             </a:pPr>
             <a:r>
-              <a:t>87%</a:t>
+              <a:t>88%</a:t>
             </a:r>
           </a:p>
         </p:txBody>
@@ -5411,7 +5411,7 @@
               </a:defRPr>
             </a:pPr>
             <a:r>
-              <a:t>31,336</a:t>
+              <a:t>32,108</a:t>
             </a:r>
           </a:p>
         </p:txBody>
@@ -5526,7 +5526,7 @@
               </a:defRPr>
             </a:pPr>
             <a:r>
-              <a:t>Pacing 109% of Q1 Final</a:t>
+              <a:t>Pacing 110% of Q1 Final</a:t>
             </a:r>
           </a:p>
         </p:txBody>
@@ -5758,7 +5758,7 @@
               </a:defRPr>
             </a:pPr>
             <a:r>
-              <a:t>▲ $2.2M vs Apr pace</a:t>
+              <a:t>▲ $1.7M vs Apr pace</a:t>
             </a:r>
           </a:p>
         </p:txBody>
@@ -5794,7 +5794,7 @@
               </a:defRPr>
             </a:pPr>
             <a:r>
-              <a:t>▲ 39pp vs Q1 avg (48%)</a:t>
+              <a:t>▲ 40pp vs Q1 avg (48%)</a:t>
             </a:r>
           </a:p>
         </p:txBody>
@@ -5830,7 +5830,7 @@
               </a:defRPr>
             </a:pPr>
             <a:r>
-              <a:t>▲ 13799 vs Apr (17537)</a:t>
+              <a:t>▲ 14605 vs Apr (17503)</a:t>
             </a:r>
           </a:p>
         </p:txBody>
@@ -6071,7 +6071,7 @@
               </a:defRPr>
             </a:pPr>
             <a:r>
-              <a:t>$28.0M</a:t>
+              <a:t>$28.5M</a:t>
             </a:r>
           </a:p>
         </p:txBody>
@@ -6143,7 +6143,7 @@
               </a:defRPr>
             </a:pPr>
             <a:r>
-              <a:t>$8.7M</a:t>
+              <a:t>$8.8M</a:t>
             </a:r>
           </a:p>
         </p:txBody>
@@ -6600,7 +6600,7 @@
               </a:defRPr>
             </a:pPr>
             <a:r>
-              <a:t>45,772</a:t>
+              <a:t>45,733</a:t>
             </a:r>
           </a:p>
         </p:txBody>
@@ -6787,7 +6787,7 @@
               </a:defRPr>
             </a:pPr>
             <a:r>
-              <a:t>MTD (May):  $10.33M written  ·  $11.86M pace  ·  27/31 days elapsed</a:t>
+              <a:t>MTD (May):  $10.28M written  ·  $11.39M pace  ·  28/31 days elapsed</a:t>
             </a:r>
           </a:p>
         </p:txBody>
@@ -6952,7 +6952,7 @@
               </a:defRPr>
             </a:pPr>
             <a:r>
-              <a:t>Largest fleet policies written Apr 1–May 27  ·  Ranked by premium  ·  Fleet = 4+ power units</a:t>
+              <a:t>Largest fleet policies written Apr 1–May 28  ·  Ranked by premium  ·  Fleet = 4+ power units</a:t>
             </a:r>
           </a:p>
         </p:txBody>
@@ -6988,7 +6988,7 @@
               </a:defRPr>
             </a:pPr>
             <a:r>
-              <a:t>Generated May 27, 2026</a:t>
+              <a:t>Generated May 28, 2026</a:t>
             </a:r>
           </a:p>
         </p:txBody>
@@ -7585,7 +7585,7 @@
               </a:defRPr>
             </a:pPr>
             <a:r>
-              <a:t>Jtc Insurance Agency, Inc.</a:t>
+              <a:t>Jagdeep Singh Insurance Agency, Inc</a:t>
             </a:r>
           </a:p>
         </p:txBody>
@@ -7621,7 +7621,7 @@
               </a:defRPr>
             </a:pPr>
             <a:r>
-              <a:t>$318K</a:t>
+              <a:t>$323K</a:t>
             </a:r>
           </a:p>
         </p:txBody>
@@ -7657,7 +7657,7 @@
               </a:defRPr>
             </a:pPr>
             <a:r>
-              <a:t>21</a:t>
+              <a:t>17</a:t>
             </a:r>
           </a:p>
         </p:txBody>
@@ -7808,7 +7808,7 @@
               </a:defRPr>
             </a:pPr>
             <a:r>
-              <a:t>Safeline Insurance Agency, Inc.</a:t>
+              <a:t>Jtc Insurance Agency, Inc.</a:t>
             </a:r>
           </a:p>
         </p:txBody>
@@ -7844,7 +7844,7 @@
               </a:defRPr>
             </a:pPr>
             <a:r>
-              <a:t>$315K</a:t>
+              <a:t>$318K</a:t>
             </a:r>
           </a:p>
         </p:txBody>
@@ -7880,7 +7880,7 @@
               </a:defRPr>
             </a:pPr>
             <a:r>
-              <a:t>15</a:t>
+              <a:t>21</a:t>
             </a:r>
           </a:p>
         </p:txBody>
@@ -7995,7 +7995,7 @@
               </a:defRPr>
             </a:pPr>
             <a:r>
-              <a:t>Christopher H.</a:t>
+              <a:t>Derek J.</a:t>
             </a:r>
           </a:p>
         </p:txBody>
@@ -8031,7 +8031,7 @@
               </a:defRPr>
             </a:pPr>
             <a:r>
-              <a:t>Insurox Group, Inc</a:t>
+              <a:t>Safeline Insurance Agency, Inc.</a:t>
             </a:r>
           </a:p>
         </p:txBody>
@@ -8067,7 +8067,7 @@
               </a:defRPr>
             </a:pPr>
             <a:r>
-              <a:t>$275K</a:t>
+              <a:t>$315K</a:t>
             </a:r>
           </a:p>
         </p:txBody>
@@ -8103,7 +8103,7 @@
               </a:defRPr>
             </a:pPr>
             <a:r>
-              <a:t>9</a:t>
+              <a:t>15</a:t>
             </a:r>
           </a:p>
         </p:txBody>
@@ -8218,7 +8218,7 @@
               </a:defRPr>
             </a:pPr>
             <a:r>
-              <a:t>Derrick L.</a:t>
+              <a:t>Christopher H.</a:t>
             </a:r>
           </a:p>
         </p:txBody>
@@ -8254,7 +8254,7 @@
               </a:defRPr>
             </a:pPr>
             <a:r>
-              <a:t>Lone Star Direct Insurance Agency LLC</a:t>
+              <a:t>Insurox Group, Inc</a:t>
             </a:r>
           </a:p>
         </p:txBody>
@@ -8290,7 +8290,7 @@
               </a:defRPr>
             </a:pPr>
             <a:r>
-              <a:t>$254K</a:t>
+              <a:t>$275K</a:t>
             </a:r>
           </a:p>
         </p:txBody>
@@ -8326,7 +8326,7 @@
               </a:defRPr>
             </a:pPr>
             <a:r>
-              <a:t>21</a:t>
+              <a:t>9</a:t>
             </a:r>
           </a:p>
         </p:txBody>
@@ -8441,7 +8441,7 @@
               </a:defRPr>
             </a:pPr>
             <a:r>
-              <a:t>Christopher H.</a:t>
+              <a:t>Derrick L.</a:t>
             </a:r>
           </a:p>
         </p:txBody>
@@ -8477,7 +8477,7 @@
               </a:defRPr>
             </a:pPr>
             <a:r>
-              <a:t>TR Insurance Agency Inc</a:t>
+              <a:t>Lone Star Direct Insurance Agency LLC</a:t>
             </a:r>
           </a:p>
         </p:txBody>
@@ -8513,7 +8513,7 @@
               </a:defRPr>
             </a:pPr>
             <a:r>
-              <a:t>$241K</a:t>
+              <a:t>$254K</a:t>
             </a:r>
           </a:p>
         </p:txBody>
@@ -8549,7 +8549,7 @@
               </a:defRPr>
             </a:pPr>
             <a:r>
-              <a:t>12</a:t>
+              <a:t>21</a:t>
             </a:r>
           </a:p>
         </p:txBody>
@@ -8664,7 +8664,7 @@
               </a:defRPr>
             </a:pPr>
             <a:r>
-              <a:t>Alexis B.</a:t>
+              <a:t>Christopher H.</a:t>
             </a:r>
           </a:p>
         </p:txBody>
@@ -8700,7 +8700,7 @@
               </a:defRPr>
             </a:pPr>
             <a:r>
-              <a:t>Amerigo Insurance Agency</a:t>
+              <a:t>TR Insurance Agency Inc</a:t>
             </a:r>
           </a:p>
         </p:txBody>
@@ -8736,7 +8736,7 @@
               </a:defRPr>
             </a:pPr>
             <a:r>
-              <a:t>$234K</a:t>
+              <a:t>$241K</a:t>
             </a:r>
           </a:p>
         </p:txBody>
@@ -8772,7 +8772,7 @@
               </a:defRPr>
             </a:pPr>
             <a:r>
-              <a:t>10</a:t>
+              <a:t>12</a:t>
             </a:r>
           </a:p>
         </p:txBody>
@@ -8923,7 +8923,7 @@
               </a:defRPr>
             </a:pPr>
             <a:r>
-              <a:t>Paramount Exclusive Insurance Services, Inc.</a:t>
+              <a:t>Jagdeep Singh Insurance Agency, Inc</a:t>
             </a:r>
           </a:p>
         </p:txBody>
@@ -8959,7 +8959,7 @@
               </a:defRPr>
             </a:pPr>
             <a:r>
-              <a:t>$220K</a:t>
+              <a:t>$239K</a:t>
             </a:r>
           </a:p>
         </p:txBody>
@@ -8995,7 +8995,7 @@
               </a:defRPr>
             </a:pPr>
             <a:r>
-              <a:t>11</a:t>
+              <a:t>15</a:t>
             </a:r>
           </a:p>
         </p:txBody>
@@ -9110,7 +9110,7 @@
               </a:defRPr>
             </a:pPr>
             <a:r>
-              <a:t>Derek J.</a:t>
+              <a:t>Alexis B.</a:t>
             </a:r>
           </a:p>
         </p:txBody>
@@ -9146,7 +9146,7 @@
               </a:defRPr>
             </a:pPr>
             <a:r>
-              <a:t>Jagdeep Singh Insurance Agency, Inc</a:t>
+              <a:t>Amerigo Insurance Agency</a:t>
             </a:r>
           </a:p>
         </p:txBody>
@@ -9182,7 +9182,7 @@
               </a:defRPr>
             </a:pPr>
             <a:r>
-              <a:t>$217K</a:t>
+              <a:t>$234K</a:t>
             </a:r>
           </a:p>
         </p:txBody>
@@ -9218,7 +9218,7 @@
               </a:defRPr>
             </a:pPr>
             <a:r>
-              <a:t>11</a:t>
+              <a:t>10</a:t>
             </a:r>
           </a:p>
         </p:txBody>
@@ -9369,7 +9369,7 @@
               </a:defRPr>
             </a:pPr>
             <a:r>
-              <a:t>Surefire Insurance Agency Corp.</a:t>
+              <a:t>Reliance Partners, LLC</a:t>
             </a:r>
           </a:p>
         </p:txBody>
@@ -9405,7 +9405,7 @@
               </a:defRPr>
             </a:pPr>
             <a:r>
-              <a:t>$216K</a:t>
+              <a:t>$231K</a:t>
             </a:r>
           </a:p>
         </p:txBody>
@@ -9441,7 +9441,7 @@
               </a:defRPr>
             </a:pPr>
             <a:r>
-              <a:t>17</a:t>
+              <a:t>13</a:t>
             </a:r>
           </a:p>
         </p:txBody>
@@ -9592,7 +9592,7 @@
               </a:defRPr>
             </a:pPr>
             <a:r>
-              <a:t>Reliance Partners, LLC</a:t>
+              <a:t>Paramount Exclusive Insurance Services, Inc.</a:t>
             </a:r>
           </a:p>
         </p:txBody>
@@ -9628,7 +9628,7 @@
               </a:defRPr>
             </a:pPr>
             <a:r>
-              <a:t>$215K</a:t>
+              <a:t>$220K</a:t>
             </a:r>
           </a:p>
         </p:txBody>
@@ -9664,7 +9664,7 @@
               </a:defRPr>
             </a:pPr>
             <a:r>
-              <a:t>12</a:t>
+              <a:t>11</a:t>
             </a:r>
           </a:p>
         </p:txBody>
@@ -9779,7 +9779,7 @@
               </a:defRPr>
             </a:pPr>
             <a:r>
-              <a:t>Christopher H.</a:t>
+              <a:t>Derek J.</a:t>
             </a:r>
           </a:p>
         </p:txBody>
@@ -9815,7 +9815,7 @@
               </a:defRPr>
             </a:pPr>
             <a:r>
-              <a:t>Velocity Insurance Multiservices LLC</a:t>
+              <a:t>Jagdeep Singh Insurance Agency, Inc</a:t>
             </a:r>
           </a:p>
         </p:txBody>
@@ -9851,7 +9851,7 @@
               </a:defRPr>
             </a:pPr>
             <a:r>
-              <a:t>$203K</a:t>
+              <a:t>$217K</a:t>
             </a:r>
           </a:p>
         </p:txBody>
@@ -9887,7 +9887,7 @@
               </a:defRPr>
             </a:pPr>
             <a:r>
-              <a:t>8</a:t>
+              <a:t>11</a:t>
             </a:r>
           </a:p>
         </p:txBody>
@@ -11563,7 +11563,7 @@
               </a:defRPr>
             </a:pPr>
             <a:r>
-              <a:t>Westy M.</a:t>
+              <a:t>Christopher H.</a:t>
             </a:r>
           </a:p>
         </p:txBody>
@@ -11599,7 +11599,7 @@
               </a:defRPr>
             </a:pPr>
             <a:r>
-              <a:t>Acrisure LLC DBA RRL Insurance Agency</a:t>
+              <a:t>Get Logan Inc</a:t>
             </a:r>
           </a:p>
         </p:txBody>
@@ -11635,7 +11635,7 @@
               </a:defRPr>
             </a:pPr>
             <a:r>
-              <a:t>$174K</a:t>
+              <a:t>$171K</a:t>
             </a:r>
           </a:p>
         </p:txBody>
@@ -11671,7 +11671,7 @@
               </a:defRPr>
             </a:pPr>
             <a:r>
-              <a:t>13</a:t>
+              <a:t>6</a:t>
             </a:r>
           </a:p>
         </p:txBody>
@@ -11750,7 +11750,7 @@
               </a:defRPr>
             </a:pPr>
             <a:r>
-              <a:t>Q2 Fleet Total: 221 fleet binds  ·  $20.2M bound premium</a:t>
+              <a:t>Q2 Fleet Total: 217 fleet binds  ·  $19.9M bound premium</a:t>
             </a:r>
           </a:p>
         </p:txBody>
@@ -11891,7 +11891,7 @@
               </a:defRPr>
             </a:pPr>
             <a:r>
-              <a:t>Ranked by bound GWP written  ·  Mint-shaded row = new vs last week’s deck  ·  Apr 1–May 27  ·  Individual producers</a:t>
+              <a:t>Ranked by bound GWP written  ·  Mint-shaded row = new vs last week’s deck  ·  Apr 1–May 28  ·  Individual producers</a:t>
             </a:r>
           </a:p>
         </p:txBody>
@@ -11927,7 +11927,7 @@
               </a:defRPr>
             </a:pPr>
             <a:r>
-              <a:t>Generated May 27, 2026</a:t>
+              <a:t>Generated May 28, 2026</a:t>
             </a:r>
           </a:p>
         </p:txBody>
@@ -12977,7 +12977,7 @@
               </a:defRPr>
             </a:pPr>
             <a:r>
-              <a:t>Cecile Awad</a:t>
+              <a:t>Gurashish Bedi</a:t>
             </a:r>
           </a:p>
         </p:txBody>
@@ -13013,7 +13013,7 @@
               </a:defRPr>
             </a:pPr>
             <a:r>
-              <a:t>United Advantage Insurance Service…</a:t>
+              <a:t>Commercial Trucking Insurance Agen…</a:t>
             </a:r>
           </a:p>
         </p:txBody>
@@ -13049,7 +13049,7 @@
               </a:defRPr>
             </a:pPr>
             <a:r>
-              <a:t>$1.4M</a:t>
+              <a:t>$1.5M</a:t>
             </a:r>
           </a:p>
         </p:txBody>
@@ -13164,7 +13164,7 @@
               </a:defRPr>
             </a:pPr>
             <a:r>
-              <a:t>Gurashish Bedi</a:t>
+              <a:t>Cecile Awad</a:t>
             </a:r>
           </a:p>
         </p:txBody>
@@ -13200,7 +13200,7 @@
               </a:defRPr>
             </a:pPr>
             <a:r>
-              <a:t>Commercial Trucking Insurance Agen…</a:t>
+              <a:t>United Advantage Insurance Service…</a:t>
             </a:r>
           </a:p>
         </p:txBody>
@@ -13797,7 +13797,7 @@
               </a:defRPr>
             </a:pPr>
             <a:r>
-              <a:t>$990K</a:t>
+              <a:t>$1.0M</a:t>
             </a:r>
           </a:p>
         </p:txBody>
@@ -13984,7 +13984,7 @@
               </a:defRPr>
             </a:pPr>
             <a:r>
-              <a:t>$834K</a:t>
+              <a:t>$838K</a:t>
             </a:r>
           </a:p>
         </p:txBody>
@@ -14099,7 +14099,7 @@
               </a:defRPr>
             </a:pPr>
             <a:r>
-              <a:t>Raj Singh</a:t>
+              <a:t>Ateetpal Bansal</a:t>
             </a:r>
           </a:p>
         </p:txBody>
@@ -14135,7 +14135,7 @@
               </a:defRPr>
             </a:pPr>
             <a:r>
-              <a:t>Pride Insurance LLC</a:t>
+              <a:t>Jagdeep Singh Insurance Agency, In…</a:t>
             </a:r>
           </a:p>
         </p:txBody>
@@ -14171,7 +14171,7 @@
               </a:defRPr>
             </a:pPr>
             <a:r>
-              <a:t>$706K</a:t>
+              <a:t>$720K</a:t>
             </a:r>
           </a:p>
         </p:txBody>
@@ -14286,7 +14286,7 @@
               </a:defRPr>
             </a:pPr>
             <a:r>
-              <a:t>Larisa Davtyan</a:t>
+              <a:t>Raj Singh</a:t>
             </a:r>
           </a:p>
         </p:txBody>
@@ -14322,7 +14322,7 @@
               </a:defRPr>
             </a:pPr>
             <a:r>
-              <a:t>Safeline Insurance Agency, Inc.</a:t>
+              <a:t>Pride Insurance LLC</a:t>
             </a:r>
           </a:p>
         </p:txBody>
@@ -14358,7 +14358,7 @@
               </a:defRPr>
             </a:pPr>
             <a:r>
-              <a:t>$700K</a:t>
+              <a:t>$706K</a:t>
             </a:r>
           </a:p>
         </p:txBody>
@@ -14473,7 +14473,7 @@
               </a:defRPr>
             </a:pPr>
             <a:r>
-              <a:t>Ateetpal Bansal</a:t>
+              <a:t>Larisa Davtyan</a:t>
             </a:r>
           </a:p>
         </p:txBody>
@@ -14509,7 +14509,7 @@
               </a:defRPr>
             </a:pPr>
             <a:r>
-              <a:t>Jagdeep Singh Insurance Agency, In…</a:t>
+              <a:t>Safeline Insurance Agency, Inc.</a:t>
             </a:r>
           </a:p>
         </p:txBody>
@@ -14545,7 +14545,7 @@
               </a:defRPr>
             </a:pPr>
             <a:r>
-              <a:t>$692K</a:t>
+              <a:t>$700K</a:t>
             </a:r>
           </a:p>
         </p:txBody>
@@ -14919,7 +14919,7 @@
               </a:defRPr>
             </a:pPr>
             <a:r>
-              <a:t>$652K</a:t>
+              <a:t>$683K</a:t>
             </a:r>
           </a:p>
         </p:txBody>
@@ -15106,7 +15106,7 @@
               </a:defRPr>
             </a:pPr>
             <a:r>
-              <a:t>$617K</a:t>
+              <a:t>$638K</a:t>
             </a:r>
           </a:p>
         </p:txBody>
@@ -15293,7 +15293,7 @@
               </a:defRPr>
             </a:pPr>
             <a:r>
-              <a:t>$545K</a:t>
+              <a:t>$589K</a:t>
             </a:r>
           </a:p>
         </p:txBody>
@@ -15480,7 +15480,7 @@
               </a:defRPr>
             </a:pPr>
             <a:r>
-              <a:t>$542K</a:t>
+              <a:t>$565K</a:t>
             </a:r>
           </a:p>
         </p:txBody>
@@ -15667,7 +15667,7 @@
               </a:defRPr>
             </a:pPr>
             <a:r>
-              <a:t>$531K</a:t>
+              <a:t>$548K</a:t>
             </a:r>
           </a:p>
         </p:txBody>
@@ -15782,7 +15782,7 @@
               </a:defRPr>
             </a:pPr>
             <a:r>
-              <a:t>Daven Loomba</a:t>
+              <a:t>Justin Robert</a:t>
             </a:r>
           </a:p>
         </p:txBody>
@@ -15818,7 +15818,7 @@
               </a:defRPr>
             </a:pPr>
             <a:r>
-              <a:t>GoldenEra Insurance Agency</a:t>
+              <a:t>Justin Robert Insurance Agency LLC</a:t>
             </a:r>
           </a:p>
         </p:txBody>
@@ -15854,7 +15854,7 @@
               </a:defRPr>
             </a:pPr>
             <a:r>
-              <a:t>$505K</a:t>
+              <a:t>$529K</a:t>
             </a:r>
           </a:p>
         </p:txBody>
@@ -16156,7 +16156,7 @@
               </a:defRPr>
             </a:pPr>
             <a:r>
-              <a:t>Justin Robert</a:t>
+              <a:t>Daven Loomba</a:t>
             </a:r>
           </a:p>
         </p:txBody>
@@ -16192,7 +16192,7 @@
               </a:defRPr>
             </a:pPr>
             <a:r>
-              <a:t>Justin Robert Insurance Agency LLC</a:t>
+              <a:t>GoldenEra Insurance Agency</a:t>
             </a:r>
           </a:p>
         </p:txBody>
@@ -16228,7 +16228,7 @@
               </a:defRPr>
             </a:pPr>
             <a:r>
-              <a:t>$502K</a:t>
+              <a:t>$505K</a:t>
             </a:r>
           </a:p>
         </p:txBody>
@@ -16602,7 +16602,7 @@
               </a:defRPr>
             </a:pPr>
             <a:r>
-              <a:t>$445K</a:t>
+              <a:t>$455K</a:t>
             </a:r>
           </a:p>
         </p:txBody>
@@ -16717,7 +16717,7 @@
               </a:defRPr>
             </a:pPr>
             <a:r>
-              <a:t>Christian Gomez</a:t>
+              <a:t>Deepak Goswami</a:t>
             </a:r>
           </a:p>
         </p:txBody>
@@ -16753,7 +16753,7 @@
               </a:defRPr>
             </a:pPr>
             <a:r>
-              <a:t>Your Truck Shield LLC</a:t>
+              <a:t>A.S.I.A Inc</a:t>
             </a:r>
           </a:p>
         </p:txBody>
@@ -16789,7 +16789,7 @@
               </a:defRPr>
             </a:pPr>
             <a:r>
-              <a:t>$442K</a:t>
+              <a:t>$443K</a:t>
             </a:r>
           </a:p>
         </p:txBody>
@@ -16904,7 +16904,7 @@
               </a:defRPr>
             </a:pPr>
             <a:r>
-              <a:t>Deepak Goswami</a:t>
+              <a:t>Christian Gomez</a:t>
             </a:r>
           </a:p>
         </p:txBody>
@@ -16940,7 +16940,7 @@
               </a:defRPr>
             </a:pPr>
             <a:r>
-              <a:t>A.S.I.A Inc</a:t>
+              <a:t>Your Truck Shield LLC</a:t>
             </a:r>
           </a:p>
         </p:txBody>
@@ -16976,7 +16976,7 @@
               </a:defRPr>
             </a:pPr>
             <a:r>
-              <a:t>$439K</a:t>
+              <a:t>$442K</a:t>
             </a:r>
           </a:p>
         </p:txBody>
@@ -18285,7 +18285,7 @@
               </a:defRPr>
             </a:pPr>
             <a:r>
-              <a:t>$372K</a:t>
+              <a:t>$375K</a:t>
             </a:r>
           </a:p>
         </p:txBody>
@@ -19709,7 +19709,7 @@
               </a:defRPr>
             </a:pPr>
             <a:r>
-              <a:t>Nicholas Banks</a:t>
+              <a:t>Venizelos Papadopulos</a:t>
             </a:r>
           </a:p>
         </p:txBody>
@@ -19745,7 +19745,7 @@
               </a:defRPr>
             </a:pPr>
             <a:r>
-              <a:t>Reliance Partners, LLC</a:t>
+              <a:t>Exclusive Financial Services, Inc</a:t>
             </a:r>
           </a:p>
         </p:txBody>
@@ -19781,7 +19781,7 @@
               </a:defRPr>
             </a:pPr>
             <a:r>
-              <a:t>$330K</a:t>
+              <a:t>$334K</a:t>
             </a:r>
           </a:p>
         </p:txBody>
@@ -19922,7 +19922,7 @@
               </a:defRPr>
             </a:pPr>
             <a:r>
-              <a:t>Q2 2026 YTD (Apr 1–May 27)  |  Green = on target  |  Amber = at risk  |  Red = behind  |  Goal: ≥40 acts/wk  |  Ranked by composite OKR score</a:t>
+              <a:t>Q2 2026 YTD (Apr 1–May 28)  |  Green = on target  |  Amber = at risk  |  Red = behind  |  Goal: ≥40 acts/wk  |  Ranked by composite OKR score</a:t>
             </a:r>
           </a:p>
         </p:txBody>
@@ -19958,7 +19958,7 @@
               </a:defRPr>
             </a:pPr>
             <a:r>
-              <a:t>Generated May 27, 2026</a:t>
+              <a:t>Generated May 28, 2026</a:t>
             </a:r>
           </a:p>
         </p:txBody>
@@ -20123,7 +20123,7 @@
               </a:defRPr>
             </a:pPr>
             <a:r>
-              <a:t>Q2 2026 YTD (Apr 1–May 27)  |  Green = on target  |  Amber = at risk  |  Red = behind  |  Goal: ≥50 acts/wk  |  Ranked by composite OKR score</a:t>
+              <a:t>Q2 2026 YTD (Apr 1–May 28)  |  Green = on target  |  Amber = at risk  |  Red = behind  |  Goal: ≥50 acts/wk  |  Ranked by composite OKR score</a:t>
             </a:r>
           </a:p>
         </p:txBody>
@@ -20159,7 +20159,7 @@
               </a:defRPr>
             </a:pPr>
             <a:r>
-              <a:t>Generated May 27, 2026</a:t>
+              <a:t>Generated May 28, 2026</a:t>
             </a:r>
           </a:p>
         </p:txBody>
@@ -20324,7 +20324,7 @@
               </a:defRPr>
             </a:pPr>
             <a:r>
-              <a:t>Q2 YTD  |  Apr 1–May 27  |  BDMs Only  |  Goal: 40 acts/wk  |  Emails excluded</a:t>
+              <a:t>Q2 YTD  |  Apr 1–May 28  |  BDMs Only  |  Goal: 40 acts/wk  |  Emails excluded</a:t>
             </a:r>
           </a:p>
         </p:txBody>
@@ -20360,7 +20360,7 @@
               </a:defRPr>
             </a:pPr>
             <a:r>
-              <a:t>Generated May 27, 2026</a:t>
+              <a:t>Generated May 28, 2026</a:t>
             </a:r>
           </a:p>
         </p:txBody>
@@ -20727,7 +20727,7 @@
               </a:defRPr>
             </a:pPr>
             <a:r>
-              <a:t>May 25-27</a:t>
+              <a:t>May 25-28</a:t>
             </a:r>
           </a:p>
         </p:txBody>
@@ -21431,7 +21431,7 @@
               </a:defRPr>
             </a:pPr>
             <a:r>
-              <a:t>12</a:t>
+              <a:t>19</a:t>
             </a:r>
           </a:p>
         </p:txBody>
@@ -22178,7 +22178,7 @@
               </a:defRPr>
             </a:pPr>
             <a:r>
-              <a:t>6</a:t>
+              <a:t>26</a:t>
             </a:r>
           </a:p>
         </p:txBody>
@@ -23570,7 +23570,7 @@
             <a:avLst/>
           </a:prstGeom>
           <a:solidFill>
-            <a:srgbClr val="DC2626"/>
+            <a:srgbClr val="D97706"/>
           </a:solidFill>
           <a:ln>
             <a:noFill/>
@@ -23629,7 +23629,7 @@
               </a:defRPr>
             </a:pPr>
             <a:r>
-              <a:t>20</a:t>
+              <a:t>37</a:t>
             </a:r>
           </a:p>
         </p:txBody>
@@ -24333,7 +24333,7 @@
               </a:defRPr>
             </a:pPr>
             <a:r>
-              <a:t>4</a:t>
+              <a:t>11</a:t>
             </a:r>
           </a:p>
         </p:txBody>
@@ -24448,7 +24448,7 @@
               </a:defRPr>
             </a:pPr>
             <a:r>
-              <a:t>Alexis Berry-Smith</a:t>
+              <a:t>Alexis Berrysmith</a:t>
             </a:r>
           </a:p>
         </p:txBody>
@@ -25080,7 +25080,7 @@
               </a:defRPr>
             </a:pPr>
             <a:r>
-              <a:t>4</a:t>
+              <a:t>21</a:t>
             </a:r>
           </a:p>
         </p:txBody>
@@ -25555,7 +25555,7 @@
               </a:defRPr>
             </a:pPr>
             <a:r>
-              <a:t>441</a:t>
+              <a:t>448</a:t>
             </a:r>
           </a:p>
         </p:txBody>
@@ -25627,7 +25627,7 @@
               </a:defRPr>
             </a:pPr>
             <a:r>
-              <a:t>91</a:t>
+              <a:t>94</a:t>
             </a:r>
           </a:p>
         </p:txBody>
@@ -25663,7 +25663,7 @@
               </a:defRPr>
             </a:pPr>
             <a:r>
-              <a:t>488</a:t>
+              <a:t>495</a:t>
             </a:r>
           </a:p>
         </p:txBody>
@@ -25886,7 +25886,7 @@
               </a:defRPr>
             </a:pPr>
             <a:r>
-              <a:t>255</a:t>
+              <a:t>274</a:t>
             </a:r>
           </a:p>
         </p:txBody>
@@ -25922,7 +25922,7 @@
               </a:defRPr>
             </a:pPr>
             <a:r>
-              <a:t>24</a:t>
+              <a:t>25</a:t>
             </a:r>
           </a:p>
         </p:txBody>
@@ -25994,7 +25994,7 @@
               </a:defRPr>
             </a:pPr>
             <a:r>
-              <a:t>279</a:t>
+              <a:t>299</a:t>
             </a:r>
           </a:p>
         </p:txBody>
@@ -26246,7 +26246,7 @@
               </a:defRPr>
             </a:pPr>
             <a:r>
-              <a:t>37</a:t>
+              <a:t>38</a:t>
             </a:r>
           </a:p>
         </p:txBody>
@@ -26505,7 +26505,7 @@
               </a:defRPr>
             </a:pPr>
             <a:r>
-              <a:t>418</a:t>
+              <a:t>435</a:t>
             </a:r>
           </a:p>
         </p:txBody>
@@ -26577,7 +26577,7 @@
               </a:defRPr>
             </a:pPr>
             <a:r>
-              <a:t>52</a:t>
+              <a:t>55</a:t>
             </a:r>
           </a:p>
         </p:txBody>
@@ -26613,7 +26613,7 @@
               </a:defRPr>
             </a:pPr>
             <a:r>
-              <a:t>438</a:t>
+              <a:t>455</a:t>
             </a:r>
           </a:p>
         </p:txBody>
@@ -26793,7 +26793,7 @@
               </a:defRPr>
             </a:pPr>
             <a:r>
-              <a:t>247</a:t>
+              <a:t>254</a:t>
             </a:r>
           </a:p>
         </p:txBody>
@@ -26865,7 +26865,7 @@
               </a:defRPr>
             </a:pPr>
             <a:r>
-              <a:t>48</a:t>
+              <a:t>50</a:t>
             </a:r>
           </a:p>
         </p:txBody>
@@ -26901,7 +26901,7 @@
               </a:defRPr>
             </a:pPr>
             <a:r>
-              <a:t>263</a:t>
+              <a:t>270</a:t>
             </a:r>
           </a:p>
         </p:txBody>
@@ -27052,7 +27052,7 @@
               </a:defRPr>
             </a:pPr>
             <a:r>
-              <a:t>Alexis Berry-Smith</a:t>
+              <a:t>Alexis Berrysmith</a:t>
             </a:r>
           </a:p>
         </p:txBody>
@@ -27124,7 +27124,7 @@
               </a:defRPr>
             </a:pPr>
             <a:r>
-              <a:t>113</a:t>
+              <a:t>129</a:t>
             </a:r>
           </a:p>
         </p:txBody>
@@ -27160,7 +27160,7 @@
               </a:defRPr>
             </a:pPr>
             <a:r>
-              <a:t>15</a:t>
+              <a:t>16</a:t>
             </a:r>
           </a:p>
         </p:txBody>
@@ -27232,7 +27232,7 @@
               </a:defRPr>
             </a:pPr>
             <a:r>
-              <a:t>128</a:t>
+              <a:t>145</a:t>
             </a:r>
           </a:p>
         </p:txBody>
@@ -27445,7 +27445,7 @@
               </a:defRPr>
             </a:pPr>
             <a:r>
-              <a:t>Q2 YTD  |  Apr 1–May 27  |  BDAs Only  |  Goal: 50 acts/wk  |  Emails excluded</a:t>
+              <a:t>Q2 YTD  |  Apr 1–May 28  |  BDAs Only  |  Goal: 50 acts/wk  |  Emails excluded</a:t>
             </a:r>
           </a:p>
         </p:txBody>
@@ -27481,7 +27481,7 @@
               </a:defRPr>
             </a:pPr>
             <a:r>
-              <a:t>Generated May 27, 2026</a:t>
+              <a:t>Generated May 28, 2026</a:t>
             </a:r>
           </a:p>
         </p:txBody>
@@ -27848,7 +27848,7 @@
               </a:defRPr>
             </a:pPr>
             <a:r>
-              <a:t>May 25-27</a:t>
+              <a:t>May 25-28</a:t>
             </a:r>
           </a:p>
         </p:txBody>
@@ -28552,7 +28552,7 @@
               </a:defRPr>
             </a:pPr>
             <a:r>
-              <a:t>25</a:t>
+              <a:t>36</a:t>
             </a:r>
           </a:p>
         </p:txBody>
@@ -29227,7 +29227,7 @@
               </a:defRPr>
             </a:pPr>
             <a:r>
-              <a:t>10</a:t>
+              <a:t>16</a:t>
             </a:r>
           </a:p>
         </p:txBody>
@@ -29263,7 +29263,7 @@
               </a:defRPr>
             </a:pPr>
             <a:r>
-              <a:t>65%</a:t>
+              <a:t>67%</a:t>
             </a:r>
           </a:p>
         </p:txBody>
@@ -29859,7 +29859,7 @@
               </a:defRPr>
             </a:pPr>
             <a:r>
-              <a:t>10</a:t>
+              <a:t>22</a:t>
             </a:r>
           </a:p>
         </p:txBody>
@@ -29889,13 +29889,13 @@
             <a:pPr algn="ctr">
               <a:defRPr sz="1100" b="1">
                 <a:solidFill>
-                  <a:srgbClr val="DC2626"/>
-                </a:solidFill>
-                <a:latin typeface="Calibri"/>
-              </a:defRPr>
-            </a:pPr>
-            <a:r>
-              <a:t>72%</a:t>
+                  <a:srgbClr val="D97706"/>
+                </a:solidFill>
+                <a:latin typeface="Calibri"/>
+              </a:defRPr>
+            </a:pPr>
+            <a:r>
+              <a:t>76%</a:t>
             </a:r>
           </a:p>
         </p:txBody>
@@ -30534,7 +30534,7 @@
               </a:defRPr>
             </a:pPr>
             <a:r>
-              <a:t>12</a:t>
+              <a:t>23</a:t>
             </a:r>
           </a:p>
         </p:txBody>
@@ -30570,7 +30570,7 @@
               </a:defRPr>
             </a:pPr>
             <a:r>
-              <a:t>82%</a:t>
+              <a:t>86%</a:t>
             </a:r>
           </a:p>
         </p:txBody>
@@ -31238,7 +31238,7 @@
               </a:defRPr>
             </a:pPr>
             <a:r>
-              <a:t>11</a:t>
+              <a:t>22</a:t>
             </a:r>
           </a:p>
         </p:txBody>
@@ -31713,7 +31713,7 @@
               </a:defRPr>
             </a:pPr>
             <a:r>
-              <a:t>375</a:t>
+              <a:t>386</a:t>
             </a:r>
           </a:p>
         </p:txBody>
@@ -31785,7 +31785,7 @@
               </a:defRPr>
             </a:pPr>
             <a:r>
-              <a:t>38</a:t>
+              <a:t>39</a:t>
             </a:r>
           </a:p>
         </p:txBody>
@@ -31821,7 +31821,7 @@
               </a:defRPr>
             </a:pPr>
             <a:r>
-              <a:t>385</a:t>
+              <a:t>396</a:t>
             </a:r>
           </a:p>
         </p:txBody>
@@ -32044,7 +32044,7 @@
               </a:defRPr>
             </a:pPr>
             <a:r>
-              <a:t>183</a:t>
+              <a:t>189</a:t>
             </a:r>
           </a:p>
         </p:txBody>
@@ -32152,7 +32152,7 @@
               </a:defRPr>
             </a:pPr>
             <a:r>
-              <a:t>195</a:t>
+              <a:t>201</a:t>
             </a:r>
           </a:p>
         </p:txBody>
@@ -32188,7 +32188,7 @@
               </a:defRPr>
             </a:pPr>
             <a:r>
-              <a:t>32.5</a:t>
+              <a:t>33.5</a:t>
             </a:r>
           </a:p>
         </p:txBody>
@@ -32224,7 +32224,7 @@
               </a:defRPr>
             </a:pPr>
             <a:r>
-              <a:t>65%</a:t>
+              <a:t>67%</a:t>
             </a:r>
           </a:p>
         </p:txBody>
@@ -32332,7 +32332,7 @@
               </a:defRPr>
             </a:pPr>
             <a:r>
-              <a:t>204</a:t>
+              <a:t>216</a:t>
             </a:r>
           </a:p>
         </p:txBody>
@@ -32404,7 +32404,7 @@
               </a:defRPr>
             </a:pPr>
             <a:r>
-              <a:t>30</a:t>
+              <a:t>32</a:t>
             </a:r>
           </a:p>
         </p:txBody>
@@ -32440,7 +32440,7 @@
               </a:defRPr>
             </a:pPr>
             <a:r>
-              <a:t>215</a:t>
+              <a:t>227</a:t>
             </a:r>
           </a:p>
         </p:txBody>
@@ -32476,7 +32476,7 @@
               </a:defRPr>
             </a:pPr>
             <a:r>
-              <a:t>35.8</a:t>
+              <a:t>37.8</a:t>
             </a:r>
           </a:p>
         </p:txBody>
@@ -32506,13 +32506,13 @@
             <a:pPr algn="ctr">
               <a:defRPr sz="900" b="0">
                 <a:solidFill>
-                  <a:srgbClr val="DC2626"/>
-                </a:solidFill>
-                <a:latin typeface="Calibri"/>
-              </a:defRPr>
-            </a:pPr>
-            <a:r>
-              <a:t>72%</a:t>
+                  <a:srgbClr val="D97706"/>
+                </a:solidFill>
+                <a:latin typeface="Calibri"/>
+              </a:defRPr>
+            </a:pPr>
+            <a:r>
+              <a:t>76%</a:t>
             </a:r>
           </a:p>
         </p:txBody>
@@ -32663,7 +32663,7 @@
               </a:defRPr>
             </a:pPr>
             <a:r>
-              <a:t>233</a:t>
+              <a:t>243</a:t>
             </a:r>
           </a:p>
         </p:txBody>
@@ -32699,7 +32699,7 @@
               </a:defRPr>
             </a:pPr>
             <a:r>
-              <a:t>13</a:t>
+              <a:t>14</a:t>
             </a:r>
           </a:p>
         </p:txBody>
@@ -32735,7 +32735,7 @@
               </a:defRPr>
             </a:pPr>
             <a:r>
-              <a:t>17</a:t>
+              <a:t>19</a:t>
             </a:r>
           </a:p>
         </p:txBody>
@@ -32771,7 +32771,7 @@
               </a:defRPr>
             </a:pPr>
             <a:r>
-              <a:t>246</a:t>
+              <a:t>257</a:t>
             </a:r>
           </a:p>
         </p:txBody>
@@ -32807,7 +32807,7 @@
               </a:defRPr>
             </a:pPr>
             <a:r>
-              <a:t>41.0</a:t>
+              <a:t>42.8</a:t>
             </a:r>
           </a:p>
         </p:txBody>
@@ -32843,7 +32843,7 @@
               </a:defRPr>
             </a:pPr>
             <a:r>
-              <a:t>82%</a:t>
+              <a:t>86%</a:t>
             </a:r>
           </a:p>
         </p:txBody>
@@ -32951,7 +32951,7 @@
               </a:defRPr>
             </a:pPr>
             <a:r>
-              <a:t>165</a:t>
+              <a:t>176</a:t>
             </a:r>
           </a:p>
         </p:txBody>
@@ -33059,7 +33059,7 @@
               </a:defRPr>
             </a:pPr>
             <a:r>
-              <a:t>172</a:t>
+              <a:t>183</a:t>
             </a:r>
           </a:p>
         </p:txBody>
@@ -33308,7 +33308,7 @@
               </a:defRPr>
             </a:pPr>
             <a:r>
-              <a:t>Generated May 27, 2026</a:t>
+              <a:t>Generated May 28, 2026</a:t>
             </a:r>
           </a:p>
         </p:txBody>
@@ -33999,7 +33999,7 @@
               </a:defRPr>
             </a:pPr>
             <a:r>
-              <a:t>7075</a:t>
+              <a:t>7226</a:t>
             </a:r>
           </a:p>
         </p:txBody>
@@ -34035,7 +34035,7 @@
               </a:defRPr>
             </a:pPr>
             <a:r>
-              <a:t>497</a:t>
+              <a:t>498</a:t>
             </a:r>
           </a:p>
         </p:txBody>
@@ -34107,7 +34107,7 @@
               </a:defRPr>
             </a:pPr>
             <a:r>
-              <a:t>$4.5M</a:t>
+              <a:t>$4.6M</a:t>
             </a:r>
           </a:p>
         </p:txBody>
@@ -34143,7 +34143,7 @@
               </a:defRPr>
             </a:pPr>
             <a:r>
-              <a:t>$4.1M</a:t>
+              <a:t>$4.2M</a:t>
             </a:r>
           </a:p>
         </p:txBody>
@@ -34438,7 +34438,7 @@
               </a:defRPr>
             </a:pPr>
             <a:r>
-              <a:t>3418</a:t>
+              <a:t>3503</a:t>
             </a:r>
           </a:p>
         </p:txBody>
@@ -34474,7 +34474,7 @@
               </a:defRPr>
             </a:pPr>
             <a:r>
-              <a:t>347</a:t>
+              <a:t>350</a:t>
             </a:r>
           </a:p>
         </p:txBody>
@@ -34546,7 +34546,7 @@
               </a:defRPr>
             </a:pPr>
             <a:r>
-              <a:t>$1.3M</a:t>
+              <a:t>$1.4M</a:t>
             </a:r>
           </a:p>
         </p:txBody>
@@ -34582,7 +34582,7 @@
               </a:defRPr>
             </a:pPr>
             <a:r>
-              <a:t>$3.0M</a:t>
+              <a:t>$3.1M</a:t>
             </a:r>
           </a:p>
         </p:txBody>
@@ -34834,7 +34834,7 @@
               </a:defRPr>
             </a:pPr>
             <a:r>
-              <a:t>5477</a:t>
+              <a:t>5614</a:t>
             </a:r>
           </a:p>
         </p:txBody>
@@ -34870,7 +34870,7 @@
               </a:defRPr>
             </a:pPr>
             <a:r>
-              <a:t>307</a:t>
+              <a:t>313</a:t>
             </a:r>
           </a:p>
         </p:txBody>
@@ -34906,7 +34906,7 @@
               </a:defRPr>
             </a:pPr>
             <a:r>
-              <a:t>$8.9M</a:t>
+              <a:t>$9.0M</a:t>
             </a:r>
           </a:p>
         </p:txBody>
@@ -34978,7 +34978,7 @@
               </a:defRPr>
             </a:pPr>
             <a:r>
-              <a:t>$3.6M</a:t>
+              <a:t>$3.7M</a:t>
             </a:r>
           </a:p>
         </p:txBody>
@@ -35273,7 +35273,7 @@
               </a:defRPr>
             </a:pPr>
             <a:r>
-              <a:t>3317</a:t>
+              <a:t>3424</a:t>
             </a:r>
           </a:p>
         </p:txBody>
@@ -35309,7 +35309,7 @@
               </a:defRPr>
             </a:pPr>
             <a:r>
-              <a:t>257</a:t>
+              <a:t>259</a:t>
             </a:r>
           </a:p>
         </p:txBody>
@@ -35345,7 +35345,7 @@
               </a:defRPr>
             </a:pPr>
             <a:r>
-              <a:t>$6.3M</a:t>
+              <a:t>$6.0M</a:t>
             </a:r>
           </a:p>
         </p:txBody>
@@ -35417,7 +35417,7 @@
               </a:defRPr>
             </a:pPr>
             <a:r>
-              <a:t>$1.8M</a:t>
+              <a:t>$1.9M</a:t>
             </a:r>
           </a:p>
         </p:txBody>
@@ -35453,7 +35453,7 @@
               </a:defRPr>
             </a:pPr>
             <a:r>
-              <a:t>Alexis Berry-Smith</a:t>
+              <a:t>Alexis Berrysmith</a:t>
             </a:r>
           </a:p>
         </p:txBody>
@@ -35669,7 +35669,7 @@
               </a:defRPr>
             </a:pPr>
             <a:r>
-              <a:t>1850</a:t>
+              <a:t>1887</a:t>
             </a:r>
           </a:p>
         </p:txBody>
@@ -35705,7 +35705,7 @@
               </a:defRPr>
             </a:pPr>
             <a:r>
-              <a:t>130</a:t>
+              <a:t>127</a:t>
             </a:r>
           </a:p>
         </p:txBody>
@@ -35741,7 +35741,7 @@
               </a:defRPr>
             </a:pPr>
             <a:r>
-              <a:t>$4.2M</a:t>
+              <a:t>$4.1M</a:t>
             </a:r>
           </a:p>
         </p:txBody>
@@ -35813,7 +35813,7 @@
               </a:defRPr>
             </a:pPr>
             <a:r>
-              <a:t>$1.5M</a:t>
+              <a:t>$1.6M</a:t>
             </a:r>
           </a:p>
         </p:txBody>
@@ -36187,7 +36187,7 @@
               </a:defRPr>
             </a:pPr>
             <a:r>
-              <a:t>4047</a:t>
+              <a:t>4155</a:t>
             </a:r>
           </a:p>
         </p:txBody>
@@ -36223,7 +36223,7 @@
               </a:defRPr>
             </a:pPr>
             <a:r>
-              <a:t>110</a:t>
+              <a:t>113</a:t>
             </a:r>
           </a:p>
         </p:txBody>
@@ -36259,7 +36259,7 @@
               </a:defRPr>
             </a:pPr>
             <a:r>
-              <a:t>$2.7M</a:t>
+              <a:t>$2.8M</a:t>
             </a:r>
           </a:p>
         </p:txBody>
@@ -36331,7 +36331,7 @@
               </a:defRPr>
             </a:pPr>
             <a:r>
-              <a:t>$794K</a:t>
+              <a:t>$835K</a:t>
             </a:r>
           </a:p>
         </p:txBody>
@@ -36583,7 +36583,7 @@
               </a:defRPr>
             </a:pPr>
             <a:r>
-              <a:t>2781</a:t>
+              <a:t>2855</a:t>
             </a:r>
           </a:p>
         </p:txBody>
@@ -36727,7 +36727,7 @@
               </a:defRPr>
             </a:pPr>
             <a:r>
-              <a:t>$246K</a:t>
+              <a:t>$271K</a:t>
             </a:r>
           </a:p>
         </p:txBody>
@@ -37022,7 +37022,7 @@
               </a:defRPr>
             </a:pPr>
             <a:r>
-              <a:t>1610</a:t>
+              <a:t>1655</a:t>
             </a:r>
           </a:p>
         </p:txBody>
@@ -37166,7 +37166,7 @@
               </a:defRPr>
             </a:pPr>
             <a:r>
-              <a:t>$307K</a:t>
+              <a:t>$351K</a:t>
             </a:r>
           </a:p>
         </p:txBody>
@@ -37418,7 +37418,7 @@
               </a:defRPr>
             </a:pPr>
             <a:r>
-              <a:t>931</a:t>
+              <a:t>945</a:t>
             </a:r>
           </a:p>
         </p:txBody>
@@ -37454,7 +37454,7 @@
               </a:defRPr>
             </a:pPr>
             <a:r>
-              <a:t>50</a:t>
+              <a:t>54</a:t>
             </a:r>
           </a:p>
         </p:txBody>
@@ -37490,7 +37490,7 @@
               </a:defRPr>
             </a:pPr>
             <a:r>
-              <a:t>$917K</a:t>
+              <a:t>$959K</a:t>
             </a:r>
           </a:p>
         </p:txBody>
@@ -37562,7 +37562,7 @@
               </a:defRPr>
             </a:pPr>
             <a:r>
-              <a:t>$102K</a:t>
+              <a:t>$114K</a:t>
             </a:r>
           </a:p>
         </p:txBody>
@@ -37857,7 +37857,7 @@
               </a:defRPr>
             </a:pPr>
             <a:r>
-              <a:t>614</a:t>
+              <a:t>621</a:t>
             </a:r>
           </a:p>
         </p:txBody>
@@ -37893,7 +37893,7 @@
               </a:defRPr>
             </a:pPr>
             <a:r>
-              <a:t>24</a:t>
+              <a:t>25</a:t>
             </a:r>
           </a:p>
         </p:txBody>
@@ -37929,7 +37929,7 @@
               </a:defRPr>
             </a:pPr>
             <a:r>
-              <a:t>$801K</a:t>
+              <a:t>$824K</a:t>
             </a:r>
           </a:p>
         </p:txBody>
@@ -38195,7 +38195,7 @@
               </a:defRPr>
             </a:pPr>
             <a:r>
-              <a:t>214</a:t>
+              <a:t>216</a:t>
             </a:r>
           </a:p>
         </p:txBody>
@@ -38231,7 +38231,7 @@
               </a:defRPr>
             </a:pPr>
             <a:r>
-              <a:t>214</a:t>
+              <a:t>216</a:t>
             </a:r>
           </a:p>
         </p:txBody>
@@ -38375,7 +38375,7 @@
               </a:defRPr>
             </a:pPr>
             <a:r>
-              <a:t>7626</a:t>
+              <a:t>7795</a:t>
             </a:r>
           </a:p>
         </p:txBody>
@@ -38411,7 +38411,7 @@
               </a:defRPr>
             </a:pPr>
             <a:r>
-              <a:t>297</a:t>
+              <a:t>303</a:t>
             </a:r>
           </a:p>
         </p:txBody>
@@ -38447,7 +38447,7 @@
               </a:defRPr>
             </a:pPr>
             <a:r>
-              <a:t>$8.3M</a:t>
+              <a:t>$8.4M</a:t>
             </a:r>
           </a:p>
         </p:txBody>
@@ -38519,7 +38519,7 @@
               </a:defRPr>
             </a:pPr>
             <a:r>
-              <a:t>$2.8M</a:t>
+              <a:t>$2.9M</a:t>
             </a:r>
           </a:p>
         </p:txBody>
@@ -39134,7 +39134,7 @@
               </a:defRPr>
             </a:pPr>
             <a:r>
-              <a:t>Retail-vertical agencies in each rep's HubSpot portfolio with zero 2026 submissions  |  Refreshed 2026-05-27</a:t>
+              <a:t>Retail-vertical agencies in each rep's HubSpot portfolio with zero 2026 submissions  |  Refreshed 2026-05-28</a:t>
             </a:r>
           </a:p>
         </p:txBody>
@@ -39170,7 +39170,7 @@
               </a:defRPr>
             </a:pPr>
             <a:r>
-              <a:t>Generated May 27, 2026</a:t>
+              <a:t>Generated May 28, 2026</a:t>
             </a:r>
           </a:p>
         </p:txBody>
@@ -41443,7 +41443,7 @@
               </a:defRPr>
             </a:pPr>
             <a:r>
-              <a:t>Generated May 27, 2026</a:t>
+              <a:t>Generated May 28, 2026</a:t>
             </a:r>
           </a:p>
         </p:txBody>
@@ -41608,7 +41608,7 @@
               </a:defRPr>
             </a:pPr>
             <a:r>
-              <a:t>Ranked by Q2 GWP (left) and Q2 Submissions (right)  ·  Mint-shaded row = new vs last week’s deck  ·  Apr 1–May 27</a:t>
+              <a:t>Ranked by Q2 GWP (left) and Q2 Submissions (right)  ·  Mint-shaded row = new vs last week’s deck  ·  Apr 1–May 28</a:t>
             </a:r>
           </a:p>
         </p:txBody>
@@ -41644,7 +41644,7 @@
               </a:defRPr>
             </a:pPr>
             <a:r>
-              <a:t>Generated May 27, 2026</a:t>
+              <a:t>Generated May 28, 2026</a:t>
             </a:r>
           </a:p>
         </p:txBody>
@@ -42097,7 +42097,7 @@
               </a:defRPr>
             </a:pPr>
             <a:r>
-              <a:t>$3.1M</a:t>
+              <a:t>$3.0M</a:t>
             </a:r>
           </a:p>
         </p:txBody>
@@ -42212,7 +42212,7 @@
               </a:defRPr>
             </a:pPr>
             <a:r>
-              <a:t>Christopher H.</a:t>
+              <a:t>Derek J.</a:t>
             </a:r>
           </a:p>
         </p:txBody>
@@ -42248,7 +42248,7 @@
               </a:defRPr>
             </a:pPr>
             <a:r>
-              <a:t>Commercial Trucking Insurance Agency LLC</a:t>
+              <a:t>Jagdeep Singh Insurance Agency, Inc</a:t>
             </a:r>
           </a:p>
         </p:txBody>
@@ -42284,7 +42284,7 @@
               </a:defRPr>
             </a:pPr>
             <a:r>
-              <a:t>$2.2M</a:t>
+              <a:t>$2.4M</a:t>
             </a:r>
           </a:p>
         </p:txBody>
@@ -42399,7 +42399,7 @@
               </a:defRPr>
             </a:pPr>
             <a:r>
-              <a:t>Derek J.</a:t>
+              <a:t>Christopher H.</a:t>
             </a:r>
           </a:p>
         </p:txBody>
@@ -42435,7 +42435,7 @@
               </a:defRPr>
             </a:pPr>
             <a:r>
-              <a:t>Reliance Partners, LLC</a:t>
+              <a:t>Commercial Trucking Insurance Agency LLC</a:t>
             </a:r>
           </a:p>
         </p:txBody>
@@ -42471,7 +42471,7 @@
               </a:defRPr>
             </a:pPr>
             <a:r>
-              <a:t>$2.1M</a:t>
+              <a:t>$2.2M</a:t>
             </a:r>
           </a:p>
         </p:txBody>
@@ -42622,7 +42622,7 @@
               </a:defRPr>
             </a:pPr>
             <a:r>
-              <a:t>Jagdeep Singh Insurance Agency, Inc</a:t>
+              <a:t>Reliance Partners, LLC</a:t>
             </a:r>
           </a:p>
         </p:txBody>
@@ -42658,7 +42658,7 @@
               </a:defRPr>
             </a:pPr>
             <a:r>
-              <a:t>$1.9M</a:t>
+              <a:t>$2.1M</a:t>
             </a:r>
           </a:p>
         </p:txBody>
@@ -42845,7 +42845,7 @@
               </a:defRPr>
             </a:pPr>
             <a:r>
-              <a:t>$1.8M</a:t>
+              <a:t>$1.7M</a:t>
             </a:r>
           </a:p>
         </p:txBody>
@@ -43032,7 +43032,7 @@
               </a:defRPr>
             </a:pPr>
             <a:r>
-              <a:t>$1.6M</a:t>
+              <a:t>$1.7M</a:t>
             </a:r>
           </a:p>
         </p:txBody>
@@ -43147,7 +43147,7 @@
               </a:defRPr>
             </a:pPr>
             <a:r>
-              <a:t>Derek J.</a:t>
+              <a:t>Derrick L.</a:t>
             </a:r>
           </a:p>
         </p:txBody>
@@ -43183,7 +43183,7 @@
               </a:defRPr>
             </a:pPr>
             <a:r>
-              <a:t>Safeline Insurance Agency, Inc.</a:t>
+              <a:t>American Fleet Insurance</a:t>
             </a:r>
           </a:p>
         </p:txBody>
@@ -43219,7 +43219,7 @@
               </a:defRPr>
             </a:pPr>
             <a:r>
-              <a:t>$1.5M</a:t>
+              <a:t>$1.4M</a:t>
             </a:r>
           </a:p>
         </p:txBody>
@@ -43334,7 +43334,7 @@
               </a:defRPr>
             </a:pPr>
             <a:r>
-              <a:t>Derrick L.</a:t>
+              <a:t>Derek J.</a:t>
             </a:r>
           </a:p>
         </p:txBody>
@@ -43370,7 +43370,7 @@
               </a:defRPr>
             </a:pPr>
             <a:r>
-              <a:t>American Fleet Insurance</a:t>
+              <a:t>CASCADE INSURANCE SERVICES INC DBA: CASC…</a:t>
             </a:r>
           </a:p>
         </p:txBody>
@@ -43708,7 +43708,7 @@
               </a:defRPr>
             </a:pPr>
             <a:r>
-              <a:t>Derek J.</a:t>
+              <a:t>Ron D.</a:t>
             </a:r>
           </a:p>
         </p:txBody>
@@ -43744,7 +43744,7 @@
               </a:defRPr>
             </a:pPr>
             <a:r>
-              <a:t>CASCADE INSURANCE SERVICES INC DBA: CASC…</a:t>
+              <a:t>Insurance4Truckers LLC</a:t>
             </a:r>
           </a:p>
         </p:txBody>
@@ -43780,7 +43780,7 @@
               </a:defRPr>
             </a:pPr>
             <a:r>
-              <a:t>$1.4M</a:t>
+              <a:t>$1.3M</a:t>
             </a:r>
           </a:p>
         </p:txBody>
@@ -43895,7 +43895,7 @@
               </a:defRPr>
             </a:pPr>
             <a:r>
-              <a:t>Ron D.</a:t>
+              <a:t>Derek J.</a:t>
             </a:r>
           </a:p>
         </p:txBody>
@@ -43931,7 +43931,7 @@
               </a:defRPr>
             </a:pPr>
             <a:r>
-              <a:t>Insurance4Truckers LLC</a:t>
+              <a:t>Safeline Insurance Agency, Inc.</a:t>
             </a:r>
           </a:p>
         </p:txBody>
@@ -44082,7 +44082,7 @@
               </a:defRPr>
             </a:pPr>
             <a:r>
-              <a:t>Derek J.</a:t>
+              <a:t>Ron D.</a:t>
             </a:r>
           </a:p>
         </p:txBody>
@@ -44118,7 +44118,7 @@
               </a:defRPr>
             </a:pPr>
             <a:r>
-              <a:t>Surefire Insurance Agency Corp.</a:t>
+              <a:t>Valion Security LLC</a:t>
             </a:r>
           </a:p>
         </p:txBody>
@@ -44154,7 +44154,7 @@
               </a:defRPr>
             </a:pPr>
             <a:r>
-              <a:t>$1.0M</a:t>
+              <a:t>$1.1M</a:t>
             </a:r>
           </a:p>
         </p:txBody>
@@ -44269,7 +44269,7 @@
               </a:defRPr>
             </a:pPr>
             <a:r>
-              <a:t>Alexis B.</a:t>
+              <a:t>Kurt B.</a:t>
             </a:r>
           </a:p>
         </p:txBody>
@@ -44305,7 +44305,7 @@
               </a:defRPr>
             </a:pPr>
             <a:r>
-              <a:t>A.S.I.A Inc</a:t>
+              <a:t>Fino Services LLC</a:t>
             </a:r>
           </a:p>
         </p:txBody>
@@ -44456,7 +44456,7 @@
               </a:defRPr>
             </a:pPr>
             <a:r>
-              <a:t>Kurt B.</a:t>
+              <a:t>Alexis B.</a:t>
             </a:r>
           </a:p>
         </p:txBody>
@@ -44492,7 +44492,7 @@
               </a:defRPr>
             </a:pPr>
             <a:r>
-              <a:t>Fino Services LLC</a:t>
+              <a:t>A.S.I.A Inc</a:t>
             </a:r>
           </a:p>
         </p:txBody>
@@ -44528,7 +44528,7 @@
               </a:defRPr>
             </a:pPr>
             <a:r>
-              <a:t>$966K</a:t>
+              <a:t>$991K</a:t>
             </a:r>
           </a:p>
         </p:txBody>
@@ -44679,7 +44679,7 @@
               </a:defRPr>
             </a:pPr>
             <a:r>
-              <a:t>Valion Security LLC</a:t>
+              <a:t>Prestige International Insurance Group I…</a:t>
             </a:r>
           </a:p>
         </p:txBody>
@@ -44715,7 +44715,7 @@
               </a:defRPr>
             </a:pPr>
             <a:r>
-              <a:t>$957K</a:t>
+              <a:t>$831K</a:t>
             </a:r>
           </a:p>
         </p:txBody>
@@ -44830,7 +44830,7 @@
               </a:defRPr>
             </a:pPr>
             <a:r>
-              <a:t>Ron D.</a:t>
+              <a:t>Derek J.</a:t>
             </a:r>
           </a:p>
         </p:txBody>
@@ -44866,7 +44866,7 @@
               </a:defRPr>
             </a:pPr>
             <a:r>
-              <a:t>Prestige International Insurance Group I…</a:t>
+              <a:t>Vintage Insurance Agency Inc (The)</a:t>
             </a:r>
           </a:p>
         </p:txBody>
@@ -44902,7 +44902,7 @@
               </a:defRPr>
             </a:pPr>
             <a:r>
-              <a:t>$831K</a:t>
+              <a:t>$775K</a:t>
             </a:r>
           </a:p>
         </p:txBody>
@@ -45089,7 +45089,7 @@
               </a:defRPr>
             </a:pPr>
             <a:r>
-              <a:t>$774K</a:t>
+              <a:t>$764K</a:t>
             </a:r>
           </a:p>
         </p:txBody>
@@ -45240,7 +45240,7 @@
               </a:defRPr>
             </a:pPr>
             <a:r>
-              <a:t>Vintage Insurance Agency Inc (The)</a:t>
+              <a:t>Surefire Insurance Agency Corp.</a:t>
             </a:r>
           </a:p>
         </p:txBody>
@@ -45276,7 +45276,7 @@
               </a:defRPr>
             </a:pPr>
             <a:r>
-              <a:t>$723K</a:t>
+              <a:t>$737K</a:t>
             </a:r>
           </a:p>
         </p:txBody>
@@ -45290,6 +45290,646 @@
         <p:spPr>
           <a:xfrm>
             <a:off x="228600" y="5596127"/>
+            <a:ext cx="5742432" cy="237744"/>
+          </a:xfrm>
+          <a:prstGeom prst="rect">
+            <a:avLst/>
+          </a:prstGeom>
+          <a:solidFill>
+            <a:srgbClr val="D1FAE5"/>
+          </a:solidFill>
+          <a:ln>
+            <a:noFill/>
+          </a:ln>
+        </p:spPr>
+        <p:style>
+          <a:lnRef idx="1">
+            <a:schemeClr val="accent1"/>
+          </a:lnRef>
+          <a:fillRef idx="3">
+            <a:schemeClr val="accent1"/>
+          </a:fillRef>
+          <a:effectRef idx="2">
+            <a:schemeClr val="accent1"/>
+          </a:effectRef>
+          <a:fontRef idx="minor">
+            <a:schemeClr val="lt1"/>
+          </a:fontRef>
+        </p:style>
+        <p:txBody>
+          <a:bodyPr rtlCol="0" anchor="ctr"/>
+          <a:lstStyle/>
+          <a:p>
+            <a:pPr algn="ctr"/>
+          </a:p>
+        </p:txBody>
+      </p:sp>
+      <p:sp>
+        <p:nvSpPr>
+          <p:cNvPr id="104" name="TextBox 103"/>
+          <p:cNvSpPr txBox="1"/>
+          <p:nvPr/>
+        </p:nvSpPr>
+        <p:spPr>
+          <a:xfrm>
+            <a:off x="228600" y="5614415"/>
+            <a:ext cx="347472" cy="219456"/>
+          </a:xfrm>
+          <a:prstGeom prst="rect">
+            <a:avLst/>
+          </a:prstGeom>
+          <a:noFill/>
+        </p:spPr>
+        <p:txBody>
+          <a:bodyPr wrap="square">
+            <a:spAutoFit/>
+          </a:bodyPr>
+          <a:lstStyle/>
+          <a:p>
+            <a:pPr algn="ctr">
+              <a:defRPr sz="950" b="1">
+                <a:solidFill>
+                  <a:srgbClr val="111827"/>
+                </a:solidFill>
+                <a:latin typeface="Calibri"/>
+              </a:defRPr>
+            </a:pPr>
+            <a:r>
+              <a:t>19</a:t>
+            </a:r>
+          </a:p>
+        </p:txBody>
+      </p:sp>
+      <p:sp>
+        <p:nvSpPr>
+          <p:cNvPr id="105" name="TextBox 104"/>
+          <p:cNvSpPr txBox="1"/>
+          <p:nvPr/>
+        </p:nvSpPr>
+        <p:spPr>
+          <a:xfrm>
+            <a:off x="576072" y="5614415"/>
+            <a:ext cx="1005840" cy="219456"/>
+          </a:xfrm>
+          <a:prstGeom prst="rect">
+            <a:avLst/>
+          </a:prstGeom>
+          <a:noFill/>
+        </p:spPr>
+        <p:txBody>
+          <a:bodyPr wrap="square">
+            <a:spAutoFit/>
+          </a:bodyPr>
+          <a:lstStyle/>
+          <a:p>
+            <a:pPr algn="ctr">
+              <a:defRPr sz="950" b="1">
+                <a:solidFill>
+                  <a:srgbClr val="111827"/>
+                </a:solidFill>
+                <a:latin typeface="Calibri"/>
+              </a:defRPr>
+            </a:pPr>
+            <a:r>
+              <a:t>Derek J.</a:t>
+            </a:r>
+          </a:p>
+        </p:txBody>
+      </p:sp>
+      <p:sp>
+        <p:nvSpPr>
+          <p:cNvPr id="106" name="TextBox 105"/>
+          <p:cNvSpPr txBox="1"/>
+          <p:nvPr/>
+        </p:nvSpPr>
+        <p:spPr>
+          <a:xfrm>
+            <a:off x="1581912" y="5614415"/>
+            <a:ext cx="3474720" cy="219456"/>
+          </a:xfrm>
+          <a:prstGeom prst="rect">
+            <a:avLst/>
+          </a:prstGeom>
+          <a:noFill/>
+        </p:spPr>
+        <p:txBody>
+          <a:bodyPr wrap="square">
+            <a:spAutoFit/>
+          </a:bodyPr>
+          <a:lstStyle/>
+          <a:p>
+            <a:pPr algn="l">
+              <a:defRPr sz="950" b="0">
+                <a:solidFill>
+                  <a:srgbClr val="111827"/>
+                </a:solidFill>
+                <a:latin typeface="Calibri"/>
+              </a:defRPr>
+            </a:pPr>
+            <a:r>
+              <a:t>Sedge Insurance Agency LLC</a:t>
+            </a:r>
+          </a:p>
+        </p:txBody>
+      </p:sp>
+      <p:sp>
+        <p:nvSpPr>
+          <p:cNvPr id="107" name="TextBox 106"/>
+          <p:cNvSpPr txBox="1"/>
+          <p:nvPr/>
+        </p:nvSpPr>
+        <p:spPr>
+          <a:xfrm>
+            <a:off x="5056631" y="5614415"/>
+            <a:ext cx="914400" cy="219456"/>
+          </a:xfrm>
+          <a:prstGeom prst="rect">
+            <a:avLst/>
+          </a:prstGeom>
+          <a:noFill/>
+        </p:spPr>
+        <p:txBody>
+          <a:bodyPr wrap="square">
+            <a:spAutoFit/>
+          </a:bodyPr>
+          <a:lstStyle/>
+          <a:p>
+            <a:pPr algn="ctr">
+              <a:defRPr sz="950" b="1">
+                <a:solidFill>
+                  <a:srgbClr val="111827"/>
+                </a:solidFill>
+                <a:latin typeface="Calibri"/>
+              </a:defRPr>
+            </a:pPr>
+            <a:r>
+              <a:t>$600K</a:t>
+            </a:r>
+          </a:p>
+        </p:txBody>
+      </p:sp>
+      <p:sp>
+        <p:nvSpPr>
+          <p:cNvPr id="108" name="Rectangle 107"/>
+          <p:cNvSpPr/>
+          <p:nvPr/>
+        </p:nvSpPr>
+        <p:spPr>
+          <a:xfrm>
+            <a:off x="228600" y="5833871"/>
+            <a:ext cx="5742432" cy="237744"/>
+          </a:xfrm>
+          <a:prstGeom prst="rect">
+            <a:avLst/>
+          </a:prstGeom>
+          <a:solidFill>
+            <a:srgbClr val="F9FAFB"/>
+          </a:solidFill>
+          <a:ln>
+            <a:noFill/>
+          </a:ln>
+        </p:spPr>
+        <p:style>
+          <a:lnRef idx="1">
+            <a:schemeClr val="accent1"/>
+          </a:lnRef>
+          <a:fillRef idx="3">
+            <a:schemeClr val="accent1"/>
+          </a:fillRef>
+          <a:effectRef idx="2">
+            <a:schemeClr val="accent1"/>
+          </a:effectRef>
+          <a:fontRef idx="minor">
+            <a:schemeClr val="lt1"/>
+          </a:fontRef>
+        </p:style>
+        <p:txBody>
+          <a:bodyPr rtlCol="0" anchor="ctr"/>
+          <a:lstStyle/>
+          <a:p>
+            <a:pPr algn="ctr"/>
+          </a:p>
+        </p:txBody>
+      </p:sp>
+      <p:sp>
+        <p:nvSpPr>
+          <p:cNvPr id="109" name="TextBox 108"/>
+          <p:cNvSpPr txBox="1"/>
+          <p:nvPr/>
+        </p:nvSpPr>
+        <p:spPr>
+          <a:xfrm>
+            <a:off x="228600" y="5852159"/>
+            <a:ext cx="347472" cy="219456"/>
+          </a:xfrm>
+          <a:prstGeom prst="rect">
+            <a:avLst/>
+          </a:prstGeom>
+          <a:noFill/>
+        </p:spPr>
+        <p:txBody>
+          <a:bodyPr wrap="square">
+            <a:spAutoFit/>
+          </a:bodyPr>
+          <a:lstStyle/>
+          <a:p>
+            <a:pPr algn="ctr">
+              <a:defRPr sz="950" b="1">
+                <a:solidFill>
+                  <a:srgbClr val="111827"/>
+                </a:solidFill>
+                <a:latin typeface="Calibri"/>
+              </a:defRPr>
+            </a:pPr>
+            <a:r>
+              <a:t>20</a:t>
+            </a:r>
+          </a:p>
+        </p:txBody>
+      </p:sp>
+      <p:sp>
+        <p:nvSpPr>
+          <p:cNvPr id="110" name="TextBox 109"/>
+          <p:cNvSpPr txBox="1"/>
+          <p:nvPr/>
+        </p:nvSpPr>
+        <p:spPr>
+          <a:xfrm>
+            <a:off x="576072" y="5852159"/>
+            <a:ext cx="1005840" cy="219456"/>
+          </a:xfrm>
+          <a:prstGeom prst="rect">
+            <a:avLst/>
+          </a:prstGeom>
+          <a:noFill/>
+        </p:spPr>
+        <p:txBody>
+          <a:bodyPr wrap="square">
+            <a:spAutoFit/>
+          </a:bodyPr>
+          <a:lstStyle/>
+          <a:p>
+            <a:pPr algn="ctr">
+              <a:defRPr sz="950" b="1">
+                <a:solidFill>
+                  <a:srgbClr val="111827"/>
+                </a:solidFill>
+                <a:latin typeface="Calibri"/>
+              </a:defRPr>
+            </a:pPr>
+            <a:r>
+              <a:t>Derrick L.</a:t>
+            </a:r>
+          </a:p>
+        </p:txBody>
+      </p:sp>
+      <p:sp>
+        <p:nvSpPr>
+          <p:cNvPr id="111" name="TextBox 110"/>
+          <p:cNvSpPr txBox="1"/>
+          <p:nvPr/>
+        </p:nvSpPr>
+        <p:spPr>
+          <a:xfrm>
+            <a:off x="1581912" y="5852159"/>
+            <a:ext cx="3474720" cy="219456"/>
+          </a:xfrm>
+          <a:prstGeom prst="rect">
+            <a:avLst/>
+          </a:prstGeom>
+          <a:noFill/>
+        </p:spPr>
+        <p:txBody>
+          <a:bodyPr wrap="square">
+            <a:spAutoFit/>
+          </a:bodyPr>
+          <a:lstStyle/>
+          <a:p>
+            <a:pPr algn="l">
+              <a:defRPr sz="950" b="0">
+                <a:solidFill>
+                  <a:srgbClr val="111827"/>
+                </a:solidFill>
+                <a:latin typeface="Calibri"/>
+              </a:defRPr>
+            </a:pPr>
+            <a:r>
+              <a:t>Justin Wilson</a:t>
+            </a:r>
+          </a:p>
+        </p:txBody>
+      </p:sp>
+      <p:sp>
+        <p:nvSpPr>
+          <p:cNvPr id="112" name="TextBox 111"/>
+          <p:cNvSpPr txBox="1"/>
+          <p:nvPr/>
+        </p:nvSpPr>
+        <p:spPr>
+          <a:xfrm>
+            <a:off x="5056631" y="5852159"/>
+            <a:ext cx="914400" cy="219456"/>
+          </a:xfrm>
+          <a:prstGeom prst="rect">
+            <a:avLst/>
+          </a:prstGeom>
+          <a:noFill/>
+        </p:spPr>
+        <p:txBody>
+          <a:bodyPr wrap="square">
+            <a:spAutoFit/>
+          </a:bodyPr>
+          <a:lstStyle/>
+          <a:p>
+            <a:pPr algn="ctr">
+              <a:defRPr sz="950" b="1">
+                <a:solidFill>
+                  <a:srgbClr val="111827"/>
+                </a:solidFill>
+                <a:latin typeface="Calibri"/>
+              </a:defRPr>
+            </a:pPr>
+            <a:r>
+              <a:t>$595K</a:t>
+            </a:r>
+          </a:p>
+        </p:txBody>
+      </p:sp>
+      <p:sp>
+        <p:nvSpPr>
+          <p:cNvPr id="113" name="Rectangle 112"/>
+          <p:cNvSpPr/>
+          <p:nvPr/>
+        </p:nvSpPr>
+        <p:spPr>
+          <a:xfrm>
+            <a:off x="6291072" y="841248"/>
+            <a:ext cx="5779008" cy="237744"/>
+          </a:xfrm>
+          <a:prstGeom prst="rect">
+            <a:avLst/>
+          </a:prstGeom>
+          <a:solidFill>
+            <a:srgbClr val="1E073B"/>
+          </a:solidFill>
+          <a:ln>
+            <a:noFill/>
+          </a:ln>
+        </p:spPr>
+        <p:style>
+          <a:lnRef idx="1">
+            <a:schemeClr val="accent1"/>
+          </a:lnRef>
+          <a:fillRef idx="3">
+            <a:schemeClr val="accent1"/>
+          </a:fillRef>
+          <a:effectRef idx="2">
+            <a:schemeClr val="accent1"/>
+          </a:effectRef>
+          <a:fontRef idx="minor">
+            <a:schemeClr val="lt1"/>
+          </a:fontRef>
+        </p:style>
+        <p:txBody>
+          <a:bodyPr rtlCol="0" anchor="ctr"/>
+          <a:lstStyle/>
+          <a:p>
+            <a:pPr algn="ctr"/>
+          </a:p>
+        </p:txBody>
+      </p:sp>
+      <p:sp>
+        <p:nvSpPr>
+          <p:cNvPr id="114" name="TextBox 113"/>
+          <p:cNvSpPr txBox="1"/>
+          <p:nvPr/>
+        </p:nvSpPr>
+        <p:spPr>
+          <a:xfrm>
+            <a:off x="6364224" y="868680"/>
+            <a:ext cx="5742432" cy="182880"/>
+          </a:xfrm>
+          <a:prstGeom prst="rect">
+            <a:avLst/>
+          </a:prstGeom>
+          <a:noFill/>
+        </p:spPr>
+        <p:txBody>
+          <a:bodyPr wrap="square">
+            <a:spAutoFit/>
+          </a:bodyPr>
+          <a:lstStyle/>
+          <a:p>
+            <a:pPr algn="l">
+              <a:defRPr sz="900" b="1">
+                <a:solidFill>
+                  <a:srgbClr val="FFFFFF"/>
+                </a:solidFill>
+                <a:latin typeface="Calibri"/>
+              </a:defRPr>
+            </a:pPr>
+            <a:r>
+              <a:t>Top 20 Agencies — Q2 Submissions</a:t>
+            </a:r>
+          </a:p>
+        </p:txBody>
+      </p:sp>
+      <p:sp>
+        <p:nvSpPr>
+          <p:cNvPr id="115" name="TextBox 114"/>
+          <p:cNvSpPr txBox="1"/>
+          <p:nvPr/>
+        </p:nvSpPr>
+        <p:spPr>
+          <a:xfrm>
+            <a:off x="6291072" y="1097280"/>
+            <a:ext cx="347472" cy="201168"/>
+          </a:xfrm>
+          <a:prstGeom prst="rect">
+            <a:avLst/>
+          </a:prstGeom>
+          <a:noFill/>
+        </p:spPr>
+        <p:txBody>
+          <a:bodyPr wrap="square">
+            <a:spAutoFit/>
+          </a:bodyPr>
+          <a:lstStyle/>
+          <a:p>
+            <a:pPr algn="ctr">
+              <a:defRPr sz="850" b="1">
+                <a:solidFill>
+                  <a:srgbClr val="6B7280"/>
+                </a:solidFill>
+                <a:latin typeface="Calibri"/>
+              </a:defRPr>
+            </a:pPr>
+            <a:r>
+              <a:t>#</a:t>
+            </a:r>
+          </a:p>
+        </p:txBody>
+      </p:sp>
+      <p:sp>
+        <p:nvSpPr>
+          <p:cNvPr id="116" name="TextBox 115"/>
+          <p:cNvSpPr txBox="1"/>
+          <p:nvPr/>
+        </p:nvSpPr>
+        <p:spPr>
+          <a:xfrm>
+            <a:off x="6638544" y="1097280"/>
+            <a:ext cx="1005840" cy="201168"/>
+          </a:xfrm>
+          <a:prstGeom prst="rect">
+            <a:avLst/>
+          </a:prstGeom>
+          <a:noFill/>
+        </p:spPr>
+        <p:txBody>
+          <a:bodyPr wrap="square">
+            <a:spAutoFit/>
+          </a:bodyPr>
+          <a:lstStyle/>
+          <a:p>
+            <a:pPr algn="ctr">
+              <a:defRPr sz="850" b="1">
+                <a:solidFill>
+                  <a:srgbClr val="6B7280"/>
+                </a:solidFill>
+                <a:latin typeface="Calibri"/>
+              </a:defRPr>
+            </a:pPr>
+            <a:r>
+              <a:t>Rep</a:t>
+            </a:r>
+          </a:p>
+        </p:txBody>
+      </p:sp>
+      <p:sp>
+        <p:nvSpPr>
+          <p:cNvPr id="117" name="TextBox 116"/>
+          <p:cNvSpPr txBox="1"/>
+          <p:nvPr/>
+        </p:nvSpPr>
+        <p:spPr>
+          <a:xfrm>
+            <a:off x="7644383" y="1097280"/>
+            <a:ext cx="3474720" cy="201168"/>
+          </a:xfrm>
+          <a:prstGeom prst="rect">
+            <a:avLst/>
+          </a:prstGeom>
+          <a:noFill/>
+        </p:spPr>
+        <p:txBody>
+          <a:bodyPr wrap="square">
+            <a:spAutoFit/>
+          </a:bodyPr>
+          <a:lstStyle/>
+          <a:p>
+            <a:pPr algn="l">
+              <a:defRPr sz="850" b="1">
+                <a:solidFill>
+                  <a:srgbClr val="6B7280"/>
+                </a:solidFill>
+                <a:latin typeface="Calibri"/>
+              </a:defRPr>
+            </a:pPr>
+            <a:r>
+              <a:t>Agency</a:t>
+            </a:r>
+          </a:p>
+        </p:txBody>
+      </p:sp>
+      <p:sp>
+        <p:nvSpPr>
+          <p:cNvPr id="118" name="TextBox 117"/>
+          <p:cNvSpPr txBox="1"/>
+          <p:nvPr/>
+        </p:nvSpPr>
+        <p:spPr>
+          <a:xfrm>
+            <a:off x="11119104" y="1097280"/>
+            <a:ext cx="914400" cy="201168"/>
+          </a:xfrm>
+          <a:prstGeom prst="rect">
+            <a:avLst/>
+          </a:prstGeom>
+          <a:noFill/>
+        </p:spPr>
+        <p:txBody>
+          <a:bodyPr wrap="square">
+            <a:spAutoFit/>
+          </a:bodyPr>
+          <a:lstStyle/>
+          <a:p>
+            <a:pPr algn="ctr">
+              <a:defRPr sz="850" b="1">
+                <a:solidFill>
+                  <a:srgbClr val="6B7280"/>
+                </a:solidFill>
+                <a:latin typeface="Calibri"/>
+              </a:defRPr>
+            </a:pPr>
+            <a:r>
+              <a:t>Q2 Subs</a:t>
+            </a:r>
+          </a:p>
+        </p:txBody>
+      </p:sp>
+      <p:sp>
+        <p:nvSpPr>
+          <p:cNvPr id="119" name="Rectangle 118"/>
+          <p:cNvSpPr/>
+          <p:nvPr/>
+        </p:nvSpPr>
+        <p:spPr>
+          <a:xfrm>
+            <a:off x="6291072" y="1298448"/>
+            <a:ext cx="5742432" cy="9144"/>
+          </a:xfrm>
+          <a:prstGeom prst="rect">
+            <a:avLst/>
+          </a:prstGeom>
+          <a:solidFill>
+            <a:srgbClr val="E5E7EB"/>
+          </a:solidFill>
+          <a:ln>
+            <a:noFill/>
+          </a:ln>
+        </p:spPr>
+        <p:style>
+          <a:lnRef idx="1">
+            <a:schemeClr val="accent1"/>
+          </a:lnRef>
+          <a:fillRef idx="3">
+            <a:schemeClr val="accent1"/>
+          </a:fillRef>
+          <a:effectRef idx="2">
+            <a:schemeClr val="accent1"/>
+          </a:effectRef>
+          <a:fontRef idx="minor">
+            <a:schemeClr val="lt1"/>
+          </a:fontRef>
+        </p:style>
+        <p:txBody>
+          <a:bodyPr rtlCol="0" anchor="ctr"/>
+          <a:lstStyle/>
+          <a:p>
+            <a:pPr algn="ctr"/>
+          </a:p>
+        </p:txBody>
+      </p:sp>
+      <p:sp>
+        <p:nvSpPr>
+          <p:cNvPr id="120" name="Rectangle 119"/>
+          <p:cNvSpPr/>
+          <p:nvPr/>
+        </p:nvSpPr>
+        <p:spPr>
+          <a:xfrm>
+            <a:off x="6291072" y="1316736"/>
             <a:ext cx="5742432" cy="237744"/>
           </a:xfrm>
           <a:prstGeom prst="rect">
@@ -45326,13 +45966,13 @@
       </p:sp>
       <p:sp>
         <p:nvSpPr>
-          <p:cNvPr id="104" name="TextBox 103"/>
-          <p:cNvSpPr txBox="1"/>
-          <p:nvPr/>
-        </p:nvSpPr>
-        <p:spPr>
-          <a:xfrm>
-            <a:off x="228600" y="5614415"/>
+          <p:cNvPr id="121" name="TextBox 120"/>
+          <p:cNvSpPr txBox="1"/>
+          <p:nvPr/>
+        </p:nvSpPr>
+        <p:spPr>
+          <a:xfrm>
+            <a:off x="6291072" y="1335024"/>
             <a:ext cx="347472" cy="219456"/>
           </a:xfrm>
           <a:prstGeom prst="rect">
@@ -45355,20 +45995,20 @@
               </a:defRPr>
             </a:pPr>
             <a:r>
-              <a:t>19</a:t>
-            </a:r>
-          </a:p>
-        </p:txBody>
-      </p:sp>
-      <p:sp>
-        <p:nvSpPr>
-          <p:cNvPr id="105" name="TextBox 104"/>
-          <p:cNvSpPr txBox="1"/>
-          <p:nvPr/>
-        </p:nvSpPr>
-        <p:spPr>
-          <a:xfrm>
-            <a:off x="576072" y="5614415"/>
+              <a:t>1</a:t>
+            </a:r>
+          </a:p>
+        </p:txBody>
+      </p:sp>
+      <p:sp>
+        <p:nvSpPr>
+          <p:cNvPr id="122" name="TextBox 121"/>
+          <p:cNvSpPr txBox="1"/>
+          <p:nvPr/>
+        </p:nvSpPr>
+        <p:spPr>
+          <a:xfrm>
+            <a:off x="6638544" y="1335024"/>
             <a:ext cx="1005840" cy="219456"/>
           </a:xfrm>
           <a:prstGeom prst="rect">
@@ -45391,20 +46031,20 @@
               </a:defRPr>
             </a:pPr>
             <a:r>
-              <a:t>Derrick L.</a:t>
-            </a:r>
-          </a:p>
-        </p:txBody>
-      </p:sp>
-      <p:sp>
-        <p:nvSpPr>
-          <p:cNvPr id="106" name="TextBox 105"/>
-          <p:cNvSpPr txBox="1"/>
-          <p:nvPr/>
-        </p:nvSpPr>
-        <p:spPr>
-          <a:xfrm>
-            <a:off x="1581912" y="5614415"/>
+              <a:t>Derek J.</a:t>
+            </a:r>
+          </a:p>
+        </p:txBody>
+      </p:sp>
+      <p:sp>
+        <p:nvSpPr>
+          <p:cNvPr id="123" name="TextBox 122"/>
+          <p:cNvSpPr txBox="1"/>
+          <p:nvPr/>
+        </p:nvSpPr>
+        <p:spPr>
+          <a:xfrm>
+            <a:off x="7644383" y="1335024"/>
             <a:ext cx="3474720" cy="219456"/>
           </a:xfrm>
           <a:prstGeom prst="rect">
@@ -45427,20 +46067,20 @@
               </a:defRPr>
             </a:pPr>
             <a:r>
-              <a:t>Justin Wilson</a:t>
-            </a:r>
-          </a:p>
-        </p:txBody>
-      </p:sp>
-      <p:sp>
-        <p:nvSpPr>
-          <p:cNvPr id="107" name="TextBox 106"/>
-          <p:cNvSpPr txBox="1"/>
-          <p:nvPr/>
-        </p:nvSpPr>
-        <p:spPr>
-          <a:xfrm>
-            <a:off x="5056631" y="5614415"/>
+              <a:t>Reliance Partners, LLC</a:t>
+            </a:r>
+          </a:p>
+        </p:txBody>
+      </p:sp>
+      <p:sp>
+        <p:nvSpPr>
+          <p:cNvPr id="124" name="TextBox 123"/>
+          <p:cNvSpPr txBox="1"/>
+          <p:nvPr/>
+        </p:nvSpPr>
+        <p:spPr>
+          <a:xfrm>
+            <a:off x="11119104" y="1335024"/>
             <a:ext cx="914400" cy="219456"/>
           </a:xfrm>
           <a:prstGeom prst="rect">
@@ -45463,27 +46103,27 @@
               </a:defRPr>
             </a:pPr>
             <a:r>
-              <a:t>$640K</a:t>
-            </a:r>
-          </a:p>
-        </p:txBody>
-      </p:sp>
-      <p:sp>
-        <p:nvSpPr>
-          <p:cNvPr id="108" name="Rectangle 107"/>
+              <a:t>2283</a:t>
+            </a:r>
+          </a:p>
+        </p:txBody>
+      </p:sp>
+      <p:sp>
+        <p:nvSpPr>
+          <p:cNvPr id="125" name="Rectangle 124"/>
           <p:cNvSpPr/>
           <p:nvPr/>
         </p:nvSpPr>
         <p:spPr>
           <a:xfrm>
-            <a:off x="228600" y="5833871"/>
+            <a:off x="6291072" y="1554480"/>
             <a:ext cx="5742432" cy="237744"/>
           </a:xfrm>
           <a:prstGeom prst="rect">
             <a:avLst/>
           </a:prstGeom>
           <a:solidFill>
-            <a:srgbClr val="D1FAE5"/>
+            <a:srgbClr val="F9FAFB"/>
           </a:solidFill>
           <a:ln>
             <a:noFill/>
@@ -45513,13 +46153,13 @@
       </p:sp>
       <p:sp>
         <p:nvSpPr>
-          <p:cNvPr id="109" name="TextBox 108"/>
-          <p:cNvSpPr txBox="1"/>
-          <p:nvPr/>
-        </p:nvSpPr>
-        <p:spPr>
-          <a:xfrm>
-            <a:off x="228600" y="5852159"/>
+          <p:cNvPr id="126" name="TextBox 125"/>
+          <p:cNvSpPr txBox="1"/>
+          <p:nvPr/>
+        </p:nvSpPr>
+        <p:spPr>
+          <a:xfrm>
+            <a:off x="6291072" y="1572768"/>
             <a:ext cx="347472" cy="219456"/>
           </a:xfrm>
           <a:prstGeom prst="rect">
@@ -45542,20 +46182,20 @@
               </a:defRPr>
             </a:pPr>
             <a:r>
-              <a:t>20</a:t>
-            </a:r>
-          </a:p>
-        </p:txBody>
-      </p:sp>
-      <p:sp>
-        <p:nvSpPr>
-          <p:cNvPr id="110" name="TextBox 109"/>
-          <p:cNvSpPr txBox="1"/>
-          <p:nvPr/>
-        </p:nvSpPr>
-        <p:spPr>
-          <a:xfrm>
-            <a:off x="576072" y="5852159"/>
+              <a:t>2</a:t>
+            </a:r>
+          </a:p>
+        </p:txBody>
+      </p:sp>
+      <p:sp>
+        <p:nvSpPr>
+          <p:cNvPr id="127" name="TextBox 126"/>
+          <p:cNvSpPr txBox="1"/>
+          <p:nvPr/>
+        </p:nvSpPr>
+        <p:spPr>
+          <a:xfrm>
+            <a:off x="6638544" y="1572768"/>
             <a:ext cx="1005840" cy="219456"/>
           </a:xfrm>
           <a:prstGeom prst="rect">
@@ -45578,20 +46218,20 @@
               </a:defRPr>
             </a:pPr>
             <a:r>
-              <a:t>Christopher H.</a:t>
-            </a:r>
-          </a:p>
-        </p:txBody>
-      </p:sp>
-      <p:sp>
-        <p:nvSpPr>
-          <p:cNvPr id="111" name="TextBox 110"/>
-          <p:cNvSpPr txBox="1"/>
-          <p:nvPr/>
-        </p:nvSpPr>
-        <p:spPr>
-          <a:xfrm>
-            <a:off x="1581912" y="5852159"/>
+              <a:t>Ron D.</a:t>
+            </a:r>
+          </a:p>
+        </p:txBody>
+      </p:sp>
+      <p:sp>
+        <p:nvSpPr>
+          <p:cNvPr id="128" name="TextBox 127"/>
+          <p:cNvSpPr txBox="1"/>
+          <p:nvPr/>
+        </p:nvSpPr>
+        <p:spPr>
+          <a:xfrm>
+            <a:off x="7644383" y="1572768"/>
             <a:ext cx="3474720" cy="219456"/>
           </a:xfrm>
           <a:prstGeom prst="rect">
@@ -45614,20 +46254,20 @@
               </a:defRPr>
             </a:pPr>
             <a:r>
-              <a:t>Velocity Insurance Multiservices LLC</a:t>
-            </a:r>
-          </a:p>
-        </p:txBody>
-      </p:sp>
-      <p:sp>
-        <p:nvSpPr>
-          <p:cNvPr id="112" name="TextBox 111"/>
-          <p:cNvSpPr txBox="1"/>
-          <p:nvPr/>
-        </p:nvSpPr>
-        <p:spPr>
-          <a:xfrm>
-            <a:off x="5056631" y="5852159"/>
+              <a:t>Insurance4Truckers LLC</a:t>
+            </a:r>
+          </a:p>
+        </p:txBody>
+      </p:sp>
+      <p:sp>
+        <p:nvSpPr>
+          <p:cNvPr id="129" name="TextBox 128"/>
+          <p:cNvSpPr txBox="1"/>
+          <p:nvPr/>
+        </p:nvSpPr>
+        <p:spPr>
+          <a:xfrm>
+            <a:off x="11119104" y="1572768"/>
             <a:ext cx="914400" cy="219456"/>
           </a:xfrm>
           <a:prstGeom prst="rect">
@@ -45650,286 +46290,20 @@
               </a:defRPr>
             </a:pPr>
             <a:r>
-              <a:t>$598K</a:t>
-            </a:r>
-          </a:p>
-        </p:txBody>
-      </p:sp>
-      <p:sp>
-        <p:nvSpPr>
-          <p:cNvPr id="113" name="Rectangle 112"/>
+              <a:t>2140</a:t>
+            </a:r>
+          </a:p>
+        </p:txBody>
+      </p:sp>
+      <p:sp>
+        <p:nvSpPr>
+          <p:cNvPr id="130" name="Rectangle 129"/>
           <p:cNvSpPr/>
           <p:nvPr/>
         </p:nvSpPr>
         <p:spPr>
           <a:xfrm>
-            <a:off x="6291072" y="841248"/>
-            <a:ext cx="5779008" cy="237744"/>
-          </a:xfrm>
-          <a:prstGeom prst="rect">
-            <a:avLst/>
-          </a:prstGeom>
-          <a:solidFill>
-            <a:srgbClr val="1E073B"/>
-          </a:solidFill>
-          <a:ln>
-            <a:noFill/>
-          </a:ln>
-        </p:spPr>
-        <p:style>
-          <a:lnRef idx="1">
-            <a:schemeClr val="accent1"/>
-          </a:lnRef>
-          <a:fillRef idx="3">
-            <a:schemeClr val="accent1"/>
-          </a:fillRef>
-          <a:effectRef idx="2">
-            <a:schemeClr val="accent1"/>
-          </a:effectRef>
-          <a:fontRef idx="minor">
-            <a:schemeClr val="lt1"/>
-          </a:fontRef>
-        </p:style>
-        <p:txBody>
-          <a:bodyPr rtlCol="0" anchor="ctr"/>
-          <a:lstStyle/>
-          <a:p>
-            <a:pPr algn="ctr"/>
-          </a:p>
-        </p:txBody>
-      </p:sp>
-      <p:sp>
-        <p:nvSpPr>
-          <p:cNvPr id="114" name="TextBox 113"/>
-          <p:cNvSpPr txBox="1"/>
-          <p:nvPr/>
-        </p:nvSpPr>
-        <p:spPr>
-          <a:xfrm>
-            <a:off x="6364224" y="868680"/>
-            <a:ext cx="5742432" cy="182880"/>
-          </a:xfrm>
-          <a:prstGeom prst="rect">
-            <a:avLst/>
-          </a:prstGeom>
-          <a:noFill/>
-        </p:spPr>
-        <p:txBody>
-          <a:bodyPr wrap="square">
-            <a:spAutoFit/>
-          </a:bodyPr>
-          <a:lstStyle/>
-          <a:p>
-            <a:pPr algn="l">
-              <a:defRPr sz="900" b="1">
-                <a:solidFill>
-                  <a:srgbClr val="FFFFFF"/>
-                </a:solidFill>
-                <a:latin typeface="Calibri"/>
-              </a:defRPr>
-            </a:pPr>
-            <a:r>
-              <a:t>Top 20 Agencies — Q2 Submissions</a:t>
-            </a:r>
-          </a:p>
-        </p:txBody>
-      </p:sp>
-      <p:sp>
-        <p:nvSpPr>
-          <p:cNvPr id="115" name="TextBox 114"/>
-          <p:cNvSpPr txBox="1"/>
-          <p:nvPr/>
-        </p:nvSpPr>
-        <p:spPr>
-          <a:xfrm>
-            <a:off x="6291072" y="1097280"/>
-            <a:ext cx="347472" cy="201168"/>
-          </a:xfrm>
-          <a:prstGeom prst="rect">
-            <a:avLst/>
-          </a:prstGeom>
-          <a:noFill/>
-        </p:spPr>
-        <p:txBody>
-          <a:bodyPr wrap="square">
-            <a:spAutoFit/>
-          </a:bodyPr>
-          <a:lstStyle/>
-          <a:p>
-            <a:pPr algn="ctr">
-              <a:defRPr sz="850" b="1">
-                <a:solidFill>
-                  <a:srgbClr val="6B7280"/>
-                </a:solidFill>
-                <a:latin typeface="Calibri"/>
-              </a:defRPr>
-            </a:pPr>
-            <a:r>
-              <a:t>#</a:t>
-            </a:r>
-          </a:p>
-        </p:txBody>
-      </p:sp>
-      <p:sp>
-        <p:nvSpPr>
-          <p:cNvPr id="116" name="TextBox 115"/>
-          <p:cNvSpPr txBox="1"/>
-          <p:nvPr/>
-        </p:nvSpPr>
-        <p:spPr>
-          <a:xfrm>
-            <a:off x="6638544" y="1097280"/>
-            <a:ext cx="1005840" cy="201168"/>
-          </a:xfrm>
-          <a:prstGeom prst="rect">
-            <a:avLst/>
-          </a:prstGeom>
-          <a:noFill/>
-        </p:spPr>
-        <p:txBody>
-          <a:bodyPr wrap="square">
-            <a:spAutoFit/>
-          </a:bodyPr>
-          <a:lstStyle/>
-          <a:p>
-            <a:pPr algn="ctr">
-              <a:defRPr sz="850" b="1">
-                <a:solidFill>
-                  <a:srgbClr val="6B7280"/>
-                </a:solidFill>
-                <a:latin typeface="Calibri"/>
-              </a:defRPr>
-            </a:pPr>
-            <a:r>
-              <a:t>Rep</a:t>
-            </a:r>
-          </a:p>
-        </p:txBody>
-      </p:sp>
-      <p:sp>
-        <p:nvSpPr>
-          <p:cNvPr id="117" name="TextBox 116"/>
-          <p:cNvSpPr txBox="1"/>
-          <p:nvPr/>
-        </p:nvSpPr>
-        <p:spPr>
-          <a:xfrm>
-            <a:off x="7644383" y="1097280"/>
-            <a:ext cx="3474720" cy="201168"/>
-          </a:xfrm>
-          <a:prstGeom prst="rect">
-            <a:avLst/>
-          </a:prstGeom>
-          <a:noFill/>
-        </p:spPr>
-        <p:txBody>
-          <a:bodyPr wrap="square">
-            <a:spAutoFit/>
-          </a:bodyPr>
-          <a:lstStyle/>
-          <a:p>
-            <a:pPr algn="l">
-              <a:defRPr sz="850" b="1">
-                <a:solidFill>
-                  <a:srgbClr val="6B7280"/>
-                </a:solidFill>
-                <a:latin typeface="Calibri"/>
-              </a:defRPr>
-            </a:pPr>
-            <a:r>
-              <a:t>Agency</a:t>
-            </a:r>
-          </a:p>
-        </p:txBody>
-      </p:sp>
-      <p:sp>
-        <p:nvSpPr>
-          <p:cNvPr id="118" name="TextBox 117"/>
-          <p:cNvSpPr txBox="1"/>
-          <p:nvPr/>
-        </p:nvSpPr>
-        <p:spPr>
-          <a:xfrm>
-            <a:off x="11119104" y="1097280"/>
-            <a:ext cx="914400" cy="201168"/>
-          </a:xfrm>
-          <a:prstGeom prst="rect">
-            <a:avLst/>
-          </a:prstGeom>
-          <a:noFill/>
-        </p:spPr>
-        <p:txBody>
-          <a:bodyPr wrap="square">
-            <a:spAutoFit/>
-          </a:bodyPr>
-          <a:lstStyle/>
-          <a:p>
-            <a:pPr algn="ctr">
-              <a:defRPr sz="850" b="1">
-                <a:solidFill>
-                  <a:srgbClr val="6B7280"/>
-                </a:solidFill>
-                <a:latin typeface="Calibri"/>
-              </a:defRPr>
-            </a:pPr>
-            <a:r>
-              <a:t>Q2 Subs</a:t>
-            </a:r>
-          </a:p>
-        </p:txBody>
-      </p:sp>
-      <p:sp>
-        <p:nvSpPr>
-          <p:cNvPr id="119" name="Rectangle 118"/>
-          <p:cNvSpPr/>
-          <p:nvPr/>
-        </p:nvSpPr>
-        <p:spPr>
-          <a:xfrm>
-            <a:off x="6291072" y="1298448"/>
-            <a:ext cx="5742432" cy="9144"/>
-          </a:xfrm>
-          <a:prstGeom prst="rect">
-            <a:avLst/>
-          </a:prstGeom>
-          <a:solidFill>
-            <a:srgbClr val="E5E7EB"/>
-          </a:solidFill>
-          <a:ln>
-            <a:noFill/>
-          </a:ln>
-        </p:spPr>
-        <p:style>
-          <a:lnRef idx="1">
-            <a:schemeClr val="accent1"/>
-          </a:lnRef>
-          <a:fillRef idx="3">
-            <a:schemeClr val="accent1"/>
-          </a:fillRef>
-          <a:effectRef idx="2">
-            <a:schemeClr val="accent1"/>
-          </a:effectRef>
-          <a:fontRef idx="minor">
-            <a:schemeClr val="lt1"/>
-          </a:fontRef>
-        </p:style>
-        <p:txBody>
-          <a:bodyPr rtlCol="0" anchor="ctr"/>
-          <a:lstStyle/>
-          <a:p>
-            <a:pPr algn="ctr"/>
-          </a:p>
-        </p:txBody>
-      </p:sp>
-      <p:sp>
-        <p:nvSpPr>
-          <p:cNvPr id="120" name="Rectangle 119"/>
-          <p:cNvSpPr/>
-          <p:nvPr/>
-        </p:nvSpPr>
-        <p:spPr>
-          <a:xfrm>
-            <a:off x="6291072" y="1316736"/>
+            <a:off x="6291072" y="1792224"/>
             <a:ext cx="5742432" cy="237744"/>
           </a:xfrm>
           <a:prstGeom prst="rect">
@@ -45966,13 +46340,13 @@
       </p:sp>
       <p:sp>
         <p:nvSpPr>
-          <p:cNvPr id="121" name="TextBox 120"/>
-          <p:cNvSpPr txBox="1"/>
-          <p:nvPr/>
-        </p:nvSpPr>
-        <p:spPr>
-          <a:xfrm>
-            <a:off x="6291072" y="1335024"/>
+          <p:cNvPr id="131" name="TextBox 130"/>
+          <p:cNvSpPr txBox="1"/>
+          <p:nvPr/>
+        </p:nvSpPr>
+        <p:spPr>
+          <a:xfrm>
+            <a:off x="6291072" y="1810512"/>
             <a:ext cx="347472" cy="219456"/>
           </a:xfrm>
           <a:prstGeom prst="rect">
@@ -45995,20 +46369,20 @@
               </a:defRPr>
             </a:pPr>
             <a:r>
-              <a:t>1</a:t>
-            </a:r>
-          </a:p>
-        </p:txBody>
-      </p:sp>
-      <p:sp>
-        <p:nvSpPr>
-          <p:cNvPr id="122" name="TextBox 121"/>
-          <p:cNvSpPr txBox="1"/>
-          <p:nvPr/>
-        </p:nvSpPr>
-        <p:spPr>
-          <a:xfrm>
-            <a:off x="6638544" y="1335024"/>
+              <a:t>3</a:t>
+            </a:r>
+          </a:p>
+        </p:txBody>
+      </p:sp>
+      <p:sp>
+        <p:nvSpPr>
+          <p:cNvPr id="132" name="TextBox 131"/>
+          <p:cNvSpPr txBox="1"/>
+          <p:nvPr/>
+        </p:nvSpPr>
+        <p:spPr>
+          <a:xfrm>
+            <a:off x="6638544" y="1810512"/>
             <a:ext cx="1005840" cy="219456"/>
           </a:xfrm>
           <a:prstGeom prst="rect">
@@ -46031,20 +46405,20 @@
               </a:defRPr>
             </a:pPr>
             <a:r>
-              <a:t>Derek J.</a:t>
-            </a:r>
-          </a:p>
-        </p:txBody>
-      </p:sp>
-      <p:sp>
-        <p:nvSpPr>
-          <p:cNvPr id="123" name="TextBox 122"/>
-          <p:cNvSpPr txBox="1"/>
-          <p:nvPr/>
-        </p:nvSpPr>
-        <p:spPr>
-          <a:xfrm>
-            <a:off x="7644383" y="1335024"/>
+              <a:t>Kurt B.</a:t>
+            </a:r>
+          </a:p>
+        </p:txBody>
+      </p:sp>
+      <p:sp>
+        <p:nvSpPr>
+          <p:cNvPr id="133" name="TextBox 132"/>
+          <p:cNvSpPr txBox="1"/>
+          <p:nvPr/>
+        </p:nvSpPr>
+        <p:spPr>
+          <a:xfrm>
+            <a:off x="7644383" y="1810512"/>
             <a:ext cx="3474720" cy="219456"/>
           </a:xfrm>
           <a:prstGeom prst="rect">
@@ -46067,20 +46441,20 @@
               </a:defRPr>
             </a:pPr>
             <a:r>
-              <a:t>Reliance Partners, LLC</a:t>
-            </a:r>
-          </a:p>
-        </p:txBody>
-      </p:sp>
-      <p:sp>
-        <p:nvSpPr>
-          <p:cNvPr id="124" name="TextBox 123"/>
-          <p:cNvSpPr txBox="1"/>
-          <p:nvPr/>
-        </p:nvSpPr>
-        <p:spPr>
-          <a:xfrm>
-            <a:off x="11119104" y="1335024"/>
+              <a:t>Fino Services LLC</a:t>
+            </a:r>
+          </a:p>
+        </p:txBody>
+      </p:sp>
+      <p:sp>
+        <p:nvSpPr>
+          <p:cNvPr id="134" name="TextBox 133"/>
+          <p:cNvSpPr txBox="1"/>
+          <p:nvPr/>
+        </p:nvSpPr>
+        <p:spPr>
+          <a:xfrm>
+            <a:off x="11119104" y="1810512"/>
             <a:ext cx="914400" cy="219456"/>
           </a:xfrm>
           <a:prstGeom prst="rect">
@@ -46103,20 +46477,20 @@
               </a:defRPr>
             </a:pPr>
             <a:r>
-              <a:t>2224</a:t>
-            </a:r>
-          </a:p>
-        </p:txBody>
-      </p:sp>
-      <p:sp>
-        <p:nvSpPr>
-          <p:cNvPr id="125" name="Rectangle 124"/>
+              <a:t>1622</a:t>
+            </a:r>
+          </a:p>
+        </p:txBody>
+      </p:sp>
+      <p:sp>
+        <p:nvSpPr>
+          <p:cNvPr id="135" name="Rectangle 134"/>
           <p:cNvSpPr/>
           <p:nvPr/>
         </p:nvSpPr>
         <p:spPr>
           <a:xfrm>
-            <a:off x="6291072" y="1554480"/>
+            <a:off x="6291072" y="2029968"/>
             <a:ext cx="5742432" cy="237744"/>
           </a:xfrm>
           <a:prstGeom prst="rect">
@@ -46153,13 +46527,13 @@
       </p:sp>
       <p:sp>
         <p:nvSpPr>
-          <p:cNvPr id="126" name="TextBox 125"/>
-          <p:cNvSpPr txBox="1"/>
-          <p:nvPr/>
-        </p:nvSpPr>
-        <p:spPr>
-          <a:xfrm>
-            <a:off x="6291072" y="1572768"/>
+          <p:cNvPr id="136" name="TextBox 135"/>
+          <p:cNvSpPr txBox="1"/>
+          <p:nvPr/>
+        </p:nvSpPr>
+        <p:spPr>
+          <a:xfrm>
+            <a:off x="6291072" y="2048256"/>
             <a:ext cx="347472" cy="219456"/>
           </a:xfrm>
           <a:prstGeom prst="rect">
@@ -46182,20 +46556,20 @@
               </a:defRPr>
             </a:pPr>
             <a:r>
-              <a:t>2</a:t>
-            </a:r>
-          </a:p>
-        </p:txBody>
-      </p:sp>
-      <p:sp>
-        <p:nvSpPr>
-          <p:cNvPr id="127" name="TextBox 126"/>
-          <p:cNvSpPr txBox="1"/>
-          <p:nvPr/>
-        </p:nvSpPr>
-        <p:spPr>
-          <a:xfrm>
-            <a:off x="6638544" y="1572768"/>
+              <a:t>4</a:t>
+            </a:r>
+          </a:p>
+        </p:txBody>
+      </p:sp>
+      <p:sp>
+        <p:nvSpPr>
+          <p:cNvPr id="137" name="TextBox 136"/>
+          <p:cNvSpPr txBox="1"/>
+          <p:nvPr/>
+        </p:nvSpPr>
+        <p:spPr>
+          <a:xfrm>
+            <a:off x="6638544" y="2048256"/>
             <a:ext cx="1005840" cy="219456"/>
           </a:xfrm>
           <a:prstGeom prst="rect">
@@ -46225,13 +46599,13 @@
       </p:sp>
       <p:sp>
         <p:nvSpPr>
-          <p:cNvPr id="128" name="TextBox 127"/>
-          <p:cNvSpPr txBox="1"/>
-          <p:nvPr/>
-        </p:nvSpPr>
-        <p:spPr>
-          <a:xfrm>
-            <a:off x="7644383" y="1572768"/>
+          <p:cNvPr id="138" name="TextBox 137"/>
+          <p:cNvSpPr txBox="1"/>
+          <p:nvPr/>
+        </p:nvSpPr>
+        <p:spPr>
+          <a:xfrm>
+            <a:off x="7644383" y="2048256"/>
             <a:ext cx="3474720" cy="219456"/>
           </a:xfrm>
           <a:prstGeom prst="rect">
@@ -46254,20 +46628,20 @@
               </a:defRPr>
             </a:pPr>
             <a:r>
-              <a:t>Insurance4Truckers LLC</a:t>
-            </a:r>
-          </a:p>
-        </p:txBody>
-      </p:sp>
-      <p:sp>
-        <p:nvSpPr>
-          <p:cNvPr id="129" name="TextBox 128"/>
-          <p:cNvSpPr txBox="1"/>
-          <p:nvPr/>
-        </p:nvSpPr>
-        <p:spPr>
-          <a:xfrm>
-            <a:off x="11119104" y="1572768"/>
+              <a:t>USA SPECIALTY INSURANCE/DBA PREVENTTY</a:t>
+            </a:r>
+          </a:p>
+        </p:txBody>
+      </p:sp>
+      <p:sp>
+        <p:nvSpPr>
+          <p:cNvPr id="139" name="TextBox 138"/>
+          <p:cNvSpPr txBox="1"/>
+          <p:nvPr/>
+        </p:nvSpPr>
+        <p:spPr>
+          <a:xfrm>
+            <a:off x="11119104" y="2048256"/>
             <a:ext cx="914400" cy="219456"/>
           </a:xfrm>
           <a:prstGeom prst="rect">
@@ -46290,20 +46664,20 @@
               </a:defRPr>
             </a:pPr>
             <a:r>
-              <a:t>2096</a:t>
-            </a:r>
-          </a:p>
-        </p:txBody>
-      </p:sp>
-      <p:sp>
-        <p:nvSpPr>
-          <p:cNvPr id="130" name="Rectangle 129"/>
+              <a:t>1359</a:t>
+            </a:r>
+          </a:p>
+        </p:txBody>
+      </p:sp>
+      <p:sp>
+        <p:nvSpPr>
+          <p:cNvPr id="140" name="Rectangle 139"/>
           <p:cNvSpPr/>
           <p:nvPr/>
         </p:nvSpPr>
         <p:spPr>
           <a:xfrm>
-            <a:off x="6291072" y="1792224"/>
+            <a:off x="6291072" y="2267712"/>
             <a:ext cx="5742432" cy="237744"/>
           </a:xfrm>
           <a:prstGeom prst="rect">
@@ -46340,13 +46714,13 @@
       </p:sp>
       <p:sp>
         <p:nvSpPr>
-          <p:cNvPr id="131" name="TextBox 130"/>
-          <p:cNvSpPr txBox="1"/>
-          <p:nvPr/>
-        </p:nvSpPr>
-        <p:spPr>
-          <a:xfrm>
-            <a:off x="6291072" y="1810512"/>
+          <p:cNvPr id="141" name="TextBox 140"/>
+          <p:cNvSpPr txBox="1"/>
+          <p:nvPr/>
+        </p:nvSpPr>
+        <p:spPr>
+          <a:xfrm>
+            <a:off x="6291072" y="2286000"/>
             <a:ext cx="347472" cy="219456"/>
           </a:xfrm>
           <a:prstGeom prst="rect">
@@ -46369,20 +46743,20 @@
               </a:defRPr>
             </a:pPr>
             <a:r>
-              <a:t>3</a:t>
-            </a:r>
-          </a:p>
-        </p:txBody>
-      </p:sp>
-      <p:sp>
-        <p:nvSpPr>
-          <p:cNvPr id="132" name="TextBox 131"/>
-          <p:cNvSpPr txBox="1"/>
-          <p:nvPr/>
-        </p:nvSpPr>
-        <p:spPr>
-          <a:xfrm>
-            <a:off x="6638544" y="1810512"/>
+              <a:t>5</a:t>
+            </a:r>
+          </a:p>
+        </p:txBody>
+      </p:sp>
+      <p:sp>
+        <p:nvSpPr>
+          <p:cNvPr id="142" name="TextBox 141"/>
+          <p:cNvSpPr txBox="1"/>
+          <p:nvPr/>
+        </p:nvSpPr>
+        <p:spPr>
+          <a:xfrm>
+            <a:off x="6638544" y="2286000"/>
             <a:ext cx="1005840" cy="219456"/>
           </a:xfrm>
           <a:prstGeom prst="rect">
@@ -46405,20 +46779,20 @@
               </a:defRPr>
             </a:pPr>
             <a:r>
-              <a:t>Kurt B.</a:t>
-            </a:r>
-          </a:p>
-        </p:txBody>
-      </p:sp>
-      <p:sp>
-        <p:nvSpPr>
-          <p:cNvPr id="133" name="TextBox 132"/>
-          <p:cNvSpPr txBox="1"/>
-          <p:nvPr/>
-        </p:nvSpPr>
-        <p:spPr>
-          <a:xfrm>
-            <a:off x="7644383" y="1810512"/>
+              <a:t>Derek J.</a:t>
+            </a:r>
+          </a:p>
+        </p:txBody>
+      </p:sp>
+      <p:sp>
+        <p:nvSpPr>
+          <p:cNvPr id="143" name="TextBox 142"/>
+          <p:cNvSpPr txBox="1"/>
+          <p:nvPr/>
+        </p:nvSpPr>
+        <p:spPr>
+          <a:xfrm>
+            <a:off x="7644383" y="2286000"/>
             <a:ext cx="3474720" cy="219456"/>
           </a:xfrm>
           <a:prstGeom prst="rect">
@@ -46441,20 +46815,20 @@
               </a:defRPr>
             </a:pPr>
             <a:r>
-              <a:t>Fino Services LLC</a:t>
-            </a:r>
-          </a:p>
-        </p:txBody>
-      </p:sp>
-      <p:sp>
-        <p:nvSpPr>
-          <p:cNvPr id="134" name="TextBox 133"/>
-          <p:cNvSpPr txBox="1"/>
-          <p:nvPr/>
-        </p:nvSpPr>
-        <p:spPr>
-          <a:xfrm>
-            <a:off x="11119104" y="1810512"/>
+              <a:t>United Advantage Insurance Services</a:t>
+            </a:r>
+          </a:p>
+        </p:txBody>
+      </p:sp>
+      <p:sp>
+        <p:nvSpPr>
+          <p:cNvPr id="144" name="TextBox 143"/>
+          <p:cNvSpPr txBox="1"/>
+          <p:nvPr/>
+        </p:nvSpPr>
+        <p:spPr>
+          <a:xfrm>
+            <a:off x="11119104" y="2286000"/>
             <a:ext cx="914400" cy="219456"/>
           </a:xfrm>
           <a:prstGeom prst="rect">
@@ -46477,20 +46851,20 @@
               </a:defRPr>
             </a:pPr>
             <a:r>
-              <a:t>1578</a:t>
-            </a:r>
-          </a:p>
-        </p:txBody>
-      </p:sp>
-      <p:sp>
-        <p:nvSpPr>
-          <p:cNvPr id="135" name="Rectangle 134"/>
+              <a:t>1185</a:t>
+            </a:r>
+          </a:p>
+        </p:txBody>
+      </p:sp>
+      <p:sp>
+        <p:nvSpPr>
+          <p:cNvPr id="145" name="Rectangle 144"/>
           <p:cNvSpPr/>
           <p:nvPr/>
         </p:nvSpPr>
         <p:spPr>
           <a:xfrm>
-            <a:off x="6291072" y="2029968"/>
+            <a:off x="6291072" y="2505456"/>
             <a:ext cx="5742432" cy="237744"/>
           </a:xfrm>
           <a:prstGeom prst="rect">
@@ -46527,13 +46901,13 @@
       </p:sp>
       <p:sp>
         <p:nvSpPr>
-          <p:cNvPr id="136" name="TextBox 135"/>
-          <p:cNvSpPr txBox="1"/>
-          <p:nvPr/>
-        </p:nvSpPr>
-        <p:spPr>
-          <a:xfrm>
-            <a:off x="6291072" y="2048256"/>
+          <p:cNvPr id="146" name="TextBox 145"/>
+          <p:cNvSpPr txBox="1"/>
+          <p:nvPr/>
+        </p:nvSpPr>
+        <p:spPr>
+          <a:xfrm>
+            <a:off x="6291072" y="2523744"/>
             <a:ext cx="347472" cy="219456"/>
           </a:xfrm>
           <a:prstGeom prst="rect">
@@ -46556,20 +46930,20 @@
               </a:defRPr>
             </a:pPr>
             <a:r>
-              <a:t>4</a:t>
-            </a:r>
-          </a:p>
-        </p:txBody>
-      </p:sp>
-      <p:sp>
-        <p:nvSpPr>
-          <p:cNvPr id="137" name="TextBox 136"/>
-          <p:cNvSpPr txBox="1"/>
-          <p:nvPr/>
-        </p:nvSpPr>
-        <p:spPr>
-          <a:xfrm>
-            <a:off x="6638544" y="2048256"/>
+              <a:t>6</a:t>
+            </a:r>
+          </a:p>
+        </p:txBody>
+      </p:sp>
+      <p:sp>
+        <p:nvSpPr>
+          <p:cNvPr id="147" name="TextBox 146"/>
+          <p:cNvSpPr txBox="1"/>
+          <p:nvPr/>
+        </p:nvSpPr>
+        <p:spPr>
+          <a:xfrm>
+            <a:off x="6638544" y="2523744"/>
             <a:ext cx="1005840" cy="219456"/>
           </a:xfrm>
           <a:prstGeom prst="rect">
@@ -46592,20 +46966,20 @@
               </a:defRPr>
             </a:pPr>
             <a:r>
-              <a:t>Ron D.</a:t>
-            </a:r>
-          </a:p>
-        </p:txBody>
-      </p:sp>
-      <p:sp>
-        <p:nvSpPr>
-          <p:cNvPr id="138" name="TextBox 137"/>
-          <p:cNvSpPr txBox="1"/>
-          <p:nvPr/>
-        </p:nvSpPr>
-        <p:spPr>
-          <a:xfrm>
-            <a:off x="7644383" y="2048256"/>
+              <a:t>Derrick L.</a:t>
+            </a:r>
+          </a:p>
+        </p:txBody>
+      </p:sp>
+      <p:sp>
+        <p:nvSpPr>
+          <p:cNvPr id="148" name="TextBox 147"/>
+          <p:cNvSpPr txBox="1"/>
+          <p:nvPr/>
+        </p:nvSpPr>
+        <p:spPr>
+          <a:xfrm>
+            <a:off x="7644383" y="2523744"/>
             <a:ext cx="3474720" cy="219456"/>
           </a:xfrm>
           <a:prstGeom prst="rect">
@@ -46628,20 +47002,20 @@
               </a:defRPr>
             </a:pPr>
             <a:r>
-              <a:t>USA SPECIALTY INSURANCE/DBA PREVENTTY</a:t>
-            </a:r>
-          </a:p>
-        </p:txBody>
-      </p:sp>
-      <p:sp>
-        <p:nvSpPr>
-          <p:cNvPr id="139" name="TextBox 138"/>
-          <p:cNvSpPr txBox="1"/>
-          <p:nvPr/>
-        </p:nvSpPr>
-        <p:spPr>
-          <a:xfrm>
-            <a:off x="11119104" y="2048256"/>
+              <a:t>American Fleet Insurance</a:t>
+            </a:r>
+          </a:p>
+        </p:txBody>
+      </p:sp>
+      <p:sp>
+        <p:nvSpPr>
+          <p:cNvPr id="149" name="TextBox 148"/>
+          <p:cNvSpPr txBox="1"/>
+          <p:nvPr/>
+        </p:nvSpPr>
+        <p:spPr>
+          <a:xfrm>
+            <a:off x="11119104" y="2523744"/>
             <a:ext cx="914400" cy="219456"/>
           </a:xfrm>
           <a:prstGeom prst="rect">
@@ -46664,20 +47038,20 @@
               </a:defRPr>
             </a:pPr>
             <a:r>
-              <a:t>1323</a:t>
-            </a:r>
-          </a:p>
-        </p:txBody>
-      </p:sp>
-      <p:sp>
-        <p:nvSpPr>
-          <p:cNvPr id="140" name="Rectangle 139"/>
+              <a:t>1062</a:t>
+            </a:r>
+          </a:p>
+        </p:txBody>
+      </p:sp>
+      <p:sp>
+        <p:nvSpPr>
+          <p:cNvPr id="150" name="Rectangle 149"/>
           <p:cNvSpPr/>
           <p:nvPr/>
         </p:nvSpPr>
         <p:spPr>
           <a:xfrm>
-            <a:off x="6291072" y="2267712"/>
+            <a:off x="6291072" y="2743199"/>
             <a:ext cx="5742432" cy="237744"/>
           </a:xfrm>
           <a:prstGeom prst="rect">
@@ -46714,13 +47088,13 @@
       </p:sp>
       <p:sp>
         <p:nvSpPr>
-          <p:cNvPr id="141" name="TextBox 140"/>
-          <p:cNvSpPr txBox="1"/>
-          <p:nvPr/>
-        </p:nvSpPr>
-        <p:spPr>
-          <a:xfrm>
-            <a:off x="6291072" y="2286000"/>
+          <p:cNvPr id="151" name="TextBox 150"/>
+          <p:cNvSpPr txBox="1"/>
+          <p:nvPr/>
+        </p:nvSpPr>
+        <p:spPr>
+          <a:xfrm>
+            <a:off x="6291072" y="2761487"/>
             <a:ext cx="347472" cy="219456"/>
           </a:xfrm>
           <a:prstGeom prst="rect">
@@ -46743,20 +47117,20 @@
               </a:defRPr>
             </a:pPr>
             <a:r>
-              <a:t>5</a:t>
-            </a:r>
-          </a:p>
-        </p:txBody>
-      </p:sp>
-      <p:sp>
-        <p:nvSpPr>
-          <p:cNvPr id="142" name="TextBox 141"/>
-          <p:cNvSpPr txBox="1"/>
-          <p:nvPr/>
-        </p:nvSpPr>
-        <p:spPr>
-          <a:xfrm>
-            <a:off x="6638544" y="2286000"/>
+              <a:t>7</a:t>
+            </a:r>
+          </a:p>
+        </p:txBody>
+      </p:sp>
+      <p:sp>
+        <p:nvSpPr>
+          <p:cNvPr id="152" name="TextBox 151"/>
+          <p:cNvSpPr txBox="1"/>
+          <p:nvPr/>
+        </p:nvSpPr>
+        <p:spPr>
+          <a:xfrm>
+            <a:off x="6638544" y="2761487"/>
             <a:ext cx="1005840" cy="219456"/>
           </a:xfrm>
           <a:prstGeom prst="rect">
@@ -46779,20 +47153,20 @@
               </a:defRPr>
             </a:pPr>
             <a:r>
-              <a:t>Derek J.</a:t>
-            </a:r>
-          </a:p>
-        </p:txBody>
-      </p:sp>
-      <p:sp>
-        <p:nvSpPr>
-          <p:cNvPr id="143" name="TextBox 142"/>
-          <p:cNvSpPr txBox="1"/>
-          <p:nvPr/>
-        </p:nvSpPr>
-        <p:spPr>
-          <a:xfrm>
-            <a:off x="7644383" y="2286000"/>
+              <a:t>Derrick L.</a:t>
+            </a:r>
+          </a:p>
+        </p:txBody>
+      </p:sp>
+      <p:sp>
+        <p:nvSpPr>
+          <p:cNvPr id="153" name="TextBox 152"/>
+          <p:cNvSpPr txBox="1"/>
+          <p:nvPr/>
+        </p:nvSpPr>
+        <p:spPr>
+          <a:xfrm>
+            <a:off x="7644383" y="2761487"/>
             <a:ext cx="3474720" cy="219456"/>
           </a:xfrm>
           <a:prstGeom prst="rect">
@@ -46815,20 +47189,20 @@
               </a:defRPr>
             </a:pPr>
             <a:r>
-              <a:t>United Advantage Insurance Services</a:t>
-            </a:r>
-          </a:p>
-        </p:txBody>
-      </p:sp>
-      <p:sp>
-        <p:nvSpPr>
-          <p:cNvPr id="144" name="TextBox 143"/>
-          <p:cNvSpPr txBox="1"/>
-          <p:nvPr/>
-        </p:nvSpPr>
-        <p:spPr>
-          <a:xfrm>
-            <a:off x="11119104" y="2286000"/>
+              <a:t>AMC Agents LLC</a:t>
+            </a:r>
+          </a:p>
+        </p:txBody>
+      </p:sp>
+      <p:sp>
+        <p:nvSpPr>
+          <p:cNvPr id="154" name="TextBox 153"/>
+          <p:cNvSpPr txBox="1"/>
+          <p:nvPr/>
+        </p:nvSpPr>
+        <p:spPr>
+          <a:xfrm>
+            <a:off x="11119104" y="2761487"/>
             <a:ext cx="914400" cy="219456"/>
           </a:xfrm>
           <a:prstGeom prst="rect">
@@ -46851,20 +47225,20 @@
               </a:defRPr>
             </a:pPr>
             <a:r>
-              <a:t>1184</a:t>
-            </a:r>
-          </a:p>
-        </p:txBody>
-      </p:sp>
-      <p:sp>
-        <p:nvSpPr>
-          <p:cNvPr id="145" name="Rectangle 144"/>
+              <a:t>1047</a:t>
+            </a:r>
+          </a:p>
+        </p:txBody>
+      </p:sp>
+      <p:sp>
+        <p:nvSpPr>
+          <p:cNvPr id="155" name="Rectangle 154"/>
           <p:cNvSpPr/>
           <p:nvPr/>
         </p:nvSpPr>
         <p:spPr>
           <a:xfrm>
-            <a:off x="6291072" y="2505456"/>
+            <a:off x="6291072" y="2980943"/>
             <a:ext cx="5742432" cy="237744"/>
           </a:xfrm>
           <a:prstGeom prst="rect">
@@ -46901,13 +47275,13 @@
       </p:sp>
       <p:sp>
         <p:nvSpPr>
-          <p:cNvPr id="146" name="TextBox 145"/>
-          <p:cNvSpPr txBox="1"/>
-          <p:nvPr/>
-        </p:nvSpPr>
-        <p:spPr>
-          <a:xfrm>
-            <a:off x="6291072" y="2523744"/>
+          <p:cNvPr id="156" name="TextBox 155"/>
+          <p:cNvSpPr txBox="1"/>
+          <p:nvPr/>
+        </p:nvSpPr>
+        <p:spPr>
+          <a:xfrm>
+            <a:off x="6291072" y="2999231"/>
             <a:ext cx="347472" cy="219456"/>
           </a:xfrm>
           <a:prstGeom prst="rect">
@@ -46930,20 +47304,20 @@
               </a:defRPr>
             </a:pPr>
             <a:r>
-              <a:t>6</a:t>
-            </a:r>
-          </a:p>
-        </p:txBody>
-      </p:sp>
-      <p:sp>
-        <p:nvSpPr>
-          <p:cNvPr id="147" name="TextBox 146"/>
-          <p:cNvSpPr txBox="1"/>
-          <p:nvPr/>
-        </p:nvSpPr>
-        <p:spPr>
-          <a:xfrm>
-            <a:off x="6638544" y="2523744"/>
+              <a:t>8</a:t>
+            </a:r>
+          </a:p>
+        </p:txBody>
+      </p:sp>
+      <p:sp>
+        <p:nvSpPr>
+          <p:cNvPr id="157" name="TextBox 156"/>
+          <p:cNvSpPr txBox="1"/>
+          <p:nvPr/>
+        </p:nvSpPr>
+        <p:spPr>
+          <a:xfrm>
+            <a:off x="6638544" y="2999231"/>
             <a:ext cx="1005840" cy="219456"/>
           </a:xfrm>
           <a:prstGeom prst="rect">
@@ -46966,20 +47340,20 @@
               </a:defRPr>
             </a:pPr>
             <a:r>
-              <a:t>Derrick L.</a:t>
-            </a:r>
-          </a:p>
-        </p:txBody>
-      </p:sp>
-      <p:sp>
-        <p:nvSpPr>
-          <p:cNvPr id="148" name="TextBox 147"/>
-          <p:cNvSpPr txBox="1"/>
-          <p:nvPr/>
-        </p:nvSpPr>
-        <p:spPr>
-          <a:xfrm>
-            <a:off x="7644383" y="2523744"/>
+              <a:t>Erika C.</a:t>
+            </a:r>
+          </a:p>
+        </p:txBody>
+      </p:sp>
+      <p:sp>
+        <p:nvSpPr>
+          <p:cNvPr id="158" name="TextBox 157"/>
+          <p:cNvSpPr txBox="1"/>
+          <p:nvPr/>
+        </p:nvSpPr>
+        <p:spPr>
+          <a:xfrm>
+            <a:off x="7644383" y="2999231"/>
             <a:ext cx="3474720" cy="219456"/>
           </a:xfrm>
           <a:prstGeom prst="rect">
@@ -47002,20 +47376,20 @@
               </a:defRPr>
             </a:pPr>
             <a:r>
-              <a:t>American Fleet Insurance</a:t>
-            </a:r>
-          </a:p>
-        </p:txBody>
-      </p:sp>
-      <p:sp>
-        <p:nvSpPr>
-          <p:cNvPr id="149" name="TextBox 148"/>
-          <p:cNvSpPr txBox="1"/>
-          <p:nvPr/>
-        </p:nvSpPr>
-        <p:spPr>
-          <a:xfrm>
-            <a:off x="11119104" y="2523744"/>
+              <a:t>Cslr Insurance Services, LLC</a:t>
+            </a:r>
+          </a:p>
+        </p:txBody>
+      </p:sp>
+      <p:sp>
+        <p:nvSpPr>
+          <p:cNvPr id="159" name="TextBox 158"/>
+          <p:cNvSpPr txBox="1"/>
+          <p:nvPr/>
+        </p:nvSpPr>
+        <p:spPr>
+          <a:xfrm>
+            <a:off x="11119104" y="2999231"/>
             <a:ext cx="914400" cy="219456"/>
           </a:xfrm>
           <a:prstGeom prst="rect">
@@ -47038,20 +47412,20 @@
               </a:defRPr>
             </a:pPr>
             <a:r>
-              <a:t>1030</a:t>
-            </a:r>
-          </a:p>
-        </p:txBody>
-      </p:sp>
-      <p:sp>
-        <p:nvSpPr>
-          <p:cNvPr id="150" name="Rectangle 149"/>
+              <a:t>977</a:t>
+            </a:r>
+          </a:p>
+        </p:txBody>
+      </p:sp>
+      <p:sp>
+        <p:nvSpPr>
+          <p:cNvPr id="160" name="Rectangle 159"/>
           <p:cNvSpPr/>
           <p:nvPr/>
         </p:nvSpPr>
         <p:spPr>
           <a:xfrm>
-            <a:off x="6291072" y="2743199"/>
+            <a:off x="6291072" y="3218687"/>
             <a:ext cx="5742432" cy="237744"/>
           </a:xfrm>
           <a:prstGeom prst="rect">
@@ -47088,13 +47462,13 @@
       </p:sp>
       <p:sp>
         <p:nvSpPr>
-          <p:cNvPr id="151" name="TextBox 150"/>
-          <p:cNvSpPr txBox="1"/>
-          <p:nvPr/>
-        </p:nvSpPr>
-        <p:spPr>
-          <a:xfrm>
-            <a:off x="6291072" y="2761487"/>
+          <p:cNvPr id="161" name="TextBox 160"/>
+          <p:cNvSpPr txBox="1"/>
+          <p:nvPr/>
+        </p:nvSpPr>
+        <p:spPr>
+          <a:xfrm>
+            <a:off x="6291072" y="3236975"/>
             <a:ext cx="347472" cy="219456"/>
           </a:xfrm>
           <a:prstGeom prst="rect">
@@ -47117,20 +47491,20 @@
               </a:defRPr>
             </a:pPr>
             <a:r>
-              <a:t>7</a:t>
-            </a:r>
-          </a:p>
-        </p:txBody>
-      </p:sp>
-      <p:sp>
-        <p:nvSpPr>
-          <p:cNvPr id="152" name="TextBox 151"/>
-          <p:cNvSpPr txBox="1"/>
-          <p:nvPr/>
-        </p:nvSpPr>
-        <p:spPr>
-          <a:xfrm>
-            <a:off x="6638544" y="2761487"/>
+              <a:t>9</a:t>
+            </a:r>
+          </a:p>
+        </p:txBody>
+      </p:sp>
+      <p:sp>
+        <p:nvSpPr>
+          <p:cNvPr id="162" name="TextBox 161"/>
+          <p:cNvSpPr txBox="1"/>
+          <p:nvPr/>
+        </p:nvSpPr>
+        <p:spPr>
+          <a:xfrm>
+            <a:off x="6638544" y="3236975"/>
             <a:ext cx="1005840" cy="219456"/>
           </a:xfrm>
           <a:prstGeom prst="rect">
@@ -47153,20 +47527,20 @@
               </a:defRPr>
             </a:pPr>
             <a:r>
-              <a:t>Derrick L.</a:t>
-            </a:r>
-          </a:p>
-        </p:txBody>
-      </p:sp>
-      <p:sp>
-        <p:nvSpPr>
-          <p:cNvPr id="153" name="TextBox 152"/>
-          <p:cNvSpPr txBox="1"/>
-          <p:nvPr/>
-        </p:nvSpPr>
-        <p:spPr>
-          <a:xfrm>
-            <a:off x="7644383" y="2761487"/>
+              <a:t>Christopher H.</a:t>
+            </a:r>
+          </a:p>
+        </p:txBody>
+      </p:sp>
+      <p:sp>
+        <p:nvSpPr>
+          <p:cNvPr id="163" name="TextBox 162"/>
+          <p:cNvSpPr txBox="1"/>
+          <p:nvPr/>
+        </p:nvSpPr>
+        <p:spPr>
+          <a:xfrm>
+            <a:off x="7644383" y="3236975"/>
             <a:ext cx="3474720" cy="219456"/>
           </a:xfrm>
           <a:prstGeom prst="rect">
@@ -47189,20 +47563,20 @@
               </a:defRPr>
             </a:pPr>
             <a:r>
-              <a:t>AMC Agents LLC</a:t>
-            </a:r>
-          </a:p>
-        </p:txBody>
-      </p:sp>
-      <p:sp>
-        <p:nvSpPr>
-          <p:cNvPr id="154" name="TextBox 153"/>
-          <p:cNvSpPr txBox="1"/>
-          <p:nvPr/>
-        </p:nvSpPr>
-        <p:spPr>
-          <a:xfrm>
-            <a:off x="11119104" y="2761487"/>
+              <a:t>DNIS Inc.</a:t>
+            </a:r>
+          </a:p>
+        </p:txBody>
+      </p:sp>
+      <p:sp>
+        <p:nvSpPr>
+          <p:cNvPr id="164" name="TextBox 163"/>
+          <p:cNvSpPr txBox="1"/>
+          <p:nvPr/>
+        </p:nvSpPr>
+        <p:spPr>
+          <a:xfrm>
+            <a:off x="11119104" y="3236975"/>
             <a:ext cx="914400" cy="219456"/>
           </a:xfrm>
           <a:prstGeom prst="rect">
@@ -47225,20 +47599,20 @@
               </a:defRPr>
             </a:pPr>
             <a:r>
-              <a:t>1001</a:t>
-            </a:r>
-          </a:p>
-        </p:txBody>
-      </p:sp>
-      <p:sp>
-        <p:nvSpPr>
-          <p:cNvPr id="155" name="Rectangle 154"/>
+              <a:t>717</a:t>
+            </a:r>
+          </a:p>
+        </p:txBody>
+      </p:sp>
+      <p:sp>
+        <p:nvSpPr>
+          <p:cNvPr id="165" name="Rectangle 164"/>
           <p:cNvSpPr/>
           <p:nvPr/>
         </p:nvSpPr>
         <p:spPr>
           <a:xfrm>
-            <a:off x="6291072" y="2980943"/>
+            <a:off x="6291072" y="3456431"/>
             <a:ext cx="5742432" cy="237744"/>
           </a:xfrm>
           <a:prstGeom prst="rect">
@@ -47275,13 +47649,13 @@
       </p:sp>
       <p:sp>
         <p:nvSpPr>
-          <p:cNvPr id="156" name="TextBox 155"/>
-          <p:cNvSpPr txBox="1"/>
-          <p:nvPr/>
-        </p:nvSpPr>
-        <p:spPr>
-          <a:xfrm>
-            <a:off x="6291072" y="2999231"/>
+          <p:cNvPr id="166" name="TextBox 165"/>
+          <p:cNvSpPr txBox="1"/>
+          <p:nvPr/>
+        </p:nvSpPr>
+        <p:spPr>
+          <a:xfrm>
+            <a:off x="6291072" y="3474719"/>
             <a:ext cx="347472" cy="219456"/>
           </a:xfrm>
           <a:prstGeom prst="rect">
@@ -47304,20 +47678,20 @@
               </a:defRPr>
             </a:pPr>
             <a:r>
-              <a:t>8</a:t>
-            </a:r>
-          </a:p>
-        </p:txBody>
-      </p:sp>
-      <p:sp>
-        <p:nvSpPr>
-          <p:cNvPr id="157" name="TextBox 156"/>
-          <p:cNvSpPr txBox="1"/>
-          <p:nvPr/>
-        </p:nvSpPr>
-        <p:spPr>
-          <a:xfrm>
-            <a:off x="6638544" y="2999231"/>
+              <a:t>10</a:t>
+            </a:r>
+          </a:p>
+        </p:txBody>
+      </p:sp>
+      <p:sp>
+        <p:nvSpPr>
+          <p:cNvPr id="167" name="TextBox 166"/>
+          <p:cNvSpPr txBox="1"/>
+          <p:nvPr/>
+        </p:nvSpPr>
+        <p:spPr>
+          <a:xfrm>
+            <a:off x="6638544" y="3474719"/>
             <a:ext cx="1005840" cy="219456"/>
           </a:xfrm>
           <a:prstGeom prst="rect">
@@ -47340,20 +47714,20 @@
               </a:defRPr>
             </a:pPr>
             <a:r>
-              <a:t>Erika C.</a:t>
-            </a:r>
-          </a:p>
-        </p:txBody>
-      </p:sp>
-      <p:sp>
-        <p:nvSpPr>
-          <p:cNvPr id="158" name="TextBox 157"/>
-          <p:cNvSpPr txBox="1"/>
-          <p:nvPr/>
-        </p:nvSpPr>
-        <p:spPr>
-          <a:xfrm>
-            <a:off x="7644383" y="2999231"/>
+              <a:t>Ron D.</a:t>
+            </a:r>
+          </a:p>
+        </p:txBody>
+      </p:sp>
+      <p:sp>
+        <p:nvSpPr>
+          <p:cNvPr id="168" name="TextBox 167"/>
+          <p:cNvSpPr txBox="1"/>
+          <p:nvPr/>
+        </p:nvSpPr>
+        <p:spPr>
+          <a:xfrm>
+            <a:off x="7644383" y="3474719"/>
             <a:ext cx="3474720" cy="219456"/>
           </a:xfrm>
           <a:prstGeom prst="rect">
@@ -47376,20 +47750,20 @@
               </a:defRPr>
             </a:pPr>
             <a:r>
-              <a:t>Cslr Insurance Services, LLC</a:t>
-            </a:r>
-          </a:p>
-        </p:txBody>
-      </p:sp>
-      <p:sp>
-        <p:nvSpPr>
-          <p:cNvPr id="159" name="TextBox 158"/>
-          <p:cNvSpPr txBox="1"/>
-          <p:nvPr/>
-        </p:nvSpPr>
-        <p:spPr>
-          <a:xfrm>
-            <a:off x="11119104" y="2999231"/>
+              <a:t>Prestige International Insurance Group I…</a:t>
+            </a:r>
+          </a:p>
+        </p:txBody>
+      </p:sp>
+      <p:sp>
+        <p:nvSpPr>
+          <p:cNvPr id="169" name="TextBox 168"/>
+          <p:cNvSpPr txBox="1"/>
+          <p:nvPr/>
+        </p:nvSpPr>
+        <p:spPr>
+          <a:xfrm>
+            <a:off x="11119104" y="3474719"/>
             <a:ext cx="914400" cy="219456"/>
           </a:xfrm>
           <a:prstGeom prst="rect">
@@ -47412,20 +47786,20 @@
               </a:defRPr>
             </a:pPr>
             <a:r>
-              <a:t>956</a:t>
-            </a:r>
-          </a:p>
-        </p:txBody>
-      </p:sp>
-      <p:sp>
-        <p:nvSpPr>
-          <p:cNvPr id="160" name="Rectangle 159"/>
+              <a:t>582</a:t>
+            </a:r>
+          </a:p>
+        </p:txBody>
+      </p:sp>
+      <p:sp>
+        <p:nvSpPr>
+          <p:cNvPr id="170" name="Rectangle 169"/>
           <p:cNvSpPr/>
           <p:nvPr/>
         </p:nvSpPr>
         <p:spPr>
           <a:xfrm>
-            <a:off x="6291072" y="3218687"/>
+            <a:off x="6291072" y="3694175"/>
             <a:ext cx="5742432" cy="237744"/>
           </a:xfrm>
           <a:prstGeom prst="rect">
@@ -47462,13 +47836,13 @@
       </p:sp>
       <p:sp>
         <p:nvSpPr>
-          <p:cNvPr id="161" name="TextBox 160"/>
-          <p:cNvSpPr txBox="1"/>
-          <p:nvPr/>
-        </p:nvSpPr>
-        <p:spPr>
-          <a:xfrm>
-            <a:off x="6291072" y="3236975"/>
+          <p:cNvPr id="171" name="TextBox 170"/>
+          <p:cNvSpPr txBox="1"/>
+          <p:nvPr/>
+        </p:nvSpPr>
+        <p:spPr>
+          <a:xfrm>
+            <a:off x="6291072" y="3712463"/>
             <a:ext cx="347472" cy="219456"/>
           </a:xfrm>
           <a:prstGeom prst="rect">
@@ -47491,20 +47865,20 @@
               </a:defRPr>
             </a:pPr>
             <a:r>
-              <a:t>9</a:t>
-            </a:r>
-          </a:p>
-        </p:txBody>
-      </p:sp>
-      <p:sp>
-        <p:nvSpPr>
-          <p:cNvPr id="162" name="TextBox 161"/>
-          <p:cNvSpPr txBox="1"/>
-          <p:nvPr/>
-        </p:nvSpPr>
-        <p:spPr>
-          <a:xfrm>
-            <a:off x="6638544" y="3236975"/>
+              <a:t>11</a:t>
+            </a:r>
+          </a:p>
+        </p:txBody>
+      </p:sp>
+      <p:sp>
+        <p:nvSpPr>
+          <p:cNvPr id="172" name="TextBox 171"/>
+          <p:cNvSpPr txBox="1"/>
+          <p:nvPr/>
+        </p:nvSpPr>
+        <p:spPr>
+          <a:xfrm>
+            <a:off x="6638544" y="3712463"/>
             <a:ext cx="1005840" cy="219456"/>
           </a:xfrm>
           <a:prstGeom prst="rect">
@@ -47527,20 +47901,20 @@
               </a:defRPr>
             </a:pPr>
             <a:r>
-              <a:t>Christopher H.</a:t>
-            </a:r>
-          </a:p>
-        </p:txBody>
-      </p:sp>
-      <p:sp>
-        <p:nvSpPr>
-          <p:cNvPr id="163" name="TextBox 162"/>
-          <p:cNvSpPr txBox="1"/>
-          <p:nvPr/>
-        </p:nvSpPr>
-        <p:spPr>
-          <a:xfrm>
-            <a:off x="7644383" y="3236975"/>
+              <a:t>Derek J.</a:t>
+            </a:r>
+          </a:p>
+        </p:txBody>
+      </p:sp>
+      <p:sp>
+        <p:nvSpPr>
+          <p:cNvPr id="173" name="TextBox 172"/>
+          <p:cNvSpPr txBox="1"/>
+          <p:nvPr/>
+        </p:nvSpPr>
+        <p:spPr>
+          <a:xfrm>
+            <a:off x="7644383" y="3712463"/>
             <a:ext cx="3474720" cy="219456"/>
           </a:xfrm>
           <a:prstGeom prst="rect">
@@ -47563,20 +47937,20 @@
               </a:defRPr>
             </a:pPr>
             <a:r>
-              <a:t>DNIS Inc.</a:t>
-            </a:r>
-          </a:p>
-        </p:txBody>
-      </p:sp>
-      <p:sp>
-        <p:nvSpPr>
-          <p:cNvPr id="164" name="TextBox 163"/>
-          <p:cNvSpPr txBox="1"/>
-          <p:nvPr/>
-        </p:nvSpPr>
-        <p:spPr>
-          <a:xfrm>
-            <a:off x="11119104" y="3236975"/>
+              <a:t>Jagdeep Singh Insurance Agency, Inc</a:t>
+            </a:r>
+          </a:p>
+        </p:txBody>
+      </p:sp>
+      <p:sp>
+        <p:nvSpPr>
+          <p:cNvPr id="174" name="TextBox 173"/>
+          <p:cNvSpPr txBox="1"/>
+          <p:nvPr/>
+        </p:nvSpPr>
+        <p:spPr>
+          <a:xfrm>
+            <a:off x="11119104" y="3712463"/>
             <a:ext cx="914400" cy="219456"/>
           </a:xfrm>
           <a:prstGeom prst="rect">
@@ -47599,20 +47973,20 @@
               </a:defRPr>
             </a:pPr>
             <a:r>
-              <a:t>705</a:t>
-            </a:r>
-          </a:p>
-        </p:txBody>
-      </p:sp>
-      <p:sp>
-        <p:nvSpPr>
-          <p:cNvPr id="165" name="Rectangle 164"/>
+              <a:t>540</a:t>
+            </a:r>
+          </a:p>
+        </p:txBody>
+      </p:sp>
+      <p:sp>
+        <p:nvSpPr>
+          <p:cNvPr id="175" name="Rectangle 174"/>
           <p:cNvSpPr/>
           <p:nvPr/>
         </p:nvSpPr>
         <p:spPr>
           <a:xfrm>
-            <a:off x="6291072" y="3456431"/>
+            <a:off x="6291072" y="3931919"/>
             <a:ext cx="5742432" cy="237744"/>
           </a:xfrm>
           <a:prstGeom prst="rect">
@@ -47649,13 +48023,13 @@
       </p:sp>
       <p:sp>
         <p:nvSpPr>
-          <p:cNvPr id="166" name="TextBox 165"/>
-          <p:cNvSpPr txBox="1"/>
-          <p:nvPr/>
-        </p:nvSpPr>
-        <p:spPr>
-          <a:xfrm>
-            <a:off x="6291072" y="3474719"/>
+          <p:cNvPr id="176" name="TextBox 175"/>
+          <p:cNvSpPr txBox="1"/>
+          <p:nvPr/>
+        </p:nvSpPr>
+        <p:spPr>
+          <a:xfrm>
+            <a:off x="6291072" y="3950207"/>
             <a:ext cx="347472" cy="219456"/>
           </a:xfrm>
           <a:prstGeom prst="rect">
@@ -47678,20 +48052,20 @@
               </a:defRPr>
             </a:pPr>
             <a:r>
-              <a:t>10</a:t>
-            </a:r>
-          </a:p>
-        </p:txBody>
-      </p:sp>
-      <p:sp>
-        <p:nvSpPr>
-          <p:cNvPr id="167" name="TextBox 166"/>
-          <p:cNvSpPr txBox="1"/>
-          <p:nvPr/>
-        </p:nvSpPr>
-        <p:spPr>
-          <a:xfrm>
-            <a:off x="6638544" y="3474719"/>
+              <a:t>12</a:t>
+            </a:r>
+          </a:p>
+        </p:txBody>
+      </p:sp>
+      <p:sp>
+        <p:nvSpPr>
+          <p:cNvPr id="177" name="TextBox 176"/>
+          <p:cNvSpPr txBox="1"/>
+          <p:nvPr/>
+        </p:nvSpPr>
+        <p:spPr>
+          <a:xfrm>
+            <a:off x="6638544" y="3950207"/>
             <a:ext cx="1005840" cy="219456"/>
           </a:xfrm>
           <a:prstGeom prst="rect">
@@ -47714,20 +48088,20 @@
               </a:defRPr>
             </a:pPr>
             <a:r>
-              <a:t>Ron D.</a:t>
-            </a:r>
-          </a:p>
-        </p:txBody>
-      </p:sp>
-      <p:sp>
-        <p:nvSpPr>
-          <p:cNvPr id="168" name="TextBox 167"/>
-          <p:cNvSpPr txBox="1"/>
-          <p:nvPr/>
-        </p:nvSpPr>
-        <p:spPr>
-          <a:xfrm>
-            <a:off x="7644383" y="3474719"/>
+              <a:t>Kurt B.</a:t>
+            </a:r>
+          </a:p>
+        </p:txBody>
+      </p:sp>
+      <p:sp>
+        <p:nvSpPr>
+          <p:cNvPr id="178" name="TextBox 177"/>
+          <p:cNvSpPr txBox="1"/>
+          <p:nvPr/>
+        </p:nvSpPr>
+        <p:spPr>
+          <a:xfrm>
+            <a:off x="7644383" y="3950207"/>
             <a:ext cx="3474720" cy="219456"/>
           </a:xfrm>
           <a:prstGeom prst="rect">
@@ -47750,20 +48124,20 @@
               </a:defRPr>
             </a:pPr>
             <a:r>
-              <a:t>Prestige International Insurance Group I…</a:t>
-            </a:r>
-          </a:p>
-        </p:txBody>
-      </p:sp>
-      <p:sp>
-        <p:nvSpPr>
-          <p:cNvPr id="169" name="TextBox 168"/>
-          <p:cNvSpPr txBox="1"/>
-          <p:nvPr/>
-        </p:nvSpPr>
-        <p:spPr>
-          <a:xfrm>
-            <a:off x="11119104" y="3474719"/>
+              <a:t>Justin Robert Insurance Agency LLC</a:t>
+            </a:r>
+          </a:p>
+        </p:txBody>
+      </p:sp>
+      <p:sp>
+        <p:nvSpPr>
+          <p:cNvPr id="179" name="TextBox 178"/>
+          <p:cNvSpPr txBox="1"/>
+          <p:nvPr/>
+        </p:nvSpPr>
+        <p:spPr>
+          <a:xfrm>
+            <a:off x="11119104" y="3950207"/>
             <a:ext cx="914400" cy="219456"/>
           </a:xfrm>
           <a:prstGeom prst="rect">
@@ -47786,20 +48160,20 @@
               </a:defRPr>
             </a:pPr>
             <a:r>
-              <a:t>566</a:t>
-            </a:r>
-          </a:p>
-        </p:txBody>
-      </p:sp>
-      <p:sp>
-        <p:nvSpPr>
-          <p:cNvPr id="170" name="Rectangle 169"/>
+              <a:t>525</a:t>
+            </a:r>
+          </a:p>
+        </p:txBody>
+      </p:sp>
+      <p:sp>
+        <p:nvSpPr>
+          <p:cNvPr id="180" name="Rectangle 179"/>
           <p:cNvSpPr/>
           <p:nvPr/>
         </p:nvSpPr>
         <p:spPr>
           <a:xfrm>
-            <a:off x="6291072" y="3694175"/>
+            <a:off x="6291072" y="4169663"/>
             <a:ext cx="5742432" cy="237744"/>
           </a:xfrm>
           <a:prstGeom prst="rect">
@@ -47836,13 +48210,13 @@
       </p:sp>
       <p:sp>
         <p:nvSpPr>
-          <p:cNvPr id="171" name="TextBox 170"/>
-          <p:cNvSpPr txBox="1"/>
-          <p:nvPr/>
-        </p:nvSpPr>
-        <p:spPr>
-          <a:xfrm>
-            <a:off x="6291072" y="3712463"/>
+          <p:cNvPr id="181" name="TextBox 180"/>
+          <p:cNvSpPr txBox="1"/>
+          <p:nvPr/>
+        </p:nvSpPr>
+        <p:spPr>
+          <a:xfrm>
+            <a:off x="6291072" y="4187951"/>
             <a:ext cx="347472" cy="219456"/>
           </a:xfrm>
           <a:prstGeom prst="rect">
@@ -47865,20 +48239,20 @@
               </a:defRPr>
             </a:pPr>
             <a:r>
-              <a:t>11</a:t>
-            </a:r>
-          </a:p>
-        </p:txBody>
-      </p:sp>
-      <p:sp>
-        <p:nvSpPr>
-          <p:cNvPr id="172" name="TextBox 171"/>
-          <p:cNvSpPr txBox="1"/>
-          <p:nvPr/>
-        </p:nvSpPr>
-        <p:spPr>
-          <a:xfrm>
-            <a:off x="6638544" y="3712463"/>
+              <a:t>13</a:t>
+            </a:r>
+          </a:p>
+        </p:txBody>
+      </p:sp>
+      <p:sp>
+        <p:nvSpPr>
+          <p:cNvPr id="182" name="TextBox 181"/>
+          <p:cNvSpPr txBox="1"/>
+          <p:nvPr/>
+        </p:nvSpPr>
+        <p:spPr>
+          <a:xfrm>
+            <a:off x="6638544" y="4187951"/>
             <a:ext cx="1005840" cy="219456"/>
           </a:xfrm>
           <a:prstGeom prst="rect">
@@ -47901,20 +48275,20 @@
               </a:defRPr>
             </a:pPr>
             <a:r>
-              <a:t>Derek J.</a:t>
-            </a:r>
-          </a:p>
-        </p:txBody>
-      </p:sp>
-      <p:sp>
-        <p:nvSpPr>
-          <p:cNvPr id="173" name="TextBox 172"/>
-          <p:cNvSpPr txBox="1"/>
-          <p:nvPr/>
-        </p:nvSpPr>
-        <p:spPr>
-          <a:xfrm>
-            <a:off x="7644383" y="3712463"/>
+              <a:t>Erika C.</a:t>
+            </a:r>
+          </a:p>
+        </p:txBody>
+      </p:sp>
+      <p:sp>
+        <p:nvSpPr>
+          <p:cNvPr id="183" name="TextBox 182"/>
+          <p:cNvSpPr txBox="1"/>
+          <p:nvPr/>
+        </p:nvSpPr>
+        <p:spPr>
+          <a:xfrm>
+            <a:off x="7644383" y="4187951"/>
             <a:ext cx="3474720" cy="219456"/>
           </a:xfrm>
           <a:prstGeom prst="rect">
@@ -47937,20 +48311,20 @@
               </a:defRPr>
             </a:pPr>
             <a:r>
-              <a:t>Jagdeep Singh Insurance Agency, Inc</a:t>
-            </a:r>
-          </a:p>
-        </p:txBody>
-      </p:sp>
-      <p:sp>
-        <p:nvSpPr>
-          <p:cNvPr id="174" name="TextBox 173"/>
-          <p:cNvSpPr txBox="1"/>
-          <p:nvPr/>
-        </p:nvSpPr>
-        <p:spPr>
-          <a:xfrm>
-            <a:off x="11119104" y="3712463"/>
+              <a:t>Truckers Best Insurance dba Trucker Path…</a:t>
+            </a:r>
+          </a:p>
+        </p:txBody>
+      </p:sp>
+      <p:sp>
+        <p:nvSpPr>
+          <p:cNvPr id="184" name="TextBox 183"/>
+          <p:cNvSpPr txBox="1"/>
+          <p:nvPr/>
+        </p:nvSpPr>
+        <p:spPr>
+          <a:xfrm>
+            <a:off x="11119104" y="4187951"/>
             <a:ext cx="914400" cy="219456"/>
           </a:xfrm>
           <a:prstGeom prst="rect">
@@ -47973,20 +48347,20 @@
               </a:defRPr>
             </a:pPr>
             <a:r>
-              <a:t>533</a:t>
-            </a:r>
-          </a:p>
-        </p:txBody>
-      </p:sp>
-      <p:sp>
-        <p:nvSpPr>
-          <p:cNvPr id="175" name="Rectangle 174"/>
+              <a:t>468</a:t>
+            </a:r>
+          </a:p>
+        </p:txBody>
+      </p:sp>
+      <p:sp>
+        <p:nvSpPr>
+          <p:cNvPr id="185" name="Rectangle 184"/>
           <p:cNvSpPr/>
           <p:nvPr/>
         </p:nvSpPr>
         <p:spPr>
           <a:xfrm>
-            <a:off x="6291072" y="3931919"/>
+            <a:off x="6291072" y="4407407"/>
             <a:ext cx="5742432" cy="237744"/>
           </a:xfrm>
           <a:prstGeom prst="rect">
@@ -48023,13 +48397,13 @@
       </p:sp>
       <p:sp>
         <p:nvSpPr>
-          <p:cNvPr id="176" name="TextBox 175"/>
-          <p:cNvSpPr txBox="1"/>
-          <p:nvPr/>
-        </p:nvSpPr>
-        <p:spPr>
-          <a:xfrm>
-            <a:off x="6291072" y="3950207"/>
+          <p:cNvPr id="186" name="TextBox 185"/>
+          <p:cNvSpPr txBox="1"/>
+          <p:nvPr/>
+        </p:nvSpPr>
+        <p:spPr>
+          <a:xfrm>
+            <a:off x="6291072" y="4425695"/>
             <a:ext cx="347472" cy="219456"/>
           </a:xfrm>
           <a:prstGeom prst="rect">
@@ -48052,20 +48426,20 @@
               </a:defRPr>
             </a:pPr>
             <a:r>
-              <a:t>12</a:t>
-            </a:r>
-          </a:p>
-        </p:txBody>
-      </p:sp>
-      <p:sp>
-        <p:nvSpPr>
-          <p:cNvPr id="177" name="TextBox 176"/>
-          <p:cNvSpPr txBox="1"/>
-          <p:nvPr/>
-        </p:nvSpPr>
-        <p:spPr>
-          <a:xfrm>
-            <a:off x="6638544" y="3950207"/>
+              <a:t>14</a:t>
+            </a:r>
+          </a:p>
+        </p:txBody>
+      </p:sp>
+      <p:sp>
+        <p:nvSpPr>
+          <p:cNvPr id="187" name="TextBox 186"/>
+          <p:cNvSpPr txBox="1"/>
+          <p:nvPr/>
+        </p:nvSpPr>
+        <p:spPr>
+          <a:xfrm>
+            <a:off x="6638544" y="4425695"/>
             <a:ext cx="1005840" cy="219456"/>
           </a:xfrm>
           <a:prstGeom prst="rect">
@@ -48088,20 +48462,20 @@
               </a:defRPr>
             </a:pPr>
             <a:r>
-              <a:t>Kurt B.</a:t>
-            </a:r>
-          </a:p>
-        </p:txBody>
-      </p:sp>
-      <p:sp>
-        <p:nvSpPr>
-          <p:cNvPr id="178" name="TextBox 177"/>
-          <p:cNvSpPr txBox="1"/>
-          <p:nvPr/>
-        </p:nvSpPr>
-        <p:spPr>
-          <a:xfrm>
-            <a:off x="7644383" y="3950207"/>
+              <a:t>Alexis B.</a:t>
+            </a:r>
+          </a:p>
+        </p:txBody>
+      </p:sp>
+      <p:sp>
+        <p:nvSpPr>
+          <p:cNvPr id="188" name="TextBox 187"/>
+          <p:cNvSpPr txBox="1"/>
+          <p:nvPr/>
+        </p:nvSpPr>
+        <p:spPr>
+          <a:xfrm>
+            <a:off x="7644383" y="4425695"/>
             <a:ext cx="3474720" cy="219456"/>
           </a:xfrm>
           <a:prstGeom prst="rect">
@@ -48124,20 +48498,20 @@
               </a:defRPr>
             </a:pPr>
             <a:r>
-              <a:t>Justin Robert Insurance Agency LLC</a:t>
-            </a:r>
-          </a:p>
-        </p:txBody>
-      </p:sp>
-      <p:sp>
-        <p:nvSpPr>
-          <p:cNvPr id="179" name="TextBox 178"/>
-          <p:cNvSpPr txBox="1"/>
-          <p:nvPr/>
-        </p:nvSpPr>
-        <p:spPr>
-          <a:xfrm>
-            <a:off x="11119104" y="3950207"/>
+              <a:t>A.S.I.A Inc</a:t>
+            </a:r>
+          </a:p>
+        </p:txBody>
+      </p:sp>
+      <p:sp>
+        <p:nvSpPr>
+          <p:cNvPr id="189" name="TextBox 188"/>
+          <p:cNvSpPr txBox="1"/>
+          <p:nvPr/>
+        </p:nvSpPr>
+        <p:spPr>
+          <a:xfrm>
+            <a:off x="11119104" y="4425695"/>
             <a:ext cx="914400" cy="219456"/>
           </a:xfrm>
           <a:prstGeom prst="rect">
@@ -48160,20 +48534,20 @@
               </a:defRPr>
             </a:pPr>
             <a:r>
-              <a:t>517</a:t>
-            </a:r>
-          </a:p>
-        </p:txBody>
-      </p:sp>
-      <p:sp>
-        <p:nvSpPr>
-          <p:cNvPr id="180" name="Rectangle 179"/>
+              <a:t>467</a:t>
+            </a:r>
+          </a:p>
+        </p:txBody>
+      </p:sp>
+      <p:sp>
+        <p:nvSpPr>
+          <p:cNvPr id="190" name="Rectangle 189"/>
           <p:cNvSpPr/>
           <p:nvPr/>
         </p:nvSpPr>
         <p:spPr>
           <a:xfrm>
-            <a:off x="6291072" y="4169663"/>
+            <a:off x="6291072" y="4645151"/>
             <a:ext cx="5742432" cy="237744"/>
           </a:xfrm>
           <a:prstGeom prst="rect">
@@ -48210,13 +48584,13 @@
       </p:sp>
       <p:sp>
         <p:nvSpPr>
-          <p:cNvPr id="181" name="TextBox 180"/>
-          <p:cNvSpPr txBox="1"/>
-          <p:nvPr/>
-        </p:nvSpPr>
-        <p:spPr>
-          <a:xfrm>
-            <a:off x="6291072" y="4187951"/>
+          <p:cNvPr id="191" name="TextBox 190"/>
+          <p:cNvSpPr txBox="1"/>
+          <p:nvPr/>
+        </p:nvSpPr>
+        <p:spPr>
+          <a:xfrm>
+            <a:off x="6291072" y="4663439"/>
             <a:ext cx="347472" cy="219456"/>
           </a:xfrm>
           <a:prstGeom prst="rect">
@@ -48239,20 +48613,20 @@
               </a:defRPr>
             </a:pPr>
             <a:r>
-              <a:t>13</a:t>
-            </a:r>
-          </a:p>
-        </p:txBody>
-      </p:sp>
-      <p:sp>
-        <p:nvSpPr>
-          <p:cNvPr id="182" name="TextBox 181"/>
-          <p:cNvSpPr txBox="1"/>
-          <p:nvPr/>
-        </p:nvSpPr>
-        <p:spPr>
-          <a:xfrm>
-            <a:off x="6638544" y="4187951"/>
+              <a:t>15</a:t>
+            </a:r>
+          </a:p>
+        </p:txBody>
+      </p:sp>
+      <p:sp>
+        <p:nvSpPr>
+          <p:cNvPr id="192" name="TextBox 191"/>
+          <p:cNvSpPr txBox="1"/>
+          <p:nvPr/>
+        </p:nvSpPr>
+        <p:spPr>
+          <a:xfrm>
+            <a:off x="6638544" y="4663439"/>
             <a:ext cx="1005840" cy="219456"/>
           </a:xfrm>
           <a:prstGeom prst="rect">
@@ -48275,20 +48649,20 @@
               </a:defRPr>
             </a:pPr>
             <a:r>
-              <a:t>Alexis B.</a:t>
-            </a:r>
-          </a:p>
-        </p:txBody>
-      </p:sp>
-      <p:sp>
-        <p:nvSpPr>
-          <p:cNvPr id="183" name="TextBox 182"/>
-          <p:cNvSpPr txBox="1"/>
-          <p:nvPr/>
-        </p:nvSpPr>
-        <p:spPr>
-          <a:xfrm>
-            <a:off x="7644383" y="4187951"/>
+              <a:t>Derek J.</a:t>
+            </a:r>
+          </a:p>
+        </p:txBody>
+      </p:sp>
+      <p:sp>
+        <p:nvSpPr>
+          <p:cNvPr id="193" name="TextBox 192"/>
+          <p:cNvSpPr txBox="1"/>
+          <p:nvPr/>
+        </p:nvSpPr>
+        <p:spPr>
+          <a:xfrm>
+            <a:off x="7644383" y="4663439"/>
             <a:ext cx="3474720" cy="219456"/>
           </a:xfrm>
           <a:prstGeom prst="rect">
@@ -48311,20 +48685,20 @@
               </a:defRPr>
             </a:pPr>
             <a:r>
-              <a:t>A.S.I.A Inc</a:t>
-            </a:r>
-          </a:p>
-        </p:txBody>
-      </p:sp>
-      <p:sp>
-        <p:nvSpPr>
-          <p:cNvPr id="184" name="TextBox 183"/>
-          <p:cNvSpPr txBox="1"/>
-          <p:nvPr/>
-        </p:nvSpPr>
-        <p:spPr>
-          <a:xfrm>
-            <a:off x="11119104" y="4187951"/>
+              <a:t>Ewall Insurance Company</a:t>
+            </a:r>
+          </a:p>
+        </p:txBody>
+      </p:sp>
+      <p:sp>
+        <p:nvSpPr>
+          <p:cNvPr id="194" name="TextBox 193"/>
+          <p:cNvSpPr txBox="1"/>
+          <p:nvPr/>
+        </p:nvSpPr>
+        <p:spPr>
+          <a:xfrm>
+            <a:off x="11119104" y="4663439"/>
             <a:ext cx="914400" cy="219456"/>
           </a:xfrm>
           <a:prstGeom prst="rect">
@@ -48347,20 +48721,20 @@
               </a:defRPr>
             </a:pPr>
             <a:r>
-              <a:t>463</a:t>
-            </a:r>
-          </a:p>
-        </p:txBody>
-      </p:sp>
-      <p:sp>
-        <p:nvSpPr>
-          <p:cNvPr id="185" name="Rectangle 184"/>
+              <a:t>402</a:t>
+            </a:r>
+          </a:p>
+        </p:txBody>
+      </p:sp>
+      <p:sp>
+        <p:nvSpPr>
+          <p:cNvPr id="195" name="Rectangle 194"/>
           <p:cNvSpPr/>
           <p:nvPr/>
         </p:nvSpPr>
         <p:spPr>
           <a:xfrm>
-            <a:off x="6291072" y="4407407"/>
+            <a:off x="6291072" y="4882895"/>
             <a:ext cx="5742432" cy="237744"/>
           </a:xfrm>
           <a:prstGeom prst="rect">
@@ -48397,13 +48771,13 @@
       </p:sp>
       <p:sp>
         <p:nvSpPr>
-          <p:cNvPr id="186" name="TextBox 185"/>
-          <p:cNvSpPr txBox="1"/>
-          <p:nvPr/>
-        </p:nvSpPr>
-        <p:spPr>
-          <a:xfrm>
-            <a:off x="6291072" y="4425695"/>
+          <p:cNvPr id="196" name="TextBox 195"/>
+          <p:cNvSpPr txBox="1"/>
+          <p:nvPr/>
+        </p:nvSpPr>
+        <p:spPr>
+          <a:xfrm>
+            <a:off x="6291072" y="4901183"/>
             <a:ext cx="347472" cy="219456"/>
           </a:xfrm>
           <a:prstGeom prst="rect">
@@ -48426,20 +48800,20 @@
               </a:defRPr>
             </a:pPr>
             <a:r>
-              <a:t>14</a:t>
-            </a:r>
-          </a:p>
-        </p:txBody>
-      </p:sp>
-      <p:sp>
-        <p:nvSpPr>
-          <p:cNvPr id="187" name="TextBox 186"/>
-          <p:cNvSpPr txBox="1"/>
-          <p:nvPr/>
-        </p:nvSpPr>
-        <p:spPr>
-          <a:xfrm>
-            <a:off x="6638544" y="4425695"/>
+              <a:t>16</a:t>
+            </a:r>
+          </a:p>
+        </p:txBody>
+      </p:sp>
+      <p:sp>
+        <p:nvSpPr>
+          <p:cNvPr id="197" name="TextBox 196"/>
+          <p:cNvSpPr txBox="1"/>
+          <p:nvPr/>
+        </p:nvSpPr>
+        <p:spPr>
+          <a:xfrm>
+            <a:off x="6638544" y="4901183"/>
             <a:ext cx="1005840" cy="219456"/>
           </a:xfrm>
           <a:prstGeom prst="rect">
@@ -48462,20 +48836,20 @@
               </a:defRPr>
             </a:pPr>
             <a:r>
-              <a:t>Erika C.</a:t>
-            </a:r>
-          </a:p>
-        </p:txBody>
-      </p:sp>
-      <p:sp>
-        <p:nvSpPr>
-          <p:cNvPr id="188" name="TextBox 187"/>
-          <p:cNvSpPr txBox="1"/>
-          <p:nvPr/>
-        </p:nvSpPr>
-        <p:spPr>
-          <a:xfrm>
-            <a:off x="7644383" y="4425695"/>
+              <a:t>Kurt B.</a:t>
+            </a:r>
+          </a:p>
+        </p:txBody>
+      </p:sp>
+      <p:sp>
+        <p:nvSpPr>
+          <p:cNvPr id="198" name="TextBox 197"/>
+          <p:cNvSpPr txBox="1"/>
+          <p:nvPr/>
+        </p:nvSpPr>
+        <p:spPr>
+          <a:xfrm>
+            <a:off x="7644383" y="4901183"/>
             <a:ext cx="3474720" cy="219456"/>
           </a:xfrm>
           <a:prstGeom prst="rect">
@@ -48498,20 +48872,20 @@
               </a:defRPr>
             </a:pPr>
             <a:r>
-              <a:t>Truckers Best Insurance dba Trucker Path…</a:t>
-            </a:r>
-          </a:p>
-        </p:txBody>
-      </p:sp>
-      <p:sp>
-        <p:nvSpPr>
-          <p:cNvPr id="189" name="TextBox 188"/>
-          <p:cNvSpPr txBox="1"/>
-          <p:nvPr/>
-        </p:nvSpPr>
-        <p:spPr>
-          <a:xfrm>
-            <a:off x="11119104" y="4425695"/>
+              <a:t>Rodriguez Insurance Agency LLC</a:t>
+            </a:r>
+          </a:p>
+        </p:txBody>
+      </p:sp>
+      <p:sp>
+        <p:nvSpPr>
+          <p:cNvPr id="199" name="TextBox 198"/>
+          <p:cNvSpPr txBox="1"/>
+          <p:nvPr/>
+        </p:nvSpPr>
+        <p:spPr>
+          <a:xfrm>
+            <a:off x="11119104" y="4901183"/>
             <a:ext cx="914400" cy="219456"/>
           </a:xfrm>
           <a:prstGeom prst="rect">
@@ -48534,20 +48908,20 @@
               </a:defRPr>
             </a:pPr>
             <a:r>
-              <a:t>446</a:t>
-            </a:r>
-          </a:p>
-        </p:txBody>
-      </p:sp>
-      <p:sp>
-        <p:nvSpPr>
-          <p:cNvPr id="190" name="Rectangle 189"/>
+              <a:t>387</a:t>
+            </a:r>
+          </a:p>
+        </p:txBody>
+      </p:sp>
+      <p:sp>
+        <p:nvSpPr>
+          <p:cNvPr id="200" name="Rectangle 199"/>
           <p:cNvSpPr/>
           <p:nvPr/>
         </p:nvSpPr>
         <p:spPr>
           <a:xfrm>
-            <a:off x="6291072" y="4645151"/>
+            <a:off x="6291072" y="5120639"/>
             <a:ext cx="5742432" cy="237744"/>
           </a:xfrm>
           <a:prstGeom prst="rect">
@@ -48584,13 +48958,13 @@
       </p:sp>
       <p:sp>
         <p:nvSpPr>
-          <p:cNvPr id="191" name="TextBox 190"/>
-          <p:cNvSpPr txBox="1"/>
-          <p:nvPr/>
-        </p:nvSpPr>
-        <p:spPr>
-          <a:xfrm>
-            <a:off x="6291072" y="4663439"/>
+          <p:cNvPr id="201" name="TextBox 200"/>
+          <p:cNvSpPr txBox="1"/>
+          <p:nvPr/>
+        </p:nvSpPr>
+        <p:spPr>
+          <a:xfrm>
+            <a:off x="6291072" y="5138927"/>
             <a:ext cx="347472" cy="219456"/>
           </a:xfrm>
           <a:prstGeom prst="rect">
@@ -48613,20 +48987,20 @@
               </a:defRPr>
             </a:pPr>
             <a:r>
-              <a:t>15</a:t>
-            </a:r>
-          </a:p>
-        </p:txBody>
-      </p:sp>
-      <p:sp>
-        <p:nvSpPr>
-          <p:cNvPr id="192" name="TextBox 191"/>
-          <p:cNvSpPr txBox="1"/>
-          <p:nvPr/>
-        </p:nvSpPr>
-        <p:spPr>
-          <a:xfrm>
-            <a:off x="6638544" y="4663439"/>
+              <a:t>17</a:t>
+            </a:r>
+          </a:p>
+        </p:txBody>
+      </p:sp>
+      <p:sp>
+        <p:nvSpPr>
+          <p:cNvPr id="202" name="TextBox 201"/>
+          <p:cNvSpPr txBox="1"/>
+          <p:nvPr/>
+        </p:nvSpPr>
+        <p:spPr>
+          <a:xfrm>
+            <a:off x="6638544" y="5138927"/>
             <a:ext cx="1005840" cy="219456"/>
           </a:xfrm>
           <a:prstGeom prst="rect">
@@ -48649,20 +49023,20 @@
               </a:defRPr>
             </a:pPr>
             <a:r>
-              <a:t>Derek J.</a:t>
-            </a:r>
-          </a:p>
-        </p:txBody>
-      </p:sp>
-      <p:sp>
-        <p:nvSpPr>
-          <p:cNvPr id="193" name="TextBox 192"/>
-          <p:cNvSpPr txBox="1"/>
-          <p:nvPr/>
-        </p:nvSpPr>
-        <p:spPr>
-          <a:xfrm>
-            <a:off x="7644383" y="4663439"/>
+              <a:t>Erika C.</a:t>
+            </a:r>
+          </a:p>
+        </p:txBody>
+      </p:sp>
+      <p:sp>
+        <p:nvSpPr>
+          <p:cNvPr id="203" name="TextBox 202"/>
+          <p:cNvSpPr txBox="1"/>
+          <p:nvPr/>
+        </p:nvSpPr>
+        <p:spPr>
+          <a:xfrm>
+            <a:off x="7644383" y="5138927"/>
             <a:ext cx="3474720" cy="219456"/>
           </a:xfrm>
           <a:prstGeom prst="rect">
@@ -48685,20 +49059,20 @@
               </a:defRPr>
             </a:pPr>
             <a:r>
-              <a:t>Ewall Insurance Company</a:t>
-            </a:r>
-          </a:p>
-        </p:txBody>
-      </p:sp>
-      <p:sp>
-        <p:nvSpPr>
-          <p:cNvPr id="194" name="TextBox 193"/>
-          <p:cNvSpPr txBox="1"/>
-          <p:nvPr/>
-        </p:nvSpPr>
-        <p:spPr>
-          <a:xfrm>
-            <a:off x="11119104" y="4663439"/>
+              <a:t>Southwestern Insurance Services, Inc.</a:t>
+            </a:r>
+          </a:p>
+        </p:txBody>
+      </p:sp>
+      <p:sp>
+        <p:nvSpPr>
+          <p:cNvPr id="204" name="TextBox 203"/>
+          <p:cNvSpPr txBox="1"/>
+          <p:nvPr/>
+        </p:nvSpPr>
+        <p:spPr>
+          <a:xfrm>
+            <a:off x="11119104" y="5138927"/>
             <a:ext cx="914400" cy="219456"/>
           </a:xfrm>
           <a:prstGeom prst="rect">
@@ -48721,20 +49095,20 @@
               </a:defRPr>
             </a:pPr>
             <a:r>
-              <a:t>392</a:t>
-            </a:r>
-          </a:p>
-        </p:txBody>
-      </p:sp>
-      <p:sp>
-        <p:nvSpPr>
-          <p:cNvPr id="195" name="Rectangle 194"/>
+              <a:t>372</a:t>
+            </a:r>
+          </a:p>
+        </p:txBody>
+      </p:sp>
+      <p:sp>
+        <p:nvSpPr>
+          <p:cNvPr id="205" name="Rectangle 204"/>
           <p:cNvSpPr/>
           <p:nvPr/>
         </p:nvSpPr>
         <p:spPr>
           <a:xfrm>
-            <a:off x="6291072" y="4882895"/>
+            <a:off x="6291072" y="5358383"/>
             <a:ext cx="5742432" cy="237744"/>
           </a:xfrm>
           <a:prstGeom prst="rect">
@@ -48771,13 +49145,13 @@
       </p:sp>
       <p:sp>
         <p:nvSpPr>
-          <p:cNvPr id="196" name="TextBox 195"/>
-          <p:cNvSpPr txBox="1"/>
-          <p:nvPr/>
-        </p:nvSpPr>
-        <p:spPr>
-          <a:xfrm>
-            <a:off x="6291072" y="4901183"/>
+          <p:cNvPr id="206" name="TextBox 205"/>
+          <p:cNvSpPr txBox="1"/>
+          <p:nvPr/>
+        </p:nvSpPr>
+        <p:spPr>
+          <a:xfrm>
+            <a:off x="6291072" y="5376671"/>
             <a:ext cx="347472" cy="219456"/>
           </a:xfrm>
           <a:prstGeom prst="rect">
@@ -48800,20 +49174,20 @@
               </a:defRPr>
             </a:pPr>
             <a:r>
-              <a:t>16</a:t>
-            </a:r>
-          </a:p>
-        </p:txBody>
-      </p:sp>
-      <p:sp>
-        <p:nvSpPr>
-          <p:cNvPr id="197" name="TextBox 196"/>
-          <p:cNvSpPr txBox="1"/>
-          <p:nvPr/>
-        </p:nvSpPr>
-        <p:spPr>
-          <a:xfrm>
-            <a:off x="6638544" y="4901183"/>
+              <a:t>18</a:t>
+            </a:r>
+          </a:p>
+        </p:txBody>
+      </p:sp>
+      <p:sp>
+        <p:nvSpPr>
+          <p:cNvPr id="207" name="TextBox 206"/>
+          <p:cNvSpPr txBox="1"/>
+          <p:nvPr/>
+        </p:nvSpPr>
+        <p:spPr>
+          <a:xfrm>
+            <a:off x="6638544" y="5376671"/>
             <a:ext cx="1005840" cy="219456"/>
           </a:xfrm>
           <a:prstGeom prst="rect">
@@ -48836,20 +49210,20 @@
               </a:defRPr>
             </a:pPr>
             <a:r>
-              <a:t>Kurt B.</a:t>
-            </a:r>
-          </a:p>
-        </p:txBody>
-      </p:sp>
-      <p:sp>
-        <p:nvSpPr>
-          <p:cNvPr id="198" name="TextBox 197"/>
-          <p:cNvSpPr txBox="1"/>
-          <p:nvPr/>
-        </p:nvSpPr>
-        <p:spPr>
-          <a:xfrm>
-            <a:off x="7644383" y="4901183"/>
+              <a:t>Alexis B.</a:t>
+            </a:r>
+          </a:p>
+        </p:txBody>
+      </p:sp>
+      <p:sp>
+        <p:nvSpPr>
+          <p:cNvPr id="208" name="TextBox 207"/>
+          <p:cNvSpPr txBox="1"/>
+          <p:nvPr/>
+        </p:nvSpPr>
+        <p:spPr>
+          <a:xfrm>
+            <a:off x="7644383" y="5376671"/>
             <a:ext cx="3474720" cy="219456"/>
           </a:xfrm>
           <a:prstGeom prst="rect">
@@ -48872,20 +49246,20 @@
               </a:defRPr>
             </a:pPr>
             <a:r>
-              <a:t>Rodriguez Insurance Agency LLC</a:t>
-            </a:r>
-          </a:p>
-        </p:txBody>
-      </p:sp>
-      <p:sp>
-        <p:nvSpPr>
-          <p:cNvPr id="199" name="TextBox 198"/>
-          <p:cNvSpPr txBox="1"/>
-          <p:nvPr/>
-        </p:nvSpPr>
-        <p:spPr>
-          <a:xfrm>
-            <a:off x="11119104" y="4901183"/>
+              <a:t>Stellar Management, Inc</a:t>
+            </a:r>
+          </a:p>
+        </p:txBody>
+      </p:sp>
+      <p:sp>
+        <p:nvSpPr>
+          <p:cNvPr id="209" name="TextBox 208"/>
+          <p:cNvSpPr txBox="1"/>
+          <p:nvPr/>
+        </p:nvSpPr>
+        <p:spPr>
+          <a:xfrm>
+            <a:off x="11119104" y="5376671"/>
             <a:ext cx="914400" cy="219456"/>
           </a:xfrm>
           <a:prstGeom prst="rect">
@@ -48908,20 +49282,20 @@
               </a:defRPr>
             </a:pPr>
             <a:r>
-              <a:t>375</a:t>
-            </a:r>
-          </a:p>
-        </p:txBody>
-      </p:sp>
-      <p:sp>
-        <p:nvSpPr>
-          <p:cNvPr id="200" name="Rectangle 199"/>
+              <a:t>372</a:t>
+            </a:r>
+          </a:p>
+        </p:txBody>
+      </p:sp>
+      <p:sp>
+        <p:nvSpPr>
+          <p:cNvPr id="210" name="Rectangle 209"/>
           <p:cNvSpPr/>
           <p:nvPr/>
         </p:nvSpPr>
         <p:spPr>
           <a:xfrm>
-            <a:off x="6291072" y="5120639"/>
+            <a:off x="6291072" y="5596127"/>
             <a:ext cx="5742432" cy="237744"/>
           </a:xfrm>
           <a:prstGeom prst="rect">
@@ -48958,13 +49332,13 @@
       </p:sp>
       <p:sp>
         <p:nvSpPr>
-          <p:cNvPr id="201" name="TextBox 200"/>
-          <p:cNvSpPr txBox="1"/>
-          <p:nvPr/>
-        </p:nvSpPr>
-        <p:spPr>
-          <a:xfrm>
-            <a:off x="6291072" y="5138927"/>
+          <p:cNvPr id="211" name="TextBox 210"/>
+          <p:cNvSpPr txBox="1"/>
+          <p:nvPr/>
+        </p:nvSpPr>
+        <p:spPr>
+          <a:xfrm>
+            <a:off x="6291072" y="5614415"/>
             <a:ext cx="347472" cy="219456"/>
           </a:xfrm>
           <a:prstGeom prst="rect">
@@ -48987,20 +49361,20 @@
               </a:defRPr>
             </a:pPr>
             <a:r>
-              <a:t>17</a:t>
-            </a:r>
-          </a:p>
-        </p:txBody>
-      </p:sp>
-      <p:sp>
-        <p:nvSpPr>
-          <p:cNvPr id="202" name="TextBox 201"/>
-          <p:cNvSpPr txBox="1"/>
-          <p:nvPr/>
-        </p:nvSpPr>
-        <p:spPr>
-          <a:xfrm>
-            <a:off x="6638544" y="5138927"/>
+              <a:t>19</a:t>
+            </a:r>
+          </a:p>
+        </p:txBody>
+      </p:sp>
+      <p:sp>
+        <p:nvSpPr>
+          <p:cNvPr id="212" name="TextBox 211"/>
+          <p:cNvSpPr txBox="1"/>
+          <p:nvPr/>
+        </p:nvSpPr>
+        <p:spPr>
+          <a:xfrm>
+            <a:off x="6638544" y="5614415"/>
             <a:ext cx="1005840" cy="219456"/>
           </a:xfrm>
           <a:prstGeom prst="rect">
@@ -49023,20 +49397,20 @@
               </a:defRPr>
             </a:pPr>
             <a:r>
-              <a:t>Erika C.</a:t>
-            </a:r>
-          </a:p>
-        </p:txBody>
-      </p:sp>
-      <p:sp>
-        <p:nvSpPr>
-          <p:cNvPr id="203" name="TextBox 202"/>
-          <p:cNvSpPr txBox="1"/>
-          <p:nvPr/>
-        </p:nvSpPr>
-        <p:spPr>
-          <a:xfrm>
-            <a:off x="7644383" y="5138927"/>
+              <a:t>Kurt B.</a:t>
+            </a:r>
+          </a:p>
+        </p:txBody>
+      </p:sp>
+      <p:sp>
+        <p:nvSpPr>
+          <p:cNvPr id="213" name="TextBox 212"/>
+          <p:cNvSpPr txBox="1"/>
+          <p:nvPr/>
+        </p:nvSpPr>
+        <p:spPr>
+          <a:xfrm>
+            <a:off x="7644383" y="5614415"/>
             <a:ext cx="3474720" cy="219456"/>
           </a:xfrm>
           <a:prstGeom prst="rect">
@@ -49059,20 +49433,20 @@
               </a:defRPr>
             </a:pPr>
             <a:r>
-              <a:t>Southwestern Insurance Services, Inc.</a:t>
-            </a:r>
-          </a:p>
-        </p:txBody>
-      </p:sp>
-      <p:sp>
-        <p:nvSpPr>
-          <p:cNvPr id="204" name="TextBox 203"/>
-          <p:cNvSpPr txBox="1"/>
-          <p:nvPr/>
-        </p:nvSpPr>
-        <p:spPr>
-          <a:xfrm>
-            <a:off x="11119104" y="5138927"/>
+              <a:t>The McClure Agency LLC</a:t>
+            </a:r>
+          </a:p>
+        </p:txBody>
+      </p:sp>
+      <p:sp>
+        <p:nvSpPr>
+          <p:cNvPr id="214" name="TextBox 213"/>
+          <p:cNvSpPr txBox="1"/>
+          <p:nvPr/>
+        </p:nvSpPr>
+        <p:spPr>
+          <a:xfrm>
+            <a:off x="11119104" y="5614415"/>
             <a:ext cx="914400" cy="219456"/>
           </a:xfrm>
           <a:prstGeom prst="rect">
@@ -49095,20 +49469,20 @@
               </a:defRPr>
             </a:pPr>
             <a:r>
-              <a:t>367</a:t>
-            </a:r>
-          </a:p>
-        </p:txBody>
-      </p:sp>
-      <p:sp>
-        <p:nvSpPr>
-          <p:cNvPr id="205" name="Rectangle 204"/>
+              <a:t>354</a:t>
+            </a:r>
+          </a:p>
+        </p:txBody>
+      </p:sp>
+      <p:sp>
+        <p:nvSpPr>
+          <p:cNvPr id="215" name="Rectangle 214"/>
           <p:cNvSpPr/>
           <p:nvPr/>
         </p:nvSpPr>
         <p:spPr>
           <a:xfrm>
-            <a:off x="6291072" y="5358383"/>
+            <a:off x="6291072" y="5833871"/>
             <a:ext cx="5742432" cy="237744"/>
           </a:xfrm>
           <a:prstGeom prst="rect">
@@ -49145,13 +49519,13 @@
       </p:sp>
       <p:sp>
         <p:nvSpPr>
-          <p:cNvPr id="206" name="TextBox 205"/>
-          <p:cNvSpPr txBox="1"/>
-          <p:nvPr/>
-        </p:nvSpPr>
-        <p:spPr>
-          <a:xfrm>
-            <a:off x="6291072" y="5376671"/>
+          <p:cNvPr id="216" name="TextBox 215"/>
+          <p:cNvSpPr txBox="1"/>
+          <p:nvPr/>
+        </p:nvSpPr>
+        <p:spPr>
+          <a:xfrm>
+            <a:off x="6291072" y="5852159"/>
             <a:ext cx="347472" cy="219456"/>
           </a:xfrm>
           <a:prstGeom prst="rect">
@@ -49174,20 +49548,20 @@
               </a:defRPr>
             </a:pPr>
             <a:r>
-              <a:t>18</a:t>
-            </a:r>
-          </a:p>
-        </p:txBody>
-      </p:sp>
-      <p:sp>
-        <p:nvSpPr>
-          <p:cNvPr id="207" name="TextBox 206"/>
-          <p:cNvSpPr txBox="1"/>
-          <p:nvPr/>
-        </p:nvSpPr>
-        <p:spPr>
-          <a:xfrm>
-            <a:off x="6638544" y="5376671"/>
+              <a:t>20</a:t>
+            </a:r>
+          </a:p>
+        </p:txBody>
+      </p:sp>
+      <p:sp>
+        <p:nvSpPr>
+          <p:cNvPr id="217" name="TextBox 216"/>
+          <p:cNvSpPr txBox="1"/>
+          <p:nvPr/>
+        </p:nvSpPr>
+        <p:spPr>
+          <a:xfrm>
+            <a:off x="6638544" y="5852159"/>
             <a:ext cx="1005840" cy="219456"/>
           </a:xfrm>
           <a:prstGeom prst="rect">
@@ -49210,20 +49584,20 @@
               </a:defRPr>
             </a:pPr>
             <a:r>
-              <a:t>Alexis B.</a:t>
-            </a:r>
-          </a:p>
-        </p:txBody>
-      </p:sp>
-      <p:sp>
-        <p:nvSpPr>
-          <p:cNvPr id="208" name="TextBox 207"/>
-          <p:cNvSpPr txBox="1"/>
-          <p:nvPr/>
-        </p:nvSpPr>
-        <p:spPr>
-          <a:xfrm>
-            <a:off x="7644383" y="5376671"/>
+              <a:t>Derrick L.</a:t>
+            </a:r>
+          </a:p>
+        </p:txBody>
+      </p:sp>
+      <p:sp>
+        <p:nvSpPr>
+          <p:cNvPr id="218" name="TextBox 217"/>
+          <p:cNvSpPr txBox="1"/>
+          <p:nvPr/>
+        </p:nvSpPr>
+        <p:spPr>
+          <a:xfrm>
+            <a:off x="7644383" y="5852159"/>
             <a:ext cx="3474720" cy="219456"/>
           </a:xfrm>
           <a:prstGeom prst="rect">
@@ -49246,380 +49620,6 @@
               </a:defRPr>
             </a:pPr>
             <a:r>
-              <a:t>Stellar Management, Inc</a:t>
-            </a:r>
-          </a:p>
-        </p:txBody>
-      </p:sp>
-      <p:sp>
-        <p:nvSpPr>
-          <p:cNvPr id="209" name="TextBox 208"/>
-          <p:cNvSpPr txBox="1"/>
-          <p:nvPr/>
-        </p:nvSpPr>
-        <p:spPr>
-          <a:xfrm>
-            <a:off x="11119104" y="5376671"/>
-            <a:ext cx="914400" cy="219456"/>
-          </a:xfrm>
-          <a:prstGeom prst="rect">
-            <a:avLst/>
-          </a:prstGeom>
-          <a:noFill/>
-        </p:spPr>
-        <p:txBody>
-          <a:bodyPr wrap="square">
-            <a:spAutoFit/>
-          </a:bodyPr>
-          <a:lstStyle/>
-          <a:p>
-            <a:pPr algn="ctr">
-              <a:defRPr sz="950" b="1">
-                <a:solidFill>
-                  <a:srgbClr val="111827"/>
-                </a:solidFill>
-                <a:latin typeface="Calibri"/>
-              </a:defRPr>
-            </a:pPr>
-            <a:r>
-              <a:t>357</a:t>
-            </a:r>
-          </a:p>
-        </p:txBody>
-      </p:sp>
-      <p:sp>
-        <p:nvSpPr>
-          <p:cNvPr id="210" name="Rectangle 209"/>
-          <p:cNvSpPr/>
-          <p:nvPr/>
-        </p:nvSpPr>
-        <p:spPr>
-          <a:xfrm>
-            <a:off x="6291072" y="5596127"/>
-            <a:ext cx="5742432" cy="237744"/>
-          </a:xfrm>
-          <a:prstGeom prst="rect">
-            <a:avLst/>
-          </a:prstGeom>
-          <a:solidFill>
-            <a:srgbClr val="FFFFFF"/>
-          </a:solidFill>
-          <a:ln>
-            <a:noFill/>
-          </a:ln>
-        </p:spPr>
-        <p:style>
-          <a:lnRef idx="1">
-            <a:schemeClr val="accent1"/>
-          </a:lnRef>
-          <a:fillRef idx="3">
-            <a:schemeClr val="accent1"/>
-          </a:fillRef>
-          <a:effectRef idx="2">
-            <a:schemeClr val="accent1"/>
-          </a:effectRef>
-          <a:fontRef idx="minor">
-            <a:schemeClr val="lt1"/>
-          </a:fontRef>
-        </p:style>
-        <p:txBody>
-          <a:bodyPr rtlCol="0" anchor="ctr"/>
-          <a:lstStyle/>
-          <a:p>
-            <a:pPr algn="ctr"/>
-          </a:p>
-        </p:txBody>
-      </p:sp>
-      <p:sp>
-        <p:nvSpPr>
-          <p:cNvPr id="211" name="TextBox 210"/>
-          <p:cNvSpPr txBox="1"/>
-          <p:nvPr/>
-        </p:nvSpPr>
-        <p:spPr>
-          <a:xfrm>
-            <a:off x="6291072" y="5614415"/>
-            <a:ext cx="347472" cy="219456"/>
-          </a:xfrm>
-          <a:prstGeom prst="rect">
-            <a:avLst/>
-          </a:prstGeom>
-          <a:noFill/>
-        </p:spPr>
-        <p:txBody>
-          <a:bodyPr wrap="square">
-            <a:spAutoFit/>
-          </a:bodyPr>
-          <a:lstStyle/>
-          <a:p>
-            <a:pPr algn="ctr">
-              <a:defRPr sz="950" b="1">
-                <a:solidFill>
-                  <a:srgbClr val="111827"/>
-                </a:solidFill>
-                <a:latin typeface="Calibri"/>
-              </a:defRPr>
-            </a:pPr>
-            <a:r>
-              <a:t>19</a:t>
-            </a:r>
-          </a:p>
-        </p:txBody>
-      </p:sp>
-      <p:sp>
-        <p:nvSpPr>
-          <p:cNvPr id="212" name="TextBox 211"/>
-          <p:cNvSpPr txBox="1"/>
-          <p:nvPr/>
-        </p:nvSpPr>
-        <p:spPr>
-          <a:xfrm>
-            <a:off x="6638544" y="5614415"/>
-            <a:ext cx="1005840" cy="219456"/>
-          </a:xfrm>
-          <a:prstGeom prst="rect">
-            <a:avLst/>
-          </a:prstGeom>
-          <a:noFill/>
-        </p:spPr>
-        <p:txBody>
-          <a:bodyPr wrap="square">
-            <a:spAutoFit/>
-          </a:bodyPr>
-          <a:lstStyle/>
-          <a:p>
-            <a:pPr algn="ctr">
-              <a:defRPr sz="950" b="1">
-                <a:solidFill>
-                  <a:srgbClr val="111827"/>
-                </a:solidFill>
-                <a:latin typeface="Calibri"/>
-              </a:defRPr>
-            </a:pPr>
-            <a:r>
-              <a:t>Kurt B.</a:t>
-            </a:r>
-          </a:p>
-        </p:txBody>
-      </p:sp>
-      <p:sp>
-        <p:nvSpPr>
-          <p:cNvPr id="213" name="TextBox 212"/>
-          <p:cNvSpPr txBox="1"/>
-          <p:nvPr/>
-        </p:nvSpPr>
-        <p:spPr>
-          <a:xfrm>
-            <a:off x="7644383" y="5614415"/>
-            <a:ext cx="3474720" cy="219456"/>
-          </a:xfrm>
-          <a:prstGeom prst="rect">
-            <a:avLst/>
-          </a:prstGeom>
-          <a:noFill/>
-        </p:spPr>
-        <p:txBody>
-          <a:bodyPr wrap="square">
-            <a:spAutoFit/>
-          </a:bodyPr>
-          <a:lstStyle/>
-          <a:p>
-            <a:pPr algn="l">
-              <a:defRPr sz="950" b="0">
-                <a:solidFill>
-                  <a:srgbClr val="111827"/>
-                </a:solidFill>
-                <a:latin typeface="Calibri"/>
-              </a:defRPr>
-            </a:pPr>
-            <a:r>
-              <a:t>The McClure Agency LLC</a:t>
-            </a:r>
-          </a:p>
-        </p:txBody>
-      </p:sp>
-      <p:sp>
-        <p:nvSpPr>
-          <p:cNvPr id="214" name="TextBox 213"/>
-          <p:cNvSpPr txBox="1"/>
-          <p:nvPr/>
-        </p:nvSpPr>
-        <p:spPr>
-          <a:xfrm>
-            <a:off x="11119104" y="5614415"/>
-            <a:ext cx="914400" cy="219456"/>
-          </a:xfrm>
-          <a:prstGeom prst="rect">
-            <a:avLst/>
-          </a:prstGeom>
-          <a:noFill/>
-        </p:spPr>
-        <p:txBody>
-          <a:bodyPr wrap="square">
-            <a:spAutoFit/>
-          </a:bodyPr>
-          <a:lstStyle/>
-          <a:p>
-            <a:pPr algn="ctr">
-              <a:defRPr sz="950" b="1">
-                <a:solidFill>
-                  <a:srgbClr val="111827"/>
-                </a:solidFill>
-                <a:latin typeface="Calibri"/>
-              </a:defRPr>
-            </a:pPr>
-            <a:r>
-              <a:t>350</a:t>
-            </a:r>
-          </a:p>
-        </p:txBody>
-      </p:sp>
-      <p:sp>
-        <p:nvSpPr>
-          <p:cNvPr id="215" name="Rectangle 214"/>
-          <p:cNvSpPr/>
-          <p:nvPr/>
-        </p:nvSpPr>
-        <p:spPr>
-          <a:xfrm>
-            <a:off x="6291072" y="5833871"/>
-            <a:ext cx="5742432" cy="237744"/>
-          </a:xfrm>
-          <a:prstGeom prst="rect">
-            <a:avLst/>
-          </a:prstGeom>
-          <a:solidFill>
-            <a:srgbClr val="F9FAFB"/>
-          </a:solidFill>
-          <a:ln>
-            <a:noFill/>
-          </a:ln>
-        </p:spPr>
-        <p:style>
-          <a:lnRef idx="1">
-            <a:schemeClr val="accent1"/>
-          </a:lnRef>
-          <a:fillRef idx="3">
-            <a:schemeClr val="accent1"/>
-          </a:fillRef>
-          <a:effectRef idx="2">
-            <a:schemeClr val="accent1"/>
-          </a:effectRef>
-          <a:fontRef idx="minor">
-            <a:schemeClr val="lt1"/>
-          </a:fontRef>
-        </p:style>
-        <p:txBody>
-          <a:bodyPr rtlCol="0" anchor="ctr"/>
-          <a:lstStyle/>
-          <a:p>
-            <a:pPr algn="ctr"/>
-          </a:p>
-        </p:txBody>
-      </p:sp>
-      <p:sp>
-        <p:nvSpPr>
-          <p:cNvPr id="216" name="TextBox 215"/>
-          <p:cNvSpPr txBox="1"/>
-          <p:nvPr/>
-        </p:nvSpPr>
-        <p:spPr>
-          <a:xfrm>
-            <a:off x="6291072" y="5852159"/>
-            <a:ext cx="347472" cy="219456"/>
-          </a:xfrm>
-          <a:prstGeom prst="rect">
-            <a:avLst/>
-          </a:prstGeom>
-          <a:noFill/>
-        </p:spPr>
-        <p:txBody>
-          <a:bodyPr wrap="square">
-            <a:spAutoFit/>
-          </a:bodyPr>
-          <a:lstStyle/>
-          <a:p>
-            <a:pPr algn="ctr">
-              <a:defRPr sz="950" b="1">
-                <a:solidFill>
-                  <a:srgbClr val="111827"/>
-                </a:solidFill>
-                <a:latin typeface="Calibri"/>
-              </a:defRPr>
-            </a:pPr>
-            <a:r>
-              <a:t>20</a:t>
-            </a:r>
-          </a:p>
-        </p:txBody>
-      </p:sp>
-      <p:sp>
-        <p:nvSpPr>
-          <p:cNvPr id="217" name="TextBox 216"/>
-          <p:cNvSpPr txBox="1"/>
-          <p:nvPr/>
-        </p:nvSpPr>
-        <p:spPr>
-          <a:xfrm>
-            <a:off x="6638544" y="5852159"/>
-            <a:ext cx="1005840" cy="219456"/>
-          </a:xfrm>
-          <a:prstGeom prst="rect">
-            <a:avLst/>
-          </a:prstGeom>
-          <a:noFill/>
-        </p:spPr>
-        <p:txBody>
-          <a:bodyPr wrap="square">
-            <a:spAutoFit/>
-          </a:bodyPr>
-          <a:lstStyle/>
-          <a:p>
-            <a:pPr algn="ctr">
-              <a:defRPr sz="950" b="1">
-                <a:solidFill>
-                  <a:srgbClr val="111827"/>
-                </a:solidFill>
-                <a:latin typeface="Calibri"/>
-              </a:defRPr>
-            </a:pPr>
-            <a:r>
-              <a:t>Derrick L.</a:t>
-            </a:r>
-          </a:p>
-        </p:txBody>
-      </p:sp>
-      <p:sp>
-        <p:nvSpPr>
-          <p:cNvPr id="218" name="TextBox 217"/>
-          <p:cNvSpPr txBox="1"/>
-          <p:nvPr/>
-        </p:nvSpPr>
-        <p:spPr>
-          <a:xfrm>
-            <a:off x="7644383" y="5852159"/>
-            <a:ext cx="3474720" cy="219456"/>
-          </a:xfrm>
-          <a:prstGeom prst="rect">
-            <a:avLst/>
-          </a:prstGeom>
-          <a:noFill/>
-        </p:spPr>
-        <p:txBody>
-          <a:bodyPr wrap="square">
-            <a:spAutoFit/>
-          </a:bodyPr>
-          <a:lstStyle/>
-          <a:p>
-            <a:pPr algn="l">
-              <a:defRPr sz="950" b="0">
-                <a:solidFill>
-                  <a:srgbClr val="111827"/>
-                </a:solidFill>
-                <a:latin typeface="Calibri"/>
-              </a:defRPr>
-            </a:pPr>
-            <a:r>
               <a:t>Protectgo Services LLC</a:t>
             </a:r>
           </a:p>
@@ -49656,7 +49656,7 @@
               </a:defRPr>
             </a:pPr>
             <a:r>
-              <a:t>323</a:t>
+              <a:t>335</a:t>
             </a:r>
           </a:p>
         </p:txBody>

--- a/generated/Sales Dashboards/BD Rep Scoreboard.pptx
+++ b/generated/Sales Dashboards/BD Rep Scoreboard.pptx
@@ -1661,7 +1661,7 @@
           </a:p>
           <a:p>
             <a:r>
-              <a:t>- We are 58 days into a 91-day quarter.</a:t>
+              <a:t>- We are 59 days into a 91-day quarter.</a:t>
             </a:r>
           </a:p>
         </p:txBody>
@@ -4902,7 +4902,7 @@
               </a:defRPr>
             </a:pPr>
             <a:r>
-              <a:t>As of May 28, 2026  |  58 days into Q2  |  33 days remaining</a:t>
+              <a:t>As of May 29, 2026  |  59 days into Q2  |  32 days remaining</a:t>
             </a:r>
           </a:p>
         </p:txBody>
@@ -4938,7 +4938,7 @@
               </a:defRPr>
             </a:pPr>
             <a:r>
-              <a:t>Generated May 28, 2026</a:t>
+              <a:t>Generated May 29, 2026</a:t>
             </a:r>
           </a:p>
         </p:txBody>
@@ -5055,7 +5055,7 @@
               </a:defRPr>
             </a:pPr>
             <a:r>
-              <a:t>Team GWP Q2 YTD  |  Proj. $31.3M</a:t>
+              <a:t>Team GWP Q2 YTD  |  Proj. $30.7M</a:t>
             </a:r>
           </a:p>
         </p:txBody>
@@ -5134,7 +5134,7 @@
               </a:defRPr>
             </a:pPr>
             <a:r>
-              <a:t>Pacing 170% of Q1 Final</a:t>
+              <a:t>Pacing 167% of Q1 Final</a:t>
             </a:r>
           </a:p>
         </p:txBody>
@@ -5215,7 +5215,7 @@
               </a:defRPr>
             </a:pPr>
             <a:r>
-              <a:t>88%</a:t>
+              <a:t>89%</a:t>
             </a:r>
           </a:p>
         </p:txBody>
@@ -5411,7 +5411,7 @@
               </a:defRPr>
             </a:pPr>
             <a:r>
-              <a:t>32,108</a:t>
+              <a:t>32,765</a:t>
             </a:r>
           </a:p>
         </p:txBody>
@@ -5526,7 +5526,7 @@
               </a:defRPr>
             </a:pPr>
             <a:r>
-              <a:t>Pacing 110% of Q1 Final</a:t>
+              <a:t>Pacing 111% of Q1 Final</a:t>
             </a:r>
           </a:p>
         </p:txBody>
@@ -5758,7 +5758,7 @@
               </a:defRPr>
             </a:pPr>
             <a:r>
-              <a:t>▲ $1.7M vs Apr pace</a:t>
+              <a:t>▲ $1.3M vs Apr pace</a:t>
             </a:r>
           </a:p>
         </p:txBody>
@@ -5794,7 +5794,7 @@
               </a:defRPr>
             </a:pPr>
             <a:r>
-              <a:t>▲ 40pp vs Q1 avg (48%)</a:t>
+              <a:t>▲ 41pp vs Q1 avg (48%)</a:t>
             </a:r>
           </a:p>
         </p:txBody>
@@ -5830,7 +5830,7 @@
               </a:defRPr>
             </a:pPr>
             <a:r>
-              <a:t>▲ 14605 vs Apr (17503)</a:t>
+              <a:t>▲ 15289 vs Apr (17476)</a:t>
             </a:r>
           </a:p>
         </p:txBody>
@@ -5866,7 +5866,7 @@
               </a:defRPr>
             </a:pPr>
             <a:r>
-              <a:t>▲ 4 vs Q1 final (5)</a:t>
+              <a:t>▲ 5 vs Q1 final (4)</a:t>
             </a:r>
           </a:p>
         </p:txBody>
@@ -6600,7 +6600,7 @@
               </a:defRPr>
             </a:pPr>
             <a:r>
-              <a:t>45,733</a:t>
+              <a:t>45,722</a:t>
             </a:r>
           </a:p>
         </p:txBody>
@@ -6672,7 +6672,7 @@
               </a:defRPr>
             </a:pPr>
             <a:r>
-              <a:t>5</a:t>
+              <a:t>4</a:t>
             </a:r>
           </a:p>
         </p:txBody>
@@ -6787,7 +6787,7 @@
               </a:defRPr>
             </a:pPr>
             <a:r>
-              <a:t>MTD (May):  $10.28M written  ·  $11.39M pace  ·  28/31 days elapsed</a:t>
+              <a:t>MTD (May):  $10.28M written  ·  $10.99M pace  ·  29/31 days elapsed</a:t>
             </a:r>
           </a:p>
         </p:txBody>
@@ -6952,7 +6952,7 @@
               </a:defRPr>
             </a:pPr>
             <a:r>
-              <a:t>Largest fleet policies written Apr 1–May 28  ·  Ranked by premium  ·  Fleet = 4+ power units</a:t>
+              <a:t>Largest fleet policies written Apr 1–May 29  ·  Ranked by premium  ·  Fleet = 4+ power units</a:t>
             </a:r>
           </a:p>
         </p:txBody>
@@ -6988,7 +6988,7 @@
               </a:defRPr>
             </a:pPr>
             <a:r>
-              <a:t>Generated May 28, 2026</a:t>
+              <a:t>Generated May 29, 2026</a:t>
             </a:r>
           </a:p>
         </p:txBody>
@@ -8218,7 +8218,7 @@
               </a:defRPr>
             </a:pPr>
             <a:r>
-              <a:t>Christopher H.</a:t>
+              <a:t>Derek J.</a:t>
             </a:r>
           </a:p>
         </p:txBody>
@@ -8254,7 +8254,7 @@
               </a:defRPr>
             </a:pPr>
             <a:r>
-              <a:t>Insurox Group, Inc</a:t>
+              <a:t>Sedge Insurance Agency LLC</a:t>
             </a:r>
           </a:p>
         </p:txBody>
@@ -8290,7 +8290,7 @@
               </a:defRPr>
             </a:pPr>
             <a:r>
-              <a:t>$275K</a:t>
+              <a:t>$281K</a:t>
             </a:r>
           </a:p>
         </p:txBody>
@@ -8326,7 +8326,7 @@
               </a:defRPr>
             </a:pPr>
             <a:r>
-              <a:t>9</a:t>
+              <a:t>12</a:t>
             </a:r>
           </a:p>
         </p:txBody>
@@ -8441,7 +8441,7 @@
               </a:defRPr>
             </a:pPr>
             <a:r>
-              <a:t>Derrick L.</a:t>
+              <a:t>Christopher H.</a:t>
             </a:r>
           </a:p>
         </p:txBody>
@@ -8477,7 +8477,7 @@
               </a:defRPr>
             </a:pPr>
             <a:r>
-              <a:t>Lone Star Direct Insurance Agency LLC</a:t>
+              <a:t>Insurox Group, Inc</a:t>
             </a:r>
           </a:p>
         </p:txBody>
@@ -8513,7 +8513,7 @@
               </a:defRPr>
             </a:pPr>
             <a:r>
-              <a:t>$254K</a:t>
+              <a:t>$275K</a:t>
             </a:r>
           </a:p>
         </p:txBody>
@@ -8549,7 +8549,7 @@
               </a:defRPr>
             </a:pPr>
             <a:r>
-              <a:t>21</a:t>
+              <a:t>9</a:t>
             </a:r>
           </a:p>
         </p:txBody>
@@ -8664,7 +8664,7 @@
               </a:defRPr>
             </a:pPr>
             <a:r>
-              <a:t>Christopher H.</a:t>
+              <a:t>Derrick L.</a:t>
             </a:r>
           </a:p>
         </p:txBody>
@@ -8700,7 +8700,7 @@
               </a:defRPr>
             </a:pPr>
             <a:r>
-              <a:t>TR Insurance Agency Inc</a:t>
+              <a:t>Lone Star Direct Insurance Agency LLC</a:t>
             </a:r>
           </a:p>
         </p:txBody>
@@ -8736,7 +8736,7 @@
               </a:defRPr>
             </a:pPr>
             <a:r>
-              <a:t>$241K</a:t>
+              <a:t>$254K</a:t>
             </a:r>
           </a:p>
         </p:txBody>
@@ -8772,7 +8772,7 @@
               </a:defRPr>
             </a:pPr>
             <a:r>
-              <a:t>12</a:t>
+              <a:t>21</a:t>
             </a:r>
           </a:p>
         </p:txBody>
@@ -8923,7 +8923,7 @@
               </a:defRPr>
             </a:pPr>
             <a:r>
-              <a:t>Jagdeep Singh Insurance Agency, Inc</a:t>
+              <a:t>Reliance Partners, LLC</a:t>
             </a:r>
           </a:p>
         </p:txBody>
@@ -8959,7 +8959,7 @@
               </a:defRPr>
             </a:pPr>
             <a:r>
-              <a:t>$239K</a:t>
+              <a:t>$247K</a:t>
             </a:r>
           </a:p>
         </p:txBody>
@@ -8995,7 +8995,7 @@
               </a:defRPr>
             </a:pPr>
             <a:r>
-              <a:t>15</a:t>
+              <a:t>10</a:t>
             </a:r>
           </a:p>
         </p:txBody>
@@ -9110,7 +9110,7 @@
               </a:defRPr>
             </a:pPr>
             <a:r>
-              <a:t>Alexis B.</a:t>
+              <a:t>Christopher H.</a:t>
             </a:r>
           </a:p>
         </p:txBody>
@@ -9146,7 +9146,7 @@
               </a:defRPr>
             </a:pPr>
             <a:r>
-              <a:t>Amerigo Insurance Agency</a:t>
+              <a:t>TR Insurance Agency Inc</a:t>
             </a:r>
           </a:p>
         </p:txBody>
@@ -9182,7 +9182,7 @@
               </a:defRPr>
             </a:pPr>
             <a:r>
-              <a:t>$234K</a:t>
+              <a:t>$241K</a:t>
             </a:r>
           </a:p>
         </p:txBody>
@@ -9218,7 +9218,7 @@
               </a:defRPr>
             </a:pPr>
             <a:r>
-              <a:t>10</a:t>
+              <a:t>12</a:t>
             </a:r>
           </a:p>
         </p:txBody>
@@ -9369,7 +9369,7 @@
               </a:defRPr>
             </a:pPr>
             <a:r>
-              <a:t>Reliance Partners, LLC</a:t>
+              <a:t>Jagdeep Singh Insurance Agency, Inc</a:t>
             </a:r>
           </a:p>
         </p:txBody>
@@ -9405,7 +9405,7 @@
               </a:defRPr>
             </a:pPr>
             <a:r>
-              <a:t>$231K</a:t>
+              <a:t>$239K</a:t>
             </a:r>
           </a:p>
         </p:txBody>
@@ -9441,7 +9441,7 @@
               </a:defRPr>
             </a:pPr>
             <a:r>
-              <a:t>13</a:t>
+              <a:t>15</a:t>
             </a:r>
           </a:p>
         </p:txBody>
@@ -9556,7 +9556,7 @@
               </a:defRPr>
             </a:pPr>
             <a:r>
-              <a:t>Derek J.</a:t>
+              <a:t>Alexis B.</a:t>
             </a:r>
           </a:p>
         </p:txBody>
@@ -9592,7 +9592,7 @@
               </a:defRPr>
             </a:pPr>
             <a:r>
-              <a:t>Paramount Exclusive Insurance Services, Inc.</a:t>
+              <a:t>Amerigo Insurance Agency</a:t>
             </a:r>
           </a:p>
         </p:txBody>
@@ -9628,7 +9628,7 @@
               </a:defRPr>
             </a:pPr>
             <a:r>
-              <a:t>$220K</a:t>
+              <a:t>$234K</a:t>
             </a:r>
           </a:p>
         </p:txBody>
@@ -9664,7 +9664,7 @@
               </a:defRPr>
             </a:pPr>
             <a:r>
-              <a:t>11</a:t>
+              <a:t>10</a:t>
             </a:r>
           </a:p>
         </p:txBody>
@@ -9815,7 +9815,7 @@
               </a:defRPr>
             </a:pPr>
             <a:r>
-              <a:t>Jagdeep Singh Insurance Agency, Inc</a:t>
+              <a:t>Paramount Exclusive Insurance Services, Inc.</a:t>
             </a:r>
           </a:p>
         </p:txBody>
@@ -9851,7 +9851,7 @@
               </a:defRPr>
             </a:pPr>
             <a:r>
-              <a:t>$217K</a:t>
+              <a:t>$220K</a:t>
             </a:r>
           </a:p>
         </p:txBody>
@@ -10002,7 +10002,7 @@
               </a:defRPr>
             </a:pPr>
             <a:r>
-              <a:t>Ron D.</a:t>
+              <a:t>Derek J.</a:t>
             </a:r>
           </a:p>
         </p:txBody>
@@ -10038,7 +10038,7 @@
               </a:defRPr>
             </a:pPr>
             <a:r>
-              <a:t>Eagle National Insurance Services, Inc.</a:t>
+              <a:t>Jagdeep Singh Insurance Agency, Inc</a:t>
             </a:r>
           </a:p>
         </p:txBody>
@@ -10074,7 +10074,7 @@
               </a:defRPr>
             </a:pPr>
             <a:r>
-              <a:t>$202K</a:t>
+              <a:t>$217K</a:t>
             </a:r>
           </a:p>
         </p:txBody>
@@ -10110,7 +10110,7 @@
               </a:defRPr>
             </a:pPr>
             <a:r>
-              <a:t>8</a:t>
+              <a:t>11</a:t>
             </a:r>
           </a:p>
         </p:txBody>
@@ -10261,7 +10261,7 @@
               </a:defRPr>
             </a:pPr>
             <a:r>
-              <a:t>CASCADE INSURANCE SERVICES INC DBA: CASCADE MUTUAL INSURANCE SERV</a:t>
+              <a:t>Surefire Insurance Agency Corp.</a:t>
             </a:r>
           </a:p>
         </p:txBody>
@@ -10297,7 +10297,7 @@
               </a:defRPr>
             </a:pPr>
             <a:r>
-              <a:t>$202K</a:t>
+              <a:t>$215K</a:t>
             </a:r>
           </a:p>
         </p:txBody>
@@ -10333,7 +10333,7 @@
               </a:defRPr>
             </a:pPr>
             <a:r>
-              <a:t>11</a:t>
+              <a:t>17</a:t>
             </a:r>
           </a:p>
         </p:txBody>
@@ -10448,7 +10448,7 @@
               </a:defRPr>
             </a:pPr>
             <a:r>
-              <a:t>Derrick L.</a:t>
+              <a:t>Derek J.</a:t>
             </a:r>
           </a:p>
         </p:txBody>
@@ -10484,7 +10484,7 @@
               </a:defRPr>
             </a:pPr>
             <a:r>
-              <a:t>Justin Wilson</a:t>
+              <a:t>Reliance Partners, LLC</a:t>
             </a:r>
           </a:p>
         </p:txBody>
@@ -10520,7 +10520,7 @@
               </a:defRPr>
             </a:pPr>
             <a:r>
-              <a:t>$194K</a:t>
+              <a:t>$214K</a:t>
             </a:r>
           </a:p>
         </p:txBody>
@@ -10556,7 +10556,7 @@
               </a:defRPr>
             </a:pPr>
             <a:r>
-              <a:t>9</a:t>
+              <a:t>12</a:t>
             </a:r>
           </a:p>
         </p:txBody>
@@ -10671,7 +10671,7 @@
               </a:defRPr>
             </a:pPr>
             <a:r>
-              <a:t>Alexis B.</a:t>
+              <a:t>Ron D.</a:t>
             </a:r>
           </a:p>
         </p:txBody>
@@ -10707,7 +10707,7 @@
               </a:defRPr>
             </a:pPr>
             <a:r>
-              <a:t>Stellar Management, Inc</a:t>
+              <a:t>Eagle National Insurance Services, Inc.</a:t>
             </a:r>
           </a:p>
         </p:txBody>
@@ -10743,7 +10743,7 @@
               </a:defRPr>
             </a:pPr>
             <a:r>
-              <a:t>$190K</a:t>
+              <a:t>$202K</a:t>
             </a:r>
           </a:p>
         </p:txBody>
@@ -10779,7 +10779,7 @@
               </a:defRPr>
             </a:pPr>
             <a:r>
-              <a:t>13</a:t>
+              <a:t>8</a:t>
             </a:r>
           </a:p>
         </p:txBody>
@@ -10894,7 +10894,7 @@
               </a:defRPr>
             </a:pPr>
             <a:r>
-              <a:t>Christopher H.</a:t>
+              <a:t>Derrick L.</a:t>
             </a:r>
           </a:p>
         </p:txBody>
@@ -10930,7 +10930,7 @@
               </a:defRPr>
             </a:pPr>
             <a:r>
-              <a:t>Truczone Insurance Agency LLC</a:t>
+              <a:t>Justin Wilson</a:t>
             </a:r>
           </a:p>
         </p:txBody>
@@ -10966,7 +10966,7 @@
               </a:defRPr>
             </a:pPr>
             <a:r>
-              <a:t>$179K</a:t>
+              <a:t>$194K</a:t>
             </a:r>
           </a:p>
         </p:txBody>
@@ -11002,7 +11002,7 @@
               </a:defRPr>
             </a:pPr>
             <a:r>
-              <a:t>13</a:t>
+              <a:t>9</a:t>
             </a:r>
           </a:p>
         </p:txBody>
@@ -11117,7 +11117,7 @@
               </a:defRPr>
             </a:pPr>
             <a:r>
-              <a:t>Ron D.</a:t>
+              <a:t>Alexis B.</a:t>
             </a:r>
           </a:p>
         </p:txBody>
@@ -11153,7 +11153,7 @@
               </a:defRPr>
             </a:pPr>
             <a:r>
-              <a:t>USA SPECIALTY INSURANCE/DBA PREVENTTY</a:t>
+              <a:t>Stellar Management, Inc</a:t>
             </a:r>
           </a:p>
         </p:txBody>
@@ -11189,7 +11189,7 @@
               </a:defRPr>
             </a:pPr>
             <a:r>
-              <a:t>$179K</a:t>
+              <a:t>$190K</a:t>
             </a:r>
           </a:p>
         </p:txBody>
@@ -11225,7 +11225,7 @@
               </a:defRPr>
             </a:pPr>
             <a:r>
-              <a:t>11</a:t>
+              <a:t>13</a:t>
             </a:r>
           </a:p>
         </p:txBody>
@@ -11340,7 +11340,7 @@
               </a:defRPr>
             </a:pPr>
             <a:r>
-              <a:t>Alexis B.</a:t>
+              <a:t>Derek J.</a:t>
             </a:r>
           </a:p>
         </p:txBody>
@@ -11376,7 +11376,7 @@
               </a:defRPr>
             </a:pPr>
             <a:r>
-              <a:t>MST INSURANCE SERVICES INC</a:t>
+              <a:t>Swan Insurance Sales, LLC</a:t>
             </a:r>
           </a:p>
         </p:txBody>
@@ -11412,7 +11412,7 @@
               </a:defRPr>
             </a:pPr>
             <a:r>
-              <a:t>$175K</a:t>
+              <a:t>$190K</a:t>
             </a:r>
           </a:p>
         </p:txBody>
@@ -11448,7 +11448,7 @@
               </a:defRPr>
             </a:pPr>
             <a:r>
-              <a:t>9</a:t>
+              <a:t>10</a:t>
             </a:r>
           </a:p>
         </p:txBody>
@@ -11599,7 +11599,7 @@
               </a:defRPr>
             </a:pPr>
             <a:r>
-              <a:t>Get Logan Inc</a:t>
+              <a:t>Truczone Insurance Agency LLC</a:t>
             </a:r>
           </a:p>
         </p:txBody>
@@ -11635,7 +11635,7 @@
               </a:defRPr>
             </a:pPr>
             <a:r>
-              <a:t>$171K</a:t>
+              <a:t>$179K</a:t>
             </a:r>
           </a:p>
         </p:txBody>
@@ -11671,7 +11671,7 @@
               </a:defRPr>
             </a:pPr>
             <a:r>
-              <a:t>6</a:t>
+              <a:t>13</a:t>
             </a:r>
           </a:p>
         </p:txBody>
@@ -11750,7 +11750,7 @@
               </a:defRPr>
             </a:pPr>
             <a:r>
-              <a:t>Q2 Fleet Total: 217 fleet binds  ·  $19.9M bound premium</a:t>
+              <a:t>Q2 Fleet Total: 222 fleet binds  ·  $20.7M bound premium</a:t>
             </a:r>
           </a:p>
         </p:txBody>
@@ -11891,7 +11891,7 @@
               </a:defRPr>
             </a:pPr>
             <a:r>
-              <a:t>Ranked by bound GWP written  ·  Mint-shaded row = new vs last week’s deck  ·  Apr 1–May 28  ·  Individual producers</a:t>
+              <a:t>Ranked by bound GWP written  ·  Mint-shaded row = new vs last week’s deck  ·  Apr 1–May 29  ·  Individual producers</a:t>
             </a:r>
           </a:p>
         </p:txBody>
@@ -11927,7 +11927,7 @@
               </a:defRPr>
             </a:pPr>
             <a:r>
-              <a:t>Generated May 28, 2026</a:t>
+              <a:t>Generated May 29, 2026</a:t>
             </a:r>
           </a:p>
         </p:txBody>
@@ -18400,7 +18400,7 @@
               </a:defRPr>
             </a:pPr>
             <a:r>
-              <a:t>Ibrahim Mammo</a:t>
+              <a:t>Michael Su</a:t>
             </a:r>
           </a:p>
         </p:txBody>
@@ -18436,7 +18436,7 @@
               </a:defRPr>
             </a:pPr>
             <a:r>
-              <a:t>Surefire Insurance Agency Corp.</a:t>
+              <a:t>Jtc Insurance Agency, Inc.</a:t>
             </a:r>
           </a:p>
         </p:txBody>
@@ -18472,7 +18472,7 @@
               </a:defRPr>
             </a:pPr>
             <a:r>
-              <a:t>$372K</a:t>
+              <a:t>$368K</a:t>
             </a:r>
           </a:p>
         </p:txBody>
@@ -18486,193 +18486,6 @@
         <p:spPr>
           <a:xfrm>
             <a:off x="6254496" y="4407408"/>
-            <a:ext cx="5705856" cy="256032"/>
-          </a:xfrm>
-          <a:prstGeom prst="rect">
-            <a:avLst/>
-          </a:prstGeom>
-          <a:solidFill>
-            <a:srgbClr val="F9FAFB"/>
-          </a:solidFill>
-          <a:ln>
-            <a:noFill/>
-          </a:ln>
-        </p:spPr>
-        <p:style>
-          <a:lnRef idx="1">
-            <a:schemeClr val="accent1"/>
-          </a:lnRef>
-          <a:fillRef idx="3">
-            <a:schemeClr val="accent1"/>
-          </a:fillRef>
-          <a:effectRef idx="2">
-            <a:schemeClr val="accent1"/>
-          </a:effectRef>
-          <a:fontRef idx="minor">
-            <a:schemeClr val="lt1"/>
-          </a:fontRef>
-        </p:style>
-        <p:txBody>
-          <a:bodyPr rtlCol="0" anchor="ctr"/>
-          <a:lstStyle/>
-          <a:p>
-            <a:pPr algn="ctr"/>
-          </a:p>
-        </p:txBody>
-      </p:sp>
-      <p:sp>
-        <p:nvSpPr>
-          <p:cNvPr id="182" name="TextBox 181"/>
-          <p:cNvSpPr txBox="1"/>
-          <p:nvPr/>
-        </p:nvSpPr>
-        <p:spPr>
-          <a:xfrm>
-            <a:off x="6254496" y="4425696"/>
-            <a:ext cx="411480" cy="237744"/>
-          </a:xfrm>
-          <a:prstGeom prst="rect">
-            <a:avLst/>
-          </a:prstGeom>
-          <a:noFill/>
-        </p:spPr>
-        <p:txBody>
-          <a:bodyPr wrap="none">
-            <a:spAutoFit/>
-          </a:bodyPr>
-          <a:lstStyle/>
-          <a:p>
-            <a:pPr algn="ctr">
-              <a:defRPr sz="950" b="1">
-                <a:solidFill>
-                  <a:srgbClr val="6B7280"/>
-                </a:solidFill>
-                <a:latin typeface="Calibri"/>
-              </a:defRPr>
-            </a:pPr>
-            <a:r>
-              <a:t>34</a:t>
-            </a:r>
-          </a:p>
-        </p:txBody>
-      </p:sp>
-      <p:sp>
-        <p:nvSpPr>
-          <p:cNvPr id="183" name="TextBox 182"/>
-          <p:cNvSpPr txBox="1"/>
-          <p:nvPr/>
-        </p:nvSpPr>
-        <p:spPr>
-          <a:xfrm>
-            <a:off x="6665976" y="4425696"/>
-            <a:ext cx="1920240" cy="237744"/>
-          </a:xfrm>
-          <a:prstGeom prst="rect">
-            <a:avLst/>
-          </a:prstGeom>
-          <a:noFill/>
-        </p:spPr>
-        <p:txBody>
-          <a:bodyPr wrap="none">
-            <a:spAutoFit/>
-          </a:bodyPr>
-          <a:lstStyle/>
-          <a:p>
-            <a:pPr algn="l">
-              <a:defRPr sz="950" b="1">
-                <a:solidFill>
-                  <a:srgbClr val="111827"/>
-                </a:solidFill>
-                <a:latin typeface="Calibri"/>
-              </a:defRPr>
-            </a:pPr>
-            <a:r>
-              <a:t>Michael Su</a:t>
-            </a:r>
-          </a:p>
-        </p:txBody>
-      </p:sp>
-      <p:sp>
-        <p:nvSpPr>
-          <p:cNvPr id="184" name="TextBox 183"/>
-          <p:cNvSpPr txBox="1"/>
-          <p:nvPr/>
-        </p:nvSpPr>
-        <p:spPr>
-          <a:xfrm>
-            <a:off x="8586216" y="4425696"/>
-            <a:ext cx="2459736" cy="237744"/>
-          </a:xfrm>
-          <a:prstGeom prst="rect">
-            <a:avLst/>
-          </a:prstGeom>
-          <a:noFill/>
-        </p:spPr>
-        <p:txBody>
-          <a:bodyPr wrap="none">
-            <a:spAutoFit/>
-          </a:bodyPr>
-          <a:lstStyle/>
-          <a:p>
-            <a:pPr algn="l">
-              <a:defRPr sz="950" b="0">
-                <a:solidFill>
-                  <a:srgbClr val="6B7280"/>
-                </a:solidFill>
-                <a:latin typeface="Calibri"/>
-              </a:defRPr>
-            </a:pPr>
-            <a:r>
-              <a:t>Jtc Insurance Agency, Inc.</a:t>
-            </a:r>
-          </a:p>
-        </p:txBody>
-      </p:sp>
-      <p:sp>
-        <p:nvSpPr>
-          <p:cNvPr id="185" name="TextBox 184"/>
-          <p:cNvSpPr txBox="1"/>
-          <p:nvPr/>
-        </p:nvSpPr>
-        <p:spPr>
-          <a:xfrm>
-            <a:off x="11045952" y="4425696"/>
-            <a:ext cx="914400" cy="237744"/>
-          </a:xfrm>
-          <a:prstGeom prst="rect">
-            <a:avLst/>
-          </a:prstGeom>
-          <a:noFill/>
-        </p:spPr>
-        <p:txBody>
-          <a:bodyPr wrap="none">
-            <a:spAutoFit/>
-          </a:bodyPr>
-          <a:lstStyle/>
-          <a:p>
-            <a:pPr algn="ctr">
-              <a:defRPr sz="950" b="1">
-                <a:solidFill>
-                  <a:srgbClr val="111827"/>
-                </a:solidFill>
-                <a:latin typeface="Calibri"/>
-              </a:defRPr>
-            </a:pPr>
-            <a:r>
-              <a:t>$368K</a:t>
-            </a:r>
-          </a:p>
-        </p:txBody>
-      </p:sp>
-      <p:sp>
-        <p:nvSpPr>
-          <p:cNvPr id="186" name="Rectangle 185"/>
-          <p:cNvSpPr/>
-          <p:nvPr/>
-        </p:nvSpPr>
-        <p:spPr>
-          <a:xfrm>
-            <a:off x="6254496" y="4663440"/>
             <a:ext cx="5705856" cy="256032"/>
           </a:xfrm>
           <a:prstGeom prst="rect">
@@ -18709,6 +18522,193 @@
       </p:sp>
       <p:sp>
         <p:nvSpPr>
+          <p:cNvPr id="182" name="TextBox 181"/>
+          <p:cNvSpPr txBox="1"/>
+          <p:nvPr/>
+        </p:nvSpPr>
+        <p:spPr>
+          <a:xfrm>
+            <a:off x="6254496" y="4425696"/>
+            <a:ext cx="411480" cy="237744"/>
+          </a:xfrm>
+          <a:prstGeom prst="rect">
+            <a:avLst/>
+          </a:prstGeom>
+          <a:noFill/>
+        </p:spPr>
+        <p:txBody>
+          <a:bodyPr wrap="none">
+            <a:spAutoFit/>
+          </a:bodyPr>
+          <a:lstStyle/>
+          <a:p>
+            <a:pPr algn="ctr">
+              <a:defRPr sz="950" b="1">
+                <a:solidFill>
+                  <a:srgbClr val="6B7280"/>
+                </a:solidFill>
+                <a:latin typeface="Calibri"/>
+              </a:defRPr>
+            </a:pPr>
+            <a:r>
+              <a:t>34</a:t>
+            </a:r>
+          </a:p>
+        </p:txBody>
+      </p:sp>
+      <p:sp>
+        <p:nvSpPr>
+          <p:cNvPr id="183" name="TextBox 182"/>
+          <p:cNvSpPr txBox="1"/>
+          <p:nvPr/>
+        </p:nvSpPr>
+        <p:spPr>
+          <a:xfrm>
+            <a:off x="6665976" y="4425696"/>
+            <a:ext cx="1920240" cy="237744"/>
+          </a:xfrm>
+          <a:prstGeom prst="rect">
+            <a:avLst/>
+          </a:prstGeom>
+          <a:noFill/>
+        </p:spPr>
+        <p:txBody>
+          <a:bodyPr wrap="none">
+            <a:spAutoFit/>
+          </a:bodyPr>
+          <a:lstStyle/>
+          <a:p>
+            <a:pPr algn="l">
+              <a:defRPr sz="950" b="1">
+                <a:solidFill>
+                  <a:srgbClr val="111827"/>
+                </a:solidFill>
+                <a:latin typeface="Calibri"/>
+              </a:defRPr>
+            </a:pPr>
+            <a:r>
+              <a:t>Elena Tchernogorova</a:t>
+            </a:r>
+          </a:p>
+        </p:txBody>
+      </p:sp>
+      <p:sp>
+        <p:nvSpPr>
+          <p:cNvPr id="184" name="TextBox 183"/>
+          <p:cNvSpPr txBox="1"/>
+          <p:nvPr/>
+        </p:nvSpPr>
+        <p:spPr>
+          <a:xfrm>
+            <a:off x="8586216" y="4425696"/>
+            <a:ext cx="2459736" cy="237744"/>
+          </a:xfrm>
+          <a:prstGeom prst="rect">
+            <a:avLst/>
+          </a:prstGeom>
+          <a:noFill/>
+        </p:spPr>
+        <p:txBody>
+          <a:bodyPr wrap="none">
+            <a:spAutoFit/>
+          </a:bodyPr>
+          <a:lstStyle/>
+          <a:p>
+            <a:pPr algn="l">
+              <a:defRPr sz="950" b="0">
+                <a:solidFill>
+                  <a:srgbClr val="6B7280"/>
+                </a:solidFill>
+                <a:latin typeface="Calibri"/>
+              </a:defRPr>
+            </a:pPr>
+            <a:r>
+              <a:t>First Connect Insurance</a:t>
+            </a:r>
+          </a:p>
+        </p:txBody>
+      </p:sp>
+      <p:sp>
+        <p:nvSpPr>
+          <p:cNvPr id="185" name="TextBox 184"/>
+          <p:cNvSpPr txBox="1"/>
+          <p:nvPr/>
+        </p:nvSpPr>
+        <p:spPr>
+          <a:xfrm>
+            <a:off x="11045952" y="4425696"/>
+            <a:ext cx="914400" cy="237744"/>
+          </a:xfrm>
+          <a:prstGeom prst="rect">
+            <a:avLst/>
+          </a:prstGeom>
+          <a:noFill/>
+        </p:spPr>
+        <p:txBody>
+          <a:bodyPr wrap="none">
+            <a:spAutoFit/>
+          </a:bodyPr>
+          <a:lstStyle/>
+          <a:p>
+            <a:pPr algn="ctr">
+              <a:defRPr sz="950" b="1">
+                <a:solidFill>
+                  <a:srgbClr val="111827"/>
+                </a:solidFill>
+                <a:latin typeface="Calibri"/>
+              </a:defRPr>
+            </a:pPr>
+            <a:r>
+              <a:t>$367K</a:t>
+            </a:r>
+          </a:p>
+        </p:txBody>
+      </p:sp>
+      <p:sp>
+        <p:nvSpPr>
+          <p:cNvPr id="186" name="Rectangle 185"/>
+          <p:cNvSpPr/>
+          <p:nvPr/>
+        </p:nvSpPr>
+        <p:spPr>
+          <a:xfrm>
+            <a:off x="6254496" y="4663440"/>
+            <a:ext cx="5705856" cy="256032"/>
+          </a:xfrm>
+          <a:prstGeom prst="rect">
+            <a:avLst/>
+          </a:prstGeom>
+          <a:solidFill>
+            <a:srgbClr val="FFFFFF"/>
+          </a:solidFill>
+          <a:ln>
+            <a:noFill/>
+          </a:ln>
+        </p:spPr>
+        <p:style>
+          <a:lnRef idx="1">
+            <a:schemeClr val="accent1"/>
+          </a:lnRef>
+          <a:fillRef idx="3">
+            <a:schemeClr val="accent1"/>
+          </a:fillRef>
+          <a:effectRef idx="2">
+            <a:schemeClr val="accent1"/>
+          </a:effectRef>
+          <a:fontRef idx="minor">
+            <a:schemeClr val="lt1"/>
+          </a:fontRef>
+        </p:style>
+        <p:txBody>
+          <a:bodyPr rtlCol="0" anchor="ctr"/>
+          <a:lstStyle/>
+          <a:p>
+            <a:pPr algn="ctr"/>
+          </a:p>
+        </p:txBody>
+      </p:sp>
+      <p:sp>
+        <p:nvSpPr>
           <p:cNvPr id="187" name="TextBox 186"/>
           <p:cNvSpPr txBox="1"/>
           <p:nvPr/>
@@ -18774,7 +18774,7 @@
               </a:defRPr>
             </a:pPr>
             <a:r>
-              <a:t>Elena Tchernogorova</a:t>
+              <a:t>Ibrahim Mammo</a:t>
             </a:r>
           </a:p>
         </p:txBody>
@@ -18810,7 +18810,7 @@
               </a:defRPr>
             </a:pPr>
             <a:r>
-              <a:t>First Connect Insurance</a:t>
+              <a:t>Surefire Insurance Agency Corp.</a:t>
             </a:r>
           </a:p>
         </p:txBody>
@@ -18846,7 +18846,7 @@
               </a:defRPr>
             </a:pPr>
             <a:r>
-              <a:t>$367K</a:t>
+              <a:t>$365K</a:t>
             </a:r>
           </a:p>
         </p:txBody>
@@ -19922,7 +19922,7 @@
               </a:defRPr>
             </a:pPr>
             <a:r>
-              <a:t>Q2 2026 YTD (Apr 1–May 28)  |  Green = on target  |  Amber = at risk  |  Red = behind  |  Goal: ≥40 acts/wk  |  Ranked by composite OKR score</a:t>
+              <a:t>Q2 2026 YTD (Apr 1–May 29)  |  Green = on target  |  Amber = at risk  |  Red = behind  |  Goal: ≥40 acts/wk  |  Ranked by composite OKR score</a:t>
             </a:r>
           </a:p>
         </p:txBody>
@@ -19958,7 +19958,7 @@
               </a:defRPr>
             </a:pPr>
             <a:r>
-              <a:t>Generated May 28, 2026</a:t>
+              <a:t>Generated May 29, 2026</a:t>
             </a:r>
           </a:p>
         </p:txBody>
@@ -20123,7 +20123,7 @@
               </a:defRPr>
             </a:pPr>
             <a:r>
-              <a:t>Q2 2026 YTD (Apr 1–May 28)  |  Green = on target  |  Amber = at risk  |  Red = behind  |  Goal: ≥50 acts/wk  |  Ranked by composite OKR score</a:t>
+              <a:t>Q2 2026 YTD (Apr 1–May 29)  |  Green = on target  |  Amber = at risk  |  Red = behind  |  Goal: ≥50 acts/wk  |  Ranked by composite OKR score</a:t>
             </a:r>
           </a:p>
         </p:txBody>
@@ -20159,7 +20159,7 @@
               </a:defRPr>
             </a:pPr>
             <a:r>
-              <a:t>Generated May 28, 2026</a:t>
+              <a:t>Generated May 29, 2026</a:t>
             </a:r>
           </a:p>
         </p:txBody>
@@ -20324,7 +20324,7 @@
               </a:defRPr>
             </a:pPr>
             <a:r>
-              <a:t>Q2 YTD  |  Apr 1–May 28  |  BDMs Only  |  Goal: 40 acts/wk  |  Emails excluded</a:t>
+              <a:t>Q2 YTD  |  Apr 1–May 29  |  BDMs Only  |  Goal: 40 acts/wk  |  Emails excluded</a:t>
             </a:r>
           </a:p>
         </p:txBody>
@@ -20360,7 +20360,7 @@
               </a:defRPr>
             </a:pPr>
             <a:r>
-              <a:t>Generated May 28, 2026</a:t>
+              <a:t>Generated May 29, 2026</a:t>
             </a:r>
           </a:p>
         </p:txBody>
@@ -20727,7 +20727,7 @@
               </a:defRPr>
             </a:pPr>
             <a:r>
-              <a:t>May 25-28</a:t>
+              <a:t>May 25-29</a:t>
             </a:r>
           </a:p>
         </p:txBody>
@@ -21372,7 +21372,7 @@
             <a:avLst/>
           </a:prstGeom>
           <a:solidFill>
-            <a:srgbClr val="DC2626"/>
+            <a:srgbClr val="05784C"/>
           </a:solidFill>
           <a:ln>
             <a:noFill/>
@@ -21431,7 +21431,7 @@
               </a:defRPr>
             </a:pPr>
             <a:r>
-              <a:t>19</a:t>
+              <a:t>41</a:t>
             </a:r>
           </a:p>
         </p:txBody>
@@ -22119,7 +22119,7 @@
             <a:avLst/>
           </a:prstGeom>
           <a:solidFill>
-            <a:srgbClr val="DC2626"/>
+            <a:srgbClr val="05784C"/>
           </a:solidFill>
           <a:ln>
             <a:noFill/>
@@ -22178,7 +22178,7 @@
               </a:defRPr>
             </a:pPr>
             <a:r>
-              <a:t>26</a:t>
+              <a:t>42</a:t>
             </a:r>
           </a:p>
         </p:txBody>
@@ -22823,7 +22823,7 @@
             <a:avLst/>
           </a:prstGeom>
           <a:solidFill>
-            <a:srgbClr val="D1D5DB"/>
+            <a:srgbClr val="DC2626"/>
           </a:solidFill>
           <a:ln>
             <a:noFill/>
@@ -22882,7 +22882,7 @@
               </a:defRPr>
             </a:pPr>
             <a:r>
-              <a:t>0</a:t>
+              <a:t>13</a:t>
             </a:r>
           </a:p>
         </p:txBody>
@@ -23570,7 +23570,7 @@
             <a:avLst/>
           </a:prstGeom>
           <a:solidFill>
-            <a:srgbClr val="D97706"/>
+            <a:srgbClr val="05784C"/>
           </a:solidFill>
           <a:ln>
             <a:noFill/>
@@ -23629,7 +23629,7 @@
               </a:defRPr>
             </a:pPr>
             <a:r>
-              <a:t>37</a:t>
+              <a:t>55</a:t>
             </a:r>
           </a:p>
         </p:txBody>
@@ -24333,7 +24333,7 @@
               </a:defRPr>
             </a:pPr>
             <a:r>
-              <a:t>11</a:t>
+              <a:t>27</a:t>
             </a:r>
           </a:p>
         </p:txBody>
@@ -25080,7 +25080,7 @@
               </a:defRPr>
             </a:pPr>
             <a:r>
-              <a:t>21</a:t>
+              <a:t>26</a:t>
             </a:r>
           </a:p>
         </p:txBody>
@@ -25555,7 +25555,7 @@
               </a:defRPr>
             </a:pPr>
             <a:r>
-              <a:t>448</a:t>
+              <a:t>470</a:t>
             </a:r>
           </a:p>
         </p:txBody>
@@ -25627,7 +25627,7 @@
               </a:defRPr>
             </a:pPr>
             <a:r>
-              <a:t>94</a:t>
+              <a:t>98</a:t>
             </a:r>
           </a:p>
         </p:txBody>
@@ -25663,7 +25663,7 @@
               </a:defRPr>
             </a:pPr>
             <a:r>
-              <a:t>495</a:t>
+              <a:t>517</a:t>
             </a:r>
           </a:p>
         </p:txBody>
@@ -25886,7 +25886,7 @@
               </a:defRPr>
             </a:pPr>
             <a:r>
-              <a:t>274</a:t>
+              <a:t>290</a:t>
             </a:r>
           </a:p>
         </p:txBody>
@@ -25994,7 +25994,7 @@
               </a:defRPr>
             </a:pPr>
             <a:r>
-              <a:t>299</a:t>
+              <a:t>315</a:t>
             </a:r>
           </a:p>
         </p:txBody>
@@ -26174,7 +26174,7 @@
               </a:defRPr>
             </a:pPr>
             <a:r>
-              <a:t>241</a:t>
+              <a:t>254</a:t>
             </a:r>
           </a:p>
         </p:txBody>
@@ -26282,7 +26282,7 @@
               </a:defRPr>
             </a:pPr>
             <a:r>
-              <a:t>254</a:t>
+              <a:t>267</a:t>
             </a:r>
           </a:p>
         </p:txBody>
@@ -26505,7 +26505,7 @@
               </a:defRPr>
             </a:pPr>
             <a:r>
-              <a:t>435</a:t>
+              <a:t>453</a:t>
             </a:r>
           </a:p>
         </p:txBody>
@@ -26613,7 +26613,7 @@
               </a:defRPr>
             </a:pPr>
             <a:r>
-              <a:t>455</a:t>
+              <a:t>473</a:t>
             </a:r>
           </a:p>
         </p:txBody>
@@ -26793,7 +26793,7 @@
               </a:defRPr>
             </a:pPr>
             <a:r>
-              <a:t>254</a:t>
+              <a:t>270</a:t>
             </a:r>
           </a:p>
         </p:txBody>
@@ -26865,7 +26865,7 @@
               </a:defRPr>
             </a:pPr>
             <a:r>
-              <a:t>50</a:t>
+              <a:t>51</a:t>
             </a:r>
           </a:p>
         </p:txBody>
@@ -26901,7 +26901,7 @@
               </a:defRPr>
             </a:pPr>
             <a:r>
-              <a:t>270</a:t>
+              <a:t>286</a:t>
             </a:r>
           </a:p>
         </p:txBody>
@@ -27124,7 +27124,7 @@
               </a:defRPr>
             </a:pPr>
             <a:r>
-              <a:t>129</a:t>
+              <a:t>133</a:t>
             </a:r>
           </a:p>
         </p:txBody>
@@ -27160,7 +27160,7 @@
               </a:defRPr>
             </a:pPr>
             <a:r>
-              <a:t>16</a:t>
+              <a:t>17</a:t>
             </a:r>
           </a:p>
         </p:txBody>
@@ -27232,7 +27232,7 @@
               </a:defRPr>
             </a:pPr>
             <a:r>
-              <a:t>145</a:t>
+              <a:t>150</a:t>
             </a:r>
           </a:p>
         </p:txBody>
@@ -27445,7 +27445,7 @@
               </a:defRPr>
             </a:pPr>
             <a:r>
-              <a:t>Q2 YTD  |  Apr 1–May 28  |  BDAs Only  |  Goal: 50 acts/wk  |  Emails excluded</a:t>
+              <a:t>Q2 YTD  |  Apr 1–May 29  |  BDAs Only  |  Goal: 50 acts/wk  |  Emails excluded</a:t>
             </a:r>
           </a:p>
         </p:txBody>
@@ -27481,7 +27481,7 @@
               </a:defRPr>
             </a:pPr>
             <a:r>
-              <a:t>Generated May 28, 2026</a:t>
+              <a:t>Generated May 29, 2026</a:t>
             </a:r>
           </a:p>
         </p:txBody>
@@ -27848,7 +27848,7 @@
               </a:defRPr>
             </a:pPr>
             <a:r>
-              <a:t>May 25-28</a:t>
+              <a:t>May 25-29</a:t>
             </a:r>
           </a:p>
         </p:txBody>
@@ -28493,7 +28493,7 @@
             <a:avLst/>
           </a:prstGeom>
           <a:solidFill>
-            <a:srgbClr val="DC2626"/>
+            <a:srgbClr val="D97706"/>
           </a:solidFill>
           <a:ln>
             <a:noFill/>
@@ -28552,7 +28552,7 @@
               </a:defRPr>
             </a:pPr>
             <a:r>
-              <a:t>36</a:t>
+              <a:t>46</a:t>
             </a:r>
           </a:p>
         </p:txBody>
@@ -29227,7 +29227,7 @@
               </a:defRPr>
             </a:pPr>
             <a:r>
-              <a:t>16</a:t>
+              <a:t>30</a:t>
             </a:r>
           </a:p>
         </p:txBody>
@@ -29263,7 +29263,7 @@
               </a:defRPr>
             </a:pPr>
             <a:r>
-              <a:t>67%</a:t>
+              <a:t>72%</a:t>
             </a:r>
           </a:p>
         </p:txBody>
@@ -29859,7 +29859,7 @@
               </a:defRPr>
             </a:pPr>
             <a:r>
-              <a:t>22</a:t>
+              <a:t>35</a:t>
             </a:r>
           </a:p>
         </p:txBody>
@@ -29895,7 +29895,7 @@
               </a:defRPr>
             </a:pPr>
             <a:r>
-              <a:t>76%</a:t>
+              <a:t>80%</a:t>
             </a:r>
           </a:p>
         </p:txBody>
@@ -30475,7 +30475,7 @@
             <a:avLst/>
           </a:prstGeom>
           <a:solidFill>
-            <a:srgbClr val="DC2626"/>
+            <a:srgbClr val="D97706"/>
           </a:solidFill>
           <a:ln>
             <a:noFill/>
@@ -30534,7 +30534,7 @@
               </a:defRPr>
             </a:pPr>
             <a:r>
-              <a:t>23</a:t>
+              <a:t>39</a:t>
             </a:r>
           </a:p>
         </p:txBody>
@@ -30570,7 +30570,7 @@
               </a:defRPr>
             </a:pPr>
             <a:r>
-              <a:t>86%</a:t>
+              <a:t>91%</a:t>
             </a:r>
           </a:p>
         </p:txBody>
@@ -31179,7 +31179,7 @@
             <a:avLst/>
           </a:prstGeom>
           <a:solidFill>
-            <a:srgbClr val="DC2626"/>
+            <a:srgbClr val="D97706"/>
           </a:solidFill>
           <a:ln>
             <a:noFill/>
@@ -31238,7 +31238,7 @@
               </a:defRPr>
             </a:pPr>
             <a:r>
-              <a:t>22</a:t>
+              <a:t>38</a:t>
             </a:r>
           </a:p>
         </p:txBody>
@@ -31713,7 +31713,7 @@
               </a:defRPr>
             </a:pPr>
             <a:r>
-              <a:t>386</a:t>
+              <a:t>396</a:t>
             </a:r>
           </a:p>
         </p:txBody>
@@ -31785,7 +31785,7 @@
               </a:defRPr>
             </a:pPr>
             <a:r>
-              <a:t>39</a:t>
+              <a:t>40</a:t>
             </a:r>
           </a:p>
         </p:txBody>
@@ -31821,7 +31821,7 @@
               </a:defRPr>
             </a:pPr>
             <a:r>
-              <a:t>396</a:t>
+              <a:t>406</a:t>
             </a:r>
           </a:p>
         </p:txBody>
@@ -32044,7 +32044,7 @@
               </a:defRPr>
             </a:pPr>
             <a:r>
-              <a:t>189</a:t>
+              <a:t>203</a:t>
             </a:r>
           </a:p>
         </p:txBody>
@@ -32116,7 +32116,7 @@
               </a:defRPr>
             </a:pPr>
             <a:r>
-              <a:t>14</a:t>
+              <a:t>15</a:t>
             </a:r>
           </a:p>
         </p:txBody>
@@ -32152,7 +32152,7 @@
               </a:defRPr>
             </a:pPr>
             <a:r>
-              <a:t>201</a:t>
+              <a:t>215</a:t>
             </a:r>
           </a:p>
         </p:txBody>
@@ -32188,7 +32188,7 @@
               </a:defRPr>
             </a:pPr>
             <a:r>
-              <a:t>33.5</a:t>
+              <a:t>35.8</a:t>
             </a:r>
           </a:p>
         </p:txBody>
@@ -32224,7 +32224,7 @@
               </a:defRPr>
             </a:pPr>
             <a:r>
-              <a:t>67%</a:t>
+              <a:t>72%</a:t>
             </a:r>
           </a:p>
         </p:txBody>
@@ -32332,7 +32332,7 @@
               </a:defRPr>
             </a:pPr>
             <a:r>
-              <a:t>216</a:t>
+              <a:t>225</a:t>
             </a:r>
           </a:p>
         </p:txBody>
@@ -32368,7 +32368,7 @@
               </a:defRPr>
             </a:pPr>
             <a:r>
-              <a:t>11</a:t>
+              <a:t>15</a:t>
             </a:r>
           </a:p>
         </p:txBody>
@@ -32404,7 +32404,7 @@
               </a:defRPr>
             </a:pPr>
             <a:r>
-              <a:t>32</a:t>
+              <a:t>36</a:t>
             </a:r>
           </a:p>
         </p:txBody>
@@ -32440,7 +32440,7 @@
               </a:defRPr>
             </a:pPr>
             <a:r>
-              <a:t>227</a:t>
+              <a:t>240</a:t>
             </a:r>
           </a:p>
         </p:txBody>
@@ -32476,7 +32476,7 @@
               </a:defRPr>
             </a:pPr>
             <a:r>
-              <a:t>37.8</a:t>
+              <a:t>40.0</a:t>
             </a:r>
           </a:p>
         </p:txBody>
@@ -32512,7 +32512,7 @@
               </a:defRPr>
             </a:pPr>
             <a:r>
-              <a:t>76%</a:t>
+              <a:t>80%</a:t>
             </a:r>
           </a:p>
         </p:txBody>
@@ -32663,7 +32663,7 @@
               </a:defRPr>
             </a:pPr>
             <a:r>
-              <a:t>243</a:t>
+              <a:t>259</a:t>
             </a:r>
           </a:p>
         </p:txBody>
@@ -32735,7 +32735,7 @@
               </a:defRPr>
             </a:pPr>
             <a:r>
-              <a:t>19</a:t>
+              <a:t>21</a:t>
             </a:r>
           </a:p>
         </p:txBody>
@@ -32771,7 +32771,7 @@
               </a:defRPr>
             </a:pPr>
             <a:r>
-              <a:t>257</a:t>
+              <a:t>273</a:t>
             </a:r>
           </a:p>
         </p:txBody>
@@ -32807,7 +32807,7 @@
               </a:defRPr>
             </a:pPr>
             <a:r>
-              <a:t>42.8</a:t>
+              <a:t>45.5</a:t>
             </a:r>
           </a:p>
         </p:txBody>
@@ -32843,7 +32843,7 @@
               </a:defRPr>
             </a:pPr>
             <a:r>
-              <a:t>86%</a:t>
+              <a:t>91%</a:t>
             </a:r>
           </a:p>
         </p:txBody>
@@ -32951,7 +32951,7 @@
               </a:defRPr>
             </a:pPr>
             <a:r>
-              <a:t>176</a:t>
+              <a:t>192</a:t>
             </a:r>
           </a:p>
         </p:txBody>
@@ -33059,7 +33059,7 @@
               </a:defRPr>
             </a:pPr>
             <a:r>
-              <a:t>183</a:t>
+              <a:t>199</a:t>
             </a:r>
           </a:p>
         </p:txBody>
@@ -33308,7 +33308,7 @@
               </a:defRPr>
             </a:pPr>
             <a:r>
-              <a:t>Generated May 28, 2026</a:t>
+              <a:t>Generated May 29, 2026</a:t>
             </a:r>
           </a:p>
         </p:txBody>
@@ -33999,7 +33999,7 @@
               </a:defRPr>
             </a:pPr>
             <a:r>
-              <a:t>7226</a:t>
+              <a:t>7353</a:t>
             </a:r>
           </a:p>
         </p:txBody>
@@ -34035,7 +34035,7 @@
               </a:defRPr>
             </a:pPr>
             <a:r>
-              <a:t>498</a:t>
+              <a:t>525</a:t>
             </a:r>
           </a:p>
         </p:txBody>
@@ -34071,7 +34071,7 @@
               </a:defRPr>
             </a:pPr>
             <a:r>
-              <a:t>$17.2M</a:t>
+              <a:t>$18.8M</a:t>
             </a:r>
           </a:p>
         </p:txBody>
@@ -34438,7 +34438,7 @@
               </a:defRPr>
             </a:pPr>
             <a:r>
-              <a:t>3503</a:t>
+              <a:t>3554</a:t>
             </a:r>
           </a:p>
         </p:txBody>
@@ -34474,7 +34474,7 @@
               </a:defRPr>
             </a:pPr>
             <a:r>
-              <a:t>350</a:t>
+              <a:t>355</a:t>
             </a:r>
           </a:p>
         </p:txBody>
@@ -34510,7 +34510,7 @@
               </a:defRPr>
             </a:pPr>
             <a:r>
-              <a:t>$9.8M</a:t>
+              <a:t>$9.6M</a:t>
             </a:r>
           </a:p>
         </p:txBody>
@@ -34834,7 +34834,7 @@
               </a:defRPr>
             </a:pPr>
             <a:r>
-              <a:t>5614</a:t>
+              <a:t>5726</a:t>
             </a:r>
           </a:p>
         </p:txBody>
@@ -34870,7 +34870,7 @@
               </a:defRPr>
             </a:pPr>
             <a:r>
-              <a:t>313</a:t>
+              <a:t>322</a:t>
             </a:r>
           </a:p>
         </p:txBody>
@@ -34906,7 +34906,7 @@
               </a:defRPr>
             </a:pPr>
             <a:r>
-              <a:t>$9.0M</a:t>
+              <a:t>$9.4M</a:t>
             </a:r>
           </a:p>
         </p:txBody>
@@ -35273,7 +35273,7 @@
               </a:defRPr>
             </a:pPr>
             <a:r>
-              <a:t>3424</a:t>
+              <a:t>3506</a:t>
             </a:r>
           </a:p>
         </p:txBody>
@@ -35309,7 +35309,7 @@
               </a:defRPr>
             </a:pPr>
             <a:r>
-              <a:t>259</a:t>
+              <a:t>270</a:t>
             </a:r>
           </a:p>
         </p:txBody>
@@ -35345,7 +35345,7 @@
               </a:defRPr>
             </a:pPr>
             <a:r>
-              <a:t>$6.0M</a:t>
+              <a:t>$6.4M</a:t>
             </a:r>
           </a:p>
         </p:txBody>
@@ -35669,7 +35669,7 @@
               </a:defRPr>
             </a:pPr>
             <a:r>
-              <a:t>1887</a:t>
+              <a:t>1926</a:t>
             </a:r>
           </a:p>
         </p:txBody>
@@ -35705,7 +35705,7 @@
               </a:defRPr>
             </a:pPr>
             <a:r>
-              <a:t>127</a:t>
+              <a:t>126</a:t>
             </a:r>
           </a:p>
         </p:txBody>
@@ -35741,7 +35741,7 @@
               </a:defRPr>
             </a:pPr>
             <a:r>
-              <a:t>$4.1M</a:t>
+              <a:t>$3.9M</a:t>
             </a:r>
           </a:p>
         </p:txBody>
@@ -36187,7 +36187,7 @@
               </a:defRPr>
             </a:pPr>
             <a:r>
-              <a:t>4155</a:t>
+              <a:t>4263</a:t>
             </a:r>
           </a:p>
         </p:txBody>
@@ -36223,7 +36223,7 @@
               </a:defRPr>
             </a:pPr>
             <a:r>
-              <a:t>113</a:t>
+              <a:t>109</a:t>
             </a:r>
           </a:p>
         </p:txBody>
@@ -36259,7 +36259,7 @@
               </a:defRPr>
             </a:pPr>
             <a:r>
-              <a:t>$2.8M</a:t>
+              <a:t>$2.6M</a:t>
             </a:r>
           </a:p>
         </p:txBody>
@@ -36583,7 +36583,7 @@
               </a:defRPr>
             </a:pPr>
             <a:r>
-              <a:t>2855</a:t>
+              <a:t>2920</a:t>
             </a:r>
           </a:p>
         </p:txBody>
@@ -36619,7 +36619,7 @@
               </a:defRPr>
             </a:pPr>
             <a:r>
-              <a:t>53</a:t>
+              <a:t>52</a:t>
             </a:r>
           </a:p>
         </p:txBody>
@@ -37022,7 +37022,7 @@
               </a:defRPr>
             </a:pPr>
             <a:r>
-              <a:t>1655</a:t>
+              <a:t>1689</a:t>
             </a:r>
           </a:p>
         </p:txBody>
@@ -37058,7 +37058,7 @@
               </a:defRPr>
             </a:pPr>
             <a:r>
-              <a:t>34</a:t>
+              <a:t>32</a:t>
             </a:r>
           </a:p>
         </p:txBody>
@@ -37418,7 +37418,7 @@
               </a:defRPr>
             </a:pPr>
             <a:r>
-              <a:t>945</a:t>
+              <a:t>961</a:t>
             </a:r>
           </a:p>
         </p:txBody>
@@ -37454,7 +37454,7 @@
               </a:defRPr>
             </a:pPr>
             <a:r>
-              <a:t>54</a:t>
+              <a:t>51</a:t>
             </a:r>
           </a:p>
         </p:txBody>
@@ -37490,7 +37490,7 @@
               </a:defRPr>
             </a:pPr>
             <a:r>
-              <a:t>$959K</a:t>
+              <a:t>$964K</a:t>
             </a:r>
           </a:p>
         </p:txBody>
@@ -37857,7 +37857,7 @@
               </a:defRPr>
             </a:pPr>
             <a:r>
-              <a:t>621</a:t>
+              <a:t>638</a:t>
             </a:r>
           </a:p>
         </p:txBody>
@@ -37893,7 +37893,7 @@
               </a:defRPr>
             </a:pPr>
             <a:r>
-              <a:t>25</a:t>
+              <a:t>26</a:t>
             </a:r>
           </a:p>
         </p:txBody>
@@ -37929,7 +37929,7 @@
               </a:defRPr>
             </a:pPr>
             <a:r>
-              <a:t>$824K</a:t>
+              <a:t>$895K</a:t>
             </a:r>
           </a:p>
         </p:txBody>
@@ -38195,7 +38195,7 @@
               </a:defRPr>
             </a:pPr>
             <a:r>
-              <a:t>216</a:t>
+              <a:t>217</a:t>
             </a:r>
           </a:p>
         </p:txBody>
@@ -38231,7 +38231,7 @@
               </a:defRPr>
             </a:pPr>
             <a:r>
-              <a:t>216</a:t>
+              <a:t>217</a:t>
             </a:r>
           </a:p>
         </p:txBody>
@@ -38375,7 +38375,7 @@
               </a:defRPr>
             </a:pPr>
             <a:r>
-              <a:t>7795</a:t>
+              <a:t>7971</a:t>
             </a:r>
           </a:p>
         </p:txBody>
@@ -38411,7 +38411,7 @@
               </a:defRPr>
             </a:pPr>
             <a:r>
-              <a:t>303</a:t>
+              <a:t>310</a:t>
             </a:r>
           </a:p>
         </p:txBody>
@@ -39134,7 +39134,7 @@
               </a:defRPr>
             </a:pPr>
             <a:r>
-              <a:t>Retail-vertical agencies in each rep's HubSpot portfolio with zero 2026 submissions  |  Refreshed 2026-05-28</a:t>
+              <a:t>Retail-vertical agencies in each rep's HubSpot portfolio with zero 2026 submissions  |  Refreshed 2026-05-29</a:t>
             </a:r>
           </a:p>
         </p:txBody>
@@ -39170,7 +39170,7 @@
               </a:defRPr>
             </a:pPr>
             <a:r>
-              <a:t>Generated May 28, 2026</a:t>
+              <a:t>Generated May 29, 2026</a:t>
             </a:r>
           </a:p>
         </p:txBody>
@@ -41443,7 +41443,7 @@
               </a:defRPr>
             </a:pPr>
             <a:r>
-              <a:t>Generated May 28, 2026</a:t>
+              <a:t>Generated May 29, 2026</a:t>
             </a:r>
           </a:p>
         </p:txBody>
@@ -41608,7 +41608,7 @@
               </a:defRPr>
             </a:pPr>
             <a:r>
-              <a:t>Ranked by Q2 GWP (left) and Q2 Submissions (right)  ·  Mint-shaded row = new vs last week’s deck  ·  Apr 1–May 28</a:t>
+              <a:t>Ranked by Q2 GWP (left) and Q2 Submissions (right)  ·  Mint-shaded row = new vs last week’s deck  ·  Apr 1–May 29</a:t>
             </a:r>
           </a:p>
         </p:txBody>
@@ -41644,7 +41644,7 @@
               </a:defRPr>
             </a:pPr>
             <a:r>
-              <a:t>Generated May 28, 2026</a:t>
+              <a:t>Generated May 29, 2026</a:t>
             </a:r>
           </a:p>
         </p:txBody>
@@ -42097,7 +42097,7 @@
               </a:defRPr>
             </a:pPr>
             <a:r>
-              <a:t>$3.0M</a:t>
+              <a:t>$3.1M</a:t>
             </a:r>
           </a:p>
         </p:txBody>
@@ -42212,7 +42212,7 @@
               </a:defRPr>
             </a:pPr>
             <a:r>
-              <a:t>Derek J.</a:t>
+              <a:t>Christopher H.</a:t>
             </a:r>
           </a:p>
         </p:txBody>
@@ -42248,7 +42248,7 @@
               </a:defRPr>
             </a:pPr>
             <a:r>
-              <a:t>Jagdeep Singh Insurance Agency, Inc</a:t>
+              <a:t>Commercial Trucking Insurance Agency LLC</a:t>
             </a:r>
           </a:p>
         </p:txBody>
@@ -42399,7 +42399,7 @@
               </a:defRPr>
             </a:pPr>
             <a:r>
-              <a:t>Christopher H.</a:t>
+              <a:t>Derek J.</a:t>
             </a:r>
           </a:p>
         </p:txBody>
@@ -42435,7 +42435,7 @@
               </a:defRPr>
             </a:pPr>
             <a:r>
-              <a:t>Commercial Trucking Insurance Agency LLC</a:t>
+              <a:t>Reliance Partners, LLC</a:t>
             </a:r>
           </a:p>
         </p:txBody>
@@ -42471,7 +42471,7 @@
               </a:defRPr>
             </a:pPr>
             <a:r>
-              <a:t>$2.2M</a:t>
+              <a:t>$2.4M</a:t>
             </a:r>
           </a:p>
         </p:txBody>
@@ -42622,7 +42622,7 @@
               </a:defRPr>
             </a:pPr>
             <a:r>
-              <a:t>Reliance Partners, LLC</a:t>
+              <a:t>Jagdeep Singh Insurance Agency, Inc</a:t>
             </a:r>
           </a:p>
         </p:txBody>
@@ -42658,7 +42658,7 @@
               </a:defRPr>
             </a:pPr>
             <a:r>
-              <a:t>$2.1M</a:t>
+              <a:t>$2.4M</a:t>
             </a:r>
           </a:p>
         </p:txBody>
@@ -42773,7 +42773,7 @@
               </a:defRPr>
             </a:pPr>
             <a:r>
-              <a:t>Christopher H.</a:t>
+              <a:t>Derek J.</a:t>
             </a:r>
           </a:p>
         </p:txBody>
@@ -42809,7 +42809,7 @@
               </a:defRPr>
             </a:pPr>
             <a:r>
-              <a:t>DNIS Inc.</a:t>
+              <a:t>United Advantage Insurance Services</a:t>
             </a:r>
           </a:p>
         </p:txBody>
@@ -42845,7 +42845,7 @@
               </a:defRPr>
             </a:pPr>
             <a:r>
-              <a:t>$1.7M</a:t>
+              <a:t>$2.0M</a:t>
             </a:r>
           </a:p>
         </p:txBody>
@@ -42960,7 +42960,7 @@
               </a:defRPr>
             </a:pPr>
             <a:r>
-              <a:t>Derek J.</a:t>
+              <a:t>Christopher H.</a:t>
             </a:r>
           </a:p>
         </p:txBody>
@@ -42996,7 +42996,7 @@
               </a:defRPr>
             </a:pPr>
             <a:r>
-              <a:t>United Advantage Insurance Services</a:t>
+              <a:t>DNIS Inc.</a:t>
             </a:r>
           </a:p>
         </p:txBody>
@@ -43032,7 +43032,7 @@
               </a:defRPr>
             </a:pPr>
             <a:r>
-              <a:t>$1.7M</a:t>
+              <a:t>$1.6M</a:t>
             </a:r>
           </a:p>
         </p:txBody>
@@ -43219,7 +43219,7 @@
               </a:defRPr>
             </a:pPr>
             <a:r>
-              <a:t>$1.4M</a:t>
+              <a:t>$1.5M</a:t>
             </a:r>
           </a:p>
         </p:txBody>
@@ -43334,7 +43334,7 @@
               </a:defRPr>
             </a:pPr>
             <a:r>
-              <a:t>Derek J.</a:t>
+              <a:t>Ron D.</a:t>
             </a:r>
           </a:p>
         </p:txBody>
@@ -43370,7 +43370,7 @@
               </a:defRPr>
             </a:pPr>
             <a:r>
-              <a:t>CASCADE INSURANCE SERVICES INC DBA: CASC…</a:t>
+              <a:t>Insurance4Truckers LLC</a:t>
             </a:r>
           </a:p>
         </p:txBody>
@@ -43708,7 +43708,7 @@
               </a:defRPr>
             </a:pPr>
             <a:r>
-              <a:t>Ron D.</a:t>
+              <a:t>Derek J.</a:t>
             </a:r>
           </a:p>
         </p:txBody>
@@ -43744,7 +43744,7 @@
               </a:defRPr>
             </a:pPr>
             <a:r>
-              <a:t>Insurance4Truckers LLC</a:t>
+              <a:t>Safeline Insurance Agency, Inc.</a:t>
             </a:r>
           </a:p>
         </p:txBody>
@@ -43780,7 +43780,7 @@
               </a:defRPr>
             </a:pPr>
             <a:r>
-              <a:t>$1.3M</a:t>
+              <a:t>$1.4M</a:t>
             </a:r>
           </a:p>
         </p:txBody>
@@ -43895,7 +43895,7 @@
               </a:defRPr>
             </a:pPr>
             <a:r>
-              <a:t>Derek J.</a:t>
+              <a:t>Ron D.</a:t>
             </a:r>
           </a:p>
         </p:txBody>
@@ -43931,7 +43931,7 @@
               </a:defRPr>
             </a:pPr>
             <a:r>
-              <a:t>Safeline Insurance Agency, Inc.</a:t>
+              <a:t>Valion Security LLC</a:t>
             </a:r>
           </a:p>
         </p:txBody>
@@ -43967,7 +43967,7 @@
               </a:defRPr>
             </a:pPr>
             <a:r>
-              <a:t>$1.3M</a:t>
+              <a:t>$1.2M</a:t>
             </a:r>
           </a:p>
         </p:txBody>
@@ -44082,7 +44082,7 @@
               </a:defRPr>
             </a:pPr>
             <a:r>
-              <a:t>Ron D.</a:t>
+              <a:t>Derek J.</a:t>
             </a:r>
           </a:p>
         </p:txBody>
@@ -44118,7 +44118,7 @@
               </a:defRPr>
             </a:pPr>
             <a:r>
-              <a:t>Valion Security LLC</a:t>
+              <a:t>CASCADE INSURANCE SERVICES INC DBA: CASC…</a:t>
             </a:r>
           </a:p>
         </p:txBody>
@@ -44269,7 +44269,7 @@
               </a:defRPr>
             </a:pPr>
             <a:r>
-              <a:t>Kurt B.</a:t>
+              <a:t>Alexis B.</a:t>
             </a:r>
           </a:p>
         </p:txBody>
@@ -44305,7 +44305,7 @@
               </a:defRPr>
             </a:pPr>
             <a:r>
-              <a:t>Fino Services LLC</a:t>
+              <a:t>A.S.I.A Inc</a:t>
             </a:r>
           </a:p>
         </p:txBody>
@@ -44341,7 +44341,7 @@
               </a:defRPr>
             </a:pPr>
             <a:r>
-              <a:t>$1.0M</a:t>
+              <a:t>$995K</a:t>
             </a:r>
           </a:p>
         </p:txBody>
@@ -44456,7 +44456,7 @@
               </a:defRPr>
             </a:pPr>
             <a:r>
-              <a:t>Alexis B.</a:t>
+              <a:t>Kurt B.</a:t>
             </a:r>
           </a:p>
         </p:txBody>
@@ -44492,7 +44492,7 @@
               </a:defRPr>
             </a:pPr>
             <a:r>
-              <a:t>A.S.I.A Inc</a:t>
+              <a:t>Fino Services LLC</a:t>
             </a:r>
           </a:p>
         </p:txBody>
@@ -44528,7 +44528,7 @@
               </a:defRPr>
             </a:pPr>
             <a:r>
-              <a:t>$991K</a:t>
+              <a:t>$956K</a:t>
             </a:r>
           </a:p>
         </p:txBody>
@@ -44643,7 +44643,7 @@
               </a:defRPr>
             </a:pPr>
             <a:r>
-              <a:t>Ron D.</a:t>
+              <a:t>Derek J.</a:t>
             </a:r>
           </a:p>
         </p:txBody>
@@ -44679,7 +44679,7 @@
               </a:defRPr>
             </a:pPr>
             <a:r>
-              <a:t>Prestige International Insurance Group I…</a:t>
+              <a:t>Surefire Insurance Agency Corp.</a:t>
             </a:r>
           </a:p>
         </p:txBody>
@@ -44715,7 +44715,7 @@
               </a:defRPr>
             </a:pPr>
             <a:r>
-              <a:t>$831K</a:t>
+              <a:t>$952K</a:t>
             </a:r>
           </a:p>
         </p:txBody>
@@ -44729,6 +44729,380 @@
         <p:spPr>
           <a:xfrm>
             <a:off x="228600" y="4882895"/>
+            <a:ext cx="5742432" cy="237744"/>
+          </a:xfrm>
+          <a:prstGeom prst="rect">
+            <a:avLst/>
+          </a:prstGeom>
+          <a:solidFill>
+            <a:srgbClr val="D1FAE5"/>
+          </a:solidFill>
+          <a:ln>
+            <a:noFill/>
+          </a:ln>
+        </p:spPr>
+        <p:style>
+          <a:lnRef idx="1">
+            <a:schemeClr val="accent1"/>
+          </a:lnRef>
+          <a:fillRef idx="3">
+            <a:schemeClr val="accent1"/>
+          </a:fillRef>
+          <a:effectRef idx="2">
+            <a:schemeClr val="accent1"/>
+          </a:effectRef>
+          <a:fontRef idx="minor">
+            <a:schemeClr val="lt1"/>
+          </a:fontRef>
+        </p:style>
+        <p:txBody>
+          <a:bodyPr rtlCol="0" anchor="ctr"/>
+          <a:lstStyle/>
+          <a:p>
+            <a:pPr algn="ctr"/>
+          </a:p>
+        </p:txBody>
+      </p:sp>
+      <p:sp>
+        <p:nvSpPr>
+          <p:cNvPr id="89" name="TextBox 88"/>
+          <p:cNvSpPr txBox="1"/>
+          <p:nvPr/>
+        </p:nvSpPr>
+        <p:spPr>
+          <a:xfrm>
+            <a:off x="228600" y="4901183"/>
+            <a:ext cx="347472" cy="219456"/>
+          </a:xfrm>
+          <a:prstGeom prst="rect">
+            <a:avLst/>
+          </a:prstGeom>
+          <a:noFill/>
+        </p:spPr>
+        <p:txBody>
+          <a:bodyPr wrap="square">
+            <a:spAutoFit/>
+          </a:bodyPr>
+          <a:lstStyle/>
+          <a:p>
+            <a:pPr algn="ctr">
+              <a:defRPr sz="950" b="1">
+                <a:solidFill>
+                  <a:srgbClr val="111827"/>
+                </a:solidFill>
+                <a:latin typeface="Calibri"/>
+              </a:defRPr>
+            </a:pPr>
+            <a:r>
+              <a:t>16</a:t>
+            </a:r>
+          </a:p>
+        </p:txBody>
+      </p:sp>
+      <p:sp>
+        <p:nvSpPr>
+          <p:cNvPr id="90" name="TextBox 89"/>
+          <p:cNvSpPr txBox="1"/>
+          <p:nvPr/>
+        </p:nvSpPr>
+        <p:spPr>
+          <a:xfrm>
+            <a:off x="576072" y="4901183"/>
+            <a:ext cx="1005840" cy="219456"/>
+          </a:xfrm>
+          <a:prstGeom prst="rect">
+            <a:avLst/>
+          </a:prstGeom>
+          <a:noFill/>
+        </p:spPr>
+        <p:txBody>
+          <a:bodyPr wrap="square">
+            <a:spAutoFit/>
+          </a:bodyPr>
+          <a:lstStyle/>
+          <a:p>
+            <a:pPr algn="ctr">
+              <a:defRPr sz="950" b="1">
+                <a:solidFill>
+                  <a:srgbClr val="111827"/>
+                </a:solidFill>
+                <a:latin typeface="Calibri"/>
+              </a:defRPr>
+            </a:pPr>
+            <a:r>
+              <a:t>Derek J.</a:t>
+            </a:r>
+          </a:p>
+        </p:txBody>
+      </p:sp>
+      <p:sp>
+        <p:nvSpPr>
+          <p:cNvPr id="91" name="TextBox 90"/>
+          <p:cNvSpPr txBox="1"/>
+          <p:nvPr/>
+        </p:nvSpPr>
+        <p:spPr>
+          <a:xfrm>
+            <a:off x="1581912" y="4901183"/>
+            <a:ext cx="3474720" cy="219456"/>
+          </a:xfrm>
+          <a:prstGeom prst="rect">
+            <a:avLst/>
+          </a:prstGeom>
+          <a:noFill/>
+        </p:spPr>
+        <p:txBody>
+          <a:bodyPr wrap="square">
+            <a:spAutoFit/>
+          </a:bodyPr>
+          <a:lstStyle/>
+          <a:p>
+            <a:pPr algn="l">
+              <a:defRPr sz="950" b="0">
+                <a:solidFill>
+                  <a:srgbClr val="111827"/>
+                </a:solidFill>
+                <a:latin typeface="Calibri"/>
+              </a:defRPr>
+            </a:pPr>
+            <a:r>
+              <a:t>Sedge Insurance Agency LLC</a:t>
+            </a:r>
+          </a:p>
+        </p:txBody>
+      </p:sp>
+      <p:sp>
+        <p:nvSpPr>
+          <p:cNvPr id="92" name="TextBox 91"/>
+          <p:cNvSpPr txBox="1"/>
+          <p:nvPr/>
+        </p:nvSpPr>
+        <p:spPr>
+          <a:xfrm>
+            <a:off x="5056631" y="4901183"/>
+            <a:ext cx="914400" cy="219456"/>
+          </a:xfrm>
+          <a:prstGeom prst="rect">
+            <a:avLst/>
+          </a:prstGeom>
+          <a:noFill/>
+        </p:spPr>
+        <p:txBody>
+          <a:bodyPr wrap="square">
+            <a:spAutoFit/>
+          </a:bodyPr>
+          <a:lstStyle/>
+          <a:p>
+            <a:pPr algn="ctr">
+              <a:defRPr sz="950" b="1">
+                <a:solidFill>
+                  <a:srgbClr val="111827"/>
+                </a:solidFill>
+                <a:latin typeface="Calibri"/>
+              </a:defRPr>
+            </a:pPr>
+            <a:r>
+              <a:t>$906K</a:t>
+            </a:r>
+          </a:p>
+        </p:txBody>
+      </p:sp>
+      <p:sp>
+        <p:nvSpPr>
+          <p:cNvPr id="93" name="Rectangle 92"/>
+          <p:cNvSpPr/>
+          <p:nvPr/>
+        </p:nvSpPr>
+        <p:spPr>
+          <a:xfrm>
+            <a:off x="228600" y="5120639"/>
+            <a:ext cx="5742432" cy="237744"/>
+          </a:xfrm>
+          <a:prstGeom prst="rect">
+            <a:avLst/>
+          </a:prstGeom>
+          <a:solidFill>
+            <a:srgbClr val="FFFFFF"/>
+          </a:solidFill>
+          <a:ln>
+            <a:noFill/>
+          </a:ln>
+        </p:spPr>
+        <p:style>
+          <a:lnRef idx="1">
+            <a:schemeClr val="accent1"/>
+          </a:lnRef>
+          <a:fillRef idx="3">
+            <a:schemeClr val="accent1"/>
+          </a:fillRef>
+          <a:effectRef idx="2">
+            <a:schemeClr val="accent1"/>
+          </a:effectRef>
+          <a:fontRef idx="minor">
+            <a:schemeClr val="lt1"/>
+          </a:fontRef>
+        </p:style>
+        <p:txBody>
+          <a:bodyPr rtlCol="0" anchor="ctr"/>
+          <a:lstStyle/>
+          <a:p>
+            <a:pPr algn="ctr"/>
+          </a:p>
+        </p:txBody>
+      </p:sp>
+      <p:sp>
+        <p:nvSpPr>
+          <p:cNvPr id="94" name="TextBox 93"/>
+          <p:cNvSpPr txBox="1"/>
+          <p:nvPr/>
+        </p:nvSpPr>
+        <p:spPr>
+          <a:xfrm>
+            <a:off x="228600" y="5138927"/>
+            <a:ext cx="347472" cy="219456"/>
+          </a:xfrm>
+          <a:prstGeom prst="rect">
+            <a:avLst/>
+          </a:prstGeom>
+          <a:noFill/>
+        </p:spPr>
+        <p:txBody>
+          <a:bodyPr wrap="square">
+            <a:spAutoFit/>
+          </a:bodyPr>
+          <a:lstStyle/>
+          <a:p>
+            <a:pPr algn="ctr">
+              <a:defRPr sz="950" b="1">
+                <a:solidFill>
+                  <a:srgbClr val="111827"/>
+                </a:solidFill>
+                <a:latin typeface="Calibri"/>
+              </a:defRPr>
+            </a:pPr>
+            <a:r>
+              <a:t>17</a:t>
+            </a:r>
+          </a:p>
+        </p:txBody>
+      </p:sp>
+      <p:sp>
+        <p:nvSpPr>
+          <p:cNvPr id="95" name="TextBox 94"/>
+          <p:cNvSpPr txBox="1"/>
+          <p:nvPr/>
+        </p:nvSpPr>
+        <p:spPr>
+          <a:xfrm>
+            <a:off x="576072" y="5138927"/>
+            <a:ext cx="1005840" cy="219456"/>
+          </a:xfrm>
+          <a:prstGeom prst="rect">
+            <a:avLst/>
+          </a:prstGeom>
+          <a:noFill/>
+        </p:spPr>
+        <p:txBody>
+          <a:bodyPr wrap="square">
+            <a:spAutoFit/>
+          </a:bodyPr>
+          <a:lstStyle/>
+          <a:p>
+            <a:pPr algn="ctr">
+              <a:defRPr sz="950" b="1">
+                <a:solidFill>
+                  <a:srgbClr val="111827"/>
+                </a:solidFill>
+                <a:latin typeface="Calibri"/>
+              </a:defRPr>
+            </a:pPr>
+            <a:r>
+              <a:t>Derek J.</a:t>
+            </a:r>
+          </a:p>
+        </p:txBody>
+      </p:sp>
+      <p:sp>
+        <p:nvSpPr>
+          <p:cNvPr id="96" name="TextBox 95"/>
+          <p:cNvSpPr txBox="1"/>
+          <p:nvPr/>
+        </p:nvSpPr>
+        <p:spPr>
+          <a:xfrm>
+            <a:off x="1581912" y="5138927"/>
+            <a:ext cx="3474720" cy="219456"/>
+          </a:xfrm>
+          <a:prstGeom prst="rect">
+            <a:avLst/>
+          </a:prstGeom>
+          <a:noFill/>
+        </p:spPr>
+        <p:txBody>
+          <a:bodyPr wrap="square">
+            <a:spAutoFit/>
+          </a:bodyPr>
+          <a:lstStyle/>
+          <a:p>
+            <a:pPr algn="l">
+              <a:defRPr sz="950" b="0">
+                <a:solidFill>
+                  <a:srgbClr val="111827"/>
+                </a:solidFill>
+                <a:latin typeface="Calibri"/>
+              </a:defRPr>
+            </a:pPr>
+            <a:r>
+              <a:t>Vintage Insurance Agency Inc (The)</a:t>
+            </a:r>
+          </a:p>
+        </p:txBody>
+      </p:sp>
+      <p:sp>
+        <p:nvSpPr>
+          <p:cNvPr id="97" name="TextBox 96"/>
+          <p:cNvSpPr txBox="1"/>
+          <p:nvPr/>
+        </p:nvSpPr>
+        <p:spPr>
+          <a:xfrm>
+            <a:off x="5056631" y="5138927"/>
+            <a:ext cx="914400" cy="219456"/>
+          </a:xfrm>
+          <a:prstGeom prst="rect">
+            <a:avLst/>
+          </a:prstGeom>
+          <a:noFill/>
+        </p:spPr>
+        <p:txBody>
+          <a:bodyPr wrap="square">
+            <a:spAutoFit/>
+          </a:bodyPr>
+          <a:lstStyle/>
+          <a:p>
+            <a:pPr algn="ctr">
+              <a:defRPr sz="950" b="1">
+                <a:solidFill>
+                  <a:srgbClr val="111827"/>
+                </a:solidFill>
+                <a:latin typeface="Calibri"/>
+              </a:defRPr>
+            </a:pPr>
+            <a:r>
+              <a:t>$849K</a:t>
+            </a:r>
+          </a:p>
+        </p:txBody>
+      </p:sp>
+      <p:sp>
+        <p:nvSpPr>
+          <p:cNvPr id="98" name="Rectangle 97"/>
+          <p:cNvSpPr/>
+          <p:nvPr/>
+        </p:nvSpPr>
+        <p:spPr>
+          <a:xfrm>
+            <a:off x="228600" y="5358383"/>
             <a:ext cx="5742432" cy="237744"/>
           </a:xfrm>
           <a:prstGeom prst="rect">
@@ -44765,13 +45139,13 @@
       </p:sp>
       <p:sp>
         <p:nvSpPr>
-          <p:cNvPr id="89" name="TextBox 88"/>
-          <p:cNvSpPr txBox="1"/>
-          <p:nvPr/>
-        </p:nvSpPr>
-        <p:spPr>
-          <a:xfrm>
-            <a:off x="228600" y="4901183"/>
+          <p:cNvPr id="99" name="TextBox 98"/>
+          <p:cNvSpPr txBox="1"/>
+          <p:nvPr/>
+        </p:nvSpPr>
+        <p:spPr>
+          <a:xfrm>
+            <a:off x="228600" y="5376671"/>
             <a:ext cx="347472" cy="219456"/>
           </a:xfrm>
           <a:prstGeom prst="rect">
@@ -44794,20 +45168,20 @@
               </a:defRPr>
             </a:pPr>
             <a:r>
-              <a:t>16</a:t>
-            </a:r>
-          </a:p>
-        </p:txBody>
-      </p:sp>
-      <p:sp>
-        <p:nvSpPr>
-          <p:cNvPr id="90" name="TextBox 89"/>
-          <p:cNvSpPr txBox="1"/>
-          <p:nvPr/>
-        </p:nvSpPr>
-        <p:spPr>
-          <a:xfrm>
-            <a:off x="576072" y="4901183"/>
+              <a:t>18</a:t>
+            </a:r>
+          </a:p>
+        </p:txBody>
+      </p:sp>
+      <p:sp>
+        <p:nvSpPr>
+          <p:cNvPr id="100" name="TextBox 99"/>
+          <p:cNvSpPr txBox="1"/>
+          <p:nvPr/>
+        </p:nvSpPr>
+        <p:spPr>
+          <a:xfrm>
+            <a:off x="576072" y="5376671"/>
             <a:ext cx="1005840" cy="219456"/>
           </a:xfrm>
           <a:prstGeom prst="rect">
@@ -44830,20 +45204,20 @@
               </a:defRPr>
             </a:pPr>
             <a:r>
-              <a:t>Derek J.</a:t>
-            </a:r>
-          </a:p>
-        </p:txBody>
-      </p:sp>
-      <p:sp>
-        <p:nvSpPr>
-          <p:cNvPr id="91" name="TextBox 90"/>
-          <p:cNvSpPr txBox="1"/>
-          <p:nvPr/>
-        </p:nvSpPr>
-        <p:spPr>
-          <a:xfrm>
-            <a:off x="1581912" y="4901183"/>
+              <a:t>Ron D.</a:t>
+            </a:r>
+          </a:p>
+        </p:txBody>
+      </p:sp>
+      <p:sp>
+        <p:nvSpPr>
+          <p:cNvPr id="101" name="TextBox 100"/>
+          <p:cNvSpPr txBox="1"/>
+          <p:nvPr/>
+        </p:nvSpPr>
+        <p:spPr>
+          <a:xfrm>
+            <a:off x="1581912" y="5376671"/>
             <a:ext cx="3474720" cy="219456"/>
           </a:xfrm>
           <a:prstGeom prst="rect">
@@ -44866,20 +45240,20 @@
               </a:defRPr>
             </a:pPr>
             <a:r>
-              <a:t>Vintage Insurance Agency Inc (The)</a:t>
-            </a:r>
-          </a:p>
-        </p:txBody>
-      </p:sp>
-      <p:sp>
-        <p:nvSpPr>
-          <p:cNvPr id="92" name="TextBox 91"/>
-          <p:cNvSpPr txBox="1"/>
-          <p:nvPr/>
-        </p:nvSpPr>
-        <p:spPr>
-          <a:xfrm>
-            <a:off x="5056631" y="4901183"/>
+              <a:t>Prestige International Insurance Group I…</a:t>
+            </a:r>
+          </a:p>
+        </p:txBody>
+      </p:sp>
+      <p:sp>
+        <p:nvSpPr>
+          <p:cNvPr id="102" name="TextBox 101"/>
+          <p:cNvSpPr txBox="1"/>
+          <p:nvPr/>
+        </p:nvSpPr>
+        <p:spPr>
+          <a:xfrm>
+            <a:off x="5056631" y="5376671"/>
             <a:ext cx="914400" cy="219456"/>
           </a:xfrm>
           <a:prstGeom prst="rect">
@@ -44902,20 +45276,20 @@
               </a:defRPr>
             </a:pPr>
             <a:r>
-              <a:t>$775K</a:t>
-            </a:r>
-          </a:p>
-        </p:txBody>
-      </p:sp>
-      <p:sp>
-        <p:nvSpPr>
-          <p:cNvPr id="93" name="Rectangle 92"/>
+              <a:t>$828K</a:t>
+            </a:r>
+          </a:p>
+        </p:txBody>
+      </p:sp>
+      <p:sp>
+        <p:nvSpPr>
+          <p:cNvPr id="103" name="Rectangle 102"/>
           <p:cNvSpPr/>
           <p:nvPr/>
         </p:nvSpPr>
         <p:spPr>
           <a:xfrm>
-            <a:off x="228600" y="5120639"/>
+            <a:off x="228600" y="5596127"/>
             <a:ext cx="5742432" cy="237744"/>
           </a:xfrm>
           <a:prstGeom prst="rect">
@@ -44952,13 +45326,13 @@
       </p:sp>
       <p:sp>
         <p:nvSpPr>
-          <p:cNvPr id="94" name="TextBox 93"/>
-          <p:cNvSpPr txBox="1"/>
-          <p:nvPr/>
-        </p:nvSpPr>
-        <p:spPr>
-          <a:xfrm>
-            <a:off x="228600" y="5138927"/>
+          <p:cNvPr id="104" name="TextBox 103"/>
+          <p:cNvSpPr txBox="1"/>
+          <p:nvPr/>
+        </p:nvSpPr>
+        <p:spPr>
+          <a:xfrm>
+            <a:off x="228600" y="5614415"/>
             <a:ext cx="347472" cy="219456"/>
           </a:xfrm>
           <a:prstGeom prst="rect">
@@ -44981,20 +45355,20 @@
               </a:defRPr>
             </a:pPr>
             <a:r>
-              <a:t>17</a:t>
-            </a:r>
-          </a:p>
-        </p:txBody>
-      </p:sp>
-      <p:sp>
-        <p:nvSpPr>
-          <p:cNvPr id="95" name="TextBox 94"/>
-          <p:cNvSpPr txBox="1"/>
-          <p:nvPr/>
-        </p:nvSpPr>
-        <p:spPr>
-          <a:xfrm>
-            <a:off x="576072" y="5138927"/>
+              <a:t>19</a:t>
+            </a:r>
+          </a:p>
+        </p:txBody>
+      </p:sp>
+      <p:sp>
+        <p:nvSpPr>
+          <p:cNvPr id="105" name="TextBox 104"/>
+          <p:cNvSpPr txBox="1"/>
+          <p:nvPr/>
+        </p:nvSpPr>
+        <p:spPr>
+          <a:xfrm>
+            <a:off x="576072" y="5614415"/>
             <a:ext cx="1005840" cy="219456"/>
           </a:xfrm>
           <a:prstGeom prst="rect">
@@ -45024,13 +45398,13 @@
       </p:sp>
       <p:sp>
         <p:nvSpPr>
-          <p:cNvPr id="96" name="TextBox 95"/>
-          <p:cNvSpPr txBox="1"/>
-          <p:nvPr/>
-        </p:nvSpPr>
-        <p:spPr>
-          <a:xfrm>
-            <a:off x="1581912" y="5138927"/>
+          <p:cNvPr id="106" name="TextBox 105"/>
+          <p:cNvSpPr txBox="1"/>
+          <p:nvPr/>
+        </p:nvSpPr>
+        <p:spPr>
+          <a:xfrm>
+            <a:off x="1581912" y="5614415"/>
             <a:ext cx="3474720" cy="219456"/>
           </a:xfrm>
           <a:prstGeom prst="rect">
@@ -45060,13 +45434,13 @@
       </p:sp>
       <p:sp>
         <p:nvSpPr>
-          <p:cNvPr id="97" name="TextBox 96"/>
-          <p:cNvSpPr txBox="1"/>
-          <p:nvPr/>
-        </p:nvSpPr>
-        <p:spPr>
-          <a:xfrm>
-            <a:off x="5056631" y="5138927"/>
+          <p:cNvPr id="107" name="TextBox 106"/>
+          <p:cNvSpPr txBox="1"/>
+          <p:nvPr/>
+        </p:nvSpPr>
+        <p:spPr>
+          <a:xfrm>
+            <a:off x="5056631" y="5614415"/>
             <a:ext cx="914400" cy="219456"/>
           </a:xfrm>
           <a:prstGeom prst="rect">
@@ -45096,13 +45470,653 @@
       </p:sp>
       <p:sp>
         <p:nvSpPr>
-          <p:cNvPr id="98" name="Rectangle 97"/>
+          <p:cNvPr id="108" name="Rectangle 107"/>
           <p:cNvSpPr/>
           <p:nvPr/>
         </p:nvSpPr>
         <p:spPr>
           <a:xfrm>
-            <a:off x="228600" y="5358383"/>
+            <a:off x="228600" y="5833871"/>
+            <a:ext cx="5742432" cy="237744"/>
+          </a:xfrm>
+          <a:prstGeom prst="rect">
+            <a:avLst/>
+          </a:prstGeom>
+          <a:solidFill>
+            <a:srgbClr val="D1FAE5"/>
+          </a:solidFill>
+          <a:ln>
+            <a:noFill/>
+          </a:ln>
+        </p:spPr>
+        <p:style>
+          <a:lnRef idx="1">
+            <a:schemeClr val="accent1"/>
+          </a:lnRef>
+          <a:fillRef idx="3">
+            <a:schemeClr val="accent1"/>
+          </a:fillRef>
+          <a:effectRef idx="2">
+            <a:schemeClr val="accent1"/>
+          </a:effectRef>
+          <a:fontRef idx="minor">
+            <a:schemeClr val="lt1"/>
+          </a:fontRef>
+        </p:style>
+        <p:txBody>
+          <a:bodyPr rtlCol="0" anchor="ctr"/>
+          <a:lstStyle/>
+          <a:p>
+            <a:pPr algn="ctr"/>
+          </a:p>
+        </p:txBody>
+      </p:sp>
+      <p:sp>
+        <p:nvSpPr>
+          <p:cNvPr id="109" name="TextBox 108"/>
+          <p:cNvSpPr txBox="1"/>
+          <p:nvPr/>
+        </p:nvSpPr>
+        <p:spPr>
+          <a:xfrm>
+            <a:off x="228600" y="5852159"/>
+            <a:ext cx="347472" cy="219456"/>
+          </a:xfrm>
+          <a:prstGeom prst="rect">
+            <a:avLst/>
+          </a:prstGeom>
+          <a:noFill/>
+        </p:spPr>
+        <p:txBody>
+          <a:bodyPr wrap="square">
+            <a:spAutoFit/>
+          </a:bodyPr>
+          <a:lstStyle/>
+          <a:p>
+            <a:pPr algn="ctr">
+              <a:defRPr sz="950" b="1">
+                <a:solidFill>
+                  <a:srgbClr val="111827"/>
+                </a:solidFill>
+                <a:latin typeface="Calibri"/>
+              </a:defRPr>
+            </a:pPr>
+            <a:r>
+              <a:t>20</a:t>
+            </a:r>
+          </a:p>
+        </p:txBody>
+      </p:sp>
+      <p:sp>
+        <p:nvSpPr>
+          <p:cNvPr id="110" name="TextBox 109"/>
+          <p:cNvSpPr txBox="1"/>
+          <p:nvPr/>
+        </p:nvSpPr>
+        <p:spPr>
+          <a:xfrm>
+            <a:off x="576072" y="5852159"/>
+            <a:ext cx="1005840" cy="219456"/>
+          </a:xfrm>
+          <a:prstGeom prst="rect">
+            <a:avLst/>
+          </a:prstGeom>
+          <a:noFill/>
+        </p:spPr>
+        <p:txBody>
+          <a:bodyPr wrap="square">
+            <a:spAutoFit/>
+          </a:bodyPr>
+          <a:lstStyle/>
+          <a:p>
+            <a:pPr algn="ctr">
+              <a:defRPr sz="950" b="1">
+                <a:solidFill>
+                  <a:srgbClr val="111827"/>
+                </a:solidFill>
+                <a:latin typeface="Calibri"/>
+              </a:defRPr>
+            </a:pPr>
+            <a:r>
+              <a:t>Derrick L.</a:t>
+            </a:r>
+          </a:p>
+        </p:txBody>
+      </p:sp>
+      <p:sp>
+        <p:nvSpPr>
+          <p:cNvPr id="111" name="TextBox 110"/>
+          <p:cNvSpPr txBox="1"/>
+          <p:nvPr/>
+        </p:nvSpPr>
+        <p:spPr>
+          <a:xfrm>
+            <a:off x="1581912" y="5852159"/>
+            <a:ext cx="3474720" cy="219456"/>
+          </a:xfrm>
+          <a:prstGeom prst="rect">
+            <a:avLst/>
+          </a:prstGeom>
+          <a:noFill/>
+        </p:spPr>
+        <p:txBody>
+          <a:bodyPr wrap="square">
+            <a:spAutoFit/>
+          </a:bodyPr>
+          <a:lstStyle/>
+          <a:p>
+            <a:pPr algn="l">
+              <a:defRPr sz="950" b="0">
+                <a:solidFill>
+                  <a:srgbClr val="111827"/>
+                </a:solidFill>
+                <a:latin typeface="Calibri"/>
+              </a:defRPr>
+            </a:pPr>
+            <a:r>
+              <a:t>Connect Insurance Agency, Inc.</a:t>
+            </a:r>
+          </a:p>
+        </p:txBody>
+      </p:sp>
+      <p:sp>
+        <p:nvSpPr>
+          <p:cNvPr id="112" name="TextBox 111"/>
+          <p:cNvSpPr txBox="1"/>
+          <p:nvPr/>
+        </p:nvSpPr>
+        <p:spPr>
+          <a:xfrm>
+            <a:off x="5056631" y="5852159"/>
+            <a:ext cx="914400" cy="219456"/>
+          </a:xfrm>
+          <a:prstGeom prst="rect">
+            <a:avLst/>
+          </a:prstGeom>
+          <a:noFill/>
+        </p:spPr>
+        <p:txBody>
+          <a:bodyPr wrap="square">
+            <a:spAutoFit/>
+          </a:bodyPr>
+          <a:lstStyle/>
+          <a:p>
+            <a:pPr algn="ctr">
+              <a:defRPr sz="950" b="1">
+                <a:solidFill>
+                  <a:srgbClr val="111827"/>
+                </a:solidFill>
+                <a:latin typeface="Calibri"/>
+              </a:defRPr>
+            </a:pPr>
+            <a:r>
+              <a:t>$743K</a:t>
+            </a:r>
+          </a:p>
+        </p:txBody>
+      </p:sp>
+      <p:sp>
+        <p:nvSpPr>
+          <p:cNvPr id="113" name="Rectangle 112"/>
+          <p:cNvSpPr/>
+          <p:nvPr/>
+        </p:nvSpPr>
+        <p:spPr>
+          <a:xfrm>
+            <a:off x="6291072" y="841248"/>
+            <a:ext cx="5779008" cy="237744"/>
+          </a:xfrm>
+          <a:prstGeom prst="rect">
+            <a:avLst/>
+          </a:prstGeom>
+          <a:solidFill>
+            <a:srgbClr val="1E073B"/>
+          </a:solidFill>
+          <a:ln>
+            <a:noFill/>
+          </a:ln>
+        </p:spPr>
+        <p:style>
+          <a:lnRef idx="1">
+            <a:schemeClr val="accent1"/>
+          </a:lnRef>
+          <a:fillRef idx="3">
+            <a:schemeClr val="accent1"/>
+          </a:fillRef>
+          <a:effectRef idx="2">
+            <a:schemeClr val="accent1"/>
+          </a:effectRef>
+          <a:fontRef idx="minor">
+            <a:schemeClr val="lt1"/>
+          </a:fontRef>
+        </p:style>
+        <p:txBody>
+          <a:bodyPr rtlCol="0" anchor="ctr"/>
+          <a:lstStyle/>
+          <a:p>
+            <a:pPr algn="ctr"/>
+          </a:p>
+        </p:txBody>
+      </p:sp>
+      <p:sp>
+        <p:nvSpPr>
+          <p:cNvPr id="114" name="TextBox 113"/>
+          <p:cNvSpPr txBox="1"/>
+          <p:nvPr/>
+        </p:nvSpPr>
+        <p:spPr>
+          <a:xfrm>
+            <a:off x="6364224" y="868680"/>
+            <a:ext cx="5742432" cy="182880"/>
+          </a:xfrm>
+          <a:prstGeom prst="rect">
+            <a:avLst/>
+          </a:prstGeom>
+          <a:noFill/>
+        </p:spPr>
+        <p:txBody>
+          <a:bodyPr wrap="square">
+            <a:spAutoFit/>
+          </a:bodyPr>
+          <a:lstStyle/>
+          <a:p>
+            <a:pPr algn="l">
+              <a:defRPr sz="900" b="1">
+                <a:solidFill>
+                  <a:srgbClr val="FFFFFF"/>
+                </a:solidFill>
+                <a:latin typeface="Calibri"/>
+              </a:defRPr>
+            </a:pPr>
+            <a:r>
+              <a:t>Top 20 Agencies — Q2 Submissions</a:t>
+            </a:r>
+          </a:p>
+        </p:txBody>
+      </p:sp>
+      <p:sp>
+        <p:nvSpPr>
+          <p:cNvPr id="115" name="TextBox 114"/>
+          <p:cNvSpPr txBox="1"/>
+          <p:nvPr/>
+        </p:nvSpPr>
+        <p:spPr>
+          <a:xfrm>
+            <a:off x="6291072" y="1097280"/>
+            <a:ext cx="347472" cy="201168"/>
+          </a:xfrm>
+          <a:prstGeom prst="rect">
+            <a:avLst/>
+          </a:prstGeom>
+          <a:noFill/>
+        </p:spPr>
+        <p:txBody>
+          <a:bodyPr wrap="square">
+            <a:spAutoFit/>
+          </a:bodyPr>
+          <a:lstStyle/>
+          <a:p>
+            <a:pPr algn="ctr">
+              <a:defRPr sz="850" b="1">
+                <a:solidFill>
+                  <a:srgbClr val="6B7280"/>
+                </a:solidFill>
+                <a:latin typeface="Calibri"/>
+              </a:defRPr>
+            </a:pPr>
+            <a:r>
+              <a:t>#</a:t>
+            </a:r>
+          </a:p>
+        </p:txBody>
+      </p:sp>
+      <p:sp>
+        <p:nvSpPr>
+          <p:cNvPr id="116" name="TextBox 115"/>
+          <p:cNvSpPr txBox="1"/>
+          <p:nvPr/>
+        </p:nvSpPr>
+        <p:spPr>
+          <a:xfrm>
+            <a:off x="6638544" y="1097280"/>
+            <a:ext cx="1005840" cy="201168"/>
+          </a:xfrm>
+          <a:prstGeom prst="rect">
+            <a:avLst/>
+          </a:prstGeom>
+          <a:noFill/>
+        </p:spPr>
+        <p:txBody>
+          <a:bodyPr wrap="square">
+            <a:spAutoFit/>
+          </a:bodyPr>
+          <a:lstStyle/>
+          <a:p>
+            <a:pPr algn="ctr">
+              <a:defRPr sz="850" b="1">
+                <a:solidFill>
+                  <a:srgbClr val="6B7280"/>
+                </a:solidFill>
+                <a:latin typeface="Calibri"/>
+              </a:defRPr>
+            </a:pPr>
+            <a:r>
+              <a:t>Rep</a:t>
+            </a:r>
+          </a:p>
+        </p:txBody>
+      </p:sp>
+      <p:sp>
+        <p:nvSpPr>
+          <p:cNvPr id="117" name="TextBox 116"/>
+          <p:cNvSpPr txBox="1"/>
+          <p:nvPr/>
+        </p:nvSpPr>
+        <p:spPr>
+          <a:xfrm>
+            <a:off x="7644383" y="1097280"/>
+            <a:ext cx="3474720" cy="201168"/>
+          </a:xfrm>
+          <a:prstGeom prst="rect">
+            <a:avLst/>
+          </a:prstGeom>
+          <a:noFill/>
+        </p:spPr>
+        <p:txBody>
+          <a:bodyPr wrap="square">
+            <a:spAutoFit/>
+          </a:bodyPr>
+          <a:lstStyle/>
+          <a:p>
+            <a:pPr algn="l">
+              <a:defRPr sz="850" b="1">
+                <a:solidFill>
+                  <a:srgbClr val="6B7280"/>
+                </a:solidFill>
+                <a:latin typeface="Calibri"/>
+              </a:defRPr>
+            </a:pPr>
+            <a:r>
+              <a:t>Agency</a:t>
+            </a:r>
+          </a:p>
+        </p:txBody>
+      </p:sp>
+      <p:sp>
+        <p:nvSpPr>
+          <p:cNvPr id="118" name="TextBox 117"/>
+          <p:cNvSpPr txBox="1"/>
+          <p:nvPr/>
+        </p:nvSpPr>
+        <p:spPr>
+          <a:xfrm>
+            <a:off x="11119104" y="1097280"/>
+            <a:ext cx="914400" cy="201168"/>
+          </a:xfrm>
+          <a:prstGeom prst="rect">
+            <a:avLst/>
+          </a:prstGeom>
+          <a:noFill/>
+        </p:spPr>
+        <p:txBody>
+          <a:bodyPr wrap="square">
+            <a:spAutoFit/>
+          </a:bodyPr>
+          <a:lstStyle/>
+          <a:p>
+            <a:pPr algn="ctr">
+              <a:defRPr sz="850" b="1">
+                <a:solidFill>
+                  <a:srgbClr val="6B7280"/>
+                </a:solidFill>
+                <a:latin typeface="Calibri"/>
+              </a:defRPr>
+            </a:pPr>
+            <a:r>
+              <a:t>Q2 Subs</a:t>
+            </a:r>
+          </a:p>
+        </p:txBody>
+      </p:sp>
+      <p:sp>
+        <p:nvSpPr>
+          <p:cNvPr id="119" name="Rectangle 118"/>
+          <p:cNvSpPr/>
+          <p:nvPr/>
+        </p:nvSpPr>
+        <p:spPr>
+          <a:xfrm>
+            <a:off x="6291072" y="1298448"/>
+            <a:ext cx="5742432" cy="9144"/>
+          </a:xfrm>
+          <a:prstGeom prst="rect">
+            <a:avLst/>
+          </a:prstGeom>
+          <a:solidFill>
+            <a:srgbClr val="E5E7EB"/>
+          </a:solidFill>
+          <a:ln>
+            <a:noFill/>
+          </a:ln>
+        </p:spPr>
+        <p:style>
+          <a:lnRef idx="1">
+            <a:schemeClr val="accent1"/>
+          </a:lnRef>
+          <a:fillRef idx="3">
+            <a:schemeClr val="accent1"/>
+          </a:fillRef>
+          <a:effectRef idx="2">
+            <a:schemeClr val="accent1"/>
+          </a:effectRef>
+          <a:fontRef idx="minor">
+            <a:schemeClr val="lt1"/>
+          </a:fontRef>
+        </p:style>
+        <p:txBody>
+          <a:bodyPr rtlCol="0" anchor="ctr"/>
+          <a:lstStyle/>
+          <a:p>
+            <a:pPr algn="ctr"/>
+          </a:p>
+        </p:txBody>
+      </p:sp>
+      <p:sp>
+        <p:nvSpPr>
+          <p:cNvPr id="120" name="Rectangle 119"/>
+          <p:cNvSpPr/>
+          <p:nvPr/>
+        </p:nvSpPr>
+        <p:spPr>
+          <a:xfrm>
+            <a:off x="6291072" y="1316736"/>
+            <a:ext cx="5742432" cy="237744"/>
+          </a:xfrm>
+          <a:prstGeom prst="rect">
+            <a:avLst/>
+          </a:prstGeom>
+          <a:solidFill>
+            <a:srgbClr val="FFFFFF"/>
+          </a:solidFill>
+          <a:ln>
+            <a:noFill/>
+          </a:ln>
+        </p:spPr>
+        <p:style>
+          <a:lnRef idx="1">
+            <a:schemeClr val="accent1"/>
+          </a:lnRef>
+          <a:fillRef idx="3">
+            <a:schemeClr val="accent1"/>
+          </a:fillRef>
+          <a:effectRef idx="2">
+            <a:schemeClr val="accent1"/>
+          </a:effectRef>
+          <a:fontRef idx="minor">
+            <a:schemeClr val="lt1"/>
+          </a:fontRef>
+        </p:style>
+        <p:txBody>
+          <a:bodyPr rtlCol="0" anchor="ctr"/>
+          <a:lstStyle/>
+          <a:p>
+            <a:pPr algn="ctr"/>
+          </a:p>
+        </p:txBody>
+      </p:sp>
+      <p:sp>
+        <p:nvSpPr>
+          <p:cNvPr id="121" name="TextBox 120"/>
+          <p:cNvSpPr txBox="1"/>
+          <p:nvPr/>
+        </p:nvSpPr>
+        <p:spPr>
+          <a:xfrm>
+            <a:off x="6291072" y="1335024"/>
+            <a:ext cx="347472" cy="219456"/>
+          </a:xfrm>
+          <a:prstGeom prst="rect">
+            <a:avLst/>
+          </a:prstGeom>
+          <a:noFill/>
+        </p:spPr>
+        <p:txBody>
+          <a:bodyPr wrap="square">
+            <a:spAutoFit/>
+          </a:bodyPr>
+          <a:lstStyle/>
+          <a:p>
+            <a:pPr algn="ctr">
+              <a:defRPr sz="950" b="1">
+                <a:solidFill>
+                  <a:srgbClr val="111827"/>
+                </a:solidFill>
+                <a:latin typeface="Calibri"/>
+              </a:defRPr>
+            </a:pPr>
+            <a:r>
+              <a:t>1</a:t>
+            </a:r>
+          </a:p>
+        </p:txBody>
+      </p:sp>
+      <p:sp>
+        <p:nvSpPr>
+          <p:cNvPr id="122" name="TextBox 121"/>
+          <p:cNvSpPr txBox="1"/>
+          <p:nvPr/>
+        </p:nvSpPr>
+        <p:spPr>
+          <a:xfrm>
+            <a:off x="6638544" y="1335024"/>
+            <a:ext cx="1005840" cy="219456"/>
+          </a:xfrm>
+          <a:prstGeom prst="rect">
+            <a:avLst/>
+          </a:prstGeom>
+          <a:noFill/>
+        </p:spPr>
+        <p:txBody>
+          <a:bodyPr wrap="square">
+            <a:spAutoFit/>
+          </a:bodyPr>
+          <a:lstStyle/>
+          <a:p>
+            <a:pPr algn="ctr">
+              <a:defRPr sz="950" b="1">
+                <a:solidFill>
+                  <a:srgbClr val="111827"/>
+                </a:solidFill>
+                <a:latin typeface="Calibri"/>
+              </a:defRPr>
+            </a:pPr>
+            <a:r>
+              <a:t>Derek J.</a:t>
+            </a:r>
+          </a:p>
+        </p:txBody>
+      </p:sp>
+      <p:sp>
+        <p:nvSpPr>
+          <p:cNvPr id="123" name="TextBox 122"/>
+          <p:cNvSpPr txBox="1"/>
+          <p:nvPr/>
+        </p:nvSpPr>
+        <p:spPr>
+          <a:xfrm>
+            <a:off x="7644383" y="1335024"/>
+            <a:ext cx="3474720" cy="219456"/>
+          </a:xfrm>
+          <a:prstGeom prst="rect">
+            <a:avLst/>
+          </a:prstGeom>
+          <a:noFill/>
+        </p:spPr>
+        <p:txBody>
+          <a:bodyPr wrap="square">
+            <a:spAutoFit/>
+          </a:bodyPr>
+          <a:lstStyle/>
+          <a:p>
+            <a:pPr algn="l">
+              <a:defRPr sz="950" b="0">
+                <a:solidFill>
+                  <a:srgbClr val="111827"/>
+                </a:solidFill>
+                <a:latin typeface="Calibri"/>
+              </a:defRPr>
+            </a:pPr>
+            <a:r>
+              <a:t>Reliance Partners, LLC</a:t>
+            </a:r>
+          </a:p>
+        </p:txBody>
+      </p:sp>
+      <p:sp>
+        <p:nvSpPr>
+          <p:cNvPr id="124" name="TextBox 123"/>
+          <p:cNvSpPr txBox="1"/>
+          <p:nvPr/>
+        </p:nvSpPr>
+        <p:spPr>
+          <a:xfrm>
+            <a:off x="11119104" y="1335024"/>
+            <a:ext cx="914400" cy="219456"/>
+          </a:xfrm>
+          <a:prstGeom prst="rect">
+            <a:avLst/>
+          </a:prstGeom>
+          <a:noFill/>
+        </p:spPr>
+        <p:txBody>
+          <a:bodyPr wrap="square">
+            <a:spAutoFit/>
+          </a:bodyPr>
+          <a:lstStyle/>
+          <a:p>
+            <a:pPr algn="ctr">
+              <a:defRPr sz="950" b="1">
+                <a:solidFill>
+                  <a:srgbClr val="111827"/>
+                </a:solidFill>
+                <a:latin typeface="Calibri"/>
+              </a:defRPr>
+            </a:pPr>
+            <a:r>
+              <a:t>2320</a:t>
+            </a:r>
+          </a:p>
+        </p:txBody>
+      </p:sp>
+      <p:sp>
+        <p:nvSpPr>
+          <p:cNvPr id="125" name="Rectangle 124"/>
+          <p:cNvSpPr/>
+          <p:nvPr/>
+        </p:nvSpPr>
+        <p:spPr>
+          <a:xfrm>
+            <a:off x="6291072" y="1554480"/>
             <a:ext cx="5742432" cy="237744"/>
           </a:xfrm>
           <a:prstGeom prst="rect">
@@ -45139,13 +46153,13 @@
       </p:sp>
       <p:sp>
         <p:nvSpPr>
-          <p:cNvPr id="99" name="TextBox 98"/>
-          <p:cNvSpPr txBox="1"/>
-          <p:nvPr/>
-        </p:nvSpPr>
-        <p:spPr>
-          <a:xfrm>
-            <a:off x="228600" y="5376671"/>
+          <p:cNvPr id="126" name="TextBox 125"/>
+          <p:cNvSpPr txBox="1"/>
+          <p:nvPr/>
+        </p:nvSpPr>
+        <p:spPr>
+          <a:xfrm>
+            <a:off x="6291072" y="1572768"/>
             <a:ext cx="347472" cy="219456"/>
           </a:xfrm>
           <a:prstGeom prst="rect">
@@ -45168,20 +46182,20 @@
               </a:defRPr>
             </a:pPr>
             <a:r>
-              <a:t>18</a:t>
-            </a:r>
-          </a:p>
-        </p:txBody>
-      </p:sp>
-      <p:sp>
-        <p:nvSpPr>
-          <p:cNvPr id="100" name="TextBox 99"/>
-          <p:cNvSpPr txBox="1"/>
-          <p:nvPr/>
-        </p:nvSpPr>
-        <p:spPr>
-          <a:xfrm>
-            <a:off x="576072" y="5376671"/>
+              <a:t>2</a:t>
+            </a:r>
+          </a:p>
+        </p:txBody>
+      </p:sp>
+      <p:sp>
+        <p:nvSpPr>
+          <p:cNvPr id="127" name="TextBox 126"/>
+          <p:cNvSpPr txBox="1"/>
+          <p:nvPr/>
+        </p:nvSpPr>
+        <p:spPr>
+          <a:xfrm>
+            <a:off x="6638544" y="1572768"/>
             <a:ext cx="1005840" cy="219456"/>
           </a:xfrm>
           <a:prstGeom prst="rect">
@@ -45204,20 +46218,20 @@
               </a:defRPr>
             </a:pPr>
             <a:r>
-              <a:t>Derek J.</a:t>
-            </a:r>
-          </a:p>
-        </p:txBody>
-      </p:sp>
-      <p:sp>
-        <p:nvSpPr>
-          <p:cNvPr id="101" name="TextBox 100"/>
-          <p:cNvSpPr txBox="1"/>
-          <p:nvPr/>
-        </p:nvSpPr>
-        <p:spPr>
-          <a:xfrm>
-            <a:off x="1581912" y="5376671"/>
+              <a:t>Ron D.</a:t>
+            </a:r>
+          </a:p>
+        </p:txBody>
+      </p:sp>
+      <p:sp>
+        <p:nvSpPr>
+          <p:cNvPr id="128" name="TextBox 127"/>
+          <p:cNvSpPr txBox="1"/>
+          <p:nvPr/>
+        </p:nvSpPr>
+        <p:spPr>
+          <a:xfrm>
+            <a:off x="7644383" y="1572768"/>
             <a:ext cx="3474720" cy="219456"/>
           </a:xfrm>
           <a:prstGeom prst="rect">
@@ -45240,20 +46254,20 @@
               </a:defRPr>
             </a:pPr>
             <a:r>
-              <a:t>Surefire Insurance Agency Corp.</a:t>
-            </a:r>
-          </a:p>
-        </p:txBody>
-      </p:sp>
-      <p:sp>
-        <p:nvSpPr>
-          <p:cNvPr id="102" name="TextBox 101"/>
-          <p:cNvSpPr txBox="1"/>
-          <p:nvPr/>
-        </p:nvSpPr>
-        <p:spPr>
-          <a:xfrm>
-            <a:off x="5056631" y="5376671"/>
+              <a:t>Insurance4Truckers LLC</a:t>
+            </a:r>
+          </a:p>
+        </p:txBody>
+      </p:sp>
+      <p:sp>
+        <p:nvSpPr>
+          <p:cNvPr id="129" name="TextBox 128"/>
+          <p:cNvSpPr txBox="1"/>
+          <p:nvPr/>
+        </p:nvSpPr>
+        <p:spPr>
+          <a:xfrm>
+            <a:off x="11119104" y="1572768"/>
             <a:ext cx="914400" cy="219456"/>
           </a:xfrm>
           <a:prstGeom prst="rect">
@@ -45276,27 +46290,27 @@
               </a:defRPr>
             </a:pPr>
             <a:r>
-              <a:t>$737K</a:t>
-            </a:r>
-          </a:p>
-        </p:txBody>
-      </p:sp>
-      <p:sp>
-        <p:nvSpPr>
-          <p:cNvPr id="103" name="Rectangle 102"/>
+              <a:t>2180</a:t>
+            </a:r>
+          </a:p>
+        </p:txBody>
+      </p:sp>
+      <p:sp>
+        <p:nvSpPr>
+          <p:cNvPr id="130" name="Rectangle 129"/>
           <p:cNvSpPr/>
           <p:nvPr/>
         </p:nvSpPr>
         <p:spPr>
           <a:xfrm>
-            <a:off x="228600" y="5596127"/>
+            <a:off x="6291072" y="1792224"/>
             <a:ext cx="5742432" cy="237744"/>
           </a:xfrm>
           <a:prstGeom prst="rect">
             <a:avLst/>
           </a:prstGeom>
           <a:solidFill>
-            <a:srgbClr val="D1FAE5"/>
+            <a:srgbClr val="FFFFFF"/>
           </a:solidFill>
           <a:ln>
             <a:noFill/>
@@ -45326,13 +46340,13 @@
       </p:sp>
       <p:sp>
         <p:nvSpPr>
-          <p:cNvPr id="104" name="TextBox 103"/>
-          <p:cNvSpPr txBox="1"/>
-          <p:nvPr/>
-        </p:nvSpPr>
-        <p:spPr>
-          <a:xfrm>
-            <a:off x="228600" y="5614415"/>
+          <p:cNvPr id="131" name="TextBox 130"/>
+          <p:cNvSpPr txBox="1"/>
+          <p:nvPr/>
+        </p:nvSpPr>
+        <p:spPr>
+          <a:xfrm>
+            <a:off x="6291072" y="1810512"/>
             <a:ext cx="347472" cy="219456"/>
           </a:xfrm>
           <a:prstGeom prst="rect">
@@ -45355,20 +46369,20 @@
               </a:defRPr>
             </a:pPr>
             <a:r>
-              <a:t>19</a:t>
-            </a:r>
-          </a:p>
-        </p:txBody>
-      </p:sp>
-      <p:sp>
-        <p:nvSpPr>
-          <p:cNvPr id="105" name="TextBox 104"/>
-          <p:cNvSpPr txBox="1"/>
-          <p:nvPr/>
-        </p:nvSpPr>
-        <p:spPr>
-          <a:xfrm>
-            <a:off x="576072" y="5614415"/>
+              <a:t>3</a:t>
+            </a:r>
+          </a:p>
+        </p:txBody>
+      </p:sp>
+      <p:sp>
+        <p:nvSpPr>
+          <p:cNvPr id="132" name="TextBox 131"/>
+          <p:cNvSpPr txBox="1"/>
+          <p:nvPr/>
+        </p:nvSpPr>
+        <p:spPr>
+          <a:xfrm>
+            <a:off x="6638544" y="1810512"/>
             <a:ext cx="1005840" cy="219456"/>
           </a:xfrm>
           <a:prstGeom prst="rect">
@@ -45391,20 +46405,20 @@
               </a:defRPr>
             </a:pPr>
             <a:r>
-              <a:t>Derek J.</a:t>
-            </a:r>
-          </a:p>
-        </p:txBody>
-      </p:sp>
-      <p:sp>
-        <p:nvSpPr>
-          <p:cNvPr id="106" name="TextBox 105"/>
-          <p:cNvSpPr txBox="1"/>
-          <p:nvPr/>
-        </p:nvSpPr>
-        <p:spPr>
-          <a:xfrm>
-            <a:off x="1581912" y="5614415"/>
+              <a:t>Kurt B.</a:t>
+            </a:r>
+          </a:p>
+        </p:txBody>
+      </p:sp>
+      <p:sp>
+        <p:nvSpPr>
+          <p:cNvPr id="133" name="TextBox 132"/>
+          <p:cNvSpPr txBox="1"/>
+          <p:nvPr/>
+        </p:nvSpPr>
+        <p:spPr>
+          <a:xfrm>
+            <a:off x="7644383" y="1810512"/>
             <a:ext cx="3474720" cy="219456"/>
           </a:xfrm>
           <a:prstGeom prst="rect">
@@ -45427,20 +46441,20 @@
               </a:defRPr>
             </a:pPr>
             <a:r>
-              <a:t>Sedge Insurance Agency LLC</a:t>
-            </a:r>
-          </a:p>
-        </p:txBody>
-      </p:sp>
-      <p:sp>
-        <p:nvSpPr>
-          <p:cNvPr id="107" name="TextBox 106"/>
-          <p:cNvSpPr txBox="1"/>
-          <p:nvPr/>
-        </p:nvSpPr>
-        <p:spPr>
-          <a:xfrm>
-            <a:off x="5056631" y="5614415"/>
+              <a:t>Fino Services LLC</a:t>
+            </a:r>
+          </a:p>
+        </p:txBody>
+      </p:sp>
+      <p:sp>
+        <p:nvSpPr>
+          <p:cNvPr id="134" name="TextBox 133"/>
+          <p:cNvSpPr txBox="1"/>
+          <p:nvPr/>
+        </p:nvSpPr>
+        <p:spPr>
+          <a:xfrm>
+            <a:off x="11119104" y="1810512"/>
             <a:ext cx="914400" cy="219456"/>
           </a:xfrm>
           <a:prstGeom prst="rect">
@@ -45463,20 +46477,20 @@
               </a:defRPr>
             </a:pPr>
             <a:r>
-              <a:t>$600K</a:t>
-            </a:r>
-          </a:p>
-        </p:txBody>
-      </p:sp>
-      <p:sp>
-        <p:nvSpPr>
-          <p:cNvPr id="108" name="Rectangle 107"/>
+              <a:t>1671</a:t>
+            </a:r>
+          </a:p>
+        </p:txBody>
+      </p:sp>
+      <p:sp>
+        <p:nvSpPr>
+          <p:cNvPr id="135" name="Rectangle 134"/>
           <p:cNvSpPr/>
           <p:nvPr/>
         </p:nvSpPr>
         <p:spPr>
           <a:xfrm>
-            <a:off x="228600" y="5833871"/>
+            <a:off x="6291072" y="2029968"/>
             <a:ext cx="5742432" cy="237744"/>
           </a:xfrm>
           <a:prstGeom prst="rect">
@@ -45513,13 +46527,13 @@
       </p:sp>
       <p:sp>
         <p:nvSpPr>
-          <p:cNvPr id="109" name="TextBox 108"/>
-          <p:cNvSpPr txBox="1"/>
-          <p:nvPr/>
-        </p:nvSpPr>
-        <p:spPr>
-          <a:xfrm>
-            <a:off x="228600" y="5852159"/>
+          <p:cNvPr id="136" name="TextBox 135"/>
+          <p:cNvSpPr txBox="1"/>
+          <p:nvPr/>
+        </p:nvSpPr>
+        <p:spPr>
+          <a:xfrm>
+            <a:off x="6291072" y="2048256"/>
             <a:ext cx="347472" cy="219456"/>
           </a:xfrm>
           <a:prstGeom prst="rect">
@@ -45542,20 +46556,20 @@
               </a:defRPr>
             </a:pPr>
             <a:r>
-              <a:t>20</a:t>
-            </a:r>
-          </a:p>
-        </p:txBody>
-      </p:sp>
-      <p:sp>
-        <p:nvSpPr>
-          <p:cNvPr id="110" name="TextBox 109"/>
-          <p:cNvSpPr txBox="1"/>
-          <p:nvPr/>
-        </p:nvSpPr>
-        <p:spPr>
-          <a:xfrm>
-            <a:off x="576072" y="5852159"/>
+              <a:t>4</a:t>
+            </a:r>
+          </a:p>
+        </p:txBody>
+      </p:sp>
+      <p:sp>
+        <p:nvSpPr>
+          <p:cNvPr id="137" name="TextBox 136"/>
+          <p:cNvSpPr txBox="1"/>
+          <p:nvPr/>
+        </p:nvSpPr>
+        <p:spPr>
+          <a:xfrm>
+            <a:off x="6638544" y="2048256"/>
             <a:ext cx="1005840" cy="219456"/>
           </a:xfrm>
           <a:prstGeom prst="rect">
@@ -45578,20 +46592,20 @@
               </a:defRPr>
             </a:pPr>
             <a:r>
-              <a:t>Derrick L.</a:t>
-            </a:r>
-          </a:p>
-        </p:txBody>
-      </p:sp>
-      <p:sp>
-        <p:nvSpPr>
-          <p:cNvPr id="111" name="TextBox 110"/>
-          <p:cNvSpPr txBox="1"/>
-          <p:nvPr/>
-        </p:nvSpPr>
-        <p:spPr>
-          <a:xfrm>
-            <a:off x="1581912" y="5852159"/>
+              <a:t>Ron D.</a:t>
+            </a:r>
+          </a:p>
+        </p:txBody>
+      </p:sp>
+      <p:sp>
+        <p:nvSpPr>
+          <p:cNvPr id="138" name="TextBox 137"/>
+          <p:cNvSpPr txBox="1"/>
+          <p:nvPr/>
+        </p:nvSpPr>
+        <p:spPr>
+          <a:xfrm>
+            <a:off x="7644383" y="2048256"/>
             <a:ext cx="3474720" cy="219456"/>
           </a:xfrm>
           <a:prstGeom prst="rect">
@@ -45614,20 +46628,20 @@
               </a:defRPr>
             </a:pPr>
             <a:r>
-              <a:t>Justin Wilson</a:t>
-            </a:r>
-          </a:p>
-        </p:txBody>
-      </p:sp>
-      <p:sp>
-        <p:nvSpPr>
-          <p:cNvPr id="112" name="TextBox 111"/>
-          <p:cNvSpPr txBox="1"/>
-          <p:nvPr/>
-        </p:nvSpPr>
-        <p:spPr>
-          <a:xfrm>
-            <a:off x="5056631" y="5852159"/>
+              <a:t>USA SPECIALTY INSURANCE/DBA PREVENTTY</a:t>
+            </a:r>
+          </a:p>
+        </p:txBody>
+      </p:sp>
+      <p:sp>
+        <p:nvSpPr>
+          <p:cNvPr id="139" name="TextBox 138"/>
+          <p:cNvSpPr txBox="1"/>
+          <p:nvPr/>
+        </p:nvSpPr>
+        <p:spPr>
+          <a:xfrm>
+            <a:off x="11119104" y="2048256"/>
             <a:ext cx="914400" cy="219456"/>
           </a:xfrm>
           <a:prstGeom prst="rect">
@@ -45650,286 +46664,20 @@
               </a:defRPr>
             </a:pPr>
             <a:r>
-              <a:t>$595K</a:t>
-            </a:r>
-          </a:p>
-        </p:txBody>
-      </p:sp>
-      <p:sp>
-        <p:nvSpPr>
-          <p:cNvPr id="113" name="Rectangle 112"/>
+              <a:t>1379</a:t>
+            </a:r>
+          </a:p>
+        </p:txBody>
+      </p:sp>
+      <p:sp>
+        <p:nvSpPr>
+          <p:cNvPr id="140" name="Rectangle 139"/>
           <p:cNvSpPr/>
           <p:nvPr/>
         </p:nvSpPr>
         <p:spPr>
           <a:xfrm>
-            <a:off x="6291072" y="841248"/>
-            <a:ext cx="5779008" cy="237744"/>
-          </a:xfrm>
-          <a:prstGeom prst="rect">
-            <a:avLst/>
-          </a:prstGeom>
-          <a:solidFill>
-            <a:srgbClr val="1E073B"/>
-          </a:solidFill>
-          <a:ln>
-            <a:noFill/>
-          </a:ln>
-        </p:spPr>
-        <p:style>
-          <a:lnRef idx="1">
-            <a:schemeClr val="accent1"/>
-          </a:lnRef>
-          <a:fillRef idx="3">
-            <a:schemeClr val="accent1"/>
-          </a:fillRef>
-          <a:effectRef idx="2">
-            <a:schemeClr val="accent1"/>
-          </a:effectRef>
-          <a:fontRef idx="minor">
-            <a:schemeClr val="lt1"/>
-          </a:fontRef>
-        </p:style>
-        <p:txBody>
-          <a:bodyPr rtlCol="0" anchor="ctr"/>
-          <a:lstStyle/>
-          <a:p>
-            <a:pPr algn="ctr"/>
-          </a:p>
-        </p:txBody>
-      </p:sp>
-      <p:sp>
-        <p:nvSpPr>
-          <p:cNvPr id="114" name="TextBox 113"/>
-          <p:cNvSpPr txBox="1"/>
-          <p:nvPr/>
-        </p:nvSpPr>
-        <p:spPr>
-          <a:xfrm>
-            <a:off x="6364224" y="868680"/>
-            <a:ext cx="5742432" cy="182880"/>
-          </a:xfrm>
-          <a:prstGeom prst="rect">
-            <a:avLst/>
-          </a:prstGeom>
-          <a:noFill/>
-        </p:spPr>
-        <p:txBody>
-          <a:bodyPr wrap="square">
-            <a:spAutoFit/>
-          </a:bodyPr>
-          <a:lstStyle/>
-          <a:p>
-            <a:pPr algn="l">
-              <a:defRPr sz="900" b="1">
-                <a:solidFill>
-                  <a:srgbClr val="FFFFFF"/>
-                </a:solidFill>
-                <a:latin typeface="Calibri"/>
-              </a:defRPr>
-            </a:pPr>
-            <a:r>
-              <a:t>Top 20 Agencies — Q2 Submissions</a:t>
-            </a:r>
-          </a:p>
-        </p:txBody>
-      </p:sp>
-      <p:sp>
-        <p:nvSpPr>
-          <p:cNvPr id="115" name="TextBox 114"/>
-          <p:cNvSpPr txBox="1"/>
-          <p:nvPr/>
-        </p:nvSpPr>
-        <p:spPr>
-          <a:xfrm>
-            <a:off x="6291072" y="1097280"/>
-            <a:ext cx="347472" cy="201168"/>
-          </a:xfrm>
-          <a:prstGeom prst="rect">
-            <a:avLst/>
-          </a:prstGeom>
-          <a:noFill/>
-        </p:spPr>
-        <p:txBody>
-          <a:bodyPr wrap="square">
-            <a:spAutoFit/>
-          </a:bodyPr>
-          <a:lstStyle/>
-          <a:p>
-            <a:pPr algn="ctr">
-              <a:defRPr sz="850" b="1">
-                <a:solidFill>
-                  <a:srgbClr val="6B7280"/>
-                </a:solidFill>
-                <a:latin typeface="Calibri"/>
-              </a:defRPr>
-            </a:pPr>
-            <a:r>
-              <a:t>#</a:t>
-            </a:r>
-          </a:p>
-        </p:txBody>
-      </p:sp>
-      <p:sp>
-        <p:nvSpPr>
-          <p:cNvPr id="116" name="TextBox 115"/>
-          <p:cNvSpPr txBox="1"/>
-          <p:nvPr/>
-        </p:nvSpPr>
-        <p:spPr>
-          <a:xfrm>
-            <a:off x="6638544" y="1097280"/>
-            <a:ext cx="1005840" cy="201168"/>
-          </a:xfrm>
-          <a:prstGeom prst="rect">
-            <a:avLst/>
-          </a:prstGeom>
-          <a:noFill/>
-        </p:spPr>
-        <p:txBody>
-          <a:bodyPr wrap="square">
-            <a:spAutoFit/>
-          </a:bodyPr>
-          <a:lstStyle/>
-          <a:p>
-            <a:pPr algn="ctr">
-              <a:defRPr sz="850" b="1">
-                <a:solidFill>
-                  <a:srgbClr val="6B7280"/>
-                </a:solidFill>
-                <a:latin typeface="Calibri"/>
-              </a:defRPr>
-            </a:pPr>
-            <a:r>
-              <a:t>Rep</a:t>
-            </a:r>
-          </a:p>
-        </p:txBody>
-      </p:sp>
-      <p:sp>
-        <p:nvSpPr>
-          <p:cNvPr id="117" name="TextBox 116"/>
-          <p:cNvSpPr txBox="1"/>
-          <p:nvPr/>
-        </p:nvSpPr>
-        <p:spPr>
-          <a:xfrm>
-            <a:off x="7644383" y="1097280"/>
-            <a:ext cx="3474720" cy="201168"/>
-          </a:xfrm>
-          <a:prstGeom prst="rect">
-            <a:avLst/>
-          </a:prstGeom>
-          <a:noFill/>
-        </p:spPr>
-        <p:txBody>
-          <a:bodyPr wrap="square">
-            <a:spAutoFit/>
-          </a:bodyPr>
-          <a:lstStyle/>
-          <a:p>
-            <a:pPr algn="l">
-              <a:defRPr sz="850" b="1">
-                <a:solidFill>
-                  <a:srgbClr val="6B7280"/>
-                </a:solidFill>
-                <a:latin typeface="Calibri"/>
-              </a:defRPr>
-            </a:pPr>
-            <a:r>
-              <a:t>Agency</a:t>
-            </a:r>
-          </a:p>
-        </p:txBody>
-      </p:sp>
-      <p:sp>
-        <p:nvSpPr>
-          <p:cNvPr id="118" name="TextBox 117"/>
-          <p:cNvSpPr txBox="1"/>
-          <p:nvPr/>
-        </p:nvSpPr>
-        <p:spPr>
-          <a:xfrm>
-            <a:off x="11119104" y="1097280"/>
-            <a:ext cx="914400" cy="201168"/>
-          </a:xfrm>
-          <a:prstGeom prst="rect">
-            <a:avLst/>
-          </a:prstGeom>
-          <a:noFill/>
-        </p:spPr>
-        <p:txBody>
-          <a:bodyPr wrap="square">
-            <a:spAutoFit/>
-          </a:bodyPr>
-          <a:lstStyle/>
-          <a:p>
-            <a:pPr algn="ctr">
-              <a:defRPr sz="850" b="1">
-                <a:solidFill>
-                  <a:srgbClr val="6B7280"/>
-                </a:solidFill>
-                <a:latin typeface="Calibri"/>
-              </a:defRPr>
-            </a:pPr>
-            <a:r>
-              <a:t>Q2 Subs</a:t>
-            </a:r>
-          </a:p>
-        </p:txBody>
-      </p:sp>
-      <p:sp>
-        <p:nvSpPr>
-          <p:cNvPr id="119" name="Rectangle 118"/>
-          <p:cNvSpPr/>
-          <p:nvPr/>
-        </p:nvSpPr>
-        <p:spPr>
-          <a:xfrm>
-            <a:off x="6291072" y="1298448"/>
-            <a:ext cx="5742432" cy="9144"/>
-          </a:xfrm>
-          <a:prstGeom prst="rect">
-            <a:avLst/>
-          </a:prstGeom>
-          <a:solidFill>
-            <a:srgbClr val="E5E7EB"/>
-          </a:solidFill>
-          <a:ln>
-            <a:noFill/>
-          </a:ln>
-        </p:spPr>
-        <p:style>
-          <a:lnRef idx="1">
-            <a:schemeClr val="accent1"/>
-          </a:lnRef>
-          <a:fillRef idx="3">
-            <a:schemeClr val="accent1"/>
-          </a:fillRef>
-          <a:effectRef idx="2">
-            <a:schemeClr val="accent1"/>
-          </a:effectRef>
-          <a:fontRef idx="minor">
-            <a:schemeClr val="lt1"/>
-          </a:fontRef>
-        </p:style>
-        <p:txBody>
-          <a:bodyPr rtlCol="0" anchor="ctr"/>
-          <a:lstStyle/>
-          <a:p>
-            <a:pPr algn="ctr"/>
-          </a:p>
-        </p:txBody>
-      </p:sp>
-      <p:sp>
-        <p:nvSpPr>
-          <p:cNvPr id="120" name="Rectangle 119"/>
-          <p:cNvSpPr/>
-          <p:nvPr/>
-        </p:nvSpPr>
-        <p:spPr>
-          <a:xfrm>
-            <a:off x="6291072" y="1316736"/>
+            <a:off x="6291072" y="2267712"/>
             <a:ext cx="5742432" cy="237744"/>
           </a:xfrm>
           <a:prstGeom prst="rect">
@@ -45966,13 +46714,13 @@
       </p:sp>
       <p:sp>
         <p:nvSpPr>
-          <p:cNvPr id="121" name="TextBox 120"/>
-          <p:cNvSpPr txBox="1"/>
-          <p:nvPr/>
-        </p:nvSpPr>
-        <p:spPr>
-          <a:xfrm>
-            <a:off x="6291072" y="1335024"/>
+          <p:cNvPr id="141" name="TextBox 140"/>
+          <p:cNvSpPr txBox="1"/>
+          <p:nvPr/>
+        </p:nvSpPr>
+        <p:spPr>
+          <a:xfrm>
+            <a:off x="6291072" y="2286000"/>
             <a:ext cx="347472" cy="219456"/>
           </a:xfrm>
           <a:prstGeom prst="rect">
@@ -45995,20 +46743,20 @@
               </a:defRPr>
             </a:pPr>
             <a:r>
-              <a:t>1</a:t>
-            </a:r>
-          </a:p>
-        </p:txBody>
-      </p:sp>
-      <p:sp>
-        <p:nvSpPr>
-          <p:cNvPr id="122" name="TextBox 121"/>
-          <p:cNvSpPr txBox="1"/>
-          <p:nvPr/>
-        </p:nvSpPr>
-        <p:spPr>
-          <a:xfrm>
-            <a:off x="6638544" y="1335024"/>
+              <a:t>5</a:t>
+            </a:r>
+          </a:p>
+        </p:txBody>
+      </p:sp>
+      <p:sp>
+        <p:nvSpPr>
+          <p:cNvPr id="142" name="TextBox 141"/>
+          <p:cNvSpPr txBox="1"/>
+          <p:nvPr/>
+        </p:nvSpPr>
+        <p:spPr>
+          <a:xfrm>
+            <a:off x="6638544" y="2286000"/>
             <a:ext cx="1005840" cy="219456"/>
           </a:xfrm>
           <a:prstGeom prst="rect">
@@ -46038,13 +46786,13 @@
       </p:sp>
       <p:sp>
         <p:nvSpPr>
-          <p:cNvPr id="123" name="TextBox 122"/>
-          <p:cNvSpPr txBox="1"/>
-          <p:nvPr/>
-        </p:nvSpPr>
-        <p:spPr>
-          <a:xfrm>
-            <a:off x="7644383" y="1335024"/>
+          <p:cNvPr id="143" name="TextBox 142"/>
+          <p:cNvSpPr txBox="1"/>
+          <p:nvPr/>
+        </p:nvSpPr>
+        <p:spPr>
+          <a:xfrm>
+            <a:off x="7644383" y="2286000"/>
             <a:ext cx="3474720" cy="219456"/>
           </a:xfrm>
           <a:prstGeom prst="rect">
@@ -46067,20 +46815,20 @@
               </a:defRPr>
             </a:pPr>
             <a:r>
-              <a:t>Reliance Partners, LLC</a:t>
-            </a:r>
-          </a:p>
-        </p:txBody>
-      </p:sp>
-      <p:sp>
-        <p:nvSpPr>
-          <p:cNvPr id="124" name="TextBox 123"/>
-          <p:cNvSpPr txBox="1"/>
-          <p:nvPr/>
-        </p:nvSpPr>
-        <p:spPr>
-          <a:xfrm>
-            <a:off x="11119104" y="1335024"/>
+              <a:t>United Advantage Insurance Services</a:t>
+            </a:r>
+          </a:p>
+        </p:txBody>
+      </p:sp>
+      <p:sp>
+        <p:nvSpPr>
+          <p:cNvPr id="144" name="TextBox 143"/>
+          <p:cNvSpPr txBox="1"/>
+          <p:nvPr/>
+        </p:nvSpPr>
+        <p:spPr>
+          <a:xfrm>
+            <a:off x="11119104" y="2286000"/>
             <a:ext cx="914400" cy="219456"/>
           </a:xfrm>
           <a:prstGeom prst="rect">
@@ -46103,20 +46851,20 @@
               </a:defRPr>
             </a:pPr>
             <a:r>
-              <a:t>2283</a:t>
-            </a:r>
-          </a:p>
-        </p:txBody>
-      </p:sp>
-      <p:sp>
-        <p:nvSpPr>
-          <p:cNvPr id="125" name="Rectangle 124"/>
+              <a:t>1195</a:t>
+            </a:r>
+          </a:p>
+        </p:txBody>
+      </p:sp>
+      <p:sp>
+        <p:nvSpPr>
+          <p:cNvPr id="145" name="Rectangle 144"/>
           <p:cNvSpPr/>
           <p:nvPr/>
         </p:nvSpPr>
         <p:spPr>
           <a:xfrm>
-            <a:off x="6291072" y="1554480"/>
+            <a:off x="6291072" y="2505456"/>
             <a:ext cx="5742432" cy="237744"/>
           </a:xfrm>
           <a:prstGeom prst="rect">
@@ -46153,13 +46901,13 @@
       </p:sp>
       <p:sp>
         <p:nvSpPr>
-          <p:cNvPr id="126" name="TextBox 125"/>
-          <p:cNvSpPr txBox="1"/>
-          <p:nvPr/>
-        </p:nvSpPr>
-        <p:spPr>
-          <a:xfrm>
-            <a:off x="6291072" y="1572768"/>
+          <p:cNvPr id="146" name="TextBox 145"/>
+          <p:cNvSpPr txBox="1"/>
+          <p:nvPr/>
+        </p:nvSpPr>
+        <p:spPr>
+          <a:xfrm>
+            <a:off x="6291072" y="2523744"/>
             <a:ext cx="347472" cy="219456"/>
           </a:xfrm>
           <a:prstGeom prst="rect">
@@ -46182,20 +46930,20 @@
               </a:defRPr>
             </a:pPr>
             <a:r>
-              <a:t>2</a:t>
-            </a:r>
-          </a:p>
-        </p:txBody>
-      </p:sp>
-      <p:sp>
-        <p:nvSpPr>
-          <p:cNvPr id="127" name="TextBox 126"/>
-          <p:cNvSpPr txBox="1"/>
-          <p:nvPr/>
-        </p:nvSpPr>
-        <p:spPr>
-          <a:xfrm>
-            <a:off x="6638544" y="1572768"/>
+              <a:t>6</a:t>
+            </a:r>
+          </a:p>
+        </p:txBody>
+      </p:sp>
+      <p:sp>
+        <p:nvSpPr>
+          <p:cNvPr id="147" name="TextBox 146"/>
+          <p:cNvSpPr txBox="1"/>
+          <p:nvPr/>
+        </p:nvSpPr>
+        <p:spPr>
+          <a:xfrm>
+            <a:off x="6638544" y="2523744"/>
             <a:ext cx="1005840" cy="219456"/>
           </a:xfrm>
           <a:prstGeom prst="rect">
@@ -46218,20 +46966,20 @@
               </a:defRPr>
             </a:pPr>
             <a:r>
-              <a:t>Ron D.</a:t>
-            </a:r>
-          </a:p>
-        </p:txBody>
-      </p:sp>
-      <p:sp>
-        <p:nvSpPr>
-          <p:cNvPr id="128" name="TextBox 127"/>
-          <p:cNvSpPr txBox="1"/>
-          <p:nvPr/>
-        </p:nvSpPr>
-        <p:spPr>
-          <a:xfrm>
-            <a:off x="7644383" y="1572768"/>
+              <a:t>Derrick L.</a:t>
+            </a:r>
+          </a:p>
+        </p:txBody>
+      </p:sp>
+      <p:sp>
+        <p:nvSpPr>
+          <p:cNvPr id="148" name="TextBox 147"/>
+          <p:cNvSpPr txBox="1"/>
+          <p:nvPr/>
+        </p:nvSpPr>
+        <p:spPr>
+          <a:xfrm>
+            <a:off x="7644383" y="2523744"/>
             <a:ext cx="3474720" cy="219456"/>
           </a:xfrm>
           <a:prstGeom prst="rect">
@@ -46254,20 +47002,20 @@
               </a:defRPr>
             </a:pPr>
             <a:r>
-              <a:t>Insurance4Truckers LLC</a:t>
-            </a:r>
-          </a:p>
-        </p:txBody>
-      </p:sp>
-      <p:sp>
-        <p:nvSpPr>
-          <p:cNvPr id="129" name="TextBox 128"/>
-          <p:cNvSpPr txBox="1"/>
-          <p:nvPr/>
-        </p:nvSpPr>
-        <p:spPr>
-          <a:xfrm>
-            <a:off x="11119104" y="1572768"/>
+              <a:t>American Fleet Insurance</a:t>
+            </a:r>
+          </a:p>
+        </p:txBody>
+      </p:sp>
+      <p:sp>
+        <p:nvSpPr>
+          <p:cNvPr id="149" name="TextBox 148"/>
+          <p:cNvSpPr txBox="1"/>
+          <p:nvPr/>
+        </p:nvSpPr>
+        <p:spPr>
+          <a:xfrm>
+            <a:off x="11119104" y="2523744"/>
             <a:ext cx="914400" cy="219456"/>
           </a:xfrm>
           <a:prstGeom prst="rect">
@@ -46290,20 +47038,20 @@
               </a:defRPr>
             </a:pPr>
             <a:r>
-              <a:t>2140</a:t>
-            </a:r>
-          </a:p>
-        </p:txBody>
-      </p:sp>
-      <p:sp>
-        <p:nvSpPr>
-          <p:cNvPr id="130" name="Rectangle 129"/>
+              <a:t>1091</a:t>
+            </a:r>
+          </a:p>
+        </p:txBody>
+      </p:sp>
+      <p:sp>
+        <p:nvSpPr>
+          <p:cNvPr id="150" name="Rectangle 149"/>
           <p:cNvSpPr/>
           <p:nvPr/>
         </p:nvSpPr>
         <p:spPr>
           <a:xfrm>
-            <a:off x="6291072" y="1792224"/>
+            <a:off x="6291072" y="2743199"/>
             <a:ext cx="5742432" cy="237744"/>
           </a:xfrm>
           <a:prstGeom prst="rect">
@@ -46340,13 +47088,13 @@
       </p:sp>
       <p:sp>
         <p:nvSpPr>
-          <p:cNvPr id="131" name="TextBox 130"/>
-          <p:cNvSpPr txBox="1"/>
-          <p:nvPr/>
-        </p:nvSpPr>
-        <p:spPr>
-          <a:xfrm>
-            <a:off x="6291072" y="1810512"/>
+          <p:cNvPr id="151" name="TextBox 150"/>
+          <p:cNvSpPr txBox="1"/>
+          <p:nvPr/>
+        </p:nvSpPr>
+        <p:spPr>
+          <a:xfrm>
+            <a:off x="6291072" y="2761487"/>
             <a:ext cx="347472" cy="219456"/>
           </a:xfrm>
           <a:prstGeom prst="rect">
@@ -46369,20 +47117,20 @@
               </a:defRPr>
             </a:pPr>
             <a:r>
-              <a:t>3</a:t>
-            </a:r>
-          </a:p>
-        </p:txBody>
-      </p:sp>
-      <p:sp>
-        <p:nvSpPr>
-          <p:cNvPr id="132" name="TextBox 131"/>
-          <p:cNvSpPr txBox="1"/>
-          <p:nvPr/>
-        </p:nvSpPr>
-        <p:spPr>
-          <a:xfrm>
-            <a:off x="6638544" y="1810512"/>
+              <a:t>7</a:t>
+            </a:r>
+          </a:p>
+        </p:txBody>
+      </p:sp>
+      <p:sp>
+        <p:nvSpPr>
+          <p:cNvPr id="152" name="TextBox 151"/>
+          <p:cNvSpPr txBox="1"/>
+          <p:nvPr/>
+        </p:nvSpPr>
+        <p:spPr>
+          <a:xfrm>
+            <a:off x="6638544" y="2761487"/>
             <a:ext cx="1005840" cy="219456"/>
           </a:xfrm>
           <a:prstGeom prst="rect">
@@ -46405,20 +47153,20 @@
               </a:defRPr>
             </a:pPr>
             <a:r>
-              <a:t>Kurt B.</a:t>
-            </a:r>
-          </a:p>
-        </p:txBody>
-      </p:sp>
-      <p:sp>
-        <p:nvSpPr>
-          <p:cNvPr id="133" name="TextBox 132"/>
-          <p:cNvSpPr txBox="1"/>
-          <p:nvPr/>
-        </p:nvSpPr>
-        <p:spPr>
-          <a:xfrm>
-            <a:off x="7644383" y="1810512"/>
+              <a:t>Derrick L.</a:t>
+            </a:r>
+          </a:p>
+        </p:txBody>
+      </p:sp>
+      <p:sp>
+        <p:nvSpPr>
+          <p:cNvPr id="153" name="TextBox 152"/>
+          <p:cNvSpPr txBox="1"/>
+          <p:nvPr/>
+        </p:nvSpPr>
+        <p:spPr>
+          <a:xfrm>
+            <a:off x="7644383" y="2761487"/>
             <a:ext cx="3474720" cy="219456"/>
           </a:xfrm>
           <a:prstGeom prst="rect">
@@ -46441,20 +47189,20 @@
               </a:defRPr>
             </a:pPr>
             <a:r>
-              <a:t>Fino Services LLC</a:t>
-            </a:r>
-          </a:p>
-        </p:txBody>
-      </p:sp>
-      <p:sp>
-        <p:nvSpPr>
-          <p:cNvPr id="134" name="TextBox 133"/>
-          <p:cNvSpPr txBox="1"/>
-          <p:nvPr/>
-        </p:nvSpPr>
-        <p:spPr>
-          <a:xfrm>
-            <a:off x="11119104" y="1810512"/>
+              <a:t>AMC Agents LLC</a:t>
+            </a:r>
+          </a:p>
+        </p:txBody>
+      </p:sp>
+      <p:sp>
+        <p:nvSpPr>
+          <p:cNvPr id="154" name="TextBox 153"/>
+          <p:cNvSpPr txBox="1"/>
+          <p:nvPr/>
+        </p:nvSpPr>
+        <p:spPr>
+          <a:xfrm>
+            <a:off x="11119104" y="2761487"/>
             <a:ext cx="914400" cy="219456"/>
           </a:xfrm>
           <a:prstGeom prst="rect">
@@ -46477,20 +47225,20 @@
               </a:defRPr>
             </a:pPr>
             <a:r>
-              <a:t>1622</a:t>
-            </a:r>
-          </a:p>
-        </p:txBody>
-      </p:sp>
-      <p:sp>
-        <p:nvSpPr>
-          <p:cNvPr id="135" name="Rectangle 134"/>
+              <a:t>1078</a:t>
+            </a:r>
+          </a:p>
+        </p:txBody>
+      </p:sp>
+      <p:sp>
+        <p:nvSpPr>
+          <p:cNvPr id="155" name="Rectangle 154"/>
           <p:cNvSpPr/>
           <p:nvPr/>
         </p:nvSpPr>
         <p:spPr>
           <a:xfrm>
-            <a:off x="6291072" y="2029968"/>
+            <a:off x="6291072" y="2980943"/>
             <a:ext cx="5742432" cy="237744"/>
           </a:xfrm>
           <a:prstGeom prst="rect">
@@ -46527,13 +47275,13 @@
       </p:sp>
       <p:sp>
         <p:nvSpPr>
-          <p:cNvPr id="136" name="TextBox 135"/>
-          <p:cNvSpPr txBox="1"/>
-          <p:nvPr/>
-        </p:nvSpPr>
-        <p:spPr>
-          <a:xfrm>
-            <a:off x="6291072" y="2048256"/>
+          <p:cNvPr id="156" name="TextBox 155"/>
+          <p:cNvSpPr txBox="1"/>
+          <p:nvPr/>
+        </p:nvSpPr>
+        <p:spPr>
+          <a:xfrm>
+            <a:off x="6291072" y="2999231"/>
             <a:ext cx="347472" cy="219456"/>
           </a:xfrm>
           <a:prstGeom prst="rect">
@@ -46556,20 +47304,20 @@
               </a:defRPr>
             </a:pPr>
             <a:r>
-              <a:t>4</a:t>
-            </a:r>
-          </a:p>
-        </p:txBody>
-      </p:sp>
-      <p:sp>
-        <p:nvSpPr>
-          <p:cNvPr id="137" name="TextBox 136"/>
-          <p:cNvSpPr txBox="1"/>
-          <p:nvPr/>
-        </p:nvSpPr>
-        <p:spPr>
-          <a:xfrm>
-            <a:off x="6638544" y="2048256"/>
+              <a:t>8</a:t>
+            </a:r>
+          </a:p>
+        </p:txBody>
+      </p:sp>
+      <p:sp>
+        <p:nvSpPr>
+          <p:cNvPr id="157" name="TextBox 156"/>
+          <p:cNvSpPr txBox="1"/>
+          <p:nvPr/>
+        </p:nvSpPr>
+        <p:spPr>
+          <a:xfrm>
+            <a:off x="6638544" y="2999231"/>
             <a:ext cx="1005840" cy="219456"/>
           </a:xfrm>
           <a:prstGeom prst="rect">
@@ -46592,20 +47340,20 @@
               </a:defRPr>
             </a:pPr>
             <a:r>
-              <a:t>Ron D.</a:t>
-            </a:r>
-          </a:p>
-        </p:txBody>
-      </p:sp>
-      <p:sp>
-        <p:nvSpPr>
-          <p:cNvPr id="138" name="TextBox 137"/>
-          <p:cNvSpPr txBox="1"/>
-          <p:nvPr/>
-        </p:nvSpPr>
-        <p:spPr>
-          <a:xfrm>
-            <a:off x="7644383" y="2048256"/>
+              <a:t>Erika C.</a:t>
+            </a:r>
+          </a:p>
+        </p:txBody>
+      </p:sp>
+      <p:sp>
+        <p:nvSpPr>
+          <p:cNvPr id="158" name="TextBox 157"/>
+          <p:cNvSpPr txBox="1"/>
+          <p:nvPr/>
+        </p:nvSpPr>
+        <p:spPr>
+          <a:xfrm>
+            <a:off x="7644383" y="2999231"/>
             <a:ext cx="3474720" cy="219456"/>
           </a:xfrm>
           <a:prstGeom prst="rect">
@@ -46628,20 +47376,20 @@
               </a:defRPr>
             </a:pPr>
             <a:r>
-              <a:t>USA SPECIALTY INSURANCE/DBA PREVENTTY</a:t>
-            </a:r>
-          </a:p>
-        </p:txBody>
-      </p:sp>
-      <p:sp>
-        <p:nvSpPr>
-          <p:cNvPr id="139" name="TextBox 138"/>
-          <p:cNvSpPr txBox="1"/>
-          <p:nvPr/>
-        </p:nvSpPr>
-        <p:spPr>
-          <a:xfrm>
-            <a:off x="11119104" y="2048256"/>
+              <a:t>Cslr Insurance Services, LLC</a:t>
+            </a:r>
+          </a:p>
+        </p:txBody>
+      </p:sp>
+      <p:sp>
+        <p:nvSpPr>
+          <p:cNvPr id="159" name="TextBox 158"/>
+          <p:cNvSpPr txBox="1"/>
+          <p:nvPr/>
+        </p:nvSpPr>
+        <p:spPr>
+          <a:xfrm>
+            <a:off x="11119104" y="2999231"/>
             <a:ext cx="914400" cy="219456"/>
           </a:xfrm>
           <a:prstGeom prst="rect">
@@ -46664,20 +47412,20 @@
               </a:defRPr>
             </a:pPr>
             <a:r>
-              <a:t>1359</a:t>
-            </a:r>
-          </a:p>
-        </p:txBody>
-      </p:sp>
-      <p:sp>
-        <p:nvSpPr>
-          <p:cNvPr id="140" name="Rectangle 139"/>
+              <a:t>1002</a:t>
+            </a:r>
+          </a:p>
+        </p:txBody>
+      </p:sp>
+      <p:sp>
+        <p:nvSpPr>
+          <p:cNvPr id="160" name="Rectangle 159"/>
           <p:cNvSpPr/>
           <p:nvPr/>
         </p:nvSpPr>
         <p:spPr>
           <a:xfrm>
-            <a:off x="6291072" y="2267712"/>
+            <a:off x="6291072" y="3218687"/>
             <a:ext cx="5742432" cy="237744"/>
           </a:xfrm>
           <a:prstGeom prst="rect">
@@ -46714,13 +47462,13 @@
       </p:sp>
       <p:sp>
         <p:nvSpPr>
-          <p:cNvPr id="141" name="TextBox 140"/>
-          <p:cNvSpPr txBox="1"/>
-          <p:nvPr/>
-        </p:nvSpPr>
-        <p:spPr>
-          <a:xfrm>
-            <a:off x="6291072" y="2286000"/>
+          <p:cNvPr id="161" name="TextBox 160"/>
+          <p:cNvSpPr txBox="1"/>
+          <p:nvPr/>
+        </p:nvSpPr>
+        <p:spPr>
+          <a:xfrm>
+            <a:off x="6291072" y="3236975"/>
             <a:ext cx="347472" cy="219456"/>
           </a:xfrm>
           <a:prstGeom prst="rect">
@@ -46743,20 +47491,20 @@
               </a:defRPr>
             </a:pPr>
             <a:r>
-              <a:t>5</a:t>
-            </a:r>
-          </a:p>
-        </p:txBody>
-      </p:sp>
-      <p:sp>
-        <p:nvSpPr>
-          <p:cNvPr id="142" name="TextBox 141"/>
-          <p:cNvSpPr txBox="1"/>
-          <p:nvPr/>
-        </p:nvSpPr>
-        <p:spPr>
-          <a:xfrm>
-            <a:off x="6638544" y="2286000"/>
+              <a:t>9</a:t>
+            </a:r>
+          </a:p>
+        </p:txBody>
+      </p:sp>
+      <p:sp>
+        <p:nvSpPr>
+          <p:cNvPr id="162" name="TextBox 161"/>
+          <p:cNvSpPr txBox="1"/>
+          <p:nvPr/>
+        </p:nvSpPr>
+        <p:spPr>
+          <a:xfrm>
+            <a:off x="6638544" y="3236975"/>
             <a:ext cx="1005840" cy="219456"/>
           </a:xfrm>
           <a:prstGeom prst="rect">
@@ -46779,20 +47527,20 @@
               </a:defRPr>
             </a:pPr>
             <a:r>
-              <a:t>Derek J.</a:t>
-            </a:r>
-          </a:p>
-        </p:txBody>
-      </p:sp>
-      <p:sp>
-        <p:nvSpPr>
-          <p:cNvPr id="143" name="TextBox 142"/>
-          <p:cNvSpPr txBox="1"/>
-          <p:nvPr/>
-        </p:nvSpPr>
-        <p:spPr>
-          <a:xfrm>
-            <a:off x="7644383" y="2286000"/>
+              <a:t>Christopher H.</a:t>
+            </a:r>
+          </a:p>
+        </p:txBody>
+      </p:sp>
+      <p:sp>
+        <p:nvSpPr>
+          <p:cNvPr id="163" name="TextBox 162"/>
+          <p:cNvSpPr txBox="1"/>
+          <p:nvPr/>
+        </p:nvSpPr>
+        <p:spPr>
+          <a:xfrm>
+            <a:off x="7644383" y="3236975"/>
             <a:ext cx="3474720" cy="219456"/>
           </a:xfrm>
           <a:prstGeom prst="rect">
@@ -46815,20 +47563,20 @@
               </a:defRPr>
             </a:pPr>
             <a:r>
-              <a:t>United Advantage Insurance Services</a:t>
-            </a:r>
-          </a:p>
-        </p:txBody>
-      </p:sp>
-      <p:sp>
-        <p:nvSpPr>
-          <p:cNvPr id="144" name="TextBox 143"/>
-          <p:cNvSpPr txBox="1"/>
-          <p:nvPr/>
-        </p:nvSpPr>
-        <p:spPr>
-          <a:xfrm>
-            <a:off x="11119104" y="2286000"/>
+              <a:t>DNIS Inc.</a:t>
+            </a:r>
+          </a:p>
+        </p:txBody>
+      </p:sp>
+      <p:sp>
+        <p:nvSpPr>
+          <p:cNvPr id="164" name="TextBox 163"/>
+          <p:cNvSpPr txBox="1"/>
+          <p:nvPr/>
+        </p:nvSpPr>
+        <p:spPr>
+          <a:xfrm>
+            <a:off x="11119104" y="3236975"/>
             <a:ext cx="914400" cy="219456"/>
           </a:xfrm>
           <a:prstGeom prst="rect">
@@ -46851,20 +47599,20 @@
               </a:defRPr>
             </a:pPr>
             <a:r>
-              <a:t>1185</a:t>
-            </a:r>
-          </a:p>
-        </p:txBody>
-      </p:sp>
-      <p:sp>
-        <p:nvSpPr>
-          <p:cNvPr id="145" name="Rectangle 144"/>
+              <a:t>726</a:t>
+            </a:r>
+          </a:p>
+        </p:txBody>
+      </p:sp>
+      <p:sp>
+        <p:nvSpPr>
+          <p:cNvPr id="165" name="Rectangle 164"/>
           <p:cNvSpPr/>
           <p:nvPr/>
         </p:nvSpPr>
         <p:spPr>
           <a:xfrm>
-            <a:off x="6291072" y="2505456"/>
+            <a:off x="6291072" y="3456431"/>
             <a:ext cx="5742432" cy="237744"/>
           </a:xfrm>
           <a:prstGeom prst="rect">
@@ -46901,13 +47649,13 @@
       </p:sp>
       <p:sp>
         <p:nvSpPr>
-          <p:cNvPr id="146" name="TextBox 145"/>
-          <p:cNvSpPr txBox="1"/>
-          <p:nvPr/>
-        </p:nvSpPr>
-        <p:spPr>
-          <a:xfrm>
-            <a:off x="6291072" y="2523744"/>
+          <p:cNvPr id="166" name="TextBox 165"/>
+          <p:cNvSpPr txBox="1"/>
+          <p:nvPr/>
+        </p:nvSpPr>
+        <p:spPr>
+          <a:xfrm>
+            <a:off x="6291072" y="3474719"/>
             <a:ext cx="347472" cy="219456"/>
           </a:xfrm>
           <a:prstGeom prst="rect">
@@ -46930,20 +47678,20 @@
               </a:defRPr>
             </a:pPr>
             <a:r>
-              <a:t>6</a:t>
-            </a:r>
-          </a:p>
-        </p:txBody>
-      </p:sp>
-      <p:sp>
-        <p:nvSpPr>
-          <p:cNvPr id="147" name="TextBox 146"/>
-          <p:cNvSpPr txBox="1"/>
-          <p:nvPr/>
-        </p:nvSpPr>
-        <p:spPr>
-          <a:xfrm>
-            <a:off x="6638544" y="2523744"/>
+              <a:t>10</a:t>
+            </a:r>
+          </a:p>
+        </p:txBody>
+      </p:sp>
+      <p:sp>
+        <p:nvSpPr>
+          <p:cNvPr id="167" name="TextBox 166"/>
+          <p:cNvSpPr txBox="1"/>
+          <p:nvPr/>
+        </p:nvSpPr>
+        <p:spPr>
+          <a:xfrm>
+            <a:off x="6638544" y="3474719"/>
             <a:ext cx="1005840" cy="219456"/>
           </a:xfrm>
           <a:prstGeom prst="rect">
@@ -46966,20 +47714,20 @@
               </a:defRPr>
             </a:pPr>
             <a:r>
-              <a:t>Derrick L.</a:t>
-            </a:r>
-          </a:p>
-        </p:txBody>
-      </p:sp>
-      <p:sp>
-        <p:nvSpPr>
-          <p:cNvPr id="148" name="TextBox 147"/>
-          <p:cNvSpPr txBox="1"/>
-          <p:nvPr/>
-        </p:nvSpPr>
-        <p:spPr>
-          <a:xfrm>
-            <a:off x="7644383" y="2523744"/>
+              <a:t>Ron D.</a:t>
+            </a:r>
+          </a:p>
+        </p:txBody>
+      </p:sp>
+      <p:sp>
+        <p:nvSpPr>
+          <p:cNvPr id="168" name="TextBox 167"/>
+          <p:cNvSpPr txBox="1"/>
+          <p:nvPr/>
+        </p:nvSpPr>
+        <p:spPr>
+          <a:xfrm>
+            <a:off x="7644383" y="3474719"/>
             <a:ext cx="3474720" cy="219456"/>
           </a:xfrm>
           <a:prstGeom prst="rect">
@@ -47002,20 +47750,20 @@
               </a:defRPr>
             </a:pPr>
             <a:r>
-              <a:t>American Fleet Insurance</a:t>
-            </a:r>
-          </a:p>
-        </p:txBody>
-      </p:sp>
-      <p:sp>
-        <p:nvSpPr>
-          <p:cNvPr id="149" name="TextBox 148"/>
-          <p:cNvSpPr txBox="1"/>
-          <p:nvPr/>
-        </p:nvSpPr>
-        <p:spPr>
-          <a:xfrm>
-            <a:off x="11119104" y="2523744"/>
+              <a:t>Prestige International Insurance Group I…</a:t>
+            </a:r>
+          </a:p>
+        </p:txBody>
+      </p:sp>
+      <p:sp>
+        <p:nvSpPr>
+          <p:cNvPr id="169" name="TextBox 168"/>
+          <p:cNvSpPr txBox="1"/>
+          <p:nvPr/>
+        </p:nvSpPr>
+        <p:spPr>
+          <a:xfrm>
+            <a:off x="11119104" y="3474719"/>
             <a:ext cx="914400" cy="219456"/>
           </a:xfrm>
           <a:prstGeom prst="rect">
@@ -47038,20 +47786,20 @@
               </a:defRPr>
             </a:pPr>
             <a:r>
-              <a:t>1062</a:t>
-            </a:r>
-          </a:p>
-        </p:txBody>
-      </p:sp>
-      <p:sp>
-        <p:nvSpPr>
-          <p:cNvPr id="150" name="Rectangle 149"/>
+              <a:t>598</a:t>
+            </a:r>
+          </a:p>
+        </p:txBody>
+      </p:sp>
+      <p:sp>
+        <p:nvSpPr>
+          <p:cNvPr id="170" name="Rectangle 169"/>
           <p:cNvSpPr/>
           <p:nvPr/>
         </p:nvSpPr>
         <p:spPr>
           <a:xfrm>
-            <a:off x="6291072" y="2743199"/>
+            <a:off x="6291072" y="3694175"/>
             <a:ext cx="5742432" cy="237744"/>
           </a:xfrm>
           <a:prstGeom prst="rect">
@@ -47088,13 +47836,13 @@
       </p:sp>
       <p:sp>
         <p:nvSpPr>
-          <p:cNvPr id="151" name="TextBox 150"/>
-          <p:cNvSpPr txBox="1"/>
-          <p:nvPr/>
-        </p:nvSpPr>
-        <p:spPr>
-          <a:xfrm>
-            <a:off x="6291072" y="2761487"/>
+          <p:cNvPr id="171" name="TextBox 170"/>
+          <p:cNvSpPr txBox="1"/>
+          <p:nvPr/>
+        </p:nvSpPr>
+        <p:spPr>
+          <a:xfrm>
+            <a:off x="6291072" y="3712463"/>
             <a:ext cx="347472" cy="219456"/>
           </a:xfrm>
           <a:prstGeom prst="rect">
@@ -47117,20 +47865,20 @@
               </a:defRPr>
             </a:pPr>
             <a:r>
-              <a:t>7</a:t>
-            </a:r>
-          </a:p>
-        </p:txBody>
-      </p:sp>
-      <p:sp>
-        <p:nvSpPr>
-          <p:cNvPr id="152" name="TextBox 151"/>
-          <p:cNvSpPr txBox="1"/>
-          <p:nvPr/>
-        </p:nvSpPr>
-        <p:spPr>
-          <a:xfrm>
-            <a:off x="6638544" y="2761487"/>
+              <a:t>11</a:t>
+            </a:r>
+          </a:p>
+        </p:txBody>
+      </p:sp>
+      <p:sp>
+        <p:nvSpPr>
+          <p:cNvPr id="172" name="TextBox 171"/>
+          <p:cNvSpPr txBox="1"/>
+          <p:nvPr/>
+        </p:nvSpPr>
+        <p:spPr>
+          <a:xfrm>
+            <a:off x="6638544" y="3712463"/>
             <a:ext cx="1005840" cy="219456"/>
           </a:xfrm>
           <a:prstGeom prst="rect">
@@ -47153,20 +47901,20 @@
               </a:defRPr>
             </a:pPr>
             <a:r>
-              <a:t>Derrick L.</a:t>
-            </a:r>
-          </a:p>
-        </p:txBody>
-      </p:sp>
-      <p:sp>
-        <p:nvSpPr>
-          <p:cNvPr id="153" name="TextBox 152"/>
-          <p:cNvSpPr txBox="1"/>
-          <p:nvPr/>
-        </p:nvSpPr>
-        <p:spPr>
-          <a:xfrm>
-            <a:off x="7644383" y="2761487"/>
+              <a:t>Derek J.</a:t>
+            </a:r>
+          </a:p>
+        </p:txBody>
+      </p:sp>
+      <p:sp>
+        <p:nvSpPr>
+          <p:cNvPr id="173" name="TextBox 172"/>
+          <p:cNvSpPr txBox="1"/>
+          <p:nvPr/>
+        </p:nvSpPr>
+        <p:spPr>
+          <a:xfrm>
+            <a:off x="7644383" y="3712463"/>
             <a:ext cx="3474720" cy="219456"/>
           </a:xfrm>
           <a:prstGeom prst="rect">
@@ -47189,20 +47937,20 @@
               </a:defRPr>
             </a:pPr>
             <a:r>
-              <a:t>AMC Agents LLC</a:t>
-            </a:r>
-          </a:p>
-        </p:txBody>
-      </p:sp>
-      <p:sp>
-        <p:nvSpPr>
-          <p:cNvPr id="154" name="TextBox 153"/>
-          <p:cNvSpPr txBox="1"/>
-          <p:nvPr/>
-        </p:nvSpPr>
-        <p:spPr>
-          <a:xfrm>
-            <a:off x="11119104" y="2761487"/>
+              <a:t>Jagdeep Singh Insurance Agency, Inc</a:t>
+            </a:r>
+          </a:p>
+        </p:txBody>
+      </p:sp>
+      <p:sp>
+        <p:nvSpPr>
+          <p:cNvPr id="174" name="TextBox 173"/>
+          <p:cNvSpPr txBox="1"/>
+          <p:nvPr/>
+        </p:nvSpPr>
+        <p:spPr>
+          <a:xfrm>
+            <a:off x="11119104" y="3712463"/>
             <a:ext cx="914400" cy="219456"/>
           </a:xfrm>
           <a:prstGeom prst="rect">
@@ -47225,20 +47973,20 @@
               </a:defRPr>
             </a:pPr>
             <a:r>
-              <a:t>1047</a:t>
-            </a:r>
-          </a:p>
-        </p:txBody>
-      </p:sp>
-      <p:sp>
-        <p:nvSpPr>
-          <p:cNvPr id="155" name="Rectangle 154"/>
+              <a:t>553</a:t>
+            </a:r>
+          </a:p>
+        </p:txBody>
+      </p:sp>
+      <p:sp>
+        <p:nvSpPr>
+          <p:cNvPr id="175" name="Rectangle 174"/>
           <p:cNvSpPr/>
           <p:nvPr/>
         </p:nvSpPr>
         <p:spPr>
           <a:xfrm>
-            <a:off x="6291072" y="2980943"/>
+            <a:off x="6291072" y="3931919"/>
             <a:ext cx="5742432" cy="237744"/>
           </a:xfrm>
           <a:prstGeom prst="rect">
@@ -47275,13 +48023,13 @@
       </p:sp>
       <p:sp>
         <p:nvSpPr>
-          <p:cNvPr id="156" name="TextBox 155"/>
-          <p:cNvSpPr txBox="1"/>
-          <p:nvPr/>
-        </p:nvSpPr>
-        <p:spPr>
-          <a:xfrm>
-            <a:off x="6291072" y="2999231"/>
+          <p:cNvPr id="176" name="TextBox 175"/>
+          <p:cNvSpPr txBox="1"/>
+          <p:nvPr/>
+        </p:nvSpPr>
+        <p:spPr>
+          <a:xfrm>
+            <a:off x="6291072" y="3950207"/>
             <a:ext cx="347472" cy="219456"/>
           </a:xfrm>
           <a:prstGeom prst="rect">
@@ -47304,20 +48052,20 @@
               </a:defRPr>
             </a:pPr>
             <a:r>
-              <a:t>8</a:t>
-            </a:r>
-          </a:p>
-        </p:txBody>
-      </p:sp>
-      <p:sp>
-        <p:nvSpPr>
-          <p:cNvPr id="157" name="TextBox 156"/>
-          <p:cNvSpPr txBox="1"/>
-          <p:nvPr/>
-        </p:nvSpPr>
-        <p:spPr>
-          <a:xfrm>
-            <a:off x="6638544" y="2999231"/>
+              <a:t>12</a:t>
+            </a:r>
+          </a:p>
+        </p:txBody>
+      </p:sp>
+      <p:sp>
+        <p:nvSpPr>
+          <p:cNvPr id="177" name="TextBox 176"/>
+          <p:cNvSpPr txBox="1"/>
+          <p:nvPr/>
+        </p:nvSpPr>
+        <p:spPr>
+          <a:xfrm>
+            <a:off x="6638544" y="3950207"/>
             <a:ext cx="1005840" cy="219456"/>
           </a:xfrm>
           <a:prstGeom prst="rect">
@@ -47340,20 +48088,20 @@
               </a:defRPr>
             </a:pPr>
             <a:r>
-              <a:t>Erika C.</a:t>
-            </a:r>
-          </a:p>
-        </p:txBody>
-      </p:sp>
-      <p:sp>
-        <p:nvSpPr>
-          <p:cNvPr id="158" name="TextBox 157"/>
-          <p:cNvSpPr txBox="1"/>
-          <p:nvPr/>
-        </p:nvSpPr>
-        <p:spPr>
-          <a:xfrm>
-            <a:off x="7644383" y="2999231"/>
+              <a:t>Kurt B.</a:t>
+            </a:r>
+          </a:p>
+        </p:txBody>
+      </p:sp>
+      <p:sp>
+        <p:nvSpPr>
+          <p:cNvPr id="178" name="TextBox 177"/>
+          <p:cNvSpPr txBox="1"/>
+          <p:nvPr/>
+        </p:nvSpPr>
+        <p:spPr>
+          <a:xfrm>
+            <a:off x="7644383" y="3950207"/>
             <a:ext cx="3474720" cy="219456"/>
           </a:xfrm>
           <a:prstGeom prst="rect">
@@ -47376,20 +48124,20 @@
               </a:defRPr>
             </a:pPr>
             <a:r>
-              <a:t>Cslr Insurance Services, LLC</a:t>
-            </a:r>
-          </a:p>
-        </p:txBody>
-      </p:sp>
-      <p:sp>
-        <p:nvSpPr>
-          <p:cNvPr id="159" name="TextBox 158"/>
-          <p:cNvSpPr txBox="1"/>
-          <p:nvPr/>
-        </p:nvSpPr>
-        <p:spPr>
-          <a:xfrm>
-            <a:off x="11119104" y="2999231"/>
+              <a:t>Justin Robert Insurance Agency LLC</a:t>
+            </a:r>
+          </a:p>
+        </p:txBody>
+      </p:sp>
+      <p:sp>
+        <p:nvSpPr>
+          <p:cNvPr id="179" name="TextBox 178"/>
+          <p:cNvSpPr txBox="1"/>
+          <p:nvPr/>
+        </p:nvSpPr>
+        <p:spPr>
+          <a:xfrm>
+            <a:off x="11119104" y="3950207"/>
             <a:ext cx="914400" cy="219456"/>
           </a:xfrm>
           <a:prstGeom prst="rect">
@@ -47412,20 +48160,20 @@
               </a:defRPr>
             </a:pPr>
             <a:r>
-              <a:t>977</a:t>
-            </a:r>
-          </a:p>
-        </p:txBody>
-      </p:sp>
-      <p:sp>
-        <p:nvSpPr>
-          <p:cNvPr id="160" name="Rectangle 159"/>
+              <a:t>534</a:t>
+            </a:r>
+          </a:p>
+        </p:txBody>
+      </p:sp>
+      <p:sp>
+        <p:nvSpPr>
+          <p:cNvPr id="180" name="Rectangle 179"/>
           <p:cNvSpPr/>
           <p:nvPr/>
         </p:nvSpPr>
         <p:spPr>
           <a:xfrm>
-            <a:off x="6291072" y="3218687"/>
+            <a:off x="6291072" y="4169663"/>
             <a:ext cx="5742432" cy="237744"/>
           </a:xfrm>
           <a:prstGeom prst="rect">
@@ -47462,13 +48210,13 @@
       </p:sp>
       <p:sp>
         <p:nvSpPr>
-          <p:cNvPr id="161" name="TextBox 160"/>
-          <p:cNvSpPr txBox="1"/>
-          <p:nvPr/>
-        </p:nvSpPr>
-        <p:spPr>
-          <a:xfrm>
-            <a:off x="6291072" y="3236975"/>
+          <p:cNvPr id="181" name="TextBox 180"/>
+          <p:cNvSpPr txBox="1"/>
+          <p:nvPr/>
+        </p:nvSpPr>
+        <p:spPr>
+          <a:xfrm>
+            <a:off x="6291072" y="4187951"/>
             <a:ext cx="347472" cy="219456"/>
           </a:xfrm>
           <a:prstGeom prst="rect">
@@ -47491,20 +48239,20 @@
               </a:defRPr>
             </a:pPr>
             <a:r>
-              <a:t>9</a:t>
-            </a:r>
-          </a:p>
-        </p:txBody>
-      </p:sp>
-      <p:sp>
-        <p:nvSpPr>
-          <p:cNvPr id="162" name="TextBox 161"/>
-          <p:cNvSpPr txBox="1"/>
-          <p:nvPr/>
-        </p:nvSpPr>
-        <p:spPr>
-          <a:xfrm>
-            <a:off x="6638544" y="3236975"/>
+              <a:t>13</a:t>
+            </a:r>
+          </a:p>
+        </p:txBody>
+      </p:sp>
+      <p:sp>
+        <p:nvSpPr>
+          <p:cNvPr id="182" name="TextBox 181"/>
+          <p:cNvSpPr txBox="1"/>
+          <p:nvPr/>
+        </p:nvSpPr>
+        <p:spPr>
+          <a:xfrm>
+            <a:off x="6638544" y="4187951"/>
             <a:ext cx="1005840" cy="219456"/>
           </a:xfrm>
           <a:prstGeom prst="rect">
@@ -47527,20 +48275,20 @@
               </a:defRPr>
             </a:pPr>
             <a:r>
-              <a:t>Christopher H.</a:t>
-            </a:r>
-          </a:p>
-        </p:txBody>
-      </p:sp>
-      <p:sp>
-        <p:nvSpPr>
-          <p:cNvPr id="163" name="TextBox 162"/>
-          <p:cNvSpPr txBox="1"/>
-          <p:nvPr/>
-        </p:nvSpPr>
-        <p:spPr>
-          <a:xfrm>
-            <a:off x="7644383" y="3236975"/>
+              <a:t>Erika C.</a:t>
+            </a:r>
+          </a:p>
+        </p:txBody>
+      </p:sp>
+      <p:sp>
+        <p:nvSpPr>
+          <p:cNvPr id="183" name="TextBox 182"/>
+          <p:cNvSpPr txBox="1"/>
+          <p:nvPr/>
+        </p:nvSpPr>
+        <p:spPr>
+          <a:xfrm>
+            <a:off x="7644383" y="4187951"/>
             <a:ext cx="3474720" cy="219456"/>
           </a:xfrm>
           <a:prstGeom prst="rect">
@@ -47563,20 +48311,20 @@
               </a:defRPr>
             </a:pPr>
             <a:r>
-              <a:t>DNIS Inc.</a:t>
-            </a:r>
-          </a:p>
-        </p:txBody>
-      </p:sp>
-      <p:sp>
-        <p:nvSpPr>
-          <p:cNvPr id="164" name="TextBox 163"/>
-          <p:cNvSpPr txBox="1"/>
-          <p:nvPr/>
-        </p:nvSpPr>
-        <p:spPr>
-          <a:xfrm>
-            <a:off x="11119104" y="3236975"/>
+              <a:t>Truckers Best Insurance dba Trucker Path…</a:t>
+            </a:r>
+          </a:p>
+        </p:txBody>
+      </p:sp>
+      <p:sp>
+        <p:nvSpPr>
+          <p:cNvPr id="184" name="TextBox 183"/>
+          <p:cNvSpPr txBox="1"/>
+          <p:nvPr/>
+        </p:nvSpPr>
+        <p:spPr>
+          <a:xfrm>
+            <a:off x="11119104" y="4187951"/>
             <a:ext cx="914400" cy="219456"/>
           </a:xfrm>
           <a:prstGeom prst="rect">
@@ -47599,20 +48347,20 @@
               </a:defRPr>
             </a:pPr>
             <a:r>
-              <a:t>717</a:t>
-            </a:r>
-          </a:p>
-        </p:txBody>
-      </p:sp>
-      <p:sp>
-        <p:nvSpPr>
-          <p:cNvPr id="165" name="Rectangle 164"/>
+              <a:t>478</a:t>
+            </a:r>
+          </a:p>
+        </p:txBody>
+      </p:sp>
+      <p:sp>
+        <p:nvSpPr>
+          <p:cNvPr id="185" name="Rectangle 184"/>
           <p:cNvSpPr/>
           <p:nvPr/>
         </p:nvSpPr>
         <p:spPr>
           <a:xfrm>
-            <a:off x="6291072" y="3456431"/>
+            <a:off x="6291072" y="4407407"/>
             <a:ext cx="5742432" cy="237744"/>
           </a:xfrm>
           <a:prstGeom prst="rect">
@@ -47649,13 +48397,13 @@
       </p:sp>
       <p:sp>
         <p:nvSpPr>
-          <p:cNvPr id="166" name="TextBox 165"/>
-          <p:cNvSpPr txBox="1"/>
-          <p:nvPr/>
-        </p:nvSpPr>
-        <p:spPr>
-          <a:xfrm>
-            <a:off x="6291072" y="3474719"/>
+          <p:cNvPr id="186" name="TextBox 185"/>
+          <p:cNvSpPr txBox="1"/>
+          <p:nvPr/>
+        </p:nvSpPr>
+        <p:spPr>
+          <a:xfrm>
+            <a:off x="6291072" y="4425695"/>
             <a:ext cx="347472" cy="219456"/>
           </a:xfrm>
           <a:prstGeom prst="rect">
@@ -47678,20 +48426,20 @@
               </a:defRPr>
             </a:pPr>
             <a:r>
-              <a:t>10</a:t>
-            </a:r>
-          </a:p>
-        </p:txBody>
-      </p:sp>
-      <p:sp>
-        <p:nvSpPr>
-          <p:cNvPr id="167" name="TextBox 166"/>
-          <p:cNvSpPr txBox="1"/>
-          <p:nvPr/>
-        </p:nvSpPr>
-        <p:spPr>
-          <a:xfrm>
-            <a:off x="6638544" y="3474719"/>
+              <a:t>14</a:t>
+            </a:r>
+          </a:p>
+        </p:txBody>
+      </p:sp>
+      <p:sp>
+        <p:nvSpPr>
+          <p:cNvPr id="187" name="TextBox 186"/>
+          <p:cNvSpPr txBox="1"/>
+          <p:nvPr/>
+        </p:nvSpPr>
+        <p:spPr>
+          <a:xfrm>
+            <a:off x="6638544" y="4425695"/>
             <a:ext cx="1005840" cy="219456"/>
           </a:xfrm>
           <a:prstGeom prst="rect">
@@ -47714,20 +48462,20 @@
               </a:defRPr>
             </a:pPr>
             <a:r>
-              <a:t>Ron D.</a:t>
-            </a:r>
-          </a:p>
-        </p:txBody>
-      </p:sp>
-      <p:sp>
-        <p:nvSpPr>
-          <p:cNvPr id="168" name="TextBox 167"/>
-          <p:cNvSpPr txBox="1"/>
-          <p:nvPr/>
-        </p:nvSpPr>
-        <p:spPr>
-          <a:xfrm>
-            <a:off x="7644383" y="3474719"/>
+              <a:t>Alexis B.</a:t>
+            </a:r>
+          </a:p>
+        </p:txBody>
+      </p:sp>
+      <p:sp>
+        <p:nvSpPr>
+          <p:cNvPr id="188" name="TextBox 187"/>
+          <p:cNvSpPr txBox="1"/>
+          <p:nvPr/>
+        </p:nvSpPr>
+        <p:spPr>
+          <a:xfrm>
+            <a:off x="7644383" y="4425695"/>
             <a:ext cx="3474720" cy="219456"/>
           </a:xfrm>
           <a:prstGeom prst="rect">
@@ -47750,20 +48498,20 @@
               </a:defRPr>
             </a:pPr>
             <a:r>
-              <a:t>Prestige International Insurance Group I…</a:t>
-            </a:r>
-          </a:p>
-        </p:txBody>
-      </p:sp>
-      <p:sp>
-        <p:nvSpPr>
-          <p:cNvPr id="169" name="TextBox 168"/>
-          <p:cNvSpPr txBox="1"/>
-          <p:nvPr/>
-        </p:nvSpPr>
-        <p:spPr>
-          <a:xfrm>
-            <a:off x="11119104" y="3474719"/>
+              <a:t>A.S.I.A Inc</a:t>
+            </a:r>
+          </a:p>
+        </p:txBody>
+      </p:sp>
+      <p:sp>
+        <p:nvSpPr>
+          <p:cNvPr id="189" name="TextBox 188"/>
+          <p:cNvSpPr txBox="1"/>
+          <p:nvPr/>
+        </p:nvSpPr>
+        <p:spPr>
+          <a:xfrm>
+            <a:off x="11119104" y="4425695"/>
             <a:ext cx="914400" cy="219456"/>
           </a:xfrm>
           <a:prstGeom prst="rect">
@@ -47786,20 +48534,20 @@
               </a:defRPr>
             </a:pPr>
             <a:r>
-              <a:t>582</a:t>
-            </a:r>
-          </a:p>
-        </p:txBody>
-      </p:sp>
-      <p:sp>
-        <p:nvSpPr>
-          <p:cNvPr id="170" name="Rectangle 169"/>
+              <a:t>474</a:t>
+            </a:r>
+          </a:p>
+        </p:txBody>
+      </p:sp>
+      <p:sp>
+        <p:nvSpPr>
+          <p:cNvPr id="190" name="Rectangle 189"/>
           <p:cNvSpPr/>
           <p:nvPr/>
         </p:nvSpPr>
         <p:spPr>
           <a:xfrm>
-            <a:off x="6291072" y="3694175"/>
+            <a:off x="6291072" y="4645151"/>
             <a:ext cx="5742432" cy="237744"/>
           </a:xfrm>
           <a:prstGeom prst="rect">
@@ -47836,13 +48584,13 @@
       </p:sp>
       <p:sp>
         <p:nvSpPr>
-          <p:cNvPr id="171" name="TextBox 170"/>
-          <p:cNvSpPr txBox="1"/>
-          <p:nvPr/>
-        </p:nvSpPr>
-        <p:spPr>
-          <a:xfrm>
-            <a:off x="6291072" y="3712463"/>
+          <p:cNvPr id="191" name="TextBox 190"/>
+          <p:cNvSpPr txBox="1"/>
+          <p:nvPr/>
+        </p:nvSpPr>
+        <p:spPr>
+          <a:xfrm>
+            <a:off x="6291072" y="4663439"/>
             <a:ext cx="347472" cy="219456"/>
           </a:xfrm>
           <a:prstGeom prst="rect">
@@ -47865,20 +48613,20 @@
               </a:defRPr>
             </a:pPr>
             <a:r>
-              <a:t>11</a:t>
-            </a:r>
-          </a:p>
-        </p:txBody>
-      </p:sp>
-      <p:sp>
-        <p:nvSpPr>
-          <p:cNvPr id="172" name="TextBox 171"/>
-          <p:cNvSpPr txBox="1"/>
-          <p:nvPr/>
-        </p:nvSpPr>
-        <p:spPr>
-          <a:xfrm>
-            <a:off x="6638544" y="3712463"/>
+              <a:t>15</a:t>
+            </a:r>
+          </a:p>
+        </p:txBody>
+      </p:sp>
+      <p:sp>
+        <p:nvSpPr>
+          <p:cNvPr id="192" name="TextBox 191"/>
+          <p:cNvSpPr txBox="1"/>
+          <p:nvPr/>
+        </p:nvSpPr>
+        <p:spPr>
+          <a:xfrm>
+            <a:off x="6638544" y="4663439"/>
             <a:ext cx="1005840" cy="219456"/>
           </a:xfrm>
           <a:prstGeom prst="rect">
@@ -47908,13 +48656,13 @@
       </p:sp>
       <p:sp>
         <p:nvSpPr>
-          <p:cNvPr id="173" name="TextBox 172"/>
-          <p:cNvSpPr txBox="1"/>
-          <p:nvPr/>
-        </p:nvSpPr>
-        <p:spPr>
-          <a:xfrm>
-            <a:off x="7644383" y="3712463"/>
+          <p:cNvPr id="193" name="TextBox 192"/>
+          <p:cNvSpPr txBox="1"/>
+          <p:nvPr/>
+        </p:nvSpPr>
+        <p:spPr>
+          <a:xfrm>
+            <a:off x="7644383" y="4663439"/>
             <a:ext cx="3474720" cy="219456"/>
           </a:xfrm>
           <a:prstGeom prst="rect">
@@ -47937,20 +48685,20 @@
               </a:defRPr>
             </a:pPr>
             <a:r>
-              <a:t>Jagdeep Singh Insurance Agency, Inc</a:t>
-            </a:r>
-          </a:p>
-        </p:txBody>
-      </p:sp>
-      <p:sp>
-        <p:nvSpPr>
-          <p:cNvPr id="174" name="TextBox 173"/>
-          <p:cNvSpPr txBox="1"/>
-          <p:nvPr/>
-        </p:nvSpPr>
-        <p:spPr>
-          <a:xfrm>
-            <a:off x="11119104" y="3712463"/>
+              <a:t>Ewall Insurance Company</a:t>
+            </a:r>
+          </a:p>
+        </p:txBody>
+      </p:sp>
+      <p:sp>
+        <p:nvSpPr>
+          <p:cNvPr id="194" name="TextBox 193"/>
+          <p:cNvSpPr txBox="1"/>
+          <p:nvPr/>
+        </p:nvSpPr>
+        <p:spPr>
+          <a:xfrm>
+            <a:off x="11119104" y="4663439"/>
             <a:ext cx="914400" cy="219456"/>
           </a:xfrm>
           <a:prstGeom prst="rect">
@@ -47973,20 +48721,20 @@
               </a:defRPr>
             </a:pPr>
             <a:r>
-              <a:t>540</a:t>
-            </a:r>
-          </a:p>
-        </p:txBody>
-      </p:sp>
-      <p:sp>
-        <p:nvSpPr>
-          <p:cNvPr id="175" name="Rectangle 174"/>
+              <a:t>404</a:t>
+            </a:r>
+          </a:p>
+        </p:txBody>
+      </p:sp>
+      <p:sp>
+        <p:nvSpPr>
+          <p:cNvPr id="195" name="Rectangle 194"/>
           <p:cNvSpPr/>
           <p:nvPr/>
         </p:nvSpPr>
         <p:spPr>
           <a:xfrm>
-            <a:off x="6291072" y="3931919"/>
+            <a:off x="6291072" y="4882895"/>
             <a:ext cx="5742432" cy="237744"/>
           </a:xfrm>
           <a:prstGeom prst="rect">
@@ -48023,13 +48771,13 @@
       </p:sp>
       <p:sp>
         <p:nvSpPr>
-          <p:cNvPr id="176" name="TextBox 175"/>
-          <p:cNvSpPr txBox="1"/>
-          <p:nvPr/>
-        </p:nvSpPr>
-        <p:spPr>
-          <a:xfrm>
-            <a:off x="6291072" y="3950207"/>
+          <p:cNvPr id="196" name="TextBox 195"/>
+          <p:cNvSpPr txBox="1"/>
+          <p:nvPr/>
+        </p:nvSpPr>
+        <p:spPr>
+          <a:xfrm>
+            <a:off x="6291072" y="4901183"/>
             <a:ext cx="347472" cy="219456"/>
           </a:xfrm>
           <a:prstGeom prst="rect">
@@ -48052,20 +48800,20 @@
               </a:defRPr>
             </a:pPr>
             <a:r>
-              <a:t>12</a:t>
-            </a:r>
-          </a:p>
-        </p:txBody>
-      </p:sp>
-      <p:sp>
-        <p:nvSpPr>
-          <p:cNvPr id="177" name="TextBox 176"/>
-          <p:cNvSpPr txBox="1"/>
-          <p:nvPr/>
-        </p:nvSpPr>
-        <p:spPr>
-          <a:xfrm>
-            <a:off x="6638544" y="3950207"/>
+              <a:t>16</a:t>
+            </a:r>
+          </a:p>
+        </p:txBody>
+      </p:sp>
+      <p:sp>
+        <p:nvSpPr>
+          <p:cNvPr id="197" name="TextBox 196"/>
+          <p:cNvSpPr txBox="1"/>
+          <p:nvPr/>
+        </p:nvSpPr>
+        <p:spPr>
+          <a:xfrm>
+            <a:off x="6638544" y="4901183"/>
             <a:ext cx="1005840" cy="219456"/>
           </a:xfrm>
           <a:prstGeom prst="rect">
@@ -48095,13 +48843,13 @@
       </p:sp>
       <p:sp>
         <p:nvSpPr>
-          <p:cNvPr id="178" name="TextBox 177"/>
-          <p:cNvSpPr txBox="1"/>
-          <p:nvPr/>
-        </p:nvSpPr>
-        <p:spPr>
-          <a:xfrm>
-            <a:off x="7644383" y="3950207"/>
+          <p:cNvPr id="198" name="TextBox 197"/>
+          <p:cNvSpPr txBox="1"/>
+          <p:nvPr/>
+        </p:nvSpPr>
+        <p:spPr>
+          <a:xfrm>
+            <a:off x="7644383" y="4901183"/>
             <a:ext cx="3474720" cy="219456"/>
           </a:xfrm>
           <a:prstGeom prst="rect">
@@ -48124,20 +48872,20 @@
               </a:defRPr>
             </a:pPr>
             <a:r>
-              <a:t>Justin Robert Insurance Agency LLC</a:t>
-            </a:r>
-          </a:p>
-        </p:txBody>
-      </p:sp>
-      <p:sp>
-        <p:nvSpPr>
-          <p:cNvPr id="179" name="TextBox 178"/>
-          <p:cNvSpPr txBox="1"/>
-          <p:nvPr/>
-        </p:nvSpPr>
-        <p:spPr>
-          <a:xfrm>
-            <a:off x="11119104" y="3950207"/>
+              <a:t>Rodriguez Insurance Agency LLC</a:t>
+            </a:r>
+          </a:p>
+        </p:txBody>
+      </p:sp>
+      <p:sp>
+        <p:nvSpPr>
+          <p:cNvPr id="199" name="TextBox 198"/>
+          <p:cNvSpPr txBox="1"/>
+          <p:nvPr/>
+        </p:nvSpPr>
+        <p:spPr>
+          <a:xfrm>
+            <a:off x="11119104" y="4901183"/>
             <a:ext cx="914400" cy="219456"/>
           </a:xfrm>
           <a:prstGeom prst="rect">
@@ -48160,20 +48908,20 @@
               </a:defRPr>
             </a:pPr>
             <a:r>
-              <a:t>525</a:t>
-            </a:r>
-          </a:p>
-        </p:txBody>
-      </p:sp>
-      <p:sp>
-        <p:nvSpPr>
-          <p:cNvPr id="180" name="Rectangle 179"/>
+              <a:t>391</a:t>
+            </a:r>
+          </a:p>
+        </p:txBody>
+      </p:sp>
+      <p:sp>
+        <p:nvSpPr>
+          <p:cNvPr id="200" name="Rectangle 199"/>
           <p:cNvSpPr/>
           <p:nvPr/>
         </p:nvSpPr>
         <p:spPr>
           <a:xfrm>
-            <a:off x="6291072" y="4169663"/>
+            <a:off x="6291072" y="5120639"/>
             <a:ext cx="5742432" cy="237744"/>
           </a:xfrm>
           <a:prstGeom prst="rect">
@@ -48210,13 +48958,13 @@
       </p:sp>
       <p:sp>
         <p:nvSpPr>
-          <p:cNvPr id="181" name="TextBox 180"/>
-          <p:cNvSpPr txBox="1"/>
-          <p:nvPr/>
-        </p:nvSpPr>
-        <p:spPr>
-          <a:xfrm>
-            <a:off x="6291072" y="4187951"/>
+          <p:cNvPr id="201" name="TextBox 200"/>
+          <p:cNvSpPr txBox="1"/>
+          <p:nvPr/>
+        </p:nvSpPr>
+        <p:spPr>
+          <a:xfrm>
+            <a:off x="6291072" y="5138927"/>
             <a:ext cx="347472" cy="219456"/>
           </a:xfrm>
           <a:prstGeom prst="rect">
@@ -48239,20 +48987,20 @@
               </a:defRPr>
             </a:pPr>
             <a:r>
-              <a:t>13</a:t>
-            </a:r>
-          </a:p>
-        </p:txBody>
-      </p:sp>
-      <p:sp>
-        <p:nvSpPr>
-          <p:cNvPr id="182" name="TextBox 181"/>
-          <p:cNvSpPr txBox="1"/>
-          <p:nvPr/>
-        </p:nvSpPr>
-        <p:spPr>
-          <a:xfrm>
-            <a:off x="6638544" y="4187951"/>
+              <a:t>17</a:t>
+            </a:r>
+          </a:p>
+        </p:txBody>
+      </p:sp>
+      <p:sp>
+        <p:nvSpPr>
+          <p:cNvPr id="202" name="TextBox 201"/>
+          <p:cNvSpPr txBox="1"/>
+          <p:nvPr/>
+        </p:nvSpPr>
+        <p:spPr>
+          <a:xfrm>
+            <a:off x="6638544" y="5138927"/>
             <a:ext cx="1005840" cy="219456"/>
           </a:xfrm>
           <a:prstGeom prst="rect">
@@ -48275,20 +49023,20 @@
               </a:defRPr>
             </a:pPr>
             <a:r>
-              <a:t>Erika C.</a:t>
-            </a:r>
-          </a:p>
-        </p:txBody>
-      </p:sp>
-      <p:sp>
-        <p:nvSpPr>
-          <p:cNvPr id="183" name="TextBox 182"/>
-          <p:cNvSpPr txBox="1"/>
-          <p:nvPr/>
-        </p:nvSpPr>
-        <p:spPr>
-          <a:xfrm>
-            <a:off x="7644383" y="4187951"/>
+              <a:t>Alexis B.</a:t>
+            </a:r>
+          </a:p>
+        </p:txBody>
+      </p:sp>
+      <p:sp>
+        <p:nvSpPr>
+          <p:cNvPr id="203" name="TextBox 202"/>
+          <p:cNvSpPr txBox="1"/>
+          <p:nvPr/>
+        </p:nvSpPr>
+        <p:spPr>
+          <a:xfrm>
+            <a:off x="7644383" y="5138927"/>
             <a:ext cx="3474720" cy="219456"/>
           </a:xfrm>
           <a:prstGeom prst="rect">
@@ -48311,20 +49059,20 @@
               </a:defRPr>
             </a:pPr>
             <a:r>
-              <a:t>Truckers Best Insurance dba Trucker Path…</a:t>
-            </a:r>
-          </a:p>
-        </p:txBody>
-      </p:sp>
-      <p:sp>
-        <p:nvSpPr>
-          <p:cNvPr id="184" name="TextBox 183"/>
-          <p:cNvSpPr txBox="1"/>
-          <p:nvPr/>
-        </p:nvSpPr>
-        <p:spPr>
-          <a:xfrm>
-            <a:off x="11119104" y="4187951"/>
+              <a:t>Stellar Management, Inc</a:t>
+            </a:r>
+          </a:p>
+        </p:txBody>
+      </p:sp>
+      <p:sp>
+        <p:nvSpPr>
+          <p:cNvPr id="204" name="TextBox 203"/>
+          <p:cNvSpPr txBox="1"/>
+          <p:nvPr/>
+        </p:nvSpPr>
+        <p:spPr>
+          <a:xfrm>
+            <a:off x="11119104" y="5138927"/>
             <a:ext cx="914400" cy="219456"/>
           </a:xfrm>
           <a:prstGeom prst="rect">
@@ -48347,20 +49095,20 @@
               </a:defRPr>
             </a:pPr>
             <a:r>
-              <a:t>468</a:t>
-            </a:r>
-          </a:p>
-        </p:txBody>
-      </p:sp>
-      <p:sp>
-        <p:nvSpPr>
-          <p:cNvPr id="185" name="Rectangle 184"/>
+              <a:t>380</a:t>
+            </a:r>
+          </a:p>
+        </p:txBody>
+      </p:sp>
+      <p:sp>
+        <p:nvSpPr>
+          <p:cNvPr id="205" name="Rectangle 204"/>
           <p:cNvSpPr/>
           <p:nvPr/>
         </p:nvSpPr>
         <p:spPr>
           <a:xfrm>
-            <a:off x="6291072" y="4407407"/>
+            <a:off x="6291072" y="5358383"/>
             <a:ext cx="5742432" cy="237744"/>
           </a:xfrm>
           <a:prstGeom prst="rect">
@@ -48397,13 +49145,13 @@
       </p:sp>
       <p:sp>
         <p:nvSpPr>
-          <p:cNvPr id="186" name="TextBox 185"/>
-          <p:cNvSpPr txBox="1"/>
-          <p:nvPr/>
-        </p:nvSpPr>
-        <p:spPr>
-          <a:xfrm>
-            <a:off x="6291072" y="4425695"/>
+          <p:cNvPr id="206" name="TextBox 205"/>
+          <p:cNvSpPr txBox="1"/>
+          <p:nvPr/>
+        </p:nvSpPr>
+        <p:spPr>
+          <a:xfrm>
+            <a:off x="6291072" y="5376671"/>
             <a:ext cx="347472" cy="219456"/>
           </a:xfrm>
           <a:prstGeom prst="rect">
@@ -48426,20 +49174,20 @@
               </a:defRPr>
             </a:pPr>
             <a:r>
-              <a:t>14</a:t>
-            </a:r>
-          </a:p>
-        </p:txBody>
-      </p:sp>
-      <p:sp>
-        <p:nvSpPr>
-          <p:cNvPr id="187" name="TextBox 186"/>
-          <p:cNvSpPr txBox="1"/>
-          <p:nvPr/>
-        </p:nvSpPr>
-        <p:spPr>
-          <a:xfrm>
-            <a:off x="6638544" y="4425695"/>
+              <a:t>18</a:t>
+            </a:r>
+          </a:p>
+        </p:txBody>
+      </p:sp>
+      <p:sp>
+        <p:nvSpPr>
+          <p:cNvPr id="207" name="TextBox 206"/>
+          <p:cNvSpPr txBox="1"/>
+          <p:nvPr/>
+        </p:nvSpPr>
+        <p:spPr>
+          <a:xfrm>
+            <a:off x="6638544" y="5376671"/>
             <a:ext cx="1005840" cy="219456"/>
           </a:xfrm>
           <a:prstGeom prst="rect">
@@ -48462,20 +49210,20 @@
               </a:defRPr>
             </a:pPr>
             <a:r>
-              <a:t>Alexis B.</a:t>
-            </a:r>
-          </a:p>
-        </p:txBody>
-      </p:sp>
-      <p:sp>
-        <p:nvSpPr>
-          <p:cNvPr id="188" name="TextBox 187"/>
-          <p:cNvSpPr txBox="1"/>
-          <p:nvPr/>
-        </p:nvSpPr>
-        <p:spPr>
-          <a:xfrm>
-            <a:off x="7644383" y="4425695"/>
+              <a:t>Erika C.</a:t>
+            </a:r>
+          </a:p>
+        </p:txBody>
+      </p:sp>
+      <p:sp>
+        <p:nvSpPr>
+          <p:cNvPr id="208" name="TextBox 207"/>
+          <p:cNvSpPr txBox="1"/>
+          <p:nvPr/>
+        </p:nvSpPr>
+        <p:spPr>
+          <a:xfrm>
+            <a:off x="7644383" y="5376671"/>
             <a:ext cx="3474720" cy="219456"/>
           </a:xfrm>
           <a:prstGeom prst="rect">
@@ -48498,20 +49246,20 @@
               </a:defRPr>
             </a:pPr>
             <a:r>
-              <a:t>A.S.I.A Inc</a:t>
-            </a:r>
-          </a:p>
-        </p:txBody>
-      </p:sp>
-      <p:sp>
-        <p:nvSpPr>
-          <p:cNvPr id="189" name="TextBox 188"/>
-          <p:cNvSpPr txBox="1"/>
-          <p:nvPr/>
-        </p:nvSpPr>
-        <p:spPr>
-          <a:xfrm>
-            <a:off x="11119104" y="4425695"/>
+              <a:t>Southwestern Insurance Services, Inc.</a:t>
+            </a:r>
+          </a:p>
+        </p:txBody>
+      </p:sp>
+      <p:sp>
+        <p:nvSpPr>
+          <p:cNvPr id="209" name="TextBox 208"/>
+          <p:cNvSpPr txBox="1"/>
+          <p:nvPr/>
+        </p:nvSpPr>
+        <p:spPr>
+          <a:xfrm>
+            <a:off x="11119104" y="5376671"/>
             <a:ext cx="914400" cy="219456"/>
           </a:xfrm>
           <a:prstGeom prst="rect">
@@ -48534,20 +49282,20 @@
               </a:defRPr>
             </a:pPr>
             <a:r>
-              <a:t>467</a:t>
-            </a:r>
-          </a:p>
-        </p:txBody>
-      </p:sp>
-      <p:sp>
-        <p:nvSpPr>
-          <p:cNvPr id="190" name="Rectangle 189"/>
+              <a:t>375</a:t>
+            </a:r>
+          </a:p>
+        </p:txBody>
+      </p:sp>
+      <p:sp>
+        <p:nvSpPr>
+          <p:cNvPr id="210" name="Rectangle 209"/>
           <p:cNvSpPr/>
           <p:nvPr/>
         </p:nvSpPr>
         <p:spPr>
           <a:xfrm>
-            <a:off x="6291072" y="4645151"/>
+            <a:off x="6291072" y="5596127"/>
             <a:ext cx="5742432" cy="237744"/>
           </a:xfrm>
           <a:prstGeom prst="rect">
@@ -48584,13 +49332,13 @@
       </p:sp>
       <p:sp>
         <p:nvSpPr>
-          <p:cNvPr id="191" name="TextBox 190"/>
-          <p:cNvSpPr txBox="1"/>
-          <p:nvPr/>
-        </p:nvSpPr>
-        <p:spPr>
-          <a:xfrm>
-            <a:off x="6291072" y="4663439"/>
+          <p:cNvPr id="211" name="TextBox 210"/>
+          <p:cNvSpPr txBox="1"/>
+          <p:nvPr/>
+        </p:nvSpPr>
+        <p:spPr>
+          <a:xfrm>
+            <a:off x="6291072" y="5614415"/>
             <a:ext cx="347472" cy="219456"/>
           </a:xfrm>
           <a:prstGeom prst="rect">
@@ -48613,20 +49361,20 @@
               </a:defRPr>
             </a:pPr>
             <a:r>
-              <a:t>15</a:t>
-            </a:r>
-          </a:p>
-        </p:txBody>
-      </p:sp>
-      <p:sp>
-        <p:nvSpPr>
-          <p:cNvPr id="192" name="TextBox 191"/>
-          <p:cNvSpPr txBox="1"/>
-          <p:nvPr/>
-        </p:nvSpPr>
-        <p:spPr>
-          <a:xfrm>
-            <a:off x="6638544" y="4663439"/>
+              <a:t>19</a:t>
+            </a:r>
+          </a:p>
+        </p:txBody>
+      </p:sp>
+      <p:sp>
+        <p:nvSpPr>
+          <p:cNvPr id="212" name="TextBox 211"/>
+          <p:cNvSpPr txBox="1"/>
+          <p:nvPr/>
+        </p:nvSpPr>
+        <p:spPr>
+          <a:xfrm>
+            <a:off x="6638544" y="5614415"/>
             <a:ext cx="1005840" cy="219456"/>
           </a:xfrm>
           <a:prstGeom prst="rect">
@@ -48649,20 +49397,20 @@
               </a:defRPr>
             </a:pPr>
             <a:r>
-              <a:t>Derek J.</a:t>
-            </a:r>
-          </a:p>
-        </p:txBody>
-      </p:sp>
-      <p:sp>
-        <p:nvSpPr>
-          <p:cNvPr id="193" name="TextBox 192"/>
-          <p:cNvSpPr txBox="1"/>
-          <p:nvPr/>
-        </p:nvSpPr>
-        <p:spPr>
-          <a:xfrm>
-            <a:off x="7644383" y="4663439"/>
+              <a:t>Kurt B.</a:t>
+            </a:r>
+          </a:p>
+        </p:txBody>
+      </p:sp>
+      <p:sp>
+        <p:nvSpPr>
+          <p:cNvPr id="213" name="TextBox 212"/>
+          <p:cNvSpPr txBox="1"/>
+          <p:nvPr/>
+        </p:nvSpPr>
+        <p:spPr>
+          <a:xfrm>
+            <a:off x="7644383" y="5614415"/>
             <a:ext cx="3474720" cy="219456"/>
           </a:xfrm>
           <a:prstGeom prst="rect">
@@ -48685,20 +49433,20 @@
               </a:defRPr>
             </a:pPr>
             <a:r>
-              <a:t>Ewall Insurance Company</a:t>
-            </a:r>
-          </a:p>
-        </p:txBody>
-      </p:sp>
-      <p:sp>
-        <p:nvSpPr>
-          <p:cNvPr id="194" name="TextBox 193"/>
-          <p:cNvSpPr txBox="1"/>
-          <p:nvPr/>
-        </p:nvSpPr>
-        <p:spPr>
-          <a:xfrm>
-            <a:off x="11119104" y="4663439"/>
+              <a:t>The McClure Agency LLC</a:t>
+            </a:r>
+          </a:p>
+        </p:txBody>
+      </p:sp>
+      <p:sp>
+        <p:nvSpPr>
+          <p:cNvPr id="214" name="TextBox 213"/>
+          <p:cNvSpPr txBox="1"/>
+          <p:nvPr/>
+        </p:nvSpPr>
+        <p:spPr>
+          <a:xfrm>
+            <a:off x="11119104" y="5614415"/>
             <a:ext cx="914400" cy="219456"/>
           </a:xfrm>
           <a:prstGeom prst="rect">
@@ -48721,20 +49469,20 @@
               </a:defRPr>
             </a:pPr>
             <a:r>
-              <a:t>402</a:t>
-            </a:r>
-          </a:p>
-        </p:txBody>
-      </p:sp>
-      <p:sp>
-        <p:nvSpPr>
-          <p:cNvPr id="195" name="Rectangle 194"/>
+              <a:t>358</a:t>
+            </a:r>
+          </a:p>
+        </p:txBody>
+      </p:sp>
+      <p:sp>
+        <p:nvSpPr>
+          <p:cNvPr id="215" name="Rectangle 214"/>
           <p:cNvSpPr/>
           <p:nvPr/>
         </p:nvSpPr>
         <p:spPr>
           <a:xfrm>
-            <a:off x="6291072" y="4882895"/>
+            <a:off x="6291072" y="5833871"/>
             <a:ext cx="5742432" cy="237744"/>
           </a:xfrm>
           <a:prstGeom prst="rect">
@@ -48771,13 +49519,13 @@
       </p:sp>
       <p:sp>
         <p:nvSpPr>
-          <p:cNvPr id="196" name="TextBox 195"/>
-          <p:cNvSpPr txBox="1"/>
-          <p:nvPr/>
-        </p:nvSpPr>
-        <p:spPr>
-          <a:xfrm>
-            <a:off x="6291072" y="4901183"/>
+          <p:cNvPr id="216" name="TextBox 215"/>
+          <p:cNvSpPr txBox="1"/>
+          <p:nvPr/>
+        </p:nvSpPr>
+        <p:spPr>
+          <a:xfrm>
+            <a:off x="6291072" y="5852159"/>
             <a:ext cx="347472" cy="219456"/>
           </a:xfrm>
           <a:prstGeom prst="rect">
@@ -48800,20 +49548,20 @@
               </a:defRPr>
             </a:pPr>
             <a:r>
-              <a:t>16</a:t>
-            </a:r>
-          </a:p>
-        </p:txBody>
-      </p:sp>
-      <p:sp>
-        <p:nvSpPr>
-          <p:cNvPr id="197" name="TextBox 196"/>
-          <p:cNvSpPr txBox="1"/>
-          <p:nvPr/>
-        </p:nvSpPr>
-        <p:spPr>
-          <a:xfrm>
-            <a:off x="6638544" y="4901183"/>
+              <a:t>20</a:t>
+            </a:r>
+          </a:p>
+        </p:txBody>
+      </p:sp>
+      <p:sp>
+        <p:nvSpPr>
+          <p:cNvPr id="217" name="TextBox 216"/>
+          <p:cNvSpPr txBox="1"/>
+          <p:nvPr/>
+        </p:nvSpPr>
+        <p:spPr>
+          <a:xfrm>
+            <a:off x="6638544" y="5852159"/>
             <a:ext cx="1005840" cy="219456"/>
           </a:xfrm>
           <a:prstGeom prst="rect">
@@ -48836,20 +49584,20 @@
               </a:defRPr>
             </a:pPr>
             <a:r>
-              <a:t>Kurt B.</a:t>
-            </a:r>
-          </a:p>
-        </p:txBody>
-      </p:sp>
-      <p:sp>
-        <p:nvSpPr>
-          <p:cNvPr id="198" name="TextBox 197"/>
-          <p:cNvSpPr txBox="1"/>
-          <p:nvPr/>
-        </p:nvSpPr>
-        <p:spPr>
-          <a:xfrm>
-            <a:off x="7644383" y="4901183"/>
+              <a:t>Derrick L.</a:t>
+            </a:r>
+          </a:p>
+        </p:txBody>
+      </p:sp>
+      <p:sp>
+        <p:nvSpPr>
+          <p:cNvPr id="218" name="TextBox 217"/>
+          <p:cNvSpPr txBox="1"/>
+          <p:nvPr/>
+        </p:nvSpPr>
+        <p:spPr>
+          <a:xfrm>
+            <a:off x="7644383" y="5852159"/>
             <a:ext cx="3474720" cy="219456"/>
           </a:xfrm>
           <a:prstGeom prst="rect">
@@ -48872,754 +49620,6 @@
               </a:defRPr>
             </a:pPr>
             <a:r>
-              <a:t>Rodriguez Insurance Agency LLC</a:t>
-            </a:r>
-          </a:p>
-        </p:txBody>
-      </p:sp>
-      <p:sp>
-        <p:nvSpPr>
-          <p:cNvPr id="199" name="TextBox 198"/>
-          <p:cNvSpPr txBox="1"/>
-          <p:nvPr/>
-        </p:nvSpPr>
-        <p:spPr>
-          <a:xfrm>
-            <a:off x="11119104" y="4901183"/>
-            <a:ext cx="914400" cy="219456"/>
-          </a:xfrm>
-          <a:prstGeom prst="rect">
-            <a:avLst/>
-          </a:prstGeom>
-          <a:noFill/>
-        </p:spPr>
-        <p:txBody>
-          <a:bodyPr wrap="square">
-            <a:spAutoFit/>
-          </a:bodyPr>
-          <a:lstStyle/>
-          <a:p>
-            <a:pPr algn="ctr">
-              <a:defRPr sz="950" b="1">
-                <a:solidFill>
-                  <a:srgbClr val="111827"/>
-                </a:solidFill>
-                <a:latin typeface="Calibri"/>
-              </a:defRPr>
-            </a:pPr>
-            <a:r>
-              <a:t>387</a:t>
-            </a:r>
-          </a:p>
-        </p:txBody>
-      </p:sp>
-      <p:sp>
-        <p:nvSpPr>
-          <p:cNvPr id="200" name="Rectangle 199"/>
-          <p:cNvSpPr/>
-          <p:nvPr/>
-        </p:nvSpPr>
-        <p:spPr>
-          <a:xfrm>
-            <a:off x="6291072" y="5120639"/>
-            <a:ext cx="5742432" cy="237744"/>
-          </a:xfrm>
-          <a:prstGeom prst="rect">
-            <a:avLst/>
-          </a:prstGeom>
-          <a:solidFill>
-            <a:srgbClr val="FFFFFF"/>
-          </a:solidFill>
-          <a:ln>
-            <a:noFill/>
-          </a:ln>
-        </p:spPr>
-        <p:style>
-          <a:lnRef idx="1">
-            <a:schemeClr val="accent1"/>
-          </a:lnRef>
-          <a:fillRef idx="3">
-            <a:schemeClr val="accent1"/>
-          </a:fillRef>
-          <a:effectRef idx="2">
-            <a:schemeClr val="accent1"/>
-          </a:effectRef>
-          <a:fontRef idx="minor">
-            <a:schemeClr val="lt1"/>
-          </a:fontRef>
-        </p:style>
-        <p:txBody>
-          <a:bodyPr rtlCol="0" anchor="ctr"/>
-          <a:lstStyle/>
-          <a:p>
-            <a:pPr algn="ctr"/>
-          </a:p>
-        </p:txBody>
-      </p:sp>
-      <p:sp>
-        <p:nvSpPr>
-          <p:cNvPr id="201" name="TextBox 200"/>
-          <p:cNvSpPr txBox="1"/>
-          <p:nvPr/>
-        </p:nvSpPr>
-        <p:spPr>
-          <a:xfrm>
-            <a:off x="6291072" y="5138927"/>
-            <a:ext cx="347472" cy="219456"/>
-          </a:xfrm>
-          <a:prstGeom prst="rect">
-            <a:avLst/>
-          </a:prstGeom>
-          <a:noFill/>
-        </p:spPr>
-        <p:txBody>
-          <a:bodyPr wrap="square">
-            <a:spAutoFit/>
-          </a:bodyPr>
-          <a:lstStyle/>
-          <a:p>
-            <a:pPr algn="ctr">
-              <a:defRPr sz="950" b="1">
-                <a:solidFill>
-                  <a:srgbClr val="111827"/>
-                </a:solidFill>
-                <a:latin typeface="Calibri"/>
-              </a:defRPr>
-            </a:pPr>
-            <a:r>
-              <a:t>17</a:t>
-            </a:r>
-          </a:p>
-        </p:txBody>
-      </p:sp>
-      <p:sp>
-        <p:nvSpPr>
-          <p:cNvPr id="202" name="TextBox 201"/>
-          <p:cNvSpPr txBox="1"/>
-          <p:nvPr/>
-        </p:nvSpPr>
-        <p:spPr>
-          <a:xfrm>
-            <a:off x="6638544" y="5138927"/>
-            <a:ext cx="1005840" cy="219456"/>
-          </a:xfrm>
-          <a:prstGeom prst="rect">
-            <a:avLst/>
-          </a:prstGeom>
-          <a:noFill/>
-        </p:spPr>
-        <p:txBody>
-          <a:bodyPr wrap="square">
-            <a:spAutoFit/>
-          </a:bodyPr>
-          <a:lstStyle/>
-          <a:p>
-            <a:pPr algn="ctr">
-              <a:defRPr sz="950" b="1">
-                <a:solidFill>
-                  <a:srgbClr val="111827"/>
-                </a:solidFill>
-                <a:latin typeface="Calibri"/>
-              </a:defRPr>
-            </a:pPr>
-            <a:r>
-              <a:t>Erika C.</a:t>
-            </a:r>
-          </a:p>
-        </p:txBody>
-      </p:sp>
-      <p:sp>
-        <p:nvSpPr>
-          <p:cNvPr id="203" name="TextBox 202"/>
-          <p:cNvSpPr txBox="1"/>
-          <p:nvPr/>
-        </p:nvSpPr>
-        <p:spPr>
-          <a:xfrm>
-            <a:off x="7644383" y="5138927"/>
-            <a:ext cx="3474720" cy="219456"/>
-          </a:xfrm>
-          <a:prstGeom prst="rect">
-            <a:avLst/>
-          </a:prstGeom>
-          <a:noFill/>
-        </p:spPr>
-        <p:txBody>
-          <a:bodyPr wrap="square">
-            <a:spAutoFit/>
-          </a:bodyPr>
-          <a:lstStyle/>
-          <a:p>
-            <a:pPr algn="l">
-              <a:defRPr sz="950" b="0">
-                <a:solidFill>
-                  <a:srgbClr val="111827"/>
-                </a:solidFill>
-                <a:latin typeface="Calibri"/>
-              </a:defRPr>
-            </a:pPr>
-            <a:r>
-              <a:t>Southwestern Insurance Services, Inc.</a:t>
-            </a:r>
-          </a:p>
-        </p:txBody>
-      </p:sp>
-      <p:sp>
-        <p:nvSpPr>
-          <p:cNvPr id="204" name="TextBox 203"/>
-          <p:cNvSpPr txBox="1"/>
-          <p:nvPr/>
-        </p:nvSpPr>
-        <p:spPr>
-          <a:xfrm>
-            <a:off x="11119104" y="5138927"/>
-            <a:ext cx="914400" cy="219456"/>
-          </a:xfrm>
-          <a:prstGeom prst="rect">
-            <a:avLst/>
-          </a:prstGeom>
-          <a:noFill/>
-        </p:spPr>
-        <p:txBody>
-          <a:bodyPr wrap="square">
-            <a:spAutoFit/>
-          </a:bodyPr>
-          <a:lstStyle/>
-          <a:p>
-            <a:pPr algn="ctr">
-              <a:defRPr sz="950" b="1">
-                <a:solidFill>
-                  <a:srgbClr val="111827"/>
-                </a:solidFill>
-                <a:latin typeface="Calibri"/>
-              </a:defRPr>
-            </a:pPr>
-            <a:r>
-              <a:t>372</a:t>
-            </a:r>
-          </a:p>
-        </p:txBody>
-      </p:sp>
-      <p:sp>
-        <p:nvSpPr>
-          <p:cNvPr id="205" name="Rectangle 204"/>
-          <p:cNvSpPr/>
-          <p:nvPr/>
-        </p:nvSpPr>
-        <p:spPr>
-          <a:xfrm>
-            <a:off x="6291072" y="5358383"/>
-            <a:ext cx="5742432" cy="237744"/>
-          </a:xfrm>
-          <a:prstGeom prst="rect">
-            <a:avLst/>
-          </a:prstGeom>
-          <a:solidFill>
-            <a:srgbClr val="F9FAFB"/>
-          </a:solidFill>
-          <a:ln>
-            <a:noFill/>
-          </a:ln>
-        </p:spPr>
-        <p:style>
-          <a:lnRef idx="1">
-            <a:schemeClr val="accent1"/>
-          </a:lnRef>
-          <a:fillRef idx="3">
-            <a:schemeClr val="accent1"/>
-          </a:fillRef>
-          <a:effectRef idx="2">
-            <a:schemeClr val="accent1"/>
-          </a:effectRef>
-          <a:fontRef idx="minor">
-            <a:schemeClr val="lt1"/>
-          </a:fontRef>
-        </p:style>
-        <p:txBody>
-          <a:bodyPr rtlCol="0" anchor="ctr"/>
-          <a:lstStyle/>
-          <a:p>
-            <a:pPr algn="ctr"/>
-          </a:p>
-        </p:txBody>
-      </p:sp>
-      <p:sp>
-        <p:nvSpPr>
-          <p:cNvPr id="206" name="TextBox 205"/>
-          <p:cNvSpPr txBox="1"/>
-          <p:nvPr/>
-        </p:nvSpPr>
-        <p:spPr>
-          <a:xfrm>
-            <a:off x="6291072" y="5376671"/>
-            <a:ext cx="347472" cy="219456"/>
-          </a:xfrm>
-          <a:prstGeom prst="rect">
-            <a:avLst/>
-          </a:prstGeom>
-          <a:noFill/>
-        </p:spPr>
-        <p:txBody>
-          <a:bodyPr wrap="square">
-            <a:spAutoFit/>
-          </a:bodyPr>
-          <a:lstStyle/>
-          <a:p>
-            <a:pPr algn="ctr">
-              <a:defRPr sz="950" b="1">
-                <a:solidFill>
-                  <a:srgbClr val="111827"/>
-                </a:solidFill>
-                <a:latin typeface="Calibri"/>
-              </a:defRPr>
-            </a:pPr>
-            <a:r>
-              <a:t>18</a:t>
-            </a:r>
-          </a:p>
-        </p:txBody>
-      </p:sp>
-      <p:sp>
-        <p:nvSpPr>
-          <p:cNvPr id="207" name="TextBox 206"/>
-          <p:cNvSpPr txBox="1"/>
-          <p:nvPr/>
-        </p:nvSpPr>
-        <p:spPr>
-          <a:xfrm>
-            <a:off x="6638544" y="5376671"/>
-            <a:ext cx="1005840" cy="219456"/>
-          </a:xfrm>
-          <a:prstGeom prst="rect">
-            <a:avLst/>
-          </a:prstGeom>
-          <a:noFill/>
-        </p:spPr>
-        <p:txBody>
-          <a:bodyPr wrap="square">
-            <a:spAutoFit/>
-          </a:bodyPr>
-          <a:lstStyle/>
-          <a:p>
-            <a:pPr algn="ctr">
-              <a:defRPr sz="950" b="1">
-                <a:solidFill>
-                  <a:srgbClr val="111827"/>
-                </a:solidFill>
-                <a:latin typeface="Calibri"/>
-              </a:defRPr>
-            </a:pPr>
-            <a:r>
-              <a:t>Alexis B.</a:t>
-            </a:r>
-          </a:p>
-        </p:txBody>
-      </p:sp>
-      <p:sp>
-        <p:nvSpPr>
-          <p:cNvPr id="208" name="TextBox 207"/>
-          <p:cNvSpPr txBox="1"/>
-          <p:nvPr/>
-        </p:nvSpPr>
-        <p:spPr>
-          <a:xfrm>
-            <a:off x="7644383" y="5376671"/>
-            <a:ext cx="3474720" cy="219456"/>
-          </a:xfrm>
-          <a:prstGeom prst="rect">
-            <a:avLst/>
-          </a:prstGeom>
-          <a:noFill/>
-        </p:spPr>
-        <p:txBody>
-          <a:bodyPr wrap="square">
-            <a:spAutoFit/>
-          </a:bodyPr>
-          <a:lstStyle/>
-          <a:p>
-            <a:pPr algn="l">
-              <a:defRPr sz="950" b="0">
-                <a:solidFill>
-                  <a:srgbClr val="111827"/>
-                </a:solidFill>
-                <a:latin typeface="Calibri"/>
-              </a:defRPr>
-            </a:pPr>
-            <a:r>
-              <a:t>Stellar Management, Inc</a:t>
-            </a:r>
-          </a:p>
-        </p:txBody>
-      </p:sp>
-      <p:sp>
-        <p:nvSpPr>
-          <p:cNvPr id="209" name="TextBox 208"/>
-          <p:cNvSpPr txBox="1"/>
-          <p:nvPr/>
-        </p:nvSpPr>
-        <p:spPr>
-          <a:xfrm>
-            <a:off x="11119104" y="5376671"/>
-            <a:ext cx="914400" cy="219456"/>
-          </a:xfrm>
-          <a:prstGeom prst="rect">
-            <a:avLst/>
-          </a:prstGeom>
-          <a:noFill/>
-        </p:spPr>
-        <p:txBody>
-          <a:bodyPr wrap="square">
-            <a:spAutoFit/>
-          </a:bodyPr>
-          <a:lstStyle/>
-          <a:p>
-            <a:pPr algn="ctr">
-              <a:defRPr sz="950" b="1">
-                <a:solidFill>
-                  <a:srgbClr val="111827"/>
-                </a:solidFill>
-                <a:latin typeface="Calibri"/>
-              </a:defRPr>
-            </a:pPr>
-            <a:r>
-              <a:t>372</a:t>
-            </a:r>
-          </a:p>
-        </p:txBody>
-      </p:sp>
-      <p:sp>
-        <p:nvSpPr>
-          <p:cNvPr id="210" name="Rectangle 209"/>
-          <p:cNvSpPr/>
-          <p:nvPr/>
-        </p:nvSpPr>
-        <p:spPr>
-          <a:xfrm>
-            <a:off x="6291072" y="5596127"/>
-            <a:ext cx="5742432" cy="237744"/>
-          </a:xfrm>
-          <a:prstGeom prst="rect">
-            <a:avLst/>
-          </a:prstGeom>
-          <a:solidFill>
-            <a:srgbClr val="FFFFFF"/>
-          </a:solidFill>
-          <a:ln>
-            <a:noFill/>
-          </a:ln>
-        </p:spPr>
-        <p:style>
-          <a:lnRef idx="1">
-            <a:schemeClr val="accent1"/>
-          </a:lnRef>
-          <a:fillRef idx="3">
-            <a:schemeClr val="accent1"/>
-          </a:fillRef>
-          <a:effectRef idx="2">
-            <a:schemeClr val="accent1"/>
-          </a:effectRef>
-          <a:fontRef idx="minor">
-            <a:schemeClr val="lt1"/>
-          </a:fontRef>
-        </p:style>
-        <p:txBody>
-          <a:bodyPr rtlCol="0" anchor="ctr"/>
-          <a:lstStyle/>
-          <a:p>
-            <a:pPr algn="ctr"/>
-          </a:p>
-        </p:txBody>
-      </p:sp>
-      <p:sp>
-        <p:nvSpPr>
-          <p:cNvPr id="211" name="TextBox 210"/>
-          <p:cNvSpPr txBox="1"/>
-          <p:nvPr/>
-        </p:nvSpPr>
-        <p:spPr>
-          <a:xfrm>
-            <a:off x="6291072" y="5614415"/>
-            <a:ext cx="347472" cy="219456"/>
-          </a:xfrm>
-          <a:prstGeom prst="rect">
-            <a:avLst/>
-          </a:prstGeom>
-          <a:noFill/>
-        </p:spPr>
-        <p:txBody>
-          <a:bodyPr wrap="square">
-            <a:spAutoFit/>
-          </a:bodyPr>
-          <a:lstStyle/>
-          <a:p>
-            <a:pPr algn="ctr">
-              <a:defRPr sz="950" b="1">
-                <a:solidFill>
-                  <a:srgbClr val="111827"/>
-                </a:solidFill>
-                <a:latin typeface="Calibri"/>
-              </a:defRPr>
-            </a:pPr>
-            <a:r>
-              <a:t>19</a:t>
-            </a:r>
-          </a:p>
-        </p:txBody>
-      </p:sp>
-      <p:sp>
-        <p:nvSpPr>
-          <p:cNvPr id="212" name="TextBox 211"/>
-          <p:cNvSpPr txBox="1"/>
-          <p:nvPr/>
-        </p:nvSpPr>
-        <p:spPr>
-          <a:xfrm>
-            <a:off x="6638544" y="5614415"/>
-            <a:ext cx="1005840" cy="219456"/>
-          </a:xfrm>
-          <a:prstGeom prst="rect">
-            <a:avLst/>
-          </a:prstGeom>
-          <a:noFill/>
-        </p:spPr>
-        <p:txBody>
-          <a:bodyPr wrap="square">
-            <a:spAutoFit/>
-          </a:bodyPr>
-          <a:lstStyle/>
-          <a:p>
-            <a:pPr algn="ctr">
-              <a:defRPr sz="950" b="1">
-                <a:solidFill>
-                  <a:srgbClr val="111827"/>
-                </a:solidFill>
-                <a:latin typeface="Calibri"/>
-              </a:defRPr>
-            </a:pPr>
-            <a:r>
-              <a:t>Kurt B.</a:t>
-            </a:r>
-          </a:p>
-        </p:txBody>
-      </p:sp>
-      <p:sp>
-        <p:nvSpPr>
-          <p:cNvPr id="213" name="TextBox 212"/>
-          <p:cNvSpPr txBox="1"/>
-          <p:nvPr/>
-        </p:nvSpPr>
-        <p:spPr>
-          <a:xfrm>
-            <a:off x="7644383" y="5614415"/>
-            <a:ext cx="3474720" cy="219456"/>
-          </a:xfrm>
-          <a:prstGeom prst="rect">
-            <a:avLst/>
-          </a:prstGeom>
-          <a:noFill/>
-        </p:spPr>
-        <p:txBody>
-          <a:bodyPr wrap="square">
-            <a:spAutoFit/>
-          </a:bodyPr>
-          <a:lstStyle/>
-          <a:p>
-            <a:pPr algn="l">
-              <a:defRPr sz="950" b="0">
-                <a:solidFill>
-                  <a:srgbClr val="111827"/>
-                </a:solidFill>
-                <a:latin typeface="Calibri"/>
-              </a:defRPr>
-            </a:pPr>
-            <a:r>
-              <a:t>The McClure Agency LLC</a:t>
-            </a:r>
-          </a:p>
-        </p:txBody>
-      </p:sp>
-      <p:sp>
-        <p:nvSpPr>
-          <p:cNvPr id="214" name="TextBox 213"/>
-          <p:cNvSpPr txBox="1"/>
-          <p:nvPr/>
-        </p:nvSpPr>
-        <p:spPr>
-          <a:xfrm>
-            <a:off x="11119104" y="5614415"/>
-            <a:ext cx="914400" cy="219456"/>
-          </a:xfrm>
-          <a:prstGeom prst="rect">
-            <a:avLst/>
-          </a:prstGeom>
-          <a:noFill/>
-        </p:spPr>
-        <p:txBody>
-          <a:bodyPr wrap="square">
-            <a:spAutoFit/>
-          </a:bodyPr>
-          <a:lstStyle/>
-          <a:p>
-            <a:pPr algn="ctr">
-              <a:defRPr sz="950" b="1">
-                <a:solidFill>
-                  <a:srgbClr val="111827"/>
-                </a:solidFill>
-                <a:latin typeface="Calibri"/>
-              </a:defRPr>
-            </a:pPr>
-            <a:r>
-              <a:t>354</a:t>
-            </a:r>
-          </a:p>
-        </p:txBody>
-      </p:sp>
-      <p:sp>
-        <p:nvSpPr>
-          <p:cNvPr id="215" name="Rectangle 214"/>
-          <p:cNvSpPr/>
-          <p:nvPr/>
-        </p:nvSpPr>
-        <p:spPr>
-          <a:xfrm>
-            <a:off x="6291072" y="5833871"/>
-            <a:ext cx="5742432" cy="237744"/>
-          </a:xfrm>
-          <a:prstGeom prst="rect">
-            <a:avLst/>
-          </a:prstGeom>
-          <a:solidFill>
-            <a:srgbClr val="F9FAFB"/>
-          </a:solidFill>
-          <a:ln>
-            <a:noFill/>
-          </a:ln>
-        </p:spPr>
-        <p:style>
-          <a:lnRef idx="1">
-            <a:schemeClr val="accent1"/>
-          </a:lnRef>
-          <a:fillRef idx="3">
-            <a:schemeClr val="accent1"/>
-          </a:fillRef>
-          <a:effectRef idx="2">
-            <a:schemeClr val="accent1"/>
-          </a:effectRef>
-          <a:fontRef idx="minor">
-            <a:schemeClr val="lt1"/>
-          </a:fontRef>
-        </p:style>
-        <p:txBody>
-          <a:bodyPr rtlCol="0" anchor="ctr"/>
-          <a:lstStyle/>
-          <a:p>
-            <a:pPr algn="ctr"/>
-          </a:p>
-        </p:txBody>
-      </p:sp>
-      <p:sp>
-        <p:nvSpPr>
-          <p:cNvPr id="216" name="TextBox 215"/>
-          <p:cNvSpPr txBox="1"/>
-          <p:nvPr/>
-        </p:nvSpPr>
-        <p:spPr>
-          <a:xfrm>
-            <a:off x="6291072" y="5852159"/>
-            <a:ext cx="347472" cy="219456"/>
-          </a:xfrm>
-          <a:prstGeom prst="rect">
-            <a:avLst/>
-          </a:prstGeom>
-          <a:noFill/>
-        </p:spPr>
-        <p:txBody>
-          <a:bodyPr wrap="square">
-            <a:spAutoFit/>
-          </a:bodyPr>
-          <a:lstStyle/>
-          <a:p>
-            <a:pPr algn="ctr">
-              <a:defRPr sz="950" b="1">
-                <a:solidFill>
-                  <a:srgbClr val="111827"/>
-                </a:solidFill>
-                <a:latin typeface="Calibri"/>
-              </a:defRPr>
-            </a:pPr>
-            <a:r>
-              <a:t>20</a:t>
-            </a:r>
-          </a:p>
-        </p:txBody>
-      </p:sp>
-      <p:sp>
-        <p:nvSpPr>
-          <p:cNvPr id="217" name="TextBox 216"/>
-          <p:cNvSpPr txBox="1"/>
-          <p:nvPr/>
-        </p:nvSpPr>
-        <p:spPr>
-          <a:xfrm>
-            <a:off x="6638544" y="5852159"/>
-            <a:ext cx="1005840" cy="219456"/>
-          </a:xfrm>
-          <a:prstGeom prst="rect">
-            <a:avLst/>
-          </a:prstGeom>
-          <a:noFill/>
-        </p:spPr>
-        <p:txBody>
-          <a:bodyPr wrap="square">
-            <a:spAutoFit/>
-          </a:bodyPr>
-          <a:lstStyle/>
-          <a:p>
-            <a:pPr algn="ctr">
-              <a:defRPr sz="950" b="1">
-                <a:solidFill>
-                  <a:srgbClr val="111827"/>
-                </a:solidFill>
-                <a:latin typeface="Calibri"/>
-              </a:defRPr>
-            </a:pPr>
-            <a:r>
-              <a:t>Derrick L.</a:t>
-            </a:r>
-          </a:p>
-        </p:txBody>
-      </p:sp>
-      <p:sp>
-        <p:nvSpPr>
-          <p:cNvPr id="218" name="TextBox 217"/>
-          <p:cNvSpPr txBox="1"/>
-          <p:nvPr/>
-        </p:nvSpPr>
-        <p:spPr>
-          <a:xfrm>
-            <a:off x="7644383" y="5852159"/>
-            <a:ext cx="3474720" cy="219456"/>
-          </a:xfrm>
-          <a:prstGeom prst="rect">
-            <a:avLst/>
-          </a:prstGeom>
-          <a:noFill/>
-        </p:spPr>
-        <p:txBody>
-          <a:bodyPr wrap="square">
-            <a:spAutoFit/>
-          </a:bodyPr>
-          <a:lstStyle/>
-          <a:p>
-            <a:pPr algn="l">
-              <a:defRPr sz="950" b="0">
-                <a:solidFill>
-                  <a:srgbClr val="111827"/>
-                </a:solidFill>
-                <a:latin typeface="Calibri"/>
-              </a:defRPr>
-            </a:pPr>
-            <a:r>
               <a:t>Protectgo Services LLC</a:t>
             </a:r>
           </a:p>
@@ -49656,7 +49656,7 @@
               </a:defRPr>
             </a:pPr>
             <a:r>
-              <a:t>335</a:t>
+              <a:t>345</a:t>
             </a:r>
           </a:p>
         </p:txBody>

--- a/generated/Sales Dashboards/BD Rep Scoreboard.pptx
+++ b/generated/Sales Dashboards/BD Rep Scoreboard.pptx
@@ -5019,7 +5019,7 @@
               </a:defRPr>
             </a:pPr>
             <a:r>
-              <a:t>$19.9M</a:t>
+              <a:t>$20.7M</a:t>
             </a:r>
           </a:p>
         </p:txBody>
@@ -5055,7 +5055,7 @@
               </a:defRPr>
             </a:pPr>
             <a:r>
-              <a:t>Team GWP Q2 YTD  |  Proj. $30.7M</a:t>
+              <a:t>Team GWP Q2 YTD  |  Proj. $32.0M</a:t>
             </a:r>
           </a:p>
         </p:txBody>
@@ -5134,7 +5134,7 @@
               </a:defRPr>
             </a:pPr>
             <a:r>
-              <a:t>Pacing 167% of Q1 Final</a:t>
+              <a:t>Pacing 173% of Q1 Final</a:t>
             </a:r>
           </a:p>
         </p:txBody>
@@ -5758,7 +5758,7 @@
               </a:defRPr>
             </a:pPr>
             <a:r>
-              <a:t>▲ $1.3M vs Apr pace</a:t>
+              <a:t>▲ $2.2M vs Apr pace</a:t>
             </a:r>
           </a:p>
         </p:txBody>
@@ -6071,7 +6071,7 @@
               </a:defRPr>
             </a:pPr>
             <a:r>
-              <a:t>$28.5M</a:t>
+              <a:t>$29.4M</a:t>
             </a:r>
           </a:p>
         </p:txBody>
@@ -6179,7 +6179,7 @@
               </a:defRPr>
             </a:pPr>
             <a:r>
-              <a:t>Renewals (22%)</a:t>
+              <a:t>Renewals (21%)</a:t>
             </a:r>
           </a:p>
         </p:txBody>
@@ -6215,7 +6215,7 @@
               </a:defRPr>
             </a:pPr>
             <a:r>
-              <a:t>$2.9M</a:t>
+              <a:t>$3.0M</a:t>
             </a:r>
           </a:p>
         </p:txBody>
@@ -6787,7 +6787,7 @@
               </a:defRPr>
             </a:pPr>
             <a:r>
-              <a:t>MTD (May):  $10.28M written  ·  $10.99M pace  ·  29/31 days elapsed</a:t>
+              <a:t>MTD (May):  $11.10M written  ·  $11.87M pace  ·  29/31 days elapsed</a:t>
             </a:r>
           </a:p>
         </p:txBody>
@@ -12488,7 +12488,7 @@
               </a:defRPr>
             </a:pPr>
             <a:r>
-              <a:t>$3.3M</a:t>
+              <a:t>$3.4M</a:t>
             </a:r>
           </a:p>
         </p:txBody>
@@ -12790,7 +12790,7 @@
               </a:defRPr>
             </a:pPr>
             <a:r>
-              <a:t>Justin Feaster</a:t>
+              <a:t>Gurashish Bedi</a:t>
             </a:r>
           </a:p>
         </p:txBody>
@@ -12826,7 +12826,7 @@
               </a:defRPr>
             </a:pPr>
             <a:r>
-              <a:t>American Fleet Insurance</a:t>
+              <a:t>Commercial Trucking Insurance Agen…</a:t>
             </a:r>
           </a:p>
         </p:txBody>
@@ -12977,7 +12977,7 @@
               </a:defRPr>
             </a:pPr>
             <a:r>
-              <a:t>Gurashish Bedi</a:t>
+              <a:t>Justin Feaster</a:t>
             </a:r>
           </a:p>
         </p:txBody>
@@ -13013,7 +13013,7 @@
               </a:defRPr>
             </a:pPr>
             <a:r>
-              <a:t>Commercial Trucking Insurance Agen…</a:t>
+              <a:t>American Fleet Insurance</a:t>
             </a:r>
           </a:p>
         </p:txBody>
@@ -13049,7 +13049,7 @@
               </a:defRPr>
             </a:pPr>
             <a:r>
-              <a:t>$1.5M</a:t>
+              <a:t>$1.6M</a:t>
             </a:r>
           </a:p>
         </p:txBody>
@@ -13236,7 +13236,7 @@
               </a:defRPr>
             </a:pPr>
             <a:r>
-              <a:t>$1.4M</a:t>
+              <a:t>$1.5M</a:t>
             </a:r>
           </a:p>
         </p:txBody>
@@ -13610,7 +13610,7 @@
               </a:defRPr>
             </a:pPr>
             <a:r>
-              <a:t>$1.1M</a:t>
+              <a:t>$1.2M</a:t>
             </a:r>
           </a:p>
         </p:txBody>
@@ -13984,7 +13984,7 @@
               </a:defRPr>
             </a:pPr>
             <a:r>
-              <a:t>$838K</a:t>
+              <a:t>$860K</a:t>
             </a:r>
           </a:p>
         </p:txBody>
@@ -14473,7 +14473,7 @@
               </a:defRPr>
             </a:pPr>
             <a:r>
-              <a:t>Larisa Davtyan</a:t>
+              <a:t>No Name Given Ankush</a:t>
             </a:r>
           </a:p>
         </p:txBody>
@@ -14509,7 +14509,7 @@
               </a:defRPr>
             </a:pPr>
             <a:r>
-              <a:t>Safeline Insurance Agency, Inc.</a:t>
+              <a:t>Vintage Insurance Agency Inc (The)</a:t>
             </a:r>
           </a:p>
         </p:txBody>
@@ -14545,7 +14545,7 @@
               </a:defRPr>
             </a:pPr>
             <a:r>
-              <a:t>$700K</a:t>
+              <a:t>$698K</a:t>
             </a:r>
           </a:p>
         </p:txBody>
@@ -14660,7 +14660,7 @@
               </a:defRPr>
             </a:pPr>
             <a:r>
-              <a:t>Shubham Kamra</a:t>
+              <a:t>Larisa Davtyan</a:t>
             </a:r>
           </a:p>
         </p:txBody>
@@ -14696,7 +14696,7 @@
               </a:defRPr>
             </a:pPr>
             <a:r>
-              <a:t>A.S.I.A Inc</a:t>
+              <a:t>Safeline Insurance Agency, Inc.</a:t>
             </a:r>
           </a:p>
         </p:txBody>
@@ -14732,7 +14732,7 @@
               </a:defRPr>
             </a:pPr>
             <a:r>
-              <a:t>$688K</a:t>
+              <a:t>$698K</a:t>
             </a:r>
           </a:p>
         </p:txBody>
@@ -14847,7 +14847,7 @@
               </a:defRPr>
             </a:pPr>
             <a:r>
-              <a:t>No Name Given Ankush</a:t>
+              <a:t>Shubham Kamra</a:t>
             </a:r>
           </a:p>
         </p:txBody>
@@ -14883,7 +14883,7 @@
               </a:defRPr>
             </a:pPr>
             <a:r>
-              <a:t>Vintage Insurance Agency Inc (The)</a:t>
+              <a:t>A.S.I.A Inc</a:t>
             </a:r>
           </a:p>
         </p:txBody>
@@ -14919,7 +14919,7 @@
               </a:defRPr>
             </a:pPr>
             <a:r>
-              <a:t>$683K</a:t>
+              <a:t>$688K</a:t>
             </a:r>
           </a:p>
         </p:txBody>
@@ -15221,7 +15221,7 @@
               </a:defRPr>
             </a:pPr>
             <a:r>
-              <a:t>Anastasiya Nabokov</a:t>
+              <a:t>Diego Giraldo</a:t>
             </a:r>
           </a:p>
         </p:txBody>
@@ -15257,7 +15257,7 @@
               </a:defRPr>
             </a:pPr>
             <a:r>
-              <a:t>Drive Safe Group LLC</a:t>
+              <a:t>Horizons Insurance And Financial S…</a:t>
             </a:r>
           </a:p>
         </p:txBody>
@@ -15293,7 +15293,7 @@
               </a:defRPr>
             </a:pPr>
             <a:r>
-              <a:t>$589K</a:t>
+              <a:t>$591K</a:t>
             </a:r>
           </a:p>
         </p:txBody>
@@ -15408,7 +15408,7 @@
               </a:defRPr>
             </a:pPr>
             <a:r>
-              <a:t>Diego Giraldo</a:t>
+              <a:t>Anastasiya Nabokov</a:t>
             </a:r>
           </a:p>
         </p:txBody>
@@ -15444,7 +15444,7 @@
               </a:defRPr>
             </a:pPr>
             <a:r>
-              <a:t>Horizons Insurance And Financial S…</a:t>
+              <a:t>Drive Safe Group LLC</a:t>
             </a:r>
           </a:p>
         </p:txBody>
@@ -15480,7 +15480,7 @@
               </a:defRPr>
             </a:pPr>
             <a:r>
-              <a:t>$565K</a:t>
+              <a:t>$589K</a:t>
             </a:r>
           </a:p>
         </p:txBody>
@@ -15667,7 +15667,7 @@
               </a:defRPr>
             </a:pPr>
             <a:r>
-              <a:t>$548K</a:t>
+              <a:t>$551K</a:t>
             </a:r>
           </a:p>
         </p:txBody>
@@ -16156,7 +16156,7 @@
               </a:defRPr>
             </a:pPr>
             <a:r>
-              <a:t>Daven Loomba</a:t>
+              <a:t>Scott Procops</a:t>
             </a:r>
           </a:p>
         </p:txBody>
@@ -16192,7 +16192,7 @@
               </a:defRPr>
             </a:pPr>
             <a:r>
-              <a:t>GoldenEra Insurance Agency</a:t>
+              <a:t>Specialty Coverage Insurance Agenc…</a:t>
             </a:r>
           </a:p>
         </p:txBody>
@@ -16228,7 +16228,7 @@
               </a:defRPr>
             </a:pPr>
             <a:r>
-              <a:t>$505K</a:t>
+              <a:t>$512K</a:t>
             </a:r>
           </a:p>
         </p:txBody>
@@ -16343,7 +16343,7 @@
               </a:defRPr>
             </a:pPr>
             <a:r>
-              <a:t>Scott Procops</a:t>
+              <a:t>Daven Loomba</a:t>
             </a:r>
           </a:p>
         </p:txBody>
@@ -16379,7 +16379,7 @@
               </a:defRPr>
             </a:pPr>
             <a:r>
-              <a:t>Specialty Coverage Insurance Agenc…</a:t>
+              <a:t>GoldenEra Insurance Agency</a:t>
             </a:r>
           </a:p>
         </p:txBody>
@@ -16415,7 +16415,7 @@
               </a:defRPr>
             </a:pPr>
             <a:r>
-              <a:t>$493K</a:t>
+              <a:t>$505K</a:t>
             </a:r>
           </a:p>
         </p:txBody>
@@ -16976,7 +16976,7 @@
               </a:defRPr>
             </a:pPr>
             <a:r>
-              <a:t>$442K</a:t>
+              <a:t>$438K</a:t>
             </a:r>
           </a:p>
         </p:txBody>
@@ -18213,7 +18213,7 @@
               </a:defRPr>
             </a:pPr>
             <a:r>
-              <a:t>Inderjit Singh</a:t>
+              <a:t>Venizelos Papadopulos</a:t>
             </a:r>
           </a:p>
         </p:txBody>
@@ -18249,7 +18249,7 @@
               </a:defRPr>
             </a:pPr>
             <a:r>
-              <a:t>American Insurance Agency LLC</a:t>
+              <a:t>Exclusive Financial Services, Inc</a:t>
             </a:r>
           </a:p>
         </p:txBody>
@@ -18285,7 +18285,7 @@
               </a:defRPr>
             </a:pPr>
             <a:r>
-              <a:t>$375K</a:t>
+              <a:t>$380K</a:t>
             </a:r>
           </a:p>
         </p:txBody>
@@ -18400,7 +18400,7 @@
               </a:defRPr>
             </a:pPr>
             <a:r>
-              <a:t>Michael Su</a:t>
+              <a:t>Inderjit Singh</a:t>
             </a:r>
           </a:p>
         </p:txBody>
@@ -18436,7 +18436,7 @@
               </a:defRPr>
             </a:pPr>
             <a:r>
-              <a:t>Jtc Insurance Agency, Inc.</a:t>
+              <a:t>American Insurance Agency LLC</a:t>
             </a:r>
           </a:p>
         </p:txBody>
@@ -18472,7 +18472,7 @@
               </a:defRPr>
             </a:pPr>
             <a:r>
-              <a:t>$368K</a:t>
+              <a:t>$375K</a:t>
             </a:r>
           </a:p>
         </p:txBody>
@@ -18486,6 +18486,193 @@
         <p:spPr>
           <a:xfrm>
             <a:off x="6254496" y="4407408"/>
+            <a:ext cx="5705856" cy="256032"/>
+          </a:xfrm>
+          <a:prstGeom prst="rect">
+            <a:avLst/>
+          </a:prstGeom>
+          <a:solidFill>
+            <a:srgbClr val="F9FAFB"/>
+          </a:solidFill>
+          <a:ln>
+            <a:noFill/>
+          </a:ln>
+        </p:spPr>
+        <p:style>
+          <a:lnRef idx="1">
+            <a:schemeClr val="accent1"/>
+          </a:lnRef>
+          <a:fillRef idx="3">
+            <a:schemeClr val="accent1"/>
+          </a:fillRef>
+          <a:effectRef idx="2">
+            <a:schemeClr val="accent1"/>
+          </a:effectRef>
+          <a:fontRef idx="minor">
+            <a:schemeClr val="lt1"/>
+          </a:fontRef>
+        </p:style>
+        <p:txBody>
+          <a:bodyPr rtlCol="0" anchor="ctr"/>
+          <a:lstStyle/>
+          <a:p>
+            <a:pPr algn="ctr"/>
+          </a:p>
+        </p:txBody>
+      </p:sp>
+      <p:sp>
+        <p:nvSpPr>
+          <p:cNvPr id="182" name="TextBox 181"/>
+          <p:cNvSpPr txBox="1"/>
+          <p:nvPr/>
+        </p:nvSpPr>
+        <p:spPr>
+          <a:xfrm>
+            <a:off x="6254496" y="4425696"/>
+            <a:ext cx="411480" cy="237744"/>
+          </a:xfrm>
+          <a:prstGeom prst="rect">
+            <a:avLst/>
+          </a:prstGeom>
+          <a:noFill/>
+        </p:spPr>
+        <p:txBody>
+          <a:bodyPr wrap="none">
+            <a:spAutoFit/>
+          </a:bodyPr>
+          <a:lstStyle/>
+          <a:p>
+            <a:pPr algn="ctr">
+              <a:defRPr sz="950" b="1">
+                <a:solidFill>
+                  <a:srgbClr val="6B7280"/>
+                </a:solidFill>
+                <a:latin typeface="Calibri"/>
+              </a:defRPr>
+            </a:pPr>
+            <a:r>
+              <a:t>34</a:t>
+            </a:r>
+          </a:p>
+        </p:txBody>
+      </p:sp>
+      <p:sp>
+        <p:nvSpPr>
+          <p:cNvPr id="183" name="TextBox 182"/>
+          <p:cNvSpPr txBox="1"/>
+          <p:nvPr/>
+        </p:nvSpPr>
+        <p:spPr>
+          <a:xfrm>
+            <a:off x="6665976" y="4425696"/>
+            <a:ext cx="1920240" cy="237744"/>
+          </a:xfrm>
+          <a:prstGeom prst="rect">
+            <a:avLst/>
+          </a:prstGeom>
+          <a:noFill/>
+        </p:spPr>
+        <p:txBody>
+          <a:bodyPr wrap="none">
+            <a:spAutoFit/>
+          </a:bodyPr>
+          <a:lstStyle/>
+          <a:p>
+            <a:pPr algn="l">
+              <a:defRPr sz="950" b="1">
+                <a:solidFill>
+                  <a:srgbClr val="111827"/>
+                </a:solidFill>
+                <a:latin typeface="Calibri"/>
+              </a:defRPr>
+            </a:pPr>
+            <a:r>
+              <a:t>Michael Su</a:t>
+            </a:r>
+          </a:p>
+        </p:txBody>
+      </p:sp>
+      <p:sp>
+        <p:nvSpPr>
+          <p:cNvPr id="184" name="TextBox 183"/>
+          <p:cNvSpPr txBox="1"/>
+          <p:nvPr/>
+        </p:nvSpPr>
+        <p:spPr>
+          <a:xfrm>
+            <a:off x="8586216" y="4425696"/>
+            <a:ext cx="2459736" cy="237744"/>
+          </a:xfrm>
+          <a:prstGeom prst="rect">
+            <a:avLst/>
+          </a:prstGeom>
+          <a:noFill/>
+        </p:spPr>
+        <p:txBody>
+          <a:bodyPr wrap="none">
+            <a:spAutoFit/>
+          </a:bodyPr>
+          <a:lstStyle/>
+          <a:p>
+            <a:pPr algn="l">
+              <a:defRPr sz="950" b="0">
+                <a:solidFill>
+                  <a:srgbClr val="6B7280"/>
+                </a:solidFill>
+                <a:latin typeface="Calibri"/>
+              </a:defRPr>
+            </a:pPr>
+            <a:r>
+              <a:t>Jtc Insurance Agency, Inc.</a:t>
+            </a:r>
+          </a:p>
+        </p:txBody>
+      </p:sp>
+      <p:sp>
+        <p:nvSpPr>
+          <p:cNvPr id="185" name="TextBox 184"/>
+          <p:cNvSpPr txBox="1"/>
+          <p:nvPr/>
+        </p:nvSpPr>
+        <p:spPr>
+          <a:xfrm>
+            <a:off x="11045952" y="4425696"/>
+            <a:ext cx="914400" cy="237744"/>
+          </a:xfrm>
+          <a:prstGeom prst="rect">
+            <a:avLst/>
+          </a:prstGeom>
+          <a:noFill/>
+        </p:spPr>
+        <p:txBody>
+          <a:bodyPr wrap="none">
+            <a:spAutoFit/>
+          </a:bodyPr>
+          <a:lstStyle/>
+          <a:p>
+            <a:pPr algn="ctr">
+              <a:defRPr sz="950" b="1">
+                <a:solidFill>
+                  <a:srgbClr val="111827"/>
+                </a:solidFill>
+                <a:latin typeface="Calibri"/>
+              </a:defRPr>
+            </a:pPr>
+            <a:r>
+              <a:t>$368K</a:t>
+            </a:r>
+          </a:p>
+        </p:txBody>
+      </p:sp>
+      <p:sp>
+        <p:nvSpPr>
+          <p:cNvPr id="186" name="Rectangle 185"/>
+          <p:cNvSpPr/>
+          <p:nvPr/>
+        </p:nvSpPr>
+        <p:spPr>
+          <a:xfrm>
+            <a:off x="6254496" y="4663440"/>
             <a:ext cx="5705856" cy="256032"/>
           </a:xfrm>
           <a:prstGeom prst="rect">
@@ -18522,13 +18709,13 @@
       </p:sp>
       <p:sp>
         <p:nvSpPr>
-          <p:cNvPr id="182" name="TextBox 181"/>
-          <p:cNvSpPr txBox="1"/>
-          <p:nvPr/>
-        </p:nvSpPr>
-        <p:spPr>
-          <a:xfrm>
-            <a:off x="6254496" y="4425696"/>
+          <p:cNvPr id="187" name="TextBox 186"/>
+          <p:cNvSpPr txBox="1"/>
+          <p:nvPr/>
+        </p:nvSpPr>
+        <p:spPr>
+          <a:xfrm>
+            <a:off x="6254496" y="4681728"/>
             <a:ext cx="411480" cy="237744"/>
           </a:xfrm>
           <a:prstGeom prst="rect">
@@ -18551,20 +18738,20 @@
               </a:defRPr>
             </a:pPr>
             <a:r>
-              <a:t>34</a:t>
-            </a:r>
-          </a:p>
-        </p:txBody>
-      </p:sp>
-      <p:sp>
-        <p:nvSpPr>
-          <p:cNvPr id="183" name="TextBox 182"/>
-          <p:cNvSpPr txBox="1"/>
-          <p:nvPr/>
-        </p:nvSpPr>
-        <p:spPr>
-          <a:xfrm>
-            <a:off x="6665976" y="4425696"/>
+              <a:t>35</a:t>
+            </a:r>
+          </a:p>
+        </p:txBody>
+      </p:sp>
+      <p:sp>
+        <p:nvSpPr>
+          <p:cNvPr id="188" name="TextBox 187"/>
+          <p:cNvSpPr txBox="1"/>
+          <p:nvPr/>
+        </p:nvSpPr>
+        <p:spPr>
+          <a:xfrm>
+            <a:off x="6665976" y="4681728"/>
             <a:ext cx="1920240" cy="237744"/>
           </a:xfrm>
           <a:prstGeom prst="rect">
@@ -18594,13 +18781,13 @@
       </p:sp>
       <p:sp>
         <p:nvSpPr>
-          <p:cNvPr id="184" name="TextBox 183"/>
-          <p:cNvSpPr txBox="1"/>
-          <p:nvPr/>
-        </p:nvSpPr>
-        <p:spPr>
-          <a:xfrm>
-            <a:off x="8586216" y="4425696"/>
+          <p:cNvPr id="189" name="TextBox 188"/>
+          <p:cNvSpPr txBox="1"/>
+          <p:nvPr/>
+        </p:nvSpPr>
+        <p:spPr>
+          <a:xfrm>
+            <a:off x="8586216" y="4681728"/>
             <a:ext cx="2459736" cy="237744"/>
           </a:xfrm>
           <a:prstGeom prst="rect">
@@ -18630,13 +18817,13 @@
       </p:sp>
       <p:sp>
         <p:nvSpPr>
-          <p:cNvPr id="185" name="TextBox 184"/>
-          <p:cNvSpPr txBox="1"/>
-          <p:nvPr/>
-        </p:nvSpPr>
-        <p:spPr>
-          <a:xfrm>
-            <a:off x="11045952" y="4425696"/>
+          <p:cNvPr id="190" name="TextBox 189"/>
+          <p:cNvSpPr txBox="1"/>
+          <p:nvPr/>
+        </p:nvSpPr>
+        <p:spPr>
+          <a:xfrm>
+            <a:off x="11045952" y="4681728"/>
             <a:ext cx="914400" cy="237744"/>
           </a:xfrm>
           <a:prstGeom prst="rect">
@@ -18666,13 +18853,200 @@
       </p:sp>
       <p:sp>
         <p:nvSpPr>
-          <p:cNvPr id="186" name="Rectangle 185"/>
+          <p:cNvPr id="191" name="Rectangle 190"/>
           <p:cNvSpPr/>
           <p:nvPr/>
         </p:nvSpPr>
         <p:spPr>
           <a:xfrm>
-            <a:off x="6254496" y="4663440"/>
+            <a:off x="6254496" y="4919472"/>
+            <a:ext cx="5705856" cy="256032"/>
+          </a:xfrm>
+          <a:prstGeom prst="rect">
+            <a:avLst/>
+          </a:prstGeom>
+          <a:solidFill>
+            <a:srgbClr val="F9FAFB"/>
+          </a:solidFill>
+          <a:ln>
+            <a:noFill/>
+          </a:ln>
+        </p:spPr>
+        <p:style>
+          <a:lnRef idx="1">
+            <a:schemeClr val="accent1"/>
+          </a:lnRef>
+          <a:fillRef idx="3">
+            <a:schemeClr val="accent1"/>
+          </a:fillRef>
+          <a:effectRef idx="2">
+            <a:schemeClr val="accent1"/>
+          </a:effectRef>
+          <a:fontRef idx="minor">
+            <a:schemeClr val="lt1"/>
+          </a:fontRef>
+        </p:style>
+        <p:txBody>
+          <a:bodyPr rtlCol="0" anchor="ctr"/>
+          <a:lstStyle/>
+          <a:p>
+            <a:pPr algn="ctr"/>
+          </a:p>
+        </p:txBody>
+      </p:sp>
+      <p:sp>
+        <p:nvSpPr>
+          <p:cNvPr id="192" name="TextBox 191"/>
+          <p:cNvSpPr txBox="1"/>
+          <p:nvPr/>
+        </p:nvSpPr>
+        <p:spPr>
+          <a:xfrm>
+            <a:off x="6254496" y="4937760"/>
+            <a:ext cx="411480" cy="237744"/>
+          </a:xfrm>
+          <a:prstGeom prst="rect">
+            <a:avLst/>
+          </a:prstGeom>
+          <a:noFill/>
+        </p:spPr>
+        <p:txBody>
+          <a:bodyPr wrap="none">
+            <a:spAutoFit/>
+          </a:bodyPr>
+          <a:lstStyle/>
+          <a:p>
+            <a:pPr algn="ctr">
+              <a:defRPr sz="950" b="1">
+                <a:solidFill>
+                  <a:srgbClr val="6B7280"/>
+                </a:solidFill>
+                <a:latin typeface="Calibri"/>
+              </a:defRPr>
+            </a:pPr>
+            <a:r>
+              <a:t>36</a:t>
+            </a:r>
+          </a:p>
+        </p:txBody>
+      </p:sp>
+      <p:sp>
+        <p:nvSpPr>
+          <p:cNvPr id="193" name="TextBox 192"/>
+          <p:cNvSpPr txBox="1"/>
+          <p:nvPr/>
+        </p:nvSpPr>
+        <p:spPr>
+          <a:xfrm>
+            <a:off x="6665976" y="4937760"/>
+            <a:ext cx="1920240" cy="237744"/>
+          </a:xfrm>
+          <a:prstGeom prst="rect">
+            <a:avLst/>
+          </a:prstGeom>
+          <a:noFill/>
+        </p:spPr>
+        <p:txBody>
+          <a:bodyPr wrap="none">
+            <a:spAutoFit/>
+          </a:bodyPr>
+          <a:lstStyle/>
+          <a:p>
+            <a:pPr algn="l">
+              <a:defRPr sz="950" b="1">
+                <a:solidFill>
+                  <a:srgbClr val="111827"/>
+                </a:solidFill>
+                <a:latin typeface="Calibri"/>
+              </a:defRPr>
+            </a:pPr>
+            <a:r>
+              <a:t>Ibrahim Mammo</a:t>
+            </a:r>
+          </a:p>
+        </p:txBody>
+      </p:sp>
+      <p:sp>
+        <p:nvSpPr>
+          <p:cNvPr id="194" name="TextBox 193"/>
+          <p:cNvSpPr txBox="1"/>
+          <p:nvPr/>
+        </p:nvSpPr>
+        <p:spPr>
+          <a:xfrm>
+            <a:off x="8586216" y="4937760"/>
+            <a:ext cx="2459736" cy="237744"/>
+          </a:xfrm>
+          <a:prstGeom prst="rect">
+            <a:avLst/>
+          </a:prstGeom>
+          <a:noFill/>
+        </p:spPr>
+        <p:txBody>
+          <a:bodyPr wrap="none">
+            <a:spAutoFit/>
+          </a:bodyPr>
+          <a:lstStyle/>
+          <a:p>
+            <a:pPr algn="l">
+              <a:defRPr sz="950" b="0">
+                <a:solidFill>
+                  <a:srgbClr val="6B7280"/>
+                </a:solidFill>
+                <a:latin typeface="Calibri"/>
+              </a:defRPr>
+            </a:pPr>
+            <a:r>
+              <a:t>Surefire Insurance Agency Corp.</a:t>
+            </a:r>
+          </a:p>
+        </p:txBody>
+      </p:sp>
+      <p:sp>
+        <p:nvSpPr>
+          <p:cNvPr id="195" name="TextBox 194"/>
+          <p:cNvSpPr txBox="1"/>
+          <p:nvPr/>
+        </p:nvSpPr>
+        <p:spPr>
+          <a:xfrm>
+            <a:off x="11045952" y="4937760"/>
+            <a:ext cx="914400" cy="237744"/>
+          </a:xfrm>
+          <a:prstGeom prst="rect">
+            <a:avLst/>
+          </a:prstGeom>
+          <a:noFill/>
+        </p:spPr>
+        <p:txBody>
+          <a:bodyPr wrap="none">
+            <a:spAutoFit/>
+          </a:bodyPr>
+          <a:lstStyle/>
+          <a:p>
+            <a:pPr algn="ctr">
+              <a:defRPr sz="950" b="1">
+                <a:solidFill>
+                  <a:srgbClr val="111827"/>
+                </a:solidFill>
+                <a:latin typeface="Calibri"/>
+              </a:defRPr>
+            </a:pPr>
+            <a:r>
+              <a:t>$365K</a:t>
+            </a:r>
+          </a:p>
+        </p:txBody>
+      </p:sp>
+      <p:sp>
+        <p:nvSpPr>
+          <p:cNvPr id="196" name="Rectangle 195"/>
+          <p:cNvSpPr/>
+          <p:nvPr/>
+        </p:nvSpPr>
+        <p:spPr>
+          <a:xfrm>
+            <a:off x="6254496" y="5175504"/>
             <a:ext cx="5705856" cy="256032"/>
           </a:xfrm>
           <a:prstGeom prst="rect">
@@ -18709,13 +19083,13 @@
       </p:sp>
       <p:sp>
         <p:nvSpPr>
-          <p:cNvPr id="187" name="TextBox 186"/>
-          <p:cNvSpPr txBox="1"/>
-          <p:nvPr/>
-        </p:nvSpPr>
-        <p:spPr>
-          <a:xfrm>
-            <a:off x="6254496" y="4681728"/>
+          <p:cNvPr id="197" name="TextBox 196"/>
+          <p:cNvSpPr txBox="1"/>
+          <p:nvPr/>
+        </p:nvSpPr>
+        <p:spPr>
+          <a:xfrm>
+            <a:off x="6254496" y="5193792"/>
             <a:ext cx="411480" cy="237744"/>
           </a:xfrm>
           <a:prstGeom prst="rect">
@@ -18738,20 +19112,20 @@
               </a:defRPr>
             </a:pPr>
             <a:r>
-              <a:t>35</a:t>
-            </a:r>
-          </a:p>
-        </p:txBody>
-      </p:sp>
-      <p:sp>
-        <p:nvSpPr>
-          <p:cNvPr id="188" name="TextBox 187"/>
-          <p:cNvSpPr txBox="1"/>
-          <p:nvPr/>
-        </p:nvSpPr>
-        <p:spPr>
-          <a:xfrm>
-            <a:off x="6665976" y="4681728"/>
+              <a:t>37</a:t>
+            </a:r>
+          </a:p>
+        </p:txBody>
+      </p:sp>
+      <p:sp>
+        <p:nvSpPr>
+          <p:cNvPr id="198" name="TextBox 197"/>
+          <p:cNvSpPr txBox="1"/>
+          <p:nvPr/>
+        </p:nvSpPr>
+        <p:spPr>
+          <a:xfrm>
+            <a:off x="6665976" y="5193792"/>
             <a:ext cx="1920240" cy="237744"/>
           </a:xfrm>
           <a:prstGeom prst="rect">
@@ -18774,20 +19148,20 @@
               </a:defRPr>
             </a:pPr>
             <a:r>
-              <a:t>Ibrahim Mammo</a:t>
-            </a:r>
-          </a:p>
-        </p:txBody>
-      </p:sp>
-      <p:sp>
-        <p:nvSpPr>
-          <p:cNvPr id="189" name="TextBox 188"/>
-          <p:cNvSpPr txBox="1"/>
-          <p:nvPr/>
-        </p:nvSpPr>
-        <p:spPr>
-          <a:xfrm>
-            <a:off x="8586216" y="4681728"/>
+              <a:t>Patricia Galindoparedes</a:t>
+            </a:r>
+          </a:p>
+        </p:txBody>
+      </p:sp>
+      <p:sp>
+        <p:nvSpPr>
+          <p:cNvPr id="199" name="TextBox 198"/>
+          <p:cNvSpPr txBox="1"/>
+          <p:nvPr/>
+        </p:nvSpPr>
+        <p:spPr>
+          <a:xfrm>
+            <a:off x="8586216" y="5193792"/>
             <a:ext cx="2459736" cy="237744"/>
           </a:xfrm>
           <a:prstGeom prst="rect">
@@ -18810,20 +19184,20 @@
               </a:defRPr>
             </a:pPr>
             <a:r>
-              <a:t>Surefire Insurance Agency Corp.</a:t>
-            </a:r>
-          </a:p>
-        </p:txBody>
-      </p:sp>
-      <p:sp>
-        <p:nvSpPr>
-          <p:cNvPr id="190" name="TextBox 189"/>
-          <p:cNvSpPr txBox="1"/>
-          <p:nvPr/>
-        </p:nvSpPr>
-        <p:spPr>
-          <a:xfrm>
-            <a:off x="11045952" y="4681728"/>
+              <a:t>Call Patty Insurance Services</a:t>
+            </a:r>
+          </a:p>
+        </p:txBody>
+      </p:sp>
+      <p:sp>
+        <p:nvSpPr>
+          <p:cNvPr id="200" name="TextBox 199"/>
+          <p:cNvSpPr txBox="1"/>
+          <p:nvPr/>
+        </p:nvSpPr>
+        <p:spPr>
+          <a:xfrm>
+            <a:off x="11045952" y="5193792"/>
             <a:ext cx="914400" cy="237744"/>
           </a:xfrm>
           <a:prstGeom prst="rect">
@@ -18846,20 +19220,20 @@
               </a:defRPr>
             </a:pPr>
             <a:r>
-              <a:t>$365K</a:t>
-            </a:r>
-          </a:p>
-        </p:txBody>
-      </p:sp>
-      <p:sp>
-        <p:nvSpPr>
-          <p:cNvPr id="191" name="Rectangle 190"/>
+              <a:t>$361K</a:t>
+            </a:r>
+          </a:p>
+        </p:txBody>
+      </p:sp>
+      <p:sp>
+        <p:nvSpPr>
+          <p:cNvPr id="201" name="Rectangle 200"/>
           <p:cNvSpPr/>
           <p:nvPr/>
         </p:nvSpPr>
         <p:spPr>
           <a:xfrm>
-            <a:off x="6254496" y="4919472"/>
+            <a:off x="6254496" y="5431536"/>
             <a:ext cx="5705856" cy="256032"/>
           </a:xfrm>
           <a:prstGeom prst="rect">
@@ -18896,13 +19270,13 @@
       </p:sp>
       <p:sp>
         <p:nvSpPr>
-          <p:cNvPr id="192" name="TextBox 191"/>
-          <p:cNvSpPr txBox="1"/>
-          <p:nvPr/>
-        </p:nvSpPr>
-        <p:spPr>
-          <a:xfrm>
-            <a:off x="6254496" y="4937760"/>
+          <p:cNvPr id="202" name="TextBox 201"/>
+          <p:cNvSpPr txBox="1"/>
+          <p:nvPr/>
+        </p:nvSpPr>
+        <p:spPr>
+          <a:xfrm>
+            <a:off x="6254496" y="5449824"/>
             <a:ext cx="411480" cy="237744"/>
           </a:xfrm>
           <a:prstGeom prst="rect">
@@ -18925,20 +19299,20 @@
               </a:defRPr>
             </a:pPr>
             <a:r>
-              <a:t>36</a:t>
-            </a:r>
-          </a:p>
-        </p:txBody>
-      </p:sp>
-      <p:sp>
-        <p:nvSpPr>
-          <p:cNvPr id="193" name="TextBox 192"/>
-          <p:cNvSpPr txBox="1"/>
-          <p:nvPr/>
-        </p:nvSpPr>
-        <p:spPr>
-          <a:xfrm>
-            <a:off x="6665976" y="4937760"/>
+              <a:t>38</a:t>
+            </a:r>
+          </a:p>
+        </p:txBody>
+      </p:sp>
+      <p:sp>
+        <p:nvSpPr>
+          <p:cNvPr id="203" name="TextBox 202"/>
+          <p:cNvSpPr txBox="1"/>
+          <p:nvPr/>
+        </p:nvSpPr>
+        <p:spPr>
+          <a:xfrm>
+            <a:off x="6665976" y="5449824"/>
             <a:ext cx="1920240" cy="237744"/>
           </a:xfrm>
           <a:prstGeom prst="rect">
@@ -18961,20 +19335,20 @@
               </a:defRPr>
             </a:pPr>
             <a:r>
-              <a:t>Patricia Galindoparedes</a:t>
-            </a:r>
-          </a:p>
-        </p:txBody>
-      </p:sp>
-      <p:sp>
-        <p:nvSpPr>
-          <p:cNvPr id="194" name="TextBox 193"/>
-          <p:cNvSpPr txBox="1"/>
-          <p:nvPr/>
-        </p:nvSpPr>
-        <p:spPr>
-          <a:xfrm>
-            <a:off x="8586216" y="4937760"/>
+              <a:t>Kurtis Gautz</a:t>
+            </a:r>
+          </a:p>
+        </p:txBody>
+      </p:sp>
+      <p:sp>
+        <p:nvSpPr>
+          <p:cNvPr id="204" name="TextBox 203"/>
+          <p:cNvSpPr txBox="1"/>
+          <p:nvPr/>
+        </p:nvSpPr>
+        <p:spPr>
+          <a:xfrm>
+            <a:off x="8586216" y="5449824"/>
             <a:ext cx="2459736" cy="237744"/>
           </a:xfrm>
           <a:prstGeom prst="rect">
@@ -18997,20 +19371,20 @@
               </a:defRPr>
             </a:pPr>
             <a:r>
-              <a:t>Call Patty Insurance Services</a:t>
-            </a:r>
-          </a:p>
-        </p:txBody>
-      </p:sp>
-      <p:sp>
-        <p:nvSpPr>
-          <p:cNvPr id="195" name="TextBox 194"/>
-          <p:cNvSpPr txBox="1"/>
-          <p:nvPr/>
-        </p:nvSpPr>
-        <p:spPr>
-          <a:xfrm>
-            <a:off x="11045952" y="4937760"/>
+              <a:t>CRC Insurance Services, Inc</a:t>
+            </a:r>
+          </a:p>
+        </p:txBody>
+      </p:sp>
+      <p:sp>
+        <p:nvSpPr>
+          <p:cNvPr id="205" name="TextBox 204"/>
+          <p:cNvSpPr txBox="1"/>
+          <p:nvPr/>
+        </p:nvSpPr>
+        <p:spPr>
+          <a:xfrm>
+            <a:off x="11045952" y="5449824"/>
             <a:ext cx="914400" cy="237744"/>
           </a:xfrm>
           <a:prstGeom prst="rect">
@@ -19033,27 +19407,27 @@
               </a:defRPr>
             </a:pPr>
             <a:r>
-              <a:t>$361K</a:t>
-            </a:r>
-          </a:p>
-        </p:txBody>
-      </p:sp>
-      <p:sp>
-        <p:nvSpPr>
-          <p:cNvPr id="196" name="Rectangle 195"/>
+              <a:t>$352K</a:t>
+            </a:r>
+          </a:p>
+        </p:txBody>
+      </p:sp>
+      <p:sp>
+        <p:nvSpPr>
+          <p:cNvPr id="206" name="Rectangle 205"/>
           <p:cNvSpPr/>
           <p:nvPr/>
         </p:nvSpPr>
         <p:spPr>
           <a:xfrm>
-            <a:off x="6254496" y="5175504"/>
+            <a:off x="6254496" y="5687568"/>
             <a:ext cx="5705856" cy="256032"/>
           </a:xfrm>
           <a:prstGeom prst="rect">
             <a:avLst/>
           </a:prstGeom>
           <a:solidFill>
-            <a:srgbClr val="FFFFFF"/>
+            <a:srgbClr val="D1FAE5"/>
           </a:solidFill>
           <a:ln>
             <a:noFill/>
@@ -19083,13 +19457,13 @@
       </p:sp>
       <p:sp>
         <p:nvSpPr>
-          <p:cNvPr id="197" name="TextBox 196"/>
-          <p:cNvSpPr txBox="1"/>
-          <p:nvPr/>
-        </p:nvSpPr>
-        <p:spPr>
-          <a:xfrm>
-            <a:off x="6254496" y="5193792"/>
+          <p:cNvPr id="207" name="TextBox 206"/>
+          <p:cNvSpPr txBox="1"/>
+          <p:nvPr/>
+        </p:nvSpPr>
+        <p:spPr>
+          <a:xfrm>
+            <a:off x="6254496" y="5705856"/>
             <a:ext cx="411480" cy="237744"/>
           </a:xfrm>
           <a:prstGeom prst="rect">
@@ -19112,20 +19486,20 @@
               </a:defRPr>
             </a:pPr>
             <a:r>
-              <a:t>37</a:t>
-            </a:r>
-          </a:p>
-        </p:txBody>
-      </p:sp>
-      <p:sp>
-        <p:nvSpPr>
-          <p:cNvPr id="198" name="TextBox 197"/>
-          <p:cNvSpPr txBox="1"/>
-          <p:nvPr/>
-        </p:nvSpPr>
-        <p:spPr>
-          <a:xfrm>
-            <a:off x="6665976" y="5193792"/>
+              <a:t>39</a:t>
+            </a:r>
+          </a:p>
+        </p:txBody>
+      </p:sp>
+      <p:sp>
+        <p:nvSpPr>
+          <p:cNvPr id="208" name="TextBox 207"/>
+          <p:cNvSpPr txBox="1"/>
+          <p:nvPr/>
+        </p:nvSpPr>
+        <p:spPr>
+          <a:xfrm>
+            <a:off x="6665976" y="5705856"/>
             <a:ext cx="1920240" cy="237744"/>
           </a:xfrm>
           <a:prstGeom prst="rect">
@@ -19148,20 +19522,20 @@
               </a:defRPr>
             </a:pPr>
             <a:r>
-              <a:t>Kurtis Gautz</a:t>
-            </a:r>
-          </a:p>
-        </p:txBody>
-      </p:sp>
-      <p:sp>
-        <p:nvSpPr>
-          <p:cNvPr id="199" name="TextBox 198"/>
-          <p:cNvSpPr txBox="1"/>
-          <p:nvPr/>
-        </p:nvSpPr>
-        <p:spPr>
-          <a:xfrm>
-            <a:off x="8586216" y="5193792"/>
+              <a:t>Api_User Api_User</a:t>
+            </a:r>
+          </a:p>
+        </p:txBody>
+      </p:sp>
+      <p:sp>
+        <p:nvSpPr>
+          <p:cNvPr id="209" name="TextBox 208"/>
+          <p:cNvSpPr txBox="1"/>
+          <p:nvPr/>
+        </p:nvSpPr>
+        <p:spPr>
+          <a:xfrm>
+            <a:off x="8586216" y="5705856"/>
             <a:ext cx="2459736" cy="237744"/>
           </a:xfrm>
           <a:prstGeom prst="rect">
@@ -19184,20 +19558,20 @@
               </a:defRPr>
             </a:pPr>
             <a:r>
-              <a:t>CRC Insurance Services, Inc</a:t>
-            </a:r>
-          </a:p>
-        </p:txBody>
-      </p:sp>
-      <p:sp>
-        <p:nvSpPr>
-          <p:cNvPr id="200" name="TextBox 199"/>
-          <p:cNvSpPr txBox="1"/>
-          <p:nvPr/>
-        </p:nvSpPr>
-        <p:spPr>
-          <a:xfrm>
-            <a:off x="11045952" y="5193792"/>
+              <a:t>Insurance4Truckers LLC</a:t>
+            </a:r>
+          </a:p>
+        </p:txBody>
+      </p:sp>
+      <p:sp>
+        <p:nvSpPr>
+          <p:cNvPr id="210" name="TextBox 209"/>
+          <p:cNvSpPr txBox="1"/>
+          <p:nvPr/>
+        </p:nvSpPr>
+        <p:spPr>
+          <a:xfrm>
+            <a:off x="11045952" y="5705856"/>
             <a:ext cx="914400" cy="237744"/>
           </a:xfrm>
           <a:prstGeom prst="rect">
@@ -19220,20 +19594,20 @@
               </a:defRPr>
             </a:pPr>
             <a:r>
-              <a:t>$352K</a:t>
-            </a:r>
-          </a:p>
-        </p:txBody>
-      </p:sp>
-      <p:sp>
-        <p:nvSpPr>
-          <p:cNvPr id="201" name="Rectangle 200"/>
+              <a:t>$344K</a:t>
+            </a:r>
+          </a:p>
+        </p:txBody>
+      </p:sp>
+      <p:sp>
+        <p:nvSpPr>
+          <p:cNvPr id="211" name="Rectangle 210"/>
           <p:cNvSpPr/>
           <p:nvPr/>
         </p:nvSpPr>
         <p:spPr>
           <a:xfrm>
-            <a:off x="6254496" y="5431536"/>
+            <a:off x="6254496" y="5943600"/>
             <a:ext cx="5705856" cy="256032"/>
           </a:xfrm>
           <a:prstGeom prst="rect">
@@ -19270,13 +19644,13 @@
       </p:sp>
       <p:sp>
         <p:nvSpPr>
-          <p:cNvPr id="202" name="TextBox 201"/>
-          <p:cNvSpPr txBox="1"/>
-          <p:nvPr/>
-        </p:nvSpPr>
-        <p:spPr>
-          <a:xfrm>
-            <a:off x="6254496" y="5449824"/>
+          <p:cNvPr id="212" name="TextBox 211"/>
+          <p:cNvSpPr txBox="1"/>
+          <p:nvPr/>
+        </p:nvSpPr>
+        <p:spPr>
+          <a:xfrm>
+            <a:off x="6254496" y="5961888"/>
             <a:ext cx="411480" cy="237744"/>
           </a:xfrm>
           <a:prstGeom prst="rect">
@@ -19299,20 +19673,20 @@
               </a:defRPr>
             </a:pPr>
             <a:r>
-              <a:t>38</a:t>
-            </a:r>
-          </a:p>
-        </p:txBody>
-      </p:sp>
-      <p:sp>
-        <p:nvSpPr>
-          <p:cNvPr id="203" name="TextBox 202"/>
-          <p:cNvSpPr txBox="1"/>
-          <p:nvPr/>
-        </p:nvSpPr>
-        <p:spPr>
-          <a:xfrm>
-            <a:off x="6665976" y="5449824"/>
+              <a:t>40</a:t>
+            </a:r>
+          </a:p>
+        </p:txBody>
+      </p:sp>
+      <p:sp>
+        <p:nvSpPr>
+          <p:cNvPr id="213" name="TextBox 212"/>
+          <p:cNvSpPr txBox="1"/>
+          <p:nvPr/>
+        </p:nvSpPr>
+        <p:spPr>
+          <a:xfrm>
+            <a:off x="6665976" y="5961888"/>
             <a:ext cx="1920240" cy="237744"/>
           </a:xfrm>
           <a:prstGeom prst="rect">
@@ -19342,13 +19716,13 @@
       </p:sp>
       <p:sp>
         <p:nvSpPr>
-          <p:cNvPr id="204" name="TextBox 203"/>
-          <p:cNvSpPr txBox="1"/>
-          <p:nvPr/>
-        </p:nvSpPr>
-        <p:spPr>
-          <a:xfrm>
-            <a:off x="8586216" y="5449824"/>
+          <p:cNvPr id="214" name="TextBox 213"/>
+          <p:cNvSpPr txBox="1"/>
+          <p:nvPr/>
+        </p:nvSpPr>
+        <p:spPr>
+          <a:xfrm>
+            <a:off x="8586216" y="5961888"/>
             <a:ext cx="2459736" cy="237744"/>
           </a:xfrm>
           <a:prstGeom prst="rect">
@@ -19378,380 +19752,6 @@
       </p:sp>
       <p:sp>
         <p:nvSpPr>
-          <p:cNvPr id="205" name="TextBox 204"/>
-          <p:cNvSpPr txBox="1"/>
-          <p:nvPr/>
-        </p:nvSpPr>
-        <p:spPr>
-          <a:xfrm>
-            <a:off x="11045952" y="5449824"/>
-            <a:ext cx="914400" cy="237744"/>
-          </a:xfrm>
-          <a:prstGeom prst="rect">
-            <a:avLst/>
-          </a:prstGeom>
-          <a:noFill/>
-        </p:spPr>
-        <p:txBody>
-          <a:bodyPr wrap="none">
-            <a:spAutoFit/>
-          </a:bodyPr>
-          <a:lstStyle/>
-          <a:p>
-            <a:pPr algn="ctr">
-              <a:defRPr sz="950" b="1">
-                <a:solidFill>
-                  <a:srgbClr val="111827"/>
-                </a:solidFill>
-                <a:latin typeface="Calibri"/>
-              </a:defRPr>
-            </a:pPr>
-            <a:r>
-              <a:t>$341K</a:t>
-            </a:r>
-          </a:p>
-        </p:txBody>
-      </p:sp>
-      <p:sp>
-        <p:nvSpPr>
-          <p:cNvPr id="206" name="Rectangle 205"/>
-          <p:cNvSpPr/>
-          <p:nvPr/>
-        </p:nvSpPr>
-        <p:spPr>
-          <a:xfrm>
-            <a:off x="6254496" y="5687568"/>
-            <a:ext cx="5705856" cy="256032"/>
-          </a:xfrm>
-          <a:prstGeom prst="rect">
-            <a:avLst/>
-          </a:prstGeom>
-          <a:solidFill>
-            <a:srgbClr val="FFFFFF"/>
-          </a:solidFill>
-          <a:ln>
-            <a:noFill/>
-          </a:ln>
-        </p:spPr>
-        <p:style>
-          <a:lnRef idx="1">
-            <a:schemeClr val="accent1"/>
-          </a:lnRef>
-          <a:fillRef idx="3">
-            <a:schemeClr val="accent1"/>
-          </a:fillRef>
-          <a:effectRef idx="2">
-            <a:schemeClr val="accent1"/>
-          </a:effectRef>
-          <a:fontRef idx="minor">
-            <a:schemeClr val="lt1"/>
-          </a:fontRef>
-        </p:style>
-        <p:txBody>
-          <a:bodyPr rtlCol="0" anchor="ctr"/>
-          <a:lstStyle/>
-          <a:p>
-            <a:pPr algn="ctr"/>
-          </a:p>
-        </p:txBody>
-      </p:sp>
-      <p:sp>
-        <p:nvSpPr>
-          <p:cNvPr id="207" name="TextBox 206"/>
-          <p:cNvSpPr txBox="1"/>
-          <p:nvPr/>
-        </p:nvSpPr>
-        <p:spPr>
-          <a:xfrm>
-            <a:off x="6254496" y="5705856"/>
-            <a:ext cx="411480" cy="237744"/>
-          </a:xfrm>
-          <a:prstGeom prst="rect">
-            <a:avLst/>
-          </a:prstGeom>
-          <a:noFill/>
-        </p:spPr>
-        <p:txBody>
-          <a:bodyPr wrap="none">
-            <a:spAutoFit/>
-          </a:bodyPr>
-          <a:lstStyle/>
-          <a:p>
-            <a:pPr algn="ctr">
-              <a:defRPr sz="950" b="1">
-                <a:solidFill>
-                  <a:srgbClr val="6B7280"/>
-                </a:solidFill>
-                <a:latin typeface="Calibri"/>
-              </a:defRPr>
-            </a:pPr>
-            <a:r>
-              <a:t>39</a:t>
-            </a:r>
-          </a:p>
-        </p:txBody>
-      </p:sp>
-      <p:sp>
-        <p:nvSpPr>
-          <p:cNvPr id="208" name="TextBox 207"/>
-          <p:cNvSpPr txBox="1"/>
-          <p:nvPr/>
-        </p:nvSpPr>
-        <p:spPr>
-          <a:xfrm>
-            <a:off x="6665976" y="5705856"/>
-            <a:ext cx="1920240" cy="237744"/>
-          </a:xfrm>
-          <a:prstGeom prst="rect">
-            <a:avLst/>
-          </a:prstGeom>
-          <a:noFill/>
-        </p:spPr>
-        <p:txBody>
-          <a:bodyPr wrap="none">
-            <a:spAutoFit/>
-          </a:bodyPr>
-          <a:lstStyle/>
-          <a:p>
-            <a:pPr algn="l">
-              <a:defRPr sz="950" b="1">
-                <a:solidFill>
-                  <a:srgbClr val="111827"/>
-                </a:solidFill>
-                <a:latin typeface="Calibri"/>
-              </a:defRPr>
-            </a:pPr>
-            <a:r>
-              <a:t>Omar Elmanzalawy</a:t>
-            </a:r>
-          </a:p>
-        </p:txBody>
-      </p:sp>
-      <p:sp>
-        <p:nvSpPr>
-          <p:cNvPr id="209" name="TextBox 208"/>
-          <p:cNvSpPr txBox="1"/>
-          <p:nvPr/>
-        </p:nvSpPr>
-        <p:spPr>
-          <a:xfrm>
-            <a:off x="8586216" y="5705856"/>
-            <a:ext cx="2459736" cy="237744"/>
-          </a:xfrm>
-          <a:prstGeom prst="rect">
-            <a:avLst/>
-          </a:prstGeom>
-          <a:noFill/>
-        </p:spPr>
-        <p:txBody>
-          <a:bodyPr wrap="none">
-            <a:spAutoFit/>
-          </a:bodyPr>
-          <a:lstStyle/>
-          <a:p>
-            <a:pPr algn="l">
-              <a:defRPr sz="950" b="0">
-                <a:solidFill>
-                  <a:srgbClr val="6B7280"/>
-                </a:solidFill>
-                <a:latin typeface="Calibri"/>
-              </a:defRPr>
-            </a:pPr>
-            <a:r>
-              <a:t>First Connect Insurance</a:t>
-            </a:r>
-          </a:p>
-        </p:txBody>
-      </p:sp>
-      <p:sp>
-        <p:nvSpPr>
-          <p:cNvPr id="210" name="TextBox 209"/>
-          <p:cNvSpPr txBox="1"/>
-          <p:nvPr/>
-        </p:nvSpPr>
-        <p:spPr>
-          <a:xfrm>
-            <a:off x="11045952" y="5705856"/>
-            <a:ext cx="914400" cy="237744"/>
-          </a:xfrm>
-          <a:prstGeom prst="rect">
-            <a:avLst/>
-          </a:prstGeom>
-          <a:noFill/>
-        </p:spPr>
-        <p:txBody>
-          <a:bodyPr wrap="none">
-            <a:spAutoFit/>
-          </a:bodyPr>
-          <a:lstStyle/>
-          <a:p>
-            <a:pPr algn="ctr">
-              <a:defRPr sz="950" b="1">
-                <a:solidFill>
-                  <a:srgbClr val="111827"/>
-                </a:solidFill>
-                <a:latin typeface="Calibri"/>
-              </a:defRPr>
-            </a:pPr>
-            <a:r>
-              <a:t>$339K</a:t>
-            </a:r>
-          </a:p>
-        </p:txBody>
-      </p:sp>
-      <p:sp>
-        <p:nvSpPr>
-          <p:cNvPr id="211" name="Rectangle 210"/>
-          <p:cNvSpPr/>
-          <p:nvPr/>
-        </p:nvSpPr>
-        <p:spPr>
-          <a:xfrm>
-            <a:off x="6254496" y="5943600"/>
-            <a:ext cx="5705856" cy="256032"/>
-          </a:xfrm>
-          <a:prstGeom prst="rect">
-            <a:avLst/>
-          </a:prstGeom>
-          <a:solidFill>
-            <a:srgbClr val="F9FAFB"/>
-          </a:solidFill>
-          <a:ln>
-            <a:noFill/>
-          </a:ln>
-        </p:spPr>
-        <p:style>
-          <a:lnRef idx="1">
-            <a:schemeClr val="accent1"/>
-          </a:lnRef>
-          <a:fillRef idx="3">
-            <a:schemeClr val="accent1"/>
-          </a:fillRef>
-          <a:effectRef idx="2">
-            <a:schemeClr val="accent1"/>
-          </a:effectRef>
-          <a:fontRef idx="minor">
-            <a:schemeClr val="lt1"/>
-          </a:fontRef>
-        </p:style>
-        <p:txBody>
-          <a:bodyPr rtlCol="0" anchor="ctr"/>
-          <a:lstStyle/>
-          <a:p>
-            <a:pPr algn="ctr"/>
-          </a:p>
-        </p:txBody>
-      </p:sp>
-      <p:sp>
-        <p:nvSpPr>
-          <p:cNvPr id="212" name="TextBox 211"/>
-          <p:cNvSpPr txBox="1"/>
-          <p:nvPr/>
-        </p:nvSpPr>
-        <p:spPr>
-          <a:xfrm>
-            <a:off x="6254496" y="5961888"/>
-            <a:ext cx="411480" cy="237744"/>
-          </a:xfrm>
-          <a:prstGeom prst="rect">
-            <a:avLst/>
-          </a:prstGeom>
-          <a:noFill/>
-        </p:spPr>
-        <p:txBody>
-          <a:bodyPr wrap="none">
-            <a:spAutoFit/>
-          </a:bodyPr>
-          <a:lstStyle/>
-          <a:p>
-            <a:pPr algn="ctr">
-              <a:defRPr sz="950" b="1">
-                <a:solidFill>
-                  <a:srgbClr val="6B7280"/>
-                </a:solidFill>
-                <a:latin typeface="Calibri"/>
-              </a:defRPr>
-            </a:pPr>
-            <a:r>
-              <a:t>40</a:t>
-            </a:r>
-          </a:p>
-        </p:txBody>
-      </p:sp>
-      <p:sp>
-        <p:nvSpPr>
-          <p:cNvPr id="213" name="TextBox 212"/>
-          <p:cNvSpPr txBox="1"/>
-          <p:nvPr/>
-        </p:nvSpPr>
-        <p:spPr>
-          <a:xfrm>
-            <a:off x="6665976" y="5961888"/>
-            <a:ext cx="1920240" cy="237744"/>
-          </a:xfrm>
-          <a:prstGeom prst="rect">
-            <a:avLst/>
-          </a:prstGeom>
-          <a:noFill/>
-        </p:spPr>
-        <p:txBody>
-          <a:bodyPr wrap="none">
-            <a:spAutoFit/>
-          </a:bodyPr>
-          <a:lstStyle/>
-          <a:p>
-            <a:pPr algn="l">
-              <a:defRPr sz="950" b="1">
-                <a:solidFill>
-                  <a:srgbClr val="111827"/>
-                </a:solidFill>
-                <a:latin typeface="Calibri"/>
-              </a:defRPr>
-            </a:pPr>
-            <a:r>
-              <a:t>Venizelos Papadopulos</a:t>
-            </a:r>
-          </a:p>
-        </p:txBody>
-      </p:sp>
-      <p:sp>
-        <p:nvSpPr>
-          <p:cNvPr id="214" name="TextBox 213"/>
-          <p:cNvSpPr txBox="1"/>
-          <p:nvPr/>
-        </p:nvSpPr>
-        <p:spPr>
-          <a:xfrm>
-            <a:off x="8586216" y="5961888"/>
-            <a:ext cx="2459736" cy="237744"/>
-          </a:xfrm>
-          <a:prstGeom prst="rect">
-            <a:avLst/>
-          </a:prstGeom>
-          <a:noFill/>
-        </p:spPr>
-        <p:txBody>
-          <a:bodyPr wrap="none">
-            <a:spAutoFit/>
-          </a:bodyPr>
-          <a:lstStyle/>
-          <a:p>
-            <a:pPr algn="l">
-              <a:defRPr sz="950" b="0">
-                <a:solidFill>
-                  <a:srgbClr val="6B7280"/>
-                </a:solidFill>
-                <a:latin typeface="Calibri"/>
-              </a:defRPr>
-            </a:pPr>
-            <a:r>
-              <a:t>Exclusive Financial Services, Inc</a:t>
-            </a:r>
-          </a:p>
-        </p:txBody>
-      </p:sp>
-      <p:sp>
-        <p:nvSpPr>
           <p:cNvPr id="215" name="TextBox 214"/>
           <p:cNvSpPr txBox="1"/>
           <p:nvPr/>
@@ -19781,7 +19781,7 @@
               </a:defRPr>
             </a:pPr>
             <a:r>
-              <a:t>$334K</a:t>
+              <a:t>$341K</a:t>
             </a:r>
           </a:p>
         </p:txBody>
@@ -34143,7 +34143,7 @@
               </a:defRPr>
             </a:pPr>
             <a:r>
-              <a:t>$4.2M</a:t>
+              <a:t>$4.3M</a:t>
             </a:r>
           </a:p>
         </p:txBody>
@@ -34978,7 +34978,7 @@
               </a:defRPr>
             </a:pPr>
             <a:r>
-              <a:t>$3.7M</a:t>
+              <a:t>$3.8M</a:t>
             </a:r>
           </a:p>
         </p:txBody>
@@ -35417,7 +35417,7 @@
               </a:defRPr>
             </a:pPr>
             <a:r>
-              <a:t>$1.9M</a:t>
+              <a:t>$2.0M</a:t>
             </a:r>
           </a:p>
         </p:txBody>
@@ -36685,13 +36685,13 @@
             <a:pPr algn="ctr">
               <a:defRPr sz="950" b="0">
                 <a:solidFill>
-                  <a:srgbClr val="111827"/>
-                </a:solidFill>
-                <a:latin typeface="Calibri"/>
-              </a:defRPr>
-            </a:pPr>
-            <a:r>
-              <a:t>$0</a:t>
+                  <a:srgbClr val="059669"/>
+                </a:solidFill>
+                <a:latin typeface="Calibri"/>
+              </a:defRPr>
+            </a:pPr>
+            <a:r>
+              <a:t>$3K</a:t>
             </a:r>
           </a:p>
         </p:txBody>
@@ -36727,7 +36727,7 @@
               </a:defRPr>
             </a:pPr>
             <a:r>
-              <a:t>$271K</a:t>
+              <a:t>$273K</a:t>
             </a:r>
           </a:p>
         </p:txBody>
@@ -38447,7 +38447,7 @@
               </a:defRPr>
             </a:pPr>
             <a:r>
-              <a:t>$8.4M</a:t>
+              <a:t>$8.6M</a:t>
             </a:r>
           </a:p>
         </p:txBody>

--- a/generated/Sales Dashboards/BD Rep Scoreboard.pptx
+++ b/generated/Sales Dashboards/BD Rep Scoreboard.pptx
@@ -1661,7 +1661,7 @@
           </a:p>
           <a:p>
             <a:r>
-              <a:t>- We are 60 days into a 91-day quarter.</a:t>
+              <a:t>- We are 61 days into a 91-day quarter.</a:t>
             </a:r>
           </a:p>
         </p:txBody>
@@ -4902,7 +4902,7 @@
               </a:defRPr>
             </a:pPr>
             <a:r>
-              <a:t>As of May 30, 2026  |  60 days into Q2  |  31 days remaining</a:t>
+              <a:t>As of May 31, 2026  |  61 days into Q2  |  30 days remaining</a:t>
             </a:r>
           </a:p>
         </p:txBody>
@@ -4938,7 +4938,7 @@
               </a:defRPr>
             </a:pPr>
             <a:r>
-              <a:t>Generated May 30, 2026</a:t>
+              <a:t>Generated May 31, 2026</a:t>
             </a:r>
           </a:p>
         </p:txBody>
@@ -5019,7 +5019,7 @@
               </a:defRPr>
             </a:pPr>
             <a:r>
-              <a:t>$21.2M</a:t>
+              <a:t>$21.1M</a:t>
             </a:r>
           </a:p>
         </p:txBody>
@@ -5055,7 +5055,7 @@
               </a:defRPr>
             </a:pPr>
             <a:r>
-              <a:t>Team GWP Q2 YTD  |  Proj. $32.1M</a:t>
+              <a:t>Team GWP Q2 YTD  |  Proj. $31.5M</a:t>
             </a:r>
           </a:p>
         </p:txBody>
@@ -5134,7 +5134,7 @@
               </a:defRPr>
             </a:pPr>
             <a:r>
-              <a:t>Pacing 174% of Q1 Final</a:t>
+              <a:t>Pacing 171% of Q1 Final</a:t>
             </a:r>
           </a:p>
         </p:txBody>
@@ -5411,7 +5411,7 @@
               </a:defRPr>
             </a:pPr>
             <a:r>
-              <a:t>33,369</a:t>
+              <a:t>33,459</a:t>
             </a:r>
           </a:p>
         </p:txBody>
@@ -5526,7 +5526,7 @@
               </a:defRPr>
             </a:pPr>
             <a:r>
-              <a:t>Pacing 111% of Q1 Final</a:t>
+              <a:t>Pacing 109% of Q1 Final</a:t>
             </a:r>
           </a:p>
         </p:txBody>
@@ -5758,7 +5758,7 @@
               </a:defRPr>
             </a:pPr>
             <a:r>
-              <a:t>▲ $2.3M vs Apr pace</a:t>
+              <a:t>▲ $1.9M vs Apr pace</a:t>
             </a:r>
           </a:p>
         </p:txBody>
@@ -5830,7 +5830,7 @@
               </a:defRPr>
             </a:pPr>
             <a:r>
-              <a:t>▲ 15904 vs Apr (17465)</a:t>
+              <a:t>▲ 15997 vs Apr (17462)</a:t>
             </a:r>
           </a:p>
         </p:txBody>
@@ -6251,7 +6251,7 @@
               </a:defRPr>
             </a:pPr>
             <a:r>
-              <a:t>Endorsements (8%)</a:t>
+              <a:t>Endorsements (7%)</a:t>
             </a:r>
           </a:p>
         </p:txBody>
@@ -6600,7 +6600,7 @@
               </a:defRPr>
             </a:pPr>
             <a:r>
-              <a:t>45,705</a:t>
+              <a:t>45,704</a:t>
             </a:r>
           </a:p>
         </p:txBody>
@@ -6787,7 +6787,7 @@
               </a:defRPr>
             </a:pPr>
             <a:r>
-              <a:t>MTD (May):  $11.55M written  ·  $11.93M pace  ·  30/31 days elapsed</a:t>
+              <a:t>MTD (May):  $11.47M written  ·  $11.47M pace  ·  31/31 days elapsed</a:t>
             </a:r>
           </a:p>
         </p:txBody>
@@ -6952,7 +6952,7 @@
               </a:defRPr>
             </a:pPr>
             <a:r>
-              <a:t>Largest fleet policies written Apr 1–May 30  ·  Ranked by premium  ·  Fleet = 4+ power units</a:t>
+              <a:t>Largest fleet policies written Apr 1–May 31  ·  Ranked by premium  ·  Fleet = 4+ power units</a:t>
             </a:r>
           </a:p>
         </p:txBody>
@@ -6988,7 +6988,7 @@
               </a:defRPr>
             </a:pPr>
             <a:r>
-              <a:t>Generated May 30, 2026</a:t>
+              <a:t>Generated May 31, 2026</a:t>
             </a:r>
           </a:p>
         </p:txBody>
@@ -11891,7 +11891,7 @@
               </a:defRPr>
             </a:pPr>
             <a:r>
-              <a:t>Ranked by bound GWP written  ·  Mint-shaded row = new vs last week’s deck  ·  Apr 1–May 30  ·  Individual producers</a:t>
+              <a:t>Ranked by bound GWP written  ·  Mint-shaded row = new vs last week’s deck  ·  Apr 1–May 31  ·  Individual producers</a:t>
             </a:r>
           </a:p>
         </p:txBody>
@@ -11927,7 +11927,7 @@
               </a:defRPr>
             </a:pPr>
             <a:r>
-              <a:t>Generated May 30, 2026</a:t>
+              <a:t>Generated May 31, 2026</a:t>
             </a:r>
           </a:p>
         </p:txBody>
@@ -12488,7 +12488,7 @@
               </a:defRPr>
             </a:pPr>
             <a:r>
-              <a:t>$3.5M</a:t>
+              <a:t>$3.6M</a:t>
             </a:r>
           </a:p>
         </p:txBody>
@@ -13797,7 +13797,7 @@
               </a:defRPr>
             </a:pPr>
             <a:r>
-              <a:t>$1.0M</a:t>
+              <a:t>$1.1M</a:t>
             </a:r>
           </a:p>
         </p:txBody>
@@ -14919,7 +14919,7 @@
               </a:defRPr>
             </a:pPr>
             <a:r>
-              <a:t>$669K</a:t>
+              <a:t>$686K</a:t>
             </a:r>
           </a:p>
         </p:txBody>
@@ -17183,7 +17183,7 @@
             <a:avLst/>
           </a:prstGeom>
           <a:solidFill>
-            <a:srgbClr val="FFFFFF"/>
+            <a:srgbClr val="D1FAE5"/>
           </a:solidFill>
           <a:ln>
             <a:noFill/>
@@ -17278,7 +17278,7 @@
               </a:defRPr>
             </a:pPr>
             <a:r>
-              <a:t>Gayane Yeghiazaryan</a:t>
+              <a:t>Lynda Inderjeet</a:t>
             </a:r>
           </a:p>
         </p:txBody>
@@ -17314,7 +17314,7 @@
               </a:defRPr>
             </a:pPr>
             <a:r>
-              <a:t>Limosa Insurance Services Inc</a:t>
+              <a:t>R-T Specialty, LLC</a:t>
             </a:r>
           </a:p>
         </p:txBody>
@@ -17350,7 +17350,7 @@
               </a:defRPr>
             </a:pPr>
             <a:r>
-              <a:t>$427K</a:t>
+              <a:t>$430K</a:t>
             </a:r>
           </a:p>
         </p:txBody>
@@ -17465,7 +17465,7 @@
               </a:defRPr>
             </a:pPr>
             <a:r>
-              <a:t>Vladimir Tesler</a:t>
+              <a:t>Gayane Yeghiazaryan</a:t>
             </a:r>
           </a:p>
         </p:txBody>
@@ -17501,7 +17501,7 @@
               </a:defRPr>
             </a:pPr>
             <a:r>
-              <a:t>Insurance Planet</a:t>
+              <a:t>Limosa Insurance Services Inc</a:t>
             </a:r>
           </a:p>
         </p:txBody>
@@ -17537,7 +17537,7 @@
               </a:defRPr>
             </a:pPr>
             <a:r>
-              <a:t>$412K</a:t>
+              <a:t>$427K</a:t>
             </a:r>
           </a:p>
         </p:txBody>
@@ -17652,7 +17652,7 @@
               </a:defRPr>
             </a:pPr>
             <a:r>
-              <a:t>Raul Fernandez</a:t>
+              <a:t>Vladimir Tesler</a:t>
             </a:r>
           </a:p>
         </p:txBody>
@@ -17688,7 +17688,7 @@
               </a:defRPr>
             </a:pPr>
             <a:r>
-              <a:t>Ewall Insurance Company</a:t>
+              <a:t>Insurance Planet</a:t>
             </a:r>
           </a:p>
         </p:txBody>
@@ -17724,7 +17724,7 @@
               </a:defRPr>
             </a:pPr>
             <a:r>
-              <a:t>$408K</a:t>
+              <a:t>$412K</a:t>
             </a:r>
           </a:p>
         </p:txBody>
@@ -17738,6 +17738,193 @@
         <p:spPr>
           <a:xfrm>
             <a:off x="6254496" y="3383280"/>
+            <a:ext cx="5705856" cy="256032"/>
+          </a:xfrm>
+          <a:prstGeom prst="rect">
+            <a:avLst/>
+          </a:prstGeom>
+          <a:solidFill>
+            <a:srgbClr val="F9FAFB"/>
+          </a:solidFill>
+          <a:ln>
+            <a:noFill/>
+          </a:ln>
+        </p:spPr>
+        <p:style>
+          <a:lnRef idx="1">
+            <a:schemeClr val="accent1"/>
+          </a:lnRef>
+          <a:fillRef idx="3">
+            <a:schemeClr val="accent1"/>
+          </a:fillRef>
+          <a:effectRef idx="2">
+            <a:schemeClr val="accent1"/>
+          </a:effectRef>
+          <a:fontRef idx="minor">
+            <a:schemeClr val="lt1"/>
+          </a:fontRef>
+        </p:style>
+        <p:txBody>
+          <a:bodyPr rtlCol="0" anchor="ctr"/>
+          <a:lstStyle/>
+          <a:p>
+            <a:pPr algn="ctr"/>
+          </a:p>
+        </p:txBody>
+      </p:sp>
+      <p:sp>
+        <p:nvSpPr>
+          <p:cNvPr id="162" name="TextBox 161"/>
+          <p:cNvSpPr txBox="1"/>
+          <p:nvPr/>
+        </p:nvSpPr>
+        <p:spPr>
+          <a:xfrm>
+            <a:off x="6254496" y="3401568"/>
+            <a:ext cx="411480" cy="237744"/>
+          </a:xfrm>
+          <a:prstGeom prst="rect">
+            <a:avLst/>
+          </a:prstGeom>
+          <a:noFill/>
+        </p:spPr>
+        <p:txBody>
+          <a:bodyPr wrap="none">
+            <a:spAutoFit/>
+          </a:bodyPr>
+          <a:lstStyle/>
+          <a:p>
+            <a:pPr algn="ctr">
+              <a:defRPr sz="950" b="1">
+                <a:solidFill>
+                  <a:srgbClr val="6B7280"/>
+                </a:solidFill>
+                <a:latin typeface="Calibri"/>
+              </a:defRPr>
+            </a:pPr>
+            <a:r>
+              <a:t>30</a:t>
+            </a:r>
+          </a:p>
+        </p:txBody>
+      </p:sp>
+      <p:sp>
+        <p:nvSpPr>
+          <p:cNvPr id="163" name="TextBox 162"/>
+          <p:cNvSpPr txBox="1"/>
+          <p:nvPr/>
+        </p:nvSpPr>
+        <p:spPr>
+          <a:xfrm>
+            <a:off x="6665976" y="3401568"/>
+            <a:ext cx="1920240" cy="237744"/>
+          </a:xfrm>
+          <a:prstGeom prst="rect">
+            <a:avLst/>
+          </a:prstGeom>
+          <a:noFill/>
+        </p:spPr>
+        <p:txBody>
+          <a:bodyPr wrap="none">
+            <a:spAutoFit/>
+          </a:bodyPr>
+          <a:lstStyle/>
+          <a:p>
+            <a:pPr algn="l">
+              <a:defRPr sz="950" b="1">
+                <a:solidFill>
+                  <a:srgbClr val="111827"/>
+                </a:solidFill>
+                <a:latin typeface="Calibri"/>
+              </a:defRPr>
+            </a:pPr>
+            <a:r>
+              <a:t>Raul Fernandez</a:t>
+            </a:r>
+          </a:p>
+        </p:txBody>
+      </p:sp>
+      <p:sp>
+        <p:nvSpPr>
+          <p:cNvPr id="164" name="TextBox 163"/>
+          <p:cNvSpPr txBox="1"/>
+          <p:nvPr/>
+        </p:nvSpPr>
+        <p:spPr>
+          <a:xfrm>
+            <a:off x="8586216" y="3401568"/>
+            <a:ext cx="2459736" cy="237744"/>
+          </a:xfrm>
+          <a:prstGeom prst="rect">
+            <a:avLst/>
+          </a:prstGeom>
+          <a:noFill/>
+        </p:spPr>
+        <p:txBody>
+          <a:bodyPr wrap="none">
+            <a:spAutoFit/>
+          </a:bodyPr>
+          <a:lstStyle/>
+          <a:p>
+            <a:pPr algn="l">
+              <a:defRPr sz="950" b="0">
+                <a:solidFill>
+                  <a:srgbClr val="6B7280"/>
+                </a:solidFill>
+                <a:latin typeface="Calibri"/>
+              </a:defRPr>
+            </a:pPr>
+            <a:r>
+              <a:t>Ewall Insurance Company</a:t>
+            </a:r>
+          </a:p>
+        </p:txBody>
+      </p:sp>
+      <p:sp>
+        <p:nvSpPr>
+          <p:cNvPr id="165" name="TextBox 164"/>
+          <p:cNvSpPr txBox="1"/>
+          <p:nvPr/>
+        </p:nvSpPr>
+        <p:spPr>
+          <a:xfrm>
+            <a:off x="11045952" y="3401568"/>
+            <a:ext cx="914400" cy="237744"/>
+          </a:xfrm>
+          <a:prstGeom prst="rect">
+            <a:avLst/>
+          </a:prstGeom>
+          <a:noFill/>
+        </p:spPr>
+        <p:txBody>
+          <a:bodyPr wrap="none">
+            <a:spAutoFit/>
+          </a:bodyPr>
+          <a:lstStyle/>
+          <a:p>
+            <a:pPr algn="ctr">
+              <a:defRPr sz="950" b="1">
+                <a:solidFill>
+                  <a:srgbClr val="111827"/>
+                </a:solidFill>
+                <a:latin typeface="Calibri"/>
+              </a:defRPr>
+            </a:pPr>
+            <a:r>
+              <a:t>$408K</a:t>
+            </a:r>
+          </a:p>
+        </p:txBody>
+      </p:sp>
+      <p:sp>
+        <p:nvSpPr>
+          <p:cNvPr id="166" name="Rectangle 165"/>
+          <p:cNvSpPr/>
+          <p:nvPr/>
+        </p:nvSpPr>
+        <p:spPr>
+          <a:xfrm>
+            <a:off x="6254496" y="3639312"/>
             <a:ext cx="5705856" cy="256032"/>
           </a:xfrm>
           <a:prstGeom prst="rect">
@@ -17774,13 +17961,13 @@
       </p:sp>
       <p:sp>
         <p:nvSpPr>
-          <p:cNvPr id="162" name="TextBox 161"/>
-          <p:cNvSpPr txBox="1"/>
-          <p:nvPr/>
-        </p:nvSpPr>
-        <p:spPr>
-          <a:xfrm>
-            <a:off x="6254496" y="3401568"/>
+          <p:cNvPr id="167" name="TextBox 166"/>
+          <p:cNvSpPr txBox="1"/>
+          <p:nvPr/>
+        </p:nvSpPr>
+        <p:spPr>
+          <a:xfrm>
+            <a:off x="6254496" y="3657600"/>
             <a:ext cx="411480" cy="237744"/>
           </a:xfrm>
           <a:prstGeom prst="rect">
@@ -17803,20 +17990,20 @@
               </a:defRPr>
             </a:pPr>
             <a:r>
-              <a:t>30</a:t>
-            </a:r>
-          </a:p>
-        </p:txBody>
-      </p:sp>
-      <p:sp>
-        <p:nvSpPr>
-          <p:cNvPr id="163" name="TextBox 162"/>
-          <p:cNvSpPr txBox="1"/>
-          <p:nvPr/>
-        </p:nvSpPr>
-        <p:spPr>
-          <a:xfrm>
-            <a:off x="6665976" y="3401568"/>
+              <a:t>31</a:t>
+            </a:r>
+          </a:p>
+        </p:txBody>
+      </p:sp>
+      <p:sp>
+        <p:nvSpPr>
+          <p:cNvPr id="168" name="TextBox 167"/>
+          <p:cNvSpPr txBox="1"/>
+          <p:nvPr/>
+        </p:nvSpPr>
+        <p:spPr>
+          <a:xfrm>
+            <a:off x="6665976" y="3657600"/>
             <a:ext cx="1920240" cy="237744"/>
           </a:xfrm>
           <a:prstGeom prst="rect">
@@ -17846,13 +18033,13 @@
       </p:sp>
       <p:sp>
         <p:nvSpPr>
-          <p:cNvPr id="164" name="TextBox 163"/>
-          <p:cNvSpPr txBox="1"/>
-          <p:nvPr/>
-        </p:nvSpPr>
-        <p:spPr>
-          <a:xfrm>
-            <a:off x="8586216" y="3401568"/>
+          <p:cNvPr id="169" name="TextBox 168"/>
+          <p:cNvSpPr txBox="1"/>
+          <p:nvPr/>
+        </p:nvSpPr>
+        <p:spPr>
+          <a:xfrm>
+            <a:off x="8586216" y="3657600"/>
             <a:ext cx="2459736" cy="237744"/>
           </a:xfrm>
           <a:prstGeom prst="rect">
@@ -17882,193 +18069,6 @@
       </p:sp>
       <p:sp>
         <p:nvSpPr>
-          <p:cNvPr id="165" name="TextBox 164"/>
-          <p:cNvSpPr txBox="1"/>
-          <p:nvPr/>
-        </p:nvSpPr>
-        <p:spPr>
-          <a:xfrm>
-            <a:off x="11045952" y="3401568"/>
-            <a:ext cx="914400" cy="237744"/>
-          </a:xfrm>
-          <a:prstGeom prst="rect">
-            <a:avLst/>
-          </a:prstGeom>
-          <a:noFill/>
-        </p:spPr>
-        <p:txBody>
-          <a:bodyPr wrap="none">
-            <a:spAutoFit/>
-          </a:bodyPr>
-          <a:lstStyle/>
-          <a:p>
-            <a:pPr algn="ctr">
-              <a:defRPr sz="950" b="1">
-                <a:solidFill>
-                  <a:srgbClr val="111827"/>
-                </a:solidFill>
-                <a:latin typeface="Calibri"/>
-              </a:defRPr>
-            </a:pPr>
-            <a:r>
-              <a:t>$407K</a:t>
-            </a:r>
-          </a:p>
-        </p:txBody>
-      </p:sp>
-      <p:sp>
-        <p:nvSpPr>
-          <p:cNvPr id="166" name="Rectangle 165"/>
-          <p:cNvSpPr/>
-          <p:nvPr/>
-        </p:nvSpPr>
-        <p:spPr>
-          <a:xfrm>
-            <a:off x="6254496" y="3639312"/>
-            <a:ext cx="5705856" cy="256032"/>
-          </a:xfrm>
-          <a:prstGeom prst="rect">
-            <a:avLst/>
-          </a:prstGeom>
-          <a:solidFill>
-            <a:srgbClr val="D1FAE5"/>
-          </a:solidFill>
-          <a:ln>
-            <a:noFill/>
-          </a:ln>
-        </p:spPr>
-        <p:style>
-          <a:lnRef idx="1">
-            <a:schemeClr val="accent1"/>
-          </a:lnRef>
-          <a:fillRef idx="3">
-            <a:schemeClr val="accent1"/>
-          </a:fillRef>
-          <a:effectRef idx="2">
-            <a:schemeClr val="accent1"/>
-          </a:effectRef>
-          <a:fontRef idx="minor">
-            <a:schemeClr val="lt1"/>
-          </a:fontRef>
-        </p:style>
-        <p:txBody>
-          <a:bodyPr rtlCol="0" anchor="ctr"/>
-          <a:lstStyle/>
-          <a:p>
-            <a:pPr algn="ctr"/>
-          </a:p>
-        </p:txBody>
-      </p:sp>
-      <p:sp>
-        <p:nvSpPr>
-          <p:cNvPr id="167" name="TextBox 166"/>
-          <p:cNvSpPr txBox="1"/>
-          <p:nvPr/>
-        </p:nvSpPr>
-        <p:spPr>
-          <a:xfrm>
-            <a:off x="6254496" y="3657600"/>
-            <a:ext cx="411480" cy="237744"/>
-          </a:xfrm>
-          <a:prstGeom prst="rect">
-            <a:avLst/>
-          </a:prstGeom>
-          <a:noFill/>
-        </p:spPr>
-        <p:txBody>
-          <a:bodyPr wrap="none">
-            <a:spAutoFit/>
-          </a:bodyPr>
-          <a:lstStyle/>
-          <a:p>
-            <a:pPr algn="ctr">
-              <a:defRPr sz="950" b="1">
-                <a:solidFill>
-                  <a:srgbClr val="6B7280"/>
-                </a:solidFill>
-                <a:latin typeface="Calibri"/>
-              </a:defRPr>
-            </a:pPr>
-            <a:r>
-              <a:t>31</a:t>
-            </a:r>
-          </a:p>
-        </p:txBody>
-      </p:sp>
-      <p:sp>
-        <p:nvSpPr>
-          <p:cNvPr id="168" name="TextBox 167"/>
-          <p:cNvSpPr txBox="1"/>
-          <p:nvPr/>
-        </p:nvSpPr>
-        <p:spPr>
-          <a:xfrm>
-            <a:off x="6665976" y="3657600"/>
-            <a:ext cx="1920240" cy="237744"/>
-          </a:xfrm>
-          <a:prstGeom prst="rect">
-            <a:avLst/>
-          </a:prstGeom>
-          <a:noFill/>
-        </p:spPr>
-        <p:txBody>
-          <a:bodyPr wrap="none">
-            <a:spAutoFit/>
-          </a:bodyPr>
-          <a:lstStyle/>
-          <a:p>
-            <a:pPr algn="l">
-              <a:defRPr sz="950" b="1">
-                <a:solidFill>
-                  <a:srgbClr val="111827"/>
-                </a:solidFill>
-                <a:latin typeface="Calibri"/>
-              </a:defRPr>
-            </a:pPr>
-            <a:r>
-              <a:t>Lynda Inderjeet</a:t>
-            </a:r>
-          </a:p>
-        </p:txBody>
-      </p:sp>
-      <p:sp>
-        <p:nvSpPr>
-          <p:cNvPr id="169" name="TextBox 168"/>
-          <p:cNvSpPr txBox="1"/>
-          <p:nvPr/>
-        </p:nvSpPr>
-        <p:spPr>
-          <a:xfrm>
-            <a:off x="8586216" y="3657600"/>
-            <a:ext cx="2459736" cy="237744"/>
-          </a:xfrm>
-          <a:prstGeom prst="rect">
-            <a:avLst/>
-          </a:prstGeom>
-          <a:noFill/>
-        </p:spPr>
-        <p:txBody>
-          <a:bodyPr wrap="none">
-            <a:spAutoFit/>
-          </a:bodyPr>
-          <a:lstStyle/>
-          <a:p>
-            <a:pPr algn="l">
-              <a:defRPr sz="950" b="0">
-                <a:solidFill>
-                  <a:srgbClr val="6B7280"/>
-                </a:solidFill>
-                <a:latin typeface="Calibri"/>
-              </a:defRPr>
-            </a:pPr>
-            <a:r>
-              <a:t>R-T Specialty, LLC</a:t>
-            </a:r>
-          </a:p>
-        </p:txBody>
-      </p:sp>
-      <p:sp>
-        <p:nvSpPr>
           <p:cNvPr id="170" name="TextBox 169"/>
           <p:cNvSpPr txBox="1"/>
           <p:nvPr/>
@@ -18098,7 +18098,7 @@
               </a:defRPr>
             </a:pPr>
             <a:r>
-              <a:t>$404K</a:t>
+              <a:t>$407K</a:t>
             </a:r>
           </a:p>
         </p:txBody>
@@ -18213,7 +18213,7 @@
               </a:defRPr>
             </a:pPr>
             <a:r>
-              <a:t>Daliborka Savovic</a:t>
+              <a:t>Venizelos Papadopulos</a:t>
             </a:r>
           </a:p>
         </p:txBody>
@@ -18249,7 +18249,7 @@
               </a:defRPr>
             </a:pPr>
             <a:r>
-              <a:t>Alpha Trucking Insurance Agency In…</a:t>
+              <a:t>Exclusive Financial Services, Inc</a:t>
             </a:r>
           </a:p>
         </p:txBody>
@@ -18285,7 +18285,7 @@
               </a:defRPr>
             </a:pPr>
             <a:r>
-              <a:t>$396K</a:t>
+              <a:t>$397K</a:t>
             </a:r>
           </a:p>
         </p:txBody>
@@ -18400,7 +18400,7 @@
               </a:defRPr>
             </a:pPr>
             <a:r>
-              <a:t>Inderjit Singh</a:t>
+              <a:t>Daliborka Savovic</a:t>
             </a:r>
           </a:p>
         </p:txBody>
@@ -18436,7 +18436,7 @@
               </a:defRPr>
             </a:pPr>
             <a:r>
-              <a:t>American Insurance Agency LLC</a:t>
+              <a:t>Alpha Trucking Insurance Agency In…</a:t>
             </a:r>
           </a:p>
         </p:txBody>
@@ -18472,7 +18472,7 @@
               </a:defRPr>
             </a:pPr>
             <a:r>
-              <a:t>$386K</a:t>
+              <a:t>$396K</a:t>
             </a:r>
           </a:p>
         </p:txBody>
@@ -18587,7 +18587,7 @@
               </a:defRPr>
             </a:pPr>
             <a:r>
-              <a:t>Venizelos Papadopulos</a:t>
+              <a:t>Inderjit Singh</a:t>
             </a:r>
           </a:p>
         </p:txBody>
@@ -18623,7 +18623,7 @@
               </a:defRPr>
             </a:pPr>
             <a:r>
-              <a:t>Exclusive Financial Services, Inc</a:t>
+              <a:t>American Insurance Agency LLC</a:t>
             </a:r>
           </a:p>
         </p:txBody>
@@ -18659,7 +18659,7 @@
               </a:defRPr>
             </a:pPr>
             <a:r>
-              <a:t>$380K</a:t>
+              <a:t>$386K</a:t>
             </a:r>
           </a:p>
         </p:txBody>
@@ -19922,7 +19922,7 @@
               </a:defRPr>
             </a:pPr>
             <a:r>
-              <a:t>Q2 2026 YTD (Apr 1–May 30)  |  Green = on target  |  Amber = at risk  |  Red = behind  |  Goal: ≥40 acts/wk  |  Ranked by composite OKR score</a:t>
+              <a:t>Q2 2026 YTD (Apr 1–May 31)  |  Green = on target  |  Amber = at risk  |  Red = behind  |  Goal: ≥40 acts/wk  |  Ranked by composite OKR score</a:t>
             </a:r>
           </a:p>
         </p:txBody>
@@ -19958,7 +19958,7 @@
               </a:defRPr>
             </a:pPr>
             <a:r>
-              <a:t>Generated May 30, 2026</a:t>
+              <a:t>Generated May 31, 2026</a:t>
             </a:r>
           </a:p>
         </p:txBody>
@@ -20123,7 +20123,7 @@
               </a:defRPr>
             </a:pPr>
             <a:r>
-              <a:t>Q2 2026 YTD (Apr 1–May 30)  |  Green = on target  |  Amber = at risk  |  Red = behind  |  Goal: ≥50 acts/wk  |  Ranked by composite OKR score</a:t>
+              <a:t>Q2 2026 YTD (Apr 1–May 31)  |  Green = on target  |  Amber = at risk  |  Red = behind  |  Goal: ≥50 acts/wk  |  Ranked by composite OKR score</a:t>
             </a:r>
           </a:p>
         </p:txBody>
@@ -20159,7 +20159,7 @@
               </a:defRPr>
             </a:pPr>
             <a:r>
-              <a:t>Generated May 30, 2026</a:t>
+              <a:t>Generated May 31, 2026</a:t>
             </a:r>
           </a:p>
         </p:txBody>
@@ -20324,7 +20324,7 @@
               </a:defRPr>
             </a:pPr>
             <a:r>
-              <a:t>Q2 YTD  |  Apr 1–May 30  |  BDMs Only  |  Goal: 40 acts/wk  |  Emails excluded</a:t>
+              <a:t>Q2 YTD  |  Apr 1–May 31  |  BDMs Only  |  Goal: 40 acts/wk  |  Emails excluded</a:t>
             </a:r>
           </a:p>
         </p:txBody>
@@ -20360,7 +20360,7 @@
               </a:defRPr>
             </a:pPr>
             <a:r>
-              <a:t>Generated May 30, 2026</a:t>
+              <a:t>Generated May 31, 2026</a:t>
             </a:r>
           </a:p>
         </p:txBody>
@@ -20727,7 +20727,7 @@
               </a:defRPr>
             </a:pPr>
             <a:r>
-              <a:t>May 25-30</a:t>
+              <a:t>May 25-31</a:t>
             </a:r>
           </a:p>
         </p:txBody>
@@ -27445,7 +27445,7 @@
               </a:defRPr>
             </a:pPr>
             <a:r>
-              <a:t>Q2 YTD  |  Apr 1–May 30  |  BDAs Only  |  Goal: 50 acts/wk  |  Emails excluded</a:t>
+              <a:t>Q2 YTD  |  Apr 1–May 31  |  BDAs Only  |  Goal: 50 acts/wk  |  Emails excluded</a:t>
             </a:r>
           </a:p>
         </p:txBody>
@@ -27481,7 +27481,7 @@
               </a:defRPr>
             </a:pPr>
             <a:r>
-              <a:t>Generated May 30, 2026</a:t>
+              <a:t>Generated May 31, 2026</a:t>
             </a:r>
           </a:p>
         </p:txBody>
@@ -27848,7 +27848,7 @@
               </a:defRPr>
             </a:pPr>
             <a:r>
-              <a:t>May 25-30</a:t>
+              <a:t>May 25-31</a:t>
             </a:r>
           </a:p>
         </p:txBody>
@@ -33308,7 +33308,7 @@
               </a:defRPr>
             </a:pPr>
             <a:r>
-              <a:t>Generated May 30, 2026</a:t>
+              <a:t>Generated May 31, 2026</a:t>
             </a:r>
           </a:p>
         </p:txBody>
@@ -33999,7 +33999,7 @@
               </a:defRPr>
             </a:pPr>
             <a:r>
-              <a:t>7482</a:t>
+              <a:t>7521</a:t>
             </a:r>
           </a:p>
         </p:txBody>
@@ -34035,7 +34035,7 @@
               </a:defRPr>
             </a:pPr>
             <a:r>
-              <a:t>535</a:t>
+              <a:t>537</a:t>
             </a:r>
           </a:p>
         </p:txBody>
@@ -34438,7 +34438,7 @@
               </a:defRPr>
             </a:pPr>
             <a:r>
-              <a:t>3624</a:t>
+              <a:t>3627</a:t>
             </a:r>
           </a:p>
         </p:txBody>
@@ -34474,7 +34474,7 @@
               </a:defRPr>
             </a:pPr>
             <a:r>
-              <a:t>371</a:t>
+              <a:t>370</a:t>
             </a:r>
           </a:p>
         </p:txBody>
@@ -34834,7 +34834,7 @@
               </a:defRPr>
             </a:pPr>
             <a:r>
-              <a:t>5814</a:t>
+              <a:t>5824</a:t>
             </a:r>
           </a:p>
         </p:txBody>
@@ -34870,7 +34870,7 @@
               </a:defRPr>
             </a:pPr>
             <a:r>
-              <a:t>336</a:t>
+              <a:t>337</a:t>
             </a:r>
           </a:p>
         </p:txBody>
@@ -34906,7 +34906,7 @@
               </a:defRPr>
             </a:pPr>
             <a:r>
-              <a:t>$9.8M</a:t>
+              <a:t>$9.9M</a:t>
             </a:r>
           </a:p>
         </p:txBody>
@@ -35273,7 +35273,7 @@
               </a:defRPr>
             </a:pPr>
             <a:r>
-              <a:t>3573</a:t>
+              <a:t>3577</a:t>
             </a:r>
           </a:p>
         </p:txBody>
@@ -35309,7 +35309,7 @@
               </a:defRPr>
             </a:pPr>
             <a:r>
-              <a:t>276</a:t>
+              <a:t>275</a:t>
             </a:r>
           </a:p>
         </p:txBody>
@@ -35669,7 +35669,7 @@
               </a:defRPr>
             </a:pPr>
             <a:r>
-              <a:t>1961</a:t>
+              <a:t>1967</a:t>
             </a:r>
           </a:p>
         </p:txBody>
@@ -35705,7 +35705,7 @@
               </a:defRPr>
             </a:pPr>
             <a:r>
-              <a:t>126</a:t>
+              <a:t>128</a:t>
             </a:r>
           </a:p>
         </p:txBody>
@@ -35741,7 +35741,7 @@
               </a:defRPr>
             </a:pPr>
             <a:r>
-              <a:t>$4.0M</a:t>
+              <a:t>$4.1M</a:t>
             </a:r>
           </a:p>
         </p:txBody>
@@ -35813,7 +35813,7 @@
               </a:defRPr>
             </a:pPr>
             <a:r>
-              <a:t>$1.6M</a:t>
+              <a:t>$1.7M</a:t>
             </a:r>
           </a:p>
         </p:txBody>
@@ -36187,7 +36187,7 @@
               </a:defRPr>
             </a:pPr>
             <a:r>
-              <a:t>4349</a:t>
+              <a:t>4358</a:t>
             </a:r>
           </a:p>
         </p:txBody>
@@ -36223,7 +36223,7 @@
               </a:defRPr>
             </a:pPr>
             <a:r>
-              <a:t>112</a:t>
+              <a:t>116</a:t>
             </a:r>
           </a:p>
         </p:txBody>
@@ -36259,7 +36259,7 @@
               </a:defRPr>
             </a:pPr>
             <a:r>
-              <a:t>$2.6M</a:t>
+              <a:t>$2.7M</a:t>
             </a:r>
           </a:p>
         </p:txBody>
@@ -36619,7 +36619,7 @@
               </a:defRPr>
             </a:pPr>
             <a:r>
-              <a:t>40</a:t>
+              <a:t>41</a:t>
             </a:r>
           </a:p>
         </p:txBody>
@@ -37022,7 +37022,7 @@
               </a:defRPr>
             </a:pPr>
             <a:r>
-              <a:t>2990</a:t>
+              <a:t>3002</a:t>
             </a:r>
           </a:p>
         </p:txBody>
@@ -37058,7 +37058,7 @@
               </a:defRPr>
             </a:pPr>
             <a:r>
-              <a:t>51</a:t>
+              <a:t>53</a:t>
             </a:r>
           </a:p>
         </p:txBody>
@@ -37418,7 +37418,7 @@
               </a:defRPr>
             </a:pPr>
             <a:r>
-              <a:t>983</a:t>
+              <a:t>989</a:t>
             </a:r>
           </a:p>
         </p:txBody>
@@ -37857,7 +37857,7 @@
               </a:defRPr>
             </a:pPr>
             <a:r>
-              <a:t>646</a:t>
+              <a:t>647</a:t>
             </a:r>
           </a:p>
         </p:txBody>
@@ -38375,7 +38375,7 @@
               </a:defRPr>
             </a:pPr>
             <a:r>
-              <a:t>8099</a:t>
+              <a:t>8117</a:t>
             </a:r>
           </a:p>
         </p:txBody>
@@ -38411,7 +38411,7 @@
               </a:defRPr>
             </a:pPr>
             <a:r>
-              <a:t>315</a:t>
+              <a:t>316</a:t>
             </a:r>
           </a:p>
         </p:txBody>
@@ -39134,7 +39134,7 @@
               </a:defRPr>
             </a:pPr>
             <a:r>
-              <a:t>Retail-vertical agencies in each rep's HubSpot portfolio with zero 2026 submissions  |  Refreshed 2026-05-30</a:t>
+              <a:t>Retail-vertical agencies in each rep's HubSpot portfolio with zero 2026 submissions  |  Refreshed 2026-05-31</a:t>
             </a:r>
           </a:p>
         </p:txBody>
@@ -39170,7 +39170,7 @@
               </a:defRPr>
             </a:pPr>
             <a:r>
-              <a:t>Generated May 30, 2026</a:t>
+              <a:t>Generated May 31, 2026</a:t>
             </a:r>
           </a:p>
         </p:txBody>
@@ -41443,7 +41443,7 @@
               </a:defRPr>
             </a:pPr>
             <a:r>
-              <a:t>Generated May 30, 2026</a:t>
+              <a:t>Generated May 31, 2026</a:t>
             </a:r>
           </a:p>
         </p:txBody>
@@ -41608,7 +41608,7 @@
               </a:defRPr>
             </a:pPr>
             <a:r>
-              <a:t>Ranked by Q2 GWP (left) and Q2 Submissions (right)  ·  Mint-shaded row = new vs last week’s deck  ·  Apr 1–May 30</a:t>
+              <a:t>Ranked by Q2 GWP (left) and Q2 Submissions (right)  ·  Mint-shaded row = new vs last week’s deck  ·  Apr 1–May 31</a:t>
             </a:r>
           </a:p>
         </p:txBody>
@@ -41644,7 +41644,7 @@
               </a:defRPr>
             </a:pPr>
             <a:r>
-              <a:t>Generated May 30, 2026</a:t>
+              <a:t>Generated May 31, 2026</a:t>
             </a:r>
           </a:p>
         </p:txBody>
@@ -44643,7 +44643,7 @@
               </a:defRPr>
             </a:pPr>
             <a:r>
-              <a:t>Alexis B.</a:t>
+              <a:t>Kurt B.</a:t>
             </a:r>
           </a:p>
         </p:txBody>
@@ -44679,7 +44679,7 @@
               </a:defRPr>
             </a:pPr>
             <a:r>
-              <a:t>A.S.I.A Inc</a:t>
+              <a:t>Fino Services LLC</a:t>
             </a:r>
           </a:p>
         </p:txBody>
@@ -44715,7 +44715,7 @@
               </a:defRPr>
             </a:pPr>
             <a:r>
-              <a:t>$973K</a:t>
+              <a:t>$1.0M</a:t>
             </a:r>
           </a:p>
         </p:txBody>
@@ -44830,7 +44830,7 @@
               </a:defRPr>
             </a:pPr>
             <a:r>
-              <a:t>Kurt B.</a:t>
+              <a:t>Alexis B.</a:t>
             </a:r>
           </a:p>
         </p:txBody>
@@ -44866,7 +44866,7 @@
               </a:defRPr>
             </a:pPr>
             <a:r>
-              <a:t>Fino Services LLC</a:t>
+              <a:t>A.S.I.A Inc</a:t>
             </a:r>
           </a:p>
         </p:txBody>
@@ -44902,7 +44902,7 @@
               </a:defRPr>
             </a:pPr>
             <a:r>
-              <a:t>$956K</a:t>
+              <a:t>$973K</a:t>
             </a:r>
           </a:p>
         </p:txBody>
@@ -46103,7 +46103,7 @@
               </a:defRPr>
             </a:pPr>
             <a:r>
-              <a:t>2355</a:t>
+              <a:t>2376</a:t>
             </a:r>
           </a:p>
         </p:txBody>
@@ -46290,7 +46290,7 @@
               </a:defRPr>
             </a:pPr>
             <a:r>
-              <a:t>2216</a:t>
+              <a:t>2223</a:t>
             </a:r>
           </a:p>
         </p:txBody>
@@ -46851,7 +46851,7 @@
               </a:defRPr>
             </a:pPr>
             <a:r>
-              <a:t>1212</a:t>
+              <a:t>1213</a:t>
             </a:r>
           </a:p>
         </p:txBody>
@@ -47038,7 +47038,7 @@
               </a:defRPr>
             </a:pPr>
             <a:r>
-              <a:t>1115</a:t>
+              <a:t>1116</a:t>
             </a:r>
           </a:p>
         </p:txBody>
@@ -47412,7 +47412,7 @@
               </a:defRPr>
             </a:pPr>
             <a:r>
-              <a:t>1022</a:t>
+              <a:t>1030</a:t>
             </a:r>
           </a:p>
         </p:txBody>
@@ -47973,7 +47973,7 @@
               </a:defRPr>
             </a:pPr>
             <a:r>
-              <a:t>566</a:t>
+              <a:t>572</a:t>
             </a:r>
           </a:p>
         </p:txBody>
@@ -48160,7 +48160,7 @@
               </a:defRPr>
             </a:pPr>
             <a:r>
-              <a:t>545</a:t>
+              <a:t>546</a:t>
             </a:r>
           </a:p>
         </p:txBody>
@@ -48347,7 +48347,7 @@
               </a:defRPr>
             </a:pPr>
             <a:r>
-              <a:t>499</a:t>
+              <a:t>500</a:t>
             </a:r>
           </a:p>
         </p:txBody>
@@ -48534,7 +48534,7 @@
               </a:defRPr>
             </a:pPr>
             <a:r>
-              <a:t>481</a:t>
+              <a:t>486</a:t>
             </a:r>
           </a:p>
         </p:txBody>
@@ -49282,7 +49282,7 @@
               </a:defRPr>
             </a:pPr>
             <a:r>
-              <a:t>380</a:t>
+              <a:t>381</a:t>
             </a:r>
           </a:p>
         </p:txBody>
@@ -49469,7 +49469,7 @@
               </a:defRPr>
             </a:pPr>
             <a:r>
-              <a:t>360</a:t>
+              <a:t>364</a:t>
             </a:r>
           </a:p>
         </p:txBody>
